--- a/docs/deck_2026-10-26_seminar.pptx
+++ b/docs/deck_2026-10-26_seminar.pptx
@@ -130,7 +130,7 @@
   <p:extLst>
     <p:ext uri="{521415D9-36F7-43E2-AB2F-B90AF26B5E84}">
       <p14:sectionLst xmlns:p14="http://schemas.microsoft.com/office/powerpoint/2010/main">
-        <p14:section name="Opening" id="{3d6dfd1a-c677-eda8-d4b3-acbc1cb46f82}">
+        <p14:section name="Opening" id="{f012b5cf-c93c-135a-065d-f612df317736}">
           <p14:sldIdLst>
             <p14:sldId id="256"/>
             <p14:sldId id="257"/>
@@ -144,13 +144,13 @@
             <p14:sldId id="265"/>
           </p14:sldIdLst>
         </p14:section>
-        <p14:section name="The model" id="{574aeb74-a2c1-471e-74f9-2577ad5000f3}">
+        <p14:section name="The model" id="{e9e34b79-d097-3f71-acb9-97b569b0fe6f}">
           <p14:sldIdLst>
             <p14:sldId id="266"/>
             <p14:sldId id="267"/>
           </p14:sldIdLst>
         </p14:section>
-        <p14:section name="Results" id="{8f4bd9b0-6480-5c00-f3fa-b2d08b25b632}">
+        <p14:section name="Results" id="{19d055d8-5dd2-1fe6-5e78-ec98aa1c4ecf}">
           <p14:sldIdLst>
             <p14:sldId id="268"/>
             <p14:sldId id="269"/>
@@ -158,17 +158,17 @@
             <p14:sldId id="271"/>
           </p14:sldIdLst>
         </p14:section>
-        <p14:section name="Validation" id="{88d0649b-6dbb-0d9b-576e-a7a7298cb198}">
+        <p14:section name="Validation" id="{7d1f650e-d851-0ec3-9bd6-bb1aa889c585}">
           <p14:sldIdLst>
             <p14:sldId id="272"/>
           </p14:sldIdLst>
         </p14:section>
-        <p14:section name="Close" id="{d1a86f69-0ecc-a79f-6f5d-4115012b9caf}">
+        <p14:section name="Close" id="{d1aa692c-05c2-d5af-e394-dbc0c614ae80}">
           <p14:sldIdLst>
             <p14:sldId id="273"/>
           </p14:sldIdLst>
         </p14:section>
-        <p14:section name="Backup" id="{d32d1c94-2944-21c6-83f2-769a6ed9eade}">
+        <p14:section name="Backup" id="{9cc6fec1-8058-488f-6b31-9cb5c20afb40}">
           <p14:sldIdLst>
             <p14:sldId id="274"/>
             <p14:sldId id="275"/>
@@ -1550,7 +1550,7 @@
           <a:p>
             <a:r>
               <a:rPr lang="en-US" dirty="0"/>
-              <a:t>~1.5 min. Theory (Diamond–Dybvig) says runs can happen; it is silent on who runs first and how a run spreads. Optional visual: a historical photo of a bank run.</a:t>
+              <a:t>~1.5 min. Raise the question only: who runs? Theory (Diamond–Dybvig) says runs can happen; it is silent on who runs first and how a run spreads. The screenshot: the FSB warned the G20 on 12 October 2026 that a fully reserved stablecoin can still face a redemption run. Even a regulator thinking about a modern run asks whether one happens, not who starts it. Alternative screenshot in figures/deck is not provided; the Nano Banc failure (25 September 2026, American Banker) was a capital failure, not a run.</a:t>
             </a:r>
             <a:endParaRPr lang="en-US" dirty="0"/>
           </a:p>
@@ -4202,8 +4202,8 @@
         </p:nvSpPr>
         <p:spPr>
           <a:xfrm>
-            <a:off x="4244873" y="3291840"/>
-            <a:ext cx="4441927" cy="1325880"/>
+            <a:off x="4244873" y="3200400"/>
+            <a:ext cx="4441927" cy="1371600"/>
           </a:xfrm>
           <a:prstGeom prst="rect">
             <a:avLst/>
@@ -4217,56 +4217,74 @@
           <a:p>
             <a:pPr marL="177800" indent="-177800">
               <a:spcAft>
-                <a:spcPts val="500"/>
+                <a:spcPts val="400"/>
               </a:spcAft>
               <a:buSzPct val="100000"/>
               <a:buChar char="•"/>
             </a:pPr>
             <a:r>
-              <a:rPr lang="en-US" sz="1200" dirty="0">
+              <a:rPr lang="en-US" sz="1150" dirty="0">
                 <a:solidFill>
                   <a:schemeClr val="tx1"/>
                 </a:solidFill>
               </a:rPr>
               <a:t>One bank that sells its long asset at a discount when cash runs short (a fire-sale bank)</a:t>
             </a:r>
-            <a:endParaRPr lang="en-US" sz="1200" dirty="0"/>
+            <a:endParaRPr lang="en-US" sz="1150" dirty="0"/>
           </a:p>
           <a:p>
             <a:pPr marL="177800" indent="-177800">
               <a:spcAft>
-                <a:spcPts val="500"/>
+                <a:spcPts val="400"/>
               </a:spcAft>
               <a:buSzPct val="100000"/>
               <a:buChar char="•"/>
             </a:pPr>
             <a:r>
-              <a:rPr lang="en-US" sz="1200" dirty="0">
+              <a:rPr lang="en-US" sz="1150" dirty="0">
                 <a:solidFill>
                   <a:schemeClr val="tx1"/>
                 </a:solidFill>
               </a:rPr>
               <a:t>Each tick a depositor sees neighbours’ withdrawals and the public news, blends them with a private signal, and withdraws if that pays</a:t>
             </a:r>
-            <a:endParaRPr lang="en-US" sz="1200" dirty="0"/>
+            <a:endParaRPr lang="en-US" sz="1150" dirty="0"/>
           </a:p>
           <a:p>
             <a:pPr marL="177800" indent="-177800">
               <a:spcAft>
-                <a:spcPts val="500"/>
+                <a:spcPts val="400"/>
               </a:spcAft>
               <a:buSzPct val="100000"/>
               <a:buChar char="•"/>
             </a:pPr>
             <a:r>
-              <a:rPr lang="en-US" sz="1200" dirty="0">
+              <a:rPr lang="en-US" sz="1150" dirty="0">
                 <a:solidFill>
                   <a:schemeClr val="tx1"/>
                 </a:solidFill>
               </a:rPr>
               <a:t>A public signal can be absent, accurate, or outdated</a:t>
             </a:r>
-            <a:endParaRPr lang="en-US" sz="1200" dirty="0"/>
+            <a:endParaRPr lang="en-US" sz="1150" dirty="0"/>
+          </a:p>
+          <a:p>
+            <a:pPr marL="177800" indent="-177800">
+              <a:spcAft>
+                <a:spcPts val="400"/>
+              </a:spcAft>
+              <a:buSzPct val="100000"/>
+              <a:buChar char="•"/>
+            </a:pPr>
+            <a:r>
+              <a:rPr lang="en-US" sz="1150" dirty="0">
+                <a:solidFill>
+                  <a:schemeClr val="tx1"/>
+                </a:solidFill>
+              </a:rPr>
+              <a:t>Outcomes: D = individualists’ minus collectivists’ withdrawal share (those not hit by the shock); P(fail) = share of runs that fail</a:t>
+            </a:r>
+            <a:endParaRPr lang="en-US" sz="1150" dirty="0"/>
           </a:p>
         </p:txBody>
       </p:sp>
@@ -8968,49 +8986,46 @@
                   <a:schemeClr val="tx2"/>
                 </a:solidFill>
               </a:rPr>
-              <a:t>The puzzle: who runs, and how a run spreads</a:t>
+              <a:t>The puzzle: who runs?</a:t>
             </a:r>
             <a:endParaRPr lang="en-US" sz="2400" dirty="0"/>
           </a:p>
         </p:txBody>
       </p:sp>
-      <p:sp>
-        <p:nvSpPr>
-          <p:cNvPr id="3" name="card-Diamond–Dybvig"/>
-          <p:cNvSpPr/>
-          <p:nvPr/>
-        </p:nvSpPr>
-        <p:spPr>
-          <a:xfrm>
-            <a:off x="457200" y="1051560"/>
-            <a:ext cx="2651760" cy="1463040"/>
-          </a:xfrm>
-          <a:prstGeom prst="roundRect">
-            <a:avLst>
-              <a:gd name="adj" fmla="val 5000"/>
-            </a:avLst>
-          </a:prstGeom>
-          <a:solidFill>
-            <a:schemeClr val="bg2"/>
-          </a:solidFill>
-          <a:ln w="12700">
-            <a:solidFill>
-              <a:schemeClr val="bg2"/>
-            </a:solidFill>
-            <a:prstDash val="solid"/>
-          </a:ln>
-        </p:spPr>
-      </p:sp>
-      <p:sp>
-        <p:nvSpPr>
-          <p:cNvPr id="4" name="card-head"/>
+      <p:pic>
+        <p:nvPicPr>
+          <p:cNvPr id="3" name="news" descr="Screenshot of a CryptoSlate news article dated 12 October 2026: Global watchdog warns the $300 billion stablecoin market could face bank runs even with full reserves. The FSB says cross-border liquidity mismatches could trigger redemption crises and threaten dollar pegs as regulators prepare for G20 discussions.">    </p:cNvPr>
+          <p:cNvPicPr>
+            <a:picLocks noChangeAspect="1"/>
+          </p:cNvPicPr>
+          <p:nvPr/>
+        </p:nvPicPr>
+        <p:blipFill>
+          <a:blip r:embed="rId1"/>
+          <a:stretch>
+            <a:fillRect/>
+          </a:stretch>
+        </p:blipFill>
+        <p:spPr>
+          <a:xfrm>
+            <a:off x="2414267" y="1051560"/>
+            <a:ext cx="4315465" cy="3337560"/>
+          </a:xfrm>
+          <a:prstGeom prst="rect">
+            <a:avLst/>
+          </a:prstGeom>
+        </p:spPr>
+      </p:pic>
+      <p:sp>
+        <p:nvSpPr>
+          <p:cNvPr id="4" name="caption"/>
           <p:cNvSpPr txBox="1"/>
           <p:nvPr/>
         </p:nvSpPr>
         <p:spPr>
           <a:xfrm>
-            <a:off x="594360" y="1143000"/>
-            <a:ext cx="2377440" cy="292608"/>
+            <a:off x="2414267" y="4434840"/>
+            <a:ext cx="4315465" cy="274320"/>
           </a:xfrm>
           <a:prstGeom prst="rect">
             <a:avLst/>
@@ -9026,526 +9041,14 @@
               <a:buNone/>
             </a:pPr>
             <a:r>
-              <a:rPr lang="en-US" sz="1300" b="1" dirty="0">
-                <a:solidFill>
-                  <a:schemeClr val="tx2"/>
-                </a:solidFill>
-              </a:rPr>
-              <a:t>Diamond–Dybvig</a:t>
-            </a:r>
-            <a:endParaRPr lang="en-US" sz="1300" dirty="0"/>
-          </a:p>
-        </p:txBody>
-      </p:sp>
-      <p:sp>
-        <p:nvSpPr>
-          <p:cNvPr id="5" name="card-body"/>
-          <p:cNvSpPr txBox="1"/>
-          <p:nvPr/>
-        </p:nvSpPr>
-        <p:spPr>
-          <a:xfrm>
-            <a:off x="594360" y="1463040"/>
-            <a:ext cx="2377440" cy="960120"/>
-          </a:xfrm>
-          <a:prstGeom prst="rect">
-            <a:avLst/>
-          </a:prstGeom>
-          <a:noFill/>
-          <a:ln/>
-        </p:spPr>
-        <p:txBody>
-          <a:bodyPr wrap="square" lIns="0" tIns="0" rIns="0" bIns="0" rtlCol="0" anchor="t"/>
-          <a:lstStyle/>
-          <a:p>
-            <a:pPr indent="0" marL="0">
-              <a:buNone/>
-            </a:pPr>
-            <a:r>
-              <a:rPr lang="en-US" sz="1150" dirty="0">
-                <a:solidFill>
-                  <a:schemeClr val="tx1"/>
-                </a:solidFill>
-              </a:rPr>
-              <a:t>A run is an equilibrium. The theory says runs can happen; it says nothing about who runs first or how a run spreads.</a:t>
-            </a:r>
-            <a:endParaRPr lang="en-US" sz="1150" dirty="0"/>
-          </a:p>
-        </p:txBody>
-      </p:sp>
-      <p:sp>
-        <p:nvSpPr>
-          <p:cNvPr id="6" name="card-Chapter 1: theory"/>
-          <p:cNvSpPr/>
-          <p:nvPr/>
-        </p:nvSpPr>
-        <p:spPr>
-          <a:xfrm>
-            <a:off x="3246120" y="1051560"/>
-            <a:ext cx="2651760" cy="1463040"/>
-          </a:xfrm>
-          <a:prstGeom prst="roundRect">
-            <a:avLst>
-              <a:gd name="adj" fmla="val 5000"/>
-            </a:avLst>
-          </a:prstGeom>
-          <a:solidFill>
-            <a:schemeClr val="bg2"/>
-          </a:solidFill>
-          <a:ln w="12700">
-            <a:solidFill>
-              <a:schemeClr val="bg2"/>
-            </a:solidFill>
-            <a:prstDash val="solid"/>
-          </a:ln>
-        </p:spPr>
-      </p:sp>
-      <p:sp>
-        <p:nvSpPr>
-          <p:cNvPr id="7" name="card-head"/>
-          <p:cNvSpPr txBox="1"/>
-          <p:nvPr/>
-        </p:nvSpPr>
-        <p:spPr>
-          <a:xfrm>
-            <a:off x="3383280" y="1143000"/>
-            <a:ext cx="2377440" cy="292608"/>
-          </a:xfrm>
-          <a:prstGeom prst="rect">
-            <a:avLst/>
-          </a:prstGeom>
-          <a:noFill/>
-          <a:ln/>
-        </p:spPr>
-        <p:txBody>
-          <a:bodyPr wrap="square" lIns="0" tIns="0" rIns="0" bIns="0" rtlCol="0" anchor="ctr"/>
-          <a:lstStyle/>
-          <a:p>
-            <a:pPr indent="0" marL="0">
-              <a:buNone/>
-            </a:pPr>
-            <a:r>
-              <a:rPr lang="en-US" sz="1300" b="1" dirty="0">
-                <a:solidFill>
-                  <a:schemeClr val="tx2"/>
-                </a:solidFill>
-              </a:rPr>
-              <a:t>Chapter 1: theory</a:t>
-            </a:r>
-            <a:endParaRPr lang="en-US" sz="1300" dirty="0"/>
-          </a:p>
-        </p:txBody>
-      </p:sp>
-      <p:sp>
-        <p:nvSpPr>
-          <p:cNvPr id="8" name="card-body"/>
-          <p:cNvSpPr txBox="1"/>
-          <p:nvPr/>
-        </p:nvSpPr>
-        <p:spPr>
-          <a:xfrm>
-            <a:off x="3383280" y="1463040"/>
-            <a:ext cx="2377440" cy="960120"/>
-          </a:xfrm>
-          <a:prstGeom prst="rect">
-            <a:avLst/>
-          </a:prstGeom>
-          <a:noFill/>
-          <a:ln/>
-        </p:spPr>
-        <p:txBody>
-          <a:bodyPr wrap="square" lIns="0" tIns="0" rIns="0" bIns="0" rtlCol="0" anchor="t"/>
-          <a:lstStyle/>
-          <a:p>
-            <a:pPr indent="0" marL="0">
-              <a:buNone/>
-            </a:pPr>
-            <a:r>
-              <a:rPr lang="en-US" sz="1150" dirty="0">
-                <a:solidFill>
-                  <a:schemeClr val="tx1"/>
-                </a:solidFill>
-              </a:rPr>
-              <a:t>Depositors differ in how much they weigh their own information against public news and what others do. That difference predicts who moves first, and in which direction, given the news.</a:t>
-            </a:r>
-            <a:endParaRPr lang="en-US" sz="1150" dirty="0"/>
-          </a:p>
-        </p:txBody>
-      </p:sp>
-      <p:sp>
-        <p:nvSpPr>
-          <p:cNvPr id="9" name="card-Chapter 2: Celsius"/>
-          <p:cNvSpPr/>
-          <p:nvPr/>
-        </p:nvSpPr>
-        <p:spPr>
-          <a:xfrm>
-            <a:off x="6035040" y="1051560"/>
-            <a:ext cx="2651760" cy="1463040"/>
-          </a:xfrm>
-          <a:prstGeom prst="roundRect">
-            <a:avLst>
-              <a:gd name="adj" fmla="val 5000"/>
-            </a:avLst>
-          </a:prstGeom>
-          <a:solidFill>
-            <a:schemeClr val="bg2"/>
-          </a:solidFill>
-          <a:ln w="12700">
-            <a:solidFill>
-              <a:schemeClr val="bg2"/>
-            </a:solidFill>
-            <a:prstDash val="solid"/>
-          </a:ln>
-        </p:spPr>
-      </p:sp>
-      <p:sp>
-        <p:nvSpPr>
-          <p:cNvPr id="10" name="card-head"/>
-          <p:cNvSpPr txBox="1"/>
-          <p:nvPr/>
-        </p:nvSpPr>
-        <p:spPr>
-          <a:xfrm>
-            <a:off x="6172200" y="1143000"/>
-            <a:ext cx="2377440" cy="292608"/>
-          </a:xfrm>
-          <a:prstGeom prst="rect">
-            <a:avLst/>
-          </a:prstGeom>
-          <a:noFill/>
-          <a:ln/>
-        </p:spPr>
-        <p:txBody>
-          <a:bodyPr wrap="square" lIns="0" tIns="0" rIns="0" bIns="0" rtlCol="0" anchor="ctr"/>
-          <a:lstStyle/>
-          <a:p>
-            <a:pPr indent="0" marL="0">
-              <a:buNone/>
-            </a:pPr>
-            <a:r>
-              <a:rPr lang="en-US" sz="1300" b="1" dirty="0">
-                <a:solidFill>
-                  <a:schemeClr val="tx2"/>
-                </a:solidFill>
-              </a:rPr>
-              <a:t>Chapter 2: Celsius</a:t>
-            </a:r>
-            <a:endParaRPr lang="en-US" sz="1300" dirty="0"/>
-          </a:p>
-        </p:txBody>
-      </p:sp>
-      <p:sp>
-        <p:nvSpPr>
-          <p:cNvPr id="11" name="card-body"/>
-          <p:cNvSpPr txBox="1"/>
-          <p:nvPr/>
-        </p:nvSpPr>
-        <p:spPr>
-          <a:xfrm>
-            <a:off x="6172200" y="1463040"/>
-            <a:ext cx="2377440" cy="960120"/>
-          </a:xfrm>
-          <a:prstGeom prst="rect">
-            <a:avLst/>
-          </a:prstGeom>
-          <a:noFill/>
-          <a:ln/>
-        </p:spPr>
-        <p:txBody>
-          <a:bodyPr wrap="square" lIns="0" tIns="0" rIns="0" bIns="0" rtlCol="0" anchor="t"/>
-          <a:lstStyle/>
-          <a:p>
-            <a:pPr indent="0" marL="0">
-              <a:buNone/>
-            </a:pPr>
-            <a:r>
-              <a:rPr lang="en-US" sz="1150" dirty="0">
-                <a:solidFill>
-                  <a:schemeClr val="tx1"/>
-                </a:solidFill>
-              </a:rPr>
-              <a:t>Those differences show up in real withdrawals. But one platform and one shock cannot vary the mix of depositors or the information they received.</a:t>
-            </a:r>
-            <a:endParaRPr lang="en-US" sz="1150" dirty="0"/>
-          </a:p>
-        </p:txBody>
-      </p:sp>
-      <p:sp>
-        <p:nvSpPr>
-          <p:cNvPr id="12" name="ch3"/>
-          <p:cNvSpPr/>
-          <p:nvPr/>
-        </p:nvSpPr>
-        <p:spPr>
-          <a:xfrm>
-            <a:off x="457200" y="2651760"/>
-            <a:ext cx="8229600" cy="868680"/>
-          </a:xfrm>
-          <a:prstGeom prst="roundRect">
-            <a:avLst>
-              <a:gd name="adj" fmla="val 8421"/>
-            </a:avLst>
-          </a:prstGeom>
-          <a:solidFill>
-            <a:schemeClr val="accent4"/>
-          </a:solidFill>
-          <a:ln w="12700">
-            <a:solidFill>
-              <a:schemeClr val="accent4"/>
-            </a:solidFill>
-            <a:prstDash val="solid"/>
-          </a:ln>
-        </p:spPr>
-      </p:sp>
-      <p:sp>
-        <p:nvSpPr>
-          <p:cNvPr id="13" name="ch3-text"/>
-          <p:cNvSpPr txBox="1"/>
-          <p:nvPr/>
-        </p:nvSpPr>
-        <p:spPr>
-          <a:xfrm>
-            <a:off x="594360" y="2697480"/>
-            <a:ext cx="7955280" cy="777240"/>
-          </a:xfrm>
-          <a:prstGeom prst="rect">
-            <a:avLst/>
-          </a:prstGeom>
-          <a:noFill/>
-          <a:ln/>
-        </p:spPr>
-        <p:txBody>
-          <a:bodyPr wrap="square" lIns="0" tIns="0" rIns="0" bIns="0" rtlCol="0" anchor="ctr"/>
-          <a:lstStyle/>
-          <a:p>
-            <a:pPr indent="0" marL="0">
-              <a:buNone/>
-            </a:pPr>
-            <a:r>
-              <a:rPr lang="en-US" sz="1250" b="1" dirty="0">
-                <a:solidFill>
-                  <a:schemeClr val="accent1"/>
-                </a:solidFill>
-              </a:rPr>
-              <a:t>Chapter 3, this talk: </a:t>
-            </a:r>
-            <a:pPr indent="0" marL="0">
-              <a:buNone/>
-            </a:pPr>
-            <a:r>
-              <a:rPr lang="en-US" sz="1250" dirty="0">
-                <a:solidFill>
-                  <a:schemeClr val="tx1"/>
-                </a:solidFill>
-              </a:rPr>
-              <a:t>a population of interacting depositors in which the mix of types, the public signal, deposit concentration and the bank’s contract can each be varied. Does the theory’s mechanism survive there?</a:t>
-            </a:r>
-            <a:endParaRPr lang="en-US" sz="1250" dirty="0"/>
-          </a:p>
-        </p:txBody>
-      </p:sp>
-      <p:sp>
-        <p:nvSpPr>
-          <p:cNvPr id="14" name="def-D"/>
-          <p:cNvSpPr/>
-          <p:nvPr/>
-        </p:nvSpPr>
-        <p:spPr>
-          <a:xfrm>
-            <a:off x="457200" y="3657600"/>
-            <a:ext cx="4023360" cy="914400"/>
-          </a:xfrm>
-          <a:prstGeom prst="roundRect">
-            <a:avLst>
-              <a:gd name="adj" fmla="val 8000"/>
-            </a:avLst>
-          </a:prstGeom>
-          <a:solidFill>
-            <a:schemeClr val="bg2"/>
-          </a:solidFill>
-          <a:ln w="12700">
-            <a:solidFill>
-              <a:schemeClr val="bg2"/>
-            </a:solidFill>
-            <a:prstDash val="solid"/>
-          </a:ln>
-        </p:spPr>
-      </p:sp>
-      <p:sp>
-        <p:nvSpPr>
-          <p:cNvPr id="15" name="def-big"/>
-          <p:cNvSpPr txBox="1"/>
-          <p:nvPr/>
-        </p:nvSpPr>
-        <p:spPr>
-          <a:xfrm>
-            <a:off x="594360" y="3703320"/>
-            <a:ext cx="1188720" cy="822960"/>
-          </a:xfrm>
-          <a:prstGeom prst="rect">
-            <a:avLst/>
-          </a:prstGeom>
-          <a:noFill/>
-          <a:ln/>
-        </p:spPr>
-        <p:txBody>
-          <a:bodyPr wrap="square" lIns="0" tIns="0" rIns="0" bIns="0" rtlCol="0" anchor="ctr"/>
-          <a:lstStyle/>
-          <a:p>
-            <a:pPr indent="0" marL="0">
-              <a:buNone/>
-            </a:pPr>
-            <a:r>
-              <a:rPr lang="en-US" sz="2400" b="1" dirty="0">
-                <a:solidFill>
-                  <a:schemeClr val="accent1"/>
-                </a:solidFill>
-                <a:latin typeface="Cambria" pitchFamily="34" charset="0"/>
-                <a:ea typeface="Cambria" pitchFamily="34" charset="-122"/>
-                <a:cs typeface="Cambria" pitchFamily="34" charset="-120"/>
-              </a:rPr>
-              <a:t>D</a:t>
-            </a:r>
-            <a:endParaRPr lang="en-US" sz="2400" dirty="0"/>
-          </a:p>
-        </p:txBody>
-      </p:sp>
-      <p:sp>
-        <p:nvSpPr>
-          <p:cNvPr id="16" name="def-label"/>
-          <p:cNvSpPr txBox="1"/>
-          <p:nvPr/>
-        </p:nvSpPr>
-        <p:spPr>
-          <a:xfrm>
-            <a:off x="1828800" y="3703320"/>
-            <a:ext cx="2560320" cy="822960"/>
-          </a:xfrm>
-          <a:prstGeom prst="rect">
-            <a:avLst/>
-          </a:prstGeom>
-          <a:noFill/>
-          <a:ln/>
-        </p:spPr>
-        <p:txBody>
-          <a:bodyPr wrap="square" lIns="0" tIns="0" rIns="0" bIns="0" rtlCol="0" anchor="ctr"/>
-          <a:lstStyle/>
-          <a:p>
-            <a:pPr indent="0" marL="0">
-              <a:buNone/>
-            </a:pPr>
-            <a:r>
-              <a:rPr lang="en-US" sz="1100" dirty="0">
+              <a:rPr lang="en-US" sz="1000" i="1" dirty="0">
                 <a:solidFill>
                   <a:schemeClr val="accent3"/>
                 </a:solidFill>
               </a:rPr>
-              <a:t>share of individualists who withdraw minus share of collectivists, among depositors the shock did not hit</a:t>
-            </a:r>
-            <a:endParaRPr lang="en-US" sz="1100" dirty="0"/>
-          </a:p>
-        </p:txBody>
-      </p:sp>
-      <p:sp>
-        <p:nvSpPr>
-          <p:cNvPr id="17" name="def-P(fail)"/>
-          <p:cNvSpPr/>
-          <p:nvPr/>
-        </p:nvSpPr>
-        <p:spPr>
-          <a:xfrm>
-            <a:off x="4663440" y="3657600"/>
-            <a:ext cx="4023360" cy="914400"/>
-          </a:xfrm>
-          <a:prstGeom prst="roundRect">
-            <a:avLst>
-              <a:gd name="adj" fmla="val 8000"/>
-            </a:avLst>
-          </a:prstGeom>
-          <a:solidFill>
-            <a:schemeClr val="bg2"/>
-          </a:solidFill>
-          <a:ln w="12700">
-            <a:solidFill>
-              <a:schemeClr val="bg2"/>
-            </a:solidFill>
-            <a:prstDash val="solid"/>
-          </a:ln>
-        </p:spPr>
-      </p:sp>
-      <p:sp>
-        <p:nvSpPr>
-          <p:cNvPr id="18" name="def-big"/>
-          <p:cNvSpPr txBox="1"/>
-          <p:nvPr/>
-        </p:nvSpPr>
-        <p:spPr>
-          <a:xfrm>
-            <a:off x="4800600" y="3703320"/>
-            <a:ext cx="1188720" cy="822960"/>
-          </a:xfrm>
-          <a:prstGeom prst="rect">
-            <a:avLst/>
-          </a:prstGeom>
-          <a:noFill/>
-          <a:ln/>
-        </p:spPr>
-        <p:txBody>
-          <a:bodyPr wrap="square" lIns="0" tIns="0" rIns="0" bIns="0" rtlCol="0" anchor="ctr"/>
-          <a:lstStyle/>
-          <a:p>
-            <a:pPr indent="0" marL="0">
-              <a:buNone/>
-            </a:pPr>
-            <a:r>
-              <a:rPr lang="en-US" sz="2400" b="1" dirty="0">
-                <a:solidFill>
-                  <a:schemeClr val="accent1"/>
-                </a:solidFill>
-                <a:latin typeface="Cambria" pitchFamily="34" charset="0"/>
-                <a:ea typeface="Cambria" pitchFamily="34" charset="-122"/>
-                <a:cs typeface="Cambria" pitchFamily="34" charset="-120"/>
-              </a:rPr>
-              <a:t>P(fail)</a:t>
-            </a:r>
-            <a:endParaRPr lang="en-US" sz="2400" dirty="0"/>
-          </a:p>
-        </p:txBody>
-      </p:sp>
-      <p:sp>
-        <p:nvSpPr>
-          <p:cNvPr id="19" name="def-label"/>
-          <p:cNvSpPr txBox="1"/>
-          <p:nvPr/>
-        </p:nvSpPr>
-        <p:spPr>
-          <a:xfrm>
-            <a:off x="6035040" y="3703320"/>
-            <a:ext cx="2560320" cy="822960"/>
-          </a:xfrm>
-          <a:prstGeom prst="rect">
-            <a:avLst/>
-          </a:prstGeom>
-          <a:noFill/>
-          <a:ln/>
-        </p:spPr>
-        <p:txBody>
-          <a:bodyPr wrap="square" lIns="0" tIns="0" rIns="0" bIns="0" rtlCol="0" anchor="ctr"/>
-          <a:lstStyle/>
-          <a:p>
-            <a:pPr indent="0" marL="0">
-              <a:buNone/>
-            </a:pPr>
-            <a:r>
-              <a:rPr lang="en-US" sz="1100" dirty="0">
-                <a:solidFill>
-                  <a:schemeClr val="accent3"/>
-                </a:solidFill>
-              </a:rPr>
-              <a:t>share of runs that end with the bank failing</a:t>
-            </a:r>
-            <a:endParaRPr lang="en-US" sz="1100" dirty="0"/>
+              <a:t>CryptoSlate, 12 October 2026, on the Financial Stability Board’s note to the G20. Screenshot, cryptoslate.com.</a:t>
+            </a:r>
+            <a:endParaRPr lang="en-US" sz="1000" dirty="0"/>
           </a:p>
         </p:txBody>
       </p:sp>

--- a/docs/deck_2026-10-26_seminar.pptx
+++ b/docs/deck_2026-10-26_seminar.pptx
@@ -130,7 +130,7 @@
   <p:extLst>
     <p:ext uri="{521415D9-36F7-43E2-AB2F-B90AF26B5E84}">
       <p14:sectionLst xmlns:p14="http://schemas.microsoft.com/office/powerpoint/2010/main">
-        <p14:section name="Opening" id="{f012b5cf-c93c-135a-065d-f612df317736}">
+        <p14:section name="Opening" id="{fc99952a-6794-1891-26c7-702b3cd86b60}">
           <p14:sldIdLst>
             <p14:sldId id="256"/>
             <p14:sldId id="257"/>
@@ -144,13 +144,13 @@
             <p14:sldId id="265"/>
           </p14:sldIdLst>
         </p14:section>
-        <p14:section name="The model" id="{e9e34b79-d097-3f71-acb9-97b569b0fe6f}">
+        <p14:section name="The model" id="{0dde5ee3-a046-b01a-b73b-54bbf70e5c45}">
           <p14:sldIdLst>
             <p14:sldId id="266"/>
             <p14:sldId id="267"/>
           </p14:sldIdLst>
         </p14:section>
-        <p14:section name="Results" id="{19d055d8-5dd2-1fe6-5e78-ec98aa1c4ecf}">
+        <p14:section name="Results" id="{14df31ad-f514-0cba-3a85-e70f167580d4}">
           <p14:sldIdLst>
             <p14:sldId id="268"/>
             <p14:sldId id="269"/>
@@ -158,17 +158,17 @@
             <p14:sldId id="271"/>
           </p14:sldIdLst>
         </p14:section>
-        <p14:section name="Validation" id="{7d1f650e-d851-0ec3-9bd6-bb1aa889c585}">
+        <p14:section name="Validation" id="{28059c1d-8ccf-7393-06a7-8cb9fbff8ca6}">
           <p14:sldIdLst>
             <p14:sldId id="272"/>
           </p14:sldIdLst>
         </p14:section>
-        <p14:section name="Close" id="{d1aa692c-05c2-d5af-e394-dbc0c614ae80}">
+        <p14:section name="Close" id="{1f8e9766-2fe0-8653-fea5-2e8f66c801b8}">
           <p14:sldIdLst>
             <p14:sldId id="273"/>
           </p14:sldIdLst>
         </p14:section>
-        <p14:section name="Backup" id="{9cc6fec1-8058-488f-6b31-9cb5c20afb40}">
+        <p14:section name="Backup" id="{1fb69547-7fc4-5f95-ab04-f12a1da29936}">
           <p14:sldIdLst>
             <p14:sldId id="274"/>
             <p14:sldId id="275"/>
@@ -670,7 +670,7 @@
           <a:p>
             <a:r>
               <a:rPr lang="en-US" dirty="0"/>
-              <a:t>~1 min. The ladder: dispersion of the signal (Goldstein-Pauzner: same signal technology, different draws, which selects the equilibrium), heterogeneity in delivery (who hears it, from whom, when: Kelly-O Grada, Iyer-Puri, Cookson et al.), heterogeneity in interpretation (the same two signals, different dispositional weights; culture is the stable source). Rung 1 orders depositors by luck, rung 2 by position, rung 3 by who they are, and only rung 3 predicts that the order flips with the sign of the public error. Nearest cousins to acknowledge if asked: Izmalkov-Yildiz 2010 (heterogeneous priors), He-Manela 2016 (information acquisition).</a:t>
+              <a:t>~1 min. The ladder: variation in the signal (Goldstein-Pauzner: same signal technology, different draws, which selects the equilibrium), variation in location (who hears it, from whom, when: Kelly-O Grada, Iyer-Puri, Cookson et al.), variation in interpretation (the same two signals, different dispositional weights; culture is the stable source). Rung 1 orders depositors by luck, rung 2 by position, rung 3 by who they are, and only rung 3 predicts that the order flips with the sign of the public error. Nearest cousins to acknowledge if asked: Izmalkov-Yildiz 2010 (heterogeneous priors), He-Manela 2016 (information acquisition).</a:t>
             </a:r>
             <a:endParaRPr lang="en-US" dirty="0"/>
           </a:p>
@@ -2078,7 +2078,7 @@
           <a:p>
             <a:r>
               <a:rPr lang="en-US" dirty="0"/>
-              <a:t>~1 min. The two mechanisms the literature has used to answer who runs and when. Dispersion: Goldstein-Pauzner's noisy private signal, the device that gives Diamond-Dybvig an equilibrium-selection mechanism; depositors are ex ante identical, so the order is luck. Delivery: the network and media literature; the order is position. Both are consistent with identical processing.</a:t>
+              <a:t>~1 min. The two mechanisms the literature has used to answer who runs and when. Variation in the signal: Goldstein-Pauzner's noisy private draw (same technology, different draws), the device that gives Diamond-Dybvig an equilibrium-selection mechanism; depositors are ex ante identical, so the order is luck. Variation in location: the network and media literature; the order is position. Both are consistent with identical processing. The third rung, variation in interpretation, is where this dissertation sits.</a:t>
             </a:r>
             <a:endParaRPr lang="en-US" dirty="0"/>
           </a:p>
@@ -2606,7 +2606,7 @@
           <a:p>
             <a:r>
               <a:rPr lang="en-US" dirty="0"/>
-              <a:t>~1 min. Why Chapter 3 is a simulation. Chapter 1 relaxed the Bayesian precision answer and kept the rest of Goldstein-Pauzner so the threshold equilibrium survives. The ABM relaxes dispersion, delivery and interpretation together, plus the incentive side, which no closed-form model could carry; that is what lets the channel decomposition (lambda on the neighbour blend vs the news blend) be measured at all.</a:t>
+              <a:t>~1 min. Why Chapter 3 is a simulation. Chapter 1 relaxed the Bayesian precision answer and kept the rest of Goldstein-Pauzner so the threshold equilibrium survives. The ABM varies the signal, location and interpretation together, plus the incentive side, which no closed-form model could carry; that is what lets the channel decomposition (lambda on the neighbour blend vs the news blend) be measured at all.</a:t>
             </a:r>
             <a:endParaRPr lang="en-US" dirty="0"/>
           </a:p>
@@ -3539,7 +3539,7 @@
                   <a:schemeClr val="tx2"/>
                 </a:solidFill>
               </a:rPr>
-              <a:t>The ladder: dispersed, delivered, interpreted</a:t>
+              <a:t>The ladder: signal, location, interpretation</a:t>
             </a:r>
             <a:endParaRPr lang="en-US" sz="2400" dirty="0"/>
           </a:p>
@@ -3547,7 +3547,7 @@
       </p:sp>
       <p:pic>
         <p:nvPicPr>
-          <p:cNvPr id="3" name="ladder" descr="Three panels. Dispersed: one bank fundamental sends a noisy private signal to each depositor, who line up from run to stay. Delivered: a network in which the signal has reached some depositors from a first hearer and not others. Interpreted: the same private and public signals reach an individualist, who leans on the private signal, and a collectivist, who leans on the public one; culture sets the weight.">    </p:cNvPr>
+          <p:cNvPr id="3" name="ladder" descr="Three panels. Signal: one bank fundamental sends a noisy private signal to each depositor, who line up from run to stay. Location: a network in which the signal has reached some depositors from a first hearer and not others. Interpretation: the same private and public signals reach an individualist, who leans on the private signal, and a collectivist, who leans on the public one; culture sets the weight.">    </p:cNvPr>
           <p:cNvPicPr>
             <a:picLocks noChangeAspect="1"/>
           </p:cNvPicPr>
@@ -10096,7 +10096,7 @@
                   <a:schemeClr val="tx2"/>
                 </a:solidFill>
               </a:rPr>
-              <a:t>Who runs, and when, has been answered two ways: by luck and by position.</a:t>
+              <a:t>Who runs, and when, has been answered two ways: by what a depositor drew and by where they sit.</a:t>
             </a:r>
             <a:endParaRPr lang="en-US" sz="1700" dirty="0"/>
           </a:p>
@@ -10136,7 +10136,7 @@
                   <a:schemeClr val="tx1"/>
                 </a:solidFill>
               </a:rPr>
-              <a:t>Dispersion. </a:t>
+              <a:t>Variation in the signal. </a:t>
             </a:r>
             <a:pPr indent="0" marL="0">
               <a:spcAft>
@@ -10168,7 +10168,7 @@
                   <a:schemeClr val="tx1"/>
                 </a:solidFill>
               </a:rPr>
-              <a:t>Delivery. </a:t>
+              <a:t>Variation in location. </a:t>
             </a:r>
             <a:pPr indent="0" marL="0">
               <a:spcAft>
@@ -12186,7 +12186,7 @@
                   <a:schemeClr val="tx1"/>
                 </a:solidFill>
               </a:rPr>
-              <a:t>Dispersion (a private draw per depositor), delivery (a network, neighbours’ withdrawals arriving tick by tick, public news absent, accurate or stale), interpretation (λ, formed in a cultural warm-up), plus deposit sizes, risk preferences and the contract.</a:t>
+              <a:t>The signal (a private draw per depositor), location (a network, neighbours’ withdrawals arriving tick by tick, public news absent, accurate or stale), interpretation (λ, formed in a cultural warm-up), plus deposit sizes, risk preferences and the contract.</a:t>
             </a:r>
             <a:endParaRPr lang="en-US" sz="1400" dirty="0"/>
           </a:p>

--- a/docs/deck_2026-10-26_seminar.pptx
+++ b/docs/deck_2026-10-26_seminar.pptx
@@ -130,7 +130,7 @@
   <p:extLst>
     <p:ext uri="{521415D9-36F7-43E2-AB2F-B90AF26B5E84}">
       <p14:sectionLst xmlns:p14="http://schemas.microsoft.com/office/powerpoint/2010/main">
-        <p14:section name="Opening" id="{fc99952a-6794-1891-26c7-702b3cd86b60}">
+        <p14:section name="Opening" id="{aeb81448-a301-79bf-b808-78467e587f4e}">
           <p14:sldIdLst>
             <p14:sldId id="256"/>
             <p14:sldId id="257"/>
@@ -144,13 +144,13 @@
             <p14:sldId id="265"/>
           </p14:sldIdLst>
         </p14:section>
-        <p14:section name="The model" id="{0dde5ee3-a046-b01a-b73b-54bbf70e5c45}">
+        <p14:section name="The model" id="{e9e6278b-4834-3dce-0379-cf39c1383116}">
           <p14:sldIdLst>
             <p14:sldId id="266"/>
             <p14:sldId id="267"/>
           </p14:sldIdLst>
         </p14:section>
-        <p14:section name="Results" id="{14df31ad-f514-0cba-3a85-e70f167580d4}">
+        <p14:section name="Results" id="{82291f85-92a5-30ea-7752-70a01a7217aa}">
           <p14:sldIdLst>
             <p14:sldId id="268"/>
             <p14:sldId id="269"/>
@@ -158,17 +158,17 @@
             <p14:sldId id="271"/>
           </p14:sldIdLst>
         </p14:section>
-        <p14:section name="Validation" id="{28059c1d-8ccf-7393-06a7-8cb9fbff8ca6}">
+        <p14:section name="Validation" id="{64bb2175-ae54-414d-3928-7faa0b2f8445}">
           <p14:sldIdLst>
             <p14:sldId id="272"/>
           </p14:sldIdLst>
         </p14:section>
-        <p14:section name="Close" id="{1f8e9766-2fe0-8653-fea5-2e8f66c801b8}">
+        <p14:section name="Close" id="{d736efe2-8d2e-8157-9ee2-ab42ad7540a9}">
           <p14:sldIdLst>
             <p14:sldId id="273"/>
           </p14:sldIdLst>
         </p14:section>
-        <p14:section name="Backup" id="{1fb69547-7fc4-5f95-ab04-f12a1da29936}">
+        <p14:section name="Backup" id="{d05939e3-f4fc-5ece-c57a-fd09324bae9a}">
           <p14:sldIdLst>
             <p14:sldId id="274"/>
             <p14:sldId id="275"/>
@@ -2078,7 +2078,7 @@
           <a:p>
             <a:r>
               <a:rPr lang="en-US" dirty="0"/>
-              <a:t>~1 min. The two mechanisms the literature has used to answer who runs and when. Variation in the signal: Goldstein-Pauzner's noisy private draw (same technology, different draws), the device that gives Diamond-Dybvig an equilibrium-selection mechanism; depositors are ex ante identical, so the order is luck. Variation in location: the network and media literature; the order is position. Both are consistent with identical processing. The third rung, variation in interpretation, is where this dissertation sits.</a:t>
+              <a:t>~1 min. The two mechanisms the literature has used to answer who runs and when. Variation in the signal: Goldstein-Pauzner's noisy private draw (same technology, different draws), the device that gives Diamond-Dybvig an equilibrium-selection mechanism; depositors are ex ante identical, so who runs is luck. Note the model is static: for an intermediate fundamental a fraction runs (those below the threshold draw), not everyone or nobody; the all-or-nothing picture is the zero-noise limit. Timing only enters with the network literature. Variation in location: the network and media literature; the order is position. Both are consistent with identical processing. The third rung, variation in interpretation, is where this dissertation sits.</a:t>
             </a:r>
             <a:endParaRPr lang="en-US" dirty="0"/>
           </a:p>
@@ -10150,7 +10150,7 @@
                   <a:schemeClr val="tx1"/>
                 </a:solidFill>
               </a:rPr>
-              <a:t>Goldstein–Pauzner give every depositor a noisy draw of the same signal. The draw breaks common knowledge and selects the equilibrium. Who runs first is whoever drew low.</a:t>
+              <a:t>Goldstein–Pauzner give every depositor a noisy draw of the same signal. The draw breaks common knowledge and selects the equilibrium. Who runs is whoever drew low; everyone decides at once, so there is no first.</a:t>
             </a:r>
             <a:endParaRPr lang="en-US" sz="1400" dirty="0"/>
           </a:p>
@@ -11826,7 +11826,7 @@
                   <a:schemeClr val="tx1"/>
                 </a:solidFill>
               </a:rPr>
-              <a:t>A stale public signal and heterogeneous dispositional weights inside Goldstein–Pauzner. Prediction: who runs first reverses with the sign of the public error.</a:t>
+              <a:t>A stale public signal and heterogeneous dispositional weights inside Goldstein–Pauzner. Prediction: which type runs reverses with the sign of the public error.</a:t>
             </a:r>
             <a:endParaRPr lang="en-US" sz="1400" dirty="0"/>
           </a:p>

--- a/docs/deck_2026-10-26_seminar.pptx
+++ b/docs/deck_2026-10-26_seminar.pptx
@@ -130,7 +130,7 @@
   <p:extLst>
     <p:ext uri="{521415D9-36F7-43E2-AB2F-B90AF26B5E84}">
       <p14:sectionLst xmlns:p14="http://schemas.microsoft.com/office/powerpoint/2010/main">
-        <p14:section name="Opening" id="{aeb81448-a301-79bf-b808-78467e587f4e}">
+        <p14:section name="Opening" id="{7f6ab689-e716-50b2-a8ef-bd79688c58af}">
           <p14:sldIdLst>
             <p14:sldId id="256"/>
             <p14:sldId id="257"/>
@@ -144,13 +144,13 @@
             <p14:sldId id="265"/>
           </p14:sldIdLst>
         </p14:section>
-        <p14:section name="The model" id="{e9e6278b-4834-3dce-0379-cf39c1383116}">
+        <p14:section name="The model" id="{2f5aba78-8008-3114-d10d-af08b27c9fc7}">
           <p14:sldIdLst>
             <p14:sldId id="266"/>
             <p14:sldId id="267"/>
           </p14:sldIdLst>
         </p14:section>
-        <p14:section name="Results" id="{82291f85-92a5-30ea-7752-70a01a7217aa}">
+        <p14:section name="Results" id="{f897c536-0899-5807-fd68-c845caa705bd}">
           <p14:sldIdLst>
             <p14:sldId id="268"/>
             <p14:sldId id="269"/>
@@ -158,17 +158,17 @@
             <p14:sldId id="271"/>
           </p14:sldIdLst>
         </p14:section>
-        <p14:section name="Validation" id="{64bb2175-ae54-414d-3928-7faa0b2f8445}">
+        <p14:section name="Validation" id="{034c4000-e196-635d-6d30-dad78092c2df}">
           <p14:sldIdLst>
             <p14:sldId id="272"/>
           </p14:sldIdLst>
         </p14:section>
-        <p14:section name="Close" id="{d736efe2-8d2e-8157-9ee2-ab42ad7540a9}">
+        <p14:section name="Close" id="{a1fe47ac-9984-e7ba-d204-c2aec107f240}">
           <p14:sldIdLst>
             <p14:sldId id="273"/>
           </p14:sldIdLst>
         </p14:section>
-        <p14:section name="Backup" id="{d05939e3-f4fc-5ece-c57a-fd09324bae9a}">
+        <p14:section name="Backup" id="{53d3af6e-e97e-e219-9c6e-cdeb02f9417f}">
           <p14:sldIdLst>
             <p14:sldId id="274"/>
             <p14:sldId id="275"/>
@@ -9994,7 +9994,7 @@
                   <a:schemeClr val="tx2"/>
                 </a:solidFill>
               </a:rPr>
-              <a:t>Two mechanisms the literature has used</a:t>
+              <a:t>Who runs? Luck of the draw, and location</a:t>
             </a:r>
             <a:endParaRPr lang="en-US" sz="2400" dirty="0"/>
           </a:p>
@@ -10068,50 +10068,14 @@
       </p:sp>
       <p:sp>
         <p:nvSpPr>
-          <p:cNvPr id="5" name="step-lead"/>
+          <p:cNvPr id="5" name="step-items"/>
           <p:cNvSpPr txBox="1"/>
           <p:nvPr/>
         </p:nvSpPr>
         <p:spPr>
           <a:xfrm>
-            <a:off x="1005840" y="1051560"/>
-            <a:ext cx="7680960" cy="868680"/>
-          </a:xfrm>
-          <a:prstGeom prst="rect">
-            <a:avLst/>
-          </a:prstGeom>
-          <a:noFill/>
-          <a:ln/>
-        </p:spPr>
-        <p:txBody>
-          <a:bodyPr wrap="square" lIns="0" tIns="0" rIns="0" bIns="0" rtlCol="0" anchor="ctr"/>
-          <a:lstStyle/>
-          <a:p>
-            <a:pPr indent="0" marL="0">
-              <a:buNone/>
-            </a:pPr>
-            <a:r>
-              <a:rPr lang="en-US" sz="1700" b="1" dirty="0">
-                <a:solidFill>
-                  <a:schemeClr val="tx2"/>
-                </a:solidFill>
-              </a:rPr>
-              <a:t>Who runs, and when, has been answered two ways: by what a depositor drew and by where they sit.</a:t>
-            </a:r>
-            <a:endParaRPr lang="en-US" sz="1700" dirty="0"/>
-          </a:p>
-        </p:txBody>
-      </p:sp>
-      <p:sp>
-        <p:nvSpPr>
-          <p:cNvPr id="6" name="step-items"/>
-          <p:cNvSpPr txBox="1"/>
-          <p:nvPr/>
-        </p:nvSpPr>
-        <p:spPr>
-          <a:xfrm>
-            <a:off x="1005840" y="2103120"/>
-            <a:ext cx="7680960" cy="2103120"/>
+            <a:off x="1005840" y="1188720"/>
+            <a:ext cx="7680960" cy="3017520"/>
           </a:xfrm>
           <a:prstGeom prst="rect">
             <a:avLst/>

--- a/docs/deck_2026-10-26_seminar.pptx
+++ b/docs/deck_2026-10-26_seminar.pptx
@@ -130,7 +130,7 @@
   <p:extLst>
     <p:ext uri="{521415D9-36F7-43E2-AB2F-B90AF26B5E84}">
       <p14:sectionLst xmlns:p14="http://schemas.microsoft.com/office/powerpoint/2010/main">
-        <p14:section name="Opening" id="{7f6ab689-e716-50b2-a8ef-bd79688c58af}">
+        <p14:section name="Opening" id="{70025f63-efd5-e29a-856c-c6602e47857e}">
           <p14:sldIdLst>
             <p14:sldId id="256"/>
             <p14:sldId id="257"/>
@@ -144,13 +144,13 @@
             <p14:sldId id="265"/>
           </p14:sldIdLst>
         </p14:section>
-        <p14:section name="The model" id="{2f5aba78-8008-3114-d10d-af08b27c9fc7}">
+        <p14:section name="The model" id="{2948d255-8d00-162f-351f-91fa56728d8e}">
           <p14:sldIdLst>
             <p14:sldId id="266"/>
             <p14:sldId id="267"/>
           </p14:sldIdLst>
         </p14:section>
-        <p14:section name="Results" id="{f897c536-0899-5807-fd68-c845caa705bd}">
+        <p14:section name="Results" id="{f655b5de-7699-ff94-0fe7-681cde8e72db}">
           <p14:sldIdLst>
             <p14:sldId id="268"/>
             <p14:sldId id="269"/>
@@ -158,17 +158,17 @@
             <p14:sldId id="271"/>
           </p14:sldIdLst>
         </p14:section>
-        <p14:section name="Validation" id="{034c4000-e196-635d-6d30-dad78092c2df}">
+        <p14:section name="Validation" id="{28a5e1c3-06ca-d1ba-bc8d-8cdc7f033f42}">
           <p14:sldIdLst>
             <p14:sldId id="272"/>
           </p14:sldIdLst>
         </p14:section>
-        <p14:section name="Close" id="{a1fe47ac-9984-e7ba-d204-c2aec107f240}">
+        <p14:section name="Close" id="{59c474d2-9f0f-4e71-c13f-c018b0fe8be5}">
           <p14:sldIdLst>
             <p14:sldId id="273"/>
           </p14:sldIdLst>
         </p14:section>
-        <p14:section name="Backup" id="{53d3af6e-e97e-e219-9c6e-cdeb02f9417f}">
+        <p14:section name="Backup" id="{f92e3103-2798-48c5-cd09-0aafd52eebd4}">
           <p14:sldIdLst>
             <p14:sldId id="274"/>
             <p14:sldId id="275"/>
@@ -2078,7 +2078,7 @@
           <a:p>
             <a:r>
               <a:rPr lang="en-US" dirty="0"/>
-              <a:t>~1 min. The two mechanisms the literature has used to answer who runs and when. Variation in the signal: Goldstein-Pauzner's noisy private draw (same technology, different draws), the device that gives Diamond-Dybvig an equilibrium-selection mechanism; depositors are ex ante identical, so who runs is luck. Note the model is static: for an intermediate fundamental a fraction runs (those below the threshold draw), not everyone or nobody; the all-or-nothing picture is the zero-noise limit. Timing only enters with the network literature. Variation in location: the network and media literature; the order is position. Both are consistent with identical processing. The third rung, variation in interpretation, is where this dissertation sits.</a:t>
+              <a:t>~1 min. The two mechanisms the literature has used to answer who runs. Variation in the signal: Goldstein-Pauzner's noisy private draw (same technology, different draws), the device that gives Diamond-Dybvig an equilibrium-selection mechanism; depositors are ex ante identical, so who runs is luck. The model is static: for an intermediate fundamental a fraction runs (those below the threshold draw), not everyone or nobody; all-or-nothing is the zero-noise limit. Timing only enters with the network literature. Variation in location: networks and media; the order is position. Both are fruitful and both are consistent with identical processing: the same Bayesian, with the same prior, sits at every node. The third rung, variation in interpretation, is where this dissertation sits.</a:t>
             </a:r>
             <a:endParaRPr lang="en-US" dirty="0"/>
           </a:p>
@@ -10002,26 +10002,26 @@
       </p:sp>
       <p:sp>
         <p:nvSpPr>
-          <p:cNvPr id="3" name="chip"/>
+          <p:cNvPr id="3" name="mech-0"/>
           <p:cNvSpPr/>
           <p:nvPr/>
         </p:nvSpPr>
         <p:spPr>
           <a:xfrm>
-            <a:off x="457200" y="1143000"/>
-            <a:ext cx="384048" cy="384048"/>
+            <a:off x="457200" y="1051560"/>
+            <a:ext cx="4023360" cy="2514600"/>
           </a:xfrm>
           <a:prstGeom prst="roundRect">
             <a:avLst>
-              <a:gd name="adj" fmla="val 14286"/>
+              <a:gd name="adj" fmla="val 2909"/>
             </a:avLst>
           </a:prstGeom>
           <a:solidFill>
-            <a:schemeClr val="accent1"/>
+            <a:schemeClr val="bg2"/>
           </a:solidFill>
           <a:ln w="12700">
             <a:solidFill>
-              <a:schemeClr val="accent1"/>
+              <a:schemeClr val="bg2"/>
             </a:solidFill>
             <a:prstDash val="solid"/>
           </a:ln>
@@ -10029,14 +10029,14 @@
       </p:sp>
       <p:sp>
         <p:nvSpPr>
-          <p:cNvPr id="4" name="chip-label"/>
+          <p:cNvPr id="4" name="mech-head"/>
           <p:cNvSpPr txBox="1"/>
           <p:nvPr/>
         </p:nvSpPr>
         <p:spPr>
           <a:xfrm>
-            <a:off x="457200" y="1143000"/>
-            <a:ext cx="384048" cy="384048"/>
+            <a:off x="640080" y="1143000"/>
+            <a:ext cx="3657600" cy="365760"/>
           </a:xfrm>
           <a:prstGeom prst="rect">
             <a:avLst/>
@@ -10048,34 +10048,31 @@
           <a:bodyPr wrap="square" lIns="0" tIns="0" rIns="0" bIns="0" rtlCol="0" anchor="ctr"/>
           <a:lstStyle/>
           <a:p>
-            <a:pPr algn="ctr" indent="0" marL="0">
-              <a:buNone/>
-            </a:pPr>
-            <a:r>
-              <a:rPr lang="en-US" sz="1300" b="1" dirty="0">
-                <a:solidFill>
-                  <a:schemeClr val="bg1"/>
-                </a:solidFill>
-                <a:latin typeface="Cambria" pitchFamily="34" charset="0"/>
-                <a:ea typeface="Cambria" pitchFamily="34" charset="-122"/>
-                <a:cs typeface="Cambria" pitchFamily="34" charset="-120"/>
-              </a:rPr>
-              <a:t>1</a:t>
-            </a:r>
-            <a:endParaRPr lang="en-US" sz="1300" dirty="0"/>
-          </a:p>
-        </p:txBody>
-      </p:sp>
-      <p:sp>
-        <p:nvSpPr>
-          <p:cNvPr id="5" name="step-items"/>
+            <a:pPr indent="0" marL="0">
+              <a:buNone/>
+            </a:pPr>
+            <a:r>
+              <a:rPr lang="en-US" sz="1800" b="1" dirty="0">
+                <a:solidFill>
+                  <a:schemeClr val="accent1"/>
+                </a:solidFill>
+              </a:rPr>
+              <a:t>Variation in the signal</a:t>
+            </a:r>
+            <a:endParaRPr lang="en-US" sz="1800" dirty="0"/>
+          </a:p>
+        </p:txBody>
+      </p:sp>
+      <p:sp>
+        <p:nvSpPr>
+          <p:cNvPr id="5" name="bullets"/>
           <p:cNvSpPr txBox="1"/>
           <p:nvPr/>
         </p:nvSpPr>
         <p:spPr>
           <a:xfrm>
-            <a:off x="1005840" y="1188720"/>
-            <a:ext cx="7680960" cy="3017520"/>
+            <a:off x="640080" y="1600200"/>
+            <a:ext cx="3657600" cy="1874520"/>
           </a:xfrm>
           <a:prstGeom prst="rect">
             <a:avLst/>
@@ -10089,88 +10086,167 @@
           <a:p>
             <a:pPr marL="177800" indent="-177800">
               <a:spcAft>
-                <a:spcPts val="900"/>
+                <a:spcPts val="800"/>
               </a:spcAft>
               <a:buSzPct val="100000"/>
               <a:buChar char="•"/>
             </a:pPr>
             <a:r>
-              <a:rPr lang="en-US" sz="1400" b="1" dirty="0">
+              <a:rPr lang="en-US" sz="1400" dirty="0">
                 <a:solidFill>
                   <a:schemeClr val="tx1"/>
                 </a:solidFill>
               </a:rPr>
-              <a:t>Variation in the signal. </a:t>
-            </a:r>
-            <a:pPr indent="0" marL="0">
-              <a:spcAft>
-                <a:spcPts val="900"/>
-              </a:spcAft>
-              <a:buNone/>
-            </a:pPr>
-            <a:r>
-              <a:rPr lang="en-US" sz="1400" dirty="0">
-                <a:solidFill>
-                  <a:schemeClr val="tx1"/>
-                </a:solidFill>
-              </a:rPr>
-              <a:t>Goldstein–Pauzner give every depositor a noisy draw of the same signal. The draw breaks common knowledge and selects the equilibrium. Who runs is whoever drew low; everyone decides at once, so there is no first.</a:t>
+              <a:t>Goldstein–Pauzner: every depositor gets a noisy draw of the same signal</a:t>
             </a:r>
             <a:endParaRPr lang="en-US" sz="1400" dirty="0"/>
           </a:p>
           <a:p>
             <a:pPr marL="177800" indent="-177800">
               <a:spcAft>
-                <a:spcPts val="900"/>
+                <a:spcPts val="800"/>
               </a:spcAft>
               <a:buSzPct val="100000"/>
               <a:buChar char="•"/>
             </a:pPr>
             <a:r>
-              <a:rPr lang="en-US" sz="1400" b="1" dirty="0">
+              <a:rPr lang="en-US" sz="1400" dirty="0">
                 <a:solidFill>
                   <a:schemeClr val="tx1"/>
                 </a:solidFill>
               </a:rPr>
-              <a:t>Variation in location. </a:t>
-            </a:r>
-            <a:pPr indent="0" marL="0">
-              <a:spcAft>
-                <a:spcPts val="900"/>
-              </a:spcAft>
-              <a:buNone/>
-            </a:pPr>
-            <a:r>
-              <a:rPr lang="en-US" sz="1400" dirty="0">
-                <a:solidFill>
-                  <a:schemeClr val="tx1"/>
-                </a:solidFill>
-              </a:rPr>
-              <a:t>Networks and media decide who hears what, from whom, when (Kelly–Ó Gráda, Iyer–Puri, Cookson et al.). Who runs first is whoever sits nearest the source.</a:t>
+              <a:t>The draw breaks common knowledge and selects the equilibrium</a:t>
             </a:r>
             <a:endParaRPr lang="en-US" sz="1400" dirty="0"/>
           </a:p>
           <a:p>
             <a:pPr marL="177800" indent="-177800">
               <a:spcAft>
-                <a:spcPts val="900"/>
+                <a:spcPts val="800"/>
               </a:spcAft>
               <a:buSzPct val="100000"/>
               <a:buChar char="•"/>
             </a:pPr>
             <a:r>
-              <a:rPr lang="en-US" sz="1400" b="1" dirty="0">
+              <a:rPr lang="en-US" sz="1400" dirty="0">
                 <a:solidFill>
                   <a:schemeClr val="tx1"/>
                 </a:solidFill>
               </a:rPr>
-              <a:t>Both are fruitful. </a:t>
-            </a:r>
+              <a:t>Who runs: whoever drew low</a:t>
+            </a:r>
+            <a:endParaRPr lang="en-US" sz="1400" dirty="0"/>
+          </a:p>
+          <a:p>
+            <a:pPr marL="177800" indent="-177800">
+              <a:spcAft>
+                <a:spcPts val="800"/>
+              </a:spcAft>
+              <a:buSzPct val="100000"/>
+              <a:buChar char="•"/>
+            </a:pPr>
+            <a:r>
+              <a:rPr lang="en-US" sz="1400" dirty="0">
+                <a:solidFill>
+                  <a:schemeClr val="tx1"/>
+                </a:solidFill>
+              </a:rPr>
+              <a:t>Everyone decides at once, so there is no first</a:t>
+            </a:r>
+            <a:endParaRPr lang="en-US" sz="1400" dirty="0"/>
+          </a:p>
+        </p:txBody>
+      </p:sp>
+      <p:sp>
+        <p:nvSpPr>
+          <p:cNvPr id="6" name="mech-1"/>
+          <p:cNvSpPr/>
+          <p:nvPr/>
+        </p:nvSpPr>
+        <p:spPr>
+          <a:xfrm>
+            <a:off x="4663440" y="1051560"/>
+            <a:ext cx="4023360" cy="2514600"/>
+          </a:xfrm>
+          <a:prstGeom prst="roundRect">
+            <a:avLst>
+              <a:gd name="adj" fmla="val 2909"/>
+            </a:avLst>
+          </a:prstGeom>
+          <a:solidFill>
+            <a:schemeClr val="bg2"/>
+          </a:solidFill>
+          <a:ln w="12700">
+            <a:solidFill>
+              <a:schemeClr val="bg2"/>
+            </a:solidFill>
+            <a:prstDash val="solid"/>
+          </a:ln>
+        </p:spPr>
+      </p:sp>
+      <p:sp>
+        <p:nvSpPr>
+          <p:cNvPr id="7" name="mech-head"/>
+          <p:cNvSpPr txBox="1"/>
+          <p:nvPr/>
+        </p:nvSpPr>
+        <p:spPr>
+          <a:xfrm>
+            <a:off x="4846320" y="1143000"/>
+            <a:ext cx="3657600" cy="365760"/>
+          </a:xfrm>
+          <a:prstGeom prst="rect">
+            <a:avLst/>
+          </a:prstGeom>
+          <a:noFill/>
+          <a:ln/>
+        </p:spPr>
+        <p:txBody>
+          <a:bodyPr wrap="square" lIns="0" tIns="0" rIns="0" bIns="0" rtlCol="0" anchor="ctr"/>
+          <a:lstStyle/>
+          <a:p>
             <a:pPr indent="0" marL="0">
+              <a:buNone/>
+            </a:pPr>
+            <a:r>
+              <a:rPr lang="en-US" sz="1800" b="1" dirty="0">
+                <a:solidFill>
+                  <a:schemeClr val="accent1"/>
+                </a:solidFill>
+              </a:rPr>
+              <a:t>Variation in location</a:t>
+            </a:r>
+            <a:endParaRPr lang="en-US" sz="1800" dirty="0"/>
+          </a:p>
+        </p:txBody>
+      </p:sp>
+      <p:sp>
+        <p:nvSpPr>
+          <p:cNvPr id="8" name="bullets"/>
+          <p:cNvSpPr txBox="1"/>
+          <p:nvPr/>
+        </p:nvSpPr>
+        <p:spPr>
+          <a:xfrm>
+            <a:off x="4846320" y="1600200"/>
+            <a:ext cx="3657600" cy="1874520"/>
+          </a:xfrm>
+          <a:prstGeom prst="rect">
+            <a:avLst/>
+          </a:prstGeom>
+          <a:noFill/>
+          <a:ln/>
+        </p:spPr>
+        <p:txBody>
+          <a:bodyPr wrap="square" lIns="0" tIns="0" rIns="0" bIns="0" rtlCol="0" anchor="t"/>
+          <a:lstStyle/>
+          <a:p>
+            <a:pPr marL="177800" indent="-177800">
               <a:spcAft>
-                <a:spcPts val="900"/>
+                <a:spcPts val="800"/>
               </a:spcAft>
-              <a:buNone/>
+              <a:buSzPct val="100000"/>
+              <a:buChar char="•"/>
             </a:pPr>
             <a:r>
               <a:rPr lang="en-US" sz="1400" dirty="0">
@@ -10178,7 +10254,43 @@
                   <a:schemeClr val="tx1"/>
                 </a:solidFill>
               </a:rPr>
-              <a:t>Neither says anything about the depositor: the same Bayesian, with the same prior, sits at every node.</a:t>
+              <a:t>Networks and media decide who hears what, from whom, when</a:t>
+            </a:r>
+            <a:endParaRPr lang="en-US" sz="1400" dirty="0"/>
+          </a:p>
+          <a:p>
+            <a:pPr marL="177800" indent="-177800">
+              <a:spcAft>
+                <a:spcPts val="800"/>
+              </a:spcAft>
+              <a:buSzPct val="100000"/>
+              <a:buChar char="•"/>
+            </a:pPr>
+            <a:r>
+              <a:rPr lang="en-US" sz="1400" dirty="0">
+                <a:solidFill>
+                  <a:schemeClr val="tx1"/>
+                </a:solidFill>
+              </a:rPr>
+              <a:t>Kelly–Ó Gráda, Iyer–Puri, Cookson et al.</a:t>
+            </a:r>
+            <a:endParaRPr lang="en-US" sz="1400" dirty="0"/>
+          </a:p>
+          <a:p>
+            <a:pPr marL="177800" indent="-177800">
+              <a:spcAft>
+                <a:spcPts val="800"/>
+              </a:spcAft>
+              <a:buSzPct val="100000"/>
+              <a:buChar char="•"/>
+            </a:pPr>
+            <a:r>
+              <a:rPr lang="en-US" sz="1400" dirty="0">
+                <a:solidFill>
+                  <a:schemeClr val="tx1"/>
+                </a:solidFill>
+              </a:rPr>
+              <a:t>Who runs first: whoever sits nearest the source</a:t>
             </a:r>
             <a:endParaRPr lang="en-US" sz="1400" dirty="0"/>
           </a:p>
@@ -10294,41 +10406,14 @@
       </p:sp>
       <p:sp>
         <p:nvSpPr>
-          <p:cNvPr id="3" name="chip"/>
-          <p:cNvSpPr/>
-          <p:nvPr/>
-        </p:nvSpPr>
-        <p:spPr>
-          <a:xfrm>
-            <a:off x="457200" y="1143000"/>
-            <a:ext cx="384048" cy="384048"/>
-          </a:xfrm>
-          <a:prstGeom prst="roundRect">
-            <a:avLst>
-              <a:gd name="adj" fmla="val 14286"/>
-            </a:avLst>
-          </a:prstGeom>
-          <a:solidFill>
-            <a:schemeClr val="accent1"/>
-          </a:solidFill>
-          <a:ln w="12700">
-            <a:solidFill>
-              <a:schemeClr val="accent1"/>
-            </a:solidFill>
-            <a:prstDash val="solid"/>
-          </a:ln>
-        </p:spPr>
-      </p:sp>
-      <p:sp>
-        <p:nvSpPr>
-          <p:cNvPr id="4" name="chip-label"/>
+          <p:cNvPr id="3" name="step-lead"/>
           <p:cNvSpPr txBox="1"/>
           <p:nvPr/>
         </p:nvSpPr>
         <p:spPr>
           <a:xfrm>
-            <a:off x="457200" y="1143000"/>
-            <a:ext cx="384048" cy="384048"/>
+            <a:off x="457200" y="1051560"/>
+            <a:ext cx="8229600" cy="868680"/>
           </a:xfrm>
           <a:prstGeom prst="rect">
             <a:avLst/>
@@ -10340,70 +10425,31 @@
           <a:bodyPr wrap="square" lIns="0" tIns="0" rIns="0" bIns="0" rtlCol="0" anchor="ctr"/>
           <a:lstStyle/>
           <a:p>
-            <a:pPr algn="ctr" indent="0" marL="0">
-              <a:buNone/>
-            </a:pPr>
-            <a:r>
-              <a:rPr lang="en-US" sz="1300" b="1" dirty="0">
-                <a:solidFill>
-                  <a:schemeClr val="bg1"/>
-                </a:solidFill>
-                <a:latin typeface="Cambria" pitchFamily="34" charset="0"/>
-                <a:ea typeface="Cambria" pitchFamily="34" charset="-122"/>
-                <a:cs typeface="Cambria" pitchFamily="34" charset="-120"/>
-              </a:rPr>
-              <a:t>2</a:t>
-            </a:r>
-            <a:endParaRPr lang="en-US" sz="1300" dirty="0"/>
-          </a:p>
-        </p:txBody>
-      </p:sp>
-      <p:sp>
-        <p:nvSpPr>
-          <p:cNvPr id="5" name="step-lead"/>
+            <a:pPr indent="0" marL="0">
+              <a:buNone/>
+            </a:pPr>
+            <a:r>
+              <a:rPr lang="en-US" sz="1700" b="1" dirty="0">
+                <a:solidFill>
+                  <a:schemeClr val="tx2"/>
+                </a:solidFill>
+              </a:rPr>
+              <a:t>Which signal does a depositor act on, and in what proportion?</a:t>
+            </a:r>
+            <a:endParaRPr lang="en-US" sz="1700" dirty="0"/>
+          </a:p>
+        </p:txBody>
+      </p:sp>
+      <p:sp>
+        <p:nvSpPr>
+          <p:cNvPr id="4" name="step-items"/>
           <p:cNvSpPr txBox="1"/>
           <p:nvPr/>
         </p:nvSpPr>
         <p:spPr>
           <a:xfrm>
-            <a:off x="1005840" y="1051560"/>
-            <a:ext cx="7680960" cy="868680"/>
-          </a:xfrm>
-          <a:prstGeom prst="rect">
-            <a:avLst/>
-          </a:prstGeom>
-          <a:noFill/>
-          <a:ln/>
-        </p:spPr>
-        <p:txBody>
-          <a:bodyPr wrap="square" lIns="0" tIns="0" rIns="0" bIns="0" rtlCol="0" anchor="ctr"/>
-          <a:lstStyle/>
-          <a:p>
-            <a:pPr indent="0" marL="0">
-              <a:buNone/>
-            </a:pPr>
-            <a:r>
-              <a:rPr lang="en-US" sz="1700" b="1" dirty="0">
-                <a:solidFill>
-                  <a:schemeClr val="tx2"/>
-                </a:solidFill>
-              </a:rPr>
-              <a:t>Which signal does a depositor act on, and in what proportion?</a:t>
-            </a:r>
-            <a:endParaRPr lang="en-US" sz="1700" dirty="0"/>
-          </a:p>
-        </p:txBody>
-      </p:sp>
-      <p:sp>
-        <p:nvSpPr>
-          <p:cNvPr id="6" name="step-items"/>
-          <p:cNvSpPr txBox="1"/>
-          <p:nvPr/>
-        </p:nvSpPr>
-        <p:spPr>
-          <a:xfrm>
-            <a:off x="1005840" y="2103120"/>
-            <a:ext cx="7680960" cy="2103120"/>
+            <a:off x="457200" y="2103120"/>
+            <a:ext cx="8229600" cy="2103120"/>
           </a:xfrm>
           <a:prstGeom prst="rect">
             <a:avLst/>
@@ -10622,41 +10668,14 @@
       </p:sp>
       <p:sp>
         <p:nvSpPr>
-          <p:cNvPr id="3" name="chip"/>
-          <p:cNvSpPr/>
-          <p:nvPr/>
-        </p:nvSpPr>
-        <p:spPr>
-          <a:xfrm>
-            <a:off x="457200" y="1143000"/>
-            <a:ext cx="384048" cy="384048"/>
-          </a:xfrm>
-          <a:prstGeom prst="roundRect">
-            <a:avLst>
-              <a:gd name="adj" fmla="val 14286"/>
-            </a:avLst>
-          </a:prstGeom>
-          <a:solidFill>
-            <a:schemeClr val="accent1"/>
-          </a:solidFill>
-          <a:ln w="12700">
-            <a:solidFill>
-              <a:schemeClr val="accent1"/>
-            </a:solidFill>
-            <a:prstDash val="solid"/>
-          </a:ln>
-        </p:spPr>
-      </p:sp>
-      <p:sp>
-        <p:nvSpPr>
-          <p:cNvPr id="4" name="chip-label"/>
+          <p:cNvPr id="3" name="step-lead"/>
           <p:cNvSpPr txBox="1"/>
           <p:nvPr/>
         </p:nvSpPr>
         <p:spPr>
           <a:xfrm>
-            <a:off x="457200" y="1143000"/>
-            <a:ext cx="384048" cy="384048"/>
+            <a:off x="457200" y="1051560"/>
+            <a:ext cx="8229600" cy="868680"/>
           </a:xfrm>
           <a:prstGeom prst="rect">
             <a:avLst/>
@@ -10668,70 +10687,31 @@
           <a:bodyPr wrap="square" lIns="0" tIns="0" rIns="0" bIns="0" rtlCol="0" anchor="ctr"/>
           <a:lstStyle/>
           <a:p>
-            <a:pPr algn="ctr" indent="0" marL="0">
-              <a:buNone/>
-            </a:pPr>
-            <a:r>
-              <a:rPr lang="en-US" sz="1300" b="1" dirty="0">
-                <a:solidFill>
-                  <a:schemeClr val="bg1"/>
-                </a:solidFill>
-                <a:latin typeface="Cambria" pitchFamily="34" charset="0"/>
-                <a:ea typeface="Cambria" pitchFamily="34" charset="-122"/>
-                <a:cs typeface="Cambria" pitchFamily="34" charset="-120"/>
-              </a:rPr>
-              <a:t>3</a:t>
-            </a:r>
-            <a:endParaRPr lang="en-US" sz="1300" dirty="0"/>
-          </a:p>
-        </p:txBody>
-      </p:sp>
-      <p:sp>
-        <p:nvSpPr>
-          <p:cNvPr id="5" name="step-lead"/>
+            <a:pPr indent="0" marL="0">
+              <a:buNone/>
+            </a:pPr>
+            <a:r>
+              <a:rPr lang="en-US" sz="1700" b="1" dirty="0">
+                <a:solidFill>
+                  <a:schemeClr val="tx2"/>
+                </a:solidFill>
+              </a:rPr>
+              <a:t>Weight on the public signal = its precision relative to the private one. The same for everyone, and vanishing.</a:t>
+            </a:r>
+            <a:endParaRPr lang="en-US" sz="1700" dirty="0"/>
+          </a:p>
+        </p:txBody>
+      </p:sp>
+      <p:sp>
+        <p:nvSpPr>
+          <p:cNvPr id="4" name="step-items"/>
           <p:cNvSpPr txBox="1"/>
           <p:nvPr/>
         </p:nvSpPr>
         <p:spPr>
           <a:xfrm>
-            <a:off x="1005840" y="1051560"/>
-            <a:ext cx="7680960" cy="868680"/>
-          </a:xfrm>
-          <a:prstGeom prst="rect">
-            <a:avLst/>
-          </a:prstGeom>
-          <a:noFill/>
-          <a:ln/>
-        </p:spPr>
-        <p:txBody>
-          <a:bodyPr wrap="square" lIns="0" tIns="0" rIns="0" bIns="0" rtlCol="0" anchor="ctr"/>
-          <a:lstStyle/>
-          <a:p>
-            <a:pPr indent="0" marL="0">
-              <a:buNone/>
-            </a:pPr>
-            <a:r>
-              <a:rPr lang="en-US" sz="1700" b="1" dirty="0">
-                <a:solidFill>
-                  <a:schemeClr val="tx2"/>
-                </a:solidFill>
-              </a:rPr>
-              <a:t>Weight on the public signal = its precision relative to the private one. The same for everyone, and vanishing.</a:t>
-            </a:r>
-            <a:endParaRPr lang="en-US" sz="1700" dirty="0"/>
-          </a:p>
-        </p:txBody>
-      </p:sp>
-      <p:sp>
-        <p:nvSpPr>
-          <p:cNvPr id="6" name="step-items"/>
-          <p:cNvSpPr txBox="1"/>
-          <p:nvPr/>
-        </p:nvSpPr>
-        <p:spPr>
-          <a:xfrm>
-            <a:off x="1005840" y="2103120"/>
-            <a:ext cx="7680960" cy="2103120"/>
+            <a:off x="457200" y="2103120"/>
+            <a:ext cx="8229600" cy="2103120"/>
           </a:xfrm>
           <a:prstGeom prst="rect">
             <a:avLst/>
@@ -10950,41 +10930,14 @@
       </p:sp>
       <p:sp>
         <p:nvSpPr>
-          <p:cNvPr id="3" name="chip"/>
-          <p:cNvSpPr/>
-          <p:nvPr/>
-        </p:nvSpPr>
-        <p:spPr>
-          <a:xfrm>
-            <a:off x="457200" y="1143000"/>
-            <a:ext cx="384048" cy="384048"/>
-          </a:xfrm>
-          <a:prstGeom prst="roundRect">
-            <a:avLst>
-              <a:gd name="adj" fmla="val 14286"/>
-            </a:avLst>
-          </a:prstGeom>
-          <a:solidFill>
-            <a:schemeClr val="accent1"/>
-          </a:solidFill>
-          <a:ln w="12700">
-            <a:solidFill>
-              <a:schemeClr val="accent1"/>
-            </a:solidFill>
-            <a:prstDash val="solid"/>
-          </a:ln>
-        </p:spPr>
-      </p:sp>
-      <p:sp>
-        <p:nvSpPr>
-          <p:cNvPr id="4" name="chip-label"/>
+          <p:cNvPr id="3" name="step-lead"/>
           <p:cNvSpPr txBox="1"/>
           <p:nvPr/>
         </p:nvSpPr>
         <p:spPr>
           <a:xfrm>
-            <a:off x="457200" y="1143000"/>
-            <a:ext cx="384048" cy="384048"/>
+            <a:off x="457200" y="1051560"/>
+            <a:ext cx="8229600" cy="868680"/>
           </a:xfrm>
           <a:prstGeom prst="rect">
             <a:avLst/>
@@ -10996,70 +10949,31 @@
           <a:bodyPr wrap="square" lIns="0" tIns="0" rIns="0" bIns="0" rtlCol="0" anchor="ctr"/>
           <a:lstStyle/>
           <a:p>
-            <a:pPr algn="ctr" indent="0" marL="0">
-              <a:buNone/>
-            </a:pPr>
-            <a:r>
-              <a:rPr lang="en-US" sz="1300" b="1" dirty="0">
-                <a:solidFill>
-                  <a:schemeClr val="bg1"/>
-                </a:solidFill>
-                <a:latin typeface="Cambria" pitchFamily="34" charset="0"/>
-                <a:ea typeface="Cambria" pitchFamily="34" charset="-122"/>
-                <a:cs typeface="Cambria" pitchFamily="34" charset="-120"/>
-              </a:rPr>
-              <a:t>4</a:t>
-            </a:r>
-            <a:endParaRPr lang="en-US" sz="1300" dirty="0"/>
-          </a:p>
-        </p:txBody>
-      </p:sp>
-      <p:sp>
-        <p:nvSpPr>
-          <p:cNvPr id="5" name="step-lead"/>
+            <a:pPr indent="0" marL="0">
+              <a:buNone/>
+            </a:pPr>
+            <a:r>
+              <a:rPr lang="en-US" sz="1700" b="1" dirty="0">
+                <a:solidFill>
+                  <a:schemeClr val="tx2"/>
+                </a:solidFill>
+              </a:rPr>
+              <a:t>Panics are open disagreements between the public line and private evidence, and depositors split on which to trust.</a:t>
+            </a:r>
+            <a:endParaRPr lang="en-US" sz="1700" dirty="0"/>
+          </a:p>
+        </p:txBody>
+      </p:sp>
+      <p:sp>
+        <p:nvSpPr>
+          <p:cNvPr id="4" name="step-items"/>
           <p:cNvSpPr txBox="1"/>
           <p:nvPr/>
         </p:nvSpPr>
         <p:spPr>
           <a:xfrm>
-            <a:off x="1005840" y="1051560"/>
-            <a:ext cx="7680960" cy="868680"/>
-          </a:xfrm>
-          <a:prstGeom prst="rect">
-            <a:avLst/>
-          </a:prstGeom>
-          <a:noFill/>
-          <a:ln/>
-        </p:spPr>
-        <p:txBody>
-          <a:bodyPr wrap="square" lIns="0" tIns="0" rIns="0" bIns="0" rtlCol="0" anchor="ctr"/>
-          <a:lstStyle/>
-          <a:p>
-            <a:pPr indent="0" marL="0">
-              <a:buNone/>
-            </a:pPr>
-            <a:r>
-              <a:rPr lang="en-US" sz="1700" b="1" dirty="0">
-                <a:solidFill>
-                  <a:schemeClr val="tx2"/>
-                </a:solidFill>
-              </a:rPr>
-              <a:t>Panics are open disagreements between the public line and private evidence, and depositors split on which to trust.</a:t>
-            </a:r>
-            <a:endParaRPr lang="en-US" sz="1700" dirty="0"/>
-          </a:p>
-        </p:txBody>
-      </p:sp>
-      <p:sp>
-        <p:nvSpPr>
-          <p:cNvPr id="6" name="step-items"/>
-          <p:cNvSpPr txBox="1"/>
-          <p:nvPr/>
-        </p:nvSpPr>
-        <p:spPr>
-          <a:xfrm>
-            <a:off x="1005840" y="2103120"/>
-            <a:ext cx="7680960" cy="2103120"/>
+            <a:off x="457200" y="2103120"/>
+            <a:ext cx="8229600" cy="2103120"/>
           </a:xfrm>
           <a:prstGeom prst="rect">
             <a:avLst/>
@@ -11170,14 +11084,14 @@
       </p:sp>
       <p:sp>
         <p:nvSpPr>
-          <p:cNvPr id="7" name="step-foot"/>
+          <p:cNvPr id="5" name="step-foot"/>
           <p:cNvSpPr txBox="1"/>
           <p:nvPr/>
         </p:nvSpPr>
         <p:spPr>
           <a:xfrm>
-            <a:off x="1005840" y="4251960"/>
-            <a:ext cx="7680960" cy="320040"/>
+            <a:off x="457200" y="4251960"/>
+            <a:ext cx="8229600" cy="320040"/>
           </a:xfrm>
           <a:prstGeom prst="rect">
             <a:avLst/>
@@ -11314,41 +11228,14 @@
       </p:sp>
       <p:sp>
         <p:nvSpPr>
-          <p:cNvPr id="3" name="chip"/>
-          <p:cNvSpPr/>
-          <p:nvPr/>
-        </p:nvSpPr>
-        <p:spPr>
-          <a:xfrm>
-            <a:off x="457200" y="1143000"/>
-            <a:ext cx="384048" cy="384048"/>
-          </a:xfrm>
-          <a:prstGeom prst="roundRect">
-            <a:avLst>
-              <a:gd name="adj" fmla="val 14286"/>
-            </a:avLst>
-          </a:prstGeom>
-          <a:solidFill>
-            <a:schemeClr val="accent1"/>
-          </a:solidFill>
-          <a:ln w="12700">
-            <a:solidFill>
-              <a:schemeClr val="accent1"/>
-            </a:solidFill>
-            <a:prstDash val="solid"/>
-          </a:ln>
-        </p:spPr>
-      </p:sp>
-      <p:sp>
-        <p:nvSpPr>
-          <p:cNvPr id="4" name="chip-label"/>
+          <p:cNvPr id="3" name="step-lead"/>
           <p:cNvSpPr txBox="1"/>
           <p:nvPr/>
         </p:nvSpPr>
         <p:spPr>
           <a:xfrm>
-            <a:off x="457200" y="1143000"/>
-            <a:ext cx="384048" cy="384048"/>
+            <a:off x="457200" y="1051560"/>
+            <a:ext cx="8229600" cy="868680"/>
           </a:xfrm>
           <a:prstGeom prst="rect">
             <a:avLst/>
@@ -11360,70 +11247,31 @@
           <a:bodyPr wrap="square" lIns="0" tIns="0" rIns="0" bIns="0" rtlCol="0" anchor="ctr"/>
           <a:lstStyle/>
           <a:p>
-            <a:pPr algn="ctr" indent="0" marL="0">
-              <a:buNone/>
-            </a:pPr>
-            <a:r>
-              <a:rPr lang="en-US" sz="1300" b="1" dirty="0">
-                <a:solidFill>
-                  <a:schemeClr val="bg1"/>
-                </a:solidFill>
-                <a:latin typeface="Cambria" pitchFamily="34" charset="0"/>
-                <a:ea typeface="Cambria" pitchFamily="34" charset="-122"/>
-                <a:cs typeface="Cambria" pitchFamily="34" charset="-120"/>
-              </a:rPr>
-              <a:t>5</a:t>
-            </a:r>
-            <a:endParaRPr lang="en-US" sz="1300" dirty="0"/>
-          </a:p>
-        </p:txBody>
-      </p:sp>
-      <p:sp>
-        <p:nvSpPr>
-          <p:cNvPr id="5" name="step-lead"/>
+            <a:pPr indent="0" marL="0">
+              <a:buNone/>
+            </a:pPr>
+            <a:r>
+              <a:rPr lang="en-US" sz="1700" b="1" dirty="0">
+                <a:solidFill>
+                  <a:schemeClr val="tx2"/>
+                </a:solidFill>
+              </a:rPr>
+              <a:t>Culture supplies a weight that differs across depositors, is set before the run, and does not move with the information environment.</a:t>
+            </a:r>
+            <a:endParaRPr lang="en-US" sz="1700" dirty="0"/>
+          </a:p>
+        </p:txBody>
+      </p:sp>
+      <p:sp>
+        <p:nvSpPr>
+          <p:cNvPr id="4" name="step-items"/>
           <p:cNvSpPr txBox="1"/>
           <p:nvPr/>
         </p:nvSpPr>
         <p:spPr>
           <a:xfrm>
-            <a:off x="1005840" y="1051560"/>
-            <a:ext cx="7680960" cy="868680"/>
-          </a:xfrm>
-          <a:prstGeom prst="rect">
-            <a:avLst/>
-          </a:prstGeom>
-          <a:noFill/>
-          <a:ln/>
-        </p:spPr>
-        <p:txBody>
-          <a:bodyPr wrap="square" lIns="0" tIns="0" rIns="0" bIns="0" rtlCol="0" anchor="ctr"/>
-          <a:lstStyle/>
-          <a:p>
-            <a:pPr indent="0" marL="0">
-              <a:buNone/>
-            </a:pPr>
-            <a:r>
-              <a:rPr lang="en-US" sz="1700" b="1" dirty="0">
-                <a:solidFill>
-                  <a:schemeClr val="tx2"/>
-                </a:solidFill>
-              </a:rPr>
-              <a:t>Culture supplies a weight that differs across depositors, is set before the run, and does not move with the information environment.</a:t>
-            </a:r>
-            <a:endParaRPr lang="en-US" sz="1700" dirty="0"/>
-          </a:p>
-        </p:txBody>
-      </p:sp>
-      <p:sp>
-        <p:nvSpPr>
-          <p:cNvPr id="6" name="step-items"/>
-          <p:cNvSpPr txBox="1"/>
-          <p:nvPr/>
-        </p:nvSpPr>
-        <p:spPr>
-          <a:xfrm>
-            <a:off x="1005840" y="2103120"/>
-            <a:ext cx="7680960" cy="2103120"/>
+            <a:off x="457200" y="2103120"/>
+            <a:ext cx="8229600" cy="2103120"/>
           </a:xfrm>
           <a:prstGeom prst="rect">
             <a:avLst/>
@@ -11642,41 +11490,14 @@
       </p:sp>
       <p:sp>
         <p:nvSpPr>
-          <p:cNvPr id="3" name="chip"/>
-          <p:cNvSpPr/>
-          <p:nvPr/>
-        </p:nvSpPr>
-        <p:spPr>
-          <a:xfrm>
-            <a:off x="457200" y="1143000"/>
-            <a:ext cx="384048" cy="384048"/>
-          </a:xfrm>
-          <a:prstGeom prst="roundRect">
-            <a:avLst>
-              <a:gd name="adj" fmla="val 14286"/>
-            </a:avLst>
-          </a:prstGeom>
-          <a:solidFill>
-            <a:schemeClr val="accent1"/>
-          </a:solidFill>
-          <a:ln w="12700">
-            <a:solidFill>
-              <a:schemeClr val="accent1"/>
-            </a:solidFill>
-            <a:prstDash val="solid"/>
-          </a:ln>
-        </p:spPr>
-      </p:sp>
-      <p:sp>
-        <p:nvSpPr>
-          <p:cNvPr id="4" name="chip-label"/>
+          <p:cNvPr id="3" name="step-lead"/>
           <p:cNvSpPr txBox="1"/>
           <p:nvPr/>
         </p:nvSpPr>
         <p:spPr>
           <a:xfrm>
-            <a:off x="457200" y="1143000"/>
-            <a:ext cx="384048" cy="384048"/>
+            <a:off x="457200" y="1051560"/>
+            <a:ext cx="8229600" cy="868680"/>
           </a:xfrm>
           <a:prstGeom prst="rect">
             <a:avLst/>
@@ -11688,70 +11509,31 @@
           <a:bodyPr wrap="square" lIns="0" tIns="0" rIns="0" bIns="0" rtlCol="0" anchor="ctr"/>
           <a:lstStyle/>
           <a:p>
-            <a:pPr algn="ctr" indent="0" marL="0">
-              <a:buNone/>
-            </a:pPr>
-            <a:r>
-              <a:rPr lang="en-US" sz="1300" b="1" dirty="0">
-                <a:solidFill>
-                  <a:schemeClr val="bg1"/>
-                </a:solidFill>
-                <a:latin typeface="Cambria" pitchFamily="34" charset="0"/>
-                <a:ea typeface="Cambria" pitchFamily="34" charset="-122"/>
-                <a:cs typeface="Cambria" pitchFamily="34" charset="-120"/>
-              </a:rPr>
-              <a:t>6</a:t>
-            </a:r>
-            <a:endParaRPr lang="en-US" sz="1300" dirty="0"/>
-          </a:p>
-        </p:txBody>
-      </p:sp>
-      <p:sp>
-        <p:nvSpPr>
-          <p:cNvPr id="5" name="step-lead"/>
+            <a:pPr indent="0" marL="0">
+              <a:buNone/>
+            </a:pPr>
+            <a:r>
+              <a:rPr lang="en-US" sz="1700" b="1" dirty="0">
+                <a:solidFill>
+                  <a:schemeClr val="tx2"/>
+                </a:solidFill>
+              </a:rPr>
+              <a:t>The weight is the depositor’s psychological characteristic; culture is the population-level source.</a:t>
+            </a:r>
+            <a:endParaRPr lang="en-US" sz="1700" dirty="0"/>
+          </a:p>
+        </p:txBody>
+      </p:sp>
+      <p:sp>
+        <p:nvSpPr>
+          <p:cNvPr id="4" name="step-items"/>
           <p:cNvSpPr txBox="1"/>
           <p:nvPr/>
         </p:nvSpPr>
         <p:spPr>
           <a:xfrm>
-            <a:off x="1005840" y="1051560"/>
-            <a:ext cx="7680960" cy="868680"/>
-          </a:xfrm>
-          <a:prstGeom prst="rect">
-            <a:avLst/>
-          </a:prstGeom>
-          <a:noFill/>
-          <a:ln/>
-        </p:spPr>
-        <p:txBody>
-          <a:bodyPr wrap="square" lIns="0" tIns="0" rIns="0" bIns="0" rtlCol="0" anchor="ctr"/>
-          <a:lstStyle/>
-          <a:p>
-            <a:pPr indent="0" marL="0">
-              <a:buNone/>
-            </a:pPr>
-            <a:r>
-              <a:rPr lang="en-US" sz="1700" b="1" dirty="0">
-                <a:solidFill>
-                  <a:schemeClr val="tx2"/>
-                </a:solidFill>
-              </a:rPr>
-              <a:t>The weight is the depositor’s psychological characteristic; culture is the population-level source.</a:t>
-            </a:r>
-            <a:endParaRPr lang="en-US" sz="1700" dirty="0"/>
-          </a:p>
-        </p:txBody>
-      </p:sp>
-      <p:sp>
-        <p:nvSpPr>
-          <p:cNvPr id="6" name="step-items"/>
-          <p:cNvSpPr txBox="1"/>
-          <p:nvPr/>
-        </p:nvSpPr>
-        <p:spPr>
-          <a:xfrm>
-            <a:off x="1005840" y="2103120"/>
-            <a:ext cx="7680960" cy="2103120"/>
+            <a:off x="457200" y="2103120"/>
+            <a:ext cx="8229600" cy="2103120"/>
           </a:xfrm>
           <a:prstGeom prst="rect">
             <a:avLst/>
@@ -11970,41 +11752,14 @@
       </p:sp>
       <p:sp>
         <p:nvSpPr>
-          <p:cNvPr id="3" name="chip"/>
-          <p:cNvSpPr/>
-          <p:nvPr/>
-        </p:nvSpPr>
-        <p:spPr>
-          <a:xfrm>
-            <a:off x="457200" y="1143000"/>
-            <a:ext cx="384048" cy="384048"/>
-          </a:xfrm>
-          <a:prstGeom prst="roundRect">
-            <a:avLst>
-              <a:gd name="adj" fmla="val 14286"/>
-            </a:avLst>
-          </a:prstGeom>
-          <a:solidFill>
-            <a:schemeClr val="accent1"/>
-          </a:solidFill>
-          <a:ln w="12700">
-            <a:solidFill>
-              <a:schemeClr val="accent1"/>
-            </a:solidFill>
-            <a:prstDash val="solid"/>
-          </a:ln>
-        </p:spPr>
-      </p:sp>
-      <p:sp>
-        <p:nvSpPr>
-          <p:cNvPr id="4" name="chip-label"/>
+          <p:cNvPr id="3" name="step-lead"/>
           <p:cNvSpPr txBox="1"/>
           <p:nvPr/>
         </p:nvSpPr>
         <p:spPr>
           <a:xfrm>
-            <a:off x="457200" y="1143000"/>
-            <a:ext cx="384048" cy="384048"/>
+            <a:off x="457200" y="1051560"/>
+            <a:ext cx="8229600" cy="868680"/>
           </a:xfrm>
           <a:prstGeom prst="rect">
             <a:avLst/>
@@ -12016,70 +11771,31 @@
           <a:bodyPr wrap="square" lIns="0" tIns="0" rIns="0" bIns="0" rtlCol="0" anchor="ctr"/>
           <a:lstStyle/>
           <a:p>
-            <a:pPr algn="ctr" indent="0" marL="0">
-              <a:buNone/>
-            </a:pPr>
-            <a:r>
-              <a:rPr lang="en-US" sz="1300" b="1" dirty="0">
-                <a:solidFill>
-                  <a:schemeClr val="bg1"/>
-                </a:solidFill>
-                <a:latin typeface="Cambria" pitchFamily="34" charset="0"/>
-                <a:ea typeface="Cambria" pitchFamily="34" charset="-122"/>
-                <a:cs typeface="Cambria" pitchFamily="34" charset="-120"/>
-              </a:rPr>
-              <a:t>7</a:t>
-            </a:r>
-            <a:endParaRPr lang="en-US" sz="1300" dirty="0"/>
-          </a:p>
-        </p:txBody>
-      </p:sp>
-      <p:sp>
-        <p:nvSpPr>
-          <p:cNvPr id="5" name="step-lead"/>
+            <a:pPr indent="0" marL="0">
+              <a:buNone/>
+            </a:pPr>
+            <a:r>
+              <a:rPr lang="en-US" sz="1700" b="1" dirty="0">
+                <a:solidFill>
+                  <a:schemeClr val="tx2"/>
+                </a:solidFill>
+              </a:rPr>
+              <a:t>Chapter 1 relaxed one assumption. The agent-based model relaxes the rest at once, and lets the three rungs interact.</a:t>
+            </a:r>
+            <a:endParaRPr lang="en-US" sz="1700" dirty="0"/>
+          </a:p>
+        </p:txBody>
+      </p:sp>
+      <p:sp>
+        <p:nvSpPr>
+          <p:cNvPr id="4" name="step-items"/>
           <p:cNvSpPr txBox="1"/>
           <p:nvPr/>
         </p:nvSpPr>
         <p:spPr>
           <a:xfrm>
-            <a:off x="1005840" y="1051560"/>
-            <a:ext cx="7680960" cy="868680"/>
-          </a:xfrm>
-          <a:prstGeom prst="rect">
-            <a:avLst/>
-          </a:prstGeom>
-          <a:noFill/>
-          <a:ln/>
-        </p:spPr>
-        <p:txBody>
-          <a:bodyPr wrap="square" lIns="0" tIns="0" rIns="0" bIns="0" rtlCol="0" anchor="ctr"/>
-          <a:lstStyle/>
-          <a:p>
-            <a:pPr indent="0" marL="0">
-              <a:buNone/>
-            </a:pPr>
-            <a:r>
-              <a:rPr lang="en-US" sz="1700" b="1" dirty="0">
-                <a:solidFill>
-                  <a:schemeClr val="tx2"/>
-                </a:solidFill>
-              </a:rPr>
-              <a:t>Chapter 1 relaxed one assumption. The agent-based model relaxes the rest at once, and lets the three rungs interact.</a:t>
-            </a:r>
-            <a:endParaRPr lang="en-US" sz="1700" dirty="0"/>
-          </a:p>
-        </p:txBody>
-      </p:sp>
-      <p:sp>
-        <p:nvSpPr>
-          <p:cNvPr id="6" name="step-items"/>
-          <p:cNvSpPr txBox="1"/>
-          <p:nvPr/>
-        </p:nvSpPr>
-        <p:spPr>
-          <a:xfrm>
-            <a:off x="1005840" y="2103120"/>
-            <a:ext cx="7680960" cy="2103120"/>
+            <a:off x="457200" y="2103120"/>
+            <a:ext cx="8229600" cy="2103120"/>
           </a:xfrm>
           <a:prstGeom prst="rect">
             <a:avLst/>

--- a/docs/deck_2026-10-26_seminar.pptx
+++ b/docs/deck_2026-10-26_seminar.pptx
@@ -28,10 +28,9 @@
     <p:sldId id="276" r:id="rId22"/>
     <p:sldId id="277" r:id="rId23"/>
     <p:sldId id="278" r:id="rId24"/>
-    <p:sldId id="279" r:id="rId25"/>
   </p:sldIdLst>
   <p:notesMasterIdLst>
-    <p:notesMasterId r:id="rId26"/>
+    <p:notesMasterId r:id="rId25"/>
   </p:notesMasterIdLst>
   <p:sldSz cx="9144000" cy="5143500"/>
   <p:notesSz cx="5143500" cy="9144000"/>
@@ -130,7 +129,7 @@
   <p:extLst>
     <p:ext uri="{521415D9-36F7-43E2-AB2F-B90AF26B5E84}">
       <p14:sectionLst xmlns:p14="http://schemas.microsoft.com/office/powerpoint/2010/main">
-        <p14:section name="Opening" id="{70025f63-efd5-e29a-856c-c6602e47857e}">
+        <p14:section name="Opening" id="{849ee837-bfee-fd69-b4cc-5daac7405823}">
           <p14:sldIdLst>
             <p14:sldId id="256"/>
             <p14:sldId id="257"/>
@@ -141,41 +140,40 @@
             <p14:sldId id="262"/>
             <p14:sldId id="263"/>
             <p14:sldId id="264"/>
-            <p14:sldId id="265"/>
           </p14:sldIdLst>
         </p14:section>
-        <p14:section name="The model" id="{2948d255-8d00-162f-351f-91fa56728d8e}">
+        <p14:section name="The model" id="{f54b7945-b27d-90d7-54c4-776168f161eb}">
           <p14:sldIdLst>
+            <p14:sldId id="265"/>
             <p14:sldId id="266"/>
-            <p14:sldId id="267"/>
           </p14:sldIdLst>
         </p14:section>
-        <p14:section name="Results" id="{f655b5de-7699-ff94-0fe7-681cde8e72db}">
+        <p14:section name="Results" id="{28d41edb-9045-168b-84c7-c226ea5a5d30}">
           <p14:sldIdLst>
+            <p14:sldId id="267"/>
             <p14:sldId id="268"/>
             <p14:sldId id="269"/>
             <p14:sldId id="270"/>
+          </p14:sldIdLst>
+        </p14:section>
+        <p14:section name="Validation" id="{b31626ba-d5d1-1804-bd31-09af4f60edad}">
+          <p14:sldIdLst>
             <p14:sldId id="271"/>
           </p14:sldIdLst>
         </p14:section>
-        <p14:section name="Validation" id="{28a5e1c3-06ca-d1ba-bc8d-8cdc7f033f42}">
+        <p14:section name="Close" id="{eb02f48d-9578-4977-2b96-19f9b95b1548}">
           <p14:sldIdLst>
             <p14:sldId id="272"/>
           </p14:sldIdLst>
         </p14:section>
-        <p14:section name="Close" id="{59c474d2-9f0f-4e71-c13f-c018b0fe8be5}">
+        <p14:section name="Backup" id="{cb5a5549-3c60-3396-0be1-811bd6396036}">
           <p14:sldIdLst>
             <p14:sldId id="273"/>
-          </p14:sldIdLst>
-        </p14:section>
-        <p14:section name="Backup" id="{f92e3103-2798-48c5-cd09-0aafd52eebd4}">
-          <p14:sldIdLst>
             <p14:sldId id="274"/>
             <p14:sldId id="275"/>
             <p14:sldId id="276"/>
             <p14:sldId id="277"/>
             <p14:sldId id="278"/>
-            <p14:sldId id="279"/>
           </p14:sldIdLst>
         </p14:section>
       </p14:sectionLst>
@@ -670,7 +668,7 @@
           <a:p>
             <a:r>
               <a:rPr lang="en-US" dirty="0"/>
-              <a:t>~1 min. The ladder: variation in the signal (Goldstein-Pauzner: same signal technology, different draws, which selects the equilibrium), variation in location (who hears it, from whom, when: Kelly-O Grada, Iyer-Puri, Cookson et al.), variation in interpretation (the same two signals, different dispositional weights; culture is the stable source). Rung 1 orders depositors by luck, rung 2 by position, rung 3 by who they are, and only rung 3 predicts that the order flips with the sign of the public error. Nearest cousins to acknowledge if asked: Izmalkov-Yildiz 2010 (heterogeneous priors), He-Manela 2016 (information acquisition).</a:t>
+              <a:t>~2 min. N = 1,000 depositors on a small-world network; one bank that sells assets at a discount when cash runs short (fire-sale bank). Each tick a depositor sees neighbours' withdrawals and the public news, blends them with a private signal, and withdraws if that pays. Reference bank: deposits log-normal (sigma 2.5), each capped at 1% of the total; CARA 0.1; partial withdrawals allowed. The diagram is the technical ODD overview: walk the right-hand column (warm-up, world, shock, tick loop) and skip the formulas.</a:t>
             </a:r>
             <a:endParaRPr lang="en-US" dirty="0"/>
           </a:p>
@@ -758,7 +756,7 @@
           <a:p>
             <a:r>
               <a:rPr lang="en-US" dirty="0"/>
-              <a:t>~2 min. N = 1,000 depositors on a small-world network; one bank that sells assets at a discount when cash runs short (fire-sale bank). Each tick a depositor sees neighbours' withdrawals and the public news, blends them with a private signal, and withdraws if that pays. Reference bank: deposits log-normal (sigma 2.5), each capped at 1% of the total; CARA 0.1; partial withdrawals allowed. The diagram is the technical ODD overview: walk the right-hand column (warm-up, world, shock, tick loop) and skip the formulas.</a:t>
+              <a:t>~1 min. Individualists put little weight on others (neighbours and public news) and more on their own information; collectivists the reverse. In the model: weight on the social side lambda; pairs shown in the figures (I, C): (0.1, 0.9) = large difference, (0.2, 0.8) = medium, (0.3, 0.5) = small. Type comes from a cultural warm-up on the network: the top mu share become individualists. Colours used throughout: orange = individualists, blue = collectivists.</a:t>
             </a:r>
             <a:endParaRPr lang="en-US" dirty="0"/>
           </a:p>
@@ -846,7 +844,7 @@
           <a:p>
             <a:r>
               <a:rPr lang="en-US" dirty="0"/>
-              <a:t>~1 min. Individualists put little weight on others (neighbours and public news) and more on their own information; collectivists the reverse. In the model: weight on the social side lambda; pairs shown in the figures (I, C): (0.1, 0.9) = large difference, (0.2, 0.8) = medium, (0.3, 0.5) = small. Type comes from a cultural warm-up on the network: the top mu share become individualists. Colours used throughout: orange = individualists, blue = collectivists.</a:t>
+              <a:t>~2 min. Collectivists jump from 0.15 to 0.93 once 20–35% of neighbours are out and reach 1.0; individualists plateau at ~0.25–0.30. Slopes: C 0.80, I 0.22 (difference +0.58, t 16.7). Lambda pairs pooled; reference bank.</a:t>
             </a:r>
             <a:endParaRPr lang="en-US" dirty="0"/>
           </a:p>
@@ -934,7 +932,7 @@
           <a:p>
             <a:r>
               <a:rPr lang="en-US" dirty="0"/>
-              <a:t>~2 min. Collectivists jump from 0.15 to 0.93 once 20–35% of neighbours are out and reach 1.0; individualists plateau at ~0.25–0.30. Slopes: C 0.80, I 0.22 (difference +0.58, t 16.7). Lambda pairs pooled; reference bank.</a:t>
+              <a:t>~2 min. Large difference (0.1, 0.9): 0.67 at mu 0 -&gt; 0.08 at mu 1; medium (0.2, 0.8) similar; small (0.3, 0.5): 0.25 -&gt; 0.09. Monotone, no interior peak. The difference between types matters most when collectivists dominate; lines converge at mu &gt;= 0.75. Includes pure cells (mu 0 and 1). If asked about Ch 1's non-monotonic prediction (P6): see backup.</a:t>
             </a:r>
             <a:endParaRPr lang="en-US" dirty="0"/>
           </a:p>
@@ -1022,7 +1020,7 @@
           <a:p>
             <a:r>
               <a:rPr lang="en-US" dirty="0"/>
-              <a:t>~2 min. Large difference (0.1, 0.9): 0.67 at mu 0 -&gt; 0.08 at mu 1; medium (0.2, 0.8) similar; small (0.3, 0.5): 0.25 -&gt; 0.09. Monotone, no interior peak. The difference between types matters most when collectivists dominate; lines converge at mu &gt;= 0.75. Includes pure cells (mu 0 and 1). If asked about Ch 1's non-monotonic prediction (P6): see backup.</a:t>
+              <a:t>~2.5 min. Large difference (0.1, 0.9): outdated pessimistic 0.48, none 0.31, accurate 0.29, outdated middling (y0 0.5) 0.18, outdated optimistic 0.16. Accurate news barely changes failure; stale optimistic halves it; stale pessimistic raises it by half. Small difference (0.3, 0.5) barely moves (0.09–0.15). All mu. Policy framing: the information environment (right to reassure), not sorting depositors by type.</a:t>
             </a:r>
             <a:endParaRPr lang="en-US" dirty="0"/>
           </a:p>
@@ -1110,7 +1108,7 @@
           <a:p>
             <a:r>
               <a:rPr lang="en-US" dirty="0"/>
-              <a:t>~2.5 min. Large difference (0.1, 0.9): outdated pessimistic 0.48, none 0.31, accurate 0.29, outdated middling (y0 0.5) 0.18, outdated optimistic 0.16. Accurate news barely changes failure; stale optimistic halves it; stale pessimistic raises it by half. Small difference (0.3, 0.5) barely moves (0.09–0.15). All mu. Policy framing: the information environment (right to reassure), not sorting depositors by type.</a:t>
+              <a:t>~2 min. Lambda pairs pooled. Uncapped (sigma 2.5) 0.61 -&gt; 0.11; capped at 1% 0.51 -&gt; 0.08; similar sizes (sigma 1) 0.50 -&gt; 0.08. Capping brings failure down to the no-concentration level at every mu. The mu gradient is the same in all three: culture's effect does not depend on concentration. One spoken sentence on what 'capped at 1%' means (no single depositor holds more than 1% of the bank).</a:t>
             </a:r>
             <a:endParaRPr lang="en-US" dirty="0"/>
           </a:p>
@@ -1198,7 +1196,7 @@
           <a:p>
             <a:r>
               <a:rPr lang="en-US" dirty="0"/>
-              <a:t>~2 min. Lambda pairs pooled. Uncapped (sigma 2.5) 0.61 -&gt; 0.11; capped at 1% 0.51 -&gt; 0.08; similar sizes (sigma 1) 0.50 -&gt; 0.08. Capping brings failure down to the no-concentration level at every mu. The mu gradient is the same in all three: culture's effect does not depend on concentration. One spoken sentence on what 'capped at 1%' means (no single depositor holds more than 1% of the bank).</a:t>
+              <a:t>~1.5 min. Ch 1's theory predicts: optimistic news -&gt; individualists run more than collectivists; pessimistic -&gt; collectivists run more. The lines rise through zero as predicted. Large difference reaches about ±0.1; small stays flat. Pre-registered tests: 3 of 4 support, on all three versions of the bank (r1k pooled: G1' +0.033, G4' -0.031, G2a' +0.093, Holm-significant; G3 counts against). Option: make this one sentence and move the figure to backup.</a:t>
             </a:r>
             <a:endParaRPr lang="en-US" dirty="0"/>
           </a:p>
@@ -1286,7 +1284,7 @@
           <a:p>
             <a:r>
               <a:rPr lang="en-US" dirty="0"/>
-              <a:t>~1.5 min. Ch 1's theory predicts: optimistic news -&gt; individualists run more than collectivists; pessimistic -&gt; collectivists run more. The lines rise through zero as predicted. Large difference reaches about ±0.1; small stays flat. Pre-registered tests: 3 of 4 support, on all three versions of the bank (r1k pooled: G1' +0.033, G4' -0.031, G2a' +0.093, Holm-significant; G3 counts against). Option: make this one sentence and move the figure to backup.</a:t>
+              <a:t>~2 min. Next steps from the outline: super-individuals (match how Celsius's largest depositors exit), deposit insurance and the reserve ratio on the fire-sale bank, topology and learning, and the full parameter sweep (stale public signal + no-signal baseline; CARA 0.1; sigma reported).</a:t>
             </a:r>
             <a:endParaRPr lang="en-US" dirty="0"/>
           </a:p>
@@ -1374,7 +1372,7 @@
           <a:p>
             <a:r>
               <a:rPr lang="en-US" dirty="0"/>
-              <a:t>~2 min. Next steps from the outline: super-individuals (match how Celsius's largest depositors exit), deposit insurance and the reserve ratio on the fire-sale bank, topology and learning, and the full parameter sweep (stale public signal + no-signal baseline; CARA 0.1; sigma reported).</a:t>
+              <a:t/>
             </a:r>
             <a:endParaRPr lang="en-US" dirty="0"/>
           </a:p>
@@ -1462,7 +1460,7 @@
           <a:p>
             <a:r>
               <a:rPr lang="en-US" dirty="0"/>
-              <a:t/>
+              <a:t>Both types withdraw less as mu rises; collectivists above individualists at every mixed mu for the two wide gaps; nearly identical at (0.3, 0.5). Technical labels.</a:t>
             </a:r>
             <a:endParaRPr lang="en-US" dirty="0"/>
           </a:p>
@@ -1638,7 +1636,7 @@
           <a:p>
             <a:r>
               <a:rPr lang="en-US" dirty="0"/>
-              <a:t>Both types withdraw less as mu rises; collectivists above individualists at every mixed mu for the two wide gaps; nearly identical at (0.3, 0.5). Technical labels.</a:t>
+              <a:t>r1k pooled: G1' +0.033, G4' -0.031, G2a' +0.093, all Holm-significant; G2b ordering holds. G3 +0.0034 pooled but (0.3, 0.5) wrong-signed in every bank -&gt; counts against. G3c (post hoc, channel-isolated) +0.019, right-signed in every pair. 3 of 4 confirmatory tests support, in all three banks.</a:t>
             </a:r>
             <a:endParaRPr lang="en-US" dirty="0"/>
           </a:p>
@@ -1726,7 +1724,7 @@
           <a:p>
             <a:r>
               <a:rPr lang="en-US" dirty="0"/>
-              <a:t>r1k pooled: G1' +0.033, G4' -0.031, G2a' +0.093, all Holm-significant; G2b ordering holds. G3 +0.0034 pooled but (0.3, 0.5) wrong-signed in every bank -&gt; counts against. G3c (post hoc, channel-isolated) +0.019, right-signed in every pair. 3 of 4 confirmatory tests support, in all three banks.</a:t>
+              <a:t>Theta-blend only: +0.14 (Ch 1's sign). Head-count only: -0.07 (opposite). Both: +0.02. The two channels pull in opposite directions; Ch 1's sign survives, damped by herding.</a:t>
             </a:r>
             <a:endParaRPr lang="en-US" dirty="0"/>
           </a:p>
@@ -1814,7 +1812,7 @@
           <a:p>
             <a:r>
               <a:rPr lang="en-US" dirty="0"/>
-              <a:t>Theta-blend only: +0.14 (Ch 1's sign). Head-count only: -0.07 (opposite). Both: +0.02. The two channels pull in opposite directions; Ch 1's sign survives, damped by herding.</a:t>
+              <a:t>Celsius falls from ~0.86 (D1–D5 band 0.82–0.90) to 0.35 (top 0.1%); the ABM stays at 0.93–1.00. The model does not yet reproduce how large depositors exit. Next: super-individuals.</a:t>
             </a:r>
             <a:endParaRPr lang="en-US" dirty="0"/>
           </a:p>
@@ -1902,7 +1900,7 @@
           <a:p>
             <a:r>
               <a:rPr lang="en-US" dirty="0"/>
-              <a:t>Celsius falls from ~0.86 (D1–D5 band 0.82–0.90) to 0.35 (top 0.1%); the ABM stays at 0.93–1.00. The model does not yet reproduce how large depositors exit. Next: super-individuals.</a:t>
+              <a:t>Vault bank, earlier specification (chapter Fig 1). For questions about Ch 1's P6. This figure is also monotone decreasing: P6 (non-monotonic fragility) was predicted in Ch 1 and found in neither bank; the P6b placebo hump was null too.</a:t>
             </a:r>
             <a:endParaRPr lang="en-US" dirty="0"/>
           </a:p>
@@ -1926,94 +1924,6 @@
             <a:fld id="{F7021451-1387-4CA6-816F-3879F97B5CBC}" type="slidenum">
               <a:rPr lang="en-US"/>
               <a:t>23</a:t>
-            </a:fld>
-            <a:endParaRPr lang="en-US"/>
-          </a:p>
-        </p:txBody>
-      </p:sp>
-    </p:spTree>
-    <p:extLst>
-      <p:ext uri="{BB962C8B-B14F-4D97-AF65-F5344CB8AC3E}">
-        <p14:creationId xmlns:p14="http://schemas.microsoft.com/office/powerpoint/2010/main" val="1024086991"/>
-      </p:ext>
-    </p:extLst>
-  </p:cSld>
-  <p:clrMapOvr>
-    <a:masterClrMapping/>
-  </p:clrMapOvr>
-</p:notes>
-</file>
-
-<file path=ppt/notesSlides/notesSlide24.xml><?xml version="1.0" encoding="utf-8"?>
-<p:notes xmlns:a="http://schemas.openxmlformats.org/drawingml/2006/main" xmlns:r="http://schemas.openxmlformats.org/officeDocument/2006/relationships" xmlns:p="http://schemas.openxmlformats.org/presentationml/2006/main">
-  <p:cSld>
-    <p:spTree>
-      <p:nvGrpSpPr>
-        <p:cNvPr id="1" name=""/>
-        <p:cNvGrpSpPr/>
-        <p:nvPr/>
-      </p:nvGrpSpPr>
-      <p:grpSpPr>
-        <a:xfrm>
-          <a:off x="0" y="0"/>
-          <a:ext cx="0" cy="0"/>
-          <a:chOff x="0" y="0"/>
-          <a:chExt cx="0" cy="0"/>
-        </a:xfrm>
-      </p:grpSpPr>
-      <p:sp>
-        <p:nvSpPr>
-          <p:cNvPr id="2" name="Slide Image Placeholder 1"/>
-          <p:cNvSpPr>
-            <a:spLocks noGrp="1" noRot="1" noChangeAspect="1"/>
-          </p:cNvSpPr>
-          <p:nvPr>
-            <p:ph type="sldImg"/>
-          </p:nvPr>
-        </p:nvSpPr>
-        <p:spPr/>
-      </p:sp>
-      <p:sp>
-        <p:nvSpPr>
-          <p:cNvPr id="3" name="Notes Placeholder 2"/>
-          <p:cNvSpPr>
-            <a:spLocks noGrp="1"/>
-          </p:cNvSpPr>
-          <p:nvPr>
-            <p:ph type="body" idx="1"/>
-          </p:nvPr>
-        </p:nvSpPr>
-        <p:spPr/>
-        <p:txBody>
-          <a:bodyPr/>
-          <a:lstStyle/>
-          <a:p>
-            <a:r>
-              <a:rPr lang="en-US" dirty="0"/>
-              <a:t>Vault bank, earlier specification (chapter Fig 1). For questions about Ch 1's P6. This figure is also monotone decreasing: P6 (non-monotonic fragility) was predicted in Ch 1 and found in neither bank; the P6b placebo hump was null too.</a:t>
-            </a:r>
-            <a:endParaRPr lang="en-US" dirty="0"/>
-          </a:p>
-        </p:txBody>
-      </p:sp>
-      <p:sp>
-        <p:nvSpPr>
-          <p:cNvPr id="4" name="Slide Number Placeholder 3"/>
-          <p:cNvSpPr>
-            <a:spLocks noGrp="1"/>
-          </p:cNvSpPr>
-          <p:nvPr>
-            <p:ph type="sldNum" sz="quarter" idx="10"/>
-          </p:nvPr>
-        </p:nvSpPr>
-        <p:spPr/>
-        <p:txBody>
-          <a:bodyPr/>
-          <a:lstStyle/>
-          <a:p>
-            <a:fld id="{F7021451-1387-4CA6-816F-3879F97B5CBC}" type="slidenum">
-              <a:rPr lang="en-US"/>
-              <a:t>24</a:t>
             </a:fld>
             <a:endParaRPr lang="en-US"/>
           </a:p>
@@ -2254,7 +2164,7 @@
           <a:p>
             <a:r>
               <a:rPr lang="en-US" dirty="0"/>
-              <a:t>~1 min. The public-signal papers answer the question with the Bayesian precision ratio: the weight on y is tau_y over tau_x plus tau_y. Two consequences: the weight is uniform across depositors, so there is no who; and it vanishes as the private signal gets precise. Both are at odds with what panics look like.</a:t>
+              <a:t>~1 min. If asked how the theory answers the third question: the public-signal global games answer it with the Bayesian precision ratio, the weight on y is tau_y over tau_x plus tau_y, the same for everyone and vanishing as private information sharpens; so any sorting between depositors is noise and official communication stops mattering just when depositors pay most attention. (Slide dropped for this audience.) The cases: in each one the public line and private evidence are in open disagreement, the weights do not vanish, and the interesting fact is who moved on which. Chapter 3's stale public signal is the general case.</a:t>
             </a:r>
             <a:endParaRPr lang="en-US" dirty="0"/>
           </a:p>
@@ -2342,7 +2252,7 @@
           <a:p>
             <a:r>
               <a:rPr lang="en-US" dirty="0"/>
-              <a:t>~1 min. Counterexamples. In each case the public line and private evidence are in open disagreement, the weights do not vanish, and the interesting fact is who moved on which. Chapter 3's stale public signal is the general case.</a:t>
+              <a:t>~1 min. Cultural economics gives a source of the weight that satisfies the three things the model needs: heterogeneity, positivity, and stability with respect to the information environment. Individualism is the dimension that maps onto the private-versus-social weighting, and names make it measurable at the individual level.</a:t>
             </a:r>
             <a:endParaRPr lang="en-US" dirty="0"/>
           </a:p>
@@ -2430,7 +2340,7 @@
           <a:p>
             <a:r>
               <a:rPr lang="en-US" dirty="0"/>
-              <a:t>~1 min. Cultural economics gives a source of the weight that satisfies the three things the model needs: heterogeneity, positivity, and stability with respect to the information environment. Individualism is the dimension that maps onto the private-versus-social weighting, and names make it measurable at the individual level.</a:t>
+              <a:t>~1 min. Where the three chapters sit on the through-line. Then the ladder as the recap, then the model.</a:t>
             </a:r>
             <a:endParaRPr lang="en-US" dirty="0"/>
           </a:p>
@@ -2518,7 +2428,7 @@
           <a:p>
             <a:r>
               <a:rPr lang="en-US" dirty="0"/>
-              <a:t>~1 min. Where the three chapters sit on the through-line. Then the ladder as the recap, then the model.</a:t>
+              <a:t>~1 min. Why Chapter 3 is a simulation. Chapter 1 relaxed the Bayesian precision answer and kept the rest of Goldstein-Pauzner so the threshold equilibrium survives. The ABM varies the signal, location and interpretation together, plus the incentive side, which no closed-form model could carry; that is what lets the channel decomposition (lambda on the neighbour blend vs the news blend) be measured at all.</a:t>
             </a:r>
             <a:endParaRPr lang="en-US" dirty="0"/>
           </a:p>
@@ -2606,7 +2516,7 @@
           <a:p>
             <a:r>
               <a:rPr lang="en-US" dirty="0"/>
-              <a:t>~1 min. Why Chapter 3 is a simulation. Chapter 1 relaxed the Bayesian precision answer and kept the rest of Goldstein-Pauzner so the threshold equilibrium survives. The ABM varies the signal, location and interpretation together, plus the incentive side, which no closed-form model could carry; that is what lets the channel decomposition (lambda on the neighbour blend vs the news blend) be measured at all.</a:t>
+              <a:t>~1 min. The ladder: variation in the signal (Goldstein-Pauzner: same signal technology, different draws, which selects the equilibrium), variation in location (who hears it, from whom, when: Kelly-O Grada, Iyer-Puri, Cookson et al.), variation in interpretation (the same two signals, different dispositional weights; culture is the stable source). Rung 1 orders depositors by luck, rung 2 by position, rung 3 by who they are, and only rung 3 predicts that the order flips with the sign of the public error. Nearest cousins to acknowledge if asked: Izmalkov-Yildiz 2010 (heterogeneous priors), He-Manela 2016 (information acquisition).</a:t>
             </a:r>
             <a:endParaRPr lang="en-US" dirty="0"/>
           </a:p>
@@ -3539,7 +3449,7 @@
                   <a:schemeClr val="tx2"/>
                 </a:solidFill>
               </a:rPr>
-              <a:t>The ladder: signal, location, interpretation</a:t>
+              <a:t>The model in one picture</a:t>
             </a:r>
             <a:endParaRPr lang="en-US" sz="2400" dirty="0"/>
           </a:p>
@@ -3547,7 +3457,7 @@
       </p:sp>
       <p:pic>
         <p:nvPicPr>
-          <p:cNvPr id="3" name="ladder" descr="Three panels. Signal: one bank fundamental sends a noisy private signal to each depositor, who line up from run to stay. Location: a network in which the signal has reached some depositors from a first hearer and not others. Interpretation: the same private and public signals reach an individualist, who leans on the private signal, and a collectivist, who leans on the public one; culture sets the weight.">    </p:cNvPr>
+          <p:cNvPr id="3" name="odd" descr="Model overview: depositors on a social network with a bank; each run draws fundamentals and signals, a shock hits, then depositors observe neighbours and news, form beliefs, and decide whether to withdraw, tick by tick.">    </p:cNvPr>
           <p:cNvPicPr>
             <a:picLocks noChangeAspect="1"/>
           </p:cNvPicPr>
@@ -3561,8 +3471,8 @@
         </p:blipFill>
         <p:spPr>
           <a:xfrm>
-            <a:off x="653339" y="1097280"/>
-            <a:ext cx="7837322" cy="2743200"/>
+            <a:off x="457200" y="1051560"/>
+            <a:ext cx="3467633" cy="3520440"/>
           </a:xfrm>
           <a:prstGeom prst="rect">
             <a:avLst/>
@@ -3571,26 +3481,26 @@
       </p:pic>
       <p:sp>
         <p:nvSpPr>
-          <p:cNvPr id="4" name="ladder-note"/>
+          <p:cNvPr id="4" name="stat-depositors on a smal"/>
           <p:cNvSpPr/>
           <p:nvPr/>
         </p:nvSpPr>
         <p:spPr>
           <a:xfrm>
-            <a:off x="457200" y="3977640"/>
-            <a:ext cx="8229600" cy="566928"/>
+            <a:off x="4244873" y="1051560"/>
+            <a:ext cx="2152383" cy="960120"/>
           </a:xfrm>
           <a:prstGeom prst="roundRect">
             <a:avLst>
-              <a:gd name="adj" fmla="val 12903"/>
+              <a:gd name="adj" fmla="val 7619"/>
             </a:avLst>
           </a:prstGeom>
           <a:solidFill>
-            <a:schemeClr val="accent4"/>
+            <a:schemeClr val="bg2"/>
           </a:solidFill>
           <a:ln w="12700">
             <a:solidFill>
-              <a:schemeClr val="accent4"/>
+              <a:schemeClr val="bg2"/>
             </a:solidFill>
             <a:prstDash val="solid"/>
           </a:ln>
@@ -3598,14 +3508,14 @@
       </p:sp>
       <p:sp>
         <p:nvSpPr>
-          <p:cNvPr id="5" name="ladder-text"/>
+          <p:cNvPr id="5" name="stat-big"/>
           <p:cNvSpPr txBox="1"/>
           <p:nvPr/>
         </p:nvSpPr>
         <p:spPr>
           <a:xfrm>
-            <a:off x="594360" y="4005072"/>
-            <a:ext cx="7955280" cy="512064"/>
+            <a:off x="4382033" y="1124712"/>
+            <a:ext cx="1878063" cy="457200"/>
           </a:xfrm>
           <a:prstGeom prst="rect">
             <a:avLst/>
@@ -3621,36 +3531,453 @@
               <a:buNone/>
             </a:pPr>
             <a:r>
-              <a:rPr lang="en-US" sz="1200" dirty="0">
+              <a:rPr lang="en-US" sz="2600" b="1" dirty="0">
+                <a:solidFill>
+                  <a:schemeClr val="accent1"/>
+                </a:solidFill>
+                <a:latin typeface="Cambria" pitchFamily="34" charset="0"/>
+                <a:ea typeface="Cambria" pitchFamily="34" charset="-122"/>
+                <a:cs typeface="Cambria" pitchFamily="34" charset="-120"/>
+              </a:rPr>
+              <a:t>1,000</a:t>
+            </a:r>
+            <a:endParaRPr lang="en-US" sz="2600" dirty="0"/>
+          </a:p>
+        </p:txBody>
+      </p:sp>
+      <p:sp>
+        <p:nvSpPr>
+          <p:cNvPr id="6" name="stat-label"/>
+          <p:cNvSpPr txBox="1"/>
+          <p:nvPr/>
+        </p:nvSpPr>
+        <p:spPr>
+          <a:xfrm>
+            <a:off x="4382033" y="1600200"/>
+            <a:ext cx="1878063" cy="356616"/>
+          </a:xfrm>
+          <a:prstGeom prst="rect">
+            <a:avLst/>
+          </a:prstGeom>
+          <a:noFill/>
+          <a:ln/>
+        </p:spPr>
+        <p:txBody>
+          <a:bodyPr wrap="square" lIns="0" tIns="0" rIns="0" bIns="0" rtlCol="0" anchor="t"/>
+          <a:lstStyle/>
+          <a:p>
+            <a:pPr indent="0" marL="0">
+              <a:buNone/>
+            </a:pPr>
+            <a:r>
+              <a:rPr lang="en-US" sz="1100" dirty="0">
                 <a:solidFill>
                   <a:schemeClr val="accent3"/>
                 </a:solidFill>
               </a:rPr>
-              <a:t>Rungs 1 and 2 are the literature. </a:t>
-            </a:r>
+              <a:t>depositors on a small-world network, one bank</a:t>
+            </a:r>
+            <a:endParaRPr lang="en-US" sz="1100" dirty="0"/>
+          </a:p>
+        </p:txBody>
+      </p:sp>
+      <p:sp>
+        <p:nvSpPr>
+          <p:cNvPr id="7" name="stat-cap on any one depos"/>
+          <p:cNvSpPr/>
+          <p:nvPr/>
+        </p:nvSpPr>
+        <p:spPr>
+          <a:xfrm>
+            <a:off x="6534417" y="1051560"/>
+            <a:ext cx="2152383" cy="960120"/>
+          </a:xfrm>
+          <a:prstGeom prst="roundRect">
+            <a:avLst>
+              <a:gd name="adj" fmla="val 7619"/>
+            </a:avLst>
+          </a:prstGeom>
+          <a:solidFill>
+            <a:schemeClr val="bg2"/>
+          </a:solidFill>
+          <a:ln w="12700">
+            <a:solidFill>
+              <a:schemeClr val="bg2"/>
+            </a:solidFill>
+            <a:prstDash val="solid"/>
+          </a:ln>
+        </p:spPr>
+      </p:sp>
+      <p:sp>
+        <p:nvSpPr>
+          <p:cNvPr id="8" name="stat-big"/>
+          <p:cNvSpPr txBox="1"/>
+          <p:nvPr/>
+        </p:nvSpPr>
+        <p:spPr>
+          <a:xfrm>
+            <a:off x="6671577" y="1124712"/>
+            <a:ext cx="1878063" cy="457200"/>
+          </a:xfrm>
+          <a:prstGeom prst="rect">
+            <a:avLst/>
+          </a:prstGeom>
+          <a:noFill/>
+          <a:ln/>
+        </p:spPr>
+        <p:txBody>
+          <a:bodyPr wrap="square" lIns="0" tIns="0" rIns="0" bIns="0" rtlCol="0" anchor="ctr"/>
+          <a:lstStyle/>
+          <a:p>
             <a:pPr indent="0" marL="0">
               <a:buNone/>
             </a:pPr>
             <a:r>
-              <a:rPr lang="en-US" sz="1200" b="1" dirty="0">
+              <a:rPr lang="en-US" sz="2600" b="1" dirty="0">
                 <a:solidFill>
                   <a:schemeClr val="accent1"/>
                 </a:solidFill>
-              </a:rPr>
-              <a:t>Rung 3 is this dissertation: </a:t>
-            </a:r>
+                <a:latin typeface="Cambria" pitchFamily="34" charset="0"/>
+                <a:ea typeface="Cambria" pitchFamily="34" charset="-122"/>
+                <a:cs typeface="Cambria" pitchFamily="34" charset="-120"/>
+              </a:rPr>
+              <a:t>1%</a:t>
+            </a:r>
+            <a:endParaRPr lang="en-US" sz="2600" dirty="0"/>
+          </a:p>
+        </p:txBody>
+      </p:sp>
+      <p:sp>
+        <p:nvSpPr>
+          <p:cNvPr id="9" name="stat-label"/>
+          <p:cNvSpPr txBox="1"/>
+          <p:nvPr/>
+        </p:nvSpPr>
+        <p:spPr>
+          <a:xfrm>
+            <a:off x="6671577" y="1600200"/>
+            <a:ext cx="1878063" cy="356616"/>
+          </a:xfrm>
+          <a:prstGeom prst="rect">
+            <a:avLst/>
+          </a:prstGeom>
+          <a:noFill/>
+          <a:ln/>
+        </p:spPr>
+        <p:txBody>
+          <a:bodyPr wrap="square" lIns="0" tIns="0" rIns="0" bIns="0" rtlCol="0" anchor="t"/>
+          <a:lstStyle/>
+          <a:p>
             <a:pPr indent="0" marL="0">
               <a:buNone/>
             </a:pPr>
             <a:r>
-              <a:rPr lang="en-US" sz="1200" dirty="0">
+              <a:rPr lang="en-US" sz="1100" dirty="0">
+                <a:solidFill>
+                  <a:schemeClr val="accent3"/>
+                </a:solidFill>
+              </a:rPr>
+              <a:t>cap on any one deposit; sizes log-normal (σ 2.5) below it</a:t>
+            </a:r>
+            <a:endParaRPr lang="en-US" sz="1100" dirty="0"/>
+          </a:p>
+        </p:txBody>
+      </p:sp>
+      <p:sp>
+        <p:nvSpPr>
+          <p:cNvPr id="10" name="stat-risk aversion; parti"/>
+          <p:cNvSpPr/>
+          <p:nvPr/>
+        </p:nvSpPr>
+        <p:spPr>
+          <a:xfrm>
+            <a:off x="4244873" y="2148840"/>
+            <a:ext cx="2152383" cy="960120"/>
+          </a:xfrm>
+          <a:prstGeom prst="roundRect">
+            <a:avLst>
+              <a:gd name="adj" fmla="val 7619"/>
+            </a:avLst>
+          </a:prstGeom>
+          <a:solidFill>
+            <a:schemeClr val="bg2"/>
+          </a:solidFill>
+          <a:ln w="12700">
+            <a:solidFill>
+              <a:schemeClr val="bg2"/>
+            </a:solidFill>
+            <a:prstDash val="solid"/>
+          </a:ln>
+        </p:spPr>
+      </p:sp>
+      <p:sp>
+        <p:nvSpPr>
+          <p:cNvPr id="11" name="stat-big"/>
+          <p:cNvSpPr txBox="1"/>
+          <p:nvPr/>
+        </p:nvSpPr>
+        <p:spPr>
+          <a:xfrm>
+            <a:off x="4382033" y="2221992"/>
+            <a:ext cx="1878063" cy="457200"/>
+          </a:xfrm>
+          <a:prstGeom prst="rect">
+            <a:avLst/>
+          </a:prstGeom>
+          <a:noFill/>
+          <a:ln/>
+        </p:spPr>
+        <p:txBody>
+          <a:bodyPr wrap="square" lIns="0" tIns="0" rIns="0" bIns="0" rtlCol="0" anchor="ctr"/>
+          <a:lstStyle/>
+          <a:p>
+            <a:pPr indent="0" marL="0">
+              <a:buNone/>
+            </a:pPr>
+            <a:r>
+              <a:rPr lang="en-US" sz="2200" b="1" dirty="0">
+                <a:solidFill>
+                  <a:schemeClr val="accent1"/>
+                </a:solidFill>
+                <a:latin typeface="Cambria" pitchFamily="34" charset="0"/>
+                <a:ea typeface="Cambria" pitchFamily="34" charset="-122"/>
+                <a:cs typeface="Cambria" pitchFamily="34" charset="-120"/>
+              </a:rPr>
+              <a:t>CARA 0.1</a:t>
+            </a:r>
+            <a:endParaRPr lang="en-US" sz="2200" dirty="0"/>
+          </a:p>
+        </p:txBody>
+      </p:sp>
+      <p:sp>
+        <p:nvSpPr>
+          <p:cNvPr id="12" name="stat-label"/>
+          <p:cNvSpPr txBox="1"/>
+          <p:nvPr/>
+        </p:nvSpPr>
+        <p:spPr>
+          <a:xfrm>
+            <a:off x="4382033" y="2697480"/>
+            <a:ext cx="1878063" cy="356616"/>
+          </a:xfrm>
+          <a:prstGeom prst="rect">
+            <a:avLst/>
+          </a:prstGeom>
+          <a:noFill/>
+          <a:ln/>
+        </p:spPr>
+        <p:txBody>
+          <a:bodyPr wrap="square" lIns="0" tIns="0" rIns="0" bIns="0" rtlCol="0" anchor="t"/>
+          <a:lstStyle/>
+          <a:p>
+            <a:pPr indent="0" marL="0">
+              <a:buNone/>
+            </a:pPr>
+            <a:r>
+              <a:rPr lang="en-US" sz="1100" dirty="0">
+                <a:solidFill>
+                  <a:schemeClr val="accent3"/>
+                </a:solidFill>
+              </a:rPr>
+              <a:t>risk aversion; partial withdrawals allowed</a:t>
+            </a:r>
+            <a:endParaRPr lang="en-US" sz="1100" dirty="0"/>
+          </a:p>
+        </p:txBody>
+      </p:sp>
+      <p:sp>
+        <p:nvSpPr>
+          <p:cNvPr id="13" name="stat-runs per cell: 25 in"/>
+          <p:cNvSpPr/>
+          <p:nvPr/>
+        </p:nvSpPr>
+        <p:spPr>
+          <a:xfrm>
+            <a:off x="6534417" y="2148840"/>
+            <a:ext cx="2152383" cy="960120"/>
+          </a:xfrm>
+          <a:prstGeom prst="roundRect">
+            <a:avLst>
+              <a:gd name="adj" fmla="val 7619"/>
+            </a:avLst>
+          </a:prstGeom>
+          <a:solidFill>
+            <a:schemeClr val="bg2"/>
+          </a:solidFill>
+          <a:ln w="12700">
+            <a:solidFill>
+              <a:schemeClr val="bg2"/>
+            </a:solidFill>
+            <a:prstDash val="solid"/>
+          </a:ln>
+        </p:spPr>
+      </p:sp>
+      <p:sp>
+        <p:nvSpPr>
+          <p:cNvPr id="14" name="stat-big"/>
+          <p:cNvSpPr txBox="1"/>
+          <p:nvPr/>
+        </p:nvSpPr>
+        <p:spPr>
+          <a:xfrm>
+            <a:off x="6671577" y="2221992"/>
+            <a:ext cx="1878063" cy="457200"/>
+          </a:xfrm>
+          <a:prstGeom prst="rect">
+            <a:avLst/>
+          </a:prstGeom>
+          <a:noFill/>
+          <a:ln/>
+        </p:spPr>
+        <p:txBody>
+          <a:bodyPr wrap="square" lIns="0" tIns="0" rIns="0" bIns="0" rtlCol="0" anchor="ctr"/>
+          <a:lstStyle/>
+          <a:p>
+            <a:pPr indent="0" marL="0">
+              <a:buNone/>
+            </a:pPr>
+            <a:r>
+              <a:rPr lang="en-US" sz="2600" b="1" dirty="0">
+                <a:solidFill>
+                  <a:schemeClr val="accent1"/>
+                </a:solidFill>
+                <a:latin typeface="Cambria" pitchFamily="34" charset="0"/>
+                <a:ea typeface="Cambria" pitchFamily="34" charset="-122"/>
+                <a:cs typeface="Cambria" pitchFamily="34" charset="-120"/>
+              </a:rPr>
+              <a:t>250</a:t>
+            </a:r>
+            <a:endParaRPr lang="en-US" sz="2600" dirty="0"/>
+          </a:p>
+        </p:txBody>
+      </p:sp>
+      <p:sp>
+        <p:nvSpPr>
+          <p:cNvPr id="15" name="stat-label"/>
+          <p:cNvSpPr txBox="1"/>
+          <p:nvPr/>
+        </p:nvSpPr>
+        <p:spPr>
+          <a:xfrm>
+            <a:off x="6671577" y="2697480"/>
+            <a:ext cx="1878063" cy="356616"/>
+          </a:xfrm>
+          <a:prstGeom prst="rect">
+            <a:avLst/>
+          </a:prstGeom>
+          <a:noFill/>
+          <a:ln/>
+        </p:spPr>
+        <p:txBody>
+          <a:bodyPr wrap="square" lIns="0" tIns="0" rIns="0" bIns="0" rtlCol="0" anchor="t"/>
+          <a:lstStyle/>
+          <a:p>
+            <a:pPr indent="0" marL="0">
+              <a:buNone/>
+            </a:pPr>
+            <a:r>
+              <a:rPr lang="en-US" sz="1100" dirty="0">
+                <a:solidFill>
+                  <a:schemeClr val="accent3"/>
+                </a:solidFill>
+              </a:rPr>
+              <a:t>runs per cell: 25 initialisations × 10 draws</a:t>
+            </a:r>
+            <a:endParaRPr lang="en-US" sz="1100" dirty="0"/>
+          </a:p>
+        </p:txBody>
+      </p:sp>
+      <p:sp>
+        <p:nvSpPr>
+          <p:cNvPr id="16" name="bullets"/>
+          <p:cNvSpPr txBox="1"/>
+          <p:nvPr/>
+        </p:nvSpPr>
+        <p:spPr>
+          <a:xfrm>
+            <a:off x="4244873" y="3200400"/>
+            <a:ext cx="4441927" cy="1371600"/>
+          </a:xfrm>
+          <a:prstGeom prst="rect">
+            <a:avLst/>
+          </a:prstGeom>
+          <a:noFill/>
+          <a:ln/>
+        </p:spPr>
+        <p:txBody>
+          <a:bodyPr wrap="square" lIns="0" tIns="0" rIns="0" bIns="0" rtlCol="0" anchor="t"/>
+          <a:lstStyle/>
+          <a:p>
+            <a:pPr marL="177800" indent="-177800">
+              <a:spcAft>
+                <a:spcPts val="400"/>
+              </a:spcAft>
+              <a:buSzPct val="100000"/>
+              <a:buChar char="•"/>
+            </a:pPr>
+            <a:r>
+              <a:rPr lang="en-US" sz="1150" dirty="0">
                 <a:solidFill>
                   <a:schemeClr val="tx1"/>
                 </a:solidFill>
               </a:rPr>
-              <a:t>the only one that orders depositors by a trait, and reverses when the public line is too optimistic or too pessimistic.</a:t>
-            </a:r>
-            <a:endParaRPr lang="en-US" sz="1200" dirty="0"/>
+              <a:t>One bank that sells its long asset at a discount when cash runs short (a fire-sale bank)</a:t>
+            </a:r>
+            <a:endParaRPr lang="en-US" sz="1150" dirty="0"/>
+          </a:p>
+          <a:p>
+            <a:pPr marL="177800" indent="-177800">
+              <a:spcAft>
+                <a:spcPts val="400"/>
+              </a:spcAft>
+              <a:buSzPct val="100000"/>
+              <a:buChar char="•"/>
+            </a:pPr>
+            <a:r>
+              <a:rPr lang="en-US" sz="1150" dirty="0">
+                <a:solidFill>
+                  <a:schemeClr val="tx1"/>
+                </a:solidFill>
+              </a:rPr>
+              <a:t>Each tick a depositor sees neighbours’ withdrawals and the public news, blends them with a private signal, and withdraws if that pays</a:t>
+            </a:r>
+            <a:endParaRPr lang="en-US" sz="1150" dirty="0"/>
+          </a:p>
+          <a:p>
+            <a:pPr marL="177800" indent="-177800">
+              <a:spcAft>
+                <a:spcPts val="400"/>
+              </a:spcAft>
+              <a:buSzPct val="100000"/>
+              <a:buChar char="•"/>
+            </a:pPr>
+            <a:r>
+              <a:rPr lang="en-US" sz="1150" dirty="0">
+                <a:solidFill>
+                  <a:schemeClr val="tx1"/>
+                </a:solidFill>
+              </a:rPr>
+              <a:t>A public signal can be absent, accurate, or outdated</a:t>
+            </a:r>
+            <a:endParaRPr lang="en-US" sz="1150" dirty="0"/>
+          </a:p>
+          <a:p>
+            <a:pPr marL="177800" indent="-177800">
+              <a:spcAft>
+                <a:spcPts val="400"/>
+              </a:spcAft>
+              <a:buSzPct val="100000"/>
+              <a:buChar char="•"/>
+            </a:pPr>
+            <a:r>
+              <a:rPr lang="en-US" sz="1150" dirty="0">
+                <a:solidFill>
+                  <a:schemeClr val="tx1"/>
+                </a:solidFill>
+              </a:rPr>
+              <a:t>Outcomes: D = individualists’ minus collectivists’ withdrawal share (those not hit by the shock); P(fail) = share of runs that fail</a:t>
+            </a:r>
+            <a:endParaRPr lang="en-US" sz="1150" dirty="0"/>
           </a:p>
         </p:txBody>
       </p:sp>
@@ -3756,50 +4083,26 @@
                   <a:schemeClr val="tx2"/>
                 </a:solidFill>
               </a:rPr>
-              <a:t>The model in one picture</a:t>
+              <a:t>Individualists and collectivists: who listens to whom</a:t>
             </a:r>
             <a:endParaRPr lang="en-US" sz="2400" dirty="0"/>
           </a:p>
         </p:txBody>
       </p:sp>
-      <p:pic>
-        <p:nvPicPr>
-          <p:cNvPr id="3" name="odd" descr="Model overview: depositors on a social network with a bank; each run draws fundamentals and signals, a shock hits, then depositors observe neighbours and news, form beliefs, and decide whether to withdraw, tick by tick.">    </p:cNvPr>
-          <p:cNvPicPr>
-            <a:picLocks noChangeAspect="1"/>
-          </p:cNvPicPr>
-          <p:nvPr/>
-        </p:nvPicPr>
-        <p:blipFill>
-          <a:blip r:embed="rId1"/>
-          <a:stretch>
-            <a:fillRect/>
-          </a:stretch>
-        </p:blipFill>
+      <p:sp>
+        <p:nvSpPr>
+          <p:cNvPr id="3" name="type-Individualists"/>
+          <p:cNvSpPr/>
+          <p:nvPr/>
+        </p:nvSpPr>
         <p:spPr>
           <a:xfrm>
             <a:off x="457200" y="1051560"/>
-            <a:ext cx="3467633" cy="3520440"/>
-          </a:xfrm>
-          <a:prstGeom prst="rect">
-            <a:avLst/>
-          </a:prstGeom>
-        </p:spPr>
-      </p:pic>
-      <p:sp>
-        <p:nvSpPr>
-          <p:cNvPr id="4" name="stat-depositors on a smal"/>
-          <p:cNvSpPr/>
-          <p:nvPr/>
-        </p:nvSpPr>
-        <p:spPr>
-          <a:xfrm>
-            <a:off x="4244873" y="1051560"/>
-            <a:ext cx="2152383" cy="960120"/>
+            <a:ext cx="4023360" cy="2377440"/>
           </a:xfrm>
           <a:prstGeom prst="roundRect">
             <a:avLst>
-              <a:gd name="adj" fmla="val 7619"/>
+              <a:gd name="adj" fmla="val 3077"/>
             </a:avLst>
           </a:prstGeom>
           <a:solidFill>
@@ -3815,14 +4118,14 @@
       </p:sp>
       <p:sp>
         <p:nvSpPr>
-          <p:cNvPr id="5" name="stat-big"/>
+          <p:cNvPr id="4" name="type-head"/>
           <p:cNvSpPr txBox="1"/>
           <p:nvPr/>
         </p:nvSpPr>
         <p:spPr>
           <a:xfrm>
-            <a:off x="4382033" y="1124712"/>
-            <a:ext cx="1878063" cy="457200"/>
+            <a:off x="640080" y="1143000"/>
+            <a:ext cx="3657600" cy="365760"/>
           </a:xfrm>
           <a:prstGeom prst="rect">
             <a:avLst/>
@@ -3838,30 +4141,27 @@
               <a:buNone/>
             </a:pPr>
             <a:r>
-              <a:rPr lang="en-US" sz="2600" b="1" dirty="0">
-                <a:solidFill>
-                  <a:schemeClr val="accent1"/>
-                </a:solidFill>
-                <a:latin typeface="Cambria" pitchFamily="34" charset="0"/>
-                <a:ea typeface="Cambria" pitchFamily="34" charset="-122"/>
-                <a:cs typeface="Cambria" pitchFamily="34" charset="-120"/>
-              </a:rPr>
-              <a:t>1,000</a:t>
-            </a:r>
-            <a:endParaRPr lang="en-US" sz="2600" dirty="0"/>
-          </a:p>
-        </p:txBody>
-      </p:sp>
-      <p:sp>
-        <p:nvSpPr>
-          <p:cNvPr id="6" name="stat-label"/>
+              <a:rPr lang="en-US" sz="1800" b="1" dirty="0">
+                <a:solidFill>
+                  <a:srgbClr val="EB6834"/>
+                </a:solidFill>
+              </a:rPr>
+              <a:t>Individualists</a:t>
+            </a:r>
+            <a:endParaRPr lang="en-US" sz="1800" dirty="0"/>
+          </a:p>
+        </p:txBody>
+      </p:sp>
+      <p:sp>
+        <p:nvSpPr>
+          <p:cNvPr id="5" name="bullets"/>
           <p:cNvSpPr txBox="1"/>
           <p:nvPr/>
         </p:nvSpPr>
         <p:spPr>
           <a:xfrm>
-            <a:off x="4382033" y="1600200"/>
-            <a:ext cx="1878063" cy="356616"/>
+            <a:off x="640080" y="1600200"/>
+            <a:ext cx="3657600" cy="1737360"/>
           </a:xfrm>
           <a:prstGeom prst="rect">
             <a:avLst/>
@@ -3873,35 +4173,93 @@
           <a:bodyPr wrap="square" lIns="0" tIns="0" rIns="0" bIns="0" rtlCol="0" anchor="t"/>
           <a:lstStyle/>
           <a:p>
-            <a:pPr indent="0" marL="0">
-              <a:buNone/>
-            </a:pPr>
-            <a:r>
-              <a:rPr lang="en-US" sz="1100" dirty="0">
-                <a:solidFill>
-                  <a:schemeClr val="accent3"/>
-                </a:solidFill>
-              </a:rPr>
-              <a:t>depositors on a small-world network, one bank</a:t>
-            </a:r>
-            <a:endParaRPr lang="en-US" sz="1100" dirty="0"/>
-          </a:p>
-        </p:txBody>
-      </p:sp>
-      <p:sp>
-        <p:nvSpPr>
-          <p:cNvPr id="7" name="stat-cap on any one depos"/>
+            <a:pPr marL="177800" indent="-177800">
+              <a:spcAft>
+                <a:spcPts val="500"/>
+              </a:spcAft>
+              <a:buSzPct val="100000"/>
+              <a:buChar char="•"/>
+            </a:pPr>
+            <a:r>
+              <a:rPr lang="en-US" sz="1300" dirty="0">
+                <a:solidFill>
+                  <a:schemeClr val="tx1"/>
+                </a:solidFill>
+              </a:rPr>
+              <a:t>Trust their own information about the bank</a:t>
+            </a:r>
+            <a:endParaRPr lang="en-US" sz="1300" dirty="0"/>
+          </a:p>
+          <a:p>
+            <a:pPr marL="177800" indent="-177800">
+              <a:spcAft>
+                <a:spcPts val="500"/>
+              </a:spcAft>
+              <a:buSzPct val="100000"/>
+              <a:buChar char="•"/>
+            </a:pPr>
+            <a:r>
+              <a:rPr lang="en-US" sz="1300" dirty="0">
+                <a:solidFill>
+                  <a:schemeClr val="tx1"/>
+                </a:solidFill>
+              </a:rPr>
+              <a:t>Put little weight on what neighbours do or on public news</a:t>
+            </a:r>
+            <a:endParaRPr lang="en-US" sz="1300" dirty="0"/>
+          </a:p>
+          <a:p>
+            <a:pPr marL="177800" indent="-177800">
+              <a:spcAft>
+                <a:spcPts val="500"/>
+              </a:spcAft>
+              <a:buSzPct val="100000"/>
+              <a:buChar char="•"/>
+            </a:pPr>
+            <a:r>
+              <a:rPr lang="en-US" sz="1300" dirty="0">
+                <a:solidFill>
+                  <a:schemeClr val="tx1"/>
+                </a:solidFill>
+              </a:rPr>
+              <a:t>Weight on the social side: λ = 0.1 to 0.3</a:t>
+            </a:r>
+            <a:endParaRPr lang="en-US" sz="1300" dirty="0"/>
+          </a:p>
+          <a:p>
+            <a:pPr marL="177800" indent="-177800">
+              <a:spcAft>
+                <a:spcPts val="500"/>
+              </a:spcAft>
+              <a:buSzPct val="100000"/>
+              <a:buChar char="•"/>
+            </a:pPr>
+            <a:r>
+              <a:rPr lang="en-US" sz="1300" dirty="0">
+                <a:solidFill>
+                  <a:schemeClr val="tx1"/>
+                </a:solidFill>
+              </a:rPr>
+              <a:t>Act on what they see themselves</a:t>
+            </a:r>
+            <a:endParaRPr lang="en-US" sz="1300" dirty="0"/>
+          </a:p>
+        </p:txBody>
+      </p:sp>
+      <p:sp>
+        <p:nvSpPr>
+          <p:cNvPr id="6" name="type-Collectivists"/>
           <p:cNvSpPr/>
           <p:nvPr/>
         </p:nvSpPr>
         <p:spPr>
           <a:xfrm>
-            <a:off x="6534417" y="1051560"/>
-            <a:ext cx="2152383" cy="960120"/>
+            <a:off x="4663440" y="1051560"/>
+            <a:ext cx="4023360" cy="2377440"/>
           </a:xfrm>
           <a:prstGeom prst="roundRect">
             <a:avLst>
-              <a:gd name="adj" fmla="val 7619"/>
+              <a:gd name="adj" fmla="val 3077"/>
             </a:avLst>
           </a:prstGeom>
           <a:solidFill>
@@ -3917,14 +4275,14 @@
       </p:sp>
       <p:sp>
         <p:nvSpPr>
-          <p:cNvPr id="8" name="stat-big"/>
+          <p:cNvPr id="7" name="type-head"/>
           <p:cNvSpPr txBox="1"/>
           <p:nvPr/>
         </p:nvSpPr>
         <p:spPr>
           <a:xfrm>
-            <a:off x="6671577" y="1124712"/>
-            <a:ext cx="1878063" cy="457200"/>
+            <a:off x="4846320" y="1143000"/>
+            <a:ext cx="3657600" cy="365760"/>
           </a:xfrm>
           <a:prstGeom prst="rect">
             <a:avLst/>
@@ -3940,39 +4298,232 @@
               <a:buNone/>
             </a:pPr>
             <a:r>
-              <a:rPr lang="en-US" sz="2600" b="1" dirty="0">
-                <a:solidFill>
-                  <a:schemeClr val="accent1"/>
+              <a:rPr lang="en-US" sz="1800" b="1" dirty="0">
+                <a:solidFill>
+                  <a:srgbClr val="2A78D6"/>
+                </a:solidFill>
+              </a:rPr>
+              <a:t>Collectivists</a:t>
+            </a:r>
+            <a:endParaRPr lang="en-US" sz="1800" dirty="0"/>
+          </a:p>
+        </p:txBody>
+      </p:sp>
+      <p:sp>
+        <p:nvSpPr>
+          <p:cNvPr id="8" name="bullets"/>
+          <p:cNvSpPr txBox="1"/>
+          <p:nvPr/>
+        </p:nvSpPr>
+        <p:spPr>
+          <a:xfrm>
+            <a:off x="4846320" y="1600200"/>
+            <a:ext cx="3657600" cy="1737360"/>
+          </a:xfrm>
+          <a:prstGeom prst="rect">
+            <a:avLst/>
+          </a:prstGeom>
+          <a:noFill/>
+          <a:ln/>
+        </p:spPr>
+        <p:txBody>
+          <a:bodyPr wrap="square" lIns="0" tIns="0" rIns="0" bIns="0" rtlCol="0" anchor="t"/>
+          <a:lstStyle/>
+          <a:p>
+            <a:pPr marL="177800" indent="-177800">
+              <a:spcAft>
+                <a:spcPts val="500"/>
+              </a:spcAft>
+              <a:buSzPct val="100000"/>
+              <a:buChar char="•"/>
+            </a:pPr>
+            <a:r>
+              <a:rPr lang="en-US" sz="1300" dirty="0">
+                <a:solidFill>
+                  <a:schemeClr val="tx1"/>
+                </a:solidFill>
+              </a:rPr>
+              <a:t>Watch what neighbours do and what the public news says</a:t>
+            </a:r>
+            <a:endParaRPr lang="en-US" sz="1300" dirty="0"/>
+          </a:p>
+          <a:p>
+            <a:pPr marL="177800" indent="-177800">
+              <a:spcAft>
+                <a:spcPts val="500"/>
+              </a:spcAft>
+              <a:buSzPct val="100000"/>
+              <a:buChar char="•"/>
+            </a:pPr>
+            <a:r>
+              <a:rPr lang="en-US" sz="1300" dirty="0">
+                <a:solidFill>
+                  <a:schemeClr val="tx1"/>
+                </a:solidFill>
+              </a:rPr>
+              <a:t>Put little weight on their own information</a:t>
+            </a:r>
+            <a:endParaRPr lang="en-US" sz="1300" dirty="0"/>
+          </a:p>
+          <a:p>
+            <a:pPr marL="177800" indent="-177800">
+              <a:spcAft>
+                <a:spcPts val="500"/>
+              </a:spcAft>
+              <a:buSzPct val="100000"/>
+              <a:buChar char="•"/>
+            </a:pPr>
+            <a:r>
+              <a:rPr lang="en-US" sz="1300" dirty="0">
+                <a:solidFill>
+                  <a:schemeClr val="tx1"/>
+                </a:solidFill>
+              </a:rPr>
+              <a:t>Weight on the social side: λ = 0.5 to 0.9</a:t>
+            </a:r>
+            <a:endParaRPr lang="en-US" sz="1300" dirty="0"/>
+          </a:p>
+          <a:p>
+            <a:pPr marL="177800" indent="-177800">
+              <a:spcAft>
+                <a:spcPts val="500"/>
+              </a:spcAft>
+              <a:buSzPct val="100000"/>
+              <a:buChar char="•"/>
+            </a:pPr>
+            <a:r>
+              <a:rPr lang="en-US" sz="1300" dirty="0">
+                <a:solidFill>
+                  <a:schemeClr val="tx1"/>
+                </a:solidFill>
+              </a:rPr>
+              <a:t>Move when others move</a:t>
+            </a:r>
+            <a:endParaRPr lang="en-US" sz="1300" dirty="0"/>
+          </a:p>
+        </p:txBody>
+      </p:sp>
+      <p:sp>
+        <p:nvSpPr>
+          <p:cNvPr id="9" name="pairs-head"/>
+          <p:cNvSpPr txBox="1"/>
+          <p:nvPr/>
+        </p:nvSpPr>
+        <p:spPr>
+          <a:xfrm>
+            <a:off x="457200" y="3611880"/>
+            <a:ext cx="4572000" cy="274320"/>
+          </a:xfrm>
+          <a:prstGeom prst="rect">
+            <a:avLst/>
+          </a:prstGeom>
+          <a:noFill/>
+          <a:ln/>
+        </p:spPr>
+        <p:txBody>
+          <a:bodyPr wrap="square" lIns="0" tIns="0" rIns="0" bIns="0" rtlCol="0" anchor="ctr"/>
+          <a:lstStyle/>
+          <a:p>
+            <a:pPr indent="0" marL="0">
+              <a:buNone/>
+            </a:pPr>
+            <a:r>
+              <a:rPr lang="en-US" sz="1100" b="1" dirty="0">
+                <a:solidFill>
+                  <a:schemeClr val="accent3"/>
+                </a:solidFill>
+              </a:rPr>
+              <a:t>Three pairs (λ individualist, λ collectivist) in the figures</a:t>
+            </a:r>
+            <a:endParaRPr lang="en-US" sz="1100" dirty="0"/>
+          </a:p>
+        </p:txBody>
+      </p:sp>
+      <p:sp>
+        <p:nvSpPr>
+          <p:cNvPr id="10" name="chip"/>
+          <p:cNvSpPr/>
+          <p:nvPr/>
+        </p:nvSpPr>
+        <p:spPr>
+          <a:xfrm>
+            <a:off x="457200" y="3931920"/>
+            <a:ext cx="914400" cy="329184"/>
+          </a:xfrm>
+          <a:prstGeom prst="roundRect">
+            <a:avLst>
+              <a:gd name="adj" fmla="val 16667"/>
+            </a:avLst>
+          </a:prstGeom>
+          <a:solidFill>
+            <a:schemeClr val="tx2"/>
+          </a:solidFill>
+          <a:ln w="12700">
+            <a:solidFill>
+              <a:schemeClr val="tx2"/>
+            </a:solidFill>
+            <a:prstDash val="solid"/>
+          </a:ln>
+        </p:spPr>
+      </p:sp>
+      <p:sp>
+        <p:nvSpPr>
+          <p:cNvPr id="11" name="chip-label"/>
+          <p:cNvSpPr txBox="1"/>
+          <p:nvPr/>
+        </p:nvSpPr>
+        <p:spPr>
+          <a:xfrm>
+            <a:off x="457200" y="3931920"/>
+            <a:ext cx="914400" cy="329184"/>
+          </a:xfrm>
+          <a:prstGeom prst="rect">
+            <a:avLst/>
+          </a:prstGeom>
+          <a:noFill/>
+          <a:ln/>
+        </p:spPr>
+        <p:txBody>
+          <a:bodyPr wrap="square" lIns="0" tIns="0" rIns="0" bIns="0" rtlCol="0" anchor="ctr"/>
+          <a:lstStyle/>
+          <a:p>
+            <a:pPr algn="ctr" indent="0" marL="0">
+              <a:buNone/>
+            </a:pPr>
+            <a:r>
+              <a:rPr lang="en-US" sz="1100" b="1" dirty="0">
+                <a:solidFill>
+                  <a:schemeClr val="bg1"/>
                 </a:solidFill>
                 <a:latin typeface="Cambria" pitchFamily="34" charset="0"/>
                 <a:ea typeface="Cambria" pitchFamily="34" charset="-122"/>
                 <a:cs typeface="Cambria" pitchFamily="34" charset="-120"/>
               </a:rPr>
-              <a:t>1%</a:t>
-            </a:r>
-            <a:endParaRPr lang="en-US" sz="2600" dirty="0"/>
-          </a:p>
-        </p:txBody>
-      </p:sp>
-      <p:sp>
-        <p:nvSpPr>
-          <p:cNvPr id="9" name="stat-label"/>
+              <a:t>(0.1, 0.9)</a:t>
+            </a:r>
+            <a:endParaRPr lang="en-US" sz="1100" dirty="0"/>
+          </a:p>
+        </p:txBody>
+      </p:sp>
+      <p:sp>
+        <p:nvSpPr>
+          <p:cNvPr id="12" name="pair-label"/>
           <p:cNvSpPr txBox="1"/>
           <p:nvPr/>
         </p:nvSpPr>
         <p:spPr>
           <a:xfrm>
-            <a:off x="6671577" y="1600200"/>
-            <a:ext cx="1878063" cy="356616"/>
-          </a:xfrm>
-          <a:prstGeom prst="rect">
-            <a:avLst/>
-          </a:prstGeom>
-          <a:noFill/>
-          <a:ln/>
-        </p:spPr>
-        <p:txBody>
-          <a:bodyPr wrap="square" lIns="0" tIns="0" rIns="0" bIns="0" rtlCol="0" anchor="t"/>
+            <a:off x="1417320" y="3931920"/>
+            <a:ext cx="640080" cy="329184"/>
+          </a:xfrm>
+          <a:prstGeom prst="rect">
+            <a:avLst/>
+          </a:prstGeom>
+          <a:noFill/>
+          <a:ln/>
+        </p:spPr>
+        <p:txBody>
+          <a:bodyPr wrap="square" lIns="0" tIns="0" rIns="0" bIns="0" rtlCol="0" anchor="ctr"/>
           <a:lstStyle/>
           <a:p>
             <a:pPr indent="0" marL="0">
@@ -3984,7 +4535,7 @@
                   <a:schemeClr val="accent3"/>
                 </a:solidFill>
               </a:rPr>
-              <a:t>cap on any one deposit; sizes log-normal (σ 2.5) below it</a:t>
+              <a:t>wide gap</a:t>
             </a:r>
             <a:endParaRPr lang="en-US" sz="1100" dirty="0"/>
           </a:p>
@@ -3992,26 +4543,26 @@
       </p:sp>
       <p:sp>
         <p:nvSpPr>
-          <p:cNvPr id="10" name="stat-risk aversion; parti"/>
+          <p:cNvPr id="13" name="chip"/>
           <p:cNvSpPr/>
           <p:nvPr/>
         </p:nvSpPr>
         <p:spPr>
           <a:xfrm>
-            <a:off x="4244873" y="2148840"/>
-            <a:ext cx="2152383" cy="960120"/>
+            <a:off x="2057400" y="3931920"/>
+            <a:ext cx="914400" cy="329184"/>
           </a:xfrm>
           <a:prstGeom prst="roundRect">
             <a:avLst>
-              <a:gd name="adj" fmla="val 7619"/>
+              <a:gd name="adj" fmla="val 16667"/>
             </a:avLst>
           </a:prstGeom>
           <a:solidFill>
-            <a:schemeClr val="bg2"/>
+            <a:schemeClr val="accent3"/>
           </a:solidFill>
           <a:ln w="12700">
             <a:solidFill>
-              <a:schemeClr val="bg2"/>
+              <a:schemeClr val="accent3"/>
             </a:solidFill>
             <a:prstDash val="solid"/>
           </a:ln>
@@ -4019,14 +4570,14 @@
       </p:sp>
       <p:sp>
         <p:nvSpPr>
-          <p:cNvPr id="11" name="stat-big"/>
+          <p:cNvPr id="14" name="chip-label"/>
           <p:cNvSpPr txBox="1"/>
           <p:nvPr/>
         </p:nvSpPr>
         <p:spPr>
           <a:xfrm>
-            <a:off x="4382033" y="2221992"/>
-            <a:ext cx="1878063" cy="457200"/>
+            <a:off x="2057400" y="3931920"/>
+            <a:ext cx="914400" cy="329184"/>
           </a:xfrm>
           <a:prstGeom prst="rect">
             <a:avLst/>
@@ -4038,43 +4589,43 @@
           <a:bodyPr wrap="square" lIns="0" tIns="0" rIns="0" bIns="0" rtlCol="0" anchor="ctr"/>
           <a:lstStyle/>
           <a:p>
-            <a:pPr indent="0" marL="0">
-              <a:buNone/>
-            </a:pPr>
-            <a:r>
-              <a:rPr lang="en-US" sz="2200" b="1" dirty="0">
-                <a:solidFill>
-                  <a:schemeClr val="accent1"/>
+            <a:pPr algn="ctr" indent="0" marL="0">
+              <a:buNone/>
+            </a:pPr>
+            <a:r>
+              <a:rPr lang="en-US" sz="1100" b="1" dirty="0">
+                <a:solidFill>
+                  <a:schemeClr val="bg1"/>
                 </a:solidFill>
                 <a:latin typeface="Cambria" pitchFamily="34" charset="0"/>
                 <a:ea typeface="Cambria" pitchFamily="34" charset="-122"/>
                 <a:cs typeface="Cambria" pitchFamily="34" charset="-120"/>
               </a:rPr>
-              <a:t>CARA 0.1</a:t>
-            </a:r>
-            <a:endParaRPr lang="en-US" sz="2200" dirty="0"/>
-          </a:p>
-        </p:txBody>
-      </p:sp>
-      <p:sp>
-        <p:nvSpPr>
-          <p:cNvPr id="12" name="stat-label"/>
+              <a:t>(0.2, 0.8)</a:t>
+            </a:r>
+            <a:endParaRPr lang="en-US" sz="1100" dirty="0"/>
+          </a:p>
+        </p:txBody>
+      </p:sp>
+      <p:sp>
+        <p:nvSpPr>
+          <p:cNvPr id="15" name="pair-label"/>
           <p:cNvSpPr txBox="1"/>
           <p:nvPr/>
         </p:nvSpPr>
         <p:spPr>
           <a:xfrm>
-            <a:off x="4382033" y="2697480"/>
-            <a:ext cx="1878063" cy="356616"/>
-          </a:xfrm>
-          <a:prstGeom prst="rect">
-            <a:avLst/>
-          </a:prstGeom>
-          <a:noFill/>
-          <a:ln/>
-        </p:spPr>
-        <p:txBody>
-          <a:bodyPr wrap="square" lIns="0" tIns="0" rIns="0" bIns="0" rtlCol="0" anchor="t"/>
+            <a:off x="3017520" y="3931920"/>
+            <a:ext cx="640080" cy="329184"/>
+          </a:xfrm>
+          <a:prstGeom prst="rect">
+            <a:avLst/>
+          </a:prstGeom>
+          <a:noFill/>
+          <a:ln/>
+        </p:spPr>
+        <p:txBody>
+          <a:bodyPr wrap="square" lIns="0" tIns="0" rIns="0" bIns="0" rtlCol="0" anchor="ctr"/>
           <a:lstStyle/>
           <a:p>
             <a:pPr indent="0" marL="0">
@@ -4086,7 +4637,7 @@
                   <a:schemeClr val="accent3"/>
                 </a:solidFill>
               </a:rPr>
-              <a:t>risk aversion; partial withdrawals allowed</a:t>
+              <a:t>medium</a:t>
             </a:r>
             <a:endParaRPr lang="en-US" sz="1100" dirty="0"/>
           </a:p>
@@ -4094,26 +4645,26 @@
       </p:sp>
       <p:sp>
         <p:nvSpPr>
-          <p:cNvPr id="13" name="stat-runs per cell: 25 in"/>
+          <p:cNvPr id="16" name="chip"/>
           <p:cNvSpPr/>
           <p:nvPr/>
         </p:nvSpPr>
         <p:spPr>
           <a:xfrm>
-            <a:off x="6534417" y="2148840"/>
-            <a:ext cx="2152383" cy="960120"/>
+            <a:off x="3657600" y="3931920"/>
+            <a:ext cx="914400" cy="329184"/>
           </a:xfrm>
           <a:prstGeom prst="roundRect">
             <a:avLst>
-              <a:gd name="adj" fmla="val 7619"/>
+              <a:gd name="adj" fmla="val 16667"/>
             </a:avLst>
           </a:prstGeom>
           <a:solidFill>
-            <a:schemeClr val="bg2"/>
+            <a:schemeClr val="accent4"/>
           </a:solidFill>
           <a:ln w="12700">
             <a:solidFill>
-              <a:schemeClr val="bg2"/>
+              <a:schemeClr val="accent4"/>
             </a:solidFill>
             <a:prstDash val="solid"/>
           </a:ln>
@@ -4121,14 +4672,14 @@
       </p:sp>
       <p:sp>
         <p:nvSpPr>
-          <p:cNvPr id="14" name="stat-big"/>
+          <p:cNvPr id="17" name="chip-label"/>
           <p:cNvSpPr txBox="1"/>
           <p:nvPr/>
         </p:nvSpPr>
         <p:spPr>
           <a:xfrm>
-            <a:off x="6671577" y="2221992"/>
-            <a:ext cx="1878063" cy="457200"/>
+            <a:off x="3657600" y="3931920"/>
+            <a:ext cx="914400" cy="329184"/>
           </a:xfrm>
           <a:prstGeom prst="rect">
             <a:avLst/>
@@ -4140,34 +4691,70 @@
           <a:bodyPr wrap="square" lIns="0" tIns="0" rIns="0" bIns="0" rtlCol="0" anchor="ctr"/>
           <a:lstStyle/>
           <a:p>
-            <a:pPr indent="0" marL="0">
-              <a:buNone/>
-            </a:pPr>
-            <a:r>
-              <a:rPr lang="en-US" sz="2600" b="1" dirty="0">
-                <a:solidFill>
-                  <a:schemeClr val="accent1"/>
+            <a:pPr algn="ctr" indent="0" marL="0">
+              <a:buNone/>
+            </a:pPr>
+            <a:r>
+              <a:rPr lang="en-US" sz="1100" b="1" dirty="0">
+                <a:solidFill>
+                  <a:schemeClr val="tx1"/>
                 </a:solidFill>
                 <a:latin typeface="Cambria" pitchFamily="34" charset="0"/>
                 <a:ea typeface="Cambria" pitchFamily="34" charset="-122"/>
                 <a:cs typeface="Cambria" pitchFamily="34" charset="-120"/>
               </a:rPr>
-              <a:t>250</a:t>
-            </a:r>
-            <a:endParaRPr lang="en-US" sz="2600" dirty="0"/>
-          </a:p>
-        </p:txBody>
-      </p:sp>
-      <p:sp>
-        <p:nvSpPr>
-          <p:cNvPr id="15" name="stat-label"/>
+              <a:t>(0.3, 0.5)</a:t>
+            </a:r>
+            <a:endParaRPr lang="en-US" sz="1100" dirty="0"/>
+          </a:p>
+        </p:txBody>
+      </p:sp>
+      <p:sp>
+        <p:nvSpPr>
+          <p:cNvPr id="18" name="pair-label"/>
           <p:cNvSpPr txBox="1"/>
           <p:nvPr/>
         </p:nvSpPr>
         <p:spPr>
           <a:xfrm>
-            <a:off x="6671577" y="2697480"/>
-            <a:ext cx="1878063" cy="356616"/>
+            <a:off x="4617720" y="3931920"/>
+            <a:ext cx="640080" cy="329184"/>
+          </a:xfrm>
+          <a:prstGeom prst="rect">
+            <a:avLst/>
+          </a:prstGeom>
+          <a:noFill/>
+          <a:ln/>
+        </p:spPr>
+        <p:txBody>
+          <a:bodyPr wrap="square" lIns="0" tIns="0" rIns="0" bIns="0" rtlCol="0" anchor="ctr"/>
+          <a:lstStyle/>
+          <a:p>
+            <a:pPr indent="0" marL="0">
+              <a:buNone/>
+            </a:pPr>
+            <a:r>
+              <a:rPr lang="en-US" sz="1100" dirty="0">
+                <a:solidFill>
+                  <a:schemeClr val="accent3"/>
+                </a:solidFill>
+              </a:rPr>
+              <a:t>narrow</a:t>
+            </a:r>
+            <a:endParaRPr lang="en-US" sz="1100" dirty="0"/>
+          </a:p>
+        </p:txBody>
+      </p:sp>
+      <p:sp>
+        <p:nvSpPr>
+          <p:cNvPr id="19" name="mu-note"/>
+          <p:cNvSpPr txBox="1"/>
+          <p:nvPr/>
+        </p:nvSpPr>
+        <p:spPr>
+          <a:xfrm>
+            <a:off x="5303520" y="3611880"/>
+            <a:ext cx="3383280" cy="822960"/>
           </a:xfrm>
           <a:prstGeom prst="rect">
             <a:avLst/>
@@ -4188,103 +4775,53 @@
                   <a:schemeClr val="accent3"/>
                 </a:solidFill>
               </a:rPr>
-              <a:t>runs per cell: 25 initialisations × 10 draws</a:t>
+              <a:t>The share of individualists μ is set by a cultural warm-up on the network. </a:t>
+            </a:r>
+            <a:pPr indent="0" marL="0">
+              <a:buNone/>
+            </a:pPr>
+            <a:r>
+              <a:rPr lang="en-US" sz="1100" b="1" dirty="0">
+                <a:solidFill>
+                  <a:srgbClr val="EB6834"/>
+                </a:solidFill>
+              </a:rPr>
+              <a:t>Orange = individualists</a:t>
+            </a:r>
+            <a:pPr indent="0" marL="0">
+              <a:buNone/>
+            </a:pPr>
+            <a:r>
+              <a:rPr lang="en-US" sz="1100" dirty="0">
+                <a:solidFill>
+                  <a:schemeClr val="accent3"/>
+                </a:solidFill>
+              </a:rPr>
+              <a:t>, </a:t>
+            </a:r>
+            <a:pPr indent="0" marL="0">
+              <a:buNone/>
+            </a:pPr>
+            <a:r>
+              <a:rPr lang="en-US" sz="1100" b="1" dirty="0">
+                <a:solidFill>
+                  <a:srgbClr val="2A78D6"/>
+                </a:solidFill>
+              </a:rPr>
+              <a:t>blue = collectivists</a:t>
+            </a:r>
+            <a:pPr indent="0" marL="0">
+              <a:buNone/>
+            </a:pPr>
+            <a:r>
+              <a:rPr lang="en-US" sz="1100" dirty="0">
+                <a:solidFill>
+                  <a:schemeClr val="accent3"/>
+                </a:solidFill>
+              </a:rPr>
+              <a:t> throughout.</a:t>
             </a:r>
             <a:endParaRPr lang="en-US" sz="1100" dirty="0"/>
-          </a:p>
-        </p:txBody>
-      </p:sp>
-      <p:sp>
-        <p:nvSpPr>
-          <p:cNvPr id="16" name="bullets"/>
-          <p:cNvSpPr txBox="1"/>
-          <p:nvPr/>
-        </p:nvSpPr>
-        <p:spPr>
-          <a:xfrm>
-            <a:off x="4244873" y="3200400"/>
-            <a:ext cx="4441927" cy="1371600"/>
-          </a:xfrm>
-          <a:prstGeom prst="rect">
-            <a:avLst/>
-          </a:prstGeom>
-          <a:noFill/>
-          <a:ln/>
-        </p:spPr>
-        <p:txBody>
-          <a:bodyPr wrap="square" lIns="0" tIns="0" rIns="0" bIns="0" rtlCol="0" anchor="t"/>
-          <a:lstStyle/>
-          <a:p>
-            <a:pPr marL="177800" indent="-177800">
-              <a:spcAft>
-                <a:spcPts val="400"/>
-              </a:spcAft>
-              <a:buSzPct val="100000"/>
-              <a:buChar char="•"/>
-            </a:pPr>
-            <a:r>
-              <a:rPr lang="en-US" sz="1150" dirty="0">
-                <a:solidFill>
-                  <a:schemeClr val="tx1"/>
-                </a:solidFill>
-              </a:rPr>
-              <a:t>One bank that sells its long asset at a discount when cash runs short (a fire-sale bank)</a:t>
-            </a:r>
-            <a:endParaRPr lang="en-US" sz="1150" dirty="0"/>
-          </a:p>
-          <a:p>
-            <a:pPr marL="177800" indent="-177800">
-              <a:spcAft>
-                <a:spcPts val="400"/>
-              </a:spcAft>
-              <a:buSzPct val="100000"/>
-              <a:buChar char="•"/>
-            </a:pPr>
-            <a:r>
-              <a:rPr lang="en-US" sz="1150" dirty="0">
-                <a:solidFill>
-                  <a:schemeClr val="tx1"/>
-                </a:solidFill>
-              </a:rPr>
-              <a:t>Each tick a depositor sees neighbours’ withdrawals and the public news, blends them with a private signal, and withdraws if that pays</a:t>
-            </a:r>
-            <a:endParaRPr lang="en-US" sz="1150" dirty="0"/>
-          </a:p>
-          <a:p>
-            <a:pPr marL="177800" indent="-177800">
-              <a:spcAft>
-                <a:spcPts val="400"/>
-              </a:spcAft>
-              <a:buSzPct val="100000"/>
-              <a:buChar char="•"/>
-            </a:pPr>
-            <a:r>
-              <a:rPr lang="en-US" sz="1150" dirty="0">
-                <a:solidFill>
-                  <a:schemeClr val="tx1"/>
-                </a:solidFill>
-              </a:rPr>
-              <a:t>A public signal can be absent, accurate, or outdated</a:t>
-            </a:r>
-            <a:endParaRPr lang="en-US" sz="1150" dirty="0"/>
-          </a:p>
-          <a:p>
-            <a:pPr marL="177800" indent="-177800">
-              <a:spcAft>
-                <a:spcPts val="400"/>
-              </a:spcAft>
-              <a:buSzPct val="100000"/>
-              <a:buChar char="•"/>
-            </a:pPr>
-            <a:r>
-              <a:rPr lang="en-US" sz="1150" dirty="0">
-                <a:solidFill>
-                  <a:schemeClr val="tx1"/>
-                </a:solidFill>
-              </a:rPr>
-              <a:t>Outcomes: D = individualists’ minus collectivists’ withdrawal share (those not hit by the shock); P(fail) = share of runs that fail</a:t>
-            </a:r>
-            <a:endParaRPr lang="en-US" sz="1150" dirty="0"/>
           </a:p>
         </p:txBody>
       </p:sp>
@@ -4390,26 +4927,86 @@
                   <a:schemeClr val="tx2"/>
                 </a:solidFill>
               </a:rPr>
-              <a:t>Individualists and collectivists: who listens to whom</a:t>
+              <a:t>Collectivists herd</a:t>
             </a:r>
             <a:endParaRPr lang="en-US" sz="2400" dirty="0"/>
           </a:p>
         </p:txBody>
       </p:sp>
-      <p:sp>
-        <p:nvSpPr>
-          <p:cNvPr id="3" name="type-Individualists"/>
+      <p:pic>
+        <p:nvPicPr>
+          <p:cNvPr id="3" name="e07" descr="Chance of withdrawing by share of neighbours who have withdrawn: collectivists jump to near 1 once 20 to 35 percent of neighbours are out; individualists level off near 0.25 to 0.30.">    </p:cNvPr>
+          <p:cNvPicPr>
+            <a:picLocks noChangeAspect="1"/>
+          </p:cNvPicPr>
+          <p:nvPr/>
+        </p:nvPicPr>
+        <p:blipFill>
+          <a:blip r:embed="rId1"/>
+          <a:stretch>
+            <a:fillRect/>
+          </a:stretch>
+        </p:blipFill>
+        <p:spPr>
+          <a:xfrm>
+            <a:off x="457200" y="1051560"/>
+            <a:ext cx="5164897" cy="3291840"/>
+          </a:xfrm>
+          <a:prstGeom prst="rect">
+            <a:avLst/>
+          </a:prstGeom>
+        </p:spPr>
+      </p:pic>
+      <p:sp>
+        <p:nvSpPr>
+          <p:cNvPr id="4" name="caption"/>
+          <p:cNvSpPr txBox="1"/>
+          <p:nvPr/>
+        </p:nvSpPr>
+        <p:spPr>
+          <a:xfrm>
+            <a:off x="457200" y="4389120"/>
+            <a:ext cx="5486400" cy="274320"/>
+          </a:xfrm>
+          <a:prstGeom prst="rect">
+            <a:avLst/>
+          </a:prstGeom>
+          <a:noFill/>
+          <a:ln/>
+        </p:spPr>
+        <p:txBody>
+          <a:bodyPr wrap="square" lIns="0" tIns="0" rIns="0" bIns="0" rtlCol="0" anchor="ctr"/>
+          <a:lstStyle/>
+          <a:p>
+            <a:pPr indent="0" marL="0">
+              <a:buNone/>
+            </a:pPr>
+            <a:r>
+              <a:rPr lang="en-US" sz="1000" i="1" dirty="0">
+                <a:solidFill>
+                  <a:schemeClr val="accent3"/>
+                </a:solidFill>
+              </a:rPr>
+              <a:t>Chance of withdrawing, given the share of a depositor’s neighbours who have already withdrawn. λ pairs pooled; reference bank.</a:t>
+            </a:r>
+            <a:endParaRPr lang="en-US" sz="1000" dirty="0"/>
+          </a:p>
+        </p:txBody>
+      </p:sp>
+      <p:sp>
+        <p:nvSpPr>
+          <p:cNvPr id="5" name="stat-collectivists, once "/>
           <p:cNvSpPr/>
           <p:nvPr/>
         </p:nvSpPr>
         <p:spPr>
           <a:xfrm>
-            <a:off x="457200" y="1051560"/>
-            <a:ext cx="4023360" cy="2377440"/>
+            <a:off x="6217920" y="1051560"/>
+            <a:ext cx="2468880" cy="1005840"/>
           </a:xfrm>
           <a:prstGeom prst="roundRect">
             <a:avLst>
-              <a:gd name="adj" fmla="val 3077"/>
+              <a:gd name="adj" fmla="val 7273"/>
             </a:avLst>
           </a:prstGeom>
           <a:solidFill>
@@ -4425,14 +5022,14 @@
       </p:sp>
       <p:sp>
         <p:nvSpPr>
-          <p:cNvPr id="4" name="type-head"/>
+          <p:cNvPr id="6" name="stat-big"/>
           <p:cNvSpPr txBox="1"/>
           <p:nvPr/>
         </p:nvSpPr>
         <p:spPr>
           <a:xfrm>
-            <a:off x="640080" y="1143000"/>
-            <a:ext cx="3657600" cy="365760"/>
+            <a:off x="6355080" y="1124712"/>
+            <a:ext cx="2194560" cy="457200"/>
           </a:xfrm>
           <a:prstGeom prst="rect">
             <a:avLst/>
@@ -4448,27 +5045,30 @@
               <a:buNone/>
             </a:pPr>
             <a:r>
-              <a:rPr lang="en-US" sz="1800" b="1" dirty="0">
-                <a:solidFill>
-                  <a:srgbClr val="EB6834"/>
-                </a:solidFill>
-              </a:rPr>
-              <a:t>Individualists</a:t>
-            </a:r>
-            <a:endParaRPr lang="en-US" sz="1800" dirty="0"/>
-          </a:p>
-        </p:txBody>
-      </p:sp>
-      <p:sp>
-        <p:nvSpPr>
-          <p:cNvPr id="5" name="bullets"/>
+              <a:rPr lang="en-US" sz="2200" b="1" dirty="0">
+                <a:solidFill>
+                  <a:srgbClr val="2A78D6"/>
+                </a:solidFill>
+                <a:latin typeface="Cambria" pitchFamily="34" charset="0"/>
+                <a:ea typeface="Cambria" pitchFamily="34" charset="-122"/>
+                <a:cs typeface="Cambria" pitchFamily="34" charset="-120"/>
+              </a:rPr>
+              <a:t>0.15 to 0.93</a:t>
+            </a:r>
+            <a:endParaRPr lang="en-US" sz="2200" dirty="0"/>
+          </a:p>
+        </p:txBody>
+      </p:sp>
+      <p:sp>
+        <p:nvSpPr>
+          <p:cNvPr id="7" name="stat-label"/>
           <p:cNvSpPr txBox="1"/>
           <p:nvPr/>
         </p:nvSpPr>
         <p:spPr>
           <a:xfrm>
-            <a:off x="640080" y="1600200"/>
-            <a:ext cx="3657600" cy="1737360"/>
+            <a:off x="6355080" y="1600200"/>
+            <a:ext cx="2194560" cy="402336"/>
           </a:xfrm>
           <a:prstGeom prst="rect">
             <a:avLst/>
@@ -4480,93 +5080,35 @@
           <a:bodyPr wrap="square" lIns="0" tIns="0" rIns="0" bIns="0" rtlCol="0" anchor="t"/>
           <a:lstStyle/>
           <a:p>
-            <a:pPr marL="177800" indent="-177800">
-              <a:spcAft>
-                <a:spcPts val="500"/>
-              </a:spcAft>
-              <a:buSzPct val="100000"/>
-              <a:buChar char="•"/>
-            </a:pPr>
-            <a:r>
-              <a:rPr lang="en-US" sz="1300" dirty="0">
-                <a:solidFill>
-                  <a:schemeClr val="tx1"/>
-                </a:solidFill>
-              </a:rPr>
-              <a:t>Trust their own information about the bank</a:t>
-            </a:r>
-            <a:endParaRPr lang="en-US" sz="1300" dirty="0"/>
-          </a:p>
-          <a:p>
-            <a:pPr marL="177800" indent="-177800">
-              <a:spcAft>
-                <a:spcPts val="500"/>
-              </a:spcAft>
-              <a:buSzPct val="100000"/>
-              <a:buChar char="•"/>
-            </a:pPr>
-            <a:r>
-              <a:rPr lang="en-US" sz="1300" dirty="0">
-                <a:solidFill>
-                  <a:schemeClr val="tx1"/>
-                </a:solidFill>
-              </a:rPr>
-              <a:t>Put little weight on what neighbours do or on public news</a:t>
-            </a:r>
-            <a:endParaRPr lang="en-US" sz="1300" dirty="0"/>
-          </a:p>
-          <a:p>
-            <a:pPr marL="177800" indent="-177800">
-              <a:spcAft>
-                <a:spcPts val="500"/>
-              </a:spcAft>
-              <a:buSzPct val="100000"/>
-              <a:buChar char="•"/>
-            </a:pPr>
-            <a:r>
-              <a:rPr lang="en-US" sz="1300" dirty="0">
-                <a:solidFill>
-                  <a:schemeClr val="tx1"/>
-                </a:solidFill>
-              </a:rPr>
-              <a:t>Weight on the social side: λ = 0.1 to 0.3</a:t>
-            </a:r>
-            <a:endParaRPr lang="en-US" sz="1300" dirty="0"/>
-          </a:p>
-          <a:p>
-            <a:pPr marL="177800" indent="-177800">
-              <a:spcAft>
-                <a:spcPts val="500"/>
-              </a:spcAft>
-              <a:buSzPct val="100000"/>
-              <a:buChar char="•"/>
-            </a:pPr>
-            <a:r>
-              <a:rPr lang="en-US" sz="1300" dirty="0">
-                <a:solidFill>
-                  <a:schemeClr val="tx1"/>
-                </a:solidFill>
-              </a:rPr>
-              <a:t>Act on what they see themselves</a:t>
-            </a:r>
-            <a:endParaRPr lang="en-US" sz="1300" dirty="0"/>
-          </a:p>
-        </p:txBody>
-      </p:sp>
-      <p:sp>
-        <p:nvSpPr>
-          <p:cNvPr id="6" name="type-Collectivists"/>
+            <a:pPr indent="0" marL="0">
+              <a:buNone/>
+            </a:pPr>
+            <a:r>
+              <a:rPr lang="en-US" sz="1100" dirty="0">
+                <a:solidFill>
+                  <a:schemeClr val="accent3"/>
+                </a:solidFill>
+              </a:rPr>
+              <a:t>collectivists, once 20–35% of their neighbours are out</a:t>
+            </a:r>
+            <a:endParaRPr lang="en-US" sz="1100" dirty="0"/>
+          </a:p>
+        </p:txBody>
+      </p:sp>
+      <p:sp>
+        <p:nvSpPr>
+          <p:cNvPr id="8" name="stat-where individualists"/>
           <p:cNvSpPr/>
           <p:nvPr/>
         </p:nvSpPr>
         <p:spPr>
           <a:xfrm>
-            <a:off x="4663440" y="1051560"/>
-            <a:ext cx="4023360" cy="2377440"/>
+            <a:off x="6217920" y="2194560"/>
+            <a:ext cx="2468880" cy="1005840"/>
           </a:xfrm>
           <a:prstGeom prst="roundRect">
             <a:avLst>
-              <a:gd name="adj" fmla="val 3077"/>
+              <a:gd name="adj" fmla="val 7273"/>
             </a:avLst>
           </a:prstGeom>
           <a:solidFill>
@@ -4582,14 +5124,14 @@
       </p:sp>
       <p:sp>
         <p:nvSpPr>
-          <p:cNvPr id="7" name="type-head"/>
+          <p:cNvPr id="9" name="stat-big"/>
           <p:cNvSpPr txBox="1"/>
           <p:nvPr/>
         </p:nvSpPr>
         <p:spPr>
           <a:xfrm>
-            <a:off x="4846320" y="1143000"/>
-            <a:ext cx="3657600" cy="365760"/>
+            <a:off x="6355080" y="2267712"/>
+            <a:ext cx="2194560" cy="457200"/>
           </a:xfrm>
           <a:prstGeom prst="rect">
             <a:avLst/>
@@ -4605,27 +5147,30 @@
               <a:buNone/>
             </a:pPr>
             <a:r>
-              <a:rPr lang="en-US" sz="1800" b="1" dirty="0">
-                <a:solidFill>
-                  <a:srgbClr val="2A78D6"/>
-                </a:solidFill>
-              </a:rPr>
-              <a:t>Collectivists</a:t>
-            </a:r>
-            <a:endParaRPr lang="en-US" sz="1800" dirty="0"/>
-          </a:p>
-        </p:txBody>
-      </p:sp>
-      <p:sp>
-        <p:nvSpPr>
-          <p:cNvPr id="8" name="bullets"/>
+              <a:rPr lang="en-US" sz="2200" b="1" dirty="0">
+                <a:solidFill>
+                  <a:srgbClr val="EB6834"/>
+                </a:solidFill>
+                <a:latin typeface="Cambria" pitchFamily="34" charset="0"/>
+                <a:ea typeface="Cambria" pitchFamily="34" charset="-122"/>
+                <a:cs typeface="Cambria" pitchFamily="34" charset="-120"/>
+              </a:rPr>
+              <a:t>0.25 to 0.30</a:t>
+            </a:r>
+            <a:endParaRPr lang="en-US" sz="2200" dirty="0"/>
+          </a:p>
+        </p:txBody>
+      </p:sp>
+      <p:sp>
+        <p:nvSpPr>
+          <p:cNvPr id="10" name="stat-label"/>
           <p:cNvSpPr txBox="1"/>
           <p:nvPr/>
         </p:nvSpPr>
         <p:spPr>
           <a:xfrm>
-            <a:off x="4846320" y="1600200"/>
-            <a:ext cx="3657600" cy="1737360"/>
+            <a:off x="6355080" y="2743200"/>
+            <a:ext cx="2194560" cy="402336"/>
           </a:xfrm>
           <a:prstGeom prst="rect">
             <a:avLst/>
@@ -4637,110 +5182,16 @@
           <a:bodyPr wrap="square" lIns="0" tIns="0" rIns="0" bIns="0" rtlCol="0" anchor="t"/>
           <a:lstStyle/>
           <a:p>
-            <a:pPr marL="177800" indent="-177800">
-              <a:spcAft>
-                <a:spcPts val="500"/>
-              </a:spcAft>
-              <a:buSzPct val="100000"/>
-              <a:buChar char="•"/>
-            </a:pPr>
-            <a:r>
-              <a:rPr lang="en-US" sz="1300" dirty="0">
-                <a:solidFill>
-                  <a:schemeClr val="tx1"/>
-                </a:solidFill>
-              </a:rPr>
-              <a:t>Watch what neighbours do and what the public news says</a:t>
-            </a:r>
-            <a:endParaRPr lang="en-US" sz="1300" dirty="0"/>
-          </a:p>
-          <a:p>
-            <a:pPr marL="177800" indent="-177800">
-              <a:spcAft>
-                <a:spcPts val="500"/>
-              </a:spcAft>
-              <a:buSzPct val="100000"/>
-              <a:buChar char="•"/>
-            </a:pPr>
-            <a:r>
-              <a:rPr lang="en-US" sz="1300" dirty="0">
-                <a:solidFill>
-                  <a:schemeClr val="tx1"/>
-                </a:solidFill>
-              </a:rPr>
-              <a:t>Put little weight on their own information</a:t>
-            </a:r>
-            <a:endParaRPr lang="en-US" sz="1300" dirty="0"/>
-          </a:p>
-          <a:p>
-            <a:pPr marL="177800" indent="-177800">
-              <a:spcAft>
-                <a:spcPts val="500"/>
-              </a:spcAft>
-              <a:buSzPct val="100000"/>
-              <a:buChar char="•"/>
-            </a:pPr>
-            <a:r>
-              <a:rPr lang="en-US" sz="1300" dirty="0">
-                <a:solidFill>
-                  <a:schemeClr val="tx1"/>
-                </a:solidFill>
-              </a:rPr>
-              <a:t>Weight on the social side: λ = 0.5 to 0.9</a:t>
-            </a:r>
-            <a:endParaRPr lang="en-US" sz="1300" dirty="0"/>
-          </a:p>
-          <a:p>
-            <a:pPr marL="177800" indent="-177800">
-              <a:spcAft>
-                <a:spcPts val="500"/>
-              </a:spcAft>
-              <a:buSzPct val="100000"/>
-              <a:buChar char="•"/>
-            </a:pPr>
-            <a:r>
-              <a:rPr lang="en-US" sz="1300" dirty="0">
-                <a:solidFill>
-                  <a:schemeClr val="tx1"/>
-                </a:solidFill>
-              </a:rPr>
-              <a:t>Move when others move</a:t>
-            </a:r>
-            <a:endParaRPr lang="en-US" sz="1300" dirty="0"/>
-          </a:p>
-        </p:txBody>
-      </p:sp>
-      <p:sp>
-        <p:nvSpPr>
-          <p:cNvPr id="9" name="pairs-head"/>
-          <p:cNvSpPr txBox="1"/>
-          <p:nvPr/>
-        </p:nvSpPr>
-        <p:spPr>
-          <a:xfrm>
-            <a:off x="457200" y="3611880"/>
-            <a:ext cx="4572000" cy="274320"/>
-          </a:xfrm>
-          <a:prstGeom prst="rect">
-            <a:avLst/>
-          </a:prstGeom>
-          <a:noFill/>
-          <a:ln/>
-        </p:spPr>
-        <p:txBody>
-          <a:bodyPr wrap="square" lIns="0" tIns="0" rIns="0" bIns="0" rtlCol="0" anchor="ctr"/>
-          <a:lstStyle/>
-          <a:p>
             <a:pPr indent="0" marL="0">
               <a:buNone/>
             </a:pPr>
             <a:r>
-              <a:rPr lang="en-US" sz="1100" b="1" dirty="0">
+              <a:rPr lang="en-US" sz="1100" dirty="0">
                 <a:solidFill>
                   <a:schemeClr val="accent3"/>
                 </a:solidFill>
               </a:rPr>
-              <a:t>Three pairs (λ individualist, λ collectivist) in the figures</a:t>
+              <a:t>where individualists level off, whatever their neighbours do</a:t>
             </a:r>
             <a:endParaRPr lang="en-US" sz="1100" dirty="0"/>
           </a:p>
@@ -4748,26 +5199,26 @@
       </p:sp>
       <p:sp>
         <p:nvSpPr>
-          <p:cNvPr id="10" name="chip"/>
+          <p:cNvPr id="11" name="stat-difference in slopes"/>
           <p:cNvSpPr/>
           <p:nvPr/>
         </p:nvSpPr>
         <p:spPr>
           <a:xfrm>
-            <a:off x="457200" y="3931920"/>
-            <a:ext cx="914400" cy="329184"/>
+            <a:off x="6217920" y="3337560"/>
+            <a:ext cx="2468880" cy="1097280"/>
           </a:xfrm>
           <a:prstGeom prst="roundRect">
             <a:avLst>
-              <a:gd name="adj" fmla="val 16667"/>
+              <a:gd name="adj" fmla="val 6667"/>
             </a:avLst>
           </a:prstGeom>
           <a:solidFill>
-            <a:schemeClr val="tx2"/>
+            <a:schemeClr val="bg2"/>
           </a:solidFill>
           <a:ln w="12700">
             <a:solidFill>
-              <a:schemeClr val="tx2"/>
+              <a:schemeClr val="bg2"/>
             </a:solidFill>
             <a:prstDash val="solid"/>
           </a:ln>
@@ -4775,14 +5226,14 @@
       </p:sp>
       <p:sp>
         <p:nvSpPr>
-          <p:cNvPr id="11" name="chip-label"/>
+          <p:cNvPr id="12" name="stat-big"/>
           <p:cNvSpPr txBox="1"/>
           <p:nvPr/>
         </p:nvSpPr>
         <p:spPr>
           <a:xfrm>
-            <a:off x="457200" y="3931920"/>
-            <a:ext cx="914400" cy="329184"/>
+            <a:off x="6355080" y="3410712"/>
+            <a:ext cx="2194560" cy="457200"/>
           </a:xfrm>
           <a:prstGeom prst="rect">
             <a:avLst/>
@@ -4794,43 +5245,43 @@
           <a:bodyPr wrap="square" lIns="0" tIns="0" rIns="0" bIns="0" rtlCol="0" anchor="ctr"/>
           <a:lstStyle/>
           <a:p>
-            <a:pPr algn="ctr" indent="0" marL="0">
-              <a:buNone/>
-            </a:pPr>
-            <a:r>
-              <a:rPr lang="en-US" sz="1100" b="1" dirty="0">
-                <a:solidFill>
-                  <a:schemeClr val="bg1"/>
+            <a:pPr indent="0" marL="0">
+              <a:buNone/>
+            </a:pPr>
+            <a:r>
+              <a:rPr lang="en-US" sz="2600" b="1" dirty="0">
+                <a:solidFill>
+                  <a:schemeClr val="accent1"/>
                 </a:solidFill>
                 <a:latin typeface="Cambria" pitchFamily="34" charset="0"/>
                 <a:ea typeface="Cambria" pitchFamily="34" charset="-122"/>
                 <a:cs typeface="Cambria" pitchFamily="34" charset="-120"/>
               </a:rPr>
-              <a:t>(0.1, 0.9)</a:t>
-            </a:r>
-            <a:endParaRPr lang="en-US" sz="1100" dirty="0"/>
-          </a:p>
-        </p:txBody>
-      </p:sp>
-      <p:sp>
-        <p:nvSpPr>
-          <p:cNvPr id="12" name="pair-label"/>
+              <a:t>+0.58</a:t>
+            </a:r>
+            <a:endParaRPr lang="en-US" sz="2600" dirty="0"/>
+          </a:p>
+        </p:txBody>
+      </p:sp>
+      <p:sp>
+        <p:nvSpPr>
+          <p:cNvPr id="13" name="stat-label"/>
           <p:cNvSpPr txBox="1"/>
           <p:nvPr/>
         </p:nvSpPr>
         <p:spPr>
           <a:xfrm>
-            <a:off x="1417320" y="3931920"/>
-            <a:ext cx="640080" cy="329184"/>
-          </a:xfrm>
-          <a:prstGeom prst="rect">
-            <a:avLst/>
-          </a:prstGeom>
-          <a:noFill/>
-          <a:ln/>
-        </p:spPr>
-        <p:txBody>
-          <a:bodyPr wrap="square" lIns="0" tIns="0" rIns="0" bIns="0" rtlCol="0" anchor="ctr"/>
+            <a:off x="6355080" y="3886200"/>
+            <a:ext cx="2194560" cy="493776"/>
+          </a:xfrm>
+          <a:prstGeom prst="rect">
+            <a:avLst/>
+          </a:prstGeom>
+          <a:noFill/>
+          <a:ln/>
+        </p:spPr>
+        <p:txBody>
+          <a:bodyPr wrap="square" lIns="0" tIns="0" rIns="0" bIns="0" rtlCol="0" anchor="t"/>
           <a:lstStyle/>
           <a:p>
             <a:pPr indent="0" marL="0">
@@ -4842,291 +5293,7 @@
                   <a:schemeClr val="accent3"/>
                 </a:solidFill>
               </a:rPr>
-              <a:t>wide gap</a:t>
-            </a:r>
-            <a:endParaRPr lang="en-US" sz="1100" dirty="0"/>
-          </a:p>
-        </p:txBody>
-      </p:sp>
-      <p:sp>
-        <p:nvSpPr>
-          <p:cNvPr id="13" name="chip"/>
-          <p:cNvSpPr/>
-          <p:nvPr/>
-        </p:nvSpPr>
-        <p:spPr>
-          <a:xfrm>
-            <a:off x="2057400" y="3931920"/>
-            <a:ext cx="914400" cy="329184"/>
-          </a:xfrm>
-          <a:prstGeom prst="roundRect">
-            <a:avLst>
-              <a:gd name="adj" fmla="val 16667"/>
-            </a:avLst>
-          </a:prstGeom>
-          <a:solidFill>
-            <a:schemeClr val="accent3"/>
-          </a:solidFill>
-          <a:ln w="12700">
-            <a:solidFill>
-              <a:schemeClr val="accent3"/>
-            </a:solidFill>
-            <a:prstDash val="solid"/>
-          </a:ln>
-        </p:spPr>
-      </p:sp>
-      <p:sp>
-        <p:nvSpPr>
-          <p:cNvPr id="14" name="chip-label"/>
-          <p:cNvSpPr txBox="1"/>
-          <p:nvPr/>
-        </p:nvSpPr>
-        <p:spPr>
-          <a:xfrm>
-            <a:off x="2057400" y="3931920"/>
-            <a:ext cx="914400" cy="329184"/>
-          </a:xfrm>
-          <a:prstGeom prst="rect">
-            <a:avLst/>
-          </a:prstGeom>
-          <a:noFill/>
-          <a:ln/>
-        </p:spPr>
-        <p:txBody>
-          <a:bodyPr wrap="square" lIns="0" tIns="0" rIns="0" bIns="0" rtlCol="0" anchor="ctr"/>
-          <a:lstStyle/>
-          <a:p>
-            <a:pPr algn="ctr" indent="0" marL="0">
-              <a:buNone/>
-            </a:pPr>
-            <a:r>
-              <a:rPr lang="en-US" sz="1100" b="1" dirty="0">
-                <a:solidFill>
-                  <a:schemeClr val="bg1"/>
-                </a:solidFill>
-                <a:latin typeface="Cambria" pitchFamily="34" charset="0"/>
-                <a:ea typeface="Cambria" pitchFamily="34" charset="-122"/>
-                <a:cs typeface="Cambria" pitchFamily="34" charset="-120"/>
-              </a:rPr>
-              <a:t>(0.2, 0.8)</a:t>
-            </a:r>
-            <a:endParaRPr lang="en-US" sz="1100" dirty="0"/>
-          </a:p>
-        </p:txBody>
-      </p:sp>
-      <p:sp>
-        <p:nvSpPr>
-          <p:cNvPr id="15" name="pair-label"/>
-          <p:cNvSpPr txBox="1"/>
-          <p:nvPr/>
-        </p:nvSpPr>
-        <p:spPr>
-          <a:xfrm>
-            <a:off x="3017520" y="3931920"/>
-            <a:ext cx="640080" cy="329184"/>
-          </a:xfrm>
-          <a:prstGeom prst="rect">
-            <a:avLst/>
-          </a:prstGeom>
-          <a:noFill/>
-          <a:ln/>
-        </p:spPr>
-        <p:txBody>
-          <a:bodyPr wrap="square" lIns="0" tIns="0" rIns="0" bIns="0" rtlCol="0" anchor="ctr"/>
-          <a:lstStyle/>
-          <a:p>
-            <a:pPr indent="0" marL="0">
-              <a:buNone/>
-            </a:pPr>
-            <a:r>
-              <a:rPr lang="en-US" sz="1100" dirty="0">
-                <a:solidFill>
-                  <a:schemeClr val="accent3"/>
-                </a:solidFill>
-              </a:rPr>
-              <a:t>medium</a:t>
-            </a:r>
-            <a:endParaRPr lang="en-US" sz="1100" dirty="0"/>
-          </a:p>
-        </p:txBody>
-      </p:sp>
-      <p:sp>
-        <p:nvSpPr>
-          <p:cNvPr id="16" name="chip"/>
-          <p:cNvSpPr/>
-          <p:nvPr/>
-        </p:nvSpPr>
-        <p:spPr>
-          <a:xfrm>
-            <a:off x="3657600" y="3931920"/>
-            <a:ext cx="914400" cy="329184"/>
-          </a:xfrm>
-          <a:prstGeom prst="roundRect">
-            <a:avLst>
-              <a:gd name="adj" fmla="val 16667"/>
-            </a:avLst>
-          </a:prstGeom>
-          <a:solidFill>
-            <a:schemeClr val="accent4"/>
-          </a:solidFill>
-          <a:ln w="12700">
-            <a:solidFill>
-              <a:schemeClr val="accent4"/>
-            </a:solidFill>
-            <a:prstDash val="solid"/>
-          </a:ln>
-        </p:spPr>
-      </p:sp>
-      <p:sp>
-        <p:nvSpPr>
-          <p:cNvPr id="17" name="chip-label"/>
-          <p:cNvSpPr txBox="1"/>
-          <p:nvPr/>
-        </p:nvSpPr>
-        <p:spPr>
-          <a:xfrm>
-            <a:off x="3657600" y="3931920"/>
-            <a:ext cx="914400" cy="329184"/>
-          </a:xfrm>
-          <a:prstGeom prst="rect">
-            <a:avLst/>
-          </a:prstGeom>
-          <a:noFill/>
-          <a:ln/>
-        </p:spPr>
-        <p:txBody>
-          <a:bodyPr wrap="square" lIns="0" tIns="0" rIns="0" bIns="0" rtlCol="0" anchor="ctr"/>
-          <a:lstStyle/>
-          <a:p>
-            <a:pPr algn="ctr" indent="0" marL="0">
-              <a:buNone/>
-            </a:pPr>
-            <a:r>
-              <a:rPr lang="en-US" sz="1100" b="1" dirty="0">
-                <a:solidFill>
-                  <a:schemeClr val="tx1"/>
-                </a:solidFill>
-                <a:latin typeface="Cambria" pitchFamily="34" charset="0"/>
-                <a:ea typeface="Cambria" pitchFamily="34" charset="-122"/>
-                <a:cs typeface="Cambria" pitchFamily="34" charset="-120"/>
-              </a:rPr>
-              <a:t>(0.3, 0.5)</a:t>
-            </a:r>
-            <a:endParaRPr lang="en-US" sz="1100" dirty="0"/>
-          </a:p>
-        </p:txBody>
-      </p:sp>
-      <p:sp>
-        <p:nvSpPr>
-          <p:cNvPr id="18" name="pair-label"/>
-          <p:cNvSpPr txBox="1"/>
-          <p:nvPr/>
-        </p:nvSpPr>
-        <p:spPr>
-          <a:xfrm>
-            <a:off x="4617720" y="3931920"/>
-            <a:ext cx="640080" cy="329184"/>
-          </a:xfrm>
-          <a:prstGeom prst="rect">
-            <a:avLst/>
-          </a:prstGeom>
-          <a:noFill/>
-          <a:ln/>
-        </p:spPr>
-        <p:txBody>
-          <a:bodyPr wrap="square" lIns="0" tIns="0" rIns="0" bIns="0" rtlCol="0" anchor="ctr"/>
-          <a:lstStyle/>
-          <a:p>
-            <a:pPr indent="0" marL="0">
-              <a:buNone/>
-            </a:pPr>
-            <a:r>
-              <a:rPr lang="en-US" sz="1100" dirty="0">
-                <a:solidFill>
-                  <a:schemeClr val="accent3"/>
-                </a:solidFill>
-              </a:rPr>
-              <a:t>narrow</a:t>
-            </a:r>
-            <a:endParaRPr lang="en-US" sz="1100" dirty="0"/>
-          </a:p>
-        </p:txBody>
-      </p:sp>
-      <p:sp>
-        <p:nvSpPr>
-          <p:cNvPr id="19" name="mu-note"/>
-          <p:cNvSpPr txBox="1"/>
-          <p:nvPr/>
-        </p:nvSpPr>
-        <p:spPr>
-          <a:xfrm>
-            <a:off x="5303520" y="3611880"/>
-            <a:ext cx="3383280" cy="822960"/>
-          </a:xfrm>
-          <a:prstGeom prst="rect">
-            <a:avLst/>
-          </a:prstGeom>
-          <a:noFill/>
-          <a:ln/>
-        </p:spPr>
-        <p:txBody>
-          <a:bodyPr wrap="square" lIns="0" tIns="0" rIns="0" bIns="0" rtlCol="0" anchor="t"/>
-          <a:lstStyle/>
-          <a:p>
-            <a:pPr indent="0" marL="0">
-              <a:buNone/>
-            </a:pPr>
-            <a:r>
-              <a:rPr lang="en-US" sz="1100" dirty="0">
-                <a:solidFill>
-                  <a:schemeClr val="accent3"/>
-                </a:solidFill>
-              </a:rPr>
-              <a:t>The share of individualists μ is set by a cultural warm-up on the network. </a:t>
-            </a:r>
-            <a:pPr indent="0" marL="0">
-              <a:buNone/>
-            </a:pPr>
-            <a:r>
-              <a:rPr lang="en-US" sz="1100" b="1" dirty="0">
-                <a:solidFill>
-                  <a:srgbClr val="EB6834"/>
-                </a:solidFill>
-              </a:rPr>
-              <a:t>Orange = individualists</a:t>
-            </a:r>
-            <a:pPr indent="0" marL="0">
-              <a:buNone/>
-            </a:pPr>
-            <a:r>
-              <a:rPr lang="en-US" sz="1100" dirty="0">
-                <a:solidFill>
-                  <a:schemeClr val="accent3"/>
-                </a:solidFill>
-              </a:rPr>
-              <a:t>, </a:t>
-            </a:r>
-            <a:pPr indent="0" marL="0">
-              <a:buNone/>
-            </a:pPr>
-            <a:r>
-              <a:rPr lang="en-US" sz="1100" b="1" dirty="0">
-                <a:solidFill>
-                  <a:srgbClr val="2A78D6"/>
-                </a:solidFill>
-              </a:rPr>
-              <a:t>blue = collectivists</a:t>
-            </a:r>
-            <a:pPr indent="0" marL="0">
-              <a:buNone/>
-            </a:pPr>
-            <a:r>
-              <a:rPr lang="en-US" sz="1100" dirty="0">
-                <a:solidFill>
-                  <a:schemeClr val="accent3"/>
-                </a:solidFill>
-              </a:rPr>
-              <a:t> throughout.</a:t>
+              <a:t>difference in slopes (collectivists 0.80, individualists 0.22), t = 16.7</a:t>
             </a:r>
             <a:endParaRPr lang="en-US" sz="1100" dirty="0"/>
           </a:p>
@@ -5234,7 +5401,7 @@
                   <a:schemeClr val="tx2"/>
                 </a:solidFill>
               </a:rPr>
-              <a:t>Collectivists herd</a:t>
+              <a:t>More individualists, fewer failures</a:t>
             </a:r>
             <a:endParaRPr lang="en-US" sz="2400" dirty="0"/>
           </a:p>
@@ -5242,7 +5409,7 @@
       </p:sp>
       <p:pic>
         <p:nvPicPr>
-          <p:cNvPr id="3" name="e07" descr="Chance of withdrawing by share of neighbours who have withdrawn: collectivists jump to near 1 once 20 to 35 percent of neighbours are out; individualists level off near 0.25 to 0.30.">    </p:cNvPr>
+          <p:cNvPr id="3" name="e05" descr="Chance the bank fails by share of individualists: falls from about 0.67 with no individualists to about 0.08 with all individualists for the large difference pair; monotone for every pair.">    </p:cNvPr>
           <p:cNvPicPr>
             <a:picLocks noChangeAspect="1"/>
           </p:cNvPicPr>
@@ -5257,7 +5424,7 @@
         <p:spPr>
           <a:xfrm>
             <a:off x="457200" y="1051560"/>
-            <a:ext cx="5164897" cy="3291840"/>
+            <a:ext cx="4941052" cy="3291840"/>
           </a:xfrm>
           <a:prstGeom prst="rect">
             <a:avLst/>
@@ -5294,7 +5461,7 @@
                   <a:schemeClr val="accent3"/>
                 </a:solidFill>
               </a:rPr>
-              <a:t>Chance of withdrawing, given the share of a depositor’s neighbours who have already withdrawn. λ pairs pooled; reference bank.</a:t>
+              <a:t>Chance the bank fails, by share of individualists μ, one line per λ pair. Includes the pure populations (μ 0 and 1).</a:t>
             </a:r>
             <a:endParaRPr lang="en-US" sz="1000" dirty="0"/>
           </a:p>
@@ -5302,7 +5469,7 @@
       </p:sp>
       <p:sp>
         <p:nvSpPr>
-          <p:cNvPr id="5" name="stat-collectivists, once "/>
+          <p:cNvPr id="5" name="stat-P(fail) from no indi"/>
           <p:cNvSpPr/>
           <p:nvPr/>
         </p:nvSpPr>
@@ -5354,13 +5521,13 @@
             <a:r>
               <a:rPr lang="en-US" sz="2200" b="1" dirty="0">
                 <a:solidFill>
-                  <a:srgbClr val="2A78D6"/>
+                  <a:schemeClr val="accent1"/>
                 </a:solidFill>
                 <a:latin typeface="Cambria" pitchFamily="34" charset="0"/>
                 <a:ea typeface="Cambria" pitchFamily="34" charset="-122"/>
                 <a:cs typeface="Cambria" pitchFamily="34" charset="-120"/>
               </a:rPr>
-              <a:t>0.15 to 0.93</a:t>
+              <a:t>0.67 to 0.08</a:t>
             </a:r>
             <a:endParaRPr lang="en-US" sz="2200" dirty="0"/>
           </a:p>
@@ -5396,7 +5563,7 @@
                   <a:schemeClr val="accent3"/>
                 </a:solidFill>
               </a:rPr>
-              <a:t>collectivists, once 20–35% of their neighbours are out</a:t>
+              <a:t>P(fail) from no individualists to all, wide λ gap</a:t>
             </a:r>
             <a:endParaRPr lang="en-US" sz="1100" dirty="0"/>
           </a:p>
@@ -5404,7 +5571,7 @@
       </p:sp>
       <p:sp>
         <p:nvSpPr>
-          <p:cNvPr id="8" name="stat-where individualists"/>
+          <p:cNvPr id="8" name="stat-the same, narrow λ g"/>
           <p:cNvSpPr/>
           <p:nvPr/>
         </p:nvSpPr>
@@ -5456,13 +5623,13 @@
             <a:r>
               <a:rPr lang="en-US" sz="2200" b="1" dirty="0">
                 <a:solidFill>
-                  <a:srgbClr val="EB6834"/>
+                  <a:schemeClr val="accent1"/>
                 </a:solidFill>
                 <a:latin typeface="Cambria" pitchFamily="34" charset="0"/>
                 <a:ea typeface="Cambria" pitchFamily="34" charset="-122"/>
                 <a:cs typeface="Cambria" pitchFamily="34" charset="-120"/>
               </a:rPr>
-              <a:t>0.25 to 0.30</a:t>
+              <a:t>0.25 to 0.09</a:t>
             </a:r>
             <a:endParaRPr lang="en-US" sz="2200" dirty="0"/>
           </a:p>
@@ -5498,7 +5665,7 @@
                   <a:schemeClr val="accent3"/>
                 </a:solidFill>
               </a:rPr>
-              <a:t>where individualists level off, whatever their neighbours do</a:t>
+              <a:t>the same, narrow λ gap: it matters most when collectivists dominate</a:t>
             </a:r>
             <a:endParaRPr lang="en-US" sz="1100" dirty="0"/>
           </a:p>
@@ -5506,7 +5673,7 @@
       </p:sp>
       <p:sp>
         <p:nvSpPr>
-          <p:cNvPr id="11" name="stat-difference in slopes"/>
+          <p:cNvPr id="11" name="card-Monotone"/>
           <p:cNvSpPr/>
           <p:nvPr/>
         </p:nvSpPr>
@@ -5533,14 +5700,14 @@
       </p:sp>
       <p:sp>
         <p:nvSpPr>
-          <p:cNvPr id="12" name="stat-big"/>
+          <p:cNvPr id="12" name="card-head"/>
           <p:cNvSpPr txBox="1"/>
           <p:nvPr/>
         </p:nvSpPr>
         <p:spPr>
           <a:xfrm>
-            <a:off x="6355080" y="3410712"/>
-            <a:ext cx="2194560" cy="457200"/>
+            <a:off x="6355080" y="3429000"/>
+            <a:ext cx="2194560" cy="292608"/>
           </a:xfrm>
           <a:prstGeom prst="rect">
             <a:avLst/>
@@ -5556,30 +5723,27 @@
               <a:buNone/>
             </a:pPr>
             <a:r>
-              <a:rPr lang="en-US" sz="2600" b="1" dirty="0">
-                <a:solidFill>
-                  <a:schemeClr val="accent1"/>
-                </a:solidFill>
-                <a:latin typeface="Cambria" pitchFamily="34" charset="0"/>
-                <a:ea typeface="Cambria" pitchFamily="34" charset="-122"/>
-                <a:cs typeface="Cambria" pitchFamily="34" charset="-120"/>
-              </a:rPr>
-              <a:t>+0.58</a:t>
-            </a:r>
-            <a:endParaRPr lang="en-US" sz="2600" dirty="0"/>
-          </a:p>
-        </p:txBody>
-      </p:sp>
-      <p:sp>
-        <p:nvSpPr>
-          <p:cNvPr id="13" name="stat-label"/>
+              <a:rPr lang="en-US" sz="1300" b="1" dirty="0">
+                <a:solidFill>
+                  <a:schemeClr val="tx2"/>
+                </a:solidFill>
+              </a:rPr>
+              <a:t>Monotone</a:t>
+            </a:r>
+            <a:endParaRPr lang="en-US" sz="1300" dirty="0"/>
+          </a:p>
+        </p:txBody>
+      </p:sp>
+      <p:sp>
+        <p:nvSpPr>
+          <p:cNvPr id="13" name="card-body"/>
           <p:cNvSpPr txBox="1"/>
           <p:nvPr/>
         </p:nvSpPr>
         <p:spPr>
           <a:xfrm>
-            <a:off x="6355080" y="3886200"/>
-            <a:ext cx="2194560" cy="493776"/>
+            <a:off x="6355080" y="3749040"/>
+            <a:ext cx="2194560" cy="594360"/>
           </a:xfrm>
           <a:prstGeom prst="rect">
             <a:avLst/>
@@ -5595,14 +5759,14 @@
               <a:buNone/>
             </a:pPr>
             <a:r>
-              <a:rPr lang="en-US" sz="1100" dirty="0">
-                <a:solidFill>
-                  <a:schemeClr val="accent3"/>
-                </a:solidFill>
-              </a:rPr>
-              <a:t>difference in slopes (collectivists 0.80, individualists 0.22), t = 16.7</a:t>
-            </a:r>
-            <a:endParaRPr lang="en-US" sz="1100" dirty="0"/>
+              <a:rPr lang="en-US" sz="1150" dirty="0">
+                <a:solidFill>
+                  <a:schemeClr val="tx1"/>
+                </a:solidFill>
+              </a:rPr>
+              <a:t>No interior peak at any mix. The lines converge once individualists are 75% or more.</a:t>
+            </a:r>
+            <a:endParaRPr lang="en-US" sz="1150" dirty="0"/>
           </a:p>
         </p:txBody>
       </p:sp>
@@ -5708,7 +5872,7 @@
                   <a:schemeClr val="tx2"/>
                 </a:solidFill>
               </a:rPr>
-              <a:t>More individualists, fewer failures</a:t>
+              <a:t>Outdated news cuts both ways</a:t>
             </a:r>
             <a:endParaRPr lang="en-US" sz="2400" dirty="0"/>
           </a:p>
@@ -5716,7 +5880,7 @@
       </p:sp>
       <p:pic>
         <p:nvPicPr>
-          <p:cNvPr id="3" name="e05" descr="Chance the bank fails by share of individualists: falls from about 0.67 with no individualists to about 0.08 with all individualists for the large difference pair; monotone for every pair.">    </p:cNvPr>
+          <p:cNvPr id="3" name="e08" descr="Chance the bank fails by kind of public news: outdated pessimistic news raises it to about 0.48, accurate news barely changes it from no news (0.29 vs 0.31), outdated optimistic news lowers it to 0.16.">    </p:cNvPr>
           <p:cNvPicPr>
             <a:picLocks noChangeAspect="1"/>
           </p:cNvPicPr>
@@ -5731,7 +5895,7 @@
         <p:spPr>
           <a:xfrm>
             <a:off x="457200" y="1051560"/>
-            <a:ext cx="4941052" cy="3291840"/>
+            <a:ext cx="5486400" cy="2607605"/>
           </a:xfrm>
           <a:prstGeom prst="rect">
             <a:avLst/>
@@ -5746,7 +5910,7 @@
         </p:nvSpPr>
         <p:spPr>
           <a:xfrm>
-            <a:off x="457200" y="4389120"/>
+            <a:off x="457200" y="3704885"/>
             <a:ext cx="5486400" cy="274320"/>
           </a:xfrm>
           <a:prstGeom prst="rect">
@@ -5768,7 +5932,7 @@
                   <a:schemeClr val="accent3"/>
                 </a:solidFill>
               </a:rPr>
-              <a:t>Chance the bank fails, by share of individualists μ, one line per λ pair. Includes the pure populations (μ 0 and 1).</a:t>
+              <a:t>Chance the bank fails, by the kind of public news, dot and CI per λ pair. All mixes μ. Numbers at right: wide λ gap.</a:t>
             </a:r>
             <a:endParaRPr lang="en-US" sz="1000" dirty="0"/>
           </a:p>
@@ -5776,18 +5940,18 @@
       </p:sp>
       <p:sp>
         <p:nvSpPr>
-          <p:cNvPr id="5" name="stat-P(fail) from no indi"/>
+          <p:cNvPr id="5" name="stat-outdated, pessimisti"/>
           <p:cNvSpPr/>
           <p:nvPr/>
         </p:nvSpPr>
         <p:spPr>
           <a:xfrm>
             <a:off x="6217920" y="1051560"/>
-            <a:ext cx="2468880" cy="1005840"/>
+            <a:ext cx="2468880" cy="777240"/>
           </a:xfrm>
           <a:prstGeom prst="roundRect">
             <a:avLst>
-              <a:gd name="adj" fmla="val 7273"/>
+              <a:gd name="adj" fmla="val 9412"/>
             </a:avLst>
           </a:prstGeom>
           <a:solidFill>
@@ -5810,7 +5974,7 @@
         <p:spPr>
           <a:xfrm>
             <a:off x="6355080" y="1124712"/>
-            <a:ext cx="2194560" cy="457200"/>
+            <a:ext cx="2194560" cy="365760"/>
           </a:xfrm>
           <a:prstGeom prst="rect">
             <a:avLst/>
@@ -5828,13 +5992,13 @@
             <a:r>
               <a:rPr lang="en-US" sz="2200" b="1" dirty="0">
                 <a:solidFill>
-                  <a:schemeClr val="accent1"/>
+                  <a:schemeClr val="accent2"/>
                 </a:solidFill>
                 <a:latin typeface="Cambria" pitchFamily="34" charset="0"/>
                 <a:ea typeface="Cambria" pitchFamily="34" charset="-122"/>
                 <a:cs typeface="Cambria" pitchFamily="34" charset="-120"/>
               </a:rPr>
-              <a:t>0.67 to 0.08</a:t>
+              <a:t>0.48</a:t>
             </a:r>
             <a:endParaRPr lang="en-US" sz="2200" dirty="0"/>
           </a:p>
@@ -5848,8 +6012,8 @@
         </p:nvSpPr>
         <p:spPr>
           <a:xfrm>
-            <a:off x="6355080" y="1600200"/>
-            <a:ext cx="2194560" cy="402336"/>
+            <a:off x="6355080" y="1508760"/>
+            <a:ext cx="2194560" cy="265176"/>
           </a:xfrm>
           <a:prstGeom prst="rect">
             <a:avLst/>
@@ -5870,7 +6034,7 @@
                   <a:schemeClr val="accent3"/>
                 </a:solidFill>
               </a:rPr>
-              <a:t>P(fail) from no individualists to all, wide λ gap</a:t>
+              <a:t>outdated, pessimistic news</a:t>
             </a:r>
             <a:endParaRPr lang="en-US" sz="1100" dirty="0"/>
           </a:p>
@@ -5878,18 +6042,18 @@
       </p:sp>
       <p:sp>
         <p:nvSpPr>
-          <p:cNvPr id="8" name="stat-the same, narrow λ g"/>
+          <p:cNvPr id="8" name="stat-no public news"/>
           <p:cNvSpPr/>
           <p:nvPr/>
         </p:nvSpPr>
         <p:spPr>
           <a:xfrm>
-            <a:off x="6217920" y="2194560"/>
-            <a:ext cx="2468880" cy="1005840"/>
+            <a:off x="6217920" y="1938528"/>
+            <a:ext cx="2468880" cy="777240"/>
           </a:xfrm>
           <a:prstGeom prst="roundRect">
             <a:avLst>
-              <a:gd name="adj" fmla="val 7273"/>
+              <a:gd name="adj" fmla="val 9412"/>
             </a:avLst>
           </a:prstGeom>
           <a:solidFill>
@@ -5911,8 +6075,8 @@
         </p:nvSpPr>
         <p:spPr>
           <a:xfrm>
-            <a:off x="6355080" y="2267712"/>
-            <a:ext cx="2194560" cy="457200"/>
+            <a:off x="6355080" y="2011680"/>
+            <a:ext cx="2194560" cy="365760"/>
           </a:xfrm>
           <a:prstGeom prst="rect">
             <a:avLst/>
@@ -5936,7 +6100,7 @@
                 <a:ea typeface="Cambria" pitchFamily="34" charset="-122"/>
                 <a:cs typeface="Cambria" pitchFamily="34" charset="-120"/>
               </a:rPr>
-              <a:t>0.25 to 0.09</a:t>
+              <a:t>0.31</a:t>
             </a:r>
             <a:endParaRPr lang="en-US" sz="2200" dirty="0"/>
           </a:p>
@@ -5950,8 +6114,8 @@
         </p:nvSpPr>
         <p:spPr>
           <a:xfrm>
-            <a:off x="6355080" y="2743200"/>
-            <a:ext cx="2194560" cy="402336"/>
+            <a:off x="6355080" y="2395728"/>
+            <a:ext cx="2194560" cy="265176"/>
           </a:xfrm>
           <a:prstGeom prst="rect">
             <a:avLst/>
@@ -5972,7 +6136,7 @@
                   <a:schemeClr val="accent3"/>
                 </a:solidFill>
               </a:rPr>
-              <a:t>the same, narrow λ gap: it matters most when collectivists dominate</a:t>
+              <a:t>no public news</a:t>
             </a:r>
             <a:endParaRPr lang="en-US" sz="1100" dirty="0"/>
           </a:p>
@@ -5980,18 +6144,18 @@
       </p:sp>
       <p:sp>
         <p:nvSpPr>
-          <p:cNvPr id="11" name="card-Monotone"/>
+          <p:cNvPr id="11" name="stat-accurate news"/>
           <p:cNvSpPr/>
           <p:nvPr/>
         </p:nvSpPr>
         <p:spPr>
           <a:xfrm>
-            <a:off x="6217920" y="3337560"/>
-            <a:ext cx="2468880" cy="1097280"/>
+            <a:off x="6217920" y="2825496"/>
+            <a:ext cx="2468880" cy="777240"/>
           </a:xfrm>
           <a:prstGeom prst="roundRect">
             <a:avLst>
-              <a:gd name="adj" fmla="val 6667"/>
+              <a:gd name="adj" fmla="val 9412"/>
             </a:avLst>
           </a:prstGeom>
           <a:solidFill>
@@ -6007,14 +6171,14 @@
       </p:sp>
       <p:sp>
         <p:nvSpPr>
-          <p:cNvPr id="12" name="card-head"/>
+          <p:cNvPr id="12" name="stat-big"/>
           <p:cNvSpPr txBox="1"/>
           <p:nvPr/>
         </p:nvSpPr>
         <p:spPr>
           <a:xfrm>
-            <a:off x="6355080" y="3429000"/>
-            <a:ext cx="2194560" cy="292608"/>
+            <a:off x="6355080" y="2898648"/>
+            <a:ext cx="2194560" cy="365760"/>
           </a:xfrm>
           <a:prstGeom prst="rect">
             <a:avLst/>
@@ -6030,27 +6194,30 @@
               <a:buNone/>
             </a:pPr>
             <a:r>
-              <a:rPr lang="en-US" sz="1300" b="1" dirty="0">
-                <a:solidFill>
-                  <a:schemeClr val="tx2"/>
-                </a:solidFill>
-              </a:rPr>
-              <a:t>Monotone</a:t>
-            </a:r>
-            <a:endParaRPr lang="en-US" sz="1300" dirty="0"/>
-          </a:p>
-        </p:txBody>
-      </p:sp>
-      <p:sp>
-        <p:nvSpPr>
-          <p:cNvPr id="13" name="card-body"/>
+              <a:rPr lang="en-US" sz="2200" b="1" dirty="0">
+                <a:solidFill>
+                  <a:schemeClr val="accent1"/>
+                </a:solidFill>
+                <a:latin typeface="Cambria" pitchFamily="34" charset="0"/>
+                <a:ea typeface="Cambria" pitchFamily="34" charset="-122"/>
+                <a:cs typeface="Cambria" pitchFamily="34" charset="-120"/>
+              </a:rPr>
+              <a:t>0.29</a:t>
+            </a:r>
+            <a:endParaRPr lang="en-US" sz="2200" dirty="0"/>
+          </a:p>
+        </p:txBody>
+      </p:sp>
+      <p:sp>
+        <p:nvSpPr>
+          <p:cNvPr id="13" name="stat-label"/>
           <p:cNvSpPr txBox="1"/>
           <p:nvPr/>
         </p:nvSpPr>
         <p:spPr>
           <a:xfrm>
-            <a:off x="6355080" y="3749040"/>
-            <a:ext cx="2194560" cy="594360"/>
+            <a:off x="6355080" y="3282696"/>
+            <a:ext cx="2194560" cy="265176"/>
           </a:xfrm>
           <a:prstGeom prst="rect">
             <a:avLst/>
@@ -6066,14 +6233,116 @@
               <a:buNone/>
             </a:pPr>
             <a:r>
-              <a:rPr lang="en-US" sz="1150" dirty="0">
-                <a:solidFill>
-                  <a:schemeClr val="tx1"/>
-                </a:solidFill>
-              </a:rPr>
-              <a:t>No interior peak at any mix. The lines converge once individualists are 75% or more.</a:t>
-            </a:r>
-            <a:endParaRPr lang="en-US" sz="1150" dirty="0"/>
+              <a:rPr lang="en-US" sz="1100" dirty="0">
+                <a:solidFill>
+                  <a:schemeClr val="accent3"/>
+                </a:solidFill>
+              </a:rPr>
+              <a:t>accurate news</a:t>
+            </a:r>
+            <a:endParaRPr lang="en-US" sz="1100" dirty="0"/>
+          </a:p>
+        </p:txBody>
+      </p:sp>
+      <p:sp>
+        <p:nvSpPr>
+          <p:cNvPr id="14" name="stat-outdated, optimistic"/>
+          <p:cNvSpPr/>
+          <p:nvPr/>
+        </p:nvSpPr>
+        <p:spPr>
+          <a:xfrm>
+            <a:off x="6217920" y="3712464"/>
+            <a:ext cx="2468880" cy="777240"/>
+          </a:xfrm>
+          <a:prstGeom prst="roundRect">
+            <a:avLst>
+              <a:gd name="adj" fmla="val 9412"/>
+            </a:avLst>
+          </a:prstGeom>
+          <a:solidFill>
+            <a:schemeClr val="bg2"/>
+          </a:solidFill>
+          <a:ln w="12700">
+            <a:solidFill>
+              <a:schemeClr val="bg2"/>
+            </a:solidFill>
+            <a:prstDash val="solid"/>
+          </a:ln>
+        </p:spPr>
+      </p:sp>
+      <p:sp>
+        <p:nvSpPr>
+          <p:cNvPr id="15" name="stat-big"/>
+          <p:cNvSpPr txBox="1"/>
+          <p:nvPr/>
+        </p:nvSpPr>
+        <p:spPr>
+          <a:xfrm>
+            <a:off x="6355080" y="3785616"/>
+            <a:ext cx="2194560" cy="365760"/>
+          </a:xfrm>
+          <a:prstGeom prst="rect">
+            <a:avLst/>
+          </a:prstGeom>
+          <a:noFill/>
+          <a:ln/>
+        </p:spPr>
+        <p:txBody>
+          <a:bodyPr wrap="square" lIns="0" tIns="0" rIns="0" bIns="0" rtlCol="0" anchor="ctr"/>
+          <a:lstStyle/>
+          <a:p>
+            <a:pPr indent="0" marL="0">
+              <a:buNone/>
+            </a:pPr>
+            <a:r>
+              <a:rPr lang="en-US" sz="2200" b="1" dirty="0">
+                <a:solidFill>
+                  <a:schemeClr val="accent5"/>
+                </a:solidFill>
+                <a:latin typeface="Cambria" pitchFamily="34" charset="0"/>
+                <a:ea typeface="Cambria" pitchFamily="34" charset="-122"/>
+                <a:cs typeface="Cambria" pitchFamily="34" charset="-120"/>
+              </a:rPr>
+              <a:t>0.16</a:t>
+            </a:r>
+            <a:endParaRPr lang="en-US" sz="2200" dirty="0"/>
+          </a:p>
+        </p:txBody>
+      </p:sp>
+      <p:sp>
+        <p:nvSpPr>
+          <p:cNvPr id="16" name="stat-label"/>
+          <p:cNvSpPr txBox="1"/>
+          <p:nvPr/>
+        </p:nvSpPr>
+        <p:spPr>
+          <a:xfrm>
+            <a:off x="6355080" y="4169664"/>
+            <a:ext cx="2194560" cy="265176"/>
+          </a:xfrm>
+          <a:prstGeom prst="rect">
+            <a:avLst/>
+          </a:prstGeom>
+          <a:noFill/>
+          <a:ln/>
+        </p:spPr>
+        <p:txBody>
+          <a:bodyPr wrap="square" lIns="0" tIns="0" rIns="0" bIns="0" rtlCol="0" anchor="t"/>
+          <a:lstStyle/>
+          <a:p>
+            <a:pPr indent="0" marL="0">
+              <a:buNone/>
+            </a:pPr>
+            <a:r>
+              <a:rPr lang="en-US" sz="1100" dirty="0">
+                <a:solidFill>
+                  <a:schemeClr val="accent3"/>
+                </a:solidFill>
+              </a:rPr>
+              <a:t>outdated, optimistic news</a:t>
+            </a:r>
+            <a:endParaRPr lang="en-US" sz="1100" dirty="0"/>
           </a:p>
         </p:txBody>
       </p:sp>
@@ -6179,7 +6448,7 @@
                   <a:schemeClr val="tx2"/>
                 </a:solidFill>
               </a:rPr>
-              <a:t>Outdated news cuts both ways</a:t>
+              <a:t>Capping the largest deposits</a:t>
             </a:r>
             <a:endParaRPr lang="en-US" sz="2400" dirty="0"/>
           </a:p>
@@ -6187,7 +6456,7 @@
       </p:sp>
       <p:pic>
         <p:nvPicPr>
-          <p:cNvPr id="3" name="e08" descr="Chance the bank fails by kind of public news: outdated pessimistic news raises it to about 0.48, accurate news barely changes it from no news (0.29 vs 0.31), outdated optimistic news lowers it to 0.16.">    </p:cNvPr>
+          <p:cNvPr id="3" name="e10" descr="Chance the bank fails by share of individualists for three deposit-size distributions: uncapped large deposits fail most often; capped at 1 percent matches the bank with similar-sized deposits at every share.">    </p:cNvPr>
           <p:cNvPicPr>
             <a:picLocks noChangeAspect="1"/>
           </p:cNvPicPr>
@@ -6202,7 +6471,7 @@
         <p:spPr>
           <a:xfrm>
             <a:off x="457200" y="1051560"/>
-            <a:ext cx="5486400" cy="2607605"/>
+            <a:ext cx="4941052" cy="3291840"/>
           </a:xfrm>
           <a:prstGeom prst="rect">
             <a:avLst/>
@@ -6217,7 +6486,7 @@
         </p:nvSpPr>
         <p:spPr>
           <a:xfrm>
-            <a:off x="457200" y="3704885"/>
+            <a:off x="457200" y="4389120"/>
             <a:ext cx="5486400" cy="274320"/>
           </a:xfrm>
           <a:prstGeom prst="rect">
@@ -6239,7 +6508,7 @@
                   <a:schemeClr val="accent3"/>
                 </a:solidFill>
               </a:rPr>
-              <a:t>Chance the bank fails, by the kind of public news, dot and CI per λ pair. All mixes μ. Numbers at right: wide λ gap.</a:t>
+              <a:t>Chance the bank fails by share of individualists, for three deposit-size distributions. λ pairs pooled.</a:t>
             </a:r>
             <a:endParaRPr lang="en-US" sz="1000" dirty="0"/>
           </a:p>
@@ -6247,18 +6516,18 @@
       </p:sp>
       <p:sp>
         <p:nvSpPr>
-          <p:cNvPr id="5" name="stat-outdated, pessimisti"/>
+          <p:cNvPr id="5" name="stat-uncapped: a few very"/>
           <p:cNvSpPr/>
           <p:nvPr/>
         </p:nvSpPr>
         <p:spPr>
           <a:xfrm>
             <a:off x="6217920" y="1051560"/>
-            <a:ext cx="2468880" cy="777240"/>
+            <a:ext cx="2468880" cy="1005840"/>
           </a:xfrm>
           <a:prstGeom prst="roundRect">
             <a:avLst>
-              <a:gd name="adj" fmla="val 9412"/>
+              <a:gd name="adj" fmla="val 7273"/>
             </a:avLst>
           </a:prstGeom>
           <a:solidFill>
@@ -6281,7 +6550,7 @@
         <p:spPr>
           <a:xfrm>
             <a:off x="6355080" y="1124712"/>
-            <a:ext cx="2194560" cy="365760"/>
+            <a:ext cx="2194560" cy="457200"/>
           </a:xfrm>
           <a:prstGeom prst="rect">
             <a:avLst/>
@@ -6305,7 +6574,7 @@
                 <a:ea typeface="Cambria" pitchFamily="34" charset="-122"/>
                 <a:cs typeface="Cambria" pitchFamily="34" charset="-120"/>
               </a:rPr>
-              <a:t>0.48</a:t>
+              <a:t>0.61 to 0.11</a:t>
             </a:r>
             <a:endParaRPr lang="en-US" sz="2200" dirty="0"/>
           </a:p>
@@ -6319,8 +6588,8 @@
         </p:nvSpPr>
         <p:spPr>
           <a:xfrm>
-            <a:off x="6355080" y="1508760"/>
-            <a:ext cx="2194560" cy="265176"/>
+            <a:off x="6355080" y="1600200"/>
+            <a:ext cx="2194560" cy="402336"/>
           </a:xfrm>
           <a:prstGeom prst="rect">
             <a:avLst/>
@@ -6341,7 +6610,7 @@
                   <a:schemeClr val="accent3"/>
                 </a:solidFill>
               </a:rPr>
-              <a:t>outdated, pessimistic news</a:t>
+              <a:t>uncapped: a few very large deposits (σ 2.5)</a:t>
             </a:r>
             <a:endParaRPr lang="en-US" sz="1100" dirty="0"/>
           </a:p>
@@ -6349,18 +6618,18 @@
       </p:sp>
       <p:sp>
         <p:nvSpPr>
-          <p:cNvPr id="8" name="stat-no public news"/>
+          <p:cNvPr id="8" name="stat-capped: no deposit a"/>
           <p:cNvSpPr/>
           <p:nvPr/>
         </p:nvSpPr>
         <p:spPr>
           <a:xfrm>
-            <a:off x="6217920" y="1938528"/>
-            <a:ext cx="2468880" cy="777240"/>
+            <a:off x="6217920" y="2194560"/>
+            <a:ext cx="2468880" cy="1005840"/>
           </a:xfrm>
           <a:prstGeom prst="roundRect">
             <a:avLst>
-              <a:gd name="adj" fmla="val 9412"/>
+              <a:gd name="adj" fmla="val 7273"/>
             </a:avLst>
           </a:prstGeom>
           <a:solidFill>
@@ -6382,8 +6651,8 @@
         </p:nvSpPr>
         <p:spPr>
           <a:xfrm>
-            <a:off x="6355080" y="2011680"/>
-            <a:ext cx="2194560" cy="365760"/>
+            <a:off x="6355080" y="2267712"/>
+            <a:ext cx="2194560" cy="457200"/>
           </a:xfrm>
           <a:prstGeom prst="rect">
             <a:avLst/>
@@ -6407,7 +6676,7 @@
                 <a:ea typeface="Cambria" pitchFamily="34" charset="-122"/>
                 <a:cs typeface="Cambria" pitchFamily="34" charset="-120"/>
               </a:rPr>
-              <a:t>0.31</a:t>
+              <a:t>0.51 to 0.08</a:t>
             </a:r>
             <a:endParaRPr lang="en-US" sz="2200" dirty="0"/>
           </a:p>
@@ -6421,8 +6690,8 @@
         </p:nvSpPr>
         <p:spPr>
           <a:xfrm>
-            <a:off x="6355080" y="2395728"/>
-            <a:ext cx="2194560" cy="265176"/>
+            <a:off x="6355080" y="2743200"/>
+            <a:ext cx="2194560" cy="402336"/>
           </a:xfrm>
           <a:prstGeom prst="rect">
             <a:avLst/>
@@ -6443,7 +6712,7 @@
                   <a:schemeClr val="accent3"/>
                 </a:solidFill>
               </a:rPr>
-              <a:t>no public news</a:t>
+              <a:t>capped: no deposit above 1% of the total (the reference bank)</a:t>
             </a:r>
             <a:endParaRPr lang="en-US" sz="1100" dirty="0"/>
           </a:p>
@@ -6451,18 +6720,18 @@
       </p:sp>
       <p:sp>
         <p:nvSpPr>
-          <p:cNvPr id="11" name="stat-accurate news"/>
+          <p:cNvPr id="11" name="stat-similar sizes (σ 1)."/>
           <p:cNvSpPr/>
           <p:nvPr/>
         </p:nvSpPr>
         <p:spPr>
           <a:xfrm>
-            <a:off x="6217920" y="2825496"/>
-            <a:ext cx="2468880" cy="777240"/>
+            <a:off x="6217920" y="3337560"/>
+            <a:ext cx="2468880" cy="1097280"/>
           </a:xfrm>
           <a:prstGeom prst="roundRect">
             <a:avLst>
-              <a:gd name="adj" fmla="val 9412"/>
+              <a:gd name="adj" fmla="val 6667"/>
             </a:avLst>
           </a:prstGeom>
           <a:solidFill>
@@ -6484,8 +6753,8 @@
         </p:nvSpPr>
         <p:spPr>
           <a:xfrm>
-            <a:off x="6355080" y="2898648"/>
-            <a:ext cx="2194560" cy="365760"/>
+            <a:off x="6355080" y="3410712"/>
+            <a:ext cx="2194560" cy="457200"/>
           </a:xfrm>
           <a:prstGeom prst="rect">
             <a:avLst/>
@@ -6503,13 +6772,13 @@
             <a:r>
               <a:rPr lang="en-US" sz="2200" b="1" dirty="0">
                 <a:solidFill>
-                  <a:schemeClr val="accent1"/>
+                  <a:schemeClr val="accent3"/>
                 </a:solidFill>
                 <a:latin typeface="Cambria" pitchFamily="34" charset="0"/>
                 <a:ea typeface="Cambria" pitchFamily="34" charset="-122"/>
                 <a:cs typeface="Cambria" pitchFamily="34" charset="-120"/>
               </a:rPr>
-              <a:t>0.29</a:t>
+              <a:t>0.50 to 0.08</a:t>
             </a:r>
             <a:endParaRPr lang="en-US" sz="2200" dirty="0"/>
           </a:p>
@@ -6523,8 +6792,8 @@
         </p:nvSpPr>
         <p:spPr>
           <a:xfrm>
-            <a:off x="6355080" y="3282696"/>
-            <a:ext cx="2194560" cy="265176"/>
+            <a:off x="6355080" y="3886200"/>
+            <a:ext cx="2194560" cy="493776"/>
           </a:xfrm>
           <a:prstGeom prst="rect">
             <a:avLst/>
@@ -6545,109 +6814,7 @@
                   <a:schemeClr val="accent3"/>
                 </a:solidFill>
               </a:rPr>
-              <a:t>accurate news</a:t>
-            </a:r>
-            <a:endParaRPr lang="en-US" sz="1100" dirty="0"/>
-          </a:p>
-        </p:txBody>
-      </p:sp>
-      <p:sp>
-        <p:nvSpPr>
-          <p:cNvPr id="14" name="stat-outdated, optimistic"/>
-          <p:cNvSpPr/>
-          <p:nvPr/>
-        </p:nvSpPr>
-        <p:spPr>
-          <a:xfrm>
-            <a:off x="6217920" y="3712464"/>
-            <a:ext cx="2468880" cy="777240"/>
-          </a:xfrm>
-          <a:prstGeom prst="roundRect">
-            <a:avLst>
-              <a:gd name="adj" fmla="val 9412"/>
-            </a:avLst>
-          </a:prstGeom>
-          <a:solidFill>
-            <a:schemeClr val="bg2"/>
-          </a:solidFill>
-          <a:ln w="12700">
-            <a:solidFill>
-              <a:schemeClr val="bg2"/>
-            </a:solidFill>
-            <a:prstDash val="solid"/>
-          </a:ln>
-        </p:spPr>
-      </p:sp>
-      <p:sp>
-        <p:nvSpPr>
-          <p:cNvPr id="15" name="stat-big"/>
-          <p:cNvSpPr txBox="1"/>
-          <p:nvPr/>
-        </p:nvSpPr>
-        <p:spPr>
-          <a:xfrm>
-            <a:off x="6355080" y="3785616"/>
-            <a:ext cx="2194560" cy="365760"/>
-          </a:xfrm>
-          <a:prstGeom prst="rect">
-            <a:avLst/>
-          </a:prstGeom>
-          <a:noFill/>
-          <a:ln/>
-        </p:spPr>
-        <p:txBody>
-          <a:bodyPr wrap="square" lIns="0" tIns="0" rIns="0" bIns="0" rtlCol="0" anchor="ctr"/>
-          <a:lstStyle/>
-          <a:p>
-            <a:pPr indent="0" marL="0">
-              <a:buNone/>
-            </a:pPr>
-            <a:r>
-              <a:rPr lang="en-US" sz="2200" b="1" dirty="0">
-                <a:solidFill>
-                  <a:schemeClr val="accent5"/>
-                </a:solidFill>
-                <a:latin typeface="Cambria" pitchFamily="34" charset="0"/>
-                <a:ea typeface="Cambria" pitchFamily="34" charset="-122"/>
-                <a:cs typeface="Cambria" pitchFamily="34" charset="-120"/>
-              </a:rPr>
-              <a:t>0.16</a:t>
-            </a:r>
-            <a:endParaRPr lang="en-US" sz="2200" dirty="0"/>
-          </a:p>
-        </p:txBody>
-      </p:sp>
-      <p:sp>
-        <p:nvSpPr>
-          <p:cNvPr id="16" name="stat-label"/>
-          <p:cNvSpPr txBox="1"/>
-          <p:nvPr/>
-        </p:nvSpPr>
-        <p:spPr>
-          <a:xfrm>
-            <a:off x="6355080" y="4169664"/>
-            <a:ext cx="2194560" cy="265176"/>
-          </a:xfrm>
-          <a:prstGeom prst="rect">
-            <a:avLst/>
-          </a:prstGeom>
-          <a:noFill/>
-          <a:ln/>
-        </p:spPr>
-        <p:txBody>
-          <a:bodyPr wrap="square" lIns="0" tIns="0" rIns="0" bIns="0" rtlCol="0" anchor="t"/>
-          <a:lstStyle/>
-          <a:p>
-            <a:pPr indent="0" marL="0">
-              <a:buNone/>
-            </a:pPr>
-            <a:r>
-              <a:rPr lang="en-US" sz="1100" dirty="0">
-                <a:solidFill>
-                  <a:schemeClr val="accent3"/>
-                </a:solidFill>
-              </a:rPr>
-              <a:t>outdated, optimistic news</a:t>
+              <a:t>similar sizes (σ 1). The μ gradient is the same in all three.</a:t>
             </a:r>
             <a:endParaRPr lang="en-US" sz="1100" dirty="0"/>
           </a:p>
@@ -6755,7 +6922,7 @@
                   <a:schemeClr val="tx2"/>
                 </a:solidFill>
               </a:rPr>
-              <a:t>Capping the largest deposits</a:t>
+              <a:t>Does the model hold up?</a:t>
             </a:r>
             <a:endParaRPr lang="en-US" sz="2400" dirty="0"/>
           </a:p>
@@ -6763,7 +6930,7 @@
       </p:sp>
       <p:pic>
         <p:nvPicPr>
-          <p:cNvPr id="3" name="e10" descr="Chance the bank fails by share of individualists for three deposit-size distributions: uncapped large deposits fail most often; capped at 1 percent matches the bank with similar-sized deposits at every share.">    </p:cNvPr>
+          <p:cNvPr id="3" name="e01" descr="Individualists' run rate minus collectivists', relative to no news, against how far public news is from the truth: rises from negative when news is pessimistic to positive when optimistic, more steeply for the wide lambda gap.">    </p:cNvPr>
           <p:cNvPicPr>
             <a:picLocks noChangeAspect="1"/>
           </p:cNvPicPr>
@@ -6778,7 +6945,7 @@
         <p:spPr>
           <a:xfrm>
             <a:off x="457200" y="1051560"/>
-            <a:ext cx="4941052" cy="3291840"/>
+            <a:ext cx="5145146" cy="3291840"/>
           </a:xfrm>
           <a:prstGeom prst="rect">
             <a:avLst/>
@@ -6815,7 +6982,7 @@
                   <a:schemeClr val="accent3"/>
                 </a:solidFill>
               </a:rPr>
-              <a:t>Chance the bank fails by share of individualists, for three deposit-size distributions. λ pairs pooled.</a:t>
+              <a:t>D relative to no news, against how far the public news sits from the truth. Shaded: where Chapter 1 predicts the sign.</a:t>
             </a:r>
             <a:endParaRPr lang="en-US" sz="1000" dirty="0"/>
           </a:p>
@@ -6823,18 +6990,18 @@
       </p:sp>
       <p:sp>
         <p:nvSpPr>
-          <p:cNvPr id="5" name="stat-uncapped: a few very"/>
+          <p:cNvPr id="5" name="tests"/>
           <p:cNvSpPr/>
           <p:nvPr/>
         </p:nvSpPr>
         <p:spPr>
           <a:xfrm>
             <a:off x="6217920" y="1051560"/>
-            <a:ext cx="2468880" cy="1005840"/>
+            <a:ext cx="2468880" cy="2103120"/>
           </a:xfrm>
           <a:prstGeom prst="roundRect">
             <a:avLst>
-              <a:gd name="adj" fmla="val 7273"/>
+              <a:gd name="adj" fmla="val 3478"/>
             </a:avLst>
           </a:prstGeom>
           <a:solidFill>
@@ -6850,93 +7017,122 @@
       </p:sp>
       <p:sp>
         <p:nvSpPr>
-          <p:cNvPr id="6" name="stat-big"/>
+          <p:cNvPr id="6" name="tests-text"/>
           <p:cNvSpPr txBox="1"/>
           <p:nvPr/>
         </p:nvSpPr>
         <p:spPr>
           <a:xfrm>
-            <a:off x="6355080" y="1124712"/>
-            <a:ext cx="2194560" cy="457200"/>
-          </a:xfrm>
-          <a:prstGeom prst="rect">
-            <a:avLst/>
-          </a:prstGeom>
-          <a:noFill/>
-          <a:ln/>
-        </p:spPr>
-        <p:txBody>
-          <a:bodyPr wrap="square" lIns="0" tIns="0" rIns="0" bIns="0" rtlCol="0" anchor="ctr"/>
+            <a:off x="6355080" y="1143000"/>
+            <a:ext cx="2194560" cy="1920240"/>
+          </a:xfrm>
+          <a:prstGeom prst="rect">
+            <a:avLst/>
+          </a:prstGeom>
+          <a:noFill/>
+          <a:ln/>
+        </p:spPr>
+        <p:txBody>
+          <a:bodyPr wrap="square" lIns="0" tIns="0" rIns="0" bIns="0" rtlCol="0" anchor="t"/>
           <a:lstStyle/>
           <a:p>
             <a:pPr indent="0" marL="0">
-              <a:buNone/>
-            </a:pPr>
-            <a:r>
-              <a:rPr lang="en-US" sz="2200" b="1" dirty="0">
+              <a:spcAft>
+                <a:spcPts val="600"/>
+              </a:spcAft>
+              <a:buNone/>
+            </a:pPr>
+            <a:r>
+              <a:rPr lang="en-US" sz="1300" b="1" dirty="0">
+                <a:solidFill>
+                  <a:schemeClr val="tx2"/>
+                </a:solidFill>
+              </a:rPr>
+              <a:t>Pre-registered tests</a:t>
+            </a:r>
+            <a:endParaRPr lang="en-US" sz="1050" dirty="0"/>
+          </a:p>
+          <a:p>
+            <a:pPr indent="0" marL="0">
+              <a:spcAft>
+                <a:spcPts val="300"/>
+              </a:spcAft>
+              <a:buNone/>
+            </a:pPr>
+            <a:r>
+              <a:rPr lang="en-US" sz="1050" dirty="0">
+                <a:solidFill>
+                  <a:schemeClr val="tx1"/>
+                </a:solidFill>
+              </a:rPr>
+              <a:t>G1′  optimistic news: individualists run more   +0.033</a:t>
+            </a:r>
+            <a:endParaRPr lang="en-US" sz="1050" dirty="0"/>
+          </a:p>
+          <a:p>
+            <a:pPr indent="0" marL="0">
+              <a:spcAft>
+                <a:spcPts val="300"/>
+              </a:spcAft>
+              <a:buNone/>
+            </a:pPr>
+            <a:r>
+              <a:rPr lang="en-US" sz="1050" dirty="0">
+                <a:solidFill>
+                  <a:schemeClr val="tx1"/>
+                </a:solidFill>
+              </a:rPr>
+              <a:t>G4′  pessimistic news: collectivists run more   −0.031</a:t>
+            </a:r>
+            <a:endParaRPr lang="en-US" sz="1050" dirty="0"/>
+          </a:p>
+          <a:p>
+            <a:pPr indent="0" marL="0">
+              <a:spcAft>
+                <a:spcPts val="300"/>
+              </a:spcAft>
+              <a:buNone/>
+            </a:pPr>
+            <a:r>
+              <a:rPr lang="en-US" sz="1050" dirty="0">
+                <a:solidFill>
+                  <a:schemeClr val="tx1"/>
+                </a:solidFill>
+              </a:rPr>
+              <a:t>G2a′  the effect grows with the λ gap   +0.093</a:t>
+            </a:r>
+            <a:endParaRPr lang="en-US" sz="1050" dirty="0"/>
+          </a:p>
+          <a:p>
+            <a:pPr indent="0" marL="0">
+              <a:buNone/>
+            </a:pPr>
+            <a:r>
+              <a:rPr lang="en-US" sz="1050" dirty="0">
                 <a:solidFill>
                   <a:schemeClr val="accent2"/>
                 </a:solidFill>
-                <a:latin typeface="Cambria" pitchFamily="34" charset="0"/>
-                <a:ea typeface="Cambria" pitchFamily="34" charset="-122"/>
-                <a:cs typeface="Cambria" pitchFamily="34" charset="-120"/>
-              </a:rPr>
-              <a:t>0.61 to 0.11</a:t>
-            </a:r>
-            <a:endParaRPr lang="en-US" sz="2200" dirty="0"/>
-          </a:p>
-        </p:txBody>
-      </p:sp>
-      <p:sp>
-        <p:nvSpPr>
-          <p:cNvPr id="7" name="stat-label"/>
-          <p:cNvSpPr txBox="1"/>
-          <p:nvPr/>
-        </p:nvSpPr>
-        <p:spPr>
-          <a:xfrm>
-            <a:off x="6355080" y="1600200"/>
-            <a:ext cx="2194560" cy="402336"/>
-          </a:xfrm>
-          <a:prstGeom prst="rect">
-            <a:avLst/>
-          </a:prstGeom>
-          <a:noFill/>
-          <a:ln/>
-        </p:spPr>
-        <p:txBody>
-          <a:bodyPr wrap="square" lIns="0" tIns="0" rIns="0" bIns="0" rtlCol="0" anchor="t"/>
-          <a:lstStyle/>
-          <a:p>
-            <a:pPr indent="0" marL="0">
-              <a:buNone/>
-            </a:pPr>
-            <a:r>
-              <a:rPr lang="en-US" sz="1100" dirty="0">
-                <a:solidFill>
-                  <a:schemeClr val="accent3"/>
-                </a:solidFill>
-              </a:rPr>
-              <a:t>uncapped: a few very large deposits (σ 2.5)</a:t>
-            </a:r>
-            <a:endParaRPr lang="en-US" sz="1100" dirty="0"/>
-          </a:p>
-        </p:txBody>
-      </p:sp>
-      <p:sp>
-        <p:nvSpPr>
-          <p:cNvPr id="8" name="stat-capped: no deposit a"/>
+              </a:rPr>
+              <a:t>G3  sorting with no news: counts against (one pair wrong-signed)</a:t>
+            </a:r>
+            <a:endParaRPr lang="en-US" sz="1050" dirty="0"/>
+          </a:p>
+        </p:txBody>
+      </p:sp>
+      <p:sp>
+        <p:nvSpPr>
+          <p:cNvPr id="7" name="stat-confirmatory tests s"/>
           <p:cNvSpPr/>
           <p:nvPr/>
         </p:nvSpPr>
         <p:spPr>
           <a:xfrm>
-            <a:off x="6217920" y="2194560"/>
-            <a:ext cx="2468880" cy="1005840"/>
+            <a:off x="6217920" y="3291840"/>
+            <a:ext cx="2468880" cy="1143000"/>
           </a:xfrm>
           <a:prstGeom prst="roundRect">
             <a:avLst>
-              <a:gd name="adj" fmla="val 7273"/>
+              <a:gd name="adj" fmla="val 6400"/>
             </a:avLst>
           </a:prstGeom>
           <a:solidFill>
@@ -6952,13 +7148,13 @@
       </p:sp>
       <p:sp>
         <p:nvSpPr>
-          <p:cNvPr id="9" name="stat-big"/>
+          <p:cNvPr id="8" name="stat-big"/>
           <p:cNvSpPr txBox="1"/>
           <p:nvPr/>
         </p:nvSpPr>
         <p:spPr>
           <a:xfrm>
-            <a:off x="6355080" y="2267712"/>
+            <a:off x="6355080" y="3364992"/>
             <a:ext cx="2194560" cy="457200"/>
           </a:xfrm>
           <a:prstGeom prst="rect">
@@ -6975,7 +7171,7 @@
               <a:buNone/>
             </a:pPr>
             <a:r>
-              <a:rPr lang="en-US" sz="2200" b="1" dirty="0">
+              <a:rPr lang="en-US" sz="2600" b="1" dirty="0">
                 <a:solidFill>
                   <a:schemeClr val="accent1"/>
                 </a:solidFill>
@@ -6983,22 +7179,22 @@
                 <a:ea typeface="Cambria" pitchFamily="34" charset="-122"/>
                 <a:cs typeface="Cambria" pitchFamily="34" charset="-120"/>
               </a:rPr>
-              <a:t>0.51 to 0.08</a:t>
-            </a:r>
-            <a:endParaRPr lang="en-US" sz="2200" dirty="0"/>
-          </a:p>
-        </p:txBody>
-      </p:sp>
-      <p:sp>
-        <p:nvSpPr>
-          <p:cNvPr id="10" name="stat-label"/>
+              <a:t>3 of 4</a:t>
+            </a:r>
+            <a:endParaRPr lang="en-US" sz="2600" dirty="0"/>
+          </a:p>
+        </p:txBody>
+      </p:sp>
+      <p:sp>
+        <p:nvSpPr>
+          <p:cNvPr id="9" name="stat-label"/>
           <p:cNvSpPr txBox="1"/>
           <p:nvPr/>
         </p:nvSpPr>
         <p:spPr>
           <a:xfrm>
-            <a:off x="6355080" y="2743200"/>
-            <a:ext cx="2194560" cy="402336"/>
+            <a:off x="6355080" y="3840480"/>
+            <a:ext cx="2194560" cy="539496"/>
           </a:xfrm>
           <a:prstGeom prst="rect">
             <a:avLst/>
@@ -7019,109 +7215,7 @@
                   <a:schemeClr val="accent3"/>
                 </a:solidFill>
               </a:rPr>
-              <a:t>capped: no deposit above 1% of the total (the reference bank)</a:t>
-            </a:r>
-            <a:endParaRPr lang="en-US" sz="1100" dirty="0"/>
-          </a:p>
-        </p:txBody>
-      </p:sp>
-      <p:sp>
-        <p:nvSpPr>
-          <p:cNvPr id="11" name="stat-similar sizes (σ 1)."/>
-          <p:cNvSpPr/>
-          <p:nvPr/>
-        </p:nvSpPr>
-        <p:spPr>
-          <a:xfrm>
-            <a:off x="6217920" y="3337560"/>
-            <a:ext cx="2468880" cy="1097280"/>
-          </a:xfrm>
-          <a:prstGeom prst="roundRect">
-            <a:avLst>
-              <a:gd name="adj" fmla="val 6667"/>
-            </a:avLst>
-          </a:prstGeom>
-          <a:solidFill>
-            <a:schemeClr val="bg2"/>
-          </a:solidFill>
-          <a:ln w="12700">
-            <a:solidFill>
-              <a:schemeClr val="bg2"/>
-            </a:solidFill>
-            <a:prstDash val="solid"/>
-          </a:ln>
-        </p:spPr>
-      </p:sp>
-      <p:sp>
-        <p:nvSpPr>
-          <p:cNvPr id="12" name="stat-big"/>
-          <p:cNvSpPr txBox="1"/>
-          <p:nvPr/>
-        </p:nvSpPr>
-        <p:spPr>
-          <a:xfrm>
-            <a:off x="6355080" y="3410712"/>
-            <a:ext cx="2194560" cy="457200"/>
-          </a:xfrm>
-          <a:prstGeom prst="rect">
-            <a:avLst/>
-          </a:prstGeom>
-          <a:noFill/>
-          <a:ln/>
-        </p:spPr>
-        <p:txBody>
-          <a:bodyPr wrap="square" lIns="0" tIns="0" rIns="0" bIns="0" rtlCol="0" anchor="ctr"/>
-          <a:lstStyle/>
-          <a:p>
-            <a:pPr indent="0" marL="0">
-              <a:buNone/>
-            </a:pPr>
-            <a:r>
-              <a:rPr lang="en-US" sz="2200" b="1" dirty="0">
-                <a:solidFill>
-                  <a:schemeClr val="accent3"/>
-                </a:solidFill>
-                <a:latin typeface="Cambria" pitchFamily="34" charset="0"/>
-                <a:ea typeface="Cambria" pitchFamily="34" charset="-122"/>
-                <a:cs typeface="Cambria" pitchFamily="34" charset="-120"/>
-              </a:rPr>
-              <a:t>0.50 to 0.08</a:t>
-            </a:r>
-            <a:endParaRPr lang="en-US" sz="2200" dirty="0"/>
-          </a:p>
-        </p:txBody>
-      </p:sp>
-      <p:sp>
-        <p:nvSpPr>
-          <p:cNvPr id="13" name="stat-label"/>
-          <p:cNvSpPr txBox="1"/>
-          <p:nvPr/>
-        </p:nvSpPr>
-        <p:spPr>
-          <a:xfrm>
-            <a:off x="6355080" y="3886200"/>
-            <a:ext cx="2194560" cy="493776"/>
-          </a:xfrm>
-          <a:prstGeom prst="rect">
-            <a:avLst/>
-          </a:prstGeom>
-          <a:noFill/>
-          <a:ln/>
-        </p:spPr>
-        <p:txBody>
-          <a:bodyPr wrap="square" lIns="0" tIns="0" rIns="0" bIns="0" rtlCol="0" anchor="t"/>
-          <a:lstStyle/>
-          <a:p>
-            <a:pPr indent="0" marL="0">
-              <a:buNone/>
-            </a:pPr>
-            <a:r>
-              <a:rPr lang="en-US" sz="1100" dirty="0">
-                <a:solidFill>
-                  <a:schemeClr val="accent3"/>
-                </a:solidFill>
-              </a:rPr>
-              <a:t>similar sizes (σ 1). The μ gradient is the same in all three.</a:t>
+              <a:t>confirmatory tests support the theory, on all three versions of the bank</a:t>
             </a:r>
             <a:endParaRPr lang="en-US" sz="1100" dirty="0"/>
           </a:p>
@@ -7229,86 +7323,26 @@
                   <a:schemeClr val="tx2"/>
                 </a:solidFill>
               </a:rPr>
-              <a:t>Does the model hold up?</a:t>
+              <a:t>Takeaways and next steps</a:t>
             </a:r>
             <a:endParaRPr lang="en-US" sz="2400" dirty="0"/>
           </a:p>
         </p:txBody>
       </p:sp>
-      <p:pic>
-        <p:nvPicPr>
-          <p:cNvPr id="3" name="e01" descr="Individualists' run rate minus collectivists', relative to no news, against how far public news is from the truth: rises from negative when news is pessimistic to positive when optimistic, more steeply for the wide lambda gap.">    </p:cNvPr>
-          <p:cNvPicPr>
-            <a:picLocks noChangeAspect="1"/>
-          </p:cNvPicPr>
-          <p:nvPr/>
-        </p:nvPicPr>
-        <p:blipFill>
-          <a:blip r:embed="rId1"/>
-          <a:stretch>
-            <a:fillRect/>
-          </a:stretch>
-        </p:blipFill>
+      <p:sp>
+        <p:nvSpPr>
+          <p:cNvPr id="3" name="take-0"/>
+          <p:cNvSpPr/>
+          <p:nvPr/>
+        </p:nvSpPr>
         <p:spPr>
           <a:xfrm>
             <a:off x="457200" y="1051560"/>
-            <a:ext cx="5145146" cy="3291840"/>
-          </a:xfrm>
-          <a:prstGeom prst="rect">
-            <a:avLst/>
-          </a:prstGeom>
-        </p:spPr>
-      </p:pic>
-      <p:sp>
-        <p:nvSpPr>
-          <p:cNvPr id="4" name="caption"/>
-          <p:cNvSpPr txBox="1"/>
-          <p:nvPr/>
-        </p:nvSpPr>
-        <p:spPr>
-          <a:xfrm>
-            <a:off x="457200" y="4389120"/>
-            <a:ext cx="5486400" cy="274320"/>
-          </a:xfrm>
-          <a:prstGeom prst="rect">
-            <a:avLst/>
-          </a:prstGeom>
-          <a:noFill/>
-          <a:ln/>
-        </p:spPr>
-        <p:txBody>
-          <a:bodyPr wrap="square" lIns="0" tIns="0" rIns="0" bIns="0" rtlCol="0" anchor="ctr"/>
-          <a:lstStyle/>
-          <a:p>
-            <a:pPr indent="0" marL="0">
-              <a:buNone/>
-            </a:pPr>
-            <a:r>
-              <a:rPr lang="en-US" sz="1000" i="1" dirty="0">
-                <a:solidFill>
-                  <a:schemeClr val="accent3"/>
-                </a:solidFill>
-              </a:rPr>
-              <a:t>D relative to no news, against how far the public news sits from the truth. Shaded: where Chapter 1 predicts the sign.</a:t>
-            </a:r>
-            <a:endParaRPr lang="en-US" sz="1000" dirty="0"/>
-          </a:p>
-        </p:txBody>
-      </p:sp>
-      <p:sp>
-        <p:nvSpPr>
-          <p:cNvPr id="5" name="tests"/>
-          <p:cNvSpPr/>
-          <p:nvPr/>
-        </p:nvSpPr>
-        <p:spPr>
-          <a:xfrm>
-            <a:off x="6217920" y="1051560"/>
-            <a:ext cx="2468880" cy="2103120"/>
+            <a:ext cx="5760720" cy="512064"/>
           </a:xfrm>
           <a:prstGeom prst="roundRect">
             <a:avLst>
-              <a:gd name="adj" fmla="val 3478"/>
+              <a:gd name="adj" fmla="val 14286"/>
             </a:avLst>
           </a:prstGeom>
           <a:solidFill>
@@ -7324,122 +7358,156 @@
       </p:sp>
       <p:sp>
         <p:nvSpPr>
-          <p:cNvPr id="6" name="tests-text"/>
-          <p:cNvSpPr txBox="1"/>
-          <p:nvPr/>
-        </p:nvSpPr>
-        <p:spPr>
-          <a:xfrm>
-            <a:off x="6355080" y="1143000"/>
-            <a:ext cx="2194560" cy="1920240"/>
-          </a:xfrm>
-          <a:prstGeom prst="rect">
-            <a:avLst/>
-          </a:prstGeom>
-          <a:noFill/>
-          <a:ln/>
-        </p:spPr>
-        <p:txBody>
-          <a:bodyPr wrap="square" lIns="0" tIns="0" rIns="0" bIns="0" rtlCol="0" anchor="t"/>
-          <a:lstStyle/>
-          <a:p>
-            <a:pPr indent="0" marL="0">
-              <a:spcAft>
-                <a:spcPts val="600"/>
-              </a:spcAft>
-              <a:buNone/>
-            </a:pPr>
-            <a:r>
-              <a:rPr lang="en-US" sz="1300" b="1" dirty="0">
-                <a:solidFill>
-                  <a:schemeClr val="tx2"/>
-                </a:solidFill>
-              </a:rPr>
-              <a:t>Pre-registered tests</a:t>
-            </a:r>
-            <a:endParaRPr lang="en-US" sz="1050" dirty="0"/>
-          </a:p>
-          <a:p>
-            <a:pPr indent="0" marL="0">
-              <a:spcAft>
-                <a:spcPts val="300"/>
-              </a:spcAft>
-              <a:buNone/>
-            </a:pPr>
-            <a:r>
-              <a:rPr lang="en-US" sz="1050" dirty="0">
-                <a:solidFill>
-                  <a:schemeClr val="tx1"/>
-                </a:solidFill>
-              </a:rPr>
-              <a:t>G1′  optimistic news: individualists run more   +0.033</a:t>
-            </a:r>
-            <a:endParaRPr lang="en-US" sz="1050" dirty="0"/>
-          </a:p>
-          <a:p>
-            <a:pPr indent="0" marL="0">
-              <a:spcAft>
-                <a:spcPts val="300"/>
-              </a:spcAft>
-              <a:buNone/>
-            </a:pPr>
-            <a:r>
-              <a:rPr lang="en-US" sz="1050" dirty="0">
-                <a:solidFill>
-                  <a:schemeClr val="tx1"/>
-                </a:solidFill>
-              </a:rPr>
-              <a:t>G4′  pessimistic news: collectivists run more   −0.031</a:t>
-            </a:r>
-            <a:endParaRPr lang="en-US" sz="1050" dirty="0"/>
-          </a:p>
-          <a:p>
-            <a:pPr indent="0" marL="0">
-              <a:spcAft>
-                <a:spcPts val="300"/>
-              </a:spcAft>
-              <a:buNone/>
-            </a:pPr>
-            <a:r>
-              <a:rPr lang="en-US" sz="1050" dirty="0">
-                <a:solidFill>
-                  <a:schemeClr val="tx1"/>
-                </a:solidFill>
-              </a:rPr>
-              <a:t>G2a′  the effect grows with the λ gap   +0.093</a:t>
-            </a:r>
-            <a:endParaRPr lang="en-US" sz="1050" dirty="0"/>
-          </a:p>
-          <a:p>
-            <a:pPr indent="0" marL="0">
-              <a:buNone/>
-            </a:pPr>
-            <a:r>
-              <a:rPr lang="en-US" sz="1050" dirty="0">
-                <a:solidFill>
-                  <a:schemeClr val="accent2"/>
-                </a:solidFill>
-              </a:rPr>
-              <a:t>G3  sorting with no news: counts against (one pair wrong-signed)</a:t>
-            </a:r>
-            <a:endParaRPr lang="en-US" sz="1050" dirty="0"/>
-          </a:p>
-        </p:txBody>
-      </p:sp>
-      <p:sp>
-        <p:nvSpPr>
-          <p:cNvPr id="7" name="stat-confirmatory tests s"/>
+          <p:cNvPr id="4" name="chip"/>
           <p:cNvSpPr/>
           <p:nvPr/>
         </p:nvSpPr>
         <p:spPr>
           <a:xfrm>
-            <a:off x="6217920" y="3291840"/>
-            <a:ext cx="2468880" cy="1143000"/>
+            <a:off x="548640" y="1143000"/>
+            <a:ext cx="329184" cy="329184"/>
           </a:xfrm>
           <a:prstGeom prst="roundRect">
             <a:avLst>
-              <a:gd name="adj" fmla="val 6400"/>
+              <a:gd name="adj" fmla="val 16667"/>
+            </a:avLst>
+          </a:prstGeom>
+          <a:solidFill>
+            <a:schemeClr val="accent1"/>
+          </a:solidFill>
+          <a:ln w="12700">
+            <a:solidFill>
+              <a:schemeClr val="accent1"/>
+            </a:solidFill>
+            <a:prstDash val="solid"/>
+          </a:ln>
+        </p:spPr>
+      </p:sp>
+      <p:sp>
+        <p:nvSpPr>
+          <p:cNvPr id="5" name="chip-label"/>
+          <p:cNvSpPr txBox="1"/>
+          <p:nvPr/>
+        </p:nvSpPr>
+        <p:spPr>
+          <a:xfrm>
+            <a:off x="548640" y="1143000"/>
+            <a:ext cx="329184" cy="329184"/>
+          </a:xfrm>
+          <a:prstGeom prst="rect">
+            <a:avLst/>
+          </a:prstGeom>
+          <a:noFill/>
+          <a:ln/>
+        </p:spPr>
+        <p:txBody>
+          <a:bodyPr wrap="square" lIns="0" tIns="0" rIns="0" bIns="0" rtlCol="0" anchor="ctr"/>
+          <a:lstStyle/>
+          <a:p>
+            <a:pPr algn="ctr" indent="0" marL="0">
+              <a:buNone/>
+            </a:pPr>
+            <a:r>
+              <a:rPr lang="en-US" sz="1100" b="1" dirty="0">
+                <a:solidFill>
+                  <a:schemeClr val="bg1"/>
+                </a:solidFill>
+                <a:latin typeface="Cambria" pitchFamily="34" charset="0"/>
+                <a:ea typeface="Cambria" pitchFamily="34" charset="-122"/>
+                <a:cs typeface="Cambria" pitchFamily="34" charset="-120"/>
+              </a:rPr>
+              <a:t>1</a:t>
+            </a:r>
+            <a:endParaRPr lang="en-US" sz="1100" dirty="0"/>
+          </a:p>
+        </p:txBody>
+      </p:sp>
+      <p:sp>
+        <p:nvSpPr>
+          <p:cNvPr id="6" name="take-head"/>
+          <p:cNvSpPr txBox="1"/>
+          <p:nvPr/>
+        </p:nvSpPr>
+        <p:spPr>
+          <a:xfrm>
+            <a:off x="987552" y="1088136"/>
+            <a:ext cx="1600200" cy="438912"/>
+          </a:xfrm>
+          <a:prstGeom prst="rect">
+            <a:avLst/>
+          </a:prstGeom>
+          <a:noFill/>
+          <a:ln/>
+        </p:spPr>
+        <p:txBody>
+          <a:bodyPr wrap="square" lIns="0" tIns="0" rIns="0" bIns="0" rtlCol="0" anchor="ctr"/>
+          <a:lstStyle/>
+          <a:p>
+            <a:pPr indent="0" marL="0">
+              <a:buNone/>
+            </a:pPr>
+            <a:r>
+              <a:rPr lang="en-US" sz="1100" b="1" dirty="0">
+                <a:solidFill>
+                  <a:schemeClr val="tx2"/>
+                </a:solidFill>
+              </a:rPr>
+              <a:t>Sorting follows the news</a:t>
+            </a:r>
+            <a:endParaRPr lang="en-US" sz="1100" dirty="0"/>
+          </a:p>
+        </p:txBody>
+      </p:sp>
+      <p:sp>
+        <p:nvSpPr>
+          <p:cNvPr id="7" name="take-body"/>
+          <p:cNvSpPr txBox="1"/>
+          <p:nvPr/>
+        </p:nvSpPr>
+        <p:spPr>
+          <a:xfrm>
+            <a:off x="2651760" y="1088136"/>
+            <a:ext cx="3474720" cy="438912"/>
+          </a:xfrm>
+          <a:prstGeom prst="rect">
+            <a:avLst/>
+          </a:prstGeom>
+          <a:noFill/>
+          <a:ln/>
+        </p:spPr>
+        <p:txBody>
+          <a:bodyPr wrap="square" lIns="0" tIns="0" rIns="0" bIns="0" rtlCol="0" anchor="ctr"/>
+          <a:lstStyle/>
+          <a:p>
+            <a:pPr indent="0" marL="0">
+              <a:buNone/>
+            </a:pPr>
+            <a:r>
+              <a:rPr lang="en-US" sz="1000" dirty="0">
+                <a:solidFill>
+                  <a:schemeClr val="tx1"/>
+                </a:solidFill>
+              </a:rPr>
+              <a:t>Optimistic public news makes individualists run relatively more; pessimistic news, collectivists. 3 of 4 pre-registered tests pass, in all three bank versions.</a:t>
+            </a:r>
+            <a:endParaRPr lang="en-US" sz="1000" dirty="0"/>
+          </a:p>
+        </p:txBody>
+      </p:sp>
+      <p:sp>
+        <p:nvSpPr>
+          <p:cNvPr id="8" name="take-1"/>
+          <p:cNvSpPr/>
+          <p:nvPr/>
+        </p:nvSpPr>
+        <p:spPr>
+          <a:xfrm>
+            <a:off x="457200" y="1636776"/>
+            <a:ext cx="5760720" cy="512064"/>
+          </a:xfrm>
+          <a:prstGeom prst="roundRect">
+            <a:avLst>
+              <a:gd name="adj" fmla="val 14286"/>
             </a:avLst>
           </a:prstGeom>
           <a:solidFill>
@@ -7455,14 +7523,41 @@
       </p:sp>
       <p:sp>
         <p:nvSpPr>
-          <p:cNvPr id="8" name="stat-big"/>
+          <p:cNvPr id="9" name="chip"/>
+          <p:cNvSpPr/>
+          <p:nvPr/>
+        </p:nvSpPr>
+        <p:spPr>
+          <a:xfrm>
+            <a:off x="548640" y="1728216"/>
+            <a:ext cx="329184" cy="329184"/>
+          </a:xfrm>
+          <a:prstGeom prst="roundRect">
+            <a:avLst>
+              <a:gd name="adj" fmla="val 16667"/>
+            </a:avLst>
+          </a:prstGeom>
+          <a:solidFill>
+            <a:schemeClr val="accent1"/>
+          </a:solidFill>
+          <a:ln w="12700">
+            <a:solidFill>
+              <a:schemeClr val="accent1"/>
+            </a:solidFill>
+            <a:prstDash val="solid"/>
+          </a:ln>
+        </p:spPr>
+      </p:sp>
+      <p:sp>
+        <p:nvSpPr>
+          <p:cNvPr id="10" name="chip-label"/>
           <p:cNvSpPr txBox="1"/>
           <p:nvPr/>
         </p:nvSpPr>
         <p:spPr>
           <a:xfrm>
-            <a:off x="6355080" y="3364992"/>
-            <a:ext cx="2194560" cy="457200"/>
+            <a:off x="548640" y="1728216"/>
+            <a:ext cx="329184" cy="329184"/>
           </a:xfrm>
           <a:prstGeom prst="rect">
             <a:avLst/>
@@ -7474,34 +7569,829 @@
           <a:bodyPr wrap="square" lIns="0" tIns="0" rIns="0" bIns="0" rtlCol="0" anchor="ctr"/>
           <a:lstStyle/>
           <a:p>
-            <a:pPr indent="0" marL="0">
-              <a:buNone/>
-            </a:pPr>
-            <a:r>
-              <a:rPr lang="en-US" sz="2600" b="1" dirty="0">
-                <a:solidFill>
-                  <a:schemeClr val="accent1"/>
+            <a:pPr algn="ctr" indent="0" marL="0">
+              <a:buNone/>
+            </a:pPr>
+            <a:r>
+              <a:rPr lang="en-US" sz="1100" b="1" dirty="0">
+                <a:solidFill>
+                  <a:schemeClr val="bg1"/>
                 </a:solidFill>
                 <a:latin typeface="Cambria" pitchFamily="34" charset="0"/>
                 <a:ea typeface="Cambria" pitchFamily="34" charset="-122"/>
                 <a:cs typeface="Cambria" pitchFamily="34" charset="-120"/>
               </a:rPr>
-              <a:t>3 of 4</a:t>
-            </a:r>
-            <a:endParaRPr lang="en-US" sz="2600" dirty="0"/>
-          </a:p>
-        </p:txBody>
-      </p:sp>
-      <p:sp>
-        <p:nvSpPr>
-          <p:cNvPr id="9" name="stat-label"/>
+              <a:t>2</a:t>
+            </a:r>
+            <a:endParaRPr lang="en-US" sz="1100" dirty="0"/>
+          </a:p>
+        </p:txBody>
+      </p:sp>
+      <p:sp>
+        <p:nvSpPr>
+          <p:cNvPr id="11" name="take-head"/>
           <p:cNvSpPr txBox="1"/>
           <p:nvPr/>
         </p:nvSpPr>
         <p:spPr>
           <a:xfrm>
-            <a:off x="6355080" y="3840480"/>
-            <a:ext cx="2194560" cy="539496"/>
+            <a:off x="987552" y="1673352"/>
+            <a:ext cx="1600200" cy="438912"/>
+          </a:xfrm>
+          <a:prstGeom prst="rect">
+            <a:avLst/>
+          </a:prstGeom>
+          <a:noFill/>
+          <a:ln/>
+        </p:spPr>
+        <p:txBody>
+          <a:bodyPr wrap="square" lIns="0" tIns="0" rIns="0" bIns="0" rtlCol="0" anchor="ctr"/>
+          <a:lstStyle/>
+          <a:p>
+            <a:pPr indent="0" marL="0">
+              <a:buNone/>
+            </a:pPr>
+            <a:r>
+              <a:rPr lang="en-US" sz="1100" b="1" dirty="0">
+                <a:solidFill>
+                  <a:schemeClr val="tx2"/>
+                </a:solidFill>
+              </a:rPr>
+              <a:t>Collectivists herd</a:t>
+            </a:r>
+            <a:endParaRPr lang="en-US" sz="1100" dirty="0"/>
+          </a:p>
+        </p:txBody>
+      </p:sp>
+      <p:sp>
+        <p:nvSpPr>
+          <p:cNvPr id="12" name="take-body"/>
+          <p:cNvSpPr txBox="1"/>
+          <p:nvPr/>
+        </p:nvSpPr>
+        <p:spPr>
+          <a:xfrm>
+            <a:off x="2651760" y="1673352"/>
+            <a:ext cx="3474720" cy="438912"/>
+          </a:xfrm>
+          <a:prstGeom prst="rect">
+            <a:avLst/>
+          </a:prstGeom>
+          <a:noFill/>
+          <a:ln/>
+        </p:spPr>
+        <p:txBody>
+          <a:bodyPr wrap="square" lIns="0" tIns="0" rIns="0" bIns="0" rtlCol="0" anchor="ctr"/>
+          <a:lstStyle/>
+          <a:p>
+            <a:pPr indent="0" marL="0">
+              <a:buNone/>
+            </a:pPr>
+            <a:r>
+              <a:rPr lang="en-US" sz="1000" dirty="0">
+                <a:solidFill>
+                  <a:schemeClr val="tx1"/>
+                </a:solidFill>
+              </a:rPr>
+              <a:t>Their chance of withdrawing jumps from 0.15 to 0.93 once 20–35% of neighbours are out; individualists level off near 0.3.</a:t>
+            </a:r>
+            <a:endParaRPr lang="en-US" sz="1000" dirty="0"/>
+          </a:p>
+        </p:txBody>
+      </p:sp>
+      <p:sp>
+        <p:nvSpPr>
+          <p:cNvPr id="13" name="take-2"/>
+          <p:cNvSpPr/>
+          <p:nvPr/>
+        </p:nvSpPr>
+        <p:spPr>
+          <a:xfrm>
+            <a:off x="457200" y="2221992"/>
+            <a:ext cx="5760720" cy="512064"/>
+          </a:xfrm>
+          <a:prstGeom prst="roundRect">
+            <a:avLst>
+              <a:gd name="adj" fmla="val 14286"/>
+            </a:avLst>
+          </a:prstGeom>
+          <a:solidFill>
+            <a:schemeClr val="bg2"/>
+          </a:solidFill>
+          <a:ln w="12700">
+            <a:solidFill>
+              <a:schemeClr val="bg2"/>
+            </a:solidFill>
+            <a:prstDash val="solid"/>
+          </a:ln>
+        </p:spPr>
+      </p:sp>
+      <p:sp>
+        <p:nvSpPr>
+          <p:cNvPr id="14" name="chip"/>
+          <p:cNvSpPr/>
+          <p:nvPr/>
+        </p:nvSpPr>
+        <p:spPr>
+          <a:xfrm>
+            <a:off x="548640" y="2313432"/>
+            <a:ext cx="329184" cy="329184"/>
+          </a:xfrm>
+          <a:prstGeom prst="roundRect">
+            <a:avLst>
+              <a:gd name="adj" fmla="val 16667"/>
+            </a:avLst>
+          </a:prstGeom>
+          <a:solidFill>
+            <a:schemeClr val="accent1"/>
+          </a:solidFill>
+          <a:ln w="12700">
+            <a:solidFill>
+              <a:schemeClr val="accent1"/>
+            </a:solidFill>
+            <a:prstDash val="solid"/>
+          </a:ln>
+        </p:spPr>
+      </p:sp>
+      <p:sp>
+        <p:nvSpPr>
+          <p:cNvPr id="15" name="chip-label"/>
+          <p:cNvSpPr txBox="1"/>
+          <p:nvPr/>
+        </p:nvSpPr>
+        <p:spPr>
+          <a:xfrm>
+            <a:off x="548640" y="2313432"/>
+            <a:ext cx="329184" cy="329184"/>
+          </a:xfrm>
+          <a:prstGeom prst="rect">
+            <a:avLst/>
+          </a:prstGeom>
+          <a:noFill/>
+          <a:ln/>
+        </p:spPr>
+        <p:txBody>
+          <a:bodyPr wrap="square" lIns="0" tIns="0" rIns="0" bIns="0" rtlCol="0" anchor="ctr"/>
+          <a:lstStyle/>
+          <a:p>
+            <a:pPr algn="ctr" indent="0" marL="0">
+              <a:buNone/>
+            </a:pPr>
+            <a:r>
+              <a:rPr lang="en-US" sz="1100" b="1" dirty="0">
+                <a:solidFill>
+                  <a:schemeClr val="bg1"/>
+                </a:solidFill>
+                <a:latin typeface="Cambria" pitchFamily="34" charset="0"/>
+                <a:ea typeface="Cambria" pitchFamily="34" charset="-122"/>
+                <a:cs typeface="Cambria" pitchFamily="34" charset="-120"/>
+              </a:rPr>
+              <a:t>3</a:t>
+            </a:r>
+            <a:endParaRPr lang="en-US" sz="1100" dirty="0"/>
+          </a:p>
+        </p:txBody>
+      </p:sp>
+      <p:sp>
+        <p:nvSpPr>
+          <p:cNvPr id="16" name="take-head"/>
+          <p:cNvSpPr txBox="1"/>
+          <p:nvPr/>
+        </p:nvSpPr>
+        <p:spPr>
+          <a:xfrm>
+            <a:off x="987552" y="2258568"/>
+            <a:ext cx="1600200" cy="438912"/>
+          </a:xfrm>
+          <a:prstGeom prst="rect">
+            <a:avLst/>
+          </a:prstGeom>
+          <a:noFill/>
+          <a:ln/>
+        </p:spPr>
+        <p:txBody>
+          <a:bodyPr wrap="square" lIns="0" tIns="0" rIns="0" bIns="0" rtlCol="0" anchor="ctr"/>
+          <a:lstStyle/>
+          <a:p>
+            <a:pPr indent="0" marL="0">
+              <a:buNone/>
+            </a:pPr>
+            <a:r>
+              <a:rPr lang="en-US" sz="1100" b="1" dirty="0">
+                <a:solidFill>
+                  <a:schemeClr val="tx2"/>
+                </a:solidFill>
+              </a:rPr>
+              <a:t>More individualists, fewer failures</a:t>
+            </a:r>
+            <a:endParaRPr lang="en-US" sz="1100" dirty="0"/>
+          </a:p>
+        </p:txBody>
+      </p:sp>
+      <p:sp>
+        <p:nvSpPr>
+          <p:cNvPr id="17" name="take-body"/>
+          <p:cNvSpPr txBox="1"/>
+          <p:nvPr/>
+        </p:nvSpPr>
+        <p:spPr>
+          <a:xfrm>
+            <a:off x="2651760" y="2258568"/>
+            <a:ext cx="3474720" cy="438912"/>
+          </a:xfrm>
+          <a:prstGeom prst="rect">
+            <a:avLst/>
+          </a:prstGeom>
+          <a:noFill/>
+          <a:ln/>
+        </p:spPr>
+        <p:txBody>
+          <a:bodyPr wrap="square" lIns="0" tIns="0" rIns="0" bIns="0" rtlCol="0" anchor="ctr"/>
+          <a:lstStyle/>
+          <a:p>
+            <a:pPr indent="0" marL="0">
+              <a:buNone/>
+            </a:pPr>
+            <a:r>
+              <a:rPr lang="en-US" sz="1000" dirty="0">
+                <a:solidFill>
+                  <a:schemeClr val="tx1"/>
+                </a:solidFill>
+              </a:rPr>
+              <a:t>P(fail) falls from 0.67 to 0.08 as the individualist share goes from 0 to 1. Monotone; no interior peak.</a:t>
+            </a:r>
+            <a:endParaRPr lang="en-US" sz="1000" dirty="0"/>
+          </a:p>
+        </p:txBody>
+      </p:sp>
+      <p:sp>
+        <p:nvSpPr>
+          <p:cNvPr id="18" name="take-3"/>
+          <p:cNvSpPr/>
+          <p:nvPr/>
+        </p:nvSpPr>
+        <p:spPr>
+          <a:xfrm>
+            <a:off x="457200" y="2807208"/>
+            <a:ext cx="5760720" cy="512064"/>
+          </a:xfrm>
+          <a:prstGeom prst="roundRect">
+            <a:avLst>
+              <a:gd name="adj" fmla="val 14286"/>
+            </a:avLst>
+          </a:prstGeom>
+          <a:solidFill>
+            <a:schemeClr val="bg2"/>
+          </a:solidFill>
+          <a:ln w="12700">
+            <a:solidFill>
+              <a:schemeClr val="bg2"/>
+            </a:solidFill>
+            <a:prstDash val="solid"/>
+          </a:ln>
+        </p:spPr>
+      </p:sp>
+      <p:sp>
+        <p:nvSpPr>
+          <p:cNvPr id="19" name="chip"/>
+          <p:cNvSpPr/>
+          <p:nvPr/>
+        </p:nvSpPr>
+        <p:spPr>
+          <a:xfrm>
+            <a:off x="548640" y="2898648"/>
+            <a:ext cx="329184" cy="329184"/>
+          </a:xfrm>
+          <a:prstGeom prst="roundRect">
+            <a:avLst>
+              <a:gd name="adj" fmla="val 16667"/>
+            </a:avLst>
+          </a:prstGeom>
+          <a:solidFill>
+            <a:schemeClr val="accent1"/>
+          </a:solidFill>
+          <a:ln w="12700">
+            <a:solidFill>
+              <a:schemeClr val="accent1"/>
+            </a:solidFill>
+            <a:prstDash val="solid"/>
+          </a:ln>
+        </p:spPr>
+      </p:sp>
+      <p:sp>
+        <p:nvSpPr>
+          <p:cNvPr id="20" name="chip-label"/>
+          <p:cNvSpPr txBox="1"/>
+          <p:nvPr/>
+        </p:nvSpPr>
+        <p:spPr>
+          <a:xfrm>
+            <a:off x="548640" y="2898648"/>
+            <a:ext cx="329184" cy="329184"/>
+          </a:xfrm>
+          <a:prstGeom prst="rect">
+            <a:avLst/>
+          </a:prstGeom>
+          <a:noFill/>
+          <a:ln/>
+        </p:spPr>
+        <p:txBody>
+          <a:bodyPr wrap="square" lIns="0" tIns="0" rIns="0" bIns="0" rtlCol="0" anchor="ctr"/>
+          <a:lstStyle/>
+          <a:p>
+            <a:pPr algn="ctr" indent="0" marL="0">
+              <a:buNone/>
+            </a:pPr>
+            <a:r>
+              <a:rPr lang="en-US" sz="1100" b="1" dirty="0">
+                <a:solidFill>
+                  <a:schemeClr val="bg1"/>
+                </a:solidFill>
+                <a:latin typeface="Cambria" pitchFamily="34" charset="0"/>
+                <a:ea typeface="Cambria" pitchFamily="34" charset="-122"/>
+                <a:cs typeface="Cambria" pitchFamily="34" charset="-120"/>
+              </a:rPr>
+              <a:t>4</a:t>
+            </a:r>
+            <a:endParaRPr lang="en-US" sz="1100" dirty="0"/>
+          </a:p>
+        </p:txBody>
+      </p:sp>
+      <p:sp>
+        <p:nvSpPr>
+          <p:cNvPr id="21" name="take-head"/>
+          <p:cNvSpPr txBox="1"/>
+          <p:nvPr/>
+        </p:nvSpPr>
+        <p:spPr>
+          <a:xfrm>
+            <a:off x="987552" y="2843784"/>
+            <a:ext cx="1600200" cy="438912"/>
+          </a:xfrm>
+          <a:prstGeom prst="rect">
+            <a:avLst/>
+          </a:prstGeom>
+          <a:noFill/>
+          <a:ln/>
+        </p:spPr>
+        <p:txBody>
+          <a:bodyPr wrap="square" lIns="0" tIns="0" rIns="0" bIns="0" rtlCol="0" anchor="ctr"/>
+          <a:lstStyle/>
+          <a:p>
+            <a:pPr indent="0" marL="0">
+              <a:buNone/>
+            </a:pPr>
+            <a:r>
+              <a:rPr lang="en-US" sz="1100" b="1" dirty="0">
+                <a:solidFill>
+                  <a:schemeClr val="tx2"/>
+                </a:solidFill>
+              </a:rPr>
+              <a:t>Stale news cuts both ways</a:t>
+            </a:r>
+            <a:endParaRPr lang="en-US" sz="1100" dirty="0"/>
+          </a:p>
+        </p:txBody>
+      </p:sp>
+      <p:sp>
+        <p:nvSpPr>
+          <p:cNvPr id="22" name="take-body"/>
+          <p:cNvSpPr txBox="1"/>
+          <p:nvPr/>
+        </p:nvSpPr>
+        <p:spPr>
+          <a:xfrm>
+            <a:off x="2651760" y="2843784"/>
+            <a:ext cx="3474720" cy="438912"/>
+          </a:xfrm>
+          <a:prstGeom prst="rect">
+            <a:avLst/>
+          </a:prstGeom>
+          <a:noFill/>
+          <a:ln/>
+        </p:spPr>
+        <p:txBody>
+          <a:bodyPr wrap="square" lIns="0" tIns="0" rIns="0" bIns="0" rtlCol="0" anchor="ctr"/>
+          <a:lstStyle/>
+          <a:p>
+            <a:pPr indent="0" marL="0">
+              <a:buNone/>
+            </a:pPr>
+            <a:r>
+              <a:rPr lang="en-US" sz="1000" dirty="0">
+                <a:solidFill>
+                  <a:schemeClr val="tx1"/>
+                </a:solidFill>
+              </a:rPr>
+              <a:t>A stale optimistic signal halves failure, a stale pessimistic one raises it by half. Accurate news barely moves it.</a:t>
+            </a:r>
+            <a:endParaRPr lang="en-US" sz="1000" dirty="0"/>
+          </a:p>
+        </p:txBody>
+      </p:sp>
+      <p:sp>
+        <p:nvSpPr>
+          <p:cNvPr id="23" name="take-4"/>
+          <p:cNvSpPr/>
+          <p:nvPr/>
+        </p:nvSpPr>
+        <p:spPr>
+          <a:xfrm>
+            <a:off x="457200" y="3392424"/>
+            <a:ext cx="5760720" cy="512064"/>
+          </a:xfrm>
+          <a:prstGeom prst="roundRect">
+            <a:avLst>
+              <a:gd name="adj" fmla="val 14286"/>
+            </a:avLst>
+          </a:prstGeom>
+          <a:solidFill>
+            <a:schemeClr val="bg2"/>
+          </a:solidFill>
+          <a:ln w="12700">
+            <a:solidFill>
+              <a:schemeClr val="bg2"/>
+            </a:solidFill>
+            <a:prstDash val="solid"/>
+          </a:ln>
+        </p:spPr>
+      </p:sp>
+      <p:sp>
+        <p:nvSpPr>
+          <p:cNvPr id="24" name="chip"/>
+          <p:cNvSpPr/>
+          <p:nvPr/>
+        </p:nvSpPr>
+        <p:spPr>
+          <a:xfrm>
+            <a:off x="548640" y="3483864"/>
+            <a:ext cx="329184" cy="329184"/>
+          </a:xfrm>
+          <a:prstGeom prst="roundRect">
+            <a:avLst>
+              <a:gd name="adj" fmla="val 16667"/>
+            </a:avLst>
+          </a:prstGeom>
+          <a:solidFill>
+            <a:schemeClr val="accent1"/>
+          </a:solidFill>
+          <a:ln w="12700">
+            <a:solidFill>
+              <a:schemeClr val="accent1"/>
+            </a:solidFill>
+            <a:prstDash val="solid"/>
+          </a:ln>
+        </p:spPr>
+      </p:sp>
+      <p:sp>
+        <p:nvSpPr>
+          <p:cNvPr id="25" name="chip-label"/>
+          <p:cNvSpPr txBox="1"/>
+          <p:nvPr/>
+        </p:nvSpPr>
+        <p:spPr>
+          <a:xfrm>
+            <a:off x="548640" y="3483864"/>
+            <a:ext cx="329184" cy="329184"/>
+          </a:xfrm>
+          <a:prstGeom prst="rect">
+            <a:avLst/>
+          </a:prstGeom>
+          <a:noFill/>
+          <a:ln/>
+        </p:spPr>
+        <p:txBody>
+          <a:bodyPr wrap="square" lIns="0" tIns="0" rIns="0" bIns="0" rtlCol="0" anchor="ctr"/>
+          <a:lstStyle/>
+          <a:p>
+            <a:pPr algn="ctr" indent="0" marL="0">
+              <a:buNone/>
+            </a:pPr>
+            <a:r>
+              <a:rPr lang="en-US" sz="1100" b="1" dirty="0">
+                <a:solidFill>
+                  <a:schemeClr val="bg1"/>
+                </a:solidFill>
+                <a:latin typeface="Cambria" pitchFamily="34" charset="0"/>
+                <a:ea typeface="Cambria" pitchFamily="34" charset="-122"/>
+                <a:cs typeface="Cambria" pitchFamily="34" charset="-120"/>
+              </a:rPr>
+              <a:t>5</a:t>
+            </a:r>
+            <a:endParaRPr lang="en-US" sz="1100" dirty="0"/>
+          </a:p>
+        </p:txBody>
+      </p:sp>
+      <p:sp>
+        <p:nvSpPr>
+          <p:cNvPr id="26" name="take-head"/>
+          <p:cNvSpPr txBox="1"/>
+          <p:nvPr/>
+        </p:nvSpPr>
+        <p:spPr>
+          <a:xfrm>
+            <a:off x="987552" y="3429000"/>
+            <a:ext cx="1600200" cy="438912"/>
+          </a:xfrm>
+          <a:prstGeom prst="rect">
+            <a:avLst/>
+          </a:prstGeom>
+          <a:noFill/>
+          <a:ln/>
+        </p:spPr>
+        <p:txBody>
+          <a:bodyPr wrap="square" lIns="0" tIns="0" rIns="0" bIns="0" rtlCol="0" anchor="ctr"/>
+          <a:lstStyle/>
+          <a:p>
+            <a:pPr indent="0" marL="0">
+              <a:buNone/>
+            </a:pPr>
+            <a:r>
+              <a:rPr lang="en-US" sz="1100" b="1" dirty="0">
+                <a:solidFill>
+                  <a:schemeClr val="tx2"/>
+                </a:solidFill>
+              </a:rPr>
+              <a:t>Capping the largest deposits</a:t>
+            </a:r>
+            <a:endParaRPr lang="en-US" sz="1100" dirty="0"/>
+          </a:p>
+        </p:txBody>
+      </p:sp>
+      <p:sp>
+        <p:nvSpPr>
+          <p:cNvPr id="27" name="take-body"/>
+          <p:cNvSpPr txBox="1"/>
+          <p:nvPr/>
+        </p:nvSpPr>
+        <p:spPr>
+          <a:xfrm>
+            <a:off x="2651760" y="3429000"/>
+            <a:ext cx="3474720" cy="438912"/>
+          </a:xfrm>
+          <a:prstGeom prst="rect">
+            <a:avLst/>
+          </a:prstGeom>
+          <a:noFill/>
+          <a:ln/>
+        </p:spPr>
+        <p:txBody>
+          <a:bodyPr wrap="square" lIns="0" tIns="0" rIns="0" bIns="0" rtlCol="0" anchor="ctr"/>
+          <a:lstStyle/>
+          <a:p>
+            <a:pPr indent="0" marL="0">
+              <a:buNone/>
+            </a:pPr>
+            <a:r>
+              <a:rPr lang="en-US" sz="1000" dirty="0">
+                <a:solidFill>
+                  <a:schemeClr val="tx1"/>
+                </a:solidFill>
+              </a:rPr>
+              <a:t>A 1% cap brings failure down to the no-concentration bank’s level; the culture gradient is unchanged.</a:t>
+            </a:r>
+            <a:endParaRPr lang="en-US" sz="1000" dirty="0"/>
+          </a:p>
+        </p:txBody>
+      </p:sp>
+      <p:sp>
+        <p:nvSpPr>
+          <p:cNvPr id="28" name="take-5"/>
+          <p:cNvSpPr/>
+          <p:nvPr/>
+        </p:nvSpPr>
+        <p:spPr>
+          <a:xfrm>
+            <a:off x="457200" y="3977640"/>
+            <a:ext cx="5760720" cy="512064"/>
+          </a:xfrm>
+          <a:prstGeom prst="roundRect">
+            <a:avLst>
+              <a:gd name="adj" fmla="val 14286"/>
+            </a:avLst>
+          </a:prstGeom>
+          <a:solidFill>
+            <a:schemeClr val="accent4"/>
+          </a:solidFill>
+          <a:ln w="12700">
+            <a:solidFill>
+              <a:schemeClr val="accent4"/>
+            </a:solidFill>
+            <a:prstDash val="solid"/>
+          </a:ln>
+        </p:spPr>
+      </p:sp>
+      <p:sp>
+        <p:nvSpPr>
+          <p:cNvPr id="29" name="chip"/>
+          <p:cNvSpPr/>
+          <p:nvPr/>
+        </p:nvSpPr>
+        <p:spPr>
+          <a:xfrm>
+            <a:off x="548640" y="4069080"/>
+            <a:ext cx="329184" cy="329184"/>
+          </a:xfrm>
+          <a:prstGeom prst="roundRect">
+            <a:avLst>
+              <a:gd name="adj" fmla="val 16667"/>
+            </a:avLst>
+          </a:prstGeom>
+          <a:solidFill>
+            <a:schemeClr val="accent2"/>
+          </a:solidFill>
+          <a:ln w="12700">
+            <a:solidFill>
+              <a:schemeClr val="accent2"/>
+            </a:solidFill>
+            <a:prstDash val="solid"/>
+          </a:ln>
+        </p:spPr>
+      </p:sp>
+      <p:sp>
+        <p:nvSpPr>
+          <p:cNvPr id="30" name="chip-label"/>
+          <p:cNvSpPr txBox="1"/>
+          <p:nvPr/>
+        </p:nvSpPr>
+        <p:spPr>
+          <a:xfrm>
+            <a:off x="548640" y="4069080"/>
+            <a:ext cx="329184" cy="329184"/>
+          </a:xfrm>
+          <a:prstGeom prst="rect">
+            <a:avLst/>
+          </a:prstGeom>
+          <a:noFill/>
+          <a:ln/>
+        </p:spPr>
+        <p:txBody>
+          <a:bodyPr wrap="square" lIns="0" tIns="0" rIns="0" bIns="0" rtlCol="0" anchor="ctr"/>
+          <a:lstStyle/>
+          <a:p>
+            <a:pPr algn="ctr" indent="0" marL="0">
+              <a:buNone/>
+            </a:pPr>
+            <a:r>
+              <a:rPr lang="en-US" sz="1100" b="1" dirty="0">
+                <a:solidFill>
+                  <a:schemeClr val="bg1"/>
+                </a:solidFill>
+                <a:latin typeface="Cambria" pitchFamily="34" charset="0"/>
+                <a:ea typeface="Cambria" pitchFamily="34" charset="-122"/>
+                <a:cs typeface="Cambria" pitchFamily="34" charset="-120"/>
+              </a:rPr>
+              <a:t>6</a:t>
+            </a:r>
+            <a:endParaRPr lang="en-US" sz="1100" dirty="0"/>
+          </a:p>
+        </p:txBody>
+      </p:sp>
+      <p:sp>
+        <p:nvSpPr>
+          <p:cNvPr id="31" name="take-head"/>
+          <p:cNvSpPr txBox="1"/>
+          <p:nvPr/>
+        </p:nvSpPr>
+        <p:spPr>
+          <a:xfrm>
+            <a:off x="987552" y="4014216"/>
+            <a:ext cx="1600200" cy="438912"/>
+          </a:xfrm>
+          <a:prstGeom prst="rect">
+            <a:avLst/>
+          </a:prstGeom>
+          <a:noFill/>
+          <a:ln/>
+        </p:spPr>
+        <p:txBody>
+          <a:bodyPr wrap="square" lIns="0" tIns="0" rIns="0" bIns="0" rtlCol="0" anchor="ctr"/>
+          <a:lstStyle/>
+          <a:p>
+            <a:pPr indent="0" marL="0">
+              <a:buNone/>
+            </a:pPr>
+            <a:r>
+              <a:rPr lang="en-US" sz="1100" b="1" dirty="0">
+                <a:solidFill>
+                  <a:schemeClr val="tx2"/>
+                </a:solidFill>
+              </a:rPr>
+              <a:t>Not yet matched</a:t>
+            </a:r>
+            <a:endParaRPr lang="en-US" sz="1100" dirty="0"/>
+          </a:p>
+        </p:txBody>
+      </p:sp>
+      <p:sp>
+        <p:nvSpPr>
+          <p:cNvPr id="32" name="take-body"/>
+          <p:cNvSpPr txBox="1"/>
+          <p:nvPr/>
+        </p:nvSpPr>
+        <p:spPr>
+          <a:xfrm>
+            <a:off x="2651760" y="4014216"/>
+            <a:ext cx="3474720" cy="438912"/>
+          </a:xfrm>
+          <a:prstGeom prst="rect">
+            <a:avLst/>
+          </a:prstGeom>
+          <a:noFill/>
+          <a:ln/>
+        </p:spPr>
+        <p:txBody>
+          <a:bodyPr wrap="square" lIns="0" tIns="0" rIns="0" bIns="0" rtlCol="0" anchor="ctr"/>
+          <a:lstStyle/>
+          <a:p>
+            <a:pPr indent="0" marL="0">
+              <a:buNone/>
+            </a:pPr>
+            <a:r>
+              <a:rPr lang="en-US" sz="1000" dirty="0">
+                <a:solidFill>
+                  <a:schemeClr val="tx1"/>
+                </a:solidFill>
+              </a:rPr>
+              <a:t>How Celsius’s largest depositors exit: one-shot share 0.35 there, 0.93 or more in the model.</a:t>
+            </a:r>
+            <a:endParaRPr lang="en-US" sz="1000" dirty="0"/>
+          </a:p>
+        </p:txBody>
+      </p:sp>
+      <p:sp>
+        <p:nvSpPr>
+          <p:cNvPr id="33" name="next"/>
+          <p:cNvSpPr/>
+          <p:nvPr/>
+        </p:nvSpPr>
+        <p:spPr>
+          <a:xfrm>
+            <a:off x="6400800" y="1051560"/>
+            <a:ext cx="2286000" cy="3438144"/>
+          </a:xfrm>
+          <a:prstGeom prst="roundRect">
+            <a:avLst>
+              <a:gd name="adj" fmla="val 3200"/>
+            </a:avLst>
+          </a:prstGeom>
+          <a:solidFill>
+            <a:schemeClr val="bg2"/>
+          </a:solidFill>
+          <a:ln w="12700">
+            <a:solidFill>
+              <a:schemeClr val="bg2"/>
+            </a:solidFill>
+            <a:prstDash val="solid"/>
+          </a:ln>
+        </p:spPr>
+      </p:sp>
+      <p:sp>
+        <p:nvSpPr>
+          <p:cNvPr id="34" name="next-head"/>
+          <p:cNvSpPr txBox="1"/>
+          <p:nvPr/>
+        </p:nvSpPr>
+        <p:spPr>
+          <a:xfrm>
+            <a:off x="6537960" y="1143000"/>
+            <a:ext cx="2011680" cy="320040"/>
+          </a:xfrm>
+          <a:prstGeom prst="rect">
+            <a:avLst/>
+          </a:prstGeom>
+          <a:noFill/>
+          <a:ln/>
+        </p:spPr>
+        <p:txBody>
+          <a:bodyPr wrap="square" lIns="0" tIns="0" rIns="0" bIns="0" rtlCol="0" anchor="ctr"/>
+          <a:lstStyle/>
+          <a:p>
+            <a:pPr indent="0" marL="0">
+              <a:buNone/>
+            </a:pPr>
+            <a:r>
+              <a:rPr lang="en-US" sz="1300" b="1" dirty="0">
+                <a:solidFill>
+                  <a:schemeClr val="tx2"/>
+                </a:solidFill>
+              </a:rPr>
+              <a:t>Next steps</a:t>
+            </a:r>
+            <a:endParaRPr lang="en-US" sz="1300" dirty="0"/>
+          </a:p>
+        </p:txBody>
+      </p:sp>
+      <p:sp>
+        <p:nvSpPr>
+          <p:cNvPr id="35" name="bullets"/>
+          <p:cNvSpPr txBox="1"/>
+          <p:nvPr/>
+        </p:nvSpPr>
+        <p:spPr>
+          <a:xfrm>
+            <a:off x="6537960" y="1508760"/>
+            <a:ext cx="2011680" cy="2926080"/>
           </a:xfrm>
           <a:prstGeom prst="rect">
             <a:avLst/>
@@ -7513,16 +8403,74 @@
           <a:bodyPr wrap="square" lIns="0" tIns="0" rIns="0" bIns="0" rtlCol="0" anchor="t"/>
           <a:lstStyle/>
           <a:p>
-            <a:pPr indent="0" marL="0">
-              <a:buNone/>
+            <a:pPr marL="177800" indent="-177800">
+              <a:spcAft>
+                <a:spcPts val="700"/>
+              </a:spcAft>
+              <a:buSzPct val="100000"/>
+              <a:buChar char="•"/>
             </a:pPr>
             <a:r>
               <a:rPr lang="en-US" sz="1100" dirty="0">
                 <a:solidFill>
-                  <a:schemeClr val="accent3"/>
-                </a:solidFill>
-              </a:rPr>
-              <a:t>confirmatory tests support the theory, on all three versions of the bank</a:t>
+                  <a:schemeClr val="tx1"/>
+                </a:solidFill>
+              </a:rPr>
+              <a:t>Super-individuals, to match how the largest depositors exit (Chapter 2 docking)</a:t>
+            </a:r>
+            <a:endParaRPr lang="en-US" sz="1100" dirty="0"/>
+          </a:p>
+          <a:p>
+            <a:pPr marL="177800" indent="-177800">
+              <a:spcAft>
+                <a:spcPts val="700"/>
+              </a:spcAft>
+              <a:buSzPct val="100000"/>
+              <a:buChar char="•"/>
+            </a:pPr>
+            <a:r>
+              <a:rPr lang="en-US" sz="1100" dirty="0">
+                <a:solidFill>
+                  <a:schemeClr val="tx1"/>
+                </a:solidFill>
+              </a:rPr>
+              <a:t>Deposit insurance and the reserve ratio on the fire-sale bank</a:t>
+            </a:r>
+            <a:endParaRPr lang="en-US" sz="1100" dirty="0"/>
+          </a:p>
+          <a:p>
+            <a:pPr marL="177800" indent="-177800">
+              <a:spcAft>
+                <a:spcPts val="700"/>
+              </a:spcAft>
+              <a:buSzPct val="100000"/>
+              <a:buChar char="•"/>
+            </a:pPr>
+            <a:r>
+              <a:rPr lang="en-US" sz="1100" dirty="0">
+                <a:solidFill>
+                  <a:schemeClr val="tx1"/>
+                </a:solidFill>
+              </a:rPr>
+              <a:t>Network topology and learning</a:t>
+            </a:r>
+            <a:endParaRPr lang="en-US" sz="1100" dirty="0"/>
+          </a:p>
+          <a:p>
+            <a:pPr marL="177800" indent="-177800">
+              <a:spcAft>
+                <a:spcPts val="700"/>
+              </a:spcAft>
+              <a:buSzPct val="100000"/>
+              <a:buChar char="•"/>
+            </a:pPr>
+            <a:r>
+              <a:rPr lang="en-US" sz="1100" dirty="0">
+                <a:solidFill>
+                  <a:schemeClr val="tx1"/>
+                </a:solidFill>
+              </a:rPr>
+              <a:t>Full sweep: stale public signal plus no-signal baseline, CARA 0.1, σ reported</a:t>
             </a:r>
             <a:endParaRPr lang="en-US" sz="1100" dirty="0"/>
           </a:p>
@@ -7608,8 +8556,8 @@
         </p:nvSpPr>
         <p:spPr>
           <a:xfrm>
-            <a:off x="457200" y="274320"/>
-            <a:ext cx="8229600" cy="685800"/>
+            <a:off x="548640" y="1828800"/>
+            <a:ext cx="8046720" cy="1097280"/>
           </a:xfrm>
           <a:prstGeom prst="rect">
             <a:avLst/>
@@ -7625,1206 +8573,52 @@
               <a:buNone/>
             </a:pPr>
             <a:r>
-              <a:rPr lang="en-US" sz="2400" b="1" dirty="0">
-                <a:solidFill>
-                  <a:schemeClr val="tx2"/>
-                </a:solidFill>
-              </a:rPr>
-              <a:t>Takeaways and next steps</a:t>
-            </a:r>
-            <a:endParaRPr lang="en-US" sz="2400" dirty="0"/>
-          </a:p>
-        </p:txBody>
-      </p:sp>
-      <p:sp>
-        <p:nvSpPr>
-          <p:cNvPr id="3" name="take-0"/>
+              <a:rPr lang="en-US" sz="3200" b="1" dirty="0">
+                <a:solidFill>
+                  <a:schemeClr val="bg1"/>
+                </a:solidFill>
+              </a:rPr>
+              <a:t>Backup</a:t>
+            </a:r>
+            <a:endParaRPr lang="en-US" sz="3200" dirty="0"/>
+          </a:p>
+        </p:txBody>
+      </p:sp>
+      <p:sp>
+        <p:nvSpPr>
+          <p:cNvPr id="3" name="Text 0"/>
           <p:cNvSpPr/>
-          <p:nvPr/>
-        </p:nvSpPr>
-        <p:spPr>
-          <a:xfrm>
-            <a:off x="457200" y="1051560"/>
-            <a:ext cx="5760720" cy="512064"/>
-          </a:xfrm>
-          <a:prstGeom prst="roundRect">
-            <a:avLst>
-              <a:gd name="adj" fmla="val 14286"/>
-            </a:avLst>
-          </a:prstGeom>
-          <a:solidFill>
-            <a:schemeClr val="bg2"/>
-          </a:solidFill>
-          <a:ln w="12700">
-            <a:solidFill>
-              <a:schemeClr val="bg2"/>
-            </a:solidFill>
-            <a:prstDash val="solid"/>
-          </a:ln>
-        </p:spPr>
-      </p:sp>
-      <p:sp>
-        <p:nvSpPr>
-          <p:cNvPr id="4" name="chip"/>
-          <p:cNvSpPr/>
-          <p:nvPr/>
-        </p:nvSpPr>
-        <p:spPr>
-          <a:xfrm>
-            <a:off x="548640" y="1143000"/>
-            <a:ext cx="329184" cy="329184"/>
-          </a:xfrm>
-          <a:prstGeom prst="roundRect">
-            <a:avLst>
-              <a:gd name="adj" fmla="val 16667"/>
-            </a:avLst>
-          </a:prstGeom>
-          <a:solidFill>
-            <a:schemeClr val="accent1"/>
-          </a:solidFill>
-          <a:ln w="12700">
-            <a:solidFill>
-              <a:schemeClr val="accent1"/>
-            </a:solidFill>
-            <a:prstDash val="solid"/>
-          </a:ln>
-        </p:spPr>
-      </p:sp>
-      <p:sp>
-        <p:nvSpPr>
-          <p:cNvPr id="5" name="chip-label"/>
-          <p:cNvSpPr txBox="1"/>
-          <p:nvPr/>
-        </p:nvSpPr>
-        <p:spPr>
-          <a:xfrm>
-            <a:off x="548640" y="1143000"/>
-            <a:ext cx="329184" cy="329184"/>
-          </a:xfrm>
-          <a:prstGeom prst="rect">
-            <a:avLst/>
-          </a:prstGeom>
-          <a:noFill/>
-          <a:ln/>
-        </p:spPr>
-        <p:txBody>
-          <a:bodyPr wrap="square" lIns="0" tIns="0" rIns="0" bIns="0" rtlCol="0" anchor="ctr"/>
-          <a:lstStyle/>
-          <a:p>
-            <a:pPr algn="ctr" indent="0" marL="0">
-              <a:buNone/>
-            </a:pPr>
-            <a:r>
-              <a:rPr lang="en-US" sz="1100" b="1" dirty="0">
-                <a:solidFill>
-                  <a:schemeClr val="bg1"/>
-                </a:solidFill>
-                <a:latin typeface="Cambria" pitchFamily="34" charset="0"/>
-                <a:ea typeface="Cambria" pitchFamily="34" charset="-122"/>
-                <a:cs typeface="Cambria" pitchFamily="34" charset="-120"/>
-              </a:rPr>
-              <a:t>1</a:t>
-            </a:r>
-            <a:endParaRPr lang="en-US" sz="1100" dirty="0"/>
-          </a:p>
-        </p:txBody>
-      </p:sp>
-      <p:sp>
-        <p:nvSpPr>
-          <p:cNvPr id="6" name="take-head"/>
-          <p:cNvSpPr txBox="1"/>
-          <p:nvPr/>
-        </p:nvSpPr>
-        <p:spPr>
-          <a:xfrm>
-            <a:off x="987552" y="1088136"/>
-            <a:ext cx="1600200" cy="438912"/>
-          </a:xfrm>
-          <a:prstGeom prst="rect">
-            <a:avLst/>
-          </a:prstGeom>
-          <a:noFill/>
-          <a:ln/>
-        </p:spPr>
-        <p:txBody>
-          <a:bodyPr wrap="square" lIns="0" tIns="0" rIns="0" bIns="0" rtlCol="0" anchor="ctr"/>
+          <p:nvPr>
+            <p:ph idx="101" type="body" hasCustomPrompt="1"/>
+          </p:nvPr>
+        </p:nvSpPr>
+        <p:spPr>
+          <a:xfrm>
+            <a:off x="548640" y="2971800"/>
+            <a:ext cx="8046720" cy="731520"/>
+          </a:xfrm>
+          <a:prstGeom prst="rect">
+            <a:avLst/>
+          </a:prstGeom>
+          <a:noFill/>
+          <a:ln/>
+        </p:spPr>
+        <p:txBody>
+          <a:bodyPr wrap="square" lIns="0" tIns="0" rIns="0" bIns="0" rtlCol="0" anchor="t"/>
           <a:lstStyle/>
           <a:p>
             <a:pPr indent="0" marL="0">
               <a:buNone/>
             </a:pPr>
             <a:r>
-              <a:rPr lang="en-US" sz="1100" b="1" dirty="0">
-                <a:solidFill>
-                  <a:schemeClr val="tx2"/>
-                </a:solidFill>
-              </a:rPr>
-              <a:t>Sorting follows the news</a:t>
-            </a:r>
-            <a:endParaRPr lang="en-US" sz="1100" dirty="0"/>
-          </a:p>
-        </p:txBody>
-      </p:sp>
-      <p:sp>
-        <p:nvSpPr>
-          <p:cNvPr id="7" name="take-body"/>
-          <p:cNvSpPr txBox="1"/>
-          <p:nvPr/>
-        </p:nvSpPr>
-        <p:spPr>
-          <a:xfrm>
-            <a:off x="2651760" y="1088136"/>
-            <a:ext cx="3474720" cy="438912"/>
-          </a:xfrm>
-          <a:prstGeom prst="rect">
-            <a:avLst/>
-          </a:prstGeom>
-          <a:noFill/>
-          <a:ln/>
-        </p:spPr>
-        <p:txBody>
-          <a:bodyPr wrap="square" lIns="0" tIns="0" rIns="0" bIns="0" rtlCol="0" anchor="ctr"/>
-          <a:lstStyle/>
-          <a:p>
-            <a:pPr indent="0" marL="0">
-              <a:buNone/>
-            </a:pPr>
-            <a:r>
-              <a:rPr lang="en-US" sz="1000" dirty="0">
-                <a:solidFill>
-                  <a:schemeClr val="tx1"/>
-                </a:solidFill>
-              </a:rPr>
-              <a:t>Optimistic public news makes individualists run relatively more; pessimistic news, collectivists. 3 of 4 pre-registered tests pass, in all three bank versions.</a:t>
-            </a:r>
-            <a:endParaRPr lang="en-US" sz="1000" dirty="0"/>
-          </a:p>
-        </p:txBody>
-      </p:sp>
-      <p:sp>
-        <p:nvSpPr>
-          <p:cNvPr id="8" name="take-1"/>
-          <p:cNvSpPr/>
-          <p:nvPr/>
-        </p:nvSpPr>
-        <p:spPr>
-          <a:xfrm>
-            <a:off x="457200" y="1636776"/>
-            <a:ext cx="5760720" cy="512064"/>
-          </a:xfrm>
-          <a:prstGeom prst="roundRect">
-            <a:avLst>
-              <a:gd name="adj" fmla="val 14286"/>
-            </a:avLst>
-          </a:prstGeom>
-          <a:solidFill>
-            <a:schemeClr val="bg2"/>
-          </a:solidFill>
-          <a:ln w="12700">
-            <a:solidFill>
-              <a:schemeClr val="bg2"/>
-            </a:solidFill>
-            <a:prstDash val="solid"/>
-          </a:ln>
-        </p:spPr>
-      </p:sp>
-      <p:sp>
-        <p:nvSpPr>
-          <p:cNvPr id="9" name="chip"/>
-          <p:cNvSpPr/>
-          <p:nvPr/>
-        </p:nvSpPr>
-        <p:spPr>
-          <a:xfrm>
-            <a:off x="548640" y="1728216"/>
-            <a:ext cx="329184" cy="329184"/>
-          </a:xfrm>
-          <a:prstGeom prst="roundRect">
-            <a:avLst>
-              <a:gd name="adj" fmla="val 16667"/>
-            </a:avLst>
-          </a:prstGeom>
-          <a:solidFill>
-            <a:schemeClr val="accent1"/>
-          </a:solidFill>
-          <a:ln w="12700">
-            <a:solidFill>
-              <a:schemeClr val="accent1"/>
-            </a:solidFill>
-            <a:prstDash val="solid"/>
-          </a:ln>
-        </p:spPr>
-      </p:sp>
-      <p:sp>
-        <p:nvSpPr>
-          <p:cNvPr id="10" name="chip-label"/>
-          <p:cNvSpPr txBox="1"/>
-          <p:nvPr/>
-        </p:nvSpPr>
-        <p:spPr>
-          <a:xfrm>
-            <a:off x="548640" y="1728216"/>
-            <a:ext cx="329184" cy="329184"/>
-          </a:xfrm>
-          <a:prstGeom prst="rect">
-            <a:avLst/>
-          </a:prstGeom>
-          <a:noFill/>
-          <a:ln/>
-        </p:spPr>
-        <p:txBody>
-          <a:bodyPr wrap="square" lIns="0" tIns="0" rIns="0" bIns="0" rtlCol="0" anchor="ctr"/>
-          <a:lstStyle/>
-          <a:p>
-            <a:pPr algn="ctr" indent="0" marL="0">
-              <a:buNone/>
-            </a:pPr>
-            <a:r>
-              <a:rPr lang="en-US" sz="1100" b="1" dirty="0">
-                <a:solidFill>
-                  <a:schemeClr val="bg1"/>
-                </a:solidFill>
-                <a:latin typeface="Cambria" pitchFamily="34" charset="0"/>
-                <a:ea typeface="Cambria" pitchFamily="34" charset="-122"/>
-                <a:cs typeface="Cambria" pitchFamily="34" charset="-120"/>
-              </a:rPr>
-              <a:t>2</a:t>
-            </a:r>
-            <a:endParaRPr lang="en-US" sz="1100" dirty="0"/>
-          </a:p>
-        </p:txBody>
-      </p:sp>
-      <p:sp>
-        <p:nvSpPr>
-          <p:cNvPr id="11" name="take-head"/>
-          <p:cNvSpPr txBox="1"/>
-          <p:nvPr/>
-        </p:nvSpPr>
-        <p:spPr>
-          <a:xfrm>
-            <a:off x="987552" y="1673352"/>
-            <a:ext cx="1600200" cy="438912"/>
-          </a:xfrm>
-          <a:prstGeom prst="rect">
-            <a:avLst/>
-          </a:prstGeom>
-          <a:noFill/>
-          <a:ln/>
-        </p:spPr>
-        <p:txBody>
-          <a:bodyPr wrap="square" lIns="0" tIns="0" rIns="0" bIns="0" rtlCol="0" anchor="ctr"/>
-          <a:lstStyle/>
-          <a:p>
-            <a:pPr indent="0" marL="0">
-              <a:buNone/>
-            </a:pPr>
-            <a:r>
-              <a:rPr lang="en-US" sz="1100" b="1" dirty="0">
-                <a:solidFill>
-                  <a:schemeClr val="tx2"/>
-                </a:solidFill>
-              </a:rPr>
-              <a:t>Collectivists herd</a:t>
-            </a:r>
-            <a:endParaRPr lang="en-US" sz="1100" dirty="0"/>
-          </a:p>
-        </p:txBody>
-      </p:sp>
-      <p:sp>
-        <p:nvSpPr>
-          <p:cNvPr id="12" name="take-body"/>
-          <p:cNvSpPr txBox="1"/>
-          <p:nvPr/>
-        </p:nvSpPr>
-        <p:spPr>
-          <a:xfrm>
-            <a:off x="2651760" y="1673352"/>
-            <a:ext cx="3474720" cy="438912"/>
-          </a:xfrm>
-          <a:prstGeom prst="rect">
-            <a:avLst/>
-          </a:prstGeom>
-          <a:noFill/>
-          <a:ln/>
-        </p:spPr>
-        <p:txBody>
-          <a:bodyPr wrap="square" lIns="0" tIns="0" rIns="0" bIns="0" rtlCol="0" anchor="ctr"/>
-          <a:lstStyle/>
-          <a:p>
-            <a:pPr indent="0" marL="0">
-              <a:buNone/>
-            </a:pPr>
-            <a:r>
-              <a:rPr lang="en-US" sz="1000" dirty="0">
-                <a:solidFill>
-                  <a:schemeClr val="tx1"/>
-                </a:solidFill>
-              </a:rPr>
-              <a:t>Their chance of withdrawing jumps from 0.15 to 0.93 once 20–35% of neighbours are out; individualists level off near 0.3.</a:t>
-            </a:r>
-            <a:endParaRPr lang="en-US" sz="1000" dirty="0"/>
-          </a:p>
-        </p:txBody>
-      </p:sp>
-      <p:sp>
-        <p:nvSpPr>
-          <p:cNvPr id="13" name="take-2"/>
-          <p:cNvSpPr/>
-          <p:nvPr/>
-        </p:nvSpPr>
-        <p:spPr>
-          <a:xfrm>
-            <a:off x="457200" y="2221992"/>
-            <a:ext cx="5760720" cy="512064"/>
-          </a:xfrm>
-          <a:prstGeom prst="roundRect">
-            <a:avLst>
-              <a:gd name="adj" fmla="val 14286"/>
-            </a:avLst>
-          </a:prstGeom>
-          <a:solidFill>
-            <a:schemeClr val="bg2"/>
-          </a:solidFill>
-          <a:ln w="12700">
-            <a:solidFill>
-              <a:schemeClr val="bg2"/>
-            </a:solidFill>
-            <a:prstDash val="solid"/>
-          </a:ln>
-        </p:spPr>
-      </p:sp>
-      <p:sp>
-        <p:nvSpPr>
-          <p:cNvPr id="14" name="chip"/>
-          <p:cNvSpPr/>
-          <p:nvPr/>
-        </p:nvSpPr>
-        <p:spPr>
-          <a:xfrm>
-            <a:off x="548640" y="2313432"/>
-            <a:ext cx="329184" cy="329184"/>
-          </a:xfrm>
-          <a:prstGeom prst="roundRect">
-            <a:avLst>
-              <a:gd name="adj" fmla="val 16667"/>
-            </a:avLst>
-          </a:prstGeom>
-          <a:solidFill>
-            <a:schemeClr val="accent1"/>
-          </a:solidFill>
-          <a:ln w="12700">
-            <a:solidFill>
-              <a:schemeClr val="accent1"/>
-            </a:solidFill>
-            <a:prstDash val="solid"/>
-          </a:ln>
-        </p:spPr>
-      </p:sp>
-      <p:sp>
-        <p:nvSpPr>
-          <p:cNvPr id="15" name="chip-label"/>
-          <p:cNvSpPr txBox="1"/>
-          <p:nvPr/>
-        </p:nvSpPr>
-        <p:spPr>
-          <a:xfrm>
-            <a:off x="548640" y="2313432"/>
-            <a:ext cx="329184" cy="329184"/>
-          </a:xfrm>
-          <a:prstGeom prst="rect">
-            <a:avLst/>
-          </a:prstGeom>
-          <a:noFill/>
-          <a:ln/>
-        </p:spPr>
-        <p:txBody>
-          <a:bodyPr wrap="square" lIns="0" tIns="0" rIns="0" bIns="0" rtlCol="0" anchor="ctr"/>
-          <a:lstStyle/>
-          <a:p>
-            <a:pPr algn="ctr" indent="0" marL="0">
-              <a:buNone/>
-            </a:pPr>
-            <a:r>
-              <a:rPr lang="en-US" sz="1100" b="1" dirty="0">
-                <a:solidFill>
-                  <a:schemeClr val="bg1"/>
-                </a:solidFill>
-                <a:latin typeface="Cambria" pitchFamily="34" charset="0"/>
-                <a:ea typeface="Cambria" pitchFamily="34" charset="-122"/>
-                <a:cs typeface="Cambria" pitchFamily="34" charset="-120"/>
-              </a:rPr>
-              <a:t>3</a:t>
-            </a:r>
-            <a:endParaRPr lang="en-US" sz="1100" dirty="0"/>
-          </a:p>
-        </p:txBody>
-      </p:sp>
-      <p:sp>
-        <p:nvSpPr>
-          <p:cNvPr id="16" name="take-head"/>
-          <p:cNvSpPr txBox="1"/>
-          <p:nvPr/>
-        </p:nvSpPr>
-        <p:spPr>
-          <a:xfrm>
-            <a:off x="987552" y="2258568"/>
-            <a:ext cx="1600200" cy="438912"/>
-          </a:xfrm>
-          <a:prstGeom prst="rect">
-            <a:avLst/>
-          </a:prstGeom>
-          <a:noFill/>
-          <a:ln/>
-        </p:spPr>
-        <p:txBody>
-          <a:bodyPr wrap="square" lIns="0" tIns="0" rIns="0" bIns="0" rtlCol="0" anchor="ctr"/>
-          <a:lstStyle/>
-          <a:p>
-            <a:pPr indent="0" marL="0">
-              <a:buNone/>
-            </a:pPr>
-            <a:r>
-              <a:rPr lang="en-US" sz="1100" b="1" dirty="0">
-                <a:solidFill>
-                  <a:schemeClr val="tx2"/>
-                </a:solidFill>
-              </a:rPr>
-              <a:t>More individualists, fewer failures</a:t>
-            </a:r>
-            <a:endParaRPr lang="en-US" sz="1100" dirty="0"/>
-          </a:p>
-        </p:txBody>
-      </p:sp>
-      <p:sp>
-        <p:nvSpPr>
-          <p:cNvPr id="17" name="take-body"/>
-          <p:cNvSpPr txBox="1"/>
-          <p:nvPr/>
-        </p:nvSpPr>
-        <p:spPr>
-          <a:xfrm>
-            <a:off x="2651760" y="2258568"/>
-            <a:ext cx="3474720" cy="438912"/>
-          </a:xfrm>
-          <a:prstGeom prst="rect">
-            <a:avLst/>
-          </a:prstGeom>
-          <a:noFill/>
-          <a:ln/>
-        </p:spPr>
-        <p:txBody>
-          <a:bodyPr wrap="square" lIns="0" tIns="0" rIns="0" bIns="0" rtlCol="0" anchor="ctr"/>
-          <a:lstStyle/>
-          <a:p>
-            <a:pPr indent="0" marL="0">
-              <a:buNone/>
-            </a:pPr>
-            <a:r>
-              <a:rPr lang="en-US" sz="1000" dirty="0">
-                <a:solidFill>
-                  <a:schemeClr val="tx1"/>
-                </a:solidFill>
-              </a:rPr>
-              <a:t>P(fail) falls from 0.67 to 0.08 as the individualist share goes from 0 to 1. Monotone; no interior peak.</a:t>
-            </a:r>
-            <a:endParaRPr lang="en-US" sz="1000" dirty="0"/>
-          </a:p>
-        </p:txBody>
-      </p:sp>
-      <p:sp>
-        <p:nvSpPr>
-          <p:cNvPr id="18" name="take-3"/>
-          <p:cNvSpPr/>
-          <p:nvPr/>
-        </p:nvSpPr>
-        <p:spPr>
-          <a:xfrm>
-            <a:off x="457200" y="2807208"/>
-            <a:ext cx="5760720" cy="512064"/>
-          </a:xfrm>
-          <a:prstGeom prst="roundRect">
-            <a:avLst>
-              <a:gd name="adj" fmla="val 14286"/>
-            </a:avLst>
-          </a:prstGeom>
-          <a:solidFill>
-            <a:schemeClr val="bg2"/>
-          </a:solidFill>
-          <a:ln w="12700">
-            <a:solidFill>
-              <a:schemeClr val="bg2"/>
-            </a:solidFill>
-            <a:prstDash val="solid"/>
-          </a:ln>
-        </p:spPr>
-      </p:sp>
-      <p:sp>
-        <p:nvSpPr>
-          <p:cNvPr id="19" name="chip"/>
-          <p:cNvSpPr/>
-          <p:nvPr/>
-        </p:nvSpPr>
-        <p:spPr>
-          <a:xfrm>
-            <a:off x="548640" y="2898648"/>
-            <a:ext cx="329184" cy="329184"/>
-          </a:xfrm>
-          <a:prstGeom prst="roundRect">
-            <a:avLst>
-              <a:gd name="adj" fmla="val 16667"/>
-            </a:avLst>
-          </a:prstGeom>
-          <a:solidFill>
-            <a:schemeClr val="accent1"/>
-          </a:solidFill>
-          <a:ln w="12700">
-            <a:solidFill>
-              <a:schemeClr val="accent1"/>
-            </a:solidFill>
-            <a:prstDash val="solid"/>
-          </a:ln>
-        </p:spPr>
-      </p:sp>
-      <p:sp>
-        <p:nvSpPr>
-          <p:cNvPr id="20" name="chip-label"/>
-          <p:cNvSpPr txBox="1"/>
-          <p:nvPr/>
-        </p:nvSpPr>
-        <p:spPr>
-          <a:xfrm>
-            <a:off x="548640" y="2898648"/>
-            <a:ext cx="329184" cy="329184"/>
-          </a:xfrm>
-          <a:prstGeom prst="rect">
-            <a:avLst/>
-          </a:prstGeom>
-          <a:noFill/>
-          <a:ln/>
-        </p:spPr>
-        <p:txBody>
-          <a:bodyPr wrap="square" lIns="0" tIns="0" rIns="0" bIns="0" rtlCol="0" anchor="ctr"/>
-          <a:lstStyle/>
-          <a:p>
-            <a:pPr algn="ctr" indent="0" marL="0">
-              <a:buNone/>
-            </a:pPr>
-            <a:r>
-              <a:rPr lang="en-US" sz="1100" b="1" dirty="0">
-                <a:solidFill>
-                  <a:schemeClr val="bg1"/>
-                </a:solidFill>
-                <a:latin typeface="Cambria" pitchFamily="34" charset="0"/>
-                <a:ea typeface="Cambria" pitchFamily="34" charset="-122"/>
-                <a:cs typeface="Cambria" pitchFamily="34" charset="-120"/>
-              </a:rPr>
-              <a:t>4</a:t>
-            </a:r>
-            <a:endParaRPr lang="en-US" sz="1100" dirty="0"/>
-          </a:p>
-        </p:txBody>
-      </p:sp>
-      <p:sp>
-        <p:nvSpPr>
-          <p:cNvPr id="21" name="take-head"/>
-          <p:cNvSpPr txBox="1"/>
-          <p:nvPr/>
-        </p:nvSpPr>
-        <p:spPr>
-          <a:xfrm>
-            <a:off x="987552" y="2843784"/>
-            <a:ext cx="1600200" cy="438912"/>
-          </a:xfrm>
-          <a:prstGeom prst="rect">
-            <a:avLst/>
-          </a:prstGeom>
-          <a:noFill/>
-          <a:ln/>
-        </p:spPr>
-        <p:txBody>
-          <a:bodyPr wrap="square" lIns="0" tIns="0" rIns="0" bIns="0" rtlCol="0" anchor="ctr"/>
-          <a:lstStyle/>
-          <a:p>
-            <a:pPr indent="0" marL="0">
-              <a:buNone/>
-            </a:pPr>
-            <a:r>
-              <a:rPr lang="en-US" sz="1100" b="1" dirty="0">
-                <a:solidFill>
-                  <a:schemeClr val="tx2"/>
-                </a:solidFill>
-              </a:rPr>
-              <a:t>Stale news cuts both ways</a:t>
-            </a:r>
-            <a:endParaRPr lang="en-US" sz="1100" dirty="0"/>
-          </a:p>
-        </p:txBody>
-      </p:sp>
-      <p:sp>
-        <p:nvSpPr>
-          <p:cNvPr id="22" name="take-body"/>
-          <p:cNvSpPr txBox="1"/>
-          <p:nvPr/>
-        </p:nvSpPr>
-        <p:spPr>
-          <a:xfrm>
-            <a:off x="2651760" y="2843784"/>
-            <a:ext cx="3474720" cy="438912"/>
-          </a:xfrm>
-          <a:prstGeom prst="rect">
-            <a:avLst/>
-          </a:prstGeom>
-          <a:noFill/>
-          <a:ln/>
-        </p:spPr>
-        <p:txBody>
-          <a:bodyPr wrap="square" lIns="0" tIns="0" rIns="0" bIns="0" rtlCol="0" anchor="ctr"/>
-          <a:lstStyle/>
-          <a:p>
-            <a:pPr indent="0" marL="0">
-              <a:buNone/>
-            </a:pPr>
-            <a:r>
-              <a:rPr lang="en-US" sz="1000" dirty="0">
-                <a:solidFill>
-                  <a:schemeClr val="tx1"/>
-                </a:solidFill>
-              </a:rPr>
-              <a:t>A stale optimistic signal halves failure, a stale pessimistic one raises it by half. Accurate news barely moves it.</a:t>
-            </a:r>
-            <a:endParaRPr lang="en-US" sz="1000" dirty="0"/>
-          </a:p>
-        </p:txBody>
-      </p:sp>
-      <p:sp>
-        <p:nvSpPr>
-          <p:cNvPr id="23" name="take-4"/>
-          <p:cNvSpPr/>
-          <p:nvPr/>
-        </p:nvSpPr>
-        <p:spPr>
-          <a:xfrm>
-            <a:off x="457200" y="3392424"/>
-            <a:ext cx="5760720" cy="512064"/>
-          </a:xfrm>
-          <a:prstGeom prst="roundRect">
-            <a:avLst>
-              <a:gd name="adj" fmla="val 14286"/>
-            </a:avLst>
-          </a:prstGeom>
-          <a:solidFill>
-            <a:schemeClr val="bg2"/>
-          </a:solidFill>
-          <a:ln w="12700">
-            <a:solidFill>
-              <a:schemeClr val="bg2"/>
-            </a:solidFill>
-            <a:prstDash val="solid"/>
-          </a:ln>
-        </p:spPr>
-      </p:sp>
-      <p:sp>
-        <p:nvSpPr>
-          <p:cNvPr id="24" name="chip"/>
-          <p:cNvSpPr/>
-          <p:nvPr/>
-        </p:nvSpPr>
-        <p:spPr>
-          <a:xfrm>
-            <a:off x="548640" y="3483864"/>
-            <a:ext cx="329184" cy="329184"/>
-          </a:xfrm>
-          <a:prstGeom prst="roundRect">
-            <a:avLst>
-              <a:gd name="adj" fmla="val 16667"/>
-            </a:avLst>
-          </a:prstGeom>
-          <a:solidFill>
-            <a:schemeClr val="accent1"/>
-          </a:solidFill>
-          <a:ln w="12700">
-            <a:solidFill>
-              <a:schemeClr val="accent1"/>
-            </a:solidFill>
-            <a:prstDash val="solid"/>
-          </a:ln>
-        </p:spPr>
-      </p:sp>
-      <p:sp>
-        <p:nvSpPr>
-          <p:cNvPr id="25" name="chip-label"/>
-          <p:cNvSpPr txBox="1"/>
-          <p:nvPr/>
-        </p:nvSpPr>
-        <p:spPr>
-          <a:xfrm>
-            <a:off x="548640" y="3483864"/>
-            <a:ext cx="329184" cy="329184"/>
-          </a:xfrm>
-          <a:prstGeom prst="rect">
-            <a:avLst/>
-          </a:prstGeom>
-          <a:noFill/>
-          <a:ln/>
-        </p:spPr>
-        <p:txBody>
-          <a:bodyPr wrap="square" lIns="0" tIns="0" rIns="0" bIns="0" rtlCol="0" anchor="ctr"/>
-          <a:lstStyle/>
-          <a:p>
-            <a:pPr algn="ctr" indent="0" marL="0">
-              <a:buNone/>
-            </a:pPr>
-            <a:r>
-              <a:rPr lang="en-US" sz="1100" b="1" dirty="0">
-                <a:solidFill>
-                  <a:schemeClr val="bg1"/>
-                </a:solidFill>
-                <a:latin typeface="Cambria" pitchFamily="34" charset="0"/>
-                <a:ea typeface="Cambria" pitchFamily="34" charset="-122"/>
-                <a:cs typeface="Cambria" pitchFamily="34" charset="-120"/>
-              </a:rPr>
-              <a:t>5</a:t>
-            </a:r>
-            <a:endParaRPr lang="en-US" sz="1100" dirty="0"/>
-          </a:p>
-        </p:txBody>
-      </p:sp>
-      <p:sp>
-        <p:nvSpPr>
-          <p:cNvPr id="26" name="take-head"/>
-          <p:cNvSpPr txBox="1"/>
-          <p:nvPr/>
-        </p:nvSpPr>
-        <p:spPr>
-          <a:xfrm>
-            <a:off x="987552" y="3429000"/>
-            <a:ext cx="1600200" cy="438912"/>
-          </a:xfrm>
-          <a:prstGeom prst="rect">
-            <a:avLst/>
-          </a:prstGeom>
-          <a:noFill/>
-          <a:ln/>
-        </p:spPr>
-        <p:txBody>
-          <a:bodyPr wrap="square" lIns="0" tIns="0" rIns="0" bIns="0" rtlCol="0" anchor="ctr"/>
-          <a:lstStyle/>
-          <a:p>
-            <a:pPr indent="0" marL="0">
-              <a:buNone/>
-            </a:pPr>
-            <a:r>
-              <a:rPr lang="en-US" sz="1100" b="1" dirty="0">
-                <a:solidFill>
-                  <a:schemeClr val="tx2"/>
-                </a:solidFill>
-              </a:rPr>
-              <a:t>Capping the largest deposits</a:t>
-            </a:r>
-            <a:endParaRPr lang="en-US" sz="1100" dirty="0"/>
-          </a:p>
-        </p:txBody>
-      </p:sp>
-      <p:sp>
-        <p:nvSpPr>
-          <p:cNvPr id="27" name="take-body"/>
-          <p:cNvSpPr txBox="1"/>
-          <p:nvPr/>
-        </p:nvSpPr>
-        <p:spPr>
-          <a:xfrm>
-            <a:off x="2651760" y="3429000"/>
-            <a:ext cx="3474720" cy="438912"/>
-          </a:xfrm>
-          <a:prstGeom prst="rect">
-            <a:avLst/>
-          </a:prstGeom>
-          <a:noFill/>
-          <a:ln/>
-        </p:spPr>
-        <p:txBody>
-          <a:bodyPr wrap="square" lIns="0" tIns="0" rIns="0" bIns="0" rtlCol="0" anchor="ctr"/>
-          <a:lstStyle/>
-          <a:p>
-            <a:pPr indent="0" marL="0">
-              <a:buNone/>
-            </a:pPr>
-            <a:r>
-              <a:rPr lang="en-US" sz="1000" dirty="0">
-                <a:solidFill>
-                  <a:schemeClr val="tx1"/>
-                </a:solidFill>
-              </a:rPr>
-              <a:t>A 1% cap brings failure down to the no-concentration bank’s level; the culture gradient is unchanged.</a:t>
-            </a:r>
-            <a:endParaRPr lang="en-US" sz="1000" dirty="0"/>
-          </a:p>
-        </p:txBody>
-      </p:sp>
-      <p:sp>
-        <p:nvSpPr>
-          <p:cNvPr id="28" name="take-5"/>
-          <p:cNvSpPr/>
-          <p:nvPr/>
-        </p:nvSpPr>
-        <p:spPr>
-          <a:xfrm>
-            <a:off x="457200" y="3977640"/>
-            <a:ext cx="5760720" cy="512064"/>
-          </a:xfrm>
-          <a:prstGeom prst="roundRect">
-            <a:avLst>
-              <a:gd name="adj" fmla="val 14286"/>
-            </a:avLst>
-          </a:prstGeom>
-          <a:solidFill>
-            <a:schemeClr val="accent4"/>
-          </a:solidFill>
-          <a:ln w="12700">
-            <a:solidFill>
-              <a:schemeClr val="accent4"/>
-            </a:solidFill>
-            <a:prstDash val="solid"/>
-          </a:ln>
-        </p:spPr>
-      </p:sp>
-      <p:sp>
-        <p:nvSpPr>
-          <p:cNvPr id="29" name="chip"/>
-          <p:cNvSpPr/>
-          <p:nvPr/>
-        </p:nvSpPr>
-        <p:spPr>
-          <a:xfrm>
-            <a:off x="548640" y="4069080"/>
-            <a:ext cx="329184" cy="329184"/>
-          </a:xfrm>
-          <a:prstGeom prst="roundRect">
-            <a:avLst>
-              <a:gd name="adj" fmla="val 16667"/>
-            </a:avLst>
-          </a:prstGeom>
-          <a:solidFill>
-            <a:schemeClr val="accent2"/>
-          </a:solidFill>
-          <a:ln w="12700">
-            <a:solidFill>
-              <a:schemeClr val="accent2"/>
-            </a:solidFill>
-            <a:prstDash val="solid"/>
-          </a:ln>
-        </p:spPr>
-      </p:sp>
-      <p:sp>
-        <p:nvSpPr>
-          <p:cNvPr id="30" name="chip-label"/>
-          <p:cNvSpPr txBox="1"/>
-          <p:nvPr/>
-        </p:nvSpPr>
-        <p:spPr>
-          <a:xfrm>
-            <a:off x="548640" y="4069080"/>
-            <a:ext cx="329184" cy="329184"/>
-          </a:xfrm>
-          <a:prstGeom prst="rect">
-            <a:avLst/>
-          </a:prstGeom>
-          <a:noFill/>
-          <a:ln/>
-        </p:spPr>
-        <p:txBody>
-          <a:bodyPr wrap="square" lIns="0" tIns="0" rIns="0" bIns="0" rtlCol="0" anchor="ctr"/>
-          <a:lstStyle/>
-          <a:p>
-            <a:pPr algn="ctr" indent="0" marL="0">
-              <a:buNone/>
-            </a:pPr>
-            <a:r>
-              <a:rPr lang="en-US" sz="1100" b="1" dirty="0">
-                <a:solidFill>
-                  <a:schemeClr val="bg1"/>
-                </a:solidFill>
-                <a:latin typeface="Cambria" pitchFamily="34" charset="0"/>
-                <a:ea typeface="Cambria" pitchFamily="34" charset="-122"/>
-                <a:cs typeface="Cambria" pitchFamily="34" charset="-120"/>
-              </a:rPr>
-              <a:t>6</a:t>
-            </a:r>
-            <a:endParaRPr lang="en-US" sz="1100" dirty="0"/>
-          </a:p>
-        </p:txBody>
-      </p:sp>
-      <p:sp>
-        <p:nvSpPr>
-          <p:cNvPr id="31" name="take-head"/>
-          <p:cNvSpPr txBox="1"/>
-          <p:nvPr/>
-        </p:nvSpPr>
-        <p:spPr>
-          <a:xfrm>
-            <a:off x="987552" y="4014216"/>
-            <a:ext cx="1600200" cy="438912"/>
-          </a:xfrm>
-          <a:prstGeom prst="rect">
-            <a:avLst/>
-          </a:prstGeom>
-          <a:noFill/>
-          <a:ln/>
-        </p:spPr>
-        <p:txBody>
-          <a:bodyPr wrap="square" lIns="0" tIns="0" rIns="0" bIns="0" rtlCol="0" anchor="ctr"/>
-          <a:lstStyle/>
-          <a:p>
-            <a:pPr indent="0" marL="0">
-              <a:buNone/>
-            </a:pPr>
-            <a:r>
-              <a:rPr lang="en-US" sz="1100" b="1" dirty="0">
-                <a:solidFill>
-                  <a:schemeClr val="tx2"/>
-                </a:solidFill>
-              </a:rPr>
-              <a:t>Not yet matched</a:t>
-            </a:r>
-            <a:endParaRPr lang="en-US" sz="1100" dirty="0"/>
-          </a:p>
-        </p:txBody>
-      </p:sp>
-      <p:sp>
-        <p:nvSpPr>
-          <p:cNvPr id="32" name="take-body"/>
-          <p:cNvSpPr txBox="1"/>
-          <p:nvPr/>
-        </p:nvSpPr>
-        <p:spPr>
-          <a:xfrm>
-            <a:off x="2651760" y="4014216"/>
-            <a:ext cx="3474720" cy="438912"/>
-          </a:xfrm>
-          <a:prstGeom prst="rect">
-            <a:avLst/>
-          </a:prstGeom>
-          <a:noFill/>
-          <a:ln/>
-        </p:spPr>
-        <p:txBody>
-          <a:bodyPr wrap="square" lIns="0" tIns="0" rIns="0" bIns="0" rtlCol="0" anchor="ctr"/>
-          <a:lstStyle/>
-          <a:p>
-            <a:pPr indent="0" marL="0">
-              <a:buNone/>
-            </a:pPr>
-            <a:r>
-              <a:rPr lang="en-US" sz="1000" dirty="0">
-                <a:solidFill>
-                  <a:schemeClr val="tx1"/>
-                </a:solidFill>
-              </a:rPr>
-              <a:t>How Celsius’s largest depositors exit: one-shot share 0.35 there, 0.93 or more in the model.</a:t>
-            </a:r>
-            <a:endParaRPr lang="en-US" sz="1000" dirty="0"/>
-          </a:p>
-        </p:txBody>
-      </p:sp>
-      <p:sp>
-        <p:nvSpPr>
-          <p:cNvPr id="33" name="next"/>
-          <p:cNvSpPr/>
-          <p:nvPr/>
-        </p:nvSpPr>
-        <p:spPr>
-          <a:xfrm>
-            <a:off x="6400800" y="1051560"/>
-            <a:ext cx="2286000" cy="3438144"/>
-          </a:xfrm>
-          <a:prstGeom prst="roundRect">
-            <a:avLst>
-              <a:gd name="adj" fmla="val 3200"/>
-            </a:avLst>
-          </a:prstGeom>
-          <a:solidFill>
-            <a:schemeClr val="bg2"/>
-          </a:solidFill>
-          <a:ln w="12700">
-            <a:solidFill>
-              <a:schemeClr val="bg2"/>
-            </a:solidFill>
-            <a:prstDash val="solid"/>
-          </a:ln>
-        </p:spPr>
-      </p:sp>
-      <p:sp>
-        <p:nvSpPr>
-          <p:cNvPr id="34" name="next-head"/>
-          <p:cNvSpPr txBox="1"/>
-          <p:nvPr/>
-        </p:nvSpPr>
-        <p:spPr>
-          <a:xfrm>
-            <a:off x="6537960" y="1143000"/>
-            <a:ext cx="2011680" cy="320040"/>
-          </a:xfrm>
-          <a:prstGeom prst="rect">
-            <a:avLst/>
-          </a:prstGeom>
-          <a:noFill/>
-          <a:ln/>
-        </p:spPr>
-        <p:txBody>
-          <a:bodyPr wrap="square" lIns="0" tIns="0" rIns="0" bIns="0" rtlCol="0" anchor="ctr"/>
-          <a:lstStyle/>
-          <a:p>
-            <a:pPr indent="0" marL="0">
-              <a:buNone/>
-            </a:pPr>
-            <a:r>
-              <a:rPr lang="en-US" sz="1300" b="1" dirty="0">
-                <a:solidFill>
-                  <a:schemeClr val="tx2"/>
-                </a:solidFill>
-              </a:rPr>
-              <a:t>Next steps</a:t>
-            </a:r>
-            <a:endParaRPr lang="en-US" sz="1300" dirty="0"/>
-          </a:p>
-        </p:txBody>
-      </p:sp>
-      <p:sp>
-        <p:nvSpPr>
-          <p:cNvPr id="35" name="bullets"/>
-          <p:cNvSpPr txBox="1"/>
-          <p:nvPr/>
-        </p:nvSpPr>
-        <p:spPr>
-          <a:xfrm>
-            <a:off x="6537960" y="1508760"/>
-            <a:ext cx="2011680" cy="2926080"/>
-          </a:xfrm>
-          <a:prstGeom prst="rect">
-            <a:avLst/>
-          </a:prstGeom>
-          <a:noFill/>
-          <a:ln/>
-        </p:spPr>
-        <p:txBody>
-          <a:bodyPr wrap="square" lIns="0" tIns="0" rIns="0" bIns="0" rtlCol="0" anchor="t"/>
-          <a:lstStyle/>
-          <a:p>
-            <a:pPr marL="177800" indent="-177800">
-              <a:spcAft>
-                <a:spcPts val="700"/>
-              </a:spcAft>
-              <a:buSzPct val="100000"/>
-              <a:buChar char="•"/>
-            </a:pPr>
-            <a:r>
-              <a:rPr lang="en-US" sz="1100" dirty="0">
-                <a:solidFill>
-                  <a:schemeClr val="tx1"/>
-                </a:solidFill>
-              </a:rPr>
-              <a:t>Super-individuals, to match how the largest depositors exit (Chapter 2 docking)</a:t>
-            </a:r>
-            <a:endParaRPr lang="en-US" sz="1100" dirty="0"/>
-          </a:p>
-          <a:p>
-            <a:pPr marL="177800" indent="-177800">
-              <a:spcAft>
-                <a:spcPts val="700"/>
-              </a:spcAft>
-              <a:buSzPct val="100000"/>
-              <a:buChar char="•"/>
-            </a:pPr>
-            <a:r>
-              <a:rPr lang="en-US" sz="1100" dirty="0">
-                <a:solidFill>
-                  <a:schemeClr val="tx1"/>
-                </a:solidFill>
-              </a:rPr>
-              <a:t>Deposit insurance and the reserve ratio on the fire-sale bank</a:t>
-            </a:r>
-            <a:endParaRPr lang="en-US" sz="1100" dirty="0"/>
-          </a:p>
-          <a:p>
-            <a:pPr marL="177800" indent="-177800">
-              <a:spcAft>
-                <a:spcPts val="700"/>
-              </a:spcAft>
-              <a:buSzPct val="100000"/>
-              <a:buChar char="•"/>
-            </a:pPr>
-            <a:r>
-              <a:rPr lang="en-US" sz="1100" dirty="0">
-                <a:solidFill>
-                  <a:schemeClr val="tx1"/>
-                </a:solidFill>
-              </a:rPr>
-              <a:t>Network topology and learning</a:t>
-            </a:r>
-            <a:endParaRPr lang="en-US" sz="1100" dirty="0"/>
-          </a:p>
-          <a:p>
-            <a:pPr marL="177800" indent="-177800">
-              <a:spcAft>
-                <a:spcPts val="700"/>
-              </a:spcAft>
-              <a:buSzPct val="100000"/>
-              <a:buChar char="•"/>
-            </a:pPr>
-            <a:r>
-              <a:rPr lang="en-US" sz="1100" dirty="0">
-                <a:solidFill>
-                  <a:schemeClr val="tx1"/>
-                </a:solidFill>
-              </a:rPr>
-              <a:t>Full sweep: stale public signal plus no-signal baseline, CARA 0.1, σ reported</a:t>
-            </a:r>
-            <a:endParaRPr lang="en-US" sz="1100" dirty="0"/>
-          </a:p>
-        </p:txBody>
-      </p:sp>
-      <p:sp>
-        <p:nvSpPr>
-          <p:cNvPr id="25" name="Slide Number Placeholder 0"/>
-          <p:cNvSpPr>
-            <a:spLocks noGrp="1"/>
-          </p:cNvSpPr>
-          <p:nvPr>
-            <p:ph type="sldNum" sz="quarter" idx="4294967295"/>
-          </p:nvPr>
-        </p:nvSpPr>
-        <p:spPr>
-          <a:xfrm>
-            <a:off x="8321040" y="4754880"/>
-            <a:ext cx="457200" cy="274320"/>
-          </a:xfrm>
-          <a:prstGeom prst="rect">
-            <a:avLst/>
-          </a:prstGeom>
-          <a:extLst>
-            <a:ext uri="{C572A759-6A51-4108-AA02-DFA0A04FC94B}">
-              <ma14:wrappingTextBoxFlag xmlns:ma14="http://schemas.microsoft.com/office/mac/drawingml/2011/main" val="0"/>
-            </a:ext>
-          </a:extLst>
-        </p:spPr>
-        <p:txBody>
-          <a:bodyPr/>
-          <a:lstStyle>
-            <a:lvl1pPr>
-              <a:defRPr sz="900">
-                <a:solidFill>
-                  <a:srgbClr val="6B7280"/>
-                </a:solidFill>
-              </a:defRPr>
-            </a:lvl1pPr>
-          </a:lstStyle>
-          <a:p>
-            <a:pPr algn="r"/>
-            <a:fld id="{F7021451-1387-4CA6-816F-3879F97B5CBC}" type="slidenum">
-              <a:rPr b="0" lang="en-US"/>
-              <a:t>18</a:t>
-            </a:fld>
-            <a:endParaRPr lang="en-US"/>
+              <a:rPr lang="en-US" sz="1600" dirty="0">
+                <a:solidFill>
+                  <a:schemeClr val="accent4"/>
+                </a:solidFill>
+              </a:rPr>
+              <a:t>Technical versions of the exhibits, the pre-registered tests, channels, and the Celsius docking gap.</a:t>
+            </a:r>
+            <a:endParaRPr lang="en-US" sz="1600" dirty="0"/>
           </a:p>
         </p:txBody>
       </p:sp>
@@ -8863,8 +8657,8 @@
         </p:nvSpPr>
         <p:spPr>
           <a:xfrm>
-            <a:off x="548640" y="1828800"/>
-            <a:ext cx="8046720" cy="1097280"/>
+            <a:off x="457200" y="274320"/>
+            <a:ext cx="8229600" cy="685800"/>
           </a:xfrm>
           <a:prstGeom prst="rect">
             <a:avLst/>
@@ -8880,52 +8674,119 @@
               <a:buNone/>
             </a:pPr>
             <a:r>
-              <a:rPr lang="en-US" sz="3200" b="1" dirty="0">
-                <a:solidFill>
-                  <a:schemeClr val="bg1"/>
-                </a:solidFill>
-              </a:rPr>
-              <a:t>Backup</a:t>
-            </a:r>
-            <a:endParaRPr lang="en-US" sz="3200" dirty="0"/>
-          </a:p>
-        </p:txBody>
-      </p:sp>
-      <p:sp>
-        <p:nvSpPr>
-          <p:cNvPr id="3" name="Text 0"/>
-          <p:cNvSpPr/>
-          <p:nvPr>
-            <p:ph idx="101" type="body" hasCustomPrompt="1"/>
-          </p:nvPr>
-        </p:nvSpPr>
-        <p:spPr>
-          <a:xfrm>
-            <a:off x="548640" y="2971800"/>
-            <a:ext cx="8046720" cy="731520"/>
-          </a:xfrm>
-          <a:prstGeom prst="rect">
-            <a:avLst/>
-          </a:prstGeom>
-          <a:noFill/>
-          <a:ln/>
-        </p:spPr>
-        <p:txBody>
-          <a:bodyPr wrap="square" lIns="0" tIns="0" rIns="0" bIns="0" rtlCol="0" anchor="t"/>
+              <a:rPr lang="en-US" sz="2400" b="1" dirty="0">
+                <a:solidFill>
+                  <a:schemeClr val="tx2"/>
+                </a:solidFill>
+              </a:rPr>
+              <a:t>Who withdraws, by type and mix</a:t>
+            </a:r>
+            <a:endParaRPr lang="en-US" sz="2400" dirty="0"/>
+          </a:p>
+        </p:txBody>
+      </p:sp>
+      <p:pic>
+        <p:nvPicPr>
+          <p:cNvPr id="3" name="e06" descr="Share who withdraw by individualist share, three panels by lambda pair: collectivists above individualists at every mixed share for the two wide gaps.">    </p:cNvPr>
+          <p:cNvPicPr>
+            <a:picLocks noChangeAspect="1"/>
+          </p:cNvPicPr>
+          <p:nvPr/>
+        </p:nvPicPr>
+        <p:blipFill>
+          <a:blip r:embed="rId1"/>
+          <a:stretch>
+            <a:fillRect/>
+          </a:stretch>
+        </p:blipFill>
+        <p:spPr>
+          <a:xfrm>
+            <a:off x="512064" y="1051560"/>
+            <a:ext cx="8119872" cy="3383280"/>
+          </a:xfrm>
+          <a:prstGeom prst="rect">
+            <a:avLst/>
+          </a:prstGeom>
+        </p:spPr>
+      </p:pic>
+      <p:sp>
+        <p:nvSpPr>
+          <p:cNvPr id="4" name="caption"/>
+          <p:cNvSpPr txBox="1"/>
+          <p:nvPr/>
+        </p:nvSpPr>
+        <p:spPr>
+          <a:xfrm>
+            <a:off x="457200" y="4480560"/>
+            <a:ext cx="8229600" cy="274320"/>
+          </a:xfrm>
+          <a:prstGeom prst="rect">
+            <a:avLst/>
+          </a:prstGeom>
+          <a:noFill/>
+          <a:ln/>
+        </p:spPr>
+        <p:txBody>
+          <a:bodyPr wrap="square" lIns="0" tIns="0" rIns="0" bIns="0" rtlCol="0" anchor="ctr"/>
           <a:lstStyle/>
           <a:p>
             <a:pPr indent="0" marL="0">
               <a:buNone/>
             </a:pPr>
             <a:r>
-              <a:rPr lang="en-US" sz="1600" dirty="0">
-                <a:solidFill>
-                  <a:schemeClr val="accent4"/>
-                </a:solidFill>
-              </a:rPr>
-              <a:t>Technical versions of the exhibits, the pre-registered tests, channels, and the Celsius docking gap.</a:t>
-            </a:r>
-            <a:endParaRPr lang="en-US" sz="1600" dirty="0"/>
+              <a:rPr lang="en-US" sz="1000" i="1" dirty="0">
+                <a:solidFill>
+                  <a:schemeClr val="accent3"/>
+                </a:solidFill>
+              </a:rPr>
+              <a:t>Share who withdraw by individualist share μ, one panel per λ pair; orange individualists, blue collectivists, with CIs.</a:t>
+            </a:r>
+            <a:endParaRPr lang="en-US" sz="1000" dirty="0"/>
+          </a:p>
+        </p:txBody>
+      </p:sp>
+      <p:sp>
+        <p:nvSpPr>
+          <p:cNvPr id="25" name="Slide Number Placeholder 0"/>
+          <p:cNvSpPr>
+            <a:spLocks noGrp="1"/>
+          </p:cNvSpPr>
+          <p:nvPr>
+            <p:ph type="sldNum" sz="quarter" idx="4294967295"/>
+          </p:nvPr>
+        </p:nvSpPr>
+        <p:spPr>
+          <a:xfrm>
+            <a:off x="8321040" y="4754880"/>
+            <a:ext cx="457200" cy="274320"/>
+          </a:xfrm>
+          <a:prstGeom prst="rect">
+            <a:avLst/>
+          </a:prstGeom>
+          <a:extLst>
+            <a:ext uri="{C572A759-6A51-4108-AA02-DFA0A04FC94B}">
+              <ma14:wrappingTextBoxFlag xmlns:ma14="http://schemas.microsoft.com/office/mac/drawingml/2011/main" val="0"/>
+            </a:ext>
+          </a:extLst>
+        </p:spPr>
+        <p:txBody>
+          <a:bodyPr/>
+          <a:lstStyle>
+            <a:lvl1pPr>
+              <a:defRPr sz="900">
+                <a:solidFill>
+                  <a:srgbClr val="6B7280"/>
+                </a:solidFill>
+              </a:defRPr>
+            </a:lvl1pPr>
+          </a:lstStyle>
+          <a:p>
+            <a:pPr algn="r"/>
+            <a:fld id="{F7021451-1387-4CA6-816F-3879F97B5CBC}" type="slidenum">
+              <a:rPr b="0" lang="en-US"/>
+              <a:t>19</a:t>
+            </a:fld>
+            <a:endParaRPr lang="en-US"/>
           </a:p>
         </p:txBody>
       </p:sp>
@@ -9154,7 +9015,7 @@
                   <a:schemeClr val="tx2"/>
                 </a:solidFill>
               </a:rPr>
-              <a:t>Who withdraws, by type and mix</a:t>
+              <a:t>The pre-registered tests, three versions of the bank</a:t>
             </a:r>
             <a:endParaRPr lang="en-US" sz="2400" dirty="0"/>
           </a:p>
@@ -9162,7 +9023,7 @@
       </p:sp>
       <p:pic>
         <p:nvPicPr>
-          <p:cNvPr id="3" name="e06" descr="Share who withdraw by individualist share, three panels by lambda pair: collectivists above individualists at every mixed share for the two wide gaps.">    </p:cNvPr>
+          <p:cNvPr id="3" name="e03" descr="Forest plot of five tests (G1', G4', G2a', G3, G3c) across three bank versions with pooled estimates and per-pair markers.">    </p:cNvPr>
           <p:cNvPicPr>
             <a:picLocks noChangeAspect="1"/>
           </p:cNvPicPr>
@@ -9176,8 +9037,8 @@
         </p:blipFill>
         <p:spPr>
           <a:xfrm>
-            <a:off x="512064" y="1051560"/>
-            <a:ext cx="8119872" cy="3383280"/>
+            <a:off x="882533" y="1051560"/>
+            <a:ext cx="7378934" cy="3383280"/>
           </a:xfrm>
           <a:prstGeom prst="rect">
             <a:avLst/>
@@ -9214,7 +9075,7 @@
                   <a:schemeClr val="accent3"/>
                 </a:solidFill>
               </a:rPr>
-              <a:t>Share who withdraw by individualist share μ, one panel per λ pair; orange individualists, blue collectivists, with CIs.</a:t>
+              <a:t>G1′, G4′, G2a′, G3 and G3c (post hoc). Rows: risk-neutral all-or-nothing, CARA partial, capped reference bank. Filled dot: pooled; hollow: each λ pair. Shaded: Chapter 1’s predicted sign.</a:t>
             </a:r>
             <a:endParaRPr lang="en-US" sz="1000" dirty="0"/>
           </a:p>
@@ -9322,7 +9183,7 @@
                   <a:schemeClr val="tx2"/>
                 </a:solidFill>
               </a:rPr>
-              <a:t>The pre-registered tests, three versions of the bank</a:t>
+              <a:t>Which channel carries culture</a:t>
             </a:r>
             <a:endParaRPr lang="en-US" sz="2400" dirty="0"/>
           </a:p>
@@ -9330,7 +9191,7 @@
       </p:sp>
       <p:pic>
         <p:nvPicPr>
-          <p:cNvPr id="3" name="e03" descr="Forest plot of five tests (G1', G4', G2a', G3, G3c) across three bank versions with pooled estimates and per-pair markers.">    </p:cNvPr>
+          <p:cNvPr id="3" name="e09" descr="Who runs in failed runs with optimistic news when lambda applies only to the neighbour blend, only to the news blend, or both: positive, negative, small positive.">    </p:cNvPr>
           <p:cNvPicPr>
             <a:picLocks noChangeAspect="1"/>
           </p:cNvPicPr>
@@ -9344,8 +9205,8 @@
         </p:blipFill>
         <p:spPr>
           <a:xfrm>
-            <a:off x="882533" y="1051560"/>
-            <a:ext cx="7378934" cy="3383280"/>
+            <a:off x="1547348" y="1051560"/>
+            <a:ext cx="6049305" cy="3383280"/>
           </a:xfrm>
           <a:prstGeom prst="rect">
             <a:avLst/>
@@ -9382,7 +9243,7 @@
                   <a:schemeClr val="accent3"/>
                 </a:solidFill>
               </a:rPr>
-              <a:t>G1′, G4′, G2a′, G3 and G3c (post hoc). Rows: risk-neutral all-or-nothing, CARA partial, capped reference bank. Filled dot: pooled; hollow: each λ pair. Shaded: Chapter 1’s predicted sign.</a:t>
+              <a:t>D in failed runs with optimistic news, when λ weights only the neighbour blend, only the news blend, or both (the model). θ-blend only +0.14; head-count only −0.07; both +0.02.</a:t>
             </a:r>
             <a:endParaRPr lang="en-US" sz="1000" dirty="0"/>
           </a:p>
@@ -9490,7 +9351,7 @@
                   <a:schemeClr val="tx2"/>
                 </a:solidFill>
               </a:rPr>
-              <a:t>Which channel carries culture</a:t>
+              <a:t>Matching Celsius: how large depositors exit</a:t>
             </a:r>
             <a:endParaRPr lang="en-US" sz="2400" dirty="0"/>
           </a:p>
@@ -9498,7 +9359,7 @@
       </p:sp>
       <p:pic>
         <p:nvPicPr>
-          <p:cNvPr id="3" name="e09" descr="Who runs in failed runs with optimistic news when lambda applies only to the neighbour blend, only to the news blend, or both: positive, negative, small positive.">    </p:cNvPr>
+          <p:cNvPr id="3" name="e04" descr="Share of exits that withdraw everything at once by depositor size: Celsius falls from about 0.86 to 0.35 for the largest; the model stays at 0.93 to 1.">    </p:cNvPr>
           <p:cNvPicPr>
             <a:picLocks noChangeAspect="1"/>
           </p:cNvPicPr>
@@ -9512,8 +9373,8 @@
         </p:blipFill>
         <p:spPr>
           <a:xfrm>
-            <a:off x="1547348" y="1051560"/>
-            <a:ext cx="6049305" cy="3383280"/>
+            <a:off x="1882292" y="1051560"/>
+            <a:ext cx="5379415" cy="3383280"/>
           </a:xfrm>
           <a:prstGeom prst="rect">
             <a:avLst/>
@@ -9550,7 +9411,7 @@
                   <a:schemeClr val="accent3"/>
                 </a:solidFill>
               </a:rPr>
-              <a:t>D in failed runs with optimistic news, when λ weights only the neighbour blend, only the news blend, or both (the model). θ-blend only +0.14; head-count only −0.07; both +0.02.</a:t>
+              <a:t>Share of exits that withdraw everything at once, by depositor size. Black: Celsius (band for D1–D5); greys: the model, uncapped and capped.</a:t>
             </a:r>
             <a:endParaRPr lang="en-US" sz="1000" dirty="0"/>
           </a:p>
@@ -9658,7 +9519,7 @@
                   <a:schemeClr val="tx2"/>
                 </a:solidFill>
               </a:rPr>
-              <a:t>Matching Celsius: how large depositors exit</a:t>
+              <a:t>Earlier specification (vault bank): failure by mix</a:t>
             </a:r>
             <a:endParaRPr lang="en-US" sz="2400" dirty="0"/>
           </a:p>
@@ -9666,7 +9527,7 @@
       </p:sp>
       <p:pic>
         <p:nvPicPr>
-          <p:cNvPr id="3" name="e04" descr="Share of exits that withdraw everything at once by depositor size: Celsius falls from about 0.86 to 0.35 for the largest; the model stays at 0.93 to 1.">    </p:cNvPr>
+          <p:cNvPr id="3" name="fig1" descr="Earlier vault-bank specification: probability of a run falls with the share of individualists for all three signal-weighting gaps.">    </p:cNvPr>
           <p:cNvPicPr>
             <a:picLocks noChangeAspect="1"/>
           </p:cNvPicPr>
@@ -9680,8 +9541,8 @@
         </p:blipFill>
         <p:spPr>
           <a:xfrm>
-            <a:off x="1882292" y="1051560"/>
-            <a:ext cx="5379415" cy="3383280"/>
+            <a:off x="1999016" y="1051560"/>
+            <a:ext cx="5145969" cy="3383280"/>
           </a:xfrm>
           <a:prstGeom prst="rect">
             <a:avLst/>
@@ -9718,7 +9579,7 @@
                   <a:schemeClr val="accent3"/>
                 </a:solidFill>
               </a:rPr>
-              <a:t>Share of exits that withdraw everything at once, by depositor size. Black: Celsius (band for D1–D5); greys: the model, uncapped and capped.</a:t>
+              <a:t>Vault bank, earlier specification (chapter Figure 1): probability of a run by share of individualists, three λ gaps. Also monotone.</a:t>
             </a:r>
             <a:endParaRPr lang="en-US" sz="1000" dirty="0"/>
           </a:p>
@@ -9764,174 +9625,6 @@
             <a:fld id="{F7021451-1387-4CA6-816F-3879F97B5CBC}" type="slidenum">
               <a:rPr b="0" lang="en-US"/>
               <a:t>23</a:t>
-            </a:fld>
-            <a:endParaRPr lang="en-US"/>
-          </a:p>
-        </p:txBody>
-      </p:sp>
-    </p:spTree>
-  </p:cSld>
-  <p:clrMapOvr>
-    <a:masterClrMapping/>
-  </p:clrMapOvr>
-</p:sld>
-</file>
-
-<file path=ppt/slides/slide24.xml><?xml version="1.0" encoding="utf-8"?>
-<p:sld xmlns:a="http://schemas.openxmlformats.org/drawingml/2006/main" xmlns:r="http://schemas.openxmlformats.org/officeDocument/2006/relationships" xmlns:p="http://schemas.openxmlformats.org/presentationml/2006/main">
-  <p:cSld name="Slide 24">
-    <p:spTree>
-      <p:nvGrpSpPr>
-        <p:cNvPr id="1" name=""/>
-        <p:cNvGrpSpPr/>
-        <p:nvPr/>
-      </p:nvGrpSpPr>
-      <p:grpSpPr>
-        <a:xfrm>
-          <a:off x="0" y="0"/>
-          <a:ext cx="0" cy="0"/>
-          <a:chOff x="0" y="0"/>
-          <a:chExt cx="0" cy="0"/>
-        </a:xfrm>
-      </p:grpSpPr>
-      <p:sp>
-        <p:nvSpPr>
-          <p:cNvPr id="2" name="Text 0"/>
-          <p:cNvSpPr/>
-          <p:nvPr>
-            <p:ph idx="100" type="title" hasCustomPrompt="1"/>
-          </p:nvPr>
-        </p:nvSpPr>
-        <p:spPr>
-          <a:xfrm>
-            <a:off x="457200" y="274320"/>
-            <a:ext cx="8229600" cy="685800"/>
-          </a:xfrm>
-          <a:prstGeom prst="rect">
-            <a:avLst/>
-          </a:prstGeom>
-          <a:noFill/>
-          <a:ln/>
-        </p:spPr>
-        <p:txBody>
-          <a:bodyPr wrap="square" lIns="0" tIns="0" rIns="0" bIns="0" rtlCol="0" anchor="ctr"/>
-          <a:lstStyle/>
-          <a:p>
-            <a:pPr algn="l" indent="0" marL="0">
-              <a:buNone/>
-            </a:pPr>
-            <a:r>
-              <a:rPr lang="en-US" sz="2400" b="1" dirty="0">
-                <a:solidFill>
-                  <a:schemeClr val="tx2"/>
-                </a:solidFill>
-              </a:rPr>
-              <a:t>Earlier specification (vault bank): failure by mix</a:t>
-            </a:r>
-            <a:endParaRPr lang="en-US" sz="2400" dirty="0"/>
-          </a:p>
-        </p:txBody>
-      </p:sp>
-      <p:pic>
-        <p:nvPicPr>
-          <p:cNvPr id="3" name="fig1" descr="Earlier vault-bank specification: probability of a run falls with the share of individualists for all three signal-weighting gaps.">    </p:cNvPr>
-          <p:cNvPicPr>
-            <a:picLocks noChangeAspect="1"/>
-          </p:cNvPicPr>
-          <p:nvPr/>
-        </p:nvPicPr>
-        <p:blipFill>
-          <a:blip r:embed="rId1"/>
-          <a:stretch>
-            <a:fillRect/>
-          </a:stretch>
-        </p:blipFill>
-        <p:spPr>
-          <a:xfrm>
-            <a:off x="1999016" y="1051560"/>
-            <a:ext cx="5145969" cy="3383280"/>
-          </a:xfrm>
-          <a:prstGeom prst="rect">
-            <a:avLst/>
-          </a:prstGeom>
-        </p:spPr>
-      </p:pic>
-      <p:sp>
-        <p:nvSpPr>
-          <p:cNvPr id="4" name="caption"/>
-          <p:cNvSpPr txBox="1"/>
-          <p:nvPr/>
-        </p:nvSpPr>
-        <p:spPr>
-          <a:xfrm>
-            <a:off x="457200" y="4480560"/>
-            <a:ext cx="8229600" cy="274320"/>
-          </a:xfrm>
-          <a:prstGeom prst="rect">
-            <a:avLst/>
-          </a:prstGeom>
-          <a:noFill/>
-          <a:ln/>
-        </p:spPr>
-        <p:txBody>
-          <a:bodyPr wrap="square" lIns="0" tIns="0" rIns="0" bIns="0" rtlCol="0" anchor="ctr"/>
-          <a:lstStyle/>
-          <a:p>
-            <a:pPr indent="0" marL="0">
-              <a:buNone/>
-            </a:pPr>
-            <a:r>
-              <a:rPr lang="en-US" sz="1000" i="1" dirty="0">
-                <a:solidFill>
-                  <a:schemeClr val="accent3"/>
-                </a:solidFill>
-              </a:rPr>
-              <a:t>Vault bank, earlier specification (chapter Figure 1): probability of a run by share of individualists, three λ gaps. Also monotone.</a:t>
-            </a:r>
-            <a:endParaRPr lang="en-US" sz="1000" dirty="0"/>
-          </a:p>
-        </p:txBody>
-      </p:sp>
-      <p:sp>
-        <p:nvSpPr>
-          <p:cNvPr id="25" name="Slide Number Placeholder 0"/>
-          <p:cNvSpPr>
-            <a:spLocks noGrp="1"/>
-          </p:cNvSpPr>
-          <p:nvPr>
-            <p:ph type="sldNum" sz="quarter" idx="4294967295"/>
-          </p:nvPr>
-        </p:nvSpPr>
-        <p:spPr>
-          <a:xfrm>
-            <a:off x="8321040" y="4754880"/>
-            <a:ext cx="457200" cy="274320"/>
-          </a:xfrm>
-          <a:prstGeom prst="rect">
-            <a:avLst/>
-          </a:prstGeom>
-          <a:extLst>
-            <a:ext uri="{C572A759-6A51-4108-AA02-DFA0A04FC94B}">
-              <ma14:wrappingTextBoxFlag xmlns:ma14="http://schemas.microsoft.com/office/mac/drawingml/2011/main" val="0"/>
-            </a:ext>
-          </a:extLst>
-        </p:spPr>
-        <p:txBody>
-          <a:bodyPr/>
-          <a:lstStyle>
-            <a:lvl1pPr>
-              <a:defRPr sz="900">
-                <a:solidFill>
-                  <a:srgbClr val="6B7280"/>
-                </a:solidFill>
-              </a:defRPr>
-            </a:lvl1pPr>
-          </a:lstStyle>
-          <a:p>
-            <a:pPr algn="r"/>
-            <a:fld id="{F7021451-1387-4CA6-816F-3879F97B5CBC}" type="slidenum">
-              <a:rPr b="0" lang="en-US"/>
-              <a:t>24</a:t>
             </a:fld>
             <a:endParaRPr lang="en-US"/>
           </a:p>
@@ -10660,7 +10353,7 @@
                   <a:schemeClr val="tx2"/>
                 </a:solidFill>
               </a:rPr>
-              <a:t>How the theory answers it: the Bayesian precision ratio</a:t>
+              <a:t>What panics look like</a:t>
             </a:r>
             <a:endParaRPr lang="en-US" sz="2400" dirty="0"/>
           </a:p>
@@ -10696,7 +10389,7 @@
                   <a:schemeClr val="tx2"/>
                 </a:solidFill>
               </a:rPr>
-              <a:t>Weight on the public signal = its precision relative to the private one. The same for everyone, and vanishing.</a:t>
+              <a:t>Panics are open disagreements between the public line and private evidence, and depositors split on which to trust.</a:t>
             </a:r>
             <a:endParaRPr lang="en-US" sz="1700" dirty="0"/>
           </a:p>
@@ -10736,7 +10429,7 @@
                   <a:schemeClr val="tx1"/>
                 </a:solidFill>
               </a:rPr>
-              <a:t>The same for everyone. </a:t>
+              <a:t>Celsius, 2022. </a:t>
             </a:r>
             <a:pPr indent="0" marL="0">
               <a:spcAft>
@@ -10750,7 +10443,7 @@
                   <a:schemeClr val="tx1"/>
                 </a:solidFill>
               </a:rPr>
-              <a:t>Two depositors with the same signals form the same belief. There is no ‘who’.</a:t>
+              <a:t>Official posts insisting the platform was sound, while CEL fell and withdrawals accelerated.</a:t>
             </a:r>
             <a:endParaRPr lang="en-US" sz="1400" dirty="0"/>
           </a:p>
@@ -10768,7 +10461,7 @@
                   <a:schemeClr val="tx1"/>
                 </a:solidFill>
               </a:rPr>
-              <a:t>Vanishing. </a:t>
+              <a:t>Silicon Valley Bank, 2023. </a:t>
             </a:r>
             <a:pPr indent="0" marL="0">
               <a:spcAft>
@@ -10782,7 +10475,7 @@
                   <a:schemeClr val="tx1"/>
                 </a:solidFill>
               </a:rPr>
-              <a:t>As private information sharpens, the weight on the public line goes to zero. The public signal matters only while depositors know little.</a:t>
+              <a:t>A call asking clients to stay calm, against a Twitter feed saying the opposite.</a:t>
             </a:r>
             <a:endParaRPr lang="en-US" sz="1400" dirty="0"/>
           </a:p>
@@ -10800,7 +10493,7 @@
                   <a:schemeClr val="tx1"/>
                 </a:solidFill>
               </a:rPr>
-              <a:t>What it predicts about a panic. </a:t>
+              <a:t>Northern Rock, 2007. </a:t>
             </a:r>
             <a:pPr indent="0" marL="0">
               <a:spcAft>
@@ -10814,9 +10507,45 @@
                   <a:schemeClr val="tx1"/>
                 </a:solidFill>
               </a:rPr>
-              <a:t>Any sorting between depositors is noise, and official communication stops mattering just when depositors are paying most attention.</a:t>
+              <a:t>A Bank of England support announcement, against queues outside the branches.</a:t>
             </a:r>
             <a:endParaRPr lang="en-US" sz="1400" dirty="0"/>
+          </a:p>
+        </p:txBody>
+      </p:sp>
+      <p:sp>
+        <p:nvSpPr>
+          <p:cNvPr id="5" name="step-foot"/>
+          <p:cNvSpPr txBox="1"/>
+          <p:nvPr/>
+        </p:nvSpPr>
+        <p:spPr>
+          <a:xfrm>
+            <a:off x="457200" y="4251960"/>
+            <a:ext cx="8229600" cy="320040"/>
+          </a:xfrm>
+          <a:prstGeom prst="rect">
+            <a:avLst/>
+          </a:prstGeom>
+          <a:noFill/>
+          <a:ln/>
+        </p:spPr>
+        <p:txBody>
+          <a:bodyPr wrap="square" lIns="0" tIns="0" rIns="0" bIns="0" rtlCol="0" anchor="ctr"/>
+          <a:lstStyle/>
+          <a:p>
+            <a:pPr indent="0" marL="0">
+              <a:buNone/>
+            </a:pPr>
+            <a:r>
+              <a:rPr lang="en-US" sz="1100" i="1" dirty="0">
+                <a:solidFill>
+                  <a:schemeClr val="accent3"/>
+                </a:solidFill>
+              </a:rPr>
+              <a:t>In each case the interesting fact is who moved on which signal.</a:t>
+            </a:r>
+            <a:endParaRPr lang="en-US" sz="1100" dirty="0"/>
           </a:p>
         </p:txBody>
       </p:sp>
@@ -10922,7 +10651,7 @@
                   <a:schemeClr val="tx2"/>
                 </a:solidFill>
               </a:rPr>
-              <a:t>Panics do not look like that</a:t>
+              <a:t>Cultural economics: a source of stable weights</a:t>
             </a:r>
             <a:endParaRPr lang="en-US" sz="2400" dirty="0"/>
           </a:p>
@@ -10958,7 +10687,7 @@
                   <a:schemeClr val="tx2"/>
                 </a:solidFill>
               </a:rPr>
-              <a:t>Panics are open disagreements between the public line and private evidence, and depositors split on which to trust.</a:t>
+              <a:t>Culture supplies a weight that differs across depositors, is set before the run, and does not move with the information environment.</a:t>
             </a:r>
             <a:endParaRPr lang="en-US" sz="1700" dirty="0"/>
           </a:p>
@@ -10998,7 +10727,7 @@
                   <a:schemeClr val="tx1"/>
                 </a:solidFill>
               </a:rPr>
-              <a:t>Celsius, 2022. </a:t>
+              <a:t>Transmitted, not chosen. </a:t>
             </a:r>
             <a:pPr indent="0" marL="0">
               <a:spcAft>
@@ -11012,7 +10741,7 @@
                   <a:schemeClr val="tx1"/>
                 </a:solidFill>
               </a:rPr>
-              <a:t>Official posts insisting the platform was sound, while CEL fell and withdrawals accelerated.</a:t>
+              <a:t>Cultural values pass largely unchanged from parents to children (Guiso, Sapienza, Zingales; Bazzi et al.). The weight is a disposition, not a calculation.</a:t>
             </a:r>
             <a:endParaRPr lang="en-US" sz="1400" dirty="0"/>
           </a:p>
@@ -11030,7 +10759,7 @@
                   <a:schemeClr val="tx1"/>
                 </a:solidFill>
               </a:rPr>
-              <a:t>Silicon Valley Bank, 2023. </a:t>
+              <a:t>Individualism is the right dimension. </a:t>
             </a:r>
             <a:pPr indent="0" marL="0">
               <a:spcAft>
@@ -11044,7 +10773,7 @@
                   <a:schemeClr val="tx1"/>
                 </a:solidFill>
               </a:rPr>
-              <a:t>A call asking clients to stay calm, against a Twitter feed saying the opposite.</a:t>
+              <a:t>Self-reliance against deference to the group (Hofstede) is the private-against-social weighting the model already contains (Gorodnichenko–Roland).</a:t>
             </a:r>
             <a:endParaRPr lang="en-US" sz="1400" dirty="0"/>
           </a:p>
@@ -11062,7 +10791,7 @@
                   <a:schemeClr val="tx1"/>
                 </a:solidFill>
               </a:rPr>
-              <a:t>Northern Rock, 2007. </a:t>
+              <a:t>Measurable per depositor. </a:t>
             </a:r>
             <a:pPr indent="0" marL="0">
               <a:spcAft>
@@ -11076,45 +10805,9 @@
                   <a:schemeClr val="tx1"/>
                 </a:solidFill>
               </a:rPr>
-              <a:t>A Bank of England support announcement, against queues outside the branches.</a:t>
+              <a:t>Given names carry it (Twenge et al.), so the weight can be observed, not assumed.</a:t>
             </a:r>
             <a:endParaRPr lang="en-US" sz="1400" dirty="0"/>
-          </a:p>
-        </p:txBody>
-      </p:sp>
-      <p:sp>
-        <p:nvSpPr>
-          <p:cNvPr id="5" name="step-foot"/>
-          <p:cNvSpPr txBox="1"/>
-          <p:nvPr/>
-        </p:nvSpPr>
-        <p:spPr>
-          <a:xfrm>
-            <a:off x="457200" y="4251960"/>
-            <a:ext cx="8229600" cy="320040"/>
-          </a:xfrm>
-          <a:prstGeom prst="rect">
-            <a:avLst/>
-          </a:prstGeom>
-          <a:noFill/>
-          <a:ln/>
-        </p:spPr>
-        <p:txBody>
-          <a:bodyPr wrap="square" lIns="0" tIns="0" rIns="0" bIns="0" rtlCol="0" anchor="ctr"/>
-          <a:lstStyle/>
-          <a:p>
-            <a:pPr indent="0" marL="0">
-              <a:buNone/>
-            </a:pPr>
-            <a:r>
-              <a:rPr lang="en-US" sz="1100" i="1" dirty="0">
-                <a:solidFill>
-                  <a:schemeClr val="accent3"/>
-                </a:solidFill>
-              </a:rPr>
-              <a:t>In each case the interesting fact is who moved on which signal.</a:t>
-            </a:r>
-            <a:endParaRPr lang="en-US" sz="1100" dirty="0"/>
           </a:p>
         </p:txBody>
       </p:sp>
@@ -11220,7 +10913,7 @@
                   <a:schemeClr val="tx2"/>
                 </a:solidFill>
               </a:rPr>
-              <a:t>Cultural economics: a source of stable weights</a:t>
+              <a:t>What this dissertation does with it</a:t>
             </a:r>
             <a:endParaRPr lang="en-US" sz="2400" dirty="0"/>
           </a:p>
@@ -11256,7 +10949,7 @@
                   <a:schemeClr val="tx2"/>
                 </a:solidFill>
               </a:rPr>
-              <a:t>Culture supplies a weight that differs across depositors, is set before the run, and does not move with the information environment.</a:t>
+              <a:t>The weight is the depositor’s psychological characteristic; culture is the population-level source.</a:t>
             </a:r>
             <a:endParaRPr lang="en-US" sz="1700" dirty="0"/>
           </a:p>
@@ -11296,7 +10989,7 @@
                   <a:schemeClr val="tx1"/>
                 </a:solidFill>
               </a:rPr>
-              <a:t>Transmitted, not chosen. </a:t>
+              <a:t>Chapter 1 formalises it. </a:t>
             </a:r>
             <a:pPr indent="0" marL="0">
               <a:spcAft>
@@ -11310,7 +11003,7 @@
                   <a:schemeClr val="tx1"/>
                 </a:solidFill>
               </a:rPr>
-              <a:t>Cultural values pass largely unchanged from parents to children (Guiso, Sapienza, Zingales; Bazzi et al.). The weight is a disposition, not a calculation.</a:t>
+              <a:t>A stale public signal and heterogeneous dispositional weights inside Goldstein–Pauzner. Prediction: which type runs reverses with the sign of the public error.</a:t>
             </a:r>
             <a:endParaRPr lang="en-US" sz="1400" dirty="0"/>
           </a:p>
@@ -11328,7 +11021,7 @@
                   <a:schemeClr val="tx1"/>
                 </a:solidFill>
               </a:rPr>
-              <a:t>Individualism is the right dimension. </a:t>
+              <a:t>Chapter 2 observes it once. </a:t>
             </a:r>
             <a:pPr indent="0" marL="0">
               <a:spcAft>
@@ -11342,7 +11035,7 @@
                   <a:schemeClr val="tx1"/>
                 </a:solidFill>
               </a:rPr>
-              <a:t>Self-reliance against deference to the group (Hofstede) is the private-against-social weighting the model already contains (Gorodnichenko–Roland).</a:t>
+              <a:t>Celsius: individualism predicts direction and timing within platform and within ancestral origin, and which public signals depositors act on.</a:t>
             </a:r>
             <a:endParaRPr lang="en-US" sz="1400" dirty="0"/>
           </a:p>
@@ -11360,7 +11053,7 @@
                   <a:schemeClr val="tx1"/>
                 </a:solidFill>
               </a:rPr>
-              <a:t>Measurable per depositor. </a:t>
+              <a:t>Chapter 3 varies it. </a:t>
             </a:r>
             <a:pPr indent="0" marL="0">
               <a:spcAft>
@@ -11374,7 +11067,7 @@
                   <a:schemeClr val="tx1"/>
                 </a:solidFill>
               </a:rPr>
-              <a:t>Given names carry it (Twenge et al.), so the weight can be observed, not assumed.</a:t>
+              <a:t>The mix of types, the gap between them, the staleness of the news, and the bank’s contract, in a population of interacting depositors.</a:t>
             </a:r>
             <a:endParaRPr lang="en-US" sz="1400" dirty="0"/>
           </a:p>
@@ -11482,7 +11175,7 @@
                   <a:schemeClr val="tx2"/>
                 </a:solidFill>
               </a:rPr>
-              <a:t>What this dissertation does with it</a:t>
+              <a:t>Why the third chapter is a simulation</a:t>
             </a:r>
             <a:endParaRPr lang="en-US" sz="2400" dirty="0"/>
           </a:p>
@@ -11518,7 +11211,7 @@
                   <a:schemeClr val="tx2"/>
                 </a:solidFill>
               </a:rPr>
-              <a:t>The weight is the depositor’s psychological characteristic; culture is the population-level source.</a:t>
+              <a:t>Chapter 1 relaxed one assumption. The agent-based model relaxes the rest at once, and lets the three rungs interact.</a:t>
             </a:r>
             <a:endParaRPr lang="en-US" sz="1700" dirty="0"/>
           </a:p>
@@ -11558,7 +11251,7 @@
                   <a:schemeClr val="tx1"/>
                 </a:solidFill>
               </a:rPr>
-              <a:t>Chapter 1 formalises it. </a:t>
+              <a:t>Chapter 1 relaxed one thing. </a:t>
             </a:r>
             <a:pPr indent="0" marL="0">
               <a:spcAft>
@@ -11572,7 +11265,7 @@
                   <a:schemeClr val="tx1"/>
                 </a:solidFill>
               </a:rPr>
-              <a:t>A stale public signal and heterogeneous dispositional weights inside Goldstein–Pauzner. Prediction: which type runs reverses with the sign of the public error.</a:t>
+              <a:t>The precision ratio became a stable, heterogeneous weight on a stale public signal. Everything else stayed: a continuum of depositors, one simultaneous move, no network.</a:t>
             </a:r>
             <a:endParaRPr lang="en-US" sz="1400" dirty="0"/>
           </a:p>
@@ -11590,7 +11283,7 @@
                   <a:schemeClr val="tx1"/>
                 </a:solidFill>
               </a:rPr>
-              <a:t>Chapter 2 observes it once. </a:t>
+              <a:t>The model relaxes the rest at once. </a:t>
             </a:r>
             <a:pPr indent="0" marL="0">
               <a:spcAft>
@@ -11604,7 +11297,7 @@
                   <a:schemeClr val="tx1"/>
                 </a:solidFill>
               </a:rPr>
-              <a:t>Celsius: individualism predicts direction and timing within platform and within ancestral origin, and which public signals depositors act on.</a:t>
+              <a:t>The signal (a private draw per depositor), location (a network, neighbours’ withdrawals arriving tick by tick, public news absent, accurate or stale), interpretation (λ, formed in a cultural warm-up), plus deposit sizes, risk preferences and the contract.</a:t>
             </a:r>
             <a:endParaRPr lang="en-US" sz="1400" dirty="0"/>
           </a:p>
@@ -11622,7 +11315,7 @@
                   <a:schemeClr val="tx1"/>
                 </a:solidFill>
               </a:rPr>
-              <a:t>Chapter 3 varies it. </a:t>
+              <a:t>An analytical model cannot carry all of that. </a:t>
             </a:r>
             <a:pPr indent="0" marL="0">
               <a:spcAft>
@@ -11636,7 +11329,7 @@
                   <a:schemeClr val="tx1"/>
                 </a:solidFill>
               </a:rPr>
-              <a:t>The mix of types, the gap between them, the staleness of the news, and the bank’s contract, in a population of interacting depositors.</a:t>
+              <a:t>Each addition breaks the threshold-equilibrium machinery; together they are beyond closed form. The simulation is what lets the rungs be varied and measured separately.</a:t>
             </a:r>
             <a:endParaRPr lang="en-US" sz="1400" dirty="0"/>
           </a:p>
@@ -11744,22 +11437,73 @@
                   <a:schemeClr val="tx2"/>
                 </a:solidFill>
               </a:rPr>
-              <a:t>Why the third chapter is a simulation</a:t>
+              <a:t>The ladder: signal, location, interpretation</a:t>
             </a:r>
             <a:endParaRPr lang="en-US" sz="2400" dirty="0"/>
           </a:p>
         </p:txBody>
       </p:sp>
-      <p:sp>
-        <p:nvSpPr>
-          <p:cNvPr id="3" name="step-lead"/>
+      <p:pic>
+        <p:nvPicPr>
+          <p:cNvPr id="3" name="ladder" descr="Three panels. Signal: one bank fundamental sends a noisy private signal to each depositor, who line up from run to stay. Location: a network in which the signal has reached some depositors from a first hearer and not others. Interpretation: the same private and public signals reach an individualist, who leans on the private signal, and a collectivist, who leans on the public one; culture sets the weight.">    </p:cNvPr>
+          <p:cNvPicPr>
+            <a:picLocks noChangeAspect="1"/>
+          </p:cNvPicPr>
+          <p:nvPr/>
+        </p:nvPicPr>
+        <p:blipFill>
+          <a:blip r:embed="rId1"/>
+          <a:stretch>
+            <a:fillRect/>
+          </a:stretch>
+        </p:blipFill>
+        <p:spPr>
+          <a:xfrm>
+            <a:off x="653339" y="1097280"/>
+            <a:ext cx="7837322" cy="2743200"/>
+          </a:xfrm>
+          <a:prstGeom prst="rect">
+            <a:avLst/>
+          </a:prstGeom>
+        </p:spPr>
+      </p:pic>
+      <p:sp>
+        <p:nvSpPr>
+          <p:cNvPr id="4" name="ladder-note"/>
+          <p:cNvSpPr/>
+          <p:nvPr/>
+        </p:nvSpPr>
+        <p:spPr>
+          <a:xfrm>
+            <a:off x="457200" y="3977640"/>
+            <a:ext cx="8229600" cy="566928"/>
+          </a:xfrm>
+          <a:prstGeom prst="roundRect">
+            <a:avLst>
+              <a:gd name="adj" fmla="val 12903"/>
+            </a:avLst>
+          </a:prstGeom>
+          <a:solidFill>
+            <a:schemeClr val="accent4"/>
+          </a:solidFill>
+          <a:ln w="12700">
+            <a:solidFill>
+              <a:schemeClr val="accent4"/>
+            </a:solidFill>
+            <a:prstDash val="solid"/>
+          </a:ln>
+        </p:spPr>
+      </p:sp>
+      <p:sp>
+        <p:nvSpPr>
+          <p:cNvPr id="5" name="ladder-text"/>
           <p:cNvSpPr txBox="1"/>
           <p:nvPr/>
         </p:nvSpPr>
         <p:spPr>
           <a:xfrm>
-            <a:off x="457200" y="1051560"/>
-            <a:ext cx="8229600" cy="868680"/>
+            <a:off x="594360" y="4005072"/>
+            <a:ext cx="7955280" cy="512064"/>
           </a:xfrm>
           <a:prstGeom prst="rect">
             <a:avLst/>
@@ -11775,132 +11519,36 @@
               <a:buNone/>
             </a:pPr>
             <a:r>
-              <a:rPr lang="en-US" sz="1700" b="1" dirty="0">
-                <a:solidFill>
-                  <a:schemeClr val="tx2"/>
-                </a:solidFill>
-              </a:rPr>
-              <a:t>Chapter 1 relaxed one assumption. The agent-based model relaxes the rest at once, and lets the three rungs interact.</a:t>
-            </a:r>
-            <a:endParaRPr lang="en-US" sz="1700" dirty="0"/>
-          </a:p>
-        </p:txBody>
-      </p:sp>
-      <p:sp>
-        <p:nvSpPr>
-          <p:cNvPr id="4" name="step-items"/>
-          <p:cNvSpPr txBox="1"/>
-          <p:nvPr/>
-        </p:nvSpPr>
-        <p:spPr>
-          <a:xfrm>
-            <a:off x="457200" y="2103120"/>
-            <a:ext cx="8229600" cy="2103120"/>
-          </a:xfrm>
-          <a:prstGeom prst="rect">
-            <a:avLst/>
-          </a:prstGeom>
-          <a:noFill/>
-          <a:ln/>
-        </p:spPr>
-        <p:txBody>
-          <a:bodyPr wrap="square" lIns="0" tIns="0" rIns="0" bIns="0" rtlCol="0" anchor="t"/>
-          <a:lstStyle/>
-          <a:p>
-            <a:pPr marL="177800" indent="-177800">
-              <a:spcAft>
-                <a:spcPts val="900"/>
-              </a:spcAft>
-              <a:buSzPct val="100000"/>
-              <a:buChar char="•"/>
-            </a:pPr>
-            <a:r>
-              <a:rPr lang="en-US" sz="1400" b="1" dirty="0">
+              <a:rPr lang="en-US" sz="1200" dirty="0">
+                <a:solidFill>
+                  <a:schemeClr val="accent3"/>
+                </a:solidFill>
+              </a:rPr>
+              <a:t>Rungs 1 and 2 are the literature. </a:t>
+            </a:r>
+            <a:pPr indent="0" marL="0">
+              <a:buNone/>
+            </a:pPr>
+            <a:r>
+              <a:rPr lang="en-US" sz="1200" b="1" dirty="0">
+                <a:solidFill>
+                  <a:schemeClr val="accent1"/>
+                </a:solidFill>
+              </a:rPr>
+              <a:t>Rung 3 is this dissertation: </a:t>
+            </a:r>
+            <a:pPr indent="0" marL="0">
+              <a:buNone/>
+            </a:pPr>
+            <a:r>
+              <a:rPr lang="en-US" sz="1200" dirty="0">
                 <a:solidFill>
                   <a:schemeClr val="tx1"/>
                 </a:solidFill>
               </a:rPr>
-              <a:t>Chapter 1 relaxed one thing. </a:t>
-            </a:r>
-            <a:pPr indent="0" marL="0">
-              <a:spcAft>
-                <a:spcPts val="900"/>
-              </a:spcAft>
-              <a:buNone/>
-            </a:pPr>
-            <a:r>
-              <a:rPr lang="en-US" sz="1400" dirty="0">
-                <a:solidFill>
-                  <a:schemeClr val="tx1"/>
-                </a:solidFill>
-              </a:rPr>
-              <a:t>The precision ratio became a stable, heterogeneous weight on a stale public signal. Everything else stayed: a continuum of depositors, one simultaneous move, no network.</a:t>
-            </a:r>
-            <a:endParaRPr lang="en-US" sz="1400" dirty="0"/>
-          </a:p>
-          <a:p>
-            <a:pPr marL="177800" indent="-177800">
-              <a:spcAft>
-                <a:spcPts val="900"/>
-              </a:spcAft>
-              <a:buSzPct val="100000"/>
-              <a:buChar char="•"/>
-            </a:pPr>
-            <a:r>
-              <a:rPr lang="en-US" sz="1400" b="1" dirty="0">
-                <a:solidFill>
-                  <a:schemeClr val="tx1"/>
-                </a:solidFill>
-              </a:rPr>
-              <a:t>The model relaxes the rest at once. </a:t>
-            </a:r>
-            <a:pPr indent="0" marL="0">
-              <a:spcAft>
-                <a:spcPts val="900"/>
-              </a:spcAft>
-              <a:buNone/>
-            </a:pPr>
-            <a:r>
-              <a:rPr lang="en-US" sz="1400" dirty="0">
-                <a:solidFill>
-                  <a:schemeClr val="tx1"/>
-                </a:solidFill>
-              </a:rPr>
-              <a:t>The signal (a private draw per depositor), location (a network, neighbours’ withdrawals arriving tick by tick, public news absent, accurate or stale), interpretation (λ, formed in a cultural warm-up), plus deposit sizes, risk preferences and the contract.</a:t>
-            </a:r>
-            <a:endParaRPr lang="en-US" sz="1400" dirty="0"/>
-          </a:p>
-          <a:p>
-            <a:pPr marL="177800" indent="-177800">
-              <a:spcAft>
-                <a:spcPts val="900"/>
-              </a:spcAft>
-              <a:buSzPct val="100000"/>
-              <a:buChar char="•"/>
-            </a:pPr>
-            <a:r>
-              <a:rPr lang="en-US" sz="1400" b="1" dirty="0">
-                <a:solidFill>
-                  <a:schemeClr val="tx1"/>
-                </a:solidFill>
-              </a:rPr>
-              <a:t>An analytical model cannot carry all of that. </a:t>
-            </a:r>
-            <a:pPr indent="0" marL="0">
-              <a:spcAft>
-                <a:spcPts val="900"/>
-              </a:spcAft>
-              <a:buNone/>
-            </a:pPr>
-            <a:r>
-              <a:rPr lang="en-US" sz="1400" dirty="0">
-                <a:solidFill>
-                  <a:schemeClr val="tx1"/>
-                </a:solidFill>
-              </a:rPr>
-              <a:t>Each addition breaks the threshold-equilibrium machinery; together they are beyond closed form. The simulation is what lets the rungs be varied and measured separately.</a:t>
-            </a:r>
-            <a:endParaRPr lang="en-US" sz="1400" dirty="0"/>
+              <a:t>the only one that orders depositors by a trait, and reverses when the public line is too optimistic or too pessimistic.</a:t>
+            </a:r>
+            <a:endParaRPr lang="en-US" sz="1200" dirty="0"/>
           </a:p>
         </p:txBody>
       </p:sp>

--- a/docs/deck_2026-10-26_seminar.pptx
+++ b/docs/deck_2026-10-26_seminar.pptx
@@ -129,7 +129,7 @@
   <p:extLst>
     <p:ext uri="{521415D9-36F7-43E2-AB2F-B90AF26B5E84}">
       <p14:sectionLst xmlns:p14="http://schemas.microsoft.com/office/powerpoint/2010/main">
-        <p14:section name="Opening" id="{849ee837-bfee-fd69-b4cc-5daac7405823}">
+        <p14:section name="Opening" id="{54f783ce-4342-bc4b-b6ea-b2554af04876}">
           <p14:sldIdLst>
             <p14:sldId id="256"/>
             <p14:sldId id="257"/>
@@ -142,13 +142,13 @@
             <p14:sldId id="264"/>
           </p14:sldIdLst>
         </p14:section>
-        <p14:section name="The model" id="{f54b7945-b27d-90d7-54c4-776168f161eb}">
+        <p14:section name="The model" id="{dcf1a77c-604d-8a0c-d591-275fd5ec57d4}">
           <p14:sldIdLst>
             <p14:sldId id="265"/>
             <p14:sldId id="266"/>
           </p14:sldIdLst>
         </p14:section>
-        <p14:section name="Results" id="{28d41edb-9045-168b-84c7-c226ea5a5d30}">
+        <p14:section name="Results" id="{d599b507-ebe5-bf5a-1c4e-826fa99cbdd8}">
           <p14:sldIdLst>
             <p14:sldId id="267"/>
             <p14:sldId id="268"/>
@@ -156,17 +156,17 @@
             <p14:sldId id="270"/>
           </p14:sldIdLst>
         </p14:section>
-        <p14:section name="Validation" id="{b31626ba-d5d1-1804-bd31-09af4f60edad}">
+        <p14:section name="Validation" id="{2a46ce99-5571-441e-1a0d-e1fe91aab1db}">
           <p14:sldIdLst>
             <p14:sldId id="271"/>
           </p14:sldIdLst>
         </p14:section>
-        <p14:section name="Close" id="{eb02f48d-9578-4977-2b96-19f9b95b1548}">
+        <p14:section name="Close" id="{9b71076e-d3df-954b-1f42-2c3112b72f13}">
           <p14:sldIdLst>
             <p14:sldId id="272"/>
           </p14:sldIdLst>
         </p14:section>
-        <p14:section name="Backup" id="{cb5a5549-3c60-3396-0be1-811bd6396036}">
+        <p14:section name="Backup" id="{ccd3d01f-d003-54b8-ffe1-2e8a531c1d23}">
           <p14:sldIdLst>
             <p14:sldId id="273"/>
             <p14:sldId id="274"/>
@@ -11265,7 +11265,7 @@
                   <a:schemeClr val="tx1"/>
                 </a:solidFill>
               </a:rPr>
-              <a:t>The precision ratio became a stable, heterogeneous weight on a stale public signal. Everything else stayed: a continuum of depositors, one simultaneous move, no network.</a:t>
+              <a:t>The one-size-fits-all weight on public news became a stable, heterogeneous weight on a stale public signal. Everything else stayed: a continuum of depositors, one simultaneous move, no network.</a:t>
             </a:r>
             <a:endParaRPr lang="en-US" sz="1400" dirty="0"/>
           </a:p>

--- a/docs/deck_2026-10-26_seminar.pptx
+++ b/docs/deck_2026-10-26_seminar.pptx
@@ -26,11 +26,9 @@
     <p:sldId id="274" r:id="rId20"/>
     <p:sldId id="275" r:id="rId21"/>
     <p:sldId id="276" r:id="rId22"/>
-    <p:sldId id="277" r:id="rId23"/>
-    <p:sldId id="278" r:id="rId24"/>
   </p:sldIdLst>
   <p:notesMasterIdLst>
-    <p:notesMasterId r:id="rId25"/>
+    <p:notesMasterId r:id="rId23"/>
   </p:notesMasterIdLst>
   <p:sldSz cx="9144000" cy="5143500"/>
   <p:notesSz cx="5143500" cy="9144000"/>
@@ -129,7 +127,7 @@
   <p:extLst>
     <p:ext uri="{521415D9-36F7-43E2-AB2F-B90AF26B5E84}">
       <p14:sectionLst xmlns:p14="http://schemas.microsoft.com/office/powerpoint/2010/main">
-        <p14:section name="Opening" id="{54f783ce-4342-bc4b-b6ea-b2554af04876}">
+        <p14:section name="Opening" id="{f9a93707-d652-f290-439a-7fc98332332b}">
           <p14:sldIdLst>
             <p14:sldId id="256"/>
             <p14:sldId id="257"/>
@@ -138,42 +136,40 @@
             <p14:sldId id="260"/>
             <p14:sldId id="261"/>
             <p14:sldId id="262"/>
+          </p14:sldIdLst>
+        </p14:section>
+        <p14:section name="The model" id="{002b32cb-b0be-cdc2-80e3-579a51ef4379}">
+          <p14:sldIdLst>
             <p14:sldId id="263"/>
             <p14:sldId id="264"/>
           </p14:sldIdLst>
         </p14:section>
-        <p14:section name="The model" id="{dcf1a77c-604d-8a0c-d591-275fd5ec57d4}">
+        <p14:section name="Results" id="{cbb8f48e-47fd-6b36-ecdd-d1cb7eb4b159}">
           <p14:sldIdLst>
             <p14:sldId id="265"/>
             <p14:sldId id="266"/>
+            <p14:sldId id="267"/>
+            <p14:sldId id="268"/>
           </p14:sldIdLst>
         </p14:section>
-        <p14:section name="Results" id="{d599b507-ebe5-bf5a-1c4e-826fa99cbdd8}">
+        <p14:section name="Validation" id="{224acc20-6cd9-cb76-084c-53cf6061a7ec}">
           <p14:sldIdLst>
-            <p14:sldId id="267"/>
-            <p14:sldId id="268"/>
             <p14:sldId id="269"/>
+          </p14:sldIdLst>
+        </p14:section>
+        <p14:section name="Close" id="{11d9ca33-be8e-4bb6-b3d1-fd8bfc3b73f4}">
+          <p14:sldIdLst>
             <p14:sldId id="270"/>
           </p14:sldIdLst>
         </p14:section>
-        <p14:section name="Validation" id="{2a46ce99-5571-441e-1a0d-e1fe91aab1db}">
+        <p14:section name="Backup" id="{bba43f02-58f1-25f3-0b2e-5a84a09d759c}">
           <p14:sldIdLst>
             <p14:sldId id="271"/>
-          </p14:sldIdLst>
-        </p14:section>
-        <p14:section name="Close" id="{9b71076e-d3df-954b-1f42-2c3112b72f13}">
-          <p14:sldIdLst>
             <p14:sldId id="272"/>
-          </p14:sldIdLst>
-        </p14:section>
-        <p14:section name="Backup" id="{ccd3d01f-d003-54b8-ffe1-2e8a531c1d23}">
-          <p14:sldIdLst>
             <p14:sldId id="273"/>
             <p14:sldId id="274"/>
             <p14:sldId id="275"/>
             <p14:sldId id="276"/>
-            <p14:sldId id="277"/>
-            <p14:sldId id="278"/>
           </p14:sldIdLst>
         </p14:section>
       </p14:sectionLst>
@@ -668,7 +664,7 @@
           <a:p>
             <a:r>
               <a:rPr lang="en-US" dirty="0"/>
-              <a:t>~2 min. N = 1,000 depositors on a small-world network; one bank that sells assets at a discount when cash runs short (fire-sale bank). Each tick a depositor sees neighbours' withdrawals and the public news, blends them with a private signal, and withdraws if that pays. Reference bank: deposits log-normal (sigma 2.5), each capped at 1% of the total; CARA 0.1; partial withdrawals allowed. The diagram is the technical ODD overview: walk the right-hand column (warm-up, world, shock, tick loop) and skip the formulas.</a:t>
+              <a:t>~2 min. Collectivists jump from 0.15 to 0.93 once 20–35% of neighbours are out and reach 1.0; individualists plateau at ~0.25–0.30. Slopes: C 0.80, I 0.22 (difference +0.58, t 16.7). Lambda pairs pooled; reference bank.</a:t>
             </a:r>
             <a:endParaRPr lang="en-US" dirty="0"/>
           </a:p>
@@ -756,7 +752,7 @@
           <a:p>
             <a:r>
               <a:rPr lang="en-US" dirty="0"/>
-              <a:t>~1 min. Individualists put little weight on others (neighbours and public news) and more on their own information; collectivists the reverse. In the model: weight on the social side lambda; pairs shown in the figures (I, C): (0.1, 0.9) = large difference, (0.2, 0.8) = medium, (0.3, 0.5) = small. Type comes from a cultural warm-up on the network: the top mu share become individualists. Colours used throughout: orange = individualists, blue = collectivists.</a:t>
+              <a:t>~2 min. Large difference (0.1, 0.9): 0.67 at mu 0 -&gt; 0.08 at mu 1; medium (0.2, 0.8) similar; small (0.3, 0.5): 0.25 -&gt; 0.09. Monotone, no interior peak. The difference between types matters most when collectivists dominate; lines converge at mu &gt;= 0.75. Includes pure cells (mu 0 and 1). If asked about Ch 1's non-monotonic prediction (P6): see backup.</a:t>
             </a:r>
             <a:endParaRPr lang="en-US" dirty="0"/>
           </a:p>
@@ -844,7 +840,7 @@
           <a:p>
             <a:r>
               <a:rPr lang="en-US" dirty="0"/>
-              <a:t>~2 min. Collectivists jump from 0.15 to 0.93 once 20–35% of neighbours are out and reach 1.0; individualists plateau at ~0.25–0.30. Slopes: C 0.80, I 0.22 (difference +0.58, t 16.7). Lambda pairs pooled; reference bank.</a:t>
+              <a:t>~2.5 min. Large difference (0.1, 0.9): outdated pessimistic 0.48, none 0.31, accurate 0.29, outdated middling (y0 0.5) 0.18, outdated optimistic 0.16. Accurate news barely changes failure; stale optimistic halves it; stale pessimistic raises it by half. Small difference (0.3, 0.5) barely moves (0.09–0.15). All mu. Policy framing: the information environment (right to reassure), not sorting depositors by type.</a:t>
             </a:r>
             <a:endParaRPr lang="en-US" dirty="0"/>
           </a:p>
@@ -932,7 +928,7 @@
           <a:p>
             <a:r>
               <a:rPr lang="en-US" dirty="0"/>
-              <a:t>~2 min. Large difference (0.1, 0.9): 0.67 at mu 0 -&gt; 0.08 at mu 1; medium (0.2, 0.8) similar; small (0.3, 0.5): 0.25 -&gt; 0.09. Monotone, no interior peak. The difference between types matters most when collectivists dominate; lines converge at mu &gt;= 0.75. Includes pure cells (mu 0 and 1). If asked about Ch 1's non-monotonic prediction (P6): see backup.</a:t>
+              <a:t>~2 min. Lambda pairs pooled. Uncapped (sigma 2.5) 0.61 -&gt; 0.11; capped at 1% 0.51 -&gt; 0.08; similar sizes (sigma 1) 0.50 -&gt; 0.08. Capping brings failure down to the no-concentration level at every mu. The mu gradient is the same in all three: culture's effect does not depend on concentration. One spoken sentence on what 'capped at 1%' means (no single depositor holds more than 1% of the bank).</a:t>
             </a:r>
             <a:endParaRPr lang="en-US" dirty="0"/>
           </a:p>
@@ -1020,7 +1016,7 @@
           <a:p>
             <a:r>
               <a:rPr lang="en-US" dirty="0"/>
-              <a:t>~2.5 min. Large difference (0.1, 0.9): outdated pessimistic 0.48, none 0.31, accurate 0.29, outdated middling (y0 0.5) 0.18, outdated optimistic 0.16. Accurate news barely changes failure; stale optimistic halves it; stale pessimistic raises it by half. Small difference (0.3, 0.5) barely moves (0.09–0.15). All mu. Policy framing: the information environment (right to reassure), not sorting depositors by type.</a:t>
+              <a:t>~1.5 min. Ch 1's theory predicts: optimistic news -&gt; individualists run more than collectivists; pessimistic -&gt; collectivists run more. The lines rise through zero as predicted. Large difference reaches about ±0.1; small stays flat. Pre-registered tests: 3 of 4 support, on all three versions of the bank (r1k pooled: G1' +0.033, G4' -0.031, G2a' +0.093, Holm-significant; G3 counts against). Option: make this one sentence and move the figure to backup.</a:t>
             </a:r>
             <a:endParaRPr lang="en-US" dirty="0"/>
           </a:p>
@@ -1108,7 +1104,7 @@
           <a:p>
             <a:r>
               <a:rPr lang="en-US" dirty="0"/>
-              <a:t>~2 min. Lambda pairs pooled. Uncapped (sigma 2.5) 0.61 -&gt; 0.11; capped at 1% 0.51 -&gt; 0.08; similar sizes (sigma 1) 0.50 -&gt; 0.08. Capping brings failure down to the no-concentration level at every mu. The mu gradient is the same in all three: culture's effect does not depend on concentration. One spoken sentence on what 'capped at 1%' means (no single depositor holds more than 1% of the bank).</a:t>
+              <a:t>~2 min. Next steps from the outline: super-individuals (match how Celsius's largest depositors exit), deposit insurance and the reserve ratio on the fire-sale bank, topology and learning, and the full parameter sweep (stale public signal + no-signal baseline; CARA 0.1; sigma reported).</a:t>
             </a:r>
             <a:endParaRPr lang="en-US" dirty="0"/>
           </a:p>
@@ -1196,7 +1192,7 @@
           <a:p>
             <a:r>
               <a:rPr lang="en-US" dirty="0"/>
-              <a:t>~1.5 min. Ch 1's theory predicts: optimistic news -&gt; individualists run more than collectivists; pessimistic -&gt; collectivists run more. The lines rise through zero as predicted. Large difference reaches about ±0.1; small stays flat. Pre-registered tests: 3 of 4 support, on all three versions of the bank (r1k pooled: G1' +0.033, G4' -0.031, G2a' +0.093, Holm-significant; G3 counts against). Option: make this one sentence and move the figure to backup.</a:t>
+              <a:t/>
             </a:r>
             <a:endParaRPr lang="en-US" dirty="0"/>
           </a:p>
@@ -1284,7 +1280,7 @@
           <a:p>
             <a:r>
               <a:rPr lang="en-US" dirty="0"/>
-              <a:t>~2 min. Next steps from the outline: super-individuals (match how Celsius's largest depositors exit), deposit insurance and the reserve ratio on the fire-sale bank, topology and learning, and the full parameter sweep (stale public signal + no-signal baseline; CARA 0.1; sigma reported).</a:t>
+              <a:t>Both types withdraw less as mu rises; collectivists above individualists at every mixed mu for the two wide gaps; nearly identical at (0.3, 0.5). Technical labels.</a:t>
             </a:r>
             <a:endParaRPr lang="en-US" dirty="0"/>
           </a:p>
@@ -1372,7 +1368,7 @@
           <a:p>
             <a:r>
               <a:rPr lang="en-US" dirty="0"/>
-              <a:t/>
+              <a:t>r1k pooled: G1' +0.033, G4' -0.031, G2a' +0.093, all Holm-significant; G2b ordering holds. G3 +0.0034 pooled but (0.3, 0.5) wrong-signed in every bank -&gt; counts against. G3c (post hoc, channel-isolated) +0.019, right-signed in every pair. 3 of 4 confirmatory tests support, in all three banks.</a:t>
             </a:r>
             <a:endParaRPr lang="en-US" dirty="0"/>
           </a:p>
@@ -1460,7 +1456,7 @@
           <a:p>
             <a:r>
               <a:rPr lang="en-US" dirty="0"/>
-              <a:t>Both types withdraw less as mu rises; collectivists above individualists at every mixed mu for the two wide gaps; nearly identical at (0.3, 0.5). Technical labels.</a:t>
+              <a:t>Theta-blend only: +0.14 (Ch 1's sign). Head-count only: -0.07 (opposite). Both: +0.02. The two channels pull in opposite directions; Ch 1's sign survives, damped by herding.</a:t>
             </a:r>
             <a:endParaRPr lang="en-US" dirty="0"/>
           </a:p>
@@ -1636,7 +1632,7 @@
           <a:p>
             <a:r>
               <a:rPr lang="en-US" dirty="0"/>
-              <a:t>r1k pooled: G1' +0.033, G4' -0.031, G2a' +0.093, all Holm-significant; G2b ordering holds. G3 +0.0034 pooled but (0.3, 0.5) wrong-signed in every bank -&gt; counts against. G3c (post hoc, channel-isolated) +0.019, right-signed in every pair. 3 of 4 confirmatory tests support, in all three banks.</a:t>
+              <a:t>Celsius falls from ~0.86 (D1–D5 band 0.82–0.90) to 0.35 (top 0.1%); the ABM stays at 0.93–1.00. The model does not yet reproduce how large depositors exit. Next: super-individuals.</a:t>
             </a:r>
             <a:endParaRPr lang="en-US" dirty="0"/>
           </a:p>
@@ -1724,7 +1720,7 @@
           <a:p>
             <a:r>
               <a:rPr lang="en-US" dirty="0"/>
-              <a:t>Theta-blend only: +0.14 (Ch 1's sign). Head-count only: -0.07 (opposite). Both: +0.02. The two channels pull in opposite directions; Ch 1's sign survives, damped by herding.</a:t>
+              <a:t>Vault bank, earlier specification (chapter Fig 1). For questions about Ch 1's P6. This figure is also monotone decreasing: P6 (non-monotonic fragility) was predicted in Ch 1 and found in neither bank; the P6b placebo hump was null too.</a:t>
             </a:r>
             <a:endParaRPr lang="en-US" dirty="0"/>
           </a:p>
@@ -1748,182 +1744,6 @@
             <a:fld id="{F7021451-1387-4CA6-816F-3879F97B5CBC}" type="slidenum">
               <a:rPr lang="en-US"/>
               <a:t>21</a:t>
-            </a:fld>
-            <a:endParaRPr lang="en-US"/>
-          </a:p>
-        </p:txBody>
-      </p:sp>
-    </p:spTree>
-    <p:extLst>
-      <p:ext uri="{BB962C8B-B14F-4D97-AF65-F5344CB8AC3E}">
-        <p14:creationId xmlns:p14="http://schemas.microsoft.com/office/powerpoint/2010/main" val="1024086991"/>
-      </p:ext>
-    </p:extLst>
-  </p:cSld>
-  <p:clrMapOvr>
-    <a:masterClrMapping/>
-  </p:clrMapOvr>
-</p:notes>
-</file>
-
-<file path=ppt/notesSlides/notesSlide22.xml><?xml version="1.0" encoding="utf-8"?>
-<p:notes xmlns:a="http://schemas.openxmlformats.org/drawingml/2006/main" xmlns:r="http://schemas.openxmlformats.org/officeDocument/2006/relationships" xmlns:p="http://schemas.openxmlformats.org/presentationml/2006/main">
-  <p:cSld>
-    <p:spTree>
-      <p:nvGrpSpPr>
-        <p:cNvPr id="1" name=""/>
-        <p:cNvGrpSpPr/>
-        <p:nvPr/>
-      </p:nvGrpSpPr>
-      <p:grpSpPr>
-        <a:xfrm>
-          <a:off x="0" y="0"/>
-          <a:ext cx="0" cy="0"/>
-          <a:chOff x="0" y="0"/>
-          <a:chExt cx="0" cy="0"/>
-        </a:xfrm>
-      </p:grpSpPr>
-      <p:sp>
-        <p:nvSpPr>
-          <p:cNvPr id="2" name="Slide Image Placeholder 1"/>
-          <p:cNvSpPr>
-            <a:spLocks noGrp="1" noRot="1" noChangeAspect="1"/>
-          </p:cNvSpPr>
-          <p:nvPr>
-            <p:ph type="sldImg"/>
-          </p:nvPr>
-        </p:nvSpPr>
-        <p:spPr/>
-      </p:sp>
-      <p:sp>
-        <p:nvSpPr>
-          <p:cNvPr id="3" name="Notes Placeholder 2"/>
-          <p:cNvSpPr>
-            <a:spLocks noGrp="1"/>
-          </p:cNvSpPr>
-          <p:nvPr>
-            <p:ph type="body" idx="1"/>
-          </p:nvPr>
-        </p:nvSpPr>
-        <p:spPr/>
-        <p:txBody>
-          <a:bodyPr/>
-          <a:lstStyle/>
-          <a:p>
-            <a:r>
-              <a:rPr lang="en-US" dirty="0"/>
-              <a:t>Celsius falls from ~0.86 (D1–D5 band 0.82–0.90) to 0.35 (top 0.1%); the ABM stays at 0.93–1.00. The model does not yet reproduce how large depositors exit. Next: super-individuals.</a:t>
-            </a:r>
-            <a:endParaRPr lang="en-US" dirty="0"/>
-          </a:p>
-        </p:txBody>
-      </p:sp>
-      <p:sp>
-        <p:nvSpPr>
-          <p:cNvPr id="4" name="Slide Number Placeholder 3"/>
-          <p:cNvSpPr>
-            <a:spLocks noGrp="1"/>
-          </p:cNvSpPr>
-          <p:nvPr>
-            <p:ph type="sldNum" sz="quarter" idx="10"/>
-          </p:nvPr>
-        </p:nvSpPr>
-        <p:spPr/>
-        <p:txBody>
-          <a:bodyPr/>
-          <a:lstStyle/>
-          <a:p>
-            <a:fld id="{F7021451-1387-4CA6-816F-3879F97B5CBC}" type="slidenum">
-              <a:rPr lang="en-US"/>
-              <a:t>22</a:t>
-            </a:fld>
-            <a:endParaRPr lang="en-US"/>
-          </a:p>
-        </p:txBody>
-      </p:sp>
-    </p:spTree>
-    <p:extLst>
-      <p:ext uri="{BB962C8B-B14F-4D97-AF65-F5344CB8AC3E}">
-        <p14:creationId xmlns:p14="http://schemas.microsoft.com/office/powerpoint/2010/main" val="1024086991"/>
-      </p:ext>
-    </p:extLst>
-  </p:cSld>
-  <p:clrMapOvr>
-    <a:masterClrMapping/>
-  </p:clrMapOvr>
-</p:notes>
-</file>
-
-<file path=ppt/notesSlides/notesSlide23.xml><?xml version="1.0" encoding="utf-8"?>
-<p:notes xmlns:a="http://schemas.openxmlformats.org/drawingml/2006/main" xmlns:r="http://schemas.openxmlformats.org/officeDocument/2006/relationships" xmlns:p="http://schemas.openxmlformats.org/presentationml/2006/main">
-  <p:cSld>
-    <p:spTree>
-      <p:nvGrpSpPr>
-        <p:cNvPr id="1" name=""/>
-        <p:cNvGrpSpPr/>
-        <p:nvPr/>
-      </p:nvGrpSpPr>
-      <p:grpSpPr>
-        <a:xfrm>
-          <a:off x="0" y="0"/>
-          <a:ext cx="0" cy="0"/>
-          <a:chOff x="0" y="0"/>
-          <a:chExt cx="0" cy="0"/>
-        </a:xfrm>
-      </p:grpSpPr>
-      <p:sp>
-        <p:nvSpPr>
-          <p:cNvPr id="2" name="Slide Image Placeholder 1"/>
-          <p:cNvSpPr>
-            <a:spLocks noGrp="1" noRot="1" noChangeAspect="1"/>
-          </p:cNvSpPr>
-          <p:nvPr>
-            <p:ph type="sldImg"/>
-          </p:nvPr>
-        </p:nvSpPr>
-        <p:spPr/>
-      </p:sp>
-      <p:sp>
-        <p:nvSpPr>
-          <p:cNvPr id="3" name="Notes Placeholder 2"/>
-          <p:cNvSpPr>
-            <a:spLocks noGrp="1"/>
-          </p:cNvSpPr>
-          <p:nvPr>
-            <p:ph type="body" idx="1"/>
-          </p:nvPr>
-        </p:nvSpPr>
-        <p:spPr/>
-        <p:txBody>
-          <a:bodyPr/>
-          <a:lstStyle/>
-          <a:p>
-            <a:r>
-              <a:rPr lang="en-US" dirty="0"/>
-              <a:t>Vault bank, earlier specification (chapter Fig 1). For questions about Ch 1's P6. This figure is also monotone decreasing: P6 (non-monotonic fragility) was predicted in Ch 1 and found in neither bank; the P6b placebo hump was null too.</a:t>
-            </a:r>
-            <a:endParaRPr lang="en-US" dirty="0"/>
-          </a:p>
-        </p:txBody>
-      </p:sp>
-      <p:sp>
-        <p:nvSpPr>
-          <p:cNvPr id="4" name="Slide Number Placeholder 3"/>
-          <p:cNvSpPr>
-            <a:spLocks noGrp="1"/>
-          </p:cNvSpPr>
-          <p:nvPr>
-            <p:ph type="sldNum" sz="quarter" idx="10"/>
-          </p:nvPr>
-        </p:nvSpPr>
-        <p:spPr/>
-        <p:txBody>
-          <a:bodyPr/>
-          <a:lstStyle/>
-          <a:p>
-            <a:fld id="{F7021451-1387-4CA6-816F-3879F97B5CBC}" type="slidenum">
-              <a:rPr lang="en-US"/>
-              <a:t>23</a:t>
             </a:fld>
             <a:endParaRPr lang="en-US"/>
           </a:p>
@@ -2340,7 +2160,7 @@
           <a:p>
             <a:r>
               <a:rPr lang="en-US" dirty="0"/>
-              <a:t>~1 min. Where the three chapters sit on the through-line. Then the ladder as the recap, then the model.</a:t>
+              <a:t>~1 min. The ladder: variation in the signal (Goldstein-Pauzner: same signal technology, different draws, which selects the equilibrium), variation in location (who hears it, from whom, when: Kelly-O Grada, Iyer-Puri, Cookson et al.), variation in interpretation (the same two signals, different dispositional weights; culture is the stable source). Rung 1 orders depositors by luck, rung 2 by position, rung 3 by who they are, and only rung 3 predicts that the order flips with the sign of the public error. Nearest cousins to acknowledge if asked: Izmalkov-Yildiz 2010 (heterogeneous priors), He-Manela 2016 (information acquisition).</a:t>
             </a:r>
             <a:endParaRPr lang="en-US" dirty="0"/>
           </a:p>
@@ -2428,7 +2248,7 @@
           <a:p>
             <a:r>
               <a:rPr lang="en-US" dirty="0"/>
-              <a:t>~1 min. Why Chapter 3 is a simulation. Chapter 1 relaxed the Bayesian precision answer and kept the rest of Goldstein-Pauzner so the threshold equilibrium survives. The ABM varies the signal, location and interpretation together, plus the incentive side, which no closed-form model could carry; that is what lets the channel decomposition (lambda on the neighbour blend vs the news blend) be measured at all.</a:t>
+              <a:t>~2 min. N = 1,000 depositors on a small-world network; one bank that sells assets at a discount when cash runs short (fire-sale bank). Each tick a depositor sees neighbours' withdrawals and the public news, blends them with a private signal, and withdraws if that pays. Reference bank: deposits log-normal (sigma 2.5), each capped at 1% of the total; CARA 0.1; partial withdrawals allowed. The diagram is the technical ODD overview: walk the right-hand column (warm-up, world, shock, tick loop) and skip the formulas.</a:t>
             </a:r>
             <a:endParaRPr lang="en-US" dirty="0"/>
           </a:p>
@@ -2516,7 +2336,7 @@
           <a:p>
             <a:r>
               <a:rPr lang="en-US" dirty="0"/>
-              <a:t>~1 min. The ladder: variation in the signal (Goldstein-Pauzner: same signal technology, different draws, which selects the equilibrium), variation in location (who hears it, from whom, when: Kelly-O Grada, Iyer-Puri, Cookson et al.), variation in interpretation (the same two signals, different dispositional weights; culture is the stable source). Rung 1 orders depositors by luck, rung 2 by position, rung 3 by who they are, and only rung 3 predicts that the order flips with the sign of the public error. Nearest cousins to acknowledge if asked: Izmalkov-Yildiz 2010 (heterogeneous priors), He-Manela 2016 (information acquisition).</a:t>
+              <a:t>~1 min. Individualists put little weight on others (neighbours and public news) and more on their own information; collectivists the reverse. In the model: weight on the social side lambda; pairs shown in the figures (I, C): (0.1, 0.9) = large difference, (0.2, 0.8) = medium, (0.3, 0.5) = small. Type comes from a cultural warm-up on the network: the top mu share become individualists. Colours used throughout: orange = individualists, blue = collectivists.</a:t>
             </a:r>
             <a:endParaRPr lang="en-US" dirty="0"/>
           </a:p>
@@ -3449,7 +3269,7 @@
                   <a:schemeClr val="tx2"/>
                 </a:solidFill>
               </a:rPr>
-              <a:t>The model in one picture</a:t>
+              <a:t>Collectivists herd</a:t>
             </a:r>
             <a:endParaRPr lang="en-US" sz="2400" dirty="0"/>
           </a:p>
@@ -3457,7 +3277,7 @@
       </p:sp>
       <p:pic>
         <p:nvPicPr>
-          <p:cNvPr id="3" name="odd" descr="Model overview: depositors on a social network with a bank; each run draws fundamentals and signals, a shock hits, then depositors observe neighbours and news, form beliefs, and decide whether to withdraw, tick by tick.">    </p:cNvPr>
+          <p:cNvPr id="3" name="e07" descr="Chance of withdrawing by share of neighbours who have withdrawn: collectivists jump to near 1 once 20 to 35 percent of neighbours are out; individualists level off near 0.25 to 0.30.">    </p:cNvPr>
           <p:cNvPicPr>
             <a:picLocks noChangeAspect="1"/>
           </p:cNvPicPr>
@@ -3472,7 +3292,7 @@
         <p:spPr>
           <a:xfrm>
             <a:off x="457200" y="1051560"/>
-            <a:ext cx="3467633" cy="3520440"/>
+            <a:ext cx="5164897" cy="3291840"/>
           </a:xfrm>
           <a:prstGeom prst="rect">
             <a:avLst/>
@@ -3481,18 +3301,54 @@
       </p:pic>
       <p:sp>
         <p:nvSpPr>
-          <p:cNvPr id="4" name="stat-depositors on a smal"/>
+          <p:cNvPr id="4" name="caption"/>
+          <p:cNvSpPr txBox="1"/>
+          <p:nvPr/>
+        </p:nvSpPr>
+        <p:spPr>
+          <a:xfrm>
+            <a:off x="457200" y="4389120"/>
+            <a:ext cx="5486400" cy="274320"/>
+          </a:xfrm>
+          <a:prstGeom prst="rect">
+            <a:avLst/>
+          </a:prstGeom>
+          <a:noFill/>
+          <a:ln/>
+        </p:spPr>
+        <p:txBody>
+          <a:bodyPr wrap="square" lIns="0" tIns="0" rIns="0" bIns="0" rtlCol="0" anchor="ctr"/>
+          <a:lstStyle/>
+          <a:p>
+            <a:pPr indent="0" marL="0">
+              <a:buNone/>
+            </a:pPr>
+            <a:r>
+              <a:rPr lang="en-US" sz="1000" i="1" dirty="0">
+                <a:solidFill>
+                  <a:schemeClr val="accent3"/>
+                </a:solidFill>
+              </a:rPr>
+              <a:t>Chance of withdrawing, given the share of a depositor’s neighbours who have already withdrawn. λ pairs pooled; reference bank.</a:t>
+            </a:r>
+            <a:endParaRPr lang="en-US" sz="1000" dirty="0"/>
+          </a:p>
+        </p:txBody>
+      </p:sp>
+      <p:sp>
+        <p:nvSpPr>
+          <p:cNvPr id="5" name="stat-collectivists, once "/>
           <p:cNvSpPr/>
           <p:nvPr/>
         </p:nvSpPr>
         <p:spPr>
           <a:xfrm>
-            <a:off x="4244873" y="1051560"/>
-            <a:ext cx="2152383" cy="960120"/>
+            <a:off x="6217920" y="1051560"/>
+            <a:ext cx="2468880" cy="1005840"/>
           </a:xfrm>
           <a:prstGeom prst="roundRect">
             <a:avLst>
-              <a:gd name="adj" fmla="val 7619"/>
+              <a:gd name="adj" fmla="val 7273"/>
             </a:avLst>
           </a:prstGeom>
           <a:solidFill>
@@ -3508,14 +3364,14 @@
       </p:sp>
       <p:sp>
         <p:nvSpPr>
-          <p:cNvPr id="5" name="stat-big"/>
+          <p:cNvPr id="6" name="stat-big"/>
           <p:cNvSpPr txBox="1"/>
           <p:nvPr/>
         </p:nvSpPr>
         <p:spPr>
           <a:xfrm>
-            <a:off x="4382033" y="1124712"/>
-            <a:ext cx="1878063" cy="457200"/>
+            <a:off x="6355080" y="1124712"/>
+            <a:ext cx="2194560" cy="457200"/>
           </a:xfrm>
           <a:prstGeom prst="rect">
             <a:avLst/>
@@ -3531,30 +3387,30 @@
               <a:buNone/>
             </a:pPr>
             <a:r>
-              <a:rPr lang="en-US" sz="2600" b="1" dirty="0">
-                <a:solidFill>
-                  <a:schemeClr val="accent1"/>
+              <a:rPr lang="en-US" sz="2200" b="1" dirty="0">
+                <a:solidFill>
+                  <a:srgbClr val="2A78D6"/>
                 </a:solidFill>
                 <a:latin typeface="Cambria" pitchFamily="34" charset="0"/>
                 <a:ea typeface="Cambria" pitchFamily="34" charset="-122"/>
                 <a:cs typeface="Cambria" pitchFamily="34" charset="-120"/>
               </a:rPr>
-              <a:t>1,000</a:t>
-            </a:r>
-            <a:endParaRPr lang="en-US" sz="2600" dirty="0"/>
-          </a:p>
-        </p:txBody>
-      </p:sp>
-      <p:sp>
-        <p:nvSpPr>
-          <p:cNvPr id="6" name="stat-label"/>
+              <a:t>0.15 to 0.93</a:t>
+            </a:r>
+            <a:endParaRPr lang="en-US" sz="2200" dirty="0"/>
+          </a:p>
+        </p:txBody>
+      </p:sp>
+      <p:sp>
+        <p:nvSpPr>
+          <p:cNvPr id="7" name="stat-label"/>
           <p:cNvSpPr txBox="1"/>
           <p:nvPr/>
         </p:nvSpPr>
         <p:spPr>
           <a:xfrm>
-            <a:off x="4382033" y="1600200"/>
-            <a:ext cx="1878063" cy="356616"/>
+            <a:off x="6355080" y="1600200"/>
+            <a:ext cx="2194560" cy="402336"/>
           </a:xfrm>
           <a:prstGeom prst="rect">
             <a:avLst/>
@@ -3575,7 +3431,7 @@
                   <a:schemeClr val="accent3"/>
                 </a:solidFill>
               </a:rPr>
-              <a:t>depositors on a small-world network, one bank</a:t>
+              <a:t>collectivists, once 20–35% of their neighbours are out</a:t>
             </a:r>
             <a:endParaRPr lang="en-US" sz="1100" dirty="0"/>
           </a:p>
@@ -3583,18 +3439,18 @@
       </p:sp>
       <p:sp>
         <p:nvSpPr>
-          <p:cNvPr id="7" name="stat-cap on any one depos"/>
+          <p:cNvPr id="8" name="stat-where individualists"/>
           <p:cNvSpPr/>
           <p:nvPr/>
         </p:nvSpPr>
         <p:spPr>
           <a:xfrm>
-            <a:off x="6534417" y="1051560"/>
-            <a:ext cx="2152383" cy="960120"/>
+            <a:off x="6217920" y="2194560"/>
+            <a:ext cx="2468880" cy="1005840"/>
           </a:xfrm>
           <a:prstGeom prst="roundRect">
             <a:avLst>
-              <a:gd name="adj" fmla="val 7619"/>
+              <a:gd name="adj" fmla="val 7273"/>
             </a:avLst>
           </a:prstGeom>
           <a:solidFill>
@@ -3610,14 +3466,14 @@
       </p:sp>
       <p:sp>
         <p:nvSpPr>
-          <p:cNvPr id="8" name="stat-big"/>
+          <p:cNvPr id="9" name="stat-big"/>
           <p:cNvSpPr txBox="1"/>
           <p:nvPr/>
         </p:nvSpPr>
         <p:spPr>
           <a:xfrm>
-            <a:off x="6671577" y="1124712"/>
-            <a:ext cx="1878063" cy="457200"/>
+            <a:off x="6355080" y="2267712"/>
+            <a:ext cx="2194560" cy="457200"/>
           </a:xfrm>
           <a:prstGeom prst="rect">
             <a:avLst/>
@@ -3633,30 +3489,30 @@
               <a:buNone/>
             </a:pPr>
             <a:r>
-              <a:rPr lang="en-US" sz="2600" b="1" dirty="0">
-                <a:solidFill>
-                  <a:schemeClr val="accent1"/>
+              <a:rPr lang="en-US" sz="2200" b="1" dirty="0">
+                <a:solidFill>
+                  <a:srgbClr val="EB6834"/>
                 </a:solidFill>
                 <a:latin typeface="Cambria" pitchFamily="34" charset="0"/>
                 <a:ea typeface="Cambria" pitchFamily="34" charset="-122"/>
                 <a:cs typeface="Cambria" pitchFamily="34" charset="-120"/>
               </a:rPr>
-              <a:t>1%</a:t>
-            </a:r>
-            <a:endParaRPr lang="en-US" sz="2600" dirty="0"/>
-          </a:p>
-        </p:txBody>
-      </p:sp>
-      <p:sp>
-        <p:nvSpPr>
-          <p:cNvPr id="9" name="stat-label"/>
+              <a:t>0.25 to 0.30</a:t>
+            </a:r>
+            <a:endParaRPr lang="en-US" sz="2200" dirty="0"/>
+          </a:p>
+        </p:txBody>
+      </p:sp>
+      <p:sp>
+        <p:nvSpPr>
+          <p:cNvPr id="10" name="stat-label"/>
           <p:cNvSpPr txBox="1"/>
           <p:nvPr/>
         </p:nvSpPr>
         <p:spPr>
           <a:xfrm>
-            <a:off x="6671577" y="1600200"/>
-            <a:ext cx="1878063" cy="356616"/>
+            <a:off x="6355080" y="2743200"/>
+            <a:ext cx="2194560" cy="402336"/>
           </a:xfrm>
           <a:prstGeom prst="rect">
             <a:avLst/>
@@ -3677,7 +3533,7 @@
                   <a:schemeClr val="accent3"/>
                 </a:solidFill>
               </a:rPr>
-              <a:t>cap on any one deposit; sizes log-normal (σ 2.5) below it</a:t>
+              <a:t>where individualists level off, whatever their neighbours do</a:t>
             </a:r>
             <a:endParaRPr lang="en-US" sz="1100" dirty="0"/>
           </a:p>
@@ -3685,18 +3541,18 @@
       </p:sp>
       <p:sp>
         <p:nvSpPr>
-          <p:cNvPr id="10" name="stat-risk aversion; parti"/>
+          <p:cNvPr id="11" name="stat-difference in slopes"/>
           <p:cNvSpPr/>
           <p:nvPr/>
         </p:nvSpPr>
         <p:spPr>
           <a:xfrm>
-            <a:off x="4244873" y="2148840"/>
-            <a:ext cx="2152383" cy="960120"/>
+            <a:off x="6217920" y="3337560"/>
+            <a:ext cx="2468880" cy="1097280"/>
           </a:xfrm>
           <a:prstGeom prst="roundRect">
             <a:avLst>
-              <a:gd name="adj" fmla="val 7619"/>
+              <a:gd name="adj" fmla="val 6667"/>
             </a:avLst>
           </a:prstGeom>
           <a:solidFill>
@@ -3712,14 +3568,14 @@
       </p:sp>
       <p:sp>
         <p:nvSpPr>
-          <p:cNvPr id="11" name="stat-big"/>
+          <p:cNvPr id="12" name="stat-big"/>
           <p:cNvSpPr txBox="1"/>
           <p:nvPr/>
         </p:nvSpPr>
         <p:spPr>
           <a:xfrm>
-            <a:off x="4382033" y="2221992"/>
-            <a:ext cx="1878063" cy="457200"/>
+            <a:off x="6355080" y="3410712"/>
+            <a:ext cx="2194560" cy="457200"/>
           </a:xfrm>
           <a:prstGeom prst="rect">
             <a:avLst/>
@@ -3735,7 +3591,7 @@
               <a:buNone/>
             </a:pPr>
             <a:r>
-              <a:rPr lang="en-US" sz="2200" b="1" dirty="0">
+              <a:rPr lang="en-US" sz="2600" b="1" dirty="0">
                 <a:solidFill>
                   <a:schemeClr val="accent1"/>
                 </a:solidFill>
@@ -3743,22 +3599,22 @@
                 <a:ea typeface="Cambria" pitchFamily="34" charset="-122"/>
                 <a:cs typeface="Cambria" pitchFamily="34" charset="-120"/>
               </a:rPr>
-              <a:t>CARA 0.1</a:t>
-            </a:r>
-            <a:endParaRPr lang="en-US" sz="2200" dirty="0"/>
-          </a:p>
-        </p:txBody>
-      </p:sp>
-      <p:sp>
-        <p:nvSpPr>
-          <p:cNvPr id="12" name="stat-label"/>
+              <a:t>+0.58</a:t>
+            </a:r>
+            <a:endParaRPr lang="en-US" sz="2600" dirty="0"/>
+          </a:p>
+        </p:txBody>
+      </p:sp>
+      <p:sp>
+        <p:nvSpPr>
+          <p:cNvPr id="13" name="stat-label"/>
           <p:cNvSpPr txBox="1"/>
           <p:nvPr/>
         </p:nvSpPr>
         <p:spPr>
           <a:xfrm>
-            <a:off x="4382033" y="2697480"/>
-            <a:ext cx="1878063" cy="356616"/>
+            <a:off x="6355080" y="3886200"/>
+            <a:ext cx="2194560" cy="493776"/>
           </a:xfrm>
           <a:prstGeom prst="rect">
             <a:avLst/>
@@ -3779,205 +3635,9 @@
                   <a:schemeClr val="accent3"/>
                 </a:solidFill>
               </a:rPr>
-              <a:t>risk aversion; partial withdrawals allowed</a:t>
+              <a:t>difference in slopes (collectivists 0.80, individualists 0.22), t = 16.7</a:t>
             </a:r>
             <a:endParaRPr lang="en-US" sz="1100" dirty="0"/>
-          </a:p>
-        </p:txBody>
-      </p:sp>
-      <p:sp>
-        <p:nvSpPr>
-          <p:cNvPr id="13" name="stat-runs per cell: 25 in"/>
-          <p:cNvSpPr/>
-          <p:nvPr/>
-        </p:nvSpPr>
-        <p:spPr>
-          <a:xfrm>
-            <a:off x="6534417" y="2148840"/>
-            <a:ext cx="2152383" cy="960120"/>
-          </a:xfrm>
-          <a:prstGeom prst="roundRect">
-            <a:avLst>
-              <a:gd name="adj" fmla="val 7619"/>
-            </a:avLst>
-          </a:prstGeom>
-          <a:solidFill>
-            <a:schemeClr val="bg2"/>
-          </a:solidFill>
-          <a:ln w="12700">
-            <a:solidFill>
-              <a:schemeClr val="bg2"/>
-            </a:solidFill>
-            <a:prstDash val="solid"/>
-          </a:ln>
-        </p:spPr>
-      </p:sp>
-      <p:sp>
-        <p:nvSpPr>
-          <p:cNvPr id="14" name="stat-big"/>
-          <p:cNvSpPr txBox="1"/>
-          <p:nvPr/>
-        </p:nvSpPr>
-        <p:spPr>
-          <a:xfrm>
-            <a:off x="6671577" y="2221992"/>
-            <a:ext cx="1878063" cy="457200"/>
-          </a:xfrm>
-          <a:prstGeom prst="rect">
-            <a:avLst/>
-          </a:prstGeom>
-          <a:noFill/>
-          <a:ln/>
-        </p:spPr>
-        <p:txBody>
-          <a:bodyPr wrap="square" lIns="0" tIns="0" rIns="0" bIns="0" rtlCol="0" anchor="ctr"/>
-          <a:lstStyle/>
-          <a:p>
-            <a:pPr indent="0" marL="0">
-              <a:buNone/>
-            </a:pPr>
-            <a:r>
-              <a:rPr lang="en-US" sz="2600" b="1" dirty="0">
-                <a:solidFill>
-                  <a:schemeClr val="accent1"/>
-                </a:solidFill>
-                <a:latin typeface="Cambria" pitchFamily="34" charset="0"/>
-                <a:ea typeface="Cambria" pitchFamily="34" charset="-122"/>
-                <a:cs typeface="Cambria" pitchFamily="34" charset="-120"/>
-              </a:rPr>
-              <a:t>250</a:t>
-            </a:r>
-            <a:endParaRPr lang="en-US" sz="2600" dirty="0"/>
-          </a:p>
-        </p:txBody>
-      </p:sp>
-      <p:sp>
-        <p:nvSpPr>
-          <p:cNvPr id="15" name="stat-label"/>
-          <p:cNvSpPr txBox="1"/>
-          <p:nvPr/>
-        </p:nvSpPr>
-        <p:spPr>
-          <a:xfrm>
-            <a:off x="6671577" y="2697480"/>
-            <a:ext cx="1878063" cy="356616"/>
-          </a:xfrm>
-          <a:prstGeom prst="rect">
-            <a:avLst/>
-          </a:prstGeom>
-          <a:noFill/>
-          <a:ln/>
-        </p:spPr>
-        <p:txBody>
-          <a:bodyPr wrap="square" lIns="0" tIns="0" rIns="0" bIns="0" rtlCol="0" anchor="t"/>
-          <a:lstStyle/>
-          <a:p>
-            <a:pPr indent="0" marL="0">
-              <a:buNone/>
-            </a:pPr>
-            <a:r>
-              <a:rPr lang="en-US" sz="1100" dirty="0">
-                <a:solidFill>
-                  <a:schemeClr val="accent3"/>
-                </a:solidFill>
-              </a:rPr>
-              <a:t>runs per cell: 25 initialisations × 10 draws</a:t>
-            </a:r>
-            <a:endParaRPr lang="en-US" sz="1100" dirty="0"/>
-          </a:p>
-        </p:txBody>
-      </p:sp>
-      <p:sp>
-        <p:nvSpPr>
-          <p:cNvPr id="16" name="bullets"/>
-          <p:cNvSpPr txBox="1"/>
-          <p:nvPr/>
-        </p:nvSpPr>
-        <p:spPr>
-          <a:xfrm>
-            <a:off x="4244873" y="3200400"/>
-            <a:ext cx="4441927" cy="1371600"/>
-          </a:xfrm>
-          <a:prstGeom prst="rect">
-            <a:avLst/>
-          </a:prstGeom>
-          <a:noFill/>
-          <a:ln/>
-        </p:spPr>
-        <p:txBody>
-          <a:bodyPr wrap="square" lIns="0" tIns="0" rIns="0" bIns="0" rtlCol="0" anchor="t"/>
-          <a:lstStyle/>
-          <a:p>
-            <a:pPr marL="177800" indent="-177800">
-              <a:spcAft>
-                <a:spcPts val="400"/>
-              </a:spcAft>
-              <a:buSzPct val="100000"/>
-              <a:buChar char="•"/>
-            </a:pPr>
-            <a:r>
-              <a:rPr lang="en-US" sz="1150" dirty="0">
-                <a:solidFill>
-                  <a:schemeClr val="tx1"/>
-                </a:solidFill>
-              </a:rPr>
-              <a:t>One bank that sells its long asset at a discount when cash runs short (a fire-sale bank)</a:t>
-            </a:r>
-            <a:endParaRPr lang="en-US" sz="1150" dirty="0"/>
-          </a:p>
-          <a:p>
-            <a:pPr marL="177800" indent="-177800">
-              <a:spcAft>
-                <a:spcPts val="400"/>
-              </a:spcAft>
-              <a:buSzPct val="100000"/>
-              <a:buChar char="•"/>
-            </a:pPr>
-            <a:r>
-              <a:rPr lang="en-US" sz="1150" dirty="0">
-                <a:solidFill>
-                  <a:schemeClr val="tx1"/>
-                </a:solidFill>
-              </a:rPr>
-              <a:t>Each tick a depositor sees neighbours’ withdrawals and the public news, blends them with a private signal, and withdraws if that pays</a:t>
-            </a:r>
-            <a:endParaRPr lang="en-US" sz="1150" dirty="0"/>
-          </a:p>
-          <a:p>
-            <a:pPr marL="177800" indent="-177800">
-              <a:spcAft>
-                <a:spcPts val="400"/>
-              </a:spcAft>
-              <a:buSzPct val="100000"/>
-              <a:buChar char="•"/>
-            </a:pPr>
-            <a:r>
-              <a:rPr lang="en-US" sz="1150" dirty="0">
-                <a:solidFill>
-                  <a:schemeClr val="tx1"/>
-                </a:solidFill>
-              </a:rPr>
-              <a:t>A public signal can be absent, accurate, or outdated</a:t>
-            </a:r>
-            <a:endParaRPr lang="en-US" sz="1150" dirty="0"/>
-          </a:p>
-          <a:p>
-            <a:pPr marL="177800" indent="-177800">
-              <a:spcAft>
-                <a:spcPts val="400"/>
-              </a:spcAft>
-              <a:buSzPct val="100000"/>
-              <a:buChar char="•"/>
-            </a:pPr>
-            <a:r>
-              <a:rPr lang="en-US" sz="1150" dirty="0">
-                <a:solidFill>
-                  <a:schemeClr val="tx1"/>
-                </a:solidFill>
-              </a:rPr>
-              <a:t>Outcomes: D = individualists’ minus collectivists’ withdrawal share (those not hit by the shock); P(fail) = share of runs that fail</a:t>
-            </a:r>
-            <a:endParaRPr lang="en-US" sz="1150" dirty="0"/>
           </a:p>
         </p:txBody>
       </p:sp>
@@ -4083,26 +3743,86 @@
                   <a:schemeClr val="tx2"/>
                 </a:solidFill>
               </a:rPr>
-              <a:t>Individualists and collectivists: who listens to whom</a:t>
+              <a:t>More individualists, fewer failures</a:t>
             </a:r>
             <a:endParaRPr lang="en-US" sz="2400" dirty="0"/>
           </a:p>
         </p:txBody>
       </p:sp>
-      <p:sp>
-        <p:nvSpPr>
-          <p:cNvPr id="3" name="type-Individualists"/>
+      <p:pic>
+        <p:nvPicPr>
+          <p:cNvPr id="3" name="e05" descr="Chance the bank fails by share of individualists: falls from about 0.67 with no individualists to about 0.08 with all individualists for the large difference pair; monotone for every pair.">    </p:cNvPr>
+          <p:cNvPicPr>
+            <a:picLocks noChangeAspect="1"/>
+          </p:cNvPicPr>
+          <p:nvPr/>
+        </p:nvPicPr>
+        <p:blipFill>
+          <a:blip r:embed="rId1"/>
+          <a:stretch>
+            <a:fillRect/>
+          </a:stretch>
+        </p:blipFill>
+        <p:spPr>
+          <a:xfrm>
+            <a:off x="457200" y="1051560"/>
+            <a:ext cx="4941052" cy="3291840"/>
+          </a:xfrm>
+          <a:prstGeom prst="rect">
+            <a:avLst/>
+          </a:prstGeom>
+        </p:spPr>
+      </p:pic>
+      <p:sp>
+        <p:nvSpPr>
+          <p:cNvPr id="4" name="caption"/>
+          <p:cNvSpPr txBox="1"/>
+          <p:nvPr/>
+        </p:nvSpPr>
+        <p:spPr>
+          <a:xfrm>
+            <a:off x="457200" y="4389120"/>
+            <a:ext cx="5486400" cy="274320"/>
+          </a:xfrm>
+          <a:prstGeom prst="rect">
+            <a:avLst/>
+          </a:prstGeom>
+          <a:noFill/>
+          <a:ln/>
+        </p:spPr>
+        <p:txBody>
+          <a:bodyPr wrap="square" lIns="0" tIns="0" rIns="0" bIns="0" rtlCol="0" anchor="ctr"/>
+          <a:lstStyle/>
+          <a:p>
+            <a:pPr indent="0" marL="0">
+              <a:buNone/>
+            </a:pPr>
+            <a:r>
+              <a:rPr lang="en-US" sz="1000" i="1" dirty="0">
+                <a:solidFill>
+                  <a:schemeClr val="accent3"/>
+                </a:solidFill>
+              </a:rPr>
+              <a:t>Chance the bank fails, by share of individualists μ, one line per λ pair. Includes the pure populations (μ 0 and 1).</a:t>
+            </a:r>
+            <a:endParaRPr lang="en-US" sz="1000" dirty="0"/>
+          </a:p>
+        </p:txBody>
+      </p:sp>
+      <p:sp>
+        <p:nvSpPr>
+          <p:cNvPr id="5" name="stat-P(fail) from no indi"/>
           <p:cNvSpPr/>
           <p:nvPr/>
         </p:nvSpPr>
         <p:spPr>
           <a:xfrm>
-            <a:off x="457200" y="1051560"/>
-            <a:ext cx="4023360" cy="2377440"/>
+            <a:off x="6217920" y="1051560"/>
+            <a:ext cx="2468880" cy="1005840"/>
           </a:xfrm>
           <a:prstGeom prst="roundRect">
             <a:avLst>
-              <a:gd name="adj" fmla="val 3077"/>
+              <a:gd name="adj" fmla="val 7273"/>
             </a:avLst>
           </a:prstGeom>
           <a:solidFill>
@@ -4118,14 +3838,14 @@
       </p:sp>
       <p:sp>
         <p:nvSpPr>
-          <p:cNvPr id="4" name="type-head"/>
+          <p:cNvPr id="6" name="stat-big"/>
           <p:cNvSpPr txBox="1"/>
           <p:nvPr/>
         </p:nvSpPr>
         <p:spPr>
           <a:xfrm>
-            <a:off x="640080" y="1143000"/>
-            <a:ext cx="3657600" cy="365760"/>
+            <a:off x="6355080" y="1124712"/>
+            <a:ext cx="2194560" cy="457200"/>
           </a:xfrm>
           <a:prstGeom prst="rect">
             <a:avLst/>
@@ -4141,27 +3861,30 @@
               <a:buNone/>
             </a:pPr>
             <a:r>
-              <a:rPr lang="en-US" sz="1800" b="1" dirty="0">
-                <a:solidFill>
-                  <a:srgbClr val="EB6834"/>
-                </a:solidFill>
-              </a:rPr>
-              <a:t>Individualists</a:t>
-            </a:r>
-            <a:endParaRPr lang="en-US" sz="1800" dirty="0"/>
-          </a:p>
-        </p:txBody>
-      </p:sp>
-      <p:sp>
-        <p:nvSpPr>
-          <p:cNvPr id="5" name="bullets"/>
+              <a:rPr lang="en-US" sz="2200" b="1" dirty="0">
+                <a:solidFill>
+                  <a:schemeClr val="accent1"/>
+                </a:solidFill>
+                <a:latin typeface="Cambria" pitchFamily="34" charset="0"/>
+                <a:ea typeface="Cambria" pitchFamily="34" charset="-122"/>
+                <a:cs typeface="Cambria" pitchFamily="34" charset="-120"/>
+              </a:rPr>
+              <a:t>0.67 to 0.08</a:t>
+            </a:r>
+            <a:endParaRPr lang="en-US" sz="2200" dirty="0"/>
+          </a:p>
+        </p:txBody>
+      </p:sp>
+      <p:sp>
+        <p:nvSpPr>
+          <p:cNvPr id="7" name="stat-label"/>
           <p:cNvSpPr txBox="1"/>
           <p:nvPr/>
         </p:nvSpPr>
         <p:spPr>
           <a:xfrm>
-            <a:off x="640080" y="1600200"/>
-            <a:ext cx="3657600" cy="1737360"/>
+            <a:off x="6355080" y="1600200"/>
+            <a:ext cx="2194560" cy="402336"/>
           </a:xfrm>
           <a:prstGeom prst="rect">
             <a:avLst/>
@@ -4173,93 +3896,35 @@
           <a:bodyPr wrap="square" lIns="0" tIns="0" rIns="0" bIns="0" rtlCol="0" anchor="t"/>
           <a:lstStyle/>
           <a:p>
-            <a:pPr marL="177800" indent="-177800">
-              <a:spcAft>
-                <a:spcPts val="500"/>
-              </a:spcAft>
-              <a:buSzPct val="100000"/>
-              <a:buChar char="•"/>
-            </a:pPr>
-            <a:r>
-              <a:rPr lang="en-US" sz="1300" dirty="0">
-                <a:solidFill>
-                  <a:schemeClr val="tx1"/>
-                </a:solidFill>
-              </a:rPr>
-              <a:t>Trust their own information about the bank</a:t>
-            </a:r>
-            <a:endParaRPr lang="en-US" sz="1300" dirty="0"/>
-          </a:p>
-          <a:p>
-            <a:pPr marL="177800" indent="-177800">
-              <a:spcAft>
-                <a:spcPts val="500"/>
-              </a:spcAft>
-              <a:buSzPct val="100000"/>
-              <a:buChar char="•"/>
-            </a:pPr>
-            <a:r>
-              <a:rPr lang="en-US" sz="1300" dirty="0">
-                <a:solidFill>
-                  <a:schemeClr val="tx1"/>
-                </a:solidFill>
-              </a:rPr>
-              <a:t>Put little weight on what neighbours do or on public news</a:t>
-            </a:r>
-            <a:endParaRPr lang="en-US" sz="1300" dirty="0"/>
-          </a:p>
-          <a:p>
-            <a:pPr marL="177800" indent="-177800">
-              <a:spcAft>
-                <a:spcPts val="500"/>
-              </a:spcAft>
-              <a:buSzPct val="100000"/>
-              <a:buChar char="•"/>
-            </a:pPr>
-            <a:r>
-              <a:rPr lang="en-US" sz="1300" dirty="0">
-                <a:solidFill>
-                  <a:schemeClr val="tx1"/>
-                </a:solidFill>
-              </a:rPr>
-              <a:t>Weight on the social side: λ = 0.1 to 0.3</a:t>
-            </a:r>
-            <a:endParaRPr lang="en-US" sz="1300" dirty="0"/>
-          </a:p>
-          <a:p>
-            <a:pPr marL="177800" indent="-177800">
-              <a:spcAft>
-                <a:spcPts val="500"/>
-              </a:spcAft>
-              <a:buSzPct val="100000"/>
-              <a:buChar char="•"/>
-            </a:pPr>
-            <a:r>
-              <a:rPr lang="en-US" sz="1300" dirty="0">
-                <a:solidFill>
-                  <a:schemeClr val="tx1"/>
-                </a:solidFill>
-              </a:rPr>
-              <a:t>Act on what they see themselves</a:t>
-            </a:r>
-            <a:endParaRPr lang="en-US" sz="1300" dirty="0"/>
-          </a:p>
-        </p:txBody>
-      </p:sp>
-      <p:sp>
-        <p:nvSpPr>
-          <p:cNvPr id="6" name="type-Collectivists"/>
+            <a:pPr indent="0" marL="0">
+              <a:buNone/>
+            </a:pPr>
+            <a:r>
+              <a:rPr lang="en-US" sz="1100" dirty="0">
+                <a:solidFill>
+                  <a:schemeClr val="accent3"/>
+                </a:solidFill>
+              </a:rPr>
+              <a:t>P(fail) from no individualists to all, wide λ gap</a:t>
+            </a:r>
+            <a:endParaRPr lang="en-US" sz="1100" dirty="0"/>
+          </a:p>
+        </p:txBody>
+      </p:sp>
+      <p:sp>
+        <p:nvSpPr>
+          <p:cNvPr id="8" name="stat-the same, narrow λ g"/>
           <p:cNvSpPr/>
           <p:nvPr/>
         </p:nvSpPr>
         <p:spPr>
           <a:xfrm>
-            <a:off x="4663440" y="1051560"/>
-            <a:ext cx="4023360" cy="2377440"/>
+            <a:off x="6217920" y="2194560"/>
+            <a:ext cx="2468880" cy="1005840"/>
           </a:xfrm>
           <a:prstGeom prst="roundRect">
             <a:avLst>
-              <a:gd name="adj" fmla="val 3077"/>
+              <a:gd name="adj" fmla="val 7273"/>
             </a:avLst>
           </a:prstGeom>
           <a:solidFill>
@@ -4275,14 +3940,14 @@
       </p:sp>
       <p:sp>
         <p:nvSpPr>
-          <p:cNvPr id="7" name="type-head"/>
+          <p:cNvPr id="9" name="stat-big"/>
           <p:cNvSpPr txBox="1"/>
           <p:nvPr/>
         </p:nvSpPr>
         <p:spPr>
           <a:xfrm>
-            <a:off x="4846320" y="1143000"/>
-            <a:ext cx="3657600" cy="365760"/>
+            <a:off x="6355080" y="2267712"/>
+            <a:ext cx="2194560" cy="457200"/>
           </a:xfrm>
           <a:prstGeom prst="rect">
             <a:avLst/>
@@ -4298,27 +3963,30 @@
               <a:buNone/>
             </a:pPr>
             <a:r>
-              <a:rPr lang="en-US" sz="1800" b="1" dirty="0">
-                <a:solidFill>
-                  <a:srgbClr val="2A78D6"/>
-                </a:solidFill>
-              </a:rPr>
-              <a:t>Collectivists</a:t>
-            </a:r>
-            <a:endParaRPr lang="en-US" sz="1800" dirty="0"/>
-          </a:p>
-        </p:txBody>
-      </p:sp>
-      <p:sp>
-        <p:nvSpPr>
-          <p:cNvPr id="8" name="bullets"/>
+              <a:rPr lang="en-US" sz="2200" b="1" dirty="0">
+                <a:solidFill>
+                  <a:schemeClr val="accent1"/>
+                </a:solidFill>
+                <a:latin typeface="Cambria" pitchFamily="34" charset="0"/>
+                <a:ea typeface="Cambria" pitchFamily="34" charset="-122"/>
+                <a:cs typeface="Cambria" pitchFamily="34" charset="-120"/>
+              </a:rPr>
+              <a:t>0.25 to 0.09</a:t>
+            </a:r>
+            <a:endParaRPr lang="en-US" sz="2200" dirty="0"/>
+          </a:p>
+        </p:txBody>
+      </p:sp>
+      <p:sp>
+        <p:nvSpPr>
+          <p:cNvPr id="10" name="stat-label"/>
           <p:cNvSpPr txBox="1"/>
           <p:nvPr/>
         </p:nvSpPr>
         <p:spPr>
           <a:xfrm>
-            <a:off x="4846320" y="1600200"/>
-            <a:ext cx="3657600" cy="1737360"/>
+            <a:off x="6355080" y="2743200"/>
+            <a:ext cx="2194560" cy="402336"/>
           </a:xfrm>
           <a:prstGeom prst="rect">
             <a:avLst/>
@@ -4330,110 +3998,16 @@
           <a:bodyPr wrap="square" lIns="0" tIns="0" rIns="0" bIns="0" rtlCol="0" anchor="t"/>
           <a:lstStyle/>
           <a:p>
-            <a:pPr marL="177800" indent="-177800">
-              <a:spcAft>
-                <a:spcPts val="500"/>
-              </a:spcAft>
-              <a:buSzPct val="100000"/>
-              <a:buChar char="•"/>
-            </a:pPr>
-            <a:r>
-              <a:rPr lang="en-US" sz="1300" dirty="0">
-                <a:solidFill>
-                  <a:schemeClr val="tx1"/>
-                </a:solidFill>
-              </a:rPr>
-              <a:t>Watch what neighbours do and what the public news says</a:t>
-            </a:r>
-            <a:endParaRPr lang="en-US" sz="1300" dirty="0"/>
-          </a:p>
-          <a:p>
-            <a:pPr marL="177800" indent="-177800">
-              <a:spcAft>
-                <a:spcPts val="500"/>
-              </a:spcAft>
-              <a:buSzPct val="100000"/>
-              <a:buChar char="•"/>
-            </a:pPr>
-            <a:r>
-              <a:rPr lang="en-US" sz="1300" dirty="0">
-                <a:solidFill>
-                  <a:schemeClr val="tx1"/>
-                </a:solidFill>
-              </a:rPr>
-              <a:t>Put little weight on their own information</a:t>
-            </a:r>
-            <a:endParaRPr lang="en-US" sz="1300" dirty="0"/>
-          </a:p>
-          <a:p>
-            <a:pPr marL="177800" indent="-177800">
-              <a:spcAft>
-                <a:spcPts val="500"/>
-              </a:spcAft>
-              <a:buSzPct val="100000"/>
-              <a:buChar char="•"/>
-            </a:pPr>
-            <a:r>
-              <a:rPr lang="en-US" sz="1300" dirty="0">
-                <a:solidFill>
-                  <a:schemeClr val="tx1"/>
-                </a:solidFill>
-              </a:rPr>
-              <a:t>Weight on the social side: λ = 0.5 to 0.9</a:t>
-            </a:r>
-            <a:endParaRPr lang="en-US" sz="1300" dirty="0"/>
-          </a:p>
-          <a:p>
-            <a:pPr marL="177800" indent="-177800">
-              <a:spcAft>
-                <a:spcPts val="500"/>
-              </a:spcAft>
-              <a:buSzPct val="100000"/>
-              <a:buChar char="•"/>
-            </a:pPr>
-            <a:r>
-              <a:rPr lang="en-US" sz="1300" dirty="0">
-                <a:solidFill>
-                  <a:schemeClr val="tx1"/>
-                </a:solidFill>
-              </a:rPr>
-              <a:t>Move when others move</a:t>
-            </a:r>
-            <a:endParaRPr lang="en-US" sz="1300" dirty="0"/>
-          </a:p>
-        </p:txBody>
-      </p:sp>
-      <p:sp>
-        <p:nvSpPr>
-          <p:cNvPr id="9" name="pairs-head"/>
-          <p:cNvSpPr txBox="1"/>
-          <p:nvPr/>
-        </p:nvSpPr>
-        <p:spPr>
-          <a:xfrm>
-            <a:off x="457200" y="3611880"/>
-            <a:ext cx="4572000" cy="274320"/>
-          </a:xfrm>
-          <a:prstGeom prst="rect">
-            <a:avLst/>
-          </a:prstGeom>
-          <a:noFill/>
-          <a:ln/>
-        </p:spPr>
-        <p:txBody>
-          <a:bodyPr wrap="square" lIns="0" tIns="0" rIns="0" bIns="0" rtlCol="0" anchor="ctr"/>
-          <a:lstStyle/>
-          <a:p>
             <a:pPr indent="0" marL="0">
               <a:buNone/>
             </a:pPr>
             <a:r>
-              <a:rPr lang="en-US" sz="1100" b="1" dirty="0">
+              <a:rPr lang="en-US" sz="1100" dirty="0">
                 <a:solidFill>
                   <a:schemeClr val="accent3"/>
                 </a:solidFill>
               </a:rPr>
-              <a:t>Three pairs (λ individualist, λ collectivist) in the figures</a:t>
+              <a:t>the same, narrow λ gap: it matters most when collectivists dominate</a:t>
             </a:r>
             <a:endParaRPr lang="en-US" sz="1100" dirty="0"/>
           </a:p>
@@ -4441,26 +4015,26 @@
       </p:sp>
       <p:sp>
         <p:nvSpPr>
-          <p:cNvPr id="10" name="chip"/>
+          <p:cNvPr id="11" name="card-Monotone"/>
           <p:cNvSpPr/>
           <p:nvPr/>
         </p:nvSpPr>
         <p:spPr>
           <a:xfrm>
-            <a:off x="457200" y="3931920"/>
-            <a:ext cx="914400" cy="329184"/>
+            <a:off x="6217920" y="3337560"/>
+            <a:ext cx="2468880" cy="1097280"/>
           </a:xfrm>
           <a:prstGeom prst="roundRect">
             <a:avLst>
-              <a:gd name="adj" fmla="val 16667"/>
+              <a:gd name="adj" fmla="val 6667"/>
             </a:avLst>
           </a:prstGeom>
           <a:solidFill>
-            <a:schemeClr val="tx2"/>
+            <a:schemeClr val="bg2"/>
           </a:solidFill>
           <a:ln w="12700">
             <a:solidFill>
-              <a:schemeClr val="tx2"/>
+              <a:schemeClr val="bg2"/>
             </a:solidFill>
             <a:prstDash val="solid"/>
           </a:ln>
@@ -4468,14 +4042,14 @@
       </p:sp>
       <p:sp>
         <p:nvSpPr>
-          <p:cNvPr id="11" name="chip-label"/>
+          <p:cNvPr id="12" name="card-head"/>
           <p:cNvSpPr txBox="1"/>
           <p:nvPr/>
         </p:nvSpPr>
         <p:spPr>
           <a:xfrm>
-            <a:off x="457200" y="3931920"/>
-            <a:ext cx="914400" cy="329184"/>
+            <a:off x="6355080" y="3429000"/>
+            <a:ext cx="2194560" cy="292608"/>
           </a:xfrm>
           <a:prstGeom prst="rect">
             <a:avLst/>
@@ -4487,341 +4061,54 @@
           <a:bodyPr wrap="square" lIns="0" tIns="0" rIns="0" bIns="0" rtlCol="0" anchor="ctr"/>
           <a:lstStyle/>
           <a:p>
-            <a:pPr algn="ctr" indent="0" marL="0">
-              <a:buNone/>
-            </a:pPr>
-            <a:r>
-              <a:rPr lang="en-US" sz="1100" b="1" dirty="0">
-                <a:solidFill>
-                  <a:schemeClr val="bg1"/>
-                </a:solidFill>
-                <a:latin typeface="Cambria" pitchFamily="34" charset="0"/>
-                <a:ea typeface="Cambria" pitchFamily="34" charset="-122"/>
-                <a:cs typeface="Cambria" pitchFamily="34" charset="-120"/>
-              </a:rPr>
-              <a:t>(0.1, 0.9)</a:t>
-            </a:r>
-            <a:endParaRPr lang="en-US" sz="1100" dirty="0"/>
-          </a:p>
-        </p:txBody>
-      </p:sp>
-      <p:sp>
-        <p:nvSpPr>
-          <p:cNvPr id="12" name="pair-label"/>
+            <a:pPr indent="0" marL="0">
+              <a:buNone/>
+            </a:pPr>
+            <a:r>
+              <a:rPr lang="en-US" sz="1300" b="1" dirty="0">
+                <a:solidFill>
+                  <a:schemeClr val="tx2"/>
+                </a:solidFill>
+              </a:rPr>
+              <a:t>Monotone</a:t>
+            </a:r>
+            <a:endParaRPr lang="en-US" sz="1300" dirty="0"/>
+          </a:p>
+        </p:txBody>
+      </p:sp>
+      <p:sp>
+        <p:nvSpPr>
+          <p:cNvPr id="13" name="card-body"/>
           <p:cNvSpPr txBox="1"/>
           <p:nvPr/>
         </p:nvSpPr>
         <p:spPr>
           <a:xfrm>
-            <a:off x="1417320" y="3931920"/>
-            <a:ext cx="640080" cy="329184"/>
-          </a:xfrm>
-          <a:prstGeom prst="rect">
-            <a:avLst/>
-          </a:prstGeom>
-          <a:noFill/>
-          <a:ln/>
-        </p:spPr>
-        <p:txBody>
-          <a:bodyPr wrap="square" lIns="0" tIns="0" rIns="0" bIns="0" rtlCol="0" anchor="ctr"/>
+            <a:off x="6355080" y="3749040"/>
+            <a:ext cx="2194560" cy="594360"/>
+          </a:xfrm>
+          <a:prstGeom prst="rect">
+            <a:avLst/>
+          </a:prstGeom>
+          <a:noFill/>
+          <a:ln/>
+        </p:spPr>
+        <p:txBody>
+          <a:bodyPr wrap="square" lIns="0" tIns="0" rIns="0" bIns="0" rtlCol="0" anchor="t"/>
           <a:lstStyle/>
           <a:p>
             <a:pPr indent="0" marL="0">
               <a:buNone/>
             </a:pPr>
             <a:r>
-              <a:rPr lang="en-US" sz="1100" dirty="0">
-                <a:solidFill>
-                  <a:schemeClr val="accent3"/>
-                </a:solidFill>
-              </a:rPr>
-              <a:t>wide gap</a:t>
-            </a:r>
-            <a:endParaRPr lang="en-US" sz="1100" dirty="0"/>
-          </a:p>
-        </p:txBody>
-      </p:sp>
-      <p:sp>
-        <p:nvSpPr>
-          <p:cNvPr id="13" name="chip"/>
-          <p:cNvSpPr/>
-          <p:nvPr/>
-        </p:nvSpPr>
-        <p:spPr>
-          <a:xfrm>
-            <a:off x="2057400" y="3931920"/>
-            <a:ext cx="914400" cy="329184"/>
-          </a:xfrm>
-          <a:prstGeom prst="roundRect">
-            <a:avLst>
-              <a:gd name="adj" fmla="val 16667"/>
-            </a:avLst>
-          </a:prstGeom>
-          <a:solidFill>
-            <a:schemeClr val="accent3"/>
-          </a:solidFill>
-          <a:ln w="12700">
-            <a:solidFill>
-              <a:schemeClr val="accent3"/>
-            </a:solidFill>
-            <a:prstDash val="solid"/>
-          </a:ln>
-        </p:spPr>
-      </p:sp>
-      <p:sp>
-        <p:nvSpPr>
-          <p:cNvPr id="14" name="chip-label"/>
-          <p:cNvSpPr txBox="1"/>
-          <p:nvPr/>
-        </p:nvSpPr>
-        <p:spPr>
-          <a:xfrm>
-            <a:off x="2057400" y="3931920"/>
-            <a:ext cx="914400" cy="329184"/>
-          </a:xfrm>
-          <a:prstGeom prst="rect">
-            <a:avLst/>
-          </a:prstGeom>
-          <a:noFill/>
-          <a:ln/>
-        </p:spPr>
-        <p:txBody>
-          <a:bodyPr wrap="square" lIns="0" tIns="0" rIns="0" bIns="0" rtlCol="0" anchor="ctr"/>
-          <a:lstStyle/>
-          <a:p>
-            <a:pPr algn="ctr" indent="0" marL="0">
-              <a:buNone/>
-            </a:pPr>
-            <a:r>
-              <a:rPr lang="en-US" sz="1100" b="1" dirty="0">
-                <a:solidFill>
-                  <a:schemeClr val="bg1"/>
-                </a:solidFill>
-                <a:latin typeface="Cambria" pitchFamily="34" charset="0"/>
-                <a:ea typeface="Cambria" pitchFamily="34" charset="-122"/>
-                <a:cs typeface="Cambria" pitchFamily="34" charset="-120"/>
-              </a:rPr>
-              <a:t>(0.2, 0.8)</a:t>
-            </a:r>
-            <a:endParaRPr lang="en-US" sz="1100" dirty="0"/>
-          </a:p>
-        </p:txBody>
-      </p:sp>
-      <p:sp>
-        <p:nvSpPr>
-          <p:cNvPr id="15" name="pair-label"/>
-          <p:cNvSpPr txBox="1"/>
-          <p:nvPr/>
-        </p:nvSpPr>
-        <p:spPr>
-          <a:xfrm>
-            <a:off x="3017520" y="3931920"/>
-            <a:ext cx="640080" cy="329184"/>
-          </a:xfrm>
-          <a:prstGeom prst="rect">
-            <a:avLst/>
-          </a:prstGeom>
-          <a:noFill/>
-          <a:ln/>
-        </p:spPr>
-        <p:txBody>
-          <a:bodyPr wrap="square" lIns="0" tIns="0" rIns="0" bIns="0" rtlCol="0" anchor="ctr"/>
-          <a:lstStyle/>
-          <a:p>
-            <a:pPr indent="0" marL="0">
-              <a:buNone/>
-            </a:pPr>
-            <a:r>
-              <a:rPr lang="en-US" sz="1100" dirty="0">
-                <a:solidFill>
-                  <a:schemeClr val="accent3"/>
-                </a:solidFill>
-              </a:rPr>
-              <a:t>medium</a:t>
-            </a:r>
-            <a:endParaRPr lang="en-US" sz="1100" dirty="0"/>
-          </a:p>
-        </p:txBody>
-      </p:sp>
-      <p:sp>
-        <p:nvSpPr>
-          <p:cNvPr id="16" name="chip"/>
-          <p:cNvSpPr/>
-          <p:nvPr/>
-        </p:nvSpPr>
-        <p:spPr>
-          <a:xfrm>
-            <a:off x="3657600" y="3931920"/>
-            <a:ext cx="914400" cy="329184"/>
-          </a:xfrm>
-          <a:prstGeom prst="roundRect">
-            <a:avLst>
-              <a:gd name="adj" fmla="val 16667"/>
-            </a:avLst>
-          </a:prstGeom>
-          <a:solidFill>
-            <a:schemeClr val="accent4"/>
-          </a:solidFill>
-          <a:ln w="12700">
-            <a:solidFill>
-              <a:schemeClr val="accent4"/>
-            </a:solidFill>
-            <a:prstDash val="solid"/>
-          </a:ln>
-        </p:spPr>
-      </p:sp>
-      <p:sp>
-        <p:nvSpPr>
-          <p:cNvPr id="17" name="chip-label"/>
-          <p:cNvSpPr txBox="1"/>
-          <p:nvPr/>
-        </p:nvSpPr>
-        <p:spPr>
-          <a:xfrm>
-            <a:off x="3657600" y="3931920"/>
-            <a:ext cx="914400" cy="329184"/>
-          </a:xfrm>
-          <a:prstGeom prst="rect">
-            <a:avLst/>
-          </a:prstGeom>
-          <a:noFill/>
-          <a:ln/>
-        </p:spPr>
-        <p:txBody>
-          <a:bodyPr wrap="square" lIns="0" tIns="0" rIns="0" bIns="0" rtlCol="0" anchor="ctr"/>
-          <a:lstStyle/>
-          <a:p>
-            <a:pPr algn="ctr" indent="0" marL="0">
-              <a:buNone/>
-            </a:pPr>
-            <a:r>
-              <a:rPr lang="en-US" sz="1100" b="1" dirty="0">
+              <a:rPr lang="en-US" sz="1150" dirty="0">
                 <a:solidFill>
                   <a:schemeClr val="tx1"/>
                 </a:solidFill>
-                <a:latin typeface="Cambria" pitchFamily="34" charset="0"/>
-                <a:ea typeface="Cambria" pitchFamily="34" charset="-122"/>
-                <a:cs typeface="Cambria" pitchFamily="34" charset="-120"/>
-              </a:rPr>
-              <a:t>(0.3, 0.5)</a:t>
-            </a:r>
-            <a:endParaRPr lang="en-US" sz="1100" dirty="0"/>
-          </a:p>
-        </p:txBody>
-      </p:sp>
-      <p:sp>
-        <p:nvSpPr>
-          <p:cNvPr id="18" name="pair-label"/>
-          <p:cNvSpPr txBox="1"/>
-          <p:nvPr/>
-        </p:nvSpPr>
-        <p:spPr>
-          <a:xfrm>
-            <a:off x="4617720" y="3931920"/>
-            <a:ext cx="640080" cy="329184"/>
-          </a:xfrm>
-          <a:prstGeom prst="rect">
-            <a:avLst/>
-          </a:prstGeom>
-          <a:noFill/>
-          <a:ln/>
-        </p:spPr>
-        <p:txBody>
-          <a:bodyPr wrap="square" lIns="0" tIns="0" rIns="0" bIns="0" rtlCol="0" anchor="ctr"/>
-          <a:lstStyle/>
-          <a:p>
-            <a:pPr indent="0" marL="0">
-              <a:buNone/>
-            </a:pPr>
-            <a:r>
-              <a:rPr lang="en-US" sz="1100" dirty="0">
-                <a:solidFill>
-                  <a:schemeClr val="accent3"/>
-                </a:solidFill>
-              </a:rPr>
-              <a:t>narrow</a:t>
-            </a:r>
-            <a:endParaRPr lang="en-US" sz="1100" dirty="0"/>
-          </a:p>
-        </p:txBody>
-      </p:sp>
-      <p:sp>
-        <p:nvSpPr>
-          <p:cNvPr id="19" name="mu-note"/>
-          <p:cNvSpPr txBox="1"/>
-          <p:nvPr/>
-        </p:nvSpPr>
-        <p:spPr>
-          <a:xfrm>
-            <a:off x="5303520" y="3611880"/>
-            <a:ext cx="3383280" cy="822960"/>
-          </a:xfrm>
-          <a:prstGeom prst="rect">
-            <a:avLst/>
-          </a:prstGeom>
-          <a:noFill/>
-          <a:ln/>
-        </p:spPr>
-        <p:txBody>
-          <a:bodyPr wrap="square" lIns="0" tIns="0" rIns="0" bIns="0" rtlCol="0" anchor="t"/>
-          <a:lstStyle/>
-          <a:p>
-            <a:pPr indent="0" marL="0">
-              <a:buNone/>
-            </a:pPr>
-            <a:r>
-              <a:rPr lang="en-US" sz="1100" dirty="0">
-                <a:solidFill>
-                  <a:schemeClr val="accent3"/>
-                </a:solidFill>
-              </a:rPr>
-              <a:t>The share of individualists μ is set by a cultural warm-up on the network. </a:t>
-            </a:r>
-            <a:pPr indent="0" marL="0">
-              <a:buNone/>
-            </a:pPr>
-            <a:r>
-              <a:rPr lang="en-US" sz="1100" b="1" dirty="0">
-                <a:solidFill>
-                  <a:srgbClr val="EB6834"/>
-                </a:solidFill>
-              </a:rPr>
-              <a:t>Orange = individualists</a:t>
-            </a:r>
-            <a:pPr indent="0" marL="0">
-              <a:buNone/>
-            </a:pPr>
-            <a:r>
-              <a:rPr lang="en-US" sz="1100" dirty="0">
-                <a:solidFill>
-                  <a:schemeClr val="accent3"/>
-                </a:solidFill>
-              </a:rPr>
-              <a:t>, </a:t>
-            </a:r>
-            <a:pPr indent="0" marL="0">
-              <a:buNone/>
-            </a:pPr>
-            <a:r>
-              <a:rPr lang="en-US" sz="1100" b="1" dirty="0">
-                <a:solidFill>
-                  <a:srgbClr val="2A78D6"/>
-                </a:solidFill>
-              </a:rPr>
-              <a:t>blue = collectivists</a:t>
-            </a:r>
-            <a:pPr indent="0" marL="0">
-              <a:buNone/>
-            </a:pPr>
-            <a:r>
-              <a:rPr lang="en-US" sz="1100" dirty="0">
-                <a:solidFill>
-                  <a:schemeClr val="accent3"/>
-                </a:solidFill>
-              </a:rPr>
-              <a:t> throughout.</a:t>
-            </a:r>
-            <a:endParaRPr lang="en-US" sz="1100" dirty="0"/>
+              </a:rPr>
+              <a:t>No interior peak at any mix. The lines converge once individualists are 75% or more.</a:t>
+            </a:r>
+            <a:endParaRPr lang="en-US" sz="1150" dirty="0"/>
           </a:p>
         </p:txBody>
       </p:sp>
@@ -4927,7 +4214,7 @@
                   <a:schemeClr val="tx2"/>
                 </a:solidFill>
               </a:rPr>
-              <a:t>Collectivists herd</a:t>
+              <a:t>Outdated news cuts both ways</a:t>
             </a:r>
             <a:endParaRPr lang="en-US" sz="2400" dirty="0"/>
           </a:p>
@@ -4935,7 +4222,7 @@
       </p:sp>
       <p:pic>
         <p:nvPicPr>
-          <p:cNvPr id="3" name="e07" descr="Chance of withdrawing by share of neighbours who have withdrawn: collectivists jump to near 1 once 20 to 35 percent of neighbours are out; individualists level off near 0.25 to 0.30.">    </p:cNvPr>
+          <p:cNvPr id="3" name="e08" descr="Chance the bank fails by kind of public news: outdated pessimistic news raises it to about 0.48, accurate news barely changes it from no news (0.29 vs 0.31), outdated optimistic news lowers it to 0.16.">    </p:cNvPr>
           <p:cNvPicPr>
             <a:picLocks noChangeAspect="1"/>
           </p:cNvPicPr>
@@ -4950,7 +4237,7 @@
         <p:spPr>
           <a:xfrm>
             <a:off x="457200" y="1051560"/>
-            <a:ext cx="5164897" cy="3291840"/>
+            <a:ext cx="5486400" cy="2607605"/>
           </a:xfrm>
           <a:prstGeom prst="rect">
             <a:avLst/>
@@ -4965,7 +4252,7 @@
         </p:nvSpPr>
         <p:spPr>
           <a:xfrm>
-            <a:off x="457200" y="4389120"/>
+            <a:off x="457200" y="3704885"/>
             <a:ext cx="5486400" cy="274320"/>
           </a:xfrm>
           <a:prstGeom prst="rect">
@@ -4987,7 +4274,7 @@
                   <a:schemeClr val="accent3"/>
                 </a:solidFill>
               </a:rPr>
-              <a:t>Chance of withdrawing, given the share of a depositor’s neighbours who have already withdrawn. λ pairs pooled; reference bank.</a:t>
+              <a:t>Chance the bank fails, by the kind of public news, dot and CI per λ pair. All mixes μ. Numbers at right: wide λ gap.</a:t>
             </a:r>
             <a:endParaRPr lang="en-US" sz="1000" dirty="0"/>
           </a:p>
@@ -4995,18 +4282,18 @@
       </p:sp>
       <p:sp>
         <p:nvSpPr>
-          <p:cNvPr id="5" name="stat-collectivists, once "/>
+          <p:cNvPr id="5" name="stat-outdated, pessimisti"/>
           <p:cNvSpPr/>
           <p:nvPr/>
         </p:nvSpPr>
         <p:spPr>
           <a:xfrm>
             <a:off x="6217920" y="1051560"/>
-            <a:ext cx="2468880" cy="1005840"/>
+            <a:ext cx="2468880" cy="777240"/>
           </a:xfrm>
           <a:prstGeom prst="roundRect">
             <a:avLst>
-              <a:gd name="adj" fmla="val 7273"/>
+              <a:gd name="adj" fmla="val 9412"/>
             </a:avLst>
           </a:prstGeom>
           <a:solidFill>
@@ -5029,7 +4316,7 @@
         <p:spPr>
           <a:xfrm>
             <a:off x="6355080" y="1124712"/>
-            <a:ext cx="2194560" cy="457200"/>
+            <a:ext cx="2194560" cy="365760"/>
           </a:xfrm>
           <a:prstGeom prst="rect">
             <a:avLst/>
@@ -5047,13 +4334,13 @@
             <a:r>
               <a:rPr lang="en-US" sz="2200" b="1" dirty="0">
                 <a:solidFill>
-                  <a:srgbClr val="2A78D6"/>
+                  <a:schemeClr val="accent2"/>
                 </a:solidFill>
                 <a:latin typeface="Cambria" pitchFamily="34" charset="0"/>
                 <a:ea typeface="Cambria" pitchFamily="34" charset="-122"/>
                 <a:cs typeface="Cambria" pitchFamily="34" charset="-120"/>
               </a:rPr>
-              <a:t>0.15 to 0.93</a:t>
+              <a:t>0.48</a:t>
             </a:r>
             <a:endParaRPr lang="en-US" sz="2200" dirty="0"/>
           </a:p>
@@ -5067,8 +4354,8 @@
         </p:nvSpPr>
         <p:spPr>
           <a:xfrm>
-            <a:off x="6355080" y="1600200"/>
-            <a:ext cx="2194560" cy="402336"/>
+            <a:off x="6355080" y="1508760"/>
+            <a:ext cx="2194560" cy="265176"/>
           </a:xfrm>
           <a:prstGeom prst="rect">
             <a:avLst/>
@@ -5089,7 +4376,7 @@
                   <a:schemeClr val="accent3"/>
                 </a:solidFill>
               </a:rPr>
-              <a:t>collectivists, once 20–35% of their neighbours are out</a:t>
+              <a:t>outdated, pessimistic news</a:t>
             </a:r>
             <a:endParaRPr lang="en-US" sz="1100" dirty="0"/>
           </a:p>
@@ -5097,18 +4384,18 @@
       </p:sp>
       <p:sp>
         <p:nvSpPr>
-          <p:cNvPr id="8" name="stat-where individualists"/>
+          <p:cNvPr id="8" name="stat-no public news"/>
           <p:cNvSpPr/>
           <p:nvPr/>
         </p:nvSpPr>
         <p:spPr>
           <a:xfrm>
-            <a:off x="6217920" y="2194560"/>
-            <a:ext cx="2468880" cy="1005840"/>
+            <a:off x="6217920" y="1938528"/>
+            <a:ext cx="2468880" cy="777240"/>
           </a:xfrm>
           <a:prstGeom prst="roundRect">
             <a:avLst>
-              <a:gd name="adj" fmla="val 7273"/>
+              <a:gd name="adj" fmla="val 9412"/>
             </a:avLst>
           </a:prstGeom>
           <a:solidFill>
@@ -5130,8 +4417,8 @@
         </p:nvSpPr>
         <p:spPr>
           <a:xfrm>
-            <a:off x="6355080" y="2267712"/>
-            <a:ext cx="2194560" cy="457200"/>
+            <a:off x="6355080" y="2011680"/>
+            <a:ext cx="2194560" cy="365760"/>
           </a:xfrm>
           <a:prstGeom prst="rect">
             <a:avLst/>
@@ -5149,13 +4436,13 @@
             <a:r>
               <a:rPr lang="en-US" sz="2200" b="1" dirty="0">
                 <a:solidFill>
-                  <a:srgbClr val="EB6834"/>
+                  <a:schemeClr val="accent1"/>
                 </a:solidFill>
                 <a:latin typeface="Cambria" pitchFamily="34" charset="0"/>
                 <a:ea typeface="Cambria" pitchFamily="34" charset="-122"/>
                 <a:cs typeface="Cambria" pitchFamily="34" charset="-120"/>
               </a:rPr>
-              <a:t>0.25 to 0.30</a:t>
+              <a:t>0.31</a:t>
             </a:r>
             <a:endParaRPr lang="en-US" sz="2200" dirty="0"/>
           </a:p>
@@ -5169,8 +4456,8 @@
         </p:nvSpPr>
         <p:spPr>
           <a:xfrm>
-            <a:off x="6355080" y="2743200"/>
-            <a:ext cx="2194560" cy="402336"/>
+            <a:off x="6355080" y="2395728"/>
+            <a:ext cx="2194560" cy="265176"/>
           </a:xfrm>
           <a:prstGeom prst="rect">
             <a:avLst/>
@@ -5191,7 +4478,7 @@
                   <a:schemeClr val="accent3"/>
                 </a:solidFill>
               </a:rPr>
-              <a:t>where individualists level off, whatever their neighbours do</a:t>
+              <a:t>no public news</a:t>
             </a:r>
             <a:endParaRPr lang="en-US" sz="1100" dirty="0"/>
           </a:p>
@@ -5199,18 +4486,18 @@
       </p:sp>
       <p:sp>
         <p:nvSpPr>
-          <p:cNvPr id="11" name="stat-difference in slopes"/>
+          <p:cNvPr id="11" name="stat-accurate news"/>
           <p:cNvSpPr/>
           <p:nvPr/>
         </p:nvSpPr>
         <p:spPr>
           <a:xfrm>
-            <a:off x="6217920" y="3337560"/>
-            <a:ext cx="2468880" cy="1097280"/>
+            <a:off x="6217920" y="2825496"/>
+            <a:ext cx="2468880" cy="777240"/>
           </a:xfrm>
           <a:prstGeom prst="roundRect">
             <a:avLst>
-              <a:gd name="adj" fmla="val 6667"/>
+              <a:gd name="adj" fmla="val 9412"/>
             </a:avLst>
           </a:prstGeom>
           <a:solidFill>
@@ -5232,8 +4519,8 @@
         </p:nvSpPr>
         <p:spPr>
           <a:xfrm>
-            <a:off x="6355080" y="3410712"/>
-            <a:ext cx="2194560" cy="457200"/>
+            <a:off x="6355080" y="2898648"/>
+            <a:ext cx="2194560" cy="365760"/>
           </a:xfrm>
           <a:prstGeom prst="rect">
             <a:avLst/>
@@ -5249,7 +4536,7 @@
               <a:buNone/>
             </a:pPr>
             <a:r>
-              <a:rPr lang="en-US" sz="2600" b="1" dirty="0">
+              <a:rPr lang="en-US" sz="2200" b="1" dirty="0">
                 <a:solidFill>
                   <a:schemeClr val="accent1"/>
                 </a:solidFill>
@@ -5257,9 +4544,9 @@
                 <a:ea typeface="Cambria" pitchFamily="34" charset="-122"/>
                 <a:cs typeface="Cambria" pitchFamily="34" charset="-120"/>
               </a:rPr>
-              <a:t>+0.58</a:t>
-            </a:r>
-            <a:endParaRPr lang="en-US" sz="2600" dirty="0"/>
+              <a:t>0.29</a:t>
+            </a:r>
+            <a:endParaRPr lang="en-US" sz="2200" dirty="0"/>
           </a:p>
         </p:txBody>
       </p:sp>
@@ -5271,8 +4558,8 @@
         </p:nvSpPr>
         <p:spPr>
           <a:xfrm>
-            <a:off x="6355080" y="3886200"/>
-            <a:ext cx="2194560" cy="493776"/>
+            <a:off x="6355080" y="3282696"/>
+            <a:ext cx="2194560" cy="265176"/>
           </a:xfrm>
           <a:prstGeom prst="rect">
             <a:avLst/>
@@ -5293,7 +4580,109 @@
                   <a:schemeClr val="accent3"/>
                 </a:solidFill>
               </a:rPr>
-              <a:t>difference in slopes (collectivists 0.80, individualists 0.22), t = 16.7</a:t>
+              <a:t>accurate news</a:t>
+            </a:r>
+            <a:endParaRPr lang="en-US" sz="1100" dirty="0"/>
+          </a:p>
+        </p:txBody>
+      </p:sp>
+      <p:sp>
+        <p:nvSpPr>
+          <p:cNvPr id="14" name="stat-outdated, optimistic"/>
+          <p:cNvSpPr/>
+          <p:nvPr/>
+        </p:nvSpPr>
+        <p:spPr>
+          <a:xfrm>
+            <a:off x="6217920" y="3712464"/>
+            <a:ext cx="2468880" cy="777240"/>
+          </a:xfrm>
+          <a:prstGeom prst="roundRect">
+            <a:avLst>
+              <a:gd name="adj" fmla="val 9412"/>
+            </a:avLst>
+          </a:prstGeom>
+          <a:solidFill>
+            <a:schemeClr val="bg2"/>
+          </a:solidFill>
+          <a:ln w="12700">
+            <a:solidFill>
+              <a:schemeClr val="bg2"/>
+            </a:solidFill>
+            <a:prstDash val="solid"/>
+          </a:ln>
+        </p:spPr>
+      </p:sp>
+      <p:sp>
+        <p:nvSpPr>
+          <p:cNvPr id="15" name="stat-big"/>
+          <p:cNvSpPr txBox="1"/>
+          <p:nvPr/>
+        </p:nvSpPr>
+        <p:spPr>
+          <a:xfrm>
+            <a:off x="6355080" y="3785616"/>
+            <a:ext cx="2194560" cy="365760"/>
+          </a:xfrm>
+          <a:prstGeom prst="rect">
+            <a:avLst/>
+          </a:prstGeom>
+          <a:noFill/>
+          <a:ln/>
+        </p:spPr>
+        <p:txBody>
+          <a:bodyPr wrap="square" lIns="0" tIns="0" rIns="0" bIns="0" rtlCol="0" anchor="ctr"/>
+          <a:lstStyle/>
+          <a:p>
+            <a:pPr indent="0" marL="0">
+              <a:buNone/>
+            </a:pPr>
+            <a:r>
+              <a:rPr lang="en-US" sz="2200" b="1" dirty="0">
+                <a:solidFill>
+                  <a:schemeClr val="accent5"/>
+                </a:solidFill>
+                <a:latin typeface="Cambria" pitchFamily="34" charset="0"/>
+                <a:ea typeface="Cambria" pitchFamily="34" charset="-122"/>
+                <a:cs typeface="Cambria" pitchFamily="34" charset="-120"/>
+              </a:rPr>
+              <a:t>0.16</a:t>
+            </a:r>
+            <a:endParaRPr lang="en-US" sz="2200" dirty="0"/>
+          </a:p>
+        </p:txBody>
+      </p:sp>
+      <p:sp>
+        <p:nvSpPr>
+          <p:cNvPr id="16" name="stat-label"/>
+          <p:cNvSpPr txBox="1"/>
+          <p:nvPr/>
+        </p:nvSpPr>
+        <p:spPr>
+          <a:xfrm>
+            <a:off x="6355080" y="4169664"/>
+            <a:ext cx="2194560" cy="265176"/>
+          </a:xfrm>
+          <a:prstGeom prst="rect">
+            <a:avLst/>
+          </a:prstGeom>
+          <a:noFill/>
+          <a:ln/>
+        </p:spPr>
+        <p:txBody>
+          <a:bodyPr wrap="square" lIns="0" tIns="0" rIns="0" bIns="0" rtlCol="0" anchor="t"/>
+          <a:lstStyle/>
+          <a:p>
+            <a:pPr indent="0" marL="0">
+              <a:buNone/>
+            </a:pPr>
+            <a:r>
+              <a:rPr lang="en-US" sz="1100" dirty="0">
+                <a:solidFill>
+                  <a:schemeClr val="accent3"/>
+                </a:solidFill>
+              </a:rPr>
+              <a:t>outdated, optimistic news</a:t>
             </a:r>
             <a:endParaRPr lang="en-US" sz="1100" dirty="0"/>
           </a:p>
@@ -5401,7 +4790,7 @@
                   <a:schemeClr val="tx2"/>
                 </a:solidFill>
               </a:rPr>
-              <a:t>More individualists, fewer failures</a:t>
+              <a:t>Capping the largest deposits</a:t>
             </a:r>
             <a:endParaRPr lang="en-US" sz="2400" dirty="0"/>
           </a:p>
@@ -5409,7 +4798,7 @@
       </p:sp>
       <p:pic>
         <p:nvPicPr>
-          <p:cNvPr id="3" name="e05" descr="Chance the bank fails by share of individualists: falls from about 0.67 with no individualists to about 0.08 with all individualists for the large difference pair; monotone for every pair.">    </p:cNvPr>
+          <p:cNvPr id="3" name="e10" descr="Chance the bank fails by share of individualists for three deposit-size distributions: uncapped large deposits fail most often; capped at 1 percent matches the bank with similar-sized deposits at every share.">    </p:cNvPr>
           <p:cNvPicPr>
             <a:picLocks noChangeAspect="1"/>
           </p:cNvPicPr>
@@ -5461,7 +4850,7 @@
                   <a:schemeClr val="accent3"/>
                 </a:solidFill>
               </a:rPr>
-              <a:t>Chance the bank fails, by share of individualists μ, one line per λ pair. Includes the pure populations (μ 0 and 1).</a:t>
+              <a:t>Chance the bank fails by share of individualists, for three deposit-size distributions. λ pairs pooled.</a:t>
             </a:r>
             <a:endParaRPr lang="en-US" sz="1000" dirty="0"/>
           </a:p>
@@ -5469,7 +4858,7 @@
       </p:sp>
       <p:sp>
         <p:nvSpPr>
-          <p:cNvPr id="5" name="stat-P(fail) from no indi"/>
+          <p:cNvPr id="5" name="stat-uncapped: a few very"/>
           <p:cNvSpPr/>
           <p:nvPr/>
         </p:nvSpPr>
@@ -5521,13 +4910,13 @@
             <a:r>
               <a:rPr lang="en-US" sz="2200" b="1" dirty="0">
                 <a:solidFill>
-                  <a:schemeClr val="accent1"/>
+                  <a:schemeClr val="accent2"/>
                 </a:solidFill>
                 <a:latin typeface="Cambria" pitchFamily="34" charset="0"/>
                 <a:ea typeface="Cambria" pitchFamily="34" charset="-122"/>
                 <a:cs typeface="Cambria" pitchFamily="34" charset="-120"/>
               </a:rPr>
-              <a:t>0.67 to 0.08</a:t>
+              <a:t>0.61 to 0.11</a:t>
             </a:r>
             <a:endParaRPr lang="en-US" sz="2200" dirty="0"/>
           </a:p>
@@ -5563,7 +4952,7 @@
                   <a:schemeClr val="accent3"/>
                 </a:solidFill>
               </a:rPr>
-              <a:t>P(fail) from no individualists to all, wide λ gap</a:t>
+              <a:t>uncapped: a few very large deposits (σ 2.5)</a:t>
             </a:r>
             <a:endParaRPr lang="en-US" sz="1100" dirty="0"/>
           </a:p>
@@ -5571,7 +4960,7 @@
       </p:sp>
       <p:sp>
         <p:nvSpPr>
-          <p:cNvPr id="8" name="stat-the same, narrow λ g"/>
+          <p:cNvPr id="8" name="stat-capped: no deposit a"/>
           <p:cNvSpPr/>
           <p:nvPr/>
         </p:nvSpPr>
@@ -5629,7 +5018,7 @@
                 <a:ea typeface="Cambria" pitchFamily="34" charset="-122"/>
                 <a:cs typeface="Cambria" pitchFamily="34" charset="-120"/>
               </a:rPr>
-              <a:t>0.25 to 0.09</a:t>
+              <a:t>0.51 to 0.08</a:t>
             </a:r>
             <a:endParaRPr lang="en-US" sz="2200" dirty="0"/>
           </a:p>
@@ -5665,7 +5054,7 @@
                   <a:schemeClr val="accent3"/>
                 </a:solidFill>
               </a:rPr>
-              <a:t>the same, narrow λ gap: it matters most when collectivists dominate</a:t>
+              <a:t>capped: no deposit above 1% of the total (the reference bank)</a:t>
             </a:r>
             <a:endParaRPr lang="en-US" sz="1100" dirty="0"/>
           </a:p>
@@ -5673,7 +5062,7 @@
       </p:sp>
       <p:sp>
         <p:nvSpPr>
-          <p:cNvPr id="11" name="card-Monotone"/>
+          <p:cNvPr id="11" name="stat-similar sizes (σ 1)."/>
           <p:cNvSpPr/>
           <p:nvPr/>
         </p:nvSpPr>
@@ -5700,14 +5089,14 @@
       </p:sp>
       <p:sp>
         <p:nvSpPr>
-          <p:cNvPr id="12" name="card-head"/>
+          <p:cNvPr id="12" name="stat-big"/>
           <p:cNvSpPr txBox="1"/>
           <p:nvPr/>
         </p:nvSpPr>
         <p:spPr>
           <a:xfrm>
-            <a:off x="6355080" y="3429000"/>
-            <a:ext cx="2194560" cy="292608"/>
+            <a:off x="6355080" y="3410712"/>
+            <a:ext cx="2194560" cy="457200"/>
           </a:xfrm>
           <a:prstGeom prst="rect">
             <a:avLst/>
@@ -5723,27 +5112,30 @@
               <a:buNone/>
             </a:pPr>
             <a:r>
-              <a:rPr lang="en-US" sz="1300" b="1" dirty="0">
-                <a:solidFill>
-                  <a:schemeClr val="tx2"/>
-                </a:solidFill>
-              </a:rPr>
-              <a:t>Monotone</a:t>
-            </a:r>
-            <a:endParaRPr lang="en-US" sz="1300" dirty="0"/>
-          </a:p>
-        </p:txBody>
-      </p:sp>
-      <p:sp>
-        <p:nvSpPr>
-          <p:cNvPr id="13" name="card-body"/>
+              <a:rPr lang="en-US" sz="2200" b="1" dirty="0">
+                <a:solidFill>
+                  <a:schemeClr val="accent3"/>
+                </a:solidFill>
+                <a:latin typeface="Cambria" pitchFamily="34" charset="0"/>
+                <a:ea typeface="Cambria" pitchFamily="34" charset="-122"/>
+                <a:cs typeface="Cambria" pitchFamily="34" charset="-120"/>
+              </a:rPr>
+              <a:t>0.50 to 0.08</a:t>
+            </a:r>
+            <a:endParaRPr lang="en-US" sz="2200" dirty="0"/>
+          </a:p>
+        </p:txBody>
+      </p:sp>
+      <p:sp>
+        <p:nvSpPr>
+          <p:cNvPr id="13" name="stat-label"/>
           <p:cNvSpPr txBox="1"/>
           <p:nvPr/>
         </p:nvSpPr>
         <p:spPr>
           <a:xfrm>
-            <a:off x="6355080" y="3749040"/>
-            <a:ext cx="2194560" cy="594360"/>
+            <a:off x="6355080" y="3886200"/>
+            <a:ext cx="2194560" cy="493776"/>
           </a:xfrm>
           <a:prstGeom prst="rect">
             <a:avLst/>
@@ -5759,14 +5151,14 @@
               <a:buNone/>
             </a:pPr>
             <a:r>
-              <a:rPr lang="en-US" sz="1150" dirty="0">
-                <a:solidFill>
-                  <a:schemeClr val="tx1"/>
-                </a:solidFill>
-              </a:rPr>
-              <a:t>No interior peak at any mix. The lines converge once individualists are 75% or more.</a:t>
-            </a:r>
-            <a:endParaRPr lang="en-US" sz="1150" dirty="0"/>
+              <a:rPr lang="en-US" sz="1100" dirty="0">
+                <a:solidFill>
+                  <a:schemeClr val="accent3"/>
+                </a:solidFill>
+              </a:rPr>
+              <a:t>similar sizes (σ 1). The μ gradient is the same in all three.</a:t>
+            </a:r>
+            <a:endParaRPr lang="en-US" sz="1100" dirty="0"/>
           </a:p>
         </p:txBody>
       </p:sp>
@@ -5872,7 +5264,7 @@
                   <a:schemeClr val="tx2"/>
                 </a:solidFill>
               </a:rPr>
-              <a:t>Outdated news cuts both ways</a:t>
+              <a:t>Does the model hold up?</a:t>
             </a:r>
             <a:endParaRPr lang="en-US" sz="2400" dirty="0"/>
           </a:p>
@@ -5880,7 +5272,7 @@
       </p:sp>
       <p:pic>
         <p:nvPicPr>
-          <p:cNvPr id="3" name="e08" descr="Chance the bank fails by kind of public news: outdated pessimistic news raises it to about 0.48, accurate news barely changes it from no news (0.29 vs 0.31), outdated optimistic news lowers it to 0.16.">    </p:cNvPr>
+          <p:cNvPr id="3" name="e01" descr="Individualists' run rate minus collectivists', relative to no news, against how far public news is from the truth: rises from negative when news is pessimistic to positive when optimistic, more steeply for the wide lambda gap.">    </p:cNvPr>
           <p:cNvPicPr>
             <a:picLocks noChangeAspect="1"/>
           </p:cNvPicPr>
@@ -5895,7 +5287,7 @@
         <p:spPr>
           <a:xfrm>
             <a:off x="457200" y="1051560"/>
-            <a:ext cx="5486400" cy="2607605"/>
+            <a:ext cx="5145146" cy="3291840"/>
           </a:xfrm>
           <a:prstGeom prst="rect">
             <a:avLst/>
@@ -5910,7 +5302,7 @@
         </p:nvSpPr>
         <p:spPr>
           <a:xfrm>
-            <a:off x="457200" y="3704885"/>
+            <a:off x="457200" y="4389120"/>
             <a:ext cx="5486400" cy="274320"/>
           </a:xfrm>
           <a:prstGeom prst="rect">
@@ -5932,7 +5324,7 @@
                   <a:schemeClr val="accent3"/>
                 </a:solidFill>
               </a:rPr>
-              <a:t>Chance the bank fails, by the kind of public news, dot and CI per λ pair. All mixes μ. Numbers at right: wide λ gap.</a:t>
+              <a:t>D relative to no news, against how far the public news sits from the truth. Shaded: where Chapter 1 predicts the sign.</a:t>
             </a:r>
             <a:endParaRPr lang="en-US" sz="1000" dirty="0"/>
           </a:p>
@@ -5940,18 +5332,18 @@
       </p:sp>
       <p:sp>
         <p:nvSpPr>
-          <p:cNvPr id="5" name="stat-outdated, pessimisti"/>
+          <p:cNvPr id="5" name="tests"/>
           <p:cNvSpPr/>
           <p:nvPr/>
         </p:nvSpPr>
         <p:spPr>
           <a:xfrm>
             <a:off x="6217920" y="1051560"/>
-            <a:ext cx="2468880" cy="777240"/>
+            <a:ext cx="2468880" cy="2103120"/>
           </a:xfrm>
           <a:prstGeom prst="roundRect">
             <a:avLst>
-              <a:gd name="adj" fmla="val 9412"/>
+              <a:gd name="adj" fmla="val 3478"/>
             </a:avLst>
           </a:prstGeom>
           <a:solidFill>
@@ -5967,93 +5359,122 @@
       </p:sp>
       <p:sp>
         <p:nvSpPr>
-          <p:cNvPr id="6" name="stat-big"/>
+          <p:cNvPr id="6" name="tests-text"/>
           <p:cNvSpPr txBox="1"/>
           <p:nvPr/>
         </p:nvSpPr>
         <p:spPr>
           <a:xfrm>
-            <a:off x="6355080" y="1124712"/>
-            <a:ext cx="2194560" cy="365760"/>
-          </a:xfrm>
-          <a:prstGeom prst="rect">
-            <a:avLst/>
-          </a:prstGeom>
-          <a:noFill/>
-          <a:ln/>
-        </p:spPr>
-        <p:txBody>
-          <a:bodyPr wrap="square" lIns="0" tIns="0" rIns="0" bIns="0" rtlCol="0" anchor="ctr"/>
+            <a:off x="6355080" y="1143000"/>
+            <a:ext cx="2194560" cy="1920240"/>
+          </a:xfrm>
+          <a:prstGeom prst="rect">
+            <a:avLst/>
+          </a:prstGeom>
+          <a:noFill/>
+          <a:ln/>
+        </p:spPr>
+        <p:txBody>
+          <a:bodyPr wrap="square" lIns="0" tIns="0" rIns="0" bIns="0" rtlCol="0" anchor="t"/>
           <a:lstStyle/>
           <a:p>
             <a:pPr indent="0" marL="0">
-              <a:buNone/>
-            </a:pPr>
-            <a:r>
-              <a:rPr lang="en-US" sz="2200" b="1" dirty="0">
+              <a:spcAft>
+                <a:spcPts val="600"/>
+              </a:spcAft>
+              <a:buNone/>
+            </a:pPr>
+            <a:r>
+              <a:rPr lang="en-US" sz="1300" b="1" dirty="0">
+                <a:solidFill>
+                  <a:schemeClr val="tx2"/>
+                </a:solidFill>
+              </a:rPr>
+              <a:t>Pre-registered tests</a:t>
+            </a:r>
+            <a:endParaRPr lang="en-US" sz="1050" dirty="0"/>
+          </a:p>
+          <a:p>
+            <a:pPr indent="0" marL="0">
+              <a:spcAft>
+                <a:spcPts val="300"/>
+              </a:spcAft>
+              <a:buNone/>
+            </a:pPr>
+            <a:r>
+              <a:rPr lang="en-US" sz="1050" dirty="0">
+                <a:solidFill>
+                  <a:schemeClr val="tx1"/>
+                </a:solidFill>
+              </a:rPr>
+              <a:t>G1′  optimistic news: individualists run more   +0.033</a:t>
+            </a:r>
+            <a:endParaRPr lang="en-US" sz="1050" dirty="0"/>
+          </a:p>
+          <a:p>
+            <a:pPr indent="0" marL="0">
+              <a:spcAft>
+                <a:spcPts val="300"/>
+              </a:spcAft>
+              <a:buNone/>
+            </a:pPr>
+            <a:r>
+              <a:rPr lang="en-US" sz="1050" dirty="0">
+                <a:solidFill>
+                  <a:schemeClr val="tx1"/>
+                </a:solidFill>
+              </a:rPr>
+              <a:t>G4′  pessimistic news: collectivists run more   −0.031</a:t>
+            </a:r>
+            <a:endParaRPr lang="en-US" sz="1050" dirty="0"/>
+          </a:p>
+          <a:p>
+            <a:pPr indent="0" marL="0">
+              <a:spcAft>
+                <a:spcPts val="300"/>
+              </a:spcAft>
+              <a:buNone/>
+            </a:pPr>
+            <a:r>
+              <a:rPr lang="en-US" sz="1050" dirty="0">
+                <a:solidFill>
+                  <a:schemeClr val="tx1"/>
+                </a:solidFill>
+              </a:rPr>
+              <a:t>G2a′  the effect grows with the λ gap   +0.093</a:t>
+            </a:r>
+            <a:endParaRPr lang="en-US" sz="1050" dirty="0"/>
+          </a:p>
+          <a:p>
+            <a:pPr indent="0" marL="0">
+              <a:buNone/>
+            </a:pPr>
+            <a:r>
+              <a:rPr lang="en-US" sz="1050" dirty="0">
                 <a:solidFill>
                   <a:schemeClr val="accent2"/>
                 </a:solidFill>
-                <a:latin typeface="Cambria" pitchFamily="34" charset="0"/>
-                <a:ea typeface="Cambria" pitchFamily="34" charset="-122"/>
-                <a:cs typeface="Cambria" pitchFamily="34" charset="-120"/>
-              </a:rPr>
-              <a:t>0.48</a:t>
-            </a:r>
-            <a:endParaRPr lang="en-US" sz="2200" dirty="0"/>
-          </a:p>
-        </p:txBody>
-      </p:sp>
-      <p:sp>
-        <p:nvSpPr>
-          <p:cNvPr id="7" name="stat-label"/>
-          <p:cNvSpPr txBox="1"/>
-          <p:nvPr/>
-        </p:nvSpPr>
-        <p:spPr>
-          <a:xfrm>
-            <a:off x="6355080" y="1508760"/>
-            <a:ext cx="2194560" cy="265176"/>
-          </a:xfrm>
-          <a:prstGeom prst="rect">
-            <a:avLst/>
-          </a:prstGeom>
-          <a:noFill/>
-          <a:ln/>
-        </p:spPr>
-        <p:txBody>
-          <a:bodyPr wrap="square" lIns="0" tIns="0" rIns="0" bIns="0" rtlCol="0" anchor="t"/>
-          <a:lstStyle/>
-          <a:p>
-            <a:pPr indent="0" marL="0">
-              <a:buNone/>
-            </a:pPr>
-            <a:r>
-              <a:rPr lang="en-US" sz="1100" dirty="0">
-                <a:solidFill>
-                  <a:schemeClr val="accent3"/>
-                </a:solidFill>
-              </a:rPr>
-              <a:t>outdated, pessimistic news</a:t>
-            </a:r>
-            <a:endParaRPr lang="en-US" sz="1100" dirty="0"/>
-          </a:p>
-        </p:txBody>
-      </p:sp>
-      <p:sp>
-        <p:nvSpPr>
-          <p:cNvPr id="8" name="stat-no public news"/>
+              </a:rPr>
+              <a:t>G3  sorting with no news: counts against (one pair wrong-signed)</a:t>
+            </a:r>
+            <a:endParaRPr lang="en-US" sz="1050" dirty="0"/>
+          </a:p>
+        </p:txBody>
+      </p:sp>
+      <p:sp>
+        <p:nvSpPr>
+          <p:cNvPr id="7" name="stat-confirmatory tests s"/>
           <p:cNvSpPr/>
           <p:nvPr/>
         </p:nvSpPr>
         <p:spPr>
           <a:xfrm>
-            <a:off x="6217920" y="1938528"/>
-            <a:ext cx="2468880" cy="777240"/>
+            <a:off x="6217920" y="3291840"/>
+            <a:ext cx="2468880" cy="1143000"/>
           </a:xfrm>
           <a:prstGeom prst="roundRect">
             <a:avLst>
-              <a:gd name="adj" fmla="val 9412"/>
+              <a:gd name="adj" fmla="val 6400"/>
             </a:avLst>
           </a:prstGeom>
           <a:solidFill>
@@ -6069,14 +5490,14 @@
       </p:sp>
       <p:sp>
         <p:nvSpPr>
-          <p:cNvPr id="9" name="stat-big"/>
+          <p:cNvPr id="8" name="stat-big"/>
           <p:cNvSpPr txBox="1"/>
           <p:nvPr/>
         </p:nvSpPr>
         <p:spPr>
           <a:xfrm>
-            <a:off x="6355080" y="2011680"/>
-            <a:ext cx="2194560" cy="365760"/>
+            <a:off x="6355080" y="3364992"/>
+            <a:ext cx="2194560" cy="457200"/>
           </a:xfrm>
           <a:prstGeom prst="rect">
             <a:avLst/>
@@ -6092,7 +5513,7 @@
               <a:buNone/>
             </a:pPr>
             <a:r>
-              <a:rPr lang="en-US" sz="2200" b="1" dirty="0">
+              <a:rPr lang="en-US" sz="2600" b="1" dirty="0">
                 <a:solidFill>
                   <a:schemeClr val="accent1"/>
                 </a:solidFill>
@@ -6100,22 +5521,22 @@
                 <a:ea typeface="Cambria" pitchFamily="34" charset="-122"/>
                 <a:cs typeface="Cambria" pitchFamily="34" charset="-120"/>
               </a:rPr>
-              <a:t>0.31</a:t>
-            </a:r>
-            <a:endParaRPr lang="en-US" sz="2200" dirty="0"/>
-          </a:p>
-        </p:txBody>
-      </p:sp>
-      <p:sp>
-        <p:nvSpPr>
-          <p:cNvPr id="10" name="stat-label"/>
+              <a:t>3 of 4</a:t>
+            </a:r>
+            <a:endParaRPr lang="en-US" sz="2600" dirty="0"/>
+          </a:p>
+        </p:txBody>
+      </p:sp>
+      <p:sp>
+        <p:nvSpPr>
+          <p:cNvPr id="9" name="stat-label"/>
           <p:cNvSpPr txBox="1"/>
           <p:nvPr/>
         </p:nvSpPr>
         <p:spPr>
           <a:xfrm>
-            <a:off x="6355080" y="2395728"/>
-            <a:ext cx="2194560" cy="265176"/>
+            <a:off x="6355080" y="3840480"/>
+            <a:ext cx="2194560" cy="539496"/>
           </a:xfrm>
           <a:prstGeom prst="rect">
             <a:avLst/>
@@ -6136,211 +5557,7 @@
                   <a:schemeClr val="accent3"/>
                 </a:solidFill>
               </a:rPr>
-              <a:t>no public news</a:t>
-            </a:r>
-            <a:endParaRPr lang="en-US" sz="1100" dirty="0"/>
-          </a:p>
-        </p:txBody>
-      </p:sp>
-      <p:sp>
-        <p:nvSpPr>
-          <p:cNvPr id="11" name="stat-accurate news"/>
-          <p:cNvSpPr/>
-          <p:nvPr/>
-        </p:nvSpPr>
-        <p:spPr>
-          <a:xfrm>
-            <a:off x="6217920" y="2825496"/>
-            <a:ext cx="2468880" cy="777240"/>
-          </a:xfrm>
-          <a:prstGeom prst="roundRect">
-            <a:avLst>
-              <a:gd name="adj" fmla="val 9412"/>
-            </a:avLst>
-          </a:prstGeom>
-          <a:solidFill>
-            <a:schemeClr val="bg2"/>
-          </a:solidFill>
-          <a:ln w="12700">
-            <a:solidFill>
-              <a:schemeClr val="bg2"/>
-            </a:solidFill>
-            <a:prstDash val="solid"/>
-          </a:ln>
-        </p:spPr>
-      </p:sp>
-      <p:sp>
-        <p:nvSpPr>
-          <p:cNvPr id="12" name="stat-big"/>
-          <p:cNvSpPr txBox="1"/>
-          <p:nvPr/>
-        </p:nvSpPr>
-        <p:spPr>
-          <a:xfrm>
-            <a:off x="6355080" y="2898648"/>
-            <a:ext cx="2194560" cy="365760"/>
-          </a:xfrm>
-          <a:prstGeom prst="rect">
-            <a:avLst/>
-          </a:prstGeom>
-          <a:noFill/>
-          <a:ln/>
-        </p:spPr>
-        <p:txBody>
-          <a:bodyPr wrap="square" lIns="0" tIns="0" rIns="0" bIns="0" rtlCol="0" anchor="ctr"/>
-          <a:lstStyle/>
-          <a:p>
-            <a:pPr indent="0" marL="0">
-              <a:buNone/>
-            </a:pPr>
-            <a:r>
-              <a:rPr lang="en-US" sz="2200" b="1" dirty="0">
-                <a:solidFill>
-                  <a:schemeClr val="accent1"/>
-                </a:solidFill>
-                <a:latin typeface="Cambria" pitchFamily="34" charset="0"/>
-                <a:ea typeface="Cambria" pitchFamily="34" charset="-122"/>
-                <a:cs typeface="Cambria" pitchFamily="34" charset="-120"/>
-              </a:rPr>
-              <a:t>0.29</a:t>
-            </a:r>
-            <a:endParaRPr lang="en-US" sz="2200" dirty="0"/>
-          </a:p>
-        </p:txBody>
-      </p:sp>
-      <p:sp>
-        <p:nvSpPr>
-          <p:cNvPr id="13" name="stat-label"/>
-          <p:cNvSpPr txBox="1"/>
-          <p:nvPr/>
-        </p:nvSpPr>
-        <p:spPr>
-          <a:xfrm>
-            <a:off x="6355080" y="3282696"/>
-            <a:ext cx="2194560" cy="265176"/>
-          </a:xfrm>
-          <a:prstGeom prst="rect">
-            <a:avLst/>
-          </a:prstGeom>
-          <a:noFill/>
-          <a:ln/>
-        </p:spPr>
-        <p:txBody>
-          <a:bodyPr wrap="square" lIns="0" tIns="0" rIns="0" bIns="0" rtlCol="0" anchor="t"/>
-          <a:lstStyle/>
-          <a:p>
-            <a:pPr indent="0" marL="0">
-              <a:buNone/>
-            </a:pPr>
-            <a:r>
-              <a:rPr lang="en-US" sz="1100" dirty="0">
-                <a:solidFill>
-                  <a:schemeClr val="accent3"/>
-                </a:solidFill>
-              </a:rPr>
-              <a:t>accurate news</a:t>
-            </a:r>
-            <a:endParaRPr lang="en-US" sz="1100" dirty="0"/>
-          </a:p>
-        </p:txBody>
-      </p:sp>
-      <p:sp>
-        <p:nvSpPr>
-          <p:cNvPr id="14" name="stat-outdated, optimistic"/>
-          <p:cNvSpPr/>
-          <p:nvPr/>
-        </p:nvSpPr>
-        <p:spPr>
-          <a:xfrm>
-            <a:off x="6217920" y="3712464"/>
-            <a:ext cx="2468880" cy="777240"/>
-          </a:xfrm>
-          <a:prstGeom prst="roundRect">
-            <a:avLst>
-              <a:gd name="adj" fmla="val 9412"/>
-            </a:avLst>
-          </a:prstGeom>
-          <a:solidFill>
-            <a:schemeClr val="bg2"/>
-          </a:solidFill>
-          <a:ln w="12700">
-            <a:solidFill>
-              <a:schemeClr val="bg2"/>
-            </a:solidFill>
-            <a:prstDash val="solid"/>
-          </a:ln>
-        </p:spPr>
-      </p:sp>
-      <p:sp>
-        <p:nvSpPr>
-          <p:cNvPr id="15" name="stat-big"/>
-          <p:cNvSpPr txBox="1"/>
-          <p:nvPr/>
-        </p:nvSpPr>
-        <p:spPr>
-          <a:xfrm>
-            <a:off x="6355080" y="3785616"/>
-            <a:ext cx="2194560" cy="365760"/>
-          </a:xfrm>
-          <a:prstGeom prst="rect">
-            <a:avLst/>
-          </a:prstGeom>
-          <a:noFill/>
-          <a:ln/>
-        </p:spPr>
-        <p:txBody>
-          <a:bodyPr wrap="square" lIns="0" tIns="0" rIns="0" bIns="0" rtlCol="0" anchor="ctr"/>
-          <a:lstStyle/>
-          <a:p>
-            <a:pPr indent="0" marL="0">
-              <a:buNone/>
-            </a:pPr>
-            <a:r>
-              <a:rPr lang="en-US" sz="2200" b="1" dirty="0">
-                <a:solidFill>
-                  <a:schemeClr val="accent5"/>
-                </a:solidFill>
-                <a:latin typeface="Cambria" pitchFamily="34" charset="0"/>
-                <a:ea typeface="Cambria" pitchFamily="34" charset="-122"/>
-                <a:cs typeface="Cambria" pitchFamily="34" charset="-120"/>
-              </a:rPr>
-              <a:t>0.16</a:t>
-            </a:r>
-            <a:endParaRPr lang="en-US" sz="2200" dirty="0"/>
-          </a:p>
-        </p:txBody>
-      </p:sp>
-      <p:sp>
-        <p:nvSpPr>
-          <p:cNvPr id="16" name="stat-label"/>
-          <p:cNvSpPr txBox="1"/>
-          <p:nvPr/>
-        </p:nvSpPr>
-        <p:spPr>
-          <a:xfrm>
-            <a:off x="6355080" y="4169664"/>
-            <a:ext cx="2194560" cy="265176"/>
-          </a:xfrm>
-          <a:prstGeom prst="rect">
-            <a:avLst/>
-          </a:prstGeom>
-          <a:noFill/>
-          <a:ln/>
-        </p:spPr>
-        <p:txBody>
-          <a:bodyPr wrap="square" lIns="0" tIns="0" rIns="0" bIns="0" rtlCol="0" anchor="t"/>
-          <a:lstStyle/>
-          <a:p>
-            <a:pPr indent="0" marL="0">
-              <a:buNone/>
-            </a:pPr>
-            <a:r>
-              <a:rPr lang="en-US" sz="1100" dirty="0">
-                <a:solidFill>
-                  <a:schemeClr val="accent3"/>
-                </a:solidFill>
-              </a:rPr>
-              <a:t>outdated, optimistic news</a:t>
+              <a:t>confirmatory tests support the theory, on all three versions of the bank</a:t>
             </a:r>
             <a:endParaRPr lang="en-US" sz="1100" dirty="0"/>
           </a:p>
@@ -6448,86 +5665,26 @@
                   <a:schemeClr val="tx2"/>
                 </a:solidFill>
               </a:rPr>
-              <a:t>Capping the largest deposits</a:t>
+              <a:t>Takeaways and next steps</a:t>
             </a:r>
             <a:endParaRPr lang="en-US" sz="2400" dirty="0"/>
           </a:p>
         </p:txBody>
       </p:sp>
-      <p:pic>
-        <p:nvPicPr>
-          <p:cNvPr id="3" name="e10" descr="Chance the bank fails by share of individualists for three deposit-size distributions: uncapped large deposits fail most often; capped at 1 percent matches the bank with similar-sized deposits at every share.">    </p:cNvPr>
-          <p:cNvPicPr>
-            <a:picLocks noChangeAspect="1"/>
-          </p:cNvPicPr>
-          <p:nvPr/>
-        </p:nvPicPr>
-        <p:blipFill>
-          <a:blip r:embed="rId1"/>
-          <a:stretch>
-            <a:fillRect/>
-          </a:stretch>
-        </p:blipFill>
+      <p:sp>
+        <p:nvSpPr>
+          <p:cNvPr id="3" name="take-0"/>
+          <p:cNvSpPr/>
+          <p:nvPr/>
+        </p:nvSpPr>
         <p:spPr>
           <a:xfrm>
             <a:off x="457200" y="1051560"/>
-            <a:ext cx="4941052" cy="3291840"/>
-          </a:xfrm>
-          <a:prstGeom prst="rect">
-            <a:avLst/>
-          </a:prstGeom>
-        </p:spPr>
-      </p:pic>
-      <p:sp>
-        <p:nvSpPr>
-          <p:cNvPr id="4" name="caption"/>
-          <p:cNvSpPr txBox="1"/>
-          <p:nvPr/>
-        </p:nvSpPr>
-        <p:spPr>
-          <a:xfrm>
-            <a:off x="457200" y="4389120"/>
-            <a:ext cx="5486400" cy="274320"/>
-          </a:xfrm>
-          <a:prstGeom prst="rect">
-            <a:avLst/>
-          </a:prstGeom>
-          <a:noFill/>
-          <a:ln/>
-        </p:spPr>
-        <p:txBody>
-          <a:bodyPr wrap="square" lIns="0" tIns="0" rIns="0" bIns="0" rtlCol="0" anchor="ctr"/>
-          <a:lstStyle/>
-          <a:p>
-            <a:pPr indent="0" marL="0">
-              <a:buNone/>
-            </a:pPr>
-            <a:r>
-              <a:rPr lang="en-US" sz="1000" i="1" dirty="0">
-                <a:solidFill>
-                  <a:schemeClr val="accent3"/>
-                </a:solidFill>
-              </a:rPr>
-              <a:t>Chance the bank fails by share of individualists, for three deposit-size distributions. λ pairs pooled.</a:t>
-            </a:r>
-            <a:endParaRPr lang="en-US" sz="1000" dirty="0"/>
-          </a:p>
-        </p:txBody>
-      </p:sp>
-      <p:sp>
-        <p:nvSpPr>
-          <p:cNvPr id="5" name="stat-uncapped: a few very"/>
-          <p:cNvSpPr/>
-          <p:nvPr/>
-        </p:nvSpPr>
-        <p:spPr>
-          <a:xfrm>
-            <a:off x="6217920" y="1051560"/>
-            <a:ext cx="2468880" cy="1005840"/>
+            <a:ext cx="5760720" cy="512064"/>
           </a:xfrm>
           <a:prstGeom prst="roundRect">
             <a:avLst>
-              <a:gd name="adj" fmla="val 7273"/>
+              <a:gd name="adj" fmla="val 14286"/>
             </a:avLst>
           </a:prstGeom>
           <a:solidFill>
@@ -6543,14 +5700,41 @@
       </p:sp>
       <p:sp>
         <p:nvSpPr>
-          <p:cNvPr id="6" name="stat-big"/>
+          <p:cNvPr id="4" name="chip"/>
+          <p:cNvSpPr/>
+          <p:nvPr/>
+        </p:nvSpPr>
+        <p:spPr>
+          <a:xfrm>
+            <a:off x="548640" y="1143000"/>
+            <a:ext cx="329184" cy="329184"/>
+          </a:xfrm>
+          <a:prstGeom prst="roundRect">
+            <a:avLst>
+              <a:gd name="adj" fmla="val 16667"/>
+            </a:avLst>
+          </a:prstGeom>
+          <a:solidFill>
+            <a:schemeClr val="accent1"/>
+          </a:solidFill>
+          <a:ln w="12700">
+            <a:solidFill>
+              <a:schemeClr val="accent1"/>
+            </a:solidFill>
+            <a:prstDash val="solid"/>
+          </a:ln>
+        </p:spPr>
+      </p:sp>
+      <p:sp>
+        <p:nvSpPr>
+          <p:cNvPr id="5" name="chip-label"/>
           <p:cNvSpPr txBox="1"/>
           <p:nvPr/>
         </p:nvSpPr>
         <p:spPr>
           <a:xfrm>
-            <a:off x="6355080" y="1124712"/>
-            <a:ext cx="2194560" cy="457200"/>
+            <a:off x="548640" y="1143000"/>
+            <a:ext cx="329184" cy="329184"/>
           </a:xfrm>
           <a:prstGeom prst="rect">
             <a:avLst/>
@@ -6562,55 +5746,55 @@
           <a:bodyPr wrap="square" lIns="0" tIns="0" rIns="0" bIns="0" rtlCol="0" anchor="ctr"/>
           <a:lstStyle/>
           <a:p>
-            <a:pPr indent="0" marL="0">
-              <a:buNone/>
-            </a:pPr>
-            <a:r>
-              <a:rPr lang="en-US" sz="2200" b="1" dirty="0">
-                <a:solidFill>
-                  <a:schemeClr val="accent2"/>
+            <a:pPr algn="ctr" indent="0" marL="0">
+              <a:buNone/>
+            </a:pPr>
+            <a:r>
+              <a:rPr lang="en-US" sz="1100" b="1" dirty="0">
+                <a:solidFill>
+                  <a:schemeClr val="bg1"/>
                 </a:solidFill>
                 <a:latin typeface="Cambria" pitchFamily="34" charset="0"/>
                 <a:ea typeface="Cambria" pitchFamily="34" charset="-122"/>
                 <a:cs typeface="Cambria" pitchFamily="34" charset="-120"/>
               </a:rPr>
-              <a:t>0.61 to 0.11</a:t>
-            </a:r>
-            <a:endParaRPr lang="en-US" sz="2200" dirty="0"/>
-          </a:p>
-        </p:txBody>
-      </p:sp>
-      <p:sp>
-        <p:nvSpPr>
-          <p:cNvPr id="7" name="stat-label"/>
+              <a:t>1</a:t>
+            </a:r>
+            <a:endParaRPr lang="en-US" sz="1100" dirty="0"/>
+          </a:p>
+        </p:txBody>
+      </p:sp>
+      <p:sp>
+        <p:nvSpPr>
+          <p:cNvPr id="6" name="take-head"/>
           <p:cNvSpPr txBox="1"/>
           <p:nvPr/>
         </p:nvSpPr>
         <p:spPr>
           <a:xfrm>
-            <a:off x="6355080" y="1600200"/>
-            <a:ext cx="2194560" cy="402336"/>
-          </a:xfrm>
-          <a:prstGeom prst="rect">
-            <a:avLst/>
-          </a:prstGeom>
-          <a:noFill/>
-          <a:ln/>
-        </p:spPr>
-        <p:txBody>
-          <a:bodyPr wrap="square" lIns="0" tIns="0" rIns="0" bIns="0" rtlCol="0" anchor="t"/>
+            <a:off x="987552" y="1088136"/>
+            <a:ext cx="1600200" cy="438912"/>
+          </a:xfrm>
+          <a:prstGeom prst="rect">
+            <a:avLst/>
+          </a:prstGeom>
+          <a:noFill/>
+          <a:ln/>
+        </p:spPr>
+        <p:txBody>
+          <a:bodyPr wrap="square" lIns="0" tIns="0" rIns="0" bIns="0" rtlCol="0" anchor="ctr"/>
           <a:lstStyle/>
           <a:p>
             <a:pPr indent="0" marL="0">
               <a:buNone/>
             </a:pPr>
             <a:r>
-              <a:rPr lang="en-US" sz="1100" dirty="0">
-                <a:solidFill>
-                  <a:schemeClr val="accent3"/>
-                </a:solidFill>
-              </a:rPr>
-              <a:t>uncapped: a few very large deposits (σ 2.5)</a:t>
+              <a:rPr lang="en-US" sz="1100" b="1" dirty="0">
+                <a:solidFill>
+                  <a:schemeClr val="tx2"/>
+                </a:solidFill>
+              </a:rPr>
+              <a:t>Sorting follows the news</a:t>
             </a:r>
             <a:endParaRPr lang="en-US" sz="1100" dirty="0"/>
           </a:p>
@@ -6618,18 +5802,54 @@
       </p:sp>
       <p:sp>
         <p:nvSpPr>
-          <p:cNvPr id="8" name="stat-capped: no deposit a"/>
+          <p:cNvPr id="7" name="take-body"/>
+          <p:cNvSpPr txBox="1"/>
+          <p:nvPr/>
+        </p:nvSpPr>
+        <p:spPr>
+          <a:xfrm>
+            <a:off x="2651760" y="1088136"/>
+            <a:ext cx="3474720" cy="438912"/>
+          </a:xfrm>
+          <a:prstGeom prst="rect">
+            <a:avLst/>
+          </a:prstGeom>
+          <a:noFill/>
+          <a:ln/>
+        </p:spPr>
+        <p:txBody>
+          <a:bodyPr wrap="square" lIns="0" tIns="0" rIns="0" bIns="0" rtlCol="0" anchor="ctr"/>
+          <a:lstStyle/>
+          <a:p>
+            <a:pPr indent="0" marL="0">
+              <a:buNone/>
+            </a:pPr>
+            <a:r>
+              <a:rPr lang="en-US" sz="1000" dirty="0">
+                <a:solidFill>
+                  <a:schemeClr val="tx1"/>
+                </a:solidFill>
+              </a:rPr>
+              <a:t>Optimistic public news makes individualists run relatively more; pessimistic news, collectivists. 3 of 4 pre-registered tests pass, in all three bank versions.</a:t>
+            </a:r>
+            <a:endParaRPr lang="en-US" sz="1000" dirty="0"/>
+          </a:p>
+        </p:txBody>
+      </p:sp>
+      <p:sp>
+        <p:nvSpPr>
+          <p:cNvPr id="8" name="take-1"/>
           <p:cNvSpPr/>
           <p:nvPr/>
         </p:nvSpPr>
         <p:spPr>
           <a:xfrm>
-            <a:off x="6217920" y="2194560"/>
-            <a:ext cx="2468880" cy="1005840"/>
+            <a:off x="457200" y="1636776"/>
+            <a:ext cx="5760720" cy="512064"/>
           </a:xfrm>
           <a:prstGeom prst="roundRect">
             <a:avLst>
-              <a:gd name="adj" fmla="val 7273"/>
+              <a:gd name="adj" fmla="val 14286"/>
             </a:avLst>
           </a:prstGeom>
           <a:solidFill>
@@ -6645,14 +5865,41 @@
       </p:sp>
       <p:sp>
         <p:nvSpPr>
-          <p:cNvPr id="9" name="stat-big"/>
+          <p:cNvPr id="9" name="chip"/>
+          <p:cNvSpPr/>
+          <p:nvPr/>
+        </p:nvSpPr>
+        <p:spPr>
+          <a:xfrm>
+            <a:off x="548640" y="1728216"/>
+            <a:ext cx="329184" cy="329184"/>
+          </a:xfrm>
+          <a:prstGeom prst="roundRect">
+            <a:avLst>
+              <a:gd name="adj" fmla="val 16667"/>
+            </a:avLst>
+          </a:prstGeom>
+          <a:solidFill>
+            <a:schemeClr val="accent1"/>
+          </a:solidFill>
+          <a:ln w="12700">
+            <a:solidFill>
+              <a:schemeClr val="accent1"/>
+            </a:solidFill>
+            <a:prstDash val="solid"/>
+          </a:ln>
+        </p:spPr>
+      </p:sp>
+      <p:sp>
+        <p:nvSpPr>
+          <p:cNvPr id="10" name="chip-label"/>
           <p:cNvSpPr txBox="1"/>
           <p:nvPr/>
         </p:nvSpPr>
         <p:spPr>
           <a:xfrm>
-            <a:off x="6355080" y="2267712"/>
-            <a:ext cx="2194560" cy="457200"/>
+            <a:off x="548640" y="1728216"/>
+            <a:ext cx="329184" cy="329184"/>
           </a:xfrm>
           <a:prstGeom prst="rect">
             <a:avLst/>
@@ -6664,55 +5911,55 @@
           <a:bodyPr wrap="square" lIns="0" tIns="0" rIns="0" bIns="0" rtlCol="0" anchor="ctr"/>
           <a:lstStyle/>
           <a:p>
-            <a:pPr indent="0" marL="0">
-              <a:buNone/>
-            </a:pPr>
-            <a:r>
-              <a:rPr lang="en-US" sz="2200" b="1" dirty="0">
-                <a:solidFill>
-                  <a:schemeClr val="accent1"/>
+            <a:pPr algn="ctr" indent="0" marL="0">
+              <a:buNone/>
+            </a:pPr>
+            <a:r>
+              <a:rPr lang="en-US" sz="1100" b="1" dirty="0">
+                <a:solidFill>
+                  <a:schemeClr val="bg1"/>
                 </a:solidFill>
                 <a:latin typeface="Cambria" pitchFamily="34" charset="0"/>
                 <a:ea typeface="Cambria" pitchFamily="34" charset="-122"/>
                 <a:cs typeface="Cambria" pitchFamily="34" charset="-120"/>
               </a:rPr>
-              <a:t>0.51 to 0.08</a:t>
-            </a:r>
-            <a:endParaRPr lang="en-US" sz="2200" dirty="0"/>
-          </a:p>
-        </p:txBody>
-      </p:sp>
-      <p:sp>
-        <p:nvSpPr>
-          <p:cNvPr id="10" name="stat-label"/>
+              <a:t>2</a:t>
+            </a:r>
+            <a:endParaRPr lang="en-US" sz="1100" dirty="0"/>
+          </a:p>
+        </p:txBody>
+      </p:sp>
+      <p:sp>
+        <p:nvSpPr>
+          <p:cNvPr id="11" name="take-head"/>
           <p:cNvSpPr txBox="1"/>
           <p:nvPr/>
         </p:nvSpPr>
         <p:spPr>
           <a:xfrm>
-            <a:off x="6355080" y="2743200"/>
-            <a:ext cx="2194560" cy="402336"/>
-          </a:xfrm>
-          <a:prstGeom prst="rect">
-            <a:avLst/>
-          </a:prstGeom>
-          <a:noFill/>
-          <a:ln/>
-        </p:spPr>
-        <p:txBody>
-          <a:bodyPr wrap="square" lIns="0" tIns="0" rIns="0" bIns="0" rtlCol="0" anchor="t"/>
+            <a:off x="987552" y="1673352"/>
+            <a:ext cx="1600200" cy="438912"/>
+          </a:xfrm>
+          <a:prstGeom prst="rect">
+            <a:avLst/>
+          </a:prstGeom>
+          <a:noFill/>
+          <a:ln/>
+        </p:spPr>
+        <p:txBody>
+          <a:bodyPr wrap="square" lIns="0" tIns="0" rIns="0" bIns="0" rtlCol="0" anchor="ctr"/>
           <a:lstStyle/>
           <a:p>
             <a:pPr indent="0" marL="0">
               <a:buNone/>
             </a:pPr>
             <a:r>
-              <a:rPr lang="en-US" sz="1100" dirty="0">
-                <a:solidFill>
-                  <a:schemeClr val="accent3"/>
-                </a:solidFill>
-              </a:rPr>
-              <a:t>capped: no deposit above 1% of the total (the reference bank)</a:t>
+              <a:rPr lang="en-US" sz="1100" b="1" dirty="0">
+                <a:solidFill>
+                  <a:schemeClr val="tx2"/>
+                </a:solidFill>
+              </a:rPr>
+              <a:t>Collectivists herd</a:t>
             </a:r>
             <a:endParaRPr lang="en-US" sz="1100" dirty="0"/>
           </a:p>
@@ -6720,18 +5967,54 @@
       </p:sp>
       <p:sp>
         <p:nvSpPr>
-          <p:cNvPr id="11" name="stat-similar sizes (σ 1)."/>
+          <p:cNvPr id="12" name="take-body"/>
+          <p:cNvSpPr txBox="1"/>
+          <p:nvPr/>
+        </p:nvSpPr>
+        <p:spPr>
+          <a:xfrm>
+            <a:off x="2651760" y="1673352"/>
+            <a:ext cx="3474720" cy="438912"/>
+          </a:xfrm>
+          <a:prstGeom prst="rect">
+            <a:avLst/>
+          </a:prstGeom>
+          <a:noFill/>
+          <a:ln/>
+        </p:spPr>
+        <p:txBody>
+          <a:bodyPr wrap="square" lIns="0" tIns="0" rIns="0" bIns="0" rtlCol="0" anchor="ctr"/>
+          <a:lstStyle/>
+          <a:p>
+            <a:pPr indent="0" marL="0">
+              <a:buNone/>
+            </a:pPr>
+            <a:r>
+              <a:rPr lang="en-US" sz="1000" dirty="0">
+                <a:solidFill>
+                  <a:schemeClr val="tx1"/>
+                </a:solidFill>
+              </a:rPr>
+              <a:t>Their chance of withdrawing jumps from 0.15 to 0.93 once 20–35% of neighbours are out; individualists level off near 0.3.</a:t>
+            </a:r>
+            <a:endParaRPr lang="en-US" sz="1000" dirty="0"/>
+          </a:p>
+        </p:txBody>
+      </p:sp>
+      <p:sp>
+        <p:nvSpPr>
+          <p:cNvPr id="13" name="take-2"/>
           <p:cNvSpPr/>
           <p:nvPr/>
         </p:nvSpPr>
         <p:spPr>
           <a:xfrm>
-            <a:off x="6217920" y="3337560"/>
-            <a:ext cx="2468880" cy="1097280"/>
+            <a:off x="457200" y="2221992"/>
+            <a:ext cx="5760720" cy="512064"/>
           </a:xfrm>
           <a:prstGeom prst="roundRect">
             <a:avLst>
-              <a:gd name="adj" fmla="val 6667"/>
+              <a:gd name="adj" fmla="val 14286"/>
             </a:avLst>
           </a:prstGeom>
           <a:solidFill>
@@ -6747,14 +6030,41 @@
       </p:sp>
       <p:sp>
         <p:nvSpPr>
-          <p:cNvPr id="12" name="stat-big"/>
+          <p:cNvPr id="14" name="chip"/>
+          <p:cNvSpPr/>
+          <p:nvPr/>
+        </p:nvSpPr>
+        <p:spPr>
+          <a:xfrm>
+            <a:off x="548640" y="2313432"/>
+            <a:ext cx="329184" cy="329184"/>
+          </a:xfrm>
+          <a:prstGeom prst="roundRect">
+            <a:avLst>
+              <a:gd name="adj" fmla="val 16667"/>
+            </a:avLst>
+          </a:prstGeom>
+          <a:solidFill>
+            <a:schemeClr val="accent1"/>
+          </a:solidFill>
+          <a:ln w="12700">
+            <a:solidFill>
+              <a:schemeClr val="accent1"/>
+            </a:solidFill>
+            <a:prstDash val="solid"/>
+          </a:ln>
+        </p:spPr>
+      </p:sp>
+      <p:sp>
+        <p:nvSpPr>
+          <p:cNvPr id="15" name="chip-label"/>
           <p:cNvSpPr txBox="1"/>
           <p:nvPr/>
         </p:nvSpPr>
         <p:spPr>
           <a:xfrm>
-            <a:off x="6355080" y="3410712"/>
-            <a:ext cx="2194560" cy="457200"/>
+            <a:off x="548640" y="2313432"/>
+            <a:ext cx="329184" cy="329184"/>
           </a:xfrm>
           <a:prstGeom prst="rect">
             <a:avLst/>
@@ -6766,34 +6076,664 @@
           <a:bodyPr wrap="square" lIns="0" tIns="0" rIns="0" bIns="0" rtlCol="0" anchor="ctr"/>
           <a:lstStyle/>
           <a:p>
-            <a:pPr indent="0" marL="0">
-              <a:buNone/>
-            </a:pPr>
-            <a:r>
-              <a:rPr lang="en-US" sz="2200" b="1" dirty="0">
-                <a:solidFill>
-                  <a:schemeClr val="accent3"/>
+            <a:pPr algn="ctr" indent="0" marL="0">
+              <a:buNone/>
+            </a:pPr>
+            <a:r>
+              <a:rPr lang="en-US" sz="1100" b="1" dirty="0">
+                <a:solidFill>
+                  <a:schemeClr val="bg1"/>
                 </a:solidFill>
                 <a:latin typeface="Cambria" pitchFamily="34" charset="0"/>
                 <a:ea typeface="Cambria" pitchFamily="34" charset="-122"/>
                 <a:cs typeface="Cambria" pitchFamily="34" charset="-120"/>
               </a:rPr>
-              <a:t>0.50 to 0.08</a:t>
-            </a:r>
-            <a:endParaRPr lang="en-US" sz="2200" dirty="0"/>
-          </a:p>
-        </p:txBody>
-      </p:sp>
-      <p:sp>
-        <p:nvSpPr>
-          <p:cNvPr id="13" name="stat-label"/>
+              <a:t>3</a:t>
+            </a:r>
+            <a:endParaRPr lang="en-US" sz="1100" dirty="0"/>
+          </a:p>
+        </p:txBody>
+      </p:sp>
+      <p:sp>
+        <p:nvSpPr>
+          <p:cNvPr id="16" name="take-head"/>
           <p:cNvSpPr txBox="1"/>
           <p:nvPr/>
         </p:nvSpPr>
         <p:spPr>
           <a:xfrm>
-            <a:off x="6355080" y="3886200"/>
-            <a:ext cx="2194560" cy="493776"/>
+            <a:off x="987552" y="2258568"/>
+            <a:ext cx="1600200" cy="438912"/>
+          </a:xfrm>
+          <a:prstGeom prst="rect">
+            <a:avLst/>
+          </a:prstGeom>
+          <a:noFill/>
+          <a:ln/>
+        </p:spPr>
+        <p:txBody>
+          <a:bodyPr wrap="square" lIns="0" tIns="0" rIns="0" bIns="0" rtlCol="0" anchor="ctr"/>
+          <a:lstStyle/>
+          <a:p>
+            <a:pPr indent="0" marL="0">
+              <a:buNone/>
+            </a:pPr>
+            <a:r>
+              <a:rPr lang="en-US" sz="1100" b="1" dirty="0">
+                <a:solidFill>
+                  <a:schemeClr val="tx2"/>
+                </a:solidFill>
+              </a:rPr>
+              <a:t>More individualists, fewer failures</a:t>
+            </a:r>
+            <a:endParaRPr lang="en-US" sz="1100" dirty="0"/>
+          </a:p>
+        </p:txBody>
+      </p:sp>
+      <p:sp>
+        <p:nvSpPr>
+          <p:cNvPr id="17" name="take-body"/>
+          <p:cNvSpPr txBox="1"/>
+          <p:nvPr/>
+        </p:nvSpPr>
+        <p:spPr>
+          <a:xfrm>
+            <a:off x="2651760" y="2258568"/>
+            <a:ext cx="3474720" cy="438912"/>
+          </a:xfrm>
+          <a:prstGeom prst="rect">
+            <a:avLst/>
+          </a:prstGeom>
+          <a:noFill/>
+          <a:ln/>
+        </p:spPr>
+        <p:txBody>
+          <a:bodyPr wrap="square" lIns="0" tIns="0" rIns="0" bIns="0" rtlCol="0" anchor="ctr"/>
+          <a:lstStyle/>
+          <a:p>
+            <a:pPr indent="0" marL="0">
+              <a:buNone/>
+            </a:pPr>
+            <a:r>
+              <a:rPr lang="en-US" sz="1000" dirty="0">
+                <a:solidFill>
+                  <a:schemeClr val="tx1"/>
+                </a:solidFill>
+              </a:rPr>
+              <a:t>P(fail) falls from 0.67 to 0.08 as the individualist share goes from 0 to 1. Monotone; no interior peak.</a:t>
+            </a:r>
+            <a:endParaRPr lang="en-US" sz="1000" dirty="0"/>
+          </a:p>
+        </p:txBody>
+      </p:sp>
+      <p:sp>
+        <p:nvSpPr>
+          <p:cNvPr id="18" name="take-3"/>
+          <p:cNvSpPr/>
+          <p:nvPr/>
+        </p:nvSpPr>
+        <p:spPr>
+          <a:xfrm>
+            <a:off x="457200" y="2807208"/>
+            <a:ext cx="5760720" cy="512064"/>
+          </a:xfrm>
+          <a:prstGeom prst="roundRect">
+            <a:avLst>
+              <a:gd name="adj" fmla="val 14286"/>
+            </a:avLst>
+          </a:prstGeom>
+          <a:solidFill>
+            <a:schemeClr val="bg2"/>
+          </a:solidFill>
+          <a:ln w="12700">
+            <a:solidFill>
+              <a:schemeClr val="bg2"/>
+            </a:solidFill>
+            <a:prstDash val="solid"/>
+          </a:ln>
+        </p:spPr>
+      </p:sp>
+      <p:sp>
+        <p:nvSpPr>
+          <p:cNvPr id="19" name="chip"/>
+          <p:cNvSpPr/>
+          <p:nvPr/>
+        </p:nvSpPr>
+        <p:spPr>
+          <a:xfrm>
+            <a:off x="548640" y="2898648"/>
+            <a:ext cx="329184" cy="329184"/>
+          </a:xfrm>
+          <a:prstGeom prst="roundRect">
+            <a:avLst>
+              <a:gd name="adj" fmla="val 16667"/>
+            </a:avLst>
+          </a:prstGeom>
+          <a:solidFill>
+            <a:schemeClr val="accent1"/>
+          </a:solidFill>
+          <a:ln w="12700">
+            <a:solidFill>
+              <a:schemeClr val="accent1"/>
+            </a:solidFill>
+            <a:prstDash val="solid"/>
+          </a:ln>
+        </p:spPr>
+      </p:sp>
+      <p:sp>
+        <p:nvSpPr>
+          <p:cNvPr id="20" name="chip-label"/>
+          <p:cNvSpPr txBox="1"/>
+          <p:nvPr/>
+        </p:nvSpPr>
+        <p:spPr>
+          <a:xfrm>
+            <a:off x="548640" y="2898648"/>
+            <a:ext cx="329184" cy="329184"/>
+          </a:xfrm>
+          <a:prstGeom prst="rect">
+            <a:avLst/>
+          </a:prstGeom>
+          <a:noFill/>
+          <a:ln/>
+        </p:spPr>
+        <p:txBody>
+          <a:bodyPr wrap="square" lIns="0" tIns="0" rIns="0" bIns="0" rtlCol="0" anchor="ctr"/>
+          <a:lstStyle/>
+          <a:p>
+            <a:pPr algn="ctr" indent="0" marL="0">
+              <a:buNone/>
+            </a:pPr>
+            <a:r>
+              <a:rPr lang="en-US" sz="1100" b="1" dirty="0">
+                <a:solidFill>
+                  <a:schemeClr val="bg1"/>
+                </a:solidFill>
+                <a:latin typeface="Cambria" pitchFamily="34" charset="0"/>
+                <a:ea typeface="Cambria" pitchFamily="34" charset="-122"/>
+                <a:cs typeface="Cambria" pitchFamily="34" charset="-120"/>
+              </a:rPr>
+              <a:t>4</a:t>
+            </a:r>
+            <a:endParaRPr lang="en-US" sz="1100" dirty="0"/>
+          </a:p>
+        </p:txBody>
+      </p:sp>
+      <p:sp>
+        <p:nvSpPr>
+          <p:cNvPr id="21" name="take-head"/>
+          <p:cNvSpPr txBox="1"/>
+          <p:nvPr/>
+        </p:nvSpPr>
+        <p:spPr>
+          <a:xfrm>
+            <a:off x="987552" y="2843784"/>
+            <a:ext cx="1600200" cy="438912"/>
+          </a:xfrm>
+          <a:prstGeom prst="rect">
+            <a:avLst/>
+          </a:prstGeom>
+          <a:noFill/>
+          <a:ln/>
+        </p:spPr>
+        <p:txBody>
+          <a:bodyPr wrap="square" lIns="0" tIns="0" rIns="0" bIns="0" rtlCol="0" anchor="ctr"/>
+          <a:lstStyle/>
+          <a:p>
+            <a:pPr indent="0" marL="0">
+              <a:buNone/>
+            </a:pPr>
+            <a:r>
+              <a:rPr lang="en-US" sz="1100" b="1" dirty="0">
+                <a:solidFill>
+                  <a:schemeClr val="tx2"/>
+                </a:solidFill>
+              </a:rPr>
+              <a:t>Stale news cuts both ways</a:t>
+            </a:r>
+            <a:endParaRPr lang="en-US" sz="1100" dirty="0"/>
+          </a:p>
+        </p:txBody>
+      </p:sp>
+      <p:sp>
+        <p:nvSpPr>
+          <p:cNvPr id="22" name="take-body"/>
+          <p:cNvSpPr txBox="1"/>
+          <p:nvPr/>
+        </p:nvSpPr>
+        <p:spPr>
+          <a:xfrm>
+            <a:off x="2651760" y="2843784"/>
+            <a:ext cx="3474720" cy="438912"/>
+          </a:xfrm>
+          <a:prstGeom prst="rect">
+            <a:avLst/>
+          </a:prstGeom>
+          <a:noFill/>
+          <a:ln/>
+        </p:spPr>
+        <p:txBody>
+          <a:bodyPr wrap="square" lIns="0" tIns="0" rIns="0" bIns="0" rtlCol="0" anchor="ctr"/>
+          <a:lstStyle/>
+          <a:p>
+            <a:pPr indent="0" marL="0">
+              <a:buNone/>
+            </a:pPr>
+            <a:r>
+              <a:rPr lang="en-US" sz="1000" dirty="0">
+                <a:solidFill>
+                  <a:schemeClr val="tx1"/>
+                </a:solidFill>
+              </a:rPr>
+              <a:t>A stale optimistic signal halves failure, a stale pessimistic one raises it by half. Accurate news barely moves it.</a:t>
+            </a:r>
+            <a:endParaRPr lang="en-US" sz="1000" dirty="0"/>
+          </a:p>
+        </p:txBody>
+      </p:sp>
+      <p:sp>
+        <p:nvSpPr>
+          <p:cNvPr id="23" name="take-4"/>
+          <p:cNvSpPr/>
+          <p:nvPr/>
+        </p:nvSpPr>
+        <p:spPr>
+          <a:xfrm>
+            <a:off x="457200" y="3392424"/>
+            <a:ext cx="5760720" cy="512064"/>
+          </a:xfrm>
+          <a:prstGeom prst="roundRect">
+            <a:avLst>
+              <a:gd name="adj" fmla="val 14286"/>
+            </a:avLst>
+          </a:prstGeom>
+          <a:solidFill>
+            <a:schemeClr val="bg2"/>
+          </a:solidFill>
+          <a:ln w="12700">
+            <a:solidFill>
+              <a:schemeClr val="bg2"/>
+            </a:solidFill>
+            <a:prstDash val="solid"/>
+          </a:ln>
+        </p:spPr>
+      </p:sp>
+      <p:sp>
+        <p:nvSpPr>
+          <p:cNvPr id="24" name="chip"/>
+          <p:cNvSpPr/>
+          <p:nvPr/>
+        </p:nvSpPr>
+        <p:spPr>
+          <a:xfrm>
+            <a:off x="548640" y="3483864"/>
+            <a:ext cx="329184" cy="329184"/>
+          </a:xfrm>
+          <a:prstGeom prst="roundRect">
+            <a:avLst>
+              <a:gd name="adj" fmla="val 16667"/>
+            </a:avLst>
+          </a:prstGeom>
+          <a:solidFill>
+            <a:schemeClr val="accent1"/>
+          </a:solidFill>
+          <a:ln w="12700">
+            <a:solidFill>
+              <a:schemeClr val="accent1"/>
+            </a:solidFill>
+            <a:prstDash val="solid"/>
+          </a:ln>
+        </p:spPr>
+      </p:sp>
+      <p:sp>
+        <p:nvSpPr>
+          <p:cNvPr id="25" name="chip-label"/>
+          <p:cNvSpPr txBox="1"/>
+          <p:nvPr/>
+        </p:nvSpPr>
+        <p:spPr>
+          <a:xfrm>
+            <a:off x="548640" y="3483864"/>
+            <a:ext cx="329184" cy="329184"/>
+          </a:xfrm>
+          <a:prstGeom prst="rect">
+            <a:avLst/>
+          </a:prstGeom>
+          <a:noFill/>
+          <a:ln/>
+        </p:spPr>
+        <p:txBody>
+          <a:bodyPr wrap="square" lIns="0" tIns="0" rIns="0" bIns="0" rtlCol="0" anchor="ctr"/>
+          <a:lstStyle/>
+          <a:p>
+            <a:pPr algn="ctr" indent="0" marL="0">
+              <a:buNone/>
+            </a:pPr>
+            <a:r>
+              <a:rPr lang="en-US" sz="1100" b="1" dirty="0">
+                <a:solidFill>
+                  <a:schemeClr val="bg1"/>
+                </a:solidFill>
+                <a:latin typeface="Cambria" pitchFamily="34" charset="0"/>
+                <a:ea typeface="Cambria" pitchFamily="34" charset="-122"/>
+                <a:cs typeface="Cambria" pitchFamily="34" charset="-120"/>
+              </a:rPr>
+              <a:t>5</a:t>
+            </a:r>
+            <a:endParaRPr lang="en-US" sz="1100" dirty="0"/>
+          </a:p>
+        </p:txBody>
+      </p:sp>
+      <p:sp>
+        <p:nvSpPr>
+          <p:cNvPr id="26" name="take-head"/>
+          <p:cNvSpPr txBox="1"/>
+          <p:nvPr/>
+        </p:nvSpPr>
+        <p:spPr>
+          <a:xfrm>
+            <a:off x="987552" y="3429000"/>
+            <a:ext cx="1600200" cy="438912"/>
+          </a:xfrm>
+          <a:prstGeom prst="rect">
+            <a:avLst/>
+          </a:prstGeom>
+          <a:noFill/>
+          <a:ln/>
+        </p:spPr>
+        <p:txBody>
+          <a:bodyPr wrap="square" lIns="0" tIns="0" rIns="0" bIns="0" rtlCol="0" anchor="ctr"/>
+          <a:lstStyle/>
+          <a:p>
+            <a:pPr indent="0" marL="0">
+              <a:buNone/>
+            </a:pPr>
+            <a:r>
+              <a:rPr lang="en-US" sz="1100" b="1" dirty="0">
+                <a:solidFill>
+                  <a:schemeClr val="tx2"/>
+                </a:solidFill>
+              </a:rPr>
+              <a:t>Capping the largest deposits</a:t>
+            </a:r>
+            <a:endParaRPr lang="en-US" sz="1100" dirty="0"/>
+          </a:p>
+        </p:txBody>
+      </p:sp>
+      <p:sp>
+        <p:nvSpPr>
+          <p:cNvPr id="27" name="take-body"/>
+          <p:cNvSpPr txBox="1"/>
+          <p:nvPr/>
+        </p:nvSpPr>
+        <p:spPr>
+          <a:xfrm>
+            <a:off x="2651760" y="3429000"/>
+            <a:ext cx="3474720" cy="438912"/>
+          </a:xfrm>
+          <a:prstGeom prst="rect">
+            <a:avLst/>
+          </a:prstGeom>
+          <a:noFill/>
+          <a:ln/>
+        </p:spPr>
+        <p:txBody>
+          <a:bodyPr wrap="square" lIns="0" tIns="0" rIns="0" bIns="0" rtlCol="0" anchor="ctr"/>
+          <a:lstStyle/>
+          <a:p>
+            <a:pPr indent="0" marL="0">
+              <a:buNone/>
+            </a:pPr>
+            <a:r>
+              <a:rPr lang="en-US" sz="1000" dirty="0">
+                <a:solidFill>
+                  <a:schemeClr val="tx1"/>
+                </a:solidFill>
+              </a:rPr>
+              <a:t>A 1% cap brings failure down to the no-concentration bank’s level; the culture gradient is unchanged.</a:t>
+            </a:r>
+            <a:endParaRPr lang="en-US" sz="1000" dirty="0"/>
+          </a:p>
+        </p:txBody>
+      </p:sp>
+      <p:sp>
+        <p:nvSpPr>
+          <p:cNvPr id="28" name="take-5"/>
+          <p:cNvSpPr/>
+          <p:nvPr/>
+        </p:nvSpPr>
+        <p:spPr>
+          <a:xfrm>
+            <a:off x="457200" y="3977640"/>
+            <a:ext cx="5760720" cy="512064"/>
+          </a:xfrm>
+          <a:prstGeom prst="roundRect">
+            <a:avLst>
+              <a:gd name="adj" fmla="val 14286"/>
+            </a:avLst>
+          </a:prstGeom>
+          <a:solidFill>
+            <a:schemeClr val="accent4"/>
+          </a:solidFill>
+          <a:ln w="12700">
+            <a:solidFill>
+              <a:schemeClr val="accent4"/>
+            </a:solidFill>
+            <a:prstDash val="solid"/>
+          </a:ln>
+        </p:spPr>
+      </p:sp>
+      <p:sp>
+        <p:nvSpPr>
+          <p:cNvPr id="29" name="chip"/>
+          <p:cNvSpPr/>
+          <p:nvPr/>
+        </p:nvSpPr>
+        <p:spPr>
+          <a:xfrm>
+            <a:off x="548640" y="4069080"/>
+            <a:ext cx="329184" cy="329184"/>
+          </a:xfrm>
+          <a:prstGeom prst="roundRect">
+            <a:avLst>
+              <a:gd name="adj" fmla="val 16667"/>
+            </a:avLst>
+          </a:prstGeom>
+          <a:solidFill>
+            <a:schemeClr val="accent2"/>
+          </a:solidFill>
+          <a:ln w="12700">
+            <a:solidFill>
+              <a:schemeClr val="accent2"/>
+            </a:solidFill>
+            <a:prstDash val="solid"/>
+          </a:ln>
+        </p:spPr>
+      </p:sp>
+      <p:sp>
+        <p:nvSpPr>
+          <p:cNvPr id="30" name="chip-label"/>
+          <p:cNvSpPr txBox="1"/>
+          <p:nvPr/>
+        </p:nvSpPr>
+        <p:spPr>
+          <a:xfrm>
+            <a:off x="548640" y="4069080"/>
+            <a:ext cx="329184" cy="329184"/>
+          </a:xfrm>
+          <a:prstGeom prst="rect">
+            <a:avLst/>
+          </a:prstGeom>
+          <a:noFill/>
+          <a:ln/>
+        </p:spPr>
+        <p:txBody>
+          <a:bodyPr wrap="square" lIns="0" tIns="0" rIns="0" bIns="0" rtlCol="0" anchor="ctr"/>
+          <a:lstStyle/>
+          <a:p>
+            <a:pPr algn="ctr" indent="0" marL="0">
+              <a:buNone/>
+            </a:pPr>
+            <a:r>
+              <a:rPr lang="en-US" sz="1100" b="1" dirty="0">
+                <a:solidFill>
+                  <a:schemeClr val="bg1"/>
+                </a:solidFill>
+                <a:latin typeface="Cambria" pitchFamily="34" charset="0"/>
+                <a:ea typeface="Cambria" pitchFamily="34" charset="-122"/>
+                <a:cs typeface="Cambria" pitchFamily="34" charset="-120"/>
+              </a:rPr>
+              <a:t>6</a:t>
+            </a:r>
+            <a:endParaRPr lang="en-US" sz="1100" dirty="0"/>
+          </a:p>
+        </p:txBody>
+      </p:sp>
+      <p:sp>
+        <p:nvSpPr>
+          <p:cNvPr id="31" name="take-head"/>
+          <p:cNvSpPr txBox="1"/>
+          <p:nvPr/>
+        </p:nvSpPr>
+        <p:spPr>
+          <a:xfrm>
+            <a:off x="987552" y="4014216"/>
+            <a:ext cx="1600200" cy="438912"/>
+          </a:xfrm>
+          <a:prstGeom prst="rect">
+            <a:avLst/>
+          </a:prstGeom>
+          <a:noFill/>
+          <a:ln/>
+        </p:spPr>
+        <p:txBody>
+          <a:bodyPr wrap="square" lIns="0" tIns="0" rIns="0" bIns="0" rtlCol="0" anchor="ctr"/>
+          <a:lstStyle/>
+          <a:p>
+            <a:pPr indent="0" marL="0">
+              <a:buNone/>
+            </a:pPr>
+            <a:r>
+              <a:rPr lang="en-US" sz="1100" b="1" dirty="0">
+                <a:solidFill>
+                  <a:schemeClr val="tx2"/>
+                </a:solidFill>
+              </a:rPr>
+              <a:t>Not yet matched</a:t>
+            </a:r>
+            <a:endParaRPr lang="en-US" sz="1100" dirty="0"/>
+          </a:p>
+        </p:txBody>
+      </p:sp>
+      <p:sp>
+        <p:nvSpPr>
+          <p:cNvPr id="32" name="take-body"/>
+          <p:cNvSpPr txBox="1"/>
+          <p:nvPr/>
+        </p:nvSpPr>
+        <p:spPr>
+          <a:xfrm>
+            <a:off x="2651760" y="4014216"/>
+            <a:ext cx="3474720" cy="438912"/>
+          </a:xfrm>
+          <a:prstGeom prst="rect">
+            <a:avLst/>
+          </a:prstGeom>
+          <a:noFill/>
+          <a:ln/>
+        </p:spPr>
+        <p:txBody>
+          <a:bodyPr wrap="square" lIns="0" tIns="0" rIns="0" bIns="0" rtlCol="0" anchor="ctr"/>
+          <a:lstStyle/>
+          <a:p>
+            <a:pPr indent="0" marL="0">
+              <a:buNone/>
+            </a:pPr>
+            <a:r>
+              <a:rPr lang="en-US" sz="1000" dirty="0">
+                <a:solidFill>
+                  <a:schemeClr val="tx1"/>
+                </a:solidFill>
+              </a:rPr>
+              <a:t>How Celsius’s largest depositors exit: one-shot share 0.35 there, 0.93 or more in the model.</a:t>
+            </a:r>
+            <a:endParaRPr lang="en-US" sz="1000" dirty="0"/>
+          </a:p>
+        </p:txBody>
+      </p:sp>
+      <p:sp>
+        <p:nvSpPr>
+          <p:cNvPr id="33" name="next"/>
+          <p:cNvSpPr/>
+          <p:nvPr/>
+        </p:nvSpPr>
+        <p:spPr>
+          <a:xfrm>
+            <a:off x="6400800" y="1051560"/>
+            <a:ext cx="2286000" cy="3438144"/>
+          </a:xfrm>
+          <a:prstGeom prst="roundRect">
+            <a:avLst>
+              <a:gd name="adj" fmla="val 3200"/>
+            </a:avLst>
+          </a:prstGeom>
+          <a:solidFill>
+            <a:schemeClr val="bg2"/>
+          </a:solidFill>
+          <a:ln w="12700">
+            <a:solidFill>
+              <a:schemeClr val="bg2"/>
+            </a:solidFill>
+            <a:prstDash val="solid"/>
+          </a:ln>
+        </p:spPr>
+      </p:sp>
+      <p:sp>
+        <p:nvSpPr>
+          <p:cNvPr id="34" name="next-head"/>
+          <p:cNvSpPr txBox="1"/>
+          <p:nvPr/>
+        </p:nvSpPr>
+        <p:spPr>
+          <a:xfrm>
+            <a:off x="6537960" y="1143000"/>
+            <a:ext cx="2011680" cy="320040"/>
+          </a:xfrm>
+          <a:prstGeom prst="rect">
+            <a:avLst/>
+          </a:prstGeom>
+          <a:noFill/>
+          <a:ln/>
+        </p:spPr>
+        <p:txBody>
+          <a:bodyPr wrap="square" lIns="0" tIns="0" rIns="0" bIns="0" rtlCol="0" anchor="ctr"/>
+          <a:lstStyle/>
+          <a:p>
+            <a:pPr indent="0" marL="0">
+              <a:buNone/>
+            </a:pPr>
+            <a:r>
+              <a:rPr lang="en-US" sz="1300" b="1" dirty="0">
+                <a:solidFill>
+                  <a:schemeClr val="tx2"/>
+                </a:solidFill>
+              </a:rPr>
+              <a:t>Next steps</a:t>
+            </a:r>
+            <a:endParaRPr lang="en-US" sz="1300" dirty="0"/>
+          </a:p>
+        </p:txBody>
+      </p:sp>
+      <p:sp>
+        <p:nvSpPr>
+          <p:cNvPr id="35" name="bullets"/>
+          <p:cNvSpPr txBox="1"/>
+          <p:nvPr/>
+        </p:nvSpPr>
+        <p:spPr>
+          <a:xfrm>
+            <a:off x="6537960" y="1508760"/>
+            <a:ext cx="2011680" cy="2926080"/>
           </a:xfrm>
           <a:prstGeom prst="rect">
             <a:avLst/>
@@ -6805,16 +6745,74 @@
           <a:bodyPr wrap="square" lIns="0" tIns="0" rIns="0" bIns="0" rtlCol="0" anchor="t"/>
           <a:lstStyle/>
           <a:p>
-            <a:pPr indent="0" marL="0">
-              <a:buNone/>
+            <a:pPr marL="177800" indent="-177800">
+              <a:spcAft>
+                <a:spcPts val="700"/>
+              </a:spcAft>
+              <a:buSzPct val="100000"/>
+              <a:buChar char="•"/>
             </a:pPr>
             <a:r>
               <a:rPr lang="en-US" sz="1100" dirty="0">
                 <a:solidFill>
-                  <a:schemeClr val="accent3"/>
-                </a:solidFill>
-              </a:rPr>
-              <a:t>similar sizes (σ 1). The μ gradient is the same in all three.</a:t>
+                  <a:schemeClr val="tx1"/>
+                </a:solidFill>
+              </a:rPr>
+              <a:t>Super-individuals, to match how the largest depositors exit (Chapter 2 docking)</a:t>
+            </a:r>
+            <a:endParaRPr lang="en-US" sz="1100" dirty="0"/>
+          </a:p>
+          <a:p>
+            <a:pPr marL="177800" indent="-177800">
+              <a:spcAft>
+                <a:spcPts val="700"/>
+              </a:spcAft>
+              <a:buSzPct val="100000"/>
+              <a:buChar char="•"/>
+            </a:pPr>
+            <a:r>
+              <a:rPr lang="en-US" sz="1100" dirty="0">
+                <a:solidFill>
+                  <a:schemeClr val="tx1"/>
+                </a:solidFill>
+              </a:rPr>
+              <a:t>Deposit insurance and the reserve ratio on the fire-sale bank</a:t>
+            </a:r>
+            <a:endParaRPr lang="en-US" sz="1100" dirty="0"/>
+          </a:p>
+          <a:p>
+            <a:pPr marL="177800" indent="-177800">
+              <a:spcAft>
+                <a:spcPts val="700"/>
+              </a:spcAft>
+              <a:buSzPct val="100000"/>
+              <a:buChar char="•"/>
+            </a:pPr>
+            <a:r>
+              <a:rPr lang="en-US" sz="1100" dirty="0">
+                <a:solidFill>
+                  <a:schemeClr val="tx1"/>
+                </a:solidFill>
+              </a:rPr>
+              <a:t>Network topology and learning</a:t>
+            </a:r>
+            <a:endParaRPr lang="en-US" sz="1100" dirty="0"/>
+          </a:p>
+          <a:p>
+            <a:pPr marL="177800" indent="-177800">
+              <a:spcAft>
+                <a:spcPts val="700"/>
+              </a:spcAft>
+              <a:buSzPct val="100000"/>
+              <a:buChar char="•"/>
+            </a:pPr>
+            <a:r>
+              <a:rPr lang="en-US" sz="1100" dirty="0">
+                <a:solidFill>
+                  <a:schemeClr val="tx1"/>
+                </a:solidFill>
+              </a:rPr>
+              <a:t>Full sweep: stale public signal plus no-signal baseline, CARA 0.1, σ reported</a:t>
             </a:r>
             <a:endParaRPr lang="en-US" sz="1100" dirty="0"/>
           </a:p>
@@ -6900,8 +6898,8 @@
         </p:nvSpPr>
         <p:spPr>
           <a:xfrm>
-            <a:off x="457200" y="274320"/>
-            <a:ext cx="8229600" cy="685800"/>
+            <a:off x="548640" y="1828800"/>
+            <a:ext cx="8046720" cy="1097280"/>
           </a:xfrm>
           <a:prstGeom prst="rect">
             <a:avLst/>
@@ -6917,352 +6915,52 @@
               <a:buNone/>
             </a:pPr>
             <a:r>
-              <a:rPr lang="en-US" sz="2400" b="1" dirty="0">
-                <a:solidFill>
-                  <a:schemeClr val="tx2"/>
-                </a:solidFill>
-              </a:rPr>
-              <a:t>Does the model hold up?</a:t>
-            </a:r>
-            <a:endParaRPr lang="en-US" sz="2400" dirty="0"/>
-          </a:p>
-        </p:txBody>
-      </p:sp>
-      <p:pic>
-        <p:nvPicPr>
-          <p:cNvPr id="3" name="e01" descr="Individualists' run rate minus collectivists', relative to no news, against how far public news is from the truth: rises from negative when news is pessimistic to positive when optimistic, more steeply for the wide lambda gap.">    </p:cNvPr>
-          <p:cNvPicPr>
-            <a:picLocks noChangeAspect="1"/>
-          </p:cNvPicPr>
-          <p:nvPr/>
-        </p:nvPicPr>
-        <p:blipFill>
-          <a:blip r:embed="rId1"/>
-          <a:stretch>
-            <a:fillRect/>
-          </a:stretch>
-        </p:blipFill>
-        <p:spPr>
-          <a:xfrm>
-            <a:off x="457200" y="1051560"/>
-            <a:ext cx="5145146" cy="3291840"/>
-          </a:xfrm>
-          <a:prstGeom prst="rect">
-            <a:avLst/>
-          </a:prstGeom>
-        </p:spPr>
-      </p:pic>
-      <p:sp>
-        <p:nvSpPr>
-          <p:cNvPr id="4" name="caption"/>
-          <p:cNvSpPr txBox="1"/>
-          <p:nvPr/>
-        </p:nvSpPr>
-        <p:spPr>
-          <a:xfrm>
-            <a:off x="457200" y="4389120"/>
-            <a:ext cx="5486400" cy="274320"/>
-          </a:xfrm>
-          <a:prstGeom prst="rect">
-            <a:avLst/>
-          </a:prstGeom>
-          <a:noFill/>
-          <a:ln/>
-        </p:spPr>
-        <p:txBody>
-          <a:bodyPr wrap="square" lIns="0" tIns="0" rIns="0" bIns="0" rtlCol="0" anchor="ctr"/>
+              <a:rPr lang="en-US" sz="3200" b="1" dirty="0">
+                <a:solidFill>
+                  <a:schemeClr val="bg1"/>
+                </a:solidFill>
+              </a:rPr>
+              <a:t>Backup</a:t>
+            </a:r>
+            <a:endParaRPr lang="en-US" sz="3200" dirty="0"/>
+          </a:p>
+        </p:txBody>
+      </p:sp>
+      <p:sp>
+        <p:nvSpPr>
+          <p:cNvPr id="3" name="Text 0"/>
+          <p:cNvSpPr/>
+          <p:nvPr>
+            <p:ph idx="101" type="body" hasCustomPrompt="1"/>
+          </p:nvPr>
+        </p:nvSpPr>
+        <p:spPr>
+          <a:xfrm>
+            <a:off x="548640" y="2971800"/>
+            <a:ext cx="8046720" cy="731520"/>
+          </a:xfrm>
+          <a:prstGeom prst="rect">
+            <a:avLst/>
+          </a:prstGeom>
+          <a:noFill/>
+          <a:ln/>
+        </p:spPr>
+        <p:txBody>
+          <a:bodyPr wrap="square" lIns="0" tIns="0" rIns="0" bIns="0" rtlCol="0" anchor="t"/>
           <a:lstStyle/>
           <a:p>
             <a:pPr indent="0" marL="0">
               <a:buNone/>
             </a:pPr>
             <a:r>
-              <a:rPr lang="en-US" sz="1000" i="1" dirty="0">
-                <a:solidFill>
-                  <a:schemeClr val="accent3"/>
-                </a:solidFill>
-              </a:rPr>
-              <a:t>D relative to no news, against how far the public news sits from the truth. Shaded: where Chapter 1 predicts the sign.</a:t>
-            </a:r>
-            <a:endParaRPr lang="en-US" sz="1000" dirty="0"/>
-          </a:p>
-        </p:txBody>
-      </p:sp>
-      <p:sp>
-        <p:nvSpPr>
-          <p:cNvPr id="5" name="tests"/>
-          <p:cNvSpPr/>
-          <p:nvPr/>
-        </p:nvSpPr>
-        <p:spPr>
-          <a:xfrm>
-            <a:off x="6217920" y="1051560"/>
-            <a:ext cx="2468880" cy="2103120"/>
-          </a:xfrm>
-          <a:prstGeom prst="roundRect">
-            <a:avLst>
-              <a:gd name="adj" fmla="val 3478"/>
-            </a:avLst>
-          </a:prstGeom>
-          <a:solidFill>
-            <a:schemeClr val="bg2"/>
-          </a:solidFill>
-          <a:ln w="12700">
-            <a:solidFill>
-              <a:schemeClr val="bg2"/>
-            </a:solidFill>
-            <a:prstDash val="solid"/>
-          </a:ln>
-        </p:spPr>
-      </p:sp>
-      <p:sp>
-        <p:nvSpPr>
-          <p:cNvPr id="6" name="tests-text"/>
-          <p:cNvSpPr txBox="1"/>
-          <p:nvPr/>
-        </p:nvSpPr>
-        <p:spPr>
-          <a:xfrm>
-            <a:off x="6355080" y="1143000"/>
-            <a:ext cx="2194560" cy="1920240"/>
-          </a:xfrm>
-          <a:prstGeom prst="rect">
-            <a:avLst/>
-          </a:prstGeom>
-          <a:noFill/>
-          <a:ln/>
-        </p:spPr>
-        <p:txBody>
-          <a:bodyPr wrap="square" lIns="0" tIns="0" rIns="0" bIns="0" rtlCol="0" anchor="t"/>
-          <a:lstStyle/>
-          <a:p>
-            <a:pPr indent="0" marL="0">
-              <a:spcAft>
-                <a:spcPts val="600"/>
-              </a:spcAft>
-              <a:buNone/>
-            </a:pPr>
-            <a:r>
-              <a:rPr lang="en-US" sz="1300" b="1" dirty="0">
-                <a:solidFill>
-                  <a:schemeClr val="tx2"/>
-                </a:solidFill>
-              </a:rPr>
-              <a:t>Pre-registered tests</a:t>
-            </a:r>
-            <a:endParaRPr lang="en-US" sz="1050" dirty="0"/>
-          </a:p>
-          <a:p>
-            <a:pPr indent="0" marL="0">
-              <a:spcAft>
-                <a:spcPts val="300"/>
-              </a:spcAft>
-              <a:buNone/>
-            </a:pPr>
-            <a:r>
-              <a:rPr lang="en-US" sz="1050" dirty="0">
-                <a:solidFill>
-                  <a:schemeClr val="tx1"/>
-                </a:solidFill>
-              </a:rPr>
-              <a:t>G1′  optimistic news: individualists run more   +0.033</a:t>
-            </a:r>
-            <a:endParaRPr lang="en-US" sz="1050" dirty="0"/>
-          </a:p>
-          <a:p>
-            <a:pPr indent="0" marL="0">
-              <a:spcAft>
-                <a:spcPts val="300"/>
-              </a:spcAft>
-              <a:buNone/>
-            </a:pPr>
-            <a:r>
-              <a:rPr lang="en-US" sz="1050" dirty="0">
-                <a:solidFill>
-                  <a:schemeClr val="tx1"/>
-                </a:solidFill>
-              </a:rPr>
-              <a:t>G4′  pessimistic news: collectivists run more   −0.031</a:t>
-            </a:r>
-            <a:endParaRPr lang="en-US" sz="1050" dirty="0"/>
-          </a:p>
-          <a:p>
-            <a:pPr indent="0" marL="0">
-              <a:spcAft>
-                <a:spcPts val="300"/>
-              </a:spcAft>
-              <a:buNone/>
-            </a:pPr>
-            <a:r>
-              <a:rPr lang="en-US" sz="1050" dirty="0">
-                <a:solidFill>
-                  <a:schemeClr val="tx1"/>
-                </a:solidFill>
-              </a:rPr>
-              <a:t>G2a′  the effect grows with the λ gap   +0.093</a:t>
-            </a:r>
-            <a:endParaRPr lang="en-US" sz="1050" dirty="0"/>
-          </a:p>
-          <a:p>
-            <a:pPr indent="0" marL="0">
-              <a:buNone/>
-            </a:pPr>
-            <a:r>
-              <a:rPr lang="en-US" sz="1050" dirty="0">
-                <a:solidFill>
-                  <a:schemeClr val="accent2"/>
-                </a:solidFill>
-              </a:rPr>
-              <a:t>G3  sorting with no news: counts against (one pair wrong-signed)</a:t>
-            </a:r>
-            <a:endParaRPr lang="en-US" sz="1050" dirty="0"/>
-          </a:p>
-        </p:txBody>
-      </p:sp>
-      <p:sp>
-        <p:nvSpPr>
-          <p:cNvPr id="7" name="stat-confirmatory tests s"/>
-          <p:cNvSpPr/>
-          <p:nvPr/>
-        </p:nvSpPr>
-        <p:spPr>
-          <a:xfrm>
-            <a:off x="6217920" y="3291840"/>
-            <a:ext cx="2468880" cy="1143000"/>
-          </a:xfrm>
-          <a:prstGeom prst="roundRect">
-            <a:avLst>
-              <a:gd name="adj" fmla="val 6400"/>
-            </a:avLst>
-          </a:prstGeom>
-          <a:solidFill>
-            <a:schemeClr val="bg2"/>
-          </a:solidFill>
-          <a:ln w="12700">
-            <a:solidFill>
-              <a:schemeClr val="bg2"/>
-            </a:solidFill>
-            <a:prstDash val="solid"/>
-          </a:ln>
-        </p:spPr>
-      </p:sp>
-      <p:sp>
-        <p:nvSpPr>
-          <p:cNvPr id="8" name="stat-big"/>
-          <p:cNvSpPr txBox="1"/>
-          <p:nvPr/>
-        </p:nvSpPr>
-        <p:spPr>
-          <a:xfrm>
-            <a:off x="6355080" y="3364992"/>
-            <a:ext cx="2194560" cy="457200"/>
-          </a:xfrm>
-          <a:prstGeom prst="rect">
-            <a:avLst/>
-          </a:prstGeom>
-          <a:noFill/>
-          <a:ln/>
-        </p:spPr>
-        <p:txBody>
-          <a:bodyPr wrap="square" lIns="0" tIns="0" rIns="0" bIns="0" rtlCol="0" anchor="ctr"/>
-          <a:lstStyle/>
-          <a:p>
-            <a:pPr indent="0" marL="0">
-              <a:buNone/>
-            </a:pPr>
-            <a:r>
-              <a:rPr lang="en-US" sz="2600" b="1" dirty="0">
-                <a:solidFill>
-                  <a:schemeClr val="accent1"/>
-                </a:solidFill>
-                <a:latin typeface="Cambria" pitchFamily="34" charset="0"/>
-                <a:ea typeface="Cambria" pitchFamily="34" charset="-122"/>
-                <a:cs typeface="Cambria" pitchFamily="34" charset="-120"/>
-              </a:rPr>
-              <a:t>3 of 4</a:t>
-            </a:r>
-            <a:endParaRPr lang="en-US" sz="2600" dirty="0"/>
-          </a:p>
-        </p:txBody>
-      </p:sp>
-      <p:sp>
-        <p:nvSpPr>
-          <p:cNvPr id="9" name="stat-label"/>
-          <p:cNvSpPr txBox="1"/>
-          <p:nvPr/>
-        </p:nvSpPr>
-        <p:spPr>
-          <a:xfrm>
-            <a:off x="6355080" y="3840480"/>
-            <a:ext cx="2194560" cy="539496"/>
-          </a:xfrm>
-          <a:prstGeom prst="rect">
-            <a:avLst/>
-          </a:prstGeom>
-          <a:noFill/>
-          <a:ln/>
-        </p:spPr>
-        <p:txBody>
-          <a:bodyPr wrap="square" lIns="0" tIns="0" rIns="0" bIns="0" rtlCol="0" anchor="t"/>
-          <a:lstStyle/>
-          <a:p>
-            <a:pPr indent="0" marL="0">
-              <a:buNone/>
-            </a:pPr>
-            <a:r>
-              <a:rPr lang="en-US" sz="1100" dirty="0">
-                <a:solidFill>
-                  <a:schemeClr val="accent3"/>
-                </a:solidFill>
-              </a:rPr>
-              <a:t>confirmatory tests support the theory, on all three versions of the bank</a:t>
-            </a:r>
-            <a:endParaRPr lang="en-US" sz="1100" dirty="0"/>
-          </a:p>
-        </p:txBody>
-      </p:sp>
-      <p:sp>
-        <p:nvSpPr>
-          <p:cNvPr id="25" name="Slide Number Placeholder 0"/>
-          <p:cNvSpPr>
-            <a:spLocks noGrp="1"/>
-          </p:cNvSpPr>
-          <p:nvPr>
-            <p:ph type="sldNum" sz="quarter" idx="4294967295"/>
-          </p:nvPr>
-        </p:nvSpPr>
-        <p:spPr>
-          <a:xfrm>
-            <a:off x="8321040" y="4754880"/>
-            <a:ext cx="457200" cy="274320"/>
-          </a:xfrm>
-          <a:prstGeom prst="rect">
-            <a:avLst/>
-          </a:prstGeom>
-          <a:extLst>
-            <a:ext uri="{C572A759-6A51-4108-AA02-DFA0A04FC94B}">
-              <ma14:wrappingTextBoxFlag xmlns:ma14="http://schemas.microsoft.com/office/mac/drawingml/2011/main" val="0"/>
-            </a:ext>
-          </a:extLst>
-        </p:spPr>
-        <p:txBody>
-          <a:bodyPr/>
-          <a:lstStyle>
-            <a:lvl1pPr>
-              <a:defRPr sz="900">
-                <a:solidFill>
-                  <a:srgbClr val="6B7280"/>
-                </a:solidFill>
-              </a:defRPr>
-            </a:lvl1pPr>
-          </a:lstStyle>
-          <a:p>
-            <a:pPr algn="r"/>
-            <a:fld id="{F7021451-1387-4CA6-816F-3879F97B5CBC}" type="slidenum">
-              <a:rPr b="0" lang="en-US"/>
-              <a:t>16</a:t>
-            </a:fld>
-            <a:endParaRPr lang="en-US"/>
+              <a:rPr lang="en-US" sz="1600" dirty="0">
+                <a:solidFill>
+                  <a:schemeClr val="accent4"/>
+                </a:solidFill>
+              </a:rPr>
+              <a:t>Technical versions of the exhibits, the pre-registered tests, channels, and the Celsius docking gap.</a:t>
+            </a:r>
+            <a:endParaRPr lang="en-US" sz="1600" dirty="0"/>
           </a:p>
         </p:txBody>
       </p:sp>
@@ -7323,76 +7021,46 @@
                   <a:schemeClr val="tx2"/>
                 </a:solidFill>
               </a:rPr>
-              <a:t>Takeaways and next steps</a:t>
+              <a:t>Who withdraws, by type and mix</a:t>
             </a:r>
             <a:endParaRPr lang="en-US" sz="2400" dirty="0"/>
           </a:p>
         </p:txBody>
       </p:sp>
-      <p:sp>
-        <p:nvSpPr>
-          <p:cNvPr id="3" name="take-0"/>
-          <p:cNvSpPr/>
-          <p:nvPr/>
-        </p:nvSpPr>
-        <p:spPr>
-          <a:xfrm>
-            <a:off x="457200" y="1051560"/>
-            <a:ext cx="5760720" cy="512064"/>
-          </a:xfrm>
-          <a:prstGeom prst="roundRect">
-            <a:avLst>
-              <a:gd name="adj" fmla="val 14286"/>
-            </a:avLst>
-          </a:prstGeom>
-          <a:solidFill>
-            <a:schemeClr val="bg2"/>
-          </a:solidFill>
-          <a:ln w="12700">
-            <a:solidFill>
-              <a:schemeClr val="bg2"/>
-            </a:solidFill>
-            <a:prstDash val="solid"/>
-          </a:ln>
-        </p:spPr>
-      </p:sp>
-      <p:sp>
-        <p:nvSpPr>
-          <p:cNvPr id="4" name="chip"/>
-          <p:cNvSpPr/>
-          <p:nvPr/>
-        </p:nvSpPr>
-        <p:spPr>
-          <a:xfrm>
-            <a:off x="548640" y="1143000"/>
-            <a:ext cx="329184" cy="329184"/>
-          </a:xfrm>
-          <a:prstGeom prst="roundRect">
-            <a:avLst>
-              <a:gd name="adj" fmla="val 16667"/>
-            </a:avLst>
-          </a:prstGeom>
-          <a:solidFill>
-            <a:schemeClr val="accent1"/>
-          </a:solidFill>
-          <a:ln w="12700">
-            <a:solidFill>
-              <a:schemeClr val="accent1"/>
-            </a:solidFill>
-            <a:prstDash val="solid"/>
-          </a:ln>
-        </p:spPr>
-      </p:sp>
-      <p:sp>
-        <p:nvSpPr>
-          <p:cNvPr id="5" name="chip-label"/>
+      <p:pic>
+        <p:nvPicPr>
+          <p:cNvPr id="3" name="e06" descr="Share who withdraw by individualist share, three panels by lambda pair: collectivists above individualists at every mixed share for the two wide gaps.">    </p:cNvPr>
+          <p:cNvPicPr>
+            <a:picLocks noChangeAspect="1"/>
+          </p:cNvPicPr>
+          <p:nvPr/>
+        </p:nvPicPr>
+        <p:blipFill>
+          <a:blip r:embed="rId1"/>
+          <a:stretch>
+            <a:fillRect/>
+          </a:stretch>
+        </p:blipFill>
+        <p:spPr>
+          <a:xfrm>
+            <a:off x="512064" y="1051560"/>
+            <a:ext cx="8119872" cy="3383280"/>
+          </a:xfrm>
+          <a:prstGeom prst="rect">
+            <a:avLst/>
+          </a:prstGeom>
+        </p:spPr>
+      </p:pic>
+      <p:sp>
+        <p:nvSpPr>
+          <p:cNvPr id="4" name="caption"/>
           <p:cNvSpPr txBox="1"/>
           <p:nvPr/>
         </p:nvSpPr>
         <p:spPr>
           <a:xfrm>
-            <a:off x="548640" y="1143000"/>
-            <a:ext cx="329184" cy="329184"/>
+            <a:off x="457200" y="4480560"/>
+            <a:ext cx="8229600" cy="274320"/>
           </a:xfrm>
           <a:prstGeom prst="rect">
             <a:avLst/>
@@ -7404,1075 +7072,18 @@
           <a:bodyPr wrap="square" lIns="0" tIns="0" rIns="0" bIns="0" rtlCol="0" anchor="ctr"/>
           <a:lstStyle/>
           <a:p>
-            <a:pPr algn="ctr" indent="0" marL="0">
-              <a:buNone/>
-            </a:pPr>
-            <a:r>
-              <a:rPr lang="en-US" sz="1100" b="1" dirty="0">
-                <a:solidFill>
-                  <a:schemeClr val="bg1"/>
-                </a:solidFill>
-                <a:latin typeface="Cambria" pitchFamily="34" charset="0"/>
-                <a:ea typeface="Cambria" pitchFamily="34" charset="-122"/>
-                <a:cs typeface="Cambria" pitchFamily="34" charset="-120"/>
-              </a:rPr>
-              <a:t>1</a:t>
-            </a:r>
-            <a:endParaRPr lang="en-US" sz="1100" dirty="0"/>
-          </a:p>
-        </p:txBody>
-      </p:sp>
-      <p:sp>
-        <p:nvSpPr>
-          <p:cNvPr id="6" name="take-head"/>
-          <p:cNvSpPr txBox="1"/>
-          <p:nvPr/>
-        </p:nvSpPr>
-        <p:spPr>
-          <a:xfrm>
-            <a:off x="987552" y="1088136"/>
-            <a:ext cx="1600200" cy="438912"/>
-          </a:xfrm>
-          <a:prstGeom prst="rect">
-            <a:avLst/>
-          </a:prstGeom>
-          <a:noFill/>
-          <a:ln/>
-        </p:spPr>
-        <p:txBody>
-          <a:bodyPr wrap="square" lIns="0" tIns="0" rIns="0" bIns="0" rtlCol="0" anchor="ctr"/>
-          <a:lstStyle/>
-          <a:p>
             <a:pPr indent="0" marL="0">
               <a:buNone/>
             </a:pPr>
             <a:r>
-              <a:rPr lang="en-US" sz="1100" b="1" dirty="0">
-                <a:solidFill>
-                  <a:schemeClr val="tx2"/>
-                </a:solidFill>
-              </a:rPr>
-              <a:t>Sorting follows the news</a:t>
-            </a:r>
-            <a:endParaRPr lang="en-US" sz="1100" dirty="0"/>
-          </a:p>
-        </p:txBody>
-      </p:sp>
-      <p:sp>
-        <p:nvSpPr>
-          <p:cNvPr id="7" name="take-body"/>
-          <p:cNvSpPr txBox="1"/>
-          <p:nvPr/>
-        </p:nvSpPr>
-        <p:spPr>
-          <a:xfrm>
-            <a:off x="2651760" y="1088136"/>
-            <a:ext cx="3474720" cy="438912"/>
-          </a:xfrm>
-          <a:prstGeom prst="rect">
-            <a:avLst/>
-          </a:prstGeom>
-          <a:noFill/>
-          <a:ln/>
-        </p:spPr>
-        <p:txBody>
-          <a:bodyPr wrap="square" lIns="0" tIns="0" rIns="0" bIns="0" rtlCol="0" anchor="ctr"/>
-          <a:lstStyle/>
-          <a:p>
-            <a:pPr indent="0" marL="0">
-              <a:buNone/>
-            </a:pPr>
-            <a:r>
-              <a:rPr lang="en-US" sz="1000" dirty="0">
-                <a:solidFill>
-                  <a:schemeClr val="tx1"/>
-                </a:solidFill>
-              </a:rPr>
-              <a:t>Optimistic public news makes individualists run relatively more; pessimistic news, collectivists. 3 of 4 pre-registered tests pass, in all three bank versions.</a:t>
+              <a:rPr lang="en-US" sz="1000" i="1" dirty="0">
+                <a:solidFill>
+                  <a:schemeClr val="accent3"/>
+                </a:solidFill>
+              </a:rPr>
+              <a:t>Share who withdraw by individualist share μ, one panel per λ pair; orange individualists, blue collectivists, with CIs.</a:t>
             </a:r>
             <a:endParaRPr lang="en-US" sz="1000" dirty="0"/>
-          </a:p>
-        </p:txBody>
-      </p:sp>
-      <p:sp>
-        <p:nvSpPr>
-          <p:cNvPr id="8" name="take-1"/>
-          <p:cNvSpPr/>
-          <p:nvPr/>
-        </p:nvSpPr>
-        <p:spPr>
-          <a:xfrm>
-            <a:off x="457200" y="1636776"/>
-            <a:ext cx="5760720" cy="512064"/>
-          </a:xfrm>
-          <a:prstGeom prst="roundRect">
-            <a:avLst>
-              <a:gd name="adj" fmla="val 14286"/>
-            </a:avLst>
-          </a:prstGeom>
-          <a:solidFill>
-            <a:schemeClr val="bg2"/>
-          </a:solidFill>
-          <a:ln w="12700">
-            <a:solidFill>
-              <a:schemeClr val="bg2"/>
-            </a:solidFill>
-            <a:prstDash val="solid"/>
-          </a:ln>
-        </p:spPr>
-      </p:sp>
-      <p:sp>
-        <p:nvSpPr>
-          <p:cNvPr id="9" name="chip"/>
-          <p:cNvSpPr/>
-          <p:nvPr/>
-        </p:nvSpPr>
-        <p:spPr>
-          <a:xfrm>
-            <a:off x="548640" y="1728216"/>
-            <a:ext cx="329184" cy="329184"/>
-          </a:xfrm>
-          <a:prstGeom prst="roundRect">
-            <a:avLst>
-              <a:gd name="adj" fmla="val 16667"/>
-            </a:avLst>
-          </a:prstGeom>
-          <a:solidFill>
-            <a:schemeClr val="accent1"/>
-          </a:solidFill>
-          <a:ln w="12700">
-            <a:solidFill>
-              <a:schemeClr val="accent1"/>
-            </a:solidFill>
-            <a:prstDash val="solid"/>
-          </a:ln>
-        </p:spPr>
-      </p:sp>
-      <p:sp>
-        <p:nvSpPr>
-          <p:cNvPr id="10" name="chip-label"/>
-          <p:cNvSpPr txBox="1"/>
-          <p:nvPr/>
-        </p:nvSpPr>
-        <p:spPr>
-          <a:xfrm>
-            <a:off x="548640" y="1728216"/>
-            <a:ext cx="329184" cy="329184"/>
-          </a:xfrm>
-          <a:prstGeom prst="rect">
-            <a:avLst/>
-          </a:prstGeom>
-          <a:noFill/>
-          <a:ln/>
-        </p:spPr>
-        <p:txBody>
-          <a:bodyPr wrap="square" lIns="0" tIns="0" rIns="0" bIns="0" rtlCol="0" anchor="ctr"/>
-          <a:lstStyle/>
-          <a:p>
-            <a:pPr algn="ctr" indent="0" marL="0">
-              <a:buNone/>
-            </a:pPr>
-            <a:r>
-              <a:rPr lang="en-US" sz="1100" b="1" dirty="0">
-                <a:solidFill>
-                  <a:schemeClr val="bg1"/>
-                </a:solidFill>
-                <a:latin typeface="Cambria" pitchFamily="34" charset="0"/>
-                <a:ea typeface="Cambria" pitchFamily="34" charset="-122"/>
-                <a:cs typeface="Cambria" pitchFamily="34" charset="-120"/>
-              </a:rPr>
-              <a:t>2</a:t>
-            </a:r>
-            <a:endParaRPr lang="en-US" sz="1100" dirty="0"/>
-          </a:p>
-        </p:txBody>
-      </p:sp>
-      <p:sp>
-        <p:nvSpPr>
-          <p:cNvPr id="11" name="take-head"/>
-          <p:cNvSpPr txBox="1"/>
-          <p:nvPr/>
-        </p:nvSpPr>
-        <p:spPr>
-          <a:xfrm>
-            <a:off x="987552" y="1673352"/>
-            <a:ext cx="1600200" cy="438912"/>
-          </a:xfrm>
-          <a:prstGeom prst="rect">
-            <a:avLst/>
-          </a:prstGeom>
-          <a:noFill/>
-          <a:ln/>
-        </p:spPr>
-        <p:txBody>
-          <a:bodyPr wrap="square" lIns="0" tIns="0" rIns="0" bIns="0" rtlCol="0" anchor="ctr"/>
-          <a:lstStyle/>
-          <a:p>
-            <a:pPr indent="0" marL="0">
-              <a:buNone/>
-            </a:pPr>
-            <a:r>
-              <a:rPr lang="en-US" sz="1100" b="1" dirty="0">
-                <a:solidFill>
-                  <a:schemeClr val="tx2"/>
-                </a:solidFill>
-              </a:rPr>
-              <a:t>Collectivists herd</a:t>
-            </a:r>
-            <a:endParaRPr lang="en-US" sz="1100" dirty="0"/>
-          </a:p>
-        </p:txBody>
-      </p:sp>
-      <p:sp>
-        <p:nvSpPr>
-          <p:cNvPr id="12" name="take-body"/>
-          <p:cNvSpPr txBox="1"/>
-          <p:nvPr/>
-        </p:nvSpPr>
-        <p:spPr>
-          <a:xfrm>
-            <a:off x="2651760" y="1673352"/>
-            <a:ext cx="3474720" cy="438912"/>
-          </a:xfrm>
-          <a:prstGeom prst="rect">
-            <a:avLst/>
-          </a:prstGeom>
-          <a:noFill/>
-          <a:ln/>
-        </p:spPr>
-        <p:txBody>
-          <a:bodyPr wrap="square" lIns="0" tIns="0" rIns="0" bIns="0" rtlCol="0" anchor="ctr"/>
-          <a:lstStyle/>
-          <a:p>
-            <a:pPr indent="0" marL="0">
-              <a:buNone/>
-            </a:pPr>
-            <a:r>
-              <a:rPr lang="en-US" sz="1000" dirty="0">
-                <a:solidFill>
-                  <a:schemeClr val="tx1"/>
-                </a:solidFill>
-              </a:rPr>
-              <a:t>Their chance of withdrawing jumps from 0.15 to 0.93 once 20–35% of neighbours are out; individualists level off near 0.3.</a:t>
-            </a:r>
-            <a:endParaRPr lang="en-US" sz="1000" dirty="0"/>
-          </a:p>
-        </p:txBody>
-      </p:sp>
-      <p:sp>
-        <p:nvSpPr>
-          <p:cNvPr id="13" name="take-2"/>
-          <p:cNvSpPr/>
-          <p:nvPr/>
-        </p:nvSpPr>
-        <p:spPr>
-          <a:xfrm>
-            <a:off x="457200" y="2221992"/>
-            <a:ext cx="5760720" cy="512064"/>
-          </a:xfrm>
-          <a:prstGeom prst="roundRect">
-            <a:avLst>
-              <a:gd name="adj" fmla="val 14286"/>
-            </a:avLst>
-          </a:prstGeom>
-          <a:solidFill>
-            <a:schemeClr val="bg2"/>
-          </a:solidFill>
-          <a:ln w="12700">
-            <a:solidFill>
-              <a:schemeClr val="bg2"/>
-            </a:solidFill>
-            <a:prstDash val="solid"/>
-          </a:ln>
-        </p:spPr>
-      </p:sp>
-      <p:sp>
-        <p:nvSpPr>
-          <p:cNvPr id="14" name="chip"/>
-          <p:cNvSpPr/>
-          <p:nvPr/>
-        </p:nvSpPr>
-        <p:spPr>
-          <a:xfrm>
-            <a:off x="548640" y="2313432"/>
-            <a:ext cx="329184" cy="329184"/>
-          </a:xfrm>
-          <a:prstGeom prst="roundRect">
-            <a:avLst>
-              <a:gd name="adj" fmla="val 16667"/>
-            </a:avLst>
-          </a:prstGeom>
-          <a:solidFill>
-            <a:schemeClr val="accent1"/>
-          </a:solidFill>
-          <a:ln w="12700">
-            <a:solidFill>
-              <a:schemeClr val="accent1"/>
-            </a:solidFill>
-            <a:prstDash val="solid"/>
-          </a:ln>
-        </p:spPr>
-      </p:sp>
-      <p:sp>
-        <p:nvSpPr>
-          <p:cNvPr id="15" name="chip-label"/>
-          <p:cNvSpPr txBox="1"/>
-          <p:nvPr/>
-        </p:nvSpPr>
-        <p:spPr>
-          <a:xfrm>
-            <a:off x="548640" y="2313432"/>
-            <a:ext cx="329184" cy="329184"/>
-          </a:xfrm>
-          <a:prstGeom prst="rect">
-            <a:avLst/>
-          </a:prstGeom>
-          <a:noFill/>
-          <a:ln/>
-        </p:spPr>
-        <p:txBody>
-          <a:bodyPr wrap="square" lIns="0" tIns="0" rIns="0" bIns="0" rtlCol="0" anchor="ctr"/>
-          <a:lstStyle/>
-          <a:p>
-            <a:pPr algn="ctr" indent="0" marL="0">
-              <a:buNone/>
-            </a:pPr>
-            <a:r>
-              <a:rPr lang="en-US" sz="1100" b="1" dirty="0">
-                <a:solidFill>
-                  <a:schemeClr val="bg1"/>
-                </a:solidFill>
-                <a:latin typeface="Cambria" pitchFamily="34" charset="0"/>
-                <a:ea typeface="Cambria" pitchFamily="34" charset="-122"/>
-                <a:cs typeface="Cambria" pitchFamily="34" charset="-120"/>
-              </a:rPr>
-              <a:t>3</a:t>
-            </a:r>
-            <a:endParaRPr lang="en-US" sz="1100" dirty="0"/>
-          </a:p>
-        </p:txBody>
-      </p:sp>
-      <p:sp>
-        <p:nvSpPr>
-          <p:cNvPr id="16" name="take-head"/>
-          <p:cNvSpPr txBox="1"/>
-          <p:nvPr/>
-        </p:nvSpPr>
-        <p:spPr>
-          <a:xfrm>
-            <a:off x="987552" y="2258568"/>
-            <a:ext cx="1600200" cy="438912"/>
-          </a:xfrm>
-          <a:prstGeom prst="rect">
-            <a:avLst/>
-          </a:prstGeom>
-          <a:noFill/>
-          <a:ln/>
-        </p:spPr>
-        <p:txBody>
-          <a:bodyPr wrap="square" lIns="0" tIns="0" rIns="0" bIns="0" rtlCol="0" anchor="ctr"/>
-          <a:lstStyle/>
-          <a:p>
-            <a:pPr indent="0" marL="0">
-              <a:buNone/>
-            </a:pPr>
-            <a:r>
-              <a:rPr lang="en-US" sz="1100" b="1" dirty="0">
-                <a:solidFill>
-                  <a:schemeClr val="tx2"/>
-                </a:solidFill>
-              </a:rPr>
-              <a:t>More individualists, fewer failures</a:t>
-            </a:r>
-            <a:endParaRPr lang="en-US" sz="1100" dirty="0"/>
-          </a:p>
-        </p:txBody>
-      </p:sp>
-      <p:sp>
-        <p:nvSpPr>
-          <p:cNvPr id="17" name="take-body"/>
-          <p:cNvSpPr txBox="1"/>
-          <p:nvPr/>
-        </p:nvSpPr>
-        <p:spPr>
-          <a:xfrm>
-            <a:off x="2651760" y="2258568"/>
-            <a:ext cx="3474720" cy="438912"/>
-          </a:xfrm>
-          <a:prstGeom prst="rect">
-            <a:avLst/>
-          </a:prstGeom>
-          <a:noFill/>
-          <a:ln/>
-        </p:spPr>
-        <p:txBody>
-          <a:bodyPr wrap="square" lIns="0" tIns="0" rIns="0" bIns="0" rtlCol="0" anchor="ctr"/>
-          <a:lstStyle/>
-          <a:p>
-            <a:pPr indent="0" marL="0">
-              <a:buNone/>
-            </a:pPr>
-            <a:r>
-              <a:rPr lang="en-US" sz="1000" dirty="0">
-                <a:solidFill>
-                  <a:schemeClr val="tx1"/>
-                </a:solidFill>
-              </a:rPr>
-              <a:t>P(fail) falls from 0.67 to 0.08 as the individualist share goes from 0 to 1. Monotone; no interior peak.</a:t>
-            </a:r>
-            <a:endParaRPr lang="en-US" sz="1000" dirty="0"/>
-          </a:p>
-        </p:txBody>
-      </p:sp>
-      <p:sp>
-        <p:nvSpPr>
-          <p:cNvPr id="18" name="take-3"/>
-          <p:cNvSpPr/>
-          <p:nvPr/>
-        </p:nvSpPr>
-        <p:spPr>
-          <a:xfrm>
-            <a:off x="457200" y="2807208"/>
-            <a:ext cx="5760720" cy="512064"/>
-          </a:xfrm>
-          <a:prstGeom prst="roundRect">
-            <a:avLst>
-              <a:gd name="adj" fmla="val 14286"/>
-            </a:avLst>
-          </a:prstGeom>
-          <a:solidFill>
-            <a:schemeClr val="bg2"/>
-          </a:solidFill>
-          <a:ln w="12700">
-            <a:solidFill>
-              <a:schemeClr val="bg2"/>
-            </a:solidFill>
-            <a:prstDash val="solid"/>
-          </a:ln>
-        </p:spPr>
-      </p:sp>
-      <p:sp>
-        <p:nvSpPr>
-          <p:cNvPr id="19" name="chip"/>
-          <p:cNvSpPr/>
-          <p:nvPr/>
-        </p:nvSpPr>
-        <p:spPr>
-          <a:xfrm>
-            <a:off x="548640" y="2898648"/>
-            <a:ext cx="329184" cy="329184"/>
-          </a:xfrm>
-          <a:prstGeom prst="roundRect">
-            <a:avLst>
-              <a:gd name="adj" fmla="val 16667"/>
-            </a:avLst>
-          </a:prstGeom>
-          <a:solidFill>
-            <a:schemeClr val="accent1"/>
-          </a:solidFill>
-          <a:ln w="12700">
-            <a:solidFill>
-              <a:schemeClr val="accent1"/>
-            </a:solidFill>
-            <a:prstDash val="solid"/>
-          </a:ln>
-        </p:spPr>
-      </p:sp>
-      <p:sp>
-        <p:nvSpPr>
-          <p:cNvPr id="20" name="chip-label"/>
-          <p:cNvSpPr txBox="1"/>
-          <p:nvPr/>
-        </p:nvSpPr>
-        <p:spPr>
-          <a:xfrm>
-            <a:off x="548640" y="2898648"/>
-            <a:ext cx="329184" cy="329184"/>
-          </a:xfrm>
-          <a:prstGeom prst="rect">
-            <a:avLst/>
-          </a:prstGeom>
-          <a:noFill/>
-          <a:ln/>
-        </p:spPr>
-        <p:txBody>
-          <a:bodyPr wrap="square" lIns="0" tIns="0" rIns="0" bIns="0" rtlCol="0" anchor="ctr"/>
-          <a:lstStyle/>
-          <a:p>
-            <a:pPr algn="ctr" indent="0" marL="0">
-              <a:buNone/>
-            </a:pPr>
-            <a:r>
-              <a:rPr lang="en-US" sz="1100" b="1" dirty="0">
-                <a:solidFill>
-                  <a:schemeClr val="bg1"/>
-                </a:solidFill>
-                <a:latin typeface="Cambria" pitchFamily="34" charset="0"/>
-                <a:ea typeface="Cambria" pitchFamily="34" charset="-122"/>
-                <a:cs typeface="Cambria" pitchFamily="34" charset="-120"/>
-              </a:rPr>
-              <a:t>4</a:t>
-            </a:r>
-            <a:endParaRPr lang="en-US" sz="1100" dirty="0"/>
-          </a:p>
-        </p:txBody>
-      </p:sp>
-      <p:sp>
-        <p:nvSpPr>
-          <p:cNvPr id="21" name="take-head"/>
-          <p:cNvSpPr txBox="1"/>
-          <p:nvPr/>
-        </p:nvSpPr>
-        <p:spPr>
-          <a:xfrm>
-            <a:off x="987552" y="2843784"/>
-            <a:ext cx="1600200" cy="438912"/>
-          </a:xfrm>
-          <a:prstGeom prst="rect">
-            <a:avLst/>
-          </a:prstGeom>
-          <a:noFill/>
-          <a:ln/>
-        </p:spPr>
-        <p:txBody>
-          <a:bodyPr wrap="square" lIns="0" tIns="0" rIns="0" bIns="0" rtlCol="0" anchor="ctr"/>
-          <a:lstStyle/>
-          <a:p>
-            <a:pPr indent="0" marL="0">
-              <a:buNone/>
-            </a:pPr>
-            <a:r>
-              <a:rPr lang="en-US" sz="1100" b="1" dirty="0">
-                <a:solidFill>
-                  <a:schemeClr val="tx2"/>
-                </a:solidFill>
-              </a:rPr>
-              <a:t>Stale news cuts both ways</a:t>
-            </a:r>
-            <a:endParaRPr lang="en-US" sz="1100" dirty="0"/>
-          </a:p>
-        </p:txBody>
-      </p:sp>
-      <p:sp>
-        <p:nvSpPr>
-          <p:cNvPr id="22" name="take-body"/>
-          <p:cNvSpPr txBox="1"/>
-          <p:nvPr/>
-        </p:nvSpPr>
-        <p:spPr>
-          <a:xfrm>
-            <a:off x="2651760" y="2843784"/>
-            <a:ext cx="3474720" cy="438912"/>
-          </a:xfrm>
-          <a:prstGeom prst="rect">
-            <a:avLst/>
-          </a:prstGeom>
-          <a:noFill/>
-          <a:ln/>
-        </p:spPr>
-        <p:txBody>
-          <a:bodyPr wrap="square" lIns="0" tIns="0" rIns="0" bIns="0" rtlCol="0" anchor="ctr"/>
-          <a:lstStyle/>
-          <a:p>
-            <a:pPr indent="0" marL="0">
-              <a:buNone/>
-            </a:pPr>
-            <a:r>
-              <a:rPr lang="en-US" sz="1000" dirty="0">
-                <a:solidFill>
-                  <a:schemeClr val="tx1"/>
-                </a:solidFill>
-              </a:rPr>
-              <a:t>A stale optimistic signal halves failure, a stale pessimistic one raises it by half. Accurate news barely moves it.</a:t>
-            </a:r>
-            <a:endParaRPr lang="en-US" sz="1000" dirty="0"/>
-          </a:p>
-        </p:txBody>
-      </p:sp>
-      <p:sp>
-        <p:nvSpPr>
-          <p:cNvPr id="23" name="take-4"/>
-          <p:cNvSpPr/>
-          <p:nvPr/>
-        </p:nvSpPr>
-        <p:spPr>
-          <a:xfrm>
-            <a:off x="457200" y="3392424"/>
-            <a:ext cx="5760720" cy="512064"/>
-          </a:xfrm>
-          <a:prstGeom prst="roundRect">
-            <a:avLst>
-              <a:gd name="adj" fmla="val 14286"/>
-            </a:avLst>
-          </a:prstGeom>
-          <a:solidFill>
-            <a:schemeClr val="bg2"/>
-          </a:solidFill>
-          <a:ln w="12700">
-            <a:solidFill>
-              <a:schemeClr val="bg2"/>
-            </a:solidFill>
-            <a:prstDash val="solid"/>
-          </a:ln>
-        </p:spPr>
-      </p:sp>
-      <p:sp>
-        <p:nvSpPr>
-          <p:cNvPr id="24" name="chip"/>
-          <p:cNvSpPr/>
-          <p:nvPr/>
-        </p:nvSpPr>
-        <p:spPr>
-          <a:xfrm>
-            <a:off x="548640" y="3483864"/>
-            <a:ext cx="329184" cy="329184"/>
-          </a:xfrm>
-          <a:prstGeom prst="roundRect">
-            <a:avLst>
-              <a:gd name="adj" fmla="val 16667"/>
-            </a:avLst>
-          </a:prstGeom>
-          <a:solidFill>
-            <a:schemeClr val="accent1"/>
-          </a:solidFill>
-          <a:ln w="12700">
-            <a:solidFill>
-              <a:schemeClr val="accent1"/>
-            </a:solidFill>
-            <a:prstDash val="solid"/>
-          </a:ln>
-        </p:spPr>
-      </p:sp>
-      <p:sp>
-        <p:nvSpPr>
-          <p:cNvPr id="25" name="chip-label"/>
-          <p:cNvSpPr txBox="1"/>
-          <p:nvPr/>
-        </p:nvSpPr>
-        <p:spPr>
-          <a:xfrm>
-            <a:off x="548640" y="3483864"/>
-            <a:ext cx="329184" cy="329184"/>
-          </a:xfrm>
-          <a:prstGeom prst="rect">
-            <a:avLst/>
-          </a:prstGeom>
-          <a:noFill/>
-          <a:ln/>
-        </p:spPr>
-        <p:txBody>
-          <a:bodyPr wrap="square" lIns="0" tIns="0" rIns="0" bIns="0" rtlCol="0" anchor="ctr"/>
-          <a:lstStyle/>
-          <a:p>
-            <a:pPr algn="ctr" indent="0" marL="0">
-              <a:buNone/>
-            </a:pPr>
-            <a:r>
-              <a:rPr lang="en-US" sz="1100" b="1" dirty="0">
-                <a:solidFill>
-                  <a:schemeClr val="bg1"/>
-                </a:solidFill>
-                <a:latin typeface="Cambria" pitchFamily="34" charset="0"/>
-                <a:ea typeface="Cambria" pitchFamily="34" charset="-122"/>
-                <a:cs typeface="Cambria" pitchFamily="34" charset="-120"/>
-              </a:rPr>
-              <a:t>5</a:t>
-            </a:r>
-            <a:endParaRPr lang="en-US" sz="1100" dirty="0"/>
-          </a:p>
-        </p:txBody>
-      </p:sp>
-      <p:sp>
-        <p:nvSpPr>
-          <p:cNvPr id="26" name="take-head"/>
-          <p:cNvSpPr txBox="1"/>
-          <p:nvPr/>
-        </p:nvSpPr>
-        <p:spPr>
-          <a:xfrm>
-            <a:off x="987552" y="3429000"/>
-            <a:ext cx="1600200" cy="438912"/>
-          </a:xfrm>
-          <a:prstGeom prst="rect">
-            <a:avLst/>
-          </a:prstGeom>
-          <a:noFill/>
-          <a:ln/>
-        </p:spPr>
-        <p:txBody>
-          <a:bodyPr wrap="square" lIns="0" tIns="0" rIns="0" bIns="0" rtlCol="0" anchor="ctr"/>
-          <a:lstStyle/>
-          <a:p>
-            <a:pPr indent="0" marL="0">
-              <a:buNone/>
-            </a:pPr>
-            <a:r>
-              <a:rPr lang="en-US" sz="1100" b="1" dirty="0">
-                <a:solidFill>
-                  <a:schemeClr val="tx2"/>
-                </a:solidFill>
-              </a:rPr>
-              <a:t>Capping the largest deposits</a:t>
-            </a:r>
-            <a:endParaRPr lang="en-US" sz="1100" dirty="0"/>
-          </a:p>
-        </p:txBody>
-      </p:sp>
-      <p:sp>
-        <p:nvSpPr>
-          <p:cNvPr id="27" name="take-body"/>
-          <p:cNvSpPr txBox="1"/>
-          <p:nvPr/>
-        </p:nvSpPr>
-        <p:spPr>
-          <a:xfrm>
-            <a:off x="2651760" y="3429000"/>
-            <a:ext cx="3474720" cy="438912"/>
-          </a:xfrm>
-          <a:prstGeom prst="rect">
-            <a:avLst/>
-          </a:prstGeom>
-          <a:noFill/>
-          <a:ln/>
-        </p:spPr>
-        <p:txBody>
-          <a:bodyPr wrap="square" lIns="0" tIns="0" rIns="0" bIns="0" rtlCol="0" anchor="ctr"/>
-          <a:lstStyle/>
-          <a:p>
-            <a:pPr indent="0" marL="0">
-              <a:buNone/>
-            </a:pPr>
-            <a:r>
-              <a:rPr lang="en-US" sz="1000" dirty="0">
-                <a:solidFill>
-                  <a:schemeClr val="tx1"/>
-                </a:solidFill>
-              </a:rPr>
-              <a:t>A 1% cap brings failure down to the no-concentration bank’s level; the culture gradient is unchanged.</a:t>
-            </a:r>
-            <a:endParaRPr lang="en-US" sz="1000" dirty="0"/>
-          </a:p>
-        </p:txBody>
-      </p:sp>
-      <p:sp>
-        <p:nvSpPr>
-          <p:cNvPr id="28" name="take-5"/>
-          <p:cNvSpPr/>
-          <p:nvPr/>
-        </p:nvSpPr>
-        <p:spPr>
-          <a:xfrm>
-            <a:off x="457200" y="3977640"/>
-            <a:ext cx="5760720" cy="512064"/>
-          </a:xfrm>
-          <a:prstGeom prst="roundRect">
-            <a:avLst>
-              <a:gd name="adj" fmla="val 14286"/>
-            </a:avLst>
-          </a:prstGeom>
-          <a:solidFill>
-            <a:schemeClr val="accent4"/>
-          </a:solidFill>
-          <a:ln w="12700">
-            <a:solidFill>
-              <a:schemeClr val="accent4"/>
-            </a:solidFill>
-            <a:prstDash val="solid"/>
-          </a:ln>
-        </p:spPr>
-      </p:sp>
-      <p:sp>
-        <p:nvSpPr>
-          <p:cNvPr id="29" name="chip"/>
-          <p:cNvSpPr/>
-          <p:nvPr/>
-        </p:nvSpPr>
-        <p:spPr>
-          <a:xfrm>
-            <a:off x="548640" y="4069080"/>
-            <a:ext cx="329184" cy="329184"/>
-          </a:xfrm>
-          <a:prstGeom prst="roundRect">
-            <a:avLst>
-              <a:gd name="adj" fmla="val 16667"/>
-            </a:avLst>
-          </a:prstGeom>
-          <a:solidFill>
-            <a:schemeClr val="accent2"/>
-          </a:solidFill>
-          <a:ln w="12700">
-            <a:solidFill>
-              <a:schemeClr val="accent2"/>
-            </a:solidFill>
-            <a:prstDash val="solid"/>
-          </a:ln>
-        </p:spPr>
-      </p:sp>
-      <p:sp>
-        <p:nvSpPr>
-          <p:cNvPr id="30" name="chip-label"/>
-          <p:cNvSpPr txBox="1"/>
-          <p:nvPr/>
-        </p:nvSpPr>
-        <p:spPr>
-          <a:xfrm>
-            <a:off x="548640" y="4069080"/>
-            <a:ext cx="329184" cy="329184"/>
-          </a:xfrm>
-          <a:prstGeom prst="rect">
-            <a:avLst/>
-          </a:prstGeom>
-          <a:noFill/>
-          <a:ln/>
-        </p:spPr>
-        <p:txBody>
-          <a:bodyPr wrap="square" lIns="0" tIns="0" rIns="0" bIns="0" rtlCol="0" anchor="ctr"/>
-          <a:lstStyle/>
-          <a:p>
-            <a:pPr algn="ctr" indent="0" marL="0">
-              <a:buNone/>
-            </a:pPr>
-            <a:r>
-              <a:rPr lang="en-US" sz="1100" b="1" dirty="0">
-                <a:solidFill>
-                  <a:schemeClr val="bg1"/>
-                </a:solidFill>
-                <a:latin typeface="Cambria" pitchFamily="34" charset="0"/>
-                <a:ea typeface="Cambria" pitchFamily="34" charset="-122"/>
-                <a:cs typeface="Cambria" pitchFamily="34" charset="-120"/>
-              </a:rPr>
-              <a:t>6</a:t>
-            </a:r>
-            <a:endParaRPr lang="en-US" sz="1100" dirty="0"/>
-          </a:p>
-        </p:txBody>
-      </p:sp>
-      <p:sp>
-        <p:nvSpPr>
-          <p:cNvPr id="31" name="take-head"/>
-          <p:cNvSpPr txBox="1"/>
-          <p:nvPr/>
-        </p:nvSpPr>
-        <p:spPr>
-          <a:xfrm>
-            <a:off x="987552" y="4014216"/>
-            <a:ext cx="1600200" cy="438912"/>
-          </a:xfrm>
-          <a:prstGeom prst="rect">
-            <a:avLst/>
-          </a:prstGeom>
-          <a:noFill/>
-          <a:ln/>
-        </p:spPr>
-        <p:txBody>
-          <a:bodyPr wrap="square" lIns="0" tIns="0" rIns="0" bIns="0" rtlCol="0" anchor="ctr"/>
-          <a:lstStyle/>
-          <a:p>
-            <a:pPr indent="0" marL="0">
-              <a:buNone/>
-            </a:pPr>
-            <a:r>
-              <a:rPr lang="en-US" sz="1100" b="1" dirty="0">
-                <a:solidFill>
-                  <a:schemeClr val="tx2"/>
-                </a:solidFill>
-              </a:rPr>
-              <a:t>Not yet matched</a:t>
-            </a:r>
-            <a:endParaRPr lang="en-US" sz="1100" dirty="0"/>
-          </a:p>
-        </p:txBody>
-      </p:sp>
-      <p:sp>
-        <p:nvSpPr>
-          <p:cNvPr id="32" name="take-body"/>
-          <p:cNvSpPr txBox="1"/>
-          <p:nvPr/>
-        </p:nvSpPr>
-        <p:spPr>
-          <a:xfrm>
-            <a:off x="2651760" y="4014216"/>
-            <a:ext cx="3474720" cy="438912"/>
-          </a:xfrm>
-          <a:prstGeom prst="rect">
-            <a:avLst/>
-          </a:prstGeom>
-          <a:noFill/>
-          <a:ln/>
-        </p:spPr>
-        <p:txBody>
-          <a:bodyPr wrap="square" lIns="0" tIns="0" rIns="0" bIns="0" rtlCol="0" anchor="ctr"/>
-          <a:lstStyle/>
-          <a:p>
-            <a:pPr indent="0" marL="0">
-              <a:buNone/>
-            </a:pPr>
-            <a:r>
-              <a:rPr lang="en-US" sz="1000" dirty="0">
-                <a:solidFill>
-                  <a:schemeClr val="tx1"/>
-                </a:solidFill>
-              </a:rPr>
-              <a:t>How Celsius’s largest depositors exit: one-shot share 0.35 there, 0.93 or more in the model.</a:t>
-            </a:r>
-            <a:endParaRPr lang="en-US" sz="1000" dirty="0"/>
-          </a:p>
-        </p:txBody>
-      </p:sp>
-      <p:sp>
-        <p:nvSpPr>
-          <p:cNvPr id="33" name="next"/>
-          <p:cNvSpPr/>
-          <p:nvPr/>
-        </p:nvSpPr>
-        <p:spPr>
-          <a:xfrm>
-            <a:off x="6400800" y="1051560"/>
-            <a:ext cx="2286000" cy="3438144"/>
-          </a:xfrm>
-          <a:prstGeom prst="roundRect">
-            <a:avLst>
-              <a:gd name="adj" fmla="val 3200"/>
-            </a:avLst>
-          </a:prstGeom>
-          <a:solidFill>
-            <a:schemeClr val="bg2"/>
-          </a:solidFill>
-          <a:ln w="12700">
-            <a:solidFill>
-              <a:schemeClr val="bg2"/>
-            </a:solidFill>
-            <a:prstDash val="solid"/>
-          </a:ln>
-        </p:spPr>
-      </p:sp>
-      <p:sp>
-        <p:nvSpPr>
-          <p:cNvPr id="34" name="next-head"/>
-          <p:cNvSpPr txBox="1"/>
-          <p:nvPr/>
-        </p:nvSpPr>
-        <p:spPr>
-          <a:xfrm>
-            <a:off x="6537960" y="1143000"/>
-            <a:ext cx="2011680" cy="320040"/>
-          </a:xfrm>
-          <a:prstGeom prst="rect">
-            <a:avLst/>
-          </a:prstGeom>
-          <a:noFill/>
-          <a:ln/>
-        </p:spPr>
-        <p:txBody>
-          <a:bodyPr wrap="square" lIns="0" tIns="0" rIns="0" bIns="0" rtlCol="0" anchor="ctr"/>
-          <a:lstStyle/>
-          <a:p>
-            <a:pPr indent="0" marL="0">
-              <a:buNone/>
-            </a:pPr>
-            <a:r>
-              <a:rPr lang="en-US" sz="1300" b="1" dirty="0">
-                <a:solidFill>
-                  <a:schemeClr val="tx2"/>
-                </a:solidFill>
-              </a:rPr>
-              <a:t>Next steps</a:t>
-            </a:r>
-            <a:endParaRPr lang="en-US" sz="1300" dirty="0"/>
-          </a:p>
-        </p:txBody>
-      </p:sp>
-      <p:sp>
-        <p:nvSpPr>
-          <p:cNvPr id="35" name="bullets"/>
-          <p:cNvSpPr txBox="1"/>
-          <p:nvPr/>
-        </p:nvSpPr>
-        <p:spPr>
-          <a:xfrm>
-            <a:off x="6537960" y="1508760"/>
-            <a:ext cx="2011680" cy="2926080"/>
-          </a:xfrm>
-          <a:prstGeom prst="rect">
-            <a:avLst/>
-          </a:prstGeom>
-          <a:noFill/>
-          <a:ln/>
-        </p:spPr>
-        <p:txBody>
-          <a:bodyPr wrap="square" lIns="0" tIns="0" rIns="0" bIns="0" rtlCol="0" anchor="t"/>
-          <a:lstStyle/>
-          <a:p>
-            <a:pPr marL="177800" indent="-177800">
-              <a:spcAft>
-                <a:spcPts val="700"/>
-              </a:spcAft>
-              <a:buSzPct val="100000"/>
-              <a:buChar char="•"/>
-            </a:pPr>
-            <a:r>
-              <a:rPr lang="en-US" sz="1100" dirty="0">
-                <a:solidFill>
-                  <a:schemeClr val="tx1"/>
-                </a:solidFill>
-              </a:rPr>
-              <a:t>Super-individuals, to match how the largest depositors exit (Chapter 2 docking)</a:t>
-            </a:r>
-            <a:endParaRPr lang="en-US" sz="1100" dirty="0"/>
-          </a:p>
-          <a:p>
-            <a:pPr marL="177800" indent="-177800">
-              <a:spcAft>
-                <a:spcPts val="700"/>
-              </a:spcAft>
-              <a:buSzPct val="100000"/>
-              <a:buChar char="•"/>
-            </a:pPr>
-            <a:r>
-              <a:rPr lang="en-US" sz="1100" dirty="0">
-                <a:solidFill>
-                  <a:schemeClr val="tx1"/>
-                </a:solidFill>
-              </a:rPr>
-              <a:t>Deposit insurance and the reserve ratio on the fire-sale bank</a:t>
-            </a:r>
-            <a:endParaRPr lang="en-US" sz="1100" dirty="0"/>
-          </a:p>
-          <a:p>
-            <a:pPr marL="177800" indent="-177800">
-              <a:spcAft>
-                <a:spcPts val="700"/>
-              </a:spcAft>
-              <a:buSzPct val="100000"/>
-              <a:buChar char="•"/>
-            </a:pPr>
-            <a:r>
-              <a:rPr lang="en-US" sz="1100" dirty="0">
-                <a:solidFill>
-                  <a:schemeClr val="tx1"/>
-                </a:solidFill>
-              </a:rPr>
-              <a:t>Network topology and learning</a:t>
-            </a:r>
-            <a:endParaRPr lang="en-US" sz="1100" dirty="0"/>
-          </a:p>
-          <a:p>
-            <a:pPr marL="177800" indent="-177800">
-              <a:spcAft>
-                <a:spcPts val="700"/>
-              </a:spcAft>
-              <a:buSzPct val="100000"/>
-              <a:buChar char="•"/>
-            </a:pPr>
-            <a:r>
-              <a:rPr lang="en-US" sz="1100" dirty="0">
-                <a:solidFill>
-                  <a:schemeClr val="tx1"/>
-                </a:solidFill>
-              </a:rPr>
-              <a:t>Full sweep: stale public signal plus no-signal baseline, CARA 0.1, σ reported</a:t>
-            </a:r>
-            <a:endParaRPr lang="en-US" sz="1100" dirty="0"/>
           </a:p>
         </p:txBody>
       </p:sp>
@@ -8556,8 +7167,8 @@
         </p:nvSpPr>
         <p:spPr>
           <a:xfrm>
-            <a:off x="548640" y="1828800"/>
-            <a:ext cx="8046720" cy="1097280"/>
+            <a:off x="457200" y="274320"/>
+            <a:ext cx="8229600" cy="685800"/>
           </a:xfrm>
           <a:prstGeom prst="rect">
             <a:avLst/>
@@ -8573,52 +7184,119 @@
               <a:buNone/>
             </a:pPr>
             <a:r>
-              <a:rPr lang="en-US" sz="3200" b="1" dirty="0">
-                <a:solidFill>
-                  <a:schemeClr val="bg1"/>
-                </a:solidFill>
-              </a:rPr>
-              <a:t>Backup</a:t>
-            </a:r>
-            <a:endParaRPr lang="en-US" sz="3200" dirty="0"/>
-          </a:p>
-        </p:txBody>
-      </p:sp>
-      <p:sp>
-        <p:nvSpPr>
-          <p:cNvPr id="3" name="Text 0"/>
-          <p:cNvSpPr/>
-          <p:nvPr>
-            <p:ph idx="101" type="body" hasCustomPrompt="1"/>
-          </p:nvPr>
-        </p:nvSpPr>
-        <p:spPr>
-          <a:xfrm>
-            <a:off x="548640" y="2971800"/>
-            <a:ext cx="8046720" cy="731520"/>
-          </a:xfrm>
-          <a:prstGeom prst="rect">
-            <a:avLst/>
-          </a:prstGeom>
-          <a:noFill/>
-          <a:ln/>
-        </p:spPr>
-        <p:txBody>
-          <a:bodyPr wrap="square" lIns="0" tIns="0" rIns="0" bIns="0" rtlCol="0" anchor="t"/>
+              <a:rPr lang="en-US" sz="2400" b="1" dirty="0">
+                <a:solidFill>
+                  <a:schemeClr val="tx2"/>
+                </a:solidFill>
+              </a:rPr>
+              <a:t>The pre-registered tests, three versions of the bank</a:t>
+            </a:r>
+            <a:endParaRPr lang="en-US" sz="2400" dirty="0"/>
+          </a:p>
+        </p:txBody>
+      </p:sp>
+      <p:pic>
+        <p:nvPicPr>
+          <p:cNvPr id="3" name="e03" descr="Forest plot of five tests (G1', G4', G2a', G3, G3c) across three bank versions with pooled estimates and per-pair markers.">    </p:cNvPr>
+          <p:cNvPicPr>
+            <a:picLocks noChangeAspect="1"/>
+          </p:cNvPicPr>
+          <p:nvPr/>
+        </p:nvPicPr>
+        <p:blipFill>
+          <a:blip r:embed="rId1"/>
+          <a:stretch>
+            <a:fillRect/>
+          </a:stretch>
+        </p:blipFill>
+        <p:spPr>
+          <a:xfrm>
+            <a:off x="882533" y="1051560"/>
+            <a:ext cx="7378934" cy="3383280"/>
+          </a:xfrm>
+          <a:prstGeom prst="rect">
+            <a:avLst/>
+          </a:prstGeom>
+        </p:spPr>
+      </p:pic>
+      <p:sp>
+        <p:nvSpPr>
+          <p:cNvPr id="4" name="caption"/>
+          <p:cNvSpPr txBox="1"/>
+          <p:nvPr/>
+        </p:nvSpPr>
+        <p:spPr>
+          <a:xfrm>
+            <a:off x="457200" y="4480560"/>
+            <a:ext cx="8229600" cy="274320"/>
+          </a:xfrm>
+          <a:prstGeom prst="rect">
+            <a:avLst/>
+          </a:prstGeom>
+          <a:noFill/>
+          <a:ln/>
+        </p:spPr>
+        <p:txBody>
+          <a:bodyPr wrap="square" lIns="0" tIns="0" rIns="0" bIns="0" rtlCol="0" anchor="ctr"/>
           <a:lstStyle/>
           <a:p>
             <a:pPr indent="0" marL="0">
               <a:buNone/>
             </a:pPr>
             <a:r>
-              <a:rPr lang="en-US" sz="1600" dirty="0">
-                <a:solidFill>
-                  <a:schemeClr val="accent4"/>
-                </a:solidFill>
-              </a:rPr>
-              <a:t>Technical versions of the exhibits, the pre-registered tests, channels, and the Celsius docking gap.</a:t>
-            </a:r>
-            <a:endParaRPr lang="en-US" sz="1600" dirty="0"/>
+              <a:rPr lang="en-US" sz="1000" i="1" dirty="0">
+                <a:solidFill>
+                  <a:schemeClr val="accent3"/>
+                </a:solidFill>
+              </a:rPr>
+              <a:t>G1′, G4′, G2a′, G3 and G3c (post hoc). Rows: risk-neutral all-or-nothing, CARA partial, capped reference bank. Filled dot: pooled; hollow: each λ pair. Shaded: Chapter 1’s predicted sign.</a:t>
+            </a:r>
+            <a:endParaRPr lang="en-US" sz="1000" dirty="0"/>
+          </a:p>
+        </p:txBody>
+      </p:sp>
+      <p:sp>
+        <p:nvSpPr>
+          <p:cNvPr id="25" name="Slide Number Placeholder 0"/>
+          <p:cNvSpPr>
+            <a:spLocks noGrp="1"/>
+          </p:cNvSpPr>
+          <p:nvPr>
+            <p:ph type="sldNum" sz="quarter" idx="4294967295"/>
+          </p:nvPr>
+        </p:nvSpPr>
+        <p:spPr>
+          <a:xfrm>
+            <a:off x="8321040" y="4754880"/>
+            <a:ext cx="457200" cy="274320"/>
+          </a:xfrm>
+          <a:prstGeom prst="rect">
+            <a:avLst/>
+          </a:prstGeom>
+          <a:extLst>
+            <a:ext uri="{C572A759-6A51-4108-AA02-DFA0A04FC94B}">
+              <ma14:wrappingTextBoxFlag xmlns:ma14="http://schemas.microsoft.com/office/mac/drawingml/2011/main" val="0"/>
+            </a:ext>
+          </a:extLst>
+        </p:spPr>
+        <p:txBody>
+          <a:bodyPr/>
+          <a:lstStyle>
+            <a:lvl1pPr>
+              <a:defRPr sz="900">
+                <a:solidFill>
+                  <a:srgbClr val="6B7280"/>
+                </a:solidFill>
+              </a:defRPr>
+            </a:lvl1pPr>
+          </a:lstStyle>
+          <a:p>
+            <a:pPr algn="r"/>
+            <a:fld id="{F7021451-1387-4CA6-816F-3879F97B5CBC}" type="slidenum">
+              <a:rPr b="0" lang="en-US"/>
+              <a:t>18</a:t>
+            </a:fld>
+            <a:endParaRPr lang="en-US"/>
           </a:p>
         </p:txBody>
       </p:sp>
@@ -8679,7 +7357,7 @@
                   <a:schemeClr val="tx2"/>
                 </a:solidFill>
               </a:rPr>
-              <a:t>Who withdraws, by type and mix</a:t>
+              <a:t>Which channel carries culture</a:t>
             </a:r>
             <a:endParaRPr lang="en-US" sz="2400" dirty="0"/>
           </a:p>
@@ -8687,7 +7365,7 @@
       </p:sp>
       <p:pic>
         <p:nvPicPr>
-          <p:cNvPr id="3" name="e06" descr="Share who withdraw by individualist share, three panels by lambda pair: collectivists above individualists at every mixed share for the two wide gaps.">    </p:cNvPr>
+          <p:cNvPr id="3" name="e09" descr="Who runs in failed runs with optimistic news when lambda applies only to the neighbour blend, only to the news blend, or both: positive, negative, small positive.">    </p:cNvPr>
           <p:cNvPicPr>
             <a:picLocks noChangeAspect="1"/>
           </p:cNvPicPr>
@@ -8701,8 +7379,8 @@
         </p:blipFill>
         <p:spPr>
           <a:xfrm>
-            <a:off x="512064" y="1051560"/>
-            <a:ext cx="8119872" cy="3383280"/>
+            <a:off x="1547348" y="1051560"/>
+            <a:ext cx="6049305" cy="3383280"/>
           </a:xfrm>
           <a:prstGeom prst="rect">
             <a:avLst/>
@@ -8739,7 +7417,7 @@
                   <a:schemeClr val="accent3"/>
                 </a:solidFill>
               </a:rPr>
-              <a:t>Share who withdraw by individualist share μ, one panel per λ pair; orange individualists, blue collectivists, with CIs.</a:t>
+              <a:t>D in failed runs with optimistic news, when λ weights only the neighbour blend, only the news blend, or both (the model). θ-blend only +0.14; head-count only −0.07; both +0.02.</a:t>
             </a:r>
             <a:endParaRPr lang="en-US" sz="1000" dirty="0"/>
           </a:p>
@@ -9015,7 +7693,7 @@
                   <a:schemeClr val="tx2"/>
                 </a:solidFill>
               </a:rPr>
-              <a:t>The pre-registered tests, three versions of the bank</a:t>
+              <a:t>Matching Celsius: how large depositors exit</a:t>
             </a:r>
             <a:endParaRPr lang="en-US" sz="2400" dirty="0"/>
           </a:p>
@@ -9023,7 +7701,7 @@
       </p:sp>
       <p:pic>
         <p:nvPicPr>
-          <p:cNvPr id="3" name="e03" descr="Forest plot of five tests (G1', G4', G2a', G3, G3c) across three bank versions with pooled estimates and per-pair markers.">    </p:cNvPr>
+          <p:cNvPr id="3" name="e04" descr="Share of exits that withdraw everything at once by depositor size: Celsius falls from about 0.86 to 0.35 for the largest; the model stays at 0.93 to 1.">    </p:cNvPr>
           <p:cNvPicPr>
             <a:picLocks noChangeAspect="1"/>
           </p:cNvPicPr>
@@ -9037,8 +7715,8 @@
         </p:blipFill>
         <p:spPr>
           <a:xfrm>
-            <a:off x="882533" y="1051560"/>
-            <a:ext cx="7378934" cy="3383280"/>
+            <a:off x="1882292" y="1051560"/>
+            <a:ext cx="5379415" cy="3383280"/>
           </a:xfrm>
           <a:prstGeom prst="rect">
             <a:avLst/>
@@ -9075,7 +7753,7 @@
                   <a:schemeClr val="accent3"/>
                 </a:solidFill>
               </a:rPr>
-              <a:t>G1′, G4′, G2a′, G3 and G3c (post hoc). Rows: risk-neutral all-or-nothing, CARA partial, capped reference bank. Filled dot: pooled; hollow: each λ pair. Shaded: Chapter 1’s predicted sign.</a:t>
+              <a:t>Share of exits that withdraw everything at once, by depositor size. Black: Celsius (band for D1–D5); greys: the model, uncapped and capped.</a:t>
             </a:r>
             <a:endParaRPr lang="en-US" sz="1000" dirty="0"/>
           </a:p>
@@ -9183,7 +7861,7 @@
                   <a:schemeClr val="tx2"/>
                 </a:solidFill>
               </a:rPr>
-              <a:t>Which channel carries culture</a:t>
+              <a:t>Earlier specification (vault bank): failure by mix</a:t>
             </a:r>
             <a:endParaRPr lang="en-US" sz="2400" dirty="0"/>
           </a:p>
@@ -9191,7 +7869,7 @@
       </p:sp>
       <p:pic>
         <p:nvPicPr>
-          <p:cNvPr id="3" name="e09" descr="Who runs in failed runs with optimistic news when lambda applies only to the neighbour blend, only to the news blend, or both: positive, negative, small positive.">    </p:cNvPr>
+          <p:cNvPr id="3" name="fig1" descr="Earlier vault-bank specification: probability of a run falls with the share of individualists for all three signal-weighting gaps.">    </p:cNvPr>
           <p:cNvPicPr>
             <a:picLocks noChangeAspect="1"/>
           </p:cNvPicPr>
@@ -9205,8 +7883,8 @@
         </p:blipFill>
         <p:spPr>
           <a:xfrm>
-            <a:off x="1547348" y="1051560"/>
-            <a:ext cx="6049305" cy="3383280"/>
+            <a:off x="1999016" y="1051560"/>
+            <a:ext cx="5145969" cy="3383280"/>
           </a:xfrm>
           <a:prstGeom prst="rect">
             <a:avLst/>
@@ -9243,7 +7921,7 @@
                   <a:schemeClr val="accent3"/>
                 </a:solidFill>
               </a:rPr>
-              <a:t>D in failed runs with optimistic news, when λ weights only the neighbour blend, only the news blend, or both (the model). θ-blend only +0.14; head-count only −0.07; both +0.02.</a:t>
+              <a:t>Vault bank, earlier specification (chapter Figure 1): probability of a run by share of individualists, three λ gaps. Also monotone.</a:t>
             </a:r>
             <a:endParaRPr lang="en-US" sz="1000" dirty="0"/>
           </a:p>
@@ -9289,342 +7967,6 @@
             <a:fld id="{F7021451-1387-4CA6-816F-3879F97B5CBC}" type="slidenum">
               <a:rPr b="0" lang="en-US"/>
               <a:t>21</a:t>
-            </a:fld>
-            <a:endParaRPr lang="en-US"/>
-          </a:p>
-        </p:txBody>
-      </p:sp>
-    </p:spTree>
-  </p:cSld>
-  <p:clrMapOvr>
-    <a:masterClrMapping/>
-  </p:clrMapOvr>
-</p:sld>
-</file>
-
-<file path=ppt/slides/slide22.xml><?xml version="1.0" encoding="utf-8"?>
-<p:sld xmlns:a="http://schemas.openxmlformats.org/drawingml/2006/main" xmlns:r="http://schemas.openxmlformats.org/officeDocument/2006/relationships" xmlns:p="http://schemas.openxmlformats.org/presentationml/2006/main">
-  <p:cSld name="Slide 22">
-    <p:spTree>
-      <p:nvGrpSpPr>
-        <p:cNvPr id="1" name=""/>
-        <p:cNvGrpSpPr/>
-        <p:nvPr/>
-      </p:nvGrpSpPr>
-      <p:grpSpPr>
-        <a:xfrm>
-          <a:off x="0" y="0"/>
-          <a:ext cx="0" cy="0"/>
-          <a:chOff x="0" y="0"/>
-          <a:chExt cx="0" cy="0"/>
-        </a:xfrm>
-      </p:grpSpPr>
-      <p:sp>
-        <p:nvSpPr>
-          <p:cNvPr id="2" name="Text 0"/>
-          <p:cNvSpPr/>
-          <p:nvPr>
-            <p:ph idx="100" type="title" hasCustomPrompt="1"/>
-          </p:nvPr>
-        </p:nvSpPr>
-        <p:spPr>
-          <a:xfrm>
-            <a:off x="457200" y="274320"/>
-            <a:ext cx="8229600" cy="685800"/>
-          </a:xfrm>
-          <a:prstGeom prst="rect">
-            <a:avLst/>
-          </a:prstGeom>
-          <a:noFill/>
-          <a:ln/>
-        </p:spPr>
-        <p:txBody>
-          <a:bodyPr wrap="square" lIns="0" tIns="0" rIns="0" bIns="0" rtlCol="0" anchor="ctr"/>
-          <a:lstStyle/>
-          <a:p>
-            <a:pPr algn="l" indent="0" marL="0">
-              <a:buNone/>
-            </a:pPr>
-            <a:r>
-              <a:rPr lang="en-US" sz="2400" b="1" dirty="0">
-                <a:solidFill>
-                  <a:schemeClr val="tx2"/>
-                </a:solidFill>
-              </a:rPr>
-              <a:t>Matching Celsius: how large depositors exit</a:t>
-            </a:r>
-            <a:endParaRPr lang="en-US" sz="2400" dirty="0"/>
-          </a:p>
-        </p:txBody>
-      </p:sp>
-      <p:pic>
-        <p:nvPicPr>
-          <p:cNvPr id="3" name="e04" descr="Share of exits that withdraw everything at once by depositor size: Celsius falls from about 0.86 to 0.35 for the largest; the model stays at 0.93 to 1.">    </p:cNvPr>
-          <p:cNvPicPr>
-            <a:picLocks noChangeAspect="1"/>
-          </p:cNvPicPr>
-          <p:nvPr/>
-        </p:nvPicPr>
-        <p:blipFill>
-          <a:blip r:embed="rId1"/>
-          <a:stretch>
-            <a:fillRect/>
-          </a:stretch>
-        </p:blipFill>
-        <p:spPr>
-          <a:xfrm>
-            <a:off x="1882292" y="1051560"/>
-            <a:ext cx="5379415" cy="3383280"/>
-          </a:xfrm>
-          <a:prstGeom prst="rect">
-            <a:avLst/>
-          </a:prstGeom>
-        </p:spPr>
-      </p:pic>
-      <p:sp>
-        <p:nvSpPr>
-          <p:cNvPr id="4" name="caption"/>
-          <p:cNvSpPr txBox="1"/>
-          <p:nvPr/>
-        </p:nvSpPr>
-        <p:spPr>
-          <a:xfrm>
-            <a:off x="457200" y="4480560"/>
-            <a:ext cx="8229600" cy="274320"/>
-          </a:xfrm>
-          <a:prstGeom prst="rect">
-            <a:avLst/>
-          </a:prstGeom>
-          <a:noFill/>
-          <a:ln/>
-        </p:spPr>
-        <p:txBody>
-          <a:bodyPr wrap="square" lIns="0" tIns="0" rIns="0" bIns="0" rtlCol="0" anchor="ctr"/>
-          <a:lstStyle/>
-          <a:p>
-            <a:pPr indent="0" marL="0">
-              <a:buNone/>
-            </a:pPr>
-            <a:r>
-              <a:rPr lang="en-US" sz="1000" i="1" dirty="0">
-                <a:solidFill>
-                  <a:schemeClr val="accent3"/>
-                </a:solidFill>
-              </a:rPr>
-              <a:t>Share of exits that withdraw everything at once, by depositor size. Black: Celsius (band for D1–D5); greys: the model, uncapped and capped.</a:t>
-            </a:r>
-            <a:endParaRPr lang="en-US" sz="1000" dirty="0"/>
-          </a:p>
-        </p:txBody>
-      </p:sp>
-      <p:sp>
-        <p:nvSpPr>
-          <p:cNvPr id="25" name="Slide Number Placeholder 0"/>
-          <p:cNvSpPr>
-            <a:spLocks noGrp="1"/>
-          </p:cNvSpPr>
-          <p:nvPr>
-            <p:ph type="sldNum" sz="quarter" idx="4294967295"/>
-          </p:nvPr>
-        </p:nvSpPr>
-        <p:spPr>
-          <a:xfrm>
-            <a:off x="8321040" y="4754880"/>
-            <a:ext cx="457200" cy="274320"/>
-          </a:xfrm>
-          <a:prstGeom prst="rect">
-            <a:avLst/>
-          </a:prstGeom>
-          <a:extLst>
-            <a:ext uri="{C572A759-6A51-4108-AA02-DFA0A04FC94B}">
-              <ma14:wrappingTextBoxFlag xmlns:ma14="http://schemas.microsoft.com/office/mac/drawingml/2011/main" val="0"/>
-            </a:ext>
-          </a:extLst>
-        </p:spPr>
-        <p:txBody>
-          <a:bodyPr/>
-          <a:lstStyle>
-            <a:lvl1pPr>
-              <a:defRPr sz="900">
-                <a:solidFill>
-                  <a:srgbClr val="6B7280"/>
-                </a:solidFill>
-              </a:defRPr>
-            </a:lvl1pPr>
-          </a:lstStyle>
-          <a:p>
-            <a:pPr algn="r"/>
-            <a:fld id="{F7021451-1387-4CA6-816F-3879F97B5CBC}" type="slidenum">
-              <a:rPr b="0" lang="en-US"/>
-              <a:t>22</a:t>
-            </a:fld>
-            <a:endParaRPr lang="en-US"/>
-          </a:p>
-        </p:txBody>
-      </p:sp>
-    </p:spTree>
-  </p:cSld>
-  <p:clrMapOvr>
-    <a:masterClrMapping/>
-  </p:clrMapOvr>
-</p:sld>
-</file>
-
-<file path=ppt/slides/slide23.xml><?xml version="1.0" encoding="utf-8"?>
-<p:sld xmlns:a="http://schemas.openxmlformats.org/drawingml/2006/main" xmlns:r="http://schemas.openxmlformats.org/officeDocument/2006/relationships" xmlns:p="http://schemas.openxmlformats.org/presentationml/2006/main">
-  <p:cSld name="Slide 23">
-    <p:spTree>
-      <p:nvGrpSpPr>
-        <p:cNvPr id="1" name=""/>
-        <p:cNvGrpSpPr/>
-        <p:nvPr/>
-      </p:nvGrpSpPr>
-      <p:grpSpPr>
-        <a:xfrm>
-          <a:off x="0" y="0"/>
-          <a:ext cx="0" cy="0"/>
-          <a:chOff x="0" y="0"/>
-          <a:chExt cx="0" cy="0"/>
-        </a:xfrm>
-      </p:grpSpPr>
-      <p:sp>
-        <p:nvSpPr>
-          <p:cNvPr id="2" name="Text 0"/>
-          <p:cNvSpPr/>
-          <p:nvPr>
-            <p:ph idx="100" type="title" hasCustomPrompt="1"/>
-          </p:nvPr>
-        </p:nvSpPr>
-        <p:spPr>
-          <a:xfrm>
-            <a:off x="457200" y="274320"/>
-            <a:ext cx="8229600" cy="685800"/>
-          </a:xfrm>
-          <a:prstGeom prst="rect">
-            <a:avLst/>
-          </a:prstGeom>
-          <a:noFill/>
-          <a:ln/>
-        </p:spPr>
-        <p:txBody>
-          <a:bodyPr wrap="square" lIns="0" tIns="0" rIns="0" bIns="0" rtlCol="0" anchor="ctr"/>
-          <a:lstStyle/>
-          <a:p>
-            <a:pPr algn="l" indent="0" marL="0">
-              <a:buNone/>
-            </a:pPr>
-            <a:r>
-              <a:rPr lang="en-US" sz="2400" b="1" dirty="0">
-                <a:solidFill>
-                  <a:schemeClr val="tx2"/>
-                </a:solidFill>
-              </a:rPr>
-              <a:t>Earlier specification (vault bank): failure by mix</a:t>
-            </a:r>
-            <a:endParaRPr lang="en-US" sz="2400" dirty="0"/>
-          </a:p>
-        </p:txBody>
-      </p:sp>
-      <p:pic>
-        <p:nvPicPr>
-          <p:cNvPr id="3" name="fig1" descr="Earlier vault-bank specification: probability of a run falls with the share of individualists for all three signal-weighting gaps.">    </p:cNvPr>
-          <p:cNvPicPr>
-            <a:picLocks noChangeAspect="1"/>
-          </p:cNvPicPr>
-          <p:nvPr/>
-        </p:nvPicPr>
-        <p:blipFill>
-          <a:blip r:embed="rId1"/>
-          <a:stretch>
-            <a:fillRect/>
-          </a:stretch>
-        </p:blipFill>
-        <p:spPr>
-          <a:xfrm>
-            <a:off x="1999016" y="1051560"/>
-            <a:ext cx="5145969" cy="3383280"/>
-          </a:xfrm>
-          <a:prstGeom prst="rect">
-            <a:avLst/>
-          </a:prstGeom>
-        </p:spPr>
-      </p:pic>
-      <p:sp>
-        <p:nvSpPr>
-          <p:cNvPr id="4" name="caption"/>
-          <p:cNvSpPr txBox="1"/>
-          <p:nvPr/>
-        </p:nvSpPr>
-        <p:spPr>
-          <a:xfrm>
-            <a:off x="457200" y="4480560"/>
-            <a:ext cx="8229600" cy="274320"/>
-          </a:xfrm>
-          <a:prstGeom prst="rect">
-            <a:avLst/>
-          </a:prstGeom>
-          <a:noFill/>
-          <a:ln/>
-        </p:spPr>
-        <p:txBody>
-          <a:bodyPr wrap="square" lIns="0" tIns="0" rIns="0" bIns="0" rtlCol="0" anchor="ctr"/>
-          <a:lstStyle/>
-          <a:p>
-            <a:pPr indent="0" marL="0">
-              <a:buNone/>
-            </a:pPr>
-            <a:r>
-              <a:rPr lang="en-US" sz="1000" i="1" dirty="0">
-                <a:solidFill>
-                  <a:schemeClr val="accent3"/>
-                </a:solidFill>
-              </a:rPr>
-              <a:t>Vault bank, earlier specification (chapter Figure 1): probability of a run by share of individualists, three λ gaps. Also monotone.</a:t>
-            </a:r>
-            <a:endParaRPr lang="en-US" sz="1000" dirty="0"/>
-          </a:p>
-        </p:txBody>
-      </p:sp>
-      <p:sp>
-        <p:nvSpPr>
-          <p:cNvPr id="25" name="Slide Number Placeholder 0"/>
-          <p:cNvSpPr>
-            <a:spLocks noGrp="1"/>
-          </p:cNvSpPr>
-          <p:nvPr>
-            <p:ph type="sldNum" sz="quarter" idx="4294967295"/>
-          </p:nvPr>
-        </p:nvSpPr>
-        <p:spPr>
-          <a:xfrm>
-            <a:off x="8321040" y="4754880"/>
-            <a:ext cx="457200" cy="274320"/>
-          </a:xfrm>
-          <a:prstGeom prst="rect">
-            <a:avLst/>
-          </a:prstGeom>
-          <a:extLst>
-            <a:ext uri="{C572A759-6A51-4108-AA02-DFA0A04FC94B}">
-              <ma14:wrappingTextBoxFlag xmlns:ma14="http://schemas.microsoft.com/office/mac/drawingml/2011/main" val="0"/>
-            </a:ext>
-          </a:extLst>
-        </p:spPr>
-        <p:txBody>
-          <a:bodyPr/>
-          <a:lstStyle>
-            <a:lvl1pPr>
-              <a:defRPr sz="900">
-                <a:solidFill>
-                  <a:srgbClr val="6B7280"/>
-                </a:solidFill>
-              </a:defRPr>
-            </a:lvl1pPr>
-          </a:lstStyle>
-          <a:p>
-            <a:pPr algn="r"/>
-            <a:fld id="{F7021451-1387-4CA6-816F-3879F97B5CBC}" type="slidenum">
-              <a:rPr b="0" lang="en-US"/>
-              <a:t>23</a:t>
             </a:fld>
             <a:endParaRPr lang="en-US"/>
           </a:p>
@@ -10913,22 +9255,73 @@
                   <a:schemeClr val="tx2"/>
                 </a:solidFill>
               </a:rPr>
-              <a:t>What this dissertation does with it</a:t>
+              <a:t>The ladder: signal, location, interpretation</a:t>
             </a:r>
             <a:endParaRPr lang="en-US" sz="2400" dirty="0"/>
           </a:p>
         </p:txBody>
       </p:sp>
-      <p:sp>
-        <p:nvSpPr>
-          <p:cNvPr id="3" name="step-lead"/>
+      <p:pic>
+        <p:nvPicPr>
+          <p:cNvPr id="3" name="ladder" descr="Three panels. Signal: one bank fundamental sends a noisy private signal to each depositor, who line up from run to stay. Location: a network in which the signal has reached some depositors from a first hearer and not others. Interpretation: the same private and public signals reach an individualist, who leans on the private signal, and a collectivist, who leans on the public one; culture sets the weight.">    </p:cNvPr>
+          <p:cNvPicPr>
+            <a:picLocks noChangeAspect="1"/>
+          </p:cNvPicPr>
+          <p:nvPr/>
+        </p:nvPicPr>
+        <p:blipFill>
+          <a:blip r:embed="rId1"/>
+          <a:stretch>
+            <a:fillRect/>
+          </a:stretch>
+        </p:blipFill>
+        <p:spPr>
+          <a:xfrm>
+            <a:off x="653339" y="1097280"/>
+            <a:ext cx="7837322" cy="2743200"/>
+          </a:xfrm>
+          <a:prstGeom prst="rect">
+            <a:avLst/>
+          </a:prstGeom>
+        </p:spPr>
+      </p:pic>
+      <p:sp>
+        <p:nvSpPr>
+          <p:cNvPr id="4" name="ladder-note"/>
+          <p:cNvSpPr/>
+          <p:nvPr/>
+        </p:nvSpPr>
+        <p:spPr>
+          <a:xfrm>
+            <a:off x="457200" y="3977640"/>
+            <a:ext cx="8229600" cy="566928"/>
+          </a:xfrm>
+          <a:prstGeom prst="roundRect">
+            <a:avLst>
+              <a:gd name="adj" fmla="val 12903"/>
+            </a:avLst>
+          </a:prstGeom>
+          <a:solidFill>
+            <a:schemeClr val="accent4"/>
+          </a:solidFill>
+          <a:ln w="12700">
+            <a:solidFill>
+              <a:schemeClr val="accent4"/>
+            </a:solidFill>
+            <a:prstDash val="solid"/>
+          </a:ln>
+        </p:spPr>
+      </p:sp>
+      <p:sp>
+        <p:nvSpPr>
+          <p:cNvPr id="5" name="ladder-text"/>
           <p:cNvSpPr txBox="1"/>
           <p:nvPr/>
         </p:nvSpPr>
         <p:spPr>
           <a:xfrm>
-            <a:off x="457200" y="1051560"/>
-            <a:ext cx="8229600" cy="868680"/>
+            <a:off x="594360" y="4005072"/>
+            <a:ext cx="7955280" cy="512064"/>
           </a:xfrm>
           <a:prstGeom prst="rect">
             <a:avLst/>
@@ -10944,132 +9337,36 @@
               <a:buNone/>
             </a:pPr>
             <a:r>
-              <a:rPr lang="en-US" sz="1700" b="1" dirty="0">
-                <a:solidFill>
-                  <a:schemeClr val="tx2"/>
-                </a:solidFill>
-              </a:rPr>
-              <a:t>The weight is the depositor’s psychological characteristic; culture is the population-level source.</a:t>
-            </a:r>
-            <a:endParaRPr lang="en-US" sz="1700" dirty="0"/>
-          </a:p>
-        </p:txBody>
-      </p:sp>
-      <p:sp>
-        <p:nvSpPr>
-          <p:cNvPr id="4" name="step-items"/>
-          <p:cNvSpPr txBox="1"/>
-          <p:nvPr/>
-        </p:nvSpPr>
-        <p:spPr>
-          <a:xfrm>
-            <a:off x="457200" y="2103120"/>
-            <a:ext cx="8229600" cy="2103120"/>
-          </a:xfrm>
-          <a:prstGeom prst="rect">
-            <a:avLst/>
-          </a:prstGeom>
-          <a:noFill/>
-          <a:ln/>
-        </p:spPr>
-        <p:txBody>
-          <a:bodyPr wrap="square" lIns="0" tIns="0" rIns="0" bIns="0" rtlCol="0" anchor="t"/>
-          <a:lstStyle/>
-          <a:p>
-            <a:pPr marL="177800" indent="-177800">
-              <a:spcAft>
-                <a:spcPts val="900"/>
-              </a:spcAft>
-              <a:buSzPct val="100000"/>
-              <a:buChar char="•"/>
-            </a:pPr>
-            <a:r>
-              <a:rPr lang="en-US" sz="1400" b="1" dirty="0">
+              <a:rPr lang="en-US" sz="1200" dirty="0">
+                <a:solidFill>
+                  <a:schemeClr val="accent3"/>
+                </a:solidFill>
+              </a:rPr>
+              <a:t>Rungs 1 and 2 are the literature. </a:t>
+            </a:r>
+            <a:pPr indent="0" marL="0">
+              <a:buNone/>
+            </a:pPr>
+            <a:r>
+              <a:rPr lang="en-US" sz="1200" b="1" dirty="0">
+                <a:solidFill>
+                  <a:schemeClr val="accent1"/>
+                </a:solidFill>
+              </a:rPr>
+              <a:t>Rung 3 is this paper: </a:t>
+            </a:r>
+            <a:pPr indent="0" marL="0">
+              <a:buNone/>
+            </a:pPr>
+            <a:r>
+              <a:rPr lang="en-US" sz="1200" dirty="0">
                 <a:solidFill>
                   <a:schemeClr val="tx1"/>
                 </a:solidFill>
               </a:rPr>
-              <a:t>Chapter 1 formalises it. </a:t>
-            </a:r>
-            <a:pPr indent="0" marL="0">
-              <a:spcAft>
-                <a:spcPts val="900"/>
-              </a:spcAft>
-              <a:buNone/>
-            </a:pPr>
-            <a:r>
-              <a:rPr lang="en-US" sz="1400" dirty="0">
-                <a:solidFill>
-                  <a:schemeClr val="tx1"/>
-                </a:solidFill>
-              </a:rPr>
-              <a:t>A stale public signal and heterogeneous dispositional weights inside Goldstein–Pauzner. Prediction: which type runs reverses with the sign of the public error.</a:t>
-            </a:r>
-            <a:endParaRPr lang="en-US" sz="1400" dirty="0"/>
-          </a:p>
-          <a:p>
-            <a:pPr marL="177800" indent="-177800">
-              <a:spcAft>
-                <a:spcPts val="900"/>
-              </a:spcAft>
-              <a:buSzPct val="100000"/>
-              <a:buChar char="•"/>
-            </a:pPr>
-            <a:r>
-              <a:rPr lang="en-US" sz="1400" b="1" dirty="0">
-                <a:solidFill>
-                  <a:schemeClr val="tx1"/>
-                </a:solidFill>
-              </a:rPr>
-              <a:t>Chapter 2 observes it once. </a:t>
-            </a:r>
-            <a:pPr indent="0" marL="0">
-              <a:spcAft>
-                <a:spcPts val="900"/>
-              </a:spcAft>
-              <a:buNone/>
-            </a:pPr>
-            <a:r>
-              <a:rPr lang="en-US" sz="1400" dirty="0">
-                <a:solidFill>
-                  <a:schemeClr val="tx1"/>
-                </a:solidFill>
-              </a:rPr>
-              <a:t>Celsius: individualism predicts direction and timing within platform and within ancestral origin, and which public signals depositors act on.</a:t>
-            </a:r>
-            <a:endParaRPr lang="en-US" sz="1400" dirty="0"/>
-          </a:p>
-          <a:p>
-            <a:pPr marL="177800" indent="-177800">
-              <a:spcAft>
-                <a:spcPts val="900"/>
-              </a:spcAft>
-              <a:buSzPct val="100000"/>
-              <a:buChar char="•"/>
-            </a:pPr>
-            <a:r>
-              <a:rPr lang="en-US" sz="1400" b="1" dirty="0">
-                <a:solidFill>
-                  <a:schemeClr val="tx1"/>
-                </a:solidFill>
-              </a:rPr>
-              <a:t>Chapter 3 varies it. </a:t>
-            </a:r>
-            <a:pPr indent="0" marL="0">
-              <a:spcAft>
-                <a:spcPts val="900"/>
-              </a:spcAft>
-              <a:buNone/>
-            </a:pPr>
-            <a:r>
-              <a:rPr lang="en-US" sz="1400" dirty="0">
-                <a:solidFill>
-                  <a:schemeClr val="tx1"/>
-                </a:solidFill>
-              </a:rPr>
-              <a:t>The mix of types, the gap between them, the staleness of the news, and the bank’s contract, in a population of interacting depositors.</a:t>
-            </a:r>
-            <a:endParaRPr lang="en-US" sz="1400" dirty="0"/>
+              <a:t>the only one that orders depositors by a trait, and reverses when the public line is too optimistic or too pessimistic.</a:t>
+            </a:r>
+            <a:endParaRPr lang="en-US" sz="1200" dirty="0"/>
           </a:p>
         </p:txBody>
       </p:sp>
@@ -11175,22 +9472,73 @@
                   <a:schemeClr val="tx2"/>
                 </a:solidFill>
               </a:rPr>
-              <a:t>Why the third chapter is a simulation</a:t>
+              <a:t>The model in one picture</a:t>
             </a:r>
             <a:endParaRPr lang="en-US" sz="2400" dirty="0"/>
           </a:p>
         </p:txBody>
       </p:sp>
-      <p:sp>
-        <p:nvSpPr>
-          <p:cNvPr id="3" name="step-lead"/>
+      <p:pic>
+        <p:nvPicPr>
+          <p:cNvPr id="3" name="odd" descr="Model overview: depositors on a social network with a bank; each run draws fundamentals and signals, a shock hits, then depositors observe neighbours and news, form beliefs, and decide whether to withdraw, tick by tick.">    </p:cNvPr>
+          <p:cNvPicPr>
+            <a:picLocks noChangeAspect="1"/>
+          </p:cNvPicPr>
+          <p:nvPr/>
+        </p:nvPicPr>
+        <p:blipFill>
+          <a:blip r:embed="rId1"/>
+          <a:stretch>
+            <a:fillRect/>
+          </a:stretch>
+        </p:blipFill>
+        <p:spPr>
+          <a:xfrm>
+            <a:off x="457200" y="1051560"/>
+            <a:ext cx="3467633" cy="3520440"/>
+          </a:xfrm>
+          <a:prstGeom prst="rect">
+            <a:avLst/>
+          </a:prstGeom>
+        </p:spPr>
+      </p:pic>
+      <p:sp>
+        <p:nvSpPr>
+          <p:cNvPr id="4" name="stat-depositors on a smal"/>
+          <p:cNvSpPr/>
+          <p:nvPr/>
+        </p:nvSpPr>
+        <p:spPr>
+          <a:xfrm>
+            <a:off x="4244873" y="1051560"/>
+            <a:ext cx="2152383" cy="960120"/>
+          </a:xfrm>
+          <a:prstGeom prst="roundRect">
+            <a:avLst>
+              <a:gd name="adj" fmla="val 7619"/>
+            </a:avLst>
+          </a:prstGeom>
+          <a:solidFill>
+            <a:schemeClr val="bg2"/>
+          </a:solidFill>
+          <a:ln w="12700">
+            <a:solidFill>
+              <a:schemeClr val="bg2"/>
+            </a:solidFill>
+            <a:prstDash val="solid"/>
+          </a:ln>
+        </p:spPr>
+      </p:sp>
+      <p:sp>
+        <p:nvSpPr>
+          <p:cNvPr id="5" name="stat-big"/>
           <p:cNvSpPr txBox="1"/>
           <p:nvPr/>
         </p:nvSpPr>
         <p:spPr>
           <a:xfrm>
-            <a:off x="457200" y="1051560"/>
-            <a:ext cx="8229600" cy="868680"/>
+            <a:off x="4382033" y="1124712"/>
+            <a:ext cx="1878063" cy="457200"/>
           </a:xfrm>
           <a:prstGeom prst="rect">
             <a:avLst/>
@@ -11206,27 +9554,372 @@
               <a:buNone/>
             </a:pPr>
             <a:r>
-              <a:rPr lang="en-US" sz="1700" b="1" dirty="0">
-                <a:solidFill>
-                  <a:schemeClr val="tx2"/>
-                </a:solidFill>
-              </a:rPr>
-              <a:t>Chapter 1 relaxed one assumption. The agent-based model relaxes the rest at once, and lets the three rungs interact.</a:t>
-            </a:r>
-            <a:endParaRPr lang="en-US" sz="1700" dirty="0"/>
-          </a:p>
-        </p:txBody>
-      </p:sp>
-      <p:sp>
-        <p:nvSpPr>
-          <p:cNvPr id="4" name="step-items"/>
+              <a:rPr lang="en-US" sz="2600" b="1" dirty="0">
+                <a:solidFill>
+                  <a:schemeClr val="accent1"/>
+                </a:solidFill>
+                <a:latin typeface="Cambria" pitchFamily="34" charset="0"/>
+                <a:ea typeface="Cambria" pitchFamily="34" charset="-122"/>
+                <a:cs typeface="Cambria" pitchFamily="34" charset="-120"/>
+              </a:rPr>
+              <a:t>1,000</a:t>
+            </a:r>
+            <a:endParaRPr lang="en-US" sz="2600" dirty="0"/>
+          </a:p>
+        </p:txBody>
+      </p:sp>
+      <p:sp>
+        <p:nvSpPr>
+          <p:cNvPr id="6" name="stat-label"/>
           <p:cNvSpPr txBox="1"/>
           <p:nvPr/>
         </p:nvSpPr>
         <p:spPr>
           <a:xfrm>
-            <a:off x="457200" y="2103120"/>
-            <a:ext cx="8229600" cy="2103120"/>
+            <a:off x="4382033" y="1600200"/>
+            <a:ext cx="1878063" cy="356616"/>
+          </a:xfrm>
+          <a:prstGeom prst="rect">
+            <a:avLst/>
+          </a:prstGeom>
+          <a:noFill/>
+          <a:ln/>
+        </p:spPr>
+        <p:txBody>
+          <a:bodyPr wrap="square" lIns="0" tIns="0" rIns="0" bIns="0" rtlCol="0" anchor="t"/>
+          <a:lstStyle/>
+          <a:p>
+            <a:pPr indent="0" marL="0">
+              <a:buNone/>
+            </a:pPr>
+            <a:r>
+              <a:rPr lang="en-US" sz="1100" dirty="0">
+                <a:solidFill>
+                  <a:schemeClr val="accent3"/>
+                </a:solidFill>
+              </a:rPr>
+              <a:t>depositors on a small-world network, one bank</a:t>
+            </a:r>
+            <a:endParaRPr lang="en-US" sz="1100" dirty="0"/>
+          </a:p>
+        </p:txBody>
+      </p:sp>
+      <p:sp>
+        <p:nvSpPr>
+          <p:cNvPr id="7" name="stat-cap on any one depos"/>
+          <p:cNvSpPr/>
+          <p:nvPr/>
+        </p:nvSpPr>
+        <p:spPr>
+          <a:xfrm>
+            <a:off x="6534417" y="1051560"/>
+            <a:ext cx="2152383" cy="960120"/>
+          </a:xfrm>
+          <a:prstGeom prst="roundRect">
+            <a:avLst>
+              <a:gd name="adj" fmla="val 7619"/>
+            </a:avLst>
+          </a:prstGeom>
+          <a:solidFill>
+            <a:schemeClr val="bg2"/>
+          </a:solidFill>
+          <a:ln w="12700">
+            <a:solidFill>
+              <a:schemeClr val="bg2"/>
+            </a:solidFill>
+            <a:prstDash val="solid"/>
+          </a:ln>
+        </p:spPr>
+      </p:sp>
+      <p:sp>
+        <p:nvSpPr>
+          <p:cNvPr id="8" name="stat-big"/>
+          <p:cNvSpPr txBox="1"/>
+          <p:nvPr/>
+        </p:nvSpPr>
+        <p:spPr>
+          <a:xfrm>
+            <a:off x="6671577" y="1124712"/>
+            <a:ext cx="1878063" cy="457200"/>
+          </a:xfrm>
+          <a:prstGeom prst="rect">
+            <a:avLst/>
+          </a:prstGeom>
+          <a:noFill/>
+          <a:ln/>
+        </p:spPr>
+        <p:txBody>
+          <a:bodyPr wrap="square" lIns="0" tIns="0" rIns="0" bIns="0" rtlCol="0" anchor="ctr"/>
+          <a:lstStyle/>
+          <a:p>
+            <a:pPr indent="0" marL="0">
+              <a:buNone/>
+            </a:pPr>
+            <a:r>
+              <a:rPr lang="en-US" sz="2600" b="1" dirty="0">
+                <a:solidFill>
+                  <a:schemeClr val="accent1"/>
+                </a:solidFill>
+                <a:latin typeface="Cambria" pitchFamily="34" charset="0"/>
+                <a:ea typeface="Cambria" pitchFamily="34" charset="-122"/>
+                <a:cs typeface="Cambria" pitchFamily="34" charset="-120"/>
+              </a:rPr>
+              <a:t>1%</a:t>
+            </a:r>
+            <a:endParaRPr lang="en-US" sz="2600" dirty="0"/>
+          </a:p>
+        </p:txBody>
+      </p:sp>
+      <p:sp>
+        <p:nvSpPr>
+          <p:cNvPr id="9" name="stat-label"/>
+          <p:cNvSpPr txBox="1"/>
+          <p:nvPr/>
+        </p:nvSpPr>
+        <p:spPr>
+          <a:xfrm>
+            <a:off x="6671577" y="1600200"/>
+            <a:ext cx="1878063" cy="356616"/>
+          </a:xfrm>
+          <a:prstGeom prst="rect">
+            <a:avLst/>
+          </a:prstGeom>
+          <a:noFill/>
+          <a:ln/>
+        </p:spPr>
+        <p:txBody>
+          <a:bodyPr wrap="square" lIns="0" tIns="0" rIns="0" bIns="0" rtlCol="0" anchor="t"/>
+          <a:lstStyle/>
+          <a:p>
+            <a:pPr indent="0" marL="0">
+              <a:buNone/>
+            </a:pPr>
+            <a:r>
+              <a:rPr lang="en-US" sz="1100" dirty="0">
+                <a:solidFill>
+                  <a:schemeClr val="accent3"/>
+                </a:solidFill>
+              </a:rPr>
+              <a:t>cap on any one deposit; sizes log-normal (σ 2.5) below it</a:t>
+            </a:r>
+            <a:endParaRPr lang="en-US" sz="1100" dirty="0"/>
+          </a:p>
+        </p:txBody>
+      </p:sp>
+      <p:sp>
+        <p:nvSpPr>
+          <p:cNvPr id="10" name="stat-risk aversion; parti"/>
+          <p:cNvSpPr/>
+          <p:nvPr/>
+        </p:nvSpPr>
+        <p:spPr>
+          <a:xfrm>
+            <a:off x="4244873" y="2148840"/>
+            <a:ext cx="2152383" cy="960120"/>
+          </a:xfrm>
+          <a:prstGeom prst="roundRect">
+            <a:avLst>
+              <a:gd name="adj" fmla="val 7619"/>
+            </a:avLst>
+          </a:prstGeom>
+          <a:solidFill>
+            <a:schemeClr val="bg2"/>
+          </a:solidFill>
+          <a:ln w="12700">
+            <a:solidFill>
+              <a:schemeClr val="bg2"/>
+            </a:solidFill>
+            <a:prstDash val="solid"/>
+          </a:ln>
+        </p:spPr>
+      </p:sp>
+      <p:sp>
+        <p:nvSpPr>
+          <p:cNvPr id="11" name="stat-big"/>
+          <p:cNvSpPr txBox="1"/>
+          <p:nvPr/>
+        </p:nvSpPr>
+        <p:spPr>
+          <a:xfrm>
+            <a:off x="4382033" y="2221992"/>
+            <a:ext cx="1878063" cy="457200"/>
+          </a:xfrm>
+          <a:prstGeom prst="rect">
+            <a:avLst/>
+          </a:prstGeom>
+          <a:noFill/>
+          <a:ln/>
+        </p:spPr>
+        <p:txBody>
+          <a:bodyPr wrap="square" lIns="0" tIns="0" rIns="0" bIns="0" rtlCol="0" anchor="ctr"/>
+          <a:lstStyle/>
+          <a:p>
+            <a:pPr indent="0" marL="0">
+              <a:buNone/>
+            </a:pPr>
+            <a:r>
+              <a:rPr lang="en-US" sz="2200" b="1" dirty="0">
+                <a:solidFill>
+                  <a:schemeClr val="accent1"/>
+                </a:solidFill>
+                <a:latin typeface="Cambria" pitchFamily="34" charset="0"/>
+                <a:ea typeface="Cambria" pitchFamily="34" charset="-122"/>
+                <a:cs typeface="Cambria" pitchFamily="34" charset="-120"/>
+              </a:rPr>
+              <a:t>CARA 0.1</a:t>
+            </a:r>
+            <a:endParaRPr lang="en-US" sz="2200" dirty="0"/>
+          </a:p>
+        </p:txBody>
+      </p:sp>
+      <p:sp>
+        <p:nvSpPr>
+          <p:cNvPr id="12" name="stat-label"/>
+          <p:cNvSpPr txBox="1"/>
+          <p:nvPr/>
+        </p:nvSpPr>
+        <p:spPr>
+          <a:xfrm>
+            <a:off x="4382033" y="2697480"/>
+            <a:ext cx="1878063" cy="356616"/>
+          </a:xfrm>
+          <a:prstGeom prst="rect">
+            <a:avLst/>
+          </a:prstGeom>
+          <a:noFill/>
+          <a:ln/>
+        </p:spPr>
+        <p:txBody>
+          <a:bodyPr wrap="square" lIns="0" tIns="0" rIns="0" bIns="0" rtlCol="0" anchor="t"/>
+          <a:lstStyle/>
+          <a:p>
+            <a:pPr indent="0" marL="0">
+              <a:buNone/>
+            </a:pPr>
+            <a:r>
+              <a:rPr lang="en-US" sz="1100" dirty="0">
+                <a:solidFill>
+                  <a:schemeClr val="accent3"/>
+                </a:solidFill>
+              </a:rPr>
+              <a:t>risk aversion; partial withdrawals allowed</a:t>
+            </a:r>
+            <a:endParaRPr lang="en-US" sz="1100" dirty="0"/>
+          </a:p>
+        </p:txBody>
+      </p:sp>
+      <p:sp>
+        <p:nvSpPr>
+          <p:cNvPr id="13" name="stat-runs per cell: 25 in"/>
+          <p:cNvSpPr/>
+          <p:nvPr/>
+        </p:nvSpPr>
+        <p:spPr>
+          <a:xfrm>
+            <a:off x="6534417" y="2148840"/>
+            <a:ext cx="2152383" cy="960120"/>
+          </a:xfrm>
+          <a:prstGeom prst="roundRect">
+            <a:avLst>
+              <a:gd name="adj" fmla="val 7619"/>
+            </a:avLst>
+          </a:prstGeom>
+          <a:solidFill>
+            <a:schemeClr val="bg2"/>
+          </a:solidFill>
+          <a:ln w="12700">
+            <a:solidFill>
+              <a:schemeClr val="bg2"/>
+            </a:solidFill>
+            <a:prstDash val="solid"/>
+          </a:ln>
+        </p:spPr>
+      </p:sp>
+      <p:sp>
+        <p:nvSpPr>
+          <p:cNvPr id="14" name="stat-big"/>
+          <p:cNvSpPr txBox="1"/>
+          <p:nvPr/>
+        </p:nvSpPr>
+        <p:spPr>
+          <a:xfrm>
+            <a:off x="6671577" y="2221992"/>
+            <a:ext cx="1878063" cy="457200"/>
+          </a:xfrm>
+          <a:prstGeom prst="rect">
+            <a:avLst/>
+          </a:prstGeom>
+          <a:noFill/>
+          <a:ln/>
+        </p:spPr>
+        <p:txBody>
+          <a:bodyPr wrap="square" lIns="0" tIns="0" rIns="0" bIns="0" rtlCol="0" anchor="ctr"/>
+          <a:lstStyle/>
+          <a:p>
+            <a:pPr indent="0" marL="0">
+              <a:buNone/>
+            </a:pPr>
+            <a:r>
+              <a:rPr lang="en-US" sz="2600" b="1" dirty="0">
+                <a:solidFill>
+                  <a:schemeClr val="accent1"/>
+                </a:solidFill>
+                <a:latin typeface="Cambria" pitchFamily="34" charset="0"/>
+                <a:ea typeface="Cambria" pitchFamily="34" charset="-122"/>
+                <a:cs typeface="Cambria" pitchFamily="34" charset="-120"/>
+              </a:rPr>
+              <a:t>250</a:t>
+            </a:r>
+            <a:endParaRPr lang="en-US" sz="2600" dirty="0"/>
+          </a:p>
+        </p:txBody>
+      </p:sp>
+      <p:sp>
+        <p:nvSpPr>
+          <p:cNvPr id="15" name="stat-label"/>
+          <p:cNvSpPr txBox="1"/>
+          <p:nvPr/>
+        </p:nvSpPr>
+        <p:spPr>
+          <a:xfrm>
+            <a:off x="6671577" y="2697480"/>
+            <a:ext cx="1878063" cy="356616"/>
+          </a:xfrm>
+          <a:prstGeom prst="rect">
+            <a:avLst/>
+          </a:prstGeom>
+          <a:noFill/>
+          <a:ln/>
+        </p:spPr>
+        <p:txBody>
+          <a:bodyPr wrap="square" lIns="0" tIns="0" rIns="0" bIns="0" rtlCol="0" anchor="t"/>
+          <a:lstStyle/>
+          <a:p>
+            <a:pPr indent="0" marL="0">
+              <a:buNone/>
+            </a:pPr>
+            <a:r>
+              <a:rPr lang="en-US" sz="1100" dirty="0">
+                <a:solidFill>
+                  <a:schemeClr val="accent3"/>
+                </a:solidFill>
+              </a:rPr>
+              <a:t>runs per cell: 25 initialisations × 10 draws</a:t>
+            </a:r>
+            <a:endParaRPr lang="en-US" sz="1100" dirty="0"/>
+          </a:p>
+        </p:txBody>
+      </p:sp>
+      <p:sp>
+        <p:nvSpPr>
+          <p:cNvPr id="16" name="bullets"/>
+          <p:cNvSpPr txBox="1"/>
+          <p:nvPr/>
+        </p:nvSpPr>
+        <p:spPr>
+          <a:xfrm>
+            <a:off x="4244873" y="3200400"/>
+            <a:ext cx="4441927" cy="1371600"/>
           </a:xfrm>
           <a:prstGeom prst="rect">
             <a:avLst/>
@@ -11240,98 +9933,74 @@
           <a:p>
             <a:pPr marL="177800" indent="-177800">
               <a:spcAft>
-                <a:spcPts val="900"/>
+                <a:spcPts val="400"/>
               </a:spcAft>
               <a:buSzPct val="100000"/>
               <a:buChar char="•"/>
             </a:pPr>
             <a:r>
-              <a:rPr lang="en-US" sz="1400" b="1" dirty="0">
+              <a:rPr lang="en-US" sz="1150" dirty="0">
                 <a:solidFill>
                   <a:schemeClr val="tx1"/>
                 </a:solidFill>
               </a:rPr>
-              <a:t>Chapter 1 relaxed one thing. </a:t>
-            </a:r>
-            <a:pPr indent="0" marL="0">
-              <a:spcAft>
-                <a:spcPts val="900"/>
-              </a:spcAft>
-              <a:buNone/>
-            </a:pPr>
-            <a:r>
-              <a:rPr lang="en-US" sz="1400" dirty="0">
-                <a:solidFill>
-                  <a:schemeClr val="tx1"/>
-                </a:solidFill>
-              </a:rPr>
-              <a:t>The one-size-fits-all weight on public news became a stable, heterogeneous weight on a stale public signal. Everything else stayed: a continuum of depositors, one simultaneous move, no network.</a:t>
-            </a:r>
-            <a:endParaRPr lang="en-US" sz="1400" dirty="0"/>
+              <a:t>One bank that sells its long asset at a discount when cash runs short (a fire-sale bank)</a:t>
+            </a:r>
+            <a:endParaRPr lang="en-US" sz="1150" dirty="0"/>
           </a:p>
           <a:p>
             <a:pPr marL="177800" indent="-177800">
               <a:spcAft>
-                <a:spcPts val="900"/>
+                <a:spcPts val="400"/>
               </a:spcAft>
               <a:buSzPct val="100000"/>
               <a:buChar char="•"/>
             </a:pPr>
             <a:r>
-              <a:rPr lang="en-US" sz="1400" b="1" dirty="0">
+              <a:rPr lang="en-US" sz="1150" dirty="0">
                 <a:solidFill>
                   <a:schemeClr val="tx1"/>
                 </a:solidFill>
               </a:rPr>
-              <a:t>The model relaxes the rest at once. </a:t>
-            </a:r>
-            <a:pPr indent="0" marL="0">
-              <a:spcAft>
-                <a:spcPts val="900"/>
-              </a:spcAft>
-              <a:buNone/>
-            </a:pPr>
-            <a:r>
-              <a:rPr lang="en-US" sz="1400" dirty="0">
-                <a:solidFill>
-                  <a:schemeClr val="tx1"/>
-                </a:solidFill>
-              </a:rPr>
-              <a:t>The signal (a private draw per depositor), location (a network, neighbours’ withdrawals arriving tick by tick, public news absent, accurate or stale), interpretation (λ, formed in a cultural warm-up), plus deposit sizes, risk preferences and the contract.</a:t>
-            </a:r>
-            <a:endParaRPr lang="en-US" sz="1400" dirty="0"/>
+              <a:t>Each tick a depositor sees neighbours’ withdrawals and the public news, blends them with a private signal, and withdraws if that pays</a:t>
+            </a:r>
+            <a:endParaRPr lang="en-US" sz="1150" dirty="0"/>
           </a:p>
           <a:p>
             <a:pPr marL="177800" indent="-177800">
               <a:spcAft>
-                <a:spcPts val="900"/>
+                <a:spcPts val="400"/>
               </a:spcAft>
               <a:buSzPct val="100000"/>
               <a:buChar char="•"/>
             </a:pPr>
             <a:r>
-              <a:rPr lang="en-US" sz="1400" b="1" dirty="0">
+              <a:rPr lang="en-US" sz="1150" dirty="0">
                 <a:solidFill>
                   <a:schemeClr val="tx1"/>
                 </a:solidFill>
               </a:rPr>
-              <a:t>An analytical model cannot carry all of that. </a:t>
-            </a:r>
-            <a:pPr indent="0" marL="0">
+              <a:t>A public signal can be absent, accurate, or outdated</a:t>
+            </a:r>
+            <a:endParaRPr lang="en-US" sz="1150" dirty="0"/>
+          </a:p>
+          <a:p>
+            <a:pPr marL="177800" indent="-177800">
               <a:spcAft>
-                <a:spcPts val="900"/>
+                <a:spcPts val="400"/>
               </a:spcAft>
-              <a:buNone/>
-            </a:pPr>
-            <a:r>
-              <a:rPr lang="en-US" sz="1400" dirty="0">
+              <a:buSzPct val="100000"/>
+              <a:buChar char="•"/>
+            </a:pPr>
+            <a:r>
+              <a:rPr lang="en-US" sz="1150" dirty="0">
                 <a:solidFill>
                   <a:schemeClr val="tx1"/>
                 </a:solidFill>
               </a:rPr>
-              <a:t>Each addition breaks the threshold-equilibrium machinery; together they are beyond closed form. The simulation is what lets the rungs be varied and measured separately.</a:t>
-            </a:r>
-            <a:endParaRPr lang="en-US" sz="1400" dirty="0"/>
+              <a:t>Outcomes: D = individualists’ minus collectivists’ withdrawal share (those not hit by the shock); P(fail) = share of runs that fail</a:t>
+            </a:r>
+            <a:endParaRPr lang="en-US" sz="1150" dirty="0"/>
           </a:p>
         </p:txBody>
       </p:sp>
@@ -11437,50 +10106,580 @@
                   <a:schemeClr val="tx2"/>
                 </a:solidFill>
               </a:rPr>
-              <a:t>The ladder: signal, location, interpretation</a:t>
+              <a:t>Individualists and collectivists: who listens to whom</a:t>
             </a:r>
             <a:endParaRPr lang="en-US" sz="2400" dirty="0"/>
           </a:p>
         </p:txBody>
       </p:sp>
-      <p:pic>
-        <p:nvPicPr>
-          <p:cNvPr id="3" name="ladder" descr="Three panels. Signal: one bank fundamental sends a noisy private signal to each depositor, who line up from run to stay. Location: a network in which the signal has reached some depositors from a first hearer and not others. Interpretation: the same private and public signals reach an individualist, who leans on the private signal, and a collectivist, who leans on the public one; culture sets the weight.">    </p:cNvPr>
-          <p:cNvPicPr>
-            <a:picLocks noChangeAspect="1"/>
-          </p:cNvPicPr>
-          <p:nvPr/>
-        </p:nvPicPr>
-        <p:blipFill>
-          <a:blip r:embed="rId1"/>
-          <a:stretch>
-            <a:fillRect/>
-          </a:stretch>
-        </p:blipFill>
-        <p:spPr>
-          <a:xfrm>
-            <a:off x="653339" y="1097280"/>
-            <a:ext cx="7837322" cy="2743200"/>
-          </a:xfrm>
-          <a:prstGeom prst="rect">
-            <a:avLst/>
-          </a:prstGeom>
-        </p:spPr>
-      </p:pic>
-      <p:sp>
-        <p:nvSpPr>
-          <p:cNvPr id="4" name="ladder-note"/>
+      <p:sp>
+        <p:nvSpPr>
+          <p:cNvPr id="3" name="type-Individualists"/>
           <p:cNvSpPr/>
           <p:nvPr/>
         </p:nvSpPr>
         <p:spPr>
           <a:xfrm>
-            <a:off x="457200" y="3977640"/>
-            <a:ext cx="8229600" cy="566928"/>
+            <a:off x="457200" y="1051560"/>
+            <a:ext cx="4023360" cy="2377440"/>
           </a:xfrm>
           <a:prstGeom prst="roundRect">
             <a:avLst>
-              <a:gd name="adj" fmla="val 12903"/>
+              <a:gd name="adj" fmla="val 3077"/>
+            </a:avLst>
+          </a:prstGeom>
+          <a:solidFill>
+            <a:schemeClr val="bg2"/>
+          </a:solidFill>
+          <a:ln w="12700">
+            <a:solidFill>
+              <a:schemeClr val="bg2"/>
+            </a:solidFill>
+            <a:prstDash val="solid"/>
+          </a:ln>
+        </p:spPr>
+      </p:sp>
+      <p:sp>
+        <p:nvSpPr>
+          <p:cNvPr id="4" name="type-head"/>
+          <p:cNvSpPr txBox="1"/>
+          <p:nvPr/>
+        </p:nvSpPr>
+        <p:spPr>
+          <a:xfrm>
+            <a:off x="640080" y="1143000"/>
+            <a:ext cx="3657600" cy="365760"/>
+          </a:xfrm>
+          <a:prstGeom prst="rect">
+            <a:avLst/>
+          </a:prstGeom>
+          <a:noFill/>
+          <a:ln/>
+        </p:spPr>
+        <p:txBody>
+          <a:bodyPr wrap="square" lIns="0" tIns="0" rIns="0" bIns="0" rtlCol="0" anchor="ctr"/>
+          <a:lstStyle/>
+          <a:p>
+            <a:pPr indent="0" marL="0">
+              <a:buNone/>
+            </a:pPr>
+            <a:r>
+              <a:rPr lang="en-US" sz="1800" b="1" dirty="0">
+                <a:solidFill>
+                  <a:srgbClr val="EB6834"/>
+                </a:solidFill>
+              </a:rPr>
+              <a:t>Individualists</a:t>
+            </a:r>
+            <a:endParaRPr lang="en-US" sz="1800" dirty="0"/>
+          </a:p>
+        </p:txBody>
+      </p:sp>
+      <p:sp>
+        <p:nvSpPr>
+          <p:cNvPr id="5" name="bullets"/>
+          <p:cNvSpPr txBox="1"/>
+          <p:nvPr/>
+        </p:nvSpPr>
+        <p:spPr>
+          <a:xfrm>
+            <a:off x="640080" y="1600200"/>
+            <a:ext cx="3657600" cy="1737360"/>
+          </a:xfrm>
+          <a:prstGeom prst="rect">
+            <a:avLst/>
+          </a:prstGeom>
+          <a:noFill/>
+          <a:ln/>
+        </p:spPr>
+        <p:txBody>
+          <a:bodyPr wrap="square" lIns="0" tIns="0" rIns="0" bIns="0" rtlCol="0" anchor="t"/>
+          <a:lstStyle/>
+          <a:p>
+            <a:pPr marL="177800" indent="-177800">
+              <a:spcAft>
+                <a:spcPts val="500"/>
+              </a:spcAft>
+              <a:buSzPct val="100000"/>
+              <a:buChar char="•"/>
+            </a:pPr>
+            <a:r>
+              <a:rPr lang="en-US" sz="1300" dirty="0">
+                <a:solidFill>
+                  <a:schemeClr val="tx1"/>
+                </a:solidFill>
+              </a:rPr>
+              <a:t>Trust their own information about the bank</a:t>
+            </a:r>
+            <a:endParaRPr lang="en-US" sz="1300" dirty="0"/>
+          </a:p>
+          <a:p>
+            <a:pPr marL="177800" indent="-177800">
+              <a:spcAft>
+                <a:spcPts val="500"/>
+              </a:spcAft>
+              <a:buSzPct val="100000"/>
+              <a:buChar char="•"/>
+            </a:pPr>
+            <a:r>
+              <a:rPr lang="en-US" sz="1300" dirty="0">
+                <a:solidFill>
+                  <a:schemeClr val="tx1"/>
+                </a:solidFill>
+              </a:rPr>
+              <a:t>Put little weight on what neighbours do or on public news</a:t>
+            </a:r>
+            <a:endParaRPr lang="en-US" sz="1300" dirty="0"/>
+          </a:p>
+          <a:p>
+            <a:pPr marL="177800" indent="-177800">
+              <a:spcAft>
+                <a:spcPts val="500"/>
+              </a:spcAft>
+              <a:buSzPct val="100000"/>
+              <a:buChar char="•"/>
+            </a:pPr>
+            <a:r>
+              <a:rPr lang="en-US" sz="1300" dirty="0">
+                <a:solidFill>
+                  <a:schemeClr val="tx1"/>
+                </a:solidFill>
+              </a:rPr>
+              <a:t>Weight on the social side: λ = 0.1 to 0.3</a:t>
+            </a:r>
+            <a:endParaRPr lang="en-US" sz="1300" dirty="0"/>
+          </a:p>
+          <a:p>
+            <a:pPr marL="177800" indent="-177800">
+              <a:spcAft>
+                <a:spcPts val="500"/>
+              </a:spcAft>
+              <a:buSzPct val="100000"/>
+              <a:buChar char="•"/>
+            </a:pPr>
+            <a:r>
+              <a:rPr lang="en-US" sz="1300" dirty="0">
+                <a:solidFill>
+                  <a:schemeClr val="tx1"/>
+                </a:solidFill>
+              </a:rPr>
+              <a:t>Act on what they see themselves</a:t>
+            </a:r>
+            <a:endParaRPr lang="en-US" sz="1300" dirty="0"/>
+          </a:p>
+        </p:txBody>
+      </p:sp>
+      <p:sp>
+        <p:nvSpPr>
+          <p:cNvPr id="6" name="type-Collectivists"/>
+          <p:cNvSpPr/>
+          <p:nvPr/>
+        </p:nvSpPr>
+        <p:spPr>
+          <a:xfrm>
+            <a:off x="4663440" y="1051560"/>
+            <a:ext cx="4023360" cy="2377440"/>
+          </a:xfrm>
+          <a:prstGeom prst="roundRect">
+            <a:avLst>
+              <a:gd name="adj" fmla="val 3077"/>
+            </a:avLst>
+          </a:prstGeom>
+          <a:solidFill>
+            <a:schemeClr val="bg2"/>
+          </a:solidFill>
+          <a:ln w="12700">
+            <a:solidFill>
+              <a:schemeClr val="bg2"/>
+            </a:solidFill>
+            <a:prstDash val="solid"/>
+          </a:ln>
+        </p:spPr>
+      </p:sp>
+      <p:sp>
+        <p:nvSpPr>
+          <p:cNvPr id="7" name="type-head"/>
+          <p:cNvSpPr txBox="1"/>
+          <p:nvPr/>
+        </p:nvSpPr>
+        <p:spPr>
+          <a:xfrm>
+            <a:off x="4846320" y="1143000"/>
+            <a:ext cx="3657600" cy="365760"/>
+          </a:xfrm>
+          <a:prstGeom prst="rect">
+            <a:avLst/>
+          </a:prstGeom>
+          <a:noFill/>
+          <a:ln/>
+        </p:spPr>
+        <p:txBody>
+          <a:bodyPr wrap="square" lIns="0" tIns="0" rIns="0" bIns="0" rtlCol="0" anchor="ctr"/>
+          <a:lstStyle/>
+          <a:p>
+            <a:pPr indent="0" marL="0">
+              <a:buNone/>
+            </a:pPr>
+            <a:r>
+              <a:rPr lang="en-US" sz="1800" b="1" dirty="0">
+                <a:solidFill>
+                  <a:srgbClr val="2A78D6"/>
+                </a:solidFill>
+              </a:rPr>
+              <a:t>Collectivists</a:t>
+            </a:r>
+            <a:endParaRPr lang="en-US" sz="1800" dirty="0"/>
+          </a:p>
+        </p:txBody>
+      </p:sp>
+      <p:sp>
+        <p:nvSpPr>
+          <p:cNvPr id="8" name="bullets"/>
+          <p:cNvSpPr txBox="1"/>
+          <p:nvPr/>
+        </p:nvSpPr>
+        <p:spPr>
+          <a:xfrm>
+            <a:off x="4846320" y="1600200"/>
+            <a:ext cx="3657600" cy="1737360"/>
+          </a:xfrm>
+          <a:prstGeom prst="rect">
+            <a:avLst/>
+          </a:prstGeom>
+          <a:noFill/>
+          <a:ln/>
+        </p:spPr>
+        <p:txBody>
+          <a:bodyPr wrap="square" lIns="0" tIns="0" rIns="0" bIns="0" rtlCol="0" anchor="t"/>
+          <a:lstStyle/>
+          <a:p>
+            <a:pPr marL="177800" indent="-177800">
+              <a:spcAft>
+                <a:spcPts val="500"/>
+              </a:spcAft>
+              <a:buSzPct val="100000"/>
+              <a:buChar char="•"/>
+            </a:pPr>
+            <a:r>
+              <a:rPr lang="en-US" sz="1300" dirty="0">
+                <a:solidFill>
+                  <a:schemeClr val="tx1"/>
+                </a:solidFill>
+              </a:rPr>
+              <a:t>Watch what neighbours do and what the public news says</a:t>
+            </a:r>
+            <a:endParaRPr lang="en-US" sz="1300" dirty="0"/>
+          </a:p>
+          <a:p>
+            <a:pPr marL="177800" indent="-177800">
+              <a:spcAft>
+                <a:spcPts val="500"/>
+              </a:spcAft>
+              <a:buSzPct val="100000"/>
+              <a:buChar char="•"/>
+            </a:pPr>
+            <a:r>
+              <a:rPr lang="en-US" sz="1300" dirty="0">
+                <a:solidFill>
+                  <a:schemeClr val="tx1"/>
+                </a:solidFill>
+              </a:rPr>
+              <a:t>Put little weight on their own information</a:t>
+            </a:r>
+            <a:endParaRPr lang="en-US" sz="1300" dirty="0"/>
+          </a:p>
+          <a:p>
+            <a:pPr marL="177800" indent="-177800">
+              <a:spcAft>
+                <a:spcPts val="500"/>
+              </a:spcAft>
+              <a:buSzPct val="100000"/>
+              <a:buChar char="•"/>
+            </a:pPr>
+            <a:r>
+              <a:rPr lang="en-US" sz="1300" dirty="0">
+                <a:solidFill>
+                  <a:schemeClr val="tx1"/>
+                </a:solidFill>
+              </a:rPr>
+              <a:t>Weight on the social side: λ = 0.5 to 0.9</a:t>
+            </a:r>
+            <a:endParaRPr lang="en-US" sz="1300" dirty="0"/>
+          </a:p>
+          <a:p>
+            <a:pPr marL="177800" indent="-177800">
+              <a:spcAft>
+                <a:spcPts val="500"/>
+              </a:spcAft>
+              <a:buSzPct val="100000"/>
+              <a:buChar char="•"/>
+            </a:pPr>
+            <a:r>
+              <a:rPr lang="en-US" sz="1300" dirty="0">
+                <a:solidFill>
+                  <a:schemeClr val="tx1"/>
+                </a:solidFill>
+              </a:rPr>
+              <a:t>Move when others move</a:t>
+            </a:r>
+            <a:endParaRPr lang="en-US" sz="1300" dirty="0"/>
+          </a:p>
+        </p:txBody>
+      </p:sp>
+      <p:sp>
+        <p:nvSpPr>
+          <p:cNvPr id="9" name="pairs-head"/>
+          <p:cNvSpPr txBox="1"/>
+          <p:nvPr/>
+        </p:nvSpPr>
+        <p:spPr>
+          <a:xfrm>
+            <a:off x="457200" y="3611880"/>
+            <a:ext cx="4572000" cy="274320"/>
+          </a:xfrm>
+          <a:prstGeom prst="rect">
+            <a:avLst/>
+          </a:prstGeom>
+          <a:noFill/>
+          <a:ln/>
+        </p:spPr>
+        <p:txBody>
+          <a:bodyPr wrap="square" lIns="0" tIns="0" rIns="0" bIns="0" rtlCol="0" anchor="ctr"/>
+          <a:lstStyle/>
+          <a:p>
+            <a:pPr indent="0" marL="0">
+              <a:buNone/>
+            </a:pPr>
+            <a:r>
+              <a:rPr lang="en-US" sz="1100" b="1" dirty="0">
+                <a:solidFill>
+                  <a:schemeClr val="accent3"/>
+                </a:solidFill>
+              </a:rPr>
+              <a:t>Three pairs (λ individualist, λ collectivist) in the figures</a:t>
+            </a:r>
+            <a:endParaRPr lang="en-US" sz="1100" dirty="0"/>
+          </a:p>
+        </p:txBody>
+      </p:sp>
+      <p:sp>
+        <p:nvSpPr>
+          <p:cNvPr id="10" name="chip"/>
+          <p:cNvSpPr/>
+          <p:nvPr/>
+        </p:nvSpPr>
+        <p:spPr>
+          <a:xfrm>
+            <a:off x="457200" y="3931920"/>
+            <a:ext cx="914400" cy="329184"/>
+          </a:xfrm>
+          <a:prstGeom prst="roundRect">
+            <a:avLst>
+              <a:gd name="adj" fmla="val 16667"/>
+            </a:avLst>
+          </a:prstGeom>
+          <a:solidFill>
+            <a:schemeClr val="tx2"/>
+          </a:solidFill>
+          <a:ln w="12700">
+            <a:solidFill>
+              <a:schemeClr val="tx2"/>
+            </a:solidFill>
+            <a:prstDash val="solid"/>
+          </a:ln>
+        </p:spPr>
+      </p:sp>
+      <p:sp>
+        <p:nvSpPr>
+          <p:cNvPr id="11" name="chip-label"/>
+          <p:cNvSpPr txBox="1"/>
+          <p:nvPr/>
+        </p:nvSpPr>
+        <p:spPr>
+          <a:xfrm>
+            <a:off x="457200" y="3931920"/>
+            <a:ext cx="914400" cy="329184"/>
+          </a:xfrm>
+          <a:prstGeom prst="rect">
+            <a:avLst/>
+          </a:prstGeom>
+          <a:noFill/>
+          <a:ln/>
+        </p:spPr>
+        <p:txBody>
+          <a:bodyPr wrap="square" lIns="0" tIns="0" rIns="0" bIns="0" rtlCol="0" anchor="ctr"/>
+          <a:lstStyle/>
+          <a:p>
+            <a:pPr algn="ctr" indent="0" marL="0">
+              <a:buNone/>
+            </a:pPr>
+            <a:r>
+              <a:rPr lang="en-US" sz="1100" b="1" dirty="0">
+                <a:solidFill>
+                  <a:schemeClr val="bg1"/>
+                </a:solidFill>
+                <a:latin typeface="Cambria" pitchFamily="34" charset="0"/>
+                <a:ea typeface="Cambria" pitchFamily="34" charset="-122"/>
+                <a:cs typeface="Cambria" pitchFamily="34" charset="-120"/>
+              </a:rPr>
+              <a:t>(0.1, 0.9)</a:t>
+            </a:r>
+            <a:endParaRPr lang="en-US" sz="1100" dirty="0"/>
+          </a:p>
+        </p:txBody>
+      </p:sp>
+      <p:sp>
+        <p:nvSpPr>
+          <p:cNvPr id="12" name="pair-label"/>
+          <p:cNvSpPr txBox="1"/>
+          <p:nvPr/>
+        </p:nvSpPr>
+        <p:spPr>
+          <a:xfrm>
+            <a:off x="1417320" y="3931920"/>
+            <a:ext cx="640080" cy="329184"/>
+          </a:xfrm>
+          <a:prstGeom prst="rect">
+            <a:avLst/>
+          </a:prstGeom>
+          <a:noFill/>
+          <a:ln/>
+        </p:spPr>
+        <p:txBody>
+          <a:bodyPr wrap="square" lIns="0" tIns="0" rIns="0" bIns="0" rtlCol="0" anchor="ctr"/>
+          <a:lstStyle/>
+          <a:p>
+            <a:pPr indent="0" marL="0">
+              <a:buNone/>
+            </a:pPr>
+            <a:r>
+              <a:rPr lang="en-US" sz="1100" dirty="0">
+                <a:solidFill>
+                  <a:schemeClr val="accent3"/>
+                </a:solidFill>
+              </a:rPr>
+              <a:t>wide gap</a:t>
+            </a:r>
+            <a:endParaRPr lang="en-US" sz="1100" dirty="0"/>
+          </a:p>
+        </p:txBody>
+      </p:sp>
+      <p:sp>
+        <p:nvSpPr>
+          <p:cNvPr id="13" name="chip"/>
+          <p:cNvSpPr/>
+          <p:nvPr/>
+        </p:nvSpPr>
+        <p:spPr>
+          <a:xfrm>
+            <a:off x="2057400" y="3931920"/>
+            <a:ext cx="914400" cy="329184"/>
+          </a:xfrm>
+          <a:prstGeom prst="roundRect">
+            <a:avLst>
+              <a:gd name="adj" fmla="val 16667"/>
+            </a:avLst>
+          </a:prstGeom>
+          <a:solidFill>
+            <a:schemeClr val="accent3"/>
+          </a:solidFill>
+          <a:ln w="12700">
+            <a:solidFill>
+              <a:schemeClr val="accent3"/>
+            </a:solidFill>
+            <a:prstDash val="solid"/>
+          </a:ln>
+        </p:spPr>
+      </p:sp>
+      <p:sp>
+        <p:nvSpPr>
+          <p:cNvPr id="14" name="chip-label"/>
+          <p:cNvSpPr txBox="1"/>
+          <p:nvPr/>
+        </p:nvSpPr>
+        <p:spPr>
+          <a:xfrm>
+            <a:off x="2057400" y="3931920"/>
+            <a:ext cx="914400" cy="329184"/>
+          </a:xfrm>
+          <a:prstGeom prst="rect">
+            <a:avLst/>
+          </a:prstGeom>
+          <a:noFill/>
+          <a:ln/>
+        </p:spPr>
+        <p:txBody>
+          <a:bodyPr wrap="square" lIns="0" tIns="0" rIns="0" bIns="0" rtlCol="0" anchor="ctr"/>
+          <a:lstStyle/>
+          <a:p>
+            <a:pPr algn="ctr" indent="0" marL="0">
+              <a:buNone/>
+            </a:pPr>
+            <a:r>
+              <a:rPr lang="en-US" sz="1100" b="1" dirty="0">
+                <a:solidFill>
+                  <a:schemeClr val="bg1"/>
+                </a:solidFill>
+                <a:latin typeface="Cambria" pitchFamily="34" charset="0"/>
+                <a:ea typeface="Cambria" pitchFamily="34" charset="-122"/>
+                <a:cs typeface="Cambria" pitchFamily="34" charset="-120"/>
+              </a:rPr>
+              <a:t>(0.2, 0.8)</a:t>
+            </a:r>
+            <a:endParaRPr lang="en-US" sz="1100" dirty="0"/>
+          </a:p>
+        </p:txBody>
+      </p:sp>
+      <p:sp>
+        <p:nvSpPr>
+          <p:cNvPr id="15" name="pair-label"/>
+          <p:cNvSpPr txBox="1"/>
+          <p:nvPr/>
+        </p:nvSpPr>
+        <p:spPr>
+          <a:xfrm>
+            <a:off x="3017520" y="3931920"/>
+            <a:ext cx="640080" cy="329184"/>
+          </a:xfrm>
+          <a:prstGeom prst="rect">
+            <a:avLst/>
+          </a:prstGeom>
+          <a:noFill/>
+          <a:ln/>
+        </p:spPr>
+        <p:txBody>
+          <a:bodyPr wrap="square" lIns="0" tIns="0" rIns="0" bIns="0" rtlCol="0" anchor="ctr"/>
+          <a:lstStyle/>
+          <a:p>
+            <a:pPr indent="0" marL="0">
+              <a:buNone/>
+            </a:pPr>
+            <a:r>
+              <a:rPr lang="en-US" sz="1100" dirty="0">
+                <a:solidFill>
+                  <a:schemeClr val="accent3"/>
+                </a:solidFill>
+              </a:rPr>
+              <a:t>medium</a:t>
+            </a:r>
+            <a:endParaRPr lang="en-US" sz="1100" dirty="0"/>
+          </a:p>
+        </p:txBody>
+      </p:sp>
+      <p:sp>
+        <p:nvSpPr>
+          <p:cNvPr id="16" name="chip"/>
+          <p:cNvSpPr/>
+          <p:nvPr/>
+        </p:nvSpPr>
+        <p:spPr>
+          <a:xfrm>
+            <a:off x="3657600" y="3931920"/>
+            <a:ext cx="914400" cy="329184"/>
+          </a:xfrm>
+          <a:prstGeom prst="roundRect">
+            <a:avLst>
+              <a:gd name="adj" fmla="val 16667"/>
             </a:avLst>
           </a:prstGeom>
           <a:solidFill>
@@ -11496,14 +10695,14 @@
       </p:sp>
       <p:sp>
         <p:nvSpPr>
-          <p:cNvPr id="5" name="ladder-text"/>
+          <p:cNvPr id="17" name="chip-label"/>
           <p:cNvSpPr txBox="1"/>
           <p:nvPr/>
         </p:nvSpPr>
         <p:spPr>
           <a:xfrm>
-            <a:off x="594360" y="4005072"/>
-            <a:ext cx="7955280" cy="512064"/>
+            <a:off x="3657600" y="3931920"/>
+            <a:ext cx="914400" cy="329184"/>
           </a:xfrm>
           <a:prstGeom prst="rect">
             <a:avLst/>
@@ -11515,40 +10714,137 @@
           <a:bodyPr wrap="square" lIns="0" tIns="0" rIns="0" bIns="0" rtlCol="0" anchor="ctr"/>
           <a:lstStyle/>
           <a:p>
+            <a:pPr algn="ctr" indent="0" marL="0">
+              <a:buNone/>
+            </a:pPr>
+            <a:r>
+              <a:rPr lang="en-US" sz="1100" b="1" dirty="0">
+                <a:solidFill>
+                  <a:schemeClr val="tx1"/>
+                </a:solidFill>
+                <a:latin typeface="Cambria" pitchFamily="34" charset="0"/>
+                <a:ea typeface="Cambria" pitchFamily="34" charset="-122"/>
+                <a:cs typeface="Cambria" pitchFamily="34" charset="-120"/>
+              </a:rPr>
+              <a:t>(0.3, 0.5)</a:t>
+            </a:r>
+            <a:endParaRPr lang="en-US" sz="1100" dirty="0"/>
+          </a:p>
+        </p:txBody>
+      </p:sp>
+      <p:sp>
+        <p:nvSpPr>
+          <p:cNvPr id="18" name="pair-label"/>
+          <p:cNvSpPr txBox="1"/>
+          <p:nvPr/>
+        </p:nvSpPr>
+        <p:spPr>
+          <a:xfrm>
+            <a:off x="4617720" y="3931920"/>
+            <a:ext cx="640080" cy="329184"/>
+          </a:xfrm>
+          <a:prstGeom prst="rect">
+            <a:avLst/>
+          </a:prstGeom>
+          <a:noFill/>
+          <a:ln/>
+        </p:spPr>
+        <p:txBody>
+          <a:bodyPr wrap="square" lIns="0" tIns="0" rIns="0" bIns="0" rtlCol="0" anchor="ctr"/>
+          <a:lstStyle/>
+          <a:p>
             <a:pPr indent="0" marL="0">
               <a:buNone/>
             </a:pPr>
             <a:r>
-              <a:rPr lang="en-US" sz="1200" dirty="0">
+              <a:rPr lang="en-US" sz="1100" dirty="0">
                 <a:solidFill>
                   <a:schemeClr val="accent3"/>
                 </a:solidFill>
               </a:rPr>
-              <a:t>Rungs 1 and 2 are the literature. </a:t>
-            </a:r>
+              <a:t>narrow</a:t>
+            </a:r>
+            <a:endParaRPr lang="en-US" sz="1100" dirty="0"/>
+          </a:p>
+        </p:txBody>
+      </p:sp>
+      <p:sp>
+        <p:nvSpPr>
+          <p:cNvPr id="19" name="mu-note"/>
+          <p:cNvSpPr txBox="1"/>
+          <p:nvPr/>
+        </p:nvSpPr>
+        <p:spPr>
+          <a:xfrm>
+            <a:off x="5303520" y="3611880"/>
+            <a:ext cx="3383280" cy="822960"/>
+          </a:xfrm>
+          <a:prstGeom prst="rect">
+            <a:avLst/>
+          </a:prstGeom>
+          <a:noFill/>
+          <a:ln/>
+        </p:spPr>
+        <p:txBody>
+          <a:bodyPr wrap="square" lIns="0" tIns="0" rIns="0" bIns="0" rtlCol="0" anchor="t"/>
+          <a:lstStyle/>
+          <a:p>
             <a:pPr indent="0" marL="0">
               <a:buNone/>
             </a:pPr>
             <a:r>
-              <a:rPr lang="en-US" sz="1200" b="1" dirty="0">
-                <a:solidFill>
-                  <a:schemeClr val="accent1"/>
-                </a:solidFill>
-              </a:rPr>
-              <a:t>Rung 3 is this dissertation: </a:t>
+              <a:rPr lang="en-US" sz="1100" dirty="0">
+                <a:solidFill>
+                  <a:schemeClr val="accent3"/>
+                </a:solidFill>
+              </a:rPr>
+              <a:t>The share of individualists μ is set by a cultural warm-up on the network. </a:t>
             </a:r>
             <a:pPr indent="0" marL="0">
               <a:buNone/>
             </a:pPr>
             <a:r>
-              <a:rPr lang="en-US" sz="1200" dirty="0">
-                <a:solidFill>
-                  <a:schemeClr val="tx1"/>
-                </a:solidFill>
-              </a:rPr>
-              <a:t>the only one that orders depositors by a trait, and reverses when the public line is too optimistic or too pessimistic.</a:t>
-            </a:r>
-            <a:endParaRPr lang="en-US" sz="1200" dirty="0"/>
+              <a:rPr lang="en-US" sz="1100" b="1" dirty="0">
+                <a:solidFill>
+                  <a:srgbClr val="EB6834"/>
+                </a:solidFill>
+              </a:rPr>
+              <a:t>Orange = individualists</a:t>
+            </a:r>
+            <a:pPr indent="0" marL="0">
+              <a:buNone/>
+            </a:pPr>
+            <a:r>
+              <a:rPr lang="en-US" sz="1100" dirty="0">
+                <a:solidFill>
+                  <a:schemeClr val="accent3"/>
+                </a:solidFill>
+              </a:rPr>
+              <a:t>, </a:t>
+            </a:r>
+            <a:pPr indent="0" marL="0">
+              <a:buNone/>
+            </a:pPr>
+            <a:r>
+              <a:rPr lang="en-US" sz="1100" b="1" dirty="0">
+                <a:solidFill>
+                  <a:srgbClr val="2A78D6"/>
+                </a:solidFill>
+              </a:rPr>
+              <a:t>blue = collectivists</a:t>
+            </a:r>
+            <a:pPr indent="0" marL="0">
+              <a:buNone/>
+            </a:pPr>
+            <a:r>
+              <a:rPr lang="en-US" sz="1100" dirty="0">
+                <a:solidFill>
+                  <a:schemeClr val="accent3"/>
+                </a:solidFill>
+              </a:rPr>
+              <a:t> throughout.</a:t>
+            </a:r>
+            <a:endParaRPr lang="en-US" sz="1100" dirty="0"/>
           </a:p>
         </p:txBody>
       </p:sp>

--- a/docs/deck_2026-10-26_seminar.pptx
+++ b/docs/deck_2026-10-26_seminar.pptx
@@ -127,7 +127,7 @@
   <p:extLst>
     <p:ext uri="{521415D9-36F7-43E2-AB2F-B90AF26B5E84}">
       <p14:sectionLst xmlns:p14="http://schemas.microsoft.com/office/powerpoint/2010/main">
-        <p14:section name="Opening" id="{f9a93707-d652-f290-439a-7fc98332332b}">
+        <p14:section name="Opening" id="{f591b675-597b-d965-19c9-32905a11ed92}">
           <p14:sldIdLst>
             <p14:sldId id="256"/>
             <p14:sldId id="257"/>
@@ -138,13 +138,13 @@
             <p14:sldId id="262"/>
           </p14:sldIdLst>
         </p14:section>
-        <p14:section name="The model" id="{002b32cb-b0be-cdc2-80e3-579a51ef4379}">
+        <p14:section name="The model" id="{54086bea-1782-8cb1-5127-9db92fdceec2}">
           <p14:sldIdLst>
             <p14:sldId id="263"/>
             <p14:sldId id="264"/>
           </p14:sldIdLst>
         </p14:section>
-        <p14:section name="Results" id="{cbb8f48e-47fd-6b36-ecdd-d1cb7eb4b159}">
+        <p14:section name="Results" id="{0e485032-1caa-bfd6-1e64-302a20c0a63f}">
           <p14:sldIdLst>
             <p14:sldId id="265"/>
             <p14:sldId id="266"/>
@@ -152,17 +152,17 @@
             <p14:sldId id="268"/>
           </p14:sldIdLst>
         </p14:section>
-        <p14:section name="Validation" id="{224acc20-6cd9-cb76-084c-53cf6061a7ec}">
+        <p14:section name="Validation" id="{fb91d5cf-01b3-f5c3-dbb5-372bb3c7e895}">
           <p14:sldIdLst>
             <p14:sldId id="269"/>
           </p14:sldIdLst>
         </p14:section>
-        <p14:section name="Close" id="{11d9ca33-be8e-4bb6-b3d1-fd8bfc3b73f4}">
+        <p14:section name="Close" id="{5f504854-4cf6-20ca-ee1e-220956e2d5fa}">
           <p14:sldIdLst>
             <p14:sldId id="270"/>
           </p14:sldIdLst>
         </p14:section>
-        <p14:section name="Backup" id="{bba43f02-58f1-25f3-0b2e-5a84a09d759c}">
+        <p14:section name="Backup" id="{26652913-41d4-51e8-82e5-d42d11bf377e}">
           <p14:sldIdLst>
             <p14:sldId id="271"/>
             <p14:sldId id="272"/>
@@ -5324,7 +5324,7 @@
                   <a:schemeClr val="accent3"/>
                 </a:solidFill>
               </a:rPr>
-              <a:t>D relative to no news, against how far the public news sits from the truth. Shaded: where Chapter 1 predicts the sign.</a:t>
+              <a:t>D relative to no news, against how far the public news sits from the truth. Shaded: where the theory predicts the sign.</a:t>
             </a:r>
             <a:endParaRPr lang="en-US" sz="1000" dirty="0"/>
           </a:p>
@@ -6758,7 +6758,7 @@
                   <a:schemeClr val="tx1"/>
                 </a:solidFill>
               </a:rPr>
-              <a:t>Super-individuals, to match how the largest depositors exit (Chapter 2 docking)</a:t>
+              <a:t>Super-individuals, to match how the largest depositors exited Celsius</a:t>
             </a:r>
             <a:endParaRPr lang="en-US" sz="1100" dirty="0"/>
           </a:p>
@@ -7249,7 +7249,7 @@
                   <a:schemeClr val="accent3"/>
                 </a:solidFill>
               </a:rPr>
-              <a:t>G1′, G4′, G2a′, G3 and G3c (post hoc). Rows: risk-neutral all-or-nothing, CARA partial, capped reference bank. Filled dot: pooled; hollow: each λ pair. Shaded: Chapter 1’s predicted sign.</a:t>
+              <a:t>G1′, G4′, G2a′, G3 and G3c (post hoc). Rows: risk-neutral all-or-nothing, CARA partial, capped reference bank. Filled dot: pooled; hollow: each λ pair. Shaded: the theory’s predicted sign.</a:t>
             </a:r>
             <a:endParaRPr lang="en-US" sz="1000" dirty="0"/>
           </a:p>

--- a/docs/deck_2026-10-26_seminar.pptx
+++ b/docs/deck_2026-10-26_seminar.pptx
@@ -127,7 +127,7 @@
   <p:extLst>
     <p:ext uri="{521415D9-36F7-43E2-AB2F-B90AF26B5E84}">
       <p14:sectionLst xmlns:p14="http://schemas.microsoft.com/office/powerpoint/2010/main">
-        <p14:section name="Opening" id="{f591b675-597b-d965-19c9-32905a11ed92}">
+        <p14:section name="Opening" id="{1d3cf074-4e85-e669-07bc-149a0e6a9387}">
           <p14:sldIdLst>
             <p14:sldId id="256"/>
             <p14:sldId id="257"/>
@@ -138,13 +138,13 @@
             <p14:sldId id="262"/>
           </p14:sldIdLst>
         </p14:section>
-        <p14:section name="The model" id="{54086bea-1782-8cb1-5127-9db92fdceec2}">
+        <p14:section name="The model" id="{7f159a6e-6da6-e182-4d0b-b4b8328511dd}">
           <p14:sldIdLst>
             <p14:sldId id="263"/>
             <p14:sldId id="264"/>
           </p14:sldIdLst>
         </p14:section>
-        <p14:section name="Results" id="{0e485032-1caa-bfd6-1e64-302a20c0a63f}">
+        <p14:section name="Results" id="{e28da7c2-1af7-15c3-cdc5-d024f3c142cd}">
           <p14:sldIdLst>
             <p14:sldId id="265"/>
             <p14:sldId id="266"/>
@@ -152,17 +152,17 @@
             <p14:sldId id="268"/>
           </p14:sldIdLst>
         </p14:section>
-        <p14:section name="Validation" id="{fb91d5cf-01b3-f5c3-dbb5-372bb3c7e895}">
+        <p14:section name="Validation" id="{92d4872b-54e6-1898-d1fb-ffbe85238d1f}">
           <p14:sldIdLst>
             <p14:sldId id="269"/>
           </p14:sldIdLst>
         </p14:section>
-        <p14:section name="Close" id="{5f504854-4cf6-20ca-ee1e-220956e2d5fa}">
+        <p14:section name="Close" id="{b13baee5-89da-91ae-9db4-6594eda1351e}">
           <p14:sldIdLst>
             <p14:sldId id="270"/>
           </p14:sldIdLst>
         </p14:section>
-        <p14:section name="Backup" id="{26652913-41d4-51e8-82e5-d42d11bf377e}">
+        <p14:section name="Backup" id="{7b94ca39-9de4-0073-627d-5bffea7a4e7e}">
           <p14:sldIdLst>
             <p14:sldId id="271"/>
             <p14:sldId id="272"/>
@@ -2611,7 +2611,7 @@
                   <a:schemeClr val="accent3"/>
                 </a:solidFill>
               </a:rPr>
-              <a:t>A bank run model for the twentieth century</a:t>
+              <a:t>Agent-based Diamond–Dybvig with cultural heterogeneity</a:t>
             </a:r>
             <a:endParaRPr lang="en-US" sz="900" dirty="0"/>
           </a:p>
@@ -3154,7 +3154,7 @@
                   <a:schemeClr val="bg1"/>
                 </a:solidFill>
               </a:rPr>
-              <a:t>A bank run model for the twentieth century</a:t>
+              <a:t>Agent-based Diamond–Dybvig with cultural heterogeneity</a:t>
             </a:r>
             <a:endParaRPr lang="en-US" sz="3400" dirty="0"/>
           </a:p>

--- a/docs/deck_2026-10-26_seminar.pptx
+++ b/docs/deck_2026-10-26_seminar.pptx
@@ -127,7 +127,7 @@
   <p:extLst>
     <p:ext uri="{521415D9-36F7-43E2-AB2F-B90AF26B5E84}">
       <p14:sectionLst xmlns:p14="http://schemas.microsoft.com/office/powerpoint/2010/main">
-        <p14:section name="Opening" id="{1d3cf074-4e85-e669-07bc-149a0e6a9387}">
+        <p14:section name="Opening" id="{d15b5380-53c5-9d8b-7dad-974d29844b4a}">
           <p14:sldIdLst>
             <p14:sldId id="256"/>
             <p14:sldId id="257"/>
@@ -138,13 +138,13 @@
             <p14:sldId id="262"/>
           </p14:sldIdLst>
         </p14:section>
-        <p14:section name="The model" id="{7f159a6e-6da6-e182-4d0b-b4b8328511dd}">
+        <p14:section name="The model" id="{a7fe3828-ed72-f34e-d8f3-86ab0a0ade73}">
           <p14:sldIdLst>
             <p14:sldId id="263"/>
             <p14:sldId id="264"/>
           </p14:sldIdLst>
         </p14:section>
-        <p14:section name="Results" id="{e28da7c2-1af7-15c3-cdc5-d024f3c142cd}">
+        <p14:section name="Results" id="{77a6db49-88e6-fca9-a2f8-f065211da351}">
           <p14:sldIdLst>
             <p14:sldId id="265"/>
             <p14:sldId id="266"/>
@@ -152,17 +152,17 @@
             <p14:sldId id="268"/>
           </p14:sldIdLst>
         </p14:section>
-        <p14:section name="Validation" id="{92d4872b-54e6-1898-d1fb-ffbe85238d1f}">
+        <p14:section name="Validation" id="{da5fa61d-7361-f704-6396-858d136567f6}">
           <p14:sldIdLst>
             <p14:sldId id="269"/>
           </p14:sldIdLst>
         </p14:section>
-        <p14:section name="Close" id="{b13baee5-89da-91ae-9db4-6594eda1351e}">
+        <p14:section name="Close" id="{08b16241-9d90-7acb-a054-b17bd4d80e56}">
           <p14:sldIdLst>
             <p14:sldId id="270"/>
           </p14:sldIdLst>
         </p14:section>
-        <p14:section name="Backup" id="{7b94ca39-9de4-0073-627d-5bffea7a4e7e}">
+        <p14:section name="Backup" id="{207e92fd-a4f5-21f5-77d3-3f8fe1e53cf5}">
           <p14:sldIdLst>
             <p14:sldId id="271"/>
             <p14:sldId id="272"/>
@@ -576,7 +576,7 @@
           <a:p>
             <a:r>
               <a:rPr lang="en-US" dirty="0"/>
-              <a:t>Working title is the chapter title; change for the seminar if you like. ~0.5 min.</a:t>
+              <a:t>~0.5 min.</a:t>
             </a:r>
             <a:endParaRPr lang="en-US" dirty="0"/>
           </a:p>
@@ -3190,20 +3190,6 @@
               <a:rPr lang="en-US" sz="1800" dirty="0">
                 <a:solidFill>
                   <a:schemeClr val="accent4"/>
-                </a:solidFill>
-              </a:rPr>
-              <a:t>Who runs, and how a run spreads: an agent-based test of the theory</a:t>
-            </a:r>
-            <a:endParaRPr lang="en-US" sz="1800" dirty="0"/>
-          </a:p>
-          <a:p>
-            <a:pPr indent="0" marL="0">
-              <a:buNone/>
-            </a:pPr>
-            <a:r>
-              <a:rPr lang="en-US" sz="1400" dirty="0">
-                <a:solidFill>
-                  <a:schemeClr val="accent3"/>
                 </a:solidFill>
               </a:rPr>
               <a:t>Walter Stover  ·  George Mason University  ·  26 October 2026</a:t>

--- a/docs/deck_2026-10-26_seminar.pptx
+++ b/docs/deck_2026-10-26_seminar.pptx
@@ -127,7 +127,7 @@
   <p:extLst>
     <p:ext uri="{521415D9-36F7-43E2-AB2F-B90AF26B5E84}">
       <p14:sectionLst xmlns:p14="http://schemas.microsoft.com/office/powerpoint/2010/main">
-        <p14:section name="Opening" id="{d15b5380-53c5-9d8b-7dad-974d29844b4a}">
+        <p14:section name="Opening" id="{54c199ad-e31e-6a87-f1e2-f9d683adb658}">
           <p14:sldIdLst>
             <p14:sldId id="256"/>
             <p14:sldId id="257"/>
@@ -138,13 +138,13 @@
             <p14:sldId id="262"/>
           </p14:sldIdLst>
         </p14:section>
-        <p14:section name="The model" id="{a7fe3828-ed72-f34e-d8f3-86ab0a0ade73}">
+        <p14:section name="The model" id="{bd929cbf-afb3-4c6c-e313-3310ae061ccf}">
           <p14:sldIdLst>
             <p14:sldId id="263"/>
             <p14:sldId id="264"/>
           </p14:sldIdLst>
         </p14:section>
-        <p14:section name="Results" id="{77a6db49-88e6-fca9-a2f8-f065211da351}">
+        <p14:section name="Results" id="{a62ac3fb-3354-551b-28a1-d127b91fa064}">
           <p14:sldIdLst>
             <p14:sldId id="265"/>
             <p14:sldId id="266"/>
@@ -152,17 +152,17 @@
             <p14:sldId id="268"/>
           </p14:sldIdLst>
         </p14:section>
-        <p14:section name="Validation" id="{da5fa61d-7361-f704-6396-858d136567f6}">
+        <p14:section name="Validation" id="{708d25ea-d98e-db39-e8c4-2fd155458fbf}">
           <p14:sldIdLst>
             <p14:sldId id="269"/>
           </p14:sldIdLst>
         </p14:section>
-        <p14:section name="Close" id="{08b16241-9d90-7acb-a054-b17bd4d80e56}">
+        <p14:section name="Close" id="{f022dfb2-da13-37df-c1b7-b47806a6db0f}">
           <p14:sldIdLst>
             <p14:sldId id="270"/>
           </p14:sldIdLst>
         </p14:section>
-        <p14:section name="Backup" id="{207e92fd-a4f5-21f5-77d3-3f8fe1e53cf5}">
+        <p14:section name="Backup" id="{c091252d-acab-bbe9-79b8-33afc35b2086}">
           <p14:sldIdLst>
             <p14:sldId id="271"/>
             <p14:sldId id="272"/>
@@ -8419,7 +8419,7 @@
                   <a:schemeClr val="tx2"/>
                 </a:solidFill>
               </a:rPr>
-              <a:t>With two signals, a third question appears</a:t>
+              <a:t>Variation in interpretation</a:t>
             </a:r>
             <a:endParaRPr lang="en-US" sz="2400" dirty="0"/>
           </a:p>
@@ -8455,7 +8455,7 @@
                   <a:schemeClr val="tx2"/>
                 </a:solidFill>
               </a:rPr>
-              <a:t>Which signal does a depositor act on, and in what proportion?</a:t>
+              <a:t>When there are two signals, which signal does a depositor act on, and in what proportion?</a:t>
             </a:r>
             <a:endParaRPr lang="en-US" sz="1700" dirty="0"/>
           </a:p>

--- a/docs/deck_2026-10-26_seminar.pptx
+++ b/docs/deck_2026-10-26_seminar.pptx
@@ -25,10 +25,9 @@
     <p:sldId id="273" r:id="rId19"/>
     <p:sldId id="274" r:id="rId20"/>
     <p:sldId id="275" r:id="rId21"/>
-    <p:sldId id="276" r:id="rId22"/>
   </p:sldIdLst>
   <p:notesMasterIdLst>
-    <p:notesMasterId r:id="rId23"/>
+    <p:notesMasterId r:id="rId22"/>
   </p:notesMasterIdLst>
   <p:sldSz cx="9144000" cy="5143500"/>
   <p:notesSz cx="5143500" cy="9144000"/>
@@ -127,7 +126,7 @@
   <p:extLst>
     <p:ext uri="{521415D9-36F7-43E2-AB2F-B90AF26B5E84}">
       <p14:sectionLst xmlns:p14="http://schemas.microsoft.com/office/powerpoint/2010/main">
-        <p14:section name="Opening" id="{54c199ad-e31e-6a87-f1e2-f9d683adb658}">
+        <p14:section name="Opening" id="{2f1dcad3-958c-d353-e35b-97829a00eb1c}">
           <p14:sldIdLst>
             <p14:sldId id="256"/>
             <p14:sldId id="257"/>
@@ -135,41 +134,40 @@
             <p14:sldId id="259"/>
             <p14:sldId id="260"/>
             <p14:sldId id="261"/>
-            <p14:sldId id="262"/>
           </p14:sldIdLst>
         </p14:section>
-        <p14:section name="The model" id="{bd929cbf-afb3-4c6c-e313-3310ae061ccf}">
+        <p14:section name="The model" id="{dd27b7fe-d3dd-a096-5fa7-c1ef7af34f9b}">
           <p14:sldIdLst>
+            <p14:sldId id="262"/>
             <p14:sldId id="263"/>
-            <p14:sldId id="264"/>
           </p14:sldIdLst>
         </p14:section>
-        <p14:section name="Results" id="{a62ac3fb-3354-551b-28a1-d127b91fa064}">
+        <p14:section name="Results" id="{4678a944-3cdc-1a9d-72f2-21811f6b4087}">
           <p14:sldIdLst>
+            <p14:sldId id="264"/>
             <p14:sldId id="265"/>
             <p14:sldId id="266"/>
             <p14:sldId id="267"/>
+          </p14:sldIdLst>
+        </p14:section>
+        <p14:section name="Validation" id="{da2a085d-e910-4f99-02f7-d20b1348fce6}">
+          <p14:sldIdLst>
             <p14:sldId id="268"/>
           </p14:sldIdLst>
         </p14:section>
-        <p14:section name="Validation" id="{708d25ea-d98e-db39-e8c4-2fd155458fbf}">
+        <p14:section name="Close" id="{ba6b389a-1350-f68c-2588-0f3332085e9a}">
           <p14:sldIdLst>
             <p14:sldId id="269"/>
           </p14:sldIdLst>
         </p14:section>
-        <p14:section name="Close" id="{f022dfb2-da13-37df-c1b7-b47806a6db0f}">
+        <p14:section name="Backup" id="{ab6faf5d-9fcb-4fac-3801-838b4a801cda}">
           <p14:sldIdLst>
             <p14:sldId id="270"/>
-          </p14:sldIdLst>
-        </p14:section>
-        <p14:section name="Backup" id="{c091252d-acab-bbe9-79b8-33afc35b2086}">
-          <p14:sldIdLst>
             <p14:sldId id="271"/>
             <p14:sldId id="272"/>
             <p14:sldId id="273"/>
             <p14:sldId id="274"/>
             <p14:sldId id="275"/>
-            <p14:sldId id="276"/>
           </p14:sldIdLst>
         </p14:section>
       </p14:sectionLst>
@@ -664,7 +662,7 @@
           <a:p>
             <a:r>
               <a:rPr lang="en-US" dirty="0"/>
-              <a:t>~2 min. Collectivists jump from 0.15 to 0.93 once 20–35% of neighbours are out and reach 1.0; individualists plateau at ~0.25–0.30. Slopes: C 0.80, I 0.22 (difference +0.58, t 16.7). Lambda pairs pooled; reference bank.</a:t>
+              <a:t>~2 min. Large difference (0.1, 0.9): 0.67 at mu 0 -&gt; 0.08 at mu 1; medium (0.2, 0.8) similar; small (0.3, 0.5): 0.25 -&gt; 0.09. Monotone, no interior peak. The difference between types matters most when collectivists dominate; lines converge at mu &gt;= 0.75. Includes pure cells (mu 0 and 1). If asked about Ch 1's non-monotonic prediction (P6): see backup.</a:t>
             </a:r>
             <a:endParaRPr lang="en-US" dirty="0"/>
           </a:p>
@@ -752,7 +750,7 @@
           <a:p>
             <a:r>
               <a:rPr lang="en-US" dirty="0"/>
-              <a:t>~2 min. Large difference (0.1, 0.9): 0.67 at mu 0 -&gt; 0.08 at mu 1; medium (0.2, 0.8) similar; small (0.3, 0.5): 0.25 -&gt; 0.09. Monotone, no interior peak. The difference between types matters most when collectivists dominate; lines converge at mu &gt;= 0.75. Includes pure cells (mu 0 and 1). If asked about Ch 1's non-monotonic prediction (P6): see backup.</a:t>
+              <a:t>~2.5 min. Large difference (0.1, 0.9): outdated pessimistic 0.48, none 0.31, accurate 0.29, outdated middling (y0 0.5) 0.18, outdated optimistic 0.16. Accurate news barely changes failure; stale optimistic halves it; stale pessimistic raises it by half. Small difference (0.3, 0.5) barely moves (0.09–0.15). All mu. Policy framing: the information environment (right to reassure), not sorting depositors by type.</a:t>
             </a:r>
             <a:endParaRPr lang="en-US" dirty="0"/>
           </a:p>
@@ -840,7 +838,7 @@
           <a:p>
             <a:r>
               <a:rPr lang="en-US" dirty="0"/>
-              <a:t>~2.5 min. Large difference (0.1, 0.9): outdated pessimistic 0.48, none 0.31, accurate 0.29, outdated middling (y0 0.5) 0.18, outdated optimistic 0.16. Accurate news barely changes failure; stale optimistic halves it; stale pessimistic raises it by half. Small difference (0.3, 0.5) barely moves (0.09–0.15). All mu. Policy framing: the information environment (right to reassure), not sorting depositors by type.</a:t>
+              <a:t>~2 min. Lambda pairs pooled. Uncapped (sigma 2.5) 0.61 -&gt; 0.11; capped at 1% 0.51 -&gt; 0.08; similar sizes (sigma 1) 0.50 -&gt; 0.08. Capping brings failure down to the no-concentration level at every mu. The mu gradient is the same in all three: culture's effect does not depend on concentration. One spoken sentence on what 'capped at 1%' means (no single depositor holds more than 1% of the bank).</a:t>
             </a:r>
             <a:endParaRPr lang="en-US" dirty="0"/>
           </a:p>
@@ -928,7 +926,7 @@
           <a:p>
             <a:r>
               <a:rPr lang="en-US" dirty="0"/>
-              <a:t>~2 min. Lambda pairs pooled. Uncapped (sigma 2.5) 0.61 -&gt; 0.11; capped at 1% 0.51 -&gt; 0.08; similar sizes (sigma 1) 0.50 -&gt; 0.08. Capping brings failure down to the no-concentration level at every mu. The mu gradient is the same in all three: culture's effect does not depend on concentration. One spoken sentence on what 'capped at 1%' means (no single depositor holds more than 1% of the bank).</a:t>
+              <a:t>~1.5 min. Ch 1's theory predicts: optimistic news -&gt; individualists run more than collectivists; pessimistic -&gt; collectivists run more. The lines rise through zero as predicted. Large difference reaches about ±0.1; small stays flat. Pre-registered tests: 3 of 4 support, on all three versions of the bank (r1k pooled: G1' +0.033, G4' -0.031, G2a' +0.093, Holm-significant; G3 counts against). Option: make this one sentence and move the figure to backup.</a:t>
             </a:r>
             <a:endParaRPr lang="en-US" dirty="0"/>
           </a:p>
@@ -1016,7 +1014,7 @@
           <a:p>
             <a:r>
               <a:rPr lang="en-US" dirty="0"/>
-              <a:t>~1.5 min. Ch 1's theory predicts: optimistic news -&gt; individualists run more than collectivists; pessimistic -&gt; collectivists run more. The lines rise through zero as predicted. Large difference reaches about ±0.1; small stays flat. Pre-registered tests: 3 of 4 support, on all three versions of the bank (r1k pooled: G1' +0.033, G4' -0.031, G2a' +0.093, Holm-significant; G3 counts against). Option: make this one sentence and move the figure to backup.</a:t>
+              <a:t>~2 min. Next steps from the outline: super-individuals (match how Celsius's largest depositors exit), deposit insurance and the reserve ratio on the fire-sale bank, topology and learning, and the full parameter sweep (stale public signal + no-signal baseline; CARA 0.1; sigma reported).</a:t>
             </a:r>
             <a:endParaRPr lang="en-US" dirty="0"/>
           </a:p>
@@ -1104,7 +1102,7 @@
           <a:p>
             <a:r>
               <a:rPr lang="en-US" dirty="0"/>
-              <a:t>~2 min. Next steps from the outline: super-individuals (match how Celsius's largest depositors exit), deposit insurance and the reserve ratio on the fire-sale bank, topology and learning, and the full parameter sweep (stale public signal + no-signal baseline; CARA 0.1; sigma reported).</a:t>
+              <a:t/>
             </a:r>
             <a:endParaRPr lang="en-US" dirty="0"/>
           </a:p>
@@ -1192,7 +1190,7 @@
           <a:p>
             <a:r>
               <a:rPr lang="en-US" dirty="0"/>
-              <a:t/>
+              <a:t>Both types withdraw less as mu rises; collectivists above individualists at every mixed mu for the two wide gaps; nearly identical at (0.3, 0.5). Technical labels.</a:t>
             </a:r>
             <a:endParaRPr lang="en-US" dirty="0"/>
           </a:p>
@@ -1280,7 +1278,7 @@
           <a:p>
             <a:r>
               <a:rPr lang="en-US" dirty="0"/>
-              <a:t>Both types withdraw less as mu rises; collectivists above individualists at every mixed mu for the two wide gaps; nearly identical at (0.3, 0.5). Technical labels.</a:t>
+              <a:t>r1k pooled: G1' +0.033, G4' -0.031, G2a' +0.093, all Holm-significant; G2b ordering holds. G3 +0.0034 pooled but (0.3, 0.5) wrong-signed in every bank -&gt; counts against. G3c (post hoc, channel-isolated) +0.019, right-signed in every pair. 3 of 4 confirmatory tests support, in all three banks.</a:t>
             </a:r>
             <a:endParaRPr lang="en-US" dirty="0"/>
           </a:p>
@@ -1368,7 +1366,7 @@
           <a:p>
             <a:r>
               <a:rPr lang="en-US" dirty="0"/>
-              <a:t>r1k pooled: G1' +0.033, G4' -0.031, G2a' +0.093, all Holm-significant; G2b ordering holds. G3 +0.0034 pooled but (0.3, 0.5) wrong-signed in every bank -&gt; counts against. G3c (post hoc, channel-isolated) +0.019, right-signed in every pair. 3 of 4 confirmatory tests support, in all three banks.</a:t>
+              <a:t>Theta-blend only: +0.14 (Ch 1's sign). Head-count only: -0.07 (opposite). Both: +0.02. The two channels pull in opposite directions; Ch 1's sign survives, damped by herding.</a:t>
             </a:r>
             <a:endParaRPr lang="en-US" dirty="0"/>
           </a:p>
@@ -1456,7 +1454,7 @@
           <a:p>
             <a:r>
               <a:rPr lang="en-US" dirty="0"/>
-              <a:t>Theta-blend only: +0.14 (Ch 1's sign). Head-count only: -0.07 (opposite). Both: +0.02. The two channels pull in opposite directions; Ch 1's sign survives, damped by herding.</a:t>
+              <a:t>Celsius falls from ~0.86 (D1–D5 band 0.82–0.90) to 0.35 (top 0.1%); the ABM stays at 0.93–1.00. The model does not yet reproduce how large depositors exit. Next: super-individuals.</a:t>
             </a:r>
             <a:endParaRPr lang="en-US" dirty="0"/>
           </a:p>
@@ -1632,7 +1630,7 @@
           <a:p>
             <a:r>
               <a:rPr lang="en-US" dirty="0"/>
-              <a:t>Celsius falls from ~0.86 (D1–D5 band 0.82–0.90) to 0.35 (top 0.1%); the ABM stays at 0.93–1.00. The model does not yet reproduce how large depositors exit. Next: super-individuals.</a:t>
+              <a:t>Vault bank, earlier specification (chapter Fig 1). For questions about Ch 1's P6. This figure is also monotone decreasing: P6 (non-monotonic fragility) was predicted in Ch 1 and found in neither bank; the P6b placebo hump was null too.</a:t>
             </a:r>
             <a:endParaRPr lang="en-US" dirty="0"/>
           </a:p>
@@ -1656,94 +1654,6 @@
             <a:fld id="{F7021451-1387-4CA6-816F-3879F97B5CBC}" type="slidenum">
               <a:rPr lang="en-US"/>
               <a:t>20</a:t>
-            </a:fld>
-            <a:endParaRPr lang="en-US"/>
-          </a:p>
-        </p:txBody>
-      </p:sp>
-    </p:spTree>
-    <p:extLst>
-      <p:ext uri="{BB962C8B-B14F-4D97-AF65-F5344CB8AC3E}">
-        <p14:creationId xmlns:p14="http://schemas.microsoft.com/office/powerpoint/2010/main" val="1024086991"/>
-      </p:ext>
-    </p:extLst>
-  </p:cSld>
-  <p:clrMapOvr>
-    <a:masterClrMapping/>
-  </p:clrMapOvr>
-</p:notes>
-</file>
-
-<file path=ppt/notesSlides/notesSlide21.xml><?xml version="1.0" encoding="utf-8"?>
-<p:notes xmlns:a="http://schemas.openxmlformats.org/drawingml/2006/main" xmlns:r="http://schemas.openxmlformats.org/officeDocument/2006/relationships" xmlns:p="http://schemas.openxmlformats.org/presentationml/2006/main">
-  <p:cSld>
-    <p:spTree>
-      <p:nvGrpSpPr>
-        <p:cNvPr id="1" name=""/>
-        <p:cNvGrpSpPr/>
-        <p:nvPr/>
-      </p:nvGrpSpPr>
-      <p:grpSpPr>
-        <a:xfrm>
-          <a:off x="0" y="0"/>
-          <a:ext cx="0" cy="0"/>
-          <a:chOff x="0" y="0"/>
-          <a:chExt cx="0" cy="0"/>
-        </a:xfrm>
-      </p:grpSpPr>
-      <p:sp>
-        <p:nvSpPr>
-          <p:cNvPr id="2" name="Slide Image Placeholder 1"/>
-          <p:cNvSpPr>
-            <a:spLocks noGrp="1" noRot="1" noChangeAspect="1"/>
-          </p:cNvSpPr>
-          <p:nvPr>
-            <p:ph type="sldImg"/>
-          </p:nvPr>
-        </p:nvSpPr>
-        <p:spPr/>
-      </p:sp>
-      <p:sp>
-        <p:nvSpPr>
-          <p:cNvPr id="3" name="Notes Placeholder 2"/>
-          <p:cNvSpPr>
-            <a:spLocks noGrp="1"/>
-          </p:cNvSpPr>
-          <p:nvPr>
-            <p:ph type="body" idx="1"/>
-          </p:nvPr>
-        </p:nvSpPr>
-        <p:spPr/>
-        <p:txBody>
-          <a:bodyPr/>
-          <a:lstStyle/>
-          <a:p>
-            <a:r>
-              <a:rPr lang="en-US" dirty="0"/>
-              <a:t>Vault bank, earlier specification (chapter Fig 1). For questions about Ch 1's P6. This figure is also monotone decreasing: P6 (non-monotonic fragility) was predicted in Ch 1 and found in neither bank; the P6b placebo hump was null too.</a:t>
-            </a:r>
-            <a:endParaRPr lang="en-US" dirty="0"/>
-          </a:p>
-        </p:txBody>
-      </p:sp>
-      <p:sp>
-        <p:nvSpPr>
-          <p:cNvPr id="4" name="Slide Number Placeholder 3"/>
-          <p:cNvSpPr>
-            <a:spLocks noGrp="1"/>
-          </p:cNvSpPr>
-          <p:nvPr>
-            <p:ph type="sldNum" sz="quarter" idx="10"/>
-          </p:nvPr>
-        </p:nvSpPr>
-        <p:spPr/>
-        <p:txBody>
-          <a:bodyPr/>
-          <a:lstStyle/>
-          <a:p>
-            <a:fld id="{F7021451-1387-4CA6-816F-3879F97B5CBC}" type="slidenum">
-              <a:rPr lang="en-US"/>
-              <a:t>21</a:t>
             </a:fld>
             <a:endParaRPr lang="en-US"/>
           </a:p>
@@ -1896,7 +1806,7 @@
           <a:p>
             <a:r>
               <a:rPr lang="en-US" dirty="0"/>
-              <a:t>~1 min. The third question is latent in the canonical theory because those models have one signal. It becomes askable once a public signal is added, which the global-games literature did in the early 2000s. It is exactly the question a panic poses.</a:t>
+              <a:t>~1.5 min. The question only becomes askable once a public signal sits next to the private one (Morris-Shin 2002, Hellwig 2002, Angeletos-Werning 2006); Diamond-Dybvig has no signal and Goldstein-Pauzner one. The screenshot is the question as a panic poses it: the public line (Becker: stay calm, that's my ask) against private evidence (VCs telling portfolio companies to move money out, the share price). Same shape at Celsius 2022 (Mashinsky on 11 June: do you know even one person who has a problem withdrawing? Why spread FUD and misinformation; withdrawals paused the next day) and Northern Rock 2007 (Bank of England support announced; queues outside the branches; a customer in the queue: we thought we would do what everyone else is doing). In each case depositors split on which to trust, and the interesting fact is who moved on which. If asked how the theory answers it: the Bayesian precision ratio, the weight on y is tau_y over tau_x plus tau_y, the same for everyone and vanishing as private information sharpens; so sorting is noise and official communication stops mattering just when depositors pay most attention.</a:t>
             </a:r>
             <a:endParaRPr lang="en-US" dirty="0"/>
           </a:p>
@@ -1984,7 +1894,7 @@
           <a:p>
             <a:r>
               <a:rPr lang="en-US" dirty="0"/>
-              <a:t>~1 min. If asked how the theory answers the third question: the public-signal global games answer it with the Bayesian precision ratio, the weight on y is tau_y over tau_x plus tau_y, the same for everyone and vanishing as private information sharpens; so any sorting between depositors is noise and official communication stops mattering just when depositors pay most attention. (Slide dropped for this audience.) The cases: in each one the public line and private evidence are in open disagreement, the weights do not vanish, and the interesting fact is who moved on which. Chapter 3's stale public signal is the general case.</a:t>
+              <a:t>~1 min. Cultural economics gives a source of the weight that satisfies the three things the model needs: heterogeneity, positivity, and stability with respect to the information environment. Individualism is the dimension that maps onto the private-versus-social weighting, and names make it measurable at the individual level.</a:t>
             </a:r>
             <a:endParaRPr lang="en-US" dirty="0"/>
           </a:p>
@@ -2072,7 +1982,7 @@
           <a:p>
             <a:r>
               <a:rPr lang="en-US" dirty="0"/>
-              <a:t>~1 min. Cultural economics gives a source of the weight that satisfies the three things the model needs: heterogeneity, positivity, and stability with respect to the information environment. Individualism is the dimension that maps onto the private-versus-social weighting, and names make it measurable at the individual level.</a:t>
+              <a:t>~1 min. The ladder: variation in the signal (Goldstein-Pauzner: same signal technology, different draws, which selects the equilibrium), variation in location (who hears it, from whom, when: Kelly-O Grada, Iyer-Puri, Cookson et al.), variation in interpretation (the same two signals, different dispositional weights; culture is the stable source). Rung 1 orders depositors by luck, rung 2 by position, rung 3 by who they are, and only rung 3 predicts that the order flips with the sign of the public error. Nearest cousins to acknowledge if asked: Izmalkov-Yildiz 2010 (heterogeneous priors), He-Manela 2016 (information acquisition).</a:t>
             </a:r>
             <a:endParaRPr lang="en-US" dirty="0"/>
           </a:p>
@@ -2160,7 +2070,7 @@
           <a:p>
             <a:r>
               <a:rPr lang="en-US" dirty="0"/>
-              <a:t>~1 min. The ladder: variation in the signal (Goldstein-Pauzner: same signal technology, different draws, which selects the equilibrium), variation in location (who hears it, from whom, when: Kelly-O Grada, Iyer-Puri, Cookson et al.), variation in interpretation (the same two signals, different dispositional weights; culture is the stable source). Rung 1 orders depositors by luck, rung 2 by position, rung 3 by who they are, and only rung 3 predicts that the order flips with the sign of the public error. Nearest cousins to acknowledge if asked: Izmalkov-Yildiz 2010 (heterogeneous priors), He-Manela 2016 (information acquisition).</a:t>
+              <a:t>~2 min. N = 1,000 depositors on a small-world network; one bank that sells assets at a discount when cash runs short (fire-sale bank). Each tick a depositor sees neighbours' withdrawals and the public news, blends them with a private signal, and withdraws if that pays. Reference bank: deposits log-normal (sigma 2.5), each capped at 1% of the total; CARA 0.1; partial withdrawals allowed. The diagram is the technical ODD overview: walk the right-hand column (warm-up, world, shock, tick loop) and skip the formulas.</a:t>
             </a:r>
             <a:endParaRPr lang="en-US" dirty="0"/>
           </a:p>
@@ -2248,7 +2158,7 @@
           <a:p>
             <a:r>
               <a:rPr lang="en-US" dirty="0"/>
-              <a:t>~2 min. N = 1,000 depositors on a small-world network; one bank that sells assets at a discount when cash runs short (fire-sale bank). Each tick a depositor sees neighbours' withdrawals and the public news, blends them with a private signal, and withdraws if that pays. Reference bank: deposits log-normal (sigma 2.5), each capped at 1% of the total; CARA 0.1; partial withdrawals allowed. The diagram is the technical ODD overview: walk the right-hand column (warm-up, world, shock, tick loop) and skip the formulas.</a:t>
+              <a:t>~1 min. Individualists put little weight on others (neighbours and public news) and more on their own information; collectivists the reverse. In the model: weight on the social side lambda; pairs shown in the figures (I, C): (0.1, 0.9) = large difference, (0.2, 0.8) = medium, (0.3, 0.5) = small. Type comes from a cultural warm-up on the network: the top mu share become individualists. Colours used throughout: orange = individualists, blue = collectivists.</a:t>
             </a:r>
             <a:endParaRPr lang="en-US" dirty="0"/>
           </a:p>
@@ -2336,7 +2246,7 @@
           <a:p>
             <a:r>
               <a:rPr lang="en-US" dirty="0"/>
-              <a:t>~1 min. Individualists put little weight on others (neighbours and public news) and more on their own information; collectivists the reverse. In the model: weight on the social side lambda; pairs shown in the figures (I, C): (0.1, 0.9) = large difference, (0.2, 0.8) = medium, (0.3, 0.5) = small. Type comes from a cultural warm-up on the network: the top mu share become individualists. Colours used throughout: orange = individualists, blue = collectivists.</a:t>
+              <a:t>~2 min. Collectivists jump from 0.15 to 0.93 once 20–35% of neighbours are out and reach 1.0; individualists plateau at ~0.25–0.30. Slopes: C 0.80, I 0.22 (difference +0.58, t 16.7). Lambda pairs pooled; reference bank.</a:t>
             </a:r>
             <a:endParaRPr lang="en-US" dirty="0"/>
           </a:p>
@@ -3255,7 +3165,7 @@
                   <a:schemeClr val="tx2"/>
                 </a:solidFill>
               </a:rPr>
-              <a:t>Collectivists herd</a:t>
+              <a:t>More individualists, fewer failures</a:t>
             </a:r>
             <a:endParaRPr lang="en-US" sz="2400" dirty="0"/>
           </a:p>
@@ -3263,7 +3173,7 @@
       </p:sp>
       <p:pic>
         <p:nvPicPr>
-          <p:cNvPr id="3" name="e07" descr="Chance of withdrawing by share of neighbours who have withdrawn: collectivists jump to near 1 once 20 to 35 percent of neighbours are out; individualists level off near 0.25 to 0.30.">    </p:cNvPr>
+          <p:cNvPr id="3" name="e05" descr="Chance the bank fails by share of individualists: falls from about 0.67 with no individualists to about 0.08 with all individualists for the large difference pair; monotone for every pair.">    </p:cNvPr>
           <p:cNvPicPr>
             <a:picLocks noChangeAspect="1"/>
           </p:cNvPicPr>
@@ -3278,7 +3188,7 @@
         <p:spPr>
           <a:xfrm>
             <a:off x="457200" y="1051560"/>
-            <a:ext cx="5164897" cy="3291840"/>
+            <a:ext cx="4941052" cy="3291840"/>
           </a:xfrm>
           <a:prstGeom prst="rect">
             <a:avLst/>
@@ -3315,7 +3225,7 @@
                   <a:schemeClr val="accent3"/>
                 </a:solidFill>
               </a:rPr>
-              <a:t>Chance of withdrawing, given the share of a depositor’s neighbours who have already withdrawn. λ pairs pooled; reference bank.</a:t>
+              <a:t>Chance the bank fails, by share of individualists μ, one line per λ pair. Includes the pure populations (μ 0 and 1).</a:t>
             </a:r>
             <a:endParaRPr lang="en-US" sz="1000" dirty="0"/>
           </a:p>
@@ -3323,7 +3233,7 @@
       </p:sp>
       <p:sp>
         <p:nvSpPr>
-          <p:cNvPr id="5" name="stat-collectivists, once "/>
+          <p:cNvPr id="5" name="stat-P(fail) from no indi"/>
           <p:cNvSpPr/>
           <p:nvPr/>
         </p:nvSpPr>
@@ -3375,13 +3285,13 @@
             <a:r>
               <a:rPr lang="en-US" sz="2200" b="1" dirty="0">
                 <a:solidFill>
-                  <a:srgbClr val="2A78D6"/>
+                  <a:schemeClr val="accent1"/>
                 </a:solidFill>
                 <a:latin typeface="Cambria" pitchFamily="34" charset="0"/>
                 <a:ea typeface="Cambria" pitchFamily="34" charset="-122"/>
                 <a:cs typeface="Cambria" pitchFamily="34" charset="-120"/>
               </a:rPr>
-              <a:t>0.15 to 0.93</a:t>
+              <a:t>0.67 to 0.08</a:t>
             </a:r>
             <a:endParaRPr lang="en-US" sz="2200" dirty="0"/>
           </a:p>
@@ -3417,7 +3327,7 @@
                   <a:schemeClr val="accent3"/>
                 </a:solidFill>
               </a:rPr>
-              <a:t>collectivists, once 20–35% of their neighbours are out</a:t>
+              <a:t>P(fail) from no individualists to all, wide λ gap</a:t>
             </a:r>
             <a:endParaRPr lang="en-US" sz="1100" dirty="0"/>
           </a:p>
@@ -3425,7 +3335,7 @@
       </p:sp>
       <p:sp>
         <p:nvSpPr>
-          <p:cNvPr id="8" name="stat-where individualists"/>
+          <p:cNvPr id="8" name="stat-the same, narrow λ g"/>
           <p:cNvSpPr/>
           <p:nvPr/>
         </p:nvSpPr>
@@ -3477,13 +3387,13 @@
             <a:r>
               <a:rPr lang="en-US" sz="2200" b="1" dirty="0">
                 <a:solidFill>
-                  <a:srgbClr val="EB6834"/>
+                  <a:schemeClr val="accent1"/>
                 </a:solidFill>
                 <a:latin typeface="Cambria" pitchFamily="34" charset="0"/>
                 <a:ea typeface="Cambria" pitchFamily="34" charset="-122"/>
                 <a:cs typeface="Cambria" pitchFamily="34" charset="-120"/>
               </a:rPr>
-              <a:t>0.25 to 0.30</a:t>
+              <a:t>0.25 to 0.09</a:t>
             </a:r>
             <a:endParaRPr lang="en-US" sz="2200" dirty="0"/>
           </a:p>
@@ -3519,7 +3429,7 @@
                   <a:schemeClr val="accent3"/>
                 </a:solidFill>
               </a:rPr>
-              <a:t>where individualists level off, whatever their neighbours do</a:t>
+              <a:t>the same, narrow λ gap: it matters most when collectivists dominate</a:t>
             </a:r>
             <a:endParaRPr lang="en-US" sz="1100" dirty="0"/>
           </a:p>
@@ -3527,7 +3437,7 @@
       </p:sp>
       <p:sp>
         <p:nvSpPr>
-          <p:cNvPr id="11" name="stat-difference in slopes"/>
+          <p:cNvPr id="11" name="card-Monotone"/>
           <p:cNvSpPr/>
           <p:nvPr/>
         </p:nvSpPr>
@@ -3554,14 +3464,14 @@
       </p:sp>
       <p:sp>
         <p:nvSpPr>
-          <p:cNvPr id="12" name="stat-big"/>
+          <p:cNvPr id="12" name="card-head"/>
           <p:cNvSpPr txBox="1"/>
           <p:nvPr/>
         </p:nvSpPr>
         <p:spPr>
           <a:xfrm>
-            <a:off x="6355080" y="3410712"/>
-            <a:ext cx="2194560" cy="457200"/>
+            <a:off x="6355080" y="3429000"/>
+            <a:ext cx="2194560" cy="292608"/>
           </a:xfrm>
           <a:prstGeom prst="rect">
             <a:avLst/>
@@ -3577,30 +3487,27 @@
               <a:buNone/>
             </a:pPr>
             <a:r>
-              <a:rPr lang="en-US" sz="2600" b="1" dirty="0">
-                <a:solidFill>
-                  <a:schemeClr val="accent1"/>
-                </a:solidFill>
-                <a:latin typeface="Cambria" pitchFamily="34" charset="0"/>
-                <a:ea typeface="Cambria" pitchFamily="34" charset="-122"/>
-                <a:cs typeface="Cambria" pitchFamily="34" charset="-120"/>
-              </a:rPr>
-              <a:t>+0.58</a:t>
-            </a:r>
-            <a:endParaRPr lang="en-US" sz="2600" dirty="0"/>
-          </a:p>
-        </p:txBody>
-      </p:sp>
-      <p:sp>
-        <p:nvSpPr>
-          <p:cNvPr id="13" name="stat-label"/>
+              <a:rPr lang="en-US" sz="1300" b="1" dirty="0">
+                <a:solidFill>
+                  <a:schemeClr val="tx2"/>
+                </a:solidFill>
+              </a:rPr>
+              <a:t>Monotone</a:t>
+            </a:r>
+            <a:endParaRPr lang="en-US" sz="1300" dirty="0"/>
+          </a:p>
+        </p:txBody>
+      </p:sp>
+      <p:sp>
+        <p:nvSpPr>
+          <p:cNvPr id="13" name="card-body"/>
           <p:cNvSpPr txBox="1"/>
           <p:nvPr/>
         </p:nvSpPr>
         <p:spPr>
           <a:xfrm>
-            <a:off x="6355080" y="3886200"/>
-            <a:ext cx="2194560" cy="493776"/>
+            <a:off x="6355080" y="3749040"/>
+            <a:ext cx="2194560" cy="594360"/>
           </a:xfrm>
           <a:prstGeom prst="rect">
             <a:avLst/>
@@ -3616,14 +3523,14 @@
               <a:buNone/>
             </a:pPr>
             <a:r>
-              <a:rPr lang="en-US" sz="1100" dirty="0">
-                <a:solidFill>
-                  <a:schemeClr val="accent3"/>
-                </a:solidFill>
-              </a:rPr>
-              <a:t>difference in slopes (collectivists 0.80, individualists 0.22), t = 16.7</a:t>
-            </a:r>
-            <a:endParaRPr lang="en-US" sz="1100" dirty="0"/>
+              <a:rPr lang="en-US" sz="1150" dirty="0">
+                <a:solidFill>
+                  <a:schemeClr val="tx1"/>
+                </a:solidFill>
+              </a:rPr>
+              <a:t>No interior peak at any mix. The lines converge once individualists are 75% or more.</a:t>
+            </a:r>
+            <a:endParaRPr lang="en-US" sz="1150" dirty="0"/>
           </a:p>
         </p:txBody>
       </p:sp>
@@ -3729,7 +3636,7 @@
                   <a:schemeClr val="tx2"/>
                 </a:solidFill>
               </a:rPr>
-              <a:t>More individualists, fewer failures</a:t>
+              <a:t>Outdated news cuts both ways</a:t>
             </a:r>
             <a:endParaRPr lang="en-US" sz="2400" dirty="0"/>
           </a:p>
@@ -3737,7 +3644,7 @@
       </p:sp>
       <p:pic>
         <p:nvPicPr>
-          <p:cNvPr id="3" name="e05" descr="Chance the bank fails by share of individualists: falls from about 0.67 with no individualists to about 0.08 with all individualists for the large difference pair; monotone for every pair.">    </p:cNvPr>
+          <p:cNvPr id="3" name="e08" descr="Chance the bank fails by kind of public news: outdated pessimistic news raises it to about 0.48, accurate news barely changes it from no news (0.29 vs 0.31), outdated optimistic news lowers it to 0.16.">    </p:cNvPr>
           <p:cNvPicPr>
             <a:picLocks noChangeAspect="1"/>
           </p:cNvPicPr>
@@ -3752,7 +3659,7 @@
         <p:spPr>
           <a:xfrm>
             <a:off x="457200" y="1051560"/>
-            <a:ext cx="4941052" cy="3291840"/>
+            <a:ext cx="5486400" cy="2607605"/>
           </a:xfrm>
           <a:prstGeom prst="rect">
             <a:avLst/>
@@ -3767,7 +3674,7 @@
         </p:nvSpPr>
         <p:spPr>
           <a:xfrm>
-            <a:off x="457200" y="4389120"/>
+            <a:off x="457200" y="3704885"/>
             <a:ext cx="5486400" cy="274320"/>
           </a:xfrm>
           <a:prstGeom prst="rect">
@@ -3789,7 +3696,7 @@
                   <a:schemeClr val="accent3"/>
                 </a:solidFill>
               </a:rPr>
-              <a:t>Chance the bank fails, by share of individualists μ, one line per λ pair. Includes the pure populations (μ 0 and 1).</a:t>
+              <a:t>Chance the bank fails, by the kind of public news, dot and CI per λ pair. All mixes μ. Numbers at right: wide λ gap.</a:t>
             </a:r>
             <a:endParaRPr lang="en-US" sz="1000" dirty="0"/>
           </a:p>
@@ -3797,18 +3704,18 @@
       </p:sp>
       <p:sp>
         <p:nvSpPr>
-          <p:cNvPr id="5" name="stat-P(fail) from no indi"/>
+          <p:cNvPr id="5" name="stat-outdated, pessimisti"/>
           <p:cNvSpPr/>
           <p:nvPr/>
         </p:nvSpPr>
         <p:spPr>
           <a:xfrm>
             <a:off x="6217920" y="1051560"/>
-            <a:ext cx="2468880" cy="1005840"/>
+            <a:ext cx="2468880" cy="777240"/>
           </a:xfrm>
           <a:prstGeom prst="roundRect">
             <a:avLst>
-              <a:gd name="adj" fmla="val 7273"/>
+              <a:gd name="adj" fmla="val 9412"/>
             </a:avLst>
           </a:prstGeom>
           <a:solidFill>
@@ -3831,7 +3738,7 @@
         <p:spPr>
           <a:xfrm>
             <a:off x="6355080" y="1124712"/>
-            <a:ext cx="2194560" cy="457200"/>
+            <a:ext cx="2194560" cy="365760"/>
           </a:xfrm>
           <a:prstGeom prst="rect">
             <a:avLst/>
@@ -3849,13 +3756,13 @@
             <a:r>
               <a:rPr lang="en-US" sz="2200" b="1" dirty="0">
                 <a:solidFill>
-                  <a:schemeClr val="accent1"/>
+                  <a:schemeClr val="accent2"/>
                 </a:solidFill>
                 <a:latin typeface="Cambria" pitchFamily="34" charset="0"/>
                 <a:ea typeface="Cambria" pitchFamily="34" charset="-122"/>
                 <a:cs typeface="Cambria" pitchFamily="34" charset="-120"/>
               </a:rPr>
-              <a:t>0.67 to 0.08</a:t>
+              <a:t>0.48</a:t>
             </a:r>
             <a:endParaRPr lang="en-US" sz="2200" dirty="0"/>
           </a:p>
@@ -3869,8 +3776,8 @@
         </p:nvSpPr>
         <p:spPr>
           <a:xfrm>
-            <a:off x="6355080" y="1600200"/>
-            <a:ext cx="2194560" cy="402336"/>
+            <a:off x="6355080" y="1508760"/>
+            <a:ext cx="2194560" cy="265176"/>
           </a:xfrm>
           <a:prstGeom prst="rect">
             <a:avLst/>
@@ -3891,7 +3798,7 @@
                   <a:schemeClr val="accent3"/>
                 </a:solidFill>
               </a:rPr>
-              <a:t>P(fail) from no individualists to all, wide λ gap</a:t>
+              <a:t>outdated, pessimistic news</a:t>
             </a:r>
             <a:endParaRPr lang="en-US" sz="1100" dirty="0"/>
           </a:p>
@@ -3899,18 +3806,18 @@
       </p:sp>
       <p:sp>
         <p:nvSpPr>
-          <p:cNvPr id="8" name="stat-the same, narrow λ g"/>
+          <p:cNvPr id="8" name="stat-no public news"/>
           <p:cNvSpPr/>
           <p:nvPr/>
         </p:nvSpPr>
         <p:spPr>
           <a:xfrm>
-            <a:off x="6217920" y="2194560"/>
-            <a:ext cx="2468880" cy="1005840"/>
+            <a:off x="6217920" y="1938528"/>
+            <a:ext cx="2468880" cy="777240"/>
           </a:xfrm>
           <a:prstGeom prst="roundRect">
             <a:avLst>
-              <a:gd name="adj" fmla="val 7273"/>
+              <a:gd name="adj" fmla="val 9412"/>
             </a:avLst>
           </a:prstGeom>
           <a:solidFill>
@@ -3932,8 +3839,8 @@
         </p:nvSpPr>
         <p:spPr>
           <a:xfrm>
-            <a:off x="6355080" y="2267712"/>
-            <a:ext cx="2194560" cy="457200"/>
+            <a:off x="6355080" y="2011680"/>
+            <a:ext cx="2194560" cy="365760"/>
           </a:xfrm>
           <a:prstGeom prst="rect">
             <a:avLst/>
@@ -3957,7 +3864,7 @@
                 <a:ea typeface="Cambria" pitchFamily="34" charset="-122"/>
                 <a:cs typeface="Cambria" pitchFamily="34" charset="-120"/>
               </a:rPr>
-              <a:t>0.25 to 0.09</a:t>
+              <a:t>0.31</a:t>
             </a:r>
             <a:endParaRPr lang="en-US" sz="2200" dirty="0"/>
           </a:p>
@@ -3971,8 +3878,8 @@
         </p:nvSpPr>
         <p:spPr>
           <a:xfrm>
-            <a:off x="6355080" y="2743200"/>
-            <a:ext cx="2194560" cy="402336"/>
+            <a:off x="6355080" y="2395728"/>
+            <a:ext cx="2194560" cy="265176"/>
           </a:xfrm>
           <a:prstGeom prst="rect">
             <a:avLst/>
@@ -3993,7 +3900,7 @@
                   <a:schemeClr val="accent3"/>
                 </a:solidFill>
               </a:rPr>
-              <a:t>the same, narrow λ gap: it matters most when collectivists dominate</a:t>
+              <a:t>no public news</a:t>
             </a:r>
             <a:endParaRPr lang="en-US" sz="1100" dirty="0"/>
           </a:p>
@@ -4001,18 +3908,18 @@
       </p:sp>
       <p:sp>
         <p:nvSpPr>
-          <p:cNvPr id="11" name="card-Monotone"/>
+          <p:cNvPr id="11" name="stat-accurate news"/>
           <p:cNvSpPr/>
           <p:nvPr/>
         </p:nvSpPr>
         <p:spPr>
           <a:xfrm>
-            <a:off x="6217920" y="3337560"/>
-            <a:ext cx="2468880" cy="1097280"/>
+            <a:off x="6217920" y="2825496"/>
+            <a:ext cx="2468880" cy="777240"/>
           </a:xfrm>
           <a:prstGeom prst="roundRect">
             <a:avLst>
-              <a:gd name="adj" fmla="val 6667"/>
+              <a:gd name="adj" fmla="val 9412"/>
             </a:avLst>
           </a:prstGeom>
           <a:solidFill>
@@ -4028,14 +3935,14 @@
       </p:sp>
       <p:sp>
         <p:nvSpPr>
-          <p:cNvPr id="12" name="card-head"/>
+          <p:cNvPr id="12" name="stat-big"/>
           <p:cNvSpPr txBox="1"/>
           <p:nvPr/>
         </p:nvSpPr>
         <p:spPr>
           <a:xfrm>
-            <a:off x="6355080" y="3429000"/>
-            <a:ext cx="2194560" cy="292608"/>
+            <a:off x="6355080" y="2898648"/>
+            <a:ext cx="2194560" cy="365760"/>
           </a:xfrm>
           <a:prstGeom prst="rect">
             <a:avLst/>
@@ -4051,27 +3958,30 @@
               <a:buNone/>
             </a:pPr>
             <a:r>
-              <a:rPr lang="en-US" sz="1300" b="1" dirty="0">
-                <a:solidFill>
-                  <a:schemeClr val="tx2"/>
-                </a:solidFill>
-              </a:rPr>
-              <a:t>Monotone</a:t>
-            </a:r>
-            <a:endParaRPr lang="en-US" sz="1300" dirty="0"/>
-          </a:p>
-        </p:txBody>
-      </p:sp>
-      <p:sp>
-        <p:nvSpPr>
-          <p:cNvPr id="13" name="card-body"/>
+              <a:rPr lang="en-US" sz="2200" b="1" dirty="0">
+                <a:solidFill>
+                  <a:schemeClr val="accent1"/>
+                </a:solidFill>
+                <a:latin typeface="Cambria" pitchFamily="34" charset="0"/>
+                <a:ea typeface="Cambria" pitchFamily="34" charset="-122"/>
+                <a:cs typeface="Cambria" pitchFamily="34" charset="-120"/>
+              </a:rPr>
+              <a:t>0.29</a:t>
+            </a:r>
+            <a:endParaRPr lang="en-US" sz="2200" dirty="0"/>
+          </a:p>
+        </p:txBody>
+      </p:sp>
+      <p:sp>
+        <p:nvSpPr>
+          <p:cNvPr id="13" name="stat-label"/>
           <p:cNvSpPr txBox="1"/>
           <p:nvPr/>
         </p:nvSpPr>
         <p:spPr>
           <a:xfrm>
-            <a:off x="6355080" y="3749040"/>
-            <a:ext cx="2194560" cy="594360"/>
+            <a:off x="6355080" y="3282696"/>
+            <a:ext cx="2194560" cy="265176"/>
           </a:xfrm>
           <a:prstGeom prst="rect">
             <a:avLst/>
@@ -4087,14 +3997,116 @@
               <a:buNone/>
             </a:pPr>
             <a:r>
-              <a:rPr lang="en-US" sz="1150" dirty="0">
-                <a:solidFill>
-                  <a:schemeClr val="tx1"/>
-                </a:solidFill>
-              </a:rPr>
-              <a:t>No interior peak at any mix. The lines converge once individualists are 75% or more.</a:t>
-            </a:r>
-            <a:endParaRPr lang="en-US" sz="1150" dirty="0"/>
+              <a:rPr lang="en-US" sz="1100" dirty="0">
+                <a:solidFill>
+                  <a:schemeClr val="accent3"/>
+                </a:solidFill>
+              </a:rPr>
+              <a:t>accurate news</a:t>
+            </a:r>
+            <a:endParaRPr lang="en-US" sz="1100" dirty="0"/>
+          </a:p>
+        </p:txBody>
+      </p:sp>
+      <p:sp>
+        <p:nvSpPr>
+          <p:cNvPr id="14" name="stat-outdated, optimistic"/>
+          <p:cNvSpPr/>
+          <p:nvPr/>
+        </p:nvSpPr>
+        <p:spPr>
+          <a:xfrm>
+            <a:off x="6217920" y="3712464"/>
+            <a:ext cx="2468880" cy="777240"/>
+          </a:xfrm>
+          <a:prstGeom prst="roundRect">
+            <a:avLst>
+              <a:gd name="adj" fmla="val 9412"/>
+            </a:avLst>
+          </a:prstGeom>
+          <a:solidFill>
+            <a:schemeClr val="bg2"/>
+          </a:solidFill>
+          <a:ln w="12700">
+            <a:solidFill>
+              <a:schemeClr val="bg2"/>
+            </a:solidFill>
+            <a:prstDash val="solid"/>
+          </a:ln>
+        </p:spPr>
+      </p:sp>
+      <p:sp>
+        <p:nvSpPr>
+          <p:cNvPr id="15" name="stat-big"/>
+          <p:cNvSpPr txBox="1"/>
+          <p:nvPr/>
+        </p:nvSpPr>
+        <p:spPr>
+          <a:xfrm>
+            <a:off x="6355080" y="3785616"/>
+            <a:ext cx="2194560" cy="365760"/>
+          </a:xfrm>
+          <a:prstGeom prst="rect">
+            <a:avLst/>
+          </a:prstGeom>
+          <a:noFill/>
+          <a:ln/>
+        </p:spPr>
+        <p:txBody>
+          <a:bodyPr wrap="square" lIns="0" tIns="0" rIns="0" bIns="0" rtlCol="0" anchor="ctr"/>
+          <a:lstStyle/>
+          <a:p>
+            <a:pPr indent="0" marL="0">
+              <a:buNone/>
+            </a:pPr>
+            <a:r>
+              <a:rPr lang="en-US" sz="2200" b="1" dirty="0">
+                <a:solidFill>
+                  <a:schemeClr val="accent5"/>
+                </a:solidFill>
+                <a:latin typeface="Cambria" pitchFamily="34" charset="0"/>
+                <a:ea typeface="Cambria" pitchFamily="34" charset="-122"/>
+                <a:cs typeface="Cambria" pitchFamily="34" charset="-120"/>
+              </a:rPr>
+              <a:t>0.16</a:t>
+            </a:r>
+            <a:endParaRPr lang="en-US" sz="2200" dirty="0"/>
+          </a:p>
+        </p:txBody>
+      </p:sp>
+      <p:sp>
+        <p:nvSpPr>
+          <p:cNvPr id="16" name="stat-label"/>
+          <p:cNvSpPr txBox="1"/>
+          <p:nvPr/>
+        </p:nvSpPr>
+        <p:spPr>
+          <a:xfrm>
+            <a:off x="6355080" y="4169664"/>
+            <a:ext cx="2194560" cy="265176"/>
+          </a:xfrm>
+          <a:prstGeom prst="rect">
+            <a:avLst/>
+          </a:prstGeom>
+          <a:noFill/>
+          <a:ln/>
+        </p:spPr>
+        <p:txBody>
+          <a:bodyPr wrap="square" lIns="0" tIns="0" rIns="0" bIns="0" rtlCol="0" anchor="t"/>
+          <a:lstStyle/>
+          <a:p>
+            <a:pPr indent="0" marL="0">
+              <a:buNone/>
+            </a:pPr>
+            <a:r>
+              <a:rPr lang="en-US" sz="1100" dirty="0">
+                <a:solidFill>
+                  <a:schemeClr val="accent3"/>
+                </a:solidFill>
+              </a:rPr>
+              <a:t>outdated, optimistic news</a:t>
+            </a:r>
+            <a:endParaRPr lang="en-US" sz="1100" dirty="0"/>
           </a:p>
         </p:txBody>
       </p:sp>
@@ -4200,7 +4212,7 @@
                   <a:schemeClr val="tx2"/>
                 </a:solidFill>
               </a:rPr>
-              <a:t>Outdated news cuts both ways</a:t>
+              <a:t>Capping the largest deposits</a:t>
             </a:r>
             <a:endParaRPr lang="en-US" sz="2400" dirty="0"/>
           </a:p>
@@ -4208,7 +4220,7 @@
       </p:sp>
       <p:pic>
         <p:nvPicPr>
-          <p:cNvPr id="3" name="e08" descr="Chance the bank fails by kind of public news: outdated pessimistic news raises it to about 0.48, accurate news barely changes it from no news (0.29 vs 0.31), outdated optimistic news lowers it to 0.16.">    </p:cNvPr>
+          <p:cNvPr id="3" name="e10" descr="Chance the bank fails by share of individualists for three deposit-size distributions: uncapped large deposits fail most often; capped at 1 percent matches the bank with similar-sized deposits at every share.">    </p:cNvPr>
           <p:cNvPicPr>
             <a:picLocks noChangeAspect="1"/>
           </p:cNvPicPr>
@@ -4223,7 +4235,7 @@
         <p:spPr>
           <a:xfrm>
             <a:off x="457200" y="1051560"/>
-            <a:ext cx="5486400" cy="2607605"/>
+            <a:ext cx="4941052" cy="3291840"/>
           </a:xfrm>
           <a:prstGeom prst="rect">
             <a:avLst/>
@@ -4238,7 +4250,7 @@
         </p:nvSpPr>
         <p:spPr>
           <a:xfrm>
-            <a:off x="457200" y="3704885"/>
+            <a:off x="457200" y="4389120"/>
             <a:ext cx="5486400" cy="274320"/>
           </a:xfrm>
           <a:prstGeom prst="rect">
@@ -4260,7 +4272,7 @@
                   <a:schemeClr val="accent3"/>
                 </a:solidFill>
               </a:rPr>
-              <a:t>Chance the bank fails, by the kind of public news, dot and CI per λ pair. All mixes μ. Numbers at right: wide λ gap.</a:t>
+              <a:t>Chance the bank fails by share of individualists, for three deposit-size distributions. λ pairs pooled.</a:t>
             </a:r>
             <a:endParaRPr lang="en-US" sz="1000" dirty="0"/>
           </a:p>
@@ -4268,18 +4280,18 @@
       </p:sp>
       <p:sp>
         <p:nvSpPr>
-          <p:cNvPr id="5" name="stat-outdated, pessimisti"/>
+          <p:cNvPr id="5" name="stat-uncapped: a few very"/>
           <p:cNvSpPr/>
           <p:nvPr/>
         </p:nvSpPr>
         <p:spPr>
           <a:xfrm>
             <a:off x="6217920" y="1051560"/>
-            <a:ext cx="2468880" cy="777240"/>
+            <a:ext cx="2468880" cy="1005840"/>
           </a:xfrm>
           <a:prstGeom prst="roundRect">
             <a:avLst>
-              <a:gd name="adj" fmla="val 9412"/>
+              <a:gd name="adj" fmla="val 7273"/>
             </a:avLst>
           </a:prstGeom>
           <a:solidFill>
@@ -4302,7 +4314,7 @@
         <p:spPr>
           <a:xfrm>
             <a:off x="6355080" y="1124712"/>
-            <a:ext cx="2194560" cy="365760"/>
+            <a:ext cx="2194560" cy="457200"/>
           </a:xfrm>
           <a:prstGeom prst="rect">
             <a:avLst/>
@@ -4326,7 +4338,7 @@
                 <a:ea typeface="Cambria" pitchFamily="34" charset="-122"/>
                 <a:cs typeface="Cambria" pitchFamily="34" charset="-120"/>
               </a:rPr>
-              <a:t>0.48</a:t>
+              <a:t>0.61 to 0.11</a:t>
             </a:r>
             <a:endParaRPr lang="en-US" sz="2200" dirty="0"/>
           </a:p>
@@ -4340,8 +4352,8 @@
         </p:nvSpPr>
         <p:spPr>
           <a:xfrm>
-            <a:off x="6355080" y="1508760"/>
-            <a:ext cx="2194560" cy="265176"/>
+            <a:off x="6355080" y="1600200"/>
+            <a:ext cx="2194560" cy="402336"/>
           </a:xfrm>
           <a:prstGeom prst="rect">
             <a:avLst/>
@@ -4362,7 +4374,7 @@
                   <a:schemeClr val="accent3"/>
                 </a:solidFill>
               </a:rPr>
-              <a:t>outdated, pessimistic news</a:t>
+              <a:t>uncapped: a few very large deposits (σ 2.5)</a:t>
             </a:r>
             <a:endParaRPr lang="en-US" sz="1100" dirty="0"/>
           </a:p>
@@ -4370,18 +4382,18 @@
       </p:sp>
       <p:sp>
         <p:nvSpPr>
-          <p:cNvPr id="8" name="stat-no public news"/>
+          <p:cNvPr id="8" name="stat-capped: no deposit a"/>
           <p:cNvSpPr/>
           <p:nvPr/>
         </p:nvSpPr>
         <p:spPr>
           <a:xfrm>
-            <a:off x="6217920" y="1938528"/>
-            <a:ext cx="2468880" cy="777240"/>
+            <a:off x="6217920" y="2194560"/>
+            <a:ext cx="2468880" cy="1005840"/>
           </a:xfrm>
           <a:prstGeom prst="roundRect">
             <a:avLst>
-              <a:gd name="adj" fmla="val 9412"/>
+              <a:gd name="adj" fmla="val 7273"/>
             </a:avLst>
           </a:prstGeom>
           <a:solidFill>
@@ -4403,8 +4415,8 @@
         </p:nvSpPr>
         <p:spPr>
           <a:xfrm>
-            <a:off x="6355080" y="2011680"/>
-            <a:ext cx="2194560" cy="365760"/>
+            <a:off x="6355080" y="2267712"/>
+            <a:ext cx="2194560" cy="457200"/>
           </a:xfrm>
           <a:prstGeom prst="rect">
             <a:avLst/>
@@ -4428,7 +4440,7 @@
                 <a:ea typeface="Cambria" pitchFamily="34" charset="-122"/>
                 <a:cs typeface="Cambria" pitchFamily="34" charset="-120"/>
               </a:rPr>
-              <a:t>0.31</a:t>
+              <a:t>0.51 to 0.08</a:t>
             </a:r>
             <a:endParaRPr lang="en-US" sz="2200" dirty="0"/>
           </a:p>
@@ -4442,8 +4454,8 @@
         </p:nvSpPr>
         <p:spPr>
           <a:xfrm>
-            <a:off x="6355080" y="2395728"/>
-            <a:ext cx="2194560" cy="265176"/>
+            <a:off x="6355080" y="2743200"/>
+            <a:ext cx="2194560" cy="402336"/>
           </a:xfrm>
           <a:prstGeom prst="rect">
             <a:avLst/>
@@ -4464,7 +4476,7 @@
                   <a:schemeClr val="accent3"/>
                 </a:solidFill>
               </a:rPr>
-              <a:t>no public news</a:t>
+              <a:t>capped: no deposit above 1% of the total (the reference bank)</a:t>
             </a:r>
             <a:endParaRPr lang="en-US" sz="1100" dirty="0"/>
           </a:p>
@@ -4472,18 +4484,18 @@
       </p:sp>
       <p:sp>
         <p:nvSpPr>
-          <p:cNvPr id="11" name="stat-accurate news"/>
+          <p:cNvPr id="11" name="stat-similar sizes (σ 1)."/>
           <p:cNvSpPr/>
           <p:nvPr/>
         </p:nvSpPr>
         <p:spPr>
           <a:xfrm>
-            <a:off x="6217920" y="2825496"/>
-            <a:ext cx="2468880" cy="777240"/>
+            <a:off x="6217920" y="3337560"/>
+            <a:ext cx="2468880" cy="1097280"/>
           </a:xfrm>
           <a:prstGeom prst="roundRect">
             <a:avLst>
-              <a:gd name="adj" fmla="val 9412"/>
+              <a:gd name="adj" fmla="val 6667"/>
             </a:avLst>
           </a:prstGeom>
           <a:solidFill>
@@ -4505,8 +4517,8 @@
         </p:nvSpPr>
         <p:spPr>
           <a:xfrm>
-            <a:off x="6355080" y="2898648"/>
-            <a:ext cx="2194560" cy="365760"/>
+            <a:off x="6355080" y="3410712"/>
+            <a:ext cx="2194560" cy="457200"/>
           </a:xfrm>
           <a:prstGeom prst="rect">
             <a:avLst/>
@@ -4524,13 +4536,13 @@
             <a:r>
               <a:rPr lang="en-US" sz="2200" b="1" dirty="0">
                 <a:solidFill>
-                  <a:schemeClr val="accent1"/>
+                  <a:schemeClr val="accent3"/>
                 </a:solidFill>
                 <a:latin typeface="Cambria" pitchFamily="34" charset="0"/>
                 <a:ea typeface="Cambria" pitchFamily="34" charset="-122"/>
                 <a:cs typeface="Cambria" pitchFamily="34" charset="-120"/>
               </a:rPr>
-              <a:t>0.29</a:t>
+              <a:t>0.50 to 0.08</a:t>
             </a:r>
             <a:endParaRPr lang="en-US" sz="2200" dirty="0"/>
           </a:p>
@@ -4544,8 +4556,8 @@
         </p:nvSpPr>
         <p:spPr>
           <a:xfrm>
-            <a:off x="6355080" y="3282696"/>
-            <a:ext cx="2194560" cy="265176"/>
+            <a:off x="6355080" y="3886200"/>
+            <a:ext cx="2194560" cy="493776"/>
           </a:xfrm>
           <a:prstGeom prst="rect">
             <a:avLst/>
@@ -4566,109 +4578,7 @@
                   <a:schemeClr val="accent3"/>
                 </a:solidFill>
               </a:rPr>
-              <a:t>accurate news</a:t>
-            </a:r>
-            <a:endParaRPr lang="en-US" sz="1100" dirty="0"/>
-          </a:p>
-        </p:txBody>
-      </p:sp>
-      <p:sp>
-        <p:nvSpPr>
-          <p:cNvPr id="14" name="stat-outdated, optimistic"/>
-          <p:cNvSpPr/>
-          <p:nvPr/>
-        </p:nvSpPr>
-        <p:spPr>
-          <a:xfrm>
-            <a:off x="6217920" y="3712464"/>
-            <a:ext cx="2468880" cy="777240"/>
-          </a:xfrm>
-          <a:prstGeom prst="roundRect">
-            <a:avLst>
-              <a:gd name="adj" fmla="val 9412"/>
-            </a:avLst>
-          </a:prstGeom>
-          <a:solidFill>
-            <a:schemeClr val="bg2"/>
-          </a:solidFill>
-          <a:ln w="12700">
-            <a:solidFill>
-              <a:schemeClr val="bg2"/>
-            </a:solidFill>
-            <a:prstDash val="solid"/>
-          </a:ln>
-        </p:spPr>
-      </p:sp>
-      <p:sp>
-        <p:nvSpPr>
-          <p:cNvPr id="15" name="stat-big"/>
-          <p:cNvSpPr txBox="1"/>
-          <p:nvPr/>
-        </p:nvSpPr>
-        <p:spPr>
-          <a:xfrm>
-            <a:off x="6355080" y="3785616"/>
-            <a:ext cx="2194560" cy="365760"/>
-          </a:xfrm>
-          <a:prstGeom prst="rect">
-            <a:avLst/>
-          </a:prstGeom>
-          <a:noFill/>
-          <a:ln/>
-        </p:spPr>
-        <p:txBody>
-          <a:bodyPr wrap="square" lIns="0" tIns="0" rIns="0" bIns="0" rtlCol="0" anchor="ctr"/>
-          <a:lstStyle/>
-          <a:p>
-            <a:pPr indent="0" marL="0">
-              <a:buNone/>
-            </a:pPr>
-            <a:r>
-              <a:rPr lang="en-US" sz="2200" b="1" dirty="0">
-                <a:solidFill>
-                  <a:schemeClr val="accent5"/>
-                </a:solidFill>
-                <a:latin typeface="Cambria" pitchFamily="34" charset="0"/>
-                <a:ea typeface="Cambria" pitchFamily="34" charset="-122"/>
-                <a:cs typeface="Cambria" pitchFamily="34" charset="-120"/>
-              </a:rPr>
-              <a:t>0.16</a:t>
-            </a:r>
-            <a:endParaRPr lang="en-US" sz="2200" dirty="0"/>
-          </a:p>
-        </p:txBody>
-      </p:sp>
-      <p:sp>
-        <p:nvSpPr>
-          <p:cNvPr id="16" name="stat-label"/>
-          <p:cNvSpPr txBox="1"/>
-          <p:nvPr/>
-        </p:nvSpPr>
-        <p:spPr>
-          <a:xfrm>
-            <a:off x="6355080" y="4169664"/>
-            <a:ext cx="2194560" cy="265176"/>
-          </a:xfrm>
-          <a:prstGeom prst="rect">
-            <a:avLst/>
-          </a:prstGeom>
-          <a:noFill/>
-          <a:ln/>
-        </p:spPr>
-        <p:txBody>
-          <a:bodyPr wrap="square" lIns="0" tIns="0" rIns="0" bIns="0" rtlCol="0" anchor="t"/>
-          <a:lstStyle/>
-          <a:p>
-            <a:pPr indent="0" marL="0">
-              <a:buNone/>
-            </a:pPr>
-            <a:r>
-              <a:rPr lang="en-US" sz="1100" dirty="0">
-                <a:solidFill>
-                  <a:schemeClr val="accent3"/>
-                </a:solidFill>
-              </a:rPr>
-              <a:t>outdated, optimistic news</a:t>
+              <a:t>similar sizes (σ 1). The μ gradient is the same in all three.</a:t>
             </a:r>
             <a:endParaRPr lang="en-US" sz="1100" dirty="0"/>
           </a:p>
@@ -4776,7 +4686,7 @@
                   <a:schemeClr val="tx2"/>
                 </a:solidFill>
               </a:rPr>
-              <a:t>Capping the largest deposits</a:t>
+              <a:t>Does the model hold up?</a:t>
             </a:r>
             <a:endParaRPr lang="en-US" sz="2400" dirty="0"/>
           </a:p>
@@ -4784,7 +4694,7 @@
       </p:sp>
       <p:pic>
         <p:nvPicPr>
-          <p:cNvPr id="3" name="e10" descr="Chance the bank fails by share of individualists for three deposit-size distributions: uncapped large deposits fail most often; capped at 1 percent matches the bank with similar-sized deposits at every share.">    </p:cNvPr>
+          <p:cNvPr id="3" name="e01" descr="Individualists' run rate minus collectivists', relative to no news, against how far public news is from the truth: rises from negative when news is pessimistic to positive when optimistic, more steeply for the wide lambda gap.">    </p:cNvPr>
           <p:cNvPicPr>
             <a:picLocks noChangeAspect="1"/>
           </p:cNvPicPr>
@@ -4799,7 +4709,7 @@
         <p:spPr>
           <a:xfrm>
             <a:off x="457200" y="1051560"/>
-            <a:ext cx="4941052" cy="3291840"/>
+            <a:ext cx="5145146" cy="3291840"/>
           </a:xfrm>
           <a:prstGeom prst="rect">
             <a:avLst/>
@@ -4836,7 +4746,7 @@
                   <a:schemeClr val="accent3"/>
                 </a:solidFill>
               </a:rPr>
-              <a:t>Chance the bank fails by share of individualists, for three deposit-size distributions. λ pairs pooled.</a:t>
+              <a:t>D relative to no news, against how far the public news sits from the truth. Shaded: where the theory predicts the sign.</a:t>
             </a:r>
             <a:endParaRPr lang="en-US" sz="1000" dirty="0"/>
           </a:p>
@@ -4844,18 +4754,18 @@
       </p:sp>
       <p:sp>
         <p:nvSpPr>
-          <p:cNvPr id="5" name="stat-uncapped: a few very"/>
+          <p:cNvPr id="5" name="tests"/>
           <p:cNvSpPr/>
           <p:nvPr/>
         </p:nvSpPr>
         <p:spPr>
           <a:xfrm>
             <a:off x="6217920" y="1051560"/>
-            <a:ext cx="2468880" cy="1005840"/>
+            <a:ext cx="2468880" cy="2103120"/>
           </a:xfrm>
           <a:prstGeom prst="roundRect">
             <a:avLst>
-              <a:gd name="adj" fmla="val 7273"/>
+              <a:gd name="adj" fmla="val 3478"/>
             </a:avLst>
           </a:prstGeom>
           <a:solidFill>
@@ -4871,93 +4781,122 @@
       </p:sp>
       <p:sp>
         <p:nvSpPr>
-          <p:cNvPr id="6" name="stat-big"/>
+          <p:cNvPr id="6" name="tests-text"/>
           <p:cNvSpPr txBox="1"/>
           <p:nvPr/>
         </p:nvSpPr>
         <p:spPr>
           <a:xfrm>
-            <a:off x="6355080" y="1124712"/>
-            <a:ext cx="2194560" cy="457200"/>
-          </a:xfrm>
-          <a:prstGeom prst="rect">
-            <a:avLst/>
-          </a:prstGeom>
-          <a:noFill/>
-          <a:ln/>
-        </p:spPr>
-        <p:txBody>
-          <a:bodyPr wrap="square" lIns="0" tIns="0" rIns="0" bIns="0" rtlCol="0" anchor="ctr"/>
+            <a:off x="6355080" y="1143000"/>
+            <a:ext cx="2194560" cy="1920240"/>
+          </a:xfrm>
+          <a:prstGeom prst="rect">
+            <a:avLst/>
+          </a:prstGeom>
+          <a:noFill/>
+          <a:ln/>
+        </p:spPr>
+        <p:txBody>
+          <a:bodyPr wrap="square" lIns="0" tIns="0" rIns="0" bIns="0" rtlCol="0" anchor="t"/>
           <a:lstStyle/>
           <a:p>
             <a:pPr indent="0" marL="0">
-              <a:buNone/>
-            </a:pPr>
-            <a:r>
-              <a:rPr lang="en-US" sz="2200" b="1" dirty="0">
+              <a:spcAft>
+                <a:spcPts val="600"/>
+              </a:spcAft>
+              <a:buNone/>
+            </a:pPr>
+            <a:r>
+              <a:rPr lang="en-US" sz="1300" b="1" dirty="0">
+                <a:solidFill>
+                  <a:schemeClr val="tx2"/>
+                </a:solidFill>
+              </a:rPr>
+              <a:t>Pre-registered tests</a:t>
+            </a:r>
+            <a:endParaRPr lang="en-US" sz="1050" dirty="0"/>
+          </a:p>
+          <a:p>
+            <a:pPr indent="0" marL="0">
+              <a:spcAft>
+                <a:spcPts val="300"/>
+              </a:spcAft>
+              <a:buNone/>
+            </a:pPr>
+            <a:r>
+              <a:rPr lang="en-US" sz="1050" dirty="0">
+                <a:solidFill>
+                  <a:schemeClr val="tx1"/>
+                </a:solidFill>
+              </a:rPr>
+              <a:t>G1′  optimistic news: individualists run more   +0.033</a:t>
+            </a:r>
+            <a:endParaRPr lang="en-US" sz="1050" dirty="0"/>
+          </a:p>
+          <a:p>
+            <a:pPr indent="0" marL="0">
+              <a:spcAft>
+                <a:spcPts val="300"/>
+              </a:spcAft>
+              <a:buNone/>
+            </a:pPr>
+            <a:r>
+              <a:rPr lang="en-US" sz="1050" dirty="0">
+                <a:solidFill>
+                  <a:schemeClr val="tx1"/>
+                </a:solidFill>
+              </a:rPr>
+              <a:t>G4′  pessimistic news: collectivists run more   −0.031</a:t>
+            </a:r>
+            <a:endParaRPr lang="en-US" sz="1050" dirty="0"/>
+          </a:p>
+          <a:p>
+            <a:pPr indent="0" marL="0">
+              <a:spcAft>
+                <a:spcPts val="300"/>
+              </a:spcAft>
+              <a:buNone/>
+            </a:pPr>
+            <a:r>
+              <a:rPr lang="en-US" sz="1050" dirty="0">
+                <a:solidFill>
+                  <a:schemeClr val="tx1"/>
+                </a:solidFill>
+              </a:rPr>
+              <a:t>G2a′  the effect grows with the λ gap   +0.093</a:t>
+            </a:r>
+            <a:endParaRPr lang="en-US" sz="1050" dirty="0"/>
+          </a:p>
+          <a:p>
+            <a:pPr indent="0" marL="0">
+              <a:buNone/>
+            </a:pPr>
+            <a:r>
+              <a:rPr lang="en-US" sz="1050" dirty="0">
                 <a:solidFill>
                   <a:schemeClr val="accent2"/>
                 </a:solidFill>
-                <a:latin typeface="Cambria" pitchFamily="34" charset="0"/>
-                <a:ea typeface="Cambria" pitchFamily="34" charset="-122"/>
-                <a:cs typeface="Cambria" pitchFamily="34" charset="-120"/>
-              </a:rPr>
-              <a:t>0.61 to 0.11</a:t>
-            </a:r>
-            <a:endParaRPr lang="en-US" sz="2200" dirty="0"/>
-          </a:p>
-        </p:txBody>
-      </p:sp>
-      <p:sp>
-        <p:nvSpPr>
-          <p:cNvPr id="7" name="stat-label"/>
-          <p:cNvSpPr txBox="1"/>
-          <p:nvPr/>
-        </p:nvSpPr>
-        <p:spPr>
-          <a:xfrm>
-            <a:off x="6355080" y="1600200"/>
-            <a:ext cx="2194560" cy="402336"/>
-          </a:xfrm>
-          <a:prstGeom prst="rect">
-            <a:avLst/>
-          </a:prstGeom>
-          <a:noFill/>
-          <a:ln/>
-        </p:spPr>
-        <p:txBody>
-          <a:bodyPr wrap="square" lIns="0" tIns="0" rIns="0" bIns="0" rtlCol="0" anchor="t"/>
-          <a:lstStyle/>
-          <a:p>
-            <a:pPr indent="0" marL="0">
-              <a:buNone/>
-            </a:pPr>
-            <a:r>
-              <a:rPr lang="en-US" sz="1100" dirty="0">
-                <a:solidFill>
-                  <a:schemeClr val="accent3"/>
-                </a:solidFill>
-              </a:rPr>
-              <a:t>uncapped: a few very large deposits (σ 2.5)</a:t>
-            </a:r>
-            <a:endParaRPr lang="en-US" sz="1100" dirty="0"/>
-          </a:p>
-        </p:txBody>
-      </p:sp>
-      <p:sp>
-        <p:nvSpPr>
-          <p:cNvPr id="8" name="stat-capped: no deposit a"/>
+              </a:rPr>
+              <a:t>G3  sorting with no news: counts against (one pair wrong-signed)</a:t>
+            </a:r>
+            <a:endParaRPr lang="en-US" sz="1050" dirty="0"/>
+          </a:p>
+        </p:txBody>
+      </p:sp>
+      <p:sp>
+        <p:nvSpPr>
+          <p:cNvPr id="7" name="stat-confirmatory tests s"/>
           <p:cNvSpPr/>
           <p:nvPr/>
         </p:nvSpPr>
         <p:spPr>
           <a:xfrm>
-            <a:off x="6217920" y="2194560"/>
-            <a:ext cx="2468880" cy="1005840"/>
+            <a:off x="6217920" y="3291840"/>
+            <a:ext cx="2468880" cy="1143000"/>
           </a:xfrm>
           <a:prstGeom prst="roundRect">
             <a:avLst>
-              <a:gd name="adj" fmla="val 7273"/>
+              <a:gd name="adj" fmla="val 6400"/>
             </a:avLst>
           </a:prstGeom>
           <a:solidFill>
@@ -4973,13 +4912,13 @@
       </p:sp>
       <p:sp>
         <p:nvSpPr>
-          <p:cNvPr id="9" name="stat-big"/>
+          <p:cNvPr id="8" name="stat-big"/>
           <p:cNvSpPr txBox="1"/>
           <p:nvPr/>
         </p:nvSpPr>
         <p:spPr>
           <a:xfrm>
-            <a:off x="6355080" y="2267712"/>
+            <a:off x="6355080" y="3364992"/>
             <a:ext cx="2194560" cy="457200"/>
           </a:xfrm>
           <a:prstGeom prst="rect">
@@ -4996,7 +4935,7 @@
               <a:buNone/>
             </a:pPr>
             <a:r>
-              <a:rPr lang="en-US" sz="2200" b="1" dirty="0">
+              <a:rPr lang="en-US" sz="2600" b="1" dirty="0">
                 <a:solidFill>
                   <a:schemeClr val="accent1"/>
                 </a:solidFill>
@@ -5004,22 +4943,22 @@
                 <a:ea typeface="Cambria" pitchFamily="34" charset="-122"/>
                 <a:cs typeface="Cambria" pitchFamily="34" charset="-120"/>
               </a:rPr>
-              <a:t>0.51 to 0.08</a:t>
-            </a:r>
-            <a:endParaRPr lang="en-US" sz="2200" dirty="0"/>
-          </a:p>
-        </p:txBody>
-      </p:sp>
-      <p:sp>
-        <p:nvSpPr>
-          <p:cNvPr id="10" name="stat-label"/>
+              <a:t>3 of 4</a:t>
+            </a:r>
+            <a:endParaRPr lang="en-US" sz="2600" dirty="0"/>
+          </a:p>
+        </p:txBody>
+      </p:sp>
+      <p:sp>
+        <p:nvSpPr>
+          <p:cNvPr id="9" name="stat-label"/>
           <p:cNvSpPr txBox="1"/>
           <p:nvPr/>
         </p:nvSpPr>
         <p:spPr>
           <a:xfrm>
-            <a:off x="6355080" y="2743200"/>
-            <a:ext cx="2194560" cy="402336"/>
+            <a:off x="6355080" y="3840480"/>
+            <a:ext cx="2194560" cy="539496"/>
           </a:xfrm>
           <a:prstGeom prst="rect">
             <a:avLst/>
@@ -5040,109 +4979,7 @@
                   <a:schemeClr val="accent3"/>
                 </a:solidFill>
               </a:rPr>
-              <a:t>capped: no deposit above 1% of the total (the reference bank)</a:t>
-            </a:r>
-            <a:endParaRPr lang="en-US" sz="1100" dirty="0"/>
-          </a:p>
-        </p:txBody>
-      </p:sp>
-      <p:sp>
-        <p:nvSpPr>
-          <p:cNvPr id="11" name="stat-similar sizes (σ 1)."/>
-          <p:cNvSpPr/>
-          <p:nvPr/>
-        </p:nvSpPr>
-        <p:spPr>
-          <a:xfrm>
-            <a:off x="6217920" y="3337560"/>
-            <a:ext cx="2468880" cy="1097280"/>
-          </a:xfrm>
-          <a:prstGeom prst="roundRect">
-            <a:avLst>
-              <a:gd name="adj" fmla="val 6667"/>
-            </a:avLst>
-          </a:prstGeom>
-          <a:solidFill>
-            <a:schemeClr val="bg2"/>
-          </a:solidFill>
-          <a:ln w="12700">
-            <a:solidFill>
-              <a:schemeClr val="bg2"/>
-            </a:solidFill>
-            <a:prstDash val="solid"/>
-          </a:ln>
-        </p:spPr>
-      </p:sp>
-      <p:sp>
-        <p:nvSpPr>
-          <p:cNvPr id="12" name="stat-big"/>
-          <p:cNvSpPr txBox="1"/>
-          <p:nvPr/>
-        </p:nvSpPr>
-        <p:spPr>
-          <a:xfrm>
-            <a:off x="6355080" y="3410712"/>
-            <a:ext cx="2194560" cy="457200"/>
-          </a:xfrm>
-          <a:prstGeom prst="rect">
-            <a:avLst/>
-          </a:prstGeom>
-          <a:noFill/>
-          <a:ln/>
-        </p:spPr>
-        <p:txBody>
-          <a:bodyPr wrap="square" lIns="0" tIns="0" rIns="0" bIns="0" rtlCol="0" anchor="ctr"/>
-          <a:lstStyle/>
-          <a:p>
-            <a:pPr indent="0" marL="0">
-              <a:buNone/>
-            </a:pPr>
-            <a:r>
-              <a:rPr lang="en-US" sz="2200" b="1" dirty="0">
-                <a:solidFill>
-                  <a:schemeClr val="accent3"/>
-                </a:solidFill>
-                <a:latin typeface="Cambria" pitchFamily="34" charset="0"/>
-                <a:ea typeface="Cambria" pitchFamily="34" charset="-122"/>
-                <a:cs typeface="Cambria" pitchFamily="34" charset="-120"/>
-              </a:rPr>
-              <a:t>0.50 to 0.08</a:t>
-            </a:r>
-            <a:endParaRPr lang="en-US" sz="2200" dirty="0"/>
-          </a:p>
-        </p:txBody>
-      </p:sp>
-      <p:sp>
-        <p:nvSpPr>
-          <p:cNvPr id="13" name="stat-label"/>
-          <p:cNvSpPr txBox="1"/>
-          <p:nvPr/>
-        </p:nvSpPr>
-        <p:spPr>
-          <a:xfrm>
-            <a:off x="6355080" y="3886200"/>
-            <a:ext cx="2194560" cy="493776"/>
-          </a:xfrm>
-          <a:prstGeom prst="rect">
-            <a:avLst/>
-          </a:prstGeom>
-          <a:noFill/>
-          <a:ln/>
-        </p:spPr>
-        <p:txBody>
-          <a:bodyPr wrap="square" lIns="0" tIns="0" rIns="0" bIns="0" rtlCol="0" anchor="t"/>
-          <a:lstStyle/>
-          <a:p>
-            <a:pPr indent="0" marL="0">
-              <a:buNone/>
-            </a:pPr>
-            <a:r>
-              <a:rPr lang="en-US" sz="1100" dirty="0">
-                <a:solidFill>
-                  <a:schemeClr val="accent3"/>
-                </a:solidFill>
-              </a:rPr>
-              <a:t>similar sizes (σ 1). The μ gradient is the same in all three.</a:t>
+              <a:t>confirmatory tests support the theory, on all three versions of the bank</a:t>
             </a:r>
             <a:endParaRPr lang="en-US" sz="1100" dirty="0"/>
           </a:p>
@@ -5250,86 +5087,26 @@
                   <a:schemeClr val="tx2"/>
                 </a:solidFill>
               </a:rPr>
-              <a:t>Does the model hold up?</a:t>
+              <a:t>Takeaways and next steps</a:t>
             </a:r>
             <a:endParaRPr lang="en-US" sz="2400" dirty="0"/>
           </a:p>
         </p:txBody>
       </p:sp>
-      <p:pic>
-        <p:nvPicPr>
-          <p:cNvPr id="3" name="e01" descr="Individualists' run rate minus collectivists', relative to no news, against how far public news is from the truth: rises from negative when news is pessimistic to positive when optimistic, more steeply for the wide lambda gap.">    </p:cNvPr>
-          <p:cNvPicPr>
-            <a:picLocks noChangeAspect="1"/>
-          </p:cNvPicPr>
-          <p:nvPr/>
-        </p:nvPicPr>
-        <p:blipFill>
-          <a:blip r:embed="rId1"/>
-          <a:stretch>
-            <a:fillRect/>
-          </a:stretch>
-        </p:blipFill>
+      <p:sp>
+        <p:nvSpPr>
+          <p:cNvPr id="3" name="take-0"/>
+          <p:cNvSpPr/>
+          <p:nvPr/>
+        </p:nvSpPr>
         <p:spPr>
           <a:xfrm>
             <a:off x="457200" y="1051560"/>
-            <a:ext cx="5145146" cy="3291840"/>
-          </a:xfrm>
-          <a:prstGeom prst="rect">
-            <a:avLst/>
-          </a:prstGeom>
-        </p:spPr>
-      </p:pic>
-      <p:sp>
-        <p:nvSpPr>
-          <p:cNvPr id="4" name="caption"/>
-          <p:cNvSpPr txBox="1"/>
-          <p:nvPr/>
-        </p:nvSpPr>
-        <p:spPr>
-          <a:xfrm>
-            <a:off x="457200" y="4389120"/>
-            <a:ext cx="5486400" cy="274320"/>
-          </a:xfrm>
-          <a:prstGeom prst="rect">
-            <a:avLst/>
-          </a:prstGeom>
-          <a:noFill/>
-          <a:ln/>
-        </p:spPr>
-        <p:txBody>
-          <a:bodyPr wrap="square" lIns="0" tIns="0" rIns="0" bIns="0" rtlCol="0" anchor="ctr"/>
-          <a:lstStyle/>
-          <a:p>
-            <a:pPr indent="0" marL="0">
-              <a:buNone/>
-            </a:pPr>
-            <a:r>
-              <a:rPr lang="en-US" sz="1000" i="1" dirty="0">
-                <a:solidFill>
-                  <a:schemeClr val="accent3"/>
-                </a:solidFill>
-              </a:rPr>
-              <a:t>D relative to no news, against how far the public news sits from the truth. Shaded: where the theory predicts the sign.</a:t>
-            </a:r>
-            <a:endParaRPr lang="en-US" sz="1000" dirty="0"/>
-          </a:p>
-        </p:txBody>
-      </p:sp>
-      <p:sp>
-        <p:nvSpPr>
-          <p:cNvPr id="5" name="tests"/>
-          <p:cNvSpPr/>
-          <p:nvPr/>
-        </p:nvSpPr>
-        <p:spPr>
-          <a:xfrm>
-            <a:off x="6217920" y="1051560"/>
-            <a:ext cx="2468880" cy="2103120"/>
+            <a:ext cx="5760720" cy="512064"/>
           </a:xfrm>
           <a:prstGeom prst="roundRect">
             <a:avLst>
-              <a:gd name="adj" fmla="val 3478"/>
+              <a:gd name="adj" fmla="val 14286"/>
             </a:avLst>
           </a:prstGeom>
           <a:solidFill>
@@ -5345,122 +5122,156 @@
       </p:sp>
       <p:sp>
         <p:nvSpPr>
-          <p:cNvPr id="6" name="tests-text"/>
-          <p:cNvSpPr txBox="1"/>
-          <p:nvPr/>
-        </p:nvSpPr>
-        <p:spPr>
-          <a:xfrm>
-            <a:off x="6355080" y="1143000"/>
-            <a:ext cx="2194560" cy="1920240"/>
-          </a:xfrm>
-          <a:prstGeom prst="rect">
-            <a:avLst/>
-          </a:prstGeom>
-          <a:noFill/>
-          <a:ln/>
-        </p:spPr>
-        <p:txBody>
-          <a:bodyPr wrap="square" lIns="0" tIns="0" rIns="0" bIns="0" rtlCol="0" anchor="t"/>
-          <a:lstStyle/>
-          <a:p>
-            <a:pPr indent="0" marL="0">
-              <a:spcAft>
-                <a:spcPts val="600"/>
-              </a:spcAft>
-              <a:buNone/>
-            </a:pPr>
-            <a:r>
-              <a:rPr lang="en-US" sz="1300" b="1" dirty="0">
-                <a:solidFill>
-                  <a:schemeClr val="tx2"/>
-                </a:solidFill>
-              </a:rPr>
-              <a:t>Pre-registered tests</a:t>
-            </a:r>
-            <a:endParaRPr lang="en-US" sz="1050" dirty="0"/>
-          </a:p>
-          <a:p>
-            <a:pPr indent="0" marL="0">
-              <a:spcAft>
-                <a:spcPts val="300"/>
-              </a:spcAft>
-              <a:buNone/>
-            </a:pPr>
-            <a:r>
-              <a:rPr lang="en-US" sz="1050" dirty="0">
-                <a:solidFill>
-                  <a:schemeClr val="tx1"/>
-                </a:solidFill>
-              </a:rPr>
-              <a:t>G1′  optimistic news: individualists run more   +0.033</a:t>
-            </a:r>
-            <a:endParaRPr lang="en-US" sz="1050" dirty="0"/>
-          </a:p>
-          <a:p>
-            <a:pPr indent="0" marL="0">
-              <a:spcAft>
-                <a:spcPts val="300"/>
-              </a:spcAft>
-              <a:buNone/>
-            </a:pPr>
-            <a:r>
-              <a:rPr lang="en-US" sz="1050" dirty="0">
-                <a:solidFill>
-                  <a:schemeClr val="tx1"/>
-                </a:solidFill>
-              </a:rPr>
-              <a:t>G4′  pessimistic news: collectivists run more   −0.031</a:t>
-            </a:r>
-            <a:endParaRPr lang="en-US" sz="1050" dirty="0"/>
-          </a:p>
-          <a:p>
-            <a:pPr indent="0" marL="0">
-              <a:spcAft>
-                <a:spcPts val="300"/>
-              </a:spcAft>
-              <a:buNone/>
-            </a:pPr>
-            <a:r>
-              <a:rPr lang="en-US" sz="1050" dirty="0">
-                <a:solidFill>
-                  <a:schemeClr val="tx1"/>
-                </a:solidFill>
-              </a:rPr>
-              <a:t>G2a′  the effect grows with the λ gap   +0.093</a:t>
-            </a:r>
-            <a:endParaRPr lang="en-US" sz="1050" dirty="0"/>
-          </a:p>
-          <a:p>
-            <a:pPr indent="0" marL="0">
-              <a:buNone/>
-            </a:pPr>
-            <a:r>
-              <a:rPr lang="en-US" sz="1050" dirty="0">
-                <a:solidFill>
-                  <a:schemeClr val="accent2"/>
-                </a:solidFill>
-              </a:rPr>
-              <a:t>G3  sorting with no news: counts against (one pair wrong-signed)</a:t>
-            </a:r>
-            <a:endParaRPr lang="en-US" sz="1050" dirty="0"/>
-          </a:p>
-        </p:txBody>
-      </p:sp>
-      <p:sp>
-        <p:nvSpPr>
-          <p:cNvPr id="7" name="stat-confirmatory tests s"/>
+          <p:cNvPr id="4" name="chip"/>
           <p:cNvSpPr/>
           <p:nvPr/>
         </p:nvSpPr>
         <p:spPr>
           <a:xfrm>
-            <a:off x="6217920" y="3291840"/>
-            <a:ext cx="2468880" cy="1143000"/>
+            <a:off x="548640" y="1143000"/>
+            <a:ext cx="329184" cy="329184"/>
           </a:xfrm>
           <a:prstGeom prst="roundRect">
             <a:avLst>
-              <a:gd name="adj" fmla="val 6400"/>
+              <a:gd name="adj" fmla="val 16667"/>
+            </a:avLst>
+          </a:prstGeom>
+          <a:solidFill>
+            <a:schemeClr val="accent1"/>
+          </a:solidFill>
+          <a:ln w="12700">
+            <a:solidFill>
+              <a:schemeClr val="accent1"/>
+            </a:solidFill>
+            <a:prstDash val="solid"/>
+          </a:ln>
+        </p:spPr>
+      </p:sp>
+      <p:sp>
+        <p:nvSpPr>
+          <p:cNvPr id="5" name="chip-label"/>
+          <p:cNvSpPr txBox="1"/>
+          <p:nvPr/>
+        </p:nvSpPr>
+        <p:spPr>
+          <a:xfrm>
+            <a:off x="548640" y="1143000"/>
+            <a:ext cx="329184" cy="329184"/>
+          </a:xfrm>
+          <a:prstGeom prst="rect">
+            <a:avLst/>
+          </a:prstGeom>
+          <a:noFill/>
+          <a:ln/>
+        </p:spPr>
+        <p:txBody>
+          <a:bodyPr wrap="square" lIns="0" tIns="0" rIns="0" bIns="0" rtlCol="0" anchor="ctr"/>
+          <a:lstStyle/>
+          <a:p>
+            <a:pPr algn="ctr" indent="0" marL="0">
+              <a:buNone/>
+            </a:pPr>
+            <a:r>
+              <a:rPr lang="en-US" sz="1100" b="1" dirty="0">
+                <a:solidFill>
+                  <a:schemeClr val="bg1"/>
+                </a:solidFill>
+                <a:latin typeface="Cambria" pitchFamily="34" charset="0"/>
+                <a:ea typeface="Cambria" pitchFamily="34" charset="-122"/>
+                <a:cs typeface="Cambria" pitchFamily="34" charset="-120"/>
+              </a:rPr>
+              <a:t>1</a:t>
+            </a:r>
+            <a:endParaRPr lang="en-US" sz="1100" dirty="0"/>
+          </a:p>
+        </p:txBody>
+      </p:sp>
+      <p:sp>
+        <p:nvSpPr>
+          <p:cNvPr id="6" name="take-head"/>
+          <p:cNvSpPr txBox="1"/>
+          <p:nvPr/>
+        </p:nvSpPr>
+        <p:spPr>
+          <a:xfrm>
+            <a:off x="987552" y="1088136"/>
+            <a:ext cx="1600200" cy="438912"/>
+          </a:xfrm>
+          <a:prstGeom prst="rect">
+            <a:avLst/>
+          </a:prstGeom>
+          <a:noFill/>
+          <a:ln/>
+        </p:spPr>
+        <p:txBody>
+          <a:bodyPr wrap="square" lIns="0" tIns="0" rIns="0" bIns="0" rtlCol="0" anchor="ctr"/>
+          <a:lstStyle/>
+          <a:p>
+            <a:pPr indent="0" marL="0">
+              <a:buNone/>
+            </a:pPr>
+            <a:r>
+              <a:rPr lang="en-US" sz="1100" b="1" dirty="0">
+                <a:solidFill>
+                  <a:schemeClr val="tx2"/>
+                </a:solidFill>
+              </a:rPr>
+              <a:t>Sorting follows the news</a:t>
+            </a:r>
+            <a:endParaRPr lang="en-US" sz="1100" dirty="0"/>
+          </a:p>
+        </p:txBody>
+      </p:sp>
+      <p:sp>
+        <p:nvSpPr>
+          <p:cNvPr id="7" name="take-body"/>
+          <p:cNvSpPr txBox="1"/>
+          <p:nvPr/>
+        </p:nvSpPr>
+        <p:spPr>
+          <a:xfrm>
+            <a:off x="2651760" y="1088136"/>
+            <a:ext cx="3474720" cy="438912"/>
+          </a:xfrm>
+          <a:prstGeom prst="rect">
+            <a:avLst/>
+          </a:prstGeom>
+          <a:noFill/>
+          <a:ln/>
+        </p:spPr>
+        <p:txBody>
+          <a:bodyPr wrap="square" lIns="0" tIns="0" rIns="0" bIns="0" rtlCol="0" anchor="ctr"/>
+          <a:lstStyle/>
+          <a:p>
+            <a:pPr indent="0" marL="0">
+              <a:buNone/>
+            </a:pPr>
+            <a:r>
+              <a:rPr lang="en-US" sz="1000" dirty="0">
+                <a:solidFill>
+                  <a:schemeClr val="tx1"/>
+                </a:solidFill>
+              </a:rPr>
+              <a:t>Optimistic public news makes individualists run relatively more; pessimistic news, collectivists. 3 of 4 pre-registered tests pass, in all three bank versions.</a:t>
+            </a:r>
+            <a:endParaRPr lang="en-US" sz="1000" dirty="0"/>
+          </a:p>
+        </p:txBody>
+      </p:sp>
+      <p:sp>
+        <p:nvSpPr>
+          <p:cNvPr id="8" name="take-1"/>
+          <p:cNvSpPr/>
+          <p:nvPr/>
+        </p:nvSpPr>
+        <p:spPr>
+          <a:xfrm>
+            <a:off x="457200" y="1636776"/>
+            <a:ext cx="5760720" cy="512064"/>
+          </a:xfrm>
+          <a:prstGeom prst="roundRect">
+            <a:avLst>
+              <a:gd name="adj" fmla="val 14286"/>
             </a:avLst>
           </a:prstGeom>
           <a:solidFill>
@@ -5476,14 +5287,41 @@
       </p:sp>
       <p:sp>
         <p:nvSpPr>
-          <p:cNvPr id="8" name="stat-big"/>
+          <p:cNvPr id="9" name="chip"/>
+          <p:cNvSpPr/>
+          <p:nvPr/>
+        </p:nvSpPr>
+        <p:spPr>
+          <a:xfrm>
+            <a:off x="548640" y="1728216"/>
+            <a:ext cx="329184" cy="329184"/>
+          </a:xfrm>
+          <a:prstGeom prst="roundRect">
+            <a:avLst>
+              <a:gd name="adj" fmla="val 16667"/>
+            </a:avLst>
+          </a:prstGeom>
+          <a:solidFill>
+            <a:schemeClr val="accent1"/>
+          </a:solidFill>
+          <a:ln w="12700">
+            <a:solidFill>
+              <a:schemeClr val="accent1"/>
+            </a:solidFill>
+            <a:prstDash val="solid"/>
+          </a:ln>
+        </p:spPr>
+      </p:sp>
+      <p:sp>
+        <p:nvSpPr>
+          <p:cNvPr id="10" name="chip-label"/>
           <p:cNvSpPr txBox="1"/>
           <p:nvPr/>
         </p:nvSpPr>
         <p:spPr>
           <a:xfrm>
-            <a:off x="6355080" y="3364992"/>
-            <a:ext cx="2194560" cy="457200"/>
+            <a:off x="548640" y="1728216"/>
+            <a:ext cx="329184" cy="329184"/>
           </a:xfrm>
           <a:prstGeom prst="rect">
             <a:avLst/>
@@ -5495,34 +5333,829 @@
           <a:bodyPr wrap="square" lIns="0" tIns="0" rIns="0" bIns="0" rtlCol="0" anchor="ctr"/>
           <a:lstStyle/>
           <a:p>
-            <a:pPr indent="0" marL="0">
-              <a:buNone/>
-            </a:pPr>
-            <a:r>
-              <a:rPr lang="en-US" sz="2600" b="1" dirty="0">
-                <a:solidFill>
-                  <a:schemeClr val="accent1"/>
+            <a:pPr algn="ctr" indent="0" marL="0">
+              <a:buNone/>
+            </a:pPr>
+            <a:r>
+              <a:rPr lang="en-US" sz="1100" b="1" dirty="0">
+                <a:solidFill>
+                  <a:schemeClr val="bg1"/>
                 </a:solidFill>
                 <a:latin typeface="Cambria" pitchFamily="34" charset="0"/>
                 <a:ea typeface="Cambria" pitchFamily="34" charset="-122"/>
                 <a:cs typeface="Cambria" pitchFamily="34" charset="-120"/>
               </a:rPr>
-              <a:t>3 of 4</a:t>
-            </a:r>
-            <a:endParaRPr lang="en-US" sz="2600" dirty="0"/>
-          </a:p>
-        </p:txBody>
-      </p:sp>
-      <p:sp>
-        <p:nvSpPr>
-          <p:cNvPr id="9" name="stat-label"/>
+              <a:t>2</a:t>
+            </a:r>
+            <a:endParaRPr lang="en-US" sz="1100" dirty="0"/>
+          </a:p>
+        </p:txBody>
+      </p:sp>
+      <p:sp>
+        <p:nvSpPr>
+          <p:cNvPr id="11" name="take-head"/>
           <p:cNvSpPr txBox="1"/>
           <p:nvPr/>
         </p:nvSpPr>
         <p:spPr>
           <a:xfrm>
-            <a:off x="6355080" y="3840480"/>
-            <a:ext cx="2194560" cy="539496"/>
+            <a:off x="987552" y="1673352"/>
+            <a:ext cx="1600200" cy="438912"/>
+          </a:xfrm>
+          <a:prstGeom prst="rect">
+            <a:avLst/>
+          </a:prstGeom>
+          <a:noFill/>
+          <a:ln/>
+        </p:spPr>
+        <p:txBody>
+          <a:bodyPr wrap="square" lIns="0" tIns="0" rIns="0" bIns="0" rtlCol="0" anchor="ctr"/>
+          <a:lstStyle/>
+          <a:p>
+            <a:pPr indent="0" marL="0">
+              <a:buNone/>
+            </a:pPr>
+            <a:r>
+              <a:rPr lang="en-US" sz="1100" b="1" dirty="0">
+                <a:solidFill>
+                  <a:schemeClr val="tx2"/>
+                </a:solidFill>
+              </a:rPr>
+              <a:t>Collectivists herd</a:t>
+            </a:r>
+            <a:endParaRPr lang="en-US" sz="1100" dirty="0"/>
+          </a:p>
+        </p:txBody>
+      </p:sp>
+      <p:sp>
+        <p:nvSpPr>
+          <p:cNvPr id="12" name="take-body"/>
+          <p:cNvSpPr txBox="1"/>
+          <p:nvPr/>
+        </p:nvSpPr>
+        <p:spPr>
+          <a:xfrm>
+            <a:off x="2651760" y="1673352"/>
+            <a:ext cx="3474720" cy="438912"/>
+          </a:xfrm>
+          <a:prstGeom prst="rect">
+            <a:avLst/>
+          </a:prstGeom>
+          <a:noFill/>
+          <a:ln/>
+        </p:spPr>
+        <p:txBody>
+          <a:bodyPr wrap="square" lIns="0" tIns="0" rIns="0" bIns="0" rtlCol="0" anchor="ctr"/>
+          <a:lstStyle/>
+          <a:p>
+            <a:pPr indent="0" marL="0">
+              <a:buNone/>
+            </a:pPr>
+            <a:r>
+              <a:rPr lang="en-US" sz="1000" dirty="0">
+                <a:solidFill>
+                  <a:schemeClr val="tx1"/>
+                </a:solidFill>
+              </a:rPr>
+              <a:t>Their chance of withdrawing jumps from 0.15 to 0.93 once 20–35% of neighbours are out; individualists level off near 0.3.</a:t>
+            </a:r>
+            <a:endParaRPr lang="en-US" sz="1000" dirty="0"/>
+          </a:p>
+        </p:txBody>
+      </p:sp>
+      <p:sp>
+        <p:nvSpPr>
+          <p:cNvPr id="13" name="take-2"/>
+          <p:cNvSpPr/>
+          <p:nvPr/>
+        </p:nvSpPr>
+        <p:spPr>
+          <a:xfrm>
+            <a:off x="457200" y="2221992"/>
+            <a:ext cx="5760720" cy="512064"/>
+          </a:xfrm>
+          <a:prstGeom prst="roundRect">
+            <a:avLst>
+              <a:gd name="adj" fmla="val 14286"/>
+            </a:avLst>
+          </a:prstGeom>
+          <a:solidFill>
+            <a:schemeClr val="bg2"/>
+          </a:solidFill>
+          <a:ln w="12700">
+            <a:solidFill>
+              <a:schemeClr val="bg2"/>
+            </a:solidFill>
+            <a:prstDash val="solid"/>
+          </a:ln>
+        </p:spPr>
+      </p:sp>
+      <p:sp>
+        <p:nvSpPr>
+          <p:cNvPr id="14" name="chip"/>
+          <p:cNvSpPr/>
+          <p:nvPr/>
+        </p:nvSpPr>
+        <p:spPr>
+          <a:xfrm>
+            <a:off x="548640" y="2313432"/>
+            <a:ext cx="329184" cy="329184"/>
+          </a:xfrm>
+          <a:prstGeom prst="roundRect">
+            <a:avLst>
+              <a:gd name="adj" fmla="val 16667"/>
+            </a:avLst>
+          </a:prstGeom>
+          <a:solidFill>
+            <a:schemeClr val="accent1"/>
+          </a:solidFill>
+          <a:ln w="12700">
+            <a:solidFill>
+              <a:schemeClr val="accent1"/>
+            </a:solidFill>
+            <a:prstDash val="solid"/>
+          </a:ln>
+        </p:spPr>
+      </p:sp>
+      <p:sp>
+        <p:nvSpPr>
+          <p:cNvPr id="15" name="chip-label"/>
+          <p:cNvSpPr txBox="1"/>
+          <p:nvPr/>
+        </p:nvSpPr>
+        <p:spPr>
+          <a:xfrm>
+            <a:off x="548640" y="2313432"/>
+            <a:ext cx="329184" cy="329184"/>
+          </a:xfrm>
+          <a:prstGeom prst="rect">
+            <a:avLst/>
+          </a:prstGeom>
+          <a:noFill/>
+          <a:ln/>
+        </p:spPr>
+        <p:txBody>
+          <a:bodyPr wrap="square" lIns="0" tIns="0" rIns="0" bIns="0" rtlCol="0" anchor="ctr"/>
+          <a:lstStyle/>
+          <a:p>
+            <a:pPr algn="ctr" indent="0" marL="0">
+              <a:buNone/>
+            </a:pPr>
+            <a:r>
+              <a:rPr lang="en-US" sz="1100" b="1" dirty="0">
+                <a:solidFill>
+                  <a:schemeClr val="bg1"/>
+                </a:solidFill>
+                <a:latin typeface="Cambria" pitchFamily="34" charset="0"/>
+                <a:ea typeface="Cambria" pitchFamily="34" charset="-122"/>
+                <a:cs typeface="Cambria" pitchFamily="34" charset="-120"/>
+              </a:rPr>
+              <a:t>3</a:t>
+            </a:r>
+            <a:endParaRPr lang="en-US" sz="1100" dirty="0"/>
+          </a:p>
+        </p:txBody>
+      </p:sp>
+      <p:sp>
+        <p:nvSpPr>
+          <p:cNvPr id="16" name="take-head"/>
+          <p:cNvSpPr txBox="1"/>
+          <p:nvPr/>
+        </p:nvSpPr>
+        <p:spPr>
+          <a:xfrm>
+            <a:off x="987552" y="2258568"/>
+            <a:ext cx="1600200" cy="438912"/>
+          </a:xfrm>
+          <a:prstGeom prst="rect">
+            <a:avLst/>
+          </a:prstGeom>
+          <a:noFill/>
+          <a:ln/>
+        </p:spPr>
+        <p:txBody>
+          <a:bodyPr wrap="square" lIns="0" tIns="0" rIns="0" bIns="0" rtlCol="0" anchor="ctr"/>
+          <a:lstStyle/>
+          <a:p>
+            <a:pPr indent="0" marL="0">
+              <a:buNone/>
+            </a:pPr>
+            <a:r>
+              <a:rPr lang="en-US" sz="1100" b="1" dirty="0">
+                <a:solidFill>
+                  <a:schemeClr val="tx2"/>
+                </a:solidFill>
+              </a:rPr>
+              <a:t>More individualists, fewer failures</a:t>
+            </a:r>
+            <a:endParaRPr lang="en-US" sz="1100" dirty="0"/>
+          </a:p>
+        </p:txBody>
+      </p:sp>
+      <p:sp>
+        <p:nvSpPr>
+          <p:cNvPr id="17" name="take-body"/>
+          <p:cNvSpPr txBox="1"/>
+          <p:nvPr/>
+        </p:nvSpPr>
+        <p:spPr>
+          <a:xfrm>
+            <a:off x="2651760" y="2258568"/>
+            <a:ext cx="3474720" cy="438912"/>
+          </a:xfrm>
+          <a:prstGeom prst="rect">
+            <a:avLst/>
+          </a:prstGeom>
+          <a:noFill/>
+          <a:ln/>
+        </p:spPr>
+        <p:txBody>
+          <a:bodyPr wrap="square" lIns="0" tIns="0" rIns="0" bIns="0" rtlCol="0" anchor="ctr"/>
+          <a:lstStyle/>
+          <a:p>
+            <a:pPr indent="0" marL="0">
+              <a:buNone/>
+            </a:pPr>
+            <a:r>
+              <a:rPr lang="en-US" sz="1000" dirty="0">
+                <a:solidFill>
+                  <a:schemeClr val="tx1"/>
+                </a:solidFill>
+              </a:rPr>
+              <a:t>P(fail) falls from 0.67 to 0.08 as the individualist share goes from 0 to 1. Monotone; no interior peak.</a:t>
+            </a:r>
+            <a:endParaRPr lang="en-US" sz="1000" dirty="0"/>
+          </a:p>
+        </p:txBody>
+      </p:sp>
+      <p:sp>
+        <p:nvSpPr>
+          <p:cNvPr id="18" name="take-3"/>
+          <p:cNvSpPr/>
+          <p:nvPr/>
+        </p:nvSpPr>
+        <p:spPr>
+          <a:xfrm>
+            <a:off x="457200" y="2807208"/>
+            <a:ext cx="5760720" cy="512064"/>
+          </a:xfrm>
+          <a:prstGeom prst="roundRect">
+            <a:avLst>
+              <a:gd name="adj" fmla="val 14286"/>
+            </a:avLst>
+          </a:prstGeom>
+          <a:solidFill>
+            <a:schemeClr val="bg2"/>
+          </a:solidFill>
+          <a:ln w="12700">
+            <a:solidFill>
+              <a:schemeClr val="bg2"/>
+            </a:solidFill>
+            <a:prstDash val="solid"/>
+          </a:ln>
+        </p:spPr>
+      </p:sp>
+      <p:sp>
+        <p:nvSpPr>
+          <p:cNvPr id="19" name="chip"/>
+          <p:cNvSpPr/>
+          <p:nvPr/>
+        </p:nvSpPr>
+        <p:spPr>
+          <a:xfrm>
+            <a:off x="548640" y="2898648"/>
+            <a:ext cx="329184" cy="329184"/>
+          </a:xfrm>
+          <a:prstGeom prst="roundRect">
+            <a:avLst>
+              <a:gd name="adj" fmla="val 16667"/>
+            </a:avLst>
+          </a:prstGeom>
+          <a:solidFill>
+            <a:schemeClr val="accent1"/>
+          </a:solidFill>
+          <a:ln w="12700">
+            <a:solidFill>
+              <a:schemeClr val="accent1"/>
+            </a:solidFill>
+            <a:prstDash val="solid"/>
+          </a:ln>
+        </p:spPr>
+      </p:sp>
+      <p:sp>
+        <p:nvSpPr>
+          <p:cNvPr id="20" name="chip-label"/>
+          <p:cNvSpPr txBox="1"/>
+          <p:nvPr/>
+        </p:nvSpPr>
+        <p:spPr>
+          <a:xfrm>
+            <a:off x="548640" y="2898648"/>
+            <a:ext cx="329184" cy="329184"/>
+          </a:xfrm>
+          <a:prstGeom prst="rect">
+            <a:avLst/>
+          </a:prstGeom>
+          <a:noFill/>
+          <a:ln/>
+        </p:spPr>
+        <p:txBody>
+          <a:bodyPr wrap="square" lIns="0" tIns="0" rIns="0" bIns="0" rtlCol="0" anchor="ctr"/>
+          <a:lstStyle/>
+          <a:p>
+            <a:pPr algn="ctr" indent="0" marL="0">
+              <a:buNone/>
+            </a:pPr>
+            <a:r>
+              <a:rPr lang="en-US" sz="1100" b="1" dirty="0">
+                <a:solidFill>
+                  <a:schemeClr val="bg1"/>
+                </a:solidFill>
+                <a:latin typeface="Cambria" pitchFamily="34" charset="0"/>
+                <a:ea typeface="Cambria" pitchFamily="34" charset="-122"/>
+                <a:cs typeface="Cambria" pitchFamily="34" charset="-120"/>
+              </a:rPr>
+              <a:t>4</a:t>
+            </a:r>
+            <a:endParaRPr lang="en-US" sz="1100" dirty="0"/>
+          </a:p>
+        </p:txBody>
+      </p:sp>
+      <p:sp>
+        <p:nvSpPr>
+          <p:cNvPr id="21" name="take-head"/>
+          <p:cNvSpPr txBox="1"/>
+          <p:nvPr/>
+        </p:nvSpPr>
+        <p:spPr>
+          <a:xfrm>
+            <a:off x="987552" y="2843784"/>
+            <a:ext cx="1600200" cy="438912"/>
+          </a:xfrm>
+          <a:prstGeom prst="rect">
+            <a:avLst/>
+          </a:prstGeom>
+          <a:noFill/>
+          <a:ln/>
+        </p:spPr>
+        <p:txBody>
+          <a:bodyPr wrap="square" lIns="0" tIns="0" rIns="0" bIns="0" rtlCol="0" anchor="ctr"/>
+          <a:lstStyle/>
+          <a:p>
+            <a:pPr indent="0" marL="0">
+              <a:buNone/>
+            </a:pPr>
+            <a:r>
+              <a:rPr lang="en-US" sz="1100" b="1" dirty="0">
+                <a:solidFill>
+                  <a:schemeClr val="tx2"/>
+                </a:solidFill>
+              </a:rPr>
+              <a:t>Stale news cuts both ways</a:t>
+            </a:r>
+            <a:endParaRPr lang="en-US" sz="1100" dirty="0"/>
+          </a:p>
+        </p:txBody>
+      </p:sp>
+      <p:sp>
+        <p:nvSpPr>
+          <p:cNvPr id="22" name="take-body"/>
+          <p:cNvSpPr txBox="1"/>
+          <p:nvPr/>
+        </p:nvSpPr>
+        <p:spPr>
+          <a:xfrm>
+            <a:off x="2651760" y="2843784"/>
+            <a:ext cx="3474720" cy="438912"/>
+          </a:xfrm>
+          <a:prstGeom prst="rect">
+            <a:avLst/>
+          </a:prstGeom>
+          <a:noFill/>
+          <a:ln/>
+        </p:spPr>
+        <p:txBody>
+          <a:bodyPr wrap="square" lIns="0" tIns="0" rIns="0" bIns="0" rtlCol="0" anchor="ctr"/>
+          <a:lstStyle/>
+          <a:p>
+            <a:pPr indent="0" marL="0">
+              <a:buNone/>
+            </a:pPr>
+            <a:r>
+              <a:rPr lang="en-US" sz="1000" dirty="0">
+                <a:solidFill>
+                  <a:schemeClr val="tx1"/>
+                </a:solidFill>
+              </a:rPr>
+              <a:t>A stale optimistic signal halves failure, a stale pessimistic one raises it by half. Accurate news barely moves it.</a:t>
+            </a:r>
+            <a:endParaRPr lang="en-US" sz="1000" dirty="0"/>
+          </a:p>
+        </p:txBody>
+      </p:sp>
+      <p:sp>
+        <p:nvSpPr>
+          <p:cNvPr id="23" name="take-4"/>
+          <p:cNvSpPr/>
+          <p:nvPr/>
+        </p:nvSpPr>
+        <p:spPr>
+          <a:xfrm>
+            <a:off x="457200" y="3392424"/>
+            <a:ext cx="5760720" cy="512064"/>
+          </a:xfrm>
+          <a:prstGeom prst="roundRect">
+            <a:avLst>
+              <a:gd name="adj" fmla="val 14286"/>
+            </a:avLst>
+          </a:prstGeom>
+          <a:solidFill>
+            <a:schemeClr val="bg2"/>
+          </a:solidFill>
+          <a:ln w="12700">
+            <a:solidFill>
+              <a:schemeClr val="bg2"/>
+            </a:solidFill>
+            <a:prstDash val="solid"/>
+          </a:ln>
+        </p:spPr>
+      </p:sp>
+      <p:sp>
+        <p:nvSpPr>
+          <p:cNvPr id="24" name="chip"/>
+          <p:cNvSpPr/>
+          <p:nvPr/>
+        </p:nvSpPr>
+        <p:spPr>
+          <a:xfrm>
+            <a:off x="548640" y="3483864"/>
+            <a:ext cx="329184" cy="329184"/>
+          </a:xfrm>
+          <a:prstGeom prst="roundRect">
+            <a:avLst>
+              <a:gd name="adj" fmla="val 16667"/>
+            </a:avLst>
+          </a:prstGeom>
+          <a:solidFill>
+            <a:schemeClr val="accent1"/>
+          </a:solidFill>
+          <a:ln w="12700">
+            <a:solidFill>
+              <a:schemeClr val="accent1"/>
+            </a:solidFill>
+            <a:prstDash val="solid"/>
+          </a:ln>
+        </p:spPr>
+      </p:sp>
+      <p:sp>
+        <p:nvSpPr>
+          <p:cNvPr id="25" name="chip-label"/>
+          <p:cNvSpPr txBox="1"/>
+          <p:nvPr/>
+        </p:nvSpPr>
+        <p:spPr>
+          <a:xfrm>
+            <a:off x="548640" y="3483864"/>
+            <a:ext cx="329184" cy="329184"/>
+          </a:xfrm>
+          <a:prstGeom prst="rect">
+            <a:avLst/>
+          </a:prstGeom>
+          <a:noFill/>
+          <a:ln/>
+        </p:spPr>
+        <p:txBody>
+          <a:bodyPr wrap="square" lIns="0" tIns="0" rIns="0" bIns="0" rtlCol="0" anchor="ctr"/>
+          <a:lstStyle/>
+          <a:p>
+            <a:pPr algn="ctr" indent="0" marL="0">
+              <a:buNone/>
+            </a:pPr>
+            <a:r>
+              <a:rPr lang="en-US" sz="1100" b="1" dirty="0">
+                <a:solidFill>
+                  <a:schemeClr val="bg1"/>
+                </a:solidFill>
+                <a:latin typeface="Cambria" pitchFamily="34" charset="0"/>
+                <a:ea typeface="Cambria" pitchFamily="34" charset="-122"/>
+                <a:cs typeface="Cambria" pitchFamily="34" charset="-120"/>
+              </a:rPr>
+              <a:t>5</a:t>
+            </a:r>
+            <a:endParaRPr lang="en-US" sz="1100" dirty="0"/>
+          </a:p>
+        </p:txBody>
+      </p:sp>
+      <p:sp>
+        <p:nvSpPr>
+          <p:cNvPr id="26" name="take-head"/>
+          <p:cNvSpPr txBox="1"/>
+          <p:nvPr/>
+        </p:nvSpPr>
+        <p:spPr>
+          <a:xfrm>
+            <a:off x="987552" y="3429000"/>
+            <a:ext cx="1600200" cy="438912"/>
+          </a:xfrm>
+          <a:prstGeom prst="rect">
+            <a:avLst/>
+          </a:prstGeom>
+          <a:noFill/>
+          <a:ln/>
+        </p:spPr>
+        <p:txBody>
+          <a:bodyPr wrap="square" lIns="0" tIns="0" rIns="0" bIns="0" rtlCol="0" anchor="ctr"/>
+          <a:lstStyle/>
+          <a:p>
+            <a:pPr indent="0" marL="0">
+              <a:buNone/>
+            </a:pPr>
+            <a:r>
+              <a:rPr lang="en-US" sz="1100" b="1" dirty="0">
+                <a:solidFill>
+                  <a:schemeClr val="tx2"/>
+                </a:solidFill>
+              </a:rPr>
+              <a:t>Capping the largest deposits</a:t>
+            </a:r>
+            <a:endParaRPr lang="en-US" sz="1100" dirty="0"/>
+          </a:p>
+        </p:txBody>
+      </p:sp>
+      <p:sp>
+        <p:nvSpPr>
+          <p:cNvPr id="27" name="take-body"/>
+          <p:cNvSpPr txBox="1"/>
+          <p:nvPr/>
+        </p:nvSpPr>
+        <p:spPr>
+          <a:xfrm>
+            <a:off x="2651760" y="3429000"/>
+            <a:ext cx="3474720" cy="438912"/>
+          </a:xfrm>
+          <a:prstGeom prst="rect">
+            <a:avLst/>
+          </a:prstGeom>
+          <a:noFill/>
+          <a:ln/>
+        </p:spPr>
+        <p:txBody>
+          <a:bodyPr wrap="square" lIns="0" tIns="0" rIns="0" bIns="0" rtlCol="0" anchor="ctr"/>
+          <a:lstStyle/>
+          <a:p>
+            <a:pPr indent="0" marL="0">
+              <a:buNone/>
+            </a:pPr>
+            <a:r>
+              <a:rPr lang="en-US" sz="1000" dirty="0">
+                <a:solidFill>
+                  <a:schemeClr val="tx1"/>
+                </a:solidFill>
+              </a:rPr>
+              <a:t>A 1% cap brings failure down to the no-concentration bank’s level; the culture gradient is unchanged.</a:t>
+            </a:r>
+            <a:endParaRPr lang="en-US" sz="1000" dirty="0"/>
+          </a:p>
+        </p:txBody>
+      </p:sp>
+      <p:sp>
+        <p:nvSpPr>
+          <p:cNvPr id="28" name="take-5"/>
+          <p:cNvSpPr/>
+          <p:nvPr/>
+        </p:nvSpPr>
+        <p:spPr>
+          <a:xfrm>
+            <a:off x="457200" y="3977640"/>
+            <a:ext cx="5760720" cy="512064"/>
+          </a:xfrm>
+          <a:prstGeom prst="roundRect">
+            <a:avLst>
+              <a:gd name="adj" fmla="val 14286"/>
+            </a:avLst>
+          </a:prstGeom>
+          <a:solidFill>
+            <a:schemeClr val="accent4"/>
+          </a:solidFill>
+          <a:ln w="12700">
+            <a:solidFill>
+              <a:schemeClr val="accent4"/>
+            </a:solidFill>
+            <a:prstDash val="solid"/>
+          </a:ln>
+        </p:spPr>
+      </p:sp>
+      <p:sp>
+        <p:nvSpPr>
+          <p:cNvPr id="29" name="chip"/>
+          <p:cNvSpPr/>
+          <p:nvPr/>
+        </p:nvSpPr>
+        <p:spPr>
+          <a:xfrm>
+            <a:off x="548640" y="4069080"/>
+            <a:ext cx="329184" cy="329184"/>
+          </a:xfrm>
+          <a:prstGeom prst="roundRect">
+            <a:avLst>
+              <a:gd name="adj" fmla="val 16667"/>
+            </a:avLst>
+          </a:prstGeom>
+          <a:solidFill>
+            <a:schemeClr val="accent2"/>
+          </a:solidFill>
+          <a:ln w="12700">
+            <a:solidFill>
+              <a:schemeClr val="accent2"/>
+            </a:solidFill>
+            <a:prstDash val="solid"/>
+          </a:ln>
+        </p:spPr>
+      </p:sp>
+      <p:sp>
+        <p:nvSpPr>
+          <p:cNvPr id="30" name="chip-label"/>
+          <p:cNvSpPr txBox="1"/>
+          <p:nvPr/>
+        </p:nvSpPr>
+        <p:spPr>
+          <a:xfrm>
+            <a:off x="548640" y="4069080"/>
+            <a:ext cx="329184" cy="329184"/>
+          </a:xfrm>
+          <a:prstGeom prst="rect">
+            <a:avLst/>
+          </a:prstGeom>
+          <a:noFill/>
+          <a:ln/>
+        </p:spPr>
+        <p:txBody>
+          <a:bodyPr wrap="square" lIns="0" tIns="0" rIns="0" bIns="0" rtlCol="0" anchor="ctr"/>
+          <a:lstStyle/>
+          <a:p>
+            <a:pPr algn="ctr" indent="0" marL="0">
+              <a:buNone/>
+            </a:pPr>
+            <a:r>
+              <a:rPr lang="en-US" sz="1100" b="1" dirty="0">
+                <a:solidFill>
+                  <a:schemeClr val="bg1"/>
+                </a:solidFill>
+                <a:latin typeface="Cambria" pitchFamily="34" charset="0"/>
+                <a:ea typeface="Cambria" pitchFamily="34" charset="-122"/>
+                <a:cs typeface="Cambria" pitchFamily="34" charset="-120"/>
+              </a:rPr>
+              <a:t>6</a:t>
+            </a:r>
+            <a:endParaRPr lang="en-US" sz="1100" dirty="0"/>
+          </a:p>
+        </p:txBody>
+      </p:sp>
+      <p:sp>
+        <p:nvSpPr>
+          <p:cNvPr id="31" name="take-head"/>
+          <p:cNvSpPr txBox="1"/>
+          <p:nvPr/>
+        </p:nvSpPr>
+        <p:spPr>
+          <a:xfrm>
+            <a:off x="987552" y="4014216"/>
+            <a:ext cx="1600200" cy="438912"/>
+          </a:xfrm>
+          <a:prstGeom prst="rect">
+            <a:avLst/>
+          </a:prstGeom>
+          <a:noFill/>
+          <a:ln/>
+        </p:spPr>
+        <p:txBody>
+          <a:bodyPr wrap="square" lIns="0" tIns="0" rIns="0" bIns="0" rtlCol="0" anchor="ctr"/>
+          <a:lstStyle/>
+          <a:p>
+            <a:pPr indent="0" marL="0">
+              <a:buNone/>
+            </a:pPr>
+            <a:r>
+              <a:rPr lang="en-US" sz="1100" b="1" dirty="0">
+                <a:solidFill>
+                  <a:schemeClr val="tx2"/>
+                </a:solidFill>
+              </a:rPr>
+              <a:t>Not yet matched</a:t>
+            </a:r>
+            <a:endParaRPr lang="en-US" sz="1100" dirty="0"/>
+          </a:p>
+        </p:txBody>
+      </p:sp>
+      <p:sp>
+        <p:nvSpPr>
+          <p:cNvPr id="32" name="take-body"/>
+          <p:cNvSpPr txBox="1"/>
+          <p:nvPr/>
+        </p:nvSpPr>
+        <p:spPr>
+          <a:xfrm>
+            <a:off x="2651760" y="4014216"/>
+            <a:ext cx="3474720" cy="438912"/>
+          </a:xfrm>
+          <a:prstGeom prst="rect">
+            <a:avLst/>
+          </a:prstGeom>
+          <a:noFill/>
+          <a:ln/>
+        </p:spPr>
+        <p:txBody>
+          <a:bodyPr wrap="square" lIns="0" tIns="0" rIns="0" bIns="0" rtlCol="0" anchor="ctr"/>
+          <a:lstStyle/>
+          <a:p>
+            <a:pPr indent="0" marL="0">
+              <a:buNone/>
+            </a:pPr>
+            <a:r>
+              <a:rPr lang="en-US" sz="1000" dirty="0">
+                <a:solidFill>
+                  <a:schemeClr val="tx1"/>
+                </a:solidFill>
+              </a:rPr>
+              <a:t>How Celsius’s largest depositors exit: one-shot share 0.35 there, 0.93 or more in the model.</a:t>
+            </a:r>
+            <a:endParaRPr lang="en-US" sz="1000" dirty="0"/>
+          </a:p>
+        </p:txBody>
+      </p:sp>
+      <p:sp>
+        <p:nvSpPr>
+          <p:cNvPr id="33" name="next"/>
+          <p:cNvSpPr/>
+          <p:nvPr/>
+        </p:nvSpPr>
+        <p:spPr>
+          <a:xfrm>
+            <a:off x="6400800" y="1051560"/>
+            <a:ext cx="2286000" cy="3438144"/>
+          </a:xfrm>
+          <a:prstGeom prst="roundRect">
+            <a:avLst>
+              <a:gd name="adj" fmla="val 3200"/>
+            </a:avLst>
+          </a:prstGeom>
+          <a:solidFill>
+            <a:schemeClr val="bg2"/>
+          </a:solidFill>
+          <a:ln w="12700">
+            <a:solidFill>
+              <a:schemeClr val="bg2"/>
+            </a:solidFill>
+            <a:prstDash val="solid"/>
+          </a:ln>
+        </p:spPr>
+      </p:sp>
+      <p:sp>
+        <p:nvSpPr>
+          <p:cNvPr id="34" name="next-head"/>
+          <p:cNvSpPr txBox="1"/>
+          <p:nvPr/>
+        </p:nvSpPr>
+        <p:spPr>
+          <a:xfrm>
+            <a:off x="6537960" y="1143000"/>
+            <a:ext cx="2011680" cy="320040"/>
+          </a:xfrm>
+          <a:prstGeom prst="rect">
+            <a:avLst/>
+          </a:prstGeom>
+          <a:noFill/>
+          <a:ln/>
+        </p:spPr>
+        <p:txBody>
+          <a:bodyPr wrap="square" lIns="0" tIns="0" rIns="0" bIns="0" rtlCol="0" anchor="ctr"/>
+          <a:lstStyle/>
+          <a:p>
+            <a:pPr indent="0" marL="0">
+              <a:buNone/>
+            </a:pPr>
+            <a:r>
+              <a:rPr lang="en-US" sz="1300" b="1" dirty="0">
+                <a:solidFill>
+                  <a:schemeClr val="tx2"/>
+                </a:solidFill>
+              </a:rPr>
+              <a:t>Next steps</a:t>
+            </a:r>
+            <a:endParaRPr lang="en-US" sz="1300" dirty="0"/>
+          </a:p>
+        </p:txBody>
+      </p:sp>
+      <p:sp>
+        <p:nvSpPr>
+          <p:cNvPr id="35" name="bullets"/>
+          <p:cNvSpPr txBox="1"/>
+          <p:nvPr/>
+        </p:nvSpPr>
+        <p:spPr>
+          <a:xfrm>
+            <a:off x="6537960" y="1508760"/>
+            <a:ext cx="2011680" cy="2926080"/>
           </a:xfrm>
           <a:prstGeom prst="rect">
             <a:avLst/>
@@ -5534,16 +6167,74 @@
           <a:bodyPr wrap="square" lIns="0" tIns="0" rIns="0" bIns="0" rtlCol="0" anchor="t"/>
           <a:lstStyle/>
           <a:p>
-            <a:pPr indent="0" marL="0">
-              <a:buNone/>
+            <a:pPr marL="177800" indent="-177800">
+              <a:spcAft>
+                <a:spcPts val="700"/>
+              </a:spcAft>
+              <a:buSzPct val="100000"/>
+              <a:buChar char="•"/>
             </a:pPr>
             <a:r>
               <a:rPr lang="en-US" sz="1100" dirty="0">
                 <a:solidFill>
-                  <a:schemeClr val="accent3"/>
-                </a:solidFill>
-              </a:rPr>
-              <a:t>confirmatory tests support the theory, on all three versions of the bank</a:t>
+                  <a:schemeClr val="tx1"/>
+                </a:solidFill>
+              </a:rPr>
+              <a:t>Super-individuals, to match how the largest depositors exited Celsius</a:t>
+            </a:r>
+            <a:endParaRPr lang="en-US" sz="1100" dirty="0"/>
+          </a:p>
+          <a:p>
+            <a:pPr marL="177800" indent="-177800">
+              <a:spcAft>
+                <a:spcPts val="700"/>
+              </a:spcAft>
+              <a:buSzPct val="100000"/>
+              <a:buChar char="•"/>
+            </a:pPr>
+            <a:r>
+              <a:rPr lang="en-US" sz="1100" dirty="0">
+                <a:solidFill>
+                  <a:schemeClr val="tx1"/>
+                </a:solidFill>
+              </a:rPr>
+              <a:t>Deposit insurance and the reserve ratio on the fire-sale bank</a:t>
+            </a:r>
+            <a:endParaRPr lang="en-US" sz="1100" dirty="0"/>
+          </a:p>
+          <a:p>
+            <a:pPr marL="177800" indent="-177800">
+              <a:spcAft>
+                <a:spcPts val="700"/>
+              </a:spcAft>
+              <a:buSzPct val="100000"/>
+              <a:buChar char="•"/>
+            </a:pPr>
+            <a:r>
+              <a:rPr lang="en-US" sz="1100" dirty="0">
+                <a:solidFill>
+                  <a:schemeClr val="tx1"/>
+                </a:solidFill>
+              </a:rPr>
+              <a:t>Network topology and learning</a:t>
+            </a:r>
+            <a:endParaRPr lang="en-US" sz="1100" dirty="0"/>
+          </a:p>
+          <a:p>
+            <a:pPr marL="177800" indent="-177800">
+              <a:spcAft>
+                <a:spcPts val="700"/>
+              </a:spcAft>
+              <a:buSzPct val="100000"/>
+              <a:buChar char="•"/>
+            </a:pPr>
+            <a:r>
+              <a:rPr lang="en-US" sz="1100" dirty="0">
+                <a:solidFill>
+                  <a:schemeClr val="tx1"/>
+                </a:solidFill>
+              </a:rPr>
+              <a:t>Full sweep: stale public signal plus no-signal baseline, CARA 0.1, σ reported</a:t>
             </a:r>
             <a:endParaRPr lang="en-US" sz="1100" dirty="0"/>
           </a:p>
@@ -5629,8 +6320,8 @@
         </p:nvSpPr>
         <p:spPr>
           <a:xfrm>
-            <a:off x="457200" y="274320"/>
-            <a:ext cx="8229600" cy="685800"/>
+            <a:off x="548640" y="1828800"/>
+            <a:ext cx="8046720" cy="1097280"/>
           </a:xfrm>
           <a:prstGeom prst="rect">
             <a:avLst/>
@@ -5646,1206 +6337,52 @@
               <a:buNone/>
             </a:pPr>
             <a:r>
-              <a:rPr lang="en-US" sz="2400" b="1" dirty="0">
-                <a:solidFill>
-                  <a:schemeClr val="tx2"/>
-                </a:solidFill>
-              </a:rPr>
-              <a:t>Takeaways and next steps</a:t>
-            </a:r>
-            <a:endParaRPr lang="en-US" sz="2400" dirty="0"/>
-          </a:p>
-        </p:txBody>
-      </p:sp>
-      <p:sp>
-        <p:nvSpPr>
-          <p:cNvPr id="3" name="take-0"/>
+              <a:rPr lang="en-US" sz="3200" b="1" dirty="0">
+                <a:solidFill>
+                  <a:schemeClr val="bg1"/>
+                </a:solidFill>
+              </a:rPr>
+              <a:t>Backup</a:t>
+            </a:r>
+            <a:endParaRPr lang="en-US" sz="3200" dirty="0"/>
+          </a:p>
+        </p:txBody>
+      </p:sp>
+      <p:sp>
+        <p:nvSpPr>
+          <p:cNvPr id="3" name="Text 0"/>
           <p:cNvSpPr/>
-          <p:nvPr/>
-        </p:nvSpPr>
-        <p:spPr>
-          <a:xfrm>
-            <a:off x="457200" y="1051560"/>
-            <a:ext cx="5760720" cy="512064"/>
-          </a:xfrm>
-          <a:prstGeom prst="roundRect">
-            <a:avLst>
-              <a:gd name="adj" fmla="val 14286"/>
-            </a:avLst>
-          </a:prstGeom>
-          <a:solidFill>
-            <a:schemeClr val="bg2"/>
-          </a:solidFill>
-          <a:ln w="12700">
-            <a:solidFill>
-              <a:schemeClr val="bg2"/>
-            </a:solidFill>
-            <a:prstDash val="solid"/>
-          </a:ln>
-        </p:spPr>
-      </p:sp>
-      <p:sp>
-        <p:nvSpPr>
-          <p:cNvPr id="4" name="chip"/>
-          <p:cNvSpPr/>
-          <p:nvPr/>
-        </p:nvSpPr>
-        <p:spPr>
-          <a:xfrm>
-            <a:off x="548640" y="1143000"/>
-            <a:ext cx="329184" cy="329184"/>
-          </a:xfrm>
-          <a:prstGeom prst="roundRect">
-            <a:avLst>
-              <a:gd name="adj" fmla="val 16667"/>
-            </a:avLst>
-          </a:prstGeom>
-          <a:solidFill>
-            <a:schemeClr val="accent1"/>
-          </a:solidFill>
-          <a:ln w="12700">
-            <a:solidFill>
-              <a:schemeClr val="accent1"/>
-            </a:solidFill>
-            <a:prstDash val="solid"/>
-          </a:ln>
-        </p:spPr>
-      </p:sp>
-      <p:sp>
-        <p:nvSpPr>
-          <p:cNvPr id="5" name="chip-label"/>
-          <p:cNvSpPr txBox="1"/>
-          <p:nvPr/>
-        </p:nvSpPr>
-        <p:spPr>
-          <a:xfrm>
-            <a:off x="548640" y="1143000"/>
-            <a:ext cx="329184" cy="329184"/>
-          </a:xfrm>
-          <a:prstGeom prst="rect">
-            <a:avLst/>
-          </a:prstGeom>
-          <a:noFill/>
-          <a:ln/>
-        </p:spPr>
-        <p:txBody>
-          <a:bodyPr wrap="square" lIns="0" tIns="0" rIns="0" bIns="0" rtlCol="0" anchor="ctr"/>
-          <a:lstStyle/>
-          <a:p>
-            <a:pPr algn="ctr" indent="0" marL="0">
-              <a:buNone/>
-            </a:pPr>
-            <a:r>
-              <a:rPr lang="en-US" sz="1100" b="1" dirty="0">
-                <a:solidFill>
-                  <a:schemeClr val="bg1"/>
-                </a:solidFill>
-                <a:latin typeface="Cambria" pitchFamily="34" charset="0"/>
-                <a:ea typeface="Cambria" pitchFamily="34" charset="-122"/>
-                <a:cs typeface="Cambria" pitchFamily="34" charset="-120"/>
-              </a:rPr>
-              <a:t>1</a:t>
-            </a:r>
-            <a:endParaRPr lang="en-US" sz="1100" dirty="0"/>
-          </a:p>
-        </p:txBody>
-      </p:sp>
-      <p:sp>
-        <p:nvSpPr>
-          <p:cNvPr id="6" name="take-head"/>
-          <p:cNvSpPr txBox="1"/>
-          <p:nvPr/>
-        </p:nvSpPr>
-        <p:spPr>
-          <a:xfrm>
-            <a:off x="987552" y="1088136"/>
-            <a:ext cx="1600200" cy="438912"/>
-          </a:xfrm>
-          <a:prstGeom prst="rect">
-            <a:avLst/>
-          </a:prstGeom>
-          <a:noFill/>
-          <a:ln/>
-        </p:spPr>
-        <p:txBody>
-          <a:bodyPr wrap="square" lIns="0" tIns="0" rIns="0" bIns="0" rtlCol="0" anchor="ctr"/>
+          <p:nvPr>
+            <p:ph idx="101" type="body" hasCustomPrompt="1"/>
+          </p:nvPr>
+        </p:nvSpPr>
+        <p:spPr>
+          <a:xfrm>
+            <a:off x="548640" y="2971800"/>
+            <a:ext cx="8046720" cy="731520"/>
+          </a:xfrm>
+          <a:prstGeom prst="rect">
+            <a:avLst/>
+          </a:prstGeom>
+          <a:noFill/>
+          <a:ln/>
+        </p:spPr>
+        <p:txBody>
+          <a:bodyPr wrap="square" lIns="0" tIns="0" rIns="0" bIns="0" rtlCol="0" anchor="t"/>
           <a:lstStyle/>
           <a:p>
             <a:pPr indent="0" marL="0">
               <a:buNone/>
             </a:pPr>
             <a:r>
-              <a:rPr lang="en-US" sz="1100" b="1" dirty="0">
-                <a:solidFill>
-                  <a:schemeClr val="tx2"/>
-                </a:solidFill>
-              </a:rPr>
-              <a:t>Sorting follows the news</a:t>
-            </a:r>
-            <a:endParaRPr lang="en-US" sz="1100" dirty="0"/>
-          </a:p>
-        </p:txBody>
-      </p:sp>
-      <p:sp>
-        <p:nvSpPr>
-          <p:cNvPr id="7" name="take-body"/>
-          <p:cNvSpPr txBox="1"/>
-          <p:nvPr/>
-        </p:nvSpPr>
-        <p:spPr>
-          <a:xfrm>
-            <a:off x="2651760" y="1088136"/>
-            <a:ext cx="3474720" cy="438912"/>
-          </a:xfrm>
-          <a:prstGeom prst="rect">
-            <a:avLst/>
-          </a:prstGeom>
-          <a:noFill/>
-          <a:ln/>
-        </p:spPr>
-        <p:txBody>
-          <a:bodyPr wrap="square" lIns="0" tIns="0" rIns="0" bIns="0" rtlCol="0" anchor="ctr"/>
-          <a:lstStyle/>
-          <a:p>
-            <a:pPr indent="0" marL="0">
-              <a:buNone/>
-            </a:pPr>
-            <a:r>
-              <a:rPr lang="en-US" sz="1000" dirty="0">
-                <a:solidFill>
-                  <a:schemeClr val="tx1"/>
-                </a:solidFill>
-              </a:rPr>
-              <a:t>Optimistic public news makes individualists run relatively more; pessimistic news, collectivists. 3 of 4 pre-registered tests pass, in all three bank versions.</a:t>
-            </a:r>
-            <a:endParaRPr lang="en-US" sz="1000" dirty="0"/>
-          </a:p>
-        </p:txBody>
-      </p:sp>
-      <p:sp>
-        <p:nvSpPr>
-          <p:cNvPr id="8" name="take-1"/>
-          <p:cNvSpPr/>
-          <p:nvPr/>
-        </p:nvSpPr>
-        <p:spPr>
-          <a:xfrm>
-            <a:off x="457200" y="1636776"/>
-            <a:ext cx="5760720" cy="512064"/>
-          </a:xfrm>
-          <a:prstGeom prst="roundRect">
-            <a:avLst>
-              <a:gd name="adj" fmla="val 14286"/>
-            </a:avLst>
-          </a:prstGeom>
-          <a:solidFill>
-            <a:schemeClr val="bg2"/>
-          </a:solidFill>
-          <a:ln w="12700">
-            <a:solidFill>
-              <a:schemeClr val="bg2"/>
-            </a:solidFill>
-            <a:prstDash val="solid"/>
-          </a:ln>
-        </p:spPr>
-      </p:sp>
-      <p:sp>
-        <p:nvSpPr>
-          <p:cNvPr id="9" name="chip"/>
-          <p:cNvSpPr/>
-          <p:nvPr/>
-        </p:nvSpPr>
-        <p:spPr>
-          <a:xfrm>
-            <a:off x="548640" y="1728216"/>
-            <a:ext cx="329184" cy="329184"/>
-          </a:xfrm>
-          <a:prstGeom prst="roundRect">
-            <a:avLst>
-              <a:gd name="adj" fmla="val 16667"/>
-            </a:avLst>
-          </a:prstGeom>
-          <a:solidFill>
-            <a:schemeClr val="accent1"/>
-          </a:solidFill>
-          <a:ln w="12700">
-            <a:solidFill>
-              <a:schemeClr val="accent1"/>
-            </a:solidFill>
-            <a:prstDash val="solid"/>
-          </a:ln>
-        </p:spPr>
-      </p:sp>
-      <p:sp>
-        <p:nvSpPr>
-          <p:cNvPr id="10" name="chip-label"/>
-          <p:cNvSpPr txBox="1"/>
-          <p:nvPr/>
-        </p:nvSpPr>
-        <p:spPr>
-          <a:xfrm>
-            <a:off x="548640" y="1728216"/>
-            <a:ext cx="329184" cy="329184"/>
-          </a:xfrm>
-          <a:prstGeom prst="rect">
-            <a:avLst/>
-          </a:prstGeom>
-          <a:noFill/>
-          <a:ln/>
-        </p:spPr>
-        <p:txBody>
-          <a:bodyPr wrap="square" lIns="0" tIns="0" rIns="0" bIns="0" rtlCol="0" anchor="ctr"/>
-          <a:lstStyle/>
-          <a:p>
-            <a:pPr algn="ctr" indent="0" marL="0">
-              <a:buNone/>
-            </a:pPr>
-            <a:r>
-              <a:rPr lang="en-US" sz="1100" b="1" dirty="0">
-                <a:solidFill>
-                  <a:schemeClr val="bg1"/>
-                </a:solidFill>
-                <a:latin typeface="Cambria" pitchFamily="34" charset="0"/>
-                <a:ea typeface="Cambria" pitchFamily="34" charset="-122"/>
-                <a:cs typeface="Cambria" pitchFamily="34" charset="-120"/>
-              </a:rPr>
-              <a:t>2</a:t>
-            </a:r>
-            <a:endParaRPr lang="en-US" sz="1100" dirty="0"/>
-          </a:p>
-        </p:txBody>
-      </p:sp>
-      <p:sp>
-        <p:nvSpPr>
-          <p:cNvPr id="11" name="take-head"/>
-          <p:cNvSpPr txBox="1"/>
-          <p:nvPr/>
-        </p:nvSpPr>
-        <p:spPr>
-          <a:xfrm>
-            <a:off x="987552" y="1673352"/>
-            <a:ext cx="1600200" cy="438912"/>
-          </a:xfrm>
-          <a:prstGeom prst="rect">
-            <a:avLst/>
-          </a:prstGeom>
-          <a:noFill/>
-          <a:ln/>
-        </p:spPr>
-        <p:txBody>
-          <a:bodyPr wrap="square" lIns="0" tIns="0" rIns="0" bIns="0" rtlCol="0" anchor="ctr"/>
-          <a:lstStyle/>
-          <a:p>
-            <a:pPr indent="0" marL="0">
-              <a:buNone/>
-            </a:pPr>
-            <a:r>
-              <a:rPr lang="en-US" sz="1100" b="1" dirty="0">
-                <a:solidFill>
-                  <a:schemeClr val="tx2"/>
-                </a:solidFill>
-              </a:rPr>
-              <a:t>Collectivists herd</a:t>
-            </a:r>
-            <a:endParaRPr lang="en-US" sz="1100" dirty="0"/>
-          </a:p>
-        </p:txBody>
-      </p:sp>
-      <p:sp>
-        <p:nvSpPr>
-          <p:cNvPr id="12" name="take-body"/>
-          <p:cNvSpPr txBox="1"/>
-          <p:nvPr/>
-        </p:nvSpPr>
-        <p:spPr>
-          <a:xfrm>
-            <a:off x="2651760" y="1673352"/>
-            <a:ext cx="3474720" cy="438912"/>
-          </a:xfrm>
-          <a:prstGeom prst="rect">
-            <a:avLst/>
-          </a:prstGeom>
-          <a:noFill/>
-          <a:ln/>
-        </p:spPr>
-        <p:txBody>
-          <a:bodyPr wrap="square" lIns="0" tIns="0" rIns="0" bIns="0" rtlCol="0" anchor="ctr"/>
-          <a:lstStyle/>
-          <a:p>
-            <a:pPr indent="0" marL="0">
-              <a:buNone/>
-            </a:pPr>
-            <a:r>
-              <a:rPr lang="en-US" sz="1000" dirty="0">
-                <a:solidFill>
-                  <a:schemeClr val="tx1"/>
-                </a:solidFill>
-              </a:rPr>
-              <a:t>Their chance of withdrawing jumps from 0.15 to 0.93 once 20–35% of neighbours are out; individualists level off near 0.3.</a:t>
-            </a:r>
-            <a:endParaRPr lang="en-US" sz="1000" dirty="0"/>
-          </a:p>
-        </p:txBody>
-      </p:sp>
-      <p:sp>
-        <p:nvSpPr>
-          <p:cNvPr id="13" name="take-2"/>
-          <p:cNvSpPr/>
-          <p:nvPr/>
-        </p:nvSpPr>
-        <p:spPr>
-          <a:xfrm>
-            <a:off x="457200" y="2221992"/>
-            <a:ext cx="5760720" cy="512064"/>
-          </a:xfrm>
-          <a:prstGeom prst="roundRect">
-            <a:avLst>
-              <a:gd name="adj" fmla="val 14286"/>
-            </a:avLst>
-          </a:prstGeom>
-          <a:solidFill>
-            <a:schemeClr val="bg2"/>
-          </a:solidFill>
-          <a:ln w="12700">
-            <a:solidFill>
-              <a:schemeClr val="bg2"/>
-            </a:solidFill>
-            <a:prstDash val="solid"/>
-          </a:ln>
-        </p:spPr>
-      </p:sp>
-      <p:sp>
-        <p:nvSpPr>
-          <p:cNvPr id="14" name="chip"/>
-          <p:cNvSpPr/>
-          <p:nvPr/>
-        </p:nvSpPr>
-        <p:spPr>
-          <a:xfrm>
-            <a:off x="548640" y="2313432"/>
-            <a:ext cx="329184" cy="329184"/>
-          </a:xfrm>
-          <a:prstGeom prst="roundRect">
-            <a:avLst>
-              <a:gd name="adj" fmla="val 16667"/>
-            </a:avLst>
-          </a:prstGeom>
-          <a:solidFill>
-            <a:schemeClr val="accent1"/>
-          </a:solidFill>
-          <a:ln w="12700">
-            <a:solidFill>
-              <a:schemeClr val="accent1"/>
-            </a:solidFill>
-            <a:prstDash val="solid"/>
-          </a:ln>
-        </p:spPr>
-      </p:sp>
-      <p:sp>
-        <p:nvSpPr>
-          <p:cNvPr id="15" name="chip-label"/>
-          <p:cNvSpPr txBox="1"/>
-          <p:nvPr/>
-        </p:nvSpPr>
-        <p:spPr>
-          <a:xfrm>
-            <a:off x="548640" y="2313432"/>
-            <a:ext cx="329184" cy="329184"/>
-          </a:xfrm>
-          <a:prstGeom prst="rect">
-            <a:avLst/>
-          </a:prstGeom>
-          <a:noFill/>
-          <a:ln/>
-        </p:spPr>
-        <p:txBody>
-          <a:bodyPr wrap="square" lIns="0" tIns="0" rIns="0" bIns="0" rtlCol="0" anchor="ctr"/>
-          <a:lstStyle/>
-          <a:p>
-            <a:pPr algn="ctr" indent="0" marL="0">
-              <a:buNone/>
-            </a:pPr>
-            <a:r>
-              <a:rPr lang="en-US" sz="1100" b="1" dirty="0">
-                <a:solidFill>
-                  <a:schemeClr val="bg1"/>
-                </a:solidFill>
-                <a:latin typeface="Cambria" pitchFamily="34" charset="0"/>
-                <a:ea typeface="Cambria" pitchFamily="34" charset="-122"/>
-                <a:cs typeface="Cambria" pitchFamily="34" charset="-120"/>
-              </a:rPr>
-              <a:t>3</a:t>
-            </a:r>
-            <a:endParaRPr lang="en-US" sz="1100" dirty="0"/>
-          </a:p>
-        </p:txBody>
-      </p:sp>
-      <p:sp>
-        <p:nvSpPr>
-          <p:cNvPr id="16" name="take-head"/>
-          <p:cNvSpPr txBox="1"/>
-          <p:nvPr/>
-        </p:nvSpPr>
-        <p:spPr>
-          <a:xfrm>
-            <a:off x="987552" y="2258568"/>
-            <a:ext cx="1600200" cy="438912"/>
-          </a:xfrm>
-          <a:prstGeom prst="rect">
-            <a:avLst/>
-          </a:prstGeom>
-          <a:noFill/>
-          <a:ln/>
-        </p:spPr>
-        <p:txBody>
-          <a:bodyPr wrap="square" lIns="0" tIns="0" rIns="0" bIns="0" rtlCol="0" anchor="ctr"/>
-          <a:lstStyle/>
-          <a:p>
-            <a:pPr indent="0" marL="0">
-              <a:buNone/>
-            </a:pPr>
-            <a:r>
-              <a:rPr lang="en-US" sz="1100" b="1" dirty="0">
-                <a:solidFill>
-                  <a:schemeClr val="tx2"/>
-                </a:solidFill>
-              </a:rPr>
-              <a:t>More individualists, fewer failures</a:t>
-            </a:r>
-            <a:endParaRPr lang="en-US" sz="1100" dirty="0"/>
-          </a:p>
-        </p:txBody>
-      </p:sp>
-      <p:sp>
-        <p:nvSpPr>
-          <p:cNvPr id="17" name="take-body"/>
-          <p:cNvSpPr txBox="1"/>
-          <p:nvPr/>
-        </p:nvSpPr>
-        <p:spPr>
-          <a:xfrm>
-            <a:off x="2651760" y="2258568"/>
-            <a:ext cx="3474720" cy="438912"/>
-          </a:xfrm>
-          <a:prstGeom prst="rect">
-            <a:avLst/>
-          </a:prstGeom>
-          <a:noFill/>
-          <a:ln/>
-        </p:spPr>
-        <p:txBody>
-          <a:bodyPr wrap="square" lIns="0" tIns="0" rIns="0" bIns="0" rtlCol="0" anchor="ctr"/>
-          <a:lstStyle/>
-          <a:p>
-            <a:pPr indent="0" marL="0">
-              <a:buNone/>
-            </a:pPr>
-            <a:r>
-              <a:rPr lang="en-US" sz="1000" dirty="0">
-                <a:solidFill>
-                  <a:schemeClr val="tx1"/>
-                </a:solidFill>
-              </a:rPr>
-              <a:t>P(fail) falls from 0.67 to 0.08 as the individualist share goes from 0 to 1. Monotone; no interior peak.</a:t>
-            </a:r>
-            <a:endParaRPr lang="en-US" sz="1000" dirty="0"/>
-          </a:p>
-        </p:txBody>
-      </p:sp>
-      <p:sp>
-        <p:nvSpPr>
-          <p:cNvPr id="18" name="take-3"/>
-          <p:cNvSpPr/>
-          <p:nvPr/>
-        </p:nvSpPr>
-        <p:spPr>
-          <a:xfrm>
-            <a:off x="457200" y="2807208"/>
-            <a:ext cx="5760720" cy="512064"/>
-          </a:xfrm>
-          <a:prstGeom prst="roundRect">
-            <a:avLst>
-              <a:gd name="adj" fmla="val 14286"/>
-            </a:avLst>
-          </a:prstGeom>
-          <a:solidFill>
-            <a:schemeClr val="bg2"/>
-          </a:solidFill>
-          <a:ln w="12700">
-            <a:solidFill>
-              <a:schemeClr val="bg2"/>
-            </a:solidFill>
-            <a:prstDash val="solid"/>
-          </a:ln>
-        </p:spPr>
-      </p:sp>
-      <p:sp>
-        <p:nvSpPr>
-          <p:cNvPr id="19" name="chip"/>
-          <p:cNvSpPr/>
-          <p:nvPr/>
-        </p:nvSpPr>
-        <p:spPr>
-          <a:xfrm>
-            <a:off x="548640" y="2898648"/>
-            <a:ext cx="329184" cy="329184"/>
-          </a:xfrm>
-          <a:prstGeom prst="roundRect">
-            <a:avLst>
-              <a:gd name="adj" fmla="val 16667"/>
-            </a:avLst>
-          </a:prstGeom>
-          <a:solidFill>
-            <a:schemeClr val="accent1"/>
-          </a:solidFill>
-          <a:ln w="12700">
-            <a:solidFill>
-              <a:schemeClr val="accent1"/>
-            </a:solidFill>
-            <a:prstDash val="solid"/>
-          </a:ln>
-        </p:spPr>
-      </p:sp>
-      <p:sp>
-        <p:nvSpPr>
-          <p:cNvPr id="20" name="chip-label"/>
-          <p:cNvSpPr txBox="1"/>
-          <p:nvPr/>
-        </p:nvSpPr>
-        <p:spPr>
-          <a:xfrm>
-            <a:off x="548640" y="2898648"/>
-            <a:ext cx="329184" cy="329184"/>
-          </a:xfrm>
-          <a:prstGeom prst="rect">
-            <a:avLst/>
-          </a:prstGeom>
-          <a:noFill/>
-          <a:ln/>
-        </p:spPr>
-        <p:txBody>
-          <a:bodyPr wrap="square" lIns="0" tIns="0" rIns="0" bIns="0" rtlCol="0" anchor="ctr"/>
-          <a:lstStyle/>
-          <a:p>
-            <a:pPr algn="ctr" indent="0" marL="0">
-              <a:buNone/>
-            </a:pPr>
-            <a:r>
-              <a:rPr lang="en-US" sz="1100" b="1" dirty="0">
-                <a:solidFill>
-                  <a:schemeClr val="bg1"/>
-                </a:solidFill>
-                <a:latin typeface="Cambria" pitchFamily="34" charset="0"/>
-                <a:ea typeface="Cambria" pitchFamily="34" charset="-122"/>
-                <a:cs typeface="Cambria" pitchFamily="34" charset="-120"/>
-              </a:rPr>
-              <a:t>4</a:t>
-            </a:r>
-            <a:endParaRPr lang="en-US" sz="1100" dirty="0"/>
-          </a:p>
-        </p:txBody>
-      </p:sp>
-      <p:sp>
-        <p:nvSpPr>
-          <p:cNvPr id="21" name="take-head"/>
-          <p:cNvSpPr txBox="1"/>
-          <p:nvPr/>
-        </p:nvSpPr>
-        <p:spPr>
-          <a:xfrm>
-            <a:off x="987552" y="2843784"/>
-            <a:ext cx="1600200" cy="438912"/>
-          </a:xfrm>
-          <a:prstGeom prst="rect">
-            <a:avLst/>
-          </a:prstGeom>
-          <a:noFill/>
-          <a:ln/>
-        </p:spPr>
-        <p:txBody>
-          <a:bodyPr wrap="square" lIns="0" tIns="0" rIns="0" bIns="0" rtlCol="0" anchor="ctr"/>
-          <a:lstStyle/>
-          <a:p>
-            <a:pPr indent="0" marL="0">
-              <a:buNone/>
-            </a:pPr>
-            <a:r>
-              <a:rPr lang="en-US" sz="1100" b="1" dirty="0">
-                <a:solidFill>
-                  <a:schemeClr val="tx2"/>
-                </a:solidFill>
-              </a:rPr>
-              <a:t>Stale news cuts both ways</a:t>
-            </a:r>
-            <a:endParaRPr lang="en-US" sz="1100" dirty="0"/>
-          </a:p>
-        </p:txBody>
-      </p:sp>
-      <p:sp>
-        <p:nvSpPr>
-          <p:cNvPr id="22" name="take-body"/>
-          <p:cNvSpPr txBox="1"/>
-          <p:nvPr/>
-        </p:nvSpPr>
-        <p:spPr>
-          <a:xfrm>
-            <a:off x="2651760" y="2843784"/>
-            <a:ext cx="3474720" cy="438912"/>
-          </a:xfrm>
-          <a:prstGeom prst="rect">
-            <a:avLst/>
-          </a:prstGeom>
-          <a:noFill/>
-          <a:ln/>
-        </p:spPr>
-        <p:txBody>
-          <a:bodyPr wrap="square" lIns="0" tIns="0" rIns="0" bIns="0" rtlCol="0" anchor="ctr"/>
-          <a:lstStyle/>
-          <a:p>
-            <a:pPr indent="0" marL="0">
-              <a:buNone/>
-            </a:pPr>
-            <a:r>
-              <a:rPr lang="en-US" sz="1000" dirty="0">
-                <a:solidFill>
-                  <a:schemeClr val="tx1"/>
-                </a:solidFill>
-              </a:rPr>
-              <a:t>A stale optimistic signal halves failure, a stale pessimistic one raises it by half. Accurate news barely moves it.</a:t>
-            </a:r>
-            <a:endParaRPr lang="en-US" sz="1000" dirty="0"/>
-          </a:p>
-        </p:txBody>
-      </p:sp>
-      <p:sp>
-        <p:nvSpPr>
-          <p:cNvPr id="23" name="take-4"/>
-          <p:cNvSpPr/>
-          <p:nvPr/>
-        </p:nvSpPr>
-        <p:spPr>
-          <a:xfrm>
-            <a:off x="457200" y="3392424"/>
-            <a:ext cx="5760720" cy="512064"/>
-          </a:xfrm>
-          <a:prstGeom prst="roundRect">
-            <a:avLst>
-              <a:gd name="adj" fmla="val 14286"/>
-            </a:avLst>
-          </a:prstGeom>
-          <a:solidFill>
-            <a:schemeClr val="bg2"/>
-          </a:solidFill>
-          <a:ln w="12700">
-            <a:solidFill>
-              <a:schemeClr val="bg2"/>
-            </a:solidFill>
-            <a:prstDash val="solid"/>
-          </a:ln>
-        </p:spPr>
-      </p:sp>
-      <p:sp>
-        <p:nvSpPr>
-          <p:cNvPr id="24" name="chip"/>
-          <p:cNvSpPr/>
-          <p:nvPr/>
-        </p:nvSpPr>
-        <p:spPr>
-          <a:xfrm>
-            <a:off x="548640" y="3483864"/>
-            <a:ext cx="329184" cy="329184"/>
-          </a:xfrm>
-          <a:prstGeom prst="roundRect">
-            <a:avLst>
-              <a:gd name="adj" fmla="val 16667"/>
-            </a:avLst>
-          </a:prstGeom>
-          <a:solidFill>
-            <a:schemeClr val="accent1"/>
-          </a:solidFill>
-          <a:ln w="12700">
-            <a:solidFill>
-              <a:schemeClr val="accent1"/>
-            </a:solidFill>
-            <a:prstDash val="solid"/>
-          </a:ln>
-        </p:spPr>
-      </p:sp>
-      <p:sp>
-        <p:nvSpPr>
-          <p:cNvPr id="25" name="chip-label"/>
-          <p:cNvSpPr txBox="1"/>
-          <p:nvPr/>
-        </p:nvSpPr>
-        <p:spPr>
-          <a:xfrm>
-            <a:off x="548640" y="3483864"/>
-            <a:ext cx="329184" cy="329184"/>
-          </a:xfrm>
-          <a:prstGeom prst="rect">
-            <a:avLst/>
-          </a:prstGeom>
-          <a:noFill/>
-          <a:ln/>
-        </p:spPr>
-        <p:txBody>
-          <a:bodyPr wrap="square" lIns="0" tIns="0" rIns="0" bIns="0" rtlCol="0" anchor="ctr"/>
-          <a:lstStyle/>
-          <a:p>
-            <a:pPr algn="ctr" indent="0" marL="0">
-              <a:buNone/>
-            </a:pPr>
-            <a:r>
-              <a:rPr lang="en-US" sz="1100" b="1" dirty="0">
-                <a:solidFill>
-                  <a:schemeClr val="bg1"/>
-                </a:solidFill>
-                <a:latin typeface="Cambria" pitchFamily="34" charset="0"/>
-                <a:ea typeface="Cambria" pitchFamily="34" charset="-122"/>
-                <a:cs typeface="Cambria" pitchFamily="34" charset="-120"/>
-              </a:rPr>
-              <a:t>5</a:t>
-            </a:r>
-            <a:endParaRPr lang="en-US" sz="1100" dirty="0"/>
-          </a:p>
-        </p:txBody>
-      </p:sp>
-      <p:sp>
-        <p:nvSpPr>
-          <p:cNvPr id="26" name="take-head"/>
-          <p:cNvSpPr txBox="1"/>
-          <p:nvPr/>
-        </p:nvSpPr>
-        <p:spPr>
-          <a:xfrm>
-            <a:off x="987552" y="3429000"/>
-            <a:ext cx="1600200" cy="438912"/>
-          </a:xfrm>
-          <a:prstGeom prst="rect">
-            <a:avLst/>
-          </a:prstGeom>
-          <a:noFill/>
-          <a:ln/>
-        </p:spPr>
-        <p:txBody>
-          <a:bodyPr wrap="square" lIns="0" tIns="0" rIns="0" bIns="0" rtlCol="0" anchor="ctr"/>
-          <a:lstStyle/>
-          <a:p>
-            <a:pPr indent="0" marL="0">
-              <a:buNone/>
-            </a:pPr>
-            <a:r>
-              <a:rPr lang="en-US" sz="1100" b="1" dirty="0">
-                <a:solidFill>
-                  <a:schemeClr val="tx2"/>
-                </a:solidFill>
-              </a:rPr>
-              <a:t>Capping the largest deposits</a:t>
-            </a:r>
-            <a:endParaRPr lang="en-US" sz="1100" dirty="0"/>
-          </a:p>
-        </p:txBody>
-      </p:sp>
-      <p:sp>
-        <p:nvSpPr>
-          <p:cNvPr id="27" name="take-body"/>
-          <p:cNvSpPr txBox="1"/>
-          <p:nvPr/>
-        </p:nvSpPr>
-        <p:spPr>
-          <a:xfrm>
-            <a:off x="2651760" y="3429000"/>
-            <a:ext cx="3474720" cy="438912"/>
-          </a:xfrm>
-          <a:prstGeom prst="rect">
-            <a:avLst/>
-          </a:prstGeom>
-          <a:noFill/>
-          <a:ln/>
-        </p:spPr>
-        <p:txBody>
-          <a:bodyPr wrap="square" lIns="0" tIns="0" rIns="0" bIns="0" rtlCol="0" anchor="ctr"/>
-          <a:lstStyle/>
-          <a:p>
-            <a:pPr indent="0" marL="0">
-              <a:buNone/>
-            </a:pPr>
-            <a:r>
-              <a:rPr lang="en-US" sz="1000" dirty="0">
-                <a:solidFill>
-                  <a:schemeClr val="tx1"/>
-                </a:solidFill>
-              </a:rPr>
-              <a:t>A 1% cap brings failure down to the no-concentration bank’s level; the culture gradient is unchanged.</a:t>
-            </a:r>
-            <a:endParaRPr lang="en-US" sz="1000" dirty="0"/>
-          </a:p>
-        </p:txBody>
-      </p:sp>
-      <p:sp>
-        <p:nvSpPr>
-          <p:cNvPr id="28" name="take-5"/>
-          <p:cNvSpPr/>
-          <p:nvPr/>
-        </p:nvSpPr>
-        <p:spPr>
-          <a:xfrm>
-            <a:off x="457200" y="3977640"/>
-            <a:ext cx="5760720" cy="512064"/>
-          </a:xfrm>
-          <a:prstGeom prst="roundRect">
-            <a:avLst>
-              <a:gd name="adj" fmla="val 14286"/>
-            </a:avLst>
-          </a:prstGeom>
-          <a:solidFill>
-            <a:schemeClr val="accent4"/>
-          </a:solidFill>
-          <a:ln w="12700">
-            <a:solidFill>
-              <a:schemeClr val="accent4"/>
-            </a:solidFill>
-            <a:prstDash val="solid"/>
-          </a:ln>
-        </p:spPr>
-      </p:sp>
-      <p:sp>
-        <p:nvSpPr>
-          <p:cNvPr id="29" name="chip"/>
-          <p:cNvSpPr/>
-          <p:nvPr/>
-        </p:nvSpPr>
-        <p:spPr>
-          <a:xfrm>
-            <a:off x="548640" y="4069080"/>
-            <a:ext cx="329184" cy="329184"/>
-          </a:xfrm>
-          <a:prstGeom prst="roundRect">
-            <a:avLst>
-              <a:gd name="adj" fmla="val 16667"/>
-            </a:avLst>
-          </a:prstGeom>
-          <a:solidFill>
-            <a:schemeClr val="accent2"/>
-          </a:solidFill>
-          <a:ln w="12700">
-            <a:solidFill>
-              <a:schemeClr val="accent2"/>
-            </a:solidFill>
-            <a:prstDash val="solid"/>
-          </a:ln>
-        </p:spPr>
-      </p:sp>
-      <p:sp>
-        <p:nvSpPr>
-          <p:cNvPr id="30" name="chip-label"/>
-          <p:cNvSpPr txBox="1"/>
-          <p:nvPr/>
-        </p:nvSpPr>
-        <p:spPr>
-          <a:xfrm>
-            <a:off x="548640" y="4069080"/>
-            <a:ext cx="329184" cy="329184"/>
-          </a:xfrm>
-          <a:prstGeom prst="rect">
-            <a:avLst/>
-          </a:prstGeom>
-          <a:noFill/>
-          <a:ln/>
-        </p:spPr>
-        <p:txBody>
-          <a:bodyPr wrap="square" lIns="0" tIns="0" rIns="0" bIns="0" rtlCol="0" anchor="ctr"/>
-          <a:lstStyle/>
-          <a:p>
-            <a:pPr algn="ctr" indent="0" marL="0">
-              <a:buNone/>
-            </a:pPr>
-            <a:r>
-              <a:rPr lang="en-US" sz="1100" b="1" dirty="0">
-                <a:solidFill>
-                  <a:schemeClr val="bg1"/>
-                </a:solidFill>
-                <a:latin typeface="Cambria" pitchFamily="34" charset="0"/>
-                <a:ea typeface="Cambria" pitchFamily="34" charset="-122"/>
-                <a:cs typeface="Cambria" pitchFamily="34" charset="-120"/>
-              </a:rPr>
-              <a:t>6</a:t>
-            </a:r>
-            <a:endParaRPr lang="en-US" sz="1100" dirty="0"/>
-          </a:p>
-        </p:txBody>
-      </p:sp>
-      <p:sp>
-        <p:nvSpPr>
-          <p:cNvPr id="31" name="take-head"/>
-          <p:cNvSpPr txBox="1"/>
-          <p:nvPr/>
-        </p:nvSpPr>
-        <p:spPr>
-          <a:xfrm>
-            <a:off x="987552" y="4014216"/>
-            <a:ext cx="1600200" cy="438912"/>
-          </a:xfrm>
-          <a:prstGeom prst="rect">
-            <a:avLst/>
-          </a:prstGeom>
-          <a:noFill/>
-          <a:ln/>
-        </p:spPr>
-        <p:txBody>
-          <a:bodyPr wrap="square" lIns="0" tIns="0" rIns="0" bIns="0" rtlCol="0" anchor="ctr"/>
-          <a:lstStyle/>
-          <a:p>
-            <a:pPr indent="0" marL="0">
-              <a:buNone/>
-            </a:pPr>
-            <a:r>
-              <a:rPr lang="en-US" sz="1100" b="1" dirty="0">
-                <a:solidFill>
-                  <a:schemeClr val="tx2"/>
-                </a:solidFill>
-              </a:rPr>
-              <a:t>Not yet matched</a:t>
-            </a:r>
-            <a:endParaRPr lang="en-US" sz="1100" dirty="0"/>
-          </a:p>
-        </p:txBody>
-      </p:sp>
-      <p:sp>
-        <p:nvSpPr>
-          <p:cNvPr id="32" name="take-body"/>
-          <p:cNvSpPr txBox="1"/>
-          <p:nvPr/>
-        </p:nvSpPr>
-        <p:spPr>
-          <a:xfrm>
-            <a:off x="2651760" y="4014216"/>
-            <a:ext cx="3474720" cy="438912"/>
-          </a:xfrm>
-          <a:prstGeom prst="rect">
-            <a:avLst/>
-          </a:prstGeom>
-          <a:noFill/>
-          <a:ln/>
-        </p:spPr>
-        <p:txBody>
-          <a:bodyPr wrap="square" lIns="0" tIns="0" rIns="0" bIns="0" rtlCol="0" anchor="ctr"/>
-          <a:lstStyle/>
-          <a:p>
-            <a:pPr indent="0" marL="0">
-              <a:buNone/>
-            </a:pPr>
-            <a:r>
-              <a:rPr lang="en-US" sz="1000" dirty="0">
-                <a:solidFill>
-                  <a:schemeClr val="tx1"/>
-                </a:solidFill>
-              </a:rPr>
-              <a:t>How Celsius’s largest depositors exit: one-shot share 0.35 there, 0.93 or more in the model.</a:t>
-            </a:r>
-            <a:endParaRPr lang="en-US" sz="1000" dirty="0"/>
-          </a:p>
-        </p:txBody>
-      </p:sp>
-      <p:sp>
-        <p:nvSpPr>
-          <p:cNvPr id="33" name="next"/>
-          <p:cNvSpPr/>
-          <p:nvPr/>
-        </p:nvSpPr>
-        <p:spPr>
-          <a:xfrm>
-            <a:off x="6400800" y="1051560"/>
-            <a:ext cx="2286000" cy="3438144"/>
-          </a:xfrm>
-          <a:prstGeom prst="roundRect">
-            <a:avLst>
-              <a:gd name="adj" fmla="val 3200"/>
-            </a:avLst>
-          </a:prstGeom>
-          <a:solidFill>
-            <a:schemeClr val="bg2"/>
-          </a:solidFill>
-          <a:ln w="12700">
-            <a:solidFill>
-              <a:schemeClr val="bg2"/>
-            </a:solidFill>
-            <a:prstDash val="solid"/>
-          </a:ln>
-        </p:spPr>
-      </p:sp>
-      <p:sp>
-        <p:nvSpPr>
-          <p:cNvPr id="34" name="next-head"/>
-          <p:cNvSpPr txBox="1"/>
-          <p:nvPr/>
-        </p:nvSpPr>
-        <p:spPr>
-          <a:xfrm>
-            <a:off x="6537960" y="1143000"/>
-            <a:ext cx="2011680" cy="320040"/>
-          </a:xfrm>
-          <a:prstGeom prst="rect">
-            <a:avLst/>
-          </a:prstGeom>
-          <a:noFill/>
-          <a:ln/>
-        </p:spPr>
-        <p:txBody>
-          <a:bodyPr wrap="square" lIns="0" tIns="0" rIns="0" bIns="0" rtlCol="0" anchor="ctr"/>
-          <a:lstStyle/>
-          <a:p>
-            <a:pPr indent="0" marL="0">
-              <a:buNone/>
-            </a:pPr>
-            <a:r>
-              <a:rPr lang="en-US" sz="1300" b="1" dirty="0">
-                <a:solidFill>
-                  <a:schemeClr val="tx2"/>
-                </a:solidFill>
-              </a:rPr>
-              <a:t>Next steps</a:t>
-            </a:r>
-            <a:endParaRPr lang="en-US" sz="1300" dirty="0"/>
-          </a:p>
-        </p:txBody>
-      </p:sp>
-      <p:sp>
-        <p:nvSpPr>
-          <p:cNvPr id="35" name="bullets"/>
-          <p:cNvSpPr txBox="1"/>
-          <p:nvPr/>
-        </p:nvSpPr>
-        <p:spPr>
-          <a:xfrm>
-            <a:off x="6537960" y="1508760"/>
-            <a:ext cx="2011680" cy="2926080"/>
-          </a:xfrm>
-          <a:prstGeom prst="rect">
-            <a:avLst/>
-          </a:prstGeom>
-          <a:noFill/>
-          <a:ln/>
-        </p:spPr>
-        <p:txBody>
-          <a:bodyPr wrap="square" lIns="0" tIns="0" rIns="0" bIns="0" rtlCol="0" anchor="t"/>
-          <a:lstStyle/>
-          <a:p>
-            <a:pPr marL="177800" indent="-177800">
-              <a:spcAft>
-                <a:spcPts val="700"/>
-              </a:spcAft>
-              <a:buSzPct val="100000"/>
-              <a:buChar char="•"/>
-            </a:pPr>
-            <a:r>
-              <a:rPr lang="en-US" sz="1100" dirty="0">
-                <a:solidFill>
-                  <a:schemeClr val="tx1"/>
-                </a:solidFill>
-              </a:rPr>
-              <a:t>Super-individuals, to match how the largest depositors exited Celsius</a:t>
-            </a:r>
-            <a:endParaRPr lang="en-US" sz="1100" dirty="0"/>
-          </a:p>
-          <a:p>
-            <a:pPr marL="177800" indent="-177800">
-              <a:spcAft>
-                <a:spcPts val="700"/>
-              </a:spcAft>
-              <a:buSzPct val="100000"/>
-              <a:buChar char="•"/>
-            </a:pPr>
-            <a:r>
-              <a:rPr lang="en-US" sz="1100" dirty="0">
-                <a:solidFill>
-                  <a:schemeClr val="tx1"/>
-                </a:solidFill>
-              </a:rPr>
-              <a:t>Deposit insurance and the reserve ratio on the fire-sale bank</a:t>
-            </a:r>
-            <a:endParaRPr lang="en-US" sz="1100" dirty="0"/>
-          </a:p>
-          <a:p>
-            <a:pPr marL="177800" indent="-177800">
-              <a:spcAft>
-                <a:spcPts val="700"/>
-              </a:spcAft>
-              <a:buSzPct val="100000"/>
-              <a:buChar char="•"/>
-            </a:pPr>
-            <a:r>
-              <a:rPr lang="en-US" sz="1100" dirty="0">
-                <a:solidFill>
-                  <a:schemeClr val="tx1"/>
-                </a:solidFill>
-              </a:rPr>
-              <a:t>Network topology and learning</a:t>
-            </a:r>
-            <a:endParaRPr lang="en-US" sz="1100" dirty="0"/>
-          </a:p>
-          <a:p>
-            <a:pPr marL="177800" indent="-177800">
-              <a:spcAft>
-                <a:spcPts val="700"/>
-              </a:spcAft>
-              <a:buSzPct val="100000"/>
-              <a:buChar char="•"/>
-            </a:pPr>
-            <a:r>
-              <a:rPr lang="en-US" sz="1100" dirty="0">
-                <a:solidFill>
-                  <a:schemeClr val="tx1"/>
-                </a:solidFill>
-              </a:rPr>
-              <a:t>Full sweep: stale public signal plus no-signal baseline, CARA 0.1, σ reported</a:t>
-            </a:r>
-            <a:endParaRPr lang="en-US" sz="1100" dirty="0"/>
-          </a:p>
-        </p:txBody>
-      </p:sp>
-      <p:sp>
-        <p:nvSpPr>
-          <p:cNvPr id="25" name="Slide Number Placeholder 0"/>
-          <p:cNvSpPr>
-            <a:spLocks noGrp="1"/>
-          </p:cNvSpPr>
-          <p:nvPr>
-            <p:ph type="sldNum" sz="quarter" idx="4294967295"/>
-          </p:nvPr>
-        </p:nvSpPr>
-        <p:spPr>
-          <a:xfrm>
-            <a:off x="8321040" y="4754880"/>
-            <a:ext cx="457200" cy="274320"/>
-          </a:xfrm>
-          <a:prstGeom prst="rect">
-            <a:avLst/>
-          </a:prstGeom>
-          <a:extLst>
-            <a:ext uri="{C572A759-6A51-4108-AA02-DFA0A04FC94B}">
-              <ma14:wrappingTextBoxFlag xmlns:ma14="http://schemas.microsoft.com/office/mac/drawingml/2011/main" val="0"/>
-            </a:ext>
-          </a:extLst>
-        </p:spPr>
-        <p:txBody>
-          <a:bodyPr/>
-          <a:lstStyle>
-            <a:lvl1pPr>
-              <a:defRPr sz="900">
-                <a:solidFill>
-                  <a:srgbClr val="6B7280"/>
-                </a:solidFill>
-              </a:defRPr>
-            </a:lvl1pPr>
-          </a:lstStyle>
-          <a:p>
-            <a:pPr algn="r"/>
-            <a:fld id="{F7021451-1387-4CA6-816F-3879F97B5CBC}" type="slidenum">
-              <a:rPr b="0" lang="en-US"/>
-              <a:t>15</a:t>
-            </a:fld>
-            <a:endParaRPr lang="en-US"/>
+              <a:rPr lang="en-US" sz="1600" dirty="0">
+                <a:solidFill>
+                  <a:schemeClr val="accent4"/>
+                </a:solidFill>
+              </a:rPr>
+              <a:t>Technical versions of the exhibits, the pre-registered tests, channels, and the Celsius docking gap.</a:t>
+            </a:r>
+            <a:endParaRPr lang="en-US" sz="1600" dirty="0"/>
           </a:p>
         </p:txBody>
       </p:sp>
@@ -6884,8 +6421,8 @@
         </p:nvSpPr>
         <p:spPr>
           <a:xfrm>
-            <a:off x="548640" y="1828800"/>
-            <a:ext cx="8046720" cy="1097280"/>
+            <a:off x="457200" y="274320"/>
+            <a:ext cx="8229600" cy="685800"/>
           </a:xfrm>
           <a:prstGeom prst="rect">
             <a:avLst/>
@@ -6901,52 +6438,119 @@
               <a:buNone/>
             </a:pPr>
             <a:r>
-              <a:rPr lang="en-US" sz="3200" b="1" dirty="0">
-                <a:solidFill>
-                  <a:schemeClr val="bg1"/>
-                </a:solidFill>
-              </a:rPr>
-              <a:t>Backup</a:t>
-            </a:r>
-            <a:endParaRPr lang="en-US" sz="3200" dirty="0"/>
-          </a:p>
-        </p:txBody>
-      </p:sp>
-      <p:sp>
-        <p:nvSpPr>
-          <p:cNvPr id="3" name="Text 0"/>
-          <p:cNvSpPr/>
-          <p:nvPr>
-            <p:ph idx="101" type="body" hasCustomPrompt="1"/>
-          </p:nvPr>
-        </p:nvSpPr>
-        <p:spPr>
-          <a:xfrm>
-            <a:off x="548640" y="2971800"/>
-            <a:ext cx="8046720" cy="731520"/>
-          </a:xfrm>
-          <a:prstGeom prst="rect">
-            <a:avLst/>
-          </a:prstGeom>
-          <a:noFill/>
-          <a:ln/>
-        </p:spPr>
-        <p:txBody>
-          <a:bodyPr wrap="square" lIns="0" tIns="0" rIns="0" bIns="0" rtlCol="0" anchor="t"/>
+              <a:rPr lang="en-US" sz="2400" b="1" dirty="0">
+                <a:solidFill>
+                  <a:schemeClr val="tx2"/>
+                </a:solidFill>
+              </a:rPr>
+              <a:t>Who withdraws, by type and mix</a:t>
+            </a:r>
+            <a:endParaRPr lang="en-US" sz="2400" dirty="0"/>
+          </a:p>
+        </p:txBody>
+      </p:sp>
+      <p:pic>
+        <p:nvPicPr>
+          <p:cNvPr id="3" name="e06" descr="Share who withdraw by individualist share, three panels by lambda pair: collectivists above individualists at every mixed share for the two wide gaps.">    </p:cNvPr>
+          <p:cNvPicPr>
+            <a:picLocks noChangeAspect="1"/>
+          </p:cNvPicPr>
+          <p:nvPr/>
+        </p:nvPicPr>
+        <p:blipFill>
+          <a:blip r:embed="rId1"/>
+          <a:stretch>
+            <a:fillRect/>
+          </a:stretch>
+        </p:blipFill>
+        <p:spPr>
+          <a:xfrm>
+            <a:off x="512064" y="1051560"/>
+            <a:ext cx="8119872" cy="3383280"/>
+          </a:xfrm>
+          <a:prstGeom prst="rect">
+            <a:avLst/>
+          </a:prstGeom>
+        </p:spPr>
+      </p:pic>
+      <p:sp>
+        <p:nvSpPr>
+          <p:cNvPr id="4" name="caption"/>
+          <p:cNvSpPr txBox="1"/>
+          <p:nvPr/>
+        </p:nvSpPr>
+        <p:spPr>
+          <a:xfrm>
+            <a:off x="457200" y="4480560"/>
+            <a:ext cx="8229600" cy="274320"/>
+          </a:xfrm>
+          <a:prstGeom prst="rect">
+            <a:avLst/>
+          </a:prstGeom>
+          <a:noFill/>
+          <a:ln/>
+        </p:spPr>
+        <p:txBody>
+          <a:bodyPr wrap="square" lIns="0" tIns="0" rIns="0" bIns="0" rtlCol="0" anchor="ctr"/>
           <a:lstStyle/>
           <a:p>
             <a:pPr indent="0" marL="0">
               <a:buNone/>
             </a:pPr>
             <a:r>
-              <a:rPr lang="en-US" sz="1600" dirty="0">
-                <a:solidFill>
-                  <a:schemeClr val="accent4"/>
-                </a:solidFill>
-              </a:rPr>
-              <a:t>Technical versions of the exhibits, the pre-registered tests, channels, and the Celsius docking gap.</a:t>
-            </a:r>
-            <a:endParaRPr lang="en-US" sz="1600" dirty="0"/>
+              <a:rPr lang="en-US" sz="1000" i="1" dirty="0">
+                <a:solidFill>
+                  <a:schemeClr val="accent3"/>
+                </a:solidFill>
+              </a:rPr>
+              <a:t>Share who withdraw by individualist share μ, one panel per λ pair; orange individualists, blue collectivists, with CIs.</a:t>
+            </a:r>
+            <a:endParaRPr lang="en-US" sz="1000" dirty="0"/>
+          </a:p>
+        </p:txBody>
+      </p:sp>
+      <p:sp>
+        <p:nvSpPr>
+          <p:cNvPr id="25" name="Slide Number Placeholder 0"/>
+          <p:cNvSpPr>
+            <a:spLocks noGrp="1"/>
+          </p:cNvSpPr>
+          <p:nvPr>
+            <p:ph type="sldNum" sz="quarter" idx="4294967295"/>
+          </p:nvPr>
+        </p:nvSpPr>
+        <p:spPr>
+          <a:xfrm>
+            <a:off x="8321040" y="4754880"/>
+            <a:ext cx="457200" cy="274320"/>
+          </a:xfrm>
+          <a:prstGeom prst="rect">
+            <a:avLst/>
+          </a:prstGeom>
+          <a:extLst>
+            <a:ext uri="{C572A759-6A51-4108-AA02-DFA0A04FC94B}">
+              <ma14:wrappingTextBoxFlag xmlns:ma14="http://schemas.microsoft.com/office/mac/drawingml/2011/main" val="0"/>
+            </a:ext>
+          </a:extLst>
+        </p:spPr>
+        <p:txBody>
+          <a:bodyPr/>
+          <a:lstStyle>
+            <a:lvl1pPr>
+              <a:defRPr sz="900">
+                <a:solidFill>
+                  <a:srgbClr val="6B7280"/>
+                </a:solidFill>
+              </a:defRPr>
+            </a:lvl1pPr>
+          </a:lstStyle>
+          <a:p>
+            <a:pPr algn="r"/>
+            <a:fld id="{F7021451-1387-4CA6-816F-3879F97B5CBC}" type="slidenum">
+              <a:rPr b="0" lang="en-US"/>
+              <a:t>16</a:t>
+            </a:fld>
+            <a:endParaRPr lang="en-US"/>
           </a:p>
         </p:txBody>
       </p:sp>
@@ -7007,7 +6611,7 @@
                   <a:schemeClr val="tx2"/>
                 </a:solidFill>
               </a:rPr>
-              <a:t>Who withdraws, by type and mix</a:t>
+              <a:t>The pre-registered tests, three versions of the bank</a:t>
             </a:r>
             <a:endParaRPr lang="en-US" sz="2400" dirty="0"/>
           </a:p>
@@ -7015,7 +6619,7 @@
       </p:sp>
       <p:pic>
         <p:nvPicPr>
-          <p:cNvPr id="3" name="e06" descr="Share who withdraw by individualist share, three panels by lambda pair: collectivists above individualists at every mixed share for the two wide gaps.">    </p:cNvPr>
+          <p:cNvPr id="3" name="e03" descr="Forest plot of five tests (G1', G4', G2a', G3, G3c) across three bank versions with pooled estimates and per-pair markers.">    </p:cNvPr>
           <p:cNvPicPr>
             <a:picLocks noChangeAspect="1"/>
           </p:cNvPicPr>
@@ -7029,8 +6633,8 @@
         </p:blipFill>
         <p:spPr>
           <a:xfrm>
-            <a:off x="512064" y="1051560"/>
-            <a:ext cx="8119872" cy="3383280"/>
+            <a:off x="882533" y="1051560"/>
+            <a:ext cx="7378934" cy="3383280"/>
           </a:xfrm>
           <a:prstGeom prst="rect">
             <a:avLst/>
@@ -7067,7 +6671,7 @@
                   <a:schemeClr val="accent3"/>
                 </a:solidFill>
               </a:rPr>
-              <a:t>Share who withdraw by individualist share μ, one panel per λ pair; orange individualists, blue collectivists, with CIs.</a:t>
+              <a:t>G1′, G4′, G2a′, G3 and G3c (post hoc). Rows: risk-neutral all-or-nothing, CARA partial, capped reference bank. Filled dot: pooled; hollow: each λ pair. Shaded: the theory’s predicted sign.</a:t>
             </a:r>
             <a:endParaRPr lang="en-US" sz="1000" dirty="0"/>
           </a:p>
@@ -7175,7 +6779,7 @@
                   <a:schemeClr val="tx2"/>
                 </a:solidFill>
               </a:rPr>
-              <a:t>The pre-registered tests, three versions of the bank</a:t>
+              <a:t>Which channel carries culture</a:t>
             </a:r>
             <a:endParaRPr lang="en-US" sz="2400" dirty="0"/>
           </a:p>
@@ -7183,7 +6787,7 @@
       </p:sp>
       <p:pic>
         <p:nvPicPr>
-          <p:cNvPr id="3" name="e03" descr="Forest plot of five tests (G1', G4', G2a', G3, G3c) across three bank versions with pooled estimates and per-pair markers.">    </p:cNvPr>
+          <p:cNvPr id="3" name="e09" descr="Who runs in failed runs with optimistic news when lambda applies only to the neighbour blend, only to the news blend, or both: positive, negative, small positive.">    </p:cNvPr>
           <p:cNvPicPr>
             <a:picLocks noChangeAspect="1"/>
           </p:cNvPicPr>
@@ -7197,8 +6801,8 @@
         </p:blipFill>
         <p:spPr>
           <a:xfrm>
-            <a:off x="882533" y="1051560"/>
-            <a:ext cx="7378934" cy="3383280"/>
+            <a:off x="1547348" y="1051560"/>
+            <a:ext cx="6049305" cy="3383280"/>
           </a:xfrm>
           <a:prstGeom prst="rect">
             <a:avLst/>
@@ -7235,7 +6839,7 @@
                   <a:schemeClr val="accent3"/>
                 </a:solidFill>
               </a:rPr>
-              <a:t>G1′, G4′, G2a′, G3 and G3c (post hoc). Rows: risk-neutral all-or-nothing, CARA partial, capped reference bank. Filled dot: pooled; hollow: each λ pair. Shaded: the theory’s predicted sign.</a:t>
+              <a:t>D in failed runs with optimistic news, when λ weights only the neighbour blend, only the news blend, or both (the model). θ-blend only +0.14; head-count only −0.07; both +0.02.</a:t>
             </a:r>
             <a:endParaRPr lang="en-US" sz="1000" dirty="0"/>
           </a:p>
@@ -7343,7 +6947,7 @@
                   <a:schemeClr val="tx2"/>
                 </a:solidFill>
               </a:rPr>
-              <a:t>Which channel carries culture</a:t>
+              <a:t>Matching Celsius: how large depositors exit</a:t>
             </a:r>
             <a:endParaRPr lang="en-US" sz="2400" dirty="0"/>
           </a:p>
@@ -7351,7 +6955,7 @@
       </p:sp>
       <p:pic>
         <p:nvPicPr>
-          <p:cNvPr id="3" name="e09" descr="Who runs in failed runs with optimistic news when lambda applies only to the neighbour blend, only to the news blend, or both: positive, negative, small positive.">    </p:cNvPr>
+          <p:cNvPr id="3" name="e04" descr="Share of exits that withdraw everything at once by depositor size: Celsius falls from about 0.86 to 0.35 for the largest; the model stays at 0.93 to 1.">    </p:cNvPr>
           <p:cNvPicPr>
             <a:picLocks noChangeAspect="1"/>
           </p:cNvPicPr>
@@ -7365,8 +6969,8 @@
         </p:blipFill>
         <p:spPr>
           <a:xfrm>
-            <a:off x="1547348" y="1051560"/>
-            <a:ext cx="6049305" cy="3383280"/>
+            <a:off x="1882292" y="1051560"/>
+            <a:ext cx="5379415" cy="3383280"/>
           </a:xfrm>
           <a:prstGeom prst="rect">
             <a:avLst/>
@@ -7403,7 +7007,7 @@
                   <a:schemeClr val="accent3"/>
                 </a:solidFill>
               </a:rPr>
-              <a:t>D in failed runs with optimistic news, when λ weights only the neighbour blend, only the news blend, or both (the model). θ-blend only +0.14; head-count only −0.07; both +0.02.</a:t>
+              <a:t>Share of exits that withdraw everything at once, by depositor size. Black: Celsius (band for D1–D5); greys: the model, uncapped and capped.</a:t>
             </a:r>
             <a:endParaRPr lang="en-US" sz="1000" dirty="0"/>
           </a:p>
@@ -7679,7 +7283,7 @@
                   <a:schemeClr val="tx2"/>
                 </a:solidFill>
               </a:rPr>
-              <a:t>Matching Celsius: how large depositors exit</a:t>
+              <a:t>Earlier specification (vault bank): failure by mix</a:t>
             </a:r>
             <a:endParaRPr lang="en-US" sz="2400" dirty="0"/>
           </a:p>
@@ -7687,7 +7291,7 @@
       </p:sp>
       <p:pic>
         <p:nvPicPr>
-          <p:cNvPr id="3" name="e04" descr="Share of exits that withdraw everything at once by depositor size: Celsius falls from about 0.86 to 0.35 for the largest; the model stays at 0.93 to 1.">    </p:cNvPr>
+          <p:cNvPr id="3" name="fig1" descr="Earlier vault-bank specification: probability of a run falls with the share of individualists for all three signal-weighting gaps.">    </p:cNvPr>
           <p:cNvPicPr>
             <a:picLocks noChangeAspect="1"/>
           </p:cNvPicPr>
@@ -7701,8 +7305,8 @@
         </p:blipFill>
         <p:spPr>
           <a:xfrm>
-            <a:off x="1882292" y="1051560"/>
-            <a:ext cx="5379415" cy="3383280"/>
+            <a:off x="1999016" y="1051560"/>
+            <a:ext cx="5145969" cy="3383280"/>
           </a:xfrm>
           <a:prstGeom prst="rect">
             <a:avLst/>
@@ -7739,7 +7343,7 @@
                   <a:schemeClr val="accent3"/>
                 </a:solidFill>
               </a:rPr>
-              <a:t>Share of exits that withdraw everything at once, by depositor size. Black: Celsius (band for D1–D5); greys: the model, uncapped and capped.</a:t>
+              <a:t>Vault bank, earlier specification (chapter Figure 1): probability of a run by share of individualists, three λ gaps. Also monotone.</a:t>
             </a:r>
             <a:endParaRPr lang="en-US" sz="1000" dirty="0"/>
           </a:p>
@@ -7785,174 +7389,6 @@
             <a:fld id="{F7021451-1387-4CA6-816F-3879F97B5CBC}" type="slidenum">
               <a:rPr b="0" lang="en-US"/>
               <a:t>20</a:t>
-            </a:fld>
-            <a:endParaRPr lang="en-US"/>
-          </a:p>
-        </p:txBody>
-      </p:sp>
-    </p:spTree>
-  </p:cSld>
-  <p:clrMapOvr>
-    <a:masterClrMapping/>
-  </p:clrMapOvr>
-</p:sld>
-</file>
-
-<file path=ppt/slides/slide21.xml><?xml version="1.0" encoding="utf-8"?>
-<p:sld xmlns:a="http://schemas.openxmlformats.org/drawingml/2006/main" xmlns:r="http://schemas.openxmlformats.org/officeDocument/2006/relationships" xmlns:p="http://schemas.openxmlformats.org/presentationml/2006/main">
-  <p:cSld name="Slide 21">
-    <p:spTree>
-      <p:nvGrpSpPr>
-        <p:cNvPr id="1" name=""/>
-        <p:cNvGrpSpPr/>
-        <p:nvPr/>
-      </p:nvGrpSpPr>
-      <p:grpSpPr>
-        <a:xfrm>
-          <a:off x="0" y="0"/>
-          <a:ext cx="0" cy="0"/>
-          <a:chOff x="0" y="0"/>
-          <a:chExt cx="0" cy="0"/>
-        </a:xfrm>
-      </p:grpSpPr>
-      <p:sp>
-        <p:nvSpPr>
-          <p:cNvPr id="2" name="Text 0"/>
-          <p:cNvSpPr/>
-          <p:nvPr>
-            <p:ph idx="100" type="title" hasCustomPrompt="1"/>
-          </p:nvPr>
-        </p:nvSpPr>
-        <p:spPr>
-          <a:xfrm>
-            <a:off x="457200" y="274320"/>
-            <a:ext cx="8229600" cy="685800"/>
-          </a:xfrm>
-          <a:prstGeom prst="rect">
-            <a:avLst/>
-          </a:prstGeom>
-          <a:noFill/>
-          <a:ln/>
-        </p:spPr>
-        <p:txBody>
-          <a:bodyPr wrap="square" lIns="0" tIns="0" rIns="0" bIns="0" rtlCol="0" anchor="ctr"/>
-          <a:lstStyle/>
-          <a:p>
-            <a:pPr algn="l" indent="0" marL="0">
-              <a:buNone/>
-            </a:pPr>
-            <a:r>
-              <a:rPr lang="en-US" sz="2400" b="1" dirty="0">
-                <a:solidFill>
-                  <a:schemeClr val="tx2"/>
-                </a:solidFill>
-              </a:rPr>
-              <a:t>Earlier specification (vault bank): failure by mix</a:t>
-            </a:r>
-            <a:endParaRPr lang="en-US" sz="2400" dirty="0"/>
-          </a:p>
-        </p:txBody>
-      </p:sp>
-      <p:pic>
-        <p:nvPicPr>
-          <p:cNvPr id="3" name="fig1" descr="Earlier vault-bank specification: probability of a run falls with the share of individualists for all three signal-weighting gaps.">    </p:cNvPr>
-          <p:cNvPicPr>
-            <a:picLocks noChangeAspect="1"/>
-          </p:cNvPicPr>
-          <p:nvPr/>
-        </p:nvPicPr>
-        <p:blipFill>
-          <a:blip r:embed="rId1"/>
-          <a:stretch>
-            <a:fillRect/>
-          </a:stretch>
-        </p:blipFill>
-        <p:spPr>
-          <a:xfrm>
-            <a:off x="1999016" y="1051560"/>
-            <a:ext cx="5145969" cy="3383280"/>
-          </a:xfrm>
-          <a:prstGeom prst="rect">
-            <a:avLst/>
-          </a:prstGeom>
-        </p:spPr>
-      </p:pic>
-      <p:sp>
-        <p:nvSpPr>
-          <p:cNvPr id="4" name="caption"/>
-          <p:cNvSpPr txBox="1"/>
-          <p:nvPr/>
-        </p:nvSpPr>
-        <p:spPr>
-          <a:xfrm>
-            <a:off x="457200" y="4480560"/>
-            <a:ext cx="8229600" cy="274320"/>
-          </a:xfrm>
-          <a:prstGeom prst="rect">
-            <a:avLst/>
-          </a:prstGeom>
-          <a:noFill/>
-          <a:ln/>
-        </p:spPr>
-        <p:txBody>
-          <a:bodyPr wrap="square" lIns="0" tIns="0" rIns="0" bIns="0" rtlCol="0" anchor="ctr"/>
-          <a:lstStyle/>
-          <a:p>
-            <a:pPr indent="0" marL="0">
-              <a:buNone/>
-            </a:pPr>
-            <a:r>
-              <a:rPr lang="en-US" sz="1000" i="1" dirty="0">
-                <a:solidFill>
-                  <a:schemeClr val="accent3"/>
-                </a:solidFill>
-              </a:rPr>
-              <a:t>Vault bank, earlier specification (chapter Figure 1): probability of a run by share of individualists, three λ gaps. Also monotone.</a:t>
-            </a:r>
-            <a:endParaRPr lang="en-US" sz="1000" dirty="0"/>
-          </a:p>
-        </p:txBody>
-      </p:sp>
-      <p:sp>
-        <p:nvSpPr>
-          <p:cNvPr id="25" name="Slide Number Placeholder 0"/>
-          <p:cNvSpPr>
-            <a:spLocks noGrp="1"/>
-          </p:cNvSpPr>
-          <p:nvPr>
-            <p:ph type="sldNum" sz="quarter" idx="4294967295"/>
-          </p:nvPr>
-        </p:nvSpPr>
-        <p:spPr>
-          <a:xfrm>
-            <a:off x="8321040" y="4754880"/>
-            <a:ext cx="457200" cy="274320"/>
-          </a:xfrm>
-          <a:prstGeom prst="rect">
-            <a:avLst/>
-          </a:prstGeom>
-          <a:extLst>
-            <a:ext uri="{C572A759-6A51-4108-AA02-DFA0A04FC94B}">
-              <ma14:wrappingTextBoxFlag xmlns:ma14="http://schemas.microsoft.com/office/mac/drawingml/2011/main" val="0"/>
-            </a:ext>
-          </a:extLst>
-        </p:spPr>
-        <p:txBody>
-          <a:bodyPr/>
-          <a:lstStyle>
-            <a:lvl1pPr>
-              <a:defRPr sz="900">
-                <a:solidFill>
-                  <a:srgbClr val="6B7280"/>
-                </a:solidFill>
-              </a:defRPr>
-            </a:lvl1pPr>
-          </a:lstStyle>
-          <a:p>
-            <a:pPr algn="r"/>
-            <a:fld id="{F7021451-1387-4CA6-816F-3879F97B5CBC}" type="slidenum">
-              <a:rPr b="0" lang="en-US"/>
-              <a:t>21</a:t>
             </a:fld>
             <a:endParaRPr lang="en-US"/>
           </a:p>
@@ -8427,14 +7863,74 @@
       </p:sp>
       <p:sp>
         <p:nvSpPr>
-          <p:cNvPr id="3" name="step-lead"/>
+          <p:cNvPr id="3" name="lead"/>
           <p:cNvSpPr txBox="1"/>
           <p:nvPr/>
         </p:nvSpPr>
         <p:spPr>
           <a:xfrm>
             <a:off x="457200" y="1051560"/>
-            <a:ext cx="8229600" cy="868680"/>
+            <a:ext cx="3200400" cy="2011680"/>
+          </a:xfrm>
+          <a:prstGeom prst="rect">
+            <a:avLst/>
+          </a:prstGeom>
+          <a:noFill/>
+          <a:ln/>
+        </p:spPr>
+        <p:txBody>
+          <a:bodyPr wrap="square" lIns="0" tIns="0" rIns="0" bIns="0" rtlCol="0" anchor="t"/>
+          <a:lstStyle/>
+          <a:p>
+            <a:pPr indent="0" marL="0">
+              <a:buNone/>
+            </a:pPr>
+            <a:r>
+              <a:rPr lang="en-US" sz="1800" b="1" dirty="0">
+                <a:solidFill>
+                  <a:schemeClr val="tx2"/>
+                </a:solidFill>
+              </a:rPr>
+              <a:t>When there are two signals, which signal does a depositor act on, and in what proportion?</a:t>
+            </a:r>
+            <a:endParaRPr lang="en-US" sz="1800" dirty="0"/>
+          </a:p>
+        </p:txBody>
+      </p:sp>
+      <p:pic>
+        <p:nvPicPr>
+          <p:cNvPr id="4" name="svb" descr="Screenshot of a TechCrunch article of 9 March 2023 headlined Silicon Valley Bank’s shares are tanking as a mess unfolds, with an embedded link Venture firms are advising portfolio companies to move money out of SVB, and a paragraph quoting CEO Greg Becker asking venture clients to stay calm, that’s my ask.">    </p:cNvPr>
+          <p:cNvPicPr>
+            <a:picLocks noChangeAspect="1"/>
+          </p:cNvPicPr>
+          <p:nvPr/>
+        </p:nvPicPr>
+        <p:blipFill>
+          <a:blip r:embed="rId1"/>
+          <a:stretch>
+            <a:fillRect/>
+          </a:stretch>
+        </p:blipFill>
+        <p:spPr>
+          <a:xfrm>
+            <a:off x="4399453" y="1051560"/>
+            <a:ext cx="3728375" cy="3474720"/>
+          </a:xfrm>
+          <a:prstGeom prst="rect">
+            <a:avLst/>
+          </a:prstGeom>
+        </p:spPr>
+      </p:pic>
+      <p:sp>
+        <p:nvSpPr>
+          <p:cNvPr id="5" name="caption"/>
+          <p:cNvSpPr txBox="1"/>
+          <p:nvPr/>
+        </p:nvSpPr>
+        <p:spPr>
+          <a:xfrm>
+            <a:off x="4399453" y="4572000"/>
+            <a:ext cx="3728375" cy="274320"/>
           </a:xfrm>
           <a:prstGeom prst="rect">
             <a:avLst/>
@@ -8450,132 +7946,14 @@
               <a:buNone/>
             </a:pPr>
             <a:r>
-              <a:rPr lang="en-US" sz="1700" b="1" dirty="0">
-                <a:solidFill>
-                  <a:schemeClr val="tx2"/>
-                </a:solidFill>
-              </a:rPr>
-              <a:t>When there are two signals, which signal does a depositor act on, and in what proportion?</a:t>
-            </a:r>
-            <a:endParaRPr lang="en-US" sz="1700" dirty="0"/>
-          </a:p>
-        </p:txBody>
-      </p:sp>
-      <p:sp>
-        <p:nvSpPr>
-          <p:cNvPr id="4" name="step-items"/>
-          <p:cNvSpPr txBox="1"/>
-          <p:nvPr/>
-        </p:nvSpPr>
-        <p:spPr>
-          <a:xfrm>
-            <a:off x="457200" y="2103120"/>
-            <a:ext cx="8229600" cy="2103120"/>
-          </a:xfrm>
-          <a:prstGeom prst="rect">
-            <a:avLst/>
-          </a:prstGeom>
-          <a:noFill/>
-          <a:ln/>
-        </p:spPr>
-        <p:txBody>
-          <a:bodyPr wrap="square" lIns="0" tIns="0" rIns="0" bIns="0" rtlCol="0" anchor="t"/>
-          <a:lstStyle/>
-          <a:p>
-            <a:pPr marL="177800" indent="-177800">
-              <a:spcAft>
-                <a:spcPts val="900"/>
-              </a:spcAft>
-              <a:buSzPct val="100000"/>
-              <a:buChar char="•"/>
-            </a:pPr>
-            <a:r>
-              <a:rPr lang="en-US" sz="1400" b="1" dirty="0">
-                <a:solidFill>
-                  <a:schemeClr val="tx1"/>
-                </a:solidFill>
-              </a:rPr>
-              <a:t>Latent in the canonical models. </a:t>
-            </a:r>
-            <a:pPr indent="0" marL="0">
-              <a:spcAft>
-                <a:spcPts val="900"/>
-              </a:spcAft>
-              <a:buNone/>
-            </a:pPr>
-            <a:r>
-              <a:rPr lang="en-US" sz="1400" dirty="0">
-                <a:solidFill>
-                  <a:schemeClr val="tx1"/>
-                </a:solidFill>
-              </a:rPr>
-              <a:t>Diamond–Dybvig has no signal; Morris–Shin and Goldstein–Pauzner have one. The question cannot arise.</a:t>
-            </a:r>
-            <a:endParaRPr lang="en-US" sz="1400" dirty="0"/>
-          </a:p>
-          <a:p>
-            <a:pPr marL="177800" indent="-177800">
-              <a:spcAft>
-                <a:spcPts val="900"/>
-              </a:spcAft>
-              <a:buSzPct val="100000"/>
-              <a:buChar char="•"/>
-            </a:pPr>
-            <a:r>
-              <a:rPr lang="en-US" sz="1400" b="1" dirty="0">
-                <a:solidFill>
-                  <a:schemeClr val="tx1"/>
-                </a:solidFill>
-              </a:rPr>
-              <a:t>Askable once a public signal is added. </a:t>
-            </a:r>
-            <a:pPr indent="0" marL="0">
-              <a:spcAft>
-                <a:spcPts val="900"/>
-              </a:spcAft>
-              <a:buNone/>
-            </a:pPr>
-            <a:r>
-              <a:rPr lang="en-US" sz="1400" dirty="0">
-                <a:solidFill>
-                  <a:schemeClr val="tx1"/>
-                </a:solidFill>
-              </a:rPr>
-              <a:t>Morris–Shin (2002), Hellwig (2002), Angeletos–Werning (2006) put a public signal next to the private one.</a:t>
-            </a:r>
-            <a:endParaRPr lang="en-US" sz="1400" dirty="0"/>
-          </a:p>
-          <a:p>
-            <a:pPr marL="177800" indent="-177800">
-              <a:spcAft>
-                <a:spcPts val="900"/>
-              </a:spcAft>
-              <a:buSzPct val="100000"/>
-              <a:buChar char="•"/>
-            </a:pPr>
-            <a:r>
-              <a:rPr lang="en-US" sz="1400" b="1" dirty="0">
-                <a:solidFill>
-                  <a:schemeClr val="tx1"/>
-                </a:solidFill>
-              </a:rPr>
-              <a:t>The question a panic poses. </a:t>
-            </a:r>
-            <a:pPr indent="0" marL="0">
-              <a:spcAft>
-                <a:spcPts val="900"/>
-              </a:spcAft>
-              <a:buNone/>
-            </a:pPr>
-            <a:r>
-              <a:rPr lang="en-US" sz="1400" dirty="0">
-                <a:solidFill>
-                  <a:schemeClr val="tx1"/>
-                </a:solidFill>
-              </a:rPr>
-              <a:t>A depositor in a run holds two things that disagree: what they see and what they are told.</a:t>
-            </a:r>
-            <a:endParaRPr lang="en-US" sz="1400" dirty="0"/>
+              <a:rPr lang="en-US" sz="1000" i="1" dirty="0">
+                <a:solidFill>
+                  <a:schemeClr val="accent3"/>
+                </a:solidFill>
+              </a:rPr>
+              <a:t>TechCrunch, 9 March 2023. Screenshot, techcrunch.com.</a:t>
+            </a:r>
+            <a:endParaRPr lang="en-US" sz="1000" dirty="0"/>
           </a:p>
         </p:txBody>
       </p:sp>
@@ -8681,7 +8059,7 @@
                   <a:schemeClr val="tx2"/>
                 </a:solidFill>
               </a:rPr>
-              <a:t>What panics look like</a:t>
+              <a:t>Cultural economics: a source of stable weights</a:t>
             </a:r>
             <a:endParaRPr lang="en-US" sz="2400" dirty="0"/>
           </a:p>
@@ -8717,7 +8095,7 @@
                   <a:schemeClr val="tx2"/>
                 </a:solidFill>
               </a:rPr>
-              <a:t>Panics are open disagreements between the public line and private evidence, and depositors split on which to trust.</a:t>
+              <a:t>Culture supplies a weight that differs across depositors, is set before the run, and does not move with the information environment.</a:t>
             </a:r>
             <a:endParaRPr lang="en-US" sz="1700" dirty="0"/>
           </a:p>
@@ -8757,7 +8135,7 @@
                   <a:schemeClr val="tx1"/>
                 </a:solidFill>
               </a:rPr>
-              <a:t>Celsius, 2022. </a:t>
+              <a:t>Transmitted, not chosen. </a:t>
             </a:r>
             <a:pPr indent="0" marL="0">
               <a:spcAft>
@@ -8771,7 +8149,7 @@
                   <a:schemeClr val="tx1"/>
                 </a:solidFill>
               </a:rPr>
-              <a:t>Official posts insisting the platform was sound, while CEL fell and withdrawals accelerated.</a:t>
+              <a:t>Cultural values pass largely unchanged from parents to children (Guiso, Sapienza, Zingales; Bazzi et al.). The weight is a disposition, not a calculation.</a:t>
             </a:r>
             <a:endParaRPr lang="en-US" sz="1400" dirty="0"/>
           </a:p>
@@ -8789,7 +8167,7 @@
                   <a:schemeClr val="tx1"/>
                 </a:solidFill>
               </a:rPr>
-              <a:t>Silicon Valley Bank, 2023. </a:t>
+              <a:t>Individualism is the right dimension. </a:t>
             </a:r>
             <a:pPr indent="0" marL="0">
               <a:spcAft>
@@ -8803,7 +8181,7 @@
                   <a:schemeClr val="tx1"/>
                 </a:solidFill>
               </a:rPr>
-              <a:t>A call asking clients to stay calm, against a Twitter feed saying the opposite.</a:t>
+              <a:t>Self-reliance against deference to the group (Hofstede) is the private-against-social weighting the model already contains (Gorodnichenko–Roland).</a:t>
             </a:r>
             <a:endParaRPr lang="en-US" sz="1400" dirty="0"/>
           </a:p>
@@ -8821,7 +8199,7 @@
                   <a:schemeClr val="tx1"/>
                 </a:solidFill>
               </a:rPr>
-              <a:t>Northern Rock, 2007. </a:t>
+              <a:t>Measurable per depositor. </a:t>
             </a:r>
             <a:pPr indent="0" marL="0">
               <a:spcAft>
@@ -8835,45 +8213,9 @@
                   <a:schemeClr val="tx1"/>
                 </a:solidFill>
               </a:rPr>
-              <a:t>A Bank of England support announcement, against queues outside the branches.</a:t>
+              <a:t>Given names carry it (Twenge et al.), so the weight can be observed, not assumed.</a:t>
             </a:r>
             <a:endParaRPr lang="en-US" sz="1400" dirty="0"/>
-          </a:p>
-        </p:txBody>
-      </p:sp>
-      <p:sp>
-        <p:nvSpPr>
-          <p:cNvPr id="5" name="step-foot"/>
-          <p:cNvSpPr txBox="1"/>
-          <p:nvPr/>
-        </p:nvSpPr>
-        <p:spPr>
-          <a:xfrm>
-            <a:off x="457200" y="4251960"/>
-            <a:ext cx="8229600" cy="320040"/>
-          </a:xfrm>
-          <a:prstGeom prst="rect">
-            <a:avLst/>
-          </a:prstGeom>
-          <a:noFill/>
-          <a:ln/>
-        </p:spPr>
-        <p:txBody>
-          <a:bodyPr wrap="square" lIns="0" tIns="0" rIns="0" bIns="0" rtlCol="0" anchor="ctr"/>
-          <a:lstStyle/>
-          <a:p>
-            <a:pPr indent="0" marL="0">
-              <a:buNone/>
-            </a:pPr>
-            <a:r>
-              <a:rPr lang="en-US" sz="1100" i="1" dirty="0">
-                <a:solidFill>
-                  <a:schemeClr val="accent3"/>
-                </a:solidFill>
-              </a:rPr>
-              <a:t>In each case the interesting fact is who moved on which signal.</a:t>
-            </a:r>
-            <a:endParaRPr lang="en-US" sz="1100" dirty="0"/>
           </a:p>
         </p:txBody>
       </p:sp>
@@ -8979,22 +8321,73 @@
                   <a:schemeClr val="tx2"/>
                 </a:solidFill>
               </a:rPr>
-              <a:t>Cultural economics: a source of stable weights</a:t>
+              <a:t>The ladder: signal, location, interpretation</a:t>
             </a:r>
             <a:endParaRPr lang="en-US" sz="2400" dirty="0"/>
           </a:p>
         </p:txBody>
       </p:sp>
-      <p:sp>
-        <p:nvSpPr>
-          <p:cNvPr id="3" name="step-lead"/>
+      <p:pic>
+        <p:nvPicPr>
+          <p:cNvPr id="3" name="ladder" descr="Three panels. Signal: one bank fundamental sends a noisy private signal to each depositor, who line up from run to stay. Location: a network in which the signal has reached some depositors from a first hearer and not others. Interpretation: the same private and public signals reach an individualist, who leans on the private signal, and a collectivist, who leans on the public one; culture sets the weight.">    </p:cNvPr>
+          <p:cNvPicPr>
+            <a:picLocks noChangeAspect="1"/>
+          </p:cNvPicPr>
+          <p:nvPr/>
+        </p:nvPicPr>
+        <p:blipFill>
+          <a:blip r:embed="rId1"/>
+          <a:stretch>
+            <a:fillRect/>
+          </a:stretch>
+        </p:blipFill>
+        <p:spPr>
+          <a:xfrm>
+            <a:off x="653339" y="1097280"/>
+            <a:ext cx="7837322" cy="2743200"/>
+          </a:xfrm>
+          <a:prstGeom prst="rect">
+            <a:avLst/>
+          </a:prstGeom>
+        </p:spPr>
+      </p:pic>
+      <p:sp>
+        <p:nvSpPr>
+          <p:cNvPr id="4" name="ladder-note"/>
+          <p:cNvSpPr/>
+          <p:nvPr/>
+        </p:nvSpPr>
+        <p:spPr>
+          <a:xfrm>
+            <a:off x="457200" y="3977640"/>
+            <a:ext cx="8229600" cy="566928"/>
+          </a:xfrm>
+          <a:prstGeom prst="roundRect">
+            <a:avLst>
+              <a:gd name="adj" fmla="val 12903"/>
+            </a:avLst>
+          </a:prstGeom>
+          <a:solidFill>
+            <a:schemeClr val="accent4"/>
+          </a:solidFill>
+          <a:ln w="12700">
+            <a:solidFill>
+              <a:schemeClr val="accent4"/>
+            </a:solidFill>
+            <a:prstDash val="solid"/>
+          </a:ln>
+        </p:spPr>
+      </p:sp>
+      <p:sp>
+        <p:nvSpPr>
+          <p:cNvPr id="5" name="ladder-text"/>
           <p:cNvSpPr txBox="1"/>
           <p:nvPr/>
         </p:nvSpPr>
         <p:spPr>
           <a:xfrm>
-            <a:off x="457200" y="1051560"/>
-            <a:ext cx="8229600" cy="868680"/>
+            <a:off x="594360" y="4005072"/>
+            <a:ext cx="7955280" cy="512064"/>
           </a:xfrm>
           <a:prstGeom prst="rect">
             <a:avLst/>
@@ -9010,132 +8403,36 @@
               <a:buNone/>
             </a:pPr>
             <a:r>
-              <a:rPr lang="en-US" sz="1700" b="1" dirty="0">
-                <a:solidFill>
-                  <a:schemeClr val="tx2"/>
-                </a:solidFill>
-              </a:rPr>
-              <a:t>Culture supplies a weight that differs across depositors, is set before the run, and does not move with the information environment.</a:t>
-            </a:r>
-            <a:endParaRPr lang="en-US" sz="1700" dirty="0"/>
-          </a:p>
-        </p:txBody>
-      </p:sp>
-      <p:sp>
-        <p:nvSpPr>
-          <p:cNvPr id="4" name="step-items"/>
-          <p:cNvSpPr txBox="1"/>
-          <p:nvPr/>
-        </p:nvSpPr>
-        <p:spPr>
-          <a:xfrm>
-            <a:off x="457200" y="2103120"/>
-            <a:ext cx="8229600" cy="2103120"/>
-          </a:xfrm>
-          <a:prstGeom prst="rect">
-            <a:avLst/>
-          </a:prstGeom>
-          <a:noFill/>
-          <a:ln/>
-        </p:spPr>
-        <p:txBody>
-          <a:bodyPr wrap="square" lIns="0" tIns="0" rIns="0" bIns="0" rtlCol="0" anchor="t"/>
-          <a:lstStyle/>
-          <a:p>
-            <a:pPr marL="177800" indent="-177800">
-              <a:spcAft>
-                <a:spcPts val="900"/>
-              </a:spcAft>
-              <a:buSzPct val="100000"/>
-              <a:buChar char="•"/>
-            </a:pPr>
-            <a:r>
-              <a:rPr lang="en-US" sz="1400" b="1" dirty="0">
+              <a:rPr lang="en-US" sz="1200" dirty="0">
+                <a:solidFill>
+                  <a:schemeClr val="accent3"/>
+                </a:solidFill>
+              </a:rPr>
+              <a:t>Rungs 1 and 2 are the literature. </a:t>
+            </a:r>
+            <a:pPr indent="0" marL="0">
+              <a:buNone/>
+            </a:pPr>
+            <a:r>
+              <a:rPr lang="en-US" sz="1200" b="1" dirty="0">
+                <a:solidFill>
+                  <a:schemeClr val="accent1"/>
+                </a:solidFill>
+              </a:rPr>
+              <a:t>Rung 3 is this paper: </a:t>
+            </a:r>
+            <a:pPr indent="0" marL="0">
+              <a:buNone/>
+            </a:pPr>
+            <a:r>
+              <a:rPr lang="en-US" sz="1200" dirty="0">
                 <a:solidFill>
                   <a:schemeClr val="tx1"/>
                 </a:solidFill>
               </a:rPr>
-              <a:t>Transmitted, not chosen. </a:t>
-            </a:r>
-            <a:pPr indent="0" marL="0">
-              <a:spcAft>
-                <a:spcPts val="900"/>
-              </a:spcAft>
-              <a:buNone/>
-            </a:pPr>
-            <a:r>
-              <a:rPr lang="en-US" sz="1400" dirty="0">
-                <a:solidFill>
-                  <a:schemeClr val="tx1"/>
-                </a:solidFill>
-              </a:rPr>
-              <a:t>Cultural values pass largely unchanged from parents to children (Guiso, Sapienza, Zingales; Bazzi et al.). The weight is a disposition, not a calculation.</a:t>
-            </a:r>
-            <a:endParaRPr lang="en-US" sz="1400" dirty="0"/>
-          </a:p>
-          <a:p>
-            <a:pPr marL="177800" indent="-177800">
-              <a:spcAft>
-                <a:spcPts val="900"/>
-              </a:spcAft>
-              <a:buSzPct val="100000"/>
-              <a:buChar char="•"/>
-            </a:pPr>
-            <a:r>
-              <a:rPr lang="en-US" sz="1400" b="1" dirty="0">
-                <a:solidFill>
-                  <a:schemeClr val="tx1"/>
-                </a:solidFill>
-              </a:rPr>
-              <a:t>Individualism is the right dimension. </a:t>
-            </a:r>
-            <a:pPr indent="0" marL="0">
-              <a:spcAft>
-                <a:spcPts val="900"/>
-              </a:spcAft>
-              <a:buNone/>
-            </a:pPr>
-            <a:r>
-              <a:rPr lang="en-US" sz="1400" dirty="0">
-                <a:solidFill>
-                  <a:schemeClr val="tx1"/>
-                </a:solidFill>
-              </a:rPr>
-              <a:t>Self-reliance against deference to the group (Hofstede) is the private-against-social weighting the model already contains (Gorodnichenko–Roland).</a:t>
-            </a:r>
-            <a:endParaRPr lang="en-US" sz="1400" dirty="0"/>
-          </a:p>
-          <a:p>
-            <a:pPr marL="177800" indent="-177800">
-              <a:spcAft>
-                <a:spcPts val="900"/>
-              </a:spcAft>
-              <a:buSzPct val="100000"/>
-              <a:buChar char="•"/>
-            </a:pPr>
-            <a:r>
-              <a:rPr lang="en-US" sz="1400" b="1" dirty="0">
-                <a:solidFill>
-                  <a:schemeClr val="tx1"/>
-                </a:solidFill>
-              </a:rPr>
-              <a:t>Measurable per depositor. </a:t>
-            </a:r>
-            <a:pPr indent="0" marL="0">
-              <a:spcAft>
-                <a:spcPts val="900"/>
-              </a:spcAft>
-              <a:buNone/>
-            </a:pPr>
-            <a:r>
-              <a:rPr lang="en-US" sz="1400" dirty="0">
-                <a:solidFill>
-                  <a:schemeClr val="tx1"/>
-                </a:solidFill>
-              </a:rPr>
-              <a:t>Given names carry it (Twenge et al.), so the weight can be observed, not assumed.</a:t>
-            </a:r>
-            <a:endParaRPr lang="en-US" sz="1400" dirty="0"/>
+              <a:t>the only one that orders depositors by a trait, and reverses when the public line is too optimistic or too pessimistic.</a:t>
+            </a:r>
+            <a:endParaRPr lang="en-US" sz="1200" dirty="0"/>
           </a:p>
         </p:txBody>
       </p:sp>
@@ -9241,7 +8538,7 @@
                   <a:schemeClr val="tx2"/>
                 </a:solidFill>
               </a:rPr>
-              <a:t>The ladder: signal, location, interpretation</a:t>
+              <a:t>The model in one picture</a:t>
             </a:r>
             <a:endParaRPr lang="en-US" sz="2400" dirty="0"/>
           </a:p>
@@ -9249,7 +8546,7 @@
       </p:sp>
       <p:pic>
         <p:nvPicPr>
-          <p:cNvPr id="3" name="ladder" descr="Three panels. Signal: one bank fundamental sends a noisy private signal to each depositor, who line up from run to stay. Location: a network in which the signal has reached some depositors from a first hearer and not others. Interpretation: the same private and public signals reach an individualist, who leans on the private signal, and a collectivist, who leans on the public one; culture sets the weight.">    </p:cNvPr>
+          <p:cNvPr id="3" name="odd" descr="Model overview: depositors on a social network with a bank; each run draws fundamentals and signals, a shock hits, then depositors observe neighbours and news, form beliefs, and decide whether to withdraw, tick by tick.">    </p:cNvPr>
           <p:cNvPicPr>
             <a:picLocks noChangeAspect="1"/>
           </p:cNvPicPr>
@@ -9263,8 +8560,8 @@
         </p:blipFill>
         <p:spPr>
           <a:xfrm>
-            <a:off x="653339" y="1097280"/>
-            <a:ext cx="7837322" cy="2743200"/>
+            <a:off x="457200" y="1051560"/>
+            <a:ext cx="3467633" cy="3520440"/>
           </a:xfrm>
           <a:prstGeom prst="rect">
             <a:avLst/>
@@ -9273,26 +8570,26 @@
       </p:pic>
       <p:sp>
         <p:nvSpPr>
-          <p:cNvPr id="4" name="ladder-note"/>
+          <p:cNvPr id="4" name="stat-depositors on a smal"/>
           <p:cNvSpPr/>
           <p:nvPr/>
         </p:nvSpPr>
         <p:spPr>
           <a:xfrm>
-            <a:off x="457200" y="3977640"/>
-            <a:ext cx="8229600" cy="566928"/>
+            <a:off x="4244873" y="1051560"/>
+            <a:ext cx="2152383" cy="960120"/>
           </a:xfrm>
           <a:prstGeom prst="roundRect">
             <a:avLst>
-              <a:gd name="adj" fmla="val 12903"/>
+              <a:gd name="adj" fmla="val 7619"/>
             </a:avLst>
           </a:prstGeom>
           <a:solidFill>
-            <a:schemeClr val="accent4"/>
+            <a:schemeClr val="bg2"/>
           </a:solidFill>
           <a:ln w="12700">
             <a:solidFill>
-              <a:schemeClr val="accent4"/>
+              <a:schemeClr val="bg2"/>
             </a:solidFill>
             <a:prstDash val="solid"/>
           </a:ln>
@@ -9300,14 +8597,14 @@
       </p:sp>
       <p:sp>
         <p:nvSpPr>
-          <p:cNvPr id="5" name="ladder-text"/>
+          <p:cNvPr id="5" name="stat-big"/>
           <p:cNvSpPr txBox="1"/>
           <p:nvPr/>
         </p:nvSpPr>
         <p:spPr>
           <a:xfrm>
-            <a:off x="594360" y="4005072"/>
-            <a:ext cx="7955280" cy="512064"/>
+            <a:off x="4382033" y="1124712"/>
+            <a:ext cx="1878063" cy="457200"/>
           </a:xfrm>
           <a:prstGeom prst="rect">
             <a:avLst/>
@@ -9323,36 +8620,453 @@
               <a:buNone/>
             </a:pPr>
             <a:r>
-              <a:rPr lang="en-US" sz="1200" dirty="0">
+              <a:rPr lang="en-US" sz="2600" b="1" dirty="0">
+                <a:solidFill>
+                  <a:schemeClr val="accent1"/>
+                </a:solidFill>
+                <a:latin typeface="Cambria" pitchFamily="34" charset="0"/>
+                <a:ea typeface="Cambria" pitchFamily="34" charset="-122"/>
+                <a:cs typeface="Cambria" pitchFamily="34" charset="-120"/>
+              </a:rPr>
+              <a:t>1,000</a:t>
+            </a:r>
+            <a:endParaRPr lang="en-US" sz="2600" dirty="0"/>
+          </a:p>
+        </p:txBody>
+      </p:sp>
+      <p:sp>
+        <p:nvSpPr>
+          <p:cNvPr id="6" name="stat-label"/>
+          <p:cNvSpPr txBox="1"/>
+          <p:nvPr/>
+        </p:nvSpPr>
+        <p:spPr>
+          <a:xfrm>
+            <a:off x="4382033" y="1600200"/>
+            <a:ext cx="1878063" cy="356616"/>
+          </a:xfrm>
+          <a:prstGeom prst="rect">
+            <a:avLst/>
+          </a:prstGeom>
+          <a:noFill/>
+          <a:ln/>
+        </p:spPr>
+        <p:txBody>
+          <a:bodyPr wrap="square" lIns="0" tIns="0" rIns="0" bIns="0" rtlCol="0" anchor="t"/>
+          <a:lstStyle/>
+          <a:p>
+            <a:pPr indent="0" marL="0">
+              <a:buNone/>
+            </a:pPr>
+            <a:r>
+              <a:rPr lang="en-US" sz="1100" dirty="0">
                 <a:solidFill>
                   <a:schemeClr val="accent3"/>
                 </a:solidFill>
               </a:rPr>
-              <a:t>Rungs 1 and 2 are the literature. </a:t>
-            </a:r>
+              <a:t>depositors on a small-world network, one bank</a:t>
+            </a:r>
+            <a:endParaRPr lang="en-US" sz="1100" dirty="0"/>
+          </a:p>
+        </p:txBody>
+      </p:sp>
+      <p:sp>
+        <p:nvSpPr>
+          <p:cNvPr id="7" name="stat-cap on any one depos"/>
+          <p:cNvSpPr/>
+          <p:nvPr/>
+        </p:nvSpPr>
+        <p:spPr>
+          <a:xfrm>
+            <a:off x="6534417" y="1051560"/>
+            <a:ext cx="2152383" cy="960120"/>
+          </a:xfrm>
+          <a:prstGeom prst="roundRect">
+            <a:avLst>
+              <a:gd name="adj" fmla="val 7619"/>
+            </a:avLst>
+          </a:prstGeom>
+          <a:solidFill>
+            <a:schemeClr val="bg2"/>
+          </a:solidFill>
+          <a:ln w="12700">
+            <a:solidFill>
+              <a:schemeClr val="bg2"/>
+            </a:solidFill>
+            <a:prstDash val="solid"/>
+          </a:ln>
+        </p:spPr>
+      </p:sp>
+      <p:sp>
+        <p:nvSpPr>
+          <p:cNvPr id="8" name="stat-big"/>
+          <p:cNvSpPr txBox="1"/>
+          <p:nvPr/>
+        </p:nvSpPr>
+        <p:spPr>
+          <a:xfrm>
+            <a:off x="6671577" y="1124712"/>
+            <a:ext cx="1878063" cy="457200"/>
+          </a:xfrm>
+          <a:prstGeom prst="rect">
+            <a:avLst/>
+          </a:prstGeom>
+          <a:noFill/>
+          <a:ln/>
+        </p:spPr>
+        <p:txBody>
+          <a:bodyPr wrap="square" lIns="0" tIns="0" rIns="0" bIns="0" rtlCol="0" anchor="ctr"/>
+          <a:lstStyle/>
+          <a:p>
             <a:pPr indent="0" marL="0">
               <a:buNone/>
             </a:pPr>
             <a:r>
-              <a:rPr lang="en-US" sz="1200" b="1" dirty="0">
+              <a:rPr lang="en-US" sz="2600" b="1" dirty="0">
                 <a:solidFill>
                   <a:schemeClr val="accent1"/>
                 </a:solidFill>
-              </a:rPr>
-              <a:t>Rung 3 is this paper: </a:t>
-            </a:r>
+                <a:latin typeface="Cambria" pitchFamily="34" charset="0"/>
+                <a:ea typeface="Cambria" pitchFamily="34" charset="-122"/>
+                <a:cs typeface="Cambria" pitchFamily="34" charset="-120"/>
+              </a:rPr>
+              <a:t>1%</a:t>
+            </a:r>
+            <a:endParaRPr lang="en-US" sz="2600" dirty="0"/>
+          </a:p>
+        </p:txBody>
+      </p:sp>
+      <p:sp>
+        <p:nvSpPr>
+          <p:cNvPr id="9" name="stat-label"/>
+          <p:cNvSpPr txBox="1"/>
+          <p:nvPr/>
+        </p:nvSpPr>
+        <p:spPr>
+          <a:xfrm>
+            <a:off x="6671577" y="1600200"/>
+            <a:ext cx="1878063" cy="356616"/>
+          </a:xfrm>
+          <a:prstGeom prst="rect">
+            <a:avLst/>
+          </a:prstGeom>
+          <a:noFill/>
+          <a:ln/>
+        </p:spPr>
+        <p:txBody>
+          <a:bodyPr wrap="square" lIns="0" tIns="0" rIns="0" bIns="0" rtlCol="0" anchor="t"/>
+          <a:lstStyle/>
+          <a:p>
             <a:pPr indent="0" marL="0">
               <a:buNone/>
             </a:pPr>
             <a:r>
-              <a:rPr lang="en-US" sz="1200" dirty="0">
+              <a:rPr lang="en-US" sz="1100" dirty="0">
+                <a:solidFill>
+                  <a:schemeClr val="accent3"/>
+                </a:solidFill>
+              </a:rPr>
+              <a:t>cap on any one deposit; sizes log-normal (σ 2.5) below it</a:t>
+            </a:r>
+            <a:endParaRPr lang="en-US" sz="1100" dirty="0"/>
+          </a:p>
+        </p:txBody>
+      </p:sp>
+      <p:sp>
+        <p:nvSpPr>
+          <p:cNvPr id="10" name="stat-risk aversion; parti"/>
+          <p:cNvSpPr/>
+          <p:nvPr/>
+        </p:nvSpPr>
+        <p:spPr>
+          <a:xfrm>
+            <a:off x="4244873" y="2148840"/>
+            <a:ext cx="2152383" cy="960120"/>
+          </a:xfrm>
+          <a:prstGeom prst="roundRect">
+            <a:avLst>
+              <a:gd name="adj" fmla="val 7619"/>
+            </a:avLst>
+          </a:prstGeom>
+          <a:solidFill>
+            <a:schemeClr val="bg2"/>
+          </a:solidFill>
+          <a:ln w="12700">
+            <a:solidFill>
+              <a:schemeClr val="bg2"/>
+            </a:solidFill>
+            <a:prstDash val="solid"/>
+          </a:ln>
+        </p:spPr>
+      </p:sp>
+      <p:sp>
+        <p:nvSpPr>
+          <p:cNvPr id="11" name="stat-big"/>
+          <p:cNvSpPr txBox="1"/>
+          <p:nvPr/>
+        </p:nvSpPr>
+        <p:spPr>
+          <a:xfrm>
+            <a:off x="4382033" y="2221992"/>
+            <a:ext cx="1878063" cy="457200"/>
+          </a:xfrm>
+          <a:prstGeom prst="rect">
+            <a:avLst/>
+          </a:prstGeom>
+          <a:noFill/>
+          <a:ln/>
+        </p:spPr>
+        <p:txBody>
+          <a:bodyPr wrap="square" lIns="0" tIns="0" rIns="0" bIns="0" rtlCol="0" anchor="ctr"/>
+          <a:lstStyle/>
+          <a:p>
+            <a:pPr indent="0" marL="0">
+              <a:buNone/>
+            </a:pPr>
+            <a:r>
+              <a:rPr lang="en-US" sz="2200" b="1" dirty="0">
+                <a:solidFill>
+                  <a:schemeClr val="accent1"/>
+                </a:solidFill>
+                <a:latin typeface="Cambria" pitchFamily="34" charset="0"/>
+                <a:ea typeface="Cambria" pitchFamily="34" charset="-122"/>
+                <a:cs typeface="Cambria" pitchFamily="34" charset="-120"/>
+              </a:rPr>
+              <a:t>CARA 0.1</a:t>
+            </a:r>
+            <a:endParaRPr lang="en-US" sz="2200" dirty="0"/>
+          </a:p>
+        </p:txBody>
+      </p:sp>
+      <p:sp>
+        <p:nvSpPr>
+          <p:cNvPr id="12" name="stat-label"/>
+          <p:cNvSpPr txBox="1"/>
+          <p:nvPr/>
+        </p:nvSpPr>
+        <p:spPr>
+          <a:xfrm>
+            <a:off x="4382033" y="2697480"/>
+            <a:ext cx="1878063" cy="356616"/>
+          </a:xfrm>
+          <a:prstGeom prst="rect">
+            <a:avLst/>
+          </a:prstGeom>
+          <a:noFill/>
+          <a:ln/>
+        </p:spPr>
+        <p:txBody>
+          <a:bodyPr wrap="square" lIns="0" tIns="0" rIns="0" bIns="0" rtlCol="0" anchor="t"/>
+          <a:lstStyle/>
+          <a:p>
+            <a:pPr indent="0" marL="0">
+              <a:buNone/>
+            </a:pPr>
+            <a:r>
+              <a:rPr lang="en-US" sz="1100" dirty="0">
+                <a:solidFill>
+                  <a:schemeClr val="accent3"/>
+                </a:solidFill>
+              </a:rPr>
+              <a:t>risk aversion; partial withdrawals allowed</a:t>
+            </a:r>
+            <a:endParaRPr lang="en-US" sz="1100" dirty="0"/>
+          </a:p>
+        </p:txBody>
+      </p:sp>
+      <p:sp>
+        <p:nvSpPr>
+          <p:cNvPr id="13" name="stat-runs per cell: 25 in"/>
+          <p:cNvSpPr/>
+          <p:nvPr/>
+        </p:nvSpPr>
+        <p:spPr>
+          <a:xfrm>
+            <a:off x="6534417" y="2148840"/>
+            <a:ext cx="2152383" cy="960120"/>
+          </a:xfrm>
+          <a:prstGeom prst="roundRect">
+            <a:avLst>
+              <a:gd name="adj" fmla="val 7619"/>
+            </a:avLst>
+          </a:prstGeom>
+          <a:solidFill>
+            <a:schemeClr val="bg2"/>
+          </a:solidFill>
+          <a:ln w="12700">
+            <a:solidFill>
+              <a:schemeClr val="bg2"/>
+            </a:solidFill>
+            <a:prstDash val="solid"/>
+          </a:ln>
+        </p:spPr>
+      </p:sp>
+      <p:sp>
+        <p:nvSpPr>
+          <p:cNvPr id="14" name="stat-big"/>
+          <p:cNvSpPr txBox="1"/>
+          <p:nvPr/>
+        </p:nvSpPr>
+        <p:spPr>
+          <a:xfrm>
+            <a:off x="6671577" y="2221992"/>
+            <a:ext cx="1878063" cy="457200"/>
+          </a:xfrm>
+          <a:prstGeom prst="rect">
+            <a:avLst/>
+          </a:prstGeom>
+          <a:noFill/>
+          <a:ln/>
+        </p:spPr>
+        <p:txBody>
+          <a:bodyPr wrap="square" lIns="0" tIns="0" rIns="0" bIns="0" rtlCol="0" anchor="ctr"/>
+          <a:lstStyle/>
+          <a:p>
+            <a:pPr indent="0" marL="0">
+              <a:buNone/>
+            </a:pPr>
+            <a:r>
+              <a:rPr lang="en-US" sz="2600" b="1" dirty="0">
+                <a:solidFill>
+                  <a:schemeClr val="accent1"/>
+                </a:solidFill>
+                <a:latin typeface="Cambria" pitchFamily="34" charset="0"/>
+                <a:ea typeface="Cambria" pitchFamily="34" charset="-122"/>
+                <a:cs typeface="Cambria" pitchFamily="34" charset="-120"/>
+              </a:rPr>
+              <a:t>250</a:t>
+            </a:r>
+            <a:endParaRPr lang="en-US" sz="2600" dirty="0"/>
+          </a:p>
+        </p:txBody>
+      </p:sp>
+      <p:sp>
+        <p:nvSpPr>
+          <p:cNvPr id="15" name="stat-label"/>
+          <p:cNvSpPr txBox="1"/>
+          <p:nvPr/>
+        </p:nvSpPr>
+        <p:spPr>
+          <a:xfrm>
+            <a:off x="6671577" y="2697480"/>
+            <a:ext cx="1878063" cy="356616"/>
+          </a:xfrm>
+          <a:prstGeom prst="rect">
+            <a:avLst/>
+          </a:prstGeom>
+          <a:noFill/>
+          <a:ln/>
+        </p:spPr>
+        <p:txBody>
+          <a:bodyPr wrap="square" lIns="0" tIns="0" rIns="0" bIns="0" rtlCol="0" anchor="t"/>
+          <a:lstStyle/>
+          <a:p>
+            <a:pPr indent="0" marL="0">
+              <a:buNone/>
+            </a:pPr>
+            <a:r>
+              <a:rPr lang="en-US" sz="1100" dirty="0">
+                <a:solidFill>
+                  <a:schemeClr val="accent3"/>
+                </a:solidFill>
+              </a:rPr>
+              <a:t>runs per cell: 25 initialisations × 10 draws</a:t>
+            </a:r>
+            <a:endParaRPr lang="en-US" sz="1100" dirty="0"/>
+          </a:p>
+        </p:txBody>
+      </p:sp>
+      <p:sp>
+        <p:nvSpPr>
+          <p:cNvPr id="16" name="bullets"/>
+          <p:cNvSpPr txBox="1"/>
+          <p:nvPr/>
+        </p:nvSpPr>
+        <p:spPr>
+          <a:xfrm>
+            <a:off x="4244873" y="3200400"/>
+            <a:ext cx="4441927" cy="1371600"/>
+          </a:xfrm>
+          <a:prstGeom prst="rect">
+            <a:avLst/>
+          </a:prstGeom>
+          <a:noFill/>
+          <a:ln/>
+        </p:spPr>
+        <p:txBody>
+          <a:bodyPr wrap="square" lIns="0" tIns="0" rIns="0" bIns="0" rtlCol="0" anchor="t"/>
+          <a:lstStyle/>
+          <a:p>
+            <a:pPr marL="177800" indent="-177800">
+              <a:spcAft>
+                <a:spcPts val="400"/>
+              </a:spcAft>
+              <a:buSzPct val="100000"/>
+              <a:buChar char="•"/>
+            </a:pPr>
+            <a:r>
+              <a:rPr lang="en-US" sz="1150" dirty="0">
                 <a:solidFill>
                   <a:schemeClr val="tx1"/>
                 </a:solidFill>
               </a:rPr>
-              <a:t>the only one that orders depositors by a trait, and reverses when the public line is too optimistic or too pessimistic.</a:t>
-            </a:r>
-            <a:endParaRPr lang="en-US" sz="1200" dirty="0"/>
+              <a:t>One bank that sells its long asset at a discount when cash runs short (a fire-sale bank)</a:t>
+            </a:r>
+            <a:endParaRPr lang="en-US" sz="1150" dirty="0"/>
+          </a:p>
+          <a:p>
+            <a:pPr marL="177800" indent="-177800">
+              <a:spcAft>
+                <a:spcPts val="400"/>
+              </a:spcAft>
+              <a:buSzPct val="100000"/>
+              <a:buChar char="•"/>
+            </a:pPr>
+            <a:r>
+              <a:rPr lang="en-US" sz="1150" dirty="0">
+                <a:solidFill>
+                  <a:schemeClr val="tx1"/>
+                </a:solidFill>
+              </a:rPr>
+              <a:t>Each tick a depositor sees neighbours’ withdrawals and the public news, blends them with a private signal, and withdraws if that pays</a:t>
+            </a:r>
+            <a:endParaRPr lang="en-US" sz="1150" dirty="0"/>
+          </a:p>
+          <a:p>
+            <a:pPr marL="177800" indent="-177800">
+              <a:spcAft>
+                <a:spcPts val="400"/>
+              </a:spcAft>
+              <a:buSzPct val="100000"/>
+              <a:buChar char="•"/>
+            </a:pPr>
+            <a:r>
+              <a:rPr lang="en-US" sz="1150" dirty="0">
+                <a:solidFill>
+                  <a:schemeClr val="tx1"/>
+                </a:solidFill>
+              </a:rPr>
+              <a:t>A public signal can be absent, accurate, or outdated</a:t>
+            </a:r>
+            <a:endParaRPr lang="en-US" sz="1150" dirty="0"/>
+          </a:p>
+          <a:p>
+            <a:pPr marL="177800" indent="-177800">
+              <a:spcAft>
+                <a:spcPts val="400"/>
+              </a:spcAft>
+              <a:buSzPct val="100000"/>
+              <a:buChar char="•"/>
+            </a:pPr>
+            <a:r>
+              <a:rPr lang="en-US" sz="1150" dirty="0">
+                <a:solidFill>
+                  <a:schemeClr val="tx1"/>
+                </a:solidFill>
+              </a:rPr>
+              <a:t>Outcomes: D = individualists’ minus collectivists’ withdrawal share (those not hit by the shock); P(fail) = share of runs that fail</a:t>
+            </a:r>
+            <a:endParaRPr lang="en-US" sz="1150" dirty="0"/>
           </a:p>
         </p:txBody>
       </p:sp>
@@ -9458,50 +9172,26 @@
                   <a:schemeClr val="tx2"/>
                 </a:solidFill>
               </a:rPr>
-              <a:t>The model in one picture</a:t>
+              <a:t>Individualists and collectivists: who listens to whom</a:t>
             </a:r>
             <a:endParaRPr lang="en-US" sz="2400" dirty="0"/>
           </a:p>
         </p:txBody>
       </p:sp>
-      <p:pic>
-        <p:nvPicPr>
-          <p:cNvPr id="3" name="odd" descr="Model overview: depositors on a social network with a bank; each run draws fundamentals and signals, a shock hits, then depositors observe neighbours and news, form beliefs, and decide whether to withdraw, tick by tick.">    </p:cNvPr>
-          <p:cNvPicPr>
-            <a:picLocks noChangeAspect="1"/>
-          </p:cNvPicPr>
-          <p:nvPr/>
-        </p:nvPicPr>
-        <p:blipFill>
-          <a:blip r:embed="rId1"/>
-          <a:stretch>
-            <a:fillRect/>
-          </a:stretch>
-        </p:blipFill>
+      <p:sp>
+        <p:nvSpPr>
+          <p:cNvPr id="3" name="type-Individualists"/>
+          <p:cNvSpPr/>
+          <p:nvPr/>
+        </p:nvSpPr>
         <p:spPr>
           <a:xfrm>
             <a:off x="457200" y="1051560"/>
-            <a:ext cx="3467633" cy="3520440"/>
-          </a:xfrm>
-          <a:prstGeom prst="rect">
-            <a:avLst/>
-          </a:prstGeom>
-        </p:spPr>
-      </p:pic>
-      <p:sp>
-        <p:nvSpPr>
-          <p:cNvPr id="4" name="stat-depositors on a smal"/>
-          <p:cNvSpPr/>
-          <p:nvPr/>
-        </p:nvSpPr>
-        <p:spPr>
-          <a:xfrm>
-            <a:off x="4244873" y="1051560"/>
-            <a:ext cx="2152383" cy="960120"/>
+            <a:ext cx="4023360" cy="2377440"/>
           </a:xfrm>
           <a:prstGeom prst="roundRect">
             <a:avLst>
-              <a:gd name="adj" fmla="val 7619"/>
+              <a:gd name="adj" fmla="val 3077"/>
             </a:avLst>
           </a:prstGeom>
           <a:solidFill>
@@ -9517,14 +9207,14 @@
       </p:sp>
       <p:sp>
         <p:nvSpPr>
-          <p:cNvPr id="5" name="stat-big"/>
+          <p:cNvPr id="4" name="type-head"/>
           <p:cNvSpPr txBox="1"/>
           <p:nvPr/>
         </p:nvSpPr>
         <p:spPr>
           <a:xfrm>
-            <a:off x="4382033" y="1124712"/>
-            <a:ext cx="1878063" cy="457200"/>
+            <a:off x="640080" y="1143000"/>
+            <a:ext cx="3657600" cy="365760"/>
           </a:xfrm>
           <a:prstGeom prst="rect">
             <a:avLst/>
@@ -9540,30 +9230,27 @@
               <a:buNone/>
             </a:pPr>
             <a:r>
-              <a:rPr lang="en-US" sz="2600" b="1" dirty="0">
-                <a:solidFill>
-                  <a:schemeClr val="accent1"/>
-                </a:solidFill>
-                <a:latin typeface="Cambria" pitchFamily="34" charset="0"/>
-                <a:ea typeface="Cambria" pitchFamily="34" charset="-122"/>
-                <a:cs typeface="Cambria" pitchFamily="34" charset="-120"/>
-              </a:rPr>
-              <a:t>1,000</a:t>
-            </a:r>
-            <a:endParaRPr lang="en-US" sz="2600" dirty="0"/>
-          </a:p>
-        </p:txBody>
-      </p:sp>
-      <p:sp>
-        <p:nvSpPr>
-          <p:cNvPr id="6" name="stat-label"/>
+              <a:rPr lang="en-US" sz="1800" b="1" dirty="0">
+                <a:solidFill>
+                  <a:srgbClr val="EB6834"/>
+                </a:solidFill>
+              </a:rPr>
+              <a:t>Individualists</a:t>
+            </a:r>
+            <a:endParaRPr lang="en-US" sz="1800" dirty="0"/>
+          </a:p>
+        </p:txBody>
+      </p:sp>
+      <p:sp>
+        <p:nvSpPr>
+          <p:cNvPr id="5" name="bullets"/>
           <p:cNvSpPr txBox="1"/>
           <p:nvPr/>
         </p:nvSpPr>
         <p:spPr>
           <a:xfrm>
-            <a:off x="4382033" y="1600200"/>
-            <a:ext cx="1878063" cy="356616"/>
+            <a:off x="640080" y="1600200"/>
+            <a:ext cx="3657600" cy="1737360"/>
           </a:xfrm>
           <a:prstGeom prst="rect">
             <a:avLst/>
@@ -9575,35 +9262,93 @@
           <a:bodyPr wrap="square" lIns="0" tIns="0" rIns="0" bIns="0" rtlCol="0" anchor="t"/>
           <a:lstStyle/>
           <a:p>
-            <a:pPr indent="0" marL="0">
-              <a:buNone/>
-            </a:pPr>
-            <a:r>
-              <a:rPr lang="en-US" sz="1100" dirty="0">
-                <a:solidFill>
-                  <a:schemeClr val="accent3"/>
-                </a:solidFill>
-              </a:rPr>
-              <a:t>depositors on a small-world network, one bank</a:t>
-            </a:r>
-            <a:endParaRPr lang="en-US" sz="1100" dirty="0"/>
-          </a:p>
-        </p:txBody>
-      </p:sp>
-      <p:sp>
-        <p:nvSpPr>
-          <p:cNvPr id="7" name="stat-cap on any one depos"/>
+            <a:pPr marL="177800" indent="-177800">
+              <a:spcAft>
+                <a:spcPts val="500"/>
+              </a:spcAft>
+              <a:buSzPct val="100000"/>
+              <a:buChar char="•"/>
+            </a:pPr>
+            <a:r>
+              <a:rPr lang="en-US" sz="1300" dirty="0">
+                <a:solidFill>
+                  <a:schemeClr val="tx1"/>
+                </a:solidFill>
+              </a:rPr>
+              <a:t>Trust their own information about the bank</a:t>
+            </a:r>
+            <a:endParaRPr lang="en-US" sz="1300" dirty="0"/>
+          </a:p>
+          <a:p>
+            <a:pPr marL="177800" indent="-177800">
+              <a:spcAft>
+                <a:spcPts val="500"/>
+              </a:spcAft>
+              <a:buSzPct val="100000"/>
+              <a:buChar char="•"/>
+            </a:pPr>
+            <a:r>
+              <a:rPr lang="en-US" sz="1300" dirty="0">
+                <a:solidFill>
+                  <a:schemeClr val="tx1"/>
+                </a:solidFill>
+              </a:rPr>
+              <a:t>Put little weight on what neighbours do or on public news</a:t>
+            </a:r>
+            <a:endParaRPr lang="en-US" sz="1300" dirty="0"/>
+          </a:p>
+          <a:p>
+            <a:pPr marL="177800" indent="-177800">
+              <a:spcAft>
+                <a:spcPts val="500"/>
+              </a:spcAft>
+              <a:buSzPct val="100000"/>
+              <a:buChar char="•"/>
+            </a:pPr>
+            <a:r>
+              <a:rPr lang="en-US" sz="1300" dirty="0">
+                <a:solidFill>
+                  <a:schemeClr val="tx1"/>
+                </a:solidFill>
+              </a:rPr>
+              <a:t>Weight on the social side: λ = 0.1 to 0.3</a:t>
+            </a:r>
+            <a:endParaRPr lang="en-US" sz="1300" dirty="0"/>
+          </a:p>
+          <a:p>
+            <a:pPr marL="177800" indent="-177800">
+              <a:spcAft>
+                <a:spcPts val="500"/>
+              </a:spcAft>
+              <a:buSzPct val="100000"/>
+              <a:buChar char="•"/>
+            </a:pPr>
+            <a:r>
+              <a:rPr lang="en-US" sz="1300" dirty="0">
+                <a:solidFill>
+                  <a:schemeClr val="tx1"/>
+                </a:solidFill>
+              </a:rPr>
+              <a:t>Act on what they see themselves</a:t>
+            </a:r>
+            <a:endParaRPr lang="en-US" sz="1300" dirty="0"/>
+          </a:p>
+        </p:txBody>
+      </p:sp>
+      <p:sp>
+        <p:nvSpPr>
+          <p:cNvPr id="6" name="type-Collectivists"/>
           <p:cNvSpPr/>
           <p:nvPr/>
         </p:nvSpPr>
         <p:spPr>
           <a:xfrm>
-            <a:off x="6534417" y="1051560"/>
-            <a:ext cx="2152383" cy="960120"/>
+            <a:off x="4663440" y="1051560"/>
+            <a:ext cx="4023360" cy="2377440"/>
           </a:xfrm>
           <a:prstGeom prst="roundRect">
             <a:avLst>
-              <a:gd name="adj" fmla="val 7619"/>
+              <a:gd name="adj" fmla="val 3077"/>
             </a:avLst>
           </a:prstGeom>
           <a:solidFill>
@@ -9619,14 +9364,14 @@
       </p:sp>
       <p:sp>
         <p:nvSpPr>
-          <p:cNvPr id="8" name="stat-big"/>
+          <p:cNvPr id="7" name="type-head"/>
           <p:cNvSpPr txBox="1"/>
           <p:nvPr/>
         </p:nvSpPr>
         <p:spPr>
           <a:xfrm>
-            <a:off x="6671577" y="1124712"/>
-            <a:ext cx="1878063" cy="457200"/>
+            <a:off x="4846320" y="1143000"/>
+            <a:ext cx="3657600" cy="365760"/>
           </a:xfrm>
           <a:prstGeom prst="rect">
             <a:avLst/>
@@ -9642,39 +9387,232 @@
               <a:buNone/>
             </a:pPr>
             <a:r>
-              <a:rPr lang="en-US" sz="2600" b="1" dirty="0">
-                <a:solidFill>
-                  <a:schemeClr val="accent1"/>
+              <a:rPr lang="en-US" sz="1800" b="1" dirty="0">
+                <a:solidFill>
+                  <a:srgbClr val="2A78D6"/>
+                </a:solidFill>
+              </a:rPr>
+              <a:t>Collectivists</a:t>
+            </a:r>
+            <a:endParaRPr lang="en-US" sz="1800" dirty="0"/>
+          </a:p>
+        </p:txBody>
+      </p:sp>
+      <p:sp>
+        <p:nvSpPr>
+          <p:cNvPr id="8" name="bullets"/>
+          <p:cNvSpPr txBox="1"/>
+          <p:nvPr/>
+        </p:nvSpPr>
+        <p:spPr>
+          <a:xfrm>
+            <a:off x="4846320" y="1600200"/>
+            <a:ext cx="3657600" cy="1737360"/>
+          </a:xfrm>
+          <a:prstGeom prst="rect">
+            <a:avLst/>
+          </a:prstGeom>
+          <a:noFill/>
+          <a:ln/>
+        </p:spPr>
+        <p:txBody>
+          <a:bodyPr wrap="square" lIns="0" tIns="0" rIns="0" bIns="0" rtlCol="0" anchor="t"/>
+          <a:lstStyle/>
+          <a:p>
+            <a:pPr marL="177800" indent="-177800">
+              <a:spcAft>
+                <a:spcPts val="500"/>
+              </a:spcAft>
+              <a:buSzPct val="100000"/>
+              <a:buChar char="•"/>
+            </a:pPr>
+            <a:r>
+              <a:rPr lang="en-US" sz="1300" dirty="0">
+                <a:solidFill>
+                  <a:schemeClr val="tx1"/>
+                </a:solidFill>
+              </a:rPr>
+              <a:t>Watch what neighbours do and what the public news says</a:t>
+            </a:r>
+            <a:endParaRPr lang="en-US" sz="1300" dirty="0"/>
+          </a:p>
+          <a:p>
+            <a:pPr marL="177800" indent="-177800">
+              <a:spcAft>
+                <a:spcPts val="500"/>
+              </a:spcAft>
+              <a:buSzPct val="100000"/>
+              <a:buChar char="•"/>
+            </a:pPr>
+            <a:r>
+              <a:rPr lang="en-US" sz="1300" dirty="0">
+                <a:solidFill>
+                  <a:schemeClr val="tx1"/>
+                </a:solidFill>
+              </a:rPr>
+              <a:t>Put little weight on their own information</a:t>
+            </a:r>
+            <a:endParaRPr lang="en-US" sz="1300" dirty="0"/>
+          </a:p>
+          <a:p>
+            <a:pPr marL="177800" indent="-177800">
+              <a:spcAft>
+                <a:spcPts val="500"/>
+              </a:spcAft>
+              <a:buSzPct val="100000"/>
+              <a:buChar char="•"/>
+            </a:pPr>
+            <a:r>
+              <a:rPr lang="en-US" sz="1300" dirty="0">
+                <a:solidFill>
+                  <a:schemeClr val="tx1"/>
+                </a:solidFill>
+              </a:rPr>
+              <a:t>Weight on the social side: λ = 0.5 to 0.9</a:t>
+            </a:r>
+            <a:endParaRPr lang="en-US" sz="1300" dirty="0"/>
+          </a:p>
+          <a:p>
+            <a:pPr marL="177800" indent="-177800">
+              <a:spcAft>
+                <a:spcPts val="500"/>
+              </a:spcAft>
+              <a:buSzPct val="100000"/>
+              <a:buChar char="•"/>
+            </a:pPr>
+            <a:r>
+              <a:rPr lang="en-US" sz="1300" dirty="0">
+                <a:solidFill>
+                  <a:schemeClr val="tx1"/>
+                </a:solidFill>
+              </a:rPr>
+              <a:t>Move when others move</a:t>
+            </a:r>
+            <a:endParaRPr lang="en-US" sz="1300" dirty="0"/>
+          </a:p>
+        </p:txBody>
+      </p:sp>
+      <p:sp>
+        <p:nvSpPr>
+          <p:cNvPr id="9" name="pairs-head"/>
+          <p:cNvSpPr txBox="1"/>
+          <p:nvPr/>
+        </p:nvSpPr>
+        <p:spPr>
+          <a:xfrm>
+            <a:off x="457200" y="3611880"/>
+            <a:ext cx="4572000" cy="274320"/>
+          </a:xfrm>
+          <a:prstGeom prst="rect">
+            <a:avLst/>
+          </a:prstGeom>
+          <a:noFill/>
+          <a:ln/>
+        </p:spPr>
+        <p:txBody>
+          <a:bodyPr wrap="square" lIns="0" tIns="0" rIns="0" bIns="0" rtlCol="0" anchor="ctr"/>
+          <a:lstStyle/>
+          <a:p>
+            <a:pPr indent="0" marL="0">
+              <a:buNone/>
+            </a:pPr>
+            <a:r>
+              <a:rPr lang="en-US" sz="1100" b="1" dirty="0">
+                <a:solidFill>
+                  <a:schemeClr val="accent3"/>
+                </a:solidFill>
+              </a:rPr>
+              <a:t>Three pairs (λ individualist, λ collectivist) in the figures</a:t>
+            </a:r>
+            <a:endParaRPr lang="en-US" sz="1100" dirty="0"/>
+          </a:p>
+        </p:txBody>
+      </p:sp>
+      <p:sp>
+        <p:nvSpPr>
+          <p:cNvPr id="10" name="chip"/>
+          <p:cNvSpPr/>
+          <p:nvPr/>
+        </p:nvSpPr>
+        <p:spPr>
+          <a:xfrm>
+            <a:off x="457200" y="3931920"/>
+            <a:ext cx="914400" cy="329184"/>
+          </a:xfrm>
+          <a:prstGeom prst="roundRect">
+            <a:avLst>
+              <a:gd name="adj" fmla="val 16667"/>
+            </a:avLst>
+          </a:prstGeom>
+          <a:solidFill>
+            <a:schemeClr val="tx2"/>
+          </a:solidFill>
+          <a:ln w="12700">
+            <a:solidFill>
+              <a:schemeClr val="tx2"/>
+            </a:solidFill>
+            <a:prstDash val="solid"/>
+          </a:ln>
+        </p:spPr>
+      </p:sp>
+      <p:sp>
+        <p:nvSpPr>
+          <p:cNvPr id="11" name="chip-label"/>
+          <p:cNvSpPr txBox="1"/>
+          <p:nvPr/>
+        </p:nvSpPr>
+        <p:spPr>
+          <a:xfrm>
+            <a:off x="457200" y="3931920"/>
+            <a:ext cx="914400" cy="329184"/>
+          </a:xfrm>
+          <a:prstGeom prst="rect">
+            <a:avLst/>
+          </a:prstGeom>
+          <a:noFill/>
+          <a:ln/>
+        </p:spPr>
+        <p:txBody>
+          <a:bodyPr wrap="square" lIns="0" tIns="0" rIns="0" bIns="0" rtlCol="0" anchor="ctr"/>
+          <a:lstStyle/>
+          <a:p>
+            <a:pPr algn="ctr" indent="0" marL="0">
+              <a:buNone/>
+            </a:pPr>
+            <a:r>
+              <a:rPr lang="en-US" sz="1100" b="1" dirty="0">
+                <a:solidFill>
+                  <a:schemeClr val="bg1"/>
                 </a:solidFill>
                 <a:latin typeface="Cambria" pitchFamily="34" charset="0"/>
                 <a:ea typeface="Cambria" pitchFamily="34" charset="-122"/>
                 <a:cs typeface="Cambria" pitchFamily="34" charset="-120"/>
               </a:rPr>
-              <a:t>1%</a:t>
-            </a:r>
-            <a:endParaRPr lang="en-US" sz="2600" dirty="0"/>
-          </a:p>
-        </p:txBody>
-      </p:sp>
-      <p:sp>
-        <p:nvSpPr>
-          <p:cNvPr id="9" name="stat-label"/>
+              <a:t>(0.1, 0.9)</a:t>
+            </a:r>
+            <a:endParaRPr lang="en-US" sz="1100" dirty="0"/>
+          </a:p>
+        </p:txBody>
+      </p:sp>
+      <p:sp>
+        <p:nvSpPr>
+          <p:cNvPr id="12" name="pair-label"/>
           <p:cNvSpPr txBox="1"/>
           <p:nvPr/>
         </p:nvSpPr>
         <p:spPr>
           <a:xfrm>
-            <a:off x="6671577" y="1600200"/>
-            <a:ext cx="1878063" cy="356616"/>
-          </a:xfrm>
-          <a:prstGeom prst="rect">
-            <a:avLst/>
-          </a:prstGeom>
-          <a:noFill/>
-          <a:ln/>
-        </p:spPr>
-        <p:txBody>
-          <a:bodyPr wrap="square" lIns="0" tIns="0" rIns="0" bIns="0" rtlCol="0" anchor="t"/>
+            <a:off x="1417320" y="3931920"/>
+            <a:ext cx="640080" cy="329184"/>
+          </a:xfrm>
+          <a:prstGeom prst="rect">
+            <a:avLst/>
+          </a:prstGeom>
+          <a:noFill/>
+          <a:ln/>
+        </p:spPr>
+        <p:txBody>
+          <a:bodyPr wrap="square" lIns="0" tIns="0" rIns="0" bIns="0" rtlCol="0" anchor="ctr"/>
           <a:lstStyle/>
           <a:p>
             <a:pPr indent="0" marL="0">
@@ -9686,7 +9624,7 @@
                   <a:schemeClr val="accent3"/>
                 </a:solidFill>
               </a:rPr>
-              <a:t>cap on any one deposit; sizes log-normal (σ 2.5) below it</a:t>
+              <a:t>wide gap</a:t>
             </a:r>
             <a:endParaRPr lang="en-US" sz="1100" dirty="0"/>
           </a:p>
@@ -9694,26 +9632,26 @@
       </p:sp>
       <p:sp>
         <p:nvSpPr>
-          <p:cNvPr id="10" name="stat-risk aversion; parti"/>
+          <p:cNvPr id="13" name="chip"/>
           <p:cNvSpPr/>
           <p:nvPr/>
         </p:nvSpPr>
         <p:spPr>
           <a:xfrm>
-            <a:off x="4244873" y="2148840"/>
-            <a:ext cx="2152383" cy="960120"/>
+            <a:off x="2057400" y="3931920"/>
+            <a:ext cx="914400" cy="329184"/>
           </a:xfrm>
           <a:prstGeom prst="roundRect">
             <a:avLst>
-              <a:gd name="adj" fmla="val 7619"/>
+              <a:gd name="adj" fmla="val 16667"/>
             </a:avLst>
           </a:prstGeom>
           <a:solidFill>
-            <a:schemeClr val="bg2"/>
+            <a:schemeClr val="accent3"/>
           </a:solidFill>
           <a:ln w="12700">
             <a:solidFill>
-              <a:schemeClr val="bg2"/>
+              <a:schemeClr val="accent3"/>
             </a:solidFill>
             <a:prstDash val="solid"/>
           </a:ln>
@@ -9721,14 +9659,14 @@
       </p:sp>
       <p:sp>
         <p:nvSpPr>
-          <p:cNvPr id="11" name="stat-big"/>
+          <p:cNvPr id="14" name="chip-label"/>
           <p:cNvSpPr txBox="1"/>
           <p:nvPr/>
         </p:nvSpPr>
         <p:spPr>
           <a:xfrm>
-            <a:off x="4382033" y="2221992"/>
-            <a:ext cx="1878063" cy="457200"/>
+            <a:off x="2057400" y="3931920"/>
+            <a:ext cx="914400" cy="329184"/>
           </a:xfrm>
           <a:prstGeom prst="rect">
             <a:avLst/>
@@ -9740,43 +9678,43 @@
           <a:bodyPr wrap="square" lIns="0" tIns="0" rIns="0" bIns="0" rtlCol="0" anchor="ctr"/>
           <a:lstStyle/>
           <a:p>
-            <a:pPr indent="0" marL="0">
-              <a:buNone/>
-            </a:pPr>
-            <a:r>
-              <a:rPr lang="en-US" sz="2200" b="1" dirty="0">
-                <a:solidFill>
-                  <a:schemeClr val="accent1"/>
+            <a:pPr algn="ctr" indent="0" marL="0">
+              <a:buNone/>
+            </a:pPr>
+            <a:r>
+              <a:rPr lang="en-US" sz="1100" b="1" dirty="0">
+                <a:solidFill>
+                  <a:schemeClr val="bg1"/>
                 </a:solidFill>
                 <a:latin typeface="Cambria" pitchFamily="34" charset="0"/>
                 <a:ea typeface="Cambria" pitchFamily="34" charset="-122"/>
                 <a:cs typeface="Cambria" pitchFamily="34" charset="-120"/>
               </a:rPr>
-              <a:t>CARA 0.1</a:t>
-            </a:r>
-            <a:endParaRPr lang="en-US" sz="2200" dirty="0"/>
-          </a:p>
-        </p:txBody>
-      </p:sp>
-      <p:sp>
-        <p:nvSpPr>
-          <p:cNvPr id="12" name="stat-label"/>
+              <a:t>(0.2, 0.8)</a:t>
+            </a:r>
+            <a:endParaRPr lang="en-US" sz="1100" dirty="0"/>
+          </a:p>
+        </p:txBody>
+      </p:sp>
+      <p:sp>
+        <p:nvSpPr>
+          <p:cNvPr id="15" name="pair-label"/>
           <p:cNvSpPr txBox="1"/>
           <p:nvPr/>
         </p:nvSpPr>
         <p:spPr>
           <a:xfrm>
-            <a:off x="4382033" y="2697480"/>
-            <a:ext cx="1878063" cy="356616"/>
-          </a:xfrm>
-          <a:prstGeom prst="rect">
-            <a:avLst/>
-          </a:prstGeom>
-          <a:noFill/>
-          <a:ln/>
-        </p:spPr>
-        <p:txBody>
-          <a:bodyPr wrap="square" lIns="0" tIns="0" rIns="0" bIns="0" rtlCol="0" anchor="t"/>
+            <a:off x="3017520" y="3931920"/>
+            <a:ext cx="640080" cy="329184"/>
+          </a:xfrm>
+          <a:prstGeom prst="rect">
+            <a:avLst/>
+          </a:prstGeom>
+          <a:noFill/>
+          <a:ln/>
+        </p:spPr>
+        <p:txBody>
+          <a:bodyPr wrap="square" lIns="0" tIns="0" rIns="0" bIns="0" rtlCol="0" anchor="ctr"/>
           <a:lstStyle/>
           <a:p>
             <a:pPr indent="0" marL="0">
@@ -9788,7 +9726,7 @@
                   <a:schemeClr val="accent3"/>
                 </a:solidFill>
               </a:rPr>
-              <a:t>risk aversion; partial withdrawals allowed</a:t>
+              <a:t>medium</a:t>
             </a:r>
             <a:endParaRPr lang="en-US" sz="1100" dirty="0"/>
           </a:p>
@@ -9796,26 +9734,26 @@
       </p:sp>
       <p:sp>
         <p:nvSpPr>
-          <p:cNvPr id="13" name="stat-runs per cell: 25 in"/>
+          <p:cNvPr id="16" name="chip"/>
           <p:cNvSpPr/>
           <p:nvPr/>
         </p:nvSpPr>
         <p:spPr>
           <a:xfrm>
-            <a:off x="6534417" y="2148840"/>
-            <a:ext cx="2152383" cy="960120"/>
+            <a:off x="3657600" y="3931920"/>
+            <a:ext cx="914400" cy="329184"/>
           </a:xfrm>
           <a:prstGeom prst="roundRect">
             <a:avLst>
-              <a:gd name="adj" fmla="val 7619"/>
+              <a:gd name="adj" fmla="val 16667"/>
             </a:avLst>
           </a:prstGeom>
           <a:solidFill>
-            <a:schemeClr val="bg2"/>
+            <a:schemeClr val="accent4"/>
           </a:solidFill>
           <a:ln w="12700">
             <a:solidFill>
-              <a:schemeClr val="bg2"/>
+              <a:schemeClr val="accent4"/>
             </a:solidFill>
             <a:prstDash val="solid"/>
           </a:ln>
@@ -9823,14 +9761,14 @@
       </p:sp>
       <p:sp>
         <p:nvSpPr>
-          <p:cNvPr id="14" name="stat-big"/>
+          <p:cNvPr id="17" name="chip-label"/>
           <p:cNvSpPr txBox="1"/>
           <p:nvPr/>
         </p:nvSpPr>
         <p:spPr>
           <a:xfrm>
-            <a:off x="6671577" y="2221992"/>
-            <a:ext cx="1878063" cy="457200"/>
+            <a:off x="3657600" y="3931920"/>
+            <a:ext cx="914400" cy="329184"/>
           </a:xfrm>
           <a:prstGeom prst="rect">
             <a:avLst/>
@@ -9842,34 +9780,70 @@
           <a:bodyPr wrap="square" lIns="0" tIns="0" rIns="0" bIns="0" rtlCol="0" anchor="ctr"/>
           <a:lstStyle/>
           <a:p>
-            <a:pPr indent="0" marL="0">
-              <a:buNone/>
-            </a:pPr>
-            <a:r>
-              <a:rPr lang="en-US" sz="2600" b="1" dirty="0">
-                <a:solidFill>
-                  <a:schemeClr val="accent1"/>
+            <a:pPr algn="ctr" indent="0" marL="0">
+              <a:buNone/>
+            </a:pPr>
+            <a:r>
+              <a:rPr lang="en-US" sz="1100" b="1" dirty="0">
+                <a:solidFill>
+                  <a:schemeClr val="tx1"/>
                 </a:solidFill>
                 <a:latin typeface="Cambria" pitchFamily="34" charset="0"/>
                 <a:ea typeface="Cambria" pitchFamily="34" charset="-122"/>
                 <a:cs typeface="Cambria" pitchFamily="34" charset="-120"/>
               </a:rPr>
-              <a:t>250</a:t>
-            </a:r>
-            <a:endParaRPr lang="en-US" sz="2600" dirty="0"/>
-          </a:p>
-        </p:txBody>
-      </p:sp>
-      <p:sp>
-        <p:nvSpPr>
-          <p:cNvPr id="15" name="stat-label"/>
+              <a:t>(0.3, 0.5)</a:t>
+            </a:r>
+            <a:endParaRPr lang="en-US" sz="1100" dirty="0"/>
+          </a:p>
+        </p:txBody>
+      </p:sp>
+      <p:sp>
+        <p:nvSpPr>
+          <p:cNvPr id="18" name="pair-label"/>
           <p:cNvSpPr txBox="1"/>
           <p:nvPr/>
         </p:nvSpPr>
         <p:spPr>
           <a:xfrm>
-            <a:off x="6671577" y="2697480"/>
-            <a:ext cx="1878063" cy="356616"/>
+            <a:off x="4617720" y="3931920"/>
+            <a:ext cx="640080" cy="329184"/>
+          </a:xfrm>
+          <a:prstGeom prst="rect">
+            <a:avLst/>
+          </a:prstGeom>
+          <a:noFill/>
+          <a:ln/>
+        </p:spPr>
+        <p:txBody>
+          <a:bodyPr wrap="square" lIns="0" tIns="0" rIns="0" bIns="0" rtlCol="0" anchor="ctr"/>
+          <a:lstStyle/>
+          <a:p>
+            <a:pPr indent="0" marL="0">
+              <a:buNone/>
+            </a:pPr>
+            <a:r>
+              <a:rPr lang="en-US" sz="1100" dirty="0">
+                <a:solidFill>
+                  <a:schemeClr val="accent3"/>
+                </a:solidFill>
+              </a:rPr>
+              <a:t>narrow</a:t>
+            </a:r>
+            <a:endParaRPr lang="en-US" sz="1100" dirty="0"/>
+          </a:p>
+        </p:txBody>
+      </p:sp>
+      <p:sp>
+        <p:nvSpPr>
+          <p:cNvPr id="19" name="mu-note"/>
+          <p:cNvSpPr txBox="1"/>
+          <p:nvPr/>
+        </p:nvSpPr>
+        <p:spPr>
+          <a:xfrm>
+            <a:off x="5303520" y="3611880"/>
+            <a:ext cx="3383280" cy="822960"/>
           </a:xfrm>
           <a:prstGeom prst="rect">
             <a:avLst/>
@@ -9890,103 +9864,53 @@
                   <a:schemeClr val="accent3"/>
                 </a:solidFill>
               </a:rPr>
-              <a:t>runs per cell: 25 initialisations × 10 draws</a:t>
+              <a:t>The share of individualists μ is set by a cultural warm-up on the network. </a:t>
+            </a:r>
+            <a:pPr indent="0" marL="0">
+              <a:buNone/>
+            </a:pPr>
+            <a:r>
+              <a:rPr lang="en-US" sz="1100" b="1" dirty="0">
+                <a:solidFill>
+                  <a:srgbClr val="EB6834"/>
+                </a:solidFill>
+              </a:rPr>
+              <a:t>Orange = individualists</a:t>
+            </a:r>
+            <a:pPr indent="0" marL="0">
+              <a:buNone/>
+            </a:pPr>
+            <a:r>
+              <a:rPr lang="en-US" sz="1100" dirty="0">
+                <a:solidFill>
+                  <a:schemeClr val="accent3"/>
+                </a:solidFill>
+              </a:rPr>
+              <a:t>, </a:t>
+            </a:r>
+            <a:pPr indent="0" marL="0">
+              <a:buNone/>
+            </a:pPr>
+            <a:r>
+              <a:rPr lang="en-US" sz="1100" b="1" dirty="0">
+                <a:solidFill>
+                  <a:srgbClr val="2A78D6"/>
+                </a:solidFill>
+              </a:rPr>
+              <a:t>blue = collectivists</a:t>
+            </a:r>
+            <a:pPr indent="0" marL="0">
+              <a:buNone/>
+            </a:pPr>
+            <a:r>
+              <a:rPr lang="en-US" sz="1100" dirty="0">
+                <a:solidFill>
+                  <a:schemeClr val="accent3"/>
+                </a:solidFill>
+              </a:rPr>
+              <a:t> throughout.</a:t>
             </a:r>
             <a:endParaRPr lang="en-US" sz="1100" dirty="0"/>
-          </a:p>
-        </p:txBody>
-      </p:sp>
-      <p:sp>
-        <p:nvSpPr>
-          <p:cNvPr id="16" name="bullets"/>
-          <p:cNvSpPr txBox="1"/>
-          <p:nvPr/>
-        </p:nvSpPr>
-        <p:spPr>
-          <a:xfrm>
-            <a:off x="4244873" y="3200400"/>
-            <a:ext cx="4441927" cy="1371600"/>
-          </a:xfrm>
-          <a:prstGeom prst="rect">
-            <a:avLst/>
-          </a:prstGeom>
-          <a:noFill/>
-          <a:ln/>
-        </p:spPr>
-        <p:txBody>
-          <a:bodyPr wrap="square" lIns="0" tIns="0" rIns="0" bIns="0" rtlCol="0" anchor="t"/>
-          <a:lstStyle/>
-          <a:p>
-            <a:pPr marL="177800" indent="-177800">
-              <a:spcAft>
-                <a:spcPts val="400"/>
-              </a:spcAft>
-              <a:buSzPct val="100000"/>
-              <a:buChar char="•"/>
-            </a:pPr>
-            <a:r>
-              <a:rPr lang="en-US" sz="1150" dirty="0">
-                <a:solidFill>
-                  <a:schemeClr val="tx1"/>
-                </a:solidFill>
-              </a:rPr>
-              <a:t>One bank that sells its long asset at a discount when cash runs short (a fire-sale bank)</a:t>
-            </a:r>
-            <a:endParaRPr lang="en-US" sz="1150" dirty="0"/>
-          </a:p>
-          <a:p>
-            <a:pPr marL="177800" indent="-177800">
-              <a:spcAft>
-                <a:spcPts val="400"/>
-              </a:spcAft>
-              <a:buSzPct val="100000"/>
-              <a:buChar char="•"/>
-            </a:pPr>
-            <a:r>
-              <a:rPr lang="en-US" sz="1150" dirty="0">
-                <a:solidFill>
-                  <a:schemeClr val="tx1"/>
-                </a:solidFill>
-              </a:rPr>
-              <a:t>Each tick a depositor sees neighbours’ withdrawals and the public news, blends them with a private signal, and withdraws if that pays</a:t>
-            </a:r>
-            <a:endParaRPr lang="en-US" sz="1150" dirty="0"/>
-          </a:p>
-          <a:p>
-            <a:pPr marL="177800" indent="-177800">
-              <a:spcAft>
-                <a:spcPts val="400"/>
-              </a:spcAft>
-              <a:buSzPct val="100000"/>
-              <a:buChar char="•"/>
-            </a:pPr>
-            <a:r>
-              <a:rPr lang="en-US" sz="1150" dirty="0">
-                <a:solidFill>
-                  <a:schemeClr val="tx1"/>
-                </a:solidFill>
-              </a:rPr>
-              <a:t>A public signal can be absent, accurate, or outdated</a:t>
-            </a:r>
-            <a:endParaRPr lang="en-US" sz="1150" dirty="0"/>
-          </a:p>
-          <a:p>
-            <a:pPr marL="177800" indent="-177800">
-              <a:spcAft>
-                <a:spcPts val="400"/>
-              </a:spcAft>
-              <a:buSzPct val="100000"/>
-              <a:buChar char="•"/>
-            </a:pPr>
-            <a:r>
-              <a:rPr lang="en-US" sz="1150" dirty="0">
-                <a:solidFill>
-                  <a:schemeClr val="tx1"/>
-                </a:solidFill>
-              </a:rPr>
-              <a:t>Outcomes: D = individualists’ minus collectivists’ withdrawal share (those not hit by the shock); P(fail) = share of runs that fail</a:t>
-            </a:r>
-            <a:endParaRPr lang="en-US" sz="1150" dirty="0"/>
           </a:p>
         </p:txBody>
       </p:sp>
@@ -10092,26 +10016,86 @@
                   <a:schemeClr val="tx2"/>
                 </a:solidFill>
               </a:rPr>
-              <a:t>Individualists and collectivists: who listens to whom</a:t>
+              <a:t>Collectivists herd</a:t>
             </a:r>
             <a:endParaRPr lang="en-US" sz="2400" dirty="0"/>
           </a:p>
         </p:txBody>
       </p:sp>
-      <p:sp>
-        <p:nvSpPr>
-          <p:cNvPr id="3" name="type-Individualists"/>
+      <p:pic>
+        <p:nvPicPr>
+          <p:cNvPr id="3" name="e07" descr="Chance of withdrawing by share of neighbours who have withdrawn: collectivists jump to near 1 once 20 to 35 percent of neighbours are out; individualists level off near 0.25 to 0.30.">    </p:cNvPr>
+          <p:cNvPicPr>
+            <a:picLocks noChangeAspect="1"/>
+          </p:cNvPicPr>
+          <p:nvPr/>
+        </p:nvPicPr>
+        <p:blipFill>
+          <a:blip r:embed="rId1"/>
+          <a:stretch>
+            <a:fillRect/>
+          </a:stretch>
+        </p:blipFill>
+        <p:spPr>
+          <a:xfrm>
+            <a:off x="457200" y="1051560"/>
+            <a:ext cx="5164897" cy="3291840"/>
+          </a:xfrm>
+          <a:prstGeom prst="rect">
+            <a:avLst/>
+          </a:prstGeom>
+        </p:spPr>
+      </p:pic>
+      <p:sp>
+        <p:nvSpPr>
+          <p:cNvPr id="4" name="caption"/>
+          <p:cNvSpPr txBox="1"/>
+          <p:nvPr/>
+        </p:nvSpPr>
+        <p:spPr>
+          <a:xfrm>
+            <a:off x="457200" y="4389120"/>
+            <a:ext cx="5486400" cy="274320"/>
+          </a:xfrm>
+          <a:prstGeom prst="rect">
+            <a:avLst/>
+          </a:prstGeom>
+          <a:noFill/>
+          <a:ln/>
+        </p:spPr>
+        <p:txBody>
+          <a:bodyPr wrap="square" lIns="0" tIns="0" rIns="0" bIns="0" rtlCol="0" anchor="ctr"/>
+          <a:lstStyle/>
+          <a:p>
+            <a:pPr indent="0" marL="0">
+              <a:buNone/>
+            </a:pPr>
+            <a:r>
+              <a:rPr lang="en-US" sz="1000" i="1" dirty="0">
+                <a:solidFill>
+                  <a:schemeClr val="accent3"/>
+                </a:solidFill>
+              </a:rPr>
+              <a:t>Chance of withdrawing, given the share of a depositor’s neighbours who have already withdrawn. λ pairs pooled; reference bank.</a:t>
+            </a:r>
+            <a:endParaRPr lang="en-US" sz="1000" dirty="0"/>
+          </a:p>
+        </p:txBody>
+      </p:sp>
+      <p:sp>
+        <p:nvSpPr>
+          <p:cNvPr id="5" name="stat-collectivists, once "/>
           <p:cNvSpPr/>
           <p:nvPr/>
         </p:nvSpPr>
         <p:spPr>
           <a:xfrm>
-            <a:off x="457200" y="1051560"/>
-            <a:ext cx="4023360" cy="2377440"/>
+            <a:off x="6217920" y="1051560"/>
+            <a:ext cx="2468880" cy="1005840"/>
           </a:xfrm>
           <a:prstGeom prst="roundRect">
             <a:avLst>
-              <a:gd name="adj" fmla="val 3077"/>
+              <a:gd name="adj" fmla="val 7273"/>
             </a:avLst>
           </a:prstGeom>
           <a:solidFill>
@@ -10127,14 +10111,14 @@
       </p:sp>
       <p:sp>
         <p:nvSpPr>
-          <p:cNvPr id="4" name="type-head"/>
+          <p:cNvPr id="6" name="stat-big"/>
           <p:cNvSpPr txBox="1"/>
           <p:nvPr/>
         </p:nvSpPr>
         <p:spPr>
           <a:xfrm>
-            <a:off x="640080" y="1143000"/>
-            <a:ext cx="3657600" cy="365760"/>
+            <a:off x="6355080" y="1124712"/>
+            <a:ext cx="2194560" cy="457200"/>
           </a:xfrm>
           <a:prstGeom prst="rect">
             <a:avLst/>
@@ -10150,27 +10134,30 @@
               <a:buNone/>
             </a:pPr>
             <a:r>
-              <a:rPr lang="en-US" sz="1800" b="1" dirty="0">
-                <a:solidFill>
-                  <a:srgbClr val="EB6834"/>
-                </a:solidFill>
-              </a:rPr>
-              <a:t>Individualists</a:t>
-            </a:r>
-            <a:endParaRPr lang="en-US" sz="1800" dirty="0"/>
-          </a:p>
-        </p:txBody>
-      </p:sp>
-      <p:sp>
-        <p:nvSpPr>
-          <p:cNvPr id="5" name="bullets"/>
+              <a:rPr lang="en-US" sz="2200" b="1" dirty="0">
+                <a:solidFill>
+                  <a:srgbClr val="2A78D6"/>
+                </a:solidFill>
+                <a:latin typeface="Cambria" pitchFamily="34" charset="0"/>
+                <a:ea typeface="Cambria" pitchFamily="34" charset="-122"/>
+                <a:cs typeface="Cambria" pitchFamily="34" charset="-120"/>
+              </a:rPr>
+              <a:t>0.15 to 0.93</a:t>
+            </a:r>
+            <a:endParaRPr lang="en-US" sz="2200" dirty="0"/>
+          </a:p>
+        </p:txBody>
+      </p:sp>
+      <p:sp>
+        <p:nvSpPr>
+          <p:cNvPr id="7" name="stat-label"/>
           <p:cNvSpPr txBox="1"/>
           <p:nvPr/>
         </p:nvSpPr>
         <p:spPr>
           <a:xfrm>
-            <a:off x="640080" y="1600200"/>
-            <a:ext cx="3657600" cy="1737360"/>
+            <a:off x="6355080" y="1600200"/>
+            <a:ext cx="2194560" cy="402336"/>
           </a:xfrm>
           <a:prstGeom prst="rect">
             <a:avLst/>
@@ -10182,93 +10169,35 @@
           <a:bodyPr wrap="square" lIns="0" tIns="0" rIns="0" bIns="0" rtlCol="0" anchor="t"/>
           <a:lstStyle/>
           <a:p>
-            <a:pPr marL="177800" indent="-177800">
-              <a:spcAft>
-                <a:spcPts val="500"/>
-              </a:spcAft>
-              <a:buSzPct val="100000"/>
-              <a:buChar char="•"/>
-            </a:pPr>
-            <a:r>
-              <a:rPr lang="en-US" sz="1300" dirty="0">
-                <a:solidFill>
-                  <a:schemeClr val="tx1"/>
-                </a:solidFill>
-              </a:rPr>
-              <a:t>Trust their own information about the bank</a:t>
-            </a:r>
-            <a:endParaRPr lang="en-US" sz="1300" dirty="0"/>
-          </a:p>
-          <a:p>
-            <a:pPr marL="177800" indent="-177800">
-              <a:spcAft>
-                <a:spcPts val="500"/>
-              </a:spcAft>
-              <a:buSzPct val="100000"/>
-              <a:buChar char="•"/>
-            </a:pPr>
-            <a:r>
-              <a:rPr lang="en-US" sz="1300" dirty="0">
-                <a:solidFill>
-                  <a:schemeClr val="tx1"/>
-                </a:solidFill>
-              </a:rPr>
-              <a:t>Put little weight on what neighbours do or on public news</a:t>
-            </a:r>
-            <a:endParaRPr lang="en-US" sz="1300" dirty="0"/>
-          </a:p>
-          <a:p>
-            <a:pPr marL="177800" indent="-177800">
-              <a:spcAft>
-                <a:spcPts val="500"/>
-              </a:spcAft>
-              <a:buSzPct val="100000"/>
-              <a:buChar char="•"/>
-            </a:pPr>
-            <a:r>
-              <a:rPr lang="en-US" sz="1300" dirty="0">
-                <a:solidFill>
-                  <a:schemeClr val="tx1"/>
-                </a:solidFill>
-              </a:rPr>
-              <a:t>Weight on the social side: λ = 0.1 to 0.3</a:t>
-            </a:r>
-            <a:endParaRPr lang="en-US" sz="1300" dirty="0"/>
-          </a:p>
-          <a:p>
-            <a:pPr marL="177800" indent="-177800">
-              <a:spcAft>
-                <a:spcPts val="500"/>
-              </a:spcAft>
-              <a:buSzPct val="100000"/>
-              <a:buChar char="•"/>
-            </a:pPr>
-            <a:r>
-              <a:rPr lang="en-US" sz="1300" dirty="0">
-                <a:solidFill>
-                  <a:schemeClr val="tx1"/>
-                </a:solidFill>
-              </a:rPr>
-              <a:t>Act on what they see themselves</a:t>
-            </a:r>
-            <a:endParaRPr lang="en-US" sz="1300" dirty="0"/>
-          </a:p>
-        </p:txBody>
-      </p:sp>
-      <p:sp>
-        <p:nvSpPr>
-          <p:cNvPr id="6" name="type-Collectivists"/>
+            <a:pPr indent="0" marL="0">
+              <a:buNone/>
+            </a:pPr>
+            <a:r>
+              <a:rPr lang="en-US" sz="1100" dirty="0">
+                <a:solidFill>
+                  <a:schemeClr val="accent3"/>
+                </a:solidFill>
+              </a:rPr>
+              <a:t>collectivists, once 20–35% of their neighbours are out</a:t>
+            </a:r>
+            <a:endParaRPr lang="en-US" sz="1100" dirty="0"/>
+          </a:p>
+        </p:txBody>
+      </p:sp>
+      <p:sp>
+        <p:nvSpPr>
+          <p:cNvPr id="8" name="stat-where individualists"/>
           <p:cNvSpPr/>
           <p:nvPr/>
         </p:nvSpPr>
         <p:spPr>
           <a:xfrm>
-            <a:off x="4663440" y="1051560"/>
-            <a:ext cx="4023360" cy="2377440"/>
+            <a:off x="6217920" y="2194560"/>
+            <a:ext cx="2468880" cy="1005840"/>
           </a:xfrm>
           <a:prstGeom prst="roundRect">
             <a:avLst>
-              <a:gd name="adj" fmla="val 3077"/>
+              <a:gd name="adj" fmla="val 7273"/>
             </a:avLst>
           </a:prstGeom>
           <a:solidFill>
@@ -10284,14 +10213,14 @@
       </p:sp>
       <p:sp>
         <p:nvSpPr>
-          <p:cNvPr id="7" name="type-head"/>
+          <p:cNvPr id="9" name="stat-big"/>
           <p:cNvSpPr txBox="1"/>
           <p:nvPr/>
         </p:nvSpPr>
         <p:spPr>
           <a:xfrm>
-            <a:off x="4846320" y="1143000"/>
-            <a:ext cx="3657600" cy="365760"/>
+            <a:off x="6355080" y="2267712"/>
+            <a:ext cx="2194560" cy="457200"/>
           </a:xfrm>
           <a:prstGeom prst="rect">
             <a:avLst/>
@@ -10307,27 +10236,30 @@
               <a:buNone/>
             </a:pPr>
             <a:r>
-              <a:rPr lang="en-US" sz="1800" b="1" dirty="0">
-                <a:solidFill>
-                  <a:srgbClr val="2A78D6"/>
-                </a:solidFill>
-              </a:rPr>
-              <a:t>Collectivists</a:t>
-            </a:r>
-            <a:endParaRPr lang="en-US" sz="1800" dirty="0"/>
-          </a:p>
-        </p:txBody>
-      </p:sp>
-      <p:sp>
-        <p:nvSpPr>
-          <p:cNvPr id="8" name="bullets"/>
+              <a:rPr lang="en-US" sz="2200" b="1" dirty="0">
+                <a:solidFill>
+                  <a:srgbClr val="EB6834"/>
+                </a:solidFill>
+                <a:latin typeface="Cambria" pitchFamily="34" charset="0"/>
+                <a:ea typeface="Cambria" pitchFamily="34" charset="-122"/>
+                <a:cs typeface="Cambria" pitchFamily="34" charset="-120"/>
+              </a:rPr>
+              <a:t>0.25 to 0.30</a:t>
+            </a:r>
+            <a:endParaRPr lang="en-US" sz="2200" dirty="0"/>
+          </a:p>
+        </p:txBody>
+      </p:sp>
+      <p:sp>
+        <p:nvSpPr>
+          <p:cNvPr id="10" name="stat-label"/>
           <p:cNvSpPr txBox="1"/>
           <p:nvPr/>
         </p:nvSpPr>
         <p:spPr>
           <a:xfrm>
-            <a:off x="4846320" y="1600200"/>
-            <a:ext cx="3657600" cy="1737360"/>
+            <a:off x="6355080" y="2743200"/>
+            <a:ext cx="2194560" cy="402336"/>
           </a:xfrm>
           <a:prstGeom prst="rect">
             <a:avLst/>
@@ -10339,110 +10271,16 @@
           <a:bodyPr wrap="square" lIns="0" tIns="0" rIns="0" bIns="0" rtlCol="0" anchor="t"/>
           <a:lstStyle/>
           <a:p>
-            <a:pPr marL="177800" indent="-177800">
-              <a:spcAft>
-                <a:spcPts val="500"/>
-              </a:spcAft>
-              <a:buSzPct val="100000"/>
-              <a:buChar char="•"/>
-            </a:pPr>
-            <a:r>
-              <a:rPr lang="en-US" sz="1300" dirty="0">
-                <a:solidFill>
-                  <a:schemeClr val="tx1"/>
-                </a:solidFill>
-              </a:rPr>
-              <a:t>Watch what neighbours do and what the public news says</a:t>
-            </a:r>
-            <a:endParaRPr lang="en-US" sz="1300" dirty="0"/>
-          </a:p>
-          <a:p>
-            <a:pPr marL="177800" indent="-177800">
-              <a:spcAft>
-                <a:spcPts val="500"/>
-              </a:spcAft>
-              <a:buSzPct val="100000"/>
-              <a:buChar char="•"/>
-            </a:pPr>
-            <a:r>
-              <a:rPr lang="en-US" sz="1300" dirty="0">
-                <a:solidFill>
-                  <a:schemeClr val="tx1"/>
-                </a:solidFill>
-              </a:rPr>
-              <a:t>Put little weight on their own information</a:t>
-            </a:r>
-            <a:endParaRPr lang="en-US" sz="1300" dirty="0"/>
-          </a:p>
-          <a:p>
-            <a:pPr marL="177800" indent="-177800">
-              <a:spcAft>
-                <a:spcPts val="500"/>
-              </a:spcAft>
-              <a:buSzPct val="100000"/>
-              <a:buChar char="•"/>
-            </a:pPr>
-            <a:r>
-              <a:rPr lang="en-US" sz="1300" dirty="0">
-                <a:solidFill>
-                  <a:schemeClr val="tx1"/>
-                </a:solidFill>
-              </a:rPr>
-              <a:t>Weight on the social side: λ = 0.5 to 0.9</a:t>
-            </a:r>
-            <a:endParaRPr lang="en-US" sz="1300" dirty="0"/>
-          </a:p>
-          <a:p>
-            <a:pPr marL="177800" indent="-177800">
-              <a:spcAft>
-                <a:spcPts val="500"/>
-              </a:spcAft>
-              <a:buSzPct val="100000"/>
-              <a:buChar char="•"/>
-            </a:pPr>
-            <a:r>
-              <a:rPr lang="en-US" sz="1300" dirty="0">
-                <a:solidFill>
-                  <a:schemeClr val="tx1"/>
-                </a:solidFill>
-              </a:rPr>
-              <a:t>Move when others move</a:t>
-            </a:r>
-            <a:endParaRPr lang="en-US" sz="1300" dirty="0"/>
-          </a:p>
-        </p:txBody>
-      </p:sp>
-      <p:sp>
-        <p:nvSpPr>
-          <p:cNvPr id="9" name="pairs-head"/>
-          <p:cNvSpPr txBox="1"/>
-          <p:nvPr/>
-        </p:nvSpPr>
-        <p:spPr>
-          <a:xfrm>
-            <a:off x="457200" y="3611880"/>
-            <a:ext cx="4572000" cy="274320"/>
-          </a:xfrm>
-          <a:prstGeom prst="rect">
-            <a:avLst/>
-          </a:prstGeom>
-          <a:noFill/>
-          <a:ln/>
-        </p:spPr>
-        <p:txBody>
-          <a:bodyPr wrap="square" lIns="0" tIns="0" rIns="0" bIns="0" rtlCol="0" anchor="ctr"/>
-          <a:lstStyle/>
-          <a:p>
             <a:pPr indent="0" marL="0">
               <a:buNone/>
             </a:pPr>
             <a:r>
-              <a:rPr lang="en-US" sz="1100" b="1" dirty="0">
+              <a:rPr lang="en-US" sz="1100" dirty="0">
                 <a:solidFill>
                   <a:schemeClr val="accent3"/>
                 </a:solidFill>
               </a:rPr>
-              <a:t>Three pairs (λ individualist, λ collectivist) in the figures</a:t>
+              <a:t>where individualists level off, whatever their neighbours do</a:t>
             </a:r>
             <a:endParaRPr lang="en-US" sz="1100" dirty="0"/>
           </a:p>
@@ -10450,26 +10288,26 @@
       </p:sp>
       <p:sp>
         <p:nvSpPr>
-          <p:cNvPr id="10" name="chip"/>
+          <p:cNvPr id="11" name="stat-difference in slopes"/>
           <p:cNvSpPr/>
           <p:nvPr/>
         </p:nvSpPr>
         <p:spPr>
           <a:xfrm>
-            <a:off x="457200" y="3931920"/>
-            <a:ext cx="914400" cy="329184"/>
+            <a:off x="6217920" y="3337560"/>
+            <a:ext cx="2468880" cy="1097280"/>
           </a:xfrm>
           <a:prstGeom prst="roundRect">
             <a:avLst>
-              <a:gd name="adj" fmla="val 16667"/>
+              <a:gd name="adj" fmla="val 6667"/>
             </a:avLst>
           </a:prstGeom>
           <a:solidFill>
-            <a:schemeClr val="tx2"/>
+            <a:schemeClr val="bg2"/>
           </a:solidFill>
           <a:ln w="12700">
             <a:solidFill>
-              <a:schemeClr val="tx2"/>
+              <a:schemeClr val="bg2"/>
             </a:solidFill>
             <a:prstDash val="solid"/>
           </a:ln>
@@ -10477,14 +10315,14 @@
       </p:sp>
       <p:sp>
         <p:nvSpPr>
-          <p:cNvPr id="11" name="chip-label"/>
+          <p:cNvPr id="12" name="stat-big"/>
           <p:cNvSpPr txBox="1"/>
           <p:nvPr/>
         </p:nvSpPr>
         <p:spPr>
           <a:xfrm>
-            <a:off x="457200" y="3931920"/>
-            <a:ext cx="914400" cy="329184"/>
+            <a:off x="6355080" y="3410712"/>
+            <a:ext cx="2194560" cy="457200"/>
           </a:xfrm>
           <a:prstGeom prst="rect">
             <a:avLst/>
@@ -10496,43 +10334,43 @@
           <a:bodyPr wrap="square" lIns="0" tIns="0" rIns="0" bIns="0" rtlCol="0" anchor="ctr"/>
           <a:lstStyle/>
           <a:p>
-            <a:pPr algn="ctr" indent="0" marL="0">
-              <a:buNone/>
-            </a:pPr>
-            <a:r>
-              <a:rPr lang="en-US" sz="1100" b="1" dirty="0">
-                <a:solidFill>
-                  <a:schemeClr val="bg1"/>
+            <a:pPr indent="0" marL="0">
+              <a:buNone/>
+            </a:pPr>
+            <a:r>
+              <a:rPr lang="en-US" sz="2600" b="1" dirty="0">
+                <a:solidFill>
+                  <a:schemeClr val="accent1"/>
                 </a:solidFill>
                 <a:latin typeface="Cambria" pitchFamily="34" charset="0"/>
                 <a:ea typeface="Cambria" pitchFamily="34" charset="-122"/>
                 <a:cs typeface="Cambria" pitchFamily="34" charset="-120"/>
               </a:rPr>
-              <a:t>(0.1, 0.9)</a:t>
-            </a:r>
-            <a:endParaRPr lang="en-US" sz="1100" dirty="0"/>
-          </a:p>
-        </p:txBody>
-      </p:sp>
-      <p:sp>
-        <p:nvSpPr>
-          <p:cNvPr id="12" name="pair-label"/>
+              <a:t>+0.58</a:t>
+            </a:r>
+            <a:endParaRPr lang="en-US" sz="2600" dirty="0"/>
+          </a:p>
+        </p:txBody>
+      </p:sp>
+      <p:sp>
+        <p:nvSpPr>
+          <p:cNvPr id="13" name="stat-label"/>
           <p:cNvSpPr txBox="1"/>
           <p:nvPr/>
         </p:nvSpPr>
         <p:spPr>
           <a:xfrm>
-            <a:off x="1417320" y="3931920"/>
-            <a:ext cx="640080" cy="329184"/>
-          </a:xfrm>
-          <a:prstGeom prst="rect">
-            <a:avLst/>
-          </a:prstGeom>
-          <a:noFill/>
-          <a:ln/>
-        </p:spPr>
-        <p:txBody>
-          <a:bodyPr wrap="square" lIns="0" tIns="0" rIns="0" bIns="0" rtlCol="0" anchor="ctr"/>
+            <a:off x="6355080" y="3886200"/>
+            <a:ext cx="2194560" cy="493776"/>
+          </a:xfrm>
+          <a:prstGeom prst="rect">
+            <a:avLst/>
+          </a:prstGeom>
+          <a:noFill/>
+          <a:ln/>
+        </p:spPr>
+        <p:txBody>
+          <a:bodyPr wrap="square" lIns="0" tIns="0" rIns="0" bIns="0" rtlCol="0" anchor="t"/>
           <a:lstStyle/>
           <a:p>
             <a:pPr indent="0" marL="0">
@@ -10544,291 +10382,7 @@
                   <a:schemeClr val="accent3"/>
                 </a:solidFill>
               </a:rPr>
-              <a:t>wide gap</a:t>
-            </a:r>
-            <a:endParaRPr lang="en-US" sz="1100" dirty="0"/>
-          </a:p>
-        </p:txBody>
-      </p:sp>
-      <p:sp>
-        <p:nvSpPr>
-          <p:cNvPr id="13" name="chip"/>
-          <p:cNvSpPr/>
-          <p:nvPr/>
-        </p:nvSpPr>
-        <p:spPr>
-          <a:xfrm>
-            <a:off x="2057400" y="3931920"/>
-            <a:ext cx="914400" cy="329184"/>
-          </a:xfrm>
-          <a:prstGeom prst="roundRect">
-            <a:avLst>
-              <a:gd name="adj" fmla="val 16667"/>
-            </a:avLst>
-          </a:prstGeom>
-          <a:solidFill>
-            <a:schemeClr val="accent3"/>
-          </a:solidFill>
-          <a:ln w="12700">
-            <a:solidFill>
-              <a:schemeClr val="accent3"/>
-            </a:solidFill>
-            <a:prstDash val="solid"/>
-          </a:ln>
-        </p:spPr>
-      </p:sp>
-      <p:sp>
-        <p:nvSpPr>
-          <p:cNvPr id="14" name="chip-label"/>
-          <p:cNvSpPr txBox="1"/>
-          <p:nvPr/>
-        </p:nvSpPr>
-        <p:spPr>
-          <a:xfrm>
-            <a:off x="2057400" y="3931920"/>
-            <a:ext cx="914400" cy="329184"/>
-          </a:xfrm>
-          <a:prstGeom prst="rect">
-            <a:avLst/>
-          </a:prstGeom>
-          <a:noFill/>
-          <a:ln/>
-        </p:spPr>
-        <p:txBody>
-          <a:bodyPr wrap="square" lIns="0" tIns="0" rIns="0" bIns="0" rtlCol="0" anchor="ctr"/>
-          <a:lstStyle/>
-          <a:p>
-            <a:pPr algn="ctr" indent="0" marL="0">
-              <a:buNone/>
-            </a:pPr>
-            <a:r>
-              <a:rPr lang="en-US" sz="1100" b="1" dirty="0">
-                <a:solidFill>
-                  <a:schemeClr val="bg1"/>
-                </a:solidFill>
-                <a:latin typeface="Cambria" pitchFamily="34" charset="0"/>
-                <a:ea typeface="Cambria" pitchFamily="34" charset="-122"/>
-                <a:cs typeface="Cambria" pitchFamily="34" charset="-120"/>
-              </a:rPr>
-              <a:t>(0.2, 0.8)</a:t>
-            </a:r>
-            <a:endParaRPr lang="en-US" sz="1100" dirty="0"/>
-          </a:p>
-        </p:txBody>
-      </p:sp>
-      <p:sp>
-        <p:nvSpPr>
-          <p:cNvPr id="15" name="pair-label"/>
-          <p:cNvSpPr txBox="1"/>
-          <p:nvPr/>
-        </p:nvSpPr>
-        <p:spPr>
-          <a:xfrm>
-            <a:off x="3017520" y="3931920"/>
-            <a:ext cx="640080" cy="329184"/>
-          </a:xfrm>
-          <a:prstGeom prst="rect">
-            <a:avLst/>
-          </a:prstGeom>
-          <a:noFill/>
-          <a:ln/>
-        </p:spPr>
-        <p:txBody>
-          <a:bodyPr wrap="square" lIns="0" tIns="0" rIns="0" bIns="0" rtlCol="0" anchor="ctr"/>
-          <a:lstStyle/>
-          <a:p>
-            <a:pPr indent="0" marL="0">
-              <a:buNone/>
-            </a:pPr>
-            <a:r>
-              <a:rPr lang="en-US" sz="1100" dirty="0">
-                <a:solidFill>
-                  <a:schemeClr val="accent3"/>
-                </a:solidFill>
-              </a:rPr>
-              <a:t>medium</a:t>
-            </a:r>
-            <a:endParaRPr lang="en-US" sz="1100" dirty="0"/>
-          </a:p>
-        </p:txBody>
-      </p:sp>
-      <p:sp>
-        <p:nvSpPr>
-          <p:cNvPr id="16" name="chip"/>
-          <p:cNvSpPr/>
-          <p:nvPr/>
-        </p:nvSpPr>
-        <p:spPr>
-          <a:xfrm>
-            <a:off x="3657600" y="3931920"/>
-            <a:ext cx="914400" cy="329184"/>
-          </a:xfrm>
-          <a:prstGeom prst="roundRect">
-            <a:avLst>
-              <a:gd name="adj" fmla="val 16667"/>
-            </a:avLst>
-          </a:prstGeom>
-          <a:solidFill>
-            <a:schemeClr val="accent4"/>
-          </a:solidFill>
-          <a:ln w="12700">
-            <a:solidFill>
-              <a:schemeClr val="accent4"/>
-            </a:solidFill>
-            <a:prstDash val="solid"/>
-          </a:ln>
-        </p:spPr>
-      </p:sp>
-      <p:sp>
-        <p:nvSpPr>
-          <p:cNvPr id="17" name="chip-label"/>
-          <p:cNvSpPr txBox="1"/>
-          <p:nvPr/>
-        </p:nvSpPr>
-        <p:spPr>
-          <a:xfrm>
-            <a:off x="3657600" y="3931920"/>
-            <a:ext cx="914400" cy="329184"/>
-          </a:xfrm>
-          <a:prstGeom prst="rect">
-            <a:avLst/>
-          </a:prstGeom>
-          <a:noFill/>
-          <a:ln/>
-        </p:spPr>
-        <p:txBody>
-          <a:bodyPr wrap="square" lIns="0" tIns="0" rIns="0" bIns="0" rtlCol="0" anchor="ctr"/>
-          <a:lstStyle/>
-          <a:p>
-            <a:pPr algn="ctr" indent="0" marL="0">
-              <a:buNone/>
-            </a:pPr>
-            <a:r>
-              <a:rPr lang="en-US" sz="1100" b="1" dirty="0">
-                <a:solidFill>
-                  <a:schemeClr val="tx1"/>
-                </a:solidFill>
-                <a:latin typeface="Cambria" pitchFamily="34" charset="0"/>
-                <a:ea typeface="Cambria" pitchFamily="34" charset="-122"/>
-                <a:cs typeface="Cambria" pitchFamily="34" charset="-120"/>
-              </a:rPr>
-              <a:t>(0.3, 0.5)</a:t>
-            </a:r>
-            <a:endParaRPr lang="en-US" sz="1100" dirty="0"/>
-          </a:p>
-        </p:txBody>
-      </p:sp>
-      <p:sp>
-        <p:nvSpPr>
-          <p:cNvPr id="18" name="pair-label"/>
-          <p:cNvSpPr txBox="1"/>
-          <p:nvPr/>
-        </p:nvSpPr>
-        <p:spPr>
-          <a:xfrm>
-            <a:off x="4617720" y="3931920"/>
-            <a:ext cx="640080" cy="329184"/>
-          </a:xfrm>
-          <a:prstGeom prst="rect">
-            <a:avLst/>
-          </a:prstGeom>
-          <a:noFill/>
-          <a:ln/>
-        </p:spPr>
-        <p:txBody>
-          <a:bodyPr wrap="square" lIns="0" tIns="0" rIns="0" bIns="0" rtlCol="0" anchor="ctr"/>
-          <a:lstStyle/>
-          <a:p>
-            <a:pPr indent="0" marL="0">
-              <a:buNone/>
-            </a:pPr>
-            <a:r>
-              <a:rPr lang="en-US" sz="1100" dirty="0">
-                <a:solidFill>
-                  <a:schemeClr val="accent3"/>
-                </a:solidFill>
-              </a:rPr>
-              <a:t>narrow</a:t>
-            </a:r>
-            <a:endParaRPr lang="en-US" sz="1100" dirty="0"/>
-          </a:p>
-        </p:txBody>
-      </p:sp>
-      <p:sp>
-        <p:nvSpPr>
-          <p:cNvPr id="19" name="mu-note"/>
-          <p:cNvSpPr txBox="1"/>
-          <p:nvPr/>
-        </p:nvSpPr>
-        <p:spPr>
-          <a:xfrm>
-            <a:off x="5303520" y="3611880"/>
-            <a:ext cx="3383280" cy="822960"/>
-          </a:xfrm>
-          <a:prstGeom prst="rect">
-            <a:avLst/>
-          </a:prstGeom>
-          <a:noFill/>
-          <a:ln/>
-        </p:spPr>
-        <p:txBody>
-          <a:bodyPr wrap="square" lIns="0" tIns="0" rIns="0" bIns="0" rtlCol="0" anchor="t"/>
-          <a:lstStyle/>
-          <a:p>
-            <a:pPr indent="0" marL="0">
-              <a:buNone/>
-            </a:pPr>
-            <a:r>
-              <a:rPr lang="en-US" sz="1100" dirty="0">
-                <a:solidFill>
-                  <a:schemeClr val="accent3"/>
-                </a:solidFill>
-              </a:rPr>
-              <a:t>The share of individualists μ is set by a cultural warm-up on the network. </a:t>
-            </a:r>
-            <a:pPr indent="0" marL="0">
-              <a:buNone/>
-            </a:pPr>
-            <a:r>
-              <a:rPr lang="en-US" sz="1100" b="1" dirty="0">
-                <a:solidFill>
-                  <a:srgbClr val="EB6834"/>
-                </a:solidFill>
-              </a:rPr>
-              <a:t>Orange = individualists</a:t>
-            </a:r>
-            <a:pPr indent="0" marL="0">
-              <a:buNone/>
-            </a:pPr>
-            <a:r>
-              <a:rPr lang="en-US" sz="1100" dirty="0">
-                <a:solidFill>
-                  <a:schemeClr val="accent3"/>
-                </a:solidFill>
-              </a:rPr>
-              <a:t>, </a:t>
-            </a:r>
-            <a:pPr indent="0" marL="0">
-              <a:buNone/>
-            </a:pPr>
-            <a:r>
-              <a:rPr lang="en-US" sz="1100" b="1" dirty="0">
-                <a:solidFill>
-                  <a:srgbClr val="2A78D6"/>
-                </a:solidFill>
-              </a:rPr>
-              <a:t>blue = collectivists</a:t>
-            </a:r>
-            <a:pPr indent="0" marL="0">
-              <a:buNone/>
-            </a:pPr>
-            <a:r>
-              <a:rPr lang="en-US" sz="1100" dirty="0">
-                <a:solidFill>
-                  <a:schemeClr val="accent3"/>
-                </a:solidFill>
-              </a:rPr>
-              <a:t> throughout.</a:t>
+              <a:t>difference in slopes (collectivists 0.80, individualists 0.22), t = 16.7</a:t>
             </a:r>
             <a:endParaRPr lang="en-US" sz="1100" dirty="0"/>
           </a:p>

--- a/docs/deck_2026-10-26_seminar.pptx
+++ b/docs/deck_2026-10-26_seminar.pptx
@@ -126,7 +126,7 @@
   <p:extLst>
     <p:ext uri="{521415D9-36F7-43E2-AB2F-B90AF26B5E84}">
       <p14:sectionLst xmlns:p14="http://schemas.microsoft.com/office/powerpoint/2010/main">
-        <p14:section name="Opening" id="{2f1dcad3-958c-d353-e35b-97829a00eb1c}">
+        <p14:section name="Opening" id="{38f2f7b6-4f00-4256-6d0f-c1d03ed050ae}">
           <p14:sldIdLst>
             <p14:sldId id="256"/>
             <p14:sldId id="257"/>
@@ -136,13 +136,13 @@
             <p14:sldId id="261"/>
           </p14:sldIdLst>
         </p14:section>
-        <p14:section name="The model" id="{dd27b7fe-d3dd-a096-5fa7-c1ef7af34f9b}">
+        <p14:section name="The model" id="{fd43a280-0a9c-5794-1f48-6c4092cc82ac}">
           <p14:sldIdLst>
             <p14:sldId id="262"/>
             <p14:sldId id="263"/>
           </p14:sldIdLst>
         </p14:section>
-        <p14:section name="Results" id="{4678a944-3cdc-1a9d-72f2-21811f6b4087}">
+        <p14:section name="Results" id="{5817c6c6-979e-cd9b-7c08-d4bc68add732}">
           <p14:sldIdLst>
             <p14:sldId id="264"/>
             <p14:sldId id="265"/>
@@ -150,17 +150,17 @@
             <p14:sldId id="267"/>
           </p14:sldIdLst>
         </p14:section>
-        <p14:section name="Validation" id="{da2a085d-e910-4f99-02f7-d20b1348fce6}">
+        <p14:section name="Validation" id="{c6126056-7f46-5a0e-f527-b09765bb04a0}">
           <p14:sldIdLst>
             <p14:sldId id="268"/>
           </p14:sldIdLst>
         </p14:section>
-        <p14:section name="Close" id="{ba6b389a-1350-f68c-2588-0f3332085e9a}">
+        <p14:section name="Close" id="{0b49eb75-640f-46e7-aaea-4598aca7d471}">
           <p14:sldIdLst>
             <p14:sldId id="269"/>
           </p14:sldIdLst>
         </p14:section>
-        <p14:section name="Backup" id="{ab6faf5d-9fcb-4fac-3801-838b4a801cda}">
+        <p14:section name="Backup" id="{8c1cda2f-6360-0d05-bcfb-be50caae211b}">
           <p14:sldIdLst>
             <p14:sldId id="270"/>
             <p14:sldId id="271"/>
@@ -1982,7 +1982,7 @@
           <a:p>
             <a:r>
               <a:rPr lang="en-US" dirty="0"/>
-              <a:t>~1 min. The ladder: variation in the signal (Goldstein-Pauzner: same signal technology, different draws, which selects the equilibrium), variation in location (who hears it, from whom, when: Kelly-O Grada, Iyer-Puri, Cookson et al.), variation in interpretation (the same two signals, different dispositional weights; culture is the stable source). Rung 1 orders depositors by luck, rung 2 by position, rung 3 by who they are, and only rung 3 predicts that the order flips with the sign of the public error. Nearest cousins to acknowledge if asked: Izmalkov-Yildiz 2010 (heterogeneous priors), He-Manela 2016 (information acquisition).</a:t>
+              <a:t>~1.5 min. The whole model in one line: a depositor blends what they are told with what they see, and the blend weight is a disposition, not a precision calculation (Chapter 1 writes it omega; the simulation writes it lambda). Subtracting the two types' estimates gives the wedge (lambda_C minus lambda_I)(x minus y): with the same pair of signals, the individualist's estimate is lower whenever private evidence is worse than the public line, so individualists run on a wider set of signals when the news is stale-optimistic, and the inclusion reverses when the news is stale-pessimistic. That is the sorting prediction the simulation tests. In the simulation, the public side is what neighbours do and what the news says, and lambda is drawn per agent in a cultural warm-up. Next: the simulation itself.</a:t>
             </a:r>
             <a:endParaRPr lang="en-US" dirty="0"/>
           </a:p>
@@ -8321,50 +8321,26 @@
                   <a:schemeClr val="tx2"/>
                 </a:solidFill>
               </a:rPr>
-              <a:t>The ladder: signal, location, interpretation</a:t>
+              <a:t>The model: one weight on two signals</a:t>
             </a:r>
             <a:endParaRPr lang="en-US" sz="2400" dirty="0"/>
           </a:p>
         </p:txBody>
       </p:sp>
-      <p:pic>
-        <p:nvPicPr>
-          <p:cNvPr id="3" name="ladder" descr="Three panels. Signal: one bank fundamental sends a noisy private signal to each depositor, who line up from run to stay. Location: a network in which the signal has reached some depositors from a first hearer and not others. Interpretation: the same private and public signals reach an individualist, who leans on the private signal, and a collectivist, who leans on the public one; culture sets the weight.">    </p:cNvPr>
-          <p:cNvPicPr>
-            <a:picLocks noChangeAspect="1"/>
-          </p:cNvPicPr>
-          <p:nvPr/>
-        </p:nvPicPr>
-        <p:blipFill>
-          <a:blip r:embed="rId1"/>
-          <a:stretch>
-            <a:fillRect/>
-          </a:stretch>
-        </p:blipFill>
-        <p:spPr>
-          <a:xfrm>
-            <a:off x="653339" y="1097280"/>
-            <a:ext cx="7837322" cy="2743200"/>
-          </a:xfrm>
-          <a:prstGeom prst="rect">
-            <a:avLst/>
-          </a:prstGeom>
-        </p:spPr>
-      </p:pic>
-      <p:sp>
-        <p:nvSpPr>
-          <p:cNvPr id="4" name="ladder-note"/>
+      <p:sp>
+        <p:nvSpPr>
+          <p:cNvPr id="3" name="eq-card"/>
           <p:cNvSpPr/>
           <p:nvPr/>
         </p:nvSpPr>
         <p:spPr>
           <a:xfrm>
-            <a:off x="457200" y="3977640"/>
-            <a:ext cx="8229600" cy="566928"/>
+            <a:off x="457200" y="1051560"/>
+            <a:ext cx="8229600" cy="1143000"/>
           </a:xfrm>
           <a:prstGeom prst="roundRect">
             <a:avLst>
-              <a:gd name="adj" fmla="val 12903"/>
+              <a:gd name="adj" fmla="val 6400"/>
             </a:avLst>
           </a:prstGeom>
           <a:solidFill>
@@ -8380,14 +8356,14 @@
       </p:sp>
       <p:sp>
         <p:nvSpPr>
-          <p:cNvPr id="5" name="ladder-text"/>
+          <p:cNvPr id="4" name="eq"/>
           <p:cNvSpPr txBox="1"/>
           <p:nvPr/>
         </p:nvSpPr>
         <p:spPr>
           <a:xfrm>
-            <a:off x="594360" y="4005072"/>
-            <a:ext cx="7955280" cy="512064"/>
+            <a:off x="640080" y="1097280"/>
+            <a:ext cx="7863840" cy="685800"/>
           </a:xfrm>
           <a:prstGeom prst="rect">
             <a:avLst/>
@@ -8399,40 +8375,834 @@
           <a:bodyPr wrap="square" lIns="0" tIns="0" rIns="0" bIns="0" rtlCol="0" anchor="ctr"/>
           <a:lstStyle/>
           <a:p>
-            <a:pPr indent="0" marL="0">
-              <a:buNone/>
-            </a:pPr>
-            <a:r>
-              <a:rPr lang="en-US" sz="1200" dirty="0">
+            <a:pPr algn="ctr" indent="0" marL="0">
+              <a:buNone/>
+            </a:pPr>
+            <a:r>
+              <a:rPr lang="en-US" sz="3000" i="1" dirty="0">
+                <a:solidFill>
+                  <a:schemeClr val="tx2"/>
+                </a:solidFill>
+                <a:latin typeface="Cambria" pitchFamily="34" charset="0"/>
+                <a:ea typeface="Cambria" pitchFamily="34" charset="-122"/>
+                <a:cs typeface="Cambria" pitchFamily="34" charset="-120"/>
+              </a:rPr>
+              <a:t>ŝ</a:t>
+            </a:r>
+            <a:pPr algn="ctr" indent="0" marL="0">
+              <a:buNone/>
+            </a:pPr>
+            <a:r>
+              <a:rPr lang="en-US" sz="3000" i="1" baseline="-40000" dirty="0">
+                <a:solidFill>
+                  <a:schemeClr val="tx2"/>
+                </a:solidFill>
+                <a:latin typeface="Cambria" pitchFamily="34" charset="0"/>
+                <a:ea typeface="Cambria" pitchFamily="34" charset="-122"/>
+                <a:cs typeface="Cambria" pitchFamily="34" charset="-120"/>
+              </a:rPr>
+              <a:t>i</a:t>
+            </a:r>
+            <a:pPr algn="ctr" indent="0" marL="0">
+              <a:buNone/>
+            </a:pPr>
+            <a:r>
+              <a:rPr lang="en-US" sz="3000" dirty="0">
+                <a:solidFill>
+                  <a:schemeClr val="tx2"/>
+                </a:solidFill>
+                <a:latin typeface="Cambria" pitchFamily="34" charset="0"/>
+                <a:ea typeface="Cambria" pitchFamily="34" charset="-122"/>
+                <a:cs typeface="Cambria" pitchFamily="34" charset="-120"/>
+              </a:rPr>
+              <a:t>  =  λ</a:t>
+            </a:r>
+            <a:pPr algn="ctr" indent="0" marL="0">
+              <a:buNone/>
+            </a:pPr>
+            <a:r>
+              <a:rPr lang="en-US" sz="3000" i="1" baseline="-40000" dirty="0">
+                <a:solidFill>
+                  <a:schemeClr val="tx2"/>
+                </a:solidFill>
+                <a:latin typeface="Cambria" pitchFamily="34" charset="0"/>
+                <a:ea typeface="Cambria" pitchFamily="34" charset="-122"/>
+                <a:cs typeface="Cambria" pitchFamily="34" charset="-120"/>
+              </a:rPr>
+              <a:t>i</a:t>
+            </a:r>
+            <a:pPr algn="ctr" indent="0" marL="0">
+              <a:buNone/>
+            </a:pPr>
+            <a:r>
+              <a:rPr lang="en-US" sz="3000" dirty="0">
+                <a:solidFill>
+                  <a:schemeClr val="tx2"/>
+                </a:solidFill>
+                <a:latin typeface="Cambria" pitchFamily="34" charset="0"/>
+                <a:ea typeface="Cambria" pitchFamily="34" charset="-122"/>
+                <a:cs typeface="Cambria" pitchFamily="34" charset="-120"/>
+              </a:rPr>
+              <a:t> · </a:t>
+            </a:r>
+            <a:pPr algn="ctr" indent="0" marL="0">
+              <a:buNone/>
+            </a:pPr>
+            <a:r>
+              <a:rPr lang="en-US" sz="3000" i="1" dirty="0">
+                <a:solidFill>
+                  <a:schemeClr val="tx2"/>
+                </a:solidFill>
+                <a:latin typeface="Cambria" pitchFamily="34" charset="0"/>
+                <a:ea typeface="Cambria" pitchFamily="34" charset="-122"/>
+                <a:cs typeface="Cambria" pitchFamily="34" charset="-120"/>
+              </a:rPr>
+              <a:t>y</a:t>
+            </a:r>
+            <a:pPr algn="ctr" indent="0" marL="0">
+              <a:buNone/>
+            </a:pPr>
+            <a:r>
+              <a:rPr lang="en-US" sz="3000" dirty="0">
+                <a:solidFill>
+                  <a:schemeClr val="tx2"/>
+                </a:solidFill>
+                <a:latin typeface="Cambria" pitchFamily="34" charset="0"/>
+                <a:ea typeface="Cambria" pitchFamily="34" charset="-122"/>
+                <a:cs typeface="Cambria" pitchFamily="34" charset="-120"/>
+              </a:rPr>
+              <a:t>  +  (1 − λ</a:t>
+            </a:r>
+            <a:pPr algn="ctr" indent="0" marL="0">
+              <a:buNone/>
+            </a:pPr>
+            <a:r>
+              <a:rPr lang="en-US" sz="3000" i="1" baseline="-40000" dirty="0">
+                <a:solidFill>
+                  <a:schemeClr val="tx2"/>
+                </a:solidFill>
+                <a:latin typeface="Cambria" pitchFamily="34" charset="0"/>
+                <a:ea typeface="Cambria" pitchFamily="34" charset="-122"/>
+                <a:cs typeface="Cambria" pitchFamily="34" charset="-120"/>
+              </a:rPr>
+              <a:t>i</a:t>
+            </a:r>
+            <a:pPr algn="ctr" indent="0" marL="0">
+              <a:buNone/>
+            </a:pPr>
+            <a:r>
+              <a:rPr lang="en-US" sz="3000" dirty="0">
+                <a:solidFill>
+                  <a:schemeClr val="tx2"/>
+                </a:solidFill>
+                <a:latin typeface="Cambria" pitchFamily="34" charset="0"/>
+                <a:ea typeface="Cambria" pitchFamily="34" charset="-122"/>
+                <a:cs typeface="Cambria" pitchFamily="34" charset="-120"/>
+              </a:rPr>
+              <a:t>) · </a:t>
+            </a:r>
+            <a:pPr algn="ctr" indent="0" marL="0">
+              <a:buNone/>
+            </a:pPr>
+            <a:r>
+              <a:rPr lang="en-US" sz="3000" i="1" dirty="0">
+                <a:solidFill>
+                  <a:schemeClr val="tx2"/>
+                </a:solidFill>
+                <a:latin typeface="Cambria" pitchFamily="34" charset="0"/>
+                <a:ea typeface="Cambria" pitchFamily="34" charset="-122"/>
+                <a:cs typeface="Cambria" pitchFamily="34" charset="-120"/>
+              </a:rPr>
+              <a:t>x</a:t>
+            </a:r>
+            <a:pPr algn="ctr" indent="0" marL="0">
+              <a:buNone/>
+            </a:pPr>
+            <a:r>
+              <a:rPr lang="en-US" sz="3000" i="1" baseline="-40000" dirty="0">
+                <a:solidFill>
+                  <a:schemeClr val="tx2"/>
+                </a:solidFill>
+                <a:latin typeface="Cambria" pitchFamily="34" charset="0"/>
+                <a:ea typeface="Cambria" pitchFamily="34" charset="-122"/>
+                <a:cs typeface="Cambria" pitchFamily="34" charset="-120"/>
+              </a:rPr>
+              <a:t>i</a:t>
+            </a:r>
+            <a:endParaRPr lang="en-US" sz="3000" dirty="0"/>
+          </a:p>
+        </p:txBody>
+      </p:sp>
+      <p:sp>
+        <p:nvSpPr>
+          <p:cNvPr id="5" name="eq-sub"/>
+          <p:cNvSpPr txBox="1"/>
+          <p:nvPr/>
+        </p:nvSpPr>
+        <p:spPr>
+          <a:xfrm>
+            <a:off x="640080" y="1783080"/>
+            <a:ext cx="7863840" cy="320040"/>
+          </a:xfrm>
+          <a:prstGeom prst="rect">
+            <a:avLst/>
+          </a:prstGeom>
+          <a:noFill/>
+          <a:ln/>
+        </p:spPr>
+        <p:txBody>
+          <a:bodyPr wrap="square" lIns="0" tIns="0" rIns="0" bIns="0" rtlCol="0" anchor="ctr"/>
+          <a:lstStyle/>
+          <a:p>
+            <a:pPr algn="ctr" indent="0" marL="0">
+              <a:buNone/>
+            </a:pPr>
+            <a:r>
+              <a:rPr lang="en-US" sz="1200" i="1" dirty="0">
                 <a:solidFill>
                   <a:schemeClr val="accent3"/>
                 </a:solidFill>
               </a:rPr>
-              <a:t>Rungs 1 and 2 are the literature. </a:t>
-            </a:r>
-            <a:pPr indent="0" marL="0">
-              <a:buNone/>
-            </a:pPr>
-            <a:r>
-              <a:rPr lang="en-US" sz="1200" b="1" dirty="0">
+              <a:t>the depositor’s estimate of the bank, compared with a threshold: run if it falls below</a:t>
+            </a:r>
+            <a:endParaRPr lang="en-US" sz="1200" dirty="0"/>
+          </a:p>
+        </p:txBody>
+      </p:sp>
+      <p:sp>
+        <p:nvSpPr>
+          <p:cNvPr id="6" name="term-0"/>
+          <p:cNvSpPr/>
+          <p:nvPr/>
+        </p:nvSpPr>
+        <p:spPr>
+          <a:xfrm>
+            <a:off x="457200" y="2331720"/>
+            <a:ext cx="2651760" cy="1188720"/>
+          </a:xfrm>
+          <a:prstGeom prst="roundRect">
+            <a:avLst>
+              <a:gd name="adj" fmla="val 6154"/>
+            </a:avLst>
+          </a:prstGeom>
+          <a:solidFill>
+            <a:schemeClr val="bg2"/>
+          </a:solidFill>
+          <a:ln w="12700">
+            <a:solidFill>
+              <a:schemeClr val="bg2"/>
+            </a:solidFill>
+            <a:prstDash val="solid"/>
+          </a:ln>
+        </p:spPr>
+      </p:sp>
+      <p:sp>
+        <p:nvSpPr>
+          <p:cNvPr id="7" name="term-head"/>
+          <p:cNvSpPr txBox="1"/>
+          <p:nvPr/>
+        </p:nvSpPr>
+        <p:spPr>
+          <a:xfrm>
+            <a:off x="594360" y="2377440"/>
+            <a:ext cx="2423160" cy="457200"/>
+          </a:xfrm>
+          <a:prstGeom prst="rect">
+            <a:avLst/>
+          </a:prstGeom>
+          <a:noFill/>
+          <a:ln/>
+        </p:spPr>
+        <p:txBody>
+          <a:bodyPr wrap="square" lIns="0" tIns="0" rIns="0" bIns="0" rtlCol="0" anchor="ctr"/>
+          <a:lstStyle/>
+          <a:p>
+            <a:pPr indent="0" marL="0">
+              <a:buNone/>
+            </a:pPr>
+            <a:r>
+              <a:rPr lang="en-US" sz="2200" i="1" dirty="0">
+                <a:solidFill>
+                  <a:schemeClr val="tx2"/>
+                </a:solidFill>
+                <a:latin typeface="Cambria" pitchFamily="34" charset="0"/>
+                <a:ea typeface="Cambria" pitchFamily="34" charset="-122"/>
+                <a:cs typeface="Cambria" pitchFamily="34" charset="-120"/>
+              </a:rPr>
+              <a:t>x</a:t>
+            </a:r>
+            <a:pPr indent="0" marL="0">
+              <a:buNone/>
+            </a:pPr>
+            <a:r>
+              <a:rPr lang="en-US" sz="2200" i="1" baseline="-40000" dirty="0">
+                <a:solidFill>
+                  <a:schemeClr val="tx2"/>
+                </a:solidFill>
+                <a:latin typeface="Cambria" pitchFamily="34" charset="0"/>
+                <a:ea typeface="Cambria" pitchFamily="34" charset="-122"/>
+                <a:cs typeface="Cambria" pitchFamily="34" charset="-120"/>
+              </a:rPr>
+              <a:t>i</a:t>
+            </a:r>
+            <a:pPr indent="0" marL="0">
+              <a:buNone/>
+            </a:pPr>
+            <a:r>
+              <a:rPr lang="en-US" sz="1250" b="1" dirty="0">
+                <a:solidFill>
+                  <a:schemeClr val="tx1"/>
+                </a:solidFill>
+              </a:rPr>
+              <a:t>   what the depositor sees</a:t>
+            </a:r>
+            <a:endParaRPr lang="en-US" sz="2200" dirty="0"/>
+          </a:p>
+        </p:txBody>
+      </p:sp>
+      <p:sp>
+        <p:nvSpPr>
+          <p:cNvPr id="8" name="term-body"/>
+          <p:cNvSpPr txBox="1"/>
+          <p:nvPr/>
+        </p:nvSpPr>
+        <p:spPr>
+          <a:xfrm>
+            <a:off x="594360" y="2834640"/>
+            <a:ext cx="2423160" cy="640080"/>
+          </a:xfrm>
+          <a:prstGeom prst="rect">
+            <a:avLst/>
+          </a:prstGeom>
+          <a:noFill/>
+          <a:ln/>
+        </p:spPr>
+        <p:txBody>
+          <a:bodyPr wrap="square" lIns="0" tIns="0" rIns="0" bIns="0" rtlCol="0" anchor="t"/>
+          <a:lstStyle/>
+          <a:p>
+            <a:pPr indent="0" marL="0">
+              <a:buNone/>
+            </a:pPr>
+            <a:r>
+              <a:rPr lang="en-US" sz="1150" dirty="0">
+                <a:solidFill>
+                  <a:schemeClr val="accent3"/>
+                </a:solidFill>
+              </a:rPr>
+              <a:t>a private signal of the fundamental, one noisy draw each</a:t>
+            </a:r>
+            <a:endParaRPr lang="en-US" sz="1150" dirty="0"/>
+          </a:p>
+        </p:txBody>
+      </p:sp>
+      <p:sp>
+        <p:nvSpPr>
+          <p:cNvPr id="9" name="term-1"/>
+          <p:cNvSpPr/>
+          <p:nvPr/>
+        </p:nvSpPr>
+        <p:spPr>
+          <a:xfrm>
+            <a:off x="3246120" y="2331720"/>
+            <a:ext cx="2651760" cy="1188720"/>
+          </a:xfrm>
+          <a:prstGeom prst="roundRect">
+            <a:avLst>
+              <a:gd name="adj" fmla="val 6154"/>
+            </a:avLst>
+          </a:prstGeom>
+          <a:solidFill>
+            <a:schemeClr val="bg2"/>
+          </a:solidFill>
+          <a:ln w="12700">
+            <a:solidFill>
+              <a:schemeClr val="bg2"/>
+            </a:solidFill>
+            <a:prstDash val="solid"/>
+          </a:ln>
+        </p:spPr>
+      </p:sp>
+      <p:sp>
+        <p:nvSpPr>
+          <p:cNvPr id="10" name="term-head"/>
+          <p:cNvSpPr txBox="1"/>
+          <p:nvPr/>
+        </p:nvSpPr>
+        <p:spPr>
+          <a:xfrm>
+            <a:off x="3383280" y="2377440"/>
+            <a:ext cx="2423160" cy="457200"/>
+          </a:xfrm>
+          <a:prstGeom prst="rect">
+            <a:avLst/>
+          </a:prstGeom>
+          <a:noFill/>
+          <a:ln/>
+        </p:spPr>
+        <p:txBody>
+          <a:bodyPr wrap="square" lIns="0" tIns="0" rIns="0" bIns="0" rtlCol="0" anchor="ctr"/>
+          <a:lstStyle/>
+          <a:p>
+            <a:pPr indent="0" marL="0">
+              <a:buNone/>
+            </a:pPr>
+            <a:r>
+              <a:rPr lang="en-US" sz="2200" i="1" dirty="0">
+                <a:solidFill>
+                  <a:schemeClr val="accent3"/>
+                </a:solidFill>
+                <a:latin typeface="Cambria" pitchFamily="34" charset="0"/>
+                <a:ea typeface="Cambria" pitchFamily="34" charset="-122"/>
+                <a:cs typeface="Cambria" pitchFamily="34" charset="-120"/>
+              </a:rPr>
+              <a:t>y</a:t>
+            </a:r>
+            <a:pPr indent="0" marL="0">
+              <a:buNone/>
+            </a:pPr>
+            <a:pPr indent="0" marL="0">
+              <a:buNone/>
+            </a:pPr>
+            <a:r>
+              <a:rPr lang="en-US" sz="1250" b="1" dirty="0">
+                <a:solidFill>
+                  <a:schemeClr val="tx1"/>
+                </a:solidFill>
+              </a:rPr>
+              <a:t>   what the depositor is told</a:t>
+            </a:r>
+            <a:endParaRPr lang="en-US" sz="2200" dirty="0"/>
+          </a:p>
+        </p:txBody>
+      </p:sp>
+      <p:sp>
+        <p:nvSpPr>
+          <p:cNvPr id="11" name="term-body"/>
+          <p:cNvSpPr txBox="1"/>
+          <p:nvPr/>
+        </p:nvSpPr>
+        <p:spPr>
+          <a:xfrm>
+            <a:off x="3383280" y="2834640"/>
+            <a:ext cx="2423160" cy="640080"/>
+          </a:xfrm>
+          <a:prstGeom prst="rect">
+            <a:avLst/>
+          </a:prstGeom>
+          <a:noFill/>
+          <a:ln/>
+        </p:spPr>
+        <p:txBody>
+          <a:bodyPr wrap="square" lIns="0" tIns="0" rIns="0" bIns="0" rtlCol="0" anchor="t"/>
+          <a:lstStyle/>
+          <a:p>
+            <a:pPr indent="0" marL="0">
+              <a:buNone/>
+            </a:pPr>
+            <a:r>
+              <a:rPr lang="en-US" sz="1150" dirty="0">
+                <a:solidFill>
+                  <a:schemeClr val="accent3"/>
+                </a:solidFill>
+              </a:rPr>
+              <a:t>a public signal, common to all, which can be stale</a:t>
+            </a:r>
+            <a:endParaRPr lang="en-US" sz="1150" dirty="0"/>
+          </a:p>
+        </p:txBody>
+      </p:sp>
+      <p:sp>
+        <p:nvSpPr>
+          <p:cNvPr id="12" name="term-2"/>
+          <p:cNvSpPr/>
+          <p:nvPr/>
+        </p:nvSpPr>
+        <p:spPr>
+          <a:xfrm>
+            <a:off x="6035040" y="2331720"/>
+            <a:ext cx="2651760" cy="1188720"/>
+          </a:xfrm>
+          <a:prstGeom prst="roundRect">
+            <a:avLst>
+              <a:gd name="adj" fmla="val 6154"/>
+            </a:avLst>
+          </a:prstGeom>
+          <a:solidFill>
+            <a:schemeClr val="bg2"/>
+          </a:solidFill>
+          <a:ln w="12700">
+            <a:solidFill>
+              <a:schemeClr val="bg2"/>
+            </a:solidFill>
+            <a:prstDash val="solid"/>
+          </a:ln>
+        </p:spPr>
+      </p:sp>
+      <p:sp>
+        <p:nvSpPr>
+          <p:cNvPr id="13" name="term-head"/>
+          <p:cNvSpPr txBox="1"/>
+          <p:nvPr/>
+        </p:nvSpPr>
+        <p:spPr>
+          <a:xfrm>
+            <a:off x="6172200" y="2377440"/>
+            <a:ext cx="2423160" cy="457200"/>
+          </a:xfrm>
+          <a:prstGeom prst="rect">
+            <a:avLst/>
+          </a:prstGeom>
+          <a:noFill/>
+          <a:ln/>
+        </p:spPr>
+        <p:txBody>
+          <a:bodyPr wrap="square" lIns="0" tIns="0" rIns="0" bIns="0" rtlCol="0" anchor="ctr"/>
+          <a:lstStyle/>
+          <a:p>
+            <a:pPr indent="0" marL="0">
+              <a:buNone/>
+            </a:pPr>
+            <a:r>
+              <a:rPr lang="en-US" sz="2200" i="1" dirty="0">
                 <a:solidFill>
                   <a:schemeClr val="accent1"/>
                 </a:solidFill>
-              </a:rPr>
-              <a:t>Rung 3 is this paper: </a:t>
-            </a:r>
-            <a:pPr indent="0" marL="0">
-              <a:buNone/>
-            </a:pPr>
-            <a:r>
-              <a:rPr lang="en-US" sz="1200" dirty="0">
+                <a:latin typeface="Cambria" pitchFamily="34" charset="0"/>
+                <a:ea typeface="Cambria" pitchFamily="34" charset="-122"/>
+                <a:cs typeface="Cambria" pitchFamily="34" charset="-120"/>
+              </a:rPr>
+              <a:t>λ</a:t>
+            </a:r>
+            <a:pPr indent="0" marL="0">
+              <a:buNone/>
+            </a:pPr>
+            <a:r>
+              <a:rPr lang="en-US" sz="2200" i="1" baseline="-40000" dirty="0">
+                <a:solidFill>
+                  <a:schemeClr val="accent1"/>
+                </a:solidFill>
+                <a:latin typeface="Cambria" pitchFamily="34" charset="0"/>
+                <a:ea typeface="Cambria" pitchFamily="34" charset="-122"/>
+                <a:cs typeface="Cambria" pitchFamily="34" charset="-120"/>
+              </a:rPr>
+              <a:t>i</a:t>
+            </a:r>
+            <a:pPr indent="0" marL="0">
+              <a:buNone/>
+            </a:pPr>
+            <a:r>
+              <a:rPr lang="en-US" sz="1250" b="1" dirty="0">
                 <a:solidFill>
                   <a:schemeClr val="tx1"/>
                 </a:solidFill>
               </a:rPr>
-              <a:t>the only one that orders depositors by a trait, and reverses when the public line is too optimistic or too pessimistic.</a:t>
-            </a:r>
-            <a:endParaRPr lang="en-US" sz="1200" dirty="0"/>
+              <a:t>   weight on the public line</a:t>
+            </a:r>
+            <a:endParaRPr lang="en-US" sz="2200" dirty="0"/>
+          </a:p>
+        </p:txBody>
+      </p:sp>
+      <p:sp>
+        <p:nvSpPr>
+          <p:cNvPr id="14" name="term-body"/>
+          <p:cNvSpPr txBox="1"/>
+          <p:nvPr/>
+        </p:nvSpPr>
+        <p:spPr>
+          <a:xfrm>
+            <a:off x="6172200" y="2834640"/>
+            <a:ext cx="2423160" cy="640080"/>
+          </a:xfrm>
+          <a:prstGeom prst="rect">
+            <a:avLst/>
+          </a:prstGeom>
+          <a:noFill/>
+          <a:ln/>
+        </p:spPr>
+        <p:txBody>
+          <a:bodyPr wrap="square" lIns="0" tIns="0" rIns="0" bIns="0" rtlCol="0" anchor="t"/>
+          <a:lstStyle/>
+          <a:p>
+            <a:pPr indent="0" marL="0">
+              <a:buNone/>
+            </a:pPr>
+            <a:r>
+              <a:rPr lang="en-US" sz="1150" dirty="0">
+                <a:solidFill>
+                  <a:schemeClr val="accent3"/>
+                </a:solidFill>
+              </a:rPr>
+              <a:t>a disposition set before the run; culture is its source</a:t>
+            </a:r>
+            <a:endParaRPr lang="en-US" sz="1150" dirty="0"/>
+          </a:p>
+        </p:txBody>
+      </p:sp>
+      <p:sp>
+        <p:nvSpPr>
+          <p:cNvPr id="15" name="wedge"/>
+          <p:cNvSpPr txBox="1"/>
+          <p:nvPr/>
+        </p:nvSpPr>
+        <p:spPr>
+          <a:xfrm>
+            <a:off x="457200" y="3657600"/>
+            <a:ext cx="8229600" cy="777240"/>
+          </a:xfrm>
+          <a:prstGeom prst="rect">
+            <a:avLst/>
+          </a:prstGeom>
+          <a:noFill/>
+          <a:ln/>
+        </p:spPr>
+        <p:txBody>
+          <a:bodyPr wrap="square" lIns="0" tIns="0" rIns="0" bIns="0" rtlCol="0" anchor="t"/>
+          <a:lstStyle/>
+          <a:p>
+            <a:pPr indent="0" marL="0">
+              <a:buNone/>
+            </a:pPr>
+            <a:r>
+              <a:rPr lang="en-US" sz="1300" b="1" dirty="0">
+                <a:solidFill>
+                  <a:srgbClr val="EB6834"/>
+                </a:solidFill>
+              </a:rPr>
+              <a:t>Individualists </a:t>
+            </a:r>
+            <a:pPr indent="0" marL="0">
+              <a:buNone/>
+            </a:pPr>
+            <a:r>
+              <a:rPr lang="en-US" sz="1300" dirty="0">
+                <a:solidFill>
+                  <a:schemeClr val="tx1"/>
+                </a:solidFill>
+              </a:rPr>
+              <a:t>λ</a:t>
+            </a:r>
+            <a:pPr indent="0" marL="0">
+              <a:buNone/>
+            </a:pPr>
+            <a:r>
+              <a:rPr lang="en-US" sz="1300" baseline="-40000" dirty="0">
+                <a:solidFill>
+                  <a:schemeClr val="tx1"/>
+                </a:solidFill>
+              </a:rPr>
+              <a:t>I</a:t>
+            </a:r>
+            <a:pPr indent="0" marL="0">
+              <a:buNone/>
+            </a:pPr>
+            <a:r>
+              <a:rPr lang="en-US" sz="1300" dirty="0">
+                <a:solidFill>
+                  <a:schemeClr val="tx1"/>
+                </a:solidFill>
+              </a:rPr>
+              <a:t>  &lt;  λ</a:t>
+            </a:r>
+            <a:pPr indent="0" marL="0">
+              <a:buNone/>
+            </a:pPr>
+            <a:r>
+              <a:rPr lang="en-US" sz="1300" baseline="-40000" dirty="0">
+                <a:solidFill>
+                  <a:schemeClr val="tx1"/>
+                </a:solidFill>
+              </a:rPr>
+              <a:t>C</a:t>
+            </a:r>
+            <a:pPr indent="0" marL="0">
+              <a:buNone/>
+            </a:pPr>
+            <a:r>
+              <a:rPr lang="en-US" sz="1300" b="1" dirty="0">
+                <a:solidFill>
+                  <a:srgbClr val="2A78D6"/>
+                </a:solidFill>
+              </a:rPr>
+              <a:t> collectivists</a:t>
+            </a:r>
+            <a:pPr indent="0" marL="0">
+              <a:buNone/>
+            </a:pPr>
+            <a:r>
+              <a:rPr lang="en-US" sz="1300" dirty="0">
+                <a:solidFill>
+                  <a:schemeClr val="tx1"/>
+                </a:solidFill>
+              </a:rPr>
+              <a:t>.  Same two signals, different estimates: </a:t>
+            </a:r>
+            <a:pPr indent="0" marL="0">
+              <a:buNone/>
+            </a:pPr>
+            <a:r>
+              <a:rPr lang="en-US" sz="1300" i="1" dirty="0">
+                <a:solidFill>
+                  <a:schemeClr val="tx1"/>
+                </a:solidFill>
+              </a:rPr>
+              <a:t>ŝ</a:t>
+            </a:r>
+            <a:pPr indent="0" marL="0">
+              <a:buNone/>
+            </a:pPr>
+            <a:r>
+              <a:rPr lang="en-US" sz="1300" baseline="-40000" dirty="0">
+                <a:solidFill>
+                  <a:schemeClr val="tx1"/>
+                </a:solidFill>
+              </a:rPr>
+              <a:t>I</a:t>
+            </a:r>
+            <a:pPr indent="0" marL="0">
+              <a:buNone/>
+            </a:pPr>
+            <a:r>
+              <a:rPr lang="en-US" sz="1300" dirty="0">
+                <a:solidFill>
+                  <a:schemeClr val="tx1"/>
+                </a:solidFill>
+              </a:rPr>
+              <a:t> − </a:t>
+            </a:r>
+            <a:pPr indent="0" marL="0">
+              <a:buNone/>
+            </a:pPr>
+            <a:r>
+              <a:rPr lang="en-US" sz="1300" i="1" dirty="0">
+                <a:solidFill>
+                  <a:schemeClr val="tx1"/>
+                </a:solidFill>
+              </a:rPr>
+              <a:t>ŝ</a:t>
+            </a:r>
+            <a:pPr indent="0" marL="0">
+              <a:buNone/>
+            </a:pPr>
+            <a:r>
+              <a:rPr lang="en-US" sz="1300" baseline="-40000" dirty="0">
+                <a:solidFill>
+                  <a:schemeClr val="tx1"/>
+                </a:solidFill>
+              </a:rPr>
+              <a:t>C</a:t>
+            </a:r>
+            <a:pPr indent="0" marL="0">
+              <a:buNone/>
+            </a:pPr>
+            <a:r>
+              <a:rPr lang="en-US" sz="1300" dirty="0">
+                <a:solidFill>
+                  <a:schemeClr val="tx1"/>
+                </a:solidFill>
+              </a:rPr>
+              <a:t> = (λ</a:t>
+            </a:r>
+            <a:pPr indent="0" marL="0">
+              <a:buNone/>
+            </a:pPr>
+            <a:r>
+              <a:rPr lang="en-US" sz="1300" baseline="-40000" dirty="0">
+                <a:solidFill>
+                  <a:schemeClr val="tx1"/>
+                </a:solidFill>
+              </a:rPr>
+              <a:t>C</a:t>
+            </a:r>
+            <a:pPr indent="0" marL="0">
+              <a:buNone/>
+            </a:pPr>
+            <a:r>
+              <a:rPr lang="en-US" sz="1300" dirty="0">
+                <a:solidFill>
+                  <a:schemeClr val="tx1"/>
+                </a:solidFill>
+              </a:rPr>
+              <a:t> − λ</a:t>
+            </a:r>
+            <a:pPr indent="0" marL="0">
+              <a:buNone/>
+            </a:pPr>
+            <a:r>
+              <a:rPr lang="en-US" sz="1300" baseline="-40000" dirty="0">
+                <a:solidFill>
+                  <a:schemeClr val="tx1"/>
+                </a:solidFill>
+              </a:rPr>
+              <a:t>I</a:t>
+            </a:r>
+            <a:pPr indent="0" marL="0">
+              <a:buNone/>
+            </a:pPr>
+            <a:r>
+              <a:rPr lang="en-US" sz="1300" dirty="0">
+                <a:solidFill>
+                  <a:schemeClr val="tx1"/>
+                </a:solidFill>
+              </a:rPr>
+              <a:t>)(</a:t>
+            </a:r>
+            <a:pPr indent="0" marL="0">
+              <a:buNone/>
+            </a:pPr>
+            <a:r>
+              <a:rPr lang="en-US" sz="1300" i="1" dirty="0">
+                <a:solidFill>
+                  <a:schemeClr val="tx1"/>
+                </a:solidFill>
+              </a:rPr>
+              <a:t>x</a:t>
+            </a:r>
+            <a:pPr indent="0" marL="0">
+              <a:buNone/>
+            </a:pPr>
+            <a:r>
+              <a:rPr lang="en-US" sz="1300" dirty="0">
+                <a:solidFill>
+                  <a:schemeClr val="tx1"/>
+                </a:solidFill>
+              </a:rPr>
+              <a:t> − </a:t>
+            </a:r>
+            <a:pPr indent="0" marL="0">
+              <a:buNone/>
+            </a:pPr>
+            <a:r>
+              <a:rPr lang="en-US" sz="1300" i="1" dirty="0">
+                <a:solidFill>
+                  <a:schemeClr val="tx1"/>
+                </a:solidFill>
+              </a:rPr>
+              <a:t>y</a:t>
+            </a:r>
+            <a:pPr indent="0" marL="0">
+              <a:buNone/>
+            </a:pPr>
+            <a:r>
+              <a:rPr lang="en-US" sz="1300" dirty="0">
+                <a:solidFill>
+                  <a:schemeClr val="tx1"/>
+                </a:solidFill>
+              </a:rPr>
+              <a:t>). </a:t>
+            </a:r>
+            <a:pPr indent="0" marL="0">
+              <a:buNone/>
+            </a:pPr>
+            <a:r>
+              <a:rPr lang="en-US" sz="1300" b="1" dirty="0">
+                <a:solidFill>
+                  <a:schemeClr val="tx2"/>
+                </a:solidFill>
+              </a:rPr>
+              <a:t>Who runs is sorted by the weight, and the order flips with the sign of the public error.</a:t>
+            </a:r>
+            <a:endParaRPr lang="en-US" sz="1300" dirty="0"/>
           </a:p>
         </p:txBody>
       </p:sp>

--- a/docs/deck_2026-10-26_seminar.pptx
+++ b/docs/deck_2026-10-26_seminar.pptx
@@ -22,12 +22,9 @@
     <p:sldId id="270" r:id="rId16"/>
     <p:sldId id="271" r:id="rId17"/>
     <p:sldId id="272" r:id="rId18"/>
-    <p:sldId id="273" r:id="rId19"/>
-    <p:sldId id="274" r:id="rId20"/>
-    <p:sldId id="275" r:id="rId21"/>
   </p:sldIdLst>
   <p:notesMasterIdLst>
-    <p:notesMasterId r:id="rId22"/>
+    <p:notesMasterId r:id="rId19"/>
   </p:notesMasterIdLst>
   <p:sldSz cx="9144000" cy="5143500"/>
   <p:notesSz cx="5143500" cy="9144000"/>
@@ -126,7 +123,7 @@
   <p:extLst>
     <p:ext uri="{521415D9-36F7-43E2-AB2F-B90AF26B5E84}">
       <p14:sectionLst xmlns:p14="http://schemas.microsoft.com/office/powerpoint/2010/main">
-        <p14:section name="Opening" id="{38f2f7b6-4f00-4256-6d0f-c1d03ed050ae}">
+        <p14:section name="Opening" id="{6d9beb0e-9aa0-932f-c957-19c334b02711}">
           <p14:sldIdLst>
             <p14:sldId id="256"/>
             <p14:sldId id="257"/>
@@ -136,13 +133,13 @@
             <p14:sldId id="261"/>
           </p14:sldIdLst>
         </p14:section>
-        <p14:section name="The model" id="{fd43a280-0a9c-5794-1f48-6c4092cc82ac}">
+        <p14:section name="The model" id="{f46d5627-9b9a-ed28-6843-82e78de20048}">
           <p14:sldIdLst>
             <p14:sldId id="262"/>
             <p14:sldId id="263"/>
           </p14:sldIdLst>
         </p14:section>
-        <p14:section name="Results" id="{5817c6c6-979e-cd9b-7c08-d4bc68add732}">
+        <p14:section name="Results" id="{ef56ac54-c560-7e66-53d4-66abda25c443}">
           <p14:sldIdLst>
             <p14:sldId id="264"/>
             <p14:sldId id="265"/>
@@ -150,24 +147,21 @@
             <p14:sldId id="267"/>
           </p14:sldIdLst>
         </p14:section>
-        <p14:section name="Validation" id="{c6126056-7f46-5a0e-f527-b09765bb04a0}">
+        <p14:section name="Validation" id="{b68adc42-6c9a-eaa4-1a69-b2323fe05bef}">
           <p14:sldIdLst>
             <p14:sldId id="268"/>
           </p14:sldIdLst>
         </p14:section>
-        <p14:section name="Close" id="{0b49eb75-640f-46e7-aaea-4598aca7d471}">
+        <p14:section name="Close" id="{44f77a63-cc4e-d7e3-946d-4444958d8d44}">
           <p14:sldIdLst>
             <p14:sldId id="269"/>
           </p14:sldIdLst>
         </p14:section>
-        <p14:section name="Backup" id="{8c1cda2f-6360-0d05-bcfb-be50caae211b}">
+        <p14:section name="Backup" id="{20089f17-7ff2-3b36-2c21-45ea981cdd02}">
           <p14:sldIdLst>
             <p14:sldId id="270"/>
             <p14:sldId id="271"/>
             <p14:sldId id="272"/>
-            <p14:sldId id="273"/>
-            <p14:sldId id="274"/>
-            <p14:sldId id="275"/>
           </p14:sldIdLst>
         </p14:section>
       </p14:sectionLst>
@@ -1278,7 +1272,7 @@
           <a:p>
             <a:r>
               <a:rPr lang="en-US" dirty="0"/>
-              <a:t>r1k pooled: G1' +0.033, G4' -0.031, G2a' +0.093, all Holm-significant; G2b ordering holds. G3 +0.0034 pooled but (0.3, 0.5) wrong-signed in every bank -&gt; counts against. G3c (post hoc, channel-isolated) +0.019, right-signed in every pair. 3 of 4 confirmatory tests support, in all three banks.</a:t>
+              <a:t>Theta-blend only: +0.14 (Ch 1's sign). Head-count only: -0.07 (opposite). Both: +0.02. The two channels pull in opposite directions; Ch 1's sign survives, damped by herding.</a:t>
             </a:r>
             <a:endParaRPr lang="en-US" dirty="0"/>
           </a:p>
@@ -1302,182 +1296,6 @@
             <a:fld id="{F7021451-1387-4CA6-816F-3879F97B5CBC}" type="slidenum">
               <a:rPr lang="en-US"/>
               <a:t>17</a:t>
-            </a:fld>
-            <a:endParaRPr lang="en-US"/>
-          </a:p>
-        </p:txBody>
-      </p:sp>
-    </p:spTree>
-    <p:extLst>
-      <p:ext uri="{BB962C8B-B14F-4D97-AF65-F5344CB8AC3E}">
-        <p14:creationId xmlns:p14="http://schemas.microsoft.com/office/powerpoint/2010/main" val="1024086991"/>
-      </p:ext>
-    </p:extLst>
-  </p:cSld>
-  <p:clrMapOvr>
-    <a:masterClrMapping/>
-  </p:clrMapOvr>
-</p:notes>
-</file>
-
-<file path=ppt/notesSlides/notesSlide18.xml><?xml version="1.0" encoding="utf-8"?>
-<p:notes xmlns:a="http://schemas.openxmlformats.org/drawingml/2006/main" xmlns:r="http://schemas.openxmlformats.org/officeDocument/2006/relationships" xmlns:p="http://schemas.openxmlformats.org/presentationml/2006/main">
-  <p:cSld>
-    <p:spTree>
-      <p:nvGrpSpPr>
-        <p:cNvPr id="1" name=""/>
-        <p:cNvGrpSpPr/>
-        <p:nvPr/>
-      </p:nvGrpSpPr>
-      <p:grpSpPr>
-        <a:xfrm>
-          <a:off x="0" y="0"/>
-          <a:ext cx="0" cy="0"/>
-          <a:chOff x="0" y="0"/>
-          <a:chExt cx="0" cy="0"/>
-        </a:xfrm>
-      </p:grpSpPr>
-      <p:sp>
-        <p:nvSpPr>
-          <p:cNvPr id="2" name="Slide Image Placeholder 1"/>
-          <p:cNvSpPr>
-            <a:spLocks noGrp="1" noRot="1" noChangeAspect="1"/>
-          </p:cNvSpPr>
-          <p:nvPr>
-            <p:ph type="sldImg"/>
-          </p:nvPr>
-        </p:nvSpPr>
-        <p:spPr/>
-      </p:sp>
-      <p:sp>
-        <p:nvSpPr>
-          <p:cNvPr id="3" name="Notes Placeholder 2"/>
-          <p:cNvSpPr>
-            <a:spLocks noGrp="1"/>
-          </p:cNvSpPr>
-          <p:nvPr>
-            <p:ph type="body" idx="1"/>
-          </p:nvPr>
-        </p:nvSpPr>
-        <p:spPr/>
-        <p:txBody>
-          <a:bodyPr/>
-          <a:lstStyle/>
-          <a:p>
-            <a:r>
-              <a:rPr lang="en-US" dirty="0"/>
-              <a:t>Theta-blend only: +0.14 (Ch 1's sign). Head-count only: -0.07 (opposite). Both: +0.02. The two channels pull in opposite directions; Ch 1's sign survives, damped by herding.</a:t>
-            </a:r>
-            <a:endParaRPr lang="en-US" dirty="0"/>
-          </a:p>
-        </p:txBody>
-      </p:sp>
-      <p:sp>
-        <p:nvSpPr>
-          <p:cNvPr id="4" name="Slide Number Placeholder 3"/>
-          <p:cNvSpPr>
-            <a:spLocks noGrp="1"/>
-          </p:cNvSpPr>
-          <p:nvPr>
-            <p:ph type="sldNum" sz="quarter" idx="10"/>
-          </p:nvPr>
-        </p:nvSpPr>
-        <p:spPr/>
-        <p:txBody>
-          <a:bodyPr/>
-          <a:lstStyle/>
-          <a:p>
-            <a:fld id="{F7021451-1387-4CA6-816F-3879F97B5CBC}" type="slidenum">
-              <a:rPr lang="en-US"/>
-              <a:t>18</a:t>
-            </a:fld>
-            <a:endParaRPr lang="en-US"/>
-          </a:p>
-        </p:txBody>
-      </p:sp>
-    </p:spTree>
-    <p:extLst>
-      <p:ext uri="{BB962C8B-B14F-4D97-AF65-F5344CB8AC3E}">
-        <p14:creationId xmlns:p14="http://schemas.microsoft.com/office/powerpoint/2010/main" val="1024086991"/>
-      </p:ext>
-    </p:extLst>
-  </p:cSld>
-  <p:clrMapOvr>
-    <a:masterClrMapping/>
-  </p:clrMapOvr>
-</p:notes>
-</file>
-
-<file path=ppt/notesSlides/notesSlide19.xml><?xml version="1.0" encoding="utf-8"?>
-<p:notes xmlns:a="http://schemas.openxmlformats.org/drawingml/2006/main" xmlns:r="http://schemas.openxmlformats.org/officeDocument/2006/relationships" xmlns:p="http://schemas.openxmlformats.org/presentationml/2006/main">
-  <p:cSld>
-    <p:spTree>
-      <p:nvGrpSpPr>
-        <p:cNvPr id="1" name=""/>
-        <p:cNvGrpSpPr/>
-        <p:nvPr/>
-      </p:nvGrpSpPr>
-      <p:grpSpPr>
-        <a:xfrm>
-          <a:off x="0" y="0"/>
-          <a:ext cx="0" cy="0"/>
-          <a:chOff x="0" y="0"/>
-          <a:chExt cx="0" cy="0"/>
-        </a:xfrm>
-      </p:grpSpPr>
-      <p:sp>
-        <p:nvSpPr>
-          <p:cNvPr id="2" name="Slide Image Placeholder 1"/>
-          <p:cNvSpPr>
-            <a:spLocks noGrp="1" noRot="1" noChangeAspect="1"/>
-          </p:cNvSpPr>
-          <p:nvPr>
-            <p:ph type="sldImg"/>
-          </p:nvPr>
-        </p:nvSpPr>
-        <p:spPr/>
-      </p:sp>
-      <p:sp>
-        <p:nvSpPr>
-          <p:cNvPr id="3" name="Notes Placeholder 2"/>
-          <p:cNvSpPr>
-            <a:spLocks noGrp="1"/>
-          </p:cNvSpPr>
-          <p:nvPr>
-            <p:ph type="body" idx="1"/>
-          </p:nvPr>
-        </p:nvSpPr>
-        <p:spPr/>
-        <p:txBody>
-          <a:bodyPr/>
-          <a:lstStyle/>
-          <a:p>
-            <a:r>
-              <a:rPr lang="en-US" dirty="0"/>
-              <a:t>Celsius falls from ~0.86 (D1–D5 band 0.82–0.90) to 0.35 (top 0.1%); the ABM stays at 0.93–1.00. The model does not yet reproduce how large depositors exit. Next: super-individuals.</a:t>
-            </a:r>
-            <a:endParaRPr lang="en-US" dirty="0"/>
-          </a:p>
-        </p:txBody>
-      </p:sp>
-      <p:sp>
-        <p:nvSpPr>
-          <p:cNvPr id="4" name="Slide Number Placeholder 3"/>
-          <p:cNvSpPr>
-            <a:spLocks noGrp="1"/>
-          </p:cNvSpPr>
-          <p:nvPr>
-            <p:ph type="sldNum" sz="quarter" idx="10"/>
-          </p:nvPr>
-        </p:nvSpPr>
-        <p:spPr/>
-        <p:txBody>
-          <a:bodyPr/>
-          <a:lstStyle/>
-          <a:p>
-            <a:fld id="{F7021451-1387-4CA6-816F-3879F97B5CBC}" type="slidenum">
-              <a:rPr lang="en-US"/>
-              <a:t>19</a:t>
             </a:fld>
             <a:endParaRPr lang="en-US"/>
           </a:p>
@@ -1566,94 +1384,6 @@
             <a:fld id="{F7021451-1387-4CA6-816F-3879F97B5CBC}" type="slidenum">
               <a:rPr lang="en-US"/>
               <a:t>2</a:t>
-            </a:fld>
-            <a:endParaRPr lang="en-US"/>
-          </a:p>
-        </p:txBody>
-      </p:sp>
-    </p:spTree>
-    <p:extLst>
-      <p:ext uri="{BB962C8B-B14F-4D97-AF65-F5344CB8AC3E}">
-        <p14:creationId xmlns:p14="http://schemas.microsoft.com/office/powerpoint/2010/main" val="1024086991"/>
-      </p:ext>
-    </p:extLst>
-  </p:cSld>
-  <p:clrMapOvr>
-    <a:masterClrMapping/>
-  </p:clrMapOvr>
-</p:notes>
-</file>
-
-<file path=ppt/notesSlides/notesSlide20.xml><?xml version="1.0" encoding="utf-8"?>
-<p:notes xmlns:a="http://schemas.openxmlformats.org/drawingml/2006/main" xmlns:r="http://schemas.openxmlformats.org/officeDocument/2006/relationships" xmlns:p="http://schemas.openxmlformats.org/presentationml/2006/main">
-  <p:cSld>
-    <p:spTree>
-      <p:nvGrpSpPr>
-        <p:cNvPr id="1" name=""/>
-        <p:cNvGrpSpPr/>
-        <p:nvPr/>
-      </p:nvGrpSpPr>
-      <p:grpSpPr>
-        <a:xfrm>
-          <a:off x="0" y="0"/>
-          <a:ext cx="0" cy="0"/>
-          <a:chOff x="0" y="0"/>
-          <a:chExt cx="0" cy="0"/>
-        </a:xfrm>
-      </p:grpSpPr>
-      <p:sp>
-        <p:nvSpPr>
-          <p:cNvPr id="2" name="Slide Image Placeholder 1"/>
-          <p:cNvSpPr>
-            <a:spLocks noGrp="1" noRot="1" noChangeAspect="1"/>
-          </p:cNvSpPr>
-          <p:nvPr>
-            <p:ph type="sldImg"/>
-          </p:nvPr>
-        </p:nvSpPr>
-        <p:spPr/>
-      </p:sp>
-      <p:sp>
-        <p:nvSpPr>
-          <p:cNvPr id="3" name="Notes Placeholder 2"/>
-          <p:cNvSpPr>
-            <a:spLocks noGrp="1"/>
-          </p:cNvSpPr>
-          <p:nvPr>
-            <p:ph type="body" idx="1"/>
-          </p:nvPr>
-        </p:nvSpPr>
-        <p:spPr/>
-        <p:txBody>
-          <a:bodyPr/>
-          <a:lstStyle/>
-          <a:p>
-            <a:r>
-              <a:rPr lang="en-US" dirty="0"/>
-              <a:t>Vault bank, earlier specification (chapter Fig 1). For questions about Ch 1's P6. This figure is also monotone decreasing: P6 (non-monotonic fragility) was predicted in Ch 1 and found in neither bank; the P6b placebo hump was null too.</a:t>
-            </a:r>
-            <a:endParaRPr lang="en-US" dirty="0"/>
-          </a:p>
-        </p:txBody>
-      </p:sp>
-      <p:sp>
-        <p:nvSpPr>
-          <p:cNvPr id="4" name="Slide Number Placeholder 3"/>
-          <p:cNvSpPr>
-            <a:spLocks noGrp="1"/>
-          </p:cNvSpPr>
-          <p:nvPr>
-            <p:ph type="sldNum" sz="quarter" idx="10"/>
-          </p:nvPr>
-        </p:nvSpPr>
-        <p:spPr/>
-        <p:txBody>
-          <a:bodyPr/>
-          <a:lstStyle/>
-          <a:p>
-            <a:fld id="{F7021451-1387-4CA6-816F-3879F97B5CBC}" type="slidenum">
-              <a:rPr lang="en-US"/>
-              <a:t>20</a:t>
             </a:fld>
             <a:endParaRPr lang="en-US"/>
           </a:p>
@@ -6380,7 +6110,7 @@
                   <a:schemeClr val="accent4"/>
                 </a:solidFill>
               </a:rPr>
-              <a:t>Technical versions of the exhibits, the pre-registered tests, channels, and the Celsius docking gap.</a:t>
+              <a:t>Technical versions of the exhibits: who withdraws by type and mix, and which channel carries culture.</a:t>
             </a:r>
             <a:endParaRPr lang="en-US" sz="1600" dirty="0"/>
           </a:p>
@@ -6611,7 +6341,7 @@
                   <a:schemeClr val="tx2"/>
                 </a:solidFill>
               </a:rPr>
-              <a:t>The pre-registered tests, three versions of the bank</a:t>
+              <a:t>Which channel carries culture</a:t>
             </a:r>
             <a:endParaRPr lang="en-US" sz="2400" dirty="0"/>
           </a:p>
@@ -6619,7 +6349,7 @@
       </p:sp>
       <p:pic>
         <p:nvPicPr>
-          <p:cNvPr id="3" name="e03" descr="Forest plot of five tests (G1', G4', G2a', G3, G3c) across three bank versions with pooled estimates and per-pair markers.">    </p:cNvPr>
+          <p:cNvPr id="3" name="e09" descr="Who runs in failed runs with optimistic news when lambda applies only to the neighbour blend, only to the news blend, or both: positive, negative, small positive.">    </p:cNvPr>
           <p:cNvPicPr>
             <a:picLocks noChangeAspect="1"/>
           </p:cNvPicPr>
@@ -6633,8 +6363,8 @@
         </p:blipFill>
         <p:spPr>
           <a:xfrm>
-            <a:off x="882533" y="1051560"/>
-            <a:ext cx="7378934" cy="3383280"/>
+            <a:off x="1547348" y="1051560"/>
+            <a:ext cx="6049305" cy="3383280"/>
           </a:xfrm>
           <a:prstGeom prst="rect">
             <a:avLst/>
@@ -6671,7 +6401,7 @@
                   <a:schemeClr val="accent3"/>
                 </a:solidFill>
               </a:rPr>
-              <a:t>G1′, G4′, G2a′, G3 and G3c (post hoc). Rows: risk-neutral all-or-nothing, CARA partial, capped reference bank. Filled dot: pooled; hollow: each λ pair. Shaded: the theory’s predicted sign.</a:t>
+              <a:t>D in failed runs with optimistic news, when λ weights only the neighbour blend, only the news blend, or both (the model). θ-blend only +0.14; head-count only −0.07; both +0.02.</a:t>
             </a:r>
             <a:endParaRPr lang="en-US" sz="1000" dirty="0"/>
           </a:p>
@@ -6717,342 +6447,6 @@
             <a:fld id="{F7021451-1387-4CA6-816F-3879F97B5CBC}" type="slidenum">
               <a:rPr b="0" lang="en-US"/>
               <a:t>17</a:t>
-            </a:fld>
-            <a:endParaRPr lang="en-US"/>
-          </a:p>
-        </p:txBody>
-      </p:sp>
-    </p:spTree>
-  </p:cSld>
-  <p:clrMapOvr>
-    <a:masterClrMapping/>
-  </p:clrMapOvr>
-</p:sld>
-</file>
-
-<file path=ppt/slides/slide18.xml><?xml version="1.0" encoding="utf-8"?>
-<p:sld xmlns:a="http://schemas.openxmlformats.org/drawingml/2006/main" xmlns:r="http://schemas.openxmlformats.org/officeDocument/2006/relationships" xmlns:p="http://schemas.openxmlformats.org/presentationml/2006/main">
-  <p:cSld name="Slide 18">
-    <p:spTree>
-      <p:nvGrpSpPr>
-        <p:cNvPr id="1" name=""/>
-        <p:cNvGrpSpPr/>
-        <p:nvPr/>
-      </p:nvGrpSpPr>
-      <p:grpSpPr>
-        <a:xfrm>
-          <a:off x="0" y="0"/>
-          <a:ext cx="0" cy="0"/>
-          <a:chOff x="0" y="0"/>
-          <a:chExt cx="0" cy="0"/>
-        </a:xfrm>
-      </p:grpSpPr>
-      <p:sp>
-        <p:nvSpPr>
-          <p:cNvPr id="2" name="Text 0"/>
-          <p:cNvSpPr/>
-          <p:nvPr>
-            <p:ph idx="100" type="title" hasCustomPrompt="1"/>
-          </p:nvPr>
-        </p:nvSpPr>
-        <p:spPr>
-          <a:xfrm>
-            <a:off x="457200" y="274320"/>
-            <a:ext cx="8229600" cy="685800"/>
-          </a:xfrm>
-          <a:prstGeom prst="rect">
-            <a:avLst/>
-          </a:prstGeom>
-          <a:noFill/>
-          <a:ln/>
-        </p:spPr>
-        <p:txBody>
-          <a:bodyPr wrap="square" lIns="0" tIns="0" rIns="0" bIns="0" rtlCol="0" anchor="ctr"/>
-          <a:lstStyle/>
-          <a:p>
-            <a:pPr algn="l" indent="0" marL="0">
-              <a:buNone/>
-            </a:pPr>
-            <a:r>
-              <a:rPr lang="en-US" sz="2400" b="1" dirty="0">
-                <a:solidFill>
-                  <a:schemeClr val="tx2"/>
-                </a:solidFill>
-              </a:rPr>
-              <a:t>Which channel carries culture</a:t>
-            </a:r>
-            <a:endParaRPr lang="en-US" sz="2400" dirty="0"/>
-          </a:p>
-        </p:txBody>
-      </p:sp>
-      <p:pic>
-        <p:nvPicPr>
-          <p:cNvPr id="3" name="e09" descr="Who runs in failed runs with optimistic news when lambda applies only to the neighbour blend, only to the news blend, or both: positive, negative, small positive.">    </p:cNvPr>
-          <p:cNvPicPr>
-            <a:picLocks noChangeAspect="1"/>
-          </p:cNvPicPr>
-          <p:nvPr/>
-        </p:nvPicPr>
-        <p:blipFill>
-          <a:blip r:embed="rId1"/>
-          <a:stretch>
-            <a:fillRect/>
-          </a:stretch>
-        </p:blipFill>
-        <p:spPr>
-          <a:xfrm>
-            <a:off x="1547348" y="1051560"/>
-            <a:ext cx="6049305" cy="3383280"/>
-          </a:xfrm>
-          <a:prstGeom prst="rect">
-            <a:avLst/>
-          </a:prstGeom>
-        </p:spPr>
-      </p:pic>
-      <p:sp>
-        <p:nvSpPr>
-          <p:cNvPr id="4" name="caption"/>
-          <p:cNvSpPr txBox="1"/>
-          <p:nvPr/>
-        </p:nvSpPr>
-        <p:spPr>
-          <a:xfrm>
-            <a:off x="457200" y="4480560"/>
-            <a:ext cx="8229600" cy="274320"/>
-          </a:xfrm>
-          <a:prstGeom prst="rect">
-            <a:avLst/>
-          </a:prstGeom>
-          <a:noFill/>
-          <a:ln/>
-        </p:spPr>
-        <p:txBody>
-          <a:bodyPr wrap="square" lIns="0" tIns="0" rIns="0" bIns="0" rtlCol="0" anchor="ctr"/>
-          <a:lstStyle/>
-          <a:p>
-            <a:pPr indent="0" marL="0">
-              <a:buNone/>
-            </a:pPr>
-            <a:r>
-              <a:rPr lang="en-US" sz="1000" i="1" dirty="0">
-                <a:solidFill>
-                  <a:schemeClr val="accent3"/>
-                </a:solidFill>
-              </a:rPr>
-              <a:t>D in failed runs with optimistic news, when λ weights only the neighbour blend, only the news blend, or both (the model). θ-blend only +0.14; head-count only −0.07; both +0.02.</a:t>
-            </a:r>
-            <a:endParaRPr lang="en-US" sz="1000" dirty="0"/>
-          </a:p>
-        </p:txBody>
-      </p:sp>
-      <p:sp>
-        <p:nvSpPr>
-          <p:cNvPr id="25" name="Slide Number Placeholder 0"/>
-          <p:cNvSpPr>
-            <a:spLocks noGrp="1"/>
-          </p:cNvSpPr>
-          <p:nvPr>
-            <p:ph type="sldNum" sz="quarter" idx="4294967295"/>
-          </p:nvPr>
-        </p:nvSpPr>
-        <p:spPr>
-          <a:xfrm>
-            <a:off x="8321040" y="4754880"/>
-            <a:ext cx="457200" cy="274320"/>
-          </a:xfrm>
-          <a:prstGeom prst="rect">
-            <a:avLst/>
-          </a:prstGeom>
-          <a:extLst>
-            <a:ext uri="{C572A759-6A51-4108-AA02-DFA0A04FC94B}">
-              <ma14:wrappingTextBoxFlag xmlns:ma14="http://schemas.microsoft.com/office/mac/drawingml/2011/main" val="0"/>
-            </a:ext>
-          </a:extLst>
-        </p:spPr>
-        <p:txBody>
-          <a:bodyPr/>
-          <a:lstStyle>
-            <a:lvl1pPr>
-              <a:defRPr sz="900">
-                <a:solidFill>
-                  <a:srgbClr val="6B7280"/>
-                </a:solidFill>
-              </a:defRPr>
-            </a:lvl1pPr>
-          </a:lstStyle>
-          <a:p>
-            <a:pPr algn="r"/>
-            <a:fld id="{F7021451-1387-4CA6-816F-3879F97B5CBC}" type="slidenum">
-              <a:rPr b="0" lang="en-US"/>
-              <a:t>18</a:t>
-            </a:fld>
-            <a:endParaRPr lang="en-US"/>
-          </a:p>
-        </p:txBody>
-      </p:sp>
-    </p:spTree>
-  </p:cSld>
-  <p:clrMapOvr>
-    <a:masterClrMapping/>
-  </p:clrMapOvr>
-</p:sld>
-</file>
-
-<file path=ppt/slides/slide19.xml><?xml version="1.0" encoding="utf-8"?>
-<p:sld xmlns:a="http://schemas.openxmlformats.org/drawingml/2006/main" xmlns:r="http://schemas.openxmlformats.org/officeDocument/2006/relationships" xmlns:p="http://schemas.openxmlformats.org/presentationml/2006/main">
-  <p:cSld name="Slide 19">
-    <p:spTree>
-      <p:nvGrpSpPr>
-        <p:cNvPr id="1" name=""/>
-        <p:cNvGrpSpPr/>
-        <p:nvPr/>
-      </p:nvGrpSpPr>
-      <p:grpSpPr>
-        <a:xfrm>
-          <a:off x="0" y="0"/>
-          <a:ext cx="0" cy="0"/>
-          <a:chOff x="0" y="0"/>
-          <a:chExt cx="0" cy="0"/>
-        </a:xfrm>
-      </p:grpSpPr>
-      <p:sp>
-        <p:nvSpPr>
-          <p:cNvPr id="2" name="Text 0"/>
-          <p:cNvSpPr/>
-          <p:nvPr>
-            <p:ph idx="100" type="title" hasCustomPrompt="1"/>
-          </p:nvPr>
-        </p:nvSpPr>
-        <p:spPr>
-          <a:xfrm>
-            <a:off x="457200" y="274320"/>
-            <a:ext cx="8229600" cy="685800"/>
-          </a:xfrm>
-          <a:prstGeom prst="rect">
-            <a:avLst/>
-          </a:prstGeom>
-          <a:noFill/>
-          <a:ln/>
-        </p:spPr>
-        <p:txBody>
-          <a:bodyPr wrap="square" lIns="0" tIns="0" rIns="0" bIns="0" rtlCol="0" anchor="ctr"/>
-          <a:lstStyle/>
-          <a:p>
-            <a:pPr algn="l" indent="0" marL="0">
-              <a:buNone/>
-            </a:pPr>
-            <a:r>
-              <a:rPr lang="en-US" sz="2400" b="1" dirty="0">
-                <a:solidFill>
-                  <a:schemeClr val="tx2"/>
-                </a:solidFill>
-              </a:rPr>
-              <a:t>Matching Celsius: how large depositors exit</a:t>
-            </a:r>
-            <a:endParaRPr lang="en-US" sz="2400" dirty="0"/>
-          </a:p>
-        </p:txBody>
-      </p:sp>
-      <p:pic>
-        <p:nvPicPr>
-          <p:cNvPr id="3" name="e04" descr="Share of exits that withdraw everything at once by depositor size: Celsius falls from about 0.86 to 0.35 for the largest; the model stays at 0.93 to 1.">    </p:cNvPr>
-          <p:cNvPicPr>
-            <a:picLocks noChangeAspect="1"/>
-          </p:cNvPicPr>
-          <p:nvPr/>
-        </p:nvPicPr>
-        <p:blipFill>
-          <a:blip r:embed="rId1"/>
-          <a:stretch>
-            <a:fillRect/>
-          </a:stretch>
-        </p:blipFill>
-        <p:spPr>
-          <a:xfrm>
-            <a:off x="1882292" y="1051560"/>
-            <a:ext cx="5379415" cy="3383280"/>
-          </a:xfrm>
-          <a:prstGeom prst="rect">
-            <a:avLst/>
-          </a:prstGeom>
-        </p:spPr>
-      </p:pic>
-      <p:sp>
-        <p:nvSpPr>
-          <p:cNvPr id="4" name="caption"/>
-          <p:cNvSpPr txBox="1"/>
-          <p:nvPr/>
-        </p:nvSpPr>
-        <p:spPr>
-          <a:xfrm>
-            <a:off x="457200" y="4480560"/>
-            <a:ext cx="8229600" cy="274320"/>
-          </a:xfrm>
-          <a:prstGeom prst="rect">
-            <a:avLst/>
-          </a:prstGeom>
-          <a:noFill/>
-          <a:ln/>
-        </p:spPr>
-        <p:txBody>
-          <a:bodyPr wrap="square" lIns="0" tIns="0" rIns="0" bIns="0" rtlCol="0" anchor="ctr"/>
-          <a:lstStyle/>
-          <a:p>
-            <a:pPr indent="0" marL="0">
-              <a:buNone/>
-            </a:pPr>
-            <a:r>
-              <a:rPr lang="en-US" sz="1000" i="1" dirty="0">
-                <a:solidFill>
-                  <a:schemeClr val="accent3"/>
-                </a:solidFill>
-              </a:rPr>
-              <a:t>Share of exits that withdraw everything at once, by depositor size. Black: Celsius (band for D1–D5); greys: the model, uncapped and capped.</a:t>
-            </a:r>
-            <a:endParaRPr lang="en-US" sz="1000" dirty="0"/>
-          </a:p>
-        </p:txBody>
-      </p:sp>
-      <p:sp>
-        <p:nvSpPr>
-          <p:cNvPr id="25" name="Slide Number Placeholder 0"/>
-          <p:cNvSpPr>
-            <a:spLocks noGrp="1"/>
-          </p:cNvSpPr>
-          <p:nvPr>
-            <p:ph type="sldNum" sz="quarter" idx="4294967295"/>
-          </p:nvPr>
-        </p:nvSpPr>
-        <p:spPr>
-          <a:xfrm>
-            <a:off x="8321040" y="4754880"/>
-            <a:ext cx="457200" cy="274320"/>
-          </a:xfrm>
-          <a:prstGeom prst="rect">
-            <a:avLst/>
-          </a:prstGeom>
-          <a:extLst>
-            <a:ext uri="{C572A759-6A51-4108-AA02-DFA0A04FC94B}">
-              <ma14:wrappingTextBoxFlag xmlns:ma14="http://schemas.microsoft.com/office/mac/drawingml/2011/main" val="0"/>
-            </a:ext>
-          </a:extLst>
-        </p:spPr>
-        <p:txBody>
-          <a:bodyPr/>
-          <a:lstStyle>
-            <a:lvl1pPr>
-              <a:defRPr sz="900">
-                <a:solidFill>
-                  <a:srgbClr val="6B7280"/>
-                </a:solidFill>
-              </a:defRPr>
-            </a:lvl1pPr>
-          </a:lstStyle>
-          <a:p>
-            <a:pPr algn="r"/>
-            <a:fld id="{F7021451-1387-4CA6-816F-3879F97B5CBC}" type="slidenum">
-              <a:rPr b="0" lang="en-US"/>
-              <a:t>19</a:t>
             </a:fld>
             <a:endParaRPr lang="en-US"/>
           </a:p>
@@ -7221,174 +6615,6 @@
             <a:fld id="{F7021451-1387-4CA6-816F-3879F97B5CBC}" type="slidenum">
               <a:rPr b="0" lang="en-US"/>
               <a:t>2</a:t>
-            </a:fld>
-            <a:endParaRPr lang="en-US"/>
-          </a:p>
-        </p:txBody>
-      </p:sp>
-    </p:spTree>
-  </p:cSld>
-  <p:clrMapOvr>
-    <a:masterClrMapping/>
-  </p:clrMapOvr>
-</p:sld>
-</file>
-
-<file path=ppt/slides/slide20.xml><?xml version="1.0" encoding="utf-8"?>
-<p:sld xmlns:a="http://schemas.openxmlformats.org/drawingml/2006/main" xmlns:r="http://schemas.openxmlformats.org/officeDocument/2006/relationships" xmlns:p="http://schemas.openxmlformats.org/presentationml/2006/main">
-  <p:cSld name="Slide 20">
-    <p:spTree>
-      <p:nvGrpSpPr>
-        <p:cNvPr id="1" name=""/>
-        <p:cNvGrpSpPr/>
-        <p:nvPr/>
-      </p:nvGrpSpPr>
-      <p:grpSpPr>
-        <a:xfrm>
-          <a:off x="0" y="0"/>
-          <a:ext cx="0" cy="0"/>
-          <a:chOff x="0" y="0"/>
-          <a:chExt cx="0" cy="0"/>
-        </a:xfrm>
-      </p:grpSpPr>
-      <p:sp>
-        <p:nvSpPr>
-          <p:cNvPr id="2" name="Text 0"/>
-          <p:cNvSpPr/>
-          <p:nvPr>
-            <p:ph idx="100" type="title" hasCustomPrompt="1"/>
-          </p:nvPr>
-        </p:nvSpPr>
-        <p:spPr>
-          <a:xfrm>
-            <a:off x="457200" y="274320"/>
-            <a:ext cx="8229600" cy="685800"/>
-          </a:xfrm>
-          <a:prstGeom prst="rect">
-            <a:avLst/>
-          </a:prstGeom>
-          <a:noFill/>
-          <a:ln/>
-        </p:spPr>
-        <p:txBody>
-          <a:bodyPr wrap="square" lIns="0" tIns="0" rIns="0" bIns="0" rtlCol="0" anchor="ctr"/>
-          <a:lstStyle/>
-          <a:p>
-            <a:pPr algn="l" indent="0" marL="0">
-              <a:buNone/>
-            </a:pPr>
-            <a:r>
-              <a:rPr lang="en-US" sz="2400" b="1" dirty="0">
-                <a:solidFill>
-                  <a:schemeClr val="tx2"/>
-                </a:solidFill>
-              </a:rPr>
-              <a:t>Earlier specification (vault bank): failure by mix</a:t>
-            </a:r>
-            <a:endParaRPr lang="en-US" sz="2400" dirty="0"/>
-          </a:p>
-        </p:txBody>
-      </p:sp>
-      <p:pic>
-        <p:nvPicPr>
-          <p:cNvPr id="3" name="fig1" descr="Earlier vault-bank specification: probability of a run falls with the share of individualists for all three signal-weighting gaps.">    </p:cNvPr>
-          <p:cNvPicPr>
-            <a:picLocks noChangeAspect="1"/>
-          </p:cNvPicPr>
-          <p:nvPr/>
-        </p:nvPicPr>
-        <p:blipFill>
-          <a:blip r:embed="rId1"/>
-          <a:stretch>
-            <a:fillRect/>
-          </a:stretch>
-        </p:blipFill>
-        <p:spPr>
-          <a:xfrm>
-            <a:off x="1999016" y="1051560"/>
-            <a:ext cx="5145969" cy="3383280"/>
-          </a:xfrm>
-          <a:prstGeom prst="rect">
-            <a:avLst/>
-          </a:prstGeom>
-        </p:spPr>
-      </p:pic>
-      <p:sp>
-        <p:nvSpPr>
-          <p:cNvPr id="4" name="caption"/>
-          <p:cNvSpPr txBox="1"/>
-          <p:nvPr/>
-        </p:nvSpPr>
-        <p:spPr>
-          <a:xfrm>
-            <a:off x="457200" y="4480560"/>
-            <a:ext cx="8229600" cy="274320"/>
-          </a:xfrm>
-          <a:prstGeom prst="rect">
-            <a:avLst/>
-          </a:prstGeom>
-          <a:noFill/>
-          <a:ln/>
-        </p:spPr>
-        <p:txBody>
-          <a:bodyPr wrap="square" lIns="0" tIns="0" rIns="0" bIns="0" rtlCol="0" anchor="ctr"/>
-          <a:lstStyle/>
-          <a:p>
-            <a:pPr indent="0" marL="0">
-              <a:buNone/>
-            </a:pPr>
-            <a:r>
-              <a:rPr lang="en-US" sz="1000" i="1" dirty="0">
-                <a:solidFill>
-                  <a:schemeClr val="accent3"/>
-                </a:solidFill>
-              </a:rPr>
-              <a:t>Vault bank, earlier specification (chapter Figure 1): probability of a run by share of individualists, three λ gaps. Also monotone.</a:t>
-            </a:r>
-            <a:endParaRPr lang="en-US" sz="1000" dirty="0"/>
-          </a:p>
-        </p:txBody>
-      </p:sp>
-      <p:sp>
-        <p:nvSpPr>
-          <p:cNvPr id="25" name="Slide Number Placeholder 0"/>
-          <p:cNvSpPr>
-            <a:spLocks noGrp="1"/>
-          </p:cNvSpPr>
-          <p:nvPr>
-            <p:ph type="sldNum" sz="quarter" idx="4294967295"/>
-          </p:nvPr>
-        </p:nvSpPr>
-        <p:spPr>
-          <a:xfrm>
-            <a:off x="8321040" y="4754880"/>
-            <a:ext cx="457200" cy="274320"/>
-          </a:xfrm>
-          <a:prstGeom prst="rect">
-            <a:avLst/>
-          </a:prstGeom>
-          <a:extLst>
-            <a:ext uri="{C572A759-6A51-4108-AA02-DFA0A04FC94B}">
-              <ma14:wrappingTextBoxFlag xmlns:ma14="http://schemas.microsoft.com/office/mac/drawingml/2011/main" val="0"/>
-            </a:ext>
-          </a:extLst>
-        </p:spPr>
-        <p:txBody>
-          <a:bodyPr/>
-          <a:lstStyle>
-            <a:lvl1pPr>
-              <a:defRPr sz="900">
-                <a:solidFill>
-                  <a:srgbClr val="6B7280"/>
-                </a:solidFill>
-              </a:defRPr>
-            </a:lvl1pPr>
-          </a:lstStyle>
-          <a:p>
-            <a:pPr algn="r"/>
-            <a:fld id="{F7021451-1387-4CA6-816F-3879F97B5CBC}" type="slidenum">
-              <a:rPr b="0" lang="en-US"/>
-              <a:t>20</a:t>
             </a:fld>
             <a:endParaRPr lang="en-US"/>
           </a:p>

--- a/docs/deck_2026-10-26_seminar.pptx
+++ b/docs/deck_2026-10-26_seminar.pptx
@@ -19,12 +19,9 @@
     <p:sldId id="267" r:id="rId13"/>
     <p:sldId id="268" r:id="rId14"/>
     <p:sldId id="269" r:id="rId15"/>
-    <p:sldId id="270" r:id="rId16"/>
-    <p:sldId id="271" r:id="rId17"/>
-    <p:sldId id="272" r:id="rId18"/>
   </p:sldIdLst>
   <p:notesMasterIdLst>
-    <p:notesMasterId r:id="rId19"/>
+    <p:notesMasterId r:id="rId16"/>
   </p:notesMasterIdLst>
   <p:sldSz cx="9144000" cy="5143500"/>
   <p:notesSz cx="5143500" cy="9144000"/>
@@ -123,7 +120,7 @@
   <p:extLst>
     <p:ext uri="{521415D9-36F7-43E2-AB2F-B90AF26B5E84}">
       <p14:sectionLst xmlns:p14="http://schemas.microsoft.com/office/powerpoint/2010/main">
-        <p14:section name="Opening" id="{6d9beb0e-9aa0-932f-c957-19c334b02711}">
+        <p14:section name="Opening" id="{55747bc9-fbff-27bd-8aa5-5a4fae069394}">
           <p14:sldIdLst>
             <p14:sldId id="256"/>
             <p14:sldId id="257"/>
@@ -133,13 +130,13 @@
             <p14:sldId id="261"/>
           </p14:sldIdLst>
         </p14:section>
-        <p14:section name="The model" id="{f46d5627-9b9a-ed28-6843-82e78de20048}">
+        <p14:section name="The model" id="{9d0c14df-bb4b-d725-5f23-c886e55d2248}">
           <p14:sldIdLst>
             <p14:sldId id="262"/>
             <p14:sldId id="263"/>
           </p14:sldIdLst>
         </p14:section>
-        <p14:section name="Results" id="{ef56ac54-c560-7e66-53d4-66abda25c443}">
+        <p14:section name="Results" id="{2d66c5e5-8eab-8a04-4be3-89b73e6948d4}">
           <p14:sldIdLst>
             <p14:sldId id="264"/>
             <p14:sldId id="265"/>
@@ -147,21 +144,14 @@
             <p14:sldId id="267"/>
           </p14:sldIdLst>
         </p14:section>
-        <p14:section name="Validation" id="{b68adc42-6c9a-eaa4-1a69-b2323fe05bef}">
+        <p14:section name="Validation" id="{512177da-e3e1-33b4-f7ac-30aa9211fc0b}">
           <p14:sldIdLst>
             <p14:sldId id="268"/>
           </p14:sldIdLst>
         </p14:section>
-        <p14:section name="Close" id="{44f77a63-cc4e-d7e3-946d-4444958d8d44}">
+        <p14:section name="Close" id="{c984a01f-8343-fd6a-056e-d8b13e51c458}">
           <p14:sldIdLst>
             <p14:sldId id="269"/>
-          </p14:sldIdLst>
-        </p14:section>
-        <p14:section name="Backup" id="{20089f17-7ff2-3b36-2c21-45ea981cdd02}">
-          <p14:sldIdLst>
-            <p14:sldId id="270"/>
-            <p14:sldId id="271"/>
-            <p14:sldId id="272"/>
           </p14:sldIdLst>
         </p14:section>
       </p14:sectionLst>
@@ -1032,270 +1022,6 @@
             <a:fld id="{F7021451-1387-4CA6-816F-3879F97B5CBC}" type="slidenum">
               <a:rPr lang="en-US"/>
               <a:t>14</a:t>
-            </a:fld>
-            <a:endParaRPr lang="en-US"/>
-          </a:p>
-        </p:txBody>
-      </p:sp>
-    </p:spTree>
-    <p:extLst>
-      <p:ext uri="{BB962C8B-B14F-4D97-AF65-F5344CB8AC3E}">
-        <p14:creationId xmlns:p14="http://schemas.microsoft.com/office/powerpoint/2010/main" val="1024086991"/>
-      </p:ext>
-    </p:extLst>
-  </p:cSld>
-  <p:clrMapOvr>
-    <a:masterClrMapping/>
-  </p:clrMapOvr>
-</p:notes>
-</file>
-
-<file path=ppt/notesSlides/notesSlide15.xml><?xml version="1.0" encoding="utf-8"?>
-<p:notes xmlns:a="http://schemas.openxmlformats.org/drawingml/2006/main" xmlns:r="http://schemas.openxmlformats.org/officeDocument/2006/relationships" xmlns:p="http://schemas.openxmlformats.org/presentationml/2006/main">
-  <p:cSld>
-    <p:spTree>
-      <p:nvGrpSpPr>
-        <p:cNvPr id="1" name=""/>
-        <p:cNvGrpSpPr/>
-        <p:nvPr/>
-      </p:nvGrpSpPr>
-      <p:grpSpPr>
-        <a:xfrm>
-          <a:off x="0" y="0"/>
-          <a:ext cx="0" cy="0"/>
-          <a:chOff x="0" y="0"/>
-          <a:chExt cx="0" cy="0"/>
-        </a:xfrm>
-      </p:grpSpPr>
-      <p:sp>
-        <p:nvSpPr>
-          <p:cNvPr id="2" name="Slide Image Placeholder 1"/>
-          <p:cNvSpPr>
-            <a:spLocks noGrp="1" noRot="1" noChangeAspect="1"/>
-          </p:cNvSpPr>
-          <p:nvPr>
-            <p:ph type="sldImg"/>
-          </p:nvPr>
-        </p:nvSpPr>
-        <p:spPr/>
-      </p:sp>
-      <p:sp>
-        <p:nvSpPr>
-          <p:cNvPr id="3" name="Notes Placeholder 2"/>
-          <p:cNvSpPr>
-            <a:spLocks noGrp="1"/>
-          </p:cNvSpPr>
-          <p:nvPr>
-            <p:ph type="body" idx="1"/>
-          </p:nvPr>
-        </p:nvSpPr>
-        <p:spPr/>
-        <p:txBody>
-          <a:bodyPr/>
-          <a:lstStyle/>
-          <a:p>
-            <a:r>
-              <a:rPr lang="en-US" dirty="0"/>
-              <a:t/>
-            </a:r>
-            <a:endParaRPr lang="en-US" dirty="0"/>
-          </a:p>
-        </p:txBody>
-      </p:sp>
-      <p:sp>
-        <p:nvSpPr>
-          <p:cNvPr id="4" name="Slide Number Placeholder 3"/>
-          <p:cNvSpPr>
-            <a:spLocks noGrp="1"/>
-          </p:cNvSpPr>
-          <p:nvPr>
-            <p:ph type="sldNum" sz="quarter" idx="10"/>
-          </p:nvPr>
-        </p:nvSpPr>
-        <p:spPr/>
-        <p:txBody>
-          <a:bodyPr/>
-          <a:lstStyle/>
-          <a:p>
-            <a:fld id="{F7021451-1387-4CA6-816F-3879F97B5CBC}" type="slidenum">
-              <a:rPr lang="en-US"/>
-              <a:t>15</a:t>
-            </a:fld>
-            <a:endParaRPr lang="en-US"/>
-          </a:p>
-        </p:txBody>
-      </p:sp>
-    </p:spTree>
-    <p:extLst>
-      <p:ext uri="{BB962C8B-B14F-4D97-AF65-F5344CB8AC3E}">
-        <p14:creationId xmlns:p14="http://schemas.microsoft.com/office/powerpoint/2010/main" val="1024086991"/>
-      </p:ext>
-    </p:extLst>
-  </p:cSld>
-  <p:clrMapOvr>
-    <a:masterClrMapping/>
-  </p:clrMapOvr>
-</p:notes>
-</file>
-
-<file path=ppt/notesSlides/notesSlide16.xml><?xml version="1.0" encoding="utf-8"?>
-<p:notes xmlns:a="http://schemas.openxmlformats.org/drawingml/2006/main" xmlns:r="http://schemas.openxmlformats.org/officeDocument/2006/relationships" xmlns:p="http://schemas.openxmlformats.org/presentationml/2006/main">
-  <p:cSld>
-    <p:spTree>
-      <p:nvGrpSpPr>
-        <p:cNvPr id="1" name=""/>
-        <p:cNvGrpSpPr/>
-        <p:nvPr/>
-      </p:nvGrpSpPr>
-      <p:grpSpPr>
-        <a:xfrm>
-          <a:off x="0" y="0"/>
-          <a:ext cx="0" cy="0"/>
-          <a:chOff x="0" y="0"/>
-          <a:chExt cx="0" cy="0"/>
-        </a:xfrm>
-      </p:grpSpPr>
-      <p:sp>
-        <p:nvSpPr>
-          <p:cNvPr id="2" name="Slide Image Placeholder 1"/>
-          <p:cNvSpPr>
-            <a:spLocks noGrp="1" noRot="1" noChangeAspect="1"/>
-          </p:cNvSpPr>
-          <p:nvPr>
-            <p:ph type="sldImg"/>
-          </p:nvPr>
-        </p:nvSpPr>
-        <p:spPr/>
-      </p:sp>
-      <p:sp>
-        <p:nvSpPr>
-          <p:cNvPr id="3" name="Notes Placeholder 2"/>
-          <p:cNvSpPr>
-            <a:spLocks noGrp="1"/>
-          </p:cNvSpPr>
-          <p:nvPr>
-            <p:ph type="body" idx="1"/>
-          </p:nvPr>
-        </p:nvSpPr>
-        <p:spPr/>
-        <p:txBody>
-          <a:bodyPr/>
-          <a:lstStyle/>
-          <a:p>
-            <a:r>
-              <a:rPr lang="en-US" dirty="0"/>
-              <a:t>Both types withdraw less as mu rises; collectivists above individualists at every mixed mu for the two wide gaps; nearly identical at (0.3, 0.5). Technical labels.</a:t>
-            </a:r>
-            <a:endParaRPr lang="en-US" dirty="0"/>
-          </a:p>
-        </p:txBody>
-      </p:sp>
-      <p:sp>
-        <p:nvSpPr>
-          <p:cNvPr id="4" name="Slide Number Placeholder 3"/>
-          <p:cNvSpPr>
-            <a:spLocks noGrp="1"/>
-          </p:cNvSpPr>
-          <p:nvPr>
-            <p:ph type="sldNum" sz="quarter" idx="10"/>
-          </p:nvPr>
-        </p:nvSpPr>
-        <p:spPr/>
-        <p:txBody>
-          <a:bodyPr/>
-          <a:lstStyle/>
-          <a:p>
-            <a:fld id="{F7021451-1387-4CA6-816F-3879F97B5CBC}" type="slidenum">
-              <a:rPr lang="en-US"/>
-              <a:t>16</a:t>
-            </a:fld>
-            <a:endParaRPr lang="en-US"/>
-          </a:p>
-        </p:txBody>
-      </p:sp>
-    </p:spTree>
-    <p:extLst>
-      <p:ext uri="{BB962C8B-B14F-4D97-AF65-F5344CB8AC3E}">
-        <p14:creationId xmlns:p14="http://schemas.microsoft.com/office/powerpoint/2010/main" val="1024086991"/>
-      </p:ext>
-    </p:extLst>
-  </p:cSld>
-  <p:clrMapOvr>
-    <a:masterClrMapping/>
-  </p:clrMapOvr>
-</p:notes>
-</file>
-
-<file path=ppt/notesSlides/notesSlide17.xml><?xml version="1.0" encoding="utf-8"?>
-<p:notes xmlns:a="http://schemas.openxmlformats.org/drawingml/2006/main" xmlns:r="http://schemas.openxmlformats.org/officeDocument/2006/relationships" xmlns:p="http://schemas.openxmlformats.org/presentationml/2006/main">
-  <p:cSld>
-    <p:spTree>
-      <p:nvGrpSpPr>
-        <p:cNvPr id="1" name=""/>
-        <p:cNvGrpSpPr/>
-        <p:nvPr/>
-      </p:nvGrpSpPr>
-      <p:grpSpPr>
-        <a:xfrm>
-          <a:off x="0" y="0"/>
-          <a:ext cx="0" cy="0"/>
-          <a:chOff x="0" y="0"/>
-          <a:chExt cx="0" cy="0"/>
-        </a:xfrm>
-      </p:grpSpPr>
-      <p:sp>
-        <p:nvSpPr>
-          <p:cNvPr id="2" name="Slide Image Placeholder 1"/>
-          <p:cNvSpPr>
-            <a:spLocks noGrp="1" noRot="1" noChangeAspect="1"/>
-          </p:cNvSpPr>
-          <p:nvPr>
-            <p:ph type="sldImg"/>
-          </p:nvPr>
-        </p:nvSpPr>
-        <p:spPr/>
-      </p:sp>
-      <p:sp>
-        <p:nvSpPr>
-          <p:cNvPr id="3" name="Notes Placeholder 2"/>
-          <p:cNvSpPr>
-            <a:spLocks noGrp="1"/>
-          </p:cNvSpPr>
-          <p:nvPr>
-            <p:ph type="body" idx="1"/>
-          </p:nvPr>
-        </p:nvSpPr>
-        <p:spPr/>
-        <p:txBody>
-          <a:bodyPr/>
-          <a:lstStyle/>
-          <a:p>
-            <a:r>
-              <a:rPr lang="en-US" dirty="0"/>
-              <a:t>Theta-blend only: +0.14 (Ch 1's sign). Head-count only: -0.07 (opposite). Both: +0.02. The two channels pull in opposite directions; Ch 1's sign survives, damped by herding.</a:t>
-            </a:r>
-            <a:endParaRPr lang="en-US" dirty="0"/>
-          </a:p>
-        </p:txBody>
-      </p:sp>
-      <p:sp>
-        <p:nvSpPr>
-          <p:cNvPr id="4" name="Slide Number Placeholder 3"/>
-          <p:cNvSpPr>
-            <a:spLocks noGrp="1"/>
-          </p:cNvSpPr>
-          <p:nvPr>
-            <p:ph type="sldNum" sz="quarter" idx="10"/>
-          </p:nvPr>
-        </p:nvSpPr>
-        <p:spPr/>
-        <p:txBody>
-          <a:bodyPr/>
-          <a:lstStyle/>
-          <a:p>
-            <a:fld id="{F7021451-1387-4CA6-816F-3879F97B5CBC}" type="slidenum">
-              <a:rPr lang="en-US"/>
-              <a:t>17</a:t>
             </a:fld>
             <a:endParaRPr lang="en-US"/>
           </a:p>
@@ -6010,443 +5736,6 @@
             <a:fld id="{F7021451-1387-4CA6-816F-3879F97B5CBC}" type="slidenum">
               <a:rPr b="0" lang="en-US"/>
               <a:t>14</a:t>
-            </a:fld>
-            <a:endParaRPr lang="en-US"/>
-          </a:p>
-        </p:txBody>
-      </p:sp>
-    </p:spTree>
-  </p:cSld>
-  <p:clrMapOvr>
-    <a:masterClrMapping/>
-  </p:clrMapOvr>
-</p:sld>
-</file>
-
-<file path=ppt/slides/slide15.xml><?xml version="1.0" encoding="utf-8"?>
-<p:sld xmlns:a="http://schemas.openxmlformats.org/drawingml/2006/main" xmlns:r="http://schemas.openxmlformats.org/officeDocument/2006/relationships" xmlns:p="http://schemas.openxmlformats.org/presentationml/2006/main">
-  <p:cSld name="Slide 15">
-    <p:spTree>
-      <p:nvGrpSpPr>
-        <p:cNvPr id="1" name=""/>
-        <p:cNvGrpSpPr/>
-        <p:nvPr/>
-      </p:nvGrpSpPr>
-      <p:grpSpPr>
-        <a:xfrm>
-          <a:off x="0" y="0"/>
-          <a:ext cx="0" cy="0"/>
-          <a:chOff x="0" y="0"/>
-          <a:chExt cx="0" cy="0"/>
-        </a:xfrm>
-      </p:grpSpPr>
-      <p:sp>
-        <p:nvSpPr>
-          <p:cNvPr id="2" name="Text 0"/>
-          <p:cNvSpPr/>
-          <p:nvPr>
-            <p:ph idx="100" type="title" hasCustomPrompt="1"/>
-          </p:nvPr>
-        </p:nvSpPr>
-        <p:spPr>
-          <a:xfrm>
-            <a:off x="548640" y="1828800"/>
-            <a:ext cx="8046720" cy="1097280"/>
-          </a:xfrm>
-          <a:prstGeom prst="rect">
-            <a:avLst/>
-          </a:prstGeom>
-          <a:noFill/>
-          <a:ln/>
-        </p:spPr>
-        <p:txBody>
-          <a:bodyPr wrap="square" lIns="0" tIns="0" rIns="0" bIns="0" rtlCol="0" anchor="ctr"/>
-          <a:lstStyle/>
-          <a:p>
-            <a:pPr algn="l" indent="0" marL="0">
-              <a:buNone/>
-            </a:pPr>
-            <a:r>
-              <a:rPr lang="en-US" sz="3200" b="1" dirty="0">
-                <a:solidFill>
-                  <a:schemeClr val="bg1"/>
-                </a:solidFill>
-              </a:rPr>
-              <a:t>Backup</a:t>
-            </a:r>
-            <a:endParaRPr lang="en-US" sz="3200" dirty="0"/>
-          </a:p>
-        </p:txBody>
-      </p:sp>
-      <p:sp>
-        <p:nvSpPr>
-          <p:cNvPr id="3" name="Text 0"/>
-          <p:cNvSpPr/>
-          <p:nvPr>
-            <p:ph idx="101" type="body" hasCustomPrompt="1"/>
-          </p:nvPr>
-        </p:nvSpPr>
-        <p:spPr>
-          <a:xfrm>
-            <a:off x="548640" y="2971800"/>
-            <a:ext cx="8046720" cy="731520"/>
-          </a:xfrm>
-          <a:prstGeom prst="rect">
-            <a:avLst/>
-          </a:prstGeom>
-          <a:noFill/>
-          <a:ln/>
-        </p:spPr>
-        <p:txBody>
-          <a:bodyPr wrap="square" lIns="0" tIns="0" rIns="0" bIns="0" rtlCol="0" anchor="t"/>
-          <a:lstStyle/>
-          <a:p>
-            <a:pPr indent="0" marL="0">
-              <a:buNone/>
-            </a:pPr>
-            <a:r>
-              <a:rPr lang="en-US" sz="1600" dirty="0">
-                <a:solidFill>
-                  <a:schemeClr val="accent4"/>
-                </a:solidFill>
-              </a:rPr>
-              <a:t>Technical versions of the exhibits: who withdraws by type and mix, and which channel carries culture.</a:t>
-            </a:r>
-            <a:endParaRPr lang="en-US" sz="1600" dirty="0"/>
-          </a:p>
-        </p:txBody>
-      </p:sp>
-    </p:spTree>
-  </p:cSld>
-  <p:clrMapOvr>
-    <a:masterClrMapping/>
-  </p:clrMapOvr>
-</p:sld>
-</file>
-
-<file path=ppt/slides/slide16.xml><?xml version="1.0" encoding="utf-8"?>
-<p:sld xmlns:a="http://schemas.openxmlformats.org/drawingml/2006/main" xmlns:r="http://schemas.openxmlformats.org/officeDocument/2006/relationships" xmlns:p="http://schemas.openxmlformats.org/presentationml/2006/main">
-  <p:cSld name="Slide 16">
-    <p:spTree>
-      <p:nvGrpSpPr>
-        <p:cNvPr id="1" name=""/>
-        <p:cNvGrpSpPr/>
-        <p:nvPr/>
-      </p:nvGrpSpPr>
-      <p:grpSpPr>
-        <a:xfrm>
-          <a:off x="0" y="0"/>
-          <a:ext cx="0" cy="0"/>
-          <a:chOff x="0" y="0"/>
-          <a:chExt cx="0" cy="0"/>
-        </a:xfrm>
-      </p:grpSpPr>
-      <p:sp>
-        <p:nvSpPr>
-          <p:cNvPr id="2" name="Text 0"/>
-          <p:cNvSpPr/>
-          <p:nvPr>
-            <p:ph idx="100" type="title" hasCustomPrompt="1"/>
-          </p:nvPr>
-        </p:nvSpPr>
-        <p:spPr>
-          <a:xfrm>
-            <a:off x="457200" y="274320"/>
-            <a:ext cx="8229600" cy="685800"/>
-          </a:xfrm>
-          <a:prstGeom prst="rect">
-            <a:avLst/>
-          </a:prstGeom>
-          <a:noFill/>
-          <a:ln/>
-        </p:spPr>
-        <p:txBody>
-          <a:bodyPr wrap="square" lIns="0" tIns="0" rIns="0" bIns="0" rtlCol="0" anchor="ctr"/>
-          <a:lstStyle/>
-          <a:p>
-            <a:pPr algn="l" indent="0" marL="0">
-              <a:buNone/>
-            </a:pPr>
-            <a:r>
-              <a:rPr lang="en-US" sz="2400" b="1" dirty="0">
-                <a:solidFill>
-                  <a:schemeClr val="tx2"/>
-                </a:solidFill>
-              </a:rPr>
-              <a:t>Who withdraws, by type and mix</a:t>
-            </a:r>
-            <a:endParaRPr lang="en-US" sz="2400" dirty="0"/>
-          </a:p>
-        </p:txBody>
-      </p:sp>
-      <p:pic>
-        <p:nvPicPr>
-          <p:cNvPr id="3" name="e06" descr="Share who withdraw by individualist share, three panels by lambda pair: collectivists above individualists at every mixed share for the two wide gaps.">    </p:cNvPr>
-          <p:cNvPicPr>
-            <a:picLocks noChangeAspect="1"/>
-          </p:cNvPicPr>
-          <p:nvPr/>
-        </p:nvPicPr>
-        <p:blipFill>
-          <a:blip r:embed="rId1"/>
-          <a:stretch>
-            <a:fillRect/>
-          </a:stretch>
-        </p:blipFill>
-        <p:spPr>
-          <a:xfrm>
-            <a:off x="512064" y="1051560"/>
-            <a:ext cx="8119872" cy="3383280"/>
-          </a:xfrm>
-          <a:prstGeom prst="rect">
-            <a:avLst/>
-          </a:prstGeom>
-        </p:spPr>
-      </p:pic>
-      <p:sp>
-        <p:nvSpPr>
-          <p:cNvPr id="4" name="caption"/>
-          <p:cNvSpPr txBox="1"/>
-          <p:nvPr/>
-        </p:nvSpPr>
-        <p:spPr>
-          <a:xfrm>
-            <a:off x="457200" y="4480560"/>
-            <a:ext cx="8229600" cy="274320"/>
-          </a:xfrm>
-          <a:prstGeom prst="rect">
-            <a:avLst/>
-          </a:prstGeom>
-          <a:noFill/>
-          <a:ln/>
-        </p:spPr>
-        <p:txBody>
-          <a:bodyPr wrap="square" lIns="0" tIns="0" rIns="0" bIns="0" rtlCol="0" anchor="ctr"/>
-          <a:lstStyle/>
-          <a:p>
-            <a:pPr indent="0" marL="0">
-              <a:buNone/>
-            </a:pPr>
-            <a:r>
-              <a:rPr lang="en-US" sz="1000" i="1" dirty="0">
-                <a:solidFill>
-                  <a:schemeClr val="accent3"/>
-                </a:solidFill>
-              </a:rPr>
-              <a:t>Share who withdraw by individualist share μ, one panel per λ pair; orange individualists, blue collectivists, with CIs.</a:t>
-            </a:r>
-            <a:endParaRPr lang="en-US" sz="1000" dirty="0"/>
-          </a:p>
-        </p:txBody>
-      </p:sp>
-      <p:sp>
-        <p:nvSpPr>
-          <p:cNvPr id="25" name="Slide Number Placeholder 0"/>
-          <p:cNvSpPr>
-            <a:spLocks noGrp="1"/>
-          </p:cNvSpPr>
-          <p:nvPr>
-            <p:ph type="sldNum" sz="quarter" idx="4294967295"/>
-          </p:nvPr>
-        </p:nvSpPr>
-        <p:spPr>
-          <a:xfrm>
-            <a:off x="8321040" y="4754880"/>
-            <a:ext cx="457200" cy="274320"/>
-          </a:xfrm>
-          <a:prstGeom prst="rect">
-            <a:avLst/>
-          </a:prstGeom>
-          <a:extLst>
-            <a:ext uri="{C572A759-6A51-4108-AA02-DFA0A04FC94B}">
-              <ma14:wrappingTextBoxFlag xmlns:ma14="http://schemas.microsoft.com/office/mac/drawingml/2011/main" val="0"/>
-            </a:ext>
-          </a:extLst>
-        </p:spPr>
-        <p:txBody>
-          <a:bodyPr/>
-          <a:lstStyle>
-            <a:lvl1pPr>
-              <a:defRPr sz="900">
-                <a:solidFill>
-                  <a:srgbClr val="6B7280"/>
-                </a:solidFill>
-              </a:defRPr>
-            </a:lvl1pPr>
-          </a:lstStyle>
-          <a:p>
-            <a:pPr algn="r"/>
-            <a:fld id="{F7021451-1387-4CA6-816F-3879F97B5CBC}" type="slidenum">
-              <a:rPr b="0" lang="en-US"/>
-              <a:t>16</a:t>
-            </a:fld>
-            <a:endParaRPr lang="en-US"/>
-          </a:p>
-        </p:txBody>
-      </p:sp>
-    </p:spTree>
-  </p:cSld>
-  <p:clrMapOvr>
-    <a:masterClrMapping/>
-  </p:clrMapOvr>
-</p:sld>
-</file>
-
-<file path=ppt/slides/slide17.xml><?xml version="1.0" encoding="utf-8"?>
-<p:sld xmlns:a="http://schemas.openxmlformats.org/drawingml/2006/main" xmlns:r="http://schemas.openxmlformats.org/officeDocument/2006/relationships" xmlns:p="http://schemas.openxmlformats.org/presentationml/2006/main">
-  <p:cSld name="Slide 17">
-    <p:spTree>
-      <p:nvGrpSpPr>
-        <p:cNvPr id="1" name=""/>
-        <p:cNvGrpSpPr/>
-        <p:nvPr/>
-      </p:nvGrpSpPr>
-      <p:grpSpPr>
-        <a:xfrm>
-          <a:off x="0" y="0"/>
-          <a:ext cx="0" cy="0"/>
-          <a:chOff x="0" y="0"/>
-          <a:chExt cx="0" cy="0"/>
-        </a:xfrm>
-      </p:grpSpPr>
-      <p:sp>
-        <p:nvSpPr>
-          <p:cNvPr id="2" name="Text 0"/>
-          <p:cNvSpPr/>
-          <p:nvPr>
-            <p:ph idx="100" type="title" hasCustomPrompt="1"/>
-          </p:nvPr>
-        </p:nvSpPr>
-        <p:spPr>
-          <a:xfrm>
-            <a:off x="457200" y="274320"/>
-            <a:ext cx="8229600" cy="685800"/>
-          </a:xfrm>
-          <a:prstGeom prst="rect">
-            <a:avLst/>
-          </a:prstGeom>
-          <a:noFill/>
-          <a:ln/>
-        </p:spPr>
-        <p:txBody>
-          <a:bodyPr wrap="square" lIns="0" tIns="0" rIns="0" bIns="0" rtlCol="0" anchor="ctr"/>
-          <a:lstStyle/>
-          <a:p>
-            <a:pPr algn="l" indent="0" marL="0">
-              <a:buNone/>
-            </a:pPr>
-            <a:r>
-              <a:rPr lang="en-US" sz="2400" b="1" dirty="0">
-                <a:solidFill>
-                  <a:schemeClr val="tx2"/>
-                </a:solidFill>
-              </a:rPr>
-              <a:t>Which channel carries culture</a:t>
-            </a:r>
-            <a:endParaRPr lang="en-US" sz="2400" dirty="0"/>
-          </a:p>
-        </p:txBody>
-      </p:sp>
-      <p:pic>
-        <p:nvPicPr>
-          <p:cNvPr id="3" name="e09" descr="Who runs in failed runs with optimistic news when lambda applies only to the neighbour blend, only to the news blend, or both: positive, negative, small positive.">    </p:cNvPr>
-          <p:cNvPicPr>
-            <a:picLocks noChangeAspect="1"/>
-          </p:cNvPicPr>
-          <p:nvPr/>
-        </p:nvPicPr>
-        <p:blipFill>
-          <a:blip r:embed="rId1"/>
-          <a:stretch>
-            <a:fillRect/>
-          </a:stretch>
-        </p:blipFill>
-        <p:spPr>
-          <a:xfrm>
-            <a:off x="1547348" y="1051560"/>
-            <a:ext cx="6049305" cy="3383280"/>
-          </a:xfrm>
-          <a:prstGeom prst="rect">
-            <a:avLst/>
-          </a:prstGeom>
-        </p:spPr>
-      </p:pic>
-      <p:sp>
-        <p:nvSpPr>
-          <p:cNvPr id="4" name="caption"/>
-          <p:cNvSpPr txBox="1"/>
-          <p:nvPr/>
-        </p:nvSpPr>
-        <p:spPr>
-          <a:xfrm>
-            <a:off x="457200" y="4480560"/>
-            <a:ext cx="8229600" cy="274320"/>
-          </a:xfrm>
-          <a:prstGeom prst="rect">
-            <a:avLst/>
-          </a:prstGeom>
-          <a:noFill/>
-          <a:ln/>
-        </p:spPr>
-        <p:txBody>
-          <a:bodyPr wrap="square" lIns="0" tIns="0" rIns="0" bIns="0" rtlCol="0" anchor="ctr"/>
-          <a:lstStyle/>
-          <a:p>
-            <a:pPr indent="0" marL="0">
-              <a:buNone/>
-            </a:pPr>
-            <a:r>
-              <a:rPr lang="en-US" sz="1000" i="1" dirty="0">
-                <a:solidFill>
-                  <a:schemeClr val="accent3"/>
-                </a:solidFill>
-              </a:rPr>
-              <a:t>D in failed runs with optimistic news, when λ weights only the neighbour blend, only the news blend, or both (the model). θ-blend only +0.14; head-count only −0.07; both +0.02.</a:t>
-            </a:r>
-            <a:endParaRPr lang="en-US" sz="1000" dirty="0"/>
-          </a:p>
-        </p:txBody>
-      </p:sp>
-      <p:sp>
-        <p:nvSpPr>
-          <p:cNvPr id="25" name="Slide Number Placeholder 0"/>
-          <p:cNvSpPr>
-            <a:spLocks noGrp="1"/>
-          </p:cNvSpPr>
-          <p:nvPr>
-            <p:ph type="sldNum" sz="quarter" idx="4294967295"/>
-          </p:nvPr>
-        </p:nvSpPr>
-        <p:spPr>
-          <a:xfrm>
-            <a:off x="8321040" y="4754880"/>
-            <a:ext cx="457200" cy="274320"/>
-          </a:xfrm>
-          <a:prstGeom prst="rect">
-            <a:avLst/>
-          </a:prstGeom>
-          <a:extLst>
-            <a:ext uri="{C572A759-6A51-4108-AA02-DFA0A04FC94B}">
-              <ma14:wrappingTextBoxFlag xmlns:ma14="http://schemas.microsoft.com/office/mac/drawingml/2011/main" val="0"/>
-            </a:ext>
-          </a:extLst>
-        </p:spPr>
-        <p:txBody>
-          <a:bodyPr/>
-          <a:lstStyle>
-            <a:lvl1pPr>
-              <a:defRPr sz="900">
-                <a:solidFill>
-                  <a:srgbClr val="6B7280"/>
-                </a:solidFill>
-              </a:defRPr>
-            </a:lvl1pPr>
-          </a:lstStyle>
-          <a:p>
-            <a:pPr algn="r"/>
-            <a:fld id="{F7021451-1387-4CA6-816F-3879F97B5CBC}" type="slidenum">
-              <a:rPr b="0" lang="en-US"/>
-              <a:t>17</a:t>
             </a:fld>
             <a:endParaRPr lang="en-US"/>
           </a:p>

--- a/docs/deck_2026-10-26_seminar.pptx
+++ b/docs/deck_2026-10-26_seminar.pptx
@@ -120,7 +120,7 @@
   <p:extLst>
     <p:ext uri="{521415D9-36F7-43E2-AB2F-B90AF26B5E84}">
       <p14:sectionLst xmlns:p14="http://schemas.microsoft.com/office/powerpoint/2010/main">
-        <p14:section name="Opening" id="{55747bc9-fbff-27bd-8aa5-5a4fae069394}">
+        <p14:section name="Opening" id="{396bd14a-a39d-e6f2-f9f5-0628e9fb9461}">
           <p14:sldIdLst>
             <p14:sldId id="256"/>
             <p14:sldId id="257"/>
@@ -130,13 +130,13 @@
             <p14:sldId id="261"/>
           </p14:sldIdLst>
         </p14:section>
-        <p14:section name="The model" id="{9d0c14df-bb4b-d725-5f23-c886e55d2248}">
+        <p14:section name="The model" id="{260780b1-eda7-6696-3496-b5072fee71e6}">
           <p14:sldIdLst>
             <p14:sldId id="262"/>
             <p14:sldId id="263"/>
           </p14:sldIdLst>
         </p14:section>
-        <p14:section name="Results" id="{2d66c5e5-8eab-8a04-4be3-89b73e6948d4}">
+        <p14:section name="Results" id="{3fe9e14b-c449-ebcb-e3cb-ecaf6b6eb562}">
           <p14:sldIdLst>
             <p14:sldId id="264"/>
             <p14:sldId id="265"/>
@@ -144,12 +144,12 @@
             <p14:sldId id="267"/>
           </p14:sldIdLst>
         </p14:section>
-        <p14:section name="Validation" id="{512177da-e3e1-33b4-f7ac-30aa9211fc0b}">
+        <p14:section name="Validation" id="{bd234241-c11c-d2f9-d706-b94b13808ece}">
           <p14:sldIdLst>
             <p14:sldId id="268"/>
           </p14:sldIdLst>
         </p14:section>
-        <p14:section name="Close" id="{c984a01f-8343-fd6a-056e-d8b13e51c458}">
+        <p14:section name="Close" id="{e05ab89a-db4b-2e47-913e-ccc4b4be4d1a}">
           <p14:sldIdLst>
             <p14:sldId id="269"/>
           </p14:sldIdLst>
@@ -7846,7 +7846,7 @@
         <p:spPr>
           <a:xfrm>
             <a:off x="457200" y="1051560"/>
-            <a:ext cx="3467633" cy="3520440"/>
+            <a:ext cx="3495797" cy="3520440"/>
           </a:xfrm>
           <a:prstGeom prst="rect">
             <a:avLst/>
@@ -7861,8 +7861,8 @@
         </p:nvSpPr>
         <p:spPr>
           <a:xfrm>
-            <a:off x="4244873" y="1051560"/>
-            <a:ext cx="2152383" cy="960120"/>
+            <a:off x="4273037" y="1051560"/>
+            <a:ext cx="2138302" cy="960120"/>
           </a:xfrm>
           <a:prstGeom prst="roundRect">
             <a:avLst>
@@ -7888,8 +7888,8 @@
         </p:nvSpPr>
         <p:spPr>
           <a:xfrm>
-            <a:off x="4382033" y="1124712"/>
-            <a:ext cx="1878063" cy="457200"/>
+            <a:off x="4410197" y="1124712"/>
+            <a:ext cx="1863982" cy="457200"/>
           </a:xfrm>
           <a:prstGeom prst="rect">
             <a:avLst/>
@@ -7927,8 +7927,8 @@
         </p:nvSpPr>
         <p:spPr>
           <a:xfrm>
-            <a:off x="4382033" y="1600200"/>
-            <a:ext cx="1878063" cy="356616"/>
+            <a:off x="4410197" y="1600200"/>
+            <a:ext cx="1863982" cy="356616"/>
           </a:xfrm>
           <a:prstGeom prst="rect">
             <a:avLst/>
@@ -7963,8 +7963,8 @@
         </p:nvSpPr>
         <p:spPr>
           <a:xfrm>
-            <a:off x="6534417" y="1051560"/>
-            <a:ext cx="2152383" cy="960120"/>
+            <a:off x="6548498" y="1051560"/>
+            <a:ext cx="2138302" cy="960120"/>
           </a:xfrm>
           <a:prstGeom prst="roundRect">
             <a:avLst>
@@ -7990,8 +7990,8 @@
         </p:nvSpPr>
         <p:spPr>
           <a:xfrm>
-            <a:off x="6671577" y="1124712"/>
-            <a:ext cx="1878063" cy="457200"/>
+            <a:off x="6685658" y="1124712"/>
+            <a:ext cx="1863982" cy="457200"/>
           </a:xfrm>
           <a:prstGeom prst="rect">
             <a:avLst/>
@@ -8029,8 +8029,8 @@
         </p:nvSpPr>
         <p:spPr>
           <a:xfrm>
-            <a:off x="6671577" y="1600200"/>
-            <a:ext cx="1878063" cy="356616"/>
+            <a:off x="6685658" y="1600200"/>
+            <a:ext cx="1863982" cy="356616"/>
           </a:xfrm>
           <a:prstGeom prst="rect">
             <a:avLst/>
@@ -8065,8 +8065,8 @@
         </p:nvSpPr>
         <p:spPr>
           <a:xfrm>
-            <a:off x="4244873" y="2148840"/>
-            <a:ext cx="2152383" cy="960120"/>
+            <a:off x="4273037" y="2148840"/>
+            <a:ext cx="2138302" cy="960120"/>
           </a:xfrm>
           <a:prstGeom prst="roundRect">
             <a:avLst>
@@ -8092,8 +8092,8 @@
         </p:nvSpPr>
         <p:spPr>
           <a:xfrm>
-            <a:off x="4382033" y="2221992"/>
-            <a:ext cx="1878063" cy="457200"/>
+            <a:off x="4410197" y="2221992"/>
+            <a:ext cx="1863982" cy="457200"/>
           </a:xfrm>
           <a:prstGeom prst="rect">
             <a:avLst/>
@@ -8131,8 +8131,8 @@
         </p:nvSpPr>
         <p:spPr>
           <a:xfrm>
-            <a:off x="4382033" y="2697480"/>
-            <a:ext cx="1878063" cy="356616"/>
+            <a:off x="4410197" y="2697480"/>
+            <a:ext cx="1863982" cy="356616"/>
           </a:xfrm>
           <a:prstGeom prst="rect">
             <a:avLst/>
@@ -8167,8 +8167,8 @@
         </p:nvSpPr>
         <p:spPr>
           <a:xfrm>
-            <a:off x="6534417" y="2148840"/>
-            <a:ext cx="2152383" cy="960120"/>
+            <a:off x="6548498" y="2148840"/>
+            <a:ext cx="2138302" cy="960120"/>
           </a:xfrm>
           <a:prstGeom prst="roundRect">
             <a:avLst>
@@ -8194,8 +8194,8 @@
         </p:nvSpPr>
         <p:spPr>
           <a:xfrm>
-            <a:off x="6671577" y="2221992"/>
-            <a:ext cx="1878063" cy="457200"/>
+            <a:off x="6685658" y="2221992"/>
+            <a:ext cx="1863982" cy="457200"/>
           </a:xfrm>
           <a:prstGeom prst="rect">
             <a:avLst/>
@@ -8233,8 +8233,8 @@
         </p:nvSpPr>
         <p:spPr>
           <a:xfrm>
-            <a:off x="6671577" y="2697480"/>
-            <a:ext cx="1878063" cy="356616"/>
+            <a:off x="6685658" y="2697480"/>
+            <a:ext cx="1863982" cy="356616"/>
           </a:xfrm>
           <a:prstGeom prst="rect">
             <a:avLst/>
@@ -8269,8 +8269,8 @@
         </p:nvSpPr>
         <p:spPr>
           <a:xfrm>
-            <a:off x="4244873" y="3200400"/>
-            <a:ext cx="4441927" cy="1371600"/>
+            <a:off x="4273037" y="3200400"/>
+            <a:ext cx="4413763" cy="1371600"/>
           </a:xfrm>
           <a:prstGeom prst="rect">
             <a:avLst/>

--- a/docs/deck_2026-10-26_seminar.pptx
+++ b/docs/deck_2026-10-26_seminar.pptx
@@ -120,7 +120,7 @@
   <p:extLst>
     <p:ext uri="{521415D9-36F7-43E2-AB2F-B90AF26B5E84}">
       <p14:sectionLst xmlns:p14="http://schemas.microsoft.com/office/powerpoint/2010/main">
-        <p14:section name="Opening" id="{396bd14a-a39d-e6f2-f9f5-0628e9fb9461}">
+        <p14:section name="Opening" id="{1f7eaf38-7217-63af-858d-04223ebb9ab6}">
           <p14:sldIdLst>
             <p14:sldId id="256"/>
             <p14:sldId id="257"/>
@@ -130,13 +130,13 @@
             <p14:sldId id="261"/>
           </p14:sldIdLst>
         </p14:section>
-        <p14:section name="The model" id="{260780b1-eda7-6696-3496-b5072fee71e6}">
+        <p14:section name="The model" id="{07e11f8b-ebfc-e6b7-cc2f-af456474f78b}">
           <p14:sldIdLst>
             <p14:sldId id="262"/>
             <p14:sldId id="263"/>
           </p14:sldIdLst>
         </p14:section>
-        <p14:section name="Results" id="{3fe9e14b-c449-ebcb-e3cb-ecaf6b6eb562}">
+        <p14:section name="Results" id="{3dcd6eb8-4a11-1cb3-fb35-50729516d630}">
           <p14:sldIdLst>
             <p14:sldId id="264"/>
             <p14:sldId id="265"/>
@@ -144,12 +144,12 @@
             <p14:sldId id="267"/>
           </p14:sldIdLst>
         </p14:section>
-        <p14:section name="Validation" id="{bd234241-c11c-d2f9-d706-b94b13808ece}">
+        <p14:section name="Validation" id="{3d995789-02a4-a703-7336-379116b19253}">
           <p14:sldIdLst>
             <p14:sldId id="268"/>
           </p14:sldIdLst>
         </p14:section>
-        <p14:section name="Close" id="{e05ab89a-db4b-2e47-913e-ccc4b4be4d1a}">
+        <p14:section name="Close" id="{58a945bc-9831-3746-1dc1-5d7114cef8ee}">
           <p14:sldIdLst>
             <p14:sldId id="269"/>
           </p14:sldIdLst>
@@ -1526,7 +1526,7 @@
           <a:p>
             <a:r>
               <a:rPr lang="en-US" dirty="0"/>
-              <a:t>~2 min. N = 1,000 depositors on a small-world network; one bank that sells assets at a discount when cash runs short (fire-sale bank). Each tick a depositor sees neighbours' withdrawals and the public news, blends them with a private signal, and withdraws if that pays. Reference bank: deposits log-normal (sigma 2.5), each capped at 1% of the total; CARA 0.1; partial withdrawals allowed. The diagram is the technical ODD overview: walk the right-hand column (warm-up, world, shock, tick loop) and skip the formulas.</a:t>
+              <a:t>~2 min. Talk through the diagram. Left: N = 1,000 depositors, deposits log-normal (sigma 2.5) capped at 1% of the total (Celsius's largest account); types I and C from the warm-up; a Newman-Watts network; the fire-sale bank (reserves rD in cash, the rest plus equity in a long asset sold at a 60% haircut if cash runs short; it fails at period 2 if cash plus the asset at R(theta) is below its promises); theta uniform per run and a public signal that is absent, accurate or stale. Middle and right: warm-up, draw the world, shock, then the tick loop: observe neighbours and the news, blend each with your own information using lambda, value staying against withdrawing (a fraction, partial withdrawals allowed) by Monte Carlo, act. 25 initialisations x 10 draws per cell. Outcomes: D = individualists' minus collectivists' withdrawal share among those not hit by the shock; P(fail) = share of runs that fail. Risk aversion is in the model (CARA) but not on the slide.</a:t>
             </a:r>
             <a:endParaRPr lang="en-US" dirty="0"/>
           </a:p>
@@ -7831,7 +7831,7 @@
       </p:sp>
       <p:pic>
         <p:nvPicPr>
-          <p:cNvPr id="3" name="odd" descr="Model overview: depositors on a social network with a bank; each run draws fundamentals and signals, a shock hits, then depositors observe neighbours and news, form beliefs, and decide whether to withdraw, tick by tick.">    </p:cNvPr>
+          <p:cNvPr id="3" name="odd" descr="Model overview in three columns. Entities: depositors with log-normal deposits capped at 1% of the total, a type and a private signal; a Newman–Watts network; a bank with reserves, a long asset that sells at a discount when cash runs short, and a return that rises with the fundamental; the environment draws the fundamental and a public signal. Schedule: cultural warm-up, draw the run’s world, an exogenous shock, then a tick loop in which each banked depositor observes neighbours and the public signal, forms beliefs with weight λ on the social side, values staying against withdrawing by Monte Carlo, and acts; then period 2 settles the bank and the run is recorded.">    </p:cNvPr>
           <p:cNvPicPr>
             <a:picLocks noChangeAspect="1"/>
           </p:cNvPicPr>
@@ -7845,516 +7845,14 @@
         </p:blipFill>
         <p:spPr>
           <a:xfrm>
-            <a:off x="457200" y="1051560"/>
-            <a:ext cx="3495797" cy="3520440"/>
+            <a:off x="755294" y="960120"/>
+            <a:ext cx="7633411" cy="3657600"/>
           </a:xfrm>
           <a:prstGeom prst="rect">
             <a:avLst/>
           </a:prstGeom>
         </p:spPr>
       </p:pic>
-      <p:sp>
-        <p:nvSpPr>
-          <p:cNvPr id="4" name="stat-depositors on a smal"/>
-          <p:cNvSpPr/>
-          <p:nvPr/>
-        </p:nvSpPr>
-        <p:spPr>
-          <a:xfrm>
-            <a:off x="4273037" y="1051560"/>
-            <a:ext cx="2138302" cy="960120"/>
-          </a:xfrm>
-          <a:prstGeom prst="roundRect">
-            <a:avLst>
-              <a:gd name="adj" fmla="val 7619"/>
-            </a:avLst>
-          </a:prstGeom>
-          <a:solidFill>
-            <a:schemeClr val="bg2"/>
-          </a:solidFill>
-          <a:ln w="12700">
-            <a:solidFill>
-              <a:schemeClr val="bg2"/>
-            </a:solidFill>
-            <a:prstDash val="solid"/>
-          </a:ln>
-        </p:spPr>
-      </p:sp>
-      <p:sp>
-        <p:nvSpPr>
-          <p:cNvPr id="5" name="stat-big"/>
-          <p:cNvSpPr txBox="1"/>
-          <p:nvPr/>
-        </p:nvSpPr>
-        <p:spPr>
-          <a:xfrm>
-            <a:off x="4410197" y="1124712"/>
-            <a:ext cx="1863982" cy="457200"/>
-          </a:xfrm>
-          <a:prstGeom prst="rect">
-            <a:avLst/>
-          </a:prstGeom>
-          <a:noFill/>
-          <a:ln/>
-        </p:spPr>
-        <p:txBody>
-          <a:bodyPr wrap="square" lIns="0" tIns="0" rIns="0" bIns="0" rtlCol="0" anchor="ctr"/>
-          <a:lstStyle/>
-          <a:p>
-            <a:pPr indent="0" marL="0">
-              <a:buNone/>
-            </a:pPr>
-            <a:r>
-              <a:rPr lang="en-US" sz="2600" b="1" dirty="0">
-                <a:solidFill>
-                  <a:schemeClr val="accent1"/>
-                </a:solidFill>
-                <a:latin typeface="Cambria" pitchFamily="34" charset="0"/>
-                <a:ea typeface="Cambria" pitchFamily="34" charset="-122"/>
-                <a:cs typeface="Cambria" pitchFamily="34" charset="-120"/>
-              </a:rPr>
-              <a:t>1,000</a:t>
-            </a:r>
-            <a:endParaRPr lang="en-US" sz="2600" dirty="0"/>
-          </a:p>
-        </p:txBody>
-      </p:sp>
-      <p:sp>
-        <p:nvSpPr>
-          <p:cNvPr id="6" name="stat-label"/>
-          <p:cNvSpPr txBox="1"/>
-          <p:nvPr/>
-        </p:nvSpPr>
-        <p:spPr>
-          <a:xfrm>
-            <a:off x="4410197" y="1600200"/>
-            <a:ext cx="1863982" cy="356616"/>
-          </a:xfrm>
-          <a:prstGeom prst="rect">
-            <a:avLst/>
-          </a:prstGeom>
-          <a:noFill/>
-          <a:ln/>
-        </p:spPr>
-        <p:txBody>
-          <a:bodyPr wrap="square" lIns="0" tIns="0" rIns="0" bIns="0" rtlCol="0" anchor="t"/>
-          <a:lstStyle/>
-          <a:p>
-            <a:pPr indent="0" marL="0">
-              <a:buNone/>
-            </a:pPr>
-            <a:r>
-              <a:rPr lang="en-US" sz="1100" dirty="0">
-                <a:solidFill>
-                  <a:schemeClr val="accent3"/>
-                </a:solidFill>
-              </a:rPr>
-              <a:t>depositors on a small-world network, one bank</a:t>
-            </a:r>
-            <a:endParaRPr lang="en-US" sz="1100" dirty="0"/>
-          </a:p>
-        </p:txBody>
-      </p:sp>
-      <p:sp>
-        <p:nvSpPr>
-          <p:cNvPr id="7" name="stat-cap on any one depos"/>
-          <p:cNvSpPr/>
-          <p:nvPr/>
-        </p:nvSpPr>
-        <p:spPr>
-          <a:xfrm>
-            <a:off x="6548498" y="1051560"/>
-            <a:ext cx="2138302" cy="960120"/>
-          </a:xfrm>
-          <a:prstGeom prst="roundRect">
-            <a:avLst>
-              <a:gd name="adj" fmla="val 7619"/>
-            </a:avLst>
-          </a:prstGeom>
-          <a:solidFill>
-            <a:schemeClr val="bg2"/>
-          </a:solidFill>
-          <a:ln w="12700">
-            <a:solidFill>
-              <a:schemeClr val="bg2"/>
-            </a:solidFill>
-            <a:prstDash val="solid"/>
-          </a:ln>
-        </p:spPr>
-      </p:sp>
-      <p:sp>
-        <p:nvSpPr>
-          <p:cNvPr id="8" name="stat-big"/>
-          <p:cNvSpPr txBox="1"/>
-          <p:nvPr/>
-        </p:nvSpPr>
-        <p:spPr>
-          <a:xfrm>
-            <a:off x="6685658" y="1124712"/>
-            <a:ext cx="1863982" cy="457200"/>
-          </a:xfrm>
-          <a:prstGeom prst="rect">
-            <a:avLst/>
-          </a:prstGeom>
-          <a:noFill/>
-          <a:ln/>
-        </p:spPr>
-        <p:txBody>
-          <a:bodyPr wrap="square" lIns="0" tIns="0" rIns="0" bIns="0" rtlCol="0" anchor="ctr"/>
-          <a:lstStyle/>
-          <a:p>
-            <a:pPr indent="0" marL="0">
-              <a:buNone/>
-            </a:pPr>
-            <a:r>
-              <a:rPr lang="en-US" sz="2600" b="1" dirty="0">
-                <a:solidFill>
-                  <a:schemeClr val="accent1"/>
-                </a:solidFill>
-                <a:latin typeface="Cambria" pitchFamily="34" charset="0"/>
-                <a:ea typeface="Cambria" pitchFamily="34" charset="-122"/>
-                <a:cs typeface="Cambria" pitchFamily="34" charset="-120"/>
-              </a:rPr>
-              <a:t>1%</a:t>
-            </a:r>
-            <a:endParaRPr lang="en-US" sz="2600" dirty="0"/>
-          </a:p>
-        </p:txBody>
-      </p:sp>
-      <p:sp>
-        <p:nvSpPr>
-          <p:cNvPr id="9" name="stat-label"/>
-          <p:cNvSpPr txBox="1"/>
-          <p:nvPr/>
-        </p:nvSpPr>
-        <p:spPr>
-          <a:xfrm>
-            <a:off x="6685658" y="1600200"/>
-            <a:ext cx="1863982" cy="356616"/>
-          </a:xfrm>
-          <a:prstGeom prst="rect">
-            <a:avLst/>
-          </a:prstGeom>
-          <a:noFill/>
-          <a:ln/>
-        </p:spPr>
-        <p:txBody>
-          <a:bodyPr wrap="square" lIns="0" tIns="0" rIns="0" bIns="0" rtlCol="0" anchor="t"/>
-          <a:lstStyle/>
-          <a:p>
-            <a:pPr indent="0" marL="0">
-              <a:buNone/>
-            </a:pPr>
-            <a:r>
-              <a:rPr lang="en-US" sz="1100" dirty="0">
-                <a:solidFill>
-                  <a:schemeClr val="accent3"/>
-                </a:solidFill>
-              </a:rPr>
-              <a:t>cap on any one deposit; sizes log-normal (σ 2.5) below it</a:t>
-            </a:r>
-            <a:endParaRPr lang="en-US" sz="1100" dirty="0"/>
-          </a:p>
-        </p:txBody>
-      </p:sp>
-      <p:sp>
-        <p:nvSpPr>
-          <p:cNvPr id="10" name="stat-risk aversion; parti"/>
-          <p:cNvSpPr/>
-          <p:nvPr/>
-        </p:nvSpPr>
-        <p:spPr>
-          <a:xfrm>
-            <a:off x="4273037" y="2148840"/>
-            <a:ext cx="2138302" cy="960120"/>
-          </a:xfrm>
-          <a:prstGeom prst="roundRect">
-            <a:avLst>
-              <a:gd name="adj" fmla="val 7619"/>
-            </a:avLst>
-          </a:prstGeom>
-          <a:solidFill>
-            <a:schemeClr val="bg2"/>
-          </a:solidFill>
-          <a:ln w="12700">
-            <a:solidFill>
-              <a:schemeClr val="bg2"/>
-            </a:solidFill>
-            <a:prstDash val="solid"/>
-          </a:ln>
-        </p:spPr>
-      </p:sp>
-      <p:sp>
-        <p:nvSpPr>
-          <p:cNvPr id="11" name="stat-big"/>
-          <p:cNvSpPr txBox="1"/>
-          <p:nvPr/>
-        </p:nvSpPr>
-        <p:spPr>
-          <a:xfrm>
-            <a:off x="4410197" y="2221992"/>
-            <a:ext cx="1863982" cy="457200"/>
-          </a:xfrm>
-          <a:prstGeom prst="rect">
-            <a:avLst/>
-          </a:prstGeom>
-          <a:noFill/>
-          <a:ln/>
-        </p:spPr>
-        <p:txBody>
-          <a:bodyPr wrap="square" lIns="0" tIns="0" rIns="0" bIns="0" rtlCol="0" anchor="ctr"/>
-          <a:lstStyle/>
-          <a:p>
-            <a:pPr indent="0" marL="0">
-              <a:buNone/>
-            </a:pPr>
-            <a:r>
-              <a:rPr lang="en-US" sz="2200" b="1" dirty="0">
-                <a:solidFill>
-                  <a:schemeClr val="accent1"/>
-                </a:solidFill>
-                <a:latin typeface="Cambria" pitchFamily="34" charset="0"/>
-                <a:ea typeface="Cambria" pitchFamily="34" charset="-122"/>
-                <a:cs typeface="Cambria" pitchFamily="34" charset="-120"/>
-              </a:rPr>
-              <a:t>CARA 0.1</a:t>
-            </a:r>
-            <a:endParaRPr lang="en-US" sz="2200" dirty="0"/>
-          </a:p>
-        </p:txBody>
-      </p:sp>
-      <p:sp>
-        <p:nvSpPr>
-          <p:cNvPr id="12" name="stat-label"/>
-          <p:cNvSpPr txBox="1"/>
-          <p:nvPr/>
-        </p:nvSpPr>
-        <p:spPr>
-          <a:xfrm>
-            <a:off x="4410197" y="2697480"/>
-            <a:ext cx="1863982" cy="356616"/>
-          </a:xfrm>
-          <a:prstGeom prst="rect">
-            <a:avLst/>
-          </a:prstGeom>
-          <a:noFill/>
-          <a:ln/>
-        </p:spPr>
-        <p:txBody>
-          <a:bodyPr wrap="square" lIns="0" tIns="0" rIns="0" bIns="0" rtlCol="0" anchor="t"/>
-          <a:lstStyle/>
-          <a:p>
-            <a:pPr indent="0" marL="0">
-              <a:buNone/>
-            </a:pPr>
-            <a:r>
-              <a:rPr lang="en-US" sz="1100" dirty="0">
-                <a:solidFill>
-                  <a:schemeClr val="accent3"/>
-                </a:solidFill>
-              </a:rPr>
-              <a:t>risk aversion; partial withdrawals allowed</a:t>
-            </a:r>
-            <a:endParaRPr lang="en-US" sz="1100" dirty="0"/>
-          </a:p>
-        </p:txBody>
-      </p:sp>
-      <p:sp>
-        <p:nvSpPr>
-          <p:cNvPr id="13" name="stat-runs per cell: 25 in"/>
-          <p:cNvSpPr/>
-          <p:nvPr/>
-        </p:nvSpPr>
-        <p:spPr>
-          <a:xfrm>
-            <a:off x="6548498" y="2148840"/>
-            <a:ext cx="2138302" cy="960120"/>
-          </a:xfrm>
-          <a:prstGeom prst="roundRect">
-            <a:avLst>
-              <a:gd name="adj" fmla="val 7619"/>
-            </a:avLst>
-          </a:prstGeom>
-          <a:solidFill>
-            <a:schemeClr val="bg2"/>
-          </a:solidFill>
-          <a:ln w="12700">
-            <a:solidFill>
-              <a:schemeClr val="bg2"/>
-            </a:solidFill>
-            <a:prstDash val="solid"/>
-          </a:ln>
-        </p:spPr>
-      </p:sp>
-      <p:sp>
-        <p:nvSpPr>
-          <p:cNvPr id="14" name="stat-big"/>
-          <p:cNvSpPr txBox="1"/>
-          <p:nvPr/>
-        </p:nvSpPr>
-        <p:spPr>
-          <a:xfrm>
-            <a:off x="6685658" y="2221992"/>
-            <a:ext cx="1863982" cy="457200"/>
-          </a:xfrm>
-          <a:prstGeom prst="rect">
-            <a:avLst/>
-          </a:prstGeom>
-          <a:noFill/>
-          <a:ln/>
-        </p:spPr>
-        <p:txBody>
-          <a:bodyPr wrap="square" lIns="0" tIns="0" rIns="0" bIns="0" rtlCol="0" anchor="ctr"/>
-          <a:lstStyle/>
-          <a:p>
-            <a:pPr indent="0" marL="0">
-              <a:buNone/>
-            </a:pPr>
-            <a:r>
-              <a:rPr lang="en-US" sz="2600" b="1" dirty="0">
-                <a:solidFill>
-                  <a:schemeClr val="accent1"/>
-                </a:solidFill>
-                <a:latin typeface="Cambria" pitchFamily="34" charset="0"/>
-                <a:ea typeface="Cambria" pitchFamily="34" charset="-122"/>
-                <a:cs typeface="Cambria" pitchFamily="34" charset="-120"/>
-              </a:rPr>
-              <a:t>250</a:t>
-            </a:r>
-            <a:endParaRPr lang="en-US" sz="2600" dirty="0"/>
-          </a:p>
-        </p:txBody>
-      </p:sp>
-      <p:sp>
-        <p:nvSpPr>
-          <p:cNvPr id="15" name="stat-label"/>
-          <p:cNvSpPr txBox="1"/>
-          <p:nvPr/>
-        </p:nvSpPr>
-        <p:spPr>
-          <a:xfrm>
-            <a:off x="6685658" y="2697480"/>
-            <a:ext cx="1863982" cy="356616"/>
-          </a:xfrm>
-          <a:prstGeom prst="rect">
-            <a:avLst/>
-          </a:prstGeom>
-          <a:noFill/>
-          <a:ln/>
-        </p:spPr>
-        <p:txBody>
-          <a:bodyPr wrap="square" lIns="0" tIns="0" rIns="0" bIns="0" rtlCol="0" anchor="t"/>
-          <a:lstStyle/>
-          <a:p>
-            <a:pPr indent="0" marL="0">
-              <a:buNone/>
-            </a:pPr>
-            <a:r>
-              <a:rPr lang="en-US" sz="1100" dirty="0">
-                <a:solidFill>
-                  <a:schemeClr val="accent3"/>
-                </a:solidFill>
-              </a:rPr>
-              <a:t>runs per cell: 25 initialisations × 10 draws</a:t>
-            </a:r>
-            <a:endParaRPr lang="en-US" sz="1100" dirty="0"/>
-          </a:p>
-        </p:txBody>
-      </p:sp>
-      <p:sp>
-        <p:nvSpPr>
-          <p:cNvPr id="16" name="bullets"/>
-          <p:cNvSpPr txBox="1"/>
-          <p:nvPr/>
-        </p:nvSpPr>
-        <p:spPr>
-          <a:xfrm>
-            <a:off x="4273037" y="3200400"/>
-            <a:ext cx="4413763" cy="1371600"/>
-          </a:xfrm>
-          <a:prstGeom prst="rect">
-            <a:avLst/>
-          </a:prstGeom>
-          <a:noFill/>
-          <a:ln/>
-        </p:spPr>
-        <p:txBody>
-          <a:bodyPr wrap="square" lIns="0" tIns="0" rIns="0" bIns="0" rtlCol="0" anchor="t"/>
-          <a:lstStyle/>
-          <a:p>
-            <a:pPr marL="177800" indent="-177800">
-              <a:spcAft>
-                <a:spcPts val="400"/>
-              </a:spcAft>
-              <a:buSzPct val="100000"/>
-              <a:buChar char="•"/>
-            </a:pPr>
-            <a:r>
-              <a:rPr lang="en-US" sz="1150" dirty="0">
-                <a:solidFill>
-                  <a:schemeClr val="tx1"/>
-                </a:solidFill>
-              </a:rPr>
-              <a:t>One bank that sells its long asset at a discount when cash runs short (a fire-sale bank)</a:t>
-            </a:r>
-            <a:endParaRPr lang="en-US" sz="1150" dirty="0"/>
-          </a:p>
-          <a:p>
-            <a:pPr marL="177800" indent="-177800">
-              <a:spcAft>
-                <a:spcPts val="400"/>
-              </a:spcAft>
-              <a:buSzPct val="100000"/>
-              <a:buChar char="•"/>
-            </a:pPr>
-            <a:r>
-              <a:rPr lang="en-US" sz="1150" dirty="0">
-                <a:solidFill>
-                  <a:schemeClr val="tx1"/>
-                </a:solidFill>
-              </a:rPr>
-              <a:t>Each tick a depositor sees neighbours’ withdrawals and the public news, blends them with a private signal, and withdraws if that pays</a:t>
-            </a:r>
-            <a:endParaRPr lang="en-US" sz="1150" dirty="0"/>
-          </a:p>
-          <a:p>
-            <a:pPr marL="177800" indent="-177800">
-              <a:spcAft>
-                <a:spcPts val="400"/>
-              </a:spcAft>
-              <a:buSzPct val="100000"/>
-              <a:buChar char="•"/>
-            </a:pPr>
-            <a:r>
-              <a:rPr lang="en-US" sz="1150" dirty="0">
-                <a:solidFill>
-                  <a:schemeClr val="tx1"/>
-                </a:solidFill>
-              </a:rPr>
-              <a:t>A public signal can be absent, accurate, or outdated</a:t>
-            </a:r>
-            <a:endParaRPr lang="en-US" sz="1150" dirty="0"/>
-          </a:p>
-          <a:p>
-            <a:pPr marL="177800" indent="-177800">
-              <a:spcAft>
-                <a:spcPts val="400"/>
-              </a:spcAft>
-              <a:buSzPct val="100000"/>
-              <a:buChar char="•"/>
-            </a:pPr>
-            <a:r>
-              <a:rPr lang="en-US" sz="1150" dirty="0">
-                <a:solidFill>
-                  <a:schemeClr val="tx1"/>
-                </a:solidFill>
-              </a:rPr>
-              <a:t>Outcomes: D = individualists’ minus collectivists’ withdrawal share (those not hit by the shock); P(fail) = share of runs that fail</a:t>
-            </a:r>
-            <a:endParaRPr lang="en-US" sz="1150" dirty="0"/>
-          </a:p>
-        </p:txBody>
-      </p:sp>
       <p:sp>
         <p:nvSpPr>
           <p:cNvPr id="25" name="Slide Number Placeholder 0"/>

--- a/docs/deck_2026-10-26_seminar.pptx
+++ b/docs/deck_2026-10-26_seminar.pptx
@@ -120,7 +120,7 @@
   <p:extLst>
     <p:ext uri="{521415D9-36F7-43E2-AB2F-B90AF26B5E84}">
       <p14:sectionLst xmlns:p14="http://schemas.microsoft.com/office/powerpoint/2010/main">
-        <p14:section name="Opening" id="{1f7eaf38-7217-63af-858d-04223ebb9ab6}">
+        <p14:section name="Opening" id="{94242ec3-5a4e-0bfd-3107-9536b985bfbc}">
           <p14:sldIdLst>
             <p14:sldId id="256"/>
             <p14:sldId id="257"/>
@@ -130,13 +130,13 @@
             <p14:sldId id="261"/>
           </p14:sldIdLst>
         </p14:section>
-        <p14:section name="The model" id="{07e11f8b-ebfc-e6b7-cc2f-af456474f78b}">
+        <p14:section name="The model" id="{668a035d-92bc-cde4-60fa-8794ddf3d63f}">
           <p14:sldIdLst>
             <p14:sldId id="262"/>
             <p14:sldId id="263"/>
           </p14:sldIdLst>
         </p14:section>
-        <p14:section name="Results" id="{3dcd6eb8-4a11-1cb3-fb35-50729516d630}">
+        <p14:section name="Results" id="{66109033-2af5-4de4-7573-55bbf8b23061}">
           <p14:sldIdLst>
             <p14:sldId id="264"/>
             <p14:sldId id="265"/>
@@ -144,12 +144,12 @@
             <p14:sldId id="267"/>
           </p14:sldIdLst>
         </p14:section>
-        <p14:section name="Validation" id="{3d995789-02a4-a703-7336-379116b19253}">
+        <p14:section name="Validation" id="{2163cee4-4da1-3543-2a88-0a2c5bac8ebd}">
           <p14:sldIdLst>
             <p14:sldId id="268"/>
           </p14:sldIdLst>
         </p14:section>
-        <p14:section name="Close" id="{58a945bc-9831-3746-1dc1-5d7114cef8ee}">
+        <p14:section name="Close" id="{9eaa7b34-87ce-a7a6-6bca-c3e988ac2b06}">
           <p14:sldIdLst>
             <p14:sldId id="269"/>
           </p14:sldIdLst>
@@ -3690,8 +3690,8 @@
         </p:blipFill>
         <p:spPr>
           <a:xfrm>
-            <a:off x="457200" y="1051560"/>
-            <a:ext cx="4941052" cy="3291840"/>
+            <a:off x="1998536" y="1005840"/>
+            <a:ext cx="5146929" cy="3429000"/>
           </a:xfrm>
           <a:prstGeom prst="rect">
             <a:avLst/>
@@ -3706,8 +3706,8 @@
         </p:nvSpPr>
         <p:spPr>
           <a:xfrm>
-            <a:off x="457200" y="4389120"/>
-            <a:ext cx="5486400" cy="274320"/>
+            <a:off x="1998536" y="4480560"/>
+            <a:ext cx="5146929" cy="274320"/>
           </a:xfrm>
           <a:prstGeom prst="rect">
             <a:avLst/>
@@ -3731,312 +3731,6 @@
               <a:t>Chance the bank fails by share of individualists, for three deposit-size distributions. λ pairs pooled.</a:t>
             </a:r>
             <a:endParaRPr lang="en-US" sz="1000" dirty="0"/>
-          </a:p>
-        </p:txBody>
-      </p:sp>
-      <p:sp>
-        <p:nvSpPr>
-          <p:cNvPr id="5" name="stat-uncapped: a few very"/>
-          <p:cNvSpPr/>
-          <p:nvPr/>
-        </p:nvSpPr>
-        <p:spPr>
-          <a:xfrm>
-            <a:off x="6217920" y="1051560"/>
-            <a:ext cx="2468880" cy="1005840"/>
-          </a:xfrm>
-          <a:prstGeom prst="roundRect">
-            <a:avLst>
-              <a:gd name="adj" fmla="val 7273"/>
-            </a:avLst>
-          </a:prstGeom>
-          <a:solidFill>
-            <a:schemeClr val="bg2"/>
-          </a:solidFill>
-          <a:ln w="12700">
-            <a:solidFill>
-              <a:schemeClr val="bg2"/>
-            </a:solidFill>
-            <a:prstDash val="solid"/>
-          </a:ln>
-        </p:spPr>
-      </p:sp>
-      <p:sp>
-        <p:nvSpPr>
-          <p:cNvPr id="6" name="stat-big"/>
-          <p:cNvSpPr txBox="1"/>
-          <p:nvPr/>
-        </p:nvSpPr>
-        <p:spPr>
-          <a:xfrm>
-            <a:off x="6355080" y="1124712"/>
-            <a:ext cx="2194560" cy="457200"/>
-          </a:xfrm>
-          <a:prstGeom prst="rect">
-            <a:avLst/>
-          </a:prstGeom>
-          <a:noFill/>
-          <a:ln/>
-        </p:spPr>
-        <p:txBody>
-          <a:bodyPr wrap="square" lIns="0" tIns="0" rIns="0" bIns="0" rtlCol="0" anchor="ctr"/>
-          <a:lstStyle/>
-          <a:p>
-            <a:pPr indent="0" marL="0">
-              <a:buNone/>
-            </a:pPr>
-            <a:r>
-              <a:rPr lang="en-US" sz="2200" b="1" dirty="0">
-                <a:solidFill>
-                  <a:schemeClr val="accent2"/>
-                </a:solidFill>
-                <a:latin typeface="Cambria" pitchFamily="34" charset="0"/>
-                <a:ea typeface="Cambria" pitchFamily="34" charset="-122"/>
-                <a:cs typeface="Cambria" pitchFamily="34" charset="-120"/>
-              </a:rPr>
-              <a:t>0.61 to 0.11</a:t>
-            </a:r>
-            <a:endParaRPr lang="en-US" sz="2200" dirty="0"/>
-          </a:p>
-        </p:txBody>
-      </p:sp>
-      <p:sp>
-        <p:nvSpPr>
-          <p:cNvPr id="7" name="stat-label"/>
-          <p:cNvSpPr txBox="1"/>
-          <p:nvPr/>
-        </p:nvSpPr>
-        <p:spPr>
-          <a:xfrm>
-            <a:off x="6355080" y="1600200"/>
-            <a:ext cx="2194560" cy="402336"/>
-          </a:xfrm>
-          <a:prstGeom prst="rect">
-            <a:avLst/>
-          </a:prstGeom>
-          <a:noFill/>
-          <a:ln/>
-        </p:spPr>
-        <p:txBody>
-          <a:bodyPr wrap="square" lIns="0" tIns="0" rIns="0" bIns="0" rtlCol="0" anchor="t"/>
-          <a:lstStyle/>
-          <a:p>
-            <a:pPr indent="0" marL="0">
-              <a:buNone/>
-            </a:pPr>
-            <a:r>
-              <a:rPr lang="en-US" sz="1100" dirty="0">
-                <a:solidFill>
-                  <a:schemeClr val="accent3"/>
-                </a:solidFill>
-              </a:rPr>
-              <a:t>uncapped: a few very large deposits (σ 2.5)</a:t>
-            </a:r>
-            <a:endParaRPr lang="en-US" sz="1100" dirty="0"/>
-          </a:p>
-        </p:txBody>
-      </p:sp>
-      <p:sp>
-        <p:nvSpPr>
-          <p:cNvPr id="8" name="stat-capped: no deposit a"/>
-          <p:cNvSpPr/>
-          <p:nvPr/>
-        </p:nvSpPr>
-        <p:spPr>
-          <a:xfrm>
-            <a:off x="6217920" y="2194560"/>
-            <a:ext cx="2468880" cy="1005840"/>
-          </a:xfrm>
-          <a:prstGeom prst="roundRect">
-            <a:avLst>
-              <a:gd name="adj" fmla="val 7273"/>
-            </a:avLst>
-          </a:prstGeom>
-          <a:solidFill>
-            <a:schemeClr val="bg2"/>
-          </a:solidFill>
-          <a:ln w="12700">
-            <a:solidFill>
-              <a:schemeClr val="bg2"/>
-            </a:solidFill>
-            <a:prstDash val="solid"/>
-          </a:ln>
-        </p:spPr>
-      </p:sp>
-      <p:sp>
-        <p:nvSpPr>
-          <p:cNvPr id="9" name="stat-big"/>
-          <p:cNvSpPr txBox="1"/>
-          <p:nvPr/>
-        </p:nvSpPr>
-        <p:spPr>
-          <a:xfrm>
-            <a:off x="6355080" y="2267712"/>
-            <a:ext cx="2194560" cy="457200"/>
-          </a:xfrm>
-          <a:prstGeom prst="rect">
-            <a:avLst/>
-          </a:prstGeom>
-          <a:noFill/>
-          <a:ln/>
-        </p:spPr>
-        <p:txBody>
-          <a:bodyPr wrap="square" lIns="0" tIns="0" rIns="0" bIns="0" rtlCol="0" anchor="ctr"/>
-          <a:lstStyle/>
-          <a:p>
-            <a:pPr indent="0" marL="0">
-              <a:buNone/>
-            </a:pPr>
-            <a:r>
-              <a:rPr lang="en-US" sz="2200" b="1" dirty="0">
-                <a:solidFill>
-                  <a:schemeClr val="accent1"/>
-                </a:solidFill>
-                <a:latin typeface="Cambria" pitchFamily="34" charset="0"/>
-                <a:ea typeface="Cambria" pitchFamily="34" charset="-122"/>
-                <a:cs typeface="Cambria" pitchFamily="34" charset="-120"/>
-              </a:rPr>
-              <a:t>0.51 to 0.08</a:t>
-            </a:r>
-            <a:endParaRPr lang="en-US" sz="2200" dirty="0"/>
-          </a:p>
-        </p:txBody>
-      </p:sp>
-      <p:sp>
-        <p:nvSpPr>
-          <p:cNvPr id="10" name="stat-label"/>
-          <p:cNvSpPr txBox="1"/>
-          <p:nvPr/>
-        </p:nvSpPr>
-        <p:spPr>
-          <a:xfrm>
-            <a:off x="6355080" y="2743200"/>
-            <a:ext cx="2194560" cy="402336"/>
-          </a:xfrm>
-          <a:prstGeom prst="rect">
-            <a:avLst/>
-          </a:prstGeom>
-          <a:noFill/>
-          <a:ln/>
-        </p:spPr>
-        <p:txBody>
-          <a:bodyPr wrap="square" lIns="0" tIns="0" rIns="0" bIns="0" rtlCol="0" anchor="t"/>
-          <a:lstStyle/>
-          <a:p>
-            <a:pPr indent="0" marL="0">
-              <a:buNone/>
-            </a:pPr>
-            <a:r>
-              <a:rPr lang="en-US" sz="1100" dirty="0">
-                <a:solidFill>
-                  <a:schemeClr val="accent3"/>
-                </a:solidFill>
-              </a:rPr>
-              <a:t>capped: no deposit above 1% of the total (the reference bank)</a:t>
-            </a:r>
-            <a:endParaRPr lang="en-US" sz="1100" dirty="0"/>
-          </a:p>
-        </p:txBody>
-      </p:sp>
-      <p:sp>
-        <p:nvSpPr>
-          <p:cNvPr id="11" name="stat-similar sizes (σ 1)."/>
-          <p:cNvSpPr/>
-          <p:nvPr/>
-        </p:nvSpPr>
-        <p:spPr>
-          <a:xfrm>
-            <a:off x="6217920" y="3337560"/>
-            <a:ext cx="2468880" cy="1097280"/>
-          </a:xfrm>
-          <a:prstGeom prst="roundRect">
-            <a:avLst>
-              <a:gd name="adj" fmla="val 6667"/>
-            </a:avLst>
-          </a:prstGeom>
-          <a:solidFill>
-            <a:schemeClr val="bg2"/>
-          </a:solidFill>
-          <a:ln w="12700">
-            <a:solidFill>
-              <a:schemeClr val="bg2"/>
-            </a:solidFill>
-            <a:prstDash val="solid"/>
-          </a:ln>
-        </p:spPr>
-      </p:sp>
-      <p:sp>
-        <p:nvSpPr>
-          <p:cNvPr id="12" name="stat-big"/>
-          <p:cNvSpPr txBox="1"/>
-          <p:nvPr/>
-        </p:nvSpPr>
-        <p:spPr>
-          <a:xfrm>
-            <a:off x="6355080" y="3410712"/>
-            <a:ext cx="2194560" cy="457200"/>
-          </a:xfrm>
-          <a:prstGeom prst="rect">
-            <a:avLst/>
-          </a:prstGeom>
-          <a:noFill/>
-          <a:ln/>
-        </p:spPr>
-        <p:txBody>
-          <a:bodyPr wrap="square" lIns="0" tIns="0" rIns="0" bIns="0" rtlCol="0" anchor="ctr"/>
-          <a:lstStyle/>
-          <a:p>
-            <a:pPr indent="0" marL="0">
-              <a:buNone/>
-            </a:pPr>
-            <a:r>
-              <a:rPr lang="en-US" sz="2200" b="1" dirty="0">
-                <a:solidFill>
-                  <a:schemeClr val="accent3"/>
-                </a:solidFill>
-                <a:latin typeface="Cambria" pitchFamily="34" charset="0"/>
-                <a:ea typeface="Cambria" pitchFamily="34" charset="-122"/>
-                <a:cs typeface="Cambria" pitchFamily="34" charset="-120"/>
-              </a:rPr>
-              <a:t>0.50 to 0.08</a:t>
-            </a:r>
-            <a:endParaRPr lang="en-US" sz="2200" dirty="0"/>
-          </a:p>
-        </p:txBody>
-      </p:sp>
-      <p:sp>
-        <p:nvSpPr>
-          <p:cNvPr id="13" name="stat-label"/>
-          <p:cNvSpPr txBox="1"/>
-          <p:nvPr/>
-        </p:nvSpPr>
-        <p:spPr>
-          <a:xfrm>
-            <a:off x="6355080" y="3886200"/>
-            <a:ext cx="2194560" cy="493776"/>
-          </a:xfrm>
-          <a:prstGeom prst="rect">
-            <a:avLst/>
-          </a:prstGeom>
-          <a:noFill/>
-          <a:ln/>
-        </p:spPr>
-        <p:txBody>
-          <a:bodyPr wrap="square" lIns="0" tIns="0" rIns="0" bIns="0" rtlCol="0" anchor="t"/>
-          <a:lstStyle/>
-          <a:p>
-            <a:pPr indent="0" marL="0">
-              <a:buNone/>
-            </a:pPr>
-            <a:r>
-              <a:rPr lang="en-US" sz="1100" dirty="0">
-                <a:solidFill>
-                  <a:schemeClr val="accent3"/>
-                </a:solidFill>
-              </a:rPr>
-              <a:t>similar sizes (σ 1). The μ gradient is the same in all three.</a:t>
-            </a:r>
-            <a:endParaRPr lang="en-US" sz="1100" dirty="0"/>
           </a:p>
         </p:txBody>
       </p:sp>

--- a/docs/deck_2026-10-26_seminar.pptx
+++ b/docs/deck_2026-10-26_seminar.pptx
@@ -120,7 +120,7 @@
   <p:extLst>
     <p:ext uri="{521415D9-36F7-43E2-AB2F-B90AF26B5E84}">
       <p14:sectionLst xmlns:p14="http://schemas.microsoft.com/office/powerpoint/2010/main">
-        <p14:section name="Opening" id="{94242ec3-5a4e-0bfd-3107-9536b985bfbc}">
+        <p14:section name="Opening" id="{adb55f74-1e4f-cafe-c236-ec8495150dba}">
           <p14:sldIdLst>
             <p14:sldId id="256"/>
             <p14:sldId id="257"/>
@@ -130,13 +130,13 @@
             <p14:sldId id="261"/>
           </p14:sldIdLst>
         </p14:section>
-        <p14:section name="The model" id="{668a035d-92bc-cde4-60fa-8794ddf3d63f}">
+        <p14:section name="The model" id="{538e7ede-8c99-7bf3-0909-8a0d8c8da669}">
           <p14:sldIdLst>
             <p14:sldId id="262"/>
             <p14:sldId id="263"/>
           </p14:sldIdLst>
         </p14:section>
-        <p14:section name="Results" id="{66109033-2af5-4de4-7573-55bbf8b23061}">
+        <p14:section name="Results" id="{b7c4e30d-a625-7c84-1c1c-518b911ddeec}">
           <p14:sldIdLst>
             <p14:sldId id="264"/>
             <p14:sldId id="265"/>
@@ -144,12 +144,12 @@
             <p14:sldId id="267"/>
           </p14:sldIdLst>
         </p14:section>
-        <p14:section name="Validation" id="{2163cee4-4da1-3543-2a88-0a2c5bac8ebd}">
+        <p14:section name="Validation" id="{3227f0ef-a8eb-06f1-9804-e50fd6c2cf70}">
           <p14:sldIdLst>
             <p14:sldId id="268"/>
           </p14:sldIdLst>
         </p14:section>
-        <p14:section name="Close" id="{9eaa7b34-87ce-a7a6-6bca-c3e988ac2b06}">
+        <p14:section name="Close" id="{184ce1ae-7332-6520-8422-fcaa1b221e28}">
           <p14:sldIdLst>
             <p14:sldId id="269"/>
           </p14:sldIdLst>
@@ -3668,7 +3668,7 @@
                   <a:schemeClr val="tx2"/>
                 </a:solidFill>
               </a:rPr>
-              <a:t>Capping the largest deposits</a:t>
+              <a:t>Varying the deposit-size distribution</a:t>
             </a:r>
             <a:endParaRPr lang="en-US" sz="2400" dirty="0"/>
           </a:p>
@@ -3690,50 +3690,14 @@
         </p:blipFill>
         <p:spPr>
           <a:xfrm>
-            <a:off x="1998536" y="1005840"/>
-            <a:ext cx="5146929" cy="3429000"/>
+            <a:off x="1861284" y="1005840"/>
+            <a:ext cx="5421432" cy="3611880"/>
           </a:xfrm>
           <a:prstGeom prst="rect">
             <a:avLst/>
           </a:prstGeom>
         </p:spPr>
       </p:pic>
-      <p:sp>
-        <p:nvSpPr>
-          <p:cNvPr id="4" name="caption"/>
-          <p:cNvSpPr txBox="1"/>
-          <p:nvPr/>
-        </p:nvSpPr>
-        <p:spPr>
-          <a:xfrm>
-            <a:off x="1998536" y="4480560"/>
-            <a:ext cx="5146929" cy="274320"/>
-          </a:xfrm>
-          <a:prstGeom prst="rect">
-            <a:avLst/>
-          </a:prstGeom>
-          <a:noFill/>
-          <a:ln/>
-        </p:spPr>
-        <p:txBody>
-          <a:bodyPr wrap="square" lIns="0" tIns="0" rIns="0" bIns="0" rtlCol="0" anchor="ctr"/>
-          <a:lstStyle/>
-          <a:p>
-            <a:pPr indent="0" marL="0">
-              <a:buNone/>
-            </a:pPr>
-            <a:r>
-              <a:rPr lang="en-US" sz="1000" i="1" dirty="0">
-                <a:solidFill>
-                  <a:schemeClr val="accent3"/>
-                </a:solidFill>
-              </a:rPr>
-              <a:t>Chance the bank fails by share of individualists, for three deposit-size distributions. λ pairs pooled.</a:t>
-            </a:r>
-            <a:endParaRPr lang="en-US" sz="1000" dirty="0"/>
-          </a:p>
-        </p:txBody>
-      </p:sp>
       <p:sp>
         <p:nvSpPr>
           <p:cNvPr id="25" name="Slide Number Placeholder 0"/>

--- a/docs/deck_2026-10-26_seminar.pptx
+++ b/docs/deck_2026-10-26_seminar.pptx
@@ -120,7 +120,7 @@
   <p:extLst>
     <p:ext uri="{521415D9-36F7-43E2-AB2F-B90AF26B5E84}">
       <p14:sectionLst xmlns:p14="http://schemas.microsoft.com/office/powerpoint/2010/main">
-        <p14:section name="Opening" id="{adb55f74-1e4f-cafe-c236-ec8495150dba}">
+        <p14:section name="Opening" id="{b6b0f83b-c9cc-eb6c-f883-e98e432d065c}">
           <p14:sldIdLst>
             <p14:sldId id="256"/>
             <p14:sldId id="257"/>
@@ -130,13 +130,13 @@
             <p14:sldId id="261"/>
           </p14:sldIdLst>
         </p14:section>
-        <p14:section name="The model" id="{538e7ede-8c99-7bf3-0909-8a0d8c8da669}">
+        <p14:section name="The model" id="{4842ef48-cbd9-2872-84c1-38994a200d3b}">
           <p14:sldIdLst>
             <p14:sldId id="262"/>
             <p14:sldId id="263"/>
           </p14:sldIdLst>
         </p14:section>
-        <p14:section name="Results" id="{b7c4e30d-a625-7c84-1c1c-518b911ddeec}">
+        <p14:section name="Results" id="{ddddc7ac-7fb3-17d7-e516-de499f8e14e9}">
           <p14:sldIdLst>
             <p14:sldId id="264"/>
             <p14:sldId id="265"/>
@@ -144,12 +144,12 @@
             <p14:sldId id="267"/>
           </p14:sldIdLst>
         </p14:section>
-        <p14:section name="Validation" id="{3227f0ef-a8eb-06f1-9804-e50fd6c2cf70}">
+        <p14:section name="Validation" id="{dd639afe-7e13-d3c9-d089-bf8162965392}">
           <p14:sldIdLst>
             <p14:sldId id="268"/>
           </p14:sldIdLst>
         </p14:section>
-        <p14:section name="Close" id="{184ce1ae-7332-6520-8422-fcaa1b221e28}">
+        <p14:section name="Close" id="{1ff97b49-e8ba-070e-4b4c-6be4435de0d1}">
           <p14:sldIdLst>
             <p14:sldId id="269"/>
           </p14:sldIdLst>
@@ -2644,7 +2644,7 @@
         <p:spPr>
           <a:xfrm>
             <a:off x="457200" y="1051560"/>
-            <a:ext cx="4941052" cy="3291840"/>
+            <a:ext cx="5013472" cy="3291840"/>
           </a:xfrm>
           <a:prstGeom prst="rect">
             <a:avLst/>
@@ -3114,458 +3114,14 @@
         </p:blipFill>
         <p:spPr>
           <a:xfrm>
-            <a:off x="457200" y="1051560"/>
-            <a:ext cx="5486400" cy="2607605"/>
+            <a:off x="730766" y="1005840"/>
+            <a:ext cx="7682469" cy="3611880"/>
           </a:xfrm>
           <a:prstGeom prst="rect">
             <a:avLst/>
           </a:prstGeom>
         </p:spPr>
       </p:pic>
-      <p:sp>
-        <p:nvSpPr>
-          <p:cNvPr id="4" name="caption"/>
-          <p:cNvSpPr txBox="1"/>
-          <p:nvPr/>
-        </p:nvSpPr>
-        <p:spPr>
-          <a:xfrm>
-            <a:off x="457200" y="3704885"/>
-            <a:ext cx="5486400" cy="274320"/>
-          </a:xfrm>
-          <a:prstGeom prst="rect">
-            <a:avLst/>
-          </a:prstGeom>
-          <a:noFill/>
-          <a:ln/>
-        </p:spPr>
-        <p:txBody>
-          <a:bodyPr wrap="square" lIns="0" tIns="0" rIns="0" bIns="0" rtlCol="0" anchor="ctr"/>
-          <a:lstStyle/>
-          <a:p>
-            <a:pPr indent="0" marL="0">
-              <a:buNone/>
-            </a:pPr>
-            <a:r>
-              <a:rPr lang="en-US" sz="1000" i="1" dirty="0">
-                <a:solidFill>
-                  <a:schemeClr val="accent3"/>
-                </a:solidFill>
-              </a:rPr>
-              <a:t>Chance the bank fails, by the kind of public news, dot and CI per λ pair. All mixes μ. Numbers at right: wide λ gap.</a:t>
-            </a:r>
-            <a:endParaRPr lang="en-US" sz="1000" dirty="0"/>
-          </a:p>
-        </p:txBody>
-      </p:sp>
-      <p:sp>
-        <p:nvSpPr>
-          <p:cNvPr id="5" name="stat-outdated, pessimisti"/>
-          <p:cNvSpPr/>
-          <p:nvPr/>
-        </p:nvSpPr>
-        <p:spPr>
-          <a:xfrm>
-            <a:off x="6217920" y="1051560"/>
-            <a:ext cx="2468880" cy="777240"/>
-          </a:xfrm>
-          <a:prstGeom prst="roundRect">
-            <a:avLst>
-              <a:gd name="adj" fmla="val 9412"/>
-            </a:avLst>
-          </a:prstGeom>
-          <a:solidFill>
-            <a:schemeClr val="bg2"/>
-          </a:solidFill>
-          <a:ln w="12700">
-            <a:solidFill>
-              <a:schemeClr val="bg2"/>
-            </a:solidFill>
-            <a:prstDash val="solid"/>
-          </a:ln>
-        </p:spPr>
-      </p:sp>
-      <p:sp>
-        <p:nvSpPr>
-          <p:cNvPr id="6" name="stat-big"/>
-          <p:cNvSpPr txBox="1"/>
-          <p:nvPr/>
-        </p:nvSpPr>
-        <p:spPr>
-          <a:xfrm>
-            <a:off x="6355080" y="1124712"/>
-            <a:ext cx="2194560" cy="365760"/>
-          </a:xfrm>
-          <a:prstGeom prst="rect">
-            <a:avLst/>
-          </a:prstGeom>
-          <a:noFill/>
-          <a:ln/>
-        </p:spPr>
-        <p:txBody>
-          <a:bodyPr wrap="square" lIns="0" tIns="0" rIns="0" bIns="0" rtlCol="0" anchor="ctr"/>
-          <a:lstStyle/>
-          <a:p>
-            <a:pPr indent="0" marL="0">
-              <a:buNone/>
-            </a:pPr>
-            <a:r>
-              <a:rPr lang="en-US" sz="2200" b="1" dirty="0">
-                <a:solidFill>
-                  <a:schemeClr val="accent2"/>
-                </a:solidFill>
-                <a:latin typeface="Cambria" pitchFamily="34" charset="0"/>
-                <a:ea typeface="Cambria" pitchFamily="34" charset="-122"/>
-                <a:cs typeface="Cambria" pitchFamily="34" charset="-120"/>
-              </a:rPr>
-              <a:t>0.48</a:t>
-            </a:r>
-            <a:endParaRPr lang="en-US" sz="2200" dirty="0"/>
-          </a:p>
-        </p:txBody>
-      </p:sp>
-      <p:sp>
-        <p:nvSpPr>
-          <p:cNvPr id="7" name="stat-label"/>
-          <p:cNvSpPr txBox="1"/>
-          <p:nvPr/>
-        </p:nvSpPr>
-        <p:spPr>
-          <a:xfrm>
-            <a:off x="6355080" y="1508760"/>
-            <a:ext cx="2194560" cy="265176"/>
-          </a:xfrm>
-          <a:prstGeom prst="rect">
-            <a:avLst/>
-          </a:prstGeom>
-          <a:noFill/>
-          <a:ln/>
-        </p:spPr>
-        <p:txBody>
-          <a:bodyPr wrap="square" lIns="0" tIns="0" rIns="0" bIns="0" rtlCol="0" anchor="t"/>
-          <a:lstStyle/>
-          <a:p>
-            <a:pPr indent="0" marL="0">
-              <a:buNone/>
-            </a:pPr>
-            <a:r>
-              <a:rPr lang="en-US" sz="1100" dirty="0">
-                <a:solidFill>
-                  <a:schemeClr val="accent3"/>
-                </a:solidFill>
-              </a:rPr>
-              <a:t>outdated, pessimistic news</a:t>
-            </a:r>
-            <a:endParaRPr lang="en-US" sz="1100" dirty="0"/>
-          </a:p>
-        </p:txBody>
-      </p:sp>
-      <p:sp>
-        <p:nvSpPr>
-          <p:cNvPr id="8" name="stat-no public news"/>
-          <p:cNvSpPr/>
-          <p:nvPr/>
-        </p:nvSpPr>
-        <p:spPr>
-          <a:xfrm>
-            <a:off x="6217920" y="1938528"/>
-            <a:ext cx="2468880" cy="777240"/>
-          </a:xfrm>
-          <a:prstGeom prst="roundRect">
-            <a:avLst>
-              <a:gd name="adj" fmla="val 9412"/>
-            </a:avLst>
-          </a:prstGeom>
-          <a:solidFill>
-            <a:schemeClr val="bg2"/>
-          </a:solidFill>
-          <a:ln w="12700">
-            <a:solidFill>
-              <a:schemeClr val="bg2"/>
-            </a:solidFill>
-            <a:prstDash val="solid"/>
-          </a:ln>
-        </p:spPr>
-      </p:sp>
-      <p:sp>
-        <p:nvSpPr>
-          <p:cNvPr id="9" name="stat-big"/>
-          <p:cNvSpPr txBox="1"/>
-          <p:nvPr/>
-        </p:nvSpPr>
-        <p:spPr>
-          <a:xfrm>
-            <a:off x="6355080" y="2011680"/>
-            <a:ext cx="2194560" cy="365760"/>
-          </a:xfrm>
-          <a:prstGeom prst="rect">
-            <a:avLst/>
-          </a:prstGeom>
-          <a:noFill/>
-          <a:ln/>
-        </p:spPr>
-        <p:txBody>
-          <a:bodyPr wrap="square" lIns="0" tIns="0" rIns="0" bIns="0" rtlCol="0" anchor="ctr"/>
-          <a:lstStyle/>
-          <a:p>
-            <a:pPr indent="0" marL="0">
-              <a:buNone/>
-            </a:pPr>
-            <a:r>
-              <a:rPr lang="en-US" sz="2200" b="1" dirty="0">
-                <a:solidFill>
-                  <a:schemeClr val="accent1"/>
-                </a:solidFill>
-                <a:latin typeface="Cambria" pitchFamily="34" charset="0"/>
-                <a:ea typeface="Cambria" pitchFamily="34" charset="-122"/>
-                <a:cs typeface="Cambria" pitchFamily="34" charset="-120"/>
-              </a:rPr>
-              <a:t>0.31</a:t>
-            </a:r>
-            <a:endParaRPr lang="en-US" sz="2200" dirty="0"/>
-          </a:p>
-        </p:txBody>
-      </p:sp>
-      <p:sp>
-        <p:nvSpPr>
-          <p:cNvPr id="10" name="stat-label"/>
-          <p:cNvSpPr txBox="1"/>
-          <p:nvPr/>
-        </p:nvSpPr>
-        <p:spPr>
-          <a:xfrm>
-            <a:off x="6355080" y="2395728"/>
-            <a:ext cx="2194560" cy="265176"/>
-          </a:xfrm>
-          <a:prstGeom prst="rect">
-            <a:avLst/>
-          </a:prstGeom>
-          <a:noFill/>
-          <a:ln/>
-        </p:spPr>
-        <p:txBody>
-          <a:bodyPr wrap="square" lIns="0" tIns="0" rIns="0" bIns="0" rtlCol="0" anchor="t"/>
-          <a:lstStyle/>
-          <a:p>
-            <a:pPr indent="0" marL="0">
-              <a:buNone/>
-            </a:pPr>
-            <a:r>
-              <a:rPr lang="en-US" sz="1100" dirty="0">
-                <a:solidFill>
-                  <a:schemeClr val="accent3"/>
-                </a:solidFill>
-              </a:rPr>
-              <a:t>no public news</a:t>
-            </a:r>
-            <a:endParaRPr lang="en-US" sz="1100" dirty="0"/>
-          </a:p>
-        </p:txBody>
-      </p:sp>
-      <p:sp>
-        <p:nvSpPr>
-          <p:cNvPr id="11" name="stat-accurate news"/>
-          <p:cNvSpPr/>
-          <p:nvPr/>
-        </p:nvSpPr>
-        <p:spPr>
-          <a:xfrm>
-            <a:off x="6217920" y="2825496"/>
-            <a:ext cx="2468880" cy="777240"/>
-          </a:xfrm>
-          <a:prstGeom prst="roundRect">
-            <a:avLst>
-              <a:gd name="adj" fmla="val 9412"/>
-            </a:avLst>
-          </a:prstGeom>
-          <a:solidFill>
-            <a:schemeClr val="bg2"/>
-          </a:solidFill>
-          <a:ln w="12700">
-            <a:solidFill>
-              <a:schemeClr val="bg2"/>
-            </a:solidFill>
-            <a:prstDash val="solid"/>
-          </a:ln>
-        </p:spPr>
-      </p:sp>
-      <p:sp>
-        <p:nvSpPr>
-          <p:cNvPr id="12" name="stat-big"/>
-          <p:cNvSpPr txBox="1"/>
-          <p:nvPr/>
-        </p:nvSpPr>
-        <p:spPr>
-          <a:xfrm>
-            <a:off x="6355080" y="2898648"/>
-            <a:ext cx="2194560" cy="365760"/>
-          </a:xfrm>
-          <a:prstGeom prst="rect">
-            <a:avLst/>
-          </a:prstGeom>
-          <a:noFill/>
-          <a:ln/>
-        </p:spPr>
-        <p:txBody>
-          <a:bodyPr wrap="square" lIns="0" tIns="0" rIns="0" bIns="0" rtlCol="0" anchor="ctr"/>
-          <a:lstStyle/>
-          <a:p>
-            <a:pPr indent="0" marL="0">
-              <a:buNone/>
-            </a:pPr>
-            <a:r>
-              <a:rPr lang="en-US" sz="2200" b="1" dirty="0">
-                <a:solidFill>
-                  <a:schemeClr val="accent1"/>
-                </a:solidFill>
-                <a:latin typeface="Cambria" pitchFamily="34" charset="0"/>
-                <a:ea typeface="Cambria" pitchFamily="34" charset="-122"/>
-                <a:cs typeface="Cambria" pitchFamily="34" charset="-120"/>
-              </a:rPr>
-              <a:t>0.29</a:t>
-            </a:r>
-            <a:endParaRPr lang="en-US" sz="2200" dirty="0"/>
-          </a:p>
-        </p:txBody>
-      </p:sp>
-      <p:sp>
-        <p:nvSpPr>
-          <p:cNvPr id="13" name="stat-label"/>
-          <p:cNvSpPr txBox="1"/>
-          <p:nvPr/>
-        </p:nvSpPr>
-        <p:spPr>
-          <a:xfrm>
-            <a:off x="6355080" y="3282696"/>
-            <a:ext cx="2194560" cy="265176"/>
-          </a:xfrm>
-          <a:prstGeom prst="rect">
-            <a:avLst/>
-          </a:prstGeom>
-          <a:noFill/>
-          <a:ln/>
-        </p:spPr>
-        <p:txBody>
-          <a:bodyPr wrap="square" lIns="0" tIns="0" rIns="0" bIns="0" rtlCol="0" anchor="t"/>
-          <a:lstStyle/>
-          <a:p>
-            <a:pPr indent="0" marL="0">
-              <a:buNone/>
-            </a:pPr>
-            <a:r>
-              <a:rPr lang="en-US" sz="1100" dirty="0">
-                <a:solidFill>
-                  <a:schemeClr val="accent3"/>
-                </a:solidFill>
-              </a:rPr>
-              <a:t>accurate news</a:t>
-            </a:r>
-            <a:endParaRPr lang="en-US" sz="1100" dirty="0"/>
-          </a:p>
-        </p:txBody>
-      </p:sp>
-      <p:sp>
-        <p:nvSpPr>
-          <p:cNvPr id="14" name="stat-outdated, optimistic"/>
-          <p:cNvSpPr/>
-          <p:nvPr/>
-        </p:nvSpPr>
-        <p:spPr>
-          <a:xfrm>
-            <a:off x="6217920" y="3712464"/>
-            <a:ext cx="2468880" cy="777240"/>
-          </a:xfrm>
-          <a:prstGeom prst="roundRect">
-            <a:avLst>
-              <a:gd name="adj" fmla="val 9412"/>
-            </a:avLst>
-          </a:prstGeom>
-          <a:solidFill>
-            <a:schemeClr val="bg2"/>
-          </a:solidFill>
-          <a:ln w="12700">
-            <a:solidFill>
-              <a:schemeClr val="bg2"/>
-            </a:solidFill>
-            <a:prstDash val="solid"/>
-          </a:ln>
-        </p:spPr>
-      </p:sp>
-      <p:sp>
-        <p:nvSpPr>
-          <p:cNvPr id="15" name="stat-big"/>
-          <p:cNvSpPr txBox="1"/>
-          <p:nvPr/>
-        </p:nvSpPr>
-        <p:spPr>
-          <a:xfrm>
-            <a:off x="6355080" y="3785616"/>
-            <a:ext cx="2194560" cy="365760"/>
-          </a:xfrm>
-          <a:prstGeom prst="rect">
-            <a:avLst/>
-          </a:prstGeom>
-          <a:noFill/>
-          <a:ln/>
-        </p:spPr>
-        <p:txBody>
-          <a:bodyPr wrap="square" lIns="0" tIns="0" rIns="0" bIns="0" rtlCol="0" anchor="ctr"/>
-          <a:lstStyle/>
-          <a:p>
-            <a:pPr indent="0" marL="0">
-              <a:buNone/>
-            </a:pPr>
-            <a:r>
-              <a:rPr lang="en-US" sz="2200" b="1" dirty="0">
-                <a:solidFill>
-                  <a:schemeClr val="accent5"/>
-                </a:solidFill>
-                <a:latin typeface="Cambria" pitchFamily="34" charset="0"/>
-                <a:ea typeface="Cambria" pitchFamily="34" charset="-122"/>
-                <a:cs typeface="Cambria" pitchFamily="34" charset="-120"/>
-              </a:rPr>
-              <a:t>0.16</a:t>
-            </a:r>
-            <a:endParaRPr lang="en-US" sz="2200" dirty="0"/>
-          </a:p>
-        </p:txBody>
-      </p:sp>
-      <p:sp>
-        <p:nvSpPr>
-          <p:cNvPr id="16" name="stat-label"/>
-          <p:cNvSpPr txBox="1"/>
-          <p:nvPr/>
-        </p:nvSpPr>
-        <p:spPr>
-          <a:xfrm>
-            <a:off x="6355080" y="4169664"/>
-            <a:ext cx="2194560" cy="265176"/>
-          </a:xfrm>
-          <a:prstGeom prst="rect">
-            <a:avLst/>
-          </a:prstGeom>
-          <a:noFill/>
-          <a:ln/>
-        </p:spPr>
-        <p:txBody>
-          <a:bodyPr wrap="square" lIns="0" tIns="0" rIns="0" bIns="0" rtlCol="0" anchor="t"/>
-          <a:lstStyle/>
-          <a:p>
-            <a:pPr indent="0" marL="0">
-              <a:buNone/>
-            </a:pPr>
-            <a:r>
-              <a:rPr lang="en-US" sz="1100" dirty="0">
-                <a:solidFill>
-                  <a:schemeClr val="accent3"/>
-                </a:solidFill>
-              </a:rPr>
-              <a:t>outdated, optimistic news</a:t>
-            </a:r>
-            <a:endParaRPr lang="en-US" sz="1100" dirty="0"/>
-          </a:p>
-        </p:txBody>
-      </p:sp>
       <p:sp>
         <p:nvSpPr>
           <p:cNvPr id="25" name="Slide Number Placeholder 0"/>
@@ -3823,7 +3379,7 @@
         <p:spPr>
           <a:xfrm>
             <a:off x="457200" y="1051560"/>
-            <a:ext cx="5145146" cy="3291840"/>
+            <a:ext cx="5214275" cy="3291840"/>
           </a:xfrm>
           <a:prstGeom prst="rect">
             <a:avLst/>

--- a/docs/deck_2026-10-26_seminar.pptx
+++ b/docs/deck_2026-10-26_seminar.pptx
@@ -120,7 +120,7 @@
   <p:extLst>
     <p:ext uri="{521415D9-36F7-43E2-AB2F-B90AF26B5E84}">
       <p14:sectionLst xmlns:p14="http://schemas.microsoft.com/office/powerpoint/2010/main">
-        <p14:section name="Opening" id="{b6b0f83b-c9cc-eb6c-f883-e98e432d065c}">
+        <p14:section name="Opening" id="{2608034c-f592-06ab-d20e-d0bf15f8d299}">
           <p14:sldIdLst>
             <p14:sldId id="256"/>
             <p14:sldId id="257"/>
@@ -130,13 +130,13 @@
             <p14:sldId id="261"/>
           </p14:sldIdLst>
         </p14:section>
-        <p14:section name="The model" id="{4842ef48-cbd9-2872-84c1-38994a200d3b}">
+        <p14:section name="The model" id="{38c95e52-69c0-e73b-e8dc-383ebdaba2b0}">
           <p14:sldIdLst>
             <p14:sldId id="262"/>
             <p14:sldId id="263"/>
           </p14:sldIdLst>
         </p14:section>
-        <p14:section name="Results" id="{ddddc7ac-7fb3-17d7-e516-de499f8e14e9}">
+        <p14:section name="Results" id="{82fd25da-2328-2403-d222-b621f0b68152}">
           <p14:sldIdLst>
             <p14:sldId id="264"/>
             <p14:sldId id="265"/>
@@ -144,12 +144,12 @@
             <p14:sldId id="267"/>
           </p14:sldIdLst>
         </p14:section>
-        <p14:section name="Validation" id="{dd639afe-7e13-d3c9-d089-bf8162965392}">
+        <p14:section name="Validation" id="{b42d5292-5795-11d3-ecd3-b831e5972654}">
           <p14:sldIdLst>
             <p14:sldId id="268"/>
           </p14:sldIdLst>
         </p14:section>
-        <p14:section name="Close" id="{1ff97b49-e8ba-070e-4b4c-6be4435de0d1}">
+        <p14:section name="Close" id="{0413a2d1-648d-303b-806e-53efe1fe319a}">
           <p14:sldIdLst>
             <p14:sldId id="269"/>
           </p14:sldIdLst>
@@ -2643,8 +2643,8 @@
         </p:blipFill>
         <p:spPr>
           <a:xfrm>
-            <a:off x="457200" y="1051560"/>
-            <a:ext cx="5013472" cy="3291840"/>
+            <a:off x="1821553" y="1005840"/>
+            <a:ext cx="5500893" cy="3611880"/>
           </a:xfrm>
           <a:prstGeom prst="rect">
             <a:avLst/>
@@ -2653,54 +2653,18 @@
       </p:pic>
       <p:sp>
         <p:nvSpPr>
-          <p:cNvPr id="4" name="caption"/>
-          <p:cNvSpPr txBox="1"/>
-          <p:nvPr/>
-        </p:nvSpPr>
-        <p:spPr>
-          <a:xfrm>
-            <a:off x="457200" y="4389120"/>
-            <a:ext cx="5486400" cy="274320"/>
-          </a:xfrm>
-          <a:prstGeom prst="rect">
-            <a:avLst/>
-          </a:prstGeom>
-          <a:noFill/>
-          <a:ln/>
-        </p:spPr>
-        <p:txBody>
-          <a:bodyPr wrap="square" lIns="0" tIns="0" rIns="0" bIns="0" rtlCol="0" anchor="ctr"/>
-          <a:lstStyle/>
-          <a:p>
-            <a:pPr indent="0" marL="0">
-              <a:buNone/>
-            </a:pPr>
-            <a:r>
-              <a:rPr lang="en-US" sz="1000" i="1" dirty="0">
-                <a:solidFill>
-                  <a:schemeClr val="accent3"/>
-                </a:solidFill>
-              </a:rPr>
-              <a:t>Chance the bank fails, by share of individualists μ, one line per λ pair. Includes the pure populations (μ 0 and 1).</a:t>
-            </a:r>
-            <a:endParaRPr lang="en-US" sz="1000" dirty="0"/>
-          </a:p>
-        </p:txBody>
-      </p:sp>
-      <p:sp>
-        <p:nvSpPr>
-          <p:cNvPr id="5" name="stat-P(fail) from no indi"/>
+          <p:cNvPr id="4" name="card-Monotone"/>
           <p:cNvSpPr/>
           <p:nvPr/>
         </p:nvSpPr>
         <p:spPr>
           <a:xfrm>
-            <a:off x="6217920" y="1051560"/>
-            <a:ext cx="2468880" cy="1005840"/>
+            <a:off x="6217920" y="3337560"/>
+            <a:ext cx="2468880" cy="1097280"/>
           </a:xfrm>
           <a:prstGeom prst="roundRect">
             <a:avLst>
-              <a:gd name="adj" fmla="val 7273"/>
+              <a:gd name="adj" fmla="val 6667"/>
             </a:avLst>
           </a:prstGeom>
           <a:solidFill>
@@ -2716,14 +2680,14 @@
       </p:sp>
       <p:sp>
         <p:nvSpPr>
-          <p:cNvPr id="6" name="stat-big"/>
+          <p:cNvPr id="5" name="card-head"/>
           <p:cNvSpPr txBox="1"/>
           <p:nvPr/>
         </p:nvSpPr>
         <p:spPr>
           <a:xfrm>
-            <a:off x="6355080" y="1124712"/>
-            <a:ext cx="2194560" cy="457200"/>
+            <a:off x="6355080" y="3429000"/>
+            <a:ext cx="2194560" cy="292608"/>
           </a:xfrm>
           <a:prstGeom prst="rect">
             <a:avLst/>
@@ -2739,210 +2703,6 @@
               <a:buNone/>
             </a:pPr>
             <a:r>
-              <a:rPr lang="en-US" sz="2200" b="1" dirty="0">
-                <a:solidFill>
-                  <a:schemeClr val="accent1"/>
-                </a:solidFill>
-                <a:latin typeface="Cambria" pitchFamily="34" charset="0"/>
-                <a:ea typeface="Cambria" pitchFamily="34" charset="-122"/>
-                <a:cs typeface="Cambria" pitchFamily="34" charset="-120"/>
-              </a:rPr>
-              <a:t>0.67 to 0.08</a:t>
-            </a:r>
-            <a:endParaRPr lang="en-US" sz="2200" dirty="0"/>
-          </a:p>
-        </p:txBody>
-      </p:sp>
-      <p:sp>
-        <p:nvSpPr>
-          <p:cNvPr id="7" name="stat-label"/>
-          <p:cNvSpPr txBox="1"/>
-          <p:nvPr/>
-        </p:nvSpPr>
-        <p:spPr>
-          <a:xfrm>
-            <a:off x="6355080" y="1600200"/>
-            <a:ext cx="2194560" cy="402336"/>
-          </a:xfrm>
-          <a:prstGeom prst="rect">
-            <a:avLst/>
-          </a:prstGeom>
-          <a:noFill/>
-          <a:ln/>
-        </p:spPr>
-        <p:txBody>
-          <a:bodyPr wrap="square" lIns="0" tIns="0" rIns="0" bIns="0" rtlCol="0" anchor="t"/>
-          <a:lstStyle/>
-          <a:p>
-            <a:pPr indent="0" marL="0">
-              <a:buNone/>
-            </a:pPr>
-            <a:r>
-              <a:rPr lang="en-US" sz="1100" dirty="0">
-                <a:solidFill>
-                  <a:schemeClr val="accent3"/>
-                </a:solidFill>
-              </a:rPr>
-              <a:t>P(fail) from no individualists to all, wide λ gap</a:t>
-            </a:r>
-            <a:endParaRPr lang="en-US" sz="1100" dirty="0"/>
-          </a:p>
-        </p:txBody>
-      </p:sp>
-      <p:sp>
-        <p:nvSpPr>
-          <p:cNvPr id="8" name="stat-the same, narrow λ g"/>
-          <p:cNvSpPr/>
-          <p:nvPr/>
-        </p:nvSpPr>
-        <p:spPr>
-          <a:xfrm>
-            <a:off x="6217920" y="2194560"/>
-            <a:ext cx="2468880" cy="1005840"/>
-          </a:xfrm>
-          <a:prstGeom prst="roundRect">
-            <a:avLst>
-              <a:gd name="adj" fmla="val 7273"/>
-            </a:avLst>
-          </a:prstGeom>
-          <a:solidFill>
-            <a:schemeClr val="bg2"/>
-          </a:solidFill>
-          <a:ln w="12700">
-            <a:solidFill>
-              <a:schemeClr val="bg2"/>
-            </a:solidFill>
-            <a:prstDash val="solid"/>
-          </a:ln>
-        </p:spPr>
-      </p:sp>
-      <p:sp>
-        <p:nvSpPr>
-          <p:cNvPr id="9" name="stat-big"/>
-          <p:cNvSpPr txBox="1"/>
-          <p:nvPr/>
-        </p:nvSpPr>
-        <p:spPr>
-          <a:xfrm>
-            <a:off x="6355080" y="2267712"/>
-            <a:ext cx="2194560" cy="457200"/>
-          </a:xfrm>
-          <a:prstGeom prst="rect">
-            <a:avLst/>
-          </a:prstGeom>
-          <a:noFill/>
-          <a:ln/>
-        </p:spPr>
-        <p:txBody>
-          <a:bodyPr wrap="square" lIns="0" tIns="0" rIns="0" bIns="0" rtlCol="0" anchor="ctr"/>
-          <a:lstStyle/>
-          <a:p>
-            <a:pPr indent="0" marL="0">
-              <a:buNone/>
-            </a:pPr>
-            <a:r>
-              <a:rPr lang="en-US" sz="2200" b="1" dirty="0">
-                <a:solidFill>
-                  <a:schemeClr val="accent1"/>
-                </a:solidFill>
-                <a:latin typeface="Cambria" pitchFamily="34" charset="0"/>
-                <a:ea typeface="Cambria" pitchFamily="34" charset="-122"/>
-                <a:cs typeface="Cambria" pitchFamily="34" charset="-120"/>
-              </a:rPr>
-              <a:t>0.25 to 0.09</a:t>
-            </a:r>
-            <a:endParaRPr lang="en-US" sz="2200" dirty="0"/>
-          </a:p>
-        </p:txBody>
-      </p:sp>
-      <p:sp>
-        <p:nvSpPr>
-          <p:cNvPr id="10" name="stat-label"/>
-          <p:cNvSpPr txBox="1"/>
-          <p:nvPr/>
-        </p:nvSpPr>
-        <p:spPr>
-          <a:xfrm>
-            <a:off x="6355080" y="2743200"/>
-            <a:ext cx="2194560" cy="402336"/>
-          </a:xfrm>
-          <a:prstGeom prst="rect">
-            <a:avLst/>
-          </a:prstGeom>
-          <a:noFill/>
-          <a:ln/>
-        </p:spPr>
-        <p:txBody>
-          <a:bodyPr wrap="square" lIns="0" tIns="0" rIns="0" bIns="0" rtlCol="0" anchor="t"/>
-          <a:lstStyle/>
-          <a:p>
-            <a:pPr indent="0" marL="0">
-              <a:buNone/>
-            </a:pPr>
-            <a:r>
-              <a:rPr lang="en-US" sz="1100" dirty="0">
-                <a:solidFill>
-                  <a:schemeClr val="accent3"/>
-                </a:solidFill>
-              </a:rPr>
-              <a:t>the same, narrow λ gap: it matters most when collectivists dominate</a:t>
-            </a:r>
-            <a:endParaRPr lang="en-US" sz="1100" dirty="0"/>
-          </a:p>
-        </p:txBody>
-      </p:sp>
-      <p:sp>
-        <p:nvSpPr>
-          <p:cNvPr id="11" name="card-Monotone"/>
-          <p:cNvSpPr/>
-          <p:nvPr/>
-        </p:nvSpPr>
-        <p:spPr>
-          <a:xfrm>
-            <a:off x="6217920" y="3337560"/>
-            <a:ext cx="2468880" cy="1097280"/>
-          </a:xfrm>
-          <a:prstGeom prst="roundRect">
-            <a:avLst>
-              <a:gd name="adj" fmla="val 6667"/>
-            </a:avLst>
-          </a:prstGeom>
-          <a:solidFill>
-            <a:schemeClr val="bg2"/>
-          </a:solidFill>
-          <a:ln w="12700">
-            <a:solidFill>
-              <a:schemeClr val="bg2"/>
-            </a:solidFill>
-            <a:prstDash val="solid"/>
-          </a:ln>
-        </p:spPr>
-      </p:sp>
-      <p:sp>
-        <p:nvSpPr>
-          <p:cNvPr id="12" name="card-head"/>
-          <p:cNvSpPr txBox="1"/>
-          <p:nvPr/>
-        </p:nvSpPr>
-        <p:spPr>
-          <a:xfrm>
-            <a:off x="6355080" y="3429000"/>
-            <a:ext cx="2194560" cy="292608"/>
-          </a:xfrm>
-          <a:prstGeom prst="rect">
-            <a:avLst/>
-          </a:prstGeom>
-          <a:noFill/>
-          <a:ln/>
-        </p:spPr>
-        <p:txBody>
-          <a:bodyPr wrap="square" lIns="0" tIns="0" rIns="0" bIns="0" rtlCol="0" anchor="ctr"/>
-          <a:lstStyle/>
-          <a:p>
-            <a:pPr indent="0" marL="0">
-              <a:buNone/>
-            </a:pPr>
-            <a:r>
               <a:rPr lang="en-US" sz="1300" b="1" dirty="0">
                 <a:solidFill>
                   <a:schemeClr val="tx2"/>
@@ -2956,7 +2716,7 @@
       </p:sp>
       <p:sp>
         <p:nvSpPr>
-          <p:cNvPr id="13" name="card-body"/>
+          <p:cNvPr id="6" name="card-body"/>
           <p:cNvSpPr txBox="1"/>
           <p:nvPr/>
         </p:nvSpPr>
@@ -8035,356 +7795,14 @@
         </p:blipFill>
         <p:spPr>
           <a:xfrm>
-            <a:off x="457200" y="1051560"/>
-            <a:ext cx="5164897" cy="3291840"/>
+            <a:off x="1738480" y="1005840"/>
+            <a:ext cx="5667040" cy="3611880"/>
           </a:xfrm>
           <a:prstGeom prst="rect">
             <a:avLst/>
           </a:prstGeom>
         </p:spPr>
       </p:pic>
-      <p:sp>
-        <p:nvSpPr>
-          <p:cNvPr id="4" name="caption"/>
-          <p:cNvSpPr txBox="1"/>
-          <p:nvPr/>
-        </p:nvSpPr>
-        <p:spPr>
-          <a:xfrm>
-            <a:off x="457200" y="4389120"/>
-            <a:ext cx="5486400" cy="274320"/>
-          </a:xfrm>
-          <a:prstGeom prst="rect">
-            <a:avLst/>
-          </a:prstGeom>
-          <a:noFill/>
-          <a:ln/>
-        </p:spPr>
-        <p:txBody>
-          <a:bodyPr wrap="square" lIns="0" tIns="0" rIns="0" bIns="0" rtlCol="0" anchor="ctr"/>
-          <a:lstStyle/>
-          <a:p>
-            <a:pPr indent="0" marL="0">
-              <a:buNone/>
-            </a:pPr>
-            <a:r>
-              <a:rPr lang="en-US" sz="1000" i="1" dirty="0">
-                <a:solidFill>
-                  <a:schemeClr val="accent3"/>
-                </a:solidFill>
-              </a:rPr>
-              <a:t>Chance of withdrawing, given the share of a depositor’s neighbours who have already withdrawn. λ pairs pooled; reference bank.</a:t>
-            </a:r>
-            <a:endParaRPr lang="en-US" sz="1000" dirty="0"/>
-          </a:p>
-        </p:txBody>
-      </p:sp>
-      <p:sp>
-        <p:nvSpPr>
-          <p:cNvPr id="5" name="stat-collectivists, once "/>
-          <p:cNvSpPr/>
-          <p:nvPr/>
-        </p:nvSpPr>
-        <p:spPr>
-          <a:xfrm>
-            <a:off x="6217920" y="1051560"/>
-            <a:ext cx="2468880" cy="1005840"/>
-          </a:xfrm>
-          <a:prstGeom prst="roundRect">
-            <a:avLst>
-              <a:gd name="adj" fmla="val 7273"/>
-            </a:avLst>
-          </a:prstGeom>
-          <a:solidFill>
-            <a:schemeClr val="bg2"/>
-          </a:solidFill>
-          <a:ln w="12700">
-            <a:solidFill>
-              <a:schemeClr val="bg2"/>
-            </a:solidFill>
-            <a:prstDash val="solid"/>
-          </a:ln>
-        </p:spPr>
-      </p:sp>
-      <p:sp>
-        <p:nvSpPr>
-          <p:cNvPr id="6" name="stat-big"/>
-          <p:cNvSpPr txBox="1"/>
-          <p:nvPr/>
-        </p:nvSpPr>
-        <p:spPr>
-          <a:xfrm>
-            <a:off x="6355080" y="1124712"/>
-            <a:ext cx="2194560" cy="457200"/>
-          </a:xfrm>
-          <a:prstGeom prst="rect">
-            <a:avLst/>
-          </a:prstGeom>
-          <a:noFill/>
-          <a:ln/>
-        </p:spPr>
-        <p:txBody>
-          <a:bodyPr wrap="square" lIns="0" tIns="0" rIns="0" bIns="0" rtlCol="0" anchor="ctr"/>
-          <a:lstStyle/>
-          <a:p>
-            <a:pPr indent="0" marL="0">
-              <a:buNone/>
-            </a:pPr>
-            <a:r>
-              <a:rPr lang="en-US" sz="2200" b="1" dirty="0">
-                <a:solidFill>
-                  <a:srgbClr val="2A78D6"/>
-                </a:solidFill>
-                <a:latin typeface="Cambria" pitchFamily="34" charset="0"/>
-                <a:ea typeface="Cambria" pitchFamily="34" charset="-122"/>
-                <a:cs typeface="Cambria" pitchFamily="34" charset="-120"/>
-              </a:rPr>
-              <a:t>0.15 to 0.93</a:t>
-            </a:r>
-            <a:endParaRPr lang="en-US" sz="2200" dirty="0"/>
-          </a:p>
-        </p:txBody>
-      </p:sp>
-      <p:sp>
-        <p:nvSpPr>
-          <p:cNvPr id="7" name="stat-label"/>
-          <p:cNvSpPr txBox="1"/>
-          <p:nvPr/>
-        </p:nvSpPr>
-        <p:spPr>
-          <a:xfrm>
-            <a:off x="6355080" y="1600200"/>
-            <a:ext cx="2194560" cy="402336"/>
-          </a:xfrm>
-          <a:prstGeom prst="rect">
-            <a:avLst/>
-          </a:prstGeom>
-          <a:noFill/>
-          <a:ln/>
-        </p:spPr>
-        <p:txBody>
-          <a:bodyPr wrap="square" lIns="0" tIns="0" rIns="0" bIns="0" rtlCol="0" anchor="t"/>
-          <a:lstStyle/>
-          <a:p>
-            <a:pPr indent="0" marL="0">
-              <a:buNone/>
-            </a:pPr>
-            <a:r>
-              <a:rPr lang="en-US" sz="1100" dirty="0">
-                <a:solidFill>
-                  <a:schemeClr val="accent3"/>
-                </a:solidFill>
-              </a:rPr>
-              <a:t>collectivists, once 20–35% of their neighbours are out</a:t>
-            </a:r>
-            <a:endParaRPr lang="en-US" sz="1100" dirty="0"/>
-          </a:p>
-        </p:txBody>
-      </p:sp>
-      <p:sp>
-        <p:nvSpPr>
-          <p:cNvPr id="8" name="stat-where individualists"/>
-          <p:cNvSpPr/>
-          <p:nvPr/>
-        </p:nvSpPr>
-        <p:spPr>
-          <a:xfrm>
-            <a:off x="6217920" y="2194560"/>
-            <a:ext cx="2468880" cy="1005840"/>
-          </a:xfrm>
-          <a:prstGeom prst="roundRect">
-            <a:avLst>
-              <a:gd name="adj" fmla="val 7273"/>
-            </a:avLst>
-          </a:prstGeom>
-          <a:solidFill>
-            <a:schemeClr val="bg2"/>
-          </a:solidFill>
-          <a:ln w="12700">
-            <a:solidFill>
-              <a:schemeClr val="bg2"/>
-            </a:solidFill>
-            <a:prstDash val="solid"/>
-          </a:ln>
-        </p:spPr>
-      </p:sp>
-      <p:sp>
-        <p:nvSpPr>
-          <p:cNvPr id="9" name="stat-big"/>
-          <p:cNvSpPr txBox="1"/>
-          <p:nvPr/>
-        </p:nvSpPr>
-        <p:spPr>
-          <a:xfrm>
-            <a:off x="6355080" y="2267712"/>
-            <a:ext cx="2194560" cy="457200"/>
-          </a:xfrm>
-          <a:prstGeom prst="rect">
-            <a:avLst/>
-          </a:prstGeom>
-          <a:noFill/>
-          <a:ln/>
-        </p:spPr>
-        <p:txBody>
-          <a:bodyPr wrap="square" lIns="0" tIns="0" rIns="0" bIns="0" rtlCol="0" anchor="ctr"/>
-          <a:lstStyle/>
-          <a:p>
-            <a:pPr indent="0" marL="0">
-              <a:buNone/>
-            </a:pPr>
-            <a:r>
-              <a:rPr lang="en-US" sz="2200" b="1" dirty="0">
-                <a:solidFill>
-                  <a:srgbClr val="EB6834"/>
-                </a:solidFill>
-                <a:latin typeface="Cambria" pitchFamily="34" charset="0"/>
-                <a:ea typeface="Cambria" pitchFamily="34" charset="-122"/>
-                <a:cs typeface="Cambria" pitchFamily="34" charset="-120"/>
-              </a:rPr>
-              <a:t>0.25 to 0.30</a:t>
-            </a:r>
-            <a:endParaRPr lang="en-US" sz="2200" dirty="0"/>
-          </a:p>
-        </p:txBody>
-      </p:sp>
-      <p:sp>
-        <p:nvSpPr>
-          <p:cNvPr id="10" name="stat-label"/>
-          <p:cNvSpPr txBox="1"/>
-          <p:nvPr/>
-        </p:nvSpPr>
-        <p:spPr>
-          <a:xfrm>
-            <a:off x="6355080" y="2743200"/>
-            <a:ext cx="2194560" cy="402336"/>
-          </a:xfrm>
-          <a:prstGeom prst="rect">
-            <a:avLst/>
-          </a:prstGeom>
-          <a:noFill/>
-          <a:ln/>
-        </p:spPr>
-        <p:txBody>
-          <a:bodyPr wrap="square" lIns="0" tIns="0" rIns="0" bIns="0" rtlCol="0" anchor="t"/>
-          <a:lstStyle/>
-          <a:p>
-            <a:pPr indent="0" marL="0">
-              <a:buNone/>
-            </a:pPr>
-            <a:r>
-              <a:rPr lang="en-US" sz="1100" dirty="0">
-                <a:solidFill>
-                  <a:schemeClr val="accent3"/>
-                </a:solidFill>
-              </a:rPr>
-              <a:t>where individualists level off, whatever their neighbours do</a:t>
-            </a:r>
-            <a:endParaRPr lang="en-US" sz="1100" dirty="0"/>
-          </a:p>
-        </p:txBody>
-      </p:sp>
-      <p:sp>
-        <p:nvSpPr>
-          <p:cNvPr id="11" name="stat-difference in slopes"/>
-          <p:cNvSpPr/>
-          <p:nvPr/>
-        </p:nvSpPr>
-        <p:spPr>
-          <a:xfrm>
-            <a:off x="6217920" y="3337560"/>
-            <a:ext cx="2468880" cy="1097280"/>
-          </a:xfrm>
-          <a:prstGeom prst="roundRect">
-            <a:avLst>
-              <a:gd name="adj" fmla="val 6667"/>
-            </a:avLst>
-          </a:prstGeom>
-          <a:solidFill>
-            <a:schemeClr val="bg2"/>
-          </a:solidFill>
-          <a:ln w="12700">
-            <a:solidFill>
-              <a:schemeClr val="bg2"/>
-            </a:solidFill>
-            <a:prstDash val="solid"/>
-          </a:ln>
-        </p:spPr>
-      </p:sp>
-      <p:sp>
-        <p:nvSpPr>
-          <p:cNvPr id="12" name="stat-big"/>
-          <p:cNvSpPr txBox="1"/>
-          <p:nvPr/>
-        </p:nvSpPr>
-        <p:spPr>
-          <a:xfrm>
-            <a:off x="6355080" y="3410712"/>
-            <a:ext cx="2194560" cy="457200"/>
-          </a:xfrm>
-          <a:prstGeom prst="rect">
-            <a:avLst/>
-          </a:prstGeom>
-          <a:noFill/>
-          <a:ln/>
-        </p:spPr>
-        <p:txBody>
-          <a:bodyPr wrap="square" lIns="0" tIns="0" rIns="0" bIns="0" rtlCol="0" anchor="ctr"/>
-          <a:lstStyle/>
-          <a:p>
-            <a:pPr indent="0" marL="0">
-              <a:buNone/>
-            </a:pPr>
-            <a:r>
-              <a:rPr lang="en-US" sz="2600" b="1" dirty="0">
-                <a:solidFill>
-                  <a:schemeClr val="accent1"/>
-                </a:solidFill>
-                <a:latin typeface="Cambria" pitchFamily="34" charset="0"/>
-                <a:ea typeface="Cambria" pitchFamily="34" charset="-122"/>
-                <a:cs typeface="Cambria" pitchFamily="34" charset="-120"/>
-              </a:rPr>
-              <a:t>+0.58</a:t>
-            </a:r>
-            <a:endParaRPr lang="en-US" sz="2600" dirty="0"/>
-          </a:p>
-        </p:txBody>
-      </p:sp>
-      <p:sp>
-        <p:nvSpPr>
-          <p:cNvPr id="13" name="stat-label"/>
-          <p:cNvSpPr txBox="1"/>
-          <p:nvPr/>
-        </p:nvSpPr>
-        <p:spPr>
-          <a:xfrm>
-            <a:off x="6355080" y="3886200"/>
-            <a:ext cx="2194560" cy="493776"/>
-          </a:xfrm>
-          <a:prstGeom prst="rect">
-            <a:avLst/>
-          </a:prstGeom>
-          <a:noFill/>
-          <a:ln/>
-        </p:spPr>
-        <p:txBody>
-          <a:bodyPr wrap="square" lIns="0" tIns="0" rIns="0" bIns="0" rtlCol="0" anchor="t"/>
-          <a:lstStyle/>
-          <a:p>
-            <a:pPr indent="0" marL="0">
-              <a:buNone/>
-            </a:pPr>
-            <a:r>
-              <a:rPr lang="en-US" sz="1100" dirty="0">
-                <a:solidFill>
-                  <a:schemeClr val="accent3"/>
-                </a:solidFill>
-              </a:rPr>
-              <a:t>difference in slopes (collectivists 0.80, individualists 0.22), t = 16.7</a:t>
-            </a:r>
-            <a:endParaRPr lang="en-US" sz="1100" dirty="0"/>
-          </a:p>
-        </p:txBody>
-      </p:sp>
       <p:sp>
         <p:nvSpPr>
           <p:cNvPr id="25" name="Slide Number Placeholder 0"/>

--- a/docs/deck_2026-10-26_seminar.pptx
+++ b/docs/deck_2026-10-26_seminar.pptx
@@ -120,7 +120,7 @@
   <p:extLst>
     <p:ext uri="{521415D9-36F7-43E2-AB2F-B90AF26B5E84}">
       <p14:sectionLst xmlns:p14="http://schemas.microsoft.com/office/powerpoint/2010/main">
-        <p14:section name="Opening" id="{2608034c-f592-06ab-d20e-d0bf15f8d299}">
+        <p14:section name="Opening" id="{44391919-9fcc-e48e-4148-b200cdee47b1}">
           <p14:sldIdLst>
             <p14:sldId id="256"/>
             <p14:sldId id="257"/>
@@ -130,13 +130,13 @@
             <p14:sldId id="261"/>
           </p14:sldIdLst>
         </p14:section>
-        <p14:section name="The model" id="{38c95e52-69c0-e73b-e8dc-383ebdaba2b0}">
+        <p14:section name="The model" id="{a2d97d17-a860-ed0c-b5db-4c8c7c436921}">
           <p14:sldIdLst>
             <p14:sldId id="262"/>
             <p14:sldId id="263"/>
           </p14:sldIdLst>
         </p14:section>
-        <p14:section name="Results" id="{82fd25da-2328-2403-d222-b621f0b68152}">
+        <p14:section name="Results" id="{57d6db16-59c6-fe38-bf59-3ea97d0f0ac8}">
           <p14:sldIdLst>
             <p14:sldId id="264"/>
             <p14:sldId id="265"/>
@@ -144,12 +144,12 @@
             <p14:sldId id="267"/>
           </p14:sldIdLst>
         </p14:section>
-        <p14:section name="Validation" id="{b42d5292-5795-11d3-ecd3-b831e5972654}">
+        <p14:section name="Validation" id="{bbeb5f1c-807a-14b3-a341-0d597cde811e}">
           <p14:sldIdLst>
             <p14:sldId id="268"/>
           </p14:sldIdLst>
         </p14:section>
-        <p14:section name="Close" id="{0413a2d1-648d-303b-806e-53efe1fe319a}">
+        <p14:section name="Close" id="{9c6f72a4-c463-7586-fe7c-888f471380be}">
           <p14:sldIdLst>
             <p14:sldId id="269"/>
           </p14:sldIdLst>
@@ -2651,105 +2651,6 @@
           </a:prstGeom>
         </p:spPr>
       </p:pic>
-      <p:sp>
-        <p:nvSpPr>
-          <p:cNvPr id="4" name="card-Monotone"/>
-          <p:cNvSpPr/>
-          <p:nvPr/>
-        </p:nvSpPr>
-        <p:spPr>
-          <a:xfrm>
-            <a:off x="6217920" y="3337560"/>
-            <a:ext cx="2468880" cy="1097280"/>
-          </a:xfrm>
-          <a:prstGeom prst="roundRect">
-            <a:avLst>
-              <a:gd name="adj" fmla="val 6667"/>
-            </a:avLst>
-          </a:prstGeom>
-          <a:solidFill>
-            <a:schemeClr val="bg2"/>
-          </a:solidFill>
-          <a:ln w="12700">
-            <a:solidFill>
-              <a:schemeClr val="bg2"/>
-            </a:solidFill>
-            <a:prstDash val="solid"/>
-          </a:ln>
-        </p:spPr>
-      </p:sp>
-      <p:sp>
-        <p:nvSpPr>
-          <p:cNvPr id="5" name="card-head"/>
-          <p:cNvSpPr txBox="1"/>
-          <p:nvPr/>
-        </p:nvSpPr>
-        <p:spPr>
-          <a:xfrm>
-            <a:off x="6355080" y="3429000"/>
-            <a:ext cx="2194560" cy="292608"/>
-          </a:xfrm>
-          <a:prstGeom prst="rect">
-            <a:avLst/>
-          </a:prstGeom>
-          <a:noFill/>
-          <a:ln/>
-        </p:spPr>
-        <p:txBody>
-          <a:bodyPr wrap="square" lIns="0" tIns="0" rIns="0" bIns="0" rtlCol="0" anchor="ctr"/>
-          <a:lstStyle/>
-          <a:p>
-            <a:pPr indent="0" marL="0">
-              <a:buNone/>
-            </a:pPr>
-            <a:r>
-              <a:rPr lang="en-US" sz="1300" b="1" dirty="0">
-                <a:solidFill>
-                  <a:schemeClr val="tx2"/>
-                </a:solidFill>
-              </a:rPr>
-              <a:t>Monotone</a:t>
-            </a:r>
-            <a:endParaRPr lang="en-US" sz="1300" dirty="0"/>
-          </a:p>
-        </p:txBody>
-      </p:sp>
-      <p:sp>
-        <p:nvSpPr>
-          <p:cNvPr id="6" name="card-body"/>
-          <p:cNvSpPr txBox="1"/>
-          <p:nvPr/>
-        </p:nvSpPr>
-        <p:spPr>
-          <a:xfrm>
-            <a:off x="6355080" y="3749040"/>
-            <a:ext cx="2194560" cy="594360"/>
-          </a:xfrm>
-          <a:prstGeom prst="rect">
-            <a:avLst/>
-          </a:prstGeom>
-          <a:noFill/>
-          <a:ln/>
-        </p:spPr>
-        <p:txBody>
-          <a:bodyPr wrap="square" lIns="0" tIns="0" rIns="0" bIns="0" rtlCol="0" anchor="t"/>
-          <a:lstStyle/>
-          <a:p>
-            <a:pPr indent="0" marL="0">
-              <a:buNone/>
-            </a:pPr>
-            <a:r>
-              <a:rPr lang="en-US" sz="1150" dirty="0">
-                <a:solidFill>
-                  <a:schemeClr val="tx1"/>
-                </a:solidFill>
-              </a:rPr>
-              <a:t>No interior peak at any mix. The lines converge once individualists are 75% or more.</a:t>
-            </a:r>
-            <a:endParaRPr lang="en-US" sz="1150" dirty="0"/>
-          </a:p>
-        </p:txBody>
-      </p:sp>
       <p:sp>
         <p:nvSpPr>
           <p:cNvPr id="25" name="Slide Number Placeholder 0"/>

--- a/docs/deck_2026-10-26_seminar.pptx
+++ b/docs/deck_2026-10-26_seminar.pptx
@@ -120,7 +120,7 @@
   <p:extLst>
     <p:ext uri="{521415D9-36F7-43E2-AB2F-B90AF26B5E84}">
       <p14:sectionLst xmlns:p14="http://schemas.microsoft.com/office/powerpoint/2010/main">
-        <p14:section name="Opening" id="{44391919-9fcc-e48e-4148-b200cdee47b1}">
+        <p14:section name="Opening" id="{f74dc821-8093-4557-6100-8267c8f72c7b}">
           <p14:sldIdLst>
             <p14:sldId id="256"/>
             <p14:sldId id="257"/>
@@ -130,13 +130,13 @@
             <p14:sldId id="261"/>
           </p14:sldIdLst>
         </p14:section>
-        <p14:section name="The model" id="{a2d97d17-a860-ed0c-b5db-4c8c7c436921}">
+        <p14:section name="The model" id="{3dbc78c5-c894-8079-f20a-0b095a8322de}">
           <p14:sldIdLst>
             <p14:sldId id="262"/>
             <p14:sldId id="263"/>
           </p14:sldIdLst>
         </p14:section>
-        <p14:section name="Results" id="{57d6db16-59c6-fe38-bf59-3ea97d0f0ac8}">
+        <p14:section name="Results" id="{52f79486-cf45-3327-b8f9-944bd37c0efd}">
           <p14:sldIdLst>
             <p14:sldId id="264"/>
             <p14:sldId id="265"/>
@@ -144,12 +144,12 @@
             <p14:sldId id="267"/>
           </p14:sldIdLst>
         </p14:section>
-        <p14:section name="Validation" id="{bbeb5f1c-807a-14b3-a341-0d597cde811e}">
+        <p14:section name="Validation" id="{3ff624ca-f151-8928-2d1e-c1e0231df7af}">
           <p14:sldIdLst>
             <p14:sldId id="268"/>
           </p14:sldIdLst>
         </p14:section>
-        <p14:section name="Close" id="{9c6f72a4-c463-7586-fe7c-888f471380be}">
+        <p14:section name="Close" id="{ef47ef8c-0395-b0a5-0ecc-5eeaa9adb85e}">
           <p14:sldIdLst>
             <p14:sldId id="269"/>
           </p14:sldIdLst>
@@ -1820,7 +1820,7 @@
         <p:txBody>
           <a:bodyPr wrap="square" rtlCol="0"/>
           <a:lstStyle>
-            <a:lvl1pPr algn="l" indent="0" marL="0">
+            <a:lvl1pPr algn="ctr" indent="0" marL="0">
               <a:buNone/>
               <a:defRPr lang="en-US" sz="3400" b="1" dirty="0">
                 <a:solidFill>
@@ -1830,7 +1830,7 @@
             </a:lvl1pPr>
           </a:lstStyle>
           <a:p>
-            <a:pPr algn="l" indent="0" marL="0">
+            <a:pPr algn="ctr" indent="0" marL="0">
               <a:buNone/>
             </a:pPr>
             <a:endParaRPr lang="en-US" sz="3400" dirty="0"/>
@@ -1930,7 +1930,7 @@
         <p:txBody>
           <a:bodyPr wrap="square" rtlCol="0"/>
           <a:lstStyle>
-            <a:lvl1pPr algn="l" indent="0" marL="0">
+            <a:lvl1pPr algn="ctr" indent="0" marL="0">
               <a:buNone/>
               <a:defRPr lang="en-US" sz="2400" b="1" dirty="0">
                 <a:solidFill>
@@ -1940,7 +1940,7 @@
             </a:lvl1pPr>
           </a:lstStyle>
           <a:p>
-            <a:pPr algn="l" indent="0" marL="0">
+            <a:pPr algn="ctr" indent="0" marL="0">
               <a:buNone/>
             </a:pPr>
             <a:endParaRPr lang="en-US" sz="2400" dirty="0"/>
@@ -2082,7 +2082,7 @@
         <p:txBody>
           <a:bodyPr wrap="square" rtlCol="0"/>
           <a:lstStyle>
-            <a:lvl1pPr algn="l" indent="0" marL="0">
+            <a:lvl1pPr algn="ctr" indent="0" marL="0">
               <a:buNone/>
               <a:defRPr lang="en-US" sz="3200" b="1" dirty="0">
                 <a:solidFill>
@@ -2092,7 +2092,7 @@
             </a:lvl1pPr>
           </a:lstStyle>
           <a:p>
-            <a:pPr algn="l" indent="0" marL="0">
+            <a:pPr algn="ctr" indent="0" marL="0">
               <a:buNone/>
             </a:pPr>
             <a:endParaRPr lang="en-US" sz="3200" dirty="0"/>
@@ -2511,7 +2511,7 @@
           <a:bodyPr wrap="square" lIns="0" tIns="0" rIns="0" bIns="0" rtlCol="0" anchor="b"/>
           <a:lstStyle/>
           <a:p>
-            <a:pPr algn="l" indent="0" marL="0">
+            <a:pPr algn="ctr" indent="0" marL="0">
               <a:buNone/>
             </a:pPr>
             <a:r>
@@ -2612,7 +2612,7 @@
           <a:bodyPr wrap="square" lIns="0" tIns="0" rIns="0" bIns="0" rtlCol="0" anchor="ctr"/>
           <a:lstStyle/>
           <a:p>
-            <a:pPr algn="l" indent="0" marL="0">
+            <a:pPr algn="ctr" indent="0" marL="0">
               <a:buNone/>
             </a:pPr>
             <a:r>
@@ -2744,7 +2744,7 @@
           <a:bodyPr wrap="square" lIns="0" tIns="0" rIns="0" bIns="0" rtlCol="0" anchor="ctr"/>
           <a:lstStyle/>
           <a:p>
-            <a:pPr algn="l" indent="0" marL="0">
+            <a:pPr algn="ctr" indent="0" marL="0">
               <a:buNone/>
             </a:pPr>
             <a:r>
@@ -2876,7 +2876,7 @@
           <a:bodyPr wrap="square" lIns="0" tIns="0" rIns="0" bIns="0" rtlCol="0" anchor="ctr"/>
           <a:lstStyle/>
           <a:p>
-            <a:pPr algn="l" indent="0" marL="0">
+            <a:pPr algn="ctr" indent="0" marL="0">
               <a:buNone/>
             </a:pPr>
             <a:r>
@@ -3008,7 +3008,7 @@
           <a:bodyPr wrap="square" lIns="0" tIns="0" rIns="0" bIns="0" rtlCol="0" anchor="ctr"/>
           <a:lstStyle/>
           <a:p>
-            <a:pPr algn="l" indent="0" marL="0">
+            <a:pPr algn="ctr" indent="0" marL="0">
               <a:buNone/>
             </a:pPr>
             <a:r>
@@ -3039,283 +3039,14 @@
         </p:blipFill>
         <p:spPr>
           <a:xfrm>
-            <a:off x="457200" y="1051560"/>
-            <a:ext cx="5214275" cy="3291840"/>
+            <a:off x="1711391" y="1005840"/>
+            <a:ext cx="5721218" cy="3611880"/>
           </a:xfrm>
           <a:prstGeom prst="rect">
             <a:avLst/>
           </a:prstGeom>
         </p:spPr>
       </p:pic>
-      <p:sp>
-        <p:nvSpPr>
-          <p:cNvPr id="4" name="caption"/>
-          <p:cNvSpPr txBox="1"/>
-          <p:nvPr/>
-        </p:nvSpPr>
-        <p:spPr>
-          <a:xfrm>
-            <a:off x="457200" y="4389120"/>
-            <a:ext cx="5486400" cy="274320"/>
-          </a:xfrm>
-          <a:prstGeom prst="rect">
-            <a:avLst/>
-          </a:prstGeom>
-          <a:noFill/>
-          <a:ln/>
-        </p:spPr>
-        <p:txBody>
-          <a:bodyPr wrap="square" lIns="0" tIns="0" rIns="0" bIns="0" rtlCol="0" anchor="ctr"/>
-          <a:lstStyle/>
-          <a:p>
-            <a:pPr indent="0" marL="0">
-              <a:buNone/>
-            </a:pPr>
-            <a:r>
-              <a:rPr lang="en-US" sz="1000" i="1" dirty="0">
-                <a:solidFill>
-                  <a:schemeClr val="accent3"/>
-                </a:solidFill>
-              </a:rPr>
-              <a:t>D relative to no news, against how far the public news sits from the truth. Shaded: where the theory predicts the sign.</a:t>
-            </a:r>
-            <a:endParaRPr lang="en-US" sz="1000" dirty="0"/>
-          </a:p>
-        </p:txBody>
-      </p:sp>
-      <p:sp>
-        <p:nvSpPr>
-          <p:cNvPr id="5" name="tests"/>
-          <p:cNvSpPr/>
-          <p:nvPr/>
-        </p:nvSpPr>
-        <p:spPr>
-          <a:xfrm>
-            <a:off x="6217920" y="1051560"/>
-            <a:ext cx="2468880" cy="2103120"/>
-          </a:xfrm>
-          <a:prstGeom prst="roundRect">
-            <a:avLst>
-              <a:gd name="adj" fmla="val 3478"/>
-            </a:avLst>
-          </a:prstGeom>
-          <a:solidFill>
-            <a:schemeClr val="bg2"/>
-          </a:solidFill>
-          <a:ln w="12700">
-            <a:solidFill>
-              <a:schemeClr val="bg2"/>
-            </a:solidFill>
-            <a:prstDash val="solid"/>
-          </a:ln>
-        </p:spPr>
-      </p:sp>
-      <p:sp>
-        <p:nvSpPr>
-          <p:cNvPr id="6" name="tests-text"/>
-          <p:cNvSpPr txBox="1"/>
-          <p:nvPr/>
-        </p:nvSpPr>
-        <p:spPr>
-          <a:xfrm>
-            <a:off x="6355080" y="1143000"/>
-            <a:ext cx="2194560" cy="1920240"/>
-          </a:xfrm>
-          <a:prstGeom prst="rect">
-            <a:avLst/>
-          </a:prstGeom>
-          <a:noFill/>
-          <a:ln/>
-        </p:spPr>
-        <p:txBody>
-          <a:bodyPr wrap="square" lIns="0" tIns="0" rIns="0" bIns="0" rtlCol="0" anchor="t"/>
-          <a:lstStyle/>
-          <a:p>
-            <a:pPr indent="0" marL="0">
-              <a:spcAft>
-                <a:spcPts val="600"/>
-              </a:spcAft>
-              <a:buNone/>
-            </a:pPr>
-            <a:r>
-              <a:rPr lang="en-US" sz="1300" b="1" dirty="0">
-                <a:solidFill>
-                  <a:schemeClr val="tx2"/>
-                </a:solidFill>
-              </a:rPr>
-              <a:t>Pre-registered tests</a:t>
-            </a:r>
-            <a:endParaRPr lang="en-US" sz="1050" dirty="0"/>
-          </a:p>
-          <a:p>
-            <a:pPr indent="0" marL="0">
-              <a:spcAft>
-                <a:spcPts val="300"/>
-              </a:spcAft>
-              <a:buNone/>
-            </a:pPr>
-            <a:r>
-              <a:rPr lang="en-US" sz="1050" dirty="0">
-                <a:solidFill>
-                  <a:schemeClr val="tx1"/>
-                </a:solidFill>
-              </a:rPr>
-              <a:t>G1′  optimistic news: individualists run more   +0.033</a:t>
-            </a:r>
-            <a:endParaRPr lang="en-US" sz="1050" dirty="0"/>
-          </a:p>
-          <a:p>
-            <a:pPr indent="0" marL="0">
-              <a:spcAft>
-                <a:spcPts val="300"/>
-              </a:spcAft>
-              <a:buNone/>
-            </a:pPr>
-            <a:r>
-              <a:rPr lang="en-US" sz="1050" dirty="0">
-                <a:solidFill>
-                  <a:schemeClr val="tx1"/>
-                </a:solidFill>
-              </a:rPr>
-              <a:t>G4′  pessimistic news: collectivists run more   −0.031</a:t>
-            </a:r>
-            <a:endParaRPr lang="en-US" sz="1050" dirty="0"/>
-          </a:p>
-          <a:p>
-            <a:pPr indent="0" marL="0">
-              <a:spcAft>
-                <a:spcPts val="300"/>
-              </a:spcAft>
-              <a:buNone/>
-            </a:pPr>
-            <a:r>
-              <a:rPr lang="en-US" sz="1050" dirty="0">
-                <a:solidFill>
-                  <a:schemeClr val="tx1"/>
-                </a:solidFill>
-              </a:rPr>
-              <a:t>G2a′  the effect grows with the λ gap   +0.093</a:t>
-            </a:r>
-            <a:endParaRPr lang="en-US" sz="1050" dirty="0"/>
-          </a:p>
-          <a:p>
-            <a:pPr indent="0" marL="0">
-              <a:buNone/>
-            </a:pPr>
-            <a:r>
-              <a:rPr lang="en-US" sz="1050" dirty="0">
-                <a:solidFill>
-                  <a:schemeClr val="accent2"/>
-                </a:solidFill>
-              </a:rPr>
-              <a:t>G3  sorting with no news: counts against (one pair wrong-signed)</a:t>
-            </a:r>
-            <a:endParaRPr lang="en-US" sz="1050" dirty="0"/>
-          </a:p>
-        </p:txBody>
-      </p:sp>
-      <p:sp>
-        <p:nvSpPr>
-          <p:cNvPr id="7" name="stat-confirmatory tests s"/>
-          <p:cNvSpPr/>
-          <p:nvPr/>
-        </p:nvSpPr>
-        <p:spPr>
-          <a:xfrm>
-            <a:off x="6217920" y="3291840"/>
-            <a:ext cx="2468880" cy="1143000"/>
-          </a:xfrm>
-          <a:prstGeom prst="roundRect">
-            <a:avLst>
-              <a:gd name="adj" fmla="val 6400"/>
-            </a:avLst>
-          </a:prstGeom>
-          <a:solidFill>
-            <a:schemeClr val="bg2"/>
-          </a:solidFill>
-          <a:ln w="12700">
-            <a:solidFill>
-              <a:schemeClr val="bg2"/>
-            </a:solidFill>
-            <a:prstDash val="solid"/>
-          </a:ln>
-        </p:spPr>
-      </p:sp>
-      <p:sp>
-        <p:nvSpPr>
-          <p:cNvPr id="8" name="stat-big"/>
-          <p:cNvSpPr txBox="1"/>
-          <p:nvPr/>
-        </p:nvSpPr>
-        <p:spPr>
-          <a:xfrm>
-            <a:off x="6355080" y="3364992"/>
-            <a:ext cx="2194560" cy="457200"/>
-          </a:xfrm>
-          <a:prstGeom prst="rect">
-            <a:avLst/>
-          </a:prstGeom>
-          <a:noFill/>
-          <a:ln/>
-        </p:spPr>
-        <p:txBody>
-          <a:bodyPr wrap="square" lIns="0" tIns="0" rIns="0" bIns="0" rtlCol="0" anchor="ctr"/>
-          <a:lstStyle/>
-          <a:p>
-            <a:pPr indent="0" marL="0">
-              <a:buNone/>
-            </a:pPr>
-            <a:r>
-              <a:rPr lang="en-US" sz="2600" b="1" dirty="0">
-                <a:solidFill>
-                  <a:schemeClr val="accent1"/>
-                </a:solidFill>
-                <a:latin typeface="Cambria" pitchFamily="34" charset="0"/>
-                <a:ea typeface="Cambria" pitchFamily="34" charset="-122"/>
-                <a:cs typeface="Cambria" pitchFamily="34" charset="-120"/>
-              </a:rPr>
-              <a:t>3 of 4</a:t>
-            </a:r>
-            <a:endParaRPr lang="en-US" sz="2600" dirty="0"/>
-          </a:p>
-        </p:txBody>
-      </p:sp>
-      <p:sp>
-        <p:nvSpPr>
-          <p:cNvPr id="9" name="stat-label"/>
-          <p:cNvSpPr txBox="1"/>
-          <p:nvPr/>
-        </p:nvSpPr>
-        <p:spPr>
-          <a:xfrm>
-            <a:off x="6355080" y="3840480"/>
-            <a:ext cx="2194560" cy="539496"/>
-          </a:xfrm>
-          <a:prstGeom prst="rect">
-            <a:avLst/>
-          </a:prstGeom>
-          <a:noFill/>
-          <a:ln/>
-        </p:spPr>
-        <p:txBody>
-          <a:bodyPr wrap="square" lIns="0" tIns="0" rIns="0" bIns="0" rtlCol="0" anchor="t"/>
-          <a:lstStyle/>
-          <a:p>
-            <a:pPr indent="0" marL="0">
-              <a:buNone/>
-            </a:pPr>
-            <a:r>
-              <a:rPr lang="en-US" sz="1100" dirty="0">
-                <a:solidFill>
-                  <a:schemeClr val="accent3"/>
-                </a:solidFill>
-              </a:rPr>
-              <a:t>confirmatory tests support the theory, on all three versions of the bank</a:t>
-            </a:r>
-            <a:endParaRPr lang="en-US" sz="1100" dirty="0"/>
-          </a:p>
-        </p:txBody>
-      </p:sp>
       <p:sp>
         <p:nvSpPr>
           <p:cNvPr id="25" name="Slide Number Placeholder 0"/>
@@ -3409,7 +3140,7 @@
           <a:bodyPr wrap="square" lIns="0" tIns="0" rIns="0" bIns="0" rtlCol="0" anchor="ctr"/>
           <a:lstStyle/>
           <a:p>
-            <a:pPr algn="l" indent="0" marL="0">
+            <a:pPr algn="ctr" indent="0" marL="0">
               <a:buNone/>
             </a:pPr>
             <a:r>
@@ -4664,7 +4395,7 @@
           <a:bodyPr wrap="square" lIns="0" tIns="0" rIns="0" bIns="0" rtlCol="0" anchor="ctr"/>
           <a:lstStyle/>
           <a:p>
-            <a:pPr algn="l" indent="0" marL="0">
+            <a:pPr algn="ctr" indent="0" marL="0">
               <a:buNone/>
             </a:pPr>
             <a:r>
@@ -4832,7 +4563,7 @@
           <a:bodyPr wrap="square" lIns="0" tIns="0" rIns="0" bIns="0" rtlCol="0" anchor="ctr"/>
           <a:lstStyle/>
           <a:p>
-            <a:pPr algn="l" indent="0" marL="0">
+            <a:pPr algn="ctr" indent="0" marL="0">
               <a:buNone/>
             </a:pPr>
             <a:r>
@@ -5236,7 +4967,7 @@
           <a:bodyPr wrap="square" lIns="0" tIns="0" rIns="0" bIns="0" rtlCol="0" anchor="ctr"/>
           <a:lstStyle/>
           <a:p>
-            <a:pPr algn="l" indent="0" marL="0">
+            <a:pPr algn="ctr" indent="0" marL="0">
               <a:buNone/>
             </a:pPr>
             <a:r>
@@ -5440,7 +5171,7 @@
           <a:bodyPr wrap="square" lIns="0" tIns="0" rIns="0" bIns="0" rtlCol="0" anchor="ctr"/>
           <a:lstStyle/>
           <a:p>
-            <a:pPr algn="l" indent="0" marL="0">
+            <a:pPr algn="ctr" indent="0" marL="0">
               <a:buNone/>
             </a:pPr>
             <a:r>
@@ -5702,7 +5433,7 @@
           <a:bodyPr wrap="square" lIns="0" tIns="0" rIns="0" bIns="0" rtlCol="0" anchor="ctr"/>
           <a:lstStyle/>
           <a:p>
-            <a:pPr algn="l" indent="0" marL="0">
+            <a:pPr algn="ctr" indent="0" marL="0">
               <a:buNone/>
             </a:pPr>
             <a:r>
@@ -6689,7 +6420,7 @@
           <a:bodyPr wrap="square" lIns="0" tIns="0" rIns="0" bIns="0" rtlCol="0" anchor="ctr"/>
           <a:lstStyle/>
           <a:p>
-            <a:pPr algn="l" indent="0" marL="0">
+            <a:pPr algn="ctr" indent="0" marL="0">
               <a:buNone/>
             </a:pPr>
             <a:r>
@@ -6821,7 +6552,7 @@
           <a:bodyPr wrap="square" lIns="0" tIns="0" rIns="0" bIns="0" rtlCol="0" anchor="ctr"/>
           <a:lstStyle/>
           <a:p>
-            <a:pPr algn="l" indent="0" marL="0">
+            <a:pPr algn="ctr" indent="0" marL="0">
               <a:buNone/>
             </a:pPr>
             <a:r>
@@ -7665,7 +7396,7 @@
           <a:bodyPr wrap="square" lIns="0" tIns="0" rIns="0" bIns="0" rtlCol="0" anchor="ctr"/>
           <a:lstStyle/>
           <a:p>
-            <a:pPr algn="l" indent="0" marL="0">
+            <a:pPr algn="ctr" indent="0" marL="0">
               <a:buNone/>
             </a:pPr>
             <a:r>

--- a/docs/deck_2026-10-26_seminar.pptx
+++ b/docs/deck_2026-10-26_seminar.pptx
@@ -120,7 +120,7 @@
   <p:extLst>
     <p:ext uri="{521415D9-36F7-43E2-AB2F-B90AF26B5E84}">
       <p14:sectionLst xmlns:p14="http://schemas.microsoft.com/office/powerpoint/2010/main">
-        <p14:section name="Opening" id="{f74dc821-8093-4557-6100-8267c8f72c7b}">
+        <p14:section name="Opening" id="{66232072-5ce4-fc8d-724d-12034e6c9281}">
           <p14:sldIdLst>
             <p14:sldId id="256"/>
             <p14:sldId id="257"/>
@@ -130,13 +130,13 @@
             <p14:sldId id="261"/>
           </p14:sldIdLst>
         </p14:section>
-        <p14:section name="The model" id="{3dbc78c5-c894-8079-f20a-0b095a8322de}">
+        <p14:section name="The model" id="{d7cb94e2-5df4-89f5-6685-eb87c59aafa0}">
           <p14:sldIdLst>
             <p14:sldId id="262"/>
             <p14:sldId id="263"/>
           </p14:sldIdLst>
         </p14:section>
-        <p14:section name="Results" id="{52f79486-cf45-3327-b8f9-944bd37c0efd}">
+        <p14:section name="Results" id="{364aee76-b905-e268-56f7-081d18027cb5}">
           <p14:sldIdLst>
             <p14:sldId id="264"/>
             <p14:sldId id="265"/>
@@ -144,12 +144,12 @@
             <p14:sldId id="267"/>
           </p14:sldIdLst>
         </p14:section>
-        <p14:section name="Validation" id="{3ff624ca-f151-8928-2d1e-c1e0231df7af}">
+        <p14:section name="Validation" id="{997b9967-b4e6-de0c-9ffe-0857759d3860}">
           <p14:sldIdLst>
             <p14:sldId id="268"/>
           </p14:sldIdLst>
         </p14:section>
-        <p14:section name="Close" id="{ef47ef8c-0395-b0a5-0ecc-5eeaa9adb85e}">
+        <p14:section name="Close" id="{f940eb86-0f47-7546-2ea4-cc08e2c6a39a}">
           <p14:sldIdLst>
             <p14:sldId id="269"/>
           </p14:sldIdLst>
@@ -1859,7 +1859,7 @@
         <p:txBody>
           <a:bodyPr wrap="square" rtlCol="0"/>
           <a:lstStyle>
-            <a:lvl1pPr indent="0" marL="0">
+            <a:lvl1pPr algn="ctr" indent="0" marL="0">
               <a:buNone/>
               <a:defRPr lang="en-US" sz="1800" dirty="0">
                 <a:solidFill>
@@ -1869,7 +1869,7 @@
             </a:lvl1pPr>
           </a:lstStyle>
           <a:p>
-            <a:pPr indent="0" marL="0">
+            <a:pPr algn="ctr" indent="0" marL="0">
               <a:buNone/>
             </a:pPr>
             <a:endParaRPr lang="en-US" sz="1800" dirty="0"/>
@@ -2121,7 +2121,7 @@
         <p:txBody>
           <a:bodyPr wrap="square" rtlCol="0"/>
           <a:lstStyle>
-            <a:lvl1pPr indent="0" marL="0">
+            <a:lvl1pPr algn="ctr" indent="0" marL="0">
               <a:buNone/>
               <a:defRPr lang="en-US" sz="1600" dirty="0">
                 <a:solidFill>
@@ -2131,7 +2131,7 @@
             </a:lvl1pPr>
           </a:lstStyle>
           <a:p>
-            <a:pPr indent="0" marL="0">
+            <a:pPr algn="ctr" indent="0" marL="0">
               <a:buNone/>
             </a:pPr>
             <a:endParaRPr lang="en-US" sz="1600" dirty="0"/>
@@ -2549,7 +2549,7 @@
           <a:bodyPr wrap="square" lIns="0" tIns="0" rIns="0" bIns="0" rtlCol="0" anchor="t"/>
           <a:lstStyle/>
           <a:p>
-            <a:pPr indent="0" marL="0">
+            <a:pPr algn="ctr" indent="0" marL="0">
               <a:buNone/>
             </a:pPr>
             <a:r>

--- a/docs/deck_2026-10-26_seminar.pptx
+++ b/docs/deck_2026-10-26_seminar.pptx
@@ -120,7 +120,7 @@
   <p:extLst>
     <p:ext uri="{521415D9-36F7-43E2-AB2F-B90AF26B5E84}">
       <p14:sectionLst xmlns:p14="http://schemas.microsoft.com/office/powerpoint/2010/main">
-        <p14:section name="Opening" id="{66232072-5ce4-fc8d-724d-12034e6c9281}">
+        <p14:section name="Opening" id="{b3036143-0614-3c46-bf62-ec9af268fe5d}">
           <p14:sldIdLst>
             <p14:sldId id="256"/>
             <p14:sldId id="257"/>
@@ -130,13 +130,13 @@
             <p14:sldId id="261"/>
           </p14:sldIdLst>
         </p14:section>
-        <p14:section name="The model" id="{d7cb94e2-5df4-89f5-6685-eb87c59aafa0}">
+        <p14:section name="The model" id="{43417378-c602-8ba3-0a7f-452f30f7e1e7}">
           <p14:sldIdLst>
             <p14:sldId id="262"/>
             <p14:sldId id="263"/>
           </p14:sldIdLst>
         </p14:section>
-        <p14:section name="Results" id="{364aee76-b905-e268-56f7-081d18027cb5}">
+        <p14:section name="Results" id="{71db07c4-e67e-e358-943e-965b0b2daefe}">
           <p14:sldIdLst>
             <p14:sldId id="264"/>
             <p14:sldId id="265"/>
@@ -144,12 +144,12 @@
             <p14:sldId id="267"/>
           </p14:sldIdLst>
         </p14:section>
-        <p14:section name="Validation" id="{997b9967-b4e6-de0c-9ffe-0857759d3860}">
+        <p14:section name="Validation" id="{4089247c-afd4-ecb0-0708-96d26b089efc}">
           <p14:sldIdLst>
             <p14:sldId id="268"/>
           </p14:sldIdLst>
         </p14:section>
-        <p14:section name="Close" id="{f940eb86-0f47-7546-2ea4-cc08e2c6a39a}">
+        <p14:section name="Close" id="{89048555-bdaa-8ff0-84d9-d74506216e4c}">
           <p14:sldIdLst>
             <p14:sldId id="269"/>
           </p14:sldIdLst>
@@ -4976,7 +4976,7 @@
                   <a:schemeClr val="tx2"/>
                 </a:solidFill>
               </a:rPr>
-              <a:t>Variation in interpretation</a:t>
+              <a:t>Who runs? Variation in interpretation</a:t>
             </a:r>
             <a:endParaRPr lang="en-US" sz="2400" dirty="0"/>
           </a:p>

--- a/docs/deck_2026-10-26_seminar.pptx
+++ b/docs/deck_2026-10-26_seminar.pptx
@@ -120,7 +120,7 @@
   <p:extLst>
     <p:ext uri="{521415D9-36F7-43E2-AB2F-B90AF26B5E84}">
       <p14:sectionLst xmlns:p14="http://schemas.microsoft.com/office/powerpoint/2010/main">
-        <p14:section name="Opening" id="{b3036143-0614-3c46-bf62-ec9af268fe5d}">
+        <p14:section name="Opening" id="{73d3a8d4-57fe-0bbe-d4aa-2b6454c48607}">
           <p14:sldIdLst>
             <p14:sldId id="256"/>
             <p14:sldId id="257"/>
@@ -130,13 +130,13 @@
             <p14:sldId id="261"/>
           </p14:sldIdLst>
         </p14:section>
-        <p14:section name="The model" id="{43417378-c602-8ba3-0a7f-452f30f7e1e7}">
+        <p14:section name="The model" id="{d28270cd-b6b6-5513-8b00-6b6d52f7d89e}">
           <p14:sldIdLst>
             <p14:sldId id="262"/>
             <p14:sldId id="263"/>
           </p14:sldIdLst>
         </p14:section>
-        <p14:section name="Results" id="{71db07c4-e67e-e358-943e-965b0b2daefe}">
+        <p14:section name="Results" id="{e7b0b13f-a173-4d8d-40de-b16682c38755}">
           <p14:sldIdLst>
             <p14:sldId id="264"/>
             <p14:sldId id="265"/>
@@ -144,12 +144,12 @@
             <p14:sldId id="267"/>
           </p14:sldIdLst>
         </p14:section>
-        <p14:section name="Validation" id="{4089247c-afd4-ecb0-0708-96d26b089efc}">
+        <p14:section name="Validation" id="{4f732cc8-e8ee-206b-b417-45ddd17b6918}">
           <p14:sldIdLst>
             <p14:sldId id="268"/>
           </p14:sldIdLst>
         </p14:section>
-        <p14:section name="Close" id="{89048555-bdaa-8ff0-84d9-d74506216e4c}">
+        <p14:section name="Close" id="{f643f2dc-3ac9-6137-0b4a-b23a5b1347cd}">
           <p14:sldIdLst>
             <p14:sldId id="269"/>
           </p14:sldIdLst>
@@ -5450,40 +5450,13 @@
       </p:sp>
       <p:sp>
         <p:nvSpPr>
-          <p:cNvPr id="3" name="eq-card"/>
-          <p:cNvSpPr/>
-          <p:nvPr/>
-        </p:nvSpPr>
-        <p:spPr>
-          <a:xfrm>
-            <a:off x="457200" y="1051560"/>
-            <a:ext cx="8229600" cy="1143000"/>
-          </a:xfrm>
-          <a:prstGeom prst="roundRect">
-            <a:avLst>
-              <a:gd name="adj" fmla="val 6400"/>
-            </a:avLst>
-          </a:prstGeom>
-          <a:solidFill>
-            <a:schemeClr val="accent4"/>
-          </a:solidFill>
-          <a:ln w="12700">
-            <a:solidFill>
-              <a:schemeClr val="accent4"/>
-            </a:solidFill>
-            <a:prstDash val="solid"/>
-          </a:ln>
-        </p:spPr>
-      </p:sp>
-      <p:sp>
-        <p:nvSpPr>
-          <p:cNvPr id="4" name="eq"/>
+          <p:cNvPr id="3" name="eq"/>
           <p:cNvSpPr txBox="1"/>
           <p:nvPr/>
         </p:nvSpPr>
         <p:spPr>
           <a:xfrm>
-            <a:off x="640080" y="1097280"/>
+            <a:off x="640080" y="1371600"/>
             <a:ext cx="7863840" cy="685800"/>
           </a:xfrm>
           <a:prstGeom prst="rect">
@@ -5656,13 +5629,13 @@
       </p:sp>
       <p:sp>
         <p:nvSpPr>
-          <p:cNvPr id="5" name="eq-sub"/>
+          <p:cNvPr id="4" name="eq-sub"/>
           <p:cNvSpPr txBox="1"/>
           <p:nvPr/>
         </p:nvSpPr>
         <p:spPr>
           <a:xfrm>
-            <a:off x="640080" y="1783080"/>
+            <a:off x="640080" y="2103120"/>
             <a:ext cx="7863840" cy="320040"/>
           </a:xfrm>
           <a:prstGeom prst="rect">
@@ -5692,41 +5665,14 @@
       </p:sp>
       <p:sp>
         <p:nvSpPr>
-          <p:cNvPr id="6" name="term-0"/>
-          <p:cNvSpPr/>
-          <p:nvPr/>
-        </p:nvSpPr>
-        <p:spPr>
-          <a:xfrm>
-            <a:off x="457200" y="2331720"/>
-            <a:ext cx="2651760" cy="1188720"/>
-          </a:xfrm>
-          <a:prstGeom prst="roundRect">
-            <a:avLst>
-              <a:gd name="adj" fmla="val 6154"/>
-            </a:avLst>
-          </a:prstGeom>
-          <a:solidFill>
-            <a:schemeClr val="bg2"/>
-          </a:solidFill>
-          <a:ln w="12700">
-            <a:solidFill>
-              <a:schemeClr val="bg2"/>
-            </a:solidFill>
-            <a:prstDash val="solid"/>
-          </a:ln>
-        </p:spPr>
-      </p:sp>
-      <p:sp>
-        <p:nvSpPr>
-          <p:cNvPr id="7" name="term-head"/>
+          <p:cNvPr id="5" name="wedge"/>
           <p:cNvSpPr txBox="1"/>
           <p:nvPr/>
         </p:nvSpPr>
         <p:spPr>
           <a:xfrm>
-            <a:off x="594360" y="2377440"/>
-            <a:ext cx="2423160" cy="457200"/>
+            <a:off x="457200" y="3017520"/>
+            <a:ext cx="8229600" cy="777240"/>
           </a:xfrm>
           <a:prstGeom prst="rect">
             <a:avLst/>
@@ -5735,595 +5681,252 @@
           <a:ln/>
         </p:spPr>
         <p:txBody>
-          <a:bodyPr wrap="square" lIns="0" tIns="0" rIns="0" bIns="0" rtlCol="0" anchor="ctr"/>
-          <a:lstStyle/>
-          <a:p>
-            <a:pPr indent="0" marL="0">
-              <a:buNone/>
-            </a:pPr>
-            <a:r>
-              <a:rPr lang="en-US" sz="2200" i="1" dirty="0">
+          <a:bodyPr wrap="square" lIns="0" tIns="0" rIns="0" bIns="0" rtlCol="0" anchor="t"/>
+          <a:lstStyle/>
+          <a:p>
+            <a:pPr algn="ctr" indent="0" marL="0">
+              <a:buNone/>
+            </a:pPr>
+            <a:r>
+              <a:rPr lang="en-US" sz="1400" b="1" dirty="0">
+                <a:solidFill>
+                  <a:srgbClr val="EB6834"/>
+                </a:solidFill>
+              </a:rPr>
+              <a:t>Individualists </a:t>
+            </a:r>
+            <a:pPr algn="ctr" indent="0" marL="0">
+              <a:buNone/>
+            </a:pPr>
+            <a:r>
+              <a:rPr lang="en-US" sz="1400" dirty="0">
+                <a:solidFill>
+                  <a:schemeClr val="tx1"/>
+                </a:solidFill>
+              </a:rPr>
+              <a:t>λ</a:t>
+            </a:r>
+            <a:pPr algn="ctr" indent="0" marL="0">
+              <a:buNone/>
+            </a:pPr>
+            <a:r>
+              <a:rPr lang="en-US" sz="1400" baseline="-40000" dirty="0">
+                <a:solidFill>
+                  <a:schemeClr val="tx1"/>
+                </a:solidFill>
+              </a:rPr>
+              <a:t>I</a:t>
+            </a:r>
+            <a:pPr algn="ctr" indent="0" marL="0">
+              <a:buNone/>
+            </a:pPr>
+            <a:r>
+              <a:rPr lang="en-US" sz="1400" dirty="0">
+                <a:solidFill>
+                  <a:schemeClr val="tx1"/>
+                </a:solidFill>
+              </a:rPr>
+              <a:t>  &lt;  λ</a:t>
+            </a:r>
+            <a:pPr algn="ctr" indent="0" marL="0">
+              <a:buNone/>
+            </a:pPr>
+            <a:r>
+              <a:rPr lang="en-US" sz="1400" baseline="-40000" dirty="0">
+                <a:solidFill>
+                  <a:schemeClr val="tx1"/>
+                </a:solidFill>
+              </a:rPr>
+              <a:t>C</a:t>
+            </a:r>
+            <a:pPr algn="ctr" indent="0" marL="0">
+              <a:buNone/>
+            </a:pPr>
+            <a:r>
+              <a:rPr lang="en-US" sz="1400" b="1" dirty="0">
+                <a:solidFill>
+                  <a:srgbClr val="2A78D6"/>
+                </a:solidFill>
+              </a:rPr>
+              <a:t> collectivists</a:t>
+            </a:r>
+            <a:pPr algn="ctr" indent="0" marL="0">
+              <a:buNone/>
+            </a:pPr>
+            <a:r>
+              <a:rPr lang="en-US" sz="1400" dirty="0">
+                <a:solidFill>
+                  <a:schemeClr val="tx1"/>
+                </a:solidFill>
+              </a:rPr>
+              <a:t>.  Same two signals, different estimates: </a:t>
+            </a:r>
+            <a:pPr algn="ctr" indent="0" marL="0">
+              <a:buNone/>
+            </a:pPr>
+            <a:r>
+              <a:rPr lang="en-US" sz="1400" i="1" dirty="0">
+                <a:solidFill>
+                  <a:schemeClr val="tx1"/>
+                </a:solidFill>
+              </a:rPr>
+              <a:t>ŝ</a:t>
+            </a:r>
+            <a:pPr algn="ctr" indent="0" marL="0">
+              <a:buNone/>
+            </a:pPr>
+            <a:r>
+              <a:rPr lang="en-US" sz="1400" baseline="-40000" dirty="0">
+                <a:solidFill>
+                  <a:schemeClr val="tx1"/>
+                </a:solidFill>
+              </a:rPr>
+              <a:t>I</a:t>
+            </a:r>
+            <a:pPr algn="ctr" indent="0" marL="0">
+              <a:buNone/>
+            </a:pPr>
+            <a:r>
+              <a:rPr lang="en-US" sz="1400" dirty="0">
+                <a:solidFill>
+                  <a:schemeClr val="tx1"/>
+                </a:solidFill>
+              </a:rPr>
+              <a:t> − </a:t>
+            </a:r>
+            <a:pPr algn="ctr" indent="0" marL="0">
+              <a:buNone/>
+            </a:pPr>
+            <a:r>
+              <a:rPr lang="en-US" sz="1400" i="1" dirty="0">
+                <a:solidFill>
+                  <a:schemeClr val="tx1"/>
+                </a:solidFill>
+              </a:rPr>
+              <a:t>ŝ</a:t>
+            </a:r>
+            <a:pPr algn="ctr" indent="0" marL="0">
+              <a:buNone/>
+            </a:pPr>
+            <a:r>
+              <a:rPr lang="en-US" sz="1400" baseline="-40000" dirty="0">
+                <a:solidFill>
+                  <a:schemeClr val="tx1"/>
+                </a:solidFill>
+              </a:rPr>
+              <a:t>C</a:t>
+            </a:r>
+            <a:pPr algn="ctr" indent="0" marL="0">
+              <a:buNone/>
+            </a:pPr>
+            <a:r>
+              <a:rPr lang="en-US" sz="1400" dirty="0">
+                <a:solidFill>
+                  <a:schemeClr val="tx1"/>
+                </a:solidFill>
+              </a:rPr>
+              <a:t> = (λ</a:t>
+            </a:r>
+            <a:pPr algn="ctr" indent="0" marL="0">
+              <a:buNone/>
+            </a:pPr>
+            <a:r>
+              <a:rPr lang="en-US" sz="1400" baseline="-40000" dirty="0">
+                <a:solidFill>
+                  <a:schemeClr val="tx1"/>
+                </a:solidFill>
+              </a:rPr>
+              <a:t>C</a:t>
+            </a:r>
+            <a:pPr algn="ctr" indent="0" marL="0">
+              <a:buNone/>
+            </a:pPr>
+            <a:r>
+              <a:rPr lang="en-US" sz="1400" dirty="0">
+                <a:solidFill>
+                  <a:schemeClr val="tx1"/>
+                </a:solidFill>
+              </a:rPr>
+              <a:t> − λ</a:t>
+            </a:r>
+            <a:pPr algn="ctr" indent="0" marL="0">
+              <a:buNone/>
+            </a:pPr>
+            <a:r>
+              <a:rPr lang="en-US" sz="1400" baseline="-40000" dirty="0">
+                <a:solidFill>
+                  <a:schemeClr val="tx1"/>
+                </a:solidFill>
+              </a:rPr>
+              <a:t>I</a:t>
+            </a:r>
+            <a:pPr algn="ctr" indent="0" marL="0">
+              <a:buNone/>
+            </a:pPr>
+            <a:r>
+              <a:rPr lang="en-US" sz="1400" dirty="0">
+                <a:solidFill>
+                  <a:schemeClr val="tx1"/>
+                </a:solidFill>
+              </a:rPr>
+              <a:t>)(</a:t>
+            </a:r>
+            <a:pPr algn="ctr" indent="0" marL="0">
+              <a:buNone/>
+            </a:pPr>
+            <a:r>
+              <a:rPr lang="en-US" sz="1400" i="1" dirty="0">
+                <a:solidFill>
+                  <a:schemeClr val="tx1"/>
+                </a:solidFill>
+              </a:rPr>
+              <a:t>x</a:t>
+            </a:r>
+            <a:pPr algn="ctr" indent="0" marL="0">
+              <a:buNone/>
+            </a:pPr>
+            <a:r>
+              <a:rPr lang="en-US" sz="1400" dirty="0">
+                <a:solidFill>
+                  <a:schemeClr val="tx1"/>
+                </a:solidFill>
+              </a:rPr>
+              <a:t> − </a:t>
+            </a:r>
+            <a:pPr algn="ctr" indent="0" marL="0">
+              <a:buNone/>
+            </a:pPr>
+            <a:r>
+              <a:rPr lang="en-US" sz="1400" i="1" dirty="0">
+                <a:solidFill>
+                  <a:schemeClr val="tx1"/>
+                </a:solidFill>
+              </a:rPr>
+              <a:t>y</a:t>
+            </a:r>
+            <a:pPr algn="ctr" indent="0" marL="0">
+              <a:buNone/>
+            </a:pPr>
+            <a:r>
+              <a:rPr lang="en-US" sz="1400" dirty="0">
+                <a:solidFill>
+                  <a:schemeClr val="tx1"/>
+                </a:solidFill>
+              </a:rPr>
+              <a:t>). </a:t>
+            </a:r>
+            <a:pPr algn="ctr" indent="0" marL="0">
+              <a:buNone/>
+            </a:pPr>
+            <a:r>
+              <a:rPr lang="en-US" sz="1400" b="1" dirty="0">
                 <a:solidFill>
                   <a:schemeClr val="tx2"/>
                 </a:solidFill>
-                <a:latin typeface="Cambria" pitchFamily="34" charset="0"/>
-                <a:ea typeface="Cambria" pitchFamily="34" charset="-122"/>
-                <a:cs typeface="Cambria" pitchFamily="34" charset="-120"/>
-              </a:rPr>
-              <a:t>x</a:t>
-            </a:r>
-            <a:pPr indent="0" marL="0">
-              <a:buNone/>
-            </a:pPr>
-            <a:r>
-              <a:rPr lang="en-US" sz="2200" i="1" baseline="-40000" dirty="0">
-                <a:solidFill>
-                  <a:schemeClr val="tx2"/>
-                </a:solidFill>
-                <a:latin typeface="Cambria" pitchFamily="34" charset="0"/>
-                <a:ea typeface="Cambria" pitchFamily="34" charset="-122"/>
-                <a:cs typeface="Cambria" pitchFamily="34" charset="-120"/>
-              </a:rPr>
-              <a:t>i</a:t>
-            </a:r>
-            <a:pPr indent="0" marL="0">
-              <a:buNone/>
-            </a:pPr>
-            <a:r>
-              <a:rPr lang="en-US" sz="1250" b="1" dirty="0">
-                <a:solidFill>
-                  <a:schemeClr val="tx1"/>
-                </a:solidFill>
-              </a:rPr>
-              <a:t>   what the depositor sees</a:t>
-            </a:r>
-            <a:endParaRPr lang="en-US" sz="2200" dirty="0"/>
-          </a:p>
-        </p:txBody>
-      </p:sp>
-      <p:sp>
-        <p:nvSpPr>
-          <p:cNvPr id="8" name="term-body"/>
-          <p:cNvSpPr txBox="1"/>
-          <p:nvPr/>
-        </p:nvSpPr>
-        <p:spPr>
-          <a:xfrm>
-            <a:off x="594360" y="2834640"/>
-            <a:ext cx="2423160" cy="640080"/>
-          </a:xfrm>
-          <a:prstGeom prst="rect">
-            <a:avLst/>
-          </a:prstGeom>
-          <a:noFill/>
-          <a:ln/>
-        </p:spPr>
-        <p:txBody>
-          <a:bodyPr wrap="square" lIns="0" tIns="0" rIns="0" bIns="0" rtlCol="0" anchor="t"/>
-          <a:lstStyle/>
-          <a:p>
-            <a:pPr indent="0" marL="0">
-              <a:buNone/>
-            </a:pPr>
-            <a:r>
-              <a:rPr lang="en-US" sz="1150" dirty="0">
-                <a:solidFill>
-                  <a:schemeClr val="accent3"/>
-                </a:solidFill>
-              </a:rPr>
-              <a:t>a private signal of the fundamental, one noisy draw each</a:t>
-            </a:r>
-            <a:endParaRPr lang="en-US" sz="1150" dirty="0"/>
-          </a:p>
-        </p:txBody>
-      </p:sp>
-      <p:sp>
-        <p:nvSpPr>
-          <p:cNvPr id="9" name="term-1"/>
-          <p:cNvSpPr/>
-          <p:nvPr/>
-        </p:nvSpPr>
-        <p:spPr>
-          <a:xfrm>
-            <a:off x="3246120" y="2331720"/>
-            <a:ext cx="2651760" cy="1188720"/>
-          </a:xfrm>
-          <a:prstGeom prst="roundRect">
-            <a:avLst>
-              <a:gd name="adj" fmla="val 6154"/>
-            </a:avLst>
-          </a:prstGeom>
-          <a:solidFill>
-            <a:schemeClr val="bg2"/>
-          </a:solidFill>
-          <a:ln w="12700">
-            <a:solidFill>
-              <a:schemeClr val="bg2"/>
-            </a:solidFill>
-            <a:prstDash val="solid"/>
-          </a:ln>
-        </p:spPr>
-      </p:sp>
-      <p:sp>
-        <p:nvSpPr>
-          <p:cNvPr id="10" name="term-head"/>
-          <p:cNvSpPr txBox="1"/>
-          <p:nvPr/>
-        </p:nvSpPr>
-        <p:spPr>
-          <a:xfrm>
-            <a:off x="3383280" y="2377440"/>
-            <a:ext cx="2423160" cy="457200"/>
-          </a:xfrm>
-          <a:prstGeom prst="rect">
-            <a:avLst/>
-          </a:prstGeom>
-          <a:noFill/>
-          <a:ln/>
-        </p:spPr>
-        <p:txBody>
-          <a:bodyPr wrap="square" lIns="0" tIns="0" rIns="0" bIns="0" rtlCol="0" anchor="ctr"/>
-          <a:lstStyle/>
-          <a:p>
-            <a:pPr indent="0" marL="0">
-              <a:buNone/>
-            </a:pPr>
-            <a:r>
-              <a:rPr lang="en-US" sz="2200" i="1" dirty="0">
-                <a:solidFill>
-                  <a:schemeClr val="accent3"/>
-                </a:solidFill>
-                <a:latin typeface="Cambria" pitchFamily="34" charset="0"/>
-                <a:ea typeface="Cambria" pitchFamily="34" charset="-122"/>
-                <a:cs typeface="Cambria" pitchFamily="34" charset="-120"/>
-              </a:rPr>
-              <a:t>y</a:t>
-            </a:r>
-            <a:pPr indent="0" marL="0">
-              <a:buNone/>
-            </a:pPr>
-            <a:pPr indent="0" marL="0">
-              <a:buNone/>
-            </a:pPr>
-            <a:r>
-              <a:rPr lang="en-US" sz="1250" b="1" dirty="0">
-                <a:solidFill>
-                  <a:schemeClr val="tx1"/>
-                </a:solidFill>
-              </a:rPr>
-              <a:t>   what the depositor is told</a:t>
-            </a:r>
-            <a:endParaRPr lang="en-US" sz="2200" dirty="0"/>
-          </a:p>
-        </p:txBody>
-      </p:sp>
-      <p:sp>
-        <p:nvSpPr>
-          <p:cNvPr id="11" name="term-body"/>
-          <p:cNvSpPr txBox="1"/>
-          <p:nvPr/>
-        </p:nvSpPr>
-        <p:spPr>
-          <a:xfrm>
-            <a:off x="3383280" y="2834640"/>
-            <a:ext cx="2423160" cy="640080"/>
-          </a:xfrm>
-          <a:prstGeom prst="rect">
-            <a:avLst/>
-          </a:prstGeom>
-          <a:noFill/>
-          <a:ln/>
-        </p:spPr>
-        <p:txBody>
-          <a:bodyPr wrap="square" lIns="0" tIns="0" rIns="0" bIns="0" rtlCol="0" anchor="t"/>
-          <a:lstStyle/>
-          <a:p>
-            <a:pPr indent="0" marL="0">
-              <a:buNone/>
-            </a:pPr>
-            <a:r>
-              <a:rPr lang="en-US" sz="1150" dirty="0">
-                <a:solidFill>
-                  <a:schemeClr val="accent3"/>
-                </a:solidFill>
-              </a:rPr>
-              <a:t>a public signal, common to all, which can be stale</a:t>
-            </a:r>
-            <a:endParaRPr lang="en-US" sz="1150" dirty="0"/>
-          </a:p>
-        </p:txBody>
-      </p:sp>
-      <p:sp>
-        <p:nvSpPr>
-          <p:cNvPr id="12" name="term-2"/>
-          <p:cNvSpPr/>
-          <p:nvPr/>
-        </p:nvSpPr>
-        <p:spPr>
-          <a:xfrm>
-            <a:off x="6035040" y="2331720"/>
-            <a:ext cx="2651760" cy="1188720"/>
-          </a:xfrm>
-          <a:prstGeom prst="roundRect">
-            <a:avLst>
-              <a:gd name="adj" fmla="val 6154"/>
-            </a:avLst>
-          </a:prstGeom>
-          <a:solidFill>
-            <a:schemeClr val="bg2"/>
-          </a:solidFill>
-          <a:ln w="12700">
-            <a:solidFill>
-              <a:schemeClr val="bg2"/>
-            </a:solidFill>
-            <a:prstDash val="solid"/>
-          </a:ln>
-        </p:spPr>
-      </p:sp>
-      <p:sp>
-        <p:nvSpPr>
-          <p:cNvPr id="13" name="term-head"/>
-          <p:cNvSpPr txBox="1"/>
-          <p:nvPr/>
-        </p:nvSpPr>
-        <p:spPr>
-          <a:xfrm>
-            <a:off x="6172200" y="2377440"/>
-            <a:ext cx="2423160" cy="457200"/>
-          </a:xfrm>
-          <a:prstGeom prst="rect">
-            <a:avLst/>
-          </a:prstGeom>
-          <a:noFill/>
-          <a:ln/>
-        </p:spPr>
-        <p:txBody>
-          <a:bodyPr wrap="square" lIns="0" tIns="0" rIns="0" bIns="0" rtlCol="0" anchor="ctr"/>
-          <a:lstStyle/>
-          <a:p>
-            <a:pPr indent="0" marL="0">
-              <a:buNone/>
-            </a:pPr>
-            <a:r>
-              <a:rPr lang="en-US" sz="2200" i="1" dirty="0">
-                <a:solidFill>
-                  <a:schemeClr val="accent1"/>
-                </a:solidFill>
-                <a:latin typeface="Cambria" pitchFamily="34" charset="0"/>
-                <a:ea typeface="Cambria" pitchFamily="34" charset="-122"/>
-                <a:cs typeface="Cambria" pitchFamily="34" charset="-120"/>
-              </a:rPr>
-              <a:t>λ</a:t>
-            </a:r>
-            <a:pPr indent="0" marL="0">
-              <a:buNone/>
-            </a:pPr>
-            <a:r>
-              <a:rPr lang="en-US" sz="2200" i="1" baseline="-40000" dirty="0">
-                <a:solidFill>
-                  <a:schemeClr val="accent1"/>
-                </a:solidFill>
-                <a:latin typeface="Cambria" pitchFamily="34" charset="0"/>
-                <a:ea typeface="Cambria" pitchFamily="34" charset="-122"/>
-                <a:cs typeface="Cambria" pitchFamily="34" charset="-120"/>
-              </a:rPr>
-              <a:t>i</a:t>
-            </a:r>
-            <a:pPr indent="0" marL="0">
-              <a:buNone/>
-            </a:pPr>
-            <a:r>
-              <a:rPr lang="en-US" sz="1250" b="1" dirty="0">
-                <a:solidFill>
-                  <a:schemeClr val="tx1"/>
-                </a:solidFill>
-              </a:rPr>
-              <a:t>   weight on the public line</a:t>
-            </a:r>
-            <a:endParaRPr lang="en-US" sz="2200" dirty="0"/>
-          </a:p>
-        </p:txBody>
-      </p:sp>
-      <p:sp>
-        <p:nvSpPr>
-          <p:cNvPr id="14" name="term-body"/>
-          <p:cNvSpPr txBox="1"/>
-          <p:nvPr/>
-        </p:nvSpPr>
-        <p:spPr>
-          <a:xfrm>
-            <a:off x="6172200" y="2834640"/>
-            <a:ext cx="2423160" cy="640080"/>
-          </a:xfrm>
-          <a:prstGeom prst="rect">
-            <a:avLst/>
-          </a:prstGeom>
-          <a:noFill/>
-          <a:ln/>
-        </p:spPr>
-        <p:txBody>
-          <a:bodyPr wrap="square" lIns="0" tIns="0" rIns="0" bIns="0" rtlCol="0" anchor="t"/>
-          <a:lstStyle/>
-          <a:p>
-            <a:pPr indent="0" marL="0">
-              <a:buNone/>
-            </a:pPr>
-            <a:r>
-              <a:rPr lang="en-US" sz="1150" dirty="0">
-                <a:solidFill>
-                  <a:schemeClr val="accent3"/>
-                </a:solidFill>
-              </a:rPr>
-              <a:t>a disposition set before the run; culture is its source</a:t>
-            </a:r>
-            <a:endParaRPr lang="en-US" sz="1150" dirty="0"/>
-          </a:p>
-        </p:txBody>
-      </p:sp>
-      <p:sp>
-        <p:nvSpPr>
-          <p:cNvPr id="15" name="wedge"/>
-          <p:cNvSpPr txBox="1"/>
-          <p:nvPr/>
-        </p:nvSpPr>
-        <p:spPr>
-          <a:xfrm>
-            <a:off x="457200" y="3657600"/>
-            <a:ext cx="8229600" cy="777240"/>
-          </a:xfrm>
-          <a:prstGeom prst="rect">
-            <a:avLst/>
-          </a:prstGeom>
-          <a:noFill/>
-          <a:ln/>
-        </p:spPr>
-        <p:txBody>
-          <a:bodyPr wrap="square" lIns="0" tIns="0" rIns="0" bIns="0" rtlCol="0" anchor="t"/>
-          <a:lstStyle/>
-          <a:p>
-            <a:pPr indent="0" marL="0">
-              <a:buNone/>
-            </a:pPr>
-            <a:r>
-              <a:rPr lang="en-US" sz="1300" b="1" dirty="0">
-                <a:solidFill>
-                  <a:srgbClr val="EB6834"/>
-                </a:solidFill>
-              </a:rPr>
-              <a:t>Individualists </a:t>
-            </a:r>
-            <a:pPr indent="0" marL="0">
-              <a:buNone/>
-            </a:pPr>
-            <a:r>
-              <a:rPr lang="en-US" sz="1300" dirty="0">
-                <a:solidFill>
-                  <a:schemeClr val="tx1"/>
-                </a:solidFill>
-              </a:rPr>
-              <a:t>λ</a:t>
-            </a:r>
-            <a:pPr indent="0" marL="0">
-              <a:buNone/>
-            </a:pPr>
-            <a:r>
-              <a:rPr lang="en-US" sz="1300" baseline="-40000" dirty="0">
-                <a:solidFill>
-                  <a:schemeClr val="tx1"/>
-                </a:solidFill>
-              </a:rPr>
-              <a:t>I</a:t>
-            </a:r>
-            <a:pPr indent="0" marL="0">
-              <a:buNone/>
-            </a:pPr>
-            <a:r>
-              <a:rPr lang="en-US" sz="1300" dirty="0">
-                <a:solidFill>
-                  <a:schemeClr val="tx1"/>
-                </a:solidFill>
-              </a:rPr>
-              <a:t>  &lt;  λ</a:t>
-            </a:r>
-            <a:pPr indent="0" marL="0">
-              <a:buNone/>
-            </a:pPr>
-            <a:r>
-              <a:rPr lang="en-US" sz="1300" baseline="-40000" dirty="0">
-                <a:solidFill>
-                  <a:schemeClr val="tx1"/>
-                </a:solidFill>
-              </a:rPr>
-              <a:t>C</a:t>
-            </a:r>
-            <a:pPr indent="0" marL="0">
-              <a:buNone/>
-            </a:pPr>
-            <a:r>
-              <a:rPr lang="en-US" sz="1300" b="1" dirty="0">
-                <a:solidFill>
-                  <a:srgbClr val="2A78D6"/>
-                </a:solidFill>
-              </a:rPr>
-              <a:t> collectivists</a:t>
-            </a:r>
-            <a:pPr indent="0" marL="0">
-              <a:buNone/>
-            </a:pPr>
-            <a:r>
-              <a:rPr lang="en-US" sz="1300" dirty="0">
-                <a:solidFill>
-                  <a:schemeClr val="tx1"/>
-                </a:solidFill>
-              </a:rPr>
-              <a:t>.  Same two signals, different estimates: </a:t>
-            </a:r>
-            <a:pPr indent="0" marL="0">
-              <a:buNone/>
-            </a:pPr>
-            <a:r>
-              <a:rPr lang="en-US" sz="1300" i="1" dirty="0">
-                <a:solidFill>
-                  <a:schemeClr val="tx1"/>
-                </a:solidFill>
-              </a:rPr>
-              <a:t>ŝ</a:t>
-            </a:r>
-            <a:pPr indent="0" marL="0">
-              <a:buNone/>
-            </a:pPr>
-            <a:r>
-              <a:rPr lang="en-US" sz="1300" baseline="-40000" dirty="0">
-                <a:solidFill>
-                  <a:schemeClr val="tx1"/>
-                </a:solidFill>
-              </a:rPr>
-              <a:t>I</a:t>
-            </a:r>
-            <a:pPr indent="0" marL="0">
-              <a:buNone/>
-            </a:pPr>
-            <a:r>
-              <a:rPr lang="en-US" sz="1300" dirty="0">
-                <a:solidFill>
-                  <a:schemeClr val="tx1"/>
-                </a:solidFill>
-              </a:rPr>
-              <a:t> − </a:t>
-            </a:r>
-            <a:pPr indent="0" marL="0">
-              <a:buNone/>
-            </a:pPr>
-            <a:r>
-              <a:rPr lang="en-US" sz="1300" i="1" dirty="0">
-                <a:solidFill>
-                  <a:schemeClr val="tx1"/>
-                </a:solidFill>
-              </a:rPr>
-              <a:t>ŝ</a:t>
-            </a:r>
-            <a:pPr indent="0" marL="0">
-              <a:buNone/>
-            </a:pPr>
-            <a:r>
-              <a:rPr lang="en-US" sz="1300" baseline="-40000" dirty="0">
-                <a:solidFill>
-                  <a:schemeClr val="tx1"/>
-                </a:solidFill>
-              </a:rPr>
-              <a:t>C</a:t>
-            </a:r>
-            <a:pPr indent="0" marL="0">
-              <a:buNone/>
-            </a:pPr>
-            <a:r>
-              <a:rPr lang="en-US" sz="1300" dirty="0">
-                <a:solidFill>
-                  <a:schemeClr val="tx1"/>
-                </a:solidFill>
-              </a:rPr>
-              <a:t> = (λ</a:t>
-            </a:r>
-            <a:pPr indent="0" marL="0">
-              <a:buNone/>
-            </a:pPr>
-            <a:r>
-              <a:rPr lang="en-US" sz="1300" baseline="-40000" dirty="0">
-                <a:solidFill>
-                  <a:schemeClr val="tx1"/>
-                </a:solidFill>
-              </a:rPr>
-              <a:t>C</a:t>
-            </a:r>
-            <a:pPr indent="0" marL="0">
-              <a:buNone/>
-            </a:pPr>
-            <a:r>
-              <a:rPr lang="en-US" sz="1300" dirty="0">
-                <a:solidFill>
-                  <a:schemeClr val="tx1"/>
-                </a:solidFill>
-              </a:rPr>
-              <a:t> − λ</a:t>
-            </a:r>
-            <a:pPr indent="0" marL="0">
-              <a:buNone/>
-            </a:pPr>
-            <a:r>
-              <a:rPr lang="en-US" sz="1300" baseline="-40000" dirty="0">
-                <a:solidFill>
-                  <a:schemeClr val="tx1"/>
-                </a:solidFill>
-              </a:rPr>
-              <a:t>I</a:t>
-            </a:r>
-            <a:pPr indent="0" marL="0">
-              <a:buNone/>
-            </a:pPr>
-            <a:r>
-              <a:rPr lang="en-US" sz="1300" dirty="0">
-                <a:solidFill>
-                  <a:schemeClr val="tx1"/>
-                </a:solidFill>
-              </a:rPr>
-              <a:t>)(</a:t>
-            </a:r>
-            <a:pPr indent="0" marL="0">
-              <a:buNone/>
-            </a:pPr>
-            <a:r>
-              <a:rPr lang="en-US" sz="1300" i="1" dirty="0">
-                <a:solidFill>
-                  <a:schemeClr val="tx1"/>
-                </a:solidFill>
-              </a:rPr>
-              <a:t>x</a:t>
-            </a:r>
-            <a:pPr indent="0" marL="0">
-              <a:buNone/>
-            </a:pPr>
-            <a:r>
-              <a:rPr lang="en-US" sz="1300" dirty="0">
-                <a:solidFill>
-                  <a:schemeClr val="tx1"/>
-                </a:solidFill>
-              </a:rPr>
-              <a:t> − </a:t>
-            </a:r>
-            <a:pPr indent="0" marL="0">
-              <a:buNone/>
-            </a:pPr>
-            <a:r>
-              <a:rPr lang="en-US" sz="1300" i="1" dirty="0">
-                <a:solidFill>
-                  <a:schemeClr val="tx1"/>
-                </a:solidFill>
-              </a:rPr>
-              <a:t>y</a:t>
-            </a:r>
-            <a:pPr indent="0" marL="0">
-              <a:buNone/>
-            </a:pPr>
-            <a:r>
-              <a:rPr lang="en-US" sz="1300" dirty="0">
-                <a:solidFill>
-                  <a:schemeClr val="tx1"/>
-                </a:solidFill>
-              </a:rPr>
-              <a:t>). </a:t>
-            </a:r>
-            <a:pPr indent="0" marL="0">
-              <a:buNone/>
-            </a:pPr>
-            <a:r>
-              <a:rPr lang="en-US" sz="1300" b="1" dirty="0">
-                <a:solidFill>
-                  <a:schemeClr val="tx2"/>
-                </a:solidFill>
               </a:rPr>
               <a:t>Who runs is sorted by the weight, and the order flips with the sign of the public error.</a:t>
             </a:r>
-            <a:endParaRPr lang="en-US" sz="1300" dirty="0"/>
+            <a:endParaRPr lang="en-US" sz="1400" dirty="0"/>
           </a:p>
         </p:txBody>
       </p:sp>

--- a/docs/deck_2026-10-26_seminar.pptx
+++ b/docs/deck_2026-10-26_seminar.pptx
@@ -120,7 +120,7 @@
   <p:extLst>
     <p:ext uri="{521415D9-36F7-43E2-AB2F-B90AF26B5E84}">
       <p14:sectionLst xmlns:p14="http://schemas.microsoft.com/office/powerpoint/2010/main">
-        <p14:section name="Opening" id="{73d3a8d4-57fe-0bbe-d4aa-2b6454c48607}">
+        <p14:section name="Opening" id="{323d20d6-e695-9e15-752b-5ddd667d8f45}">
           <p14:sldIdLst>
             <p14:sldId id="256"/>
             <p14:sldId id="257"/>
@@ -130,13 +130,13 @@
             <p14:sldId id="261"/>
           </p14:sldIdLst>
         </p14:section>
-        <p14:section name="The model" id="{d28270cd-b6b6-5513-8b00-6b6d52f7d89e}">
+        <p14:section name="The model" id="{6d5348b0-1b8b-fec1-10fd-5c57a3f13f00}">
           <p14:sldIdLst>
             <p14:sldId id="262"/>
             <p14:sldId id="263"/>
           </p14:sldIdLst>
         </p14:section>
-        <p14:section name="Results" id="{e7b0b13f-a173-4d8d-40de-b16682c38755}">
+        <p14:section name="Results" id="{97cfc799-ce7f-f93a-c311-a0a6d52329ae}">
           <p14:sldIdLst>
             <p14:sldId id="264"/>
             <p14:sldId id="265"/>
@@ -144,12 +144,12 @@
             <p14:sldId id="267"/>
           </p14:sldIdLst>
         </p14:section>
-        <p14:section name="Validation" id="{4f732cc8-e8ee-206b-b417-45ddd17b6918}">
+        <p14:section name="Validation" id="{dbd01375-bfb5-6f0c-ad03-c4cab584aaff}">
           <p14:sldIdLst>
             <p14:sldId id="268"/>
           </p14:sldIdLst>
         </p14:section>
-        <p14:section name="Close" id="{f643f2dc-3ac9-6137-0b4a-b23a5b1347cd}">
+        <p14:section name="Close" id="{dae37f5b-7041-83ff-1ce6-d3ac39617de2}">
           <p14:sldIdLst>
             <p14:sldId id="269"/>
           </p14:sldIdLst>
@@ -5671,8 +5671,8 @@
         </p:nvSpPr>
         <p:spPr>
           <a:xfrm>
-            <a:off x="457200" y="3017520"/>
-            <a:ext cx="8229600" cy="777240"/>
+            <a:off x="457200" y="2926080"/>
+            <a:ext cx="8229600" cy="1005840"/>
           </a:xfrm>
           <a:prstGeom prst="rect">
             <a:avLst/>
@@ -5924,7 +5924,7 @@
                   <a:schemeClr val="tx2"/>
                 </a:solidFill>
               </a:rPr>
-              <a:t>Who runs is sorted by the weight, and the order flips with the sign of the public error.</a:t>
+              <a:t>Which type runs more depends on which way the public line is wrong: too optimistic, individualists; too pessimistic, collectivists.</a:t>
             </a:r>
             <a:endParaRPr lang="en-US" sz="1400" dirty="0"/>
           </a:p>

--- a/docs/deck_2026-10-26_seminar.pptx
+++ b/docs/deck_2026-10-26_seminar.pptx
@@ -120,7 +120,7 @@
   <p:extLst>
     <p:ext uri="{521415D9-36F7-43E2-AB2F-B90AF26B5E84}">
       <p14:sectionLst xmlns:p14="http://schemas.microsoft.com/office/powerpoint/2010/main">
-        <p14:section name="Opening" id="{323d20d6-e695-9e15-752b-5ddd667d8f45}">
+        <p14:section name="Opening" id="{e8d106ef-29f7-f7f3-a2b9-524ca082942b}">
           <p14:sldIdLst>
             <p14:sldId id="256"/>
             <p14:sldId id="257"/>
@@ -130,13 +130,13 @@
             <p14:sldId id="261"/>
           </p14:sldIdLst>
         </p14:section>
-        <p14:section name="The model" id="{6d5348b0-1b8b-fec1-10fd-5c57a3f13f00}">
+        <p14:section name="The model" id="{9b56c753-34b1-43c1-d0c9-371c72d9d2a8}">
           <p14:sldIdLst>
             <p14:sldId id="262"/>
             <p14:sldId id="263"/>
           </p14:sldIdLst>
         </p14:section>
-        <p14:section name="Results" id="{97cfc799-ce7f-f93a-c311-a0a6d52329ae}">
+        <p14:section name="Results" id="{ad2fb228-debd-565c-9452-6bdc6685c404}">
           <p14:sldIdLst>
             <p14:sldId id="264"/>
             <p14:sldId id="265"/>
@@ -144,12 +144,12 @@
             <p14:sldId id="267"/>
           </p14:sldIdLst>
         </p14:section>
-        <p14:section name="Validation" id="{dbd01375-bfb5-6f0c-ad03-c4cab584aaff}">
+        <p14:section name="Validation" id="{f1c3482c-3ea1-8f51-0634-0281b6ee2845}">
           <p14:sldIdLst>
             <p14:sldId id="268"/>
           </p14:sldIdLst>
         </p14:section>
-        <p14:section name="Close" id="{dae37f5b-7041-83ff-1ce6-d3ac39617de2}">
+        <p14:section name="Close" id="{77450113-6f20-144f-7834-f8030bbf41bf}">
           <p14:sldIdLst>
             <p14:sldId id="269"/>
           </p14:sldIdLst>
@@ -5456,7 +5456,7 @@
         </p:nvSpPr>
         <p:spPr>
           <a:xfrm>
-            <a:off x="640080" y="1371600"/>
+            <a:off x="640080" y="1097280"/>
             <a:ext cx="7863840" cy="685800"/>
           </a:xfrm>
           <a:prstGeom prst="rect">
@@ -5635,7 +5635,7 @@
         </p:nvSpPr>
         <p:spPr>
           <a:xfrm>
-            <a:off x="640080" y="2103120"/>
+            <a:off x="640080" y="1828800"/>
             <a:ext cx="7863840" cy="320040"/>
           </a:xfrm>
           <a:prstGeom prst="rect">
@@ -5665,14 +5665,14 @@
       </p:sp>
       <p:sp>
         <p:nvSpPr>
-          <p:cNvPr id="5" name="wedge"/>
+          <p:cNvPr id="5" name="types"/>
           <p:cNvSpPr txBox="1"/>
           <p:nvPr/>
         </p:nvSpPr>
         <p:spPr>
           <a:xfrm>
-            <a:off x="457200" y="2926080"/>
-            <a:ext cx="8229600" cy="1005840"/>
+            <a:off x="457200" y="2286000"/>
+            <a:ext cx="8229600" cy="411480"/>
           </a:xfrm>
           <a:prstGeom prst="rect">
             <a:avLst/>
@@ -5681,14 +5681,14 @@
           <a:ln/>
         </p:spPr>
         <p:txBody>
-          <a:bodyPr wrap="square" lIns="0" tIns="0" rIns="0" bIns="0" rtlCol="0" anchor="t"/>
+          <a:bodyPr wrap="square" lIns="0" tIns="0" rIns="0" bIns="0" rtlCol="0" anchor="ctr"/>
           <a:lstStyle/>
           <a:p>
             <a:pPr algn="ctr" indent="0" marL="0">
               <a:buNone/>
             </a:pPr>
             <a:r>
-              <a:rPr lang="en-US" sz="1400" b="1" dirty="0">
+              <a:rPr lang="en-US" sz="1600" b="1" dirty="0">
                 <a:solidFill>
                   <a:srgbClr val="EB6834"/>
                 </a:solidFill>
@@ -5699,7 +5699,7 @@
               <a:buNone/>
             </a:pPr>
             <a:r>
-              <a:rPr lang="en-US" sz="1400" dirty="0">
+              <a:rPr lang="en-US" sz="1600" dirty="0">
                 <a:solidFill>
                   <a:schemeClr val="tx1"/>
                 </a:solidFill>
@@ -5710,7 +5710,7 @@
               <a:buNone/>
             </a:pPr>
             <a:r>
-              <a:rPr lang="en-US" sz="1400" baseline="-40000" dirty="0">
+              <a:rPr lang="en-US" sz="1600" baseline="-40000" dirty="0">
                 <a:solidFill>
                   <a:schemeClr val="tx1"/>
                 </a:solidFill>
@@ -5721,7 +5721,7 @@
               <a:buNone/>
             </a:pPr>
             <a:r>
-              <a:rPr lang="en-US" sz="1400" dirty="0">
+              <a:rPr lang="en-US" sz="1600" dirty="0">
                 <a:solidFill>
                   <a:schemeClr val="tx1"/>
                 </a:solidFill>
@@ -5732,7 +5732,7 @@
               <a:buNone/>
             </a:pPr>
             <a:r>
-              <a:rPr lang="en-US" sz="1400" baseline="-40000" dirty="0">
+              <a:rPr lang="en-US" sz="1600" baseline="-40000" dirty="0">
                 <a:solidFill>
                   <a:schemeClr val="tx1"/>
                 </a:solidFill>
@@ -5743,32 +5743,91 @@
               <a:buNone/>
             </a:pPr>
             <a:r>
-              <a:rPr lang="en-US" sz="1400" b="1" dirty="0">
+              <a:rPr lang="en-US" sz="1600" b="1" dirty="0">
                 <a:solidFill>
                   <a:srgbClr val="2A78D6"/>
                 </a:solidFill>
               </a:rPr>
               <a:t> collectivists</a:t>
             </a:r>
+            <a:endParaRPr lang="en-US" sz="1600" dirty="0"/>
+          </a:p>
+        </p:txBody>
+      </p:sp>
+      <p:sp>
+        <p:nvSpPr>
+          <p:cNvPr id="6" name="eq2"/>
+          <p:cNvSpPr txBox="1"/>
+          <p:nvPr/>
+        </p:nvSpPr>
+        <p:spPr>
+          <a:xfrm>
+            <a:off x="640080" y="2834640"/>
+            <a:ext cx="7863840" cy="685800"/>
+          </a:xfrm>
+          <a:prstGeom prst="rect">
+            <a:avLst/>
+          </a:prstGeom>
+          <a:noFill/>
+          <a:ln/>
+        </p:spPr>
+        <p:txBody>
+          <a:bodyPr wrap="square" lIns="0" tIns="0" rIns="0" bIns="0" rtlCol="0" anchor="ctr"/>
+          <a:lstStyle/>
+          <a:p>
             <a:pPr algn="ctr" indent="0" marL="0">
               <a:buNone/>
             </a:pPr>
             <a:r>
-              <a:rPr lang="en-US" sz="1400" dirty="0">
-                <a:solidFill>
-                  <a:schemeClr val="tx1"/>
-                </a:solidFill>
-              </a:rPr>
-              <a:t>.  Same two signals, different estimates: </a:t>
+              <a:rPr lang="en-US" sz="3000" i="1" dirty="0">
+                <a:solidFill>
+                  <a:schemeClr val="tx2"/>
+                </a:solidFill>
+                <a:latin typeface="Cambria" pitchFamily="34" charset="0"/>
+                <a:ea typeface="Cambria" pitchFamily="34" charset="-122"/>
+                <a:cs typeface="Cambria" pitchFamily="34" charset="-120"/>
+              </a:rPr>
+              <a:t>ŝ</a:t>
             </a:r>
             <a:pPr algn="ctr" indent="0" marL="0">
               <a:buNone/>
             </a:pPr>
             <a:r>
-              <a:rPr lang="en-US" sz="1400" i="1" dirty="0">
-                <a:solidFill>
-                  <a:schemeClr val="tx1"/>
-                </a:solidFill>
+              <a:rPr lang="en-US" sz="3000" baseline="-40000" dirty="0">
+                <a:solidFill>
+                  <a:schemeClr val="tx2"/>
+                </a:solidFill>
+                <a:latin typeface="Cambria" pitchFamily="34" charset="0"/>
+                <a:ea typeface="Cambria" pitchFamily="34" charset="-122"/>
+                <a:cs typeface="Cambria" pitchFamily="34" charset="-120"/>
+              </a:rPr>
+              <a:t>I</a:t>
+            </a:r>
+            <a:pPr algn="ctr" indent="0" marL="0">
+              <a:buNone/>
+            </a:pPr>
+            <a:r>
+              <a:rPr lang="en-US" sz="3000" dirty="0">
+                <a:solidFill>
+                  <a:schemeClr val="tx2"/>
+                </a:solidFill>
+                <a:latin typeface="Cambria" pitchFamily="34" charset="0"/>
+                <a:ea typeface="Cambria" pitchFamily="34" charset="-122"/>
+                <a:cs typeface="Cambria" pitchFamily="34" charset="-120"/>
+              </a:rPr>
+              <a:t>  −  </a:t>
+            </a:r>
+            <a:pPr algn="ctr" indent="0" marL="0">
+              <a:buNone/>
+            </a:pPr>
+            <a:r>
+              <a:rPr lang="en-US" sz="3000" i="1" dirty="0">
+                <a:solidFill>
+                  <a:schemeClr val="tx2"/>
+                </a:solidFill>
+                <a:latin typeface="Cambria" pitchFamily="34" charset="0"/>
+                <a:ea typeface="Cambria" pitchFamily="34" charset="-122"/>
+                <a:cs typeface="Cambria" pitchFamily="34" charset="-120"/>
               </a:rPr>
               <a:t>ŝ</a:t>
             </a:r>
@@ -5776,10 +5835,69 @@
               <a:buNone/>
             </a:pPr>
             <a:r>
-              <a:rPr lang="en-US" sz="1400" baseline="-40000" dirty="0">
-                <a:solidFill>
-                  <a:schemeClr val="tx1"/>
-                </a:solidFill>
+              <a:rPr lang="en-US" sz="3000" baseline="-40000" dirty="0">
+                <a:solidFill>
+                  <a:schemeClr val="tx2"/>
+                </a:solidFill>
+                <a:latin typeface="Cambria" pitchFamily="34" charset="0"/>
+                <a:ea typeface="Cambria" pitchFamily="34" charset="-122"/>
+                <a:cs typeface="Cambria" pitchFamily="34" charset="-120"/>
+              </a:rPr>
+              <a:t>C</a:t>
+            </a:r>
+            <a:pPr algn="ctr" indent="0" marL="0">
+              <a:buNone/>
+            </a:pPr>
+            <a:r>
+              <a:rPr lang="en-US" sz="3000" dirty="0">
+                <a:solidFill>
+                  <a:schemeClr val="tx2"/>
+                </a:solidFill>
+                <a:latin typeface="Cambria" pitchFamily="34" charset="0"/>
+                <a:ea typeface="Cambria" pitchFamily="34" charset="-122"/>
+                <a:cs typeface="Cambria" pitchFamily="34" charset="-120"/>
+              </a:rPr>
+              <a:t>  =  (λ</a:t>
+            </a:r>
+            <a:pPr algn="ctr" indent="0" marL="0">
+              <a:buNone/>
+            </a:pPr>
+            <a:r>
+              <a:rPr lang="en-US" sz="3000" baseline="-40000" dirty="0">
+                <a:solidFill>
+                  <a:schemeClr val="tx2"/>
+                </a:solidFill>
+                <a:latin typeface="Cambria" pitchFamily="34" charset="0"/>
+                <a:ea typeface="Cambria" pitchFamily="34" charset="-122"/>
+                <a:cs typeface="Cambria" pitchFamily="34" charset="-120"/>
+              </a:rPr>
+              <a:t>C</a:t>
+            </a:r>
+            <a:pPr algn="ctr" indent="0" marL="0">
+              <a:buNone/>
+            </a:pPr>
+            <a:r>
+              <a:rPr lang="en-US" sz="3000" dirty="0">
+                <a:solidFill>
+                  <a:schemeClr val="tx2"/>
+                </a:solidFill>
+                <a:latin typeface="Cambria" pitchFamily="34" charset="0"/>
+                <a:ea typeface="Cambria" pitchFamily="34" charset="-122"/>
+                <a:cs typeface="Cambria" pitchFamily="34" charset="-120"/>
+              </a:rPr>
+              <a:t> − λ</a:t>
+            </a:r>
+            <a:pPr algn="ctr" indent="0" marL="0">
+              <a:buNone/>
+            </a:pPr>
+            <a:r>
+              <a:rPr lang="en-US" sz="3000" baseline="-40000" dirty="0">
+                <a:solidFill>
+                  <a:schemeClr val="tx2"/>
+                </a:solidFill>
+                <a:latin typeface="Cambria" pitchFamily="34" charset="0"/>
+                <a:ea typeface="Cambria" pitchFamily="34" charset="-122"/>
+                <a:cs typeface="Cambria" pitchFamily="34" charset="-120"/>
               </a:rPr>
               <a:t>I</a:t>
             </a:r>
@@ -5787,10 +5905,41 @@
               <a:buNone/>
             </a:pPr>
             <a:r>
-              <a:rPr lang="en-US" sz="1400" dirty="0">
-                <a:solidFill>
-                  <a:schemeClr val="tx1"/>
-                </a:solidFill>
+              <a:rPr lang="en-US" sz="3000" dirty="0">
+                <a:solidFill>
+                  <a:schemeClr val="tx2"/>
+                </a:solidFill>
+                <a:latin typeface="Cambria" pitchFamily="34" charset="0"/>
+                <a:ea typeface="Cambria" pitchFamily="34" charset="-122"/>
+                <a:cs typeface="Cambria" pitchFamily="34" charset="-120"/>
+              </a:rPr>
+              <a:t>) · (</a:t>
+            </a:r>
+            <a:pPr algn="ctr" indent="0" marL="0">
+              <a:buNone/>
+            </a:pPr>
+            <a:r>
+              <a:rPr lang="en-US" sz="3000" i="1" dirty="0">
+                <a:solidFill>
+                  <a:schemeClr val="tx2"/>
+                </a:solidFill>
+                <a:latin typeface="Cambria" pitchFamily="34" charset="0"/>
+                <a:ea typeface="Cambria" pitchFamily="34" charset="-122"/>
+                <a:cs typeface="Cambria" pitchFamily="34" charset="-120"/>
+              </a:rPr>
+              <a:t>x</a:t>
+            </a:r>
+            <a:pPr algn="ctr" indent="0" marL="0">
+              <a:buNone/>
+            </a:pPr>
+            <a:r>
+              <a:rPr lang="en-US" sz="3000" dirty="0">
+                <a:solidFill>
+                  <a:schemeClr val="tx2"/>
+                </a:solidFill>
+                <a:latin typeface="Cambria" pitchFamily="34" charset="0"/>
+                <a:ea typeface="Cambria" pitchFamily="34" charset="-122"/>
+                <a:cs typeface="Cambria" pitchFamily="34" charset="-120"/>
               </a:rPr>
               <a:t> − </a:t>
             </a:r>
@@ -5798,135 +5947,67 @@
               <a:buNone/>
             </a:pPr>
             <a:r>
-              <a:rPr lang="en-US" sz="1400" i="1" dirty="0">
-                <a:solidFill>
-                  <a:schemeClr val="tx1"/>
-                </a:solidFill>
-              </a:rPr>
-              <a:t>ŝ</a:t>
+              <a:rPr lang="en-US" sz="3000" i="1" dirty="0">
+                <a:solidFill>
+                  <a:schemeClr val="tx2"/>
+                </a:solidFill>
+                <a:latin typeface="Cambria" pitchFamily="34" charset="0"/>
+                <a:ea typeface="Cambria" pitchFamily="34" charset="-122"/>
+                <a:cs typeface="Cambria" pitchFamily="34" charset="-120"/>
+              </a:rPr>
+              <a:t>y</a:t>
             </a:r>
             <a:pPr algn="ctr" indent="0" marL="0">
               <a:buNone/>
             </a:pPr>
             <a:r>
-              <a:rPr lang="en-US" sz="1400" baseline="-40000" dirty="0">
-                <a:solidFill>
-                  <a:schemeClr val="tx1"/>
-                </a:solidFill>
-              </a:rPr>
-              <a:t>C</a:t>
-            </a:r>
+              <a:rPr lang="en-US" sz="3000" dirty="0">
+                <a:solidFill>
+                  <a:schemeClr val="tx2"/>
+                </a:solidFill>
+                <a:latin typeface="Cambria" pitchFamily="34" charset="0"/>
+                <a:ea typeface="Cambria" pitchFamily="34" charset="-122"/>
+                <a:cs typeface="Cambria" pitchFamily="34" charset="-120"/>
+              </a:rPr>
+              <a:t>)</a:t>
+            </a:r>
+            <a:endParaRPr lang="en-US" sz="3000" dirty="0"/>
+          </a:p>
+        </p:txBody>
+      </p:sp>
+      <p:sp>
+        <p:nvSpPr>
+          <p:cNvPr id="7" name="eq2-sub"/>
+          <p:cNvSpPr txBox="1"/>
+          <p:nvPr/>
+        </p:nvSpPr>
+        <p:spPr>
+          <a:xfrm>
+            <a:off x="640080" y="3566160"/>
+            <a:ext cx="7863840" cy="320040"/>
+          </a:xfrm>
+          <a:prstGeom prst="rect">
+            <a:avLst/>
+          </a:prstGeom>
+          <a:noFill/>
+          <a:ln/>
+        </p:spPr>
+        <p:txBody>
+          <a:bodyPr wrap="square" lIns="0" tIns="0" rIns="0" bIns="0" rtlCol="0" anchor="ctr"/>
+          <a:lstStyle/>
+          <a:p>
             <a:pPr algn="ctr" indent="0" marL="0">
               <a:buNone/>
             </a:pPr>
             <a:r>
-              <a:rPr lang="en-US" sz="1400" dirty="0">
-                <a:solidFill>
-                  <a:schemeClr val="tx1"/>
-                </a:solidFill>
-              </a:rPr>
-              <a:t> = (λ</a:t>
-            </a:r>
-            <a:pPr algn="ctr" indent="0" marL="0">
-              <a:buNone/>
-            </a:pPr>
-            <a:r>
-              <a:rPr lang="en-US" sz="1400" baseline="-40000" dirty="0">
-                <a:solidFill>
-                  <a:schemeClr val="tx1"/>
-                </a:solidFill>
-              </a:rPr>
-              <a:t>C</a:t>
-            </a:r>
-            <a:pPr algn="ctr" indent="0" marL="0">
-              <a:buNone/>
-            </a:pPr>
-            <a:r>
-              <a:rPr lang="en-US" sz="1400" dirty="0">
-                <a:solidFill>
-                  <a:schemeClr val="tx1"/>
-                </a:solidFill>
-              </a:rPr>
-              <a:t> − λ</a:t>
-            </a:r>
-            <a:pPr algn="ctr" indent="0" marL="0">
-              <a:buNone/>
-            </a:pPr>
-            <a:r>
-              <a:rPr lang="en-US" sz="1400" baseline="-40000" dirty="0">
-                <a:solidFill>
-                  <a:schemeClr val="tx1"/>
-                </a:solidFill>
-              </a:rPr>
-              <a:t>I</a:t>
-            </a:r>
-            <a:pPr algn="ctr" indent="0" marL="0">
-              <a:buNone/>
-            </a:pPr>
-            <a:r>
-              <a:rPr lang="en-US" sz="1400" dirty="0">
-                <a:solidFill>
-                  <a:schemeClr val="tx1"/>
-                </a:solidFill>
-              </a:rPr>
-              <a:t>)(</a:t>
-            </a:r>
-            <a:pPr algn="ctr" indent="0" marL="0">
-              <a:buNone/>
-            </a:pPr>
-            <a:r>
-              <a:rPr lang="en-US" sz="1400" i="1" dirty="0">
-                <a:solidFill>
-                  <a:schemeClr val="tx1"/>
-                </a:solidFill>
-              </a:rPr>
-              <a:t>x</a:t>
-            </a:r>
-            <a:pPr algn="ctr" indent="0" marL="0">
-              <a:buNone/>
-            </a:pPr>
-            <a:r>
-              <a:rPr lang="en-US" sz="1400" dirty="0">
-                <a:solidFill>
-                  <a:schemeClr val="tx1"/>
-                </a:solidFill>
-              </a:rPr>
-              <a:t> − </a:t>
-            </a:r>
-            <a:pPr algn="ctr" indent="0" marL="0">
-              <a:buNone/>
-            </a:pPr>
-            <a:r>
-              <a:rPr lang="en-US" sz="1400" i="1" dirty="0">
-                <a:solidFill>
-                  <a:schemeClr val="tx1"/>
-                </a:solidFill>
-              </a:rPr>
-              <a:t>y</a:t>
-            </a:r>
-            <a:pPr algn="ctr" indent="0" marL="0">
-              <a:buNone/>
-            </a:pPr>
-            <a:r>
-              <a:rPr lang="en-US" sz="1400" dirty="0">
-                <a:solidFill>
-                  <a:schemeClr val="tx1"/>
-                </a:solidFill>
-              </a:rPr>
-              <a:t>). </a:t>
-            </a:r>
-            <a:pPr algn="ctr" indent="0" marL="0">
-              <a:buNone/>
-            </a:pPr>
-            <a:r>
-              <a:rPr lang="en-US" sz="1400" b="1" dirty="0">
-                <a:solidFill>
-                  <a:schemeClr val="tx2"/>
-                </a:solidFill>
-              </a:rPr>
-              <a:t>Which type runs more depends on which way the public line is wrong: too optimistic, individualists; too pessimistic, collectivists.</a:t>
-            </a:r>
-            <a:endParaRPr lang="en-US" sz="1400" dirty="0"/>
+              <a:rPr lang="en-US" sz="1200" i="1" dirty="0">
+                <a:solidFill>
+                  <a:schemeClr val="accent3"/>
+                </a:solidFill>
+              </a:rPr>
+              <a:t>same two signals, different estimates</a:t>
+            </a:r>
+            <a:endParaRPr lang="en-US" sz="1200" dirty="0"/>
           </a:p>
         </p:txBody>
       </p:sp>

--- a/docs/deck_2026-10-26_seminar.pptx
+++ b/docs/deck_2026-10-26_seminar.pptx
@@ -120,7 +120,7 @@
   <p:extLst>
     <p:ext uri="{521415D9-36F7-43E2-AB2F-B90AF26B5E84}">
       <p14:sectionLst xmlns:p14="http://schemas.microsoft.com/office/powerpoint/2010/main">
-        <p14:section name="Opening" id="{e8d106ef-29f7-f7f3-a2b9-524ca082942b}">
+        <p14:section name="Opening" id="{49df280b-01d8-0f12-4d4d-7672fd3be63a}">
           <p14:sldIdLst>
             <p14:sldId id="256"/>
             <p14:sldId id="257"/>
@@ -130,13 +130,13 @@
             <p14:sldId id="261"/>
           </p14:sldIdLst>
         </p14:section>
-        <p14:section name="The model" id="{9b56c753-34b1-43c1-d0c9-371c72d9d2a8}">
+        <p14:section name="The model" id="{591384eb-cd13-34df-b1d7-096e405a2b84}">
           <p14:sldIdLst>
             <p14:sldId id="262"/>
             <p14:sldId id="263"/>
           </p14:sldIdLst>
         </p14:section>
-        <p14:section name="Results" id="{ad2fb228-debd-565c-9452-6bdc6685c404}">
+        <p14:section name="Results" id="{3422793d-8c54-fc48-2ab6-4bcb7c212aa3}">
           <p14:sldIdLst>
             <p14:sldId id="264"/>
             <p14:sldId id="265"/>
@@ -144,12 +144,12 @@
             <p14:sldId id="267"/>
           </p14:sldIdLst>
         </p14:section>
-        <p14:section name="Validation" id="{f1c3482c-3ea1-8f51-0634-0281b6ee2845}">
+        <p14:section name="Validation" id="{82488de2-729d-546c-d210-319fb61ce12e}">
           <p14:sldIdLst>
             <p14:sldId id="268"/>
           </p14:sldIdLst>
         </p14:section>
-        <p14:section name="Close" id="{77450113-6f20-144f-7834-f8030bbf41bf}">
+        <p14:section name="Close" id="{64a6d4dd-9fe1-9f16-e9f5-8c8c2d898f39}">
           <p14:sldIdLst>
             <p14:sldId id="269"/>
           </p14:sldIdLst>
@@ -5456,7 +5456,7 @@
         </p:nvSpPr>
         <p:spPr>
           <a:xfrm>
-            <a:off x="640080" y="1097280"/>
+            <a:off x="640080" y="1234440"/>
             <a:ext cx="7863840" cy="685800"/>
           </a:xfrm>
           <a:prstGeom prst="rect">
@@ -5629,14 +5629,14 @@
       </p:sp>
       <p:sp>
         <p:nvSpPr>
-          <p:cNvPr id="4" name="eq-sub"/>
+          <p:cNvPr id="4" name="types"/>
           <p:cNvSpPr txBox="1"/>
           <p:nvPr/>
         </p:nvSpPr>
         <p:spPr>
           <a:xfrm>
-            <a:off x="640080" y="1828800"/>
-            <a:ext cx="7863840" cy="320040"/>
+            <a:off x="457200" y="2240280"/>
+            <a:ext cx="8229600" cy="685800"/>
           </a:xfrm>
           <a:prstGeom prst="rect">
             <a:avLst/>
@@ -5652,148 +5652,21 @@
               <a:buNone/>
             </a:pPr>
             <a:r>
-              <a:rPr lang="en-US" sz="1200" i="1" dirty="0">
-                <a:solidFill>
-                  <a:schemeClr val="accent3"/>
-                </a:solidFill>
-              </a:rPr>
-              <a:t>the depositor’s estimate of the bank, compared with a threshold: run if it falls below</a:t>
-            </a:r>
-            <a:endParaRPr lang="en-US" sz="1200" dirty="0"/>
-          </a:p>
-        </p:txBody>
-      </p:sp>
-      <p:sp>
-        <p:nvSpPr>
-          <p:cNvPr id="5" name="types"/>
-          <p:cNvSpPr txBox="1"/>
-          <p:nvPr/>
-        </p:nvSpPr>
-        <p:spPr>
-          <a:xfrm>
-            <a:off x="457200" y="2286000"/>
-            <a:ext cx="8229600" cy="411480"/>
-          </a:xfrm>
-          <a:prstGeom prst="rect">
-            <a:avLst/>
-          </a:prstGeom>
-          <a:noFill/>
-          <a:ln/>
-        </p:spPr>
-        <p:txBody>
-          <a:bodyPr wrap="square" lIns="0" tIns="0" rIns="0" bIns="0" rtlCol="0" anchor="ctr"/>
-          <a:lstStyle/>
-          <a:p>
-            <a:pPr algn="ctr" indent="0" marL="0">
-              <a:buNone/>
-            </a:pPr>
-            <a:r>
-              <a:rPr lang="en-US" sz="1600" b="1" dirty="0">
+              <a:rPr lang="en-US" sz="3000" b="1" dirty="0">
                 <a:solidFill>
                   <a:srgbClr val="EB6834"/>
-                </a:solidFill>
-              </a:rPr>
-              <a:t>Individualists </a:t>
-            </a:r>
-            <a:pPr algn="ctr" indent="0" marL="0">
-              <a:buNone/>
-            </a:pPr>
-            <a:r>
-              <a:rPr lang="en-US" sz="1600" dirty="0">
-                <a:solidFill>
-                  <a:schemeClr val="tx1"/>
-                </a:solidFill>
-              </a:rPr>
-              <a:t>λ</a:t>
-            </a:r>
-            <a:pPr algn="ctr" indent="0" marL="0">
-              <a:buNone/>
-            </a:pPr>
-            <a:r>
-              <a:rPr lang="en-US" sz="1600" baseline="-40000" dirty="0">
-                <a:solidFill>
-                  <a:schemeClr val="tx1"/>
-                </a:solidFill>
-              </a:rPr>
-              <a:t>I</a:t>
-            </a:r>
-            <a:pPr algn="ctr" indent="0" marL="0">
-              <a:buNone/>
-            </a:pPr>
-            <a:r>
-              <a:rPr lang="en-US" sz="1600" dirty="0">
-                <a:solidFill>
-                  <a:schemeClr val="tx1"/>
-                </a:solidFill>
-              </a:rPr>
-              <a:t>  &lt;  λ</a:t>
-            </a:r>
-            <a:pPr algn="ctr" indent="0" marL="0">
-              <a:buNone/>
-            </a:pPr>
-            <a:r>
-              <a:rPr lang="en-US" sz="1600" baseline="-40000" dirty="0">
-                <a:solidFill>
-                  <a:schemeClr val="tx1"/>
-                </a:solidFill>
-              </a:rPr>
-              <a:t>C</a:t>
-            </a:r>
-            <a:pPr algn="ctr" indent="0" marL="0">
-              <a:buNone/>
-            </a:pPr>
-            <a:r>
-              <a:rPr lang="en-US" sz="1600" b="1" dirty="0">
-                <a:solidFill>
-                  <a:srgbClr val="2A78D6"/>
-                </a:solidFill>
-              </a:rPr>
-              <a:t> collectivists</a:t>
-            </a:r>
-            <a:endParaRPr lang="en-US" sz="1600" dirty="0"/>
-          </a:p>
-        </p:txBody>
-      </p:sp>
-      <p:sp>
-        <p:nvSpPr>
-          <p:cNvPr id="6" name="eq2"/>
-          <p:cNvSpPr txBox="1"/>
-          <p:nvPr/>
-        </p:nvSpPr>
-        <p:spPr>
-          <a:xfrm>
-            <a:off x="640080" y="2834640"/>
-            <a:ext cx="7863840" cy="685800"/>
-          </a:xfrm>
-          <a:prstGeom prst="rect">
-            <a:avLst/>
-          </a:prstGeom>
-          <a:noFill/>
-          <a:ln/>
-        </p:spPr>
-        <p:txBody>
-          <a:bodyPr wrap="square" lIns="0" tIns="0" rIns="0" bIns="0" rtlCol="0" anchor="ctr"/>
-          <a:lstStyle/>
-          <a:p>
-            <a:pPr algn="ctr" indent="0" marL="0">
-              <a:buNone/>
-            </a:pPr>
-            <a:r>
-              <a:rPr lang="en-US" sz="3000" i="1" dirty="0">
-                <a:solidFill>
-                  <a:schemeClr val="tx2"/>
                 </a:solidFill>
                 <a:latin typeface="Cambria" pitchFamily="34" charset="0"/>
                 <a:ea typeface="Cambria" pitchFamily="34" charset="-122"/>
                 <a:cs typeface="Cambria" pitchFamily="34" charset="-120"/>
               </a:rPr>
-              <a:t>ŝ</a:t>
+              <a:t>Individualists </a:t>
             </a:r>
             <a:pPr algn="ctr" indent="0" marL="0">
               <a:buNone/>
             </a:pPr>
             <a:r>
-              <a:rPr lang="en-US" sz="3000" baseline="-40000" dirty="0">
+              <a:rPr lang="en-US" sz="3000" dirty="0">
                 <a:solidFill>
                   <a:schemeClr val="tx2"/>
                 </a:solidFill>
@@ -5801,13 +5674,13 @@
                 <a:ea typeface="Cambria" pitchFamily="34" charset="-122"/>
                 <a:cs typeface="Cambria" pitchFamily="34" charset="-120"/>
               </a:rPr>
-              <a:t>I</a:t>
+              <a:t>λ</a:t>
             </a:r>
             <a:pPr algn="ctr" indent="0" marL="0">
               <a:buNone/>
             </a:pPr>
             <a:r>
-              <a:rPr lang="en-US" sz="3000" dirty="0">
+              <a:rPr lang="en-US" sz="3000" baseline="-40000" dirty="0">
                 <a:solidFill>
                   <a:schemeClr val="tx2"/>
                 </a:solidFill>
@@ -5815,13 +5688,13 @@
                 <a:ea typeface="Cambria" pitchFamily="34" charset="-122"/>
                 <a:cs typeface="Cambria" pitchFamily="34" charset="-120"/>
               </a:rPr>
-              <a:t>  −  </a:t>
+              <a:t>I</a:t>
             </a:r>
             <a:pPr algn="ctr" indent="0" marL="0">
               <a:buNone/>
             </a:pPr>
             <a:r>
-              <a:rPr lang="en-US" sz="3000" i="1" dirty="0">
+              <a:rPr lang="en-US" sz="3000" dirty="0">
                 <a:solidFill>
                   <a:schemeClr val="tx2"/>
                 </a:solidFill>
@@ -5829,7 +5702,7 @@
                 <a:ea typeface="Cambria" pitchFamily="34" charset="-122"/>
                 <a:cs typeface="Cambria" pitchFamily="34" charset="-120"/>
               </a:rPr>
-              <a:t>ŝ</a:t>
+              <a:t>  &lt;  λ</a:t>
             </a:r>
             <a:pPr algn="ctr" indent="0" marL="0">
               <a:buNone/>
@@ -5849,21 +5722,46 @@
               <a:buNone/>
             </a:pPr>
             <a:r>
-              <a:rPr lang="en-US" sz="3000" dirty="0">
-                <a:solidFill>
-                  <a:schemeClr val="tx2"/>
+              <a:rPr lang="en-US" sz="3000" b="1" dirty="0">
+                <a:solidFill>
+                  <a:srgbClr val="2A78D6"/>
                 </a:solidFill>
                 <a:latin typeface="Cambria" pitchFamily="34" charset="0"/>
                 <a:ea typeface="Cambria" pitchFamily="34" charset="-122"/>
                 <a:cs typeface="Cambria" pitchFamily="34" charset="-120"/>
               </a:rPr>
-              <a:t>  =  (λ</a:t>
-            </a:r>
+              <a:t> collectivists</a:t>
+            </a:r>
+            <a:endParaRPr lang="en-US" sz="3000" dirty="0"/>
+          </a:p>
+        </p:txBody>
+      </p:sp>
+      <p:sp>
+        <p:nvSpPr>
+          <p:cNvPr id="5" name="eq2"/>
+          <p:cNvSpPr txBox="1"/>
+          <p:nvPr/>
+        </p:nvSpPr>
+        <p:spPr>
+          <a:xfrm>
+            <a:off x="640080" y="3246120"/>
+            <a:ext cx="7863840" cy="685800"/>
+          </a:xfrm>
+          <a:prstGeom prst="rect">
+            <a:avLst/>
+          </a:prstGeom>
+          <a:noFill/>
+          <a:ln/>
+        </p:spPr>
+        <p:txBody>
+          <a:bodyPr wrap="square" lIns="0" tIns="0" rIns="0" bIns="0" rtlCol="0" anchor="ctr"/>
+          <a:lstStyle/>
+          <a:p>
             <a:pPr algn="ctr" indent="0" marL="0">
               <a:buNone/>
             </a:pPr>
             <a:r>
-              <a:rPr lang="en-US" sz="3000" baseline="-40000" dirty="0">
+              <a:rPr lang="en-US" sz="3000" i="1" dirty="0">
                 <a:solidFill>
                   <a:schemeClr val="tx2"/>
                 </a:solidFill>
@@ -5871,13 +5769,13 @@
                 <a:ea typeface="Cambria" pitchFamily="34" charset="-122"/>
                 <a:cs typeface="Cambria" pitchFamily="34" charset="-120"/>
               </a:rPr>
-              <a:t>C</a:t>
+              <a:t>ŝ</a:t>
             </a:r>
             <a:pPr algn="ctr" indent="0" marL="0">
               <a:buNone/>
             </a:pPr>
             <a:r>
-              <a:rPr lang="en-US" sz="3000" dirty="0">
+              <a:rPr lang="en-US" sz="3000" baseline="-40000" dirty="0">
                 <a:solidFill>
                   <a:schemeClr val="tx2"/>
                 </a:solidFill>
@@ -5885,13 +5783,13 @@
                 <a:ea typeface="Cambria" pitchFamily="34" charset="-122"/>
                 <a:cs typeface="Cambria" pitchFamily="34" charset="-120"/>
               </a:rPr>
-              <a:t> − λ</a:t>
+              <a:t>I</a:t>
             </a:r>
             <a:pPr algn="ctr" indent="0" marL="0">
               <a:buNone/>
             </a:pPr>
             <a:r>
-              <a:rPr lang="en-US" sz="3000" baseline="-40000" dirty="0">
+              <a:rPr lang="en-US" sz="3000" dirty="0">
                 <a:solidFill>
                   <a:schemeClr val="tx2"/>
                 </a:solidFill>
@@ -5899,13 +5797,13 @@
                 <a:ea typeface="Cambria" pitchFamily="34" charset="-122"/>
                 <a:cs typeface="Cambria" pitchFamily="34" charset="-120"/>
               </a:rPr>
-              <a:t>I</a:t>
+              <a:t>  −  </a:t>
             </a:r>
             <a:pPr algn="ctr" indent="0" marL="0">
               <a:buNone/>
             </a:pPr>
             <a:r>
-              <a:rPr lang="en-US" sz="3000" dirty="0">
+              <a:rPr lang="en-US" sz="3000" i="1" dirty="0">
                 <a:solidFill>
                   <a:schemeClr val="tx2"/>
                 </a:solidFill>
@@ -5913,13 +5811,13 @@
                 <a:ea typeface="Cambria" pitchFamily="34" charset="-122"/>
                 <a:cs typeface="Cambria" pitchFamily="34" charset="-120"/>
               </a:rPr>
-              <a:t>) · (</a:t>
+              <a:t>ŝ</a:t>
             </a:r>
             <a:pPr algn="ctr" indent="0" marL="0">
               <a:buNone/>
             </a:pPr>
             <a:r>
-              <a:rPr lang="en-US" sz="3000" i="1" dirty="0">
+              <a:rPr lang="en-US" sz="3000" baseline="-40000" dirty="0">
                 <a:solidFill>
                   <a:schemeClr val="tx2"/>
                 </a:solidFill>
@@ -5927,7 +5825,7 @@
                 <a:ea typeface="Cambria" pitchFamily="34" charset="-122"/>
                 <a:cs typeface="Cambria" pitchFamily="34" charset="-120"/>
               </a:rPr>
-              <a:t>x</a:t>
+              <a:t>C</a:t>
             </a:r>
             <a:pPr algn="ctr" indent="0" marL="0">
               <a:buNone/>
@@ -5941,13 +5839,13 @@
                 <a:ea typeface="Cambria" pitchFamily="34" charset="-122"/>
                 <a:cs typeface="Cambria" pitchFamily="34" charset="-120"/>
               </a:rPr>
-              <a:t> − </a:t>
+              <a:t>  =  (λ</a:t>
             </a:r>
             <a:pPr algn="ctr" indent="0" marL="0">
               <a:buNone/>
             </a:pPr>
             <a:r>
-              <a:rPr lang="en-US" sz="3000" i="1" dirty="0">
+              <a:rPr lang="en-US" sz="3000" baseline="-40000" dirty="0">
                 <a:solidFill>
                   <a:schemeClr val="tx2"/>
                 </a:solidFill>
@@ -5955,7 +5853,7 @@
                 <a:ea typeface="Cambria" pitchFamily="34" charset="-122"/>
                 <a:cs typeface="Cambria" pitchFamily="34" charset="-120"/>
               </a:rPr>
-              <a:t>y</a:t>
+              <a:t>C</a:t>
             </a:r>
             <a:pPr algn="ctr" indent="0" marL="0">
               <a:buNone/>
@@ -5969,45 +5867,93 @@
                 <a:ea typeface="Cambria" pitchFamily="34" charset="-122"/>
                 <a:cs typeface="Cambria" pitchFamily="34" charset="-120"/>
               </a:rPr>
+              <a:t> − λ</a:t>
+            </a:r>
+            <a:pPr algn="ctr" indent="0" marL="0">
+              <a:buNone/>
+            </a:pPr>
+            <a:r>
+              <a:rPr lang="en-US" sz="3000" baseline="-40000" dirty="0">
+                <a:solidFill>
+                  <a:schemeClr val="tx2"/>
+                </a:solidFill>
+                <a:latin typeface="Cambria" pitchFamily="34" charset="0"/>
+                <a:ea typeface="Cambria" pitchFamily="34" charset="-122"/>
+                <a:cs typeface="Cambria" pitchFamily="34" charset="-120"/>
+              </a:rPr>
+              <a:t>I</a:t>
+            </a:r>
+            <a:pPr algn="ctr" indent="0" marL="0">
+              <a:buNone/>
+            </a:pPr>
+            <a:r>
+              <a:rPr lang="en-US" sz="3000" dirty="0">
+                <a:solidFill>
+                  <a:schemeClr val="tx2"/>
+                </a:solidFill>
+                <a:latin typeface="Cambria" pitchFamily="34" charset="0"/>
+                <a:ea typeface="Cambria" pitchFamily="34" charset="-122"/>
+                <a:cs typeface="Cambria" pitchFamily="34" charset="-120"/>
+              </a:rPr>
+              <a:t>) · (</a:t>
+            </a:r>
+            <a:pPr algn="ctr" indent="0" marL="0">
+              <a:buNone/>
+            </a:pPr>
+            <a:r>
+              <a:rPr lang="en-US" sz="3000" i="1" dirty="0">
+                <a:solidFill>
+                  <a:schemeClr val="tx2"/>
+                </a:solidFill>
+                <a:latin typeface="Cambria" pitchFamily="34" charset="0"/>
+                <a:ea typeface="Cambria" pitchFamily="34" charset="-122"/>
+                <a:cs typeface="Cambria" pitchFamily="34" charset="-120"/>
+              </a:rPr>
+              <a:t>x</a:t>
+            </a:r>
+            <a:pPr algn="ctr" indent="0" marL="0">
+              <a:buNone/>
+            </a:pPr>
+            <a:r>
+              <a:rPr lang="en-US" sz="3000" dirty="0">
+                <a:solidFill>
+                  <a:schemeClr val="tx2"/>
+                </a:solidFill>
+                <a:latin typeface="Cambria" pitchFamily="34" charset="0"/>
+                <a:ea typeface="Cambria" pitchFamily="34" charset="-122"/>
+                <a:cs typeface="Cambria" pitchFamily="34" charset="-120"/>
+              </a:rPr>
+              <a:t> − </a:t>
+            </a:r>
+            <a:pPr algn="ctr" indent="0" marL="0">
+              <a:buNone/>
+            </a:pPr>
+            <a:r>
+              <a:rPr lang="en-US" sz="3000" i="1" dirty="0">
+                <a:solidFill>
+                  <a:schemeClr val="tx2"/>
+                </a:solidFill>
+                <a:latin typeface="Cambria" pitchFamily="34" charset="0"/>
+                <a:ea typeface="Cambria" pitchFamily="34" charset="-122"/>
+                <a:cs typeface="Cambria" pitchFamily="34" charset="-120"/>
+              </a:rPr>
+              <a:t>y</a:t>
+            </a:r>
+            <a:pPr algn="ctr" indent="0" marL="0">
+              <a:buNone/>
+            </a:pPr>
+            <a:r>
+              <a:rPr lang="en-US" sz="3000" dirty="0">
+                <a:solidFill>
+                  <a:schemeClr val="tx2"/>
+                </a:solidFill>
+                <a:latin typeface="Cambria" pitchFamily="34" charset="0"/>
+                <a:ea typeface="Cambria" pitchFamily="34" charset="-122"/>
+                <a:cs typeface="Cambria" pitchFamily="34" charset="-120"/>
+              </a:rPr>
               <a:t>)</a:t>
             </a:r>
             <a:endParaRPr lang="en-US" sz="3000" dirty="0"/>
-          </a:p>
-        </p:txBody>
-      </p:sp>
-      <p:sp>
-        <p:nvSpPr>
-          <p:cNvPr id="7" name="eq2-sub"/>
-          <p:cNvSpPr txBox="1"/>
-          <p:nvPr/>
-        </p:nvSpPr>
-        <p:spPr>
-          <a:xfrm>
-            <a:off x="640080" y="3566160"/>
-            <a:ext cx="7863840" cy="320040"/>
-          </a:xfrm>
-          <a:prstGeom prst="rect">
-            <a:avLst/>
-          </a:prstGeom>
-          <a:noFill/>
-          <a:ln/>
-        </p:spPr>
-        <p:txBody>
-          <a:bodyPr wrap="square" lIns="0" tIns="0" rIns="0" bIns="0" rtlCol="0" anchor="ctr"/>
-          <a:lstStyle/>
-          <a:p>
-            <a:pPr algn="ctr" indent="0" marL="0">
-              <a:buNone/>
-            </a:pPr>
-            <a:r>
-              <a:rPr lang="en-US" sz="1200" i="1" dirty="0">
-                <a:solidFill>
-                  <a:schemeClr val="accent3"/>
-                </a:solidFill>
-              </a:rPr>
-              <a:t>same two signals, different estimates</a:t>
-            </a:r>
-            <a:endParaRPr lang="en-US" sz="1200" dirty="0"/>
           </a:p>
         </p:txBody>
       </p:sp>

--- a/docs/deck_2026-10-26_seminar.pptx
+++ b/docs/deck_2026-10-26_seminar.pptx
@@ -120,7 +120,7 @@
   <p:extLst>
     <p:ext uri="{521415D9-36F7-43E2-AB2F-B90AF26B5E84}">
       <p14:sectionLst xmlns:p14="http://schemas.microsoft.com/office/powerpoint/2010/main">
-        <p14:section name="Opening" id="{49df280b-01d8-0f12-4d4d-7672fd3be63a}">
+        <p14:section name="Opening" id="{531b4b43-cc7b-a765-080a-d9a077638ad3}">
           <p14:sldIdLst>
             <p14:sldId id="256"/>
             <p14:sldId id="257"/>
@@ -130,13 +130,13 @@
             <p14:sldId id="261"/>
           </p14:sldIdLst>
         </p14:section>
-        <p14:section name="The model" id="{591384eb-cd13-34df-b1d7-096e405a2b84}">
+        <p14:section name="The model" id="{faf00e54-99fc-53f9-bf89-6aa0b06ea64b}">
           <p14:sldIdLst>
             <p14:sldId id="262"/>
             <p14:sldId id="263"/>
           </p14:sldIdLst>
         </p14:section>
-        <p14:section name="Results" id="{3422793d-8c54-fc48-2ab6-4bcb7c212aa3}">
+        <p14:section name="Results" id="{894820f3-bf2a-f6b6-9132-e67141ad8e4b}">
           <p14:sldIdLst>
             <p14:sldId id="264"/>
             <p14:sldId id="265"/>
@@ -144,12 +144,12 @@
             <p14:sldId id="267"/>
           </p14:sldIdLst>
         </p14:section>
-        <p14:section name="Validation" id="{82488de2-729d-546c-d210-319fb61ce12e}">
+        <p14:section name="Validation" id="{036d2c08-b55b-bd46-5cac-90c69a365efd}">
           <p14:sldIdLst>
             <p14:sldId id="268"/>
           </p14:sldIdLst>
         </p14:section>
-        <p14:section name="Close" id="{64a6d4dd-9fe1-9f16-e9f5-8c8c2d898f39}">
+        <p14:section name="Close" id="{a489903a-90e9-33d8-223f-0f1c5356b2eb}">
           <p14:sldIdLst>
             <p14:sldId id="269"/>
           </p14:sldIdLst>

--- a/docs/deck_2026-10-26_seminar.pptx
+++ b/docs/deck_2026-10-26_seminar.pptx
@@ -120,7 +120,7 @@
   <p:extLst>
     <p:ext uri="{521415D9-36F7-43E2-AB2F-B90AF26B5E84}">
       <p14:sectionLst xmlns:p14="http://schemas.microsoft.com/office/powerpoint/2010/main">
-        <p14:section name="Opening" id="{531b4b43-cc7b-a765-080a-d9a077638ad3}">
+        <p14:section name="Opening" id="{376d669b-be17-14be-b237-fc8624411091}">
           <p14:sldIdLst>
             <p14:sldId id="256"/>
             <p14:sldId id="257"/>
@@ -130,13 +130,13 @@
             <p14:sldId id="261"/>
           </p14:sldIdLst>
         </p14:section>
-        <p14:section name="The model" id="{faf00e54-99fc-53f9-bf89-6aa0b06ea64b}">
+        <p14:section name="The model" id="{4e19ce85-378f-2703-8add-2ec3e159bc38}">
           <p14:sldIdLst>
             <p14:sldId id="262"/>
             <p14:sldId id="263"/>
           </p14:sldIdLst>
         </p14:section>
-        <p14:section name="Results" id="{894820f3-bf2a-f6b6-9132-e67141ad8e4b}">
+        <p14:section name="Results" id="{baa68e76-972d-5be2-2929-34dfd650adf7}">
           <p14:sldIdLst>
             <p14:sldId id="264"/>
             <p14:sldId id="265"/>
@@ -144,12 +144,12 @@
             <p14:sldId id="267"/>
           </p14:sldIdLst>
         </p14:section>
-        <p14:section name="Validation" id="{036d2c08-b55b-bd46-5cac-90c69a365efd}">
+        <p14:section name="Validation" id="{d1fa0da2-20d4-9998-bf3f-4179fb7ed91d}">
           <p14:sldIdLst>
             <p14:sldId id="268"/>
           </p14:sldIdLst>
         </p14:section>
-        <p14:section name="Close" id="{a489903a-90e9-33d8-223f-0f1c5356b2eb}">
+        <p14:section name="Close" id="{b668a685-14da-8823-5c90-bc5822d0e324}">
           <p14:sldIdLst>
             <p14:sldId id="269"/>
           </p14:sldIdLst>
@@ -6199,34 +6199,7 @@
       </p:sp>
       <p:sp>
         <p:nvSpPr>
-          <p:cNvPr id="3" name="type-Individualists"/>
-          <p:cNvSpPr/>
-          <p:nvPr/>
-        </p:nvSpPr>
-        <p:spPr>
-          <a:xfrm>
-            <a:off x="457200" y="1051560"/>
-            <a:ext cx="4023360" cy="2377440"/>
-          </a:xfrm>
-          <a:prstGeom prst="roundRect">
-            <a:avLst>
-              <a:gd name="adj" fmla="val 3077"/>
-            </a:avLst>
-          </a:prstGeom>
-          <a:solidFill>
-            <a:schemeClr val="bg2"/>
-          </a:solidFill>
-          <a:ln w="12700">
-            <a:solidFill>
-              <a:schemeClr val="bg2"/>
-            </a:solidFill>
-            <a:prstDash val="solid"/>
-          </a:ln>
-        </p:spPr>
-      </p:sp>
-      <p:sp>
-        <p:nvSpPr>
-          <p:cNvPr id="4" name="type-head"/>
+          <p:cNvPr id="3" name="type-head"/>
           <p:cNvSpPr txBox="1"/>
           <p:nvPr/>
         </p:nvSpPr>
@@ -6262,7 +6235,7 @@
       </p:sp>
       <p:sp>
         <p:nvSpPr>
-          <p:cNvPr id="5" name="bullets"/>
+          <p:cNvPr id="4" name="bullets"/>
           <p:cNvSpPr txBox="1"/>
           <p:nvPr/>
         </p:nvSpPr>
@@ -6356,34 +6329,7 @@
       </p:sp>
       <p:sp>
         <p:nvSpPr>
-          <p:cNvPr id="6" name="type-Collectivists"/>
-          <p:cNvSpPr/>
-          <p:nvPr/>
-        </p:nvSpPr>
-        <p:spPr>
-          <a:xfrm>
-            <a:off x="4663440" y="1051560"/>
-            <a:ext cx="4023360" cy="2377440"/>
-          </a:xfrm>
-          <a:prstGeom prst="roundRect">
-            <a:avLst>
-              <a:gd name="adj" fmla="val 3077"/>
-            </a:avLst>
-          </a:prstGeom>
-          <a:solidFill>
-            <a:schemeClr val="bg2"/>
-          </a:solidFill>
-          <a:ln w="12700">
-            <a:solidFill>
-              <a:schemeClr val="bg2"/>
-            </a:solidFill>
-            <a:prstDash val="solid"/>
-          </a:ln>
-        </p:spPr>
-      </p:sp>
-      <p:sp>
-        <p:nvSpPr>
-          <p:cNvPr id="7" name="type-head"/>
+          <p:cNvPr id="5" name="type-head"/>
           <p:cNvSpPr txBox="1"/>
           <p:nvPr/>
         </p:nvSpPr>
@@ -6419,7 +6365,7 @@
       </p:sp>
       <p:sp>
         <p:nvSpPr>
-          <p:cNvPr id="8" name="bullets"/>
+          <p:cNvPr id="6" name="bullets"/>
           <p:cNvSpPr txBox="1"/>
           <p:nvPr/>
         </p:nvSpPr>
@@ -6513,14 +6459,14 @@
       </p:sp>
       <p:sp>
         <p:nvSpPr>
-          <p:cNvPr id="9" name="pairs-head"/>
+          <p:cNvPr id="7" name="pairs-head"/>
           <p:cNvSpPr txBox="1"/>
           <p:nvPr/>
         </p:nvSpPr>
         <p:spPr>
           <a:xfrm>
-            <a:off x="457200" y="3611880"/>
-            <a:ext cx="4572000" cy="274320"/>
+            <a:off x="914400" y="3749040"/>
+            <a:ext cx="2103120" cy="329184"/>
           </a:xfrm>
           <a:prstGeom prst="rect">
             <a:avLst/>
@@ -6536,26 +6482,26 @@
               <a:buNone/>
             </a:pPr>
             <a:r>
-              <a:rPr lang="en-US" sz="1100" b="1" dirty="0">
-                <a:solidFill>
-                  <a:schemeClr val="accent3"/>
-                </a:solidFill>
-              </a:rPr>
-              <a:t>Three pairs (λ individualist, λ collectivist) in the figures</a:t>
-            </a:r>
-            <a:endParaRPr lang="en-US" sz="1100" dirty="0"/>
-          </a:p>
-        </p:txBody>
-      </p:sp>
-      <p:sp>
-        <p:nvSpPr>
-          <p:cNvPr id="10" name="chip"/>
+              <a:rPr lang="en-US" sz="1300" b="1" dirty="0">
+                <a:solidFill>
+                  <a:schemeClr val="tx2"/>
+                </a:solidFill>
+              </a:rPr>
+              <a:t>Signal interpretation gap</a:t>
+            </a:r>
+            <a:endParaRPr lang="en-US" sz="1300" dirty="0"/>
+          </a:p>
+        </p:txBody>
+      </p:sp>
+      <p:sp>
+        <p:nvSpPr>
+          <p:cNvPr id="8" name="chip"/>
           <p:cNvSpPr/>
           <p:nvPr/>
         </p:nvSpPr>
         <p:spPr>
           <a:xfrm>
-            <a:off x="457200" y="3931920"/>
+            <a:off x="3108960" y="3749040"/>
             <a:ext cx="914400" cy="329184"/>
           </a:xfrm>
           <a:prstGeom prst="roundRect">
@@ -6576,13 +6522,13 @@
       </p:sp>
       <p:sp>
         <p:nvSpPr>
-          <p:cNvPr id="11" name="chip-label"/>
+          <p:cNvPr id="9" name="chip-label"/>
           <p:cNvSpPr txBox="1"/>
           <p:nvPr/>
         </p:nvSpPr>
         <p:spPr>
           <a:xfrm>
-            <a:off x="457200" y="3931920"/>
+            <a:off x="3108960" y="3749040"/>
             <a:ext cx="914400" cy="329184"/>
           </a:xfrm>
           <a:prstGeom prst="rect">
@@ -6615,14 +6561,14 @@
       </p:sp>
       <p:sp>
         <p:nvSpPr>
-          <p:cNvPr id="12" name="pair-label"/>
+          <p:cNvPr id="10" name="pair-label"/>
           <p:cNvSpPr txBox="1"/>
           <p:nvPr/>
         </p:nvSpPr>
         <p:spPr>
           <a:xfrm>
-            <a:off x="1417320" y="3931920"/>
-            <a:ext cx="640080" cy="329184"/>
+            <a:off x="4069080" y="3749040"/>
+            <a:ext cx="777240" cy="329184"/>
           </a:xfrm>
           <a:prstGeom prst="rect">
             <a:avLst/>
@@ -6638,26 +6584,26 @@
               <a:buNone/>
             </a:pPr>
             <a:r>
-              <a:rPr lang="en-US" sz="1100" dirty="0">
+              <a:rPr lang="en-US" sz="1200" dirty="0">
                 <a:solidFill>
                   <a:schemeClr val="accent3"/>
                 </a:solidFill>
               </a:rPr>
               <a:t>wide gap</a:t>
             </a:r>
-            <a:endParaRPr lang="en-US" sz="1100" dirty="0"/>
-          </a:p>
-        </p:txBody>
-      </p:sp>
-      <p:sp>
-        <p:nvSpPr>
-          <p:cNvPr id="13" name="chip"/>
+            <a:endParaRPr lang="en-US" sz="1200" dirty="0"/>
+          </a:p>
+        </p:txBody>
+      </p:sp>
+      <p:sp>
+        <p:nvSpPr>
+          <p:cNvPr id="11" name="chip"/>
           <p:cNvSpPr/>
           <p:nvPr/>
         </p:nvSpPr>
         <p:spPr>
           <a:xfrm>
-            <a:off x="2057400" y="3931920"/>
+            <a:off x="4846320" y="3749040"/>
             <a:ext cx="914400" cy="329184"/>
           </a:xfrm>
           <a:prstGeom prst="roundRect">
@@ -6678,13 +6624,13 @@
       </p:sp>
       <p:sp>
         <p:nvSpPr>
-          <p:cNvPr id="14" name="chip-label"/>
+          <p:cNvPr id="12" name="chip-label"/>
           <p:cNvSpPr txBox="1"/>
           <p:nvPr/>
         </p:nvSpPr>
         <p:spPr>
           <a:xfrm>
-            <a:off x="2057400" y="3931920"/>
+            <a:off x="4846320" y="3749040"/>
             <a:ext cx="914400" cy="329184"/>
           </a:xfrm>
           <a:prstGeom prst="rect">
@@ -6717,14 +6663,14 @@
       </p:sp>
       <p:sp>
         <p:nvSpPr>
-          <p:cNvPr id="15" name="pair-label"/>
+          <p:cNvPr id="13" name="pair-label"/>
           <p:cNvSpPr txBox="1"/>
           <p:nvPr/>
         </p:nvSpPr>
         <p:spPr>
           <a:xfrm>
-            <a:off x="3017520" y="3931920"/>
-            <a:ext cx="640080" cy="329184"/>
+            <a:off x="5806440" y="3749040"/>
+            <a:ext cx="777240" cy="329184"/>
           </a:xfrm>
           <a:prstGeom prst="rect">
             <a:avLst/>
@@ -6740,26 +6686,26 @@
               <a:buNone/>
             </a:pPr>
             <a:r>
-              <a:rPr lang="en-US" sz="1100" dirty="0">
+              <a:rPr lang="en-US" sz="1200" dirty="0">
                 <a:solidFill>
                   <a:schemeClr val="accent3"/>
                 </a:solidFill>
               </a:rPr>
               <a:t>medium</a:t>
             </a:r>
-            <a:endParaRPr lang="en-US" sz="1100" dirty="0"/>
-          </a:p>
-        </p:txBody>
-      </p:sp>
-      <p:sp>
-        <p:nvSpPr>
-          <p:cNvPr id="16" name="chip"/>
+            <a:endParaRPr lang="en-US" sz="1200" dirty="0"/>
+          </a:p>
+        </p:txBody>
+      </p:sp>
+      <p:sp>
+        <p:nvSpPr>
+          <p:cNvPr id="14" name="chip"/>
           <p:cNvSpPr/>
           <p:nvPr/>
         </p:nvSpPr>
         <p:spPr>
           <a:xfrm>
-            <a:off x="3657600" y="3931920"/>
+            <a:off x="6583680" y="3749040"/>
             <a:ext cx="914400" cy="329184"/>
           </a:xfrm>
           <a:prstGeom prst="roundRect">
@@ -6780,13 +6726,13 @@
       </p:sp>
       <p:sp>
         <p:nvSpPr>
-          <p:cNvPr id="17" name="chip-label"/>
+          <p:cNvPr id="15" name="chip-label"/>
           <p:cNvSpPr txBox="1"/>
           <p:nvPr/>
         </p:nvSpPr>
         <p:spPr>
           <a:xfrm>
-            <a:off x="3657600" y="3931920"/>
+            <a:off x="6583680" y="3749040"/>
             <a:ext cx="914400" cy="329184"/>
           </a:xfrm>
           <a:prstGeom prst="rect">
@@ -6819,14 +6765,14 @@
       </p:sp>
       <p:sp>
         <p:nvSpPr>
-          <p:cNvPr id="18" name="pair-label"/>
+          <p:cNvPr id="16" name="pair-label"/>
           <p:cNvSpPr txBox="1"/>
           <p:nvPr/>
         </p:nvSpPr>
         <p:spPr>
           <a:xfrm>
-            <a:off x="4617720" y="3931920"/>
-            <a:ext cx="640080" cy="329184"/>
+            <a:off x="7543800" y="3749040"/>
+            <a:ext cx="777240" cy="329184"/>
           </a:xfrm>
           <a:prstGeom prst="rect">
             <a:avLst/>
@@ -6842,94 +6788,14 @@
               <a:buNone/>
             </a:pPr>
             <a:r>
-              <a:rPr lang="en-US" sz="1100" dirty="0">
+              <a:rPr lang="en-US" sz="1200" dirty="0">
                 <a:solidFill>
                   <a:schemeClr val="accent3"/>
                 </a:solidFill>
               </a:rPr>
               <a:t>narrow</a:t>
             </a:r>
-            <a:endParaRPr lang="en-US" sz="1100" dirty="0"/>
-          </a:p>
-        </p:txBody>
-      </p:sp>
-      <p:sp>
-        <p:nvSpPr>
-          <p:cNvPr id="19" name="mu-note"/>
-          <p:cNvSpPr txBox="1"/>
-          <p:nvPr/>
-        </p:nvSpPr>
-        <p:spPr>
-          <a:xfrm>
-            <a:off x="5303520" y="3611880"/>
-            <a:ext cx="3383280" cy="822960"/>
-          </a:xfrm>
-          <a:prstGeom prst="rect">
-            <a:avLst/>
-          </a:prstGeom>
-          <a:noFill/>
-          <a:ln/>
-        </p:spPr>
-        <p:txBody>
-          <a:bodyPr wrap="square" lIns="0" tIns="0" rIns="0" bIns="0" rtlCol="0" anchor="t"/>
-          <a:lstStyle/>
-          <a:p>
-            <a:pPr indent="0" marL="0">
-              <a:buNone/>
-            </a:pPr>
-            <a:r>
-              <a:rPr lang="en-US" sz="1100" dirty="0">
-                <a:solidFill>
-                  <a:schemeClr val="accent3"/>
-                </a:solidFill>
-              </a:rPr>
-              <a:t>The share of individualists μ is set by a cultural warm-up on the network. </a:t>
-            </a:r>
-            <a:pPr indent="0" marL="0">
-              <a:buNone/>
-            </a:pPr>
-            <a:r>
-              <a:rPr lang="en-US" sz="1100" b="1" dirty="0">
-                <a:solidFill>
-                  <a:srgbClr val="EB6834"/>
-                </a:solidFill>
-              </a:rPr>
-              <a:t>Orange = individualists</a:t>
-            </a:r>
-            <a:pPr indent="0" marL="0">
-              <a:buNone/>
-            </a:pPr>
-            <a:r>
-              <a:rPr lang="en-US" sz="1100" dirty="0">
-                <a:solidFill>
-                  <a:schemeClr val="accent3"/>
-                </a:solidFill>
-              </a:rPr>
-              <a:t>, </a:t>
-            </a:r>
-            <a:pPr indent="0" marL="0">
-              <a:buNone/>
-            </a:pPr>
-            <a:r>
-              <a:rPr lang="en-US" sz="1100" b="1" dirty="0">
-                <a:solidFill>
-                  <a:srgbClr val="2A78D6"/>
-                </a:solidFill>
-              </a:rPr>
-              <a:t>blue = collectivists</a:t>
-            </a:r>
-            <a:pPr indent="0" marL="0">
-              <a:buNone/>
-            </a:pPr>
-            <a:r>
-              <a:rPr lang="en-US" sz="1100" dirty="0">
-                <a:solidFill>
-                  <a:schemeClr val="accent3"/>
-                </a:solidFill>
-              </a:rPr>
-              <a:t> throughout.</a:t>
-            </a:r>
-            <a:endParaRPr lang="en-US" sz="1100" dirty="0"/>
+            <a:endParaRPr lang="en-US" sz="1200" dirty="0"/>
           </a:p>
         </p:txBody>
       </p:sp>

--- a/docs/deck_2026-10-26_seminar.pptx
+++ b/docs/deck_2026-10-26_seminar.pptx
@@ -120,7 +120,7 @@
   <p:extLst>
     <p:ext uri="{521415D9-36F7-43E2-AB2F-B90AF26B5E84}">
       <p14:sectionLst xmlns:p14="http://schemas.microsoft.com/office/powerpoint/2010/main">
-        <p14:section name="Opening" id="{376d669b-be17-14be-b237-fc8624411091}">
+        <p14:section name="Opening" id="{49c422ad-505d-8dcf-c12d-ff605d9aaaa0}">
           <p14:sldIdLst>
             <p14:sldId id="256"/>
             <p14:sldId id="257"/>
@@ -130,13 +130,13 @@
             <p14:sldId id="261"/>
           </p14:sldIdLst>
         </p14:section>
-        <p14:section name="The model" id="{4e19ce85-378f-2703-8add-2ec3e159bc38}">
+        <p14:section name="The model" id="{481503f5-a1b7-8bef-c57a-44ace5cec1e5}">
           <p14:sldIdLst>
             <p14:sldId id="262"/>
             <p14:sldId id="263"/>
           </p14:sldIdLst>
         </p14:section>
-        <p14:section name="Results" id="{baa68e76-972d-5be2-2929-34dfd650adf7}">
+        <p14:section name="Results" id="{85901ff1-6875-5771-133d-a9a628aed2a5}">
           <p14:sldIdLst>
             <p14:sldId id="264"/>
             <p14:sldId id="265"/>
@@ -144,12 +144,12 @@
             <p14:sldId id="267"/>
           </p14:sldIdLst>
         </p14:section>
-        <p14:section name="Validation" id="{d1fa0da2-20d4-9998-bf3f-4179fb7ed91d}">
+        <p14:section name="Validation" id="{f9368fb3-0c9c-652b-9c95-3431d06c4de7}">
           <p14:sldIdLst>
             <p14:sldId id="268"/>
           </p14:sldIdLst>
         </p14:section>
-        <p14:section name="Close" id="{b668a685-14da-8823-5c90-bc5822d0e324}">
+        <p14:section name="Close" id="{4898beb8-f625-c9f1-f85a-50d2d4d3b4f7}">
           <p14:sldIdLst>
             <p14:sldId id="269"/>
           </p14:sldIdLst>
@@ -6465,8 +6465,8 @@
         </p:nvSpPr>
         <p:spPr>
           <a:xfrm>
-            <a:off x="914400" y="3749040"/>
-            <a:ext cx="2103120" cy="329184"/>
+            <a:off x="457200" y="3886200"/>
+            <a:ext cx="8229600" cy="329184"/>
           </a:xfrm>
           <a:prstGeom prst="rect">
             <a:avLst/>
@@ -6478,7 +6478,7 @@
           <a:bodyPr wrap="square" lIns="0" tIns="0" rIns="0" bIns="0" rtlCol="0" anchor="ctr"/>
           <a:lstStyle/>
           <a:p>
-            <a:pPr indent="0" marL="0">
+            <a:pPr algn="ctr" indent="0" marL="0">
               <a:buNone/>
             </a:pPr>
             <a:r>
@@ -6501,7 +6501,7 @@
         </p:nvSpPr>
         <p:spPr>
           <a:xfrm>
-            <a:off x="3108960" y="3749040"/>
+            <a:off x="2057400" y="3429000"/>
             <a:ext cx="914400" cy="329184"/>
           </a:xfrm>
           <a:prstGeom prst="roundRect">
@@ -6528,7 +6528,7 @@
         </p:nvSpPr>
         <p:spPr>
           <a:xfrm>
-            <a:off x="3108960" y="3749040"/>
+            <a:off x="2057400" y="3429000"/>
             <a:ext cx="914400" cy="329184"/>
           </a:xfrm>
           <a:prstGeom prst="rect">
@@ -6567,7 +6567,7 @@
         </p:nvSpPr>
         <p:spPr>
           <a:xfrm>
-            <a:off x="4069080" y="3749040"/>
+            <a:off x="3017520" y="3429000"/>
             <a:ext cx="777240" cy="329184"/>
           </a:xfrm>
           <a:prstGeom prst="rect">
@@ -6603,7 +6603,7 @@
         </p:nvSpPr>
         <p:spPr>
           <a:xfrm>
-            <a:off x="4846320" y="3749040"/>
+            <a:off x="3794760" y="3429000"/>
             <a:ext cx="914400" cy="329184"/>
           </a:xfrm>
           <a:prstGeom prst="roundRect">
@@ -6630,7 +6630,7 @@
         </p:nvSpPr>
         <p:spPr>
           <a:xfrm>
-            <a:off x="4846320" y="3749040"/>
+            <a:off x="3794760" y="3429000"/>
             <a:ext cx="914400" cy="329184"/>
           </a:xfrm>
           <a:prstGeom prst="rect">
@@ -6669,7 +6669,7 @@
         </p:nvSpPr>
         <p:spPr>
           <a:xfrm>
-            <a:off x="5806440" y="3749040"/>
+            <a:off x="4754880" y="3429000"/>
             <a:ext cx="777240" cy="329184"/>
           </a:xfrm>
           <a:prstGeom prst="rect">
@@ -6705,7 +6705,7 @@
         </p:nvSpPr>
         <p:spPr>
           <a:xfrm>
-            <a:off x="6583680" y="3749040"/>
+            <a:off x="5532120" y="3429000"/>
             <a:ext cx="914400" cy="329184"/>
           </a:xfrm>
           <a:prstGeom prst="roundRect">
@@ -6732,7 +6732,7 @@
         </p:nvSpPr>
         <p:spPr>
           <a:xfrm>
-            <a:off x="6583680" y="3749040"/>
+            <a:off x="5532120" y="3429000"/>
             <a:ext cx="914400" cy="329184"/>
           </a:xfrm>
           <a:prstGeom prst="rect">
@@ -6771,7 +6771,7 @@
         </p:nvSpPr>
         <p:spPr>
           <a:xfrm>
-            <a:off x="7543800" y="3749040"/>
+            <a:off x="6492240" y="3429000"/>
             <a:ext cx="777240" cy="329184"/>
           </a:xfrm>
           <a:prstGeom prst="rect">

--- a/docs/deck_2026-10-26_seminar.pptx
+++ b/docs/deck_2026-10-26_seminar.pptx
@@ -120,7 +120,7 @@
   <p:extLst>
     <p:ext uri="{521415D9-36F7-43E2-AB2F-B90AF26B5E84}">
       <p14:sectionLst xmlns:p14="http://schemas.microsoft.com/office/powerpoint/2010/main">
-        <p14:section name="Opening" id="{49c422ad-505d-8dcf-c12d-ff605d9aaaa0}">
+        <p14:section name="Opening" id="{3c0f1e0c-7c18-eb01-bf6a-11c8510f56ac}">
           <p14:sldIdLst>
             <p14:sldId id="256"/>
             <p14:sldId id="257"/>
@@ -130,13 +130,13 @@
             <p14:sldId id="261"/>
           </p14:sldIdLst>
         </p14:section>
-        <p14:section name="The model" id="{481503f5-a1b7-8bef-c57a-44ace5cec1e5}">
+        <p14:section name="The model" id="{5c1b3cfd-5638-9a33-58d5-7f895a2e268f}">
           <p14:sldIdLst>
             <p14:sldId id="262"/>
             <p14:sldId id="263"/>
           </p14:sldIdLst>
         </p14:section>
-        <p14:section name="Results" id="{85901ff1-6875-5771-133d-a9a628aed2a5}">
+        <p14:section name="Results" id="{bff05c9e-5350-fc9e-a1bc-a5ca9e23503c}">
           <p14:sldIdLst>
             <p14:sldId id="264"/>
             <p14:sldId id="265"/>
@@ -144,12 +144,12 @@
             <p14:sldId id="267"/>
           </p14:sldIdLst>
         </p14:section>
-        <p14:section name="Validation" id="{f9368fb3-0c9c-652b-9c95-3431d06c4de7}">
+        <p14:section name="Validation" id="{e569a8c1-abeb-152c-bec6-dd04644ace26}">
           <p14:sldIdLst>
             <p14:sldId id="268"/>
           </p14:sldIdLst>
         </p14:section>
-        <p14:section name="Close" id="{4898beb8-f625-c9f1-f85a-50d2d4d3b4f7}">
+        <p14:section name="Close" id="{b73275a0-fad0-4d42-c4db-b551958915af}">
           <p14:sldIdLst>
             <p14:sldId id="269"/>
           </p14:sldIdLst>
@@ -3157,68 +3157,14 @@
       </p:sp>
       <p:sp>
         <p:nvSpPr>
-          <p:cNvPr id="3" name="take-0"/>
-          <p:cNvSpPr/>
-          <p:nvPr/>
-        </p:nvSpPr>
-        <p:spPr>
-          <a:xfrm>
-            <a:off x="457200" y="1051560"/>
-            <a:ext cx="5760720" cy="512064"/>
-          </a:xfrm>
-          <a:prstGeom prst="roundRect">
-            <a:avLst>
-              <a:gd name="adj" fmla="val 14286"/>
-            </a:avLst>
-          </a:prstGeom>
-          <a:solidFill>
-            <a:schemeClr val="bg2"/>
-          </a:solidFill>
-          <a:ln w="12700">
-            <a:solidFill>
-              <a:schemeClr val="bg2"/>
-            </a:solidFill>
-            <a:prstDash val="solid"/>
-          </a:ln>
-        </p:spPr>
-      </p:sp>
-      <p:sp>
-        <p:nvSpPr>
-          <p:cNvPr id="4" name="chip"/>
-          <p:cNvSpPr/>
-          <p:nvPr/>
-        </p:nvSpPr>
-        <p:spPr>
-          <a:xfrm>
-            <a:off x="548640" y="1143000"/>
-            <a:ext cx="329184" cy="329184"/>
-          </a:xfrm>
-          <a:prstGeom prst="roundRect">
-            <a:avLst>
-              <a:gd name="adj" fmla="val 16667"/>
-            </a:avLst>
-          </a:prstGeom>
-          <a:solidFill>
-            <a:schemeClr val="accent1"/>
-          </a:solidFill>
-          <a:ln w="12700">
-            <a:solidFill>
-              <a:schemeClr val="accent1"/>
-            </a:solidFill>
-            <a:prstDash val="solid"/>
-          </a:ln>
-        </p:spPr>
-      </p:sp>
-      <p:sp>
-        <p:nvSpPr>
-          <p:cNvPr id="5" name="chip-label"/>
+          <p:cNvPr id="3" name="take-head"/>
           <p:cNvSpPr txBox="1"/>
           <p:nvPr/>
         </p:nvSpPr>
         <p:spPr>
           <a:xfrm>
-            <a:off x="548640" y="1143000"/>
-            <a:ext cx="329184" cy="329184"/>
+            <a:off x="457200" y="1051560"/>
+            <a:ext cx="2743200" cy="530352"/>
           </a:xfrm>
           <a:prstGeom prst="rect">
             <a:avLst/>
@@ -3230,34 +3176,42 @@
           <a:bodyPr wrap="square" lIns="0" tIns="0" rIns="0" bIns="0" rtlCol="0" anchor="ctr"/>
           <a:lstStyle/>
           <a:p>
-            <a:pPr algn="ctr" indent="0" marL="0">
-              <a:buNone/>
-            </a:pPr>
-            <a:r>
-              <a:rPr lang="en-US" sz="1100" b="1" dirty="0">
-                <a:solidFill>
-                  <a:schemeClr val="bg1"/>
-                </a:solidFill>
-                <a:latin typeface="Cambria" pitchFamily="34" charset="0"/>
-                <a:ea typeface="Cambria" pitchFamily="34" charset="-122"/>
-                <a:cs typeface="Cambria" pitchFamily="34" charset="-120"/>
-              </a:rPr>
-              <a:t>1</a:t>
-            </a:r>
-            <a:endParaRPr lang="en-US" sz="1100" dirty="0"/>
-          </a:p>
-        </p:txBody>
-      </p:sp>
-      <p:sp>
-        <p:nvSpPr>
-          <p:cNvPr id="6" name="take-head"/>
+            <a:pPr indent="0" marL="0">
+              <a:buNone/>
+            </a:pPr>
+            <a:r>
+              <a:rPr lang="en-US" sz="1300" b="1" dirty="0">
+                <a:solidFill>
+                  <a:schemeClr val="accent1"/>
+                </a:solidFill>
+              </a:rPr>
+              <a:t>1:  </a:t>
+            </a:r>
+            <a:pPr indent="0" marL="0">
+              <a:buNone/>
+            </a:pPr>
+            <a:r>
+              <a:rPr lang="en-US" sz="1300" b="1" dirty="0">
+                <a:solidFill>
+                  <a:schemeClr val="tx2"/>
+                </a:solidFill>
+              </a:rPr>
+              <a:t>Sorting follows the news</a:t>
+            </a:r>
+            <a:endParaRPr lang="en-US" sz="1300" dirty="0"/>
+          </a:p>
+        </p:txBody>
+      </p:sp>
+      <p:sp>
+        <p:nvSpPr>
+          <p:cNvPr id="4" name="take-body"/>
           <p:cNvSpPr txBox="1"/>
           <p:nvPr/>
         </p:nvSpPr>
         <p:spPr>
           <a:xfrm>
-            <a:off x="987552" y="1088136"/>
-            <a:ext cx="1600200" cy="438912"/>
+            <a:off x="3291840" y="1051560"/>
+            <a:ext cx="5394960" cy="530352"/>
           </a:xfrm>
           <a:prstGeom prst="rect">
             <a:avLst/>
@@ -3273,27 +3227,27 @@
               <a:buNone/>
             </a:pPr>
             <a:r>
-              <a:rPr lang="en-US" sz="1100" b="1" dirty="0">
-                <a:solidFill>
-                  <a:schemeClr val="tx2"/>
-                </a:solidFill>
-              </a:rPr>
-              <a:t>Sorting follows the news</a:t>
-            </a:r>
-            <a:endParaRPr lang="en-US" sz="1100" dirty="0"/>
-          </a:p>
-        </p:txBody>
-      </p:sp>
-      <p:sp>
-        <p:nvSpPr>
-          <p:cNvPr id="7" name="take-body"/>
+              <a:rPr lang="en-US" sz="1200" dirty="0">
+                <a:solidFill>
+                  <a:schemeClr val="tx1"/>
+                </a:solidFill>
+              </a:rPr>
+              <a:t>Optimistic public news makes individualists run relatively more; pessimistic news, collectivists.</a:t>
+            </a:r>
+            <a:endParaRPr lang="en-US" sz="1200" dirty="0"/>
+          </a:p>
+        </p:txBody>
+      </p:sp>
+      <p:sp>
+        <p:nvSpPr>
+          <p:cNvPr id="5" name="take-head"/>
           <p:cNvSpPr txBox="1"/>
           <p:nvPr/>
         </p:nvSpPr>
         <p:spPr>
           <a:xfrm>
-            <a:off x="2651760" y="1088136"/>
-            <a:ext cx="3474720" cy="438912"/>
+            <a:off x="457200" y="1627632"/>
+            <a:ext cx="2743200" cy="530352"/>
           </a:xfrm>
           <a:prstGeom prst="rect">
             <a:avLst/>
@@ -3309,81 +3263,38 @@
               <a:buNone/>
             </a:pPr>
             <a:r>
-              <a:rPr lang="en-US" sz="1000" dirty="0">
-                <a:solidFill>
-                  <a:schemeClr val="tx1"/>
-                </a:solidFill>
-              </a:rPr>
-              <a:t>Optimistic public news makes individualists run relatively more; pessimistic news, collectivists. 3 of 4 pre-registered tests pass, in all three bank versions.</a:t>
-            </a:r>
-            <a:endParaRPr lang="en-US" sz="1000" dirty="0"/>
-          </a:p>
-        </p:txBody>
-      </p:sp>
-      <p:sp>
-        <p:nvSpPr>
-          <p:cNvPr id="8" name="take-1"/>
-          <p:cNvSpPr/>
-          <p:nvPr/>
-        </p:nvSpPr>
-        <p:spPr>
-          <a:xfrm>
-            <a:off x="457200" y="1636776"/>
-            <a:ext cx="5760720" cy="512064"/>
-          </a:xfrm>
-          <a:prstGeom prst="roundRect">
-            <a:avLst>
-              <a:gd name="adj" fmla="val 14286"/>
-            </a:avLst>
-          </a:prstGeom>
-          <a:solidFill>
-            <a:schemeClr val="bg2"/>
-          </a:solidFill>
-          <a:ln w="12700">
-            <a:solidFill>
-              <a:schemeClr val="bg2"/>
-            </a:solidFill>
-            <a:prstDash val="solid"/>
-          </a:ln>
-        </p:spPr>
-      </p:sp>
-      <p:sp>
-        <p:nvSpPr>
-          <p:cNvPr id="9" name="chip"/>
-          <p:cNvSpPr/>
-          <p:nvPr/>
-        </p:nvSpPr>
-        <p:spPr>
-          <a:xfrm>
-            <a:off x="548640" y="1728216"/>
-            <a:ext cx="329184" cy="329184"/>
-          </a:xfrm>
-          <a:prstGeom prst="roundRect">
-            <a:avLst>
-              <a:gd name="adj" fmla="val 16667"/>
-            </a:avLst>
-          </a:prstGeom>
-          <a:solidFill>
-            <a:schemeClr val="accent1"/>
-          </a:solidFill>
-          <a:ln w="12700">
-            <a:solidFill>
-              <a:schemeClr val="accent1"/>
-            </a:solidFill>
-            <a:prstDash val="solid"/>
-          </a:ln>
-        </p:spPr>
-      </p:sp>
-      <p:sp>
-        <p:nvSpPr>
-          <p:cNvPr id="10" name="chip-label"/>
+              <a:rPr lang="en-US" sz="1300" b="1" dirty="0">
+                <a:solidFill>
+                  <a:schemeClr val="accent1"/>
+                </a:solidFill>
+              </a:rPr>
+              <a:t>2:  </a:t>
+            </a:r>
+            <a:pPr indent="0" marL="0">
+              <a:buNone/>
+            </a:pPr>
+            <a:r>
+              <a:rPr lang="en-US" sz="1300" b="1" dirty="0">
+                <a:solidFill>
+                  <a:schemeClr val="tx2"/>
+                </a:solidFill>
+              </a:rPr>
+              <a:t>Collectivists herd</a:t>
+            </a:r>
+            <a:endParaRPr lang="en-US" sz="1300" dirty="0"/>
+          </a:p>
+        </p:txBody>
+      </p:sp>
+      <p:sp>
+        <p:nvSpPr>
+          <p:cNvPr id="6" name="take-body"/>
           <p:cNvSpPr txBox="1"/>
           <p:nvPr/>
         </p:nvSpPr>
         <p:spPr>
           <a:xfrm>
-            <a:off x="548640" y="1728216"/>
-            <a:ext cx="329184" cy="329184"/>
+            <a:off x="3291840" y="1627632"/>
+            <a:ext cx="5394960" cy="530352"/>
           </a:xfrm>
           <a:prstGeom prst="rect">
             <a:avLst/>
@@ -3395,21 +3306,184 @@
           <a:bodyPr wrap="square" lIns="0" tIns="0" rIns="0" bIns="0" rtlCol="0" anchor="ctr"/>
           <a:lstStyle/>
           <a:p>
-            <a:pPr algn="ctr" indent="0" marL="0">
-              <a:buNone/>
-            </a:pPr>
-            <a:r>
-              <a:rPr lang="en-US" sz="1100" b="1" dirty="0">
-                <a:solidFill>
-                  <a:schemeClr val="bg1"/>
-                </a:solidFill>
-                <a:latin typeface="Cambria" pitchFamily="34" charset="0"/>
-                <a:ea typeface="Cambria" pitchFamily="34" charset="-122"/>
-                <a:cs typeface="Cambria" pitchFamily="34" charset="-120"/>
-              </a:rPr>
-              <a:t>2</a:t>
-            </a:r>
-            <a:endParaRPr lang="en-US" sz="1100" dirty="0"/>
+            <a:pPr indent="0" marL="0">
+              <a:buNone/>
+            </a:pPr>
+            <a:r>
+              <a:rPr lang="en-US" sz="1200" dirty="0">
+                <a:solidFill>
+                  <a:schemeClr val="tx1"/>
+                </a:solidFill>
+              </a:rPr>
+              <a:t>Their chance of withdrawing jumps from 0.15 to 0.93 once 20–35% of neighbours are out; individualists level off near 0.3.</a:t>
+            </a:r>
+            <a:endParaRPr lang="en-US" sz="1200" dirty="0"/>
+          </a:p>
+        </p:txBody>
+      </p:sp>
+      <p:sp>
+        <p:nvSpPr>
+          <p:cNvPr id="7" name="take-head"/>
+          <p:cNvSpPr txBox="1"/>
+          <p:nvPr/>
+        </p:nvSpPr>
+        <p:spPr>
+          <a:xfrm>
+            <a:off x="457200" y="2203704"/>
+            <a:ext cx="2743200" cy="530352"/>
+          </a:xfrm>
+          <a:prstGeom prst="rect">
+            <a:avLst/>
+          </a:prstGeom>
+          <a:noFill/>
+          <a:ln/>
+        </p:spPr>
+        <p:txBody>
+          <a:bodyPr wrap="square" lIns="0" tIns="0" rIns="0" bIns="0" rtlCol="0" anchor="ctr"/>
+          <a:lstStyle/>
+          <a:p>
+            <a:pPr indent="0" marL="0">
+              <a:buNone/>
+            </a:pPr>
+            <a:r>
+              <a:rPr lang="en-US" sz="1300" b="1" dirty="0">
+                <a:solidFill>
+                  <a:schemeClr val="accent1"/>
+                </a:solidFill>
+              </a:rPr>
+              <a:t>3:  </a:t>
+            </a:r>
+            <a:pPr indent="0" marL="0">
+              <a:buNone/>
+            </a:pPr>
+            <a:r>
+              <a:rPr lang="en-US" sz="1300" b="1" dirty="0">
+                <a:solidFill>
+                  <a:schemeClr val="tx2"/>
+                </a:solidFill>
+              </a:rPr>
+              <a:t>More individualists, fewer failures</a:t>
+            </a:r>
+            <a:endParaRPr lang="en-US" sz="1300" dirty="0"/>
+          </a:p>
+        </p:txBody>
+      </p:sp>
+      <p:sp>
+        <p:nvSpPr>
+          <p:cNvPr id="8" name="take-body"/>
+          <p:cNvSpPr txBox="1"/>
+          <p:nvPr/>
+        </p:nvSpPr>
+        <p:spPr>
+          <a:xfrm>
+            <a:off x="3291840" y="2203704"/>
+            <a:ext cx="5394960" cy="530352"/>
+          </a:xfrm>
+          <a:prstGeom prst="rect">
+            <a:avLst/>
+          </a:prstGeom>
+          <a:noFill/>
+          <a:ln/>
+        </p:spPr>
+        <p:txBody>
+          <a:bodyPr wrap="square" lIns="0" tIns="0" rIns="0" bIns="0" rtlCol="0" anchor="ctr"/>
+          <a:lstStyle/>
+          <a:p>
+            <a:pPr indent="0" marL="0">
+              <a:buNone/>
+            </a:pPr>
+            <a:r>
+              <a:rPr lang="en-US" sz="1200" dirty="0">
+                <a:solidFill>
+                  <a:schemeClr val="tx1"/>
+                </a:solidFill>
+              </a:rPr>
+              <a:t>P(fail) falls from 0.67 to 0.08 as the individualist share goes from 0 to 1.</a:t>
+            </a:r>
+            <a:endParaRPr lang="en-US" sz="1200" dirty="0"/>
+          </a:p>
+        </p:txBody>
+      </p:sp>
+      <p:sp>
+        <p:nvSpPr>
+          <p:cNvPr id="9" name="take-head"/>
+          <p:cNvSpPr txBox="1"/>
+          <p:nvPr/>
+        </p:nvSpPr>
+        <p:spPr>
+          <a:xfrm>
+            <a:off x="457200" y="2779776"/>
+            <a:ext cx="2743200" cy="530352"/>
+          </a:xfrm>
+          <a:prstGeom prst="rect">
+            <a:avLst/>
+          </a:prstGeom>
+          <a:noFill/>
+          <a:ln/>
+        </p:spPr>
+        <p:txBody>
+          <a:bodyPr wrap="square" lIns="0" tIns="0" rIns="0" bIns="0" rtlCol="0" anchor="ctr"/>
+          <a:lstStyle/>
+          <a:p>
+            <a:pPr indent="0" marL="0">
+              <a:buNone/>
+            </a:pPr>
+            <a:r>
+              <a:rPr lang="en-US" sz="1300" b="1" dirty="0">
+                <a:solidFill>
+                  <a:schemeClr val="accent1"/>
+                </a:solidFill>
+              </a:rPr>
+              <a:t>4:  </a:t>
+            </a:r>
+            <a:pPr indent="0" marL="0">
+              <a:buNone/>
+            </a:pPr>
+            <a:r>
+              <a:rPr lang="en-US" sz="1300" b="1" dirty="0">
+                <a:solidFill>
+                  <a:schemeClr val="tx2"/>
+                </a:solidFill>
+              </a:rPr>
+              <a:t>Stale news cuts both ways</a:t>
+            </a:r>
+            <a:endParaRPr lang="en-US" sz="1300" dirty="0"/>
+          </a:p>
+        </p:txBody>
+      </p:sp>
+      <p:sp>
+        <p:nvSpPr>
+          <p:cNvPr id="10" name="take-body"/>
+          <p:cNvSpPr txBox="1"/>
+          <p:nvPr/>
+        </p:nvSpPr>
+        <p:spPr>
+          <a:xfrm>
+            <a:off x="3291840" y="2779776"/>
+            <a:ext cx="5394960" cy="530352"/>
+          </a:xfrm>
+          <a:prstGeom prst="rect">
+            <a:avLst/>
+          </a:prstGeom>
+          <a:noFill/>
+          <a:ln/>
+        </p:spPr>
+        <p:txBody>
+          <a:bodyPr wrap="square" lIns="0" tIns="0" rIns="0" bIns="0" rtlCol="0" anchor="ctr"/>
+          <a:lstStyle/>
+          <a:p>
+            <a:pPr indent="0" marL="0">
+              <a:buNone/>
+            </a:pPr>
+            <a:r>
+              <a:rPr lang="en-US" sz="1200" dirty="0">
+                <a:solidFill>
+                  <a:schemeClr val="tx1"/>
+                </a:solidFill>
+              </a:rPr>
+              <a:t>A stale optimistic signal halves failure, a stale pessimistic one raises it by half. Accurate news barely moves it.</a:t>
+            </a:r>
+            <a:endParaRPr lang="en-US" sz="1200" dirty="0"/>
           </a:p>
         </p:txBody>
       </p:sp>
@@ -3421,8 +3495,8 @@
         </p:nvSpPr>
         <p:spPr>
           <a:xfrm>
-            <a:off x="987552" y="1673352"/>
-            <a:ext cx="1600200" cy="438912"/>
+            <a:off x="457200" y="3355848"/>
+            <a:ext cx="2743200" cy="530352"/>
           </a:xfrm>
           <a:prstGeom prst="rect">
             <a:avLst/>
@@ -3438,14 +3512,25 @@
               <a:buNone/>
             </a:pPr>
             <a:r>
-              <a:rPr lang="en-US" sz="1100" b="1" dirty="0">
+              <a:rPr lang="en-US" sz="1300" b="1" dirty="0">
+                <a:solidFill>
+                  <a:schemeClr val="accent1"/>
+                </a:solidFill>
+              </a:rPr>
+              <a:t>5:  </a:t>
+            </a:r>
+            <a:pPr indent="0" marL="0">
+              <a:buNone/>
+            </a:pPr>
+            <a:r>
+              <a:rPr lang="en-US" sz="1300" b="1" dirty="0">
                 <a:solidFill>
                   <a:schemeClr val="tx2"/>
                 </a:solidFill>
               </a:rPr>
-              <a:t>Collectivists herd</a:t>
-            </a:r>
-            <a:endParaRPr lang="en-US" sz="1100" dirty="0"/>
+              <a:t>Capping the largest deposits</a:t>
+            </a:r>
+            <a:endParaRPr lang="en-US" sz="1300" dirty="0"/>
           </a:p>
         </p:txBody>
       </p:sp>
@@ -3457,8 +3542,8 @@
         </p:nvSpPr>
         <p:spPr>
           <a:xfrm>
-            <a:off x="2651760" y="1673352"/>
-            <a:ext cx="3474720" cy="438912"/>
+            <a:off x="3291840" y="3355848"/>
+            <a:ext cx="5394960" cy="530352"/>
           </a:xfrm>
           <a:prstGeom prst="rect">
             <a:avLst/>
@@ -3474,81 +3559,27 @@
               <a:buNone/>
             </a:pPr>
             <a:r>
-              <a:rPr lang="en-US" sz="1000" dirty="0">
+              <a:rPr lang="en-US" sz="1200" dirty="0">
                 <a:solidFill>
                   <a:schemeClr val="tx1"/>
                 </a:solidFill>
               </a:rPr>
-              <a:t>Their chance of withdrawing jumps from 0.15 to 0.93 once 20–35% of neighbours are out; individualists level off near 0.3.</a:t>
-            </a:r>
-            <a:endParaRPr lang="en-US" sz="1000" dirty="0"/>
-          </a:p>
-        </p:txBody>
-      </p:sp>
-      <p:sp>
-        <p:nvSpPr>
-          <p:cNvPr id="13" name="take-2"/>
-          <p:cNvSpPr/>
-          <p:nvPr/>
-        </p:nvSpPr>
-        <p:spPr>
-          <a:xfrm>
-            <a:off x="457200" y="2221992"/>
-            <a:ext cx="5760720" cy="512064"/>
-          </a:xfrm>
-          <a:prstGeom prst="roundRect">
-            <a:avLst>
-              <a:gd name="adj" fmla="val 14286"/>
-            </a:avLst>
-          </a:prstGeom>
-          <a:solidFill>
-            <a:schemeClr val="bg2"/>
-          </a:solidFill>
-          <a:ln w="12700">
-            <a:solidFill>
-              <a:schemeClr val="bg2"/>
-            </a:solidFill>
-            <a:prstDash val="solid"/>
-          </a:ln>
-        </p:spPr>
-      </p:sp>
-      <p:sp>
-        <p:nvSpPr>
-          <p:cNvPr id="14" name="chip"/>
-          <p:cNvSpPr/>
-          <p:nvPr/>
-        </p:nvSpPr>
-        <p:spPr>
-          <a:xfrm>
-            <a:off x="548640" y="2313432"/>
-            <a:ext cx="329184" cy="329184"/>
-          </a:xfrm>
-          <a:prstGeom prst="roundRect">
-            <a:avLst>
-              <a:gd name="adj" fmla="val 16667"/>
-            </a:avLst>
-          </a:prstGeom>
-          <a:solidFill>
-            <a:schemeClr val="accent1"/>
-          </a:solidFill>
-          <a:ln w="12700">
-            <a:solidFill>
-              <a:schemeClr val="accent1"/>
-            </a:solidFill>
-            <a:prstDash val="solid"/>
-          </a:ln>
-        </p:spPr>
-      </p:sp>
-      <p:sp>
-        <p:nvSpPr>
-          <p:cNvPr id="15" name="chip-label"/>
+              <a:t>A 1% cap brings failure down to the no-concentration bank’s level; the culture gradient is unchanged.</a:t>
+            </a:r>
+            <a:endParaRPr lang="en-US" sz="1200" dirty="0"/>
+          </a:p>
+        </p:txBody>
+      </p:sp>
+      <p:sp>
+        <p:nvSpPr>
+          <p:cNvPr id="13" name="take-head"/>
           <p:cNvSpPr txBox="1"/>
           <p:nvPr/>
         </p:nvSpPr>
         <p:spPr>
           <a:xfrm>
-            <a:off x="548640" y="2313432"/>
-            <a:ext cx="329184" cy="329184"/>
+            <a:off x="457200" y="3931920"/>
+            <a:ext cx="2743200" cy="530352"/>
           </a:xfrm>
           <a:prstGeom prst="rect">
             <a:avLst/>
@@ -3560,34 +3591,42 @@
           <a:bodyPr wrap="square" lIns="0" tIns="0" rIns="0" bIns="0" rtlCol="0" anchor="ctr"/>
           <a:lstStyle/>
           <a:p>
-            <a:pPr algn="ctr" indent="0" marL="0">
-              <a:buNone/>
-            </a:pPr>
-            <a:r>
-              <a:rPr lang="en-US" sz="1100" b="1" dirty="0">
-                <a:solidFill>
-                  <a:schemeClr val="bg1"/>
-                </a:solidFill>
-                <a:latin typeface="Cambria" pitchFamily="34" charset="0"/>
-                <a:ea typeface="Cambria" pitchFamily="34" charset="-122"/>
-                <a:cs typeface="Cambria" pitchFamily="34" charset="-120"/>
-              </a:rPr>
-              <a:t>3</a:t>
-            </a:r>
-            <a:endParaRPr lang="en-US" sz="1100" dirty="0"/>
-          </a:p>
-        </p:txBody>
-      </p:sp>
-      <p:sp>
-        <p:nvSpPr>
-          <p:cNvPr id="16" name="take-head"/>
+            <a:pPr indent="0" marL="0">
+              <a:buNone/>
+            </a:pPr>
+            <a:r>
+              <a:rPr lang="en-US" sz="1300" b="1" dirty="0">
+                <a:solidFill>
+                  <a:schemeClr val="accent1"/>
+                </a:solidFill>
+              </a:rPr>
+              <a:t>6:  </a:t>
+            </a:r>
+            <a:pPr indent="0" marL="0">
+              <a:buNone/>
+            </a:pPr>
+            <a:r>
+              <a:rPr lang="en-US" sz="1300" b="1" dirty="0">
+                <a:solidFill>
+                  <a:schemeClr val="tx2"/>
+                </a:solidFill>
+              </a:rPr>
+              <a:t>Not yet matched</a:t>
+            </a:r>
+            <a:endParaRPr lang="en-US" sz="1300" dirty="0"/>
+          </a:p>
+        </p:txBody>
+      </p:sp>
+      <p:sp>
+        <p:nvSpPr>
+          <p:cNvPr id="14" name="take-body"/>
           <p:cNvSpPr txBox="1"/>
           <p:nvPr/>
         </p:nvSpPr>
         <p:spPr>
           <a:xfrm>
-            <a:off x="987552" y="2258568"/>
-            <a:ext cx="1600200" cy="438912"/>
+            <a:off x="3291840" y="3931920"/>
+            <a:ext cx="5394960" cy="530352"/>
           </a:xfrm>
           <a:prstGeom prst="rect">
             <a:avLst/>
@@ -3603,702 +3642,14 @@
               <a:buNone/>
             </a:pPr>
             <a:r>
-              <a:rPr lang="en-US" sz="1100" b="1" dirty="0">
-                <a:solidFill>
-                  <a:schemeClr val="tx2"/>
-                </a:solidFill>
-              </a:rPr>
-              <a:t>More individualists, fewer failures</a:t>
-            </a:r>
-            <a:endParaRPr lang="en-US" sz="1100" dirty="0"/>
-          </a:p>
-        </p:txBody>
-      </p:sp>
-      <p:sp>
-        <p:nvSpPr>
-          <p:cNvPr id="17" name="take-body"/>
-          <p:cNvSpPr txBox="1"/>
-          <p:nvPr/>
-        </p:nvSpPr>
-        <p:spPr>
-          <a:xfrm>
-            <a:off x="2651760" y="2258568"/>
-            <a:ext cx="3474720" cy="438912"/>
-          </a:xfrm>
-          <a:prstGeom prst="rect">
-            <a:avLst/>
-          </a:prstGeom>
-          <a:noFill/>
-          <a:ln/>
-        </p:spPr>
-        <p:txBody>
-          <a:bodyPr wrap="square" lIns="0" tIns="0" rIns="0" bIns="0" rtlCol="0" anchor="ctr"/>
-          <a:lstStyle/>
-          <a:p>
-            <a:pPr indent="0" marL="0">
-              <a:buNone/>
-            </a:pPr>
-            <a:r>
-              <a:rPr lang="en-US" sz="1000" dirty="0">
+              <a:rPr lang="en-US" sz="1200" dirty="0">
                 <a:solidFill>
                   <a:schemeClr val="tx1"/>
                 </a:solidFill>
               </a:rPr>
-              <a:t>P(fail) falls from 0.67 to 0.08 as the individualist share goes from 0 to 1. Monotone; no interior peak.</a:t>
-            </a:r>
-            <a:endParaRPr lang="en-US" sz="1000" dirty="0"/>
-          </a:p>
-        </p:txBody>
-      </p:sp>
-      <p:sp>
-        <p:nvSpPr>
-          <p:cNvPr id="18" name="take-3"/>
-          <p:cNvSpPr/>
-          <p:nvPr/>
-        </p:nvSpPr>
-        <p:spPr>
-          <a:xfrm>
-            <a:off x="457200" y="2807208"/>
-            <a:ext cx="5760720" cy="512064"/>
-          </a:xfrm>
-          <a:prstGeom prst="roundRect">
-            <a:avLst>
-              <a:gd name="adj" fmla="val 14286"/>
-            </a:avLst>
-          </a:prstGeom>
-          <a:solidFill>
-            <a:schemeClr val="bg2"/>
-          </a:solidFill>
-          <a:ln w="12700">
-            <a:solidFill>
-              <a:schemeClr val="bg2"/>
-            </a:solidFill>
-            <a:prstDash val="solid"/>
-          </a:ln>
-        </p:spPr>
-      </p:sp>
-      <p:sp>
-        <p:nvSpPr>
-          <p:cNvPr id="19" name="chip"/>
-          <p:cNvSpPr/>
-          <p:nvPr/>
-        </p:nvSpPr>
-        <p:spPr>
-          <a:xfrm>
-            <a:off x="548640" y="2898648"/>
-            <a:ext cx="329184" cy="329184"/>
-          </a:xfrm>
-          <a:prstGeom prst="roundRect">
-            <a:avLst>
-              <a:gd name="adj" fmla="val 16667"/>
-            </a:avLst>
-          </a:prstGeom>
-          <a:solidFill>
-            <a:schemeClr val="accent1"/>
-          </a:solidFill>
-          <a:ln w="12700">
-            <a:solidFill>
-              <a:schemeClr val="accent1"/>
-            </a:solidFill>
-            <a:prstDash val="solid"/>
-          </a:ln>
-        </p:spPr>
-      </p:sp>
-      <p:sp>
-        <p:nvSpPr>
-          <p:cNvPr id="20" name="chip-label"/>
-          <p:cNvSpPr txBox="1"/>
-          <p:nvPr/>
-        </p:nvSpPr>
-        <p:spPr>
-          <a:xfrm>
-            <a:off x="548640" y="2898648"/>
-            <a:ext cx="329184" cy="329184"/>
-          </a:xfrm>
-          <a:prstGeom prst="rect">
-            <a:avLst/>
-          </a:prstGeom>
-          <a:noFill/>
-          <a:ln/>
-        </p:spPr>
-        <p:txBody>
-          <a:bodyPr wrap="square" lIns="0" tIns="0" rIns="0" bIns="0" rtlCol="0" anchor="ctr"/>
-          <a:lstStyle/>
-          <a:p>
-            <a:pPr algn="ctr" indent="0" marL="0">
-              <a:buNone/>
-            </a:pPr>
-            <a:r>
-              <a:rPr lang="en-US" sz="1100" b="1" dirty="0">
-                <a:solidFill>
-                  <a:schemeClr val="bg1"/>
-                </a:solidFill>
-                <a:latin typeface="Cambria" pitchFamily="34" charset="0"/>
-                <a:ea typeface="Cambria" pitchFamily="34" charset="-122"/>
-                <a:cs typeface="Cambria" pitchFamily="34" charset="-120"/>
-              </a:rPr>
-              <a:t>4</a:t>
-            </a:r>
-            <a:endParaRPr lang="en-US" sz="1100" dirty="0"/>
-          </a:p>
-        </p:txBody>
-      </p:sp>
-      <p:sp>
-        <p:nvSpPr>
-          <p:cNvPr id="21" name="take-head"/>
-          <p:cNvSpPr txBox="1"/>
-          <p:nvPr/>
-        </p:nvSpPr>
-        <p:spPr>
-          <a:xfrm>
-            <a:off x="987552" y="2843784"/>
-            <a:ext cx="1600200" cy="438912"/>
-          </a:xfrm>
-          <a:prstGeom prst="rect">
-            <a:avLst/>
-          </a:prstGeom>
-          <a:noFill/>
-          <a:ln/>
-        </p:spPr>
-        <p:txBody>
-          <a:bodyPr wrap="square" lIns="0" tIns="0" rIns="0" bIns="0" rtlCol="0" anchor="ctr"/>
-          <a:lstStyle/>
-          <a:p>
-            <a:pPr indent="0" marL="0">
-              <a:buNone/>
-            </a:pPr>
-            <a:r>
-              <a:rPr lang="en-US" sz="1100" b="1" dirty="0">
-                <a:solidFill>
-                  <a:schemeClr val="tx2"/>
-                </a:solidFill>
-              </a:rPr>
-              <a:t>Stale news cuts both ways</a:t>
-            </a:r>
-            <a:endParaRPr lang="en-US" sz="1100" dirty="0"/>
-          </a:p>
-        </p:txBody>
-      </p:sp>
-      <p:sp>
-        <p:nvSpPr>
-          <p:cNvPr id="22" name="take-body"/>
-          <p:cNvSpPr txBox="1"/>
-          <p:nvPr/>
-        </p:nvSpPr>
-        <p:spPr>
-          <a:xfrm>
-            <a:off x="2651760" y="2843784"/>
-            <a:ext cx="3474720" cy="438912"/>
-          </a:xfrm>
-          <a:prstGeom prst="rect">
-            <a:avLst/>
-          </a:prstGeom>
-          <a:noFill/>
-          <a:ln/>
-        </p:spPr>
-        <p:txBody>
-          <a:bodyPr wrap="square" lIns="0" tIns="0" rIns="0" bIns="0" rtlCol="0" anchor="ctr"/>
-          <a:lstStyle/>
-          <a:p>
-            <a:pPr indent="0" marL="0">
-              <a:buNone/>
-            </a:pPr>
-            <a:r>
-              <a:rPr lang="en-US" sz="1000" dirty="0">
-                <a:solidFill>
-                  <a:schemeClr val="tx1"/>
-                </a:solidFill>
-              </a:rPr>
-              <a:t>A stale optimistic signal halves failure, a stale pessimistic one raises it by half. Accurate news barely moves it.</a:t>
-            </a:r>
-            <a:endParaRPr lang="en-US" sz="1000" dirty="0"/>
-          </a:p>
-        </p:txBody>
-      </p:sp>
-      <p:sp>
-        <p:nvSpPr>
-          <p:cNvPr id="23" name="take-4"/>
-          <p:cNvSpPr/>
-          <p:nvPr/>
-        </p:nvSpPr>
-        <p:spPr>
-          <a:xfrm>
-            <a:off x="457200" y="3392424"/>
-            <a:ext cx="5760720" cy="512064"/>
-          </a:xfrm>
-          <a:prstGeom prst="roundRect">
-            <a:avLst>
-              <a:gd name="adj" fmla="val 14286"/>
-            </a:avLst>
-          </a:prstGeom>
-          <a:solidFill>
-            <a:schemeClr val="bg2"/>
-          </a:solidFill>
-          <a:ln w="12700">
-            <a:solidFill>
-              <a:schemeClr val="bg2"/>
-            </a:solidFill>
-            <a:prstDash val="solid"/>
-          </a:ln>
-        </p:spPr>
-      </p:sp>
-      <p:sp>
-        <p:nvSpPr>
-          <p:cNvPr id="24" name="chip"/>
-          <p:cNvSpPr/>
-          <p:nvPr/>
-        </p:nvSpPr>
-        <p:spPr>
-          <a:xfrm>
-            <a:off x="548640" y="3483864"/>
-            <a:ext cx="329184" cy="329184"/>
-          </a:xfrm>
-          <a:prstGeom prst="roundRect">
-            <a:avLst>
-              <a:gd name="adj" fmla="val 16667"/>
-            </a:avLst>
-          </a:prstGeom>
-          <a:solidFill>
-            <a:schemeClr val="accent1"/>
-          </a:solidFill>
-          <a:ln w="12700">
-            <a:solidFill>
-              <a:schemeClr val="accent1"/>
-            </a:solidFill>
-            <a:prstDash val="solid"/>
-          </a:ln>
-        </p:spPr>
-      </p:sp>
-      <p:sp>
-        <p:nvSpPr>
-          <p:cNvPr id="25" name="chip-label"/>
-          <p:cNvSpPr txBox="1"/>
-          <p:nvPr/>
-        </p:nvSpPr>
-        <p:spPr>
-          <a:xfrm>
-            <a:off x="548640" y="3483864"/>
-            <a:ext cx="329184" cy="329184"/>
-          </a:xfrm>
-          <a:prstGeom prst="rect">
-            <a:avLst/>
-          </a:prstGeom>
-          <a:noFill/>
-          <a:ln/>
-        </p:spPr>
-        <p:txBody>
-          <a:bodyPr wrap="square" lIns="0" tIns="0" rIns="0" bIns="0" rtlCol="0" anchor="ctr"/>
-          <a:lstStyle/>
-          <a:p>
-            <a:pPr algn="ctr" indent="0" marL="0">
-              <a:buNone/>
-            </a:pPr>
-            <a:r>
-              <a:rPr lang="en-US" sz="1100" b="1" dirty="0">
-                <a:solidFill>
-                  <a:schemeClr val="bg1"/>
-                </a:solidFill>
-                <a:latin typeface="Cambria" pitchFamily="34" charset="0"/>
-                <a:ea typeface="Cambria" pitchFamily="34" charset="-122"/>
-                <a:cs typeface="Cambria" pitchFamily="34" charset="-120"/>
-              </a:rPr>
-              <a:t>5</a:t>
-            </a:r>
-            <a:endParaRPr lang="en-US" sz="1100" dirty="0"/>
-          </a:p>
-        </p:txBody>
-      </p:sp>
-      <p:sp>
-        <p:nvSpPr>
-          <p:cNvPr id="26" name="take-head"/>
-          <p:cNvSpPr txBox="1"/>
-          <p:nvPr/>
-        </p:nvSpPr>
-        <p:spPr>
-          <a:xfrm>
-            <a:off x="987552" y="3429000"/>
-            <a:ext cx="1600200" cy="438912"/>
-          </a:xfrm>
-          <a:prstGeom prst="rect">
-            <a:avLst/>
-          </a:prstGeom>
-          <a:noFill/>
-          <a:ln/>
-        </p:spPr>
-        <p:txBody>
-          <a:bodyPr wrap="square" lIns="0" tIns="0" rIns="0" bIns="0" rtlCol="0" anchor="ctr"/>
-          <a:lstStyle/>
-          <a:p>
-            <a:pPr indent="0" marL="0">
-              <a:buNone/>
-            </a:pPr>
-            <a:r>
-              <a:rPr lang="en-US" sz="1100" b="1" dirty="0">
-                <a:solidFill>
-                  <a:schemeClr val="tx2"/>
-                </a:solidFill>
-              </a:rPr>
-              <a:t>Capping the largest deposits</a:t>
-            </a:r>
-            <a:endParaRPr lang="en-US" sz="1100" dirty="0"/>
-          </a:p>
-        </p:txBody>
-      </p:sp>
-      <p:sp>
-        <p:nvSpPr>
-          <p:cNvPr id="27" name="take-body"/>
-          <p:cNvSpPr txBox="1"/>
-          <p:nvPr/>
-        </p:nvSpPr>
-        <p:spPr>
-          <a:xfrm>
-            <a:off x="2651760" y="3429000"/>
-            <a:ext cx="3474720" cy="438912"/>
-          </a:xfrm>
-          <a:prstGeom prst="rect">
-            <a:avLst/>
-          </a:prstGeom>
-          <a:noFill/>
-          <a:ln/>
-        </p:spPr>
-        <p:txBody>
-          <a:bodyPr wrap="square" lIns="0" tIns="0" rIns="0" bIns="0" rtlCol="0" anchor="ctr"/>
-          <a:lstStyle/>
-          <a:p>
-            <a:pPr indent="0" marL="0">
-              <a:buNone/>
-            </a:pPr>
-            <a:r>
-              <a:rPr lang="en-US" sz="1000" dirty="0">
-                <a:solidFill>
-                  <a:schemeClr val="tx1"/>
-                </a:solidFill>
-              </a:rPr>
-              <a:t>A 1% cap brings failure down to the no-concentration bank’s level; the culture gradient is unchanged.</a:t>
-            </a:r>
-            <a:endParaRPr lang="en-US" sz="1000" dirty="0"/>
-          </a:p>
-        </p:txBody>
-      </p:sp>
-      <p:sp>
-        <p:nvSpPr>
-          <p:cNvPr id="28" name="take-5"/>
-          <p:cNvSpPr/>
-          <p:nvPr/>
-        </p:nvSpPr>
-        <p:spPr>
-          <a:xfrm>
-            <a:off x="457200" y="3977640"/>
-            <a:ext cx="5760720" cy="512064"/>
-          </a:xfrm>
-          <a:prstGeom prst="roundRect">
-            <a:avLst>
-              <a:gd name="adj" fmla="val 14286"/>
-            </a:avLst>
-          </a:prstGeom>
-          <a:solidFill>
-            <a:schemeClr val="accent4"/>
-          </a:solidFill>
-          <a:ln w="12700">
-            <a:solidFill>
-              <a:schemeClr val="accent4"/>
-            </a:solidFill>
-            <a:prstDash val="solid"/>
-          </a:ln>
-        </p:spPr>
-      </p:sp>
-      <p:sp>
-        <p:nvSpPr>
-          <p:cNvPr id="29" name="chip"/>
-          <p:cNvSpPr/>
-          <p:nvPr/>
-        </p:nvSpPr>
-        <p:spPr>
-          <a:xfrm>
-            <a:off x="548640" y="4069080"/>
-            <a:ext cx="329184" cy="329184"/>
-          </a:xfrm>
-          <a:prstGeom prst="roundRect">
-            <a:avLst>
-              <a:gd name="adj" fmla="val 16667"/>
-            </a:avLst>
-          </a:prstGeom>
-          <a:solidFill>
-            <a:schemeClr val="accent2"/>
-          </a:solidFill>
-          <a:ln w="12700">
-            <a:solidFill>
-              <a:schemeClr val="accent2"/>
-            </a:solidFill>
-            <a:prstDash val="solid"/>
-          </a:ln>
-        </p:spPr>
-      </p:sp>
-      <p:sp>
-        <p:nvSpPr>
-          <p:cNvPr id="30" name="chip-label"/>
-          <p:cNvSpPr txBox="1"/>
-          <p:nvPr/>
-        </p:nvSpPr>
-        <p:spPr>
-          <a:xfrm>
-            <a:off x="548640" y="4069080"/>
-            <a:ext cx="329184" cy="329184"/>
-          </a:xfrm>
-          <a:prstGeom prst="rect">
-            <a:avLst/>
-          </a:prstGeom>
-          <a:noFill/>
-          <a:ln/>
-        </p:spPr>
-        <p:txBody>
-          <a:bodyPr wrap="square" lIns="0" tIns="0" rIns="0" bIns="0" rtlCol="0" anchor="ctr"/>
-          <a:lstStyle/>
-          <a:p>
-            <a:pPr algn="ctr" indent="0" marL="0">
-              <a:buNone/>
-            </a:pPr>
-            <a:r>
-              <a:rPr lang="en-US" sz="1100" b="1" dirty="0">
-                <a:solidFill>
-                  <a:schemeClr val="bg1"/>
-                </a:solidFill>
-                <a:latin typeface="Cambria" pitchFamily="34" charset="0"/>
-                <a:ea typeface="Cambria" pitchFamily="34" charset="-122"/>
-                <a:cs typeface="Cambria" pitchFamily="34" charset="-120"/>
-              </a:rPr>
-              <a:t>6</a:t>
-            </a:r>
-            <a:endParaRPr lang="en-US" sz="1100" dirty="0"/>
-          </a:p>
-        </p:txBody>
-      </p:sp>
-      <p:sp>
-        <p:nvSpPr>
-          <p:cNvPr id="31" name="take-head"/>
-          <p:cNvSpPr txBox="1"/>
-          <p:nvPr/>
-        </p:nvSpPr>
-        <p:spPr>
-          <a:xfrm>
-            <a:off x="987552" y="4014216"/>
-            <a:ext cx="1600200" cy="438912"/>
-          </a:xfrm>
-          <a:prstGeom prst="rect">
-            <a:avLst/>
-          </a:prstGeom>
-          <a:noFill/>
-          <a:ln/>
-        </p:spPr>
-        <p:txBody>
-          <a:bodyPr wrap="square" lIns="0" tIns="0" rIns="0" bIns="0" rtlCol="0" anchor="ctr"/>
-          <a:lstStyle/>
-          <a:p>
-            <a:pPr indent="0" marL="0">
-              <a:buNone/>
-            </a:pPr>
-            <a:r>
-              <a:rPr lang="en-US" sz="1100" b="1" dirty="0">
-                <a:solidFill>
-                  <a:schemeClr val="tx2"/>
-                </a:solidFill>
-              </a:rPr>
-              <a:t>Not yet matched</a:t>
-            </a:r>
-            <a:endParaRPr lang="en-US" sz="1100" dirty="0"/>
-          </a:p>
-        </p:txBody>
-      </p:sp>
-      <p:sp>
-        <p:nvSpPr>
-          <p:cNvPr id="32" name="take-body"/>
-          <p:cNvSpPr txBox="1"/>
-          <p:nvPr/>
-        </p:nvSpPr>
-        <p:spPr>
-          <a:xfrm>
-            <a:off x="2651760" y="4014216"/>
-            <a:ext cx="3474720" cy="438912"/>
-          </a:xfrm>
-          <a:prstGeom prst="rect">
-            <a:avLst/>
-          </a:prstGeom>
-          <a:noFill/>
-          <a:ln/>
-        </p:spPr>
-        <p:txBody>
-          <a:bodyPr wrap="square" lIns="0" tIns="0" rIns="0" bIns="0" rtlCol="0" anchor="ctr"/>
-          <a:lstStyle/>
-          <a:p>
-            <a:pPr indent="0" marL="0">
-              <a:buNone/>
-            </a:pPr>
-            <a:r>
-              <a:rPr lang="en-US" sz="1000" dirty="0">
-                <a:solidFill>
-                  <a:schemeClr val="tx1"/>
-                </a:solidFill>
-              </a:rPr>
-              <a:t>How Celsius’s largest depositors exit: one-shot share 0.35 there, 0.93 or more in the model.</a:t>
-            </a:r>
-            <a:endParaRPr lang="en-US" sz="1000" dirty="0"/>
-          </a:p>
-        </p:txBody>
-      </p:sp>
-      <p:sp>
-        <p:nvSpPr>
-          <p:cNvPr id="33" name="next"/>
-          <p:cNvSpPr/>
-          <p:nvPr/>
-        </p:nvSpPr>
-        <p:spPr>
-          <a:xfrm>
-            <a:off x="6400800" y="1051560"/>
-            <a:ext cx="2286000" cy="3438144"/>
-          </a:xfrm>
-          <a:prstGeom prst="roundRect">
-            <a:avLst>
-              <a:gd name="adj" fmla="val 3200"/>
-            </a:avLst>
-          </a:prstGeom>
-          <a:solidFill>
-            <a:schemeClr val="bg2"/>
-          </a:solidFill>
-          <a:ln w="12700">
-            <a:solidFill>
-              <a:schemeClr val="bg2"/>
-            </a:solidFill>
-            <a:prstDash val="solid"/>
-          </a:ln>
-        </p:spPr>
-      </p:sp>
-      <p:sp>
-        <p:nvSpPr>
-          <p:cNvPr id="34" name="next-head"/>
-          <p:cNvSpPr txBox="1"/>
-          <p:nvPr/>
-        </p:nvSpPr>
-        <p:spPr>
-          <a:xfrm>
-            <a:off x="6537960" y="1143000"/>
-            <a:ext cx="2011680" cy="320040"/>
-          </a:xfrm>
-          <a:prstGeom prst="rect">
-            <a:avLst/>
-          </a:prstGeom>
-          <a:noFill/>
-          <a:ln/>
-        </p:spPr>
-        <p:txBody>
-          <a:bodyPr wrap="square" lIns="0" tIns="0" rIns="0" bIns="0" rtlCol="0" anchor="ctr"/>
-          <a:lstStyle/>
-          <a:p>
-            <a:pPr indent="0" marL="0">
-              <a:buNone/>
-            </a:pPr>
-            <a:r>
-              <a:rPr lang="en-US" sz="1300" b="1" dirty="0">
-                <a:solidFill>
-                  <a:schemeClr val="tx2"/>
-                </a:solidFill>
-              </a:rPr>
-              <a:t>Next steps</a:t>
-            </a:r>
-            <a:endParaRPr lang="en-US" sz="1300" dirty="0"/>
-          </a:p>
-        </p:txBody>
-      </p:sp>
-      <p:sp>
-        <p:nvSpPr>
-          <p:cNvPr id="35" name="bullets"/>
-          <p:cNvSpPr txBox="1"/>
-          <p:nvPr/>
-        </p:nvSpPr>
-        <p:spPr>
-          <a:xfrm>
-            <a:off x="6537960" y="1508760"/>
-            <a:ext cx="2011680" cy="2926080"/>
-          </a:xfrm>
-          <a:prstGeom prst="rect">
-            <a:avLst/>
-          </a:prstGeom>
-          <a:noFill/>
-          <a:ln/>
-        </p:spPr>
-        <p:txBody>
-          <a:bodyPr wrap="square" lIns="0" tIns="0" rIns="0" bIns="0" rtlCol="0" anchor="t"/>
-          <a:lstStyle/>
-          <a:p>
-            <a:pPr marL="177800" indent="-177800">
-              <a:spcAft>
-                <a:spcPts val="700"/>
-              </a:spcAft>
-              <a:buSzPct val="100000"/>
-              <a:buChar char="•"/>
-            </a:pPr>
-            <a:r>
-              <a:rPr lang="en-US" sz="1100" dirty="0">
-                <a:solidFill>
-                  <a:schemeClr val="tx1"/>
-                </a:solidFill>
-              </a:rPr>
-              <a:t>Super-individuals, to match how the largest depositors exited Celsius</a:t>
-            </a:r>
-            <a:endParaRPr lang="en-US" sz="1100" dirty="0"/>
-          </a:p>
-          <a:p>
-            <a:pPr marL="177800" indent="-177800">
-              <a:spcAft>
-                <a:spcPts val="700"/>
-              </a:spcAft>
-              <a:buSzPct val="100000"/>
-              <a:buChar char="•"/>
-            </a:pPr>
-            <a:r>
-              <a:rPr lang="en-US" sz="1100" dirty="0">
-                <a:solidFill>
-                  <a:schemeClr val="tx1"/>
-                </a:solidFill>
-              </a:rPr>
-              <a:t>Deposit insurance and the reserve ratio on the fire-sale bank</a:t>
-            </a:r>
-            <a:endParaRPr lang="en-US" sz="1100" dirty="0"/>
-          </a:p>
-          <a:p>
-            <a:pPr marL="177800" indent="-177800">
-              <a:spcAft>
-                <a:spcPts val="700"/>
-              </a:spcAft>
-              <a:buSzPct val="100000"/>
-              <a:buChar char="•"/>
-            </a:pPr>
-            <a:r>
-              <a:rPr lang="en-US" sz="1100" dirty="0">
-                <a:solidFill>
-                  <a:schemeClr val="tx1"/>
-                </a:solidFill>
-              </a:rPr>
-              <a:t>Network topology and learning</a:t>
-            </a:r>
-            <a:endParaRPr lang="en-US" sz="1100" dirty="0"/>
-          </a:p>
-          <a:p>
-            <a:pPr marL="177800" indent="-177800">
-              <a:spcAft>
-                <a:spcPts val="700"/>
-              </a:spcAft>
-              <a:buSzPct val="100000"/>
-              <a:buChar char="•"/>
-            </a:pPr>
-            <a:r>
-              <a:rPr lang="en-US" sz="1100" dirty="0">
-                <a:solidFill>
-                  <a:schemeClr val="tx1"/>
-                </a:solidFill>
-              </a:rPr>
-              <a:t>Full sweep: stale public signal plus no-signal baseline, CARA 0.1, σ reported</a:t>
-            </a:r>
-            <a:endParaRPr lang="en-US" sz="1100" dirty="0"/>
+              <a:t>How large depositors exit in real runs: one-shot share about 0.35 there, 0.93 or more in the model.</a:t>
+            </a:r>
+            <a:endParaRPr lang="en-US" sz="1200" dirty="0"/>
           </a:p>
         </p:txBody>
       </p:sp>

--- a/docs/deck_2026-10-26_seminar.pptx
+++ b/docs/deck_2026-10-26_seminar.pptx
@@ -120,7 +120,7 @@
   <p:extLst>
     <p:ext uri="{521415D9-36F7-43E2-AB2F-B90AF26B5E84}">
       <p14:sectionLst xmlns:p14="http://schemas.microsoft.com/office/powerpoint/2010/main">
-        <p14:section name="Opening" id="{3c0f1e0c-7c18-eb01-bf6a-11c8510f56ac}">
+        <p14:section name="Opening" id="{b281086f-10c5-245c-420f-c960da7f8fbc}">
           <p14:sldIdLst>
             <p14:sldId id="256"/>
             <p14:sldId id="257"/>
@@ -130,13 +130,13 @@
             <p14:sldId id="261"/>
           </p14:sldIdLst>
         </p14:section>
-        <p14:section name="The model" id="{5c1b3cfd-5638-9a33-58d5-7f895a2e268f}">
+        <p14:section name="The model" id="{e7051012-8c73-fd7a-61c6-a429ab3145fb}">
           <p14:sldIdLst>
             <p14:sldId id="262"/>
             <p14:sldId id="263"/>
           </p14:sldIdLst>
         </p14:section>
-        <p14:section name="Results" id="{bff05c9e-5350-fc9e-a1bc-a5ca9e23503c}">
+        <p14:section name="Results" id="{6f70587a-91e7-e1af-07af-3daf5fdd2bc9}">
           <p14:sldIdLst>
             <p14:sldId id="264"/>
             <p14:sldId id="265"/>
@@ -144,12 +144,12 @@
             <p14:sldId id="267"/>
           </p14:sldIdLst>
         </p14:section>
-        <p14:section name="Validation" id="{e569a8c1-abeb-152c-bec6-dd04644ace26}">
+        <p14:section name="Validation" id="{4313d352-190c-de3a-0abb-3fca065fe1c0}">
           <p14:sldIdLst>
             <p14:sldId id="268"/>
           </p14:sldIdLst>
         </p14:section>
-        <p14:section name="Close" id="{b73275a0-fad0-4d42-c4db-b551958915af}">
+        <p14:section name="Close" id="{24f3d447-6751-12b6-e3f2-65b5a9054412}">
           <p14:sldIdLst>
             <p14:sldId id="269"/>
           </p14:sldIdLst>
@@ -3647,7 +3647,7 @@
                   <a:schemeClr val="tx1"/>
                 </a:solidFill>
               </a:rPr>
-              <a:t>How large depositors exit in real runs: one-shot share about 0.35 there, 0.93 or more in the model.</a:t>
+              <a:t>How large depositors exit in real runs.</a:t>
             </a:r>
             <a:endParaRPr lang="en-US" sz="1200" dirty="0"/>
           </a:p>

--- a/docs/deck_2026-10-26_seminar.pptx
+++ b/docs/deck_2026-10-26_seminar.pptx
@@ -120,7 +120,7 @@
   <p:extLst>
     <p:ext uri="{521415D9-36F7-43E2-AB2F-B90AF26B5E84}">
       <p14:sectionLst xmlns:p14="http://schemas.microsoft.com/office/powerpoint/2010/main">
-        <p14:section name="Opening" id="{b281086f-10c5-245c-420f-c960da7f8fbc}">
+        <p14:section name="Opening" id="{8ad3b9cd-eb38-cf3b-df61-9f00c8726f63}">
           <p14:sldIdLst>
             <p14:sldId id="256"/>
             <p14:sldId id="257"/>
@@ -130,13 +130,13 @@
             <p14:sldId id="261"/>
           </p14:sldIdLst>
         </p14:section>
-        <p14:section name="The model" id="{e7051012-8c73-fd7a-61c6-a429ab3145fb}">
+        <p14:section name="The model" id="{21fa26a8-ee32-d805-174b-c13f3ff7c2ee}">
           <p14:sldIdLst>
             <p14:sldId id="262"/>
             <p14:sldId id="263"/>
           </p14:sldIdLst>
         </p14:section>
-        <p14:section name="Results" id="{6f70587a-91e7-e1af-07af-3daf5fdd2bc9}">
+        <p14:section name="Results" id="{d956cebf-f002-c8d4-bcec-2e7f469fcc06}">
           <p14:sldIdLst>
             <p14:sldId id="264"/>
             <p14:sldId id="265"/>
@@ -144,12 +144,12 @@
             <p14:sldId id="267"/>
           </p14:sldIdLst>
         </p14:section>
-        <p14:section name="Validation" id="{4313d352-190c-de3a-0abb-3fca065fe1c0}">
+        <p14:section name="Validation" id="{62898186-09f2-1605-547b-463032f94ec9}">
           <p14:sldIdLst>
             <p14:sldId id="268"/>
           </p14:sldIdLst>
         </p14:section>
-        <p14:section name="Close" id="{24f3d447-6751-12b6-e3f2-65b5a9054412}">
+        <p14:section name="Close" id="{f2141c3d-d899-de71-8440-9eb3b0af1c00}">
           <p14:sldIdLst>
             <p14:sldId id="269"/>
           </p14:sldIdLst>
@@ -3931,34 +3931,7 @@
       </p:sp>
       <p:sp>
         <p:nvSpPr>
-          <p:cNvPr id="3" name="mech-0"/>
-          <p:cNvSpPr/>
-          <p:nvPr/>
-        </p:nvSpPr>
-        <p:spPr>
-          <a:xfrm>
-            <a:off x="457200" y="1051560"/>
-            <a:ext cx="4023360" cy="2514600"/>
-          </a:xfrm>
-          <a:prstGeom prst="roundRect">
-            <a:avLst>
-              <a:gd name="adj" fmla="val 2909"/>
-            </a:avLst>
-          </a:prstGeom>
-          <a:solidFill>
-            <a:schemeClr val="bg2"/>
-          </a:solidFill>
-          <a:ln w="12700">
-            <a:solidFill>
-              <a:schemeClr val="bg2"/>
-            </a:solidFill>
-            <a:prstDash val="solid"/>
-          </a:ln>
-        </p:spPr>
-      </p:sp>
-      <p:sp>
-        <p:nvSpPr>
-          <p:cNvPr id="4" name="mech-head"/>
+          <p:cNvPr id="3" name="mech-head"/>
           <p:cNvSpPr txBox="1"/>
           <p:nvPr/>
         </p:nvSpPr>
@@ -3994,7 +3967,7 @@
       </p:sp>
       <p:sp>
         <p:nvSpPr>
-          <p:cNvPr id="5" name="bullets"/>
+          <p:cNvPr id="4" name="bullets"/>
           <p:cNvSpPr txBox="1"/>
           <p:nvPr/>
         </p:nvSpPr>
@@ -4088,34 +4061,7 @@
       </p:sp>
       <p:sp>
         <p:nvSpPr>
-          <p:cNvPr id="6" name="mech-1"/>
-          <p:cNvSpPr/>
-          <p:nvPr/>
-        </p:nvSpPr>
-        <p:spPr>
-          <a:xfrm>
-            <a:off x="4663440" y="1051560"/>
-            <a:ext cx="4023360" cy="2514600"/>
-          </a:xfrm>
-          <a:prstGeom prst="roundRect">
-            <a:avLst>
-              <a:gd name="adj" fmla="val 2909"/>
-            </a:avLst>
-          </a:prstGeom>
-          <a:solidFill>
-            <a:schemeClr val="bg2"/>
-          </a:solidFill>
-          <a:ln w="12700">
-            <a:solidFill>
-              <a:schemeClr val="bg2"/>
-            </a:solidFill>
-            <a:prstDash val="solid"/>
-          </a:ln>
-        </p:spPr>
-      </p:sp>
-      <p:sp>
-        <p:nvSpPr>
-          <p:cNvPr id="7" name="mech-head"/>
+          <p:cNvPr id="5" name="mech-head"/>
           <p:cNvSpPr txBox="1"/>
           <p:nvPr/>
         </p:nvSpPr>
@@ -4151,7 +4097,7 @@
       </p:sp>
       <p:sp>
         <p:nvSpPr>
-          <p:cNvPr id="8" name="bullets"/>
+          <p:cNvPr id="6" name="bullets"/>
           <p:cNvSpPr txBox="1"/>
           <p:nvPr/>
         </p:nvSpPr>

--- a/docs/deck_2026-10-26_seminar.pptx
+++ b/docs/deck_2026-10-26_seminar.pptx
@@ -120,7 +120,7 @@
   <p:extLst>
     <p:ext uri="{521415D9-36F7-43E2-AB2F-B90AF26B5E84}">
       <p14:sectionLst xmlns:p14="http://schemas.microsoft.com/office/powerpoint/2010/main">
-        <p14:section name="Opening" id="{8ad3b9cd-eb38-cf3b-df61-9f00c8726f63}">
+        <p14:section name="Opening" id="{c120e781-6f4e-3440-9e28-992d777fd984}">
           <p14:sldIdLst>
             <p14:sldId id="256"/>
             <p14:sldId id="257"/>
@@ -130,13 +130,13 @@
             <p14:sldId id="261"/>
           </p14:sldIdLst>
         </p14:section>
-        <p14:section name="The model" id="{21fa26a8-ee32-d805-174b-c13f3ff7c2ee}">
+        <p14:section name="The model" id="{37153be5-aebb-3165-4d48-73fceba3bdd1}">
           <p14:sldIdLst>
             <p14:sldId id="262"/>
             <p14:sldId id="263"/>
           </p14:sldIdLst>
         </p14:section>
-        <p14:section name="Results" id="{d956cebf-f002-c8d4-bcec-2e7f469fcc06}">
+        <p14:section name="Results" id="{195a147b-a6a6-80f3-9260-ed96a3502ce2}">
           <p14:sldIdLst>
             <p14:sldId id="264"/>
             <p14:sldId id="265"/>
@@ -144,12 +144,12 @@
             <p14:sldId id="267"/>
           </p14:sldIdLst>
         </p14:section>
-        <p14:section name="Validation" id="{62898186-09f2-1605-547b-463032f94ec9}">
+        <p14:section name="Validation" id="{2ac6484c-7871-1830-4175-e4e74f670d0a}">
           <p14:sldIdLst>
             <p14:sldId id="268"/>
           </p14:sldIdLst>
         </p14:section>
-        <p14:section name="Close" id="{f2141c3d-d899-de71-8440-9eb3b0af1c00}">
+        <p14:section name="Close" id="{825121fc-4db3-f1d9-7784-9aaae9366bd1}">
           <p14:sldIdLst>
             <p14:sldId id="269"/>
           </p14:sldIdLst>
@@ -4485,50 +4485,14 @@
       </p:sp>
       <p:sp>
         <p:nvSpPr>
-          <p:cNvPr id="3" name="step-lead"/>
+          <p:cNvPr id="3" name="step-items"/>
           <p:cNvSpPr txBox="1"/>
           <p:nvPr/>
         </p:nvSpPr>
         <p:spPr>
           <a:xfrm>
-            <a:off x="457200" y="1051560"/>
-            <a:ext cx="8229600" cy="868680"/>
-          </a:xfrm>
-          <a:prstGeom prst="rect">
-            <a:avLst/>
-          </a:prstGeom>
-          <a:noFill/>
-          <a:ln/>
-        </p:spPr>
-        <p:txBody>
-          <a:bodyPr wrap="square" lIns="0" tIns="0" rIns="0" bIns="0" rtlCol="0" anchor="ctr"/>
-          <a:lstStyle/>
-          <a:p>
-            <a:pPr indent="0" marL="0">
-              <a:buNone/>
-            </a:pPr>
-            <a:r>
-              <a:rPr lang="en-US" sz="1700" b="1" dirty="0">
-                <a:solidFill>
-                  <a:schemeClr val="tx2"/>
-                </a:solidFill>
-              </a:rPr>
-              <a:t>Culture supplies a weight that differs across depositors, is set before the run, and does not move with the information environment.</a:t>
-            </a:r>
-            <a:endParaRPr lang="en-US" sz="1700" dirty="0"/>
-          </a:p>
-        </p:txBody>
-      </p:sp>
-      <p:sp>
-        <p:nvSpPr>
-          <p:cNvPr id="4" name="step-items"/>
-          <p:cNvSpPr txBox="1"/>
-          <p:nvPr/>
-        </p:nvSpPr>
-        <p:spPr>
-          <a:xfrm>
-            <a:off x="457200" y="2103120"/>
-            <a:ext cx="8229600" cy="2103120"/>
+            <a:off x="457200" y="1188720"/>
+            <a:ext cx="8229600" cy="3017520"/>
           </a:xfrm>
           <a:prstGeom prst="rect">
             <a:avLst/>
@@ -4567,7 +4531,7 @@
                   <a:schemeClr val="tx1"/>
                 </a:solidFill>
               </a:rPr>
-              <a:t>Cultural values pass largely unchanged from parents to children (Guiso, Sapienza, Zingales; Bazzi et al.). The weight is a disposition, not a calculation.</a:t>
+              <a:t>Cultural values pass largely unchanged from parents to children (Guiso, Sapienza, Zingales; Bazzi et al.).</a:t>
             </a:r>
             <a:endParaRPr lang="en-US" sz="1400" dirty="0"/>
           </a:p>

--- a/docs/deck_2026-10-26_seminar.pptx
+++ b/docs/deck_2026-10-26_seminar.pptx
@@ -120,7 +120,7 @@
   <p:extLst>
     <p:ext uri="{521415D9-36F7-43E2-AB2F-B90AF26B5E84}">
       <p14:sectionLst xmlns:p14="http://schemas.microsoft.com/office/powerpoint/2010/main">
-        <p14:section name="Opening" id="{c120e781-6f4e-3440-9e28-992d777fd984}">
+        <p14:section name="Opening" id="{13e4db2b-f004-4929-528c-f2d17e2d1dd9}">
           <p14:sldIdLst>
             <p14:sldId id="256"/>
             <p14:sldId id="257"/>
@@ -130,13 +130,13 @@
             <p14:sldId id="261"/>
           </p14:sldIdLst>
         </p14:section>
-        <p14:section name="The model" id="{37153be5-aebb-3165-4d48-73fceba3bdd1}">
+        <p14:section name="The model" id="{f77a608f-a50b-b9ca-a202-5520211cbd29}">
           <p14:sldIdLst>
             <p14:sldId id="262"/>
             <p14:sldId id="263"/>
           </p14:sldIdLst>
         </p14:section>
-        <p14:section name="Results" id="{195a147b-a6a6-80f3-9260-ed96a3502ce2}">
+        <p14:section name="Results" id="{772b5bf7-aa53-b7b4-1131-512b348abced}">
           <p14:sldIdLst>
             <p14:sldId id="264"/>
             <p14:sldId id="265"/>
@@ -144,12 +144,12 @@
             <p14:sldId id="267"/>
           </p14:sldIdLst>
         </p14:section>
-        <p14:section name="Validation" id="{2ac6484c-7871-1830-4175-e4e74f670d0a}">
+        <p14:section name="Validation" id="{d3bdf570-f543-e169-e41b-803b868e27b7}">
           <p14:sldIdLst>
             <p14:sldId id="268"/>
           </p14:sldIdLst>
         </p14:section>
-        <p14:section name="Close" id="{825121fc-4db3-f1d9-7784-9aaae9366bd1}">
+        <p14:section name="Close" id="{bfa1e8a0-a0ca-6086-3258-0e5cde0f1140}">
           <p14:sldIdLst>
             <p14:sldId id="269"/>
           </p14:sldIdLst>
@@ -4517,7 +4517,7 @@
                   <a:schemeClr val="tx1"/>
                 </a:solidFill>
               </a:rPr>
-              <a:t>Transmitted, not chosen. </a:t>
+              <a:t>Transmitted weights. </a:t>
             </a:r>
             <a:pPr indent="0" marL="0">
               <a:spcAft>
@@ -4549,7 +4549,7 @@
                   <a:schemeClr val="tx1"/>
                 </a:solidFill>
               </a:rPr>
-              <a:t>Individualism is the right dimension. </a:t>
+              <a:t>Individualism </a:t>
             </a:r>
             <a:pPr indent="0" marL="0">
               <a:spcAft>
@@ -4563,7 +4563,7 @@
                   <a:schemeClr val="tx1"/>
                 </a:solidFill>
               </a:rPr>
-              <a:t>Self-reliance against deference to the group (Hofstede) is the private-against-social weighting the model already contains (Gorodnichenko–Roland).</a:t>
+              <a:t>as self-reliance against deference to the group (Hofstede) is the private-against-social weighting the model already contains (Gorodnichenko–Roland).</a:t>
             </a:r>
             <a:endParaRPr lang="en-US" sz="1400" dirty="0"/>
           </a:p>
@@ -4595,7 +4595,7 @@
                   <a:schemeClr val="tx1"/>
                 </a:solidFill>
               </a:rPr>
-              <a:t>Given names carry it (Twenge et al.), so the weight can be observed, not assumed.</a:t>
+              <a:t>Given names carry it (Twenge et al.), so we can observe the weight instead of assuming it.</a:t>
             </a:r>
             <a:endParaRPr lang="en-US" sz="1400" dirty="0"/>
           </a:p>

--- a/docs/deck_2026-10-26_seminar.pptx
+++ b/docs/deck_2026-10-26_seminar.pptx
@@ -120,7 +120,7 @@
   <p:extLst>
     <p:ext uri="{521415D9-36F7-43E2-AB2F-B90AF26B5E84}">
       <p14:sectionLst xmlns:p14="http://schemas.microsoft.com/office/powerpoint/2010/main">
-        <p14:section name="Opening" id="{13e4db2b-f004-4929-528c-f2d17e2d1dd9}">
+        <p14:section name="Opening" id="{1fa76bfe-7eb0-a57a-f9ab-de26fbff9853}">
           <p14:sldIdLst>
             <p14:sldId id="256"/>
             <p14:sldId id="257"/>
@@ -130,13 +130,13 @@
             <p14:sldId id="261"/>
           </p14:sldIdLst>
         </p14:section>
-        <p14:section name="The model" id="{f77a608f-a50b-b9ca-a202-5520211cbd29}">
+        <p14:section name="The model" id="{8f63fa55-fca3-9d31-faae-e7cb022e0248}">
           <p14:sldIdLst>
             <p14:sldId id="262"/>
             <p14:sldId id="263"/>
           </p14:sldIdLst>
         </p14:section>
-        <p14:section name="Results" id="{772b5bf7-aa53-b7b4-1131-512b348abced}">
+        <p14:section name="Results" id="{a6b1f877-02e5-088c-4f93-467249faa465}">
           <p14:sldIdLst>
             <p14:sldId id="264"/>
             <p14:sldId id="265"/>
@@ -144,12 +144,12 @@
             <p14:sldId id="267"/>
           </p14:sldIdLst>
         </p14:section>
-        <p14:section name="Validation" id="{d3bdf570-f543-e169-e41b-803b868e27b7}">
+        <p14:section name="Validation" id="{1334211a-053c-a8a6-c071-afd4ab268bc9}">
           <p14:sldIdLst>
             <p14:sldId id="268"/>
           </p14:sldIdLst>
         </p14:section>
-        <p14:section name="Close" id="{bfa1e8a0-a0ca-6086-3258-0e5cde0f1140}">
+        <p14:section name="Close" id="{e97a2cb0-cb34-6c99-cf3d-f3279421fe24}">
           <p14:sldIdLst>
             <p14:sldId id="269"/>
           </p14:sldIdLst>
@@ -2556,6 +2556,20 @@
               <a:rPr lang="en-US" sz="1800" dirty="0">
                 <a:solidFill>
                   <a:schemeClr val="accent4"/>
+                </a:solidFill>
+              </a:rPr>
+              <a:t>Markets and Society 2026</a:t>
+            </a:r>
+            <a:endParaRPr lang="en-US" sz="1800" dirty="0"/>
+          </a:p>
+          <a:p>
+            <a:pPr algn="ctr" indent="0" marL="0">
+              <a:buNone/>
+            </a:pPr>
+            <a:r>
+              <a:rPr lang="en-US" sz="1400" dirty="0">
+                <a:solidFill>
+                  <a:schemeClr val="accent3"/>
                 </a:solidFill>
               </a:rPr>
               <a:t>Walter Stover  ·  George Mason University  ·  26 October 2026</a:t>

--- a/docs/deck_2026-10-26_seminar.pptx
+++ b/docs/deck_2026-10-26_seminar.pptx
@@ -120,7 +120,7 @@
   <p:extLst>
     <p:ext uri="{521415D9-36F7-43E2-AB2F-B90AF26B5E84}">
       <p14:sectionLst xmlns:p14="http://schemas.microsoft.com/office/powerpoint/2010/main">
-        <p14:section name="Opening" id="{1fa76bfe-7eb0-a57a-f9ab-de26fbff9853}">
+        <p14:section name="Opening" id="{9341bb9d-c2d3-e0f9-7b76-63ca8ef59693}">
           <p14:sldIdLst>
             <p14:sldId id="256"/>
             <p14:sldId id="257"/>
@@ -130,13 +130,13 @@
             <p14:sldId id="261"/>
           </p14:sldIdLst>
         </p14:section>
-        <p14:section name="The model" id="{8f63fa55-fca3-9d31-faae-e7cb022e0248}">
+        <p14:section name="The model" id="{ee055e89-27c8-e65c-8bed-a00f3f9ac758}">
           <p14:sldIdLst>
             <p14:sldId id="262"/>
             <p14:sldId id="263"/>
           </p14:sldIdLst>
         </p14:section>
-        <p14:section name="Results" id="{a6b1f877-02e5-088c-4f93-467249faa465}">
+        <p14:section name="Results" id="{678c6eee-6df7-4b05-ea56-efe1890bbe5f}">
           <p14:sldIdLst>
             <p14:sldId id="264"/>
             <p14:sldId id="265"/>
@@ -144,12 +144,12 @@
             <p14:sldId id="267"/>
           </p14:sldIdLst>
         </p14:section>
-        <p14:section name="Validation" id="{1334211a-053c-a8a6-c071-afd4ab268bc9}">
+        <p14:section name="Validation" id="{9281544c-dc74-9b41-9ac0-8a55072b59f4}">
           <p14:sldIdLst>
             <p14:sldId id="268"/>
           </p14:sldIdLst>
         </p14:section>
-        <p14:section name="Close" id="{e97a2cb0-cb34-6c99-cf3d-f3279421fe24}">
+        <p14:section name="Close" id="{7ff35129-9451-9346-e521-a21b60c5f462}">
           <p14:sldIdLst>
             <p14:sldId id="269"/>
           </p14:sldIdLst>
@@ -1977,7 +1977,7 @@
                   <a:schemeClr val="accent3"/>
                 </a:solidFill>
               </a:rPr>
-              <a:t>Agent-based Diamond–Dybvig with cultural heterogeneity</a:t>
+              <a:t>Agent-based Diamond–Dybvig with Cultural Heterogeneity</a:t>
             </a:r>
             <a:endParaRPr lang="en-US" sz="900" dirty="0"/>
           </a:p>
@@ -2520,7 +2520,7 @@
                   <a:schemeClr val="bg1"/>
                 </a:solidFill>
               </a:rPr>
-              <a:t>Agent-based Diamond–Dybvig with cultural heterogeneity</a:t>
+              <a:t>Agent-based Diamond–Dybvig with Cultural Heterogeneity</a:t>
             </a:r>
             <a:endParaRPr lang="en-US" sz="3400" dirty="0"/>
           </a:p>
@@ -2567,12 +2567,12 @@
               <a:buNone/>
             </a:pPr>
             <a:r>
-              <a:rPr lang="en-US" sz="1400" dirty="0">
-                <a:solidFill>
-                  <a:schemeClr val="accent3"/>
-                </a:solidFill>
-              </a:rPr>
-              <a:t>Walter Stover  ·  George Mason University  ·  26 October 2026</a:t>
+              <a:rPr lang="en-US" sz="1800" dirty="0">
+                <a:solidFill>
+                  <a:schemeClr val="accent4"/>
+                </a:solidFill>
+              </a:rPr>
+              <a:t>Walter Stover  ·  George Mason University  ·  26 October</a:t>
             </a:r>
             <a:endParaRPr lang="en-US" sz="1800" dirty="0"/>
           </a:p>

--- a/docs/deck_2026-10-26_seminar.pptx
+++ b/docs/deck_2026-10-26_seminar.pptx
@@ -19,9 +19,11 @@
     <p:sldId id="267" r:id="rId13"/>
     <p:sldId id="268" r:id="rId14"/>
     <p:sldId id="269" r:id="rId15"/>
+    <p:sldId id="270" r:id="rId16"/>
+    <p:sldId id="271" r:id="rId17"/>
   </p:sldIdLst>
   <p:notesMasterIdLst>
-    <p:notesMasterId r:id="rId16"/>
+    <p:notesMasterId r:id="rId18"/>
   </p:notesMasterIdLst>
   <p:sldSz cx="9144000" cy="5143500"/>
   <p:notesSz cx="5143500" cy="9144000"/>
@@ -120,38 +122,39 @@
   <p:extLst>
     <p:ext uri="{521415D9-36F7-43E2-AB2F-B90AF26B5E84}">
       <p14:sectionLst xmlns:p14="http://schemas.microsoft.com/office/powerpoint/2010/main">
-        <p14:section name="Opening" id="{9341bb9d-c2d3-e0f9-7b76-63ca8ef59693}">
+        <p14:section name="Opening" id="{4658e545-11c0-43ca-f693-22e28a4924bf}">
           <p14:sldIdLst>
             <p14:sldId id="256"/>
             <p14:sldId id="257"/>
             <p14:sldId id="258"/>
             <p14:sldId id="259"/>
             <p14:sldId id="260"/>
-            <p14:sldId id="261"/>
+            <p14:sldId id="262"/>
           </p14:sldIdLst>
         </p14:section>
-        <p14:section name="The model" id="{ee055e89-27c8-e65c-8bed-a00f3f9ac758}">
+        <p14:section name="The model" id="{8adb3581-b003-8914-350c-6fc655770fe6}">
           <p14:sldIdLst>
-            <p14:sldId id="262"/>
             <p14:sldId id="263"/>
+            <p14:sldId id="264"/>
           </p14:sldIdLst>
         </p14:section>
-        <p14:section name="Results" id="{678c6eee-6df7-4b05-ea56-efe1890bbe5f}">
+        <p14:section name="Results" id="{90084578-f552-8e86-299c-05d47401621d}">
           <p14:sldIdLst>
-            <p14:sldId id="264"/>
             <p14:sldId id="265"/>
             <p14:sldId id="266"/>
             <p14:sldId id="267"/>
+            <p14:sldId id="268"/>
+            <p14:sldId id="269"/>
           </p14:sldIdLst>
         </p14:section>
-        <p14:section name="Validation" id="{9281544c-dc74-9b41-9ac0-8a55072b59f4}">
+        <p14:section name="Validation" id="{b15d4de9-3e77-5966-dd7f-262bcb2e547c}">
           <p14:sldIdLst>
-            <p14:sldId id="268"/>
+            <p14:sldId id="270"/>
           </p14:sldIdLst>
         </p14:section>
-        <p14:section name="Close" id="{7ff35129-9451-9346-e521-a21b60c5f462}">
+        <p14:section name="Close" id="{19d0b0b1-2032-f5c4-417b-6e68be271e28}">
           <p14:sldIdLst>
-            <p14:sldId id="269"/>
+            <p14:sldId id="271"/>
           </p14:sldIdLst>
         </p14:section>
       </p14:sectionLst>
@@ -646,7 +649,7 @@
           <a:p>
             <a:r>
               <a:rPr lang="en-US" dirty="0"/>
-              <a:t>~2 min. Large difference (0.1, 0.9): 0.67 at mu 0 -&gt; 0.08 at mu 1; medium (0.2, 0.8) similar; small (0.3, 0.5): 0.25 -&gt; 0.09. Monotone, no interior peak. The difference between types matters most when collectivists dominate; lines converge at mu &gt;= 0.75. Includes pure cells (mu 0 and 1). If asked about Ch 1's non-monotonic prediction (P6): see backup.</a:t>
+              <a:t>Section card. ~0.1 min.</a:t>
             </a:r>
             <a:endParaRPr lang="en-US" dirty="0"/>
           </a:p>
@@ -734,7 +737,7 @@
           <a:p>
             <a:r>
               <a:rPr lang="en-US" dirty="0"/>
-              <a:t>~2.5 min. Large difference (0.1, 0.9): outdated pessimistic 0.48, none 0.31, accurate 0.29, outdated middling (y0 0.5) 0.18, outdated optimistic 0.16. Accurate news barely changes failure; stale optimistic halves it; stale pessimistic raises it by half. Small difference (0.3, 0.5) barely moves (0.09–0.15). All mu. Policy framing: the information environment (right to reassure), not sorting depositors by type.</a:t>
+              <a:t>~2 min. Collectivists jump from 0.15 to 0.93 once 20–35% of neighbours are out and reach 1.0; individualists plateau at ~0.25–0.30. Slopes: C 0.80, I 0.22 (difference +0.58, t 16.7). Lambda pairs pooled; reference bank.</a:t>
             </a:r>
             <a:endParaRPr lang="en-US" dirty="0"/>
           </a:p>
@@ -822,7 +825,7 @@
           <a:p>
             <a:r>
               <a:rPr lang="en-US" dirty="0"/>
-              <a:t>~2 min. Lambda pairs pooled. Uncapped (sigma 2.5) 0.61 -&gt; 0.11; capped at 1% 0.51 -&gt; 0.08; similar sizes (sigma 1) 0.50 -&gt; 0.08. Capping brings failure down to the no-concentration level at every mu. The mu gradient is the same in all three: culture's effect does not depend on concentration. One spoken sentence on what 'capped at 1%' means (no single depositor holds more than 1% of the bank).</a:t>
+              <a:t>~2 min. Large difference (0.1, 0.9): 0.67 at mu 0 -&gt; 0.08 at mu 1; medium (0.2, 0.8) similar; small (0.3, 0.5): 0.25 -&gt; 0.09. Monotone, no interior peak. The difference between types matters most when collectivists dominate; lines converge at mu &gt;= 0.75. Includes pure cells (mu 0 and 1). If asked about Ch 1's non-monotonic prediction (P6): see backup.</a:t>
             </a:r>
             <a:endParaRPr lang="en-US" dirty="0"/>
           </a:p>
@@ -910,7 +913,7 @@
           <a:p>
             <a:r>
               <a:rPr lang="en-US" dirty="0"/>
-              <a:t>~1.5 min. Ch 1's theory predicts: optimistic news -&gt; individualists run more than collectivists; pessimistic -&gt; collectivists run more. The lines rise through zero as predicted. Large difference reaches about ±0.1; small stays flat. Pre-registered tests: 3 of 4 support, on all three versions of the bank (r1k pooled: G1' +0.033, G4' -0.031, G2a' +0.093, Holm-significant; G3 counts against). Option: make this one sentence and move the figure to backup.</a:t>
+              <a:t>~2.5 min. Large difference (0.1, 0.9): outdated pessimistic 0.48, none 0.31, accurate 0.29, outdated middling (y0 0.5) 0.18, outdated optimistic 0.16. Accurate news barely changes failure; stale optimistic halves it; stale pessimistic raises it by half. Small difference (0.3, 0.5) barely moves (0.09–0.15). All mu. Policy framing: the information environment (right to reassure), not sorting depositors by type.</a:t>
             </a:r>
             <a:endParaRPr lang="en-US" dirty="0"/>
           </a:p>
@@ -998,7 +1001,7 @@
           <a:p>
             <a:r>
               <a:rPr lang="en-US" dirty="0"/>
-              <a:t>~2 min. Next steps from the outline: super-individuals (match how Celsius's largest depositors exit), deposit insurance and the reserve ratio on the fire-sale bank, topology and learning, and the full parameter sweep (stale public signal + no-signal baseline; CARA 0.1; sigma reported).</a:t>
+              <a:t>~2 min. Lambda pairs pooled. Uncapped (sigma 2.5) 0.61 -&gt; 0.11; capped at 1% 0.51 -&gt; 0.08; similar sizes (sigma 1) 0.50 -&gt; 0.08. Capping brings failure down to the no-concentration level at every mu. The mu gradient is the same in all three: culture's effect does not depend on concentration. One spoken sentence on what 'capped at 1%' means (no single depositor holds more than 1% of the bank).</a:t>
             </a:r>
             <a:endParaRPr lang="en-US" dirty="0"/>
           </a:p>
@@ -1022,6 +1025,182 @@
             <a:fld id="{F7021451-1387-4CA6-816F-3879F97B5CBC}" type="slidenum">
               <a:rPr lang="en-US"/>
               <a:t>14</a:t>
+            </a:fld>
+            <a:endParaRPr lang="en-US"/>
+          </a:p>
+        </p:txBody>
+      </p:sp>
+    </p:spTree>
+    <p:extLst>
+      <p:ext uri="{BB962C8B-B14F-4D97-AF65-F5344CB8AC3E}">
+        <p14:creationId xmlns:p14="http://schemas.microsoft.com/office/powerpoint/2010/main" val="1024086991"/>
+      </p:ext>
+    </p:extLst>
+  </p:cSld>
+  <p:clrMapOvr>
+    <a:masterClrMapping/>
+  </p:clrMapOvr>
+</p:notes>
+</file>
+
+<file path=ppt/notesSlides/notesSlide15.xml><?xml version="1.0" encoding="utf-8"?>
+<p:notes xmlns:a="http://schemas.openxmlformats.org/drawingml/2006/main" xmlns:r="http://schemas.openxmlformats.org/officeDocument/2006/relationships" xmlns:p="http://schemas.openxmlformats.org/presentationml/2006/main">
+  <p:cSld>
+    <p:spTree>
+      <p:nvGrpSpPr>
+        <p:cNvPr id="1" name=""/>
+        <p:cNvGrpSpPr/>
+        <p:nvPr/>
+      </p:nvGrpSpPr>
+      <p:grpSpPr>
+        <a:xfrm>
+          <a:off x="0" y="0"/>
+          <a:ext cx="0" cy="0"/>
+          <a:chOff x="0" y="0"/>
+          <a:chExt cx="0" cy="0"/>
+        </a:xfrm>
+      </p:grpSpPr>
+      <p:sp>
+        <p:nvSpPr>
+          <p:cNvPr id="2" name="Slide Image Placeholder 1"/>
+          <p:cNvSpPr>
+            <a:spLocks noGrp="1" noRot="1" noChangeAspect="1"/>
+          </p:cNvSpPr>
+          <p:nvPr>
+            <p:ph type="sldImg"/>
+          </p:nvPr>
+        </p:nvSpPr>
+        <p:spPr/>
+      </p:sp>
+      <p:sp>
+        <p:nvSpPr>
+          <p:cNvPr id="3" name="Notes Placeholder 2"/>
+          <p:cNvSpPr>
+            <a:spLocks noGrp="1"/>
+          </p:cNvSpPr>
+          <p:nvPr>
+            <p:ph type="body" idx="1"/>
+          </p:nvPr>
+        </p:nvSpPr>
+        <p:spPr/>
+        <p:txBody>
+          <a:bodyPr/>
+          <a:lstStyle/>
+          <a:p>
+            <a:r>
+              <a:rPr lang="en-US" dirty="0"/>
+              <a:t>~1.5 min. Ch 1's theory predicts: optimistic news -&gt; individualists run more than collectivists; pessimistic -&gt; collectivists run more. The lines rise through zero as predicted. Large difference reaches about ±0.1; small stays flat. Pre-registered tests: 3 of 4 support, on all three versions of the bank (r1k pooled: G1' +0.033, G4' -0.031, G2a' +0.093, Holm-significant; G3 counts against). Option: make this one sentence and move the figure to backup.</a:t>
+            </a:r>
+            <a:endParaRPr lang="en-US" dirty="0"/>
+          </a:p>
+        </p:txBody>
+      </p:sp>
+      <p:sp>
+        <p:nvSpPr>
+          <p:cNvPr id="4" name="Slide Number Placeholder 3"/>
+          <p:cNvSpPr>
+            <a:spLocks noGrp="1"/>
+          </p:cNvSpPr>
+          <p:nvPr>
+            <p:ph type="sldNum" sz="quarter" idx="10"/>
+          </p:nvPr>
+        </p:nvSpPr>
+        <p:spPr/>
+        <p:txBody>
+          <a:bodyPr/>
+          <a:lstStyle/>
+          <a:p>
+            <a:fld id="{F7021451-1387-4CA6-816F-3879F97B5CBC}" type="slidenum">
+              <a:rPr lang="en-US"/>
+              <a:t>15</a:t>
+            </a:fld>
+            <a:endParaRPr lang="en-US"/>
+          </a:p>
+        </p:txBody>
+      </p:sp>
+    </p:spTree>
+    <p:extLst>
+      <p:ext uri="{BB962C8B-B14F-4D97-AF65-F5344CB8AC3E}">
+        <p14:creationId xmlns:p14="http://schemas.microsoft.com/office/powerpoint/2010/main" val="1024086991"/>
+      </p:ext>
+    </p:extLst>
+  </p:cSld>
+  <p:clrMapOvr>
+    <a:masterClrMapping/>
+  </p:clrMapOvr>
+</p:notes>
+</file>
+
+<file path=ppt/notesSlides/notesSlide16.xml><?xml version="1.0" encoding="utf-8"?>
+<p:notes xmlns:a="http://schemas.openxmlformats.org/drawingml/2006/main" xmlns:r="http://schemas.openxmlformats.org/officeDocument/2006/relationships" xmlns:p="http://schemas.openxmlformats.org/presentationml/2006/main">
+  <p:cSld>
+    <p:spTree>
+      <p:nvGrpSpPr>
+        <p:cNvPr id="1" name=""/>
+        <p:cNvGrpSpPr/>
+        <p:nvPr/>
+      </p:nvGrpSpPr>
+      <p:grpSpPr>
+        <a:xfrm>
+          <a:off x="0" y="0"/>
+          <a:ext cx="0" cy="0"/>
+          <a:chOff x="0" y="0"/>
+          <a:chExt cx="0" cy="0"/>
+        </a:xfrm>
+      </p:grpSpPr>
+      <p:sp>
+        <p:nvSpPr>
+          <p:cNvPr id="2" name="Slide Image Placeholder 1"/>
+          <p:cNvSpPr>
+            <a:spLocks noGrp="1" noRot="1" noChangeAspect="1"/>
+          </p:cNvSpPr>
+          <p:nvPr>
+            <p:ph type="sldImg"/>
+          </p:nvPr>
+        </p:nvSpPr>
+        <p:spPr/>
+      </p:sp>
+      <p:sp>
+        <p:nvSpPr>
+          <p:cNvPr id="3" name="Notes Placeholder 2"/>
+          <p:cNvSpPr>
+            <a:spLocks noGrp="1"/>
+          </p:cNvSpPr>
+          <p:nvPr>
+            <p:ph type="body" idx="1"/>
+          </p:nvPr>
+        </p:nvSpPr>
+        <p:spPr/>
+        <p:txBody>
+          <a:bodyPr/>
+          <a:lstStyle/>
+          <a:p>
+            <a:r>
+              <a:rPr lang="en-US" dirty="0"/>
+              <a:t>~2 min. Next steps from the outline: super-individuals (match how Celsius's largest depositors exit), deposit insurance and the reserve ratio on the fire-sale bank, topology and learning, and the full parameter sweep (stale public signal + no-signal baseline; CARA 0.1; sigma reported).</a:t>
+            </a:r>
+            <a:endParaRPr lang="en-US" dirty="0"/>
+          </a:p>
+        </p:txBody>
+      </p:sp>
+      <p:sp>
+        <p:nvSpPr>
+          <p:cNvPr id="4" name="Slide Number Placeholder 3"/>
+          <p:cNvSpPr>
+            <a:spLocks noGrp="1"/>
+          </p:cNvSpPr>
+          <p:nvPr>
+            <p:ph type="sldNum" sz="quarter" idx="10"/>
+          </p:nvPr>
+        </p:nvSpPr>
+        <p:spPr/>
+        <p:txBody>
+          <a:bodyPr/>
+          <a:lstStyle/>
+          <a:p>
+            <a:fld id="{F7021451-1387-4CA6-816F-3879F97B5CBC}" type="slidenum">
+              <a:rPr lang="en-US"/>
+              <a:t>16</a:t>
             </a:fld>
             <a:endParaRPr lang="en-US"/>
           </a:p>
@@ -1438,7 +1617,7 @@
           <a:p>
             <a:r>
               <a:rPr lang="en-US" dirty="0"/>
-              <a:t>~1.5 min. The whole model in one line: a depositor blends what they are told with what they see, and the blend weight is a disposition, not a precision calculation (Chapter 1 writes it omega; the simulation writes it lambda). Subtracting the two types' estimates gives the wedge (lambda_C minus lambda_I)(x minus y): with the same pair of signals, the individualist's estimate is lower whenever private evidence is worse than the public line, so individualists run on a wider set of signals when the news is stale-optimistic, and the inclusion reverses when the news is stale-pessimistic. That is the sorting prediction the simulation tests. In the simulation, the public side is what neighbours do and what the news says, and lambda is drawn per agent in a cultural warm-up. Next: the simulation itself.</a:t>
+              <a:t>Section card. ~0.2 min.</a:t>
             </a:r>
             <a:endParaRPr lang="en-US" dirty="0"/>
           </a:p>
@@ -1526,7 +1705,7 @@
           <a:p>
             <a:r>
               <a:rPr lang="en-US" dirty="0"/>
-              <a:t>~2 min. Talk through the diagram. Left: N = 1,000 depositors, deposits log-normal (sigma 2.5) capped at 1% of the total (Celsius's largest account); types I and C from the warm-up; a Newman-Watts network; the fire-sale bank (reserves rD in cash, the rest plus equity in a long asset sold at a 60% haircut if cash runs short; it fails at period 2 if cash plus the asset at R(theta) is below its promises); theta uniform per run and a public signal that is absent, accurate or stale. Middle and right: warm-up, draw the world, shock, then the tick loop: observe neighbours and the news, blend each with your own information using lambda, value staying against withdrawing (a fraction, partial withdrawals allowed) by Monte Carlo, act. 25 initialisations x 10 draws per cell. Outcomes: D = individualists' minus collectivists' withdrawal share among those not hit by the shock; P(fail) = share of runs that fail. Risk aversion is in the model (CARA) but not on the slide.</a:t>
+              <a:t>~1.5 min. The whole model in one line: a depositor blends what they are told with what they see, and the blend weight is a disposition, not a precision calculation (Chapter 1 writes it omega; the simulation writes it lambda). Subtracting the two types' estimates gives the wedge (lambda_C minus lambda_I)(x minus y): with the same pair of signals, the individualist's estimate is lower whenever private evidence is worse than the public line, so individualists run on a wider set of signals when the news is stale-optimistic, and the inclusion reverses when the news is stale-pessimistic. That is the sorting prediction the simulation tests. In the simulation, the public side is what neighbours do and what the news says, and lambda is drawn per agent in a cultural warm-up. Next: the simulation itself.</a:t>
             </a:r>
             <a:endParaRPr lang="en-US" dirty="0"/>
           </a:p>
@@ -1614,7 +1793,7 @@
           <a:p>
             <a:r>
               <a:rPr lang="en-US" dirty="0"/>
-              <a:t>~1 min. Individualists put little weight on others (neighbours and public news) and more on their own information; collectivists the reverse. In the model: weight on the social side lambda; pairs shown in the figures (I, C): (0.1, 0.9) = large difference, (0.2, 0.8) = medium, (0.3, 0.5) = small. Type comes from a cultural warm-up on the network: the top mu share become individualists. Colours used throughout: orange = individualists, blue = collectivists.</a:t>
+              <a:t>~2 min. Talk through the diagram. Left: N = 1,000 depositors, deposits log-normal (sigma 2.5) capped at 1% of the total (Celsius's largest account); types I and C from the warm-up; a Newman-Watts network; the fire-sale bank (reserves rD in cash, the rest plus equity in a long asset sold at a 60% haircut if cash runs short; it fails at period 2 if cash plus the asset at R(theta) is below its promises); theta uniform per run and a public signal that is absent, accurate or stale. Middle and right: warm-up, draw the world, shock, then the tick loop: observe neighbours and the news, blend each with your own information using lambda, value staying against withdrawing (a fraction, partial withdrawals allowed) by Monte Carlo, act. 25 initialisations x 10 draws per cell. Outcomes: D = individualists' minus collectivists' withdrawal share among those not hit by the shock; P(fail) = share of runs that fail. Risk aversion is in the model (CARA) but not on the slide.</a:t>
             </a:r>
             <a:endParaRPr lang="en-US" dirty="0"/>
           </a:p>
@@ -1702,7 +1881,7 @@
           <a:p>
             <a:r>
               <a:rPr lang="en-US" dirty="0"/>
-              <a:t>~2 min. Collectivists jump from 0.15 to 0.93 once 20–35% of neighbours are out and reach 1.0; individualists plateau at ~0.25–0.30. Slopes: C 0.80, I 0.22 (difference +0.58, t 16.7). Lambda pairs pooled; reference bank.</a:t>
+              <a:t>~1 min. Individualists put little weight on others (neighbours and public news) and more on their own information; collectivists the reverse. In the model: weight on the social side lambda; pairs shown in the figures (I, C): (0.1, 0.9) = large difference, (0.2, 0.8) = medium, (0.3, 0.5) = small. Type comes from a cultural warm-up on the network: the top mu share become individualists. Colours used throughout: orange = individualists, blue = collectivists.</a:t>
             </a:r>
             <a:endParaRPr lang="en-US" dirty="0"/>
           </a:p>
@@ -2613,8 +2792,8 @@
         </p:nvSpPr>
         <p:spPr>
           <a:xfrm>
-            <a:off x="457200" y="274320"/>
-            <a:ext cx="8229600" cy="685800"/>
+            <a:off x="548640" y="1828800"/>
+            <a:ext cx="8046720" cy="1097280"/>
           </a:xfrm>
           <a:prstGeom prst="rect">
             <a:avLst/>
@@ -2630,83 +2809,44 @@
               <a:buNone/>
             </a:pPr>
             <a:r>
-              <a:rPr lang="en-US" sz="2400" b="1" dirty="0">
-                <a:solidFill>
-                  <a:schemeClr val="tx2"/>
-                </a:solidFill>
-              </a:rPr>
-              <a:t>More individualists, fewer failures</a:t>
-            </a:r>
-            <a:endParaRPr lang="en-US" sz="2400" dirty="0"/>
-          </a:p>
-        </p:txBody>
-      </p:sp>
-      <p:pic>
-        <p:nvPicPr>
-          <p:cNvPr id="3" name="e05" descr="Chance the bank fails by share of individualists: falls from about 0.67 with no individualists to about 0.08 with all individualists for the large difference pair; monotone for every pair.">    </p:cNvPr>
-          <p:cNvPicPr>
-            <a:picLocks noChangeAspect="1"/>
-          </p:cNvPicPr>
-          <p:nvPr/>
-        </p:nvPicPr>
-        <p:blipFill>
-          <a:blip r:embed="rId1"/>
-          <a:stretch>
-            <a:fillRect/>
-          </a:stretch>
-        </p:blipFill>
-        <p:spPr>
-          <a:xfrm>
-            <a:off x="1821553" y="1005840"/>
-            <a:ext cx="5500893" cy="3611880"/>
-          </a:xfrm>
-          <a:prstGeom prst="rect">
-            <a:avLst/>
-          </a:prstGeom>
-        </p:spPr>
-      </p:pic>
-      <p:sp>
-        <p:nvSpPr>
-          <p:cNvPr id="25" name="Slide Number Placeholder 0"/>
-          <p:cNvSpPr>
-            <a:spLocks noGrp="1"/>
-          </p:cNvSpPr>
-          <p:nvPr>
-            <p:ph type="sldNum" sz="quarter" idx="4294967295"/>
-          </p:nvPr>
-        </p:nvSpPr>
-        <p:spPr>
-          <a:xfrm>
-            <a:off x="8321040" y="4754880"/>
-            <a:ext cx="457200" cy="274320"/>
-          </a:xfrm>
-          <a:prstGeom prst="rect">
-            <a:avLst/>
-          </a:prstGeom>
-          <a:extLst>
-            <a:ext uri="{C572A759-6A51-4108-AA02-DFA0A04FC94B}">
-              <ma14:wrappingTextBoxFlag xmlns:ma14="http://schemas.microsoft.com/office/mac/drawingml/2011/main" val="0"/>
-            </a:ext>
-          </a:extLst>
-        </p:spPr>
-        <p:txBody>
-          <a:bodyPr/>
-          <a:lstStyle>
-            <a:lvl1pPr>
-              <a:defRPr sz="900">
-                <a:solidFill>
-                  <a:srgbClr val="6B7280"/>
-                </a:solidFill>
-              </a:defRPr>
-            </a:lvl1pPr>
-          </a:lstStyle>
-          <a:p>
-            <a:pPr algn="r"/>
-            <a:fld id="{F7021451-1387-4CA6-816F-3879F97B5CBC}" type="slidenum">
-              <a:rPr b="0" lang="en-US"/>
-              <a:t>10</a:t>
-            </a:fld>
-            <a:endParaRPr lang="en-US"/>
+              <a:rPr lang="en-US" sz="3200" b="1" dirty="0">
+                <a:solidFill>
+                  <a:schemeClr val="bg1"/>
+                </a:solidFill>
+              </a:rPr>
+              <a:t>Results</a:t>
+            </a:r>
+            <a:endParaRPr lang="en-US" sz="3200" dirty="0"/>
+          </a:p>
+        </p:txBody>
+      </p:sp>
+      <p:sp>
+        <p:nvSpPr>
+          <p:cNvPr id="4" name="Text 0"/>
+          <p:cNvSpPr/>
+          <p:nvPr>
+            <p:ph idx="101" type="body" hasCustomPrompt="1"/>
+          </p:nvPr>
+        </p:nvSpPr>
+        <p:spPr>
+          <a:xfrm>
+            <a:off x="548640" y="2971800"/>
+            <a:ext cx="8046720" cy="731520"/>
+          </a:xfrm>
+          <a:prstGeom prst="rect">
+            <a:avLst/>
+          </a:prstGeom>
+          <a:noFill/>
+          <a:ln/>
+        </p:spPr>
+        <p:txBody>
+          <a:bodyPr wrap="square" lIns="0" tIns="0" rIns="0" bIns="0" rtlCol="0" anchor="t"/>
+          <a:lstStyle/>
+          <a:p>
+            <a:pPr algn="ctr" indent="0" marL="0">
+              <a:buNone/>
+            </a:pPr>
+            <a:endParaRPr lang="en-US" sz="1600" dirty="0"/>
           </a:p>
         </p:txBody>
       </p:sp>
@@ -2767,7 +2907,7 @@
                   <a:schemeClr val="tx2"/>
                 </a:solidFill>
               </a:rPr>
-              <a:t>Outdated news cuts both ways</a:t>
+              <a:t>Collectivists herd</a:t>
             </a:r>
             <a:endParaRPr lang="en-US" sz="2400" dirty="0"/>
           </a:p>
@@ -2775,7 +2915,7 @@
       </p:sp>
       <p:pic>
         <p:nvPicPr>
-          <p:cNvPr id="3" name="e08" descr="Chance the bank fails by kind of public news: outdated pessimistic news raises it to about 0.48, accurate news barely changes it from no news (0.29 vs 0.31), outdated optimistic news lowers it to 0.16.">    </p:cNvPr>
+          <p:cNvPr id="3" name="e07" descr="Chance of withdrawing by share of neighbours who have withdrawn: collectivists jump to near 1 once 20 to 35 percent of neighbours are out; individualists level off near 0.25 to 0.30.">    </p:cNvPr>
           <p:cNvPicPr>
             <a:picLocks noChangeAspect="1"/>
           </p:cNvPicPr>
@@ -2789,8 +2929,8 @@
         </p:blipFill>
         <p:spPr>
           <a:xfrm>
-            <a:off x="730766" y="1005840"/>
-            <a:ext cx="7682469" cy="3611880"/>
+            <a:off x="1738480" y="1005840"/>
+            <a:ext cx="5667040" cy="3611880"/>
           </a:xfrm>
           <a:prstGeom prst="rect">
             <a:avLst/>
@@ -2899,7 +3039,7 @@
                   <a:schemeClr val="tx2"/>
                 </a:solidFill>
               </a:rPr>
-              <a:t>Varying the deposit-size distribution</a:t>
+              <a:t>More individualists, fewer failures</a:t>
             </a:r>
             <a:endParaRPr lang="en-US" sz="2400" dirty="0"/>
           </a:p>
@@ -2907,7 +3047,7 @@
       </p:sp>
       <p:pic>
         <p:nvPicPr>
-          <p:cNvPr id="3" name="e10" descr="Chance the bank fails by share of individualists for three deposit-size distributions: uncapped large deposits fail most often; capped at 1 percent matches the bank with similar-sized deposits at every share.">    </p:cNvPr>
+          <p:cNvPr id="3" name="e05" descr="Chance the bank fails by share of individualists: falls from about 0.67 with no individualists to about 0.08 with all individualists for the large difference pair; monotone for every pair.">    </p:cNvPr>
           <p:cNvPicPr>
             <a:picLocks noChangeAspect="1"/>
           </p:cNvPicPr>
@@ -2921,8 +3061,8 @@
         </p:blipFill>
         <p:spPr>
           <a:xfrm>
-            <a:off x="1861284" y="1005840"/>
-            <a:ext cx="5421432" cy="3611880"/>
+            <a:off x="1821553" y="1005840"/>
+            <a:ext cx="5500893" cy="3611880"/>
           </a:xfrm>
           <a:prstGeom prst="rect">
             <a:avLst/>
@@ -3031,7 +3171,7 @@
                   <a:schemeClr val="tx2"/>
                 </a:solidFill>
               </a:rPr>
-              <a:t>Does the model hold up?</a:t>
+              <a:t>Outdated news cuts both ways</a:t>
             </a:r>
             <a:endParaRPr lang="en-US" sz="2400" dirty="0"/>
           </a:p>
@@ -3039,7 +3179,7 @@
       </p:sp>
       <p:pic>
         <p:nvPicPr>
-          <p:cNvPr id="3" name="e01" descr="Individualists' run rate minus collectivists', relative to no news, against how far public news is from the truth: rises from negative when news is pessimistic to positive when optimistic, more steeply for the wide lambda gap.">    </p:cNvPr>
+          <p:cNvPr id="3" name="e08" descr="Chance the bank fails by kind of public news: outdated pessimistic news raises it to about 0.48, accurate news barely changes it from no news (0.29 vs 0.31), outdated optimistic news lowers it to 0.16.">    </p:cNvPr>
           <p:cNvPicPr>
             <a:picLocks noChangeAspect="1"/>
           </p:cNvPicPr>
@@ -3053,8 +3193,8 @@
         </p:blipFill>
         <p:spPr>
           <a:xfrm>
-            <a:off x="1711391" y="1005840"/>
-            <a:ext cx="5721218" cy="3611880"/>
+            <a:off x="730766" y="1005840"/>
+            <a:ext cx="7682469" cy="3611880"/>
           </a:xfrm>
           <a:prstGeom prst="rect">
             <a:avLst/>
@@ -3163,510 +3303,36 @@
                   <a:schemeClr val="tx2"/>
                 </a:solidFill>
               </a:rPr>
-              <a:t>Takeaways and next steps</a:t>
+              <a:t>Varying the deposit-size distribution</a:t>
             </a:r>
             <a:endParaRPr lang="en-US" sz="2400" dirty="0"/>
           </a:p>
         </p:txBody>
       </p:sp>
-      <p:sp>
-        <p:nvSpPr>
-          <p:cNvPr id="3" name="take-head"/>
-          <p:cNvSpPr txBox="1"/>
+      <p:pic>
+        <p:nvPicPr>
+          <p:cNvPr id="3" name="e10" descr="Chance the bank fails by share of individualists for three deposit-size distributions: uncapped large deposits fail most often; capped at 1 percent matches the bank with similar-sized deposits at every share.">    </p:cNvPr>
+          <p:cNvPicPr>
+            <a:picLocks noChangeAspect="1"/>
+          </p:cNvPicPr>
           <p:nvPr/>
-        </p:nvSpPr>
-        <p:spPr>
-          <a:xfrm>
-            <a:off x="457200" y="1051560"/>
-            <a:ext cx="2743200" cy="530352"/>
-          </a:xfrm>
-          <a:prstGeom prst="rect">
-            <a:avLst/>
-          </a:prstGeom>
-          <a:noFill/>
-          <a:ln/>
-        </p:spPr>
-        <p:txBody>
-          <a:bodyPr wrap="square" lIns="0" tIns="0" rIns="0" bIns="0" rtlCol="0" anchor="ctr"/>
-          <a:lstStyle/>
-          <a:p>
-            <a:pPr indent="0" marL="0">
-              <a:buNone/>
-            </a:pPr>
-            <a:r>
-              <a:rPr lang="en-US" sz="1300" b="1" dirty="0">
-                <a:solidFill>
-                  <a:schemeClr val="accent1"/>
-                </a:solidFill>
-              </a:rPr>
-              <a:t>1:  </a:t>
-            </a:r>
-            <a:pPr indent="0" marL="0">
-              <a:buNone/>
-            </a:pPr>
-            <a:r>
-              <a:rPr lang="en-US" sz="1300" b="1" dirty="0">
-                <a:solidFill>
-                  <a:schemeClr val="tx2"/>
-                </a:solidFill>
-              </a:rPr>
-              <a:t>Sorting follows the news</a:t>
-            </a:r>
-            <a:endParaRPr lang="en-US" sz="1300" dirty="0"/>
-          </a:p>
-        </p:txBody>
-      </p:sp>
-      <p:sp>
-        <p:nvSpPr>
-          <p:cNvPr id="4" name="take-body"/>
-          <p:cNvSpPr txBox="1"/>
-          <p:nvPr/>
-        </p:nvSpPr>
-        <p:spPr>
-          <a:xfrm>
-            <a:off x="3291840" y="1051560"/>
-            <a:ext cx="5394960" cy="530352"/>
-          </a:xfrm>
-          <a:prstGeom prst="rect">
-            <a:avLst/>
-          </a:prstGeom>
-          <a:noFill/>
-          <a:ln/>
-        </p:spPr>
-        <p:txBody>
-          <a:bodyPr wrap="square" lIns="0" tIns="0" rIns="0" bIns="0" rtlCol="0" anchor="ctr"/>
-          <a:lstStyle/>
-          <a:p>
-            <a:pPr indent="0" marL="0">
-              <a:buNone/>
-            </a:pPr>
-            <a:r>
-              <a:rPr lang="en-US" sz="1200" dirty="0">
-                <a:solidFill>
-                  <a:schemeClr val="tx1"/>
-                </a:solidFill>
-              </a:rPr>
-              <a:t>Optimistic public news makes individualists run relatively more; pessimistic news, collectivists.</a:t>
-            </a:r>
-            <a:endParaRPr lang="en-US" sz="1200" dirty="0"/>
-          </a:p>
-        </p:txBody>
-      </p:sp>
-      <p:sp>
-        <p:nvSpPr>
-          <p:cNvPr id="5" name="take-head"/>
-          <p:cNvSpPr txBox="1"/>
-          <p:nvPr/>
-        </p:nvSpPr>
-        <p:spPr>
-          <a:xfrm>
-            <a:off x="457200" y="1627632"/>
-            <a:ext cx="2743200" cy="530352"/>
-          </a:xfrm>
-          <a:prstGeom prst="rect">
-            <a:avLst/>
-          </a:prstGeom>
-          <a:noFill/>
-          <a:ln/>
-        </p:spPr>
-        <p:txBody>
-          <a:bodyPr wrap="square" lIns="0" tIns="0" rIns="0" bIns="0" rtlCol="0" anchor="ctr"/>
-          <a:lstStyle/>
-          <a:p>
-            <a:pPr indent="0" marL="0">
-              <a:buNone/>
-            </a:pPr>
-            <a:r>
-              <a:rPr lang="en-US" sz="1300" b="1" dirty="0">
-                <a:solidFill>
-                  <a:schemeClr val="accent1"/>
-                </a:solidFill>
-              </a:rPr>
-              <a:t>2:  </a:t>
-            </a:r>
-            <a:pPr indent="0" marL="0">
-              <a:buNone/>
-            </a:pPr>
-            <a:r>
-              <a:rPr lang="en-US" sz="1300" b="1" dirty="0">
-                <a:solidFill>
-                  <a:schemeClr val="tx2"/>
-                </a:solidFill>
-              </a:rPr>
-              <a:t>Collectivists herd</a:t>
-            </a:r>
-            <a:endParaRPr lang="en-US" sz="1300" dirty="0"/>
-          </a:p>
-        </p:txBody>
-      </p:sp>
-      <p:sp>
-        <p:nvSpPr>
-          <p:cNvPr id="6" name="take-body"/>
-          <p:cNvSpPr txBox="1"/>
-          <p:nvPr/>
-        </p:nvSpPr>
-        <p:spPr>
-          <a:xfrm>
-            <a:off x="3291840" y="1627632"/>
-            <a:ext cx="5394960" cy="530352"/>
-          </a:xfrm>
-          <a:prstGeom prst="rect">
-            <a:avLst/>
-          </a:prstGeom>
-          <a:noFill/>
-          <a:ln/>
-        </p:spPr>
-        <p:txBody>
-          <a:bodyPr wrap="square" lIns="0" tIns="0" rIns="0" bIns="0" rtlCol="0" anchor="ctr"/>
-          <a:lstStyle/>
-          <a:p>
-            <a:pPr indent="0" marL="0">
-              <a:buNone/>
-            </a:pPr>
-            <a:r>
-              <a:rPr lang="en-US" sz="1200" dirty="0">
-                <a:solidFill>
-                  <a:schemeClr val="tx1"/>
-                </a:solidFill>
-              </a:rPr>
-              <a:t>Their chance of withdrawing jumps from 0.15 to 0.93 once 20–35% of neighbours are out; individualists level off near 0.3.</a:t>
-            </a:r>
-            <a:endParaRPr lang="en-US" sz="1200" dirty="0"/>
-          </a:p>
-        </p:txBody>
-      </p:sp>
-      <p:sp>
-        <p:nvSpPr>
-          <p:cNvPr id="7" name="take-head"/>
-          <p:cNvSpPr txBox="1"/>
-          <p:nvPr/>
-        </p:nvSpPr>
-        <p:spPr>
-          <a:xfrm>
-            <a:off x="457200" y="2203704"/>
-            <a:ext cx="2743200" cy="530352"/>
-          </a:xfrm>
-          <a:prstGeom prst="rect">
-            <a:avLst/>
-          </a:prstGeom>
-          <a:noFill/>
-          <a:ln/>
-        </p:spPr>
-        <p:txBody>
-          <a:bodyPr wrap="square" lIns="0" tIns="0" rIns="0" bIns="0" rtlCol="0" anchor="ctr"/>
-          <a:lstStyle/>
-          <a:p>
-            <a:pPr indent="0" marL="0">
-              <a:buNone/>
-            </a:pPr>
-            <a:r>
-              <a:rPr lang="en-US" sz="1300" b="1" dirty="0">
-                <a:solidFill>
-                  <a:schemeClr val="accent1"/>
-                </a:solidFill>
-              </a:rPr>
-              <a:t>3:  </a:t>
-            </a:r>
-            <a:pPr indent="0" marL="0">
-              <a:buNone/>
-            </a:pPr>
-            <a:r>
-              <a:rPr lang="en-US" sz="1300" b="1" dirty="0">
-                <a:solidFill>
-                  <a:schemeClr val="tx2"/>
-                </a:solidFill>
-              </a:rPr>
-              <a:t>More individualists, fewer failures</a:t>
-            </a:r>
-            <a:endParaRPr lang="en-US" sz="1300" dirty="0"/>
-          </a:p>
-        </p:txBody>
-      </p:sp>
-      <p:sp>
-        <p:nvSpPr>
-          <p:cNvPr id="8" name="take-body"/>
-          <p:cNvSpPr txBox="1"/>
-          <p:nvPr/>
-        </p:nvSpPr>
-        <p:spPr>
-          <a:xfrm>
-            <a:off x="3291840" y="2203704"/>
-            <a:ext cx="5394960" cy="530352"/>
-          </a:xfrm>
-          <a:prstGeom prst="rect">
-            <a:avLst/>
-          </a:prstGeom>
-          <a:noFill/>
-          <a:ln/>
-        </p:spPr>
-        <p:txBody>
-          <a:bodyPr wrap="square" lIns="0" tIns="0" rIns="0" bIns="0" rtlCol="0" anchor="ctr"/>
-          <a:lstStyle/>
-          <a:p>
-            <a:pPr indent="0" marL="0">
-              <a:buNone/>
-            </a:pPr>
-            <a:r>
-              <a:rPr lang="en-US" sz="1200" dirty="0">
-                <a:solidFill>
-                  <a:schemeClr val="tx1"/>
-                </a:solidFill>
-              </a:rPr>
-              <a:t>P(fail) falls from 0.67 to 0.08 as the individualist share goes from 0 to 1.</a:t>
-            </a:r>
-            <a:endParaRPr lang="en-US" sz="1200" dirty="0"/>
-          </a:p>
-        </p:txBody>
-      </p:sp>
-      <p:sp>
-        <p:nvSpPr>
-          <p:cNvPr id="9" name="take-head"/>
-          <p:cNvSpPr txBox="1"/>
-          <p:nvPr/>
-        </p:nvSpPr>
-        <p:spPr>
-          <a:xfrm>
-            <a:off x="457200" y="2779776"/>
-            <a:ext cx="2743200" cy="530352"/>
-          </a:xfrm>
-          <a:prstGeom prst="rect">
-            <a:avLst/>
-          </a:prstGeom>
-          <a:noFill/>
-          <a:ln/>
-        </p:spPr>
-        <p:txBody>
-          <a:bodyPr wrap="square" lIns="0" tIns="0" rIns="0" bIns="0" rtlCol="0" anchor="ctr"/>
-          <a:lstStyle/>
-          <a:p>
-            <a:pPr indent="0" marL="0">
-              <a:buNone/>
-            </a:pPr>
-            <a:r>
-              <a:rPr lang="en-US" sz="1300" b="1" dirty="0">
-                <a:solidFill>
-                  <a:schemeClr val="accent1"/>
-                </a:solidFill>
-              </a:rPr>
-              <a:t>4:  </a:t>
-            </a:r>
-            <a:pPr indent="0" marL="0">
-              <a:buNone/>
-            </a:pPr>
-            <a:r>
-              <a:rPr lang="en-US" sz="1300" b="1" dirty="0">
-                <a:solidFill>
-                  <a:schemeClr val="tx2"/>
-                </a:solidFill>
-              </a:rPr>
-              <a:t>Stale news cuts both ways</a:t>
-            </a:r>
-            <a:endParaRPr lang="en-US" sz="1300" dirty="0"/>
-          </a:p>
-        </p:txBody>
-      </p:sp>
-      <p:sp>
-        <p:nvSpPr>
-          <p:cNvPr id="10" name="take-body"/>
-          <p:cNvSpPr txBox="1"/>
-          <p:nvPr/>
-        </p:nvSpPr>
-        <p:spPr>
-          <a:xfrm>
-            <a:off x="3291840" y="2779776"/>
-            <a:ext cx="5394960" cy="530352"/>
-          </a:xfrm>
-          <a:prstGeom prst="rect">
-            <a:avLst/>
-          </a:prstGeom>
-          <a:noFill/>
-          <a:ln/>
-        </p:spPr>
-        <p:txBody>
-          <a:bodyPr wrap="square" lIns="0" tIns="0" rIns="0" bIns="0" rtlCol="0" anchor="ctr"/>
-          <a:lstStyle/>
-          <a:p>
-            <a:pPr indent="0" marL="0">
-              <a:buNone/>
-            </a:pPr>
-            <a:r>
-              <a:rPr lang="en-US" sz="1200" dirty="0">
-                <a:solidFill>
-                  <a:schemeClr val="tx1"/>
-                </a:solidFill>
-              </a:rPr>
-              <a:t>A stale optimistic signal halves failure, a stale pessimistic one raises it by half. Accurate news barely moves it.</a:t>
-            </a:r>
-            <a:endParaRPr lang="en-US" sz="1200" dirty="0"/>
-          </a:p>
-        </p:txBody>
-      </p:sp>
-      <p:sp>
-        <p:nvSpPr>
-          <p:cNvPr id="11" name="take-head"/>
-          <p:cNvSpPr txBox="1"/>
-          <p:nvPr/>
-        </p:nvSpPr>
-        <p:spPr>
-          <a:xfrm>
-            <a:off x="457200" y="3355848"/>
-            <a:ext cx="2743200" cy="530352"/>
-          </a:xfrm>
-          <a:prstGeom prst="rect">
-            <a:avLst/>
-          </a:prstGeom>
-          <a:noFill/>
-          <a:ln/>
-        </p:spPr>
-        <p:txBody>
-          <a:bodyPr wrap="square" lIns="0" tIns="0" rIns="0" bIns="0" rtlCol="0" anchor="ctr"/>
-          <a:lstStyle/>
-          <a:p>
-            <a:pPr indent="0" marL="0">
-              <a:buNone/>
-            </a:pPr>
-            <a:r>
-              <a:rPr lang="en-US" sz="1300" b="1" dirty="0">
-                <a:solidFill>
-                  <a:schemeClr val="accent1"/>
-                </a:solidFill>
-              </a:rPr>
-              <a:t>5:  </a:t>
-            </a:r>
-            <a:pPr indent="0" marL="0">
-              <a:buNone/>
-            </a:pPr>
-            <a:r>
-              <a:rPr lang="en-US" sz="1300" b="1" dirty="0">
-                <a:solidFill>
-                  <a:schemeClr val="tx2"/>
-                </a:solidFill>
-              </a:rPr>
-              <a:t>Capping the largest deposits</a:t>
-            </a:r>
-            <a:endParaRPr lang="en-US" sz="1300" dirty="0"/>
-          </a:p>
-        </p:txBody>
-      </p:sp>
-      <p:sp>
-        <p:nvSpPr>
-          <p:cNvPr id="12" name="take-body"/>
-          <p:cNvSpPr txBox="1"/>
-          <p:nvPr/>
-        </p:nvSpPr>
-        <p:spPr>
-          <a:xfrm>
-            <a:off x="3291840" y="3355848"/>
-            <a:ext cx="5394960" cy="530352"/>
-          </a:xfrm>
-          <a:prstGeom prst="rect">
-            <a:avLst/>
-          </a:prstGeom>
-          <a:noFill/>
-          <a:ln/>
-        </p:spPr>
-        <p:txBody>
-          <a:bodyPr wrap="square" lIns="0" tIns="0" rIns="0" bIns="0" rtlCol="0" anchor="ctr"/>
-          <a:lstStyle/>
-          <a:p>
-            <a:pPr indent="0" marL="0">
-              <a:buNone/>
-            </a:pPr>
-            <a:r>
-              <a:rPr lang="en-US" sz="1200" dirty="0">
-                <a:solidFill>
-                  <a:schemeClr val="tx1"/>
-                </a:solidFill>
-              </a:rPr>
-              <a:t>A 1% cap brings failure down to the no-concentration bank’s level; the culture gradient is unchanged.</a:t>
-            </a:r>
-            <a:endParaRPr lang="en-US" sz="1200" dirty="0"/>
-          </a:p>
-        </p:txBody>
-      </p:sp>
-      <p:sp>
-        <p:nvSpPr>
-          <p:cNvPr id="13" name="take-head"/>
-          <p:cNvSpPr txBox="1"/>
-          <p:nvPr/>
-        </p:nvSpPr>
-        <p:spPr>
-          <a:xfrm>
-            <a:off x="457200" y="3931920"/>
-            <a:ext cx="2743200" cy="530352"/>
-          </a:xfrm>
-          <a:prstGeom prst="rect">
-            <a:avLst/>
-          </a:prstGeom>
-          <a:noFill/>
-          <a:ln/>
-        </p:spPr>
-        <p:txBody>
-          <a:bodyPr wrap="square" lIns="0" tIns="0" rIns="0" bIns="0" rtlCol="0" anchor="ctr"/>
-          <a:lstStyle/>
-          <a:p>
-            <a:pPr indent="0" marL="0">
-              <a:buNone/>
-            </a:pPr>
-            <a:r>
-              <a:rPr lang="en-US" sz="1300" b="1" dirty="0">
-                <a:solidFill>
-                  <a:schemeClr val="accent1"/>
-                </a:solidFill>
-              </a:rPr>
-              <a:t>6:  </a:t>
-            </a:r>
-            <a:pPr indent="0" marL="0">
-              <a:buNone/>
-            </a:pPr>
-            <a:r>
-              <a:rPr lang="en-US" sz="1300" b="1" dirty="0">
-                <a:solidFill>
-                  <a:schemeClr val="tx2"/>
-                </a:solidFill>
-              </a:rPr>
-              <a:t>Not yet matched</a:t>
-            </a:r>
-            <a:endParaRPr lang="en-US" sz="1300" dirty="0"/>
-          </a:p>
-        </p:txBody>
-      </p:sp>
-      <p:sp>
-        <p:nvSpPr>
-          <p:cNvPr id="14" name="take-body"/>
-          <p:cNvSpPr txBox="1"/>
-          <p:nvPr/>
-        </p:nvSpPr>
-        <p:spPr>
-          <a:xfrm>
-            <a:off x="3291840" y="3931920"/>
-            <a:ext cx="5394960" cy="530352"/>
-          </a:xfrm>
-          <a:prstGeom prst="rect">
-            <a:avLst/>
-          </a:prstGeom>
-          <a:noFill/>
-          <a:ln/>
-        </p:spPr>
-        <p:txBody>
-          <a:bodyPr wrap="square" lIns="0" tIns="0" rIns="0" bIns="0" rtlCol="0" anchor="ctr"/>
-          <a:lstStyle/>
-          <a:p>
-            <a:pPr indent="0" marL="0">
-              <a:buNone/>
-            </a:pPr>
-            <a:r>
-              <a:rPr lang="en-US" sz="1200" dirty="0">
-                <a:solidFill>
-                  <a:schemeClr val="tx1"/>
-                </a:solidFill>
-              </a:rPr>
-              <a:t>How large depositors exit in real runs.</a:t>
-            </a:r>
-            <a:endParaRPr lang="en-US" sz="1200" dirty="0"/>
-          </a:p>
-        </p:txBody>
-      </p:sp>
+        </p:nvPicPr>
+        <p:blipFill>
+          <a:blip r:embed="rId1"/>
+          <a:stretch>
+            <a:fillRect/>
+          </a:stretch>
+        </p:blipFill>
+        <p:spPr>
+          <a:xfrm>
+            <a:off x="1861284" y="1005840"/>
+            <a:ext cx="5421432" cy="3611880"/>
+          </a:xfrm>
+          <a:prstGeom prst="rect">
+            <a:avLst/>
+          </a:prstGeom>
+        </p:spPr>
+      </p:pic>
       <p:sp>
         <p:nvSpPr>
           <p:cNvPr id="25" name="Slide Number Placeholder 0"/>
@@ -3707,6 +3373,744 @@
             <a:fld id="{F7021451-1387-4CA6-816F-3879F97B5CBC}" type="slidenum">
               <a:rPr b="0" lang="en-US"/>
               <a:t>14</a:t>
+            </a:fld>
+            <a:endParaRPr lang="en-US"/>
+          </a:p>
+        </p:txBody>
+      </p:sp>
+    </p:spTree>
+  </p:cSld>
+  <p:clrMapOvr>
+    <a:masterClrMapping/>
+  </p:clrMapOvr>
+</p:sld>
+</file>
+
+<file path=ppt/slides/slide15.xml><?xml version="1.0" encoding="utf-8"?>
+<p:sld xmlns:a="http://schemas.openxmlformats.org/drawingml/2006/main" xmlns:r="http://schemas.openxmlformats.org/officeDocument/2006/relationships" xmlns:p="http://schemas.openxmlformats.org/presentationml/2006/main">
+  <p:cSld name="Slide 15">
+    <p:spTree>
+      <p:nvGrpSpPr>
+        <p:cNvPr id="1" name=""/>
+        <p:cNvGrpSpPr/>
+        <p:nvPr/>
+      </p:nvGrpSpPr>
+      <p:grpSpPr>
+        <a:xfrm>
+          <a:off x="0" y="0"/>
+          <a:ext cx="0" cy="0"/>
+          <a:chOff x="0" y="0"/>
+          <a:chExt cx="0" cy="0"/>
+        </a:xfrm>
+      </p:grpSpPr>
+      <p:sp>
+        <p:nvSpPr>
+          <p:cNvPr id="2" name="Text 0"/>
+          <p:cNvSpPr/>
+          <p:nvPr>
+            <p:ph idx="100" type="title" hasCustomPrompt="1"/>
+          </p:nvPr>
+        </p:nvSpPr>
+        <p:spPr>
+          <a:xfrm>
+            <a:off x="457200" y="274320"/>
+            <a:ext cx="8229600" cy="685800"/>
+          </a:xfrm>
+          <a:prstGeom prst="rect">
+            <a:avLst/>
+          </a:prstGeom>
+          <a:noFill/>
+          <a:ln/>
+        </p:spPr>
+        <p:txBody>
+          <a:bodyPr wrap="square" lIns="0" tIns="0" rIns="0" bIns="0" rtlCol="0" anchor="ctr"/>
+          <a:lstStyle/>
+          <a:p>
+            <a:pPr algn="ctr" indent="0" marL="0">
+              <a:buNone/>
+            </a:pPr>
+            <a:r>
+              <a:rPr lang="en-US" sz="2400" b="1" dirty="0">
+                <a:solidFill>
+                  <a:schemeClr val="tx2"/>
+                </a:solidFill>
+              </a:rPr>
+              <a:t>Does the model hold up?</a:t>
+            </a:r>
+            <a:endParaRPr lang="en-US" sz="2400" dirty="0"/>
+          </a:p>
+        </p:txBody>
+      </p:sp>
+      <p:pic>
+        <p:nvPicPr>
+          <p:cNvPr id="3" name="e01" descr="Individualists' run rate minus collectivists', relative to no news, against how far public news is from the truth: rises from negative when news is pessimistic to positive when optimistic, more steeply for the wide lambda gap.">    </p:cNvPr>
+          <p:cNvPicPr>
+            <a:picLocks noChangeAspect="1"/>
+          </p:cNvPicPr>
+          <p:nvPr/>
+        </p:nvPicPr>
+        <p:blipFill>
+          <a:blip r:embed="rId1"/>
+          <a:stretch>
+            <a:fillRect/>
+          </a:stretch>
+        </p:blipFill>
+        <p:spPr>
+          <a:xfrm>
+            <a:off x="1711391" y="1005840"/>
+            <a:ext cx="5721218" cy="3611880"/>
+          </a:xfrm>
+          <a:prstGeom prst="rect">
+            <a:avLst/>
+          </a:prstGeom>
+        </p:spPr>
+      </p:pic>
+      <p:sp>
+        <p:nvSpPr>
+          <p:cNvPr id="25" name="Slide Number Placeholder 0"/>
+          <p:cNvSpPr>
+            <a:spLocks noGrp="1"/>
+          </p:cNvSpPr>
+          <p:nvPr>
+            <p:ph type="sldNum" sz="quarter" idx="4294967295"/>
+          </p:nvPr>
+        </p:nvSpPr>
+        <p:spPr>
+          <a:xfrm>
+            <a:off x="8321040" y="4754880"/>
+            <a:ext cx="457200" cy="274320"/>
+          </a:xfrm>
+          <a:prstGeom prst="rect">
+            <a:avLst/>
+          </a:prstGeom>
+          <a:extLst>
+            <a:ext uri="{C572A759-6A51-4108-AA02-DFA0A04FC94B}">
+              <ma14:wrappingTextBoxFlag xmlns:ma14="http://schemas.microsoft.com/office/mac/drawingml/2011/main" val="0"/>
+            </a:ext>
+          </a:extLst>
+        </p:spPr>
+        <p:txBody>
+          <a:bodyPr/>
+          <a:lstStyle>
+            <a:lvl1pPr>
+              <a:defRPr sz="900">
+                <a:solidFill>
+                  <a:srgbClr val="6B7280"/>
+                </a:solidFill>
+              </a:defRPr>
+            </a:lvl1pPr>
+          </a:lstStyle>
+          <a:p>
+            <a:pPr algn="r"/>
+            <a:fld id="{F7021451-1387-4CA6-816F-3879F97B5CBC}" type="slidenum">
+              <a:rPr b="0" lang="en-US"/>
+              <a:t>15</a:t>
+            </a:fld>
+            <a:endParaRPr lang="en-US"/>
+          </a:p>
+        </p:txBody>
+      </p:sp>
+    </p:spTree>
+  </p:cSld>
+  <p:clrMapOvr>
+    <a:masterClrMapping/>
+  </p:clrMapOvr>
+</p:sld>
+</file>
+
+<file path=ppt/slides/slide16.xml><?xml version="1.0" encoding="utf-8"?>
+<p:sld xmlns:a="http://schemas.openxmlformats.org/drawingml/2006/main" xmlns:r="http://schemas.openxmlformats.org/officeDocument/2006/relationships" xmlns:p="http://schemas.openxmlformats.org/presentationml/2006/main">
+  <p:cSld name="Slide 16">
+    <p:spTree>
+      <p:nvGrpSpPr>
+        <p:cNvPr id="1" name=""/>
+        <p:cNvGrpSpPr/>
+        <p:nvPr/>
+      </p:nvGrpSpPr>
+      <p:grpSpPr>
+        <a:xfrm>
+          <a:off x="0" y="0"/>
+          <a:ext cx="0" cy="0"/>
+          <a:chOff x="0" y="0"/>
+          <a:chExt cx="0" cy="0"/>
+        </a:xfrm>
+      </p:grpSpPr>
+      <p:sp>
+        <p:nvSpPr>
+          <p:cNvPr id="2" name="Text 0"/>
+          <p:cNvSpPr/>
+          <p:nvPr>
+            <p:ph idx="100" type="title" hasCustomPrompt="1"/>
+          </p:nvPr>
+        </p:nvSpPr>
+        <p:spPr>
+          <a:xfrm>
+            <a:off x="457200" y="274320"/>
+            <a:ext cx="8229600" cy="685800"/>
+          </a:xfrm>
+          <a:prstGeom prst="rect">
+            <a:avLst/>
+          </a:prstGeom>
+          <a:noFill/>
+          <a:ln/>
+        </p:spPr>
+        <p:txBody>
+          <a:bodyPr wrap="square" lIns="0" tIns="0" rIns="0" bIns="0" rtlCol="0" anchor="ctr"/>
+          <a:lstStyle/>
+          <a:p>
+            <a:pPr algn="ctr" indent="0" marL="0">
+              <a:buNone/>
+            </a:pPr>
+            <a:r>
+              <a:rPr lang="en-US" sz="2400" b="1" dirty="0">
+                <a:solidFill>
+                  <a:schemeClr val="tx2"/>
+                </a:solidFill>
+              </a:rPr>
+              <a:t>Takeaways and next steps</a:t>
+            </a:r>
+            <a:endParaRPr lang="en-US" sz="2400" dirty="0"/>
+          </a:p>
+        </p:txBody>
+      </p:sp>
+      <p:sp>
+        <p:nvSpPr>
+          <p:cNvPr id="3" name="take-head"/>
+          <p:cNvSpPr txBox="1"/>
+          <p:nvPr/>
+        </p:nvSpPr>
+        <p:spPr>
+          <a:xfrm>
+            <a:off x="457200" y="1051560"/>
+            <a:ext cx="2743200" cy="530352"/>
+          </a:xfrm>
+          <a:prstGeom prst="rect">
+            <a:avLst/>
+          </a:prstGeom>
+          <a:noFill/>
+          <a:ln/>
+        </p:spPr>
+        <p:txBody>
+          <a:bodyPr wrap="square" lIns="0" tIns="0" rIns="0" bIns="0" rtlCol="0" anchor="ctr"/>
+          <a:lstStyle/>
+          <a:p>
+            <a:pPr indent="0" marL="0">
+              <a:buNone/>
+            </a:pPr>
+            <a:r>
+              <a:rPr lang="en-US" sz="1300" b="1" dirty="0">
+                <a:solidFill>
+                  <a:schemeClr val="accent1"/>
+                </a:solidFill>
+              </a:rPr>
+              <a:t>1:  </a:t>
+            </a:r>
+            <a:pPr indent="0" marL="0">
+              <a:buNone/>
+            </a:pPr>
+            <a:r>
+              <a:rPr lang="en-US" sz="1300" b="1" dirty="0">
+                <a:solidFill>
+                  <a:schemeClr val="tx2"/>
+                </a:solidFill>
+              </a:rPr>
+              <a:t>Sorting follows the news</a:t>
+            </a:r>
+            <a:endParaRPr lang="en-US" sz="1300" dirty="0"/>
+          </a:p>
+        </p:txBody>
+      </p:sp>
+      <p:sp>
+        <p:nvSpPr>
+          <p:cNvPr id="4" name="take-body"/>
+          <p:cNvSpPr txBox="1"/>
+          <p:nvPr/>
+        </p:nvSpPr>
+        <p:spPr>
+          <a:xfrm>
+            <a:off x="3291840" y="1051560"/>
+            <a:ext cx="5394960" cy="530352"/>
+          </a:xfrm>
+          <a:prstGeom prst="rect">
+            <a:avLst/>
+          </a:prstGeom>
+          <a:noFill/>
+          <a:ln/>
+        </p:spPr>
+        <p:txBody>
+          <a:bodyPr wrap="square" lIns="0" tIns="0" rIns="0" bIns="0" rtlCol="0" anchor="ctr"/>
+          <a:lstStyle/>
+          <a:p>
+            <a:pPr indent="0" marL="0">
+              <a:buNone/>
+            </a:pPr>
+            <a:r>
+              <a:rPr lang="en-US" sz="1200" dirty="0">
+                <a:solidFill>
+                  <a:schemeClr val="tx1"/>
+                </a:solidFill>
+              </a:rPr>
+              <a:t>Optimistic public news makes individualists run relatively more; pessimistic news, collectivists.</a:t>
+            </a:r>
+            <a:endParaRPr lang="en-US" sz="1200" dirty="0"/>
+          </a:p>
+        </p:txBody>
+      </p:sp>
+      <p:sp>
+        <p:nvSpPr>
+          <p:cNvPr id="5" name="take-head"/>
+          <p:cNvSpPr txBox="1"/>
+          <p:nvPr/>
+        </p:nvSpPr>
+        <p:spPr>
+          <a:xfrm>
+            <a:off x="457200" y="1627632"/>
+            <a:ext cx="2743200" cy="530352"/>
+          </a:xfrm>
+          <a:prstGeom prst="rect">
+            <a:avLst/>
+          </a:prstGeom>
+          <a:noFill/>
+          <a:ln/>
+        </p:spPr>
+        <p:txBody>
+          <a:bodyPr wrap="square" lIns="0" tIns="0" rIns="0" bIns="0" rtlCol="0" anchor="ctr"/>
+          <a:lstStyle/>
+          <a:p>
+            <a:pPr indent="0" marL="0">
+              <a:buNone/>
+            </a:pPr>
+            <a:r>
+              <a:rPr lang="en-US" sz="1300" b="1" dirty="0">
+                <a:solidFill>
+                  <a:schemeClr val="accent1"/>
+                </a:solidFill>
+              </a:rPr>
+              <a:t>2:  </a:t>
+            </a:r>
+            <a:pPr indent="0" marL="0">
+              <a:buNone/>
+            </a:pPr>
+            <a:r>
+              <a:rPr lang="en-US" sz="1300" b="1" dirty="0">
+                <a:solidFill>
+                  <a:schemeClr val="tx2"/>
+                </a:solidFill>
+              </a:rPr>
+              <a:t>Collectivists herd</a:t>
+            </a:r>
+            <a:endParaRPr lang="en-US" sz="1300" dirty="0"/>
+          </a:p>
+        </p:txBody>
+      </p:sp>
+      <p:sp>
+        <p:nvSpPr>
+          <p:cNvPr id="6" name="take-body"/>
+          <p:cNvSpPr txBox="1"/>
+          <p:nvPr/>
+        </p:nvSpPr>
+        <p:spPr>
+          <a:xfrm>
+            <a:off x="3291840" y="1627632"/>
+            <a:ext cx="5394960" cy="530352"/>
+          </a:xfrm>
+          <a:prstGeom prst="rect">
+            <a:avLst/>
+          </a:prstGeom>
+          <a:noFill/>
+          <a:ln/>
+        </p:spPr>
+        <p:txBody>
+          <a:bodyPr wrap="square" lIns="0" tIns="0" rIns="0" bIns="0" rtlCol="0" anchor="ctr"/>
+          <a:lstStyle/>
+          <a:p>
+            <a:pPr indent="0" marL="0">
+              <a:buNone/>
+            </a:pPr>
+            <a:r>
+              <a:rPr lang="en-US" sz="1200" dirty="0">
+                <a:solidFill>
+                  <a:schemeClr val="tx1"/>
+                </a:solidFill>
+              </a:rPr>
+              <a:t>Their chance of withdrawing jumps from 0.15 to 0.93 once 20–35% of neighbours are out; individualists level off near 0.3.</a:t>
+            </a:r>
+            <a:endParaRPr lang="en-US" sz="1200" dirty="0"/>
+          </a:p>
+        </p:txBody>
+      </p:sp>
+      <p:sp>
+        <p:nvSpPr>
+          <p:cNvPr id="7" name="take-head"/>
+          <p:cNvSpPr txBox="1"/>
+          <p:nvPr/>
+        </p:nvSpPr>
+        <p:spPr>
+          <a:xfrm>
+            <a:off x="457200" y="2203704"/>
+            <a:ext cx="2743200" cy="530352"/>
+          </a:xfrm>
+          <a:prstGeom prst="rect">
+            <a:avLst/>
+          </a:prstGeom>
+          <a:noFill/>
+          <a:ln/>
+        </p:spPr>
+        <p:txBody>
+          <a:bodyPr wrap="square" lIns="0" tIns="0" rIns="0" bIns="0" rtlCol="0" anchor="ctr"/>
+          <a:lstStyle/>
+          <a:p>
+            <a:pPr indent="0" marL="0">
+              <a:buNone/>
+            </a:pPr>
+            <a:r>
+              <a:rPr lang="en-US" sz="1300" b="1" dirty="0">
+                <a:solidFill>
+                  <a:schemeClr val="accent1"/>
+                </a:solidFill>
+              </a:rPr>
+              <a:t>3:  </a:t>
+            </a:r>
+            <a:pPr indent="0" marL="0">
+              <a:buNone/>
+            </a:pPr>
+            <a:r>
+              <a:rPr lang="en-US" sz="1300" b="1" dirty="0">
+                <a:solidFill>
+                  <a:schemeClr val="tx2"/>
+                </a:solidFill>
+              </a:rPr>
+              <a:t>More individualists, fewer failures</a:t>
+            </a:r>
+            <a:endParaRPr lang="en-US" sz="1300" dirty="0"/>
+          </a:p>
+        </p:txBody>
+      </p:sp>
+      <p:sp>
+        <p:nvSpPr>
+          <p:cNvPr id="8" name="take-body"/>
+          <p:cNvSpPr txBox="1"/>
+          <p:nvPr/>
+        </p:nvSpPr>
+        <p:spPr>
+          <a:xfrm>
+            <a:off x="3291840" y="2203704"/>
+            <a:ext cx="5394960" cy="530352"/>
+          </a:xfrm>
+          <a:prstGeom prst="rect">
+            <a:avLst/>
+          </a:prstGeom>
+          <a:noFill/>
+          <a:ln/>
+        </p:spPr>
+        <p:txBody>
+          <a:bodyPr wrap="square" lIns="0" tIns="0" rIns="0" bIns="0" rtlCol="0" anchor="ctr"/>
+          <a:lstStyle/>
+          <a:p>
+            <a:pPr indent="0" marL="0">
+              <a:buNone/>
+            </a:pPr>
+            <a:r>
+              <a:rPr lang="en-US" sz="1200" dirty="0">
+                <a:solidFill>
+                  <a:schemeClr val="tx1"/>
+                </a:solidFill>
+              </a:rPr>
+              <a:t>P(fail) falls from 0.67 to 0.08 as the individualist share goes from 0 to 1.</a:t>
+            </a:r>
+            <a:endParaRPr lang="en-US" sz="1200" dirty="0"/>
+          </a:p>
+        </p:txBody>
+      </p:sp>
+      <p:sp>
+        <p:nvSpPr>
+          <p:cNvPr id="9" name="take-head"/>
+          <p:cNvSpPr txBox="1"/>
+          <p:nvPr/>
+        </p:nvSpPr>
+        <p:spPr>
+          <a:xfrm>
+            <a:off x="457200" y="2779776"/>
+            <a:ext cx="2743200" cy="530352"/>
+          </a:xfrm>
+          <a:prstGeom prst="rect">
+            <a:avLst/>
+          </a:prstGeom>
+          <a:noFill/>
+          <a:ln/>
+        </p:spPr>
+        <p:txBody>
+          <a:bodyPr wrap="square" lIns="0" tIns="0" rIns="0" bIns="0" rtlCol="0" anchor="ctr"/>
+          <a:lstStyle/>
+          <a:p>
+            <a:pPr indent="0" marL="0">
+              <a:buNone/>
+            </a:pPr>
+            <a:r>
+              <a:rPr lang="en-US" sz="1300" b="1" dirty="0">
+                <a:solidFill>
+                  <a:schemeClr val="accent1"/>
+                </a:solidFill>
+              </a:rPr>
+              <a:t>4:  </a:t>
+            </a:r>
+            <a:pPr indent="0" marL="0">
+              <a:buNone/>
+            </a:pPr>
+            <a:r>
+              <a:rPr lang="en-US" sz="1300" b="1" dirty="0">
+                <a:solidFill>
+                  <a:schemeClr val="tx2"/>
+                </a:solidFill>
+              </a:rPr>
+              <a:t>Stale news cuts both ways</a:t>
+            </a:r>
+            <a:endParaRPr lang="en-US" sz="1300" dirty="0"/>
+          </a:p>
+        </p:txBody>
+      </p:sp>
+      <p:sp>
+        <p:nvSpPr>
+          <p:cNvPr id="10" name="take-body"/>
+          <p:cNvSpPr txBox="1"/>
+          <p:nvPr/>
+        </p:nvSpPr>
+        <p:spPr>
+          <a:xfrm>
+            <a:off x="3291840" y="2779776"/>
+            <a:ext cx="5394960" cy="530352"/>
+          </a:xfrm>
+          <a:prstGeom prst="rect">
+            <a:avLst/>
+          </a:prstGeom>
+          <a:noFill/>
+          <a:ln/>
+        </p:spPr>
+        <p:txBody>
+          <a:bodyPr wrap="square" lIns="0" tIns="0" rIns="0" bIns="0" rtlCol="0" anchor="ctr"/>
+          <a:lstStyle/>
+          <a:p>
+            <a:pPr indent="0" marL="0">
+              <a:buNone/>
+            </a:pPr>
+            <a:r>
+              <a:rPr lang="en-US" sz="1200" dirty="0">
+                <a:solidFill>
+                  <a:schemeClr val="tx1"/>
+                </a:solidFill>
+              </a:rPr>
+              <a:t>A stale optimistic signal halves failure, a stale pessimistic one raises it by half. Accurate news barely moves it.</a:t>
+            </a:r>
+            <a:endParaRPr lang="en-US" sz="1200" dirty="0"/>
+          </a:p>
+        </p:txBody>
+      </p:sp>
+      <p:sp>
+        <p:nvSpPr>
+          <p:cNvPr id="11" name="take-head"/>
+          <p:cNvSpPr txBox="1"/>
+          <p:nvPr/>
+        </p:nvSpPr>
+        <p:spPr>
+          <a:xfrm>
+            <a:off x="457200" y="3355848"/>
+            <a:ext cx="2743200" cy="530352"/>
+          </a:xfrm>
+          <a:prstGeom prst="rect">
+            <a:avLst/>
+          </a:prstGeom>
+          <a:noFill/>
+          <a:ln/>
+        </p:spPr>
+        <p:txBody>
+          <a:bodyPr wrap="square" lIns="0" tIns="0" rIns="0" bIns="0" rtlCol="0" anchor="ctr"/>
+          <a:lstStyle/>
+          <a:p>
+            <a:pPr indent="0" marL="0">
+              <a:buNone/>
+            </a:pPr>
+            <a:r>
+              <a:rPr lang="en-US" sz="1300" b="1" dirty="0">
+                <a:solidFill>
+                  <a:schemeClr val="accent1"/>
+                </a:solidFill>
+              </a:rPr>
+              <a:t>5:  </a:t>
+            </a:r>
+            <a:pPr indent="0" marL="0">
+              <a:buNone/>
+            </a:pPr>
+            <a:r>
+              <a:rPr lang="en-US" sz="1300" b="1" dirty="0">
+                <a:solidFill>
+                  <a:schemeClr val="tx2"/>
+                </a:solidFill>
+              </a:rPr>
+              <a:t>Capping the largest deposits</a:t>
+            </a:r>
+            <a:endParaRPr lang="en-US" sz="1300" dirty="0"/>
+          </a:p>
+        </p:txBody>
+      </p:sp>
+      <p:sp>
+        <p:nvSpPr>
+          <p:cNvPr id="12" name="take-body"/>
+          <p:cNvSpPr txBox="1"/>
+          <p:nvPr/>
+        </p:nvSpPr>
+        <p:spPr>
+          <a:xfrm>
+            <a:off x="3291840" y="3355848"/>
+            <a:ext cx="5394960" cy="530352"/>
+          </a:xfrm>
+          <a:prstGeom prst="rect">
+            <a:avLst/>
+          </a:prstGeom>
+          <a:noFill/>
+          <a:ln/>
+        </p:spPr>
+        <p:txBody>
+          <a:bodyPr wrap="square" lIns="0" tIns="0" rIns="0" bIns="0" rtlCol="0" anchor="ctr"/>
+          <a:lstStyle/>
+          <a:p>
+            <a:pPr indent="0" marL="0">
+              <a:buNone/>
+            </a:pPr>
+            <a:r>
+              <a:rPr lang="en-US" sz="1200" dirty="0">
+                <a:solidFill>
+                  <a:schemeClr val="tx1"/>
+                </a:solidFill>
+              </a:rPr>
+              <a:t>A 1% cap brings failure down to the no-concentration bank’s level; the culture gradient is unchanged.</a:t>
+            </a:r>
+            <a:endParaRPr lang="en-US" sz="1200" dirty="0"/>
+          </a:p>
+        </p:txBody>
+      </p:sp>
+      <p:sp>
+        <p:nvSpPr>
+          <p:cNvPr id="13" name="take-head"/>
+          <p:cNvSpPr txBox="1"/>
+          <p:nvPr/>
+        </p:nvSpPr>
+        <p:spPr>
+          <a:xfrm>
+            <a:off x="457200" y="3931920"/>
+            <a:ext cx="2743200" cy="530352"/>
+          </a:xfrm>
+          <a:prstGeom prst="rect">
+            <a:avLst/>
+          </a:prstGeom>
+          <a:noFill/>
+          <a:ln/>
+        </p:spPr>
+        <p:txBody>
+          <a:bodyPr wrap="square" lIns="0" tIns="0" rIns="0" bIns="0" rtlCol="0" anchor="ctr"/>
+          <a:lstStyle/>
+          <a:p>
+            <a:pPr indent="0" marL="0">
+              <a:buNone/>
+            </a:pPr>
+            <a:r>
+              <a:rPr lang="en-US" sz="1300" b="1" dirty="0">
+                <a:solidFill>
+                  <a:schemeClr val="accent1"/>
+                </a:solidFill>
+              </a:rPr>
+              <a:t>6:  </a:t>
+            </a:r>
+            <a:pPr indent="0" marL="0">
+              <a:buNone/>
+            </a:pPr>
+            <a:r>
+              <a:rPr lang="en-US" sz="1300" b="1" dirty="0">
+                <a:solidFill>
+                  <a:schemeClr val="tx2"/>
+                </a:solidFill>
+              </a:rPr>
+              <a:t>Not yet matched</a:t>
+            </a:r>
+            <a:endParaRPr lang="en-US" sz="1300" dirty="0"/>
+          </a:p>
+        </p:txBody>
+      </p:sp>
+      <p:sp>
+        <p:nvSpPr>
+          <p:cNvPr id="14" name="take-body"/>
+          <p:cNvSpPr txBox="1"/>
+          <p:nvPr/>
+        </p:nvSpPr>
+        <p:spPr>
+          <a:xfrm>
+            <a:off x="3291840" y="3931920"/>
+            <a:ext cx="5394960" cy="530352"/>
+          </a:xfrm>
+          <a:prstGeom prst="rect">
+            <a:avLst/>
+          </a:prstGeom>
+          <a:noFill/>
+          <a:ln/>
+        </p:spPr>
+        <p:txBody>
+          <a:bodyPr wrap="square" lIns="0" tIns="0" rIns="0" bIns="0" rtlCol="0" anchor="ctr"/>
+          <a:lstStyle/>
+          <a:p>
+            <a:pPr indent="0" marL="0">
+              <a:buNone/>
+            </a:pPr>
+            <a:r>
+              <a:rPr lang="en-US" sz="1200" dirty="0">
+                <a:solidFill>
+                  <a:schemeClr val="tx1"/>
+                </a:solidFill>
+              </a:rPr>
+              <a:t>How large depositors exit in real runs.</a:t>
+            </a:r>
+            <a:endParaRPr lang="en-US" sz="1200" dirty="0"/>
+          </a:p>
+        </p:txBody>
+      </p:sp>
+      <p:sp>
+        <p:nvSpPr>
+          <p:cNvPr id="25" name="Slide Number Placeholder 0"/>
+          <p:cNvSpPr>
+            <a:spLocks noGrp="1"/>
+          </p:cNvSpPr>
+          <p:nvPr>
+            <p:ph type="sldNum" sz="quarter" idx="4294967295"/>
+          </p:nvPr>
+        </p:nvSpPr>
+        <p:spPr>
+          <a:xfrm>
+            <a:off x="8321040" y="4754880"/>
+            <a:ext cx="457200" cy="274320"/>
+          </a:xfrm>
+          <a:prstGeom prst="rect">
+            <a:avLst/>
+          </a:prstGeom>
+          <a:extLst>
+            <a:ext uri="{C572A759-6A51-4108-AA02-DFA0A04FC94B}">
+              <ma14:wrappingTextBoxFlag xmlns:ma14="http://schemas.microsoft.com/office/mac/drawingml/2011/main" val="0"/>
+            </a:ext>
+          </a:extLst>
+        </p:spPr>
+        <p:txBody>
+          <a:bodyPr/>
+          <a:lstStyle>
+            <a:lvl1pPr>
+              <a:defRPr sz="900">
+                <a:solidFill>
+                  <a:srgbClr val="6B7280"/>
+                </a:solidFill>
+              </a:defRPr>
+            </a:lvl1pPr>
+          </a:lstStyle>
+          <a:p>
+            <a:pPr algn="r"/>
+            <a:fld id="{F7021451-1387-4CA6-816F-3879F97B5CBC}" type="slidenum">
+              <a:rPr b="0" lang="en-US"/>
+              <a:t>16</a:t>
             </a:fld>
             <a:endParaRPr lang="en-US"/>
           </a:p>
@@ -4695,8 +5099,8 @@
         </p:nvSpPr>
         <p:spPr>
           <a:xfrm>
-            <a:off x="457200" y="274320"/>
-            <a:ext cx="8229600" cy="685800"/>
+            <a:off x="548640" y="1828800"/>
+            <a:ext cx="8046720" cy="1097280"/>
           </a:xfrm>
           <a:prstGeom prst="rect">
             <a:avLst/>
@@ -4712,27 +5116,29 @@
               <a:buNone/>
             </a:pPr>
             <a:r>
-              <a:rPr lang="en-US" sz="2400" b="1" dirty="0">
-                <a:solidFill>
-                  <a:schemeClr val="tx2"/>
-                </a:solidFill>
-              </a:rPr>
-              <a:t>The model: one weight on two signals</a:t>
-            </a:r>
-            <a:endParaRPr lang="en-US" sz="2400" dirty="0"/>
-          </a:p>
-        </p:txBody>
-      </p:sp>
-      <p:sp>
-        <p:nvSpPr>
-          <p:cNvPr id="3" name="eq"/>
-          <p:cNvSpPr txBox="1"/>
-          <p:nvPr/>
-        </p:nvSpPr>
-        <p:spPr>
-          <a:xfrm>
-            <a:off x="640080" y="1234440"/>
-            <a:ext cx="7863840" cy="685800"/>
+              <a:rPr lang="en-US" sz="3200" b="1" dirty="0">
+                <a:solidFill>
+                  <a:schemeClr val="bg1"/>
+                </a:solidFill>
+              </a:rPr>
+              <a:t>An agent-based bank run model with culturally heterogeneous signal interpretation</a:t>
+            </a:r>
+            <a:endParaRPr lang="en-US" sz="3200" dirty="0"/>
+          </a:p>
+        </p:txBody>
+      </p:sp>
+      <p:sp>
+        <p:nvSpPr>
+          <p:cNvPr id="4" name="Text 0"/>
+          <p:cNvSpPr/>
+          <p:nvPr>
+            <p:ph idx="101" type="body" hasCustomPrompt="1"/>
+          </p:nvPr>
+        </p:nvSpPr>
+        <p:spPr>
+          <a:xfrm>
+            <a:off x="548640" y="2971800"/>
+            <a:ext cx="8046720" cy="731520"/>
           </a:xfrm>
           <a:prstGeom prst="rect">
             <a:avLst/>
@@ -4741,539 +5147,13 @@
           <a:ln/>
         </p:spPr>
         <p:txBody>
-          <a:bodyPr wrap="square" lIns="0" tIns="0" rIns="0" bIns="0" rtlCol="0" anchor="ctr"/>
+          <a:bodyPr wrap="square" lIns="0" tIns="0" rIns="0" bIns="0" rtlCol="0" anchor="t"/>
           <a:lstStyle/>
           <a:p>
             <a:pPr algn="ctr" indent="0" marL="0">
               <a:buNone/>
             </a:pPr>
-            <a:r>
-              <a:rPr lang="en-US" sz="3000" i="1" dirty="0">
-                <a:solidFill>
-                  <a:schemeClr val="tx2"/>
-                </a:solidFill>
-                <a:latin typeface="Cambria" pitchFamily="34" charset="0"/>
-                <a:ea typeface="Cambria" pitchFamily="34" charset="-122"/>
-                <a:cs typeface="Cambria" pitchFamily="34" charset="-120"/>
-              </a:rPr>
-              <a:t>ŝ</a:t>
-            </a:r>
-            <a:pPr algn="ctr" indent="0" marL="0">
-              <a:buNone/>
-            </a:pPr>
-            <a:r>
-              <a:rPr lang="en-US" sz="3000" i="1" baseline="-40000" dirty="0">
-                <a:solidFill>
-                  <a:schemeClr val="tx2"/>
-                </a:solidFill>
-                <a:latin typeface="Cambria" pitchFamily="34" charset="0"/>
-                <a:ea typeface="Cambria" pitchFamily="34" charset="-122"/>
-                <a:cs typeface="Cambria" pitchFamily="34" charset="-120"/>
-              </a:rPr>
-              <a:t>i</a:t>
-            </a:r>
-            <a:pPr algn="ctr" indent="0" marL="0">
-              <a:buNone/>
-            </a:pPr>
-            <a:r>
-              <a:rPr lang="en-US" sz="3000" dirty="0">
-                <a:solidFill>
-                  <a:schemeClr val="tx2"/>
-                </a:solidFill>
-                <a:latin typeface="Cambria" pitchFamily="34" charset="0"/>
-                <a:ea typeface="Cambria" pitchFamily="34" charset="-122"/>
-                <a:cs typeface="Cambria" pitchFamily="34" charset="-120"/>
-              </a:rPr>
-              <a:t>  =  λ</a:t>
-            </a:r>
-            <a:pPr algn="ctr" indent="0" marL="0">
-              <a:buNone/>
-            </a:pPr>
-            <a:r>
-              <a:rPr lang="en-US" sz="3000" i="1" baseline="-40000" dirty="0">
-                <a:solidFill>
-                  <a:schemeClr val="tx2"/>
-                </a:solidFill>
-                <a:latin typeface="Cambria" pitchFamily="34" charset="0"/>
-                <a:ea typeface="Cambria" pitchFamily="34" charset="-122"/>
-                <a:cs typeface="Cambria" pitchFamily="34" charset="-120"/>
-              </a:rPr>
-              <a:t>i</a:t>
-            </a:r>
-            <a:pPr algn="ctr" indent="0" marL="0">
-              <a:buNone/>
-            </a:pPr>
-            <a:r>
-              <a:rPr lang="en-US" sz="3000" dirty="0">
-                <a:solidFill>
-                  <a:schemeClr val="tx2"/>
-                </a:solidFill>
-                <a:latin typeface="Cambria" pitchFamily="34" charset="0"/>
-                <a:ea typeface="Cambria" pitchFamily="34" charset="-122"/>
-                <a:cs typeface="Cambria" pitchFamily="34" charset="-120"/>
-              </a:rPr>
-              <a:t> · </a:t>
-            </a:r>
-            <a:pPr algn="ctr" indent="0" marL="0">
-              <a:buNone/>
-            </a:pPr>
-            <a:r>
-              <a:rPr lang="en-US" sz="3000" i="1" dirty="0">
-                <a:solidFill>
-                  <a:schemeClr val="tx2"/>
-                </a:solidFill>
-                <a:latin typeface="Cambria" pitchFamily="34" charset="0"/>
-                <a:ea typeface="Cambria" pitchFamily="34" charset="-122"/>
-                <a:cs typeface="Cambria" pitchFamily="34" charset="-120"/>
-              </a:rPr>
-              <a:t>y</a:t>
-            </a:r>
-            <a:pPr algn="ctr" indent="0" marL="0">
-              <a:buNone/>
-            </a:pPr>
-            <a:r>
-              <a:rPr lang="en-US" sz="3000" dirty="0">
-                <a:solidFill>
-                  <a:schemeClr val="tx2"/>
-                </a:solidFill>
-                <a:latin typeface="Cambria" pitchFamily="34" charset="0"/>
-                <a:ea typeface="Cambria" pitchFamily="34" charset="-122"/>
-                <a:cs typeface="Cambria" pitchFamily="34" charset="-120"/>
-              </a:rPr>
-              <a:t>  +  (1 − λ</a:t>
-            </a:r>
-            <a:pPr algn="ctr" indent="0" marL="0">
-              <a:buNone/>
-            </a:pPr>
-            <a:r>
-              <a:rPr lang="en-US" sz="3000" i="1" baseline="-40000" dirty="0">
-                <a:solidFill>
-                  <a:schemeClr val="tx2"/>
-                </a:solidFill>
-                <a:latin typeface="Cambria" pitchFamily="34" charset="0"/>
-                <a:ea typeface="Cambria" pitchFamily="34" charset="-122"/>
-                <a:cs typeface="Cambria" pitchFamily="34" charset="-120"/>
-              </a:rPr>
-              <a:t>i</a:t>
-            </a:r>
-            <a:pPr algn="ctr" indent="0" marL="0">
-              <a:buNone/>
-            </a:pPr>
-            <a:r>
-              <a:rPr lang="en-US" sz="3000" dirty="0">
-                <a:solidFill>
-                  <a:schemeClr val="tx2"/>
-                </a:solidFill>
-                <a:latin typeface="Cambria" pitchFamily="34" charset="0"/>
-                <a:ea typeface="Cambria" pitchFamily="34" charset="-122"/>
-                <a:cs typeface="Cambria" pitchFamily="34" charset="-120"/>
-              </a:rPr>
-              <a:t>) · </a:t>
-            </a:r>
-            <a:pPr algn="ctr" indent="0" marL="0">
-              <a:buNone/>
-            </a:pPr>
-            <a:r>
-              <a:rPr lang="en-US" sz="3000" i="1" dirty="0">
-                <a:solidFill>
-                  <a:schemeClr val="tx2"/>
-                </a:solidFill>
-                <a:latin typeface="Cambria" pitchFamily="34" charset="0"/>
-                <a:ea typeface="Cambria" pitchFamily="34" charset="-122"/>
-                <a:cs typeface="Cambria" pitchFamily="34" charset="-120"/>
-              </a:rPr>
-              <a:t>x</a:t>
-            </a:r>
-            <a:pPr algn="ctr" indent="0" marL="0">
-              <a:buNone/>
-            </a:pPr>
-            <a:r>
-              <a:rPr lang="en-US" sz="3000" i="1" baseline="-40000" dirty="0">
-                <a:solidFill>
-                  <a:schemeClr val="tx2"/>
-                </a:solidFill>
-                <a:latin typeface="Cambria" pitchFamily="34" charset="0"/>
-                <a:ea typeface="Cambria" pitchFamily="34" charset="-122"/>
-                <a:cs typeface="Cambria" pitchFamily="34" charset="-120"/>
-              </a:rPr>
-              <a:t>i</a:t>
-            </a:r>
-            <a:endParaRPr lang="en-US" sz="3000" dirty="0"/>
-          </a:p>
-        </p:txBody>
-      </p:sp>
-      <p:sp>
-        <p:nvSpPr>
-          <p:cNvPr id="4" name="types"/>
-          <p:cNvSpPr txBox="1"/>
-          <p:nvPr/>
-        </p:nvSpPr>
-        <p:spPr>
-          <a:xfrm>
-            <a:off x="457200" y="2240280"/>
-            <a:ext cx="8229600" cy="685800"/>
-          </a:xfrm>
-          <a:prstGeom prst="rect">
-            <a:avLst/>
-          </a:prstGeom>
-          <a:noFill/>
-          <a:ln/>
-        </p:spPr>
-        <p:txBody>
-          <a:bodyPr wrap="square" lIns="0" tIns="0" rIns="0" bIns="0" rtlCol="0" anchor="ctr"/>
-          <a:lstStyle/>
-          <a:p>
-            <a:pPr algn="ctr" indent="0" marL="0">
-              <a:buNone/>
-            </a:pPr>
-            <a:r>
-              <a:rPr lang="en-US" sz="3000" b="1" dirty="0">
-                <a:solidFill>
-                  <a:srgbClr val="EB6834"/>
-                </a:solidFill>
-                <a:latin typeface="Cambria" pitchFamily="34" charset="0"/>
-                <a:ea typeface="Cambria" pitchFamily="34" charset="-122"/>
-                <a:cs typeface="Cambria" pitchFamily="34" charset="-120"/>
-              </a:rPr>
-              <a:t>Individualists </a:t>
-            </a:r>
-            <a:pPr algn="ctr" indent="0" marL="0">
-              <a:buNone/>
-            </a:pPr>
-            <a:r>
-              <a:rPr lang="en-US" sz="3000" dirty="0">
-                <a:solidFill>
-                  <a:schemeClr val="tx2"/>
-                </a:solidFill>
-                <a:latin typeface="Cambria" pitchFamily="34" charset="0"/>
-                <a:ea typeface="Cambria" pitchFamily="34" charset="-122"/>
-                <a:cs typeface="Cambria" pitchFamily="34" charset="-120"/>
-              </a:rPr>
-              <a:t>λ</a:t>
-            </a:r>
-            <a:pPr algn="ctr" indent="0" marL="0">
-              <a:buNone/>
-            </a:pPr>
-            <a:r>
-              <a:rPr lang="en-US" sz="3000" baseline="-40000" dirty="0">
-                <a:solidFill>
-                  <a:schemeClr val="tx2"/>
-                </a:solidFill>
-                <a:latin typeface="Cambria" pitchFamily="34" charset="0"/>
-                <a:ea typeface="Cambria" pitchFamily="34" charset="-122"/>
-                <a:cs typeface="Cambria" pitchFamily="34" charset="-120"/>
-              </a:rPr>
-              <a:t>I</a:t>
-            </a:r>
-            <a:pPr algn="ctr" indent="0" marL="0">
-              <a:buNone/>
-            </a:pPr>
-            <a:r>
-              <a:rPr lang="en-US" sz="3000" dirty="0">
-                <a:solidFill>
-                  <a:schemeClr val="tx2"/>
-                </a:solidFill>
-                <a:latin typeface="Cambria" pitchFamily="34" charset="0"/>
-                <a:ea typeface="Cambria" pitchFamily="34" charset="-122"/>
-                <a:cs typeface="Cambria" pitchFamily="34" charset="-120"/>
-              </a:rPr>
-              <a:t>  &lt;  λ</a:t>
-            </a:r>
-            <a:pPr algn="ctr" indent="0" marL="0">
-              <a:buNone/>
-            </a:pPr>
-            <a:r>
-              <a:rPr lang="en-US" sz="3000" baseline="-40000" dirty="0">
-                <a:solidFill>
-                  <a:schemeClr val="tx2"/>
-                </a:solidFill>
-                <a:latin typeface="Cambria" pitchFamily="34" charset="0"/>
-                <a:ea typeface="Cambria" pitchFamily="34" charset="-122"/>
-                <a:cs typeface="Cambria" pitchFamily="34" charset="-120"/>
-              </a:rPr>
-              <a:t>C</a:t>
-            </a:r>
-            <a:pPr algn="ctr" indent="0" marL="0">
-              <a:buNone/>
-            </a:pPr>
-            <a:r>
-              <a:rPr lang="en-US" sz="3000" b="1" dirty="0">
-                <a:solidFill>
-                  <a:srgbClr val="2A78D6"/>
-                </a:solidFill>
-                <a:latin typeface="Cambria" pitchFamily="34" charset="0"/>
-                <a:ea typeface="Cambria" pitchFamily="34" charset="-122"/>
-                <a:cs typeface="Cambria" pitchFamily="34" charset="-120"/>
-              </a:rPr>
-              <a:t> collectivists</a:t>
-            </a:r>
-            <a:endParaRPr lang="en-US" sz="3000" dirty="0"/>
-          </a:p>
-        </p:txBody>
-      </p:sp>
-      <p:sp>
-        <p:nvSpPr>
-          <p:cNvPr id="5" name="eq2"/>
-          <p:cNvSpPr txBox="1"/>
-          <p:nvPr/>
-        </p:nvSpPr>
-        <p:spPr>
-          <a:xfrm>
-            <a:off x="640080" y="3246120"/>
-            <a:ext cx="7863840" cy="685800"/>
-          </a:xfrm>
-          <a:prstGeom prst="rect">
-            <a:avLst/>
-          </a:prstGeom>
-          <a:noFill/>
-          <a:ln/>
-        </p:spPr>
-        <p:txBody>
-          <a:bodyPr wrap="square" lIns="0" tIns="0" rIns="0" bIns="0" rtlCol="0" anchor="ctr"/>
-          <a:lstStyle/>
-          <a:p>
-            <a:pPr algn="ctr" indent="0" marL="0">
-              <a:buNone/>
-            </a:pPr>
-            <a:r>
-              <a:rPr lang="en-US" sz="3000" i="1" dirty="0">
-                <a:solidFill>
-                  <a:schemeClr val="tx2"/>
-                </a:solidFill>
-                <a:latin typeface="Cambria" pitchFamily="34" charset="0"/>
-                <a:ea typeface="Cambria" pitchFamily="34" charset="-122"/>
-                <a:cs typeface="Cambria" pitchFamily="34" charset="-120"/>
-              </a:rPr>
-              <a:t>ŝ</a:t>
-            </a:r>
-            <a:pPr algn="ctr" indent="0" marL="0">
-              <a:buNone/>
-            </a:pPr>
-            <a:r>
-              <a:rPr lang="en-US" sz="3000" baseline="-40000" dirty="0">
-                <a:solidFill>
-                  <a:schemeClr val="tx2"/>
-                </a:solidFill>
-                <a:latin typeface="Cambria" pitchFamily="34" charset="0"/>
-                <a:ea typeface="Cambria" pitchFamily="34" charset="-122"/>
-                <a:cs typeface="Cambria" pitchFamily="34" charset="-120"/>
-              </a:rPr>
-              <a:t>I</a:t>
-            </a:r>
-            <a:pPr algn="ctr" indent="0" marL="0">
-              <a:buNone/>
-            </a:pPr>
-            <a:r>
-              <a:rPr lang="en-US" sz="3000" dirty="0">
-                <a:solidFill>
-                  <a:schemeClr val="tx2"/>
-                </a:solidFill>
-                <a:latin typeface="Cambria" pitchFamily="34" charset="0"/>
-                <a:ea typeface="Cambria" pitchFamily="34" charset="-122"/>
-                <a:cs typeface="Cambria" pitchFamily="34" charset="-120"/>
-              </a:rPr>
-              <a:t>  −  </a:t>
-            </a:r>
-            <a:pPr algn="ctr" indent="0" marL="0">
-              <a:buNone/>
-            </a:pPr>
-            <a:r>
-              <a:rPr lang="en-US" sz="3000" i="1" dirty="0">
-                <a:solidFill>
-                  <a:schemeClr val="tx2"/>
-                </a:solidFill>
-                <a:latin typeface="Cambria" pitchFamily="34" charset="0"/>
-                <a:ea typeface="Cambria" pitchFamily="34" charset="-122"/>
-                <a:cs typeface="Cambria" pitchFamily="34" charset="-120"/>
-              </a:rPr>
-              <a:t>ŝ</a:t>
-            </a:r>
-            <a:pPr algn="ctr" indent="0" marL="0">
-              <a:buNone/>
-            </a:pPr>
-            <a:r>
-              <a:rPr lang="en-US" sz="3000" baseline="-40000" dirty="0">
-                <a:solidFill>
-                  <a:schemeClr val="tx2"/>
-                </a:solidFill>
-                <a:latin typeface="Cambria" pitchFamily="34" charset="0"/>
-                <a:ea typeface="Cambria" pitchFamily="34" charset="-122"/>
-                <a:cs typeface="Cambria" pitchFamily="34" charset="-120"/>
-              </a:rPr>
-              <a:t>C</a:t>
-            </a:r>
-            <a:pPr algn="ctr" indent="0" marL="0">
-              <a:buNone/>
-            </a:pPr>
-            <a:r>
-              <a:rPr lang="en-US" sz="3000" dirty="0">
-                <a:solidFill>
-                  <a:schemeClr val="tx2"/>
-                </a:solidFill>
-                <a:latin typeface="Cambria" pitchFamily="34" charset="0"/>
-                <a:ea typeface="Cambria" pitchFamily="34" charset="-122"/>
-                <a:cs typeface="Cambria" pitchFamily="34" charset="-120"/>
-              </a:rPr>
-              <a:t>  =  (λ</a:t>
-            </a:r>
-            <a:pPr algn="ctr" indent="0" marL="0">
-              <a:buNone/>
-            </a:pPr>
-            <a:r>
-              <a:rPr lang="en-US" sz="3000" baseline="-40000" dirty="0">
-                <a:solidFill>
-                  <a:schemeClr val="tx2"/>
-                </a:solidFill>
-                <a:latin typeface="Cambria" pitchFamily="34" charset="0"/>
-                <a:ea typeface="Cambria" pitchFamily="34" charset="-122"/>
-                <a:cs typeface="Cambria" pitchFamily="34" charset="-120"/>
-              </a:rPr>
-              <a:t>C</a:t>
-            </a:r>
-            <a:pPr algn="ctr" indent="0" marL="0">
-              <a:buNone/>
-            </a:pPr>
-            <a:r>
-              <a:rPr lang="en-US" sz="3000" dirty="0">
-                <a:solidFill>
-                  <a:schemeClr val="tx2"/>
-                </a:solidFill>
-                <a:latin typeface="Cambria" pitchFamily="34" charset="0"/>
-                <a:ea typeface="Cambria" pitchFamily="34" charset="-122"/>
-                <a:cs typeface="Cambria" pitchFamily="34" charset="-120"/>
-              </a:rPr>
-              <a:t> − λ</a:t>
-            </a:r>
-            <a:pPr algn="ctr" indent="0" marL="0">
-              <a:buNone/>
-            </a:pPr>
-            <a:r>
-              <a:rPr lang="en-US" sz="3000" baseline="-40000" dirty="0">
-                <a:solidFill>
-                  <a:schemeClr val="tx2"/>
-                </a:solidFill>
-                <a:latin typeface="Cambria" pitchFamily="34" charset="0"/>
-                <a:ea typeface="Cambria" pitchFamily="34" charset="-122"/>
-                <a:cs typeface="Cambria" pitchFamily="34" charset="-120"/>
-              </a:rPr>
-              <a:t>I</a:t>
-            </a:r>
-            <a:pPr algn="ctr" indent="0" marL="0">
-              <a:buNone/>
-            </a:pPr>
-            <a:r>
-              <a:rPr lang="en-US" sz="3000" dirty="0">
-                <a:solidFill>
-                  <a:schemeClr val="tx2"/>
-                </a:solidFill>
-                <a:latin typeface="Cambria" pitchFamily="34" charset="0"/>
-                <a:ea typeface="Cambria" pitchFamily="34" charset="-122"/>
-                <a:cs typeface="Cambria" pitchFamily="34" charset="-120"/>
-              </a:rPr>
-              <a:t>) · (</a:t>
-            </a:r>
-            <a:pPr algn="ctr" indent="0" marL="0">
-              <a:buNone/>
-            </a:pPr>
-            <a:r>
-              <a:rPr lang="en-US" sz="3000" i="1" dirty="0">
-                <a:solidFill>
-                  <a:schemeClr val="tx2"/>
-                </a:solidFill>
-                <a:latin typeface="Cambria" pitchFamily="34" charset="0"/>
-                <a:ea typeface="Cambria" pitchFamily="34" charset="-122"/>
-                <a:cs typeface="Cambria" pitchFamily="34" charset="-120"/>
-              </a:rPr>
-              <a:t>x</a:t>
-            </a:r>
-            <a:pPr algn="ctr" indent="0" marL="0">
-              <a:buNone/>
-            </a:pPr>
-            <a:r>
-              <a:rPr lang="en-US" sz="3000" dirty="0">
-                <a:solidFill>
-                  <a:schemeClr val="tx2"/>
-                </a:solidFill>
-                <a:latin typeface="Cambria" pitchFamily="34" charset="0"/>
-                <a:ea typeface="Cambria" pitchFamily="34" charset="-122"/>
-                <a:cs typeface="Cambria" pitchFamily="34" charset="-120"/>
-              </a:rPr>
-              <a:t> − </a:t>
-            </a:r>
-            <a:pPr algn="ctr" indent="0" marL="0">
-              <a:buNone/>
-            </a:pPr>
-            <a:r>
-              <a:rPr lang="en-US" sz="3000" i="1" dirty="0">
-                <a:solidFill>
-                  <a:schemeClr val="tx2"/>
-                </a:solidFill>
-                <a:latin typeface="Cambria" pitchFamily="34" charset="0"/>
-                <a:ea typeface="Cambria" pitchFamily="34" charset="-122"/>
-                <a:cs typeface="Cambria" pitchFamily="34" charset="-120"/>
-              </a:rPr>
-              <a:t>y</a:t>
-            </a:r>
-            <a:pPr algn="ctr" indent="0" marL="0">
-              <a:buNone/>
-            </a:pPr>
-            <a:r>
-              <a:rPr lang="en-US" sz="3000" dirty="0">
-                <a:solidFill>
-                  <a:schemeClr val="tx2"/>
-                </a:solidFill>
-                <a:latin typeface="Cambria" pitchFamily="34" charset="0"/>
-                <a:ea typeface="Cambria" pitchFamily="34" charset="-122"/>
-                <a:cs typeface="Cambria" pitchFamily="34" charset="-120"/>
-              </a:rPr>
-              <a:t>)</a:t>
-            </a:r>
-            <a:endParaRPr lang="en-US" sz="3000" dirty="0"/>
-          </a:p>
-        </p:txBody>
-      </p:sp>
-      <p:sp>
-        <p:nvSpPr>
-          <p:cNvPr id="25" name="Slide Number Placeholder 0"/>
-          <p:cNvSpPr>
-            <a:spLocks noGrp="1"/>
-          </p:cNvSpPr>
-          <p:nvPr>
-            <p:ph type="sldNum" sz="quarter" idx="4294967295"/>
-          </p:nvPr>
-        </p:nvSpPr>
-        <p:spPr>
-          <a:xfrm>
-            <a:off x="8321040" y="4754880"/>
-            <a:ext cx="457200" cy="274320"/>
-          </a:xfrm>
-          <a:prstGeom prst="rect">
-            <a:avLst/>
-          </a:prstGeom>
-          <a:extLst>
-            <a:ext uri="{C572A759-6A51-4108-AA02-DFA0A04FC94B}">
-              <ma14:wrappingTextBoxFlag xmlns:ma14="http://schemas.microsoft.com/office/mac/drawingml/2011/main" val="0"/>
-            </a:ext>
-          </a:extLst>
-        </p:spPr>
-        <p:txBody>
-          <a:bodyPr/>
-          <a:lstStyle>
-            <a:lvl1pPr>
-              <a:defRPr sz="900">
-                <a:solidFill>
-                  <a:srgbClr val="6B7280"/>
-                </a:solidFill>
-              </a:defRPr>
-            </a:lvl1pPr>
-          </a:lstStyle>
-          <a:p>
-            <a:pPr algn="r"/>
-            <a:fld id="{F7021451-1387-4CA6-816F-3879F97B5CBC}" type="slidenum">
-              <a:rPr b="0" lang="en-US"/>
-              <a:t>6</a:t>
-            </a:fld>
-            <a:endParaRPr lang="en-US"/>
+            <a:endParaRPr lang="en-US" sz="1600" dirty="0"/>
           </a:p>
         </p:txBody>
       </p:sp>
@@ -5334,36 +5214,521 @@
                   <a:schemeClr val="tx2"/>
                 </a:solidFill>
               </a:rPr>
-              <a:t>The model in one picture</a:t>
+              <a:t>The model: one weight on two signals</a:t>
             </a:r>
             <a:endParaRPr lang="en-US" sz="2400" dirty="0"/>
           </a:p>
         </p:txBody>
       </p:sp>
-      <p:pic>
-        <p:nvPicPr>
-          <p:cNvPr id="3" name="odd" descr="Model overview in three columns. Entities: depositors with log-normal deposits capped at 1% of the total, a type and a private signal; a Newman–Watts network; a bank with reserves, a long asset that sells at a discount when cash runs short, and a return that rises with the fundamental; the environment draws the fundamental and a public signal. Schedule: cultural warm-up, draw the run’s world, an exogenous shock, then a tick loop in which each banked depositor observes neighbours and the public signal, forms beliefs with weight λ on the social side, values staying against withdrawing by Monte Carlo, and acts; then period 2 settles the bank and the run is recorded.">    </p:cNvPr>
-          <p:cNvPicPr>
-            <a:picLocks noChangeAspect="1"/>
-          </p:cNvPicPr>
+      <p:sp>
+        <p:nvSpPr>
+          <p:cNvPr id="3" name="eq"/>
+          <p:cNvSpPr txBox="1"/>
           <p:nvPr/>
-        </p:nvPicPr>
-        <p:blipFill>
-          <a:blip r:embed="rId1"/>
-          <a:stretch>
-            <a:fillRect/>
-          </a:stretch>
-        </p:blipFill>
-        <p:spPr>
-          <a:xfrm>
-            <a:off x="755294" y="960120"/>
-            <a:ext cx="7633411" cy="3657600"/>
-          </a:xfrm>
-          <a:prstGeom prst="rect">
-            <a:avLst/>
-          </a:prstGeom>
-        </p:spPr>
-      </p:pic>
+        </p:nvSpPr>
+        <p:spPr>
+          <a:xfrm>
+            <a:off x="640080" y="1234440"/>
+            <a:ext cx="7863840" cy="685800"/>
+          </a:xfrm>
+          <a:prstGeom prst="rect">
+            <a:avLst/>
+          </a:prstGeom>
+          <a:noFill/>
+          <a:ln/>
+        </p:spPr>
+        <p:txBody>
+          <a:bodyPr wrap="square" lIns="0" tIns="0" rIns="0" bIns="0" rtlCol="0" anchor="ctr"/>
+          <a:lstStyle/>
+          <a:p>
+            <a:pPr algn="ctr" indent="0" marL="0">
+              <a:buNone/>
+            </a:pPr>
+            <a:r>
+              <a:rPr lang="en-US" sz="3000" i="1" dirty="0">
+                <a:solidFill>
+                  <a:schemeClr val="tx2"/>
+                </a:solidFill>
+                <a:latin typeface="Cambria" pitchFamily="34" charset="0"/>
+                <a:ea typeface="Cambria" pitchFamily="34" charset="-122"/>
+                <a:cs typeface="Cambria" pitchFamily="34" charset="-120"/>
+              </a:rPr>
+              <a:t>ŝ</a:t>
+            </a:r>
+            <a:pPr algn="ctr" indent="0" marL="0">
+              <a:buNone/>
+            </a:pPr>
+            <a:r>
+              <a:rPr lang="en-US" sz="3000" i="1" baseline="-40000" dirty="0">
+                <a:solidFill>
+                  <a:schemeClr val="tx2"/>
+                </a:solidFill>
+                <a:latin typeface="Cambria" pitchFamily="34" charset="0"/>
+                <a:ea typeface="Cambria" pitchFamily="34" charset="-122"/>
+                <a:cs typeface="Cambria" pitchFamily="34" charset="-120"/>
+              </a:rPr>
+              <a:t>i</a:t>
+            </a:r>
+            <a:pPr algn="ctr" indent="0" marL="0">
+              <a:buNone/>
+            </a:pPr>
+            <a:r>
+              <a:rPr lang="en-US" sz="3000" dirty="0">
+                <a:solidFill>
+                  <a:schemeClr val="tx2"/>
+                </a:solidFill>
+                <a:latin typeface="Cambria" pitchFamily="34" charset="0"/>
+                <a:ea typeface="Cambria" pitchFamily="34" charset="-122"/>
+                <a:cs typeface="Cambria" pitchFamily="34" charset="-120"/>
+              </a:rPr>
+              <a:t>  =  λ</a:t>
+            </a:r>
+            <a:pPr algn="ctr" indent="0" marL="0">
+              <a:buNone/>
+            </a:pPr>
+            <a:r>
+              <a:rPr lang="en-US" sz="3000" i="1" baseline="-40000" dirty="0">
+                <a:solidFill>
+                  <a:schemeClr val="tx2"/>
+                </a:solidFill>
+                <a:latin typeface="Cambria" pitchFamily="34" charset="0"/>
+                <a:ea typeface="Cambria" pitchFamily="34" charset="-122"/>
+                <a:cs typeface="Cambria" pitchFamily="34" charset="-120"/>
+              </a:rPr>
+              <a:t>i</a:t>
+            </a:r>
+            <a:pPr algn="ctr" indent="0" marL="0">
+              <a:buNone/>
+            </a:pPr>
+            <a:r>
+              <a:rPr lang="en-US" sz="3000" dirty="0">
+                <a:solidFill>
+                  <a:schemeClr val="tx2"/>
+                </a:solidFill>
+                <a:latin typeface="Cambria" pitchFamily="34" charset="0"/>
+                <a:ea typeface="Cambria" pitchFamily="34" charset="-122"/>
+                <a:cs typeface="Cambria" pitchFamily="34" charset="-120"/>
+              </a:rPr>
+              <a:t> · </a:t>
+            </a:r>
+            <a:pPr algn="ctr" indent="0" marL="0">
+              <a:buNone/>
+            </a:pPr>
+            <a:r>
+              <a:rPr lang="en-US" sz="3000" i="1" dirty="0">
+                <a:solidFill>
+                  <a:schemeClr val="tx2"/>
+                </a:solidFill>
+                <a:latin typeface="Cambria" pitchFamily="34" charset="0"/>
+                <a:ea typeface="Cambria" pitchFamily="34" charset="-122"/>
+                <a:cs typeface="Cambria" pitchFamily="34" charset="-120"/>
+              </a:rPr>
+              <a:t>y</a:t>
+            </a:r>
+            <a:pPr algn="ctr" indent="0" marL="0">
+              <a:buNone/>
+            </a:pPr>
+            <a:r>
+              <a:rPr lang="en-US" sz="3000" dirty="0">
+                <a:solidFill>
+                  <a:schemeClr val="tx2"/>
+                </a:solidFill>
+                <a:latin typeface="Cambria" pitchFamily="34" charset="0"/>
+                <a:ea typeface="Cambria" pitchFamily="34" charset="-122"/>
+                <a:cs typeface="Cambria" pitchFamily="34" charset="-120"/>
+              </a:rPr>
+              <a:t>  +  (1 − λ</a:t>
+            </a:r>
+            <a:pPr algn="ctr" indent="0" marL="0">
+              <a:buNone/>
+            </a:pPr>
+            <a:r>
+              <a:rPr lang="en-US" sz="3000" i="1" baseline="-40000" dirty="0">
+                <a:solidFill>
+                  <a:schemeClr val="tx2"/>
+                </a:solidFill>
+                <a:latin typeface="Cambria" pitchFamily="34" charset="0"/>
+                <a:ea typeface="Cambria" pitchFamily="34" charset="-122"/>
+                <a:cs typeface="Cambria" pitchFamily="34" charset="-120"/>
+              </a:rPr>
+              <a:t>i</a:t>
+            </a:r>
+            <a:pPr algn="ctr" indent="0" marL="0">
+              <a:buNone/>
+            </a:pPr>
+            <a:r>
+              <a:rPr lang="en-US" sz="3000" dirty="0">
+                <a:solidFill>
+                  <a:schemeClr val="tx2"/>
+                </a:solidFill>
+                <a:latin typeface="Cambria" pitchFamily="34" charset="0"/>
+                <a:ea typeface="Cambria" pitchFamily="34" charset="-122"/>
+                <a:cs typeface="Cambria" pitchFamily="34" charset="-120"/>
+              </a:rPr>
+              <a:t>) · </a:t>
+            </a:r>
+            <a:pPr algn="ctr" indent="0" marL="0">
+              <a:buNone/>
+            </a:pPr>
+            <a:r>
+              <a:rPr lang="en-US" sz="3000" i="1" dirty="0">
+                <a:solidFill>
+                  <a:schemeClr val="tx2"/>
+                </a:solidFill>
+                <a:latin typeface="Cambria" pitchFamily="34" charset="0"/>
+                <a:ea typeface="Cambria" pitchFamily="34" charset="-122"/>
+                <a:cs typeface="Cambria" pitchFamily="34" charset="-120"/>
+              </a:rPr>
+              <a:t>x</a:t>
+            </a:r>
+            <a:pPr algn="ctr" indent="0" marL="0">
+              <a:buNone/>
+            </a:pPr>
+            <a:r>
+              <a:rPr lang="en-US" sz="3000" i="1" baseline="-40000" dirty="0">
+                <a:solidFill>
+                  <a:schemeClr val="tx2"/>
+                </a:solidFill>
+                <a:latin typeface="Cambria" pitchFamily="34" charset="0"/>
+                <a:ea typeface="Cambria" pitchFamily="34" charset="-122"/>
+                <a:cs typeface="Cambria" pitchFamily="34" charset="-120"/>
+              </a:rPr>
+              <a:t>i</a:t>
+            </a:r>
+            <a:endParaRPr lang="en-US" sz="3000" dirty="0"/>
+          </a:p>
+        </p:txBody>
+      </p:sp>
+      <p:sp>
+        <p:nvSpPr>
+          <p:cNvPr id="4" name="types"/>
+          <p:cNvSpPr txBox="1"/>
+          <p:nvPr/>
+        </p:nvSpPr>
+        <p:spPr>
+          <a:xfrm>
+            <a:off x="457200" y="2240280"/>
+            <a:ext cx="8229600" cy="685800"/>
+          </a:xfrm>
+          <a:prstGeom prst="rect">
+            <a:avLst/>
+          </a:prstGeom>
+          <a:noFill/>
+          <a:ln/>
+        </p:spPr>
+        <p:txBody>
+          <a:bodyPr wrap="square" lIns="0" tIns="0" rIns="0" bIns="0" rtlCol="0" anchor="ctr"/>
+          <a:lstStyle/>
+          <a:p>
+            <a:pPr algn="ctr" indent="0" marL="0">
+              <a:buNone/>
+            </a:pPr>
+            <a:r>
+              <a:rPr lang="en-US" sz="3000" b="1" dirty="0">
+                <a:solidFill>
+                  <a:srgbClr val="EB6834"/>
+                </a:solidFill>
+                <a:latin typeface="Cambria" pitchFamily="34" charset="0"/>
+                <a:ea typeface="Cambria" pitchFamily="34" charset="-122"/>
+                <a:cs typeface="Cambria" pitchFamily="34" charset="-120"/>
+              </a:rPr>
+              <a:t>Individualists </a:t>
+            </a:r>
+            <a:pPr algn="ctr" indent="0" marL="0">
+              <a:buNone/>
+            </a:pPr>
+            <a:r>
+              <a:rPr lang="en-US" sz="3000" dirty="0">
+                <a:solidFill>
+                  <a:schemeClr val="tx2"/>
+                </a:solidFill>
+                <a:latin typeface="Cambria" pitchFamily="34" charset="0"/>
+                <a:ea typeface="Cambria" pitchFamily="34" charset="-122"/>
+                <a:cs typeface="Cambria" pitchFamily="34" charset="-120"/>
+              </a:rPr>
+              <a:t>λ</a:t>
+            </a:r>
+            <a:pPr algn="ctr" indent="0" marL="0">
+              <a:buNone/>
+            </a:pPr>
+            <a:r>
+              <a:rPr lang="en-US" sz="3000" baseline="-40000" dirty="0">
+                <a:solidFill>
+                  <a:schemeClr val="tx2"/>
+                </a:solidFill>
+                <a:latin typeface="Cambria" pitchFamily="34" charset="0"/>
+                <a:ea typeface="Cambria" pitchFamily="34" charset="-122"/>
+                <a:cs typeface="Cambria" pitchFamily="34" charset="-120"/>
+              </a:rPr>
+              <a:t>I</a:t>
+            </a:r>
+            <a:pPr algn="ctr" indent="0" marL="0">
+              <a:buNone/>
+            </a:pPr>
+            <a:r>
+              <a:rPr lang="en-US" sz="3000" dirty="0">
+                <a:solidFill>
+                  <a:schemeClr val="tx2"/>
+                </a:solidFill>
+                <a:latin typeface="Cambria" pitchFamily="34" charset="0"/>
+                <a:ea typeface="Cambria" pitchFamily="34" charset="-122"/>
+                <a:cs typeface="Cambria" pitchFamily="34" charset="-120"/>
+              </a:rPr>
+              <a:t>  &lt;  λ</a:t>
+            </a:r>
+            <a:pPr algn="ctr" indent="0" marL="0">
+              <a:buNone/>
+            </a:pPr>
+            <a:r>
+              <a:rPr lang="en-US" sz="3000" baseline="-40000" dirty="0">
+                <a:solidFill>
+                  <a:schemeClr val="tx2"/>
+                </a:solidFill>
+                <a:latin typeface="Cambria" pitchFamily="34" charset="0"/>
+                <a:ea typeface="Cambria" pitchFamily="34" charset="-122"/>
+                <a:cs typeface="Cambria" pitchFamily="34" charset="-120"/>
+              </a:rPr>
+              <a:t>C</a:t>
+            </a:r>
+            <a:pPr algn="ctr" indent="0" marL="0">
+              <a:buNone/>
+            </a:pPr>
+            <a:r>
+              <a:rPr lang="en-US" sz="3000" b="1" dirty="0">
+                <a:solidFill>
+                  <a:srgbClr val="2A78D6"/>
+                </a:solidFill>
+                <a:latin typeface="Cambria" pitchFamily="34" charset="0"/>
+                <a:ea typeface="Cambria" pitchFamily="34" charset="-122"/>
+                <a:cs typeface="Cambria" pitchFamily="34" charset="-120"/>
+              </a:rPr>
+              <a:t> collectivists</a:t>
+            </a:r>
+            <a:endParaRPr lang="en-US" sz="3000" dirty="0"/>
+          </a:p>
+        </p:txBody>
+      </p:sp>
+      <p:sp>
+        <p:nvSpPr>
+          <p:cNvPr id="5" name="eq2"/>
+          <p:cNvSpPr txBox="1"/>
+          <p:nvPr/>
+        </p:nvSpPr>
+        <p:spPr>
+          <a:xfrm>
+            <a:off x="640080" y="3246120"/>
+            <a:ext cx="7863840" cy="685800"/>
+          </a:xfrm>
+          <a:prstGeom prst="rect">
+            <a:avLst/>
+          </a:prstGeom>
+          <a:noFill/>
+          <a:ln/>
+        </p:spPr>
+        <p:txBody>
+          <a:bodyPr wrap="square" lIns="0" tIns="0" rIns="0" bIns="0" rtlCol="0" anchor="ctr"/>
+          <a:lstStyle/>
+          <a:p>
+            <a:pPr algn="ctr" indent="0" marL="0">
+              <a:buNone/>
+            </a:pPr>
+            <a:r>
+              <a:rPr lang="en-US" sz="3000" i="1" dirty="0">
+                <a:solidFill>
+                  <a:schemeClr val="tx2"/>
+                </a:solidFill>
+                <a:latin typeface="Cambria" pitchFamily="34" charset="0"/>
+                <a:ea typeface="Cambria" pitchFamily="34" charset="-122"/>
+                <a:cs typeface="Cambria" pitchFamily="34" charset="-120"/>
+              </a:rPr>
+              <a:t>ŝ</a:t>
+            </a:r>
+            <a:pPr algn="ctr" indent="0" marL="0">
+              <a:buNone/>
+            </a:pPr>
+            <a:r>
+              <a:rPr lang="en-US" sz="3000" baseline="-40000" dirty="0">
+                <a:solidFill>
+                  <a:schemeClr val="tx2"/>
+                </a:solidFill>
+                <a:latin typeface="Cambria" pitchFamily="34" charset="0"/>
+                <a:ea typeface="Cambria" pitchFamily="34" charset="-122"/>
+                <a:cs typeface="Cambria" pitchFamily="34" charset="-120"/>
+              </a:rPr>
+              <a:t>I</a:t>
+            </a:r>
+            <a:pPr algn="ctr" indent="0" marL="0">
+              <a:buNone/>
+            </a:pPr>
+            <a:r>
+              <a:rPr lang="en-US" sz="3000" dirty="0">
+                <a:solidFill>
+                  <a:schemeClr val="tx2"/>
+                </a:solidFill>
+                <a:latin typeface="Cambria" pitchFamily="34" charset="0"/>
+                <a:ea typeface="Cambria" pitchFamily="34" charset="-122"/>
+                <a:cs typeface="Cambria" pitchFamily="34" charset="-120"/>
+              </a:rPr>
+              <a:t>  −  </a:t>
+            </a:r>
+            <a:pPr algn="ctr" indent="0" marL="0">
+              <a:buNone/>
+            </a:pPr>
+            <a:r>
+              <a:rPr lang="en-US" sz="3000" i="1" dirty="0">
+                <a:solidFill>
+                  <a:schemeClr val="tx2"/>
+                </a:solidFill>
+                <a:latin typeface="Cambria" pitchFamily="34" charset="0"/>
+                <a:ea typeface="Cambria" pitchFamily="34" charset="-122"/>
+                <a:cs typeface="Cambria" pitchFamily="34" charset="-120"/>
+              </a:rPr>
+              <a:t>ŝ</a:t>
+            </a:r>
+            <a:pPr algn="ctr" indent="0" marL="0">
+              <a:buNone/>
+            </a:pPr>
+            <a:r>
+              <a:rPr lang="en-US" sz="3000" baseline="-40000" dirty="0">
+                <a:solidFill>
+                  <a:schemeClr val="tx2"/>
+                </a:solidFill>
+                <a:latin typeface="Cambria" pitchFamily="34" charset="0"/>
+                <a:ea typeface="Cambria" pitchFamily="34" charset="-122"/>
+                <a:cs typeface="Cambria" pitchFamily="34" charset="-120"/>
+              </a:rPr>
+              <a:t>C</a:t>
+            </a:r>
+            <a:pPr algn="ctr" indent="0" marL="0">
+              <a:buNone/>
+            </a:pPr>
+            <a:r>
+              <a:rPr lang="en-US" sz="3000" dirty="0">
+                <a:solidFill>
+                  <a:schemeClr val="tx2"/>
+                </a:solidFill>
+                <a:latin typeface="Cambria" pitchFamily="34" charset="0"/>
+                <a:ea typeface="Cambria" pitchFamily="34" charset="-122"/>
+                <a:cs typeface="Cambria" pitchFamily="34" charset="-120"/>
+              </a:rPr>
+              <a:t>  =  (λ</a:t>
+            </a:r>
+            <a:pPr algn="ctr" indent="0" marL="0">
+              <a:buNone/>
+            </a:pPr>
+            <a:r>
+              <a:rPr lang="en-US" sz="3000" baseline="-40000" dirty="0">
+                <a:solidFill>
+                  <a:schemeClr val="tx2"/>
+                </a:solidFill>
+                <a:latin typeface="Cambria" pitchFamily="34" charset="0"/>
+                <a:ea typeface="Cambria" pitchFamily="34" charset="-122"/>
+                <a:cs typeface="Cambria" pitchFamily="34" charset="-120"/>
+              </a:rPr>
+              <a:t>C</a:t>
+            </a:r>
+            <a:pPr algn="ctr" indent="0" marL="0">
+              <a:buNone/>
+            </a:pPr>
+            <a:r>
+              <a:rPr lang="en-US" sz="3000" dirty="0">
+                <a:solidFill>
+                  <a:schemeClr val="tx2"/>
+                </a:solidFill>
+                <a:latin typeface="Cambria" pitchFamily="34" charset="0"/>
+                <a:ea typeface="Cambria" pitchFamily="34" charset="-122"/>
+                <a:cs typeface="Cambria" pitchFamily="34" charset="-120"/>
+              </a:rPr>
+              <a:t> − λ</a:t>
+            </a:r>
+            <a:pPr algn="ctr" indent="0" marL="0">
+              <a:buNone/>
+            </a:pPr>
+            <a:r>
+              <a:rPr lang="en-US" sz="3000" baseline="-40000" dirty="0">
+                <a:solidFill>
+                  <a:schemeClr val="tx2"/>
+                </a:solidFill>
+                <a:latin typeface="Cambria" pitchFamily="34" charset="0"/>
+                <a:ea typeface="Cambria" pitchFamily="34" charset="-122"/>
+                <a:cs typeface="Cambria" pitchFamily="34" charset="-120"/>
+              </a:rPr>
+              <a:t>I</a:t>
+            </a:r>
+            <a:pPr algn="ctr" indent="0" marL="0">
+              <a:buNone/>
+            </a:pPr>
+            <a:r>
+              <a:rPr lang="en-US" sz="3000" dirty="0">
+                <a:solidFill>
+                  <a:schemeClr val="tx2"/>
+                </a:solidFill>
+                <a:latin typeface="Cambria" pitchFamily="34" charset="0"/>
+                <a:ea typeface="Cambria" pitchFamily="34" charset="-122"/>
+                <a:cs typeface="Cambria" pitchFamily="34" charset="-120"/>
+              </a:rPr>
+              <a:t>) · (</a:t>
+            </a:r>
+            <a:pPr algn="ctr" indent="0" marL="0">
+              <a:buNone/>
+            </a:pPr>
+            <a:r>
+              <a:rPr lang="en-US" sz="3000" i="1" dirty="0">
+                <a:solidFill>
+                  <a:schemeClr val="tx2"/>
+                </a:solidFill>
+                <a:latin typeface="Cambria" pitchFamily="34" charset="0"/>
+                <a:ea typeface="Cambria" pitchFamily="34" charset="-122"/>
+                <a:cs typeface="Cambria" pitchFamily="34" charset="-120"/>
+              </a:rPr>
+              <a:t>x</a:t>
+            </a:r>
+            <a:pPr algn="ctr" indent="0" marL="0">
+              <a:buNone/>
+            </a:pPr>
+            <a:r>
+              <a:rPr lang="en-US" sz="3000" dirty="0">
+                <a:solidFill>
+                  <a:schemeClr val="tx2"/>
+                </a:solidFill>
+                <a:latin typeface="Cambria" pitchFamily="34" charset="0"/>
+                <a:ea typeface="Cambria" pitchFamily="34" charset="-122"/>
+                <a:cs typeface="Cambria" pitchFamily="34" charset="-120"/>
+              </a:rPr>
+              <a:t> − </a:t>
+            </a:r>
+            <a:pPr algn="ctr" indent="0" marL="0">
+              <a:buNone/>
+            </a:pPr>
+            <a:r>
+              <a:rPr lang="en-US" sz="3000" i="1" dirty="0">
+                <a:solidFill>
+                  <a:schemeClr val="tx2"/>
+                </a:solidFill>
+                <a:latin typeface="Cambria" pitchFamily="34" charset="0"/>
+                <a:ea typeface="Cambria" pitchFamily="34" charset="-122"/>
+                <a:cs typeface="Cambria" pitchFamily="34" charset="-120"/>
+              </a:rPr>
+              <a:t>y</a:t>
+            </a:r>
+            <a:pPr algn="ctr" indent="0" marL="0">
+              <a:buNone/>
+            </a:pPr>
+            <a:r>
+              <a:rPr lang="en-US" sz="3000" dirty="0">
+                <a:solidFill>
+                  <a:schemeClr val="tx2"/>
+                </a:solidFill>
+                <a:latin typeface="Cambria" pitchFamily="34" charset="0"/>
+                <a:ea typeface="Cambria" pitchFamily="34" charset="-122"/>
+                <a:cs typeface="Cambria" pitchFamily="34" charset="-120"/>
+              </a:rPr>
+              <a:t>)</a:t>
+            </a:r>
+            <a:endParaRPr lang="en-US" sz="3000" dirty="0"/>
+          </a:p>
+        </p:txBody>
+      </p:sp>
       <p:sp>
         <p:nvSpPr>
           <p:cNvPr id="25" name="Slide Number Placeholder 0"/>
@@ -5466,614 +5831,36 @@
                   <a:schemeClr val="tx2"/>
                 </a:solidFill>
               </a:rPr>
-              <a:t>Individualists and collectivists: who listens to whom</a:t>
+              <a:t>The model in one picture</a:t>
             </a:r>
             <a:endParaRPr lang="en-US" sz="2400" dirty="0"/>
           </a:p>
         </p:txBody>
       </p:sp>
-      <p:sp>
-        <p:nvSpPr>
-          <p:cNvPr id="3" name="type-head"/>
-          <p:cNvSpPr txBox="1"/>
+      <p:pic>
+        <p:nvPicPr>
+          <p:cNvPr id="3" name="odd" descr="Model overview in three columns. Entities: depositors with log-normal deposits capped at 1% of the total, a type and a private signal; a Newman–Watts network; a bank with reserves, a long asset that sells at a discount when cash runs short, and a return that rises with the fundamental; the environment draws the fundamental and a public signal. Schedule: cultural warm-up, draw the run’s world, an exogenous shock, then a tick loop in which each banked depositor observes neighbours and the public signal, forms beliefs with weight λ on the social side, values staying against withdrawing by Monte Carlo, and acts; then period 2 settles the bank and the run is recorded.">    </p:cNvPr>
+          <p:cNvPicPr>
+            <a:picLocks noChangeAspect="1"/>
+          </p:cNvPicPr>
           <p:nvPr/>
-        </p:nvSpPr>
-        <p:spPr>
-          <a:xfrm>
-            <a:off x="640080" y="1143000"/>
-            <a:ext cx="3657600" cy="365760"/>
-          </a:xfrm>
-          <a:prstGeom prst="rect">
-            <a:avLst/>
-          </a:prstGeom>
-          <a:noFill/>
-          <a:ln/>
-        </p:spPr>
-        <p:txBody>
-          <a:bodyPr wrap="square" lIns="0" tIns="0" rIns="0" bIns="0" rtlCol="0" anchor="ctr"/>
-          <a:lstStyle/>
-          <a:p>
-            <a:pPr indent="0" marL="0">
-              <a:buNone/>
-            </a:pPr>
-            <a:r>
-              <a:rPr lang="en-US" sz="1800" b="1" dirty="0">
-                <a:solidFill>
-                  <a:srgbClr val="EB6834"/>
-                </a:solidFill>
-              </a:rPr>
-              <a:t>Individualists</a:t>
-            </a:r>
-            <a:endParaRPr lang="en-US" sz="1800" dirty="0"/>
-          </a:p>
-        </p:txBody>
-      </p:sp>
-      <p:sp>
-        <p:nvSpPr>
-          <p:cNvPr id="4" name="bullets"/>
-          <p:cNvSpPr txBox="1"/>
-          <p:nvPr/>
-        </p:nvSpPr>
-        <p:spPr>
-          <a:xfrm>
-            <a:off x="640080" y="1600200"/>
-            <a:ext cx="3657600" cy="1737360"/>
-          </a:xfrm>
-          <a:prstGeom prst="rect">
-            <a:avLst/>
-          </a:prstGeom>
-          <a:noFill/>
-          <a:ln/>
-        </p:spPr>
-        <p:txBody>
-          <a:bodyPr wrap="square" lIns="0" tIns="0" rIns="0" bIns="0" rtlCol="0" anchor="t"/>
-          <a:lstStyle/>
-          <a:p>
-            <a:pPr marL="177800" indent="-177800">
-              <a:spcAft>
-                <a:spcPts val="500"/>
-              </a:spcAft>
-              <a:buSzPct val="100000"/>
-              <a:buChar char="•"/>
-            </a:pPr>
-            <a:r>
-              <a:rPr lang="en-US" sz="1300" dirty="0">
-                <a:solidFill>
-                  <a:schemeClr val="tx1"/>
-                </a:solidFill>
-              </a:rPr>
-              <a:t>Trust their own information about the bank</a:t>
-            </a:r>
-            <a:endParaRPr lang="en-US" sz="1300" dirty="0"/>
-          </a:p>
-          <a:p>
-            <a:pPr marL="177800" indent="-177800">
-              <a:spcAft>
-                <a:spcPts val="500"/>
-              </a:spcAft>
-              <a:buSzPct val="100000"/>
-              <a:buChar char="•"/>
-            </a:pPr>
-            <a:r>
-              <a:rPr lang="en-US" sz="1300" dirty="0">
-                <a:solidFill>
-                  <a:schemeClr val="tx1"/>
-                </a:solidFill>
-              </a:rPr>
-              <a:t>Put little weight on what neighbours do or on public news</a:t>
-            </a:r>
-            <a:endParaRPr lang="en-US" sz="1300" dirty="0"/>
-          </a:p>
-          <a:p>
-            <a:pPr marL="177800" indent="-177800">
-              <a:spcAft>
-                <a:spcPts val="500"/>
-              </a:spcAft>
-              <a:buSzPct val="100000"/>
-              <a:buChar char="•"/>
-            </a:pPr>
-            <a:r>
-              <a:rPr lang="en-US" sz="1300" dirty="0">
-                <a:solidFill>
-                  <a:schemeClr val="tx1"/>
-                </a:solidFill>
-              </a:rPr>
-              <a:t>Weight on the social side: λ = 0.1 to 0.3</a:t>
-            </a:r>
-            <a:endParaRPr lang="en-US" sz="1300" dirty="0"/>
-          </a:p>
-          <a:p>
-            <a:pPr marL="177800" indent="-177800">
-              <a:spcAft>
-                <a:spcPts val="500"/>
-              </a:spcAft>
-              <a:buSzPct val="100000"/>
-              <a:buChar char="•"/>
-            </a:pPr>
-            <a:r>
-              <a:rPr lang="en-US" sz="1300" dirty="0">
-                <a:solidFill>
-                  <a:schemeClr val="tx1"/>
-                </a:solidFill>
-              </a:rPr>
-              <a:t>Act on what they see themselves</a:t>
-            </a:r>
-            <a:endParaRPr lang="en-US" sz="1300" dirty="0"/>
-          </a:p>
-        </p:txBody>
-      </p:sp>
-      <p:sp>
-        <p:nvSpPr>
-          <p:cNvPr id="5" name="type-head"/>
-          <p:cNvSpPr txBox="1"/>
-          <p:nvPr/>
-        </p:nvSpPr>
-        <p:spPr>
-          <a:xfrm>
-            <a:off x="4846320" y="1143000"/>
-            <a:ext cx="3657600" cy="365760"/>
-          </a:xfrm>
-          <a:prstGeom prst="rect">
-            <a:avLst/>
-          </a:prstGeom>
-          <a:noFill/>
-          <a:ln/>
-        </p:spPr>
-        <p:txBody>
-          <a:bodyPr wrap="square" lIns="0" tIns="0" rIns="0" bIns="0" rtlCol="0" anchor="ctr"/>
-          <a:lstStyle/>
-          <a:p>
-            <a:pPr indent="0" marL="0">
-              <a:buNone/>
-            </a:pPr>
-            <a:r>
-              <a:rPr lang="en-US" sz="1800" b="1" dirty="0">
-                <a:solidFill>
-                  <a:srgbClr val="2A78D6"/>
-                </a:solidFill>
-              </a:rPr>
-              <a:t>Collectivists</a:t>
-            </a:r>
-            <a:endParaRPr lang="en-US" sz="1800" dirty="0"/>
-          </a:p>
-        </p:txBody>
-      </p:sp>
-      <p:sp>
-        <p:nvSpPr>
-          <p:cNvPr id="6" name="bullets"/>
-          <p:cNvSpPr txBox="1"/>
-          <p:nvPr/>
-        </p:nvSpPr>
-        <p:spPr>
-          <a:xfrm>
-            <a:off x="4846320" y="1600200"/>
-            <a:ext cx="3657600" cy="1737360"/>
-          </a:xfrm>
-          <a:prstGeom prst="rect">
-            <a:avLst/>
-          </a:prstGeom>
-          <a:noFill/>
-          <a:ln/>
-        </p:spPr>
-        <p:txBody>
-          <a:bodyPr wrap="square" lIns="0" tIns="0" rIns="0" bIns="0" rtlCol="0" anchor="t"/>
-          <a:lstStyle/>
-          <a:p>
-            <a:pPr marL="177800" indent="-177800">
-              <a:spcAft>
-                <a:spcPts val="500"/>
-              </a:spcAft>
-              <a:buSzPct val="100000"/>
-              <a:buChar char="•"/>
-            </a:pPr>
-            <a:r>
-              <a:rPr lang="en-US" sz="1300" dirty="0">
-                <a:solidFill>
-                  <a:schemeClr val="tx1"/>
-                </a:solidFill>
-              </a:rPr>
-              <a:t>Watch what neighbours do and what the public news says</a:t>
-            </a:r>
-            <a:endParaRPr lang="en-US" sz="1300" dirty="0"/>
-          </a:p>
-          <a:p>
-            <a:pPr marL="177800" indent="-177800">
-              <a:spcAft>
-                <a:spcPts val="500"/>
-              </a:spcAft>
-              <a:buSzPct val="100000"/>
-              <a:buChar char="•"/>
-            </a:pPr>
-            <a:r>
-              <a:rPr lang="en-US" sz="1300" dirty="0">
-                <a:solidFill>
-                  <a:schemeClr val="tx1"/>
-                </a:solidFill>
-              </a:rPr>
-              <a:t>Put little weight on their own information</a:t>
-            </a:r>
-            <a:endParaRPr lang="en-US" sz="1300" dirty="0"/>
-          </a:p>
-          <a:p>
-            <a:pPr marL="177800" indent="-177800">
-              <a:spcAft>
-                <a:spcPts val="500"/>
-              </a:spcAft>
-              <a:buSzPct val="100000"/>
-              <a:buChar char="•"/>
-            </a:pPr>
-            <a:r>
-              <a:rPr lang="en-US" sz="1300" dirty="0">
-                <a:solidFill>
-                  <a:schemeClr val="tx1"/>
-                </a:solidFill>
-              </a:rPr>
-              <a:t>Weight on the social side: λ = 0.5 to 0.9</a:t>
-            </a:r>
-            <a:endParaRPr lang="en-US" sz="1300" dirty="0"/>
-          </a:p>
-          <a:p>
-            <a:pPr marL="177800" indent="-177800">
-              <a:spcAft>
-                <a:spcPts val="500"/>
-              </a:spcAft>
-              <a:buSzPct val="100000"/>
-              <a:buChar char="•"/>
-            </a:pPr>
-            <a:r>
-              <a:rPr lang="en-US" sz="1300" dirty="0">
-                <a:solidFill>
-                  <a:schemeClr val="tx1"/>
-                </a:solidFill>
-              </a:rPr>
-              <a:t>Move when others move</a:t>
-            </a:r>
-            <a:endParaRPr lang="en-US" sz="1300" dirty="0"/>
-          </a:p>
-        </p:txBody>
-      </p:sp>
-      <p:sp>
-        <p:nvSpPr>
-          <p:cNvPr id="7" name="pairs-head"/>
-          <p:cNvSpPr txBox="1"/>
-          <p:nvPr/>
-        </p:nvSpPr>
-        <p:spPr>
-          <a:xfrm>
-            <a:off x="457200" y="3886200"/>
-            <a:ext cx="8229600" cy="329184"/>
-          </a:xfrm>
-          <a:prstGeom prst="rect">
-            <a:avLst/>
-          </a:prstGeom>
-          <a:noFill/>
-          <a:ln/>
-        </p:spPr>
-        <p:txBody>
-          <a:bodyPr wrap="square" lIns="0" tIns="0" rIns="0" bIns="0" rtlCol="0" anchor="ctr"/>
-          <a:lstStyle/>
-          <a:p>
-            <a:pPr algn="ctr" indent="0" marL="0">
-              <a:buNone/>
-            </a:pPr>
-            <a:r>
-              <a:rPr lang="en-US" sz="1300" b="1" dirty="0">
-                <a:solidFill>
-                  <a:schemeClr val="tx2"/>
-                </a:solidFill>
-              </a:rPr>
-              <a:t>Signal interpretation gap</a:t>
-            </a:r>
-            <a:endParaRPr lang="en-US" sz="1300" dirty="0"/>
-          </a:p>
-        </p:txBody>
-      </p:sp>
-      <p:sp>
-        <p:nvSpPr>
-          <p:cNvPr id="8" name="chip"/>
-          <p:cNvSpPr/>
-          <p:nvPr/>
-        </p:nvSpPr>
-        <p:spPr>
-          <a:xfrm>
-            <a:off x="2057400" y="3429000"/>
-            <a:ext cx="914400" cy="329184"/>
-          </a:xfrm>
-          <a:prstGeom prst="roundRect">
-            <a:avLst>
-              <a:gd name="adj" fmla="val 16667"/>
-            </a:avLst>
-          </a:prstGeom>
-          <a:solidFill>
-            <a:schemeClr val="tx2"/>
-          </a:solidFill>
-          <a:ln w="12700">
-            <a:solidFill>
-              <a:schemeClr val="tx2"/>
-            </a:solidFill>
-            <a:prstDash val="solid"/>
-          </a:ln>
-        </p:spPr>
-      </p:sp>
-      <p:sp>
-        <p:nvSpPr>
-          <p:cNvPr id="9" name="chip-label"/>
-          <p:cNvSpPr txBox="1"/>
-          <p:nvPr/>
-        </p:nvSpPr>
-        <p:spPr>
-          <a:xfrm>
-            <a:off x="2057400" y="3429000"/>
-            <a:ext cx="914400" cy="329184"/>
-          </a:xfrm>
-          <a:prstGeom prst="rect">
-            <a:avLst/>
-          </a:prstGeom>
-          <a:noFill/>
-          <a:ln/>
-        </p:spPr>
-        <p:txBody>
-          <a:bodyPr wrap="square" lIns="0" tIns="0" rIns="0" bIns="0" rtlCol="0" anchor="ctr"/>
-          <a:lstStyle/>
-          <a:p>
-            <a:pPr algn="ctr" indent="0" marL="0">
-              <a:buNone/>
-            </a:pPr>
-            <a:r>
-              <a:rPr lang="en-US" sz="1100" b="1" dirty="0">
-                <a:solidFill>
-                  <a:schemeClr val="bg1"/>
-                </a:solidFill>
-                <a:latin typeface="Cambria" pitchFamily="34" charset="0"/>
-                <a:ea typeface="Cambria" pitchFamily="34" charset="-122"/>
-                <a:cs typeface="Cambria" pitchFamily="34" charset="-120"/>
-              </a:rPr>
-              <a:t>(0.1, 0.9)</a:t>
-            </a:r>
-            <a:endParaRPr lang="en-US" sz="1100" dirty="0"/>
-          </a:p>
-        </p:txBody>
-      </p:sp>
-      <p:sp>
-        <p:nvSpPr>
-          <p:cNvPr id="10" name="pair-label"/>
-          <p:cNvSpPr txBox="1"/>
-          <p:nvPr/>
-        </p:nvSpPr>
-        <p:spPr>
-          <a:xfrm>
-            <a:off x="3017520" y="3429000"/>
-            <a:ext cx="777240" cy="329184"/>
-          </a:xfrm>
-          <a:prstGeom prst="rect">
-            <a:avLst/>
-          </a:prstGeom>
-          <a:noFill/>
-          <a:ln/>
-        </p:spPr>
-        <p:txBody>
-          <a:bodyPr wrap="square" lIns="0" tIns="0" rIns="0" bIns="0" rtlCol="0" anchor="ctr"/>
-          <a:lstStyle/>
-          <a:p>
-            <a:pPr indent="0" marL="0">
-              <a:buNone/>
-            </a:pPr>
-            <a:r>
-              <a:rPr lang="en-US" sz="1200" dirty="0">
-                <a:solidFill>
-                  <a:schemeClr val="accent3"/>
-                </a:solidFill>
-              </a:rPr>
-              <a:t>wide gap</a:t>
-            </a:r>
-            <a:endParaRPr lang="en-US" sz="1200" dirty="0"/>
-          </a:p>
-        </p:txBody>
-      </p:sp>
-      <p:sp>
-        <p:nvSpPr>
-          <p:cNvPr id="11" name="chip"/>
-          <p:cNvSpPr/>
-          <p:nvPr/>
-        </p:nvSpPr>
-        <p:spPr>
-          <a:xfrm>
-            <a:off x="3794760" y="3429000"/>
-            <a:ext cx="914400" cy="329184"/>
-          </a:xfrm>
-          <a:prstGeom prst="roundRect">
-            <a:avLst>
-              <a:gd name="adj" fmla="val 16667"/>
-            </a:avLst>
-          </a:prstGeom>
-          <a:solidFill>
-            <a:schemeClr val="accent3"/>
-          </a:solidFill>
-          <a:ln w="12700">
-            <a:solidFill>
-              <a:schemeClr val="accent3"/>
-            </a:solidFill>
-            <a:prstDash val="solid"/>
-          </a:ln>
-        </p:spPr>
-      </p:sp>
-      <p:sp>
-        <p:nvSpPr>
-          <p:cNvPr id="12" name="chip-label"/>
-          <p:cNvSpPr txBox="1"/>
-          <p:nvPr/>
-        </p:nvSpPr>
-        <p:spPr>
-          <a:xfrm>
-            <a:off x="3794760" y="3429000"/>
-            <a:ext cx="914400" cy="329184"/>
-          </a:xfrm>
-          <a:prstGeom prst="rect">
-            <a:avLst/>
-          </a:prstGeom>
-          <a:noFill/>
-          <a:ln/>
-        </p:spPr>
-        <p:txBody>
-          <a:bodyPr wrap="square" lIns="0" tIns="0" rIns="0" bIns="0" rtlCol="0" anchor="ctr"/>
-          <a:lstStyle/>
-          <a:p>
-            <a:pPr algn="ctr" indent="0" marL="0">
-              <a:buNone/>
-            </a:pPr>
-            <a:r>
-              <a:rPr lang="en-US" sz="1100" b="1" dirty="0">
-                <a:solidFill>
-                  <a:schemeClr val="bg1"/>
-                </a:solidFill>
-                <a:latin typeface="Cambria" pitchFamily="34" charset="0"/>
-                <a:ea typeface="Cambria" pitchFamily="34" charset="-122"/>
-                <a:cs typeface="Cambria" pitchFamily="34" charset="-120"/>
-              </a:rPr>
-              <a:t>(0.2, 0.8)</a:t>
-            </a:r>
-            <a:endParaRPr lang="en-US" sz="1100" dirty="0"/>
-          </a:p>
-        </p:txBody>
-      </p:sp>
-      <p:sp>
-        <p:nvSpPr>
-          <p:cNvPr id="13" name="pair-label"/>
-          <p:cNvSpPr txBox="1"/>
-          <p:nvPr/>
-        </p:nvSpPr>
-        <p:spPr>
-          <a:xfrm>
-            <a:off x="4754880" y="3429000"/>
-            <a:ext cx="777240" cy="329184"/>
-          </a:xfrm>
-          <a:prstGeom prst="rect">
-            <a:avLst/>
-          </a:prstGeom>
-          <a:noFill/>
-          <a:ln/>
-        </p:spPr>
-        <p:txBody>
-          <a:bodyPr wrap="square" lIns="0" tIns="0" rIns="0" bIns="0" rtlCol="0" anchor="ctr"/>
-          <a:lstStyle/>
-          <a:p>
-            <a:pPr indent="0" marL="0">
-              <a:buNone/>
-            </a:pPr>
-            <a:r>
-              <a:rPr lang="en-US" sz="1200" dirty="0">
-                <a:solidFill>
-                  <a:schemeClr val="accent3"/>
-                </a:solidFill>
-              </a:rPr>
-              <a:t>medium</a:t>
-            </a:r>
-            <a:endParaRPr lang="en-US" sz="1200" dirty="0"/>
-          </a:p>
-        </p:txBody>
-      </p:sp>
-      <p:sp>
-        <p:nvSpPr>
-          <p:cNvPr id="14" name="chip"/>
-          <p:cNvSpPr/>
-          <p:nvPr/>
-        </p:nvSpPr>
-        <p:spPr>
-          <a:xfrm>
-            <a:off x="5532120" y="3429000"/>
-            <a:ext cx="914400" cy="329184"/>
-          </a:xfrm>
-          <a:prstGeom prst="roundRect">
-            <a:avLst>
-              <a:gd name="adj" fmla="val 16667"/>
-            </a:avLst>
-          </a:prstGeom>
-          <a:solidFill>
-            <a:schemeClr val="accent4"/>
-          </a:solidFill>
-          <a:ln w="12700">
-            <a:solidFill>
-              <a:schemeClr val="accent4"/>
-            </a:solidFill>
-            <a:prstDash val="solid"/>
-          </a:ln>
-        </p:spPr>
-      </p:sp>
-      <p:sp>
-        <p:nvSpPr>
-          <p:cNvPr id="15" name="chip-label"/>
-          <p:cNvSpPr txBox="1"/>
-          <p:nvPr/>
-        </p:nvSpPr>
-        <p:spPr>
-          <a:xfrm>
-            <a:off x="5532120" y="3429000"/>
-            <a:ext cx="914400" cy="329184"/>
-          </a:xfrm>
-          <a:prstGeom prst="rect">
-            <a:avLst/>
-          </a:prstGeom>
-          <a:noFill/>
-          <a:ln/>
-        </p:spPr>
-        <p:txBody>
-          <a:bodyPr wrap="square" lIns="0" tIns="0" rIns="0" bIns="0" rtlCol="0" anchor="ctr"/>
-          <a:lstStyle/>
-          <a:p>
-            <a:pPr algn="ctr" indent="0" marL="0">
-              <a:buNone/>
-            </a:pPr>
-            <a:r>
-              <a:rPr lang="en-US" sz="1100" b="1" dirty="0">
-                <a:solidFill>
-                  <a:schemeClr val="tx1"/>
-                </a:solidFill>
-                <a:latin typeface="Cambria" pitchFamily="34" charset="0"/>
-                <a:ea typeface="Cambria" pitchFamily="34" charset="-122"/>
-                <a:cs typeface="Cambria" pitchFamily="34" charset="-120"/>
-              </a:rPr>
-              <a:t>(0.3, 0.5)</a:t>
-            </a:r>
-            <a:endParaRPr lang="en-US" sz="1100" dirty="0"/>
-          </a:p>
-        </p:txBody>
-      </p:sp>
-      <p:sp>
-        <p:nvSpPr>
-          <p:cNvPr id="16" name="pair-label"/>
-          <p:cNvSpPr txBox="1"/>
-          <p:nvPr/>
-        </p:nvSpPr>
-        <p:spPr>
-          <a:xfrm>
-            <a:off x="6492240" y="3429000"/>
-            <a:ext cx="777240" cy="329184"/>
-          </a:xfrm>
-          <a:prstGeom prst="rect">
-            <a:avLst/>
-          </a:prstGeom>
-          <a:noFill/>
-          <a:ln/>
-        </p:spPr>
-        <p:txBody>
-          <a:bodyPr wrap="square" lIns="0" tIns="0" rIns="0" bIns="0" rtlCol="0" anchor="ctr"/>
-          <a:lstStyle/>
-          <a:p>
-            <a:pPr indent="0" marL="0">
-              <a:buNone/>
-            </a:pPr>
-            <a:r>
-              <a:rPr lang="en-US" sz="1200" dirty="0">
-                <a:solidFill>
-                  <a:schemeClr val="accent3"/>
-                </a:solidFill>
-              </a:rPr>
-              <a:t>narrow</a:t>
-            </a:r>
-            <a:endParaRPr lang="en-US" sz="1200" dirty="0"/>
-          </a:p>
-        </p:txBody>
-      </p:sp>
+        </p:nvPicPr>
+        <p:blipFill>
+          <a:blip r:embed="rId1"/>
+          <a:stretch>
+            <a:fillRect/>
+          </a:stretch>
+        </p:blipFill>
+        <p:spPr>
+          <a:xfrm>
+            <a:off x="755294" y="960120"/>
+            <a:ext cx="7633411" cy="3657600"/>
+          </a:xfrm>
+          <a:prstGeom prst="rect">
+            <a:avLst/>
+          </a:prstGeom>
+        </p:spPr>
+      </p:pic>
       <p:sp>
         <p:nvSpPr>
           <p:cNvPr id="25" name="Slide Number Placeholder 0"/>
@@ -6176,36 +5963,614 @@
                   <a:schemeClr val="tx2"/>
                 </a:solidFill>
               </a:rPr>
-              <a:t>Collectivists herd</a:t>
+              <a:t>Individualists and collectivists: who listens to whom</a:t>
             </a:r>
             <a:endParaRPr lang="en-US" sz="2400" dirty="0"/>
           </a:p>
         </p:txBody>
       </p:sp>
-      <p:pic>
-        <p:nvPicPr>
-          <p:cNvPr id="3" name="e07" descr="Chance of withdrawing by share of neighbours who have withdrawn: collectivists jump to near 1 once 20 to 35 percent of neighbours are out; individualists level off near 0.25 to 0.30.">    </p:cNvPr>
-          <p:cNvPicPr>
-            <a:picLocks noChangeAspect="1"/>
-          </p:cNvPicPr>
+      <p:sp>
+        <p:nvSpPr>
+          <p:cNvPr id="3" name="type-head"/>
+          <p:cNvSpPr txBox="1"/>
           <p:nvPr/>
-        </p:nvPicPr>
-        <p:blipFill>
-          <a:blip r:embed="rId1"/>
-          <a:stretch>
-            <a:fillRect/>
-          </a:stretch>
-        </p:blipFill>
-        <p:spPr>
-          <a:xfrm>
-            <a:off x="1738480" y="1005840"/>
-            <a:ext cx="5667040" cy="3611880"/>
-          </a:xfrm>
-          <a:prstGeom prst="rect">
-            <a:avLst/>
-          </a:prstGeom>
-        </p:spPr>
-      </p:pic>
+        </p:nvSpPr>
+        <p:spPr>
+          <a:xfrm>
+            <a:off x="640080" y="1143000"/>
+            <a:ext cx="3657600" cy="365760"/>
+          </a:xfrm>
+          <a:prstGeom prst="rect">
+            <a:avLst/>
+          </a:prstGeom>
+          <a:noFill/>
+          <a:ln/>
+        </p:spPr>
+        <p:txBody>
+          <a:bodyPr wrap="square" lIns="0" tIns="0" rIns="0" bIns="0" rtlCol="0" anchor="ctr"/>
+          <a:lstStyle/>
+          <a:p>
+            <a:pPr indent="0" marL="0">
+              <a:buNone/>
+            </a:pPr>
+            <a:r>
+              <a:rPr lang="en-US" sz="1800" b="1" dirty="0">
+                <a:solidFill>
+                  <a:srgbClr val="EB6834"/>
+                </a:solidFill>
+              </a:rPr>
+              <a:t>Individualists</a:t>
+            </a:r>
+            <a:endParaRPr lang="en-US" sz="1800" dirty="0"/>
+          </a:p>
+        </p:txBody>
+      </p:sp>
+      <p:sp>
+        <p:nvSpPr>
+          <p:cNvPr id="4" name="bullets"/>
+          <p:cNvSpPr txBox="1"/>
+          <p:nvPr/>
+        </p:nvSpPr>
+        <p:spPr>
+          <a:xfrm>
+            <a:off x="640080" y="1600200"/>
+            <a:ext cx="3657600" cy="1737360"/>
+          </a:xfrm>
+          <a:prstGeom prst="rect">
+            <a:avLst/>
+          </a:prstGeom>
+          <a:noFill/>
+          <a:ln/>
+        </p:spPr>
+        <p:txBody>
+          <a:bodyPr wrap="square" lIns="0" tIns="0" rIns="0" bIns="0" rtlCol="0" anchor="t"/>
+          <a:lstStyle/>
+          <a:p>
+            <a:pPr marL="177800" indent="-177800">
+              <a:spcAft>
+                <a:spcPts val="500"/>
+              </a:spcAft>
+              <a:buSzPct val="100000"/>
+              <a:buChar char="•"/>
+            </a:pPr>
+            <a:r>
+              <a:rPr lang="en-US" sz="1300" dirty="0">
+                <a:solidFill>
+                  <a:schemeClr val="tx1"/>
+                </a:solidFill>
+              </a:rPr>
+              <a:t>Trust their own information about the bank</a:t>
+            </a:r>
+            <a:endParaRPr lang="en-US" sz="1300" dirty="0"/>
+          </a:p>
+          <a:p>
+            <a:pPr marL="177800" indent="-177800">
+              <a:spcAft>
+                <a:spcPts val="500"/>
+              </a:spcAft>
+              <a:buSzPct val="100000"/>
+              <a:buChar char="•"/>
+            </a:pPr>
+            <a:r>
+              <a:rPr lang="en-US" sz="1300" dirty="0">
+                <a:solidFill>
+                  <a:schemeClr val="tx1"/>
+                </a:solidFill>
+              </a:rPr>
+              <a:t>Put little weight on what neighbours do or on public news</a:t>
+            </a:r>
+            <a:endParaRPr lang="en-US" sz="1300" dirty="0"/>
+          </a:p>
+          <a:p>
+            <a:pPr marL="177800" indent="-177800">
+              <a:spcAft>
+                <a:spcPts val="500"/>
+              </a:spcAft>
+              <a:buSzPct val="100000"/>
+              <a:buChar char="•"/>
+            </a:pPr>
+            <a:r>
+              <a:rPr lang="en-US" sz="1300" dirty="0">
+                <a:solidFill>
+                  <a:schemeClr val="tx1"/>
+                </a:solidFill>
+              </a:rPr>
+              <a:t>Weight on the social side: λ = 0.1 to 0.3</a:t>
+            </a:r>
+            <a:endParaRPr lang="en-US" sz="1300" dirty="0"/>
+          </a:p>
+          <a:p>
+            <a:pPr marL="177800" indent="-177800">
+              <a:spcAft>
+                <a:spcPts val="500"/>
+              </a:spcAft>
+              <a:buSzPct val="100000"/>
+              <a:buChar char="•"/>
+            </a:pPr>
+            <a:r>
+              <a:rPr lang="en-US" sz="1300" dirty="0">
+                <a:solidFill>
+                  <a:schemeClr val="tx1"/>
+                </a:solidFill>
+              </a:rPr>
+              <a:t>Act on what they see themselves</a:t>
+            </a:r>
+            <a:endParaRPr lang="en-US" sz="1300" dirty="0"/>
+          </a:p>
+        </p:txBody>
+      </p:sp>
+      <p:sp>
+        <p:nvSpPr>
+          <p:cNvPr id="5" name="type-head"/>
+          <p:cNvSpPr txBox="1"/>
+          <p:nvPr/>
+        </p:nvSpPr>
+        <p:spPr>
+          <a:xfrm>
+            <a:off x="4846320" y="1143000"/>
+            <a:ext cx="3657600" cy="365760"/>
+          </a:xfrm>
+          <a:prstGeom prst="rect">
+            <a:avLst/>
+          </a:prstGeom>
+          <a:noFill/>
+          <a:ln/>
+        </p:spPr>
+        <p:txBody>
+          <a:bodyPr wrap="square" lIns="0" tIns="0" rIns="0" bIns="0" rtlCol="0" anchor="ctr"/>
+          <a:lstStyle/>
+          <a:p>
+            <a:pPr indent="0" marL="0">
+              <a:buNone/>
+            </a:pPr>
+            <a:r>
+              <a:rPr lang="en-US" sz="1800" b="1" dirty="0">
+                <a:solidFill>
+                  <a:srgbClr val="2A78D6"/>
+                </a:solidFill>
+              </a:rPr>
+              <a:t>Collectivists</a:t>
+            </a:r>
+            <a:endParaRPr lang="en-US" sz="1800" dirty="0"/>
+          </a:p>
+        </p:txBody>
+      </p:sp>
+      <p:sp>
+        <p:nvSpPr>
+          <p:cNvPr id="6" name="bullets"/>
+          <p:cNvSpPr txBox="1"/>
+          <p:nvPr/>
+        </p:nvSpPr>
+        <p:spPr>
+          <a:xfrm>
+            <a:off x="4846320" y="1600200"/>
+            <a:ext cx="3657600" cy="1737360"/>
+          </a:xfrm>
+          <a:prstGeom prst="rect">
+            <a:avLst/>
+          </a:prstGeom>
+          <a:noFill/>
+          <a:ln/>
+        </p:spPr>
+        <p:txBody>
+          <a:bodyPr wrap="square" lIns="0" tIns="0" rIns="0" bIns="0" rtlCol="0" anchor="t"/>
+          <a:lstStyle/>
+          <a:p>
+            <a:pPr marL="177800" indent="-177800">
+              <a:spcAft>
+                <a:spcPts val="500"/>
+              </a:spcAft>
+              <a:buSzPct val="100000"/>
+              <a:buChar char="•"/>
+            </a:pPr>
+            <a:r>
+              <a:rPr lang="en-US" sz="1300" dirty="0">
+                <a:solidFill>
+                  <a:schemeClr val="tx1"/>
+                </a:solidFill>
+              </a:rPr>
+              <a:t>Watch what neighbours do and what the public news says</a:t>
+            </a:r>
+            <a:endParaRPr lang="en-US" sz="1300" dirty="0"/>
+          </a:p>
+          <a:p>
+            <a:pPr marL="177800" indent="-177800">
+              <a:spcAft>
+                <a:spcPts val="500"/>
+              </a:spcAft>
+              <a:buSzPct val="100000"/>
+              <a:buChar char="•"/>
+            </a:pPr>
+            <a:r>
+              <a:rPr lang="en-US" sz="1300" dirty="0">
+                <a:solidFill>
+                  <a:schemeClr val="tx1"/>
+                </a:solidFill>
+              </a:rPr>
+              <a:t>Put little weight on their own information</a:t>
+            </a:r>
+            <a:endParaRPr lang="en-US" sz="1300" dirty="0"/>
+          </a:p>
+          <a:p>
+            <a:pPr marL="177800" indent="-177800">
+              <a:spcAft>
+                <a:spcPts val="500"/>
+              </a:spcAft>
+              <a:buSzPct val="100000"/>
+              <a:buChar char="•"/>
+            </a:pPr>
+            <a:r>
+              <a:rPr lang="en-US" sz="1300" dirty="0">
+                <a:solidFill>
+                  <a:schemeClr val="tx1"/>
+                </a:solidFill>
+              </a:rPr>
+              <a:t>Weight on the social side: λ = 0.5 to 0.9</a:t>
+            </a:r>
+            <a:endParaRPr lang="en-US" sz="1300" dirty="0"/>
+          </a:p>
+          <a:p>
+            <a:pPr marL="177800" indent="-177800">
+              <a:spcAft>
+                <a:spcPts val="500"/>
+              </a:spcAft>
+              <a:buSzPct val="100000"/>
+              <a:buChar char="•"/>
+            </a:pPr>
+            <a:r>
+              <a:rPr lang="en-US" sz="1300" dirty="0">
+                <a:solidFill>
+                  <a:schemeClr val="tx1"/>
+                </a:solidFill>
+              </a:rPr>
+              <a:t>Move when others move</a:t>
+            </a:r>
+            <a:endParaRPr lang="en-US" sz="1300" dirty="0"/>
+          </a:p>
+        </p:txBody>
+      </p:sp>
+      <p:sp>
+        <p:nvSpPr>
+          <p:cNvPr id="7" name="pairs-head"/>
+          <p:cNvSpPr txBox="1"/>
+          <p:nvPr/>
+        </p:nvSpPr>
+        <p:spPr>
+          <a:xfrm>
+            <a:off x="457200" y="3886200"/>
+            <a:ext cx="8229600" cy="329184"/>
+          </a:xfrm>
+          <a:prstGeom prst="rect">
+            <a:avLst/>
+          </a:prstGeom>
+          <a:noFill/>
+          <a:ln/>
+        </p:spPr>
+        <p:txBody>
+          <a:bodyPr wrap="square" lIns="0" tIns="0" rIns="0" bIns="0" rtlCol="0" anchor="ctr"/>
+          <a:lstStyle/>
+          <a:p>
+            <a:pPr algn="ctr" indent="0" marL="0">
+              <a:buNone/>
+            </a:pPr>
+            <a:r>
+              <a:rPr lang="en-US" sz="1300" b="1" dirty="0">
+                <a:solidFill>
+                  <a:schemeClr val="tx2"/>
+                </a:solidFill>
+              </a:rPr>
+              <a:t>Signal interpretation gap</a:t>
+            </a:r>
+            <a:endParaRPr lang="en-US" sz="1300" dirty="0"/>
+          </a:p>
+        </p:txBody>
+      </p:sp>
+      <p:sp>
+        <p:nvSpPr>
+          <p:cNvPr id="8" name="chip"/>
+          <p:cNvSpPr/>
+          <p:nvPr/>
+        </p:nvSpPr>
+        <p:spPr>
+          <a:xfrm>
+            <a:off x="2057400" y="3429000"/>
+            <a:ext cx="914400" cy="329184"/>
+          </a:xfrm>
+          <a:prstGeom prst="roundRect">
+            <a:avLst>
+              <a:gd name="adj" fmla="val 16667"/>
+            </a:avLst>
+          </a:prstGeom>
+          <a:solidFill>
+            <a:schemeClr val="tx2"/>
+          </a:solidFill>
+          <a:ln w="12700">
+            <a:solidFill>
+              <a:schemeClr val="tx2"/>
+            </a:solidFill>
+            <a:prstDash val="solid"/>
+          </a:ln>
+        </p:spPr>
+      </p:sp>
+      <p:sp>
+        <p:nvSpPr>
+          <p:cNvPr id="9" name="chip-label"/>
+          <p:cNvSpPr txBox="1"/>
+          <p:nvPr/>
+        </p:nvSpPr>
+        <p:spPr>
+          <a:xfrm>
+            <a:off x="2057400" y="3429000"/>
+            <a:ext cx="914400" cy="329184"/>
+          </a:xfrm>
+          <a:prstGeom prst="rect">
+            <a:avLst/>
+          </a:prstGeom>
+          <a:noFill/>
+          <a:ln/>
+        </p:spPr>
+        <p:txBody>
+          <a:bodyPr wrap="square" lIns="0" tIns="0" rIns="0" bIns="0" rtlCol="0" anchor="ctr"/>
+          <a:lstStyle/>
+          <a:p>
+            <a:pPr algn="ctr" indent="0" marL="0">
+              <a:buNone/>
+            </a:pPr>
+            <a:r>
+              <a:rPr lang="en-US" sz="1100" b="1" dirty="0">
+                <a:solidFill>
+                  <a:schemeClr val="bg1"/>
+                </a:solidFill>
+                <a:latin typeface="Cambria" pitchFamily="34" charset="0"/>
+                <a:ea typeface="Cambria" pitchFamily="34" charset="-122"/>
+                <a:cs typeface="Cambria" pitchFamily="34" charset="-120"/>
+              </a:rPr>
+              <a:t>(0.1, 0.9)</a:t>
+            </a:r>
+            <a:endParaRPr lang="en-US" sz="1100" dirty="0"/>
+          </a:p>
+        </p:txBody>
+      </p:sp>
+      <p:sp>
+        <p:nvSpPr>
+          <p:cNvPr id="10" name="pair-label"/>
+          <p:cNvSpPr txBox="1"/>
+          <p:nvPr/>
+        </p:nvSpPr>
+        <p:spPr>
+          <a:xfrm>
+            <a:off x="3017520" y="3429000"/>
+            <a:ext cx="777240" cy="329184"/>
+          </a:xfrm>
+          <a:prstGeom prst="rect">
+            <a:avLst/>
+          </a:prstGeom>
+          <a:noFill/>
+          <a:ln/>
+        </p:spPr>
+        <p:txBody>
+          <a:bodyPr wrap="square" lIns="0" tIns="0" rIns="0" bIns="0" rtlCol="0" anchor="ctr"/>
+          <a:lstStyle/>
+          <a:p>
+            <a:pPr indent="0" marL="0">
+              <a:buNone/>
+            </a:pPr>
+            <a:r>
+              <a:rPr lang="en-US" sz="1200" dirty="0">
+                <a:solidFill>
+                  <a:schemeClr val="accent3"/>
+                </a:solidFill>
+              </a:rPr>
+              <a:t>wide gap</a:t>
+            </a:r>
+            <a:endParaRPr lang="en-US" sz="1200" dirty="0"/>
+          </a:p>
+        </p:txBody>
+      </p:sp>
+      <p:sp>
+        <p:nvSpPr>
+          <p:cNvPr id="11" name="chip"/>
+          <p:cNvSpPr/>
+          <p:nvPr/>
+        </p:nvSpPr>
+        <p:spPr>
+          <a:xfrm>
+            <a:off x="3794760" y="3429000"/>
+            <a:ext cx="914400" cy="329184"/>
+          </a:xfrm>
+          <a:prstGeom prst="roundRect">
+            <a:avLst>
+              <a:gd name="adj" fmla="val 16667"/>
+            </a:avLst>
+          </a:prstGeom>
+          <a:solidFill>
+            <a:schemeClr val="accent3"/>
+          </a:solidFill>
+          <a:ln w="12700">
+            <a:solidFill>
+              <a:schemeClr val="accent3"/>
+            </a:solidFill>
+            <a:prstDash val="solid"/>
+          </a:ln>
+        </p:spPr>
+      </p:sp>
+      <p:sp>
+        <p:nvSpPr>
+          <p:cNvPr id="12" name="chip-label"/>
+          <p:cNvSpPr txBox="1"/>
+          <p:nvPr/>
+        </p:nvSpPr>
+        <p:spPr>
+          <a:xfrm>
+            <a:off x="3794760" y="3429000"/>
+            <a:ext cx="914400" cy="329184"/>
+          </a:xfrm>
+          <a:prstGeom prst="rect">
+            <a:avLst/>
+          </a:prstGeom>
+          <a:noFill/>
+          <a:ln/>
+        </p:spPr>
+        <p:txBody>
+          <a:bodyPr wrap="square" lIns="0" tIns="0" rIns="0" bIns="0" rtlCol="0" anchor="ctr"/>
+          <a:lstStyle/>
+          <a:p>
+            <a:pPr algn="ctr" indent="0" marL="0">
+              <a:buNone/>
+            </a:pPr>
+            <a:r>
+              <a:rPr lang="en-US" sz="1100" b="1" dirty="0">
+                <a:solidFill>
+                  <a:schemeClr val="bg1"/>
+                </a:solidFill>
+                <a:latin typeface="Cambria" pitchFamily="34" charset="0"/>
+                <a:ea typeface="Cambria" pitchFamily="34" charset="-122"/>
+                <a:cs typeface="Cambria" pitchFamily="34" charset="-120"/>
+              </a:rPr>
+              <a:t>(0.2, 0.8)</a:t>
+            </a:r>
+            <a:endParaRPr lang="en-US" sz="1100" dirty="0"/>
+          </a:p>
+        </p:txBody>
+      </p:sp>
+      <p:sp>
+        <p:nvSpPr>
+          <p:cNvPr id="13" name="pair-label"/>
+          <p:cNvSpPr txBox="1"/>
+          <p:nvPr/>
+        </p:nvSpPr>
+        <p:spPr>
+          <a:xfrm>
+            <a:off x="4754880" y="3429000"/>
+            <a:ext cx="777240" cy="329184"/>
+          </a:xfrm>
+          <a:prstGeom prst="rect">
+            <a:avLst/>
+          </a:prstGeom>
+          <a:noFill/>
+          <a:ln/>
+        </p:spPr>
+        <p:txBody>
+          <a:bodyPr wrap="square" lIns="0" tIns="0" rIns="0" bIns="0" rtlCol="0" anchor="ctr"/>
+          <a:lstStyle/>
+          <a:p>
+            <a:pPr indent="0" marL="0">
+              <a:buNone/>
+            </a:pPr>
+            <a:r>
+              <a:rPr lang="en-US" sz="1200" dirty="0">
+                <a:solidFill>
+                  <a:schemeClr val="accent3"/>
+                </a:solidFill>
+              </a:rPr>
+              <a:t>medium</a:t>
+            </a:r>
+            <a:endParaRPr lang="en-US" sz="1200" dirty="0"/>
+          </a:p>
+        </p:txBody>
+      </p:sp>
+      <p:sp>
+        <p:nvSpPr>
+          <p:cNvPr id="14" name="chip"/>
+          <p:cNvSpPr/>
+          <p:nvPr/>
+        </p:nvSpPr>
+        <p:spPr>
+          <a:xfrm>
+            <a:off x="5532120" y="3429000"/>
+            <a:ext cx="914400" cy="329184"/>
+          </a:xfrm>
+          <a:prstGeom prst="roundRect">
+            <a:avLst>
+              <a:gd name="adj" fmla="val 16667"/>
+            </a:avLst>
+          </a:prstGeom>
+          <a:solidFill>
+            <a:schemeClr val="accent4"/>
+          </a:solidFill>
+          <a:ln w="12700">
+            <a:solidFill>
+              <a:schemeClr val="accent4"/>
+            </a:solidFill>
+            <a:prstDash val="solid"/>
+          </a:ln>
+        </p:spPr>
+      </p:sp>
+      <p:sp>
+        <p:nvSpPr>
+          <p:cNvPr id="15" name="chip-label"/>
+          <p:cNvSpPr txBox="1"/>
+          <p:nvPr/>
+        </p:nvSpPr>
+        <p:spPr>
+          <a:xfrm>
+            <a:off x="5532120" y="3429000"/>
+            <a:ext cx="914400" cy="329184"/>
+          </a:xfrm>
+          <a:prstGeom prst="rect">
+            <a:avLst/>
+          </a:prstGeom>
+          <a:noFill/>
+          <a:ln/>
+        </p:spPr>
+        <p:txBody>
+          <a:bodyPr wrap="square" lIns="0" tIns="0" rIns="0" bIns="0" rtlCol="0" anchor="ctr"/>
+          <a:lstStyle/>
+          <a:p>
+            <a:pPr algn="ctr" indent="0" marL="0">
+              <a:buNone/>
+            </a:pPr>
+            <a:r>
+              <a:rPr lang="en-US" sz="1100" b="1" dirty="0">
+                <a:solidFill>
+                  <a:schemeClr val="tx1"/>
+                </a:solidFill>
+                <a:latin typeface="Cambria" pitchFamily="34" charset="0"/>
+                <a:ea typeface="Cambria" pitchFamily="34" charset="-122"/>
+                <a:cs typeface="Cambria" pitchFamily="34" charset="-120"/>
+              </a:rPr>
+              <a:t>(0.3, 0.5)</a:t>
+            </a:r>
+            <a:endParaRPr lang="en-US" sz="1100" dirty="0"/>
+          </a:p>
+        </p:txBody>
+      </p:sp>
+      <p:sp>
+        <p:nvSpPr>
+          <p:cNvPr id="16" name="pair-label"/>
+          <p:cNvSpPr txBox="1"/>
+          <p:nvPr/>
+        </p:nvSpPr>
+        <p:spPr>
+          <a:xfrm>
+            <a:off x="6492240" y="3429000"/>
+            <a:ext cx="777240" cy="329184"/>
+          </a:xfrm>
+          <a:prstGeom prst="rect">
+            <a:avLst/>
+          </a:prstGeom>
+          <a:noFill/>
+          <a:ln/>
+        </p:spPr>
+        <p:txBody>
+          <a:bodyPr wrap="square" lIns="0" tIns="0" rIns="0" bIns="0" rtlCol="0" anchor="ctr"/>
+          <a:lstStyle/>
+          <a:p>
+            <a:pPr indent="0" marL="0">
+              <a:buNone/>
+            </a:pPr>
+            <a:r>
+              <a:rPr lang="en-US" sz="1200" dirty="0">
+                <a:solidFill>
+                  <a:schemeClr val="accent3"/>
+                </a:solidFill>
+              </a:rPr>
+              <a:t>narrow</a:t>
+            </a:r>
+            <a:endParaRPr lang="en-US" sz="1200" dirty="0"/>
+          </a:p>
+        </p:txBody>
+      </p:sp>
       <p:sp>
         <p:nvSpPr>
           <p:cNvPr id="25" name="Slide Number Placeholder 0"/>

--- a/docs/deck_2026-10-26_seminar.pptx
+++ b/docs/deck_2026-10-26_seminar.pptx
@@ -122,7 +122,7 @@
   <p:extLst>
     <p:ext uri="{521415D9-36F7-43E2-AB2F-B90AF26B5E84}">
       <p14:sectionLst xmlns:p14="http://schemas.microsoft.com/office/powerpoint/2010/main">
-        <p14:section name="Opening" id="{4658e545-11c0-43ca-f693-22e28a4924bf}">
+        <p14:section name="Opening" id="{ed600e3b-1275-a80f-2c4f-ee723e1245b3}">
           <p14:sldIdLst>
             <p14:sldId id="256"/>
             <p14:sldId id="257"/>
@@ -132,13 +132,13 @@
             <p14:sldId id="262"/>
           </p14:sldIdLst>
         </p14:section>
-        <p14:section name="The model" id="{8adb3581-b003-8914-350c-6fc655770fe6}">
+        <p14:section name="The model" id="{2f868b52-186f-7a43-bf93-9398eceea952}">
           <p14:sldIdLst>
             <p14:sldId id="263"/>
             <p14:sldId id="264"/>
           </p14:sldIdLst>
         </p14:section>
-        <p14:section name="Results" id="{90084578-f552-8e86-299c-05d47401621d}">
+        <p14:section name="Results" id="{b8a4100a-4eae-9c37-0dd0-858f18d9db70}">
           <p14:sldIdLst>
             <p14:sldId id="265"/>
             <p14:sldId id="266"/>
@@ -147,12 +147,12 @@
             <p14:sldId id="269"/>
           </p14:sldIdLst>
         </p14:section>
-        <p14:section name="Validation" id="{b15d4de9-3e77-5966-dd7f-262bcb2e547c}">
+        <p14:section name="Validation" id="{4ff5f7c7-474e-bc74-f6fb-c7637f8bae2a}">
           <p14:sldIdLst>
             <p14:sldId id="270"/>
           </p14:sldIdLst>
         </p14:section>
-        <p14:section name="Close" id="{19d0b0b1-2032-f5c4-417b-6e68be271e28}">
+        <p14:section name="Close" id="{5b39c763-0bb8-fb51-1988-2d9216822688}">
           <p14:sldIdLst>
             <p14:sldId id="271"/>
           </p14:sldIdLst>
@@ -5426,7 +5426,7 @@
             <a:r>
               <a:rPr lang="en-US" sz="3000" b="1" dirty="0">
                 <a:solidFill>
-                  <a:srgbClr val="EB6834"/>
+                  <a:srgbClr val="D62828"/>
                 </a:solidFill>
                 <a:latin typeface="Cambria" pitchFamily="34" charset="0"/>
                 <a:ea typeface="Cambria" pitchFamily="34" charset="-122"/>
@@ -5996,7 +5996,7 @@
             <a:r>
               <a:rPr lang="en-US" sz="1800" b="1" dirty="0">
                 <a:solidFill>
-                  <a:srgbClr val="EB6834"/>
+                  <a:srgbClr val="D62828"/>
                 </a:solidFill>
               </a:rPr>
               <a:t>Individualists</a:t>

--- a/docs/deck_2026-10-26_seminar.pptx
+++ b/docs/deck_2026-10-26_seminar.pptx
@@ -122,7 +122,7 @@
   <p:extLst>
     <p:ext uri="{521415D9-36F7-43E2-AB2F-B90AF26B5E84}">
       <p14:sectionLst xmlns:p14="http://schemas.microsoft.com/office/powerpoint/2010/main">
-        <p14:section name="Opening" id="{ed600e3b-1275-a80f-2c4f-ee723e1245b3}">
+        <p14:section name="Opening" id="{795e3b42-6817-3d83-12bd-e2c827b8ce7f}">
           <p14:sldIdLst>
             <p14:sldId id="256"/>
             <p14:sldId id="257"/>
@@ -132,13 +132,13 @@
             <p14:sldId id="262"/>
           </p14:sldIdLst>
         </p14:section>
-        <p14:section name="The model" id="{2f868b52-186f-7a43-bf93-9398eceea952}">
+        <p14:section name="The model" id="{1445559a-9fef-cd07-96c5-9e716de719f2}">
           <p14:sldIdLst>
             <p14:sldId id="263"/>
             <p14:sldId id="264"/>
           </p14:sldIdLst>
         </p14:section>
-        <p14:section name="Results" id="{b8a4100a-4eae-9c37-0dd0-858f18d9db70}">
+        <p14:section name="Results" id="{5952e06b-c898-3c48-8730-6571701602d6}">
           <p14:sldIdLst>
             <p14:sldId id="265"/>
             <p14:sldId id="266"/>
@@ -147,12 +147,12 @@
             <p14:sldId id="269"/>
           </p14:sldIdLst>
         </p14:section>
-        <p14:section name="Validation" id="{4ff5f7c7-474e-bc74-f6fb-c7637f8bae2a}">
+        <p14:section name="Validation" id="{22546429-4435-0580-b38e-7a7d4cf27411}">
           <p14:sldIdLst>
             <p14:sldId id="270"/>
           </p14:sldIdLst>
         </p14:section>
-        <p14:section name="Close" id="{5b39c763-0bb8-fb51-1988-2d9216822688}">
+        <p14:section name="Close" id="{7855dd14-854f-0d15-547b-8ea7af6c6d9f}">
           <p14:sldIdLst>
             <p14:sldId id="271"/>
           </p14:sldIdLst>
@@ -5121,7 +5121,7 @@
                   <a:schemeClr val="bg1"/>
                 </a:solidFill>
               </a:rPr>
-              <a:t>An agent-based bank run model with culturally heterogeneous signal interpretation</a:t>
+              <a:t>An agent-based bank run model</a:t>
             </a:r>
             <a:endParaRPr lang="en-US" sz="3200" dirty="0"/>
           </a:p>

--- a/docs/deck_2026-10-26_seminar.pptx
+++ b/docs/deck_2026-10-26_seminar.pptx
@@ -5122,6 +5122,21 @@
                 </a:solidFill>
               </a:rPr>
               <a:t>An agent-based bank run model</a:t>
+            </a:r>
+            <a:br>
+              <a:rPr lang="en-US" sz="3200" b="1" dirty="0">
+                <a:solidFill>
+                  <a:schemeClr val="bg1"/>
+                </a:solidFill>
+              </a:rPr>
+            </a:br>
+            <a:r>
+              <a:rPr lang="en-US" sz="3200" b="1" dirty="0">
+                <a:solidFill>
+                  <a:schemeClr val="bg1"/>
+                </a:solidFill>
+              </a:rPr>
+              <a:t>with culture</a:t>
             </a:r>
             <a:endParaRPr lang="en-US" sz="3200" dirty="0"/>
           </a:p>

--- a/docs/deck_2026-10-26_seminar.pptx
+++ b/docs/deck_2026-10-26_seminar.pptx
@@ -122,7 +122,7 @@
   <p:extLst>
     <p:ext uri="{521415D9-36F7-43E2-AB2F-B90AF26B5E84}">
       <p14:sectionLst xmlns:p14="http://schemas.microsoft.com/office/powerpoint/2010/main">
-        <p14:section name="Opening" id="{795e3b42-6817-3d83-12bd-e2c827b8ce7f}">
+        <p14:section name="Opening" id="{e50f61ee-7bef-7ce8-4b28-4b59a5327a61}">
           <p14:sldIdLst>
             <p14:sldId id="256"/>
             <p14:sldId id="257"/>
@@ -132,13 +132,13 @@
             <p14:sldId id="262"/>
           </p14:sldIdLst>
         </p14:section>
-        <p14:section name="The model" id="{1445559a-9fef-cd07-96c5-9e716de719f2}">
+        <p14:section name="The model" id="{93910c9f-1099-270d-c07f-5103a4462bd3}">
           <p14:sldIdLst>
             <p14:sldId id="263"/>
             <p14:sldId id="264"/>
           </p14:sldIdLst>
         </p14:section>
-        <p14:section name="Results" id="{5952e06b-c898-3c48-8730-6571701602d6}">
+        <p14:section name="Results" id="{72fcd71d-aa50-e9e8-c28d-1957eafc80c4}">
           <p14:sldIdLst>
             <p14:sldId id="265"/>
             <p14:sldId id="266"/>
@@ -147,12 +147,12 @@
             <p14:sldId id="269"/>
           </p14:sldIdLst>
         </p14:section>
-        <p14:section name="Validation" id="{22546429-4435-0580-b38e-7a7d4cf27411}">
+        <p14:section name="Validation" id="{2e89d5aa-f328-3aec-2413-2c4b74dc54f0}">
           <p14:sldIdLst>
             <p14:sldId id="270"/>
           </p14:sldIdLst>
         </p14:section>
-        <p14:section name="Close" id="{7855dd14-854f-0d15-547b-8ea7af6c6d9f}">
+        <p14:section name="Close" id="{244f6fad-fb3d-8a9f-c084-bd96c103640b}">
           <p14:sldIdLst>
             <p14:sldId id="271"/>
           </p14:sldIdLst>
@@ -1265,7 +1265,7 @@
           <a:p>
             <a:r>
               <a:rPr lang="en-US" dirty="0"/>
-              <a:t>~1.5 min. Raise the question only: who runs? Theory (Diamond–Dybvig) says runs can happen; it is silent on who runs first and how a run spreads. The screenshot: the FSB warned the G20 on 12 October 2026 that a fully reserved stablecoin can still face a redemption run. Even a regulator thinking about a modern run asks whether one happens, not who starts it. Alternative screenshot in figures/deck is not provided; the Nano Banc failure (25 September 2026, American Banker) was a capital failure, not a run.</a:t>
+              <a:t>~1.5 min. Photo: the 1931 run on the American Union Bank, New York (National Archives, public domain). Raise the question only: who runs? Theory (Diamond–Dybvig) says runs can happen; it is silent on who runs first and how a run spreads. The screenshot: the FSB warned the G20 on 12 October 2026 that a fully reserved stablecoin can still face a redemption run. Even a regulator thinking about a modern run asks whether one happens, not who starts it. Alternative screenshot in figures/deck is not provided; the Nano Banc failure (25 September 2026, American Banker) was a capital failure, not a run.</a:t>
             </a:r>
             <a:endParaRPr lang="en-US" dirty="0"/>
           </a:p>
@@ -4181,7 +4181,7 @@
       </p:sp>
       <p:pic>
         <p:nvPicPr>
-          <p:cNvPr id="3" name="news" descr="Screenshot of a CryptoSlate news article dated 12 October 2026: Global watchdog warns the $300 billion stablecoin market could face bank runs even with full reserves. The FSB says cross-border liquidity mismatches could trigger redemption crises and threaten dollar pegs as regulators prepare for G20 discussions.">    </p:cNvPr>
+          <p:cNvPr id="3" name="aub" descr="Black-and-white photograph from 1931: a dense crowd of depositors in hats and suits packs the sidewalk outside the American Union Bank in New York, at the corner of West 37th Street, during a bank run.">    </p:cNvPr>
           <p:cNvPicPr>
             <a:picLocks noChangeAspect="1"/>
           </p:cNvPicPr>
@@ -4195,8 +4195,8 @@
         </p:blipFill>
         <p:spPr>
           <a:xfrm>
-            <a:off x="2414267" y="1051560"/>
-            <a:ext cx="4315465" cy="3337560"/>
+            <a:off x="477591" y="1051560"/>
+            <a:ext cx="3982578" cy="3108960"/>
           </a:xfrm>
           <a:prstGeom prst="rect">
             <a:avLst/>
@@ -4211,8 +4211,68 @@
         </p:nvSpPr>
         <p:spPr>
           <a:xfrm>
-            <a:off x="2414267" y="4434840"/>
-            <a:ext cx="4315465" cy="274320"/>
+            <a:off x="477591" y="4206240"/>
+            <a:ext cx="3982578" cy="274320"/>
+          </a:xfrm>
+          <a:prstGeom prst="rect">
+            <a:avLst/>
+          </a:prstGeom>
+          <a:noFill/>
+          <a:ln/>
+        </p:spPr>
+        <p:txBody>
+          <a:bodyPr wrap="square" lIns="0" tIns="0" rIns="0" bIns="0" rtlCol="0" anchor="ctr"/>
+          <a:lstStyle/>
+          <a:p>
+            <a:pPr indent="0" marL="0">
+              <a:buNone/>
+            </a:pPr>
+            <a:r>
+              <a:rPr lang="en-US" sz="1000" i="1" dirty="0">
+                <a:solidFill>
+                  <a:schemeClr val="accent3"/>
+                </a:solidFill>
+              </a:rPr>
+              <a:t>Run on the American Union Bank, New York, 1931. National Archives; public domain.</a:t>
+            </a:r>
+            <a:endParaRPr lang="en-US" sz="1000" dirty="0"/>
+          </a:p>
+        </p:txBody>
+      </p:sp>
+      <p:pic>
+        <p:nvPicPr>
+          <p:cNvPr id="5" name="news" descr="Screenshot of a CryptoSlate news article dated 12 October 2026: Global watchdog warns the $300 billion stablecoin market could face bank runs even with full reserves. The FSB says cross-border liquidity mismatches could trigger redemption crises and threaten dollar pegs as regulators prepare for G20 discussions.">    </p:cNvPr>
+          <p:cNvPicPr>
+            <a:picLocks noChangeAspect="1"/>
+          </p:cNvPicPr>
+          <p:nvPr/>
+        </p:nvPicPr>
+        <p:blipFill>
+          <a:blip r:embed="rId2"/>
+          <a:stretch>
+            <a:fillRect/>
+          </a:stretch>
+        </p:blipFill>
+        <p:spPr>
+          <a:xfrm>
+            <a:off x="4665177" y="1051560"/>
+            <a:ext cx="4019885" cy="3108960"/>
+          </a:xfrm>
+          <a:prstGeom prst="rect">
+            <a:avLst/>
+          </a:prstGeom>
+        </p:spPr>
+      </p:pic>
+      <p:sp>
+        <p:nvSpPr>
+          <p:cNvPr id="6" name="caption"/>
+          <p:cNvSpPr txBox="1"/>
+          <p:nvPr/>
+        </p:nvSpPr>
+        <p:spPr>
+          <a:xfrm>
+            <a:off x="4665177" y="4206240"/>
+            <a:ext cx="4019885" cy="274320"/>
           </a:xfrm>
           <a:prstGeom prst="rect">
             <a:avLst/>
@@ -5123,13 +5183,12 @@
               </a:rPr>
               <a:t>An agent-based bank run model</a:t>
             </a:r>
-            <a:br>
-              <a:rPr lang="en-US" sz="3200" b="1" dirty="0">
-                <a:solidFill>
-                  <a:schemeClr val="bg1"/>
-                </a:solidFill>
-              </a:rPr>
-            </a:br>
+            <a:endParaRPr lang="en-US" sz="3200" dirty="0"/>
+          </a:p>
+          <a:p>
+            <a:pPr algn="ctr" indent="0" marL="0">
+              <a:buNone/>
+            </a:pPr>
             <a:r>
               <a:rPr lang="en-US" sz="3200" b="1" dirty="0">
                 <a:solidFill>
